--- a/slides/Optimizing Memory Layouts and Traversal Orders in High-Performance Computing.pptx
+++ b/slides/Optimizing Memory Layouts and Traversal Orders in High-Performance Computing.pptx
@@ -6,14 +6,15 @@
   </p:sldMasterIdLst>
   <p:sldIdLst>
     <p:sldId id="256" r:id="rId2"/>
-    <p:sldId id="257" r:id="rId3"/>
-    <p:sldId id="263" r:id="rId4"/>
-    <p:sldId id="264" r:id="rId5"/>
-    <p:sldId id="258" r:id="rId6"/>
-    <p:sldId id="259" r:id="rId7"/>
-    <p:sldId id="260" r:id="rId8"/>
-    <p:sldId id="261" r:id="rId9"/>
-    <p:sldId id="262" r:id="rId10"/>
+    <p:sldId id="265" r:id="rId3"/>
+    <p:sldId id="266" r:id="rId4"/>
+    <p:sldId id="263" r:id="rId5"/>
+    <p:sldId id="264" r:id="rId6"/>
+    <p:sldId id="258" r:id="rId7"/>
+    <p:sldId id="259" r:id="rId8"/>
+    <p:sldId id="260" r:id="rId9"/>
+    <p:sldId id="261" r:id="rId10"/>
+    <p:sldId id="262" r:id="rId11"/>
   </p:sldIdLst>
   <p:sldSz cx="12192000" cy="6858000"/>
   <p:notesSz cx="6858000" cy="9144000"/>
@@ -118,7 +119,8 @@
         <p14:section name="Default Section" id="{293DA01B-4D9B-48A0-906B-75ADFA7BB1A7}">
           <p14:sldIdLst>
             <p14:sldId id="256"/>
-            <p14:sldId id="257"/>
+            <p14:sldId id="265"/>
+            <p14:sldId id="266"/>
             <p14:sldId id="263"/>
             <p14:sldId id="264"/>
           </p14:sldIdLst>
@@ -150,6 +152,9 @@
         </p14:section>
       </p14:sectionLst>
     </p:ext>
+    <p:ext uri="{EFAFB233-063F-42B5-8137-9DF3F51BA10A}">
+      <p15:sldGuideLst xmlns:p15="http://schemas.microsoft.com/office/powerpoint/2012/main"/>
+    </p:ext>
   </p:extLst>
 </p:presentation>
 </file>
@@ -301,7 +306,7 @@
           <a:p>
             <a:fld id="{93F57E82-5604-4F8C-BCFA-F7C026884391}" type="datetimeFigureOut">
               <a:rPr lang="en-US" smtClean="0"/>
-              <a:t>8/8/2026</a:t>
+              <a:t>8/18/2026</a:t>
             </a:fld>
             <a:endParaRPr lang="en-US"/>
           </a:p>
@@ -499,7 +504,7 @@
           <a:p>
             <a:fld id="{93F57E82-5604-4F8C-BCFA-F7C026884391}" type="datetimeFigureOut">
               <a:rPr lang="en-US" smtClean="0"/>
-              <a:t>8/8/2026</a:t>
+              <a:t>8/18/2026</a:t>
             </a:fld>
             <a:endParaRPr lang="en-US"/>
           </a:p>
@@ -707,7 +712,7 @@
           <a:p>
             <a:fld id="{93F57E82-5604-4F8C-BCFA-F7C026884391}" type="datetimeFigureOut">
               <a:rPr lang="en-US" smtClean="0"/>
-              <a:t>8/8/2026</a:t>
+              <a:t>8/18/2026</a:t>
             </a:fld>
             <a:endParaRPr lang="en-US"/>
           </a:p>
@@ -905,7 +910,7 @@
           <a:p>
             <a:fld id="{93F57E82-5604-4F8C-BCFA-F7C026884391}" type="datetimeFigureOut">
               <a:rPr lang="en-US" smtClean="0"/>
-              <a:t>8/8/2026</a:t>
+              <a:t>8/18/2026</a:t>
             </a:fld>
             <a:endParaRPr lang="en-US"/>
           </a:p>
@@ -1180,7 +1185,7 @@
           <a:p>
             <a:fld id="{93F57E82-5604-4F8C-BCFA-F7C026884391}" type="datetimeFigureOut">
               <a:rPr lang="en-US" smtClean="0"/>
-              <a:t>8/8/2026</a:t>
+              <a:t>8/18/2026</a:t>
             </a:fld>
             <a:endParaRPr lang="en-US"/>
           </a:p>
@@ -1445,7 +1450,7 @@
           <a:p>
             <a:fld id="{93F57E82-5604-4F8C-BCFA-F7C026884391}" type="datetimeFigureOut">
               <a:rPr lang="en-US" smtClean="0"/>
-              <a:t>8/8/2026</a:t>
+              <a:t>8/18/2026</a:t>
             </a:fld>
             <a:endParaRPr lang="en-US"/>
           </a:p>
@@ -1857,7 +1862,7 @@
           <a:p>
             <a:fld id="{93F57E82-5604-4F8C-BCFA-F7C026884391}" type="datetimeFigureOut">
               <a:rPr lang="en-US" smtClean="0"/>
-              <a:t>8/8/2026</a:t>
+              <a:t>8/18/2026</a:t>
             </a:fld>
             <a:endParaRPr lang="en-US"/>
           </a:p>
@@ -1998,7 +2003,7 @@
           <a:p>
             <a:fld id="{93F57E82-5604-4F8C-BCFA-F7C026884391}" type="datetimeFigureOut">
               <a:rPr lang="en-US" smtClean="0"/>
-              <a:t>8/8/2026</a:t>
+              <a:t>8/18/2026</a:t>
             </a:fld>
             <a:endParaRPr lang="en-US"/>
           </a:p>
@@ -2111,7 +2116,7 @@
           <a:p>
             <a:fld id="{93F57E82-5604-4F8C-BCFA-F7C026884391}" type="datetimeFigureOut">
               <a:rPr lang="en-US" smtClean="0"/>
-              <a:t>8/8/2026</a:t>
+              <a:t>8/18/2026</a:t>
             </a:fld>
             <a:endParaRPr lang="en-US"/>
           </a:p>
@@ -2422,7 +2427,7 @@
           <a:p>
             <a:fld id="{93F57E82-5604-4F8C-BCFA-F7C026884391}" type="datetimeFigureOut">
               <a:rPr lang="en-US" smtClean="0"/>
-              <a:t>8/8/2026</a:t>
+              <a:t>8/18/2026</a:t>
             </a:fld>
             <a:endParaRPr lang="en-US"/>
           </a:p>
@@ -2710,7 +2715,7 @@
           <a:p>
             <a:fld id="{93F57E82-5604-4F8C-BCFA-F7C026884391}" type="datetimeFigureOut">
               <a:rPr lang="en-US" smtClean="0"/>
-              <a:t>8/8/2026</a:t>
+              <a:t>8/18/2026</a:t>
             </a:fld>
             <a:endParaRPr lang="en-US"/>
           </a:p>
@@ -2951,7 +2956,7 @@
           <a:p>
             <a:fld id="{93F57E82-5604-4F8C-BCFA-F7C026884391}" type="datetimeFigureOut">
               <a:rPr lang="en-US" smtClean="0"/>
-              <a:t>8/8/2026</a:t>
+              <a:t>8/18/2026</a:t>
             </a:fld>
             <a:endParaRPr lang="en-US"/>
           </a:p>
@@ -3450,7 +3455,7 @@
 </p:sld>
 </file>
 
-<file path=ppt/slides/slide2.xml><?xml version="1.0" encoding="utf-8"?>
+<file path=ppt/slides/slide10.xml><?xml version="1.0" encoding="utf-8"?>
 <p:sld xmlns:a="http://schemas.openxmlformats.org/drawingml/2006/main" xmlns:r="http://schemas.openxmlformats.org/officeDocument/2006/relationships" xmlns:p="http://schemas.openxmlformats.org/presentationml/2006/main">
   <p:cSld>
     <p:spTree>
@@ -3472,7 +3477,7 @@
           <p:cNvPr id="2" name="Title 1">
             <a:extLst>
               <a:ext uri="{FF2B5EF4-FFF2-40B4-BE49-F238E27FC236}">
-                <a16:creationId xmlns:a16="http://schemas.microsoft.com/office/drawing/2014/main" id="{36CBB0EF-8FF3-0FBB-5857-EDFAEA9F2716}"/>
+                <a16:creationId xmlns:a16="http://schemas.microsoft.com/office/drawing/2014/main" id="{5EFCD7CC-C2D6-52E6-02D5-F41FC5389A5C}"/>
               </a:ext>
             </a:extLst>
           </p:cNvPr>
@@ -3488,10 +3493,7 @@
           <a:bodyPr/>
           <a:lstStyle/>
           <a:p>
-            <a:r>
-              <a:rPr lang="en-US" dirty="0"/>
-              <a:t>Contribution map</a:t>
-            </a:r>
+            <a:endParaRPr lang="en-US"/>
           </a:p>
         </p:txBody>
       </p:sp>
@@ -3500,7 +3502,7 @@
           <p:cNvPr id="3" name="Content Placeholder 2">
             <a:extLst>
               <a:ext uri="{FF2B5EF4-FFF2-40B4-BE49-F238E27FC236}">
-                <a16:creationId xmlns:a16="http://schemas.microsoft.com/office/drawing/2014/main" id="{5A889E22-7155-1CD3-33A4-DB5C75682770}"/>
+                <a16:creationId xmlns:a16="http://schemas.microsoft.com/office/drawing/2014/main" id="{950373B6-1B3D-2E32-D54A-18C124620153}"/>
               </a:ext>
             </a:extLst>
           </p:cNvPr>
@@ -3523,7 +3525,183 @@
     </p:spTree>
     <p:extLst>
       <p:ext uri="{BB962C8B-B14F-4D97-AF65-F5344CB8AC3E}">
-        <p14:creationId xmlns:p14="http://schemas.microsoft.com/office/powerpoint/2010/main" val="687549363"/>
+        <p14:creationId xmlns:p14="http://schemas.microsoft.com/office/powerpoint/2010/main" val="2595384929"/>
+      </p:ext>
+    </p:extLst>
+  </p:cSld>
+  <p:clrMapOvr>
+    <a:masterClrMapping/>
+  </p:clrMapOvr>
+</p:sld>
+</file>
+
+<file path=ppt/slides/slide2.xml><?xml version="1.0" encoding="utf-8"?>
+<p:sld xmlns:a="http://schemas.openxmlformats.org/drawingml/2006/main" xmlns:r="http://schemas.openxmlformats.org/officeDocument/2006/relationships" xmlns:p="http://schemas.openxmlformats.org/presentationml/2006/main">
+  <p:cSld>
+    <p:spTree>
+      <p:nvGrpSpPr>
+        <p:cNvPr id="1" name="">
+          <a:extLst>
+            <a:ext uri="{FF2B5EF4-FFF2-40B4-BE49-F238E27FC236}">
+              <a16:creationId xmlns:a16="http://schemas.microsoft.com/office/drawing/2014/main" id="{EFDF7620-7AA1-EF30-FDC7-27AAC7FFE5EE}"/>
+            </a:ext>
+          </a:extLst>
+        </p:cNvPr>
+        <p:cNvGrpSpPr/>
+        <p:nvPr/>
+      </p:nvGrpSpPr>
+      <p:grpSpPr>
+        <a:xfrm>
+          <a:off x="0" y="0"/>
+          <a:ext cx="0" cy="0"/>
+          <a:chOff x="0" y="0"/>
+          <a:chExt cx="0" cy="0"/>
+        </a:xfrm>
+      </p:grpSpPr>
+      <p:sp>
+        <p:nvSpPr>
+          <p:cNvPr id="2" name="Title 1">
+            <a:extLst>
+              <a:ext uri="{FF2B5EF4-FFF2-40B4-BE49-F238E27FC236}">
+                <a16:creationId xmlns:a16="http://schemas.microsoft.com/office/drawing/2014/main" id="{F7C42AB4-1D66-61B5-41F3-D1C814D6D79F}"/>
+              </a:ext>
+            </a:extLst>
+          </p:cNvPr>
+          <p:cNvSpPr>
+            <a:spLocks noGrp="1"/>
+          </p:cNvSpPr>
+          <p:nvPr>
+            <p:ph type="title"/>
+          </p:nvPr>
+        </p:nvSpPr>
+        <p:spPr/>
+        <p:txBody>
+          <a:bodyPr/>
+          <a:lstStyle/>
+          <a:p>
+            <a:r>
+              <a:rPr lang="en-US" dirty="0"/>
+              <a:t>Contribution map</a:t>
+            </a:r>
+          </a:p>
+        </p:txBody>
+      </p:sp>
+      <p:sp>
+        <p:nvSpPr>
+          <p:cNvPr id="3" name="Content Placeholder 2">
+            <a:extLst>
+              <a:ext uri="{FF2B5EF4-FFF2-40B4-BE49-F238E27FC236}">
+                <a16:creationId xmlns:a16="http://schemas.microsoft.com/office/drawing/2014/main" id="{7FC71ADE-62E2-F5C5-38A6-5FA51E07F94E}"/>
+              </a:ext>
+            </a:extLst>
+          </p:cNvPr>
+          <p:cNvSpPr>
+            <a:spLocks noGrp="1"/>
+          </p:cNvSpPr>
+          <p:nvPr>
+            <p:ph idx="1"/>
+          </p:nvPr>
+        </p:nvSpPr>
+        <p:spPr/>
+        <p:txBody>
+          <a:bodyPr/>
+          <a:lstStyle/>
+          <a:p>
+            <a:r>
+              <a:rPr lang="en-US" dirty="0"/>
+              <a:t>Background: GPU &amp; Cluster computing</a:t>
+            </a:r>
+          </a:p>
+          <a:p>
+            <a:pPr lvl="1"/>
+            <a:r>
+              <a:rPr lang="en-US" dirty="0"/>
+              <a:t>Too many decisions, complex code </a:t>
+            </a:r>
+            <a:r>
+              <a:rPr lang="en-US" dirty="0">
+                <a:sym typeface="Wingdings" panose="05000000000000000000" pitchFamily="2" charset="2"/>
+              </a:rPr>
+              <a:t> the problem, it is hard</a:t>
+            </a:r>
+            <a:endParaRPr lang="en-US" dirty="0"/>
+          </a:p>
+          <a:p>
+            <a:pPr lvl="2"/>
+            <a:r>
+              <a:rPr lang="en-US" dirty="0"/>
+              <a:t>layout options</a:t>
+            </a:r>
+          </a:p>
+          <a:p>
+            <a:pPr lvl="2"/>
+            <a:r>
+              <a:rPr lang="en-US" dirty="0"/>
+              <a:t>traversal options</a:t>
+            </a:r>
+          </a:p>
+          <a:p>
+            <a:pPr lvl="2"/>
+            <a:r>
+              <a:rPr lang="en-US" dirty="0"/>
+              <a:t>parallelization</a:t>
+            </a:r>
+          </a:p>
+          <a:p>
+            <a:pPr lvl="2"/>
+            <a:r>
+              <a:rPr lang="en-US" dirty="0"/>
+              <a:t>parameters for the above (block sizes, …)</a:t>
+            </a:r>
+          </a:p>
+          <a:p>
+            <a:pPr lvl="1"/>
+            <a:r>
+              <a:rPr lang="en-US" dirty="0"/>
+              <a:t>Our solution: Abstraction &amp; automatization </a:t>
+            </a:r>
+            <a:r>
+              <a:rPr lang="en-US" dirty="0">
+                <a:sym typeface="Wingdings" panose="05000000000000000000" pitchFamily="2" charset="2"/>
+              </a:rPr>
+              <a:t> we offer a solution</a:t>
+            </a:r>
+            <a:endParaRPr lang="en-US" dirty="0"/>
+          </a:p>
+          <a:p>
+            <a:pPr lvl="2"/>
+            <a:r>
+              <a:rPr lang="en-US" dirty="0"/>
+              <a:t>Eco context? (Compilers, other abstractions, autotuning)</a:t>
+            </a:r>
+          </a:p>
+          <a:p>
+            <a:pPr lvl="2"/>
+            <a:r>
+              <a:rPr lang="en-US" dirty="0"/>
+              <a:t>Separation of concerns, independent aspects</a:t>
+            </a:r>
+          </a:p>
+          <a:p>
+            <a:pPr lvl="2"/>
+            <a:r>
+              <a:rPr lang="en-US" dirty="0"/>
+              <a:t>Introducing layout-agnostic and traversal-agnostic algorithm design</a:t>
+            </a:r>
+          </a:p>
+          <a:p>
+            <a:pPr lvl="1"/>
+            <a:r>
+              <a:rPr lang="en-US" dirty="0"/>
+              <a:t>How the world is saved</a:t>
+            </a:r>
+          </a:p>
+        </p:txBody>
+      </p:sp>
+    </p:spTree>
+    <p:extLst>
+      <p:ext uri="{BB962C8B-B14F-4D97-AF65-F5344CB8AC3E}">
+        <p14:creationId xmlns:p14="http://schemas.microsoft.com/office/powerpoint/2010/main" val="1408920348"/>
       </p:ext>
     </p:extLst>
   </p:cSld>
@@ -3555,7 +3733,7 @@
           <p:cNvPr id="2" name="Title 1">
             <a:extLst>
               <a:ext uri="{FF2B5EF4-FFF2-40B4-BE49-F238E27FC236}">
-                <a16:creationId xmlns:a16="http://schemas.microsoft.com/office/drawing/2014/main" id="{BC500110-1A1D-46C5-865E-8C33FFF09E26}"/>
+                <a16:creationId xmlns:a16="http://schemas.microsoft.com/office/drawing/2014/main" id="{6447B745-9B50-DD90-5161-BD2A06CEA44B}"/>
               </a:ext>
             </a:extLst>
           </p:cNvPr>
@@ -3573,7 +3751,7 @@
           <a:p>
             <a:r>
               <a:rPr lang="en-US" dirty="0"/>
-              <a:t>Layout-agnostic design</a:t>
+              <a:t>Contribution map</a:t>
             </a:r>
           </a:p>
         </p:txBody>
@@ -3583,7 +3761,7 @@
           <p:cNvPr id="3" name="Content Placeholder 2">
             <a:extLst>
               <a:ext uri="{FF2B5EF4-FFF2-40B4-BE49-F238E27FC236}">
-                <a16:creationId xmlns:a16="http://schemas.microsoft.com/office/drawing/2014/main" id="{BC98E21C-63B1-8313-A72D-D4A24D26FBA1}"/>
+                <a16:creationId xmlns:a16="http://schemas.microsoft.com/office/drawing/2014/main" id="{FC82B3D9-0F0B-5093-8759-0AA05117C2D6}"/>
               </a:ext>
             </a:extLst>
           </p:cNvPr>
@@ -3599,14 +3777,14 @@
           <a:bodyPr/>
           <a:lstStyle/>
           <a:p>
-            <a:endParaRPr lang="en-US"/>
+            <a:endParaRPr lang="en-US" dirty="0"/>
           </a:p>
         </p:txBody>
       </p:sp>
     </p:spTree>
     <p:extLst>
       <p:ext uri="{BB962C8B-B14F-4D97-AF65-F5344CB8AC3E}">
-        <p14:creationId xmlns:p14="http://schemas.microsoft.com/office/powerpoint/2010/main" val="3503651732"/>
+        <p14:creationId xmlns:p14="http://schemas.microsoft.com/office/powerpoint/2010/main" val="1745489699"/>
       </p:ext>
     </p:extLst>
   </p:cSld>
@@ -3638,7 +3816,7 @@
           <p:cNvPr id="2" name="Title 1">
             <a:extLst>
               <a:ext uri="{FF2B5EF4-FFF2-40B4-BE49-F238E27FC236}">
-                <a16:creationId xmlns:a16="http://schemas.microsoft.com/office/drawing/2014/main" id="{F794F90E-47C1-8163-3DF3-3F88A625B905}"/>
+                <a16:creationId xmlns:a16="http://schemas.microsoft.com/office/drawing/2014/main" id="{BC500110-1A1D-46C5-865E-8C33FFF09E26}"/>
               </a:ext>
             </a:extLst>
           </p:cNvPr>
@@ -3656,7 +3834,7 @@
           <a:p>
             <a:r>
               <a:rPr lang="en-US" dirty="0"/>
-              <a:t>Traversal-agnostic design</a:t>
+              <a:t>Layout-agnostic design</a:t>
             </a:r>
           </a:p>
         </p:txBody>
@@ -3666,7 +3844,7 @@
           <p:cNvPr id="3" name="Content Placeholder 2">
             <a:extLst>
               <a:ext uri="{FF2B5EF4-FFF2-40B4-BE49-F238E27FC236}">
-                <a16:creationId xmlns:a16="http://schemas.microsoft.com/office/drawing/2014/main" id="{3821D725-871B-DFB5-1476-7BE78B119576}"/>
+                <a16:creationId xmlns:a16="http://schemas.microsoft.com/office/drawing/2014/main" id="{BC98E21C-63B1-8313-A72D-D4A24D26FBA1}"/>
               </a:ext>
             </a:extLst>
           </p:cNvPr>
@@ -3682,14 +3860,17 @@
           <a:bodyPr/>
           <a:lstStyle/>
           <a:p>
-            <a:endParaRPr lang="en-US"/>
+            <a:r>
+              <a:rPr lang="en-US" dirty="0"/>
+              <a:t>Algorithm with explicit offset calculations × Algorithm with logical indices</a:t>
+            </a:r>
           </a:p>
         </p:txBody>
       </p:sp>
     </p:spTree>
     <p:extLst>
       <p:ext uri="{BB962C8B-B14F-4D97-AF65-F5344CB8AC3E}">
-        <p14:creationId xmlns:p14="http://schemas.microsoft.com/office/powerpoint/2010/main" val="3026343622"/>
+        <p14:creationId xmlns:p14="http://schemas.microsoft.com/office/powerpoint/2010/main" val="3503651732"/>
       </p:ext>
     </p:extLst>
   </p:cSld>
@@ -3721,7 +3902,7 @@
           <p:cNvPr id="2" name="Title 1">
             <a:extLst>
               <a:ext uri="{FF2B5EF4-FFF2-40B4-BE49-F238E27FC236}">
-                <a16:creationId xmlns:a16="http://schemas.microsoft.com/office/drawing/2014/main" id="{3844D8EA-565C-C8A0-F333-6EBD085AC735}"/>
+                <a16:creationId xmlns:a16="http://schemas.microsoft.com/office/drawing/2014/main" id="{F794F90E-47C1-8163-3DF3-3F88A625B905}"/>
               </a:ext>
             </a:extLst>
           </p:cNvPr>
@@ -3739,7 +3920,7 @@
           <a:p>
             <a:r>
               <a:rPr lang="en-US" dirty="0"/>
-              <a:t>Proposed abstractions</a:t>
+              <a:t>Traversal-agnostic design</a:t>
             </a:r>
           </a:p>
         </p:txBody>
@@ -3749,7 +3930,7 @@
           <p:cNvPr id="3" name="Content Placeholder 2">
             <a:extLst>
               <a:ext uri="{FF2B5EF4-FFF2-40B4-BE49-F238E27FC236}">
-                <a16:creationId xmlns:a16="http://schemas.microsoft.com/office/drawing/2014/main" id="{0B0BC514-DFF4-C541-7399-85275B2EB075}"/>
+                <a16:creationId xmlns:a16="http://schemas.microsoft.com/office/drawing/2014/main" id="{3821D725-871B-DFB5-1476-7BE78B119576}"/>
               </a:ext>
             </a:extLst>
           </p:cNvPr>
@@ -3767,31 +3948,7 @@
           <a:p>
             <a:r>
               <a:rPr lang="en-US" dirty="0"/>
-              <a:t>Layout abstractions</a:t>
-            </a:r>
-          </a:p>
-          <a:p>
-            <a:r>
-              <a:rPr lang="en-US" dirty="0"/>
-              <a:t>Traversal abstractions</a:t>
-            </a:r>
-          </a:p>
-          <a:p>
-            <a:r>
-              <a:rPr lang="en-US" dirty="0"/>
-              <a:t>Practical aspects</a:t>
-            </a:r>
-          </a:p>
-          <a:p>
-            <a:r>
-              <a:rPr lang="en-US" dirty="0"/>
-              <a:t>Distributed computing</a:t>
-            </a:r>
-          </a:p>
-          <a:p>
-            <a:r>
-              <a:rPr lang="en-US" dirty="0"/>
-              <a:t>Stencil computations</a:t>
+              <a:t>We can go even further</a:t>
             </a:r>
           </a:p>
         </p:txBody>
@@ -3799,7 +3956,7 @@
     </p:spTree>
     <p:extLst>
       <p:ext uri="{BB962C8B-B14F-4D97-AF65-F5344CB8AC3E}">
-        <p14:creationId xmlns:p14="http://schemas.microsoft.com/office/powerpoint/2010/main" val="2195190930"/>
+        <p14:creationId xmlns:p14="http://schemas.microsoft.com/office/powerpoint/2010/main" val="3026343622"/>
       </p:ext>
     </p:extLst>
   </p:cSld>
@@ -3831,7 +3988,7 @@
           <p:cNvPr id="2" name="Title 1">
             <a:extLst>
               <a:ext uri="{FF2B5EF4-FFF2-40B4-BE49-F238E27FC236}">
-                <a16:creationId xmlns:a16="http://schemas.microsoft.com/office/drawing/2014/main" id="{1CFD8E19-FCBD-3C1F-9804-55F9EF315364}"/>
+                <a16:creationId xmlns:a16="http://schemas.microsoft.com/office/drawing/2014/main" id="{3844D8EA-565C-C8A0-F333-6EBD085AC735}"/>
               </a:ext>
             </a:extLst>
           </p:cNvPr>
@@ -3849,7 +4006,7 @@
           <a:p>
             <a:r>
               <a:rPr lang="en-US" dirty="0"/>
-              <a:t>LLMs in algorithm design</a:t>
+              <a:t>Proposed abstractions</a:t>
             </a:r>
           </a:p>
         </p:txBody>
@@ -3859,7 +4016,7 @@
           <p:cNvPr id="3" name="Content Placeholder 2">
             <a:extLst>
               <a:ext uri="{FF2B5EF4-FFF2-40B4-BE49-F238E27FC236}">
-                <a16:creationId xmlns:a16="http://schemas.microsoft.com/office/drawing/2014/main" id="{64F2D09B-2F00-3457-9D41-D2EAB2BD84E5}"/>
+                <a16:creationId xmlns:a16="http://schemas.microsoft.com/office/drawing/2014/main" id="{0B0BC514-DFF4-C541-7399-85275B2EB075}"/>
               </a:ext>
             </a:extLst>
           </p:cNvPr>
@@ -3877,13 +4034,31 @@
           <a:p>
             <a:r>
               <a:rPr lang="en-US" dirty="0"/>
-              <a:t>Tutoring LLMs for CUDA optimization</a:t>
+              <a:t>Layout abstractions</a:t>
             </a:r>
           </a:p>
           <a:p>
             <a:r>
               <a:rPr lang="en-US" dirty="0"/>
-              <a:t>LLMs and abstractions</a:t>
+              <a:t>Traversal abstractions</a:t>
+            </a:r>
+          </a:p>
+          <a:p>
+            <a:r>
+              <a:rPr lang="en-US" dirty="0"/>
+              <a:t>Practical aspects</a:t>
+            </a:r>
+          </a:p>
+          <a:p>
+            <a:r>
+              <a:rPr lang="en-US" dirty="0"/>
+              <a:t>Distributed computing</a:t>
+            </a:r>
+          </a:p>
+          <a:p>
+            <a:r>
+              <a:rPr lang="en-US" dirty="0"/>
+              <a:t>Stencil computations</a:t>
             </a:r>
           </a:p>
         </p:txBody>
@@ -3891,7 +4066,7 @@
     </p:spTree>
     <p:extLst>
       <p:ext uri="{BB962C8B-B14F-4D97-AF65-F5344CB8AC3E}">
-        <p14:creationId xmlns:p14="http://schemas.microsoft.com/office/powerpoint/2010/main" val="645810162"/>
+        <p14:creationId xmlns:p14="http://schemas.microsoft.com/office/powerpoint/2010/main" val="2195190930"/>
       </p:ext>
     </p:extLst>
   </p:cSld>
@@ -3923,7 +4098,7 @@
           <p:cNvPr id="2" name="Title 1">
             <a:extLst>
               <a:ext uri="{FF2B5EF4-FFF2-40B4-BE49-F238E27FC236}">
-                <a16:creationId xmlns:a16="http://schemas.microsoft.com/office/drawing/2014/main" id="{928BD501-0287-7E9D-6C52-A86B98F9EB52}"/>
+                <a16:creationId xmlns:a16="http://schemas.microsoft.com/office/drawing/2014/main" id="{1CFD8E19-FCBD-3C1F-9804-55F9EF315364}"/>
               </a:ext>
             </a:extLst>
           </p:cNvPr>
@@ -3941,7 +4116,7 @@
           <a:p>
             <a:r>
               <a:rPr lang="en-US" dirty="0"/>
-              <a:t>Software artifacts</a:t>
+              <a:t>LLMs in algorithm design</a:t>
             </a:r>
           </a:p>
         </p:txBody>
@@ -3951,7 +4126,7 @@
           <p:cNvPr id="3" name="Content Placeholder 2">
             <a:extLst>
               <a:ext uri="{FF2B5EF4-FFF2-40B4-BE49-F238E27FC236}">
-                <a16:creationId xmlns:a16="http://schemas.microsoft.com/office/drawing/2014/main" id="{369E5D67-EA03-A5CA-2D82-199F178CE89C}"/>
+                <a16:creationId xmlns:a16="http://schemas.microsoft.com/office/drawing/2014/main" id="{64F2D09B-2F00-3457-9D41-D2EAB2BD84E5}"/>
               </a:ext>
             </a:extLst>
           </p:cNvPr>
@@ -3968,24 +4143,22 @@
           <a:lstStyle/>
           <a:p>
             <a:r>
-              <a:rPr lang="en-US" dirty="0" err="1"/>
-              <a:t>Noarr</a:t>
-            </a:r>
-            <a:endParaRPr lang="en-US" dirty="0"/>
-          </a:p>
-          <a:p>
-            <a:r>
-              <a:rPr lang="en-US" dirty="0" err="1"/>
-              <a:t>Cellato</a:t>
-            </a:r>
-            <a:endParaRPr lang="en-US" dirty="0"/>
+              <a:rPr lang="en-US" dirty="0"/>
+              <a:t>Tutoring LLMs for CUDA optimization</a:t>
+            </a:r>
+          </a:p>
+          <a:p>
+            <a:r>
+              <a:rPr lang="en-US" dirty="0"/>
+              <a:t>LLMs and abstractions</a:t>
+            </a:r>
           </a:p>
         </p:txBody>
       </p:sp>
     </p:spTree>
     <p:extLst>
       <p:ext uri="{BB962C8B-B14F-4D97-AF65-F5344CB8AC3E}">
-        <p14:creationId xmlns:p14="http://schemas.microsoft.com/office/powerpoint/2010/main" val="4085122203"/>
+        <p14:creationId xmlns:p14="http://schemas.microsoft.com/office/powerpoint/2010/main" val="645810162"/>
       </p:ext>
     </p:extLst>
   </p:cSld>
@@ -4017,7 +4190,7 @@
           <p:cNvPr id="2" name="Title 1">
             <a:extLst>
               <a:ext uri="{FF2B5EF4-FFF2-40B4-BE49-F238E27FC236}">
-                <a16:creationId xmlns:a16="http://schemas.microsoft.com/office/drawing/2014/main" id="{63B07F39-5957-124B-D20D-4A155E0E07D1}"/>
+                <a16:creationId xmlns:a16="http://schemas.microsoft.com/office/drawing/2014/main" id="{928BD501-0287-7E9D-6C52-A86B98F9EB52}"/>
               </a:ext>
             </a:extLst>
           </p:cNvPr>
@@ -4035,7 +4208,7 @@
           <a:p>
             <a:r>
               <a:rPr lang="en-US" dirty="0"/>
-              <a:t>Summary</a:t>
+              <a:t>Software artifacts</a:t>
             </a:r>
           </a:p>
         </p:txBody>
@@ -4045,7 +4218,7 @@
           <p:cNvPr id="3" name="Content Placeholder 2">
             <a:extLst>
               <a:ext uri="{FF2B5EF4-FFF2-40B4-BE49-F238E27FC236}">
-                <a16:creationId xmlns:a16="http://schemas.microsoft.com/office/drawing/2014/main" id="{4437CB38-BBCE-B652-0445-A75C99068419}"/>
+                <a16:creationId xmlns:a16="http://schemas.microsoft.com/office/drawing/2014/main" id="{369E5D67-EA03-A5CA-2D82-199F178CE89C}"/>
               </a:ext>
             </a:extLst>
           </p:cNvPr>
@@ -4062,43 +4235,24 @@
           <a:lstStyle/>
           <a:p>
             <a:r>
-              <a:rPr lang="en-US" dirty="0"/>
-              <a:t>6 peer-reviewed publications </a:t>
-            </a:r>
-          </a:p>
-          <a:p>
-            <a:pPr lvl="1"/>
-            <a:r>
-              <a:rPr lang="en-US" dirty="0"/>
-              <a:t>2 journal articles</a:t>
-            </a:r>
-          </a:p>
-          <a:p>
-            <a:pPr lvl="1"/>
-            <a:r>
-              <a:rPr lang="en-US" dirty="0"/>
-              <a:t>3 conference papers,</a:t>
-            </a:r>
-          </a:p>
-          <a:p>
-            <a:pPr lvl="1"/>
-            <a:r>
-              <a:rPr lang="en-US" dirty="0"/>
-              <a:t>1 workshop paper</a:t>
-            </a:r>
-          </a:p>
-          <a:p>
-            <a:r>
-              <a:rPr lang="en-US" dirty="0"/>
-              <a:t>1 publication awaiting peer review</a:t>
-            </a:r>
+              <a:rPr lang="en-US" dirty="0" err="1"/>
+              <a:t>Noarr</a:t>
+            </a:r>
+            <a:endParaRPr lang="en-US" dirty="0"/>
+          </a:p>
+          <a:p>
+            <a:r>
+              <a:rPr lang="en-US" dirty="0" err="1"/>
+              <a:t>Cellato</a:t>
+            </a:r>
+            <a:endParaRPr lang="en-US" dirty="0"/>
           </a:p>
         </p:txBody>
       </p:sp>
     </p:spTree>
     <p:extLst>
       <p:ext uri="{BB962C8B-B14F-4D97-AF65-F5344CB8AC3E}">
-        <p14:creationId xmlns:p14="http://schemas.microsoft.com/office/powerpoint/2010/main" val="309417143"/>
+        <p14:creationId xmlns:p14="http://schemas.microsoft.com/office/powerpoint/2010/main" val="4085122203"/>
       </p:ext>
     </p:extLst>
   </p:cSld>
@@ -4130,7 +4284,7 @@
           <p:cNvPr id="2" name="Title 1">
             <a:extLst>
               <a:ext uri="{FF2B5EF4-FFF2-40B4-BE49-F238E27FC236}">
-                <a16:creationId xmlns:a16="http://schemas.microsoft.com/office/drawing/2014/main" id="{5EFCD7CC-C2D6-52E6-02D5-F41FC5389A5C}"/>
+                <a16:creationId xmlns:a16="http://schemas.microsoft.com/office/drawing/2014/main" id="{63B07F39-5957-124B-D20D-4A155E0E07D1}"/>
               </a:ext>
             </a:extLst>
           </p:cNvPr>
@@ -4146,7 +4300,10 @@
           <a:bodyPr/>
           <a:lstStyle/>
           <a:p>
-            <a:endParaRPr lang="en-US"/>
+            <a:r>
+              <a:rPr lang="en-US" dirty="0"/>
+              <a:t>Summary</a:t>
+            </a:r>
           </a:p>
         </p:txBody>
       </p:sp>
@@ -4155,7 +4312,7 @@
           <p:cNvPr id="3" name="Content Placeholder 2">
             <a:extLst>
               <a:ext uri="{FF2B5EF4-FFF2-40B4-BE49-F238E27FC236}">
-                <a16:creationId xmlns:a16="http://schemas.microsoft.com/office/drawing/2014/main" id="{950373B6-1B3D-2E32-D54A-18C124620153}"/>
+                <a16:creationId xmlns:a16="http://schemas.microsoft.com/office/drawing/2014/main" id="{4437CB38-BBCE-B652-0445-A75C99068419}"/>
               </a:ext>
             </a:extLst>
           </p:cNvPr>
@@ -4171,14 +4328,44 @@
           <a:bodyPr/>
           <a:lstStyle/>
           <a:p>
-            <a:endParaRPr lang="en-US"/>
+            <a:r>
+              <a:rPr lang="en-US" dirty="0"/>
+              <a:t>6 peer-reviewed publications </a:t>
+            </a:r>
+          </a:p>
+          <a:p>
+            <a:pPr lvl="1"/>
+            <a:r>
+              <a:rPr lang="en-US" dirty="0"/>
+              <a:t>2 journal articles</a:t>
+            </a:r>
+          </a:p>
+          <a:p>
+            <a:pPr lvl="1"/>
+            <a:r>
+              <a:rPr lang="en-US" dirty="0"/>
+              <a:t>3 conference papers,</a:t>
+            </a:r>
+          </a:p>
+          <a:p>
+            <a:pPr lvl="1"/>
+            <a:r>
+              <a:rPr lang="en-US" dirty="0"/>
+              <a:t>1 workshop paper</a:t>
+            </a:r>
+          </a:p>
+          <a:p>
+            <a:r>
+              <a:rPr lang="en-US" dirty="0"/>
+              <a:t>1 publication awaiting peer review</a:t>
+            </a:r>
           </a:p>
         </p:txBody>
       </p:sp>
     </p:spTree>
     <p:extLst>
       <p:ext uri="{BB962C8B-B14F-4D97-AF65-F5344CB8AC3E}">
-        <p14:creationId xmlns:p14="http://schemas.microsoft.com/office/powerpoint/2010/main" val="2595384929"/>
+        <p14:creationId xmlns:p14="http://schemas.microsoft.com/office/powerpoint/2010/main" val="309417143"/>
       </p:ext>
     </p:extLst>
   </p:cSld>

--- a/slides/Optimizing Memory Layouts and Traversal Orders in High-Performance Computing.pptx
+++ b/slides/Optimizing Memory Layouts and Traversal Orders in High-Performance Computing.pptx
@@ -4,17 +4,21 @@
   <p:sldMasterIdLst>
     <p:sldMasterId id="2147483648" r:id="rId1"/>
   </p:sldMasterIdLst>
+  <p:notesMasterIdLst>
+    <p:notesMasterId r:id="rId13"/>
+  </p:notesMasterIdLst>
   <p:sldIdLst>
     <p:sldId id="256" r:id="rId2"/>
-    <p:sldId id="265" r:id="rId3"/>
-    <p:sldId id="266" r:id="rId4"/>
+    <p:sldId id="267" r:id="rId3"/>
+    <p:sldId id="265" r:id="rId4"/>
     <p:sldId id="263" r:id="rId5"/>
     <p:sldId id="264" r:id="rId6"/>
     <p:sldId id="258" r:id="rId7"/>
     <p:sldId id="259" r:id="rId8"/>
     <p:sldId id="260" r:id="rId9"/>
-    <p:sldId id="261" r:id="rId10"/>
-    <p:sldId id="262" r:id="rId11"/>
+    <p:sldId id="266" r:id="rId10"/>
+    <p:sldId id="261" r:id="rId11"/>
+    <p:sldId id="262" r:id="rId12"/>
   </p:sldIdLst>
   <p:sldSz cx="12192000" cy="6858000"/>
   <p:notesSz cx="6858000" cy="9144000"/>
@@ -119,8 +123,8 @@
         <p14:section name="Default Section" id="{293DA01B-4D9B-48A0-906B-75ADFA7BB1A7}">
           <p14:sldIdLst>
             <p14:sldId id="256"/>
+            <p14:sldId id="267"/>
             <p14:sldId id="265"/>
-            <p14:sldId id="266"/>
             <p14:sldId id="263"/>
             <p14:sldId id="264"/>
           </p14:sldIdLst>
@@ -142,6 +146,7 @@
         </p14:section>
         <p14:section name="summary" id="{D3BAAF83-51D3-4EFD-B7CC-7BA6DAC4A838}">
           <p14:sldIdLst>
+            <p14:sldId id="266"/>
             <p14:sldId id="261"/>
           </p14:sldIdLst>
         </p14:section>
@@ -157,6 +162,439 @@
     </p:ext>
   </p:extLst>
 </p:presentation>
+</file>
+
+<file path=ppt/notesMasters/notesMaster1.xml><?xml version="1.0" encoding="utf-8"?>
+<p:notesMaster xmlns:a="http://schemas.openxmlformats.org/drawingml/2006/main" xmlns:r="http://schemas.openxmlformats.org/officeDocument/2006/relationships" xmlns:p="http://schemas.openxmlformats.org/presentationml/2006/main">
+  <p:cSld>
+    <p:bg>
+      <p:bgRef idx="1001">
+        <a:schemeClr val="bg1"/>
+      </p:bgRef>
+    </p:bg>
+    <p:spTree>
+      <p:nvGrpSpPr>
+        <p:cNvPr id="1" name=""/>
+        <p:cNvGrpSpPr/>
+        <p:nvPr/>
+      </p:nvGrpSpPr>
+      <p:grpSpPr>
+        <a:xfrm>
+          <a:off x="0" y="0"/>
+          <a:ext cx="0" cy="0"/>
+          <a:chOff x="0" y="0"/>
+          <a:chExt cx="0" cy="0"/>
+        </a:xfrm>
+      </p:grpSpPr>
+      <p:sp>
+        <p:nvSpPr>
+          <p:cNvPr id="2" name="Header Placeholder 1"/>
+          <p:cNvSpPr>
+            <a:spLocks noGrp="1"/>
+          </p:cNvSpPr>
+          <p:nvPr>
+            <p:ph type="hdr" sz="quarter"/>
+          </p:nvPr>
+        </p:nvSpPr>
+        <p:spPr>
+          <a:xfrm>
+            <a:off x="0" y="0"/>
+            <a:ext cx="2971800" cy="458788"/>
+          </a:xfrm>
+          <a:prstGeom prst="rect">
+            <a:avLst/>
+          </a:prstGeom>
+        </p:spPr>
+        <p:txBody>
+          <a:bodyPr vert="horz" lIns="91440" tIns="45720" rIns="91440" bIns="45720" rtlCol="0"/>
+          <a:lstStyle>
+            <a:lvl1pPr algn="l">
+              <a:defRPr sz="1200"/>
+            </a:lvl1pPr>
+          </a:lstStyle>
+          <a:p>
+            <a:endParaRPr lang="en-US"/>
+          </a:p>
+        </p:txBody>
+      </p:sp>
+      <p:sp>
+        <p:nvSpPr>
+          <p:cNvPr id="3" name="Date Placeholder 2"/>
+          <p:cNvSpPr>
+            <a:spLocks noGrp="1"/>
+          </p:cNvSpPr>
+          <p:nvPr>
+            <p:ph type="dt" idx="1"/>
+          </p:nvPr>
+        </p:nvSpPr>
+        <p:spPr>
+          <a:xfrm>
+            <a:off x="3884613" y="0"/>
+            <a:ext cx="2971800" cy="458788"/>
+          </a:xfrm>
+          <a:prstGeom prst="rect">
+            <a:avLst/>
+          </a:prstGeom>
+        </p:spPr>
+        <p:txBody>
+          <a:bodyPr vert="horz" lIns="91440" tIns="45720" rIns="91440" bIns="45720" rtlCol="0"/>
+          <a:lstStyle>
+            <a:lvl1pPr algn="r">
+              <a:defRPr sz="1200"/>
+            </a:lvl1pPr>
+          </a:lstStyle>
+          <a:p>
+            <a:fld id="{34A5C982-A1C5-4AC2-B4BF-466515DA1494}" type="datetimeFigureOut">
+              <a:rPr lang="en-US" smtClean="0"/>
+              <a:t>8/20/2026</a:t>
+            </a:fld>
+            <a:endParaRPr lang="en-US"/>
+          </a:p>
+        </p:txBody>
+      </p:sp>
+      <p:sp>
+        <p:nvSpPr>
+          <p:cNvPr id="4" name="Slide Image Placeholder 3"/>
+          <p:cNvSpPr>
+            <a:spLocks noGrp="1" noRot="1" noChangeAspect="1"/>
+          </p:cNvSpPr>
+          <p:nvPr>
+            <p:ph type="sldImg" idx="2"/>
+          </p:nvPr>
+        </p:nvSpPr>
+        <p:spPr>
+          <a:xfrm>
+            <a:off x="685800" y="1143000"/>
+            <a:ext cx="5486400" cy="3086100"/>
+          </a:xfrm>
+          <a:prstGeom prst="rect">
+            <a:avLst/>
+          </a:prstGeom>
+          <a:noFill/>
+          <a:ln w="12700">
+            <a:solidFill>
+              <a:prstClr val="black"/>
+            </a:solidFill>
+          </a:ln>
+        </p:spPr>
+        <p:txBody>
+          <a:bodyPr vert="horz" lIns="91440" tIns="45720" rIns="91440" bIns="45720" rtlCol="0" anchor="ctr"/>
+          <a:lstStyle/>
+          <a:p>
+            <a:endParaRPr lang="en-US"/>
+          </a:p>
+        </p:txBody>
+      </p:sp>
+      <p:sp>
+        <p:nvSpPr>
+          <p:cNvPr id="5" name="Notes Placeholder 4"/>
+          <p:cNvSpPr>
+            <a:spLocks noGrp="1"/>
+          </p:cNvSpPr>
+          <p:nvPr>
+            <p:ph type="body" sz="quarter" idx="3"/>
+          </p:nvPr>
+        </p:nvSpPr>
+        <p:spPr>
+          <a:xfrm>
+            <a:off x="685800" y="4400550"/>
+            <a:ext cx="5486400" cy="3600450"/>
+          </a:xfrm>
+          <a:prstGeom prst="rect">
+            <a:avLst/>
+          </a:prstGeom>
+        </p:spPr>
+        <p:txBody>
+          <a:bodyPr vert="horz" lIns="91440" tIns="45720" rIns="91440" bIns="45720" rtlCol="0"/>
+          <a:lstStyle/>
+          <a:p>
+            <a:pPr lvl="0"/>
+            <a:r>
+              <a:rPr lang="en-US"/>
+              <a:t>Click to edit Master text styles</a:t>
+            </a:r>
+          </a:p>
+          <a:p>
+            <a:pPr lvl="1"/>
+            <a:r>
+              <a:rPr lang="en-US"/>
+              <a:t>Second level</a:t>
+            </a:r>
+          </a:p>
+          <a:p>
+            <a:pPr lvl="2"/>
+            <a:r>
+              <a:rPr lang="en-US"/>
+              <a:t>Third level</a:t>
+            </a:r>
+          </a:p>
+          <a:p>
+            <a:pPr lvl="3"/>
+            <a:r>
+              <a:rPr lang="en-US"/>
+              <a:t>Fourth level</a:t>
+            </a:r>
+          </a:p>
+          <a:p>
+            <a:pPr lvl="4"/>
+            <a:r>
+              <a:rPr lang="en-US"/>
+              <a:t>Fifth level</a:t>
+            </a:r>
+          </a:p>
+        </p:txBody>
+      </p:sp>
+      <p:sp>
+        <p:nvSpPr>
+          <p:cNvPr id="6" name="Footer Placeholder 5"/>
+          <p:cNvSpPr>
+            <a:spLocks noGrp="1"/>
+          </p:cNvSpPr>
+          <p:nvPr>
+            <p:ph type="ftr" sz="quarter" idx="4"/>
+          </p:nvPr>
+        </p:nvSpPr>
+        <p:spPr>
+          <a:xfrm>
+            <a:off x="0" y="8685213"/>
+            <a:ext cx="2971800" cy="458787"/>
+          </a:xfrm>
+          <a:prstGeom prst="rect">
+            <a:avLst/>
+          </a:prstGeom>
+        </p:spPr>
+        <p:txBody>
+          <a:bodyPr vert="horz" lIns="91440" tIns="45720" rIns="91440" bIns="45720" rtlCol="0" anchor="b"/>
+          <a:lstStyle>
+            <a:lvl1pPr algn="l">
+              <a:defRPr sz="1200"/>
+            </a:lvl1pPr>
+          </a:lstStyle>
+          <a:p>
+            <a:endParaRPr lang="en-US"/>
+          </a:p>
+        </p:txBody>
+      </p:sp>
+      <p:sp>
+        <p:nvSpPr>
+          <p:cNvPr id="7" name="Slide Number Placeholder 6"/>
+          <p:cNvSpPr>
+            <a:spLocks noGrp="1"/>
+          </p:cNvSpPr>
+          <p:nvPr>
+            <p:ph type="sldNum" sz="quarter" idx="5"/>
+          </p:nvPr>
+        </p:nvSpPr>
+        <p:spPr>
+          <a:xfrm>
+            <a:off x="3884613" y="8685213"/>
+            <a:ext cx="2971800" cy="458787"/>
+          </a:xfrm>
+          <a:prstGeom prst="rect">
+            <a:avLst/>
+          </a:prstGeom>
+        </p:spPr>
+        <p:txBody>
+          <a:bodyPr vert="horz" lIns="91440" tIns="45720" rIns="91440" bIns="45720" rtlCol="0" anchor="b"/>
+          <a:lstStyle>
+            <a:lvl1pPr algn="r">
+              <a:defRPr sz="1200"/>
+            </a:lvl1pPr>
+          </a:lstStyle>
+          <a:p>
+            <a:fld id="{FA8FD632-245B-410D-BCC4-8BF8D37AB67F}" type="slidenum">
+              <a:rPr lang="en-US" smtClean="0"/>
+              <a:t>‹#›</a:t>
+            </a:fld>
+            <a:endParaRPr lang="en-US"/>
+          </a:p>
+        </p:txBody>
+      </p:sp>
+    </p:spTree>
+    <p:extLst>
+      <p:ext uri="{BB962C8B-B14F-4D97-AF65-F5344CB8AC3E}">
+        <p14:creationId xmlns:p14="http://schemas.microsoft.com/office/powerpoint/2010/main" val="3610353035"/>
+      </p:ext>
+    </p:extLst>
+  </p:cSld>
+  <p:clrMap bg1="lt1" tx1="dk1" bg2="lt2" tx2="dk2" accent1="accent1" accent2="accent2" accent3="accent3" accent4="accent4" accent5="accent5" accent6="accent6" hlink="hlink" folHlink="folHlink"/>
+  <p:notesStyle>
+    <a:lvl1pPr marL="0" algn="l" defTabSz="914400" rtl="0" eaLnBrk="1" latinLnBrk="0" hangingPunct="1">
+      <a:defRPr sz="1200" kern="1200">
+        <a:solidFill>
+          <a:schemeClr val="tx1"/>
+        </a:solidFill>
+        <a:latin typeface="+mn-lt"/>
+        <a:ea typeface="+mn-ea"/>
+        <a:cs typeface="+mn-cs"/>
+      </a:defRPr>
+    </a:lvl1pPr>
+    <a:lvl2pPr marL="457200" algn="l" defTabSz="914400" rtl="0" eaLnBrk="1" latinLnBrk="0" hangingPunct="1">
+      <a:defRPr sz="1200" kern="1200">
+        <a:solidFill>
+          <a:schemeClr val="tx1"/>
+        </a:solidFill>
+        <a:latin typeface="+mn-lt"/>
+        <a:ea typeface="+mn-ea"/>
+        <a:cs typeface="+mn-cs"/>
+      </a:defRPr>
+    </a:lvl2pPr>
+    <a:lvl3pPr marL="914400" algn="l" defTabSz="914400" rtl="0" eaLnBrk="1" latinLnBrk="0" hangingPunct="1">
+      <a:defRPr sz="1200" kern="1200">
+        <a:solidFill>
+          <a:schemeClr val="tx1"/>
+        </a:solidFill>
+        <a:latin typeface="+mn-lt"/>
+        <a:ea typeface="+mn-ea"/>
+        <a:cs typeface="+mn-cs"/>
+      </a:defRPr>
+    </a:lvl3pPr>
+    <a:lvl4pPr marL="1371600" algn="l" defTabSz="914400" rtl="0" eaLnBrk="1" latinLnBrk="0" hangingPunct="1">
+      <a:defRPr sz="1200" kern="1200">
+        <a:solidFill>
+          <a:schemeClr val="tx1"/>
+        </a:solidFill>
+        <a:latin typeface="+mn-lt"/>
+        <a:ea typeface="+mn-ea"/>
+        <a:cs typeface="+mn-cs"/>
+      </a:defRPr>
+    </a:lvl4pPr>
+    <a:lvl5pPr marL="1828800" algn="l" defTabSz="914400" rtl="0" eaLnBrk="1" latinLnBrk="0" hangingPunct="1">
+      <a:defRPr sz="1200" kern="1200">
+        <a:solidFill>
+          <a:schemeClr val="tx1"/>
+        </a:solidFill>
+        <a:latin typeface="+mn-lt"/>
+        <a:ea typeface="+mn-ea"/>
+        <a:cs typeface="+mn-cs"/>
+      </a:defRPr>
+    </a:lvl5pPr>
+    <a:lvl6pPr marL="2286000" algn="l" defTabSz="914400" rtl="0" eaLnBrk="1" latinLnBrk="0" hangingPunct="1">
+      <a:defRPr sz="1200" kern="1200">
+        <a:solidFill>
+          <a:schemeClr val="tx1"/>
+        </a:solidFill>
+        <a:latin typeface="+mn-lt"/>
+        <a:ea typeface="+mn-ea"/>
+        <a:cs typeface="+mn-cs"/>
+      </a:defRPr>
+    </a:lvl6pPr>
+    <a:lvl7pPr marL="2743200" algn="l" defTabSz="914400" rtl="0" eaLnBrk="1" latinLnBrk="0" hangingPunct="1">
+      <a:defRPr sz="1200" kern="1200">
+        <a:solidFill>
+          <a:schemeClr val="tx1"/>
+        </a:solidFill>
+        <a:latin typeface="+mn-lt"/>
+        <a:ea typeface="+mn-ea"/>
+        <a:cs typeface="+mn-cs"/>
+      </a:defRPr>
+    </a:lvl7pPr>
+    <a:lvl8pPr marL="3200400" algn="l" defTabSz="914400" rtl="0" eaLnBrk="1" latinLnBrk="0" hangingPunct="1">
+      <a:defRPr sz="1200" kern="1200">
+        <a:solidFill>
+          <a:schemeClr val="tx1"/>
+        </a:solidFill>
+        <a:latin typeface="+mn-lt"/>
+        <a:ea typeface="+mn-ea"/>
+        <a:cs typeface="+mn-cs"/>
+      </a:defRPr>
+    </a:lvl8pPr>
+    <a:lvl9pPr marL="3657600" algn="l" defTabSz="914400" rtl="0" eaLnBrk="1" latinLnBrk="0" hangingPunct="1">
+      <a:defRPr sz="1200" kern="1200">
+        <a:solidFill>
+          <a:schemeClr val="tx1"/>
+        </a:solidFill>
+        <a:latin typeface="+mn-lt"/>
+        <a:ea typeface="+mn-ea"/>
+        <a:cs typeface="+mn-cs"/>
+      </a:defRPr>
+    </a:lvl9pPr>
+  </p:notesStyle>
+</p:notesMaster>
+</file>
+
+<file path=ppt/notesSlides/notesSlide1.xml><?xml version="1.0" encoding="utf-8"?>
+<p:notes xmlns:a="http://schemas.openxmlformats.org/drawingml/2006/main" xmlns:r="http://schemas.openxmlformats.org/officeDocument/2006/relationships" xmlns:p="http://schemas.openxmlformats.org/presentationml/2006/main">
+  <p:cSld>
+    <p:spTree>
+      <p:nvGrpSpPr>
+        <p:cNvPr id="1" name=""/>
+        <p:cNvGrpSpPr/>
+        <p:nvPr/>
+      </p:nvGrpSpPr>
+      <p:grpSpPr>
+        <a:xfrm>
+          <a:off x="0" y="0"/>
+          <a:ext cx="0" cy="0"/>
+          <a:chOff x="0" y="0"/>
+          <a:chExt cx="0" cy="0"/>
+        </a:xfrm>
+      </p:grpSpPr>
+      <p:sp>
+        <p:nvSpPr>
+          <p:cNvPr id="2" name="Slide Image Placeholder 1"/>
+          <p:cNvSpPr>
+            <a:spLocks noGrp="1" noRot="1" noChangeAspect="1"/>
+          </p:cNvSpPr>
+          <p:nvPr>
+            <p:ph type="sldImg"/>
+          </p:nvPr>
+        </p:nvSpPr>
+        <p:spPr/>
+      </p:sp>
+      <p:sp>
+        <p:nvSpPr>
+          <p:cNvPr id="3" name="Notes Placeholder 2"/>
+          <p:cNvSpPr>
+            <a:spLocks noGrp="1"/>
+          </p:cNvSpPr>
+          <p:nvPr>
+            <p:ph type="body" idx="1"/>
+          </p:nvPr>
+        </p:nvSpPr>
+        <p:spPr/>
+        <p:txBody>
+          <a:bodyPr/>
+          <a:lstStyle/>
+          <a:p>
+            <a:endParaRPr lang="en-US" dirty="0"/>
+          </a:p>
+        </p:txBody>
+      </p:sp>
+      <p:sp>
+        <p:nvSpPr>
+          <p:cNvPr id="4" name="Slide Number Placeholder 3"/>
+          <p:cNvSpPr>
+            <a:spLocks noGrp="1"/>
+          </p:cNvSpPr>
+          <p:nvPr>
+            <p:ph type="sldNum" sz="quarter" idx="5"/>
+          </p:nvPr>
+        </p:nvSpPr>
+        <p:spPr/>
+        <p:txBody>
+          <a:bodyPr/>
+          <a:lstStyle/>
+          <a:p>
+            <a:fld id="{FA8FD632-245B-410D-BCC4-8BF8D37AB67F}" type="slidenum">
+              <a:rPr lang="en-US" smtClean="0"/>
+              <a:t>3</a:t>
+            </a:fld>
+            <a:endParaRPr lang="en-US"/>
+          </a:p>
+        </p:txBody>
+      </p:sp>
+    </p:spTree>
+    <p:extLst>
+      <p:ext uri="{BB962C8B-B14F-4D97-AF65-F5344CB8AC3E}">
+        <p14:creationId xmlns:p14="http://schemas.microsoft.com/office/powerpoint/2010/main" val="936605202"/>
+      </p:ext>
+    </p:extLst>
+  </p:cSld>
+  <p:clrMapOvr>
+    <a:masterClrMapping/>
+  </p:clrMapOvr>
+</p:notes>
 </file>
 
 <file path=ppt/slideLayouts/slideLayout1.xml><?xml version="1.0" encoding="utf-8"?>
@@ -306,7 +744,7 @@
           <a:p>
             <a:fld id="{93F57E82-5604-4F8C-BCFA-F7C026884391}" type="datetimeFigureOut">
               <a:rPr lang="en-US" smtClean="0"/>
-              <a:t>8/18/2026</a:t>
+              <a:t>8/20/2026</a:t>
             </a:fld>
             <a:endParaRPr lang="en-US"/>
           </a:p>
@@ -504,7 +942,7 @@
           <a:p>
             <a:fld id="{93F57E82-5604-4F8C-BCFA-F7C026884391}" type="datetimeFigureOut">
               <a:rPr lang="en-US" smtClean="0"/>
-              <a:t>8/18/2026</a:t>
+              <a:t>8/20/2026</a:t>
             </a:fld>
             <a:endParaRPr lang="en-US"/>
           </a:p>
@@ -712,7 +1150,7 @@
           <a:p>
             <a:fld id="{93F57E82-5604-4F8C-BCFA-F7C026884391}" type="datetimeFigureOut">
               <a:rPr lang="en-US" smtClean="0"/>
-              <a:t>8/18/2026</a:t>
+              <a:t>8/20/2026</a:t>
             </a:fld>
             <a:endParaRPr lang="en-US"/>
           </a:p>
@@ -910,7 +1348,7 @@
           <a:p>
             <a:fld id="{93F57E82-5604-4F8C-BCFA-F7C026884391}" type="datetimeFigureOut">
               <a:rPr lang="en-US" smtClean="0"/>
-              <a:t>8/18/2026</a:t>
+              <a:t>8/20/2026</a:t>
             </a:fld>
             <a:endParaRPr lang="en-US"/>
           </a:p>
@@ -1185,7 +1623,7 @@
           <a:p>
             <a:fld id="{93F57E82-5604-4F8C-BCFA-F7C026884391}" type="datetimeFigureOut">
               <a:rPr lang="en-US" smtClean="0"/>
-              <a:t>8/18/2026</a:t>
+              <a:t>8/20/2026</a:t>
             </a:fld>
             <a:endParaRPr lang="en-US"/>
           </a:p>
@@ -1450,7 +1888,7 @@
           <a:p>
             <a:fld id="{93F57E82-5604-4F8C-BCFA-F7C026884391}" type="datetimeFigureOut">
               <a:rPr lang="en-US" smtClean="0"/>
-              <a:t>8/18/2026</a:t>
+              <a:t>8/20/2026</a:t>
             </a:fld>
             <a:endParaRPr lang="en-US"/>
           </a:p>
@@ -1862,7 +2300,7 @@
           <a:p>
             <a:fld id="{93F57E82-5604-4F8C-BCFA-F7C026884391}" type="datetimeFigureOut">
               <a:rPr lang="en-US" smtClean="0"/>
-              <a:t>8/18/2026</a:t>
+              <a:t>8/20/2026</a:t>
             </a:fld>
             <a:endParaRPr lang="en-US"/>
           </a:p>
@@ -2003,7 +2441,7 @@
           <a:p>
             <a:fld id="{93F57E82-5604-4F8C-BCFA-F7C026884391}" type="datetimeFigureOut">
               <a:rPr lang="en-US" smtClean="0"/>
-              <a:t>8/18/2026</a:t>
+              <a:t>8/20/2026</a:t>
             </a:fld>
             <a:endParaRPr lang="en-US"/>
           </a:p>
@@ -2116,7 +2554,7 @@
           <a:p>
             <a:fld id="{93F57E82-5604-4F8C-BCFA-F7C026884391}" type="datetimeFigureOut">
               <a:rPr lang="en-US" smtClean="0"/>
-              <a:t>8/18/2026</a:t>
+              <a:t>8/20/2026</a:t>
             </a:fld>
             <a:endParaRPr lang="en-US"/>
           </a:p>
@@ -2427,7 +2865,7 @@
           <a:p>
             <a:fld id="{93F57E82-5604-4F8C-BCFA-F7C026884391}" type="datetimeFigureOut">
               <a:rPr lang="en-US" smtClean="0"/>
-              <a:t>8/18/2026</a:t>
+              <a:t>8/20/2026</a:t>
             </a:fld>
             <a:endParaRPr lang="en-US"/>
           </a:p>
@@ -2715,7 +3153,7 @@
           <a:p>
             <a:fld id="{93F57E82-5604-4F8C-BCFA-F7C026884391}" type="datetimeFigureOut">
               <a:rPr lang="en-US" smtClean="0"/>
-              <a:t>8/18/2026</a:t>
+              <a:t>8/20/2026</a:t>
             </a:fld>
             <a:endParaRPr lang="en-US"/>
           </a:p>
@@ -2956,7 +3394,7 @@
           <a:p>
             <a:fld id="{93F57E82-5604-4F8C-BCFA-F7C026884391}" type="datetimeFigureOut">
               <a:rPr lang="en-US" smtClean="0"/>
-              <a:t>8/18/2026</a:t>
+              <a:t>8/20/2026</a:t>
             </a:fld>
             <a:endParaRPr lang="en-US"/>
           </a:p>
@@ -3477,6 +3915,119 @@
           <p:cNvPr id="2" name="Title 1">
             <a:extLst>
               <a:ext uri="{FF2B5EF4-FFF2-40B4-BE49-F238E27FC236}">
+                <a16:creationId xmlns:a16="http://schemas.microsoft.com/office/drawing/2014/main" id="{63B07F39-5957-124B-D20D-4A155E0E07D1}"/>
+              </a:ext>
+            </a:extLst>
+          </p:cNvPr>
+          <p:cNvSpPr>
+            <a:spLocks noGrp="1"/>
+          </p:cNvSpPr>
+          <p:nvPr>
+            <p:ph type="title"/>
+          </p:nvPr>
+        </p:nvSpPr>
+        <p:spPr/>
+        <p:txBody>
+          <a:bodyPr/>
+          <a:lstStyle/>
+          <a:p>
+            <a:r>
+              <a:rPr lang="en-US" dirty="0"/>
+              <a:t>Summary</a:t>
+            </a:r>
+          </a:p>
+        </p:txBody>
+      </p:sp>
+      <p:sp>
+        <p:nvSpPr>
+          <p:cNvPr id="3" name="Content Placeholder 2">
+            <a:extLst>
+              <a:ext uri="{FF2B5EF4-FFF2-40B4-BE49-F238E27FC236}">
+                <a16:creationId xmlns:a16="http://schemas.microsoft.com/office/drawing/2014/main" id="{4437CB38-BBCE-B652-0445-A75C99068419}"/>
+              </a:ext>
+            </a:extLst>
+          </p:cNvPr>
+          <p:cNvSpPr>
+            <a:spLocks noGrp="1"/>
+          </p:cNvSpPr>
+          <p:nvPr>
+            <p:ph idx="1"/>
+          </p:nvPr>
+        </p:nvSpPr>
+        <p:spPr/>
+        <p:txBody>
+          <a:bodyPr/>
+          <a:lstStyle/>
+          <a:p>
+            <a:r>
+              <a:rPr lang="en-US" dirty="0"/>
+              <a:t>6 peer-reviewed publications </a:t>
+            </a:r>
+          </a:p>
+          <a:p>
+            <a:pPr lvl="1"/>
+            <a:r>
+              <a:rPr lang="en-US" dirty="0"/>
+              <a:t>2 journal articles</a:t>
+            </a:r>
+          </a:p>
+          <a:p>
+            <a:pPr lvl="1"/>
+            <a:r>
+              <a:rPr lang="en-US" dirty="0"/>
+              <a:t>3 conference papers,</a:t>
+            </a:r>
+          </a:p>
+          <a:p>
+            <a:pPr lvl="1"/>
+            <a:r>
+              <a:rPr lang="en-US" dirty="0"/>
+              <a:t>1 workshop paper</a:t>
+            </a:r>
+          </a:p>
+          <a:p>
+            <a:r>
+              <a:rPr lang="en-US" dirty="0"/>
+              <a:t>1 publication awaiting peer review</a:t>
+            </a:r>
+          </a:p>
+        </p:txBody>
+      </p:sp>
+    </p:spTree>
+    <p:extLst>
+      <p:ext uri="{BB962C8B-B14F-4D97-AF65-F5344CB8AC3E}">
+        <p14:creationId xmlns:p14="http://schemas.microsoft.com/office/powerpoint/2010/main" val="309417143"/>
+      </p:ext>
+    </p:extLst>
+  </p:cSld>
+  <p:clrMapOvr>
+    <a:masterClrMapping/>
+  </p:clrMapOvr>
+</p:sld>
+</file>
+
+<file path=ppt/slides/slide11.xml><?xml version="1.0" encoding="utf-8"?>
+<p:sld xmlns:a="http://schemas.openxmlformats.org/drawingml/2006/main" xmlns:r="http://schemas.openxmlformats.org/officeDocument/2006/relationships" xmlns:p="http://schemas.openxmlformats.org/presentationml/2006/main">
+  <p:cSld>
+    <p:spTree>
+      <p:nvGrpSpPr>
+        <p:cNvPr id="1" name=""/>
+        <p:cNvGrpSpPr/>
+        <p:nvPr/>
+      </p:nvGrpSpPr>
+      <p:grpSpPr>
+        <a:xfrm>
+          <a:off x="0" y="0"/>
+          <a:ext cx="0" cy="0"/>
+          <a:chOff x="0" y="0"/>
+          <a:chExt cx="0" cy="0"/>
+        </a:xfrm>
+      </p:grpSpPr>
+      <p:sp>
+        <p:nvSpPr>
+          <p:cNvPr id="2" name="Title 1">
+            <a:extLst>
+              <a:ext uri="{FF2B5EF4-FFF2-40B4-BE49-F238E27FC236}">
                 <a16:creationId xmlns:a16="http://schemas.microsoft.com/office/drawing/2014/main" id="{5EFCD7CC-C2D6-52E6-02D5-F41FC5389A5C}"/>
               </a:ext>
             </a:extLst>
@@ -3536,6 +4087,120 @@
 </file>
 
 <file path=ppt/slides/slide2.xml><?xml version="1.0" encoding="utf-8"?>
+<p:sld xmlns:a="http://schemas.openxmlformats.org/drawingml/2006/main" xmlns:r="http://schemas.openxmlformats.org/officeDocument/2006/relationships" xmlns:p="http://schemas.openxmlformats.org/presentationml/2006/main">
+  <p:cSld>
+    <p:spTree>
+      <p:nvGrpSpPr>
+        <p:cNvPr id="1" name=""/>
+        <p:cNvGrpSpPr/>
+        <p:nvPr/>
+      </p:nvGrpSpPr>
+      <p:grpSpPr>
+        <a:xfrm>
+          <a:off x="0" y="0"/>
+          <a:ext cx="0" cy="0"/>
+          <a:chOff x="0" y="0"/>
+          <a:chExt cx="0" cy="0"/>
+        </a:xfrm>
+      </p:grpSpPr>
+      <p:sp>
+        <p:nvSpPr>
+          <p:cNvPr id="2" name="Title 1">
+            <a:extLst>
+              <a:ext uri="{FF2B5EF4-FFF2-40B4-BE49-F238E27FC236}">
+                <a16:creationId xmlns:a16="http://schemas.microsoft.com/office/drawing/2014/main" id="{CBF50859-03D1-3749-29C1-D1A71CA7DA81}"/>
+              </a:ext>
+            </a:extLst>
+          </p:cNvPr>
+          <p:cNvSpPr>
+            <a:spLocks noGrp="1"/>
+          </p:cNvSpPr>
+          <p:nvPr>
+            <p:ph type="title"/>
+          </p:nvPr>
+        </p:nvSpPr>
+        <p:spPr/>
+        <p:txBody>
+          <a:bodyPr/>
+          <a:lstStyle/>
+          <a:p>
+            <a:r>
+              <a:rPr lang="en-US" dirty="0" err="1"/>
+              <a:t>Automatizace</a:t>
+            </a:r>
+            <a:r>
+              <a:rPr lang="en-US" dirty="0"/>
+              <a:t> &amp; </a:t>
+            </a:r>
+            <a:r>
+              <a:rPr lang="en-US" dirty="0" err="1"/>
+              <a:t>zjednodusovani</a:t>
+            </a:r>
+            <a:br>
+              <a:rPr lang="en-US" dirty="0"/>
+            </a:br>
+            <a:r>
+              <a:rPr lang="en-US" dirty="0"/>
+              <a:t>(</a:t>
+            </a:r>
+            <a:r>
+              <a:rPr lang="en-US" dirty="0" err="1"/>
+              <a:t>separace</a:t>
+            </a:r>
+            <a:r>
+              <a:rPr lang="en-US" dirty="0"/>
+              <a:t> </a:t>
+            </a:r>
+            <a:r>
+              <a:rPr lang="en-US" dirty="0" err="1"/>
+              <a:t>concernu</a:t>
+            </a:r>
+            <a:r>
+              <a:rPr lang="en-US" dirty="0"/>
+              <a:t>)</a:t>
+            </a:r>
+          </a:p>
+        </p:txBody>
+      </p:sp>
+      <p:sp>
+        <p:nvSpPr>
+          <p:cNvPr id="3" name="Content Placeholder 2">
+            <a:extLst>
+              <a:ext uri="{FF2B5EF4-FFF2-40B4-BE49-F238E27FC236}">
+                <a16:creationId xmlns:a16="http://schemas.microsoft.com/office/drawing/2014/main" id="{36D19B1D-58F5-79C8-5802-D994DFE792E4}"/>
+              </a:ext>
+            </a:extLst>
+          </p:cNvPr>
+          <p:cNvSpPr>
+            <a:spLocks noGrp="1"/>
+          </p:cNvSpPr>
+          <p:nvPr>
+            <p:ph idx="1"/>
+          </p:nvPr>
+        </p:nvSpPr>
+        <p:spPr/>
+        <p:txBody>
+          <a:bodyPr/>
+          <a:lstStyle/>
+          <a:p>
+            <a:endParaRPr lang="en-US"/>
+          </a:p>
+        </p:txBody>
+      </p:sp>
+    </p:spTree>
+    <p:extLst>
+      <p:ext uri="{BB962C8B-B14F-4D97-AF65-F5344CB8AC3E}">
+        <p14:creationId xmlns:p14="http://schemas.microsoft.com/office/powerpoint/2010/main" val="1824864462"/>
+      </p:ext>
+    </p:extLst>
+  </p:cSld>
+  <p:clrMapOvr>
+    <a:masterClrMapping/>
+  </p:clrMapOvr>
+</p:sld>
+</file>
+
+<file path=ppt/slides/slide3.xml><?xml version="1.0" encoding="utf-8"?>
 <p:sld xmlns:a="http://schemas.openxmlformats.org/drawingml/2006/main" xmlns:r="http://schemas.openxmlformats.org/officeDocument/2006/relationships" xmlns:p="http://schemas.openxmlformats.org/presentationml/2006/main">
   <p:cSld>
     <p:spTree>
@@ -3581,7 +4246,7 @@
           <a:p>
             <a:r>
               <a:rPr lang="en-US" dirty="0"/>
-              <a:t>Contribution map</a:t>
+              <a:t>M &amp; S</a:t>
             </a:r>
           </a:p>
         </p:txBody>
@@ -3609,14 +4274,14 @@
           <a:p>
             <a:r>
               <a:rPr lang="en-US" dirty="0"/>
-              <a:t>Background: GPU &amp; Cluster computing</a:t>
+              <a:t>Motivation: GPU &amp; Cluster computing</a:t>
             </a:r>
           </a:p>
           <a:p>
             <a:pPr lvl="1"/>
             <a:r>
               <a:rPr lang="en-US" dirty="0"/>
-              <a:t>Too many decisions, complex code </a:t>
+              <a:t>Too many decisions, complex code (you don’t know) </a:t>
             </a:r>
             <a:r>
               <a:rPr lang="en-US" dirty="0">
@@ -3630,21 +4295,23 @@
             <a:pPr lvl="2"/>
             <a:r>
               <a:rPr lang="en-US" dirty="0"/>
-              <a:t>layout options</a:t>
-            </a:r>
-          </a:p>
-          <a:p>
-            <a:pPr lvl="2"/>
+              <a:t>layout options, traversal options, parallelization (Matice, </a:t>
+            </a:r>
+            <a:r>
+              <a:rPr lang="en-US" dirty="0" err="1"/>
+              <a:t>pruchod</a:t>
+            </a:r>
             <a:r>
               <a:rPr lang="en-US" dirty="0"/>
-              <a:t>traversal options</a:t>
-            </a:r>
-          </a:p>
-          <a:p>
-            <a:pPr lvl="2"/>
+              <a:t>; </a:t>
+            </a:r>
+            <a:r>
+              <a:rPr lang="en-US" dirty="0" err="1"/>
+              <a:t>nasobeni</a:t>
+            </a:r>
             <a:r>
               <a:rPr lang="en-US" dirty="0"/>
-              <a:t>parallelization</a:t>
+              <a:t>?)</a:t>
             </a:r>
           </a:p>
           <a:p>
@@ -3655,7 +4322,6 @@
             </a:r>
           </a:p>
           <a:p>
-            <a:pPr lvl="1"/>
             <a:r>
               <a:rPr lang="en-US" dirty="0"/>
               <a:t>Our solution: Abstraction &amp; automatization </a:t>
@@ -3669,21 +4335,14 @@
             <a:endParaRPr lang="en-US" dirty="0"/>
           </a:p>
           <a:p>
-            <a:pPr lvl="2"/>
-            <a:r>
-              <a:rPr lang="en-US" dirty="0"/>
-              <a:t>Eco context? (Compilers, other abstractions, autotuning)</a:t>
-            </a:r>
-          </a:p>
-          <a:p>
-            <a:pPr lvl="2"/>
+            <a:pPr lvl="1"/>
             <a:r>
               <a:rPr lang="en-US" dirty="0"/>
               <a:t>Separation of concerns, independent aspects</a:t>
             </a:r>
           </a:p>
           <a:p>
-            <a:pPr lvl="2"/>
+            <a:pPr lvl="1"/>
             <a:r>
               <a:rPr lang="en-US" dirty="0"/>
               <a:t>Introducing layout-agnostic and traversal-agnostic algorithm design</a:t>
@@ -3702,89 +4361,6 @@
     <p:extLst>
       <p:ext uri="{BB962C8B-B14F-4D97-AF65-F5344CB8AC3E}">
         <p14:creationId xmlns:p14="http://schemas.microsoft.com/office/powerpoint/2010/main" val="1408920348"/>
-      </p:ext>
-    </p:extLst>
-  </p:cSld>
-  <p:clrMapOvr>
-    <a:masterClrMapping/>
-  </p:clrMapOvr>
-</p:sld>
-</file>
-
-<file path=ppt/slides/slide3.xml><?xml version="1.0" encoding="utf-8"?>
-<p:sld xmlns:a="http://schemas.openxmlformats.org/drawingml/2006/main" xmlns:r="http://schemas.openxmlformats.org/officeDocument/2006/relationships" xmlns:p="http://schemas.openxmlformats.org/presentationml/2006/main">
-  <p:cSld>
-    <p:spTree>
-      <p:nvGrpSpPr>
-        <p:cNvPr id="1" name=""/>
-        <p:cNvGrpSpPr/>
-        <p:nvPr/>
-      </p:nvGrpSpPr>
-      <p:grpSpPr>
-        <a:xfrm>
-          <a:off x="0" y="0"/>
-          <a:ext cx="0" cy="0"/>
-          <a:chOff x="0" y="0"/>
-          <a:chExt cx="0" cy="0"/>
-        </a:xfrm>
-      </p:grpSpPr>
-      <p:sp>
-        <p:nvSpPr>
-          <p:cNvPr id="2" name="Title 1">
-            <a:extLst>
-              <a:ext uri="{FF2B5EF4-FFF2-40B4-BE49-F238E27FC236}">
-                <a16:creationId xmlns:a16="http://schemas.microsoft.com/office/drawing/2014/main" id="{6447B745-9B50-DD90-5161-BD2A06CEA44B}"/>
-              </a:ext>
-            </a:extLst>
-          </p:cNvPr>
-          <p:cNvSpPr>
-            <a:spLocks noGrp="1"/>
-          </p:cNvSpPr>
-          <p:nvPr>
-            <p:ph type="title"/>
-          </p:nvPr>
-        </p:nvSpPr>
-        <p:spPr/>
-        <p:txBody>
-          <a:bodyPr/>
-          <a:lstStyle/>
-          <a:p>
-            <a:r>
-              <a:rPr lang="en-US" dirty="0"/>
-              <a:t>Contribution map</a:t>
-            </a:r>
-          </a:p>
-        </p:txBody>
-      </p:sp>
-      <p:sp>
-        <p:nvSpPr>
-          <p:cNvPr id="3" name="Content Placeholder 2">
-            <a:extLst>
-              <a:ext uri="{FF2B5EF4-FFF2-40B4-BE49-F238E27FC236}">
-                <a16:creationId xmlns:a16="http://schemas.microsoft.com/office/drawing/2014/main" id="{FC82B3D9-0F0B-5093-8759-0AA05117C2D6}"/>
-              </a:ext>
-            </a:extLst>
-          </p:cNvPr>
-          <p:cNvSpPr>
-            <a:spLocks noGrp="1"/>
-          </p:cNvSpPr>
-          <p:nvPr>
-            <p:ph idx="1"/>
-          </p:nvPr>
-        </p:nvSpPr>
-        <p:spPr/>
-        <p:txBody>
-          <a:bodyPr/>
-          <a:lstStyle/>
-          <a:p>
-            <a:endParaRPr lang="en-US" dirty="0"/>
-          </a:p>
-        </p:txBody>
-      </p:sp>
-    </p:spTree>
-    <p:extLst>
-      <p:ext uri="{BB962C8B-B14F-4D97-AF65-F5344CB8AC3E}">
-        <p14:creationId xmlns:p14="http://schemas.microsoft.com/office/powerpoint/2010/main" val="1745489699"/>
       </p:ext>
     </p:extLst>
   </p:cSld>
@@ -4044,21 +4620,89 @@
             </a:r>
           </a:p>
           <a:p>
+            <a:endParaRPr lang="en-US" dirty="0"/>
+          </a:p>
+          <a:p>
             <a:r>
               <a:rPr lang="en-US" dirty="0"/>
-              <a:t>Practical aspects</a:t>
-            </a:r>
-          </a:p>
-          <a:p>
+              <a:t>Extensions</a:t>
+            </a:r>
+          </a:p>
+          <a:p>
+            <a:pPr lvl="1"/>
+            <a:r>
+              <a:rPr lang="en-US" dirty="0"/>
+              <a:t>? Practical aspects; </a:t>
+            </a:r>
+            <a:r>
+              <a:rPr lang="en-US" dirty="0">
+                <a:sym typeface="Wingdings" panose="05000000000000000000" pitchFamily="2" charset="2"/>
+              </a:rPr>
+              <a:t> autotuning</a:t>
+            </a:r>
+            <a:endParaRPr lang="en-US" dirty="0"/>
+          </a:p>
+          <a:p>
+            <a:pPr lvl="1"/>
             <a:r>
               <a:rPr lang="en-US" dirty="0"/>
               <a:t>Distributed computing</a:t>
             </a:r>
           </a:p>
           <a:p>
+            <a:endParaRPr lang="en-US" dirty="0"/>
+          </a:p>
+          <a:p>
             <a:r>
               <a:rPr lang="en-US" dirty="0"/>
-              <a:t>Stencil computations</a:t>
+              <a:t>Knowledge </a:t>
+            </a:r>
+            <a:r>
+              <a:rPr lang="en-US" dirty="0" err="1"/>
+              <a:t>neco</a:t>
+            </a:r>
+            <a:r>
+              <a:rPr lang="en-US" dirty="0"/>
+              <a:t> (</a:t>
+            </a:r>
+            <a:r>
+              <a:rPr lang="en-US" dirty="0" err="1"/>
+              <a:t>metaprogramovani</a:t>
+            </a:r>
+            <a:r>
+              <a:rPr lang="en-US" dirty="0"/>
+              <a:t>, </a:t>
+            </a:r>
+            <a:r>
+              <a:rPr lang="en-US" dirty="0" err="1"/>
+              <a:t>stavebni</a:t>
+            </a:r>
+            <a:r>
+              <a:rPr lang="en-US" dirty="0"/>
+              <a:t> </a:t>
+            </a:r>
+            <a:r>
+              <a:rPr lang="en-US" dirty="0" err="1"/>
+              <a:t>bloky</a:t>
+            </a:r>
+            <a:r>
+              <a:rPr lang="en-US" dirty="0"/>
+              <a:t>, </a:t>
+            </a:r>
+            <a:r>
+              <a:rPr lang="en-US" dirty="0" err="1"/>
+              <a:t>traversery</a:t>
+            </a:r>
+            <a:r>
+              <a:rPr lang="en-US" dirty="0"/>
+              <a:t>?)</a:t>
+            </a:r>
+          </a:p>
+          <a:p>
+            <a:pPr lvl="1"/>
+            <a:r>
+              <a:rPr lang="en-US" dirty="0"/>
+              <a:t>CA computations (</a:t>
             </a:r>
           </a:p>
         </p:txBody>
@@ -4207,9 +4851,10 @@
           <a:lstStyle/>
           <a:p>
             <a:r>
-              <a:rPr lang="en-US" dirty="0"/>
-              <a:t>Software artifacts</a:t>
-            </a:r>
+              <a:rPr lang="en-US" dirty="0" err="1"/>
+              <a:t>Zahodit</a:t>
+            </a:r>
+            <a:endParaRPr lang="en-US" dirty="0"/>
           </a:p>
         </p:txBody>
       </p:sp>
@@ -4284,7 +4929,7 @@
           <p:cNvPr id="2" name="Title 1">
             <a:extLst>
               <a:ext uri="{FF2B5EF4-FFF2-40B4-BE49-F238E27FC236}">
-                <a16:creationId xmlns:a16="http://schemas.microsoft.com/office/drawing/2014/main" id="{63B07F39-5957-124B-D20D-4A155E0E07D1}"/>
+                <a16:creationId xmlns:a16="http://schemas.microsoft.com/office/drawing/2014/main" id="{6447B745-9B50-DD90-5161-BD2A06CEA44B}"/>
               </a:ext>
             </a:extLst>
           </p:cNvPr>
@@ -4302,70 +4947,555 @@
           <a:p>
             <a:r>
               <a:rPr lang="en-US" dirty="0"/>
-              <a:t>Summary</a:t>
-            </a:r>
-          </a:p>
-        </p:txBody>
-      </p:sp>
-      <p:sp>
-        <p:nvSpPr>
-          <p:cNvPr id="3" name="Content Placeholder 2">
-            <a:extLst>
-              <a:ext uri="{FF2B5EF4-FFF2-40B4-BE49-F238E27FC236}">
-                <a16:creationId xmlns:a16="http://schemas.microsoft.com/office/drawing/2014/main" id="{4437CB38-BBCE-B652-0445-A75C99068419}"/>
-              </a:ext>
-            </a:extLst>
-          </p:cNvPr>
-          <p:cNvSpPr>
-            <a:spLocks noGrp="1"/>
-          </p:cNvSpPr>
-          <p:nvPr>
-            <p:ph idx="1"/>
-          </p:nvPr>
-        </p:nvSpPr>
-        <p:spPr/>
-        <p:txBody>
-          <a:bodyPr/>
-          <a:lstStyle/>
-          <a:p>
+              <a:t>Contribution map</a:t>
+            </a:r>
+          </a:p>
+        </p:txBody>
+      </p:sp>
+      <p:sp>
+        <p:nvSpPr>
+          <p:cNvPr id="5" name="Rectangle 4">
+            <a:extLst>
+              <a:ext uri="{FF2B5EF4-FFF2-40B4-BE49-F238E27FC236}">
+                <a16:creationId xmlns:a16="http://schemas.microsoft.com/office/drawing/2014/main" id="{CB7F8197-FC2F-9C2A-050C-CCCB46D86C79}"/>
+              </a:ext>
+            </a:extLst>
+          </p:cNvPr>
+          <p:cNvSpPr/>
+          <p:nvPr/>
+        </p:nvSpPr>
+        <p:spPr>
+          <a:xfrm>
+            <a:off x="4240490" y="1406732"/>
+            <a:ext cx="3711020" cy="914400"/>
+          </a:xfrm>
+          <a:prstGeom prst="rect">
+            <a:avLst/>
+          </a:prstGeom>
+        </p:spPr>
+        <p:style>
+          <a:lnRef idx="2">
+            <a:schemeClr val="accent1">
+              <a:shade val="15000"/>
+            </a:schemeClr>
+          </a:lnRef>
+          <a:fillRef idx="1">
+            <a:schemeClr val="accent1"/>
+          </a:fillRef>
+          <a:effectRef idx="0">
+            <a:schemeClr val="accent1"/>
+          </a:effectRef>
+          <a:fontRef idx="minor">
+            <a:schemeClr val="lt1"/>
+          </a:fontRef>
+        </p:style>
+        <p:txBody>
+          <a:bodyPr rtlCol="0" anchor="ctr"/>
+          <a:lstStyle/>
+          <a:p>
+            <a:pPr algn="ctr"/>
             <a:r>
               <a:rPr lang="en-US" dirty="0"/>
-              <a:t>6 peer-reviewed publications </a:t>
-            </a:r>
-          </a:p>
-          <a:p>
-            <a:pPr lvl="1"/>
+              <a:t>Separate algorithm design from performance optimization</a:t>
+            </a:r>
+          </a:p>
+        </p:txBody>
+      </p:sp>
+      <p:sp>
+        <p:nvSpPr>
+          <p:cNvPr id="7" name="Rectangle 6">
+            <a:extLst>
+              <a:ext uri="{FF2B5EF4-FFF2-40B4-BE49-F238E27FC236}">
+                <a16:creationId xmlns:a16="http://schemas.microsoft.com/office/drawing/2014/main" id="{60EC2A1A-B720-84BC-76D5-4751C09EA61A}"/>
+              </a:ext>
+            </a:extLst>
+          </p:cNvPr>
+          <p:cNvSpPr/>
+          <p:nvPr/>
+        </p:nvSpPr>
+        <p:spPr>
+          <a:xfrm>
+            <a:off x="150074" y="2971800"/>
+            <a:ext cx="3711020" cy="914400"/>
+          </a:xfrm>
+          <a:prstGeom prst="rect">
+            <a:avLst/>
+          </a:prstGeom>
+        </p:spPr>
+        <p:style>
+          <a:lnRef idx="2">
+            <a:schemeClr val="accent1">
+              <a:shade val="15000"/>
+            </a:schemeClr>
+          </a:lnRef>
+          <a:fillRef idx="1">
+            <a:schemeClr val="accent1"/>
+          </a:fillRef>
+          <a:effectRef idx="0">
+            <a:schemeClr val="accent1"/>
+          </a:effectRef>
+          <a:fontRef idx="minor">
+            <a:schemeClr val="lt1"/>
+          </a:fontRef>
+        </p:style>
+        <p:txBody>
+          <a:bodyPr rtlCol="0" anchor="ctr"/>
+          <a:lstStyle/>
+          <a:p>
+            <a:pPr algn="ctr"/>
             <a:r>
               <a:rPr lang="en-US" dirty="0"/>
-              <a:t>2 journal articles</a:t>
-            </a:r>
-          </a:p>
-          <a:p>
-            <a:pPr lvl="1"/>
+              <a:t>Layout- and traversal-agnostic abstractions</a:t>
+            </a:r>
+          </a:p>
+        </p:txBody>
+      </p:sp>
+      <p:sp>
+        <p:nvSpPr>
+          <p:cNvPr id="9" name="Rectangle 8">
+            <a:extLst>
+              <a:ext uri="{FF2B5EF4-FFF2-40B4-BE49-F238E27FC236}">
+                <a16:creationId xmlns:a16="http://schemas.microsoft.com/office/drawing/2014/main" id="{6DB7F776-4EDC-09F4-F04A-E586FC4B4500}"/>
+              </a:ext>
+            </a:extLst>
+          </p:cNvPr>
+          <p:cNvSpPr/>
+          <p:nvPr/>
+        </p:nvSpPr>
+        <p:spPr>
+          <a:xfrm>
+            <a:off x="7840178" y="2971800"/>
+            <a:ext cx="3711020" cy="914400"/>
+          </a:xfrm>
+          <a:prstGeom prst="rect">
+            <a:avLst/>
+          </a:prstGeom>
+        </p:spPr>
+        <p:style>
+          <a:lnRef idx="2">
+            <a:schemeClr val="accent1">
+              <a:shade val="15000"/>
+            </a:schemeClr>
+          </a:lnRef>
+          <a:fillRef idx="1">
+            <a:schemeClr val="accent1"/>
+          </a:fillRef>
+          <a:effectRef idx="0">
+            <a:schemeClr val="accent1"/>
+          </a:effectRef>
+          <a:fontRef idx="minor">
+            <a:schemeClr val="lt1"/>
+          </a:fontRef>
+        </p:style>
+        <p:txBody>
+          <a:bodyPr rtlCol="0" anchor="ctr"/>
+          <a:lstStyle/>
+          <a:p>
+            <a:pPr algn="ctr"/>
             <a:r>
               <a:rPr lang="en-US" dirty="0"/>
-              <a:t>3 conference papers,</a:t>
-            </a:r>
-          </a:p>
-          <a:p>
-            <a:pPr lvl="1"/>
+              <a:t>LLM-assisted optimization</a:t>
+            </a:r>
+          </a:p>
+        </p:txBody>
+      </p:sp>
+      <p:sp>
+        <p:nvSpPr>
+          <p:cNvPr id="11" name="Rectangle 10">
+            <a:extLst>
+              <a:ext uri="{FF2B5EF4-FFF2-40B4-BE49-F238E27FC236}">
+                <a16:creationId xmlns:a16="http://schemas.microsoft.com/office/drawing/2014/main" id="{5B2B9BCB-5805-C1F1-AF45-681B37E6B83E}"/>
+              </a:ext>
+            </a:extLst>
+          </p:cNvPr>
+          <p:cNvSpPr/>
+          <p:nvPr/>
+        </p:nvSpPr>
+        <p:spPr>
+          <a:xfrm>
+            <a:off x="150074" y="4252912"/>
+            <a:ext cx="3711020" cy="914400"/>
+          </a:xfrm>
+          <a:prstGeom prst="rect">
+            <a:avLst/>
+          </a:prstGeom>
+        </p:spPr>
+        <p:style>
+          <a:lnRef idx="2">
+            <a:schemeClr val="accent1">
+              <a:shade val="15000"/>
+            </a:schemeClr>
+          </a:lnRef>
+          <a:fillRef idx="1">
+            <a:schemeClr val="accent1"/>
+          </a:fillRef>
+          <a:effectRef idx="0">
+            <a:schemeClr val="accent1"/>
+          </a:effectRef>
+          <a:fontRef idx="minor">
+            <a:schemeClr val="lt1"/>
+          </a:fontRef>
+        </p:style>
+        <p:txBody>
+          <a:bodyPr rtlCol="0" anchor="ctr"/>
+          <a:lstStyle/>
+          <a:p>
+            <a:pPr algn="ctr"/>
             <a:r>
               <a:rPr lang="en-US" dirty="0"/>
-              <a:t>1 workshop paper</a:t>
-            </a:r>
-          </a:p>
-          <a:p>
+              <a:t>Layout abstractions</a:t>
+            </a:r>
+          </a:p>
+        </p:txBody>
+      </p:sp>
+      <p:sp>
+        <p:nvSpPr>
+          <p:cNvPr id="13" name="Rectangle 12">
+            <a:extLst>
+              <a:ext uri="{FF2B5EF4-FFF2-40B4-BE49-F238E27FC236}">
+                <a16:creationId xmlns:a16="http://schemas.microsoft.com/office/drawing/2014/main" id="{31388E94-1EEB-E24E-1923-AA250880AF84}"/>
+              </a:ext>
+            </a:extLst>
+          </p:cNvPr>
+          <p:cNvSpPr/>
+          <p:nvPr/>
+        </p:nvSpPr>
+        <p:spPr>
+          <a:xfrm>
+            <a:off x="4240490" y="4252912"/>
+            <a:ext cx="3711020" cy="914400"/>
+          </a:xfrm>
+          <a:prstGeom prst="rect">
+            <a:avLst/>
+          </a:prstGeom>
+        </p:spPr>
+        <p:style>
+          <a:lnRef idx="2">
+            <a:schemeClr val="accent1">
+              <a:shade val="15000"/>
+            </a:schemeClr>
+          </a:lnRef>
+          <a:fillRef idx="1">
+            <a:schemeClr val="accent1"/>
+          </a:fillRef>
+          <a:effectRef idx="0">
+            <a:schemeClr val="accent1"/>
+          </a:effectRef>
+          <a:fontRef idx="minor">
+            <a:schemeClr val="lt1"/>
+          </a:fontRef>
+        </p:style>
+        <p:txBody>
+          <a:bodyPr rtlCol="0" anchor="ctr"/>
+          <a:lstStyle/>
+          <a:p>
+            <a:pPr algn="ctr"/>
             <a:r>
               <a:rPr lang="en-US" dirty="0"/>
-              <a:t>1 publication awaiting peer review</a:t>
-            </a:r>
+              <a:t>Traversal abstractions</a:t>
+            </a:r>
+          </a:p>
+        </p:txBody>
+      </p:sp>
+      <p:sp>
+        <p:nvSpPr>
+          <p:cNvPr id="15" name="Rectangle 14">
+            <a:extLst>
+              <a:ext uri="{FF2B5EF4-FFF2-40B4-BE49-F238E27FC236}">
+                <a16:creationId xmlns:a16="http://schemas.microsoft.com/office/drawing/2014/main" id="{DE8920A4-4430-6757-E41A-9BA9578DC80D}"/>
+              </a:ext>
+            </a:extLst>
+          </p:cNvPr>
+          <p:cNvSpPr/>
+          <p:nvPr/>
+        </p:nvSpPr>
+        <p:spPr>
+          <a:xfrm>
+            <a:off x="8330906" y="4252912"/>
+            <a:ext cx="3711020" cy="914400"/>
+          </a:xfrm>
+          <a:prstGeom prst="rect">
+            <a:avLst/>
+          </a:prstGeom>
+        </p:spPr>
+        <p:style>
+          <a:lnRef idx="2">
+            <a:schemeClr val="accent1">
+              <a:shade val="15000"/>
+            </a:schemeClr>
+          </a:lnRef>
+          <a:fillRef idx="1">
+            <a:schemeClr val="accent1"/>
+          </a:fillRef>
+          <a:effectRef idx="0">
+            <a:schemeClr val="accent1"/>
+          </a:effectRef>
+          <a:fontRef idx="minor">
+            <a:schemeClr val="lt1"/>
+          </a:fontRef>
+        </p:style>
+        <p:txBody>
+          <a:bodyPr rtlCol="0" anchor="ctr"/>
+          <a:lstStyle/>
+          <a:p>
+            <a:pPr algn="ctr"/>
+            <a:r>
+              <a:rPr lang="en-US" dirty="0"/>
+              <a:t>Practical aspects</a:t>
+            </a:r>
+          </a:p>
+        </p:txBody>
+      </p:sp>
+      <p:sp>
+        <p:nvSpPr>
+          <p:cNvPr id="17" name="Rectangle 16">
+            <a:extLst>
+              <a:ext uri="{FF2B5EF4-FFF2-40B4-BE49-F238E27FC236}">
+                <a16:creationId xmlns:a16="http://schemas.microsoft.com/office/drawing/2014/main" id="{D01E75A2-333B-DF95-544C-0ACF1B88882C}"/>
+              </a:ext>
+            </a:extLst>
+          </p:cNvPr>
+          <p:cNvSpPr/>
+          <p:nvPr/>
+        </p:nvSpPr>
+        <p:spPr>
+          <a:xfrm>
+            <a:off x="302474" y="5356288"/>
+            <a:ext cx="3711020" cy="914400"/>
+          </a:xfrm>
+          <a:prstGeom prst="rect">
+            <a:avLst/>
+          </a:prstGeom>
+        </p:spPr>
+        <p:style>
+          <a:lnRef idx="2">
+            <a:schemeClr val="accent1">
+              <a:shade val="15000"/>
+            </a:schemeClr>
+          </a:lnRef>
+          <a:fillRef idx="1">
+            <a:schemeClr val="accent1"/>
+          </a:fillRef>
+          <a:effectRef idx="0">
+            <a:schemeClr val="accent1"/>
+          </a:effectRef>
+          <a:fontRef idx="minor">
+            <a:schemeClr val="lt1"/>
+          </a:fontRef>
+        </p:style>
+        <p:txBody>
+          <a:bodyPr rtlCol="0" anchor="ctr"/>
+          <a:lstStyle/>
+          <a:p>
+            <a:pPr algn="ctr"/>
+            <a:r>
+              <a:rPr lang="en-US" dirty="0"/>
+              <a:t>Noarr structures</a:t>
+            </a:r>
+          </a:p>
+        </p:txBody>
+      </p:sp>
+      <p:sp>
+        <p:nvSpPr>
+          <p:cNvPr id="19" name="Rectangle 18">
+            <a:extLst>
+              <a:ext uri="{FF2B5EF4-FFF2-40B4-BE49-F238E27FC236}">
+                <a16:creationId xmlns:a16="http://schemas.microsoft.com/office/drawing/2014/main" id="{67736357-2F90-D241-51F6-C03C797EFFC2}"/>
+              </a:ext>
+            </a:extLst>
+          </p:cNvPr>
+          <p:cNvSpPr/>
+          <p:nvPr/>
+        </p:nvSpPr>
+        <p:spPr>
+          <a:xfrm>
+            <a:off x="454874" y="5508688"/>
+            <a:ext cx="3711020" cy="914400"/>
+          </a:xfrm>
+          <a:prstGeom prst="rect">
+            <a:avLst/>
+          </a:prstGeom>
+        </p:spPr>
+        <p:style>
+          <a:lnRef idx="2">
+            <a:schemeClr val="accent1">
+              <a:shade val="15000"/>
+            </a:schemeClr>
+          </a:lnRef>
+          <a:fillRef idx="1">
+            <a:schemeClr val="accent1"/>
+          </a:fillRef>
+          <a:effectRef idx="0">
+            <a:schemeClr val="accent1"/>
+          </a:effectRef>
+          <a:fontRef idx="minor">
+            <a:schemeClr val="lt1"/>
+          </a:fontRef>
+        </p:style>
+        <p:txBody>
+          <a:bodyPr rtlCol="0" anchor="ctr"/>
+          <a:lstStyle/>
+          <a:p>
+            <a:pPr algn="ctr"/>
+            <a:r>
+              <a:rPr lang="en-US" dirty="0"/>
+              <a:t>Noarr traversers</a:t>
+            </a:r>
+          </a:p>
+        </p:txBody>
+      </p:sp>
+      <p:sp>
+        <p:nvSpPr>
+          <p:cNvPr id="21" name="Rectangle 20">
+            <a:extLst>
+              <a:ext uri="{FF2B5EF4-FFF2-40B4-BE49-F238E27FC236}">
+                <a16:creationId xmlns:a16="http://schemas.microsoft.com/office/drawing/2014/main" id="{9EC73339-8B3D-25F4-18D5-E5821CB7CE8B}"/>
+              </a:ext>
+            </a:extLst>
+          </p:cNvPr>
+          <p:cNvSpPr/>
+          <p:nvPr/>
+        </p:nvSpPr>
+        <p:spPr>
+          <a:xfrm>
+            <a:off x="607274" y="5661088"/>
+            <a:ext cx="3711020" cy="914400"/>
+          </a:xfrm>
+          <a:prstGeom prst="rect">
+            <a:avLst/>
+          </a:prstGeom>
+        </p:spPr>
+        <p:style>
+          <a:lnRef idx="2">
+            <a:schemeClr val="accent1">
+              <a:shade val="15000"/>
+            </a:schemeClr>
+          </a:lnRef>
+          <a:fillRef idx="1">
+            <a:schemeClr val="accent1"/>
+          </a:fillRef>
+          <a:effectRef idx="0">
+            <a:schemeClr val="accent1"/>
+          </a:effectRef>
+          <a:fontRef idx="minor">
+            <a:schemeClr val="lt1"/>
+          </a:fontRef>
+        </p:style>
+        <p:txBody>
+          <a:bodyPr rtlCol="0" anchor="ctr"/>
+          <a:lstStyle/>
+          <a:p>
+            <a:pPr algn="ctr"/>
+            <a:r>
+              <a:rPr lang="en-US" dirty="0"/>
+              <a:t>Noarr tuning</a:t>
+            </a:r>
+          </a:p>
+        </p:txBody>
+      </p:sp>
+      <p:sp>
+        <p:nvSpPr>
+          <p:cNvPr id="23" name="Rectangle 22">
+            <a:extLst>
+              <a:ext uri="{FF2B5EF4-FFF2-40B4-BE49-F238E27FC236}">
+                <a16:creationId xmlns:a16="http://schemas.microsoft.com/office/drawing/2014/main" id="{63EC4F51-D7C0-1DFC-E94E-75AE185B7CC1}"/>
+              </a:ext>
+            </a:extLst>
+          </p:cNvPr>
+          <p:cNvSpPr/>
+          <p:nvPr/>
+        </p:nvSpPr>
+        <p:spPr>
+          <a:xfrm>
+            <a:off x="759674" y="5813488"/>
+            <a:ext cx="3711020" cy="914400"/>
+          </a:xfrm>
+          <a:prstGeom prst="rect">
+            <a:avLst/>
+          </a:prstGeom>
+        </p:spPr>
+        <p:style>
+          <a:lnRef idx="2">
+            <a:schemeClr val="accent1">
+              <a:shade val="15000"/>
+            </a:schemeClr>
+          </a:lnRef>
+          <a:fillRef idx="1">
+            <a:schemeClr val="accent1"/>
+          </a:fillRef>
+          <a:effectRef idx="0">
+            <a:schemeClr val="accent1"/>
+          </a:effectRef>
+          <a:fontRef idx="minor">
+            <a:schemeClr val="lt1"/>
+          </a:fontRef>
+        </p:style>
+        <p:txBody>
+          <a:bodyPr rtlCol="0" anchor="ctr"/>
+          <a:lstStyle/>
+          <a:p>
+            <a:pPr algn="ctr"/>
+            <a:r>
+              <a:rPr lang="en-US" dirty="0"/>
+              <a:t>Noarr-MPI</a:t>
+            </a:r>
+          </a:p>
+        </p:txBody>
+      </p:sp>
+      <p:sp>
+        <p:nvSpPr>
+          <p:cNvPr id="25" name="Rectangle 24">
+            <a:extLst>
+              <a:ext uri="{FF2B5EF4-FFF2-40B4-BE49-F238E27FC236}">
+                <a16:creationId xmlns:a16="http://schemas.microsoft.com/office/drawing/2014/main" id="{B7D64168-E19F-C04D-293D-CB07E85D29DA}"/>
+              </a:ext>
+            </a:extLst>
+          </p:cNvPr>
+          <p:cNvSpPr/>
+          <p:nvPr/>
+        </p:nvSpPr>
+        <p:spPr>
+          <a:xfrm>
+            <a:off x="4853138" y="5424788"/>
+            <a:ext cx="3711020" cy="914400"/>
+          </a:xfrm>
+          <a:prstGeom prst="rect">
+            <a:avLst/>
+          </a:prstGeom>
+        </p:spPr>
+        <p:style>
+          <a:lnRef idx="2">
+            <a:schemeClr val="accent1">
+              <a:shade val="15000"/>
+            </a:schemeClr>
+          </a:lnRef>
+          <a:fillRef idx="1">
+            <a:schemeClr val="accent1"/>
+          </a:fillRef>
+          <a:effectRef idx="0">
+            <a:schemeClr val="accent1"/>
+          </a:effectRef>
+          <a:fontRef idx="minor">
+            <a:schemeClr val="lt1"/>
+          </a:fontRef>
+        </p:style>
+        <p:txBody>
+          <a:bodyPr rtlCol="0" anchor="ctr"/>
+          <a:lstStyle/>
+          <a:p>
+            <a:pPr algn="ctr"/>
+            <a:r>
+              <a:rPr lang="en-US" dirty="0" err="1"/>
+              <a:t>Cellato</a:t>
+            </a:r>
+            <a:endParaRPr lang="en-US" dirty="0"/>
           </a:p>
         </p:txBody>
       </p:sp>
     </p:spTree>
     <p:extLst>
       <p:ext uri="{BB962C8B-B14F-4D97-AF65-F5344CB8AC3E}">
-        <p14:creationId xmlns:p14="http://schemas.microsoft.com/office/powerpoint/2010/main" val="309417143"/>
+        <p14:creationId xmlns:p14="http://schemas.microsoft.com/office/powerpoint/2010/main" val="1745489699"/>
       </p:ext>
     </p:extLst>
   </p:cSld>
@@ -4688,4 +5818,319 @@
     </a:ext>
   </a:extLst>
 </a:theme>
+</file>
+
+<file path=ppt/theme/theme2.xml><?xml version="1.0" encoding="utf-8"?>
+<a:theme xmlns:a="http://schemas.openxmlformats.org/drawingml/2006/main" name="Office Theme">
+  <a:themeElements>
+    <a:clrScheme name="Office">
+      <a:dk1>
+        <a:sysClr val="windowText" lastClr="000000"/>
+      </a:dk1>
+      <a:lt1>
+        <a:sysClr val="window" lastClr="FFFFFF"/>
+      </a:lt1>
+      <a:dk2>
+        <a:srgbClr val="0E2841"/>
+      </a:dk2>
+      <a:lt2>
+        <a:srgbClr val="E8E8E8"/>
+      </a:lt2>
+      <a:accent1>
+        <a:srgbClr val="156082"/>
+      </a:accent1>
+      <a:accent2>
+        <a:srgbClr val="E97132"/>
+      </a:accent2>
+      <a:accent3>
+        <a:srgbClr val="196B24"/>
+      </a:accent3>
+      <a:accent4>
+        <a:srgbClr val="0F9ED5"/>
+      </a:accent4>
+      <a:accent5>
+        <a:srgbClr val="A02B93"/>
+      </a:accent5>
+      <a:accent6>
+        <a:srgbClr val="4EA72E"/>
+      </a:accent6>
+      <a:hlink>
+        <a:srgbClr val="467886"/>
+      </a:hlink>
+      <a:folHlink>
+        <a:srgbClr val="96607D"/>
+      </a:folHlink>
+    </a:clrScheme>
+    <a:fontScheme name="Office">
+      <a:majorFont>
+        <a:latin typeface="Aptos Display" panose="02110004020202020204"/>
+        <a:ea typeface=""/>
+        <a:cs typeface=""/>
+        <a:font script="Jpan" typeface="游ゴシック Light"/>
+        <a:font script="Hang" typeface="맑은 고딕"/>
+        <a:font script="Hans" typeface="等线 Light"/>
+        <a:font script="Hant" typeface="新細明體"/>
+        <a:font script="Arab" typeface="Times New Roman"/>
+        <a:font script="Hebr" typeface="Times New Roman"/>
+        <a:font script="Thai" typeface="Angsana New"/>
+        <a:font script="Ethi" typeface="Nyala"/>
+        <a:font script="Beng" typeface="Vrinda"/>
+        <a:font script="Gujr" typeface="Shruti"/>
+        <a:font script="Khmr" typeface="MoolBoran"/>
+        <a:font script="Knda" typeface="Tunga"/>
+        <a:font script="Guru" typeface="Raavi"/>
+        <a:font script="Cans" typeface="Euphemia"/>
+        <a:font script="Cher" typeface="Plantagenet Cherokee"/>
+        <a:font script="Yiii" typeface="Microsoft Yi Baiti"/>
+        <a:font script="Tibt" typeface="Microsoft Himalaya"/>
+        <a:font script="Thaa" typeface="MV Boli"/>
+        <a:font script="Deva" typeface="Mangal"/>
+        <a:font script="Telu" typeface="Gautami"/>
+        <a:font script="Taml" typeface="Latha"/>
+        <a:font script="Syrc" typeface="Estrangelo Edessa"/>
+        <a:font script="Orya" typeface="Kalinga"/>
+        <a:font script="Mlym" typeface="Kartika"/>
+        <a:font script="Laoo" typeface="DokChampa"/>
+        <a:font script="Sinh" typeface="Iskoola Pota"/>
+        <a:font script="Mong" typeface="Mongolian Baiti"/>
+        <a:font script="Viet" typeface="Times New Roman"/>
+        <a:font script="Uigh" typeface="Microsoft Uighur"/>
+        <a:font script="Geor" typeface="Sylfaen"/>
+        <a:font script="Armn" typeface="Arial"/>
+        <a:font script="Bugi" typeface="Leelawadee UI"/>
+        <a:font script="Bopo" typeface="Microsoft JhengHei"/>
+        <a:font script="Java" typeface="Javanese Text"/>
+        <a:font script="Lisu" typeface="Segoe UI"/>
+        <a:font script="Mymr" typeface="Myanmar Text"/>
+        <a:font script="Nkoo" typeface="Ebrima"/>
+        <a:font script="Olck" typeface="Nirmala UI"/>
+        <a:font script="Osma" typeface="Ebrima"/>
+        <a:font script="Phag" typeface="Phagspa"/>
+        <a:font script="Syrn" typeface="Estrangelo Edessa"/>
+        <a:font script="Syrj" typeface="Estrangelo Edessa"/>
+        <a:font script="Syre" typeface="Estrangelo Edessa"/>
+        <a:font script="Sora" typeface="Nirmala UI"/>
+        <a:font script="Tale" typeface="Microsoft Tai Le"/>
+        <a:font script="Talu" typeface="Microsoft New Tai Lue"/>
+        <a:font script="Tfng" typeface="Ebrima"/>
+      </a:majorFont>
+      <a:minorFont>
+        <a:latin typeface="Aptos" panose="02110004020202020204"/>
+        <a:ea typeface=""/>
+        <a:cs typeface=""/>
+        <a:font script="Jpan" typeface="游ゴシック"/>
+        <a:font script="Hang" typeface="맑은 고딕"/>
+        <a:font script="Hans" typeface="等线"/>
+        <a:font script="Hant" typeface="新細明體"/>
+        <a:font script="Arab" typeface="Arial"/>
+        <a:font script="Hebr" typeface="Arial"/>
+        <a:font script="Thai" typeface="Cordia New"/>
+        <a:font script="Ethi" typeface="Nyala"/>
+        <a:font script="Beng" typeface="Vrinda"/>
+        <a:font script="Gujr" typeface="Shruti"/>
+        <a:font script="Khmr" typeface="DaunPenh"/>
+        <a:font script="Knda" typeface="Tunga"/>
+        <a:font script="Guru" typeface="Raavi"/>
+        <a:font script="Cans" typeface="Euphemia"/>
+        <a:font script="Cher" typeface="Plantagenet Cherokee"/>
+        <a:font script="Yiii" typeface="Microsoft Yi Baiti"/>
+        <a:font script="Tibt" typeface="Microsoft Himalaya"/>
+        <a:font script="Thaa" typeface="MV Boli"/>
+        <a:font script="Deva" typeface="Mangal"/>
+        <a:font script="Telu" typeface="Gautami"/>
+        <a:font script="Taml" typeface="Latha"/>
+        <a:font script="Syrc" typeface="Estrangelo Edessa"/>
+        <a:font script="Orya" typeface="Kalinga"/>
+        <a:font script="Mlym" typeface="Kartika"/>
+        <a:font script="Laoo" typeface="DokChampa"/>
+        <a:font script="Sinh" typeface="Iskoola Pota"/>
+        <a:font script="Mong" typeface="Mongolian Baiti"/>
+        <a:font script="Viet" typeface="Arial"/>
+        <a:font script="Uigh" typeface="Microsoft Uighur"/>
+        <a:font script="Geor" typeface="Sylfaen"/>
+        <a:font script="Armn" typeface="Arial"/>
+        <a:font script="Bugi" typeface="Leelawadee UI"/>
+        <a:font script="Bopo" typeface="Microsoft JhengHei"/>
+        <a:font script="Java" typeface="Javanese Text"/>
+        <a:font script="Lisu" typeface="Segoe UI"/>
+        <a:font script="Mymr" typeface="Myanmar Text"/>
+        <a:font script="Nkoo" typeface="Ebrima"/>
+        <a:font script="Olck" typeface="Nirmala UI"/>
+        <a:font script="Osma" typeface="Ebrima"/>
+        <a:font script="Phag" typeface="Phagspa"/>
+        <a:font script="Syrn" typeface="Estrangelo Edessa"/>
+        <a:font script="Syrj" typeface="Estrangelo Edessa"/>
+        <a:font script="Syre" typeface="Estrangelo Edessa"/>
+        <a:font script="Sora" typeface="Nirmala UI"/>
+        <a:font script="Tale" typeface="Microsoft Tai Le"/>
+        <a:font script="Talu" typeface="Microsoft New Tai Lue"/>
+        <a:font script="Tfng" typeface="Ebrima"/>
+      </a:minorFont>
+    </a:fontScheme>
+    <a:fmtScheme name="Office">
+      <a:fillStyleLst>
+        <a:solidFill>
+          <a:schemeClr val="phClr"/>
+        </a:solidFill>
+        <a:gradFill rotWithShape="1">
+          <a:gsLst>
+            <a:gs pos="0">
+              <a:schemeClr val="phClr">
+                <a:lumMod val="110000"/>
+                <a:satMod val="105000"/>
+                <a:tint val="67000"/>
+              </a:schemeClr>
+            </a:gs>
+            <a:gs pos="50000">
+              <a:schemeClr val="phClr">
+                <a:lumMod val="105000"/>
+                <a:satMod val="103000"/>
+                <a:tint val="73000"/>
+              </a:schemeClr>
+            </a:gs>
+            <a:gs pos="100000">
+              <a:schemeClr val="phClr">
+                <a:lumMod val="105000"/>
+                <a:satMod val="109000"/>
+                <a:tint val="81000"/>
+              </a:schemeClr>
+            </a:gs>
+          </a:gsLst>
+          <a:lin ang="5400000" scaled="0"/>
+        </a:gradFill>
+        <a:gradFill rotWithShape="1">
+          <a:gsLst>
+            <a:gs pos="0">
+              <a:schemeClr val="phClr">
+                <a:satMod val="103000"/>
+                <a:lumMod val="102000"/>
+                <a:tint val="94000"/>
+              </a:schemeClr>
+            </a:gs>
+            <a:gs pos="50000">
+              <a:schemeClr val="phClr">
+                <a:satMod val="110000"/>
+                <a:lumMod val="100000"/>
+                <a:shade val="100000"/>
+              </a:schemeClr>
+            </a:gs>
+            <a:gs pos="100000">
+              <a:schemeClr val="phClr">
+                <a:lumMod val="99000"/>
+                <a:satMod val="120000"/>
+                <a:shade val="78000"/>
+              </a:schemeClr>
+            </a:gs>
+          </a:gsLst>
+          <a:lin ang="5400000" scaled="0"/>
+        </a:gradFill>
+      </a:fillStyleLst>
+      <a:lnStyleLst>
+        <a:ln w="12700" cap="flat" cmpd="sng" algn="ctr">
+          <a:solidFill>
+            <a:schemeClr val="phClr"/>
+          </a:solidFill>
+          <a:prstDash val="solid"/>
+          <a:miter lim="800000"/>
+        </a:ln>
+        <a:ln w="19050" cap="flat" cmpd="sng" algn="ctr">
+          <a:solidFill>
+            <a:schemeClr val="phClr"/>
+          </a:solidFill>
+          <a:prstDash val="solid"/>
+          <a:miter lim="800000"/>
+        </a:ln>
+        <a:ln w="25400" cap="flat" cmpd="sng" algn="ctr">
+          <a:solidFill>
+            <a:schemeClr val="phClr"/>
+          </a:solidFill>
+          <a:prstDash val="solid"/>
+          <a:miter lim="800000"/>
+        </a:ln>
+      </a:lnStyleLst>
+      <a:effectStyleLst>
+        <a:effectStyle>
+          <a:effectLst/>
+        </a:effectStyle>
+        <a:effectStyle>
+          <a:effectLst/>
+        </a:effectStyle>
+        <a:effectStyle>
+          <a:effectLst>
+            <a:outerShdw blurRad="57150" dist="19050" dir="5400000" algn="ctr" rotWithShape="0">
+              <a:srgbClr val="000000">
+                <a:alpha val="63000"/>
+              </a:srgbClr>
+            </a:outerShdw>
+          </a:effectLst>
+        </a:effectStyle>
+      </a:effectStyleLst>
+      <a:bgFillStyleLst>
+        <a:solidFill>
+          <a:schemeClr val="phClr"/>
+        </a:solidFill>
+        <a:solidFill>
+          <a:schemeClr val="phClr">
+            <a:tint val="95000"/>
+            <a:satMod val="170000"/>
+          </a:schemeClr>
+        </a:solidFill>
+        <a:gradFill rotWithShape="1">
+          <a:gsLst>
+            <a:gs pos="0">
+              <a:schemeClr val="phClr">
+                <a:tint val="93000"/>
+                <a:satMod val="150000"/>
+                <a:shade val="98000"/>
+                <a:lumMod val="102000"/>
+              </a:schemeClr>
+            </a:gs>
+            <a:gs pos="50000">
+              <a:schemeClr val="phClr">
+                <a:tint val="98000"/>
+                <a:satMod val="130000"/>
+                <a:shade val="90000"/>
+                <a:lumMod val="103000"/>
+              </a:schemeClr>
+            </a:gs>
+            <a:gs pos="100000">
+              <a:schemeClr val="phClr">
+                <a:shade val="63000"/>
+                <a:satMod val="120000"/>
+              </a:schemeClr>
+            </a:gs>
+          </a:gsLst>
+          <a:lin ang="5400000" scaled="0"/>
+        </a:gradFill>
+      </a:bgFillStyleLst>
+    </a:fmtScheme>
+  </a:themeElements>
+  <a:objectDefaults>
+    <a:lnDef>
+      <a:spPr/>
+      <a:bodyPr/>
+      <a:lstStyle/>
+      <a:style>
+        <a:lnRef idx="2">
+          <a:schemeClr val="accent1"/>
+        </a:lnRef>
+        <a:fillRef idx="0">
+          <a:schemeClr val="accent1"/>
+        </a:fillRef>
+        <a:effectRef idx="1">
+          <a:schemeClr val="accent1"/>
+        </a:effectRef>
+        <a:fontRef idx="minor">
+          <a:schemeClr val="tx1"/>
+        </a:fontRef>
+      </a:style>
+    </a:lnDef>
+  </a:objectDefaults>
+  <a:extraClrSchemeLst/>
+  <a:extLst>
+    <a:ext uri="{05A4C25C-085E-4340-85A3-A5531E510DB2}">
+      <thm15:themeFamily xmlns:thm15="http://schemas.microsoft.com/office/thememl/2012/main" name="Office Theme" id="{2E142A2C-CD16-42D6-873A-C26D2A0506FA}" vid="{1BDDFF52-6CD6-40A5-AB3C-68EB2F1E4D0A}"/>
+    </a:ext>
+  </a:extLst>
+</a:theme>
 </file>
--- a/slides/Optimizing Memory Layouts and Traversal Orders in High-Performance Computing.pptx
+++ b/slides/Optimizing Memory Layouts and Traversal Orders in High-Performance Computing.pptx
@@ -5,20 +5,22 @@
     <p:sldMasterId id="2147483648" r:id="rId1"/>
   </p:sldMasterIdLst>
   <p:notesMasterIdLst>
-    <p:notesMasterId r:id="rId13"/>
+    <p:notesMasterId r:id="rId15"/>
   </p:notesMasterIdLst>
   <p:sldIdLst>
     <p:sldId id="256" r:id="rId2"/>
-    <p:sldId id="267" r:id="rId3"/>
-    <p:sldId id="265" r:id="rId4"/>
-    <p:sldId id="263" r:id="rId5"/>
-    <p:sldId id="264" r:id="rId6"/>
-    <p:sldId id="258" r:id="rId7"/>
-    <p:sldId id="259" r:id="rId8"/>
-    <p:sldId id="260" r:id="rId9"/>
-    <p:sldId id="266" r:id="rId10"/>
-    <p:sldId id="261" r:id="rId11"/>
-    <p:sldId id="262" r:id="rId12"/>
+    <p:sldId id="268" r:id="rId3"/>
+    <p:sldId id="269" r:id="rId4"/>
+    <p:sldId id="270" r:id="rId5"/>
+    <p:sldId id="265" r:id="rId6"/>
+    <p:sldId id="263" r:id="rId7"/>
+    <p:sldId id="264" r:id="rId8"/>
+    <p:sldId id="258" r:id="rId9"/>
+    <p:sldId id="259" r:id="rId10"/>
+    <p:sldId id="260" r:id="rId11"/>
+    <p:sldId id="266" r:id="rId12"/>
+    <p:sldId id="261" r:id="rId13"/>
+    <p:sldId id="262" r:id="rId14"/>
   </p:sldIdLst>
   <p:sldSz cx="12192000" cy="6858000"/>
   <p:notesSz cx="6858000" cy="9144000"/>
@@ -123,7 +125,9 @@
         <p14:section name="Default Section" id="{293DA01B-4D9B-48A0-906B-75ADFA7BB1A7}">
           <p14:sldIdLst>
             <p14:sldId id="256"/>
-            <p14:sldId id="267"/>
+            <p14:sldId id="268"/>
+            <p14:sldId id="269"/>
+            <p14:sldId id="270"/>
             <p14:sldId id="265"/>
             <p14:sldId id="263"/>
             <p14:sldId id="264"/>
@@ -246,7 +250,7 @@
           <a:p>
             <a:fld id="{34A5C982-A1C5-4AC2-B4BF-466515DA1494}" type="datetimeFigureOut">
               <a:rPr lang="en-US" smtClean="0"/>
-              <a:t>8/20/2026</a:t>
+              <a:t>8/21/2026</a:t>
             </a:fld>
             <a:endParaRPr lang="en-US"/>
           </a:p>
@@ -578,7 +582,7 @@
           <a:p>
             <a:fld id="{FA8FD632-245B-410D-BCC4-8BF8D37AB67F}" type="slidenum">
               <a:rPr lang="en-US" smtClean="0"/>
-              <a:t>3</a:t>
+              <a:t>5</a:t>
             </a:fld>
             <a:endParaRPr lang="en-US"/>
           </a:p>
@@ -744,7 +748,7 @@
           <a:p>
             <a:fld id="{93F57E82-5604-4F8C-BCFA-F7C026884391}" type="datetimeFigureOut">
               <a:rPr lang="en-US" smtClean="0"/>
-              <a:t>8/20/2026</a:t>
+              <a:t>8/21/2026</a:t>
             </a:fld>
             <a:endParaRPr lang="en-US"/>
           </a:p>
@@ -942,7 +946,7 @@
           <a:p>
             <a:fld id="{93F57E82-5604-4F8C-BCFA-F7C026884391}" type="datetimeFigureOut">
               <a:rPr lang="en-US" smtClean="0"/>
-              <a:t>8/20/2026</a:t>
+              <a:t>8/21/2026</a:t>
             </a:fld>
             <a:endParaRPr lang="en-US"/>
           </a:p>
@@ -1150,7 +1154,7 @@
           <a:p>
             <a:fld id="{93F57E82-5604-4F8C-BCFA-F7C026884391}" type="datetimeFigureOut">
               <a:rPr lang="en-US" smtClean="0"/>
-              <a:t>8/20/2026</a:t>
+              <a:t>8/21/2026</a:t>
             </a:fld>
             <a:endParaRPr lang="en-US"/>
           </a:p>
@@ -1348,7 +1352,7 @@
           <a:p>
             <a:fld id="{93F57E82-5604-4F8C-BCFA-F7C026884391}" type="datetimeFigureOut">
               <a:rPr lang="en-US" smtClean="0"/>
-              <a:t>8/20/2026</a:t>
+              <a:t>8/21/2026</a:t>
             </a:fld>
             <a:endParaRPr lang="en-US"/>
           </a:p>
@@ -1623,7 +1627,7 @@
           <a:p>
             <a:fld id="{93F57E82-5604-4F8C-BCFA-F7C026884391}" type="datetimeFigureOut">
               <a:rPr lang="en-US" smtClean="0"/>
-              <a:t>8/20/2026</a:t>
+              <a:t>8/21/2026</a:t>
             </a:fld>
             <a:endParaRPr lang="en-US"/>
           </a:p>
@@ -1888,7 +1892,7 @@
           <a:p>
             <a:fld id="{93F57E82-5604-4F8C-BCFA-F7C026884391}" type="datetimeFigureOut">
               <a:rPr lang="en-US" smtClean="0"/>
-              <a:t>8/20/2026</a:t>
+              <a:t>8/21/2026</a:t>
             </a:fld>
             <a:endParaRPr lang="en-US"/>
           </a:p>
@@ -2300,7 +2304,7 @@
           <a:p>
             <a:fld id="{93F57E82-5604-4F8C-BCFA-F7C026884391}" type="datetimeFigureOut">
               <a:rPr lang="en-US" smtClean="0"/>
-              <a:t>8/20/2026</a:t>
+              <a:t>8/21/2026</a:t>
             </a:fld>
             <a:endParaRPr lang="en-US"/>
           </a:p>
@@ -2441,7 +2445,7 @@
           <a:p>
             <a:fld id="{93F57E82-5604-4F8C-BCFA-F7C026884391}" type="datetimeFigureOut">
               <a:rPr lang="en-US" smtClean="0"/>
-              <a:t>8/20/2026</a:t>
+              <a:t>8/21/2026</a:t>
             </a:fld>
             <a:endParaRPr lang="en-US"/>
           </a:p>
@@ -2554,7 +2558,7 @@
           <a:p>
             <a:fld id="{93F57E82-5604-4F8C-BCFA-F7C026884391}" type="datetimeFigureOut">
               <a:rPr lang="en-US" smtClean="0"/>
-              <a:t>8/20/2026</a:t>
+              <a:t>8/21/2026</a:t>
             </a:fld>
             <a:endParaRPr lang="en-US"/>
           </a:p>
@@ -2865,7 +2869,7 @@
           <a:p>
             <a:fld id="{93F57E82-5604-4F8C-BCFA-F7C026884391}" type="datetimeFigureOut">
               <a:rPr lang="en-US" smtClean="0"/>
-              <a:t>8/20/2026</a:t>
+              <a:t>8/21/2026</a:t>
             </a:fld>
             <a:endParaRPr lang="en-US"/>
           </a:p>
@@ -3153,7 +3157,7 @@
           <a:p>
             <a:fld id="{93F57E82-5604-4F8C-BCFA-F7C026884391}" type="datetimeFigureOut">
               <a:rPr lang="en-US" smtClean="0"/>
-              <a:t>8/20/2026</a:t>
+              <a:t>8/21/2026</a:t>
             </a:fld>
             <a:endParaRPr lang="en-US"/>
           </a:p>
@@ -3394,7 +3398,7 @@
           <a:p>
             <a:fld id="{93F57E82-5604-4F8C-BCFA-F7C026884391}" type="datetimeFigureOut">
               <a:rPr lang="en-US" smtClean="0"/>
-              <a:t>8/20/2026</a:t>
+              <a:t>8/21/2026</a:t>
             </a:fld>
             <a:endParaRPr lang="en-US"/>
           </a:p>
@@ -3915,6 +3919,699 @@
           <p:cNvPr id="2" name="Title 1">
             <a:extLst>
               <a:ext uri="{FF2B5EF4-FFF2-40B4-BE49-F238E27FC236}">
+                <a16:creationId xmlns:a16="http://schemas.microsoft.com/office/drawing/2014/main" id="{928BD501-0287-7E9D-6C52-A86B98F9EB52}"/>
+              </a:ext>
+            </a:extLst>
+          </p:cNvPr>
+          <p:cNvSpPr>
+            <a:spLocks noGrp="1"/>
+          </p:cNvSpPr>
+          <p:nvPr>
+            <p:ph type="title"/>
+          </p:nvPr>
+        </p:nvSpPr>
+        <p:spPr/>
+        <p:txBody>
+          <a:bodyPr/>
+          <a:lstStyle/>
+          <a:p>
+            <a:r>
+              <a:rPr lang="en-US" dirty="0" err="1"/>
+              <a:t>Zahodit</a:t>
+            </a:r>
+            <a:endParaRPr lang="en-US" dirty="0"/>
+          </a:p>
+        </p:txBody>
+      </p:sp>
+      <p:sp>
+        <p:nvSpPr>
+          <p:cNvPr id="3" name="Content Placeholder 2">
+            <a:extLst>
+              <a:ext uri="{FF2B5EF4-FFF2-40B4-BE49-F238E27FC236}">
+                <a16:creationId xmlns:a16="http://schemas.microsoft.com/office/drawing/2014/main" id="{369E5D67-EA03-A5CA-2D82-199F178CE89C}"/>
+              </a:ext>
+            </a:extLst>
+          </p:cNvPr>
+          <p:cNvSpPr>
+            <a:spLocks noGrp="1"/>
+          </p:cNvSpPr>
+          <p:nvPr>
+            <p:ph idx="1"/>
+          </p:nvPr>
+        </p:nvSpPr>
+        <p:spPr/>
+        <p:txBody>
+          <a:bodyPr/>
+          <a:lstStyle/>
+          <a:p>
+            <a:r>
+              <a:rPr lang="en-US" dirty="0" err="1"/>
+              <a:t>Noarr</a:t>
+            </a:r>
+            <a:endParaRPr lang="en-US" dirty="0"/>
+          </a:p>
+          <a:p>
+            <a:r>
+              <a:rPr lang="en-US" dirty="0" err="1"/>
+              <a:t>Cellato</a:t>
+            </a:r>
+            <a:endParaRPr lang="en-US" dirty="0"/>
+          </a:p>
+        </p:txBody>
+      </p:sp>
+    </p:spTree>
+    <p:extLst>
+      <p:ext uri="{BB962C8B-B14F-4D97-AF65-F5344CB8AC3E}">
+        <p14:creationId xmlns:p14="http://schemas.microsoft.com/office/powerpoint/2010/main" val="4085122203"/>
+      </p:ext>
+    </p:extLst>
+  </p:cSld>
+  <p:clrMapOvr>
+    <a:masterClrMapping/>
+  </p:clrMapOvr>
+</p:sld>
+</file>
+
+<file path=ppt/slides/slide11.xml><?xml version="1.0" encoding="utf-8"?>
+<p:sld xmlns:a="http://schemas.openxmlformats.org/drawingml/2006/main" xmlns:r="http://schemas.openxmlformats.org/officeDocument/2006/relationships" xmlns:p="http://schemas.openxmlformats.org/presentationml/2006/main">
+  <p:cSld>
+    <p:spTree>
+      <p:nvGrpSpPr>
+        <p:cNvPr id="1" name=""/>
+        <p:cNvGrpSpPr/>
+        <p:nvPr/>
+      </p:nvGrpSpPr>
+      <p:grpSpPr>
+        <a:xfrm>
+          <a:off x="0" y="0"/>
+          <a:ext cx="0" cy="0"/>
+          <a:chOff x="0" y="0"/>
+          <a:chExt cx="0" cy="0"/>
+        </a:xfrm>
+      </p:grpSpPr>
+      <p:sp>
+        <p:nvSpPr>
+          <p:cNvPr id="2" name="Title 1">
+            <a:extLst>
+              <a:ext uri="{FF2B5EF4-FFF2-40B4-BE49-F238E27FC236}">
+                <a16:creationId xmlns:a16="http://schemas.microsoft.com/office/drawing/2014/main" id="{6447B745-9B50-DD90-5161-BD2A06CEA44B}"/>
+              </a:ext>
+            </a:extLst>
+          </p:cNvPr>
+          <p:cNvSpPr>
+            <a:spLocks noGrp="1"/>
+          </p:cNvSpPr>
+          <p:nvPr>
+            <p:ph type="title"/>
+          </p:nvPr>
+        </p:nvSpPr>
+        <p:spPr/>
+        <p:txBody>
+          <a:bodyPr/>
+          <a:lstStyle/>
+          <a:p>
+            <a:r>
+              <a:rPr lang="en-US" dirty="0"/>
+              <a:t>Contribution map</a:t>
+            </a:r>
+          </a:p>
+        </p:txBody>
+      </p:sp>
+      <p:sp>
+        <p:nvSpPr>
+          <p:cNvPr id="5" name="Rectangle 4">
+            <a:extLst>
+              <a:ext uri="{FF2B5EF4-FFF2-40B4-BE49-F238E27FC236}">
+                <a16:creationId xmlns:a16="http://schemas.microsoft.com/office/drawing/2014/main" id="{CB7F8197-FC2F-9C2A-050C-CCCB46D86C79}"/>
+              </a:ext>
+            </a:extLst>
+          </p:cNvPr>
+          <p:cNvSpPr/>
+          <p:nvPr/>
+        </p:nvSpPr>
+        <p:spPr>
+          <a:xfrm>
+            <a:off x="4240490" y="1406732"/>
+            <a:ext cx="3711020" cy="914400"/>
+          </a:xfrm>
+          <a:prstGeom prst="rect">
+            <a:avLst/>
+          </a:prstGeom>
+        </p:spPr>
+        <p:style>
+          <a:lnRef idx="2">
+            <a:schemeClr val="accent1">
+              <a:shade val="15000"/>
+            </a:schemeClr>
+          </a:lnRef>
+          <a:fillRef idx="1">
+            <a:schemeClr val="accent1"/>
+          </a:fillRef>
+          <a:effectRef idx="0">
+            <a:schemeClr val="accent1"/>
+          </a:effectRef>
+          <a:fontRef idx="minor">
+            <a:schemeClr val="lt1"/>
+          </a:fontRef>
+        </p:style>
+        <p:txBody>
+          <a:bodyPr rtlCol="0" anchor="ctr"/>
+          <a:lstStyle/>
+          <a:p>
+            <a:pPr algn="ctr"/>
+            <a:r>
+              <a:rPr lang="en-US" dirty="0"/>
+              <a:t>Separate algorithm design from performance optimization</a:t>
+            </a:r>
+          </a:p>
+        </p:txBody>
+      </p:sp>
+      <p:sp>
+        <p:nvSpPr>
+          <p:cNvPr id="7" name="Rectangle 6">
+            <a:extLst>
+              <a:ext uri="{FF2B5EF4-FFF2-40B4-BE49-F238E27FC236}">
+                <a16:creationId xmlns:a16="http://schemas.microsoft.com/office/drawing/2014/main" id="{60EC2A1A-B720-84BC-76D5-4751C09EA61A}"/>
+              </a:ext>
+            </a:extLst>
+          </p:cNvPr>
+          <p:cNvSpPr/>
+          <p:nvPr/>
+        </p:nvSpPr>
+        <p:spPr>
+          <a:xfrm>
+            <a:off x="150074" y="2971800"/>
+            <a:ext cx="3711020" cy="914400"/>
+          </a:xfrm>
+          <a:prstGeom prst="rect">
+            <a:avLst/>
+          </a:prstGeom>
+        </p:spPr>
+        <p:style>
+          <a:lnRef idx="2">
+            <a:schemeClr val="accent1">
+              <a:shade val="15000"/>
+            </a:schemeClr>
+          </a:lnRef>
+          <a:fillRef idx="1">
+            <a:schemeClr val="accent1"/>
+          </a:fillRef>
+          <a:effectRef idx="0">
+            <a:schemeClr val="accent1"/>
+          </a:effectRef>
+          <a:fontRef idx="minor">
+            <a:schemeClr val="lt1"/>
+          </a:fontRef>
+        </p:style>
+        <p:txBody>
+          <a:bodyPr rtlCol="0" anchor="ctr"/>
+          <a:lstStyle/>
+          <a:p>
+            <a:pPr algn="ctr"/>
+            <a:r>
+              <a:rPr lang="en-US" dirty="0"/>
+              <a:t>Layout- and traversal-agnostic abstractions</a:t>
+            </a:r>
+          </a:p>
+        </p:txBody>
+      </p:sp>
+      <p:sp>
+        <p:nvSpPr>
+          <p:cNvPr id="9" name="Rectangle 8">
+            <a:extLst>
+              <a:ext uri="{FF2B5EF4-FFF2-40B4-BE49-F238E27FC236}">
+                <a16:creationId xmlns:a16="http://schemas.microsoft.com/office/drawing/2014/main" id="{6DB7F776-4EDC-09F4-F04A-E586FC4B4500}"/>
+              </a:ext>
+            </a:extLst>
+          </p:cNvPr>
+          <p:cNvSpPr/>
+          <p:nvPr/>
+        </p:nvSpPr>
+        <p:spPr>
+          <a:xfrm>
+            <a:off x="7840178" y="2971800"/>
+            <a:ext cx="3711020" cy="914400"/>
+          </a:xfrm>
+          <a:prstGeom prst="rect">
+            <a:avLst/>
+          </a:prstGeom>
+        </p:spPr>
+        <p:style>
+          <a:lnRef idx="2">
+            <a:schemeClr val="accent1">
+              <a:shade val="15000"/>
+            </a:schemeClr>
+          </a:lnRef>
+          <a:fillRef idx="1">
+            <a:schemeClr val="accent1"/>
+          </a:fillRef>
+          <a:effectRef idx="0">
+            <a:schemeClr val="accent1"/>
+          </a:effectRef>
+          <a:fontRef idx="minor">
+            <a:schemeClr val="lt1"/>
+          </a:fontRef>
+        </p:style>
+        <p:txBody>
+          <a:bodyPr rtlCol="0" anchor="ctr"/>
+          <a:lstStyle/>
+          <a:p>
+            <a:pPr algn="ctr"/>
+            <a:r>
+              <a:rPr lang="en-US" dirty="0"/>
+              <a:t>LLM-assisted optimization</a:t>
+            </a:r>
+          </a:p>
+        </p:txBody>
+      </p:sp>
+      <p:sp>
+        <p:nvSpPr>
+          <p:cNvPr id="11" name="Rectangle 10">
+            <a:extLst>
+              <a:ext uri="{FF2B5EF4-FFF2-40B4-BE49-F238E27FC236}">
+                <a16:creationId xmlns:a16="http://schemas.microsoft.com/office/drawing/2014/main" id="{5B2B9BCB-5805-C1F1-AF45-681B37E6B83E}"/>
+              </a:ext>
+            </a:extLst>
+          </p:cNvPr>
+          <p:cNvSpPr/>
+          <p:nvPr/>
+        </p:nvSpPr>
+        <p:spPr>
+          <a:xfrm>
+            <a:off x="150074" y="4252912"/>
+            <a:ext cx="3711020" cy="914400"/>
+          </a:xfrm>
+          <a:prstGeom prst="rect">
+            <a:avLst/>
+          </a:prstGeom>
+        </p:spPr>
+        <p:style>
+          <a:lnRef idx="2">
+            <a:schemeClr val="accent1">
+              <a:shade val="15000"/>
+            </a:schemeClr>
+          </a:lnRef>
+          <a:fillRef idx="1">
+            <a:schemeClr val="accent1"/>
+          </a:fillRef>
+          <a:effectRef idx="0">
+            <a:schemeClr val="accent1"/>
+          </a:effectRef>
+          <a:fontRef idx="minor">
+            <a:schemeClr val="lt1"/>
+          </a:fontRef>
+        </p:style>
+        <p:txBody>
+          <a:bodyPr rtlCol="0" anchor="ctr"/>
+          <a:lstStyle/>
+          <a:p>
+            <a:pPr algn="ctr"/>
+            <a:r>
+              <a:rPr lang="en-US" dirty="0"/>
+              <a:t>Layout abstractions</a:t>
+            </a:r>
+          </a:p>
+        </p:txBody>
+      </p:sp>
+      <p:sp>
+        <p:nvSpPr>
+          <p:cNvPr id="13" name="Rectangle 12">
+            <a:extLst>
+              <a:ext uri="{FF2B5EF4-FFF2-40B4-BE49-F238E27FC236}">
+                <a16:creationId xmlns:a16="http://schemas.microsoft.com/office/drawing/2014/main" id="{31388E94-1EEB-E24E-1923-AA250880AF84}"/>
+              </a:ext>
+            </a:extLst>
+          </p:cNvPr>
+          <p:cNvSpPr/>
+          <p:nvPr/>
+        </p:nvSpPr>
+        <p:spPr>
+          <a:xfrm>
+            <a:off x="4240490" y="4252912"/>
+            <a:ext cx="3711020" cy="914400"/>
+          </a:xfrm>
+          <a:prstGeom prst="rect">
+            <a:avLst/>
+          </a:prstGeom>
+        </p:spPr>
+        <p:style>
+          <a:lnRef idx="2">
+            <a:schemeClr val="accent1">
+              <a:shade val="15000"/>
+            </a:schemeClr>
+          </a:lnRef>
+          <a:fillRef idx="1">
+            <a:schemeClr val="accent1"/>
+          </a:fillRef>
+          <a:effectRef idx="0">
+            <a:schemeClr val="accent1"/>
+          </a:effectRef>
+          <a:fontRef idx="minor">
+            <a:schemeClr val="lt1"/>
+          </a:fontRef>
+        </p:style>
+        <p:txBody>
+          <a:bodyPr rtlCol="0" anchor="ctr"/>
+          <a:lstStyle/>
+          <a:p>
+            <a:pPr algn="ctr"/>
+            <a:r>
+              <a:rPr lang="en-US" dirty="0"/>
+              <a:t>Traversal abstractions</a:t>
+            </a:r>
+          </a:p>
+        </p:txBody>
+      </p:sp>
+      <p:sp>
+        <p:nvSpPr>
+          <p:cNvPr id="15" name="Rectangle 14">
+            <a:extLst>
+              <a:ext uri="{FF2B5EF4-FFF2-40B4-BE49-F238E27FC236}">
+                <a16:creationId xmlns:a16="http://schemas.microsoft.com/office/drawing/2014/main" id="{DE8920A4-4430-6757-E41A-9BA9578DC80D}"/>
+              </a:ext>
+            </a:extLst>
+          </p:cNvPr>
+          <p:cNvSpPr/>
+          <p:nvPr/>
+        </p:nvSpPr>
+        <p:spPr>
+          <a:xfrm>
+            <a:off x="8330906" y="4252912"/>
+            <a:ext cx="3711020" cy="914400"/>
+          </a:xfrm>
+          <a:prstGeom prst="rect">
+            <a:avLst/>
+          </a:prstGeom>
+        </p:spPr>
+        <p:style>
+          <a:lnRef idx="2">
+            <a:schemeClr val="accent1">
+              <a:shade val="15000"/>
+            </a:schemeClr>
+          </a:lnRef>
+          <a:fillRef idx="1">
+            <a:schemeClr val="accent1"/>
+          </a:fillRef>
+          <a:effectRef idx="0">
+            <a:schemeClr val="accent1"/>
+          </a:effectRef>
+          <a:fontRef idx="minor">
+            <a:schemeClr val="lt1"/>
+          </a:fontRef>
+        </p:style>
+        <p:txBody>
+          <a:bodyPr rtlCol="0" anchor="ctr"/>
+          <a:lstStyle/>
+          <a:p>
+            <a:pPr algn="ctr"/>
+            <a:r>
+              <a:rPr lang="en-US" dirty="0"/>
+              <a:t>Practical aspects</a:t>
+            </a:r>
+          </a:p>
+        </p:txBody>
+      </p:sp>
+      <p:sp>
+        <p:nvSpPr>
+          <p:cNvPr id="17" name="Rectangle 16">
+            <a:extLst>
+              <a:ext uri="{FF2B5EF4-FFF2-40B4-BE49-F238E27FC236}">
+                <a16:creationId xmlns:a16="http://schemas.microsoft.com/office/drawing/2014/main" id="{D01E75A2-333B-DF95-544C-0ACF1B88882C}"/>
+              </a:ext>
+            </a:extLst>
+          </p:cNvPr>
+          <p:cNvSpPr/>
+          <p:nvPr/>
+        </p:nvSpPr>
+        <p:spPr>
+          <a:xfrm>
+            <a:off x="302474" y="5356288"/>
+            <a:ext cx="3711020" cy="914400"/>
+          </a:xfrm>
+          <a:prstGeom prst="rect">
+            <a:avLst/>
+          </a:prstGeom>
+        </p:spPr>
+        <p:style>
+          <a:lnRef idx="2">
+            <a:schemeClr val="accent1">
+              <a:shade val="15000"/>
+            </a:schemeClr>
+          </a:lnRef>
+          <a:fillRef idx="1">
+            <a:schemeClr val="accent1"/>
+          </a:fillRef>
+          <a:effectRef idx="0">
+            <a:schemeClr val="accent1"/>
+          </a:effectRef>
+          <a:fontRef idx="minor">
+            <a:schemeClr val="lt1"/>
+          </a:fontRef>
+        </p:style>
+        <p:txBody>
+          <a:bodyPr rtlCol="0" anchor="ctr"/>
+          <a:lstStyle/>
+          <a:p>
+            <a:pPr algn="ctr"/>
+            <a:r>
+              <a:rPr lang="en-US" dirty="0"/>
+              <a:t>Noarr structures</a:t>
+            </a:r>
+          </a:p>
+        </p:txBody>
+      </p:sp>
+      <p:sp>
+        <p:nvSpPr>
+          <p:cNvPr id="19" name="Rectangle 18">
+            <a:extLst>
+              <a:ext uri="{FF2B5EF4-FFF2-40B4-BE49-F238E27FC236}">
+                <a16:creationId xmlns:a16="http://schemas.microsoft.com/office/drawing/2014/main" id="{67736357-2F90-D241-51F6-C03C797EFFC2}"/>
+              </a:ext>
+            </a:extLst>
+          </p:cNvPr>
+          <p:cNvSpPr/>
+          <p:nvPr/>
+        </p:nvSpPr>
+        <p:spPr>
+          <a:xfrm>
+            <a:off x="454874" y="5508688"/>
+            <a:ext cx="3711020" cy="914400"/>
+          </a:xfrm>
+          <a:prstGeom prst="rect">
+            <a:avLst/>
+          </a:prstGeom>
+        </p:spPr>
+        <p:style>
+          <a:lnRef idx="2">
+            <a:schemeClr val="accent1">
+              <a:shade val="15000"/>
+            </a:schemeClr>
+          </a:lnRef>
+          <a:fillRef idx="1">
+            <a:schemeClr val="accent1"/>
+          </a:fillRef>
+          <a:effectRef idx="0">
+            <a:schemeClr val="accent1"/>
+          </a:effectRef>
+          <a:fontRef idx="minor">
+            <a:schemeClr val="lt1"/>
+          </a:fontRef>
+        </p:style>
+        <p:txBody>
+          <a:bodyPr rtlCol="0" anchor="ctr"/>
+          <a:lstStyle/>
+          <a:p>
+            <a:pPr algn="ctr"/>
+            <a:r>
+              <a:rPr lang="en-US" dirty="0"/>
+              <a:t>Noarr traversers</a:t>
+            </a:r>
+          </a:p>
+        </p:txBody>
+      </p:sp>
+      <p:sp>
+        <p:nvSpPr>
+          <p:cNvPr id="21" name="Rectangle 20">
+            <a:extLst>
+              <a:ext uri="{FF2B5EF4-FFF2-40B4-BE49-F238E27FC236}">
+                <a16:creationId xmlns:a16="http://schemas.microsoft.com/office/drawing/2014/main" id="{9EC73339-8B3D-25F4-18D5-E5821CB7CE8B}"/>
+              </a:ext>
+            </a:extLst>
+          </p:cNvPr>
+          <p:cNvSpPr/>
+          <p:nvPr/>
+        </p:nvSpPr>
+        <p:spPr>
+          <a:xfrm>
+            <a:off x="607274" y="5661088"/>
+            <a:ext cx="3711020" cy="914400"/>
+          </a:xfrm>
+          <a:prstGeom prst="rect">
+            <a:avLst/>
+          </a:prstGeom>
+        </p:spPr>
+        <p:style>
+          <a:lnRef idx="2">
+            <a:schemeClr val="accent1">
+              <a:shade val="15000"/>
+            </a:schemeClr>
+          </a:lnRef>
+          <a:fillRef idx="1">
+            <a:schemeClr val="accent1"/>
+          </a:fillRef>
+          <a:effectRef idx="0">
+            <a:schemeClr val="accent1"/>
+          </a:effectRef>
+          <a:fontRef idx="minor">
+            <a:schemeClr val="lt1"/>
+          </a:fontRef>
+        </p:style>
+        <p:txBody>
+          <a:bodyPr rtlCol="0" anchor="ctr"/>
+          <a:lstStyle/>
+          <a:p>
+            <a:pPr algn="ctr"/>
+            <a:r>
+              <a:rPr lang="en-US" dirty="0"/>
+              <a:t>Noarr tuning</a:t>
+            </a:r>
+          </a:p>
+        </p:txBody>
+      </p:sp>
+      <p:sp>
+        <p:nvSpPr>
+          <p:cNvPr id="23" name="Rectangle 22">
+            <a:extLst>
+              <a:ext uri="{FF2B5EF4-FFF2-40B4-BE49-F238E27FC236}">
+                <a16:creationId xmlns:a16="http://schemas.microsoft.com/office/drawing/2014/main" id="{63EC4F51-D7C0-1DFC-E94E-75AE185B7CC1}"/>
+              </a:ext>
+            </a:extLst>
+          </p:cNvPr>
+          <p:cNvSpPr/>
+          <p:nvPr/>
+        </p:nvSpPr>
+        <p:spPr>
+          <a:xfrm>
+            <a:off x="759674" y="5813488"/>
+            <a:ext cx="3711020" cy="914400"/>
+          </a:xfrm>
+          <a:prstGeom prst="rect">
+            <a:avLst/>
+          </a:prstGeom>
+        </p:spPr>
+        <p:style>
+          <a:lnRef idx="2">
+            <a:schemeClr val="accent1">
+              <a:shade val="15000"/>
+            </a:schemeClr>
+          </a:lnRef>
+          <a:fillRef idx="1">
+            <a:schemeClr val="accent1"/>
+          </a:fillRef>
+          <a:effectRef idx="0">
+            <a:schemeClr val="accent1"/>
+          </a:effectRef>
+          <a:fontRef idx="minor">
+            <a:schemeClr val="lt1"/>
+          </a:fontRef>
+        </p:style>
+        <p:txBody>
+          <a:bodyPr rtlCol="0" anchor="ctr"/>
+          <a:lstStyle/>
+          <a:p>
+            <a:pPr algn="ctr"/>
+            <a:r>
+              <a:rPr lang="en-US" dirty="0"/>
+              <a:t>Noarr-MPI</a:t>
+            </a:r>
+          </a:p>
+        </p:txBody>
+      </p:sp>
+      <p:sp>
+        <p:nvSpPr>
+          <p:cNvPr id="25" name="Rectangle 24">
+            <a:extLst>
+              <a:ext uri="{FF2B5EF4-FFF2-40B4-BE49-F238E27FC236}">
+                <a16:creationId xmlns:a16="http://schemas.microsoft.com/office/drawing/2014/main" id="{B7D64168-E19F-C04D-293D-CB07E85D29DA}"/>
+              </a:ext>
+            </a:extLst>
+          </p:cNvPr>
+          <p:cNvSpPr/>
+          <p:nvPr/>
+        </p:nvSpPr>
+        <p:spPr>
+          <a:xfrm>
+            <a:off x="4853138" y="5424788"/>
+            <a:ext cx="3711020" cy="914400"/>
+          </a:xfrm>
+          <a:prstGeom prst="rect">
+            <a:avLst/>
+          </a:prstGeom>
+        </p:spPr>
+        <p:style>
+          <a:lnRef idx="2">
+            <a:schemeClr val="accent1">
+              <a:shade val="15000"/>
+            </a:schemeClr>
+          </a:lnRef>
+          <a:fillRef idx="1">
+            <a:schemeClr val="accent1"/>
+          </a:fillRef>
+          <a:effectRef idx="0">
+            <a:schemeClr val="accent1"/>
+          </a:effectRef>
+          <a:fontRef idx="minor">
+            <a:schemeClr val="lt1"/>
+          </a:fontRef>
+        </p:style>
+        <p:txBody>
+          <a:bodyPr rtlCol="0" anchor="ctr"/>
+          <a:lstStyle/>
+          <a:p>
+            <a:pPr algn="ctr"/>
+            <a:r>
+              <a:rPr lang="en-US" dirty="0" err="1"/>
+              <a:t>Cellato</a:t>
+            </a:r>
+            <a:endParaRPr lang="en-US" dirty="0"/>
+          </a:p>
+        </p:txBody>
+      </p:sp>
+    </p:spTree>
+    <p:extLst>
+      <p:ext uri="{BB962C8B-B14F-4D97-AF65-F5344CB8AC3E}">
+        <p14:creationId xmlns:p14="http://schemas.microsoft.com/office/powerpoint/2010/main" val="1745489699"/>
+      </p:ext>
+    </p:extLst>
+  </p:cSld>
+  <p:clrMapOvr>
+    <a:masterClrMapping/>
+  </p:clrMapOvr>
+</p:sld>
+</file>
+
+<file path=ppt/slides/slide12.xml><?xml version="1.0" encoding="utf-8"?>
+<p:sld xmlns:a="http://schemas.openxmlformats.org/drawingml/2006/main" xmlns:r="http://schemas.openxmlformats.org/officeDocument/2006/relationships" xmlns:p="http://schemas.openxmlformats.org/presentationml/2006/main">
+  <p:cSld>
+    <p:spTree>
+      <p:nvGrpSpPr>
+        <p:cNvPr id="1" name=""/>
+        <p:cNvGrpSpPr/>
+        <p:nvPr/>
+      </p:nvGrpSpPr>
+      <p:grpSpPr>
+        <a:xfrm>
+          <a:off x="0" y="0"/>
+          <a:ext cx="0" cy="0"/>
+          <a:chOff x="0" y="0"/>
+          <a:chExt cx="0" cy="0"/>
+        </a:xfrm>
+      </p:grpSpPr>
+      <p:sp>
+        <p:nvSpPr>
+          <p:cNvPr id="2" name="Title 1">
+            <a:extLst>
+              <a:ext uri="{FF2B5EF4-FFF2-40B4-BE49-F238E27FC236}">
                 <a16:creationId xmlns:a16="http://schemas.microsoft.com/office/drawing/2014/main" id="{63B07F39-5957-124B-D20D-4A155E0E07D1}"/>
               </a:ext>
             </a:extLst>
@@ -4006,7 +4703,7 @@
 </p:sld>
 </file>
 
-<file path=ppt/slides/slide11.xml><?xml version="1.0" encoding="utf-8"?>
+<file path=ppt/slides/slide13.xml><?xml version="1.0" encoding="utf-8"?>
 <p:sld xmlns:a="http://schemas.openxmlformats.org/drawingml/2006/main" xmlns:r="http://schemas.openxmlformats.org/officeDocument/2006/relationships" xmlns:p="http://schemas.openxmlformats.org/presentationml/2006/main">
   <p:cSld>
     <p:spTree>
@@ -4108,7 +4805,7 @@
           <p:cNvPr id="2" name="Title 1">
             <a:extLst>
               <a:ext uri="{FF2B5EF4-FFF2-40B4-BE49-F238E27FC236}">
-                <a16:creationId xmlns:a16="http://schemas.microsoft.com/office/drawing/2014/main" id="{CBF50859-03D1-3749-29C1-D1A71CA7DA81}"/>
+                <a16:creationId xmlns:a16="http://schemas.microsoft.com/office/drawing/2014/main" id="{71043B47-263E-C46D-0276-B63FF60C41E2}"/>
               </a:ext>
             </a:extLst>
           </p:cNvPr>
@@ -4124,73 +4821,263 @@
           <a:bodyPr/>
           <a:lstStyle/>
           <a:p>
+            <a:endParaRPr lang="en-US"/>
+          </a:p>
+        </p:txBody>
+      </p:sp>
+      <p:sp>
+        <p:nvSpPr>
+          <p:cNvPr id="3" name="Content Placeholder 2">
+            <a:extLst>
+              <a:ext uri="{FF2B5EF4-FFF2-40B4-BE49-F238E27FC236}">
+                <a16:creationId xmlns:a16="http://schemas.microsoft.com/office/drawing/2014/main" id="{AFF2A90F-7540-DC59-26EA-C4E197B07663}"/>
+              </a:ext>
+            </a:extLst>
+          </p:cNvPr>
+          <p:cNvSpPr>
+            <a:spLocks noGrp="1"/>
+          </p:cNvSpPr>
+          <p:nvPr>
+            <p:ph idx="1"/>
+          </p:nvPr>
+        </p:nvSpPr>
+        <p:spPr/>
+        <p:txBody>
+          <a:bodyPr>
+            <a:normAutofit lnSpcReduction="10000"/>
+          </a:bodyPr>
+          <a:lstStyle/>
+          <a:p>
+            <a:r>
+              <a:rPr lang="en-US" dirty="0">
+                <a:solidFill>
+                  <a:schemeClr val="accent3"/>
+                </a:solidFill>
+              </a:rPr>
+              <a:t>Data layout </a:t>
+            </a:r>
+            <a:r>
+              <a:rPr lang="en-US" dirty="0"/>
+              <a:t>(matrix - row/col major), </a:t>
+            </a:r>
+            <a:r>
+              <a:rPr lang="en-US" dirty="0">
+                <a:solidFill>
+                  <a:schemeClr val="accent3"/>
+                </a:solidFill>
+              </a:rPr>
+              <a:t>traversal order </a:t>
+            </a:r>
+            <a:r>
+              <a:rPr lang="en-US" dirty="0"/>
+              <a:t>(row/col-wise)</a:t>
+            </a:r>
+          </a:p>
+          <a:p>
+            <a:pPr lvl="1"/>
+            <a:r>
+              <a:rPr lang="en-US" dirty="0"/>
+              <a:t>This case: match = good; not match = not good </a:t>
+            </a:r>
+            <a:r>
+              <a:rPr lang="en-US" dirty="0">
+                <a:sym typeface="Wingdings" panose="05000000000000000000" pitchFamily="2" charset="2"/>
+              </a:rPr>
+              <a:t> idea</a:t>
+            </a:r>
+            <a:endParaRPr lang="en-US" dirty="0"/>
+          </a:p>
+          <a:p>
+            <a:pPr lvl="2"/>
+            <a:r>
+              <a:rPr lang="en-US" dirty="0">
+                <a:solidFill>
+                  <a:srgbClr val="FF0000"/>
+                </a:solidFill>
+              </a:rPr>
+              <a:t>Sometimes can change both </a:t>
+            </a:r>
+          </a:p>
+          <a:p>
+            <a:pPr lvl="1"/>
+            <a:r>
+              <a:rPr lang="en-US" dirty="0"/>
+              <a:t>Real use cases</a:t>
+            </a:r>
+          </a:p>
+          <a:p>
+            <a:pPr lvl="2"/>
+            <a:r>
+              <a:rPr lang="en-US" dirty="0"/>
+              <a:t>Algorithms more complex; </a:t>
+            </a:r>
             <a:r>
               <a:rPr lang="en-US" dirty="0" err="1"/>
-              <a:t>Automatizace</a:t>
-            </a:r>
-            <a:r>
-              <a:rPr lang="en-US" dirty="0"/>
-              <a:t> &amp; </a:t>
+              <a:t>eg</a:t>
+            </a:r>
+            <a:r>
+              <a:rPr lang="en-US" dirty="0"/>
+              <a:t>:</a:t>
+            </a:r>
+          </a:p>
+          <a:p>
+            <a:pPr lvl="3"/>
+            <a:r>
+              <a:rPr lang="en-US" dirty="0"/>
+              <a:t>Multiple data structures</a:t>
+            </a:r>
+          </a:p>
+          <a:p>
+            <a:pPr lvl="3"/>
+            <a:r>
+              <a:rPr lang="en-US" dirty="0"/>
+              <a:t>Traversals not simple perfect loop nests</a:t>
+            </a:r>
+          </a:p>
+          <a:p>
+            <a:pPr lvl="2"/>
+            <a:r>
+              <a:rPr lang="en-US" dirty="0"/>
+              <a:t>Hardware many features; </a:t>
             </a:r>
             <a:r>
               <a:rPr lang="en-US" dirty="0" err="1"/>
-              <a:t>zjednodusovani</a:t>
-            </a:r>
-            <a:br>
-              <a:rPr lang="en-US" dirty="0"/>
-            </a:br>
-            <a:r>
-              <a:rPr lang="en-US" dirty="0"/>
-              <a:t>(</a:t>
-            </a:r>
-            <a:r>
-              <a:rPr lang="en-US" dirty="0" err="1"/>
-              <a:t>separace</a:t>
-            </a:r>
-            <a:r>
-              <a:rPr lang="en-US" dirty="0"/>
-              <a:t> </a:t>
-            </a:r>
-            <a:r>
-              <a:rPr lang="en-US" dirty="0" err="1"/>
-              <a:t>concernu</a:t>
-            </a:r>
-            <a:r>
-              <a:rPr lang="en-US" dirty="0"/>
-              <a:t>)</a:t>
-            </a:r>
-          </a:p>
-        </p:txBody>
-      </p:sp>
-      <p:sp>
-        <p:nvSpPr>
-          <p:cNvPr id="3" name="Content Placeholder 2">
-            <a:extLst>
-              <a:ext uri="{FF2B5EF4-FFF2-40B4-BE49-F238E27FC236}">
-                <a16:creationId xmlns:a16="http://schemas.microsoft.com/office/drawing/2014/main" id="{36D19B1D-58F5-79C8-5802-D994DFE792E4}"/>
-              </a:ext>
-            </a:extLst>
-          </p:cNvPr>
-          <p:cNvSpPr>
-            <a:spLocks noGrp="1"/>
-          </p:cNvSpPr>
-          <p:nvPr>
-            <p:ph idx="1"/>
-          </p:nvPr>
-        </p:nvSpPr>
-        <p:spPr/>
-        <p:txBody>
-          <a:bodyPr/>
-          <a:lstStyle/>
-          <a:p>
-            <a:endParaRPr lang="en-US"/>
+              <a:t>eg</a:t>
+            </a:r>
+            <a:r>
+              <a:rPr lang="en-US" dirty="0"/>
+              <a:t>:</a:t>
+            </a:r>
+          </a:p>
+          <a:p>
+            <a:pPr lvl="3"/>
+            <a:r>
+              <a:rPr lang="en-US" dirty="0">
+                <a:solidFill>
+                  <a:schemeClr val="accent3"/>
+                </a:solidFill>
+              </a:rPr>
+              <a:t>Caches</a:t>
+            </a:r>
+            <a:r>
+              <a:rPr lang="en-US" dirty="0"/>
+              <a:t>, memory bandwidths/capacities, etc.</a:t>
+            </a:r>
+          </a:p>
+          <a:p>
+            <a:pPr lvl="3"/>
+            <a:r>
+              <a:rPr lang="en-US" dirty="0"/>
+              <a:t>Multiple proc. units</a:t>
+            </a:r>
+          </a:p>
+          <a:p>
+            <a:pPr lvl="2"/>
+            <a:r>
+              <a:rPr lang="en-US" dirty="0">
+                <a:solidFill>
+                  <a:schemeClr val="accent3"/>
+                </a:solidFill>
+              </a:rPr>
+              <a:t>More optimized </a:t>
+            </a:r>
+            <a:r>
+              <a:rPr lang="en-US" dirty="0">
+                <a:solidFill>
+                  <a:schemeClr val="accent3"/>
+                </a:solidFill>
+                <a:sym typeface="Wingdings" panose="05000000000000000000" pitchFamily="2" charset="2"/>
+              </a:rPr>
+              <a:t> more complex, less portable (each </a:t>
+            </a:r>
+            <a:r>
+              <a:rPr lang="en-US" dirty="0" err="1">
+                <a:solidFill>
+                  <a:schemeClr val="accent3"/>
+                </a:solidFill>
+                <a:sym typeface="Wingdings" panose="05000000000000000000" pitchFamily="2" charset="2"/>
+              </a:rPr>
+              <a:t>hwarch</a:t>
+            </a:r>
+            <a:r>
+              <a:rPr lang="en-US" dirty="0">
+                <a:solidFill>
+                  <a:schemeClr val="accent3"/>
+                </a:solidFill>
+                <a:sym typeface="Wingdings" panose="05000000000000000000" pitchFamily="2" charset="2"/>
+              </a:rPr>
+              <a:t> different decisions)</a:t>
+            </a:r>
+            <a:endParaRPr lang="en-US" dirty="0">
+              <a:solidFill>
+                <a:schemeClr val="accent3"/>
+              </a:solidFill>
+            </a:endParaRPr>
+          </a:p>
+          <a:p>
+            <a:pPr lvl="2"/>
+            <a:r>
+              <a:rPr lang="en-US" dirty="0">
+                <a:solidFill>
+                  <a:schemeClr val="accent3"/>
+                </a:solidFill>
+              </a:rPr>
+              <a:t>No analytical solutions – evidence: use of </a:t>
+            </a:r>
+            <a:r>
+              <a:rPr lang="en-US" dirty="0" err="1">
+                <a:solidFill>
+                  <a:schemeClr val="accent3"/>
+                </a:solidFill>
+              </a:rPr>
+              <a:t>pgo</a:t>
+            </a:r>
+            <a:r>
+              <a:rPr lang="en-US" dirty="0">
+                <a:solidFill>
+                  <a:schemeClr val="accent3"/>
+                </a:solidFill>
+              </a:rPr>
+              <a:t>, autotuning, </a:t>
+            </a:r>
+            <a:r>
+              <a:rPr lang="en-US" dirty="0" err="1">
+                <a:solidFill>
+                  <a:schemeClr val="accent3"/>
+                </a:solidFill>
+              </a:rPr>
+              <a:t>ev</a:t>
+            </a:r>
+            <a:r>
+              <a:rPr lang="en-US" dirty="0">
+                <a:solidFill>
+                  <a:schemeClr val="accent3"/>
+                </a:solidFill>
+              </a:rPr>
+              <a:t>. alg., etc.</a:t>
+            </a:r>
+          </a:p>
+          <a:p>
+            <a:pPr lvl="1"/>
+            <a:r>
+              <a:rPr lang="en-US" dirty="0">
+                <a:solidFill>
+                  <a:srgbClr val="FF0000"/>
+                </a:solidFill>
+              </a:rPr>
+              <a:t>Real-world data, dimensions ~~ semantic meaning (image x, y, channel)</a:t>
+            </a:r>
+          </a:p>
+          <a:p>
+            <a:pPr lvl="1"/>
+            <a:endParaRPr lang="en-US" dirty="0"/>
           </a:p>
         </p:txBody>
       </p:sp>
     </p:spTree>
     <p:extLst>
       <p:ext uri="{BB962C8B-B14F-4D97-AF65-F5344CB8AC3E}">
-        <p14:creationId xmlns:p14="http://schemas.microsoft.com/office/powerpoint/2010/main" val="1824864462"/>
+        <p14:creationId xmlns:p14="http://schemas.microsoft.com/office/powerpoint/2010/main" val="1814957213"/>
       </p:ext>
     </p:extLst>
   </p:cSld>
@@ -4205,13 +5092,7 @@
   <p:cSld>
     <p:spTree>
       <p:nvGrpSpPr>
-        <p:cNvPr id="1" name="">
-          <a:extLst>
-            <a:ext uri="{FF2B5EF4-FFF2-40B4-BE49-F238E27FC236}">
-              <a16:creationId xmlns:a16="http://schemas.microsoft.com/office/drawing/2014/main" id="{EFDF7620-7AA1-EF30-FDC7-27AAC7FFE5EE}"/>
-            </a:ext>
-          </a:extLst>
-        </p:cNvPr>
+        <p:cNvPr id="1" name=""/>
         <p:cNvGrpSpPr/>
         <p:nvPr/>
       </p:nvGrpSpPr>
@@ -4228,7 +5109,7 @@
           <p:cNvPr id="2" name="Title 1">
             <a:extLst>
               <a:ext uri="{FF2B5EF4-FFF2-40B4-BE49-F238E27FC236}">
-                <a16:creationId xmlns:a16="http://schemas.microsoft.com/office/drawing/2014/main" id="{F7C42AB4-1D66-61B5-41F3-D1C814D6D79F}"/>
+                <a16:creationId xmlns:a16="http://schemas.microsoft.com/office/drawing/2014/main" id="{9056C07C-65B7-F09E-1FC3-13A2803F54CE}"/>
               </a:ext>
             </a:extLst>
           </p:cNvPr>
@@ -4241,13 +5122,22 @@
         </p:nvSpPr>
         <p:spPr/>
         <p:txBody>
-          <a:bodyPr/>
-          <a:lstStyle/>
-          <a:p>
-            <a:r>
-              <a:rPr lang="en-US" dirty="0"/>
-              <a:t>M &amp; S</a:t>
-            </a:r>
+          <a:bodyPr>
+            <a:normAutofit/>
+          </a:bodyPr>
+          <a:lstStyle/>
+          <a:p>
+            <a:r>
+              <a:rPr lang="en-US" dirty="0"/>
+              <a:t>Automatization and simplification</a:t>
+            </a:r>
+            <a:endParaRPr lang="en-US" dirty="0">
+              <a:solidFill>
+                <a:schemeClr val="accent5">
+                  <a:lumMod val="75000"/>
+                </a:schemeClr>
+              </a:solidFill>
+            </a:endParaRPr>
           </a:p>
         </p:txBody>
       </p:sp>
@@ -4256,7 +5146,7 @@
           <p:cNvPr id="3" name="Content Placeholder 2">
             <a:extLst>
               <a:ext uri="{FF2B5EF4-FFF2-40B4-BE49-F238E27FC236}">
-                <a16:creationId xmlns:a16="http://schemas.microsoft.com/office/drawing/2014/main" id="{7FC71ADE-62E2-F5C5-38A6-5FA51E07F94E}"/>
+                <a16:creationId xmlns:a16="http://schemas.microsoft.com/office/drawing/2014/main" id="{E0A72CA4-DE0C-C168-CA4C-3E1D449376E7}"/>
               </a:ext>
             </a:extLst>
           </p:cNvPr>
@@ -4272,95 +5162,63 @@
           <a:bodyPr/>
           <a:lstStyle/>
           <a:p>
-            <a:r>
-              <a:rPr lang="en-US" dirty="0"/>
-              <a:t>Motivation: GPU &amp; Cluster computing</a:t>
+            <a:pPr marL="514350" indent="-514350">
+              <a:buFont typeface="+mj-lt"/>
+              <a:buAutoNum type="arabicPeriod"/>
+            </a:pPr>
+            <a:r>
+              <a:rPr lang="en-US" dirty="0"/>
+              <a:t>Abstraction with swappable building blocks</a:t>
             </a:r>
           </a:p>
           <a:p>
             <a:pPr lvl="1"/>
             <a:r>
               <a:rPr lang="en-US" dirty="0"/>
-              <a:t>Too many decisions, complex code (you don’t know) </a:t>
-            </a:r>
-            <a:r>
-              <a:rPr lang="en-US" dirty="0">
-                <a:sym typeface="Wingdings" panose="05000000000000000000" pitchFamily="2" charset="2"/>
-              </a:rPr>
-              <a:t> the problem, it is hard</a:t>
-            </a:r>
+              <a:t>Autotuning chooses the bb</a:t>
+            </a:r>
+          </a:p>
+          <a:p>
+            <a:pPr lvl="1"/>
+            <a:r>
+              <a:rPr lang="en-US" dirty="0"/>
+              <a:t>Layout-agnosticism; traversal-agnosticism</a:t>
+            </a:r>
+          </a:p>
+          <a:p>
+            <a:pPr marL="514350" indent="-514350">
+              <a:buFont typeface="+mj-lt"/>
+              <a:buAutoNum type="arabicPeriod"/>
+            </a:pPr>
+            <a:r>
+              <a:rPr lang="en-US" dirty="0"/>
+              <a:t>LLMs</a:t>
+            </a:r>
+          </a:p>
+          <a:p>
+            <a:pPr lvl="1"/>
+            <a:r>
+              <a:rPr lang="en-US" dirty="0"/>
+              <a:t>First phase: the API is fixed, AI can do the magic</a:t>
+            </a:r>
+          </a:p>
+          <a:p>
+            <a:pPr lvl="1"/>
+            <a:r>
+              <a:rPr lang="en-US" dirty="0"/>
+              <a:t>Second phase: how to improve the magic? Do the abstractions help?</a:t>
+            </a:r>
+          </a:p>
+          <a:p>
+            <a:pPr lvl="1"/>
             <a:endParaRPr lang="en-US" dirty="0"/>
-          </a:p>
-          <a:p>
-            <a:pPr lvl="2"/>
-            <a:r>
-              <a:rPr lang="en-US" dirty="0"/>
-              <a:t>layout options, traversal options, parallelization (Matice, </a:t>
-            </a:r>
-            <a:r>
-              <a:rPr lang="en-US" dirty="0" err="1"/>
-              <a:t>pruchod</a:t>
-            </a:r>
-            <a:r>
-              <a:rPr lang="en-US" dirty="0"/>
-              <a:t>; </a:t>
-            </a:r>
-            <a:r>
-              <a:rPr lang="en-US" dirty="0" err="1"/>
-              <a:t>nasobeni</a:t>
-            </a:r>
-            <a:r>
-              <a:rPr lang="en-US" dirty="0"/>
-              <a:t>?)</a:t>
-            </a:r>
-          </a:p>
-          <a:p>
-            <a:pPr lvl="2"/>
-            <a:r>
-              <a:rPr lang="en-US" dirty="0"/>
-              <a:t>parameters for the above (block sizes, …)</a:t>
-            </a:r>
-          </a:p>
-          <a:p>
-            <a:r>
-              <a:rPr lang="en-US" dirty="0"/>
-              <a:t>Our solution: Abstraction &amp; automatization </a:t>
-            </a:r>
-            <a:r>
-              <a:rPr lang="en-US" dirty="0">
-                <a:sym typeface="Wingdings" panose="05000000000000000000" pitchFamily="2" charset="2"/>
-              </a:rPr>
-              <a:t> we offer a solution</a:t>
-            </a:r>
-            <a:endParaRPr lang="en-US" dirty="0"/>
-          </a:p>
-          <a:p>
-            <a:pPr lvl="1"/>
-            <a:r>
-              <a:rPr lang="en-US" dirty="0"/>
-              <a:t>Separation of concerns, independent aspects</a:t>
-            </a:r>
-          </a:p>
-          <a:p>
-            <a:pPr lvl="1"/>
-            <a:r>
-              <a:rPr lang="en-US" dirty="0"/>
-              <a:t>Introducing layout-agnostic and traversal-agnostic algorithm design</a:t>
-            </a:r>
-          </a:p>
-          <a:p>
-            <a:pPr lvl="1"/>
-            <a:r>
-              <a:rPr lang="en-US" dirty="0"/>
-              <a:t>How the world is saved</a:t>
-            </a:r>
           </a:p>
         </p:txBody>
       </p:sp>
     </p:spTree>
     <p:extLst>
       <p:ext uri="{BB962C8B-B14F-4D97-AF65-F5344CB8AC3E}">
-        <p14:creationId xmlns:p14="http://schemas.microsoft.com/office/powerpoint/2010/main" val="1408920348"/>
+        <p14:creationId xmlns:p14="http://schemas.microsoft.com/office/powerpoint/2010/main" val="269399300"/>
       </p:ext>
     </p:extLst>
   </p:cSld>
@@ -4392,7 +5250,7 @@
           <p:cNvPr id="2" name="Title 1">
             <a:extLst>
               <a:ext uri="{FF2B5EF4-FFF2-40B4-BE49-F238E27FC236}">
-                <a16:creationId xmlns:a16="http://schemas.microsoft.com/office/drawing/2014/main" id="{BC500110-1A1D-46C5-865E-8C33FFF09E26}"/>
+                <a16:creationId xmlns:a16="http://schemas.microsoft.com/office/drawing/2014/main" id="{4B486C2A-DE9D-7966-AEFE-4393C57CF5AE}"/>
               </a:ext>
             </a:extLst>
           </p:cNvPr>
@@ -4410,7 +5268,7 @@
           <a:p>
             <a:r>
               <a:rPr lang="en-US" dirty="0"/>
-              <a:t>Layout-agnostic design</a:t>
+              <a:t>Small step: layout agnostic design</a:t>
             </a:r>
           </a:p>
         </p:txBody>
@@ -4420,7 +5278,7 @@
           <p:cNvPr id="3" name="Content Placeholder 2">
             <a:extLst>
               <a:ext uri="{FF2B5EF4-FFF2-40B4-BE49-F238E27FC236}">
-                <a16:creationId xmlns:a16="http://schemas.microsoft.com/office/drawing/2014/main" id="{BC98E21C-63B1-8313-A72D-D4A24D26FBA1}"/>
+                <a16:creationId xmlns:a16="http://schemas.microsoft.com/office/drawing/2014/main" id="{003AA056-645F-427D-52A3-1F81FFA685BA}"/>
               </a:ext>
             </a:extLst>
           </p:cNvPr>
@@ -4438,15 +5296,127 @@
           <a:p>
             <a:r>
               <a:rPr lang="en-US" dirty="0"/>
-              <a:t>Algorithm with explicit offset calculations × Algorithm with logical indices</a:t>
-            </a:r>
+              <a:t>For a fixed </a:t>
+            </a:r>
+            <a:r>
+              <a:rPr lang="en-US" dirty="0" err="1"/>
+              <a:t>algorithm+traversal</a:t>
+            </a:r>
+            <a:r>
+              <a:rPr lang="en-US" dirty="0"/>
+              <a:t>, allow different layouts</a:t>
+            </a:r>
+          </a:p>
+          <a:p>
+            <a:pPr lvl="1"/>
+            <a:r>
+              <a:rPr lang="en-US" dirty="0"/>
+              <a:t>Not entirely new idea: </a:t>
+            </a:r>
+            <a:r>
+              <a:rPr lang="en-US" dirty="0" err="1"/>
+              <a:t>Kokkoss</a:t>
+            </a:r>
+            <a:r>
+              <a:rPr lang="en-US" dirty="0"/>
+              <a:t>::View, </a:t>
+            </a:r>
+            <a:r>
+              <a:rPr lang="en-US" dirty="0" err="1"/>
+              <a:t>numpy.ndarray</a:t>
+            </a:r>
+            <a:r>
+              <a:rPr lang="en-US" dirty="0"/>
+              <a:t>, many others</a:t>
+            </a:r>
+          </a:p>
+          <a:p>
+            <a:r>
+              <a:rPr lang="en-US" dirty="0" err="1"/>
+              <a:t>Noarr</a:t>
+            </a:r>
+            <a:r>
+              <a:rPr lang="en-US" dirty="0"/>
+              <a:t> Structures</a:t>
+            </a:r>
+          </a:p>
+          <a:p>
+            <a:pPr lvl="1"/>
+            <a:r>
+              <a:rPr lang="en-US" dirty="0"/>
+              <a:t>Abstraction for building &amp; transforming layouts</a:t>
+            </a:r>
+          </a:p>
+          <a:p>
+            <a:pPr lvl="2"/>
+            <a:r>
+              <a:rPr lang="en-US" dirty="0"/>
+              <a:t>Separated from memory management</a:t>
+            </a:r>
+          </a:p>
+          <a:p>
+            <a:pPr lvl="1"/>
+            <a:r>
+              <a:rPr lang="en-US" dirty="0"/>
+              <a:t>Effortless static extents</a:t>
+            </a:r>
+          </a:p>
+          <a:p>
+            <a:pPr lvl="1"/>
+            <a:r>
+              <a:rPr lang="en-US" dirty="0"/>
+              <a:t>Based on functional composition algebra</a:t>
+            </a:r>
+          </a:p>
+          <a:p>
+            <a:pPr lvl="2"/>
+            <a:r>
+              <a:rPr lang="en-US" dirty="0"/>
+              <a:t>Unlike std::</a:t>
+            </a:r>
+            <a:r>
+              <a:rPr lang="en-US" dirty="0" err="1"/>
+              <a:t>mdspan</a:t>
+            </a:r>
+            <a:r>
+              <a:rPr lang="en-US" dirty="0"/>
+              <a:t> or </a:t>
+            </a:r>
+            <a:r>
+              <a:rPr lang="en-US" dirty="0" err="1"/>
+              <a:t>Kokkos</a:t>
+            </a:r>
+            <a:r>
+              <a:rPr lang="en-US" dirty="0"/>
+              <a:t>::View, others</a:t>
+            </a:r>
+          </a:p>
+          <a:p>
+            <a:pPr lvl="2"/>
+            <a:r>
+              <a:rPr lang="en-US" dirty="0"/>
+              <a:t>Later adopted by CUTLASS </a:t>
+            </a:r>
+            <a:r>
+              <a:rPr lang="en-US" dirty="0" err="1"/>
+              <a:t>CUTe</a:t>
+            </a:r>
+            <a:endParaRPr lang="en-US" dirty="0"/>
+          </a:p>
+          <a:p>
+            <a:pPr lvl="1"/>
+            <a:r>
+              <a:rPr lang="en-US"/>
+              <a:t>Named dimensions</a:t>
+            </a:r>
+            <a:endParaRPr lang="en-US" dirty="0"/>
           </a:p>
         </p:txBody>
       </p:sp>
     </p:spTree>
     <p:extLst>
       <p:ext uri="{BB962C8B-B14F-4D97-AF65-F5344CB8AC3E}">
-        <p14:creationId xmlns:p14="http://schemas.microsoft.com/office/powerpoint/2010/main" val="3503651732"/>
+        <p14:creationId xmlns:p14="http://schemas.microsoft.com/office/powerpoint/2010/main" val="3515881039"/>
       </p:ext>
     </p:extLst>
   </p:cSld>
@@ -4461,7 +5431,13 @@
   <p:cSld>
     <p:spTree>
       <p:nvGrpSpPr>
-        <p:cNvPr id="1" name=""/>
+        <p:cNvPr id="1" name="">
+          <a:extLst>
+            <a:ext uri="{FF2B5EF4-FFF2-40B4-BE49-F238E27FC236}">
+              <a16:creationId xmlns:a16="http://schemas.microsoft.com/office/drawing/2014/main" id="{EFDF7620-7AA1-EF30-FDC7-27AAC7FFE5EE}"/>
+            </a:ext>
+          </a:extLst>
+        </p:cNvPr>
         <p:cNvGrpSpPr/>
         <p:nvPr/>
       </p:nvGrpSpPr>
@@ -4478,7 +5454,7 @@
           <p:cNvPr id="2" name="Title 1">
             <a:extLst>
               <a:ext uri="{FF2B5EF4-FFF2-40B4-BE49-F238E27FC236}">
-                <a16:creationId xmlns:a16="http://schemas.microsoft.com/office/drawing/2014/main" id="{F794F90E-47C1-8163-3DF3-3F88A625B905}"/>
+                <a16:creationId xmlns:a16="http://schemas.microsoft.com/office/drawing/2014/main" id="{F7C42AB4-1D66-61B5-41F3-D1C814D6D79F}"/>
               </a:ext>
             </a:extLst>
           </p:cNvPr>
@@ -4496,7 +5472,7 @@
           <a:p>
             <a:r>
               <a:rPr lang="en-US" dirty="0"/>
-              <a:t>Traversal-agnostic design</a:t>
+              <a:t>M &amp; S</a:t>
             </a:r>
           </a:p>
         </p:txBody>
@@ -4506,7 +5482,7 @@
           <p:cNvPr id="3" name="Content Placeholder 2">
             <a:extLst>
               <a:ext uri="{FF2B5EF4-FFF2-40B4-BE49-F238E27FC236}">
-                <a16:creationId xmlns:a16="http://schemas.microsoft.com/office/drawing/2014/main" id="{3821D725-871B-DFB5-1476-7BE78B119576}"/>
+                <a16:creationId xmlns:a16="http://schemas.microsoft.com/office/drawing/2014/main" id="{7FC71ADE-62E2-F5C5-38A6-5FA51E07F94E}"/>
               </a:ext>
             </a:extLst>
           </p:cNvPr>
@@ -4524,7 +5500,85 @@
           <a:p>
             <a:r>
               <a:rPr lang="en-US" dirty="0"/>
-              <a:t>We can go even further</a:t>
+              <a:t>Motivation: GPU &amp; Cluster computing</a:t>
+            </a:r>
+          </a:p>
+          <a:p>
+            <a:pPr lvl="1"/>
+            <a:r>
+              <a:rPr lang="en-US" dirty="0"/>
+              <a:t>Too many decisions, complex code (you don’t know) </a:t>
+            </a:r>
+            <a:r>
+              <a:rPr lang="en-US" dirty="0">
+                <a:sym typeface="Wingdings" panose="05000000000000000000" pitchFamily="2" charset="2"/>
+              </a:rPr>
+              <a:t> the problem, it is hard</a:t>
+            </a:r>
+            <a:endParaRPr lang="en-US" dirty="0"/>
+          </a:p>
+          <a:p>
+            <a:pPr lvl="2"/>
+            <a:r>
+              <a:rPr lang="en-US" dirty="0"/>
+              <a:t>layout options, traversal options, parallelization (Matice, </a:t>
+            </a:r>
+            <a:r>
+              <a:rPr lang="en-US" dirty="0" err="1"/>
+              <a:t>pruchod</a:t>
+            </a:r>
+            <a:r>
+              <a:rPr lang="en-US" dirty="0"/>
+              <a:t>; </a:t>
+            </a:r>
+            <a:r>
+              <a:rPr lang="en-US" dirty="0" err="1"/>
+              <a:t>nasobeni</a:t>
+            </a:r>
+            <a:r>
+              <a:rPr lang="en-US" dirty="0"/>
+              <a:t>?)</a:t>
+            </a:r>
+          </a:p>
+          <a:p>
+            <a:pPr lvl="2"/>
+            <a:r>
+              <a:rPr lang="en-US" dirty="0"/>
+              <a:t>parameters for the above (block sizes, …)</a:t>
+            </a:r>
+          </a:p>
+          <a:p>
+            <a:r>
+              <a:rPr lang="en-US" dirty="0"/>
+              <a:t>Our solution: Abstraction &amp; automatization </a:t>
+            </a:r>
+            <a:r>
+              <a:rPr lang="en-US" dirty="0">
+                <a:sym typeface="Wingdings" panose="05000000000000000000" pitchFamily="2" charset="2"/>
+              </a:rPr>
+              <a:t> we offer a solution</a:t>
+            </a:r>
+            <a:endParaRPr lang="en-US" dirty="0"/>
+          </a:p>
+          <a:p>
+            <a:pPr lvl="1"/>
+            <a:r>
+              <a:rPr lang="en-US" dirty="0"/>
+              <a:t>Separation of concerns, independent aspects</a:t>
+            </a:r>
+          </a:p>
+          <a:p>
+            <a:pPr lvl="1"/>
+            <a:r>
+              <a:rPr lang="en-US" dirty="0"/>
+              <a:t>Introducing layout-agnostic and traversal-agnostic algorithm design</a:t>
+            </a:r>
+          </a:p>
+          <a:p>
+            <a:pPr lvl="1"/>
+            <a:r>
+              <a:rPr lang="en-US" dirty="0"/>
+              <a:t>How the world is saved</a:t>
             </a:r>
           </a:p>
         </p:txBody>
@@ -4532,7 +5586,7 @@
     </p:spTree>
     <p:extLst>
       <p:ext uri="{BB962C8B-B14F-4D97-AF65-F5344CB8AC3E}">
-        <p14:creationId xmlns:p14="http://schemas.microsoft.com/office/powerpoint/2010/main" val="3026343622"/>
+        <p14:creationId xmlns:p14="http://schemas.microsoft.com/office/powerpoint/2010/main" val="1408920348"/>
       </p:ext>
     </p:extLst>
   </p:cSld>
@@ -4564,7 +5618,7 @@
           <p:cNvPr id="2" name="Title 1">
             <a:extLst>
               <a:ext uri="{FF2B5EF4-FFF2-40B4-BE49-F238E27FC236}">
-                <a16:creationId xmlns:a16="http://schemas.microsoft.com/office/drawing/2014/main" id="{3844D8EA-565C-C8A0-F333-6EBD085AC735}"/>
+                <a16:creationId xmlns:a16="http://schemas.microsoft.com/office/drawing/2014/main" id="{BC500110-1A1D-46C5-865E-8C33FFF09E26}"/>
               </a:ext>
             </a:extLst>
           </p:cNvPr>
@@ -4582,7 +5636,7 @@
           <a:p>
             <a:r>
               <a:rPr lang="en-US" dirty="0"/>
-              <a:t>Proposed abstractions</a:t>
+              <a:t>Layout-agnostic design</a:t>
             </a:r>
           </a:p>
         </p:txBody>
@@ -4592,7 +5646,7 @@
           <p:cNvPr id="3" name="Content Placeholder 2">
             <a:extLst>
               <a:ext uri="{FF2B5EF4-FFF2-40B4-BE49-F238E27FC236}">
-                <a16:creationId xmlns:a16="http://schemas.microsoft.com/office/drawing/2014/main" id="{0B0BC514-DFF4-C541-7399-85275B2EB075}"/>
+                <a16:creationId xmlns:a16="http://schemas.microsoft.com/office/drawing/2014/main" id="{BC98E21C-63B1-8313-A72D-D4A24D26FBA1}"/>
               </a:ext>
             </a:extLst>
           </p:cNvPr>
@@ -4610,99 +5664,7 @@
           <a:p>
             <a:r>
               <a:rPr lang="en-US" dirty="0"/>
-              <a:t>Layout abstractions</a:t>
-            </a:r>
-          </a:p>
-          <a:p>
-            <a:r>
-              <a:rPr lang="en-US" dirty="0"/>
-              <a:t>Traversal abstractions</a:t>
-            </a:r>
-          </a:p>
-          <a:p>
-            <a:endParaRPr lang="en-US" dirty="0"/>
-          </a:p>
-          <a:p>
-            <a:r>
-              <a:rPr lang="en-US" dirty="0"/>
-              <a:t>Extensions</a:t>
-            </a:r>
-          </a:p>
-          <a:p>
-            <a:pPr lvl="1"/>
-            <a:r>
-              <a:rPr lang="en-US" dirty="0"/>
-              <a:t>? Practical aspects; </a:t>
-            </a:r>
-            <a:r>
-              <a:rPr lang="en-US" dirty="0">
-                <a:sym typeface="Wingdings" panose="05000000000000000000" pitchFamily="2" charset="2"/>
-              </a:rPr>
-              <a:t> autotuning</a:t>
-            </a:r>
-            <a:endParaRPr lang="en-US" dirty="0"/>
-          </a:p>
-          <a:p>
-            <a:pPr lvl="1"/>
-            <a:r>
-              <a:rPr lang="en-US" dirty="0"/>
-              <a:t>Distributed computing</a:t>
-            </a:r>
-          </a:p>
-          <a:p>
-            <a:endParaRPr lang="en-US" dirty="0"/>
-          </a:p>
-          <a:p>
-            <a:r>
-              <a:rPr lang="en-US" dirty="0"/>
-              <a:t>Knowledge </a:t>
-            </a:r>
-            <a:r>
-              <a:rPr lang="en-US" dirty="0" err="1"/>
-              <a:t>neco</a:t>
-            </a:r>
-            <a:r>
-              <a:rPr lang="en-US" dirty="0"/>
-              <a:t> (</a:t>
-            </a:r>
-            <a:r>
-              <a:rPr lang="en-US" dirty="0" err="1"/>
-              <a:t>metaprogramovani</a:t>
-            </a:r>
-            <a:r>
-              <a:rPr lang="en-US" dirty="0"/>
-              <a:t>, </a:t>
-            </a:r>
-            <a:r>
-              <a:rPr lang="en-US" dirty="0" err="1"/>
-              <a:t>stavebni</a:t>
-            </a:r>
-            <a:r>
-              <a:rPr lang="en-US" dirty="0"/>
-              <a:t> </a:t>
-            </a:r>
-            <a:r>
-              <a:rPr lang="en-US" dirty="0" err="1"/>
-              <a:t>bloky</a:t>
-            </a:r>
-            <a:r>
-              <a:rPr lang="en-US" dirty="0"/>
-              <a:t>, </a:t>
-            </a:r>
-            <a:r>
-              <a:rPr lang="en-US" dirty="0" err="1"/>
-              <a:t>traversery</a:t>
-            </a:r>
-            <a:r>
-              <a:rPr lang="en-US" dirty="0"/>
-              <a:t>?)</a:t>
-            </a:r>
-          </a:p>
-          <a:p>
-            <a:pPr lvl="1"/>
-            <a:r>
-              <a:rPr lang="en-US" dirty="0"/>
-              <a:t>CA computations (</a:t>
+              <a:t>Algorithm with explicit offset calculations × Algorithm with logical indices</a:t>
             </a:r>
           </a:p>
         </p:txBody>
@@ -4710,7 +5672,7 @@
     </p:spTree>
     <p:extLst>
       <p:ext uri="{BB962C8B-B14F-4D97-AF65-F5344CB8AC3E}">
-        <p14:creationId xmlns:p14="http://schemas.microsoft.com/office/powerpoint/2010/main" val="2195190930"/>
+        <p14:creationId xmlns:p14="http://schemas.microsoft.com/office/powerpoint/2010/main" val="3503651732"/>
       </p:ext>
     </p:extLst>
   </p:cSld>
@@ -4742,7 +5704,7 @@
           <p:cNvPr id="2" name="Title 1">
             <a:extLst>
               <a:ext uri="{FF2B5EF4-FFF2-40B4-BE49-F238E27FC236}">
-                <a16:creationId xmlns:a16="http://schemas.microsoft.com/office/drawing/2014/main" id="{1CFD8E19-FCBD-3C1F-9804-55F9EF315364}"/>
+                <a16:creationId xmlns:a16="http://schemas.microsoft.com/office/drawing/2014/main" id="{F794F90E-47C1-8163-3DF3-3F88A625B905}"/>
               </a:ext>
             </a:extLst>
           </p:cNvPr>
@@ -4760,7 +5722,7 @@
           <a:p>
             <a:r>
               <a:rPr lang="en-US" dirty="0"/>
-              <a:t>LLMs in algorithm design</a:t>
+              <a:t>Traversal-agnostic design</a:t>
             </a:r>
           </a:p>
         </p:txBody>
@@ -4770,7 +5732,7 @@
           <p:cNvPr id="3" name="Content Placeholder 2">
             <a:extLst>
               <a:ext uri="{FF2B5EF4-FFF2-40B4-BE49-F238E27FC236}">
-                <a16:creationId xmlns:a16="http://schemas.microsoft.com/office/drawing/2014/main" id="{64F2D09B-2F00-3457-9D41-D2EAB2BD84E5}"/>
+                <a16:creationId xmlns:a16="http://schemas.microsoft.com/office/drawing/2014/main" id="{3821D725-871B-DFB5-1476-7BE78B119576}"/>
               </a:ext>
             </a:extLst>
           </p:cNvPr>
@@ -4788,13 +5750,7 @@
           <a:p>
             <a:r>
               <a:rPr lang="en-US" dirty="0"/>
-              <a:t>Tutoring LLMs for CUDA optimization</a:t>
-            </a:r>
-          </a:p>
-          <a:p>
-            <a:r>
-              <a:rPr lang="en-US" dirty="0"/>
-              <a:t>LLMs and abstractions</a:t>
+              <a:t>We can go even further</a:t>
             </a:r>
           </a:p>
         </p:txBody>
@@ -4802,7 +5758,7 @@
     </p:spTree>
     <p:extLst>
       <p:ext uri="{BB962C8B-B14F-4D97-AF65-F5344CB8AC3E}">
-        <p14:creationId xmlns:p14="http://schemas.microsoft.com/office/powerpoint/2010/main" val="645810162"/>
+        <p14:creationId xmlns:p14="http://schemas.microsoft.com/office/powerpoint/2010/main" val="3026343622"/>
       </p:ext>
     </p:extLst>
   </p:cSld>
@@ -4834,7 +5790,7 @@
           <p:cNvPr id="2" name="Title 1">
             <a:extLst>
               <a:ext uri="{FF2B5EF4-FFF2-40B4-BE49-F238E27FC236}">
-                <a16:creationId xmlns:a16="http://schemas.microsoft.com/office/drawing/2014/main" id="{928BD501-0287-7E9D-6C52-A86B98F9EB52}"/>
+                <a16:creationId xmlns:a16="http://schemas.microsoft.com/office/drawing/2014/main" id="{3844D8EA-565C-C8A0-F333-6EBD085AC735}"/>
               </a:ext>
             </a:extLst>
           </p:cNvPr>
@@ -4851,53 +5807,136 @@
           <a:lstStyle/>
           <a:p>
             <a:r>
+              <a:rPr lang="en-US" dirty="0"/>
+              <a:t>Proposed abstractions</a:t>
+            </a:r>
+          </a:p>
+        </p:txBody>
+      </p:sp>
+      <p:sp>
+        <p:nvSpPr>
+          <p:cNvPr id="3" name="Content Placeholder 2">
+            <a:extLst>
+              <a:ext uri="{FF2B5EF4-FFF2-40B4-BE49-F238E27FC236}">
+                <a16:creationId xmlns:a16="http://schemas.microsoft.com/office/drawing/2014/main" id="{0B0BC514-DFF4-C541-7399-85275B2EB075}"/>
+              </a:ext>
+            </a:extLst>
+          </p:cNvPr>
+          <p:cNvSpPr>
+            <a:spLocks noGrp="1"/>
+          </p:cNvSpPr>
+          <p:nvPr>
+            <p:ph idx="1"/>
+          </p:nvPr>
+        </p:nvSpPr>
+        <p:spPr/>
+        <p:txBody>
+          <a:bodyPr/>
+          <a:lstStyle/>
+          <a:p>
+            <a:r>
+              <a:rPr lang="en-US" dirty="0"/>
+              <a:t>Layout abstractions</a:t>
+            </a:r>
+          </a:p>
+          <a:p>
+            <a:r>
+              <a:rPr lang="en-US" dirty="0"/>
+              <a:t>Traversal abstractions</a:t>
+            </a:r>
+          </a:p>
+          <a:p>
+            <a:endParaRPr lang="en-US" dirty="0"/>
+          </a:p>
+          <a:p>
+            <a:r>
+              <a:rPr lang="en-US" dirty="0"/>
+              <a:t>Extensions</a:t>
+            </a:r>
+          </a:p>
+          <a:p>
+            <a:pPr lvl="1"/>
+            <a:r>
+              <a:rPr lang="en-US" dirty="0"/>
+              <a:t>? Practical aspects; </a:t>
+            </a:r>
+            <a:r>
+              <a:rPr lang="en-US" dirty="0">
+                <a:sym typeface="Wingdings" panose="05000000000000000000" pitchFamily="2" charset="2"/>
+              </a:rPr>
+              <a:t> autotuning</a:t>
+            </a:r>
+            <a:endParaRPr lang="en-US" dirty="0"/>
+          </a:p>
+          <a:p>
+            <a:pPr lvl="1"/>
+            <a:r>
+              <a:rPr lang="en-US" dirty="0"/>
+              <a:t>Distributed computing</a:t>
+            </a:r>
+          </a:p>
+          <a:p>
+            <a:endParaRPr lang="en-US" dirty="0"/>
+          </a:p>
+          <a:p>
+            <a:r>
+              <a:rPr lang="en-US" dirty="0"/>
+              <a:t>Knowledge </a:t>
+            </a:r>
+            <a:r>
               <a:rPr lang="en-US" dirty="0" err="1"/>
-              <a:t>Zahodit</a:t>
-            </a:r>
-            <a:endParaRPr lang="en-US" dirty="0"/>
-          </a:p>
-        </p:txBody>
-      </p:sp>
-      <p:sp>
-        <p:nvSpPr>
-          <p:cNvPr id="3" name="Content Placeholder 2">
-            <a:extLst>
-              <a:ext uri="{FF2B5EF4-FFF2-40B4-BE49-F238E27FC236}">
-                <a16:creationId xmlns:a16="http://schemas.microsoft.com/office/drawing/2014/main" id="{369E5D67-EA03-A5CA-2D82-199F178CE89C}"/>
-              </a:ext>
-            </a:extLst>
-          </p:cNvPr>
-          <p:cNvSpPr>
-            <a:spLocks noGrp="1"/>
-          </p:cNvSpPr>
-          <p:nvPr>
-            <p:ph idx="1"/>
-          </p:nvPr>
-        </p:nvSpPr>
-        <p:spPr/>
-        <p:txBody>
-          <a:bodyPr/>
-          <a:lstStyle/>
-          <a:p>
+              <a:t>neco</a:t>
+            </a:r>
+            <a:r>
+              <a:rPr lang="en-US" dirty="0"/>
+              <a:t> (</a:t>
+            </a:r>
             <a:r>
               <a:rPr lang="en-US" dirty="0" err="1"/>
-              <a:t>Noarr</a:t>
-            </a:r>
-            <a:endParaRPr lang="en-US" dirty="0"/>
-          </a:p>
-          <a:p>
+              <a:t>metaprogramovani</a:t>
+            </a:r>
+            <a:r>
+              <a:rPr lang="en-US" dirty="0"/>
+              <a:t>, </a:t>
+            </a:r>
             <a:r>
               <a:rPr lang="en-US" dirty="0" err="1"/>
-              <a:t>Cellato</a:t>
-            </a:r>
-            <a:endParaRPr lang="en-US" dirty="0"/>
+              <a:t>stavebni</a:t>
+            </a:r>
+            <a:r>
+              <a:rPr lang="en-US" dirty="0"/>
+              <a:t> </a:t>
+            </a:r>
+            <a:r>
+              <a:rPr lang="en-US" dirty="0" err="1"/>
+              <a:t>bloky</a:t>
+            </a:r>
+            <a:r>
+              <a:rPr lang="en-US" dirty="0"/>
+              <a:t>, </a:t>
+            </a:r>
+            <a:r>
+              <a:rPr lang="en-US" dirty="0" err="1"/>
+              <a:t>traversery</a:t>
+            </a:r>
+            <a:r>
+              <a:rPr lang="en-US" dirty="0"/>
+              <a:t>?)</a:t>
+            </a:r>
+          </a:p>
+          <a:p>
+            <a:pPr lvl="1"/>
+            <a:r>
+              <a:rPr lang="en-US" dirty="0"/>
+              <a:t>CA computations (</a:t>
+            </a:r>
           </a:p>
         </p:txBody>
       </p:sp>
     </p:spTree>
     <p:extLst>
       <p:ext uri="{BB962C8B-B14F-4D97-AF65-F5344CB8AC3E}">
-        <p14:creationId xmlns:p14="http://schemas.microsoft.com/office/powerpoint/2010/main" val="4085122203"/>
+        <p14:creationId xmlns:p14="http://schemas.microsoft.com/office/powerpoint/2010/main" val="2195190930"/>
       </p:ext>
     </p:extLst>
   </p:cSld>
@@ -4929,7 +5968,7 @@
           <p:cNvPr id="2" name="Title 1">
             <a:extLst>
               <a:ext uri="{FF2B5EF4-FFF2-40B4-BE49-F238E27FC236}">
-                <a16:creationId xmlns:a16="http://schemas.microsoft.com/office/drawing/2014/main" id="{6447B745-9B50-DD90-5161-BD2A06CEA44B}"/>
+                <a16:creationId xmlns:a16="http://schemas.microsoft.com/office/drawing/2014/main" id="{1CFD8E19-FCBD-3C1F-9804-55F9EF315364}"/>
               </a:ext>
             </a:extLst>
           </p:cNvPr>
@@ -4947,555 +5986,49 @@
           <a:p>
             <a:r>
               <a:rPr lang="en-US" dirty="0"/>
-              <a:t>Contribution map</a:t>
-            </a:r>
-          </a:p>
-        </p:txBody>
-      </p:sp>
-      <p:sp>
-        <p:nvSpPr>
-          <p:cNvPr id="5" name="Rectangle 4">
-            <a:extLst>
-              <a:ext uri="{FF2B5EF4-FFF2-40B4-BE49-F238E27FC236}">
-                <a16:creationId xmlns:a16="http://schemas.microsoft.com/office/drawing/2014/main" id="{CB7F8197-FC2F-9C2A-050C-CCCB46D86C79}"/>
-              </a:ext>
-            </a:extLst>
-          </p:cNvPr>
-          <p:cNvSpPr/>
-          <p:nvPr/>
-        </p:nvSpPr>
-        <p:spPr>
-          <a:xfrm>
-            <a:off x="4240490" y="1406732"/>
-            <a:ext cx="3711020" cy="914400"/>
-          </a:xfrm>
-          <a:prstGeom prst="rect">
-            <a:avLst/>
-          </a:prstGeom>
-        </p:spPr>
-        <p:style>
-          <a:lnRef idx="2">
-            <a:schemeClr val="accent1">
-              <a:shade val="15000"/>
-            </a:schemeClr>
-          </a:lnRef>
-          <a:fillRef idx="1">
-            <a:schemeClr val="accent1"/>
-          </a:fillRef>
-          <a:effectRef idx="0">
-            <a:schemeClr val="accent1"/>
-          </a:effectRef>
-          <a:fontRef idx="minor">
-            <a:schemeClr val="lt1"/>
-          </a:fontRef>
-        </p:style>
-        <p:txBody>
-          <a:bodyPr rtlCol="0" anchor="ctr"/>
-          <a:lstStyle/>
-          <a:p>
-            <a:pPr algn="ctr"/>
-            <a:r>
-              <a:rPr lang="en-US" dirty="0"/>
-              <a:t>Separate algorithm design from performance optimization</a:t>
-            </a:r>
-          </a:p>
-        </p:txBody>
-      </p:sp>
-      <p:sp>
-        <p:nvSpPr>
-          <p:cNvPr id="7" name="Rectangle 6">
-            <a:extLst>
-              <a:ext uri="{FF2B5EF4-FFF2-40B4-BE49-F238E27FC236}">
-                <a16:creationId xmlns:a16="http://schemas.microsoft.com/office/drawing/2014/main" id="{60EC2A1A-B720-84BC-76D5-4751C09EA61A}"/>
-              </a:ext>
-            </a:extLst>
-          </p:cNvPr>
-          <p:cNvSpPr/>
-          <p:nvPr/>
-        </p:nvSpPr>
-        <p:spPr>
-          <a:xfrm>
-            <a:off x="150074" y="2971800"/>
-            <a:ext cx="3711020" cy="914400"/>
-          </a:xfrm>
-          <a:prstGeom prst="rect">
-            <a:avLst/>
-          </a:prstGeom>
-        </p:spPr>
-        <p:style>
-          <a:lnRef idx="2">
-            <a:schemeClr val="accent1">
-              <a:shade val="15000"/>
-            </a:schemeClr>
-          </a:lnRef>
-          <a:fillRef idx="1">
-            <a:schemeClr val="accent1"/>
-          </a:fillRef>
-          <a:effectRef idx="0">
-            <a:schemeClr val="accent1"/>
-          </a:effectRef>
-          <a:fontRef idx="minor">
-            <a:schemeClr val="lt1"/>
-          </a:fontRef>
-        </p:style>
-        <p:txBody>
-          <a:bodyPr rtlCol="0" anchor="ctr"/>
-          <a:lstStyle/>
-          <a:p>
-            <a:pPr algn="ctr"/>
-            <a:r>
-              <a:rPr lang="en-US" dirty="0"/>
-              <a:t>Layout- and traversal-agnostic abstractions</a:t>
-            </a:r>
-          </a:p>
-        </p:txBody>
-      </p:sp>
-      <p:sp>
-        <p:nvSpPr>
-          <p:cNvPr id="9" name="Rectangle 8">
-            <a:extLst>
-              <a:ext uri="{FF2B5EF4-FFF2-40B4-BE49-F238E27FC236}">
-                <a16:creationId xmlns:a16="http://schemas.microsoft.com/office/drawing/2014/main" id="{6DB7F776-4EDC-09F4-F04A-E586FC4B4500}"/>
-              </a:ext>
-            </a:extLst>
-          </p:cNvPr>
-          <p:cNvSpPr/>
-          <p:nvPr/>
-        </p:nvSpPr>
-        <p:spPr>
-          <a:xfrm>
-            <a:off x="7840178" y="2971800"/>
-            <a:ext cx="3711020" cy="914400"/>
-          </a:xfrm>
-          <a:prstGeom prst="rect">
-            <a:avLst/>
-          </a:prstGeom>
-        </p:spPr>
-        <p:style>
-          <a:lnRef idx="2">
-            <a:schemeClr val="accent1">
-              <a:shade val="15000"/>
-            </a:schemeClr>
-          </a:lnRef>
-          <a:fillRef idx="1">
-            <a:schemeClr val="accent1"/>
-          </a:fillRef>
-          <a:effectRef idx="0">
-            <a:schemeClr val="accent1"/>
-          </a:effectRef>
-          <a:fontRef idx="minor">
-            <a:schemeClr val="lt1"/>
-          </a:fontRef>
-        </p:style>
-        <p:txBody>
-          <a:bodyPr rtlCol="0" anchor="ctr"/>
-          <a:lstStyle/>
-          <a:p>
-            <a:pPr algn="ctr"/>
-            <a:r>
-              <a:rPr lang="en-US" dirty="0"/>
-              <a:t>LLM-assisted optimization</a:t>
-            </a:r>
-          </a:p>
-        </p:txBody>
-      </p:sp>
-      <p:sp>
-        <p:nvSpPr>
-          <p:cNvPr id="11" name="Rectangle 10">
-            <a:extLst>
-              <a:ext uri="{FF2B5EF4-FFF2-40B4-BE49-F238E27FC236}">
-                <a16:creationId xmlns:a16="http://schemas.microsoft.com/office/drawing/2014/main" id="{5B2B9BCB-5805-C1F1-AF45-681B37E6B83E}"/>
-              </a:ext>
-            </a:extLst>
-          </p:cNvPr>
-          <p:cNvSpPr/>
-          <p:nvPr/>
-        </p:nvSpPr>
-        <p:spPr>
-          <a:xfrm>
-            <a:off x="150074" y="4252912"/>
-            <a:ext cx="3711020" cy="914400"/>
-          </a:xfrm>
-          <a:prstGeom prst="rect">
-            <a:avLst/>
-          </a:prstGeom>
-        </p:spPr>
-        <p:style>
-          <a:lnRef idx="2">
-            <a:schemeClr val="accent1">
-              <a:shade val="15000"/>
-            </a:schemeClr>
-          </a:lnRef>
-          <a:fillRef idx="1">
-            <a:schemeClr val="accent1"/>
-          </a:fillRef>
-          <a:effectRef idx="0">
-            <a:schemeClr val="accent1"/>
-          </a:effectRef>
-          <a:fontRef idx="minor">
-            <a:schemeClr val="lt1"/>
-          </a:fontRef>
-        </p:style>
-        <p:txBody>
-          <a:bodyPr rtlCol="0" anchor="ctr"/>
-          <a:lstStyle/>
-          <a:p>
-            <a:pPr algn="ctr"/>
-            <a:r>
-              <a:rPr lang="en-US" dirty="0"/>
-              <a:t>Layout abstractions</a:t>
-            </a:r>
-          </a:p>
-        </p:txBody>
-      </p:sp>
-      <p:sp>
-        <p:nvSpPr>
-          <p:cNvPr id="13" name="Rectangle 12">
-            <a:extLst>
-              <a:ext uri="{FF2B5EF4-FFF2-40B4-BE49-F238E27FC236}">
-                <a16:creationId xmlns:a16="http://schemas.microsoft.com/office/drawing/2014/main" id="{31388E94-1EEB-E24E-1923-AA250880AF84}"/>
-              </a:ext>
-            </a:extLst>
-          </p:cNvPr>
-          <p:cNvSpPr/>
-          <p:nvPr/>
-        </p:nvSpPr>
-        <p:spPr>
-          <a:xfrm>
-            <a:off x="4240490" y="4252912"/>
-            <a:ext cx="3711020" cy="914400"/>
-          </a:xfrm>
-          <a:prstGeom prst="rect">
-            <a:avLst/>
-          </a:prstGeom>
-        </p:spPr>
-        <p:style>
-          <a:lnRef idx="2">
-            <a:schemeClr val="accent1">
-              <a:shade val="15000"/>
-            </a:schemeClr>
-          </a:lnRef>
-          <a:fillRef idx="1">
-            <a:schemeClr val="accent1"/>
-          </a:fillRef>
-          <a:effectRef idx="0">
-            <a:schemeClr val="accent1"/>
-          </a:effectRef>
-          <a:fontRef idx="minor">
-            <a:schemeClr val="lt1"/>
-          </a:fontRef>
-        </p:style>
-        <p:txBody>
-          <a:bodyPr rtlCol="0" anchor="ctr"/>
-          <a:lstStyle/>
-          <a:p>
-            <a:pPr algn="ctr"/>
-            <a:r>
-              <a:rPr lang="en-US" dirty="0"/>
-              <a:t>Traversal abstractions</a:t>
-            </a:r>
-          </a:p>
-        </p:txBody>
-      </p:sp>
-      <p:sp>
-        <p:nvSpPr>
-          <p:cNvPr id="15" name="Rectangle 14">
-            <a:extLst>
-              <a:ext uri="{FF2B5EF4-FFF2-40B4-BE49-F238E27FC236}">
-                <a16:creationId xmlns:a16="http://schemas.microsoft.com/office/drawing/2014/main" id="{DE8920A4-4430-6757-E41A-9BA9578DC80D}"/>
-              </a:ext>
-            </a:extLst>
-          </p:cNvPr>
-          <p:cNvSpPr/>
-          <p:nvPr/>
-        </p:nvSpPr>
-        <p:spPr>
-          <a:xfrm>
-            <a:off x="8330906" y="4252912"/>
-            <a:ext cx="3711020" cy="914400"/>
-          </a:xfrm>
-          <a:prstGeom prst="rect">
-            <a:avLst/>
-          </a:prstGeom>
-        </p:spPr>
-        <p:style>
-          <a:lnRef idx="2">
-            <a:schemeClr val="accent1">
-              <a:shade val="15000"/>
-            </a:schemeClr>
-          </a:lnRef>
-          <a:fillRef idx="1">
-            <a:schemeClr val="accent1"/>
-          </a:fillRef>
-          <a:effectRef idx="0">
-            <a:schemeClr val="accent1"/>
-          </a:effectRef>
-          <a:fontRef idx="minor">
-            <a:schemeClr val="lt1"/>
-          </a:fontRef>
-        </p:style>
-        <p:txBody>
-          <a:bodyPr rtlCol="0" anchor="ctr"/>
-          <a:lstStyle/>
-          <a:p>
-            <a:pPr algn="ctr"/>
-            <a:r>
-              <a:rPr lang="en-US" dirty="0"/>
-              <a:t>Practical aspects</a:t>
-            </a:r>
-          </a:p>
-        </p:txBody>
-      </p:sp>
-      <p:sp>
-        <p:nvSpPr>
-          <p:cNvPr id="17" name="Rectangle 16">
-            <a:extLst>
-              <a:ext uri="{FF2B5EF4-FFF2-40B4-BE49-F238E27FC236}">
-                <a16:creationId xmlns:a16="http://schemas.microsoft.com/office/drawing/2014/main" id="{D01E75A2-333B-DF95-544C-0ACF1B88882C}"/>
-              </a:ext>
-            </a:extLst>
-          </p:cNvPr>
-          <p:cNvSpPr/>
-          <p:nvPr/>
-        </p:nvSpPr>
-        <p:spPr>
-          <a:xfrm>
-            <a:off x="302474" y="5356288"/>
-            <a:ext cx="3711020" cy="914400"/>
-          </a:xfrm>
-          <a:prstGeom prst="rect">
-            <a:avLst/>
-          </a:prstGeom>
-        </p:spPr>
-        <p:style>
-          <a:lnRef idx="2">
-            <a:schemeClr val="accent1">
-              <a:shade val="15000"/>
-            </a:schemeClr>
-          </a:lnRef>
-          <a:fillRef idx="1">
-            <a:schemeClr val="accent1"/>
-          </a:fillRef>
-          <a:effectRef idx="0">
-            <a:schemeClr val="accent1"/>
-          </a:effectRef>
-          <a:fontRef idx="minor">
-            <a:schemeClr val="lt1"/>
-          </a:fontRef>
-        </p:style>
-        <p:txBody>
-          <a:bodyPr rtlCol="0" anchor="ctr"/>
-          <a:lstStyle/>
-          <a:p>
-            <a:pPr algn="ctr"/>
-            <a:r>
-              <a:rPr lang="en-US" dirty="0"/>
-              <a:t>Noarr structures</a:t>
-            </a:r>
-          </a:p>
-        </p:txBody>
-      </p:sp>
-      <p:sp>
-        <p:nvSpPr>
-          <p:cNvPr id="19" name="Rectangle 18">
-            <a:extLst>
-              <a:ext uri="{FF2B5EF4-FFF2-40B4-BE49-F238E27FC236}">
-                <a16:creationId xmlns:a16="http://schemas.microsoft.com/office/drawing/2014/main" id="{67736357-2F90-D241-51F6-C03C797EFFC2}"/>
-              </a:ext>
-            </a:extLst>
-          </p:cNvPr>
-          <p:cNvSpPr/>
-          <p:nvPr/>
-        </p:nvSpPr>
-        <p:spPr>
-          <a:xfrm>
-            <a:off x="454874" y="5508688"/>
-            <a:ext cx="3711020" cy="914400"/>
-          </a:xfrm>
-          <a:prstGeom prst="rect">
-            <a:avLst/>
-          </a:prstGeom>
-        </p:spPr>
-        <p:style>
-          <a:lnRef idx="2">
-            <a:schemeClr val="accent1">
-              <a:shade val="15000"/>
-            </a:schemeClr>
-          </a:lnRef>
-          <a:fillRef idx="1">
-            <a:schemeClr val="accent1"/>
-          </a:fillRef>
-          <a:effectRef idx="0">
-            <a:schemeClr val="accent1"/>
-          </a:effectRef>
-          <a:fontRef idx="minor">
-            <a:schemeClr val="lt1"/>
-          </a:fontRef>
-        </p:style>
-        <p:txBody>
-          <a:bodyPr rtlCol="0" anchor="ctr"/>
-          <a:lstStyle/>
-          <a:p>
-            <a:pPr algn="ctr"/>
-            <a:r>
-              <a:rPr lang="en-US" dirty="0"/>
-              <a:t>Noarr traversers</a:t>
-            </a:r>
-          </a:p>
-        </p:txBody>
-      </p:sp>
-      <p:sp>
-        <p:nvSpPr>
-          <p:cNvPr id="21" name="Rectangle 20">
-            <a:extLst>
-              <a:ext uri="{FF2B5EF4-FFF2-40B4-BE49-F238E27FC236}">
-                <a16:creationId xmlns:a16="http://schemas.microsoft.com/office/drawing/2014/main" id="{9EC73339-8B3D-25F4-18D5-E5821CB7CE8B}"/>
-              </a:ext>
-            </a:extLst>
-          </p:cNvPr>
-          <p:cNvSpPr/>
-          <p:nvPr/>
-        </p:nvSpPr>
-        <p:spPr>
-          <a:xfrm>
-            <a:off x="607274" y="5661088"/>
-            <a:ext cx="3711020" cy="914400"/>
-          </a:xfrm>
-          <a:prstGeom prst="rect">
-            <a:avLst/>
-          </a:prstGeom>
-        </p:spPr>
-        <p:style>
-          <a:lnRef idx="2">
-            <a:schemeClr val="accent1">
-              <a:shade val="15000"/>
-            </a:schemeClr>
-          </a:lnRef>
-          <a:fillRef idx="1">
-            <a:schemeClr val="accent1"/>
-          </a:fillRef>
-          <a:effectRef idx="0">
-            <a:schemeClr val="accent1"/>
-          </a:effectRef>
-          <a:fontRef idx="minor">
-            <a:schemeClr val="lt1"/>
-          </a:fontRef>
-        </p:style>
-        <p:txBody>
-          <a:bodyPr rtlCol="0" anchor="ctr"/>
-          <a:lstStyle/>
-          <a:p>
-            <a:pPr algn="ctr"/>
-            <a:r>
-              <a:rPr lang="en-US" dirty="0"/>
-              <a:t>Noarr tuning</a:t>
-            </a:r>
-          </a:p>
-        </p:txBody>
-      </p:sp>
-      <p:sp>
-        <p:nvSpPr>
-          <p:cNvPr id="23" name="Rectangle 22">
-            <a:extLst>
-              <a:ext uri="{FF2B5EF4-FFF2-40B4-BE49-F238E27FC236}">
-                <a16:creationId xmlns:a16="http://schemas.microsoft.com/office/drawing/2014/main" id="{63EC4F51-D7C0-1DFC-E94E-75AE185B7CC1}"/>
-              </a:ext>
-            </a:extLst>
-          </p:cNvPr>
-          <p:cNvSpPr/>
-          <p:nvPr/>
-        </p:nvSpPr>
-        <p:spPr>
-          <a:xfrm>
-            <a:off x="759674" y="5813488"/>
-            <a:ext cx="3711020" cy="914400"/>
-          </a:xfrm>
-          <a:prstGeom prst="rect">
-            <a:avLst/>
-          </a:prstGeom>
-        </p:spPr>
-        <p:style>
-          <a:lnRef idx="2">
-            <a:schemeClr val="accent1">
-              <a:shade val="15000"/>
-            </a:schemeClr>
-          </a:lnRef>
-          <a:fillRef idx="1">
-            <a:schemeClr val="accent1"/>
-          </a:fillRef>
-          <a:effectRef idx="0">
-            <a:schemeClr val="accent1"/>
-          </a:effectRef>
-          <a:fontRef idx="minor">
-            <a:schemeClr val="lt1"/>
-          </a:fontRef>
-        </p:style>
-        <p:txBody>
-          <a:bodyPr rtlCol="0" anchor="ctr"/>
-          <a:lstStyle/>
-          <a:p>
-            <a:pPr algn="ctr"/>
-            <a:r>
-              <a:rPr lang="en-US" dirty="0"/>
-              <a:t>Noarr-MPI</a:t>
-            </a:r>
-          </a:p>
-        </p:txBody>
-      </p:sp>
-      <p:sp>
-        <p:nvSpPr>
-          <p:cNvPr id="25" name="Rectangle 24">
-            <a:extLst>
-              <a:ext uri="{FF2B5EF4-FFF2-40B4-BE49-F238E27FC236}">
-                <a16:creationId xmlns:a16="http://schemas.microsoft.com/office/drawing/2014/main" id="{B7D64168-E19F-C04D-293D-CB07E85D29DA}"/>
-              </a:ext>
-            </a:extLst>
-          </p:cNvPr>
-          <p:cNvSpPr/>
-          <p:nvPr/>
-        </p:nvSpPr>
-        <p:spPr>
-          <a:xfrm>
-            <a:off x="4853138" y="5424788"/>
-            <a:ext cx="3711020" cy="914400"/>
-          </a:xfrm>
-          <a:prstGeom prst="rect">
-            <a:avLst/>
-          </a:prstGeom>
-        </p:spPr>
-        <p:style>
-          <a:lnRef idx="2">
-            <a:schemeClr val="accent1">
-              <a:shade val="15000"/>
-            </a:schemeClr>
-          </a:lnRef>
-          <a:fillRef idx="1">
-            <a:schemeClr val="accent1"/>
-          </a:fillRef>
-          <a:effectRef idx="0">
-            <a:schemeClr val="accent1"/>
-          </a:effectRef>
-          <a:fontRef idx="minor">
-            <a:schemeClr val="lt1"/>
-          </a:fontRef>
-        </p:style>
-        <p:txBody>
-          <a:bodyPr rtlCol="0" anchor="ctr"/>
-          <a:lstStyle/>
-          <a:p>
-            <a:pPr algn="ctr"/>
-            <a:r>
-              <a:rPr lang="en-US" dirty="0" err="1"/>
-              <a:t>Cellato</a:t>
-            </a:r>
-            <a:endParaRPr lang="en-US" dirty="0"/>
+              <a:t>LLMs in algorithm design</a:t>
+            </a:r>
+          </a:p>
+        </p:txBody>
+      </p:sp>
+      <p:sp>
+        <p:nvSpPr>
+          <p:cNvPr id="3" name="Content Placeholder 2">
+            <a:extLst>
+              <a:ext uri="{FF2B5EF4-FFF2-40B4-BE49-F238E27FC236}">
+                <a16:creationId xmlns:a16="http://schemas.microsoft.com/office/drawing/2014/main" id="{64F2D09B-2F00-3457-9D41-D2EAB2BD84E5}"/>
+              </a:ext>
+            </a:extLst>
+          </p:cNvPr>
+          <p:cNvSpPr>
+            <a:spLocks noGrp="1"/>
+          </p:cNvSpPr>
+          <p:nvPr>
+            <p:ph idx="1"/>
+          </p:nvPr>
+        </p:nvSpPr>
+        <p:spPr/>
+        <p:txBody>
+          <a:bodyPr/>
+          <a:lstStyle/>
+          <a:p>
+            <a:r>
+              <a:rPr lang="en-US" dirty="0"/>
+              <a:t>Tutoring LLMs for CUDA optimization</a:t>
+            </a:r>
+          </a:p>
+          <a:p>
+            <a:r>
+              <a:rPr lang="en-US" dirty="0"/>
+              <a:t>LLMs and abstractions</a:t>
+            </a:r>
           </a:p>
         </p:txBody>
       </p:sp>
     </p:spTree>
     <p:extLst>
       <p:ext uri="{BB962C8B-B14F-4D97-AF65-F5344CB8AC3E}">
-        <p14:creationId xmlns:p14="http://schemas.microsoft.com/office/powerpoint/2010/main" val="1745489699"/>
+        <p14:creationId xmlns:p14="http://schemas.microsoft.com/office/powerpoint/2010/main" val="645810162"/>
       </p:ext>
     </p:extLst>
   </p:cSld>

--- a/slides/Optimizing Memory Layouts and Traversal Orders in High-Performance Computing.pptx
+++ b/slides/Optimizing Memory Layouts and Traversal Orders in High-Performance Computing.pptx
@@ -5,22 +5,23 @@
     <p:sldMasterId id="2147483648" r:id="rId1"/>
   </p:sldMasterIdLst>
   <p:notesMasterIdLst>
-    <p:notesMasterId r:id="rId15"/>
+    <p:notesMasterId r:id="rId16"/>
   </p:notesMasterIdLst>
   <p:sldIdLst>
     <p:sldId id="256" r:id="rId2"/>
     <p:sldId id="268" r:id="rId3"/>
     <p:sldId id="269" r:id="rId4"/>
     <p:sldId id="270" r:id="rId5"/>
-    <p:sldId id="265" r:id="rId6"/>
-    <p:sldId id="263" r:id="rId7"/>
-    <p:sldId id="264" r:id="rId8"/>
-    <p:sldId id="258" r:id="rId9"/>
-    <p:sldId id="259" r:id="rId10"/>
-    <p:sldId id="260" r:id="rId11"/>
-    <p:sldId id="266" r:id="rId12"/>
-    <p:sldId id="261" r:id="rId13"/>
-    <p:sldId id="262" r:id="rId14"/>
+    <p:sldId id="271" r:id="rId6"/>
+    <p:sldId id="265" r:id="rId7"/>
+    <p:sldId id="263" r:id="rId8"/>
+    <p:sldId id="264" r:id="rId9"/>
+    <p:sldId id="258" r:id="rId10"/>
+    <p:sldId id="259" r:id="rId11"/>
+    <p:sldId id="260" r:id="rId12"/>
+    <p:sldId id="266" r:id="rId13"/>
+    <p:sldId id="261" r:id="rId14"/>
+    <p:sldId id="262" r:id="rId15"/>
   </p:sldIdLst>
   <p:sldSz cx="12192000" cy="6858000"/>
   <p:notesSz cx="6858000" cy="9144000"/>
@@ -128,6 +129,7 @@
             <p14:sldId id="268"/>
             <p14:sldId id="269"/>
             <p14:sldId id="270"/>
+            <p14:sldId id="271"/>
             <p14:sldId id="265"/>
             <p14:sldId id="263"/>
             <p14:sldId id="264"/>
@@ -250,7 +252,7 @@
           <a:p>
             <a:fld id="{34A5C982-A1C5-4AC2-B4BF-466515DA1494}" type="datetimeFigureOut">
               <a:rPr lang="en-US" smtClean="0"/>
-              <a:t>8/21/2026</a:t>
+              <a:t>8/23/2026</a:t>
             </a:fld>
             <a:endParaRPr lang="en-US"/>
           </a:p>
@@ -582,7 +584,7 @@
           <a:p>
             <a:fld id="{FA8FD632-245B-410D-BCC4-8BF8D37AB67F}" type="slidenum">
               <a:rPr lang="en-US" smtClean="0"/>
-              <a:t>5</a:t>
+              <a:t>6</a:t>
             </a:fld>
             <a:endParaRPr lang="en-US"/>
           </a:p>
@@ -748,7 +750,7 @@
           <a:p>
             <a:fld id="{93F57E82-5604-4F8C-BCFA-F7C026884391}" type="datetimeFigureOut">
               <a:rPr lang="en-US" smtClean="0"/>
-              <a:t>8/21/2026</a:t>
+              <a:t>8/23/2026</a:t>
             </a:fld>
             <a:endParaRPr lang="en-US"/>
           </a:p>
@@ -946,7 +948,7 @@
           <a:p>
             <a:fld id="{93F57E82-5604-4F8C-BCFA-F7C026884391}" type="datetimeFigureOut">
               <a:rPr lang="en-US" smtClean="0"/>
-              <a:t>8/21/2026</a:t>
+              <a:t>8/23/2026</a:t>
             </a:fld>
             <a:endParaRPr lang="en-US"/>
           </a:p>
@@ -1154,7 +1156,7 @@
           <a:p>
             <a:fld id="{93F57E82-5604-4F8C-BCFA-F7C026884391}" type="datetimeFigureOut">
               <a:rPr lang="en-US" smtClean="0"/>
-              <a:t>8/21/2026</a:t>
+              <a:t>8/23/2026</a:t>
             </a:fld>
             <a:endParaRPr lang="en-US"/>
           </a:p>
@@ -1352,7 +1354,7 @@
           <a:p>
             <a:fld id="{93F57E82-5604-4F8C-BCFA-F7C026884391}" type="datetimeFigureOut">
               <a:rPr lang="en-US" smtClean="0"/>
-              <a:t>8/21/2026</a:t>
+              <a:t>8/23/2026</a:t>
             </a:fld>
             <a:endParaRPr lang="en-US"/>
           </a:p>
@@ -1627,7 +1629,7 @@
           <a:p>
             <a:fld id="{93F57E82-5604-4F8C-BCFA-F7C026884391}" type="datetimeFigureOut">
               <a:rPr lang="en-US" smtClean="0"/>
-              <a:t>8/21/2026</a:t>
+              <a:t>8/23/2026</a:t>
             </a:fld>
             <a:endParaRPr lang="en-US"/>
           </a:p>
@@ -1892,7 +1894,7 @@
           <a:p>
             <a:fld id="{93F57E82-5604-4F8C-BCFA-F7C026884391}" type="datetimeFigureOut">
               <a:rPr lang="en-US" smtClean="0"/>
-              <a:t>8/21/2026</a:t>
+              <a:t>8/23/2026</a:t>
             </a:fld>
             <a:endParaRPr lang="en-US"/>
           </a:p>
@@ -2304,7 +2306,7 @@
           <a:p>
             <a:fld id="{93F57E82-5604-4F8C-BCFA-F7C026884391}" type="datetimeFigureOut">
               <a:rPr lang="en-US" smtClean="0"/>
-              <a:t>8/21/2026</a:t>
+              <a:t>8/23/2026</a:t>
             </a:fld>
             <a:endParaRPr lang="en-US"/>
           </a:p>
@@ -2445,7 +2447,7 @@
           <a:p>
             <a:fld id="{93F57E82-5604-4F8C-BCFA-F7C026884391}" type="datetimeFigureOut">
               <a:rPr lang="en-US" smtClean="0"/>
-              <a:t>8/21/2026</a:t>
+              <a:t>8/23/2026</a:t>
             </a:fld>
             <a:endParaRPr lang="en-US"/>
           </a:p>
@@ -2558,7 +2560,7 @@
           <a:p>
             <a:fld id="{93F57E82-5604-4F8C-BCFA-F7C026884391}" type="datetimeFigureOut">
               <a:rPr lang="en-US" smtClean="0"/>
-              <a:t>8/21/2026</a:t>
+              <a:t>8/23/2026</a:t>
             </a:fld>
             <a:endParaRPr lang="en-US"/>
           </a:p>
@@ -2869,7 +2871,7 @@
           <a:p>
             <a:fld id="{93F57E82-5604-4F8C-BCFA-F7C026884391}" type="datetimeFigureOut">
               <a:rPr lang="en-US" smtClean="0"/>
-              <a:t>8/21/2026</a:t>
+              <a:t>8/23/2026</a:t>
             </a:fld>
             <a:endParaRPr lang="en-US"/>
           </a:p>
@@ -3157,7 +3159,7 @@
           <a:p>
             <a:fld id="{93F57E82-5604-4F8C-BCFA-F7C026884391}" type="datetimeFigureOut">
               <a:rPr lang="en-US" smtClean="0"/>
-              <a:t>8/21/2026</a:t>
+              <a:t>8/23/2026</a:t>
             </a:fld>
             <a:endParaRPr lang="en-US"/>
           </a:p>
@@ -3398,7 +3400,7 @@
           <a:p>
             <a:fld id="{93F57E82-5604-4F8C-BCFA-F7C026884391}" type="datetimeFigureOut">
               <a:rPr lang="en-US" smtClean="0"/>
-              <a:t>8/21/2026</a:t>
+              <a:t>8/23/2026</a:t>
             </a:fld>
             <a:endParaRPr lang="en-US"/>
           </a:p>
@@ -3919,7 +3921,7 @@
           <p:cNvPr id="2" name="Title 1">
             <a:extLst>
               <a:ext uri="{FF2B5EF4-FFF2-40B4-BE49-F238E27FC236}">
-                <a16:creationId xmlns:a16="http://schemas.microsoft.com/office/drawing/2014/main" id="{928BD501-0287-7E9D-6C52-A86B98F9EB52}"/>
+                <a16:creationId xmlns:a16="http://schemas.microsoft.com/office/drawing/2014/main" id="{1CFD8E19-FCBD-3C1F-9804-55F9EF315364}"/>
               </a:ext>
             </a:extLst>
           </p:cNvPr>
@@ -3936,10 +3938,9 @@
           <a:lstStyle/>
           <a:p>
             <a:r>
-              <a:rPr lang="en-US" dirty="0" err="1"/>
-              <a:t>Zahodit</a:t>
-            </a:r>
-            <a:endParaRPr lang="en-US" dirty="0"/>
+              <a:rPr lang="en-US" dirty="0"/>
+              <a:t>LLMs in algorithm design</a:t>
+            </a:r>
           </a:p>
         </p:txBody>
       </p:sp>
@@ -3948,7 +3949,7 @@
           <p:cNvPr id="3" name="Content Placeholder 2">
             <a:extLst>
               <a:ext uri="{FF2B5EF4-FFF2-40B4-BE49-F238E27FC236}">
-                <a16:creationId xmlns:a16="http://schemas.microsoft.com/office/drawing/2014/main" id="{369E5D67-EA03-A5CA-2D82-199F178CE89C}"/>
+                <a16:creationId xmlns:a16="http://schemas.microsoft.com/office/drawing/2014/main" id="{64F2D09B-2F00-3457-9D41-D2EAB2BD84E5}"/>
               </a:ext>
             </a:extLst>
           </p:cNvPr>
@@ -3965,24 +3966,22 @@
           <a:lstStyle/>
           <a:p>
             <a:r>
-              <a:rPr lang="en-US" dirty="0" err="1"/>
-              <a:t>Noarr</a:t>
-            </a:r>
-            <a:endParaRPr lang="en-US" dirty="0"/>
-          </a:p>
-          <a:p>
-            <a:r>
-              <a:rPr lang="en-US" dirty="0" err="1"/>
-              <a:t>Cellato</a:t>
-            </a:r>
-            <a:endParaRPr lang="en-US" dirty="0"/>
+              <a:rPr lang="en-US" dirty="0"/>
+              <a:t>Tutoring LLMs for CUDA optimization</a:t>
+            </a:r>
+          </a:p>
+          <a:p>
+            <a:r>
+              <a:rPr lang="en-US" dirty="0"/>
+              <a:t>LLMs and abstractions</a:t>
+            </a:r>
           </a:p>
         </p:txBody>
       </p:sp>
     </p:spTree>
     <p:extLst>
       <p:ext uri="{BB962C8B-B14F-4D97-AF65-F5344CB8AC3E}">
-        <p14:creationId xmlns:p14="http://schemas.microsoft.com/office/powerpoint/2010/main" val="4085122203"/>
+        <p14:creationId xmlns:p14="http://schemas.microsoft.com/office/powerpoint/2010/main" val="645810162"/>
       </p:ext>
     </p:extLst>
   </p:cSld>
@@ -4014,7 +4013,7 @@
           <p:cNvPr id="2" name="Title 1">
             <a:extLst>
               <a:ext uri="{FF2B5EF4-FFF2-40B4-BE49-F238E27FC236}">
-                <a16:creationId xmlns:a16="http://schemas.microsoft.com/office/drawing/2014/main" id="{6447B745-9B50-DD90-5161-BD2A06CEA44B}"/>
+                <a16:creationId xmlns:a16="http://schemas.microsoft.com/office/drawing/2014/main" id="{928BD501-0287-7E9D-6C52-A86B98F9EB52}"/>
               </a:ext>
             </a:extLst>
           </p:cNvPr>
@@ -4031,544 +4030,41 @@
           <a:lstStyle/>
           <a:p>
             <a:r>
-              <a:rPr lang="en-US" dirty="0"/>
-              <a:t>Contribution map</a:t>
-            </a:r>
-          </a:p>
-        </p:txBody>
-      </p:sp>
-      <p:sp>
-        <p:nvSpPr>
-          <p:cNvPr id="5" name="Rectangle 4">
-            <a:extLst>
-              <a:ext uri="{FF2B5EF4-FFF2-40B4-BE49-F238E27FC236}">
-                <a16:creationId xmlns:a16="http://schemas.microsoft.com/office/drawing/2014/main" id="{CB7F8197-FC2F-9C2A-050C-CCCB46D86C79}"/>
-              </a:ext>
-            </a:extLst>
-          </p:cNvPr>
-          <p:cNvSpPr/>
-          <p:nvPr/>
-        </p:nvSpPr>
-        <p:spPr>
-          <a:xfrm>
-            <a:off x="4240490" y="1406732"/>
-            <a:ext cx="3711020" cy="914400"/>
-          </a:xfrm>
-          <a:prstGeom prst="rect">
-            <a:avLst/>
-          </a:prstGeom>
-        </p:spPr>
-        <p:style>
-          <a:lnRef idx="2">
-            <a:schemeClr val="accent1">
-              <a:shade val="15000"/>
-            </a:schemeClr>
-          </a:lnRef>
-          <a:fillRef idx="1">
-            <a:schemeClr val="accent1"/>
-          </a:fillRef>
-          <a:effectRef idx="0">
-            <a:schemeClr val="accent1"/>
-          </a:effectRef>
-          <a:fontRef idx="minor">
-            <a:schemeClr val="lt1"/>
-          </a:fontRef>
-        </p:style>
-        <p:txBody>
-          <a:bodyPr rtlCol="0" anchor="ctr"/>
-          <a:lstStyle/>
-          <a:p>
-            <a:pPr algn="ctr"/>
-            <a:r>
-              <a:rPr lang="en-US" dirty="0"/>
-              <a:t>Separate algorithm design from performance optimization</a:t>
-            </a:r>
-          </a:p>
-        </p:txBody>
-      </p:sp>
-      <p:sp>
-        <p:nvSpPr>
-          <p:cNvPr id="7" name="Rectangle 6">
-            <a:extLst>
-              <a:ext uri="{FF2B5EF4-FFF2-40B4-BE49-F238E27FC236}">
-                <a16:creationId xmlns:a16="http://schemas.microsoft.com/office/drawing/2014/main" id="{60EC2A1A-B720-84BC-76D5-4751C09EA61A}"/>
-              </a:ext>
-            </a:extLst>
-          </p:cNvPr>
-          <p:cNvSpPr/>
-          <p:nvPr/>
-        </p:nvSpPr>
-        <p:spPr>
-          <a:xfrm>
-            <a:off x="150074" y="2971800"/>
-            <a:ext cx="3711020" cy="914400"/>
-          </a:xfrm>
-          <a:prstGeom prst="rect">
-            <a:avLst/>
-          </a:prstGeom>
-        </p:spPr>
-        <p:style>
-          <a:lnRef idx="2">
-            <a:schemeClr val="accent1">
-              <a:shade val="15000"/>
-            </a:schemeClr>
-          </a:lnRef>
-          <a:fillRef idx="1">
-            <a:schemeClr val="accent1"/>
-          </a:fillRef>
-          <a:effectRef idx="0">
-            <a:schemeClr val="accent1"/>
-          </a:effectRef>
-          <a:fontRef idx="minor">
-            <a:schemeClr val="lt1"/>
-          </a:fontRef>
-        </p:style>
-        <p:txBody>
-          <a:bodyPr rtlCol="0" anchor="ctr"/>
-          <a:lstStyle/>
-          <a:p>
-            <a:pPr algn="ctr"/>
-            <a:r>
-              <a:rPr lang="en-US" dirty="0"/>
-              <a:t>Layout- and traversal-agnostic abstractions</a:t>
-            </a:r>
-          </a:p>
-        </p:txBody>
-      </p:sp>
-      <p:sp>
-        <p:nvSpPr>
-          <p:cNvPr id="9" name="Rectangle 8">
-            <a:extLst>
-              <a:ext uri="{FF2B5EF4-FFF2-40B4-BE49-F238E27FC236}">
-                <a16:creationId xmlns:a16="http://schemas.microsoft.com/office/drawing/2014/main" id="{6DB7F776-4EDC-09F4-F04A-E586FC4B4500}"/>
-              </a:ext>
-            </a:extLst>
-          </p:cNvPr>
-          <p:cNvSpPr/>
-          <p:nvPr/>
-        </p:nvSpPr>
-        <p:spPr>
-          <a:xfrm>
-            <a:off x="7840178" y="2971800"/>
-            <a:ext cx="3711020" cy="914400"/>
-          </a:xfrm>
-          <a:prstGeom prst="rect">
-            <a:avLst/>
-          </a:prstGeom>
-        </p:spPr>
-        <p:style>
-          <a:lnRef idx="2">
-            <a:schemeClr val="accent1">
-              <a:shade val="15000"/>
-            </a:schemeClr>
-          </a:lnRef>
-          <a:fillRef idx="1">
-            <a:schemeClr val="accent1"/>
-          </a:fillRef>
-          <a:effectRef idx="0">
-            <a:schemeClr val="accent1"/>
-          </a:effectRef>
-          <a:fontRef idx="minor">
-            <a:schemeClr val="lt1"/>
-          </a:fontRef>
-        </p:style>
-        <p:txBody>
-          <a:bodyPr rtlCol="0" anchor="ctr"/>
-          <a:lstStyle/>
-          <a:p>
-            <a:pPr algn="ctr"/>
-            <a:r>
-              <a:rPr lang="en-US" dirty="0"/>
-              <a:t>LLM-assisted optimization</a:t>
-            </a:r>
-          </a:p>
-        </p:txBody>
-      </p:sp>
-      <p:sp>
-        <p:nvSpPr>
-          <p:cNvPr id="11" name="Rectangle 10">
-            <a:extLst>
-              <a:ext uri="{FF2B5EF4-FFF2-40B4-BE49-F238E27FC236}">
-                <a16:creationId xmlns:a16="http://schemas.microsoft.com/office/drawing/2014/main" id="{5B2B9BCB-5805-C1F1-AF45-681B37E6B83E}"/>
-              </a:ext>
-            </a:extLst>
-          </p:cNvPr>
-          <p:cNvSpPr/>
-          <p:nvPr/>
-        </p:nvSpPr>
-        <p:spPr>
-          <a:xfrm>
-            <a:off x="150074" y="4252912"/>
-            <a:ext cx="3711020" cy="914400"/>
-          </a:xfrm>
-          <a:prstGeom prst="rect">
-            <a:avLst/>
-          </a:prstGeom>
-        </p:spPr>
-        <p:style>
-          <a:lnRef idx="2">
-            <a:schemeClr val="accent1">
-              <a:shade val="15000"/>
-            </a:schemeClr>
-          </a:lnRef>
-          <a:fillRef idx="1">
-            <a:schemeClr val="accent1"/>
-          </a:fillRef>
-          <a:effectRef idx="0">
-            <a:schemeClr val="accent1"/>
-          </a:effectRef>
-          <a:fontRef idx="minor">
-            <a:schemeClr val="lt1"/>
-          </a:fontRef>
-        </p:style>
-        <p:txBody>
-          <a:bodyPr rtlCol="0" anchor="ctr"/>
-          <a:lstStyle/>
-          <a:p>
-            <a:pPr algn="ctr"/>
-            <a:r>
-              <a:rPr lang="en-US" dirty="0"/>
-              <a:t>Layout abstractions</a:t>
-            </a:r>
-          </a:p>
-        </p:txBody>
-      </p:sp>
-      <p:sp>
-        <p:nvSpPr>
-          <p:cNvPr id="13" name="Rectangle 12">
-            <a:extLst>
-              <a:ext uri="{FF2B5EF4-FFF2-40B4-BE49-F238E27FC236}">
-                <a16:creationId xmlns:a16="http://schemas.microsoft.com/office/drawing/2014/main" id="{31388E94-1EEB-E24E-1923-AA250880AF84}"/>
-              </a:ext>
-            </a:extLst>
-          </p:cNvPr>
-          <p:cNvSpPr/>
-          <p:nvPr/>
-        </p:nvSpPr>
-        <p:spPr>
-          <a:xfrm>
-            <a:off x="4240490" y="4252912"/>
-            <a:ext cx="3711020" cy="914400"/>
-          </a:xfrm>
-          <a:prstGeom prst="rect">
-            <a:avLst/>
-          </a:prstGeom>
-        </p:spPr>
-        <p:style>
-          <a:lnRef idx="2">
-            <a:schemeClr val="accent1">
-              <a:shade val="15000"/>
-            </a:schemeClr>
-          </a:lnRef>
-          <a:fillRef idx="1">
-            <a:schemeClr val="accent1"/>
-          </a:fillRef>
-          <a:effectRef idx="0">
-            <a:schemeClr val="accent1"/>
-          </a:effectRef>
-          <a:fontRef idx="minor">
-            <a:schemeClr val="lt1"/>
-          </a:fontRef>
-        </p:style>
-        <p:txBody>
-          <a:bodyPr rtlCol="0" anchor="ctr"/>
-          <a:lstStyle/>
-          <a:p>
-            <a:pPr algn="ctr"/>
-            <a:r>
-              <a:rPr lang="en-US" dirty="0"/>
-              <a:t>Traversal abstractions</a:t>
-            </a:r>
-          </a:p>
-        </p:txBody>
-      </p:sp>
-      <p:sp>
-        <p:nvSpPr>
-          <p:cNvPr id="15" name="Rectangle 14">
-            <a:extLst>
-              <a:ext uri="{FF2B5EF4-FFF2-40B4-BE49-F238E27FC236}">
-                <a16:creationId xmlns:a16="http://schemas.microsoft.com/office/drawing/2014/main" id="{DE8920A4-4430-6757-E41A-9BA9578DC80D}"/>
-              </a:ext>
-            </a:extLst>
-          </p:cNvPr>
-          <p:cNvSpPr/>
-          <p:nvPr/>
-        </p:nvSpPr>
-        <p:spPr>
-          <a:xfrm>
-            <a:off x="8330906" y="4252912"/>
-            <a:ext cx="3711020" cy="914400"/>
-          </a:xfrm>
-          <a:prstGeom prst="rect">
-            <a:avLst/>
-          </a:prstGeom>
-        </p:spPr>
-        <p:style>
-          <a:lnRef idx="2">
-            <a:schemeClr val="accent1">
-              <a:shade val="15000"/>
-            </a:schemeClr>
-          </a:lnRef>
-          <a:fillRef idx="1">
-            <a:schemeClr val="accent1"/>
-          </a:fillRef>
-          <a:effectRef idx="0">
-            <a:schemeClr val="accent1"/>
-          </a:effectRef>
-          <a:fontRef idx="minor">
-            <a:schemeClr val="lt1"/>
-          </a:fontRef>
-        </p:style>
-        <p:txBody>
-          <a:bodyPr rtlCol="0" anchor="ctr"/>
-          <a:lstStyle/>
-          <a:p>
-            <a:pPr algn="ctr"/>
-            <a:r>
-              <a:rPr lang="en-US" dirty="0"/>
-              <a:t>Practical aspects</a:t>
-            </a:r>
-          </a:p>
-        </p:txBody>
-      </p:sp>
-      <p:sp>
-        <p:nvSpPr>
-          <p:cNvPr id="17" name="Rectangle 16">
-            <a:extLst>
-              <a:ext uri="{FF2B5EF4-FFF2-40B4-BE49-F238E27FC236}">
-                <a16:creationId xmlns:a16="http://schemas.microsoft.com/office/drawing/2014/main" id="{D01E75A2-333B-DF95-544C-0ACF1B88882C}"/>
-              </a:ext>
-            </a:extLst>
-          </p:cNvPr>
-          <p:cNvSpPr/>
-          <p:nvPr/>
-        </p:nvSpPr>
-        <p:spPr>
-          <a:xfrm>
-            <a:off x="302474" y="5356288"/>
-            <a:ext cx="3711020" cy="914400"/>
-          </a:xfrm>
-          <a:prstGeom prst="rect">
-            <a:avLst/>
-          </a:prstGeom>
-        </p:spPr>
-        <p:style>
-          <a:lnRef idx="2">
-            <a:schemeClr val="accent1">
-              <a:shade val="15000"/>
-            </a:schemeClr>
-          </a:lnRef>
-          <a:fillRef idx="1">
-            <a:schemeClr val="accent1"/>
-          </a:fillRef>
-          <a:effectRef idx="0">
-            <a:schemeClr val="accent1"/>
-          </a:effectRef>
-          <a:fontRef idx="minor">
-            <a:schemeClr val="lt1"/>
-          </a:fontRef>
-        </p:style>
-        <p:txBody>
-          <a:bodyPr rtlCol="0" anchor="ctr"/>
-          <a:lstStyle/>
-          <a:p>
-            <a:pPr algn="ctr"/>
-            <a:r>
-              <a:rPr lang="en-US" dirty="0"/>
-              <a:t>Noarr structures</a:t>
-            </a:r>
-          </a:p>
-        </p:txBody>
-      </p:sp>
-      <p:sp>
-        <p:nvSpPr>
-          <p:cNvPr id="19" name="Rectangle 18">
-            <a:extLst>
-              <a:ext uri="{FF2B5EF4-FFF2-40B4-BE49-F238E27FC236}">
-                <a16:creationId xmlns:a16="http://schemas.microsoft.com/office/drawing/2014/main" id="{67736357-2F90-D241-51F6-C03C797EFFC2}"/>
-              </a:ext>
-            </a:extLst>
-          </p:cNvPr>
-          <p:cNvSpPr/>
-          <p:nvPr/>
-        </p:nvSpPr>
-        <p:spPr>
-          <a:xfrm>
-            <a:off x="454874" y="5508688"/>
-            <a:ext cx="3711020" cy="914400"/>
-          </a:xfrm>
-          <a:prstGeom prst="rect">
-            <a:avLst/>
-          </a:prstGeom>
-        </p:spPr>
-        <p:style>
-          <a:lnRef idx="2">
-            <a:schemeClr val="accent1">
-              <a:shade val="15000"/>
-            </a:schemeClr>
-          </a:lnRef>
-          <a:fillRef idx="1">
-            <a:schemeClr val="accent1"/>
-          </a:fillRef>
-          <a:effectRef idx="0">
-            <a:schemeClr val="accent1"/>
-          </a:effectRef>
-          <a:fontRef idx="minor">
-            <a:schemeClr val="lt1"/>
-          </a:fontRef>
-        </p:style>
-        <p:txBody>
-          <a:bodyPr rtlCol="0" anchor="ctr"/>
-          <a:lstStyle/>
-          <a:p>
-            <a:pPr algn="ctr"/>
-            <a:r>
-              <a:rPr lang="en-US" dirty="0"/>
-              <a:t>Noarr traversers</a:t>
-            </a:r>
-          </a:p>
-        </p:txBody>
-      </p:sp>
-      <p:sp>
-        <p:nvSpPr>
-          <p:cNvPr id="21" name="Rectangle 20">
-            <a:extLst>
-              <a:ext uri="{FF2B5EF4-FFF2-40B4-BE49-F238E27FC236}">
-                <a16:creationId xmlns:a16="http://schemas.microsoft.com/office/drawing/2014/main" id="{9EC73339-8B3D-25F4-18D5-E5821CB7CE8B}"/>
-              </a:ext>
-            </a:extLst>
-          </p:cNvPr>
-          <p:cNvSpPr/>
-          <p:nvPr/>
-        </p:nvSpPr>
-        <p:spPr>
-          <a:xfrm>
-            <a:off x="607274" y="5661088"/>
-            <a:ext cx="3711020" cy="914400"/>
-          </a:xfrm>
-          <a:prstGeom prst="rect">
-            <a:avLst/>
-          </a:prstGeom>
-        </p:spPr>
-        <p:style>
-          <a:lnRef idx="2">
-            <a:schemeClr val="accent1">
-              <a:shade val="15000"/>
-            </a:schemeClr>
-          </a:lnRef>
-          <a:fillRef idx="1">
-            <a:schemeClr val="accent1"/>
-          </a:fillRef>
-          <a:effectRef idx="0">
-            <a:schemeClr val="accent1"/>
-          </a:effectRef>
-          <a:fontRef idx="minor">
-            <a:schemeClr val="lt1"/>
-          </a:fontRef>
-        </p:style>
-        <p:txBody>
-          <a:bodyPr rtlCol="0" anchor="ctr"/>
-          <a:lstStyle/>
-          <a:p>
-            <a:pPr algn="ctr"/>
-            <a:r>
-              <a:rPr lang="en-US" dirty="0"/>
-              <a:t>Noarr tuning</a:t>
-            </a:r>
-          </a:p>
-        </p:txBody>
-      </p:sp>
-      <p:sp>
-        <p:nvSpPr>
-          <p:cNvPr id="23" name="Rectangle 22">
-            <a:extLst>
-              <a:ext uri="{FF2B5EF4-FFF2-40B4-BE49-F238E27FC236}">
-                <a16:creationId xmlns:a16="http://schemas.microsoft.com/office/drawing/2014/main" id="{63EC4F51-D7C0-1DFC-E94E-75AE185B7CC1}"/>
-              </a:ext>
-            </a:extLst>
-          </p:cNvPr>
-          <p:cNvSpPr/>
-          <p:nvPr/>
-        </p:nvSpPr>
-        <p:spPr>
-          <a:xfrm>
-            <a:off x="759674" y="5813488"/>
-            <a:ext cx="3711020" cy="914400"/>
-          </a:xfrm>
-          <a:prstGeom prst="rect">
-            <a:avLst/>
-          </a:prstGeom>
-        </p:spPr>
-        <p:style>
-          <a:lnRef idx="2">
-            <a:schemeClr val="accent1">
-              <a:shade val="15000"/>
-            </a:schemeClr>
-          </a:lnRef>
-          <a:fillRef idx="1">
-            <a:schemeClr val="accent1"/>
-          </a:fillRef>
-          <a:effectRef idx="0">
-            <a:schemeClr val="accent1"/>
-          </a:effectRef>
-          <a:fontRef idx="minor">
-            <a:schemeClr val="lt1"/>
-          </a:fontRef>
-        </p:style>
-        <p:txBody>
-          <a:bodyPr rtlCol="0" anchor="ctr"/>
-          <a:lstStyle/>
-          <a:p>
-            <a:pPr algn="ctr"/>
-            <a:r>
-              <a:rPr lang="en-US" dirty="0"/>
-              <a:t>Noarr-MPI</a:t>
-            </a:r>
-          </a:p>
-        </p:txBody>
-      </p:sp>
-      <p:sp>
-        <p:nvSpPr>
-          <p:cNvPr id="25" name="Rectangle 24">
-            <a:extLst>
-              <a:ext uri="{FF2B5EF4-FFF2-40B4-BE49-F238E27FC236}">
-                <a16:creationId xmlns:a16="http://schemas.microsoft.com/office/drawing/2014/main" id="{B7D64168-E19F-C04D-293D-CB07E85D29DA}"/>
-              </a:ext>
-            </a:extLst>
-          </p:cNvPr>
-          <p:cNvSpPr/>
-          <p:nvPr/>
-        </p:nvSpPr>
-        <p:spPr>
-          <a:xfrm>
-            <a:off x="4853138" y="5424788"/>
-            <a:ext cx="3711020" cy="914400"/>
-          </a:xfrm>
-          <a:prstGeom prst="rect">
-            <a:avLst/>
-          </a:prstGeom>
-        </p:spPr>
-        <p:style>
-          <a:lnRef idx="2">
-            <a:schemeClr val="accent1">
-              <a:shade val="15000"/>
-            </a:schemeClr>
-          </a:lnRef>
-          <a:fillRef idx="1">
-            <a:schemeClr val="accent1"/>
-          </a:fillRef>
-          <a:effectRef idx="0">
-            <a:schemeClr val="accent1"/>
-          </a:effectRef>
-          <a:fontRef idx="minor">
-            <a:schemeClr val="lt1"/>
-          </a:fontRef>
-        </p:style>
-        <p:txBody>
-          <a:bodyPr rtlCol="0" anchor="ctr"/>
-          <a:lstStyle/>
-          <a:p>
-            <a:pPr algn="ctr"/>
+              <a:rPr lang="en-US" dirty="0" err="1"/>
+              <a:t>Zahodit</a:t>
+            </a:r>
+            <a:endParaRPr lang="en-US" dirty="0"/>
+          </a:p>
+        </p:txBody>
+      </p:sp>
+      <p:sp>
+        <p:nvSpPr>
+          <p:cNvPr id="3" name="Content Placeholder 2">
+            <a:extLst>
+              <a:ext uri="{FF2B5EF4-FFF2-40B4-BE49-F238E27FC236}">
+                <a16:creationId xmlns:a16="http://schemas.microsoft.com/office/drawing/2014/main" id="{369E5D67-EA03-A5CA-2D82-199F178CE89C}"/>
+              </a:ext>
+            </a:extLst>
+          </p:cNvPr>
+          <p:cNvSpPr>
+            <a:spLocks noGrp="1"/>
+          </p:cNvSpPr>
+          <p:nvPr>
+            <p:ph idx="1"/>
+          </p:nvPr>
+        </p:nvSpPr>
+        <p:spPr/>
+        <p:txBody>
+          <a:bodyPr/>
+          <a:lstStyle/>
+          <a:p>
+            <a:r>
+              <a:rPr lang="en-US" dirty="0" err="1"/>
+              <a:t>Noarr</a:t>
+            </a:r>
+            <a:endParaRPr lang="en-US" dirty="0"/>
+          </a:p>
+          <a:p>
             <a:r>
               <a:rPr lang="en-US" dirty="0" err="1"/>
               <a:t>Cellato</a:t>
@@ -4580,7 +4076,7 @@
     </p:spTree>
     <p:extLst>
       <p:ext uri="{BB962C8B-B14F-4D97-AF65-F5344CB8AC3E}">
-        <p14:creationId xmlns:p14="http://schemas.microsoft.com/office/powerpoint/2010/main" val="1745489699"/>
+        <p14:creationId xmlns:p14="http://schemas.microsoft.com/office/powerpoint/2010/main" val="4085122203"/>
       </p:ext>
     </p:extLst>
   </p:cSld>
@@ -4612,6 +4108,604 @@
           <p:cNvPr id="2" name="Title 1">
             <a:extLst>
               <a:ext uri="{FF2B5EF4-FFF2-40B4-BE49-F238E27FC236}">
+                <a16:creationId xmlns:a16="http://schemas.microsoft.com/office/drawing/2014/main" id="{6447B745-9B50-DD90-5161-BD2A06CEA44B}"/>
+              </a:ext>
+            </a:extLst>
+          </p:cNvPr>
+          <p:cNvSpPr>
+            <a:spLocks noGrp="1"/>
+          </p:cNvSpPr>
+          <p:nvPr>
+            <p:ph type="title"/>
+          </p:nvPr>
+        </p:nvSpPr>
+        <p:spPr/>
+        <p:txBody>
+          <a:bodyPr/>
+          <a:lstStyle/>
+          <a:p>
+            <a:r>
+              <a:rPr lang="en-US" dirty="0"/>
+              <a:t>Contribution map</a:t>
+            </a:r>
+          </a:p>
+        </p:txBody>
+      </p:sp>
+      <p:sp>
+        <p:nvSpPr>
+          <p:cNvPr id="5" name="Rectangle 4">
+            <a:extLst>
+              <a:ext uri="{FF2B5EF4-FFF2-40B4-BE49-F238E27FC236}">
+                <a16:creationId xmlns:a16="http://schemas.microsoft.com/office/drawing/2014/main" id="{CB7F8197-FC2F-9C2A-050C-CCCB46D86C79}"/>
+              </a:ext>
+            </a:extLst>
+          </p:cNvPr>
+          <p:cNvSpPr/>
+          <p:nvPr/>
+        </p:nvSpPr>
+        <p:spPr>
+          <a:xfrm>
+            <a:off x="4240490" y="1406732"/>
+            <a:ext cx="3711020" cy="914400"/>
+          </a:xfrm>
+          <a:prstGeom prst="rect">
+            <a:avLst/>
+          </a:prstGeom>
+        </p:spPr>
+        <p:style>
+          <a:lnRef idx="2">
+            <a:schemeClr val="accent1">
+              <a:shade val="15000"/>
+            </a:schemeClr>
+          </a:lnRef>
+          <a:fillRef idx="1">
+            <a:schemeClr val="accent1"/>
+          </a:fillRef>
+          <a:effectRef idx="0">
+            <a:schemeClr val="accent1"/>
+          </a:effectRef>
+          <a:fontRef idx="minor">
+            <a:schemeClr val="lt1"/>
+          </a:fontRef>
+        </p:style>
+        <p:txBody>
+          <a:bodyPr rtlCol="0" anchor="ctr"/>
+          <a:lstStyle/>
+          <a:p>
+            <a:pPr algn="ctr"/>
+            <a:r>
+              <a:rPr lang="en-US" dirty="0"/>
+              <a:t>Separate algorithm design from performance optimization</a:t>
+            </a:r>
+          </a:p>
+        </p:txBody>
+      </p:sp>
+      <p:sp>
+        <p:nvSpPr>
+          <p:cNvPr id="7" name="Rectangle 6">
+            <a:extLst>
+              <a:ext uri="{FF2B5EF4-FFF2-40B4-BE49-F238E27FC236}">
+                <a16:creationId xmlns:a16="http://schemas.microsoft.com/office/drawing/2014/main" id="{60EC2A1A-B720-84BC-76D5-4751C09EA61A}"/>
+              </a:ext>
+            </a:extLst>
+          </p:cNvPr>
+          <p:cNvSpPr/>
+          <p:nvPr/>
+        </p:nvSpPr>
+        <p:spPr>
+          <a:xfrm>
+            <a:off x="150074" y="2971800"/>
+            <a:ext cx="3711020" cy="914400"/>
+          </a:xfrm>
+          <a:prstGeom prst="rect">
+            <a:avLst/>
+          </a:prstGeom>
+        </p:spPr>
+        <p:style>
+          <a:lnRef idx="2">
+            <a:schemeClr val="accent1">
+              <a:shade val="15000"/>
+            </a:schemeClr>
+          </a:lnRef>
+          <a:fillRef idx="1">
+            <a:schemeClr val="accent1"/>
+          </a:fillRef>
+          <a:effectRef idx="0">
+            <a:schemeClr val="accent1"/>
+          </a:effectRef>
+          <a:fontRef idx="minor">
+            <a:schemeClr val="lt1"/>
+          </a:fontRef>
+        </p:style>
+        <p:txBody>
+          <a:bodyPr rtlCol="0" anchor="ctr"/>
+          <a:lstStyle/>
+          <a:p>
+            <a:pPr algn="ctr"/>
+            <a:r>
+              <a:rPr lang="en-US" dirty="0"/>
+              <a:t>Layout- and traversal-agnostic abstractions</a:t>
+            </a:r>
+          </a:p>
+        </p:txBody>
+      </p:sp>
+      <p:sp>
+        <p:nvSpPr>
+          <p:cNvPr id="9" name="Rectangle 8">
+            <a:extLst>
+              <a:ext uri="{FF2B5EF4-FFF2-40B4-BE49-F238E27FC236}">
+                <a16:creationId xmlns:a16="http://schemas.microsoft.com/office/drawing/2014/main" id="{6DB7F776-4EDC-09F4-F04A-E586FC4B4500}"/>
+              </a:ext>
+            </a:extLst>
+          </p:cNvPr>
+          <p:cNvSpPr/>
+          <p:nvPr/>
+        </p:nvSpPr>
+        <p:spPr>
+          <a:xfrm>
+            <a:off x="7840178" y="2971800"/>
+            <a:ext cx="3711020" cy="914400"/>
+          </a:xfrm>
+          <a:prstGeom prst="rect">
+            <a:avLst/>
+          </a:prstGeom>
+        </p:spPr>
+        <p:style>
+          <a:lnRef idx="2">
+            <a:schemeClr val="accent1">
+              <a:shade val="15000"/>
+            </a:schemeClr>
+          </a:lnRef>
+          <a:fillRef idx="1">
+            <a:schemeClr val="accent1"/>
+          </a:fillRef>
+          <a:effectRef idx="0">
+            <a:schemeClr val="accent1"/>
+          </a:effectRef>
+          <a:fontRef idx="minor">
+            <a:schemeClr val="lt1"/>
+          </a:fontRef>
+        </p:style>
+        <p:txBody>
+          <a:bodyPr rtlCol="0" anchor="ctr"/>
+          <a:lstStyle/>
+          <a:p>
+            <a:pPr algn="ctr"/>
+            <a:r>
+              <a:rPr lang="en-US" dirty="0"/>
+              <a:t>LLM-assisted optimization</a:t>
+            </a:r>
+          </a:p>
+        </p:txBody>
+      </p:sp>
+      <p:sp>
+        <p:nvSpPr>
+          <p:cNvPr id="11" name="Rectangle 10">
+            <a:extLst>
+              <a:ext uri="{FF2B5EF4-FFF2-40B4-BE49-F238E27FC236}">
+                <a16:creationId xmlns:a16="http://schemas.microsoft.com/office/drawing/2014/main" id="{5B2B9BCB-5805-C1F1-AF45-681B37E6B83E}"/>
+              </a:ext>
+            </a:extLst>
+          </p:cNvPr>
+          <p:cNvSpPr/>
+          <p:nvPr/>
+        </p:nvSpPr>
+        <p:spPr>
+          <a:xfrm>
+            <a:off x="150074" y="4252912"/>
+            <a:ext cx="3711020" cy="914400"/>
+          </a:xfrm>
+          <a:prstGeom prst="rect">
+            <a:avLst/>
+          </a:prstGeom>
+        </p:spPr>
+        <p:style>
+          <a:lnRef idx="2">
+            <a:schemeClr val="accent1">
+              <a:shade val="15000"/>
+            </a:schemeClr>
+          </a:lnRef>
+          <a:fillRef idx="1">
+            <a:schemeClr val="accent1"/>
+          </a:fillRef>
+          <a:effectRef idx="0">
+            <a:schemeClr val="accent1"/>
+          </a:effectRef>
+          <a:fontRef idx="minor">
+            <a:schemeClr val="lt1"/>
+          </a:fontRef>
+        </p:style>
+        <p:txBody>
+          <a:bodyPr rtlCol="0" anchor="ctr"/>
+          <a:lstStyle/>
+          <a:p>
+            <a:pPr algn="ctr"/>
+            <a:r>
+              <a:rPr lang="en-US" dirty="0"/>
+              <a:t>Layout abstractions</a:t>
+            </a:r>
+          </a:p>
+        </p:txBody>
+      </p:sp>
+      <p:sp>
+        <p:nvSpPr>
+          <p:cNvPr id="13" name="Rectangle 12">
+            <a:extLst>
+              <a:ext uri="{FF2B5EF4-FFF2-40B4-BE49-F238E27FC236}">
+                <a16:creationId xmlns:a16="http://schemas.microsoft.com/office/drawing/2014/main" id="{31388E94-1EEB-E24E-1923-AA250880AF84}"/>
+              </a:ext>
+            </a:extLst>
+          </p:cNvPr>
+          <p:cNvSpPr/>
+          <p:nvPr/>
+        </p:nvSpPr>
+        <p:spPr>
+          <a:xfrm>
+            <a:off x="4240490" y="4252912"/>
+            <a:ext cx="3711020" cy="914400"/>
+          </a:xfrm>
+          <a:prstGeom prst="rect">
+            <a:avLst/>
+          </a:prstGeom>
+        </p:spPr>
+        <p:style>
+          <a:lnRef idx="2">
+            <a:schemeClr val="accent1">
+              <a:shade val="15000"/>
+            </a:schemeClr>
+          </a:lnRef>
+          <a:fillRef idx="1">
+            <a:schemeClr val="accent1"/>
+          </a:fillRef>
+          <a:effectRef idx="0">
+            <a:schemeClr val="accent1"/>
+          </a:effectRef>
+          <a:fontRef idx="minor">
+            <a:schemeClr val="lt1"/>
+          </a:fontRef>
+        </p:style>
+        <p:txBody>
+          <a:bodyPr rtlCol="0" anchor="ctr"/>
+          <a:lstStyle/>
+          <a:p>
+            <a:pPr algn="ctr"/>
+            <a:r>
+              <a:rPr lang="en-US" dirty="0"/>
+              <a:t>Traversal abstractions</a:t>
+            </a:r>
+          </a:p>
+        </p:txBody>
+      </p:sp>
+      <p:sp>
+        <p:nvSpPr>
+          <p:cNvPr id="15" name="Rectangle 14">
+            <a:extLst>
+              <a:ext uri="{FF2B5EF4-FFF2-40B4-BE49-F238E27FC236}">
+                <a16:creationId xmlns:a16="http://schemas.microsoft.com/office/drawing/2014/main" id="{DE8920A4-4430-6757-E41A-9BA9578DC80D}"/>
+              </a:ext>
+            </a:extLst>
+          </p:cNvPr>
+          <p:cNvSpPr/>
+          <p:nvPr/>
+        </p:nvSpPr>
+        <p:spPr>
+          <a:xfrm>
+            <a:off x="8330906" y="4252912"/>
+            <a:ext cx="3711020" cy="914400"/>
+          </a:xfrm>
+          <a:prstGeom prst="rect">
+            <a:avLst/>
+          </a:prstGeom>
+        </p:spPr>
+        <p:style>
+          <a:lnRef idx="2">
+            <a:schemeClr val="accent1">
+              <a:shade val="15000"/>
+            </a:schemeClr>
+          </a:lnRef>
+          <a:fillRef idx="1">
+            <a:schemeClr val="accent1"/>
+          </a:fillRef>
+          <a:effectRef idx="0">
+            <a:schemeClr val="accent1"/>
+          </a:effectRef>
+          <a:fontRef idx="minor">
+            <a:schemeClr val="lt1"/>
+          </a:fontRef>
+        </p:style>
+        <p:txBody>
+          <a:bodyPr rtlCol="0" anchor="ctr"/>
+          <a:lstStyle/>
+          <a:p>
+            <a:pPr algn="ctr"/>
+            <a:r>
+              <a:rPr lang="en-US" dirty="0"/>
+              <a:t>Practical aspects</a:t>
+            </a:r>
+          </a:p>
+        </p:txBody>
+      </p:sp>
+      <p:sp>
+        <p:nvSpPr>
+          <p:cNvPr id="17" name="Rectangle 16">
+            <a:extLst>
+              <a:ext uri="{FF2B5EF4-FFF2-40B4-BE49-F238E27FC236}">
+                <a16:creationId xmlns:a16="http://schemas.microsoft.com/office/drawing/2014/main" id="{D01E75A2-333B-DF95-544C-0ACF1B88882C}"/>
+              </a:ext>
+            </a:extLst>
+          </p:cNvPr>
+          <p:cNvSpPr/>
+          <p:nvPr/>
+        </p:nvSpPr>
+        <p:spPr>
+          <a:xfrm>
+            <a:off x="302474" y="5356288"/>
+            <a:ext cx="3711020" cy="914400"/>
+          </a:xfrm>
+          <a:prstGeom prst="rect">
+            <a:avLst/>
+          </a:prstGeom>
+        </p:spPr>
+        <p:style>
+          <a:lnRef idx="2">
+            <a:schemeClr val="accent1">
+              <a:shade val="15000"/>
+            </a:schemeClr>
+          </a:lnRef>
+          <a:fillRef idx="1">
+            <a:schemeClr val="accent1"/>
+          </a:fillRef>
+          <a:effectRef idx="0">
+            <a:schemeClr val="accent1"/>
+          </a:effectRef>
+          <a:fontRef idx="minor">
+            <a:schemeClr val="lt1"/>
+          </a:fontRef>
+        </p:style>
+        <p:txBody>
+          <a:bodyPr rtlCol="0" anchor="ctr"/>
+          <a:lstStyle/>
+          <a:p>
+            <a:pPr algn="ctr"/>
+            <a:r>
+              <a:rPr lang="en-US" dirty="0"/>
+              <a:t>Noarr structures</a:t>
+            </a:r>
+          </a:p>
+        </p:txBody>
+      </p:sp>
+      <p:sp>
+        <p:nvSpPr>
+          <p:cNvPr id="19" name="Rectangle 18">
+            <a:extLst>
+              <a:ext uri="{FF2B5EF4-FFF2-40B4-BE49-F238E27FC236}">
+                <a16:creationId xmlns:a16="http://schemas.microsoft.com/office/drawing/2014/main" id="{67736357-2F90-D241-51F6-C03C797EFFC2}"/>
+              </a:ext>
+            </a:extLst>
+          </p:cNvPr>
+          <p:cNvSpPr/>
+          <p:nvPr/>
+        </p:nvSpPr>
+        <p:spPr>
+          <a:xfrm>
+            <a:off x="454874" y="5508688"/>
+            <a:ext cx="3711020" cy="914400"/>
+          </a:xfrm>
+          <a:prstGeom prst="rect">
+            <a:avLst/>
+          </a:prstGeom>
+        </p:spPr>
+        <p:style>
+          <a:lnRef idx="2">
+            <a:schemeClr val="accent1">
+              <a:shade val="15000"/>
+            </a:schemeClr>
+          </a:lnRef>
+          <a:fillRef idx="1">
+            <a:schemeClr val="accent1"/>
+          </a:fillRef>
+          <a:effectRef idx="0">
+            <a:schemeClr val="accent1"/>
+          </a:effectRef>
+          <a:fontRef idx="minor">
+            <a:schemeClr val="lt1"/>
+          </a:fontRef>
+        </p:style>
+        <p:txBody>
+          <a:bodyPr rtlCol="0" anchor="ctr"/>
+          <a:lstStyle/>
+          <a:p>
+            <a:pPr algn="ctr"/>
+            <a:r>
+              <a:rPr lang="en-US" dirty="0"/>
+              <a:t>Noarr traversers</a:t>
+            </a:r>
+          </a:p>
+        </p:txBody>
+      </p:sp>
+      <p:sp>
+        <p:nvSpPr>
+          <p:cNvPr id="21" name="Rectangle 20">
+            <a:extLst>
+              <a:ext uri="{FF2B5EF4-FFF2-40B4-BE49-F238E27FC236}">
+                <a16:creationId xmlns:a16="http://schemas.microsoft.com/office/drawing/2014/main" id="{9EC73339-8B3D-25F4-18D5-E5821CB7CE8B}"/>
+              </a:ext>
+            </a:extLst>
+          </p:cNvPr>
+          <p:cNvSpPr/>
+          <p:nvPr/>
+        </p:nvSpPr>
+        <p:spPr>
+          <a:xfrm>
+            <a:off x="607274" y="5661088"/>
+            <a:ext cx="3711020" cy="914400"/>
+          </a:xfrm>
+          <a:prstGeom prst="rect">
+            <a:avLst/>
+          </a:prstGeom>
+        </p:spPr>
+        <p:style>
+          <a:lnRef idx="2">
+            <a:schemeClr val="accent1">
+              <a:shade val="15000"/>
+            </a:schemeClr>
+          </a:lnRef>
+          <a:fillRef idx="1">
+            <a:schemeClr val="accent1"/>
+          </a:fillRef>
+          <a:effectRef idx="0">
+            <a:schemeClr val="accent1"/>
+          </a:effectRef>
+          <a:fontRef idx="minor">
+            <a:schemeClr val="lt1"/>
+          </a:fontRef>
+        </p:style>
+        <p:txBody>
+          <a:bodyPr rtlCol="0" anchor="ctr"/>
+          <a:lstStyle/>
+          <a:p>
+            <a:pPr algn="ctr"/>
+            <a:r>
+              <a:rPr lang="en-US" dirty="0"/>
+              <a:t>Noarr tuning</a:t>
+            </a:r>
+          </a:p>
+        </p:txBody>
+      </p:sp>
+      <p:sp>
+        <p:nvSpPr>
+          <p:cNvPr id="23" name="Rectangle 22">
+            <a:extLst>
+              <a:ext uri="{FF2B5EF4-FFF2-40B4-BE49-F238E27FC236}">
+                <a16:creationId xmlns:a16="http://schemas.microsoft.com/office/drawing/2014/main" id="{63EC4F51-D7C0-1DFC-E94E-75AE185B7CC1}"/>
+              </a:ext>
+            </a:extLst>
+          </p:cNvPr>
+          <p:cNvSpPr/>
+          <p:nvPr/>
+        </p:nvSpPr>
+        <p:spPr>
+          <a:xfrm>
+            <a:off x="759674" y="5813488"/>
+            <a:ext cx="3711020" cy="914400"/>
+          </a:xfrm>
+          <a:prstGeom prst="rect">
+            <a:avLst/>
+          </a:prstGeom>
+        </p:spPr>
+        <p:style>
+          <a:lnRef idx="2">
+            <a:schemeClr val="accent1">
+              <a:shade val="15000"/>
+            </a:schemeClr>
+          </a:lnRef>
+          <a:fillRef idx="1">
+            <a:schemeClr val="accent1"/>
+          </a:fillRef>
+          <a:effectRef idx="0">
+            <a:schemeClr val="accent1"/>
+          </a:effectRef>
+          <a:fontRef idx="minor">
+            <a:schemeClr val="lt1"/>
+          </a:fontRef>
+        </p:style>
+        <p:txBody>
+          <a:bodyPr rtlCol="0" anchor="ctr"/>
+          <a:lstStyle/>
+          <a:p>
+            <a:pPr algn="ctr"/>
+            <a:r>
+              <a:rPr lang="en-US" dirty="0"/>
+              <a:t>Noarr-MPI</a:t>
+            </a:r>
+          </a:p>
+        </p:txBody>
+      </p:sp>
+      <p:sp>
+        <p:nvSpPr>
+          <p:cNvPr id="25" name="Rectangle 24">
+            <a:extLst>
+              <a:ext uri="{FF2B5EF4-FFF2-40B4-BE49-F238E27FC236}">
+                <a16:creationId xmlns:a16="http://schemas.microsoft.com/office/drawing/2014/main" id="{B7D64168-E19F-C04D-293D-CB07E85D29DA}"/>
+              </a:ext>
+            </a:extLst>
+          </p:cNvPr>
+          <p:cNvSpPr/>
+          <p:nvPr/>
+        </p:nvSpPr>
+        <p:spPr>
+          <a:xfrm>
+            <a:off x="4853138" y="5424788"/>
+            <a:ext cx="3711020" cy="914400"/>
+          </a:xfrm>
+          <a:prstGeom prst="rect">
+            <a:avLst/>
+          </a:prstGeom>
+        </p:spPr>
+        <p:style>
+          <a:lnRef idx="2">
+            <a:schemeClr val="accent1">
+              <a:shade val="15000"/>
+            </a:schemeClr>
+          </a:lnRef>
+          <a:fillRef idx="1">
+            <a:schemeClr val="accent1"/>
+          </a:fillRef>
+          <a:effectRef idx="0">
+            <a:schemeClr val="accent1"/>
+          </a:effectRef>
+          <a:fontRef idx="minor">
+            <a:schemeClr val="lt1"/>
+          </a:fontRef>
+        </p:style>
+        <p:txBody>
+          <a:bodyPr rtlCol="0" anchor="ctr"/>
+          <a:lstStyle/>
+          <a:p>
+            <a:pPr algn="ctr"/>
+            <a:r>
+              <a:rPr lang="en-US" dirty="0" err="1"/>
+              <a:t>Cellato</a:t>
+            </a:r>
+            <a:endParaRPr lang="en-US" dirty="0"/>
+          </a:p>
+        </p:txBody>
+      </p:sp>
+    </p:spTree>
+    <p:extLst>
+      <p:ext uri="{BB962C8B-B14F-4D97-AF65-F5344CB8AC3E}">
+        <p14:creationId xmlns:p14="http://schemas.microsoft.com/office/powerpoint/2010/main" val="1745489699"/>
+      </p:ext>
+    </p:extLst>
+  </p:cSld>
+  <p:clrMapOvr>
+    <a:masterClrMapping/>
+  </p:clrMapOvr>
+</p:sld>
+</file>
+
+<file path=ppt/slides/slide13.xml><?xml version="1.0" encoding="utf-8"?>
+<p:sld xmlns:a="http://schemas.openxmlformats.org/drawingml/2006/main" xmlns:r="http://schemas.openxmlformats.org/officeDocument/2006/relationships" xmlns:p="http://schemas.openxmlformats.org/presentationml/2006/main">
+  <p:cSld>
+    <p:spTree>
+      <p:nvGrpSpPr>
+        <p:cNvPr id="1" name=""/>
+        <p:cNvGrpSpPr/>
+        <p:nvPr/>
+      </p:nvGrpSpPr>
+      <p:grpSpPr>
+        <a:xfrm>
+          <a:off x="0" y="0"/>
+          <a:ext cx="0" cy="0"/>
+          <a:chOff x="0" y="0"/>
+          <a:chExt cx="0" cy="0"/>
+        </a:xfrm>
+      </p:grpSpPr>
+      <p:sp>
+        <p:nvSpPr>
+          <p:cNvPr id="2" name="Title 1">
+            <a:extLst>
+              <a:ext uri="{FF2B5EF4-FFF2-40B4-BE49-F238E27FC236}">
                 <a16:creationId xmlns:a16="http://schemas.microsoft.com/office/drawing/2014/main" id="{63B07F39-5957-124B-D20D-4A155E0E07D1}"/>
               </a:ext>
             </a:extLst>
@@ -4703,7 +4797,7 @@
 </p:sld>
 </file>
 
-<file path=ppt/slides/slide13.xml><?xml version="1.0" encoding="utf-8"?>
+<file path=ppt/slides/slide14.xml><?xml version="1.0" encoding="utf-8"?>
 <p:sld xmlns:a="http://schemas.openxmlformats.org/drawingml/2006/main" xmlns:r="http://schemas.openxmlformats.org/officeDocument/2006/relationships" xmlns:p="http://schemas.openxmlformats.org/presentationml/2006/main">
   <p:cSld>
     <p:spTree>
@@ -5291,7 +5385,9 @@
         </p:nvSpPr>
         <p:spPr/>
         <p:txBody>
-          <a:bodyPr/>
+          <a:bodyPr>
+            <a:normAutofit/>
+          </a:bodyPr>
           <a:lstStyle/>
           <a:p>
             <a:r>
@@ -5351,22 +5447,61 @@
             <a:pPr lvl="2"/>
             <a:r>
               <a:rPr lang="en-US" dirty="0"/>
-              <a:t>Separated from memory management</a:t>
-            </a:r>
+              <a:t>Separated from memory management </a:t>
+            </a:r>
+            <a:r>
+              <a:rPr lang="en-US" dirty="0">
+                <a:sym typeface="Wingdings" panose="05000000000000000000" pitchFamily="2" charset="2"/>
+              </a:rPr>
+              <a:t> can be paired with </a:t>
+            </a:r>
+            <a:r>
+              <a:rPr lang="en-US" dirty="0" err="1">
+                <a:sym typeface="Wingdings" panose="05000000000000000000" pitchFamily="2" charset="2"/>
+              </a:rPr>
+              <a:t>mmap</a:t>
+            </a:r>
+            <a:r>
+              <a:rPr lang="en-US" dirty="0">
+                <a:sym typeface="Wingdings" panose="05000000000000000000" pitchFamily="2" charset="2"/>
+              </a:rPr>
+              <a:t>, __shared__</a:t>
+            </a:r>
+            <a:endParaRPr lang="en-US" dirty="0"/>
           </a:p>
           <a:p>
             <a:pPr lvl="1"/>
             <a:r>
               <a:rPr lang="en-US" dirty="0"/>
-              <a:t>Effortless static extents</a:t>
+              <a:t>Effortless static extents </a:t>
+            </a:r>
+            <a:r>
+              <a:rPr lang="en-US" dirty="0">
+                <a:sym typeface="Wingdings" panose="05000000000000000000" pitchFamily="2" charset="2"/>
+              </a:rPr>
+              <a:t> better compiler optimizations, faster</a:t>
+            </a:r>
+          </a:p>
+          <a:p>
+            <a:pPr lvl="2"/>
+            <a:r>
+              <a:rPr lang="en-US" dirty="0"/>
+              <a:t>Static parameters encoded in type (no overhead until used)</a:t>
             </a:r>
           </a:p>
           <a:p>
             <a:pPr lvl="1"/>
             <a:r>
               <a:rPr lang="en-US" dirty="0"/>
-              <a:t>Based on functional composition algebra</a:t>
-            </a:r>
+              <a:t>Based on functional composition algebra </a:t>
+            </a:r>
+            <a:r>
+              <a:rPr lang="en-US" dirty="0">
+                <a:sym typeface="Wingdings" panose="05000000000000000000" pitchFamily="2" charset="2"/>
+              </a:rPr>
+              <a:t> easily extensible/reusable</a:t>
+            </a:r>
+            <a:endParaRPr lang="en-US" dirty="0"/>
           </a:p>
           <a:p>
             <a:pPr lvl="2"/>
@@ -5406,8 +5541,14 @@
           <a:p>
             <a:pPr lvl="1"/>
             <a:r>
-              <a:rPr lang="en-US"/>
-              <a:t>Named dimensions</a:t>
+              <a:rPr lang="en-US" dirty="0"/>
+              <a:t>Named dimensions </a:t>
+            </a:r>
+            <a:r>
+              <a:rPr lang="en-US" dirty="0">
+                <a:sym typeface="Wingdings" panose="05000000000000000000" pitchFamily="2" charset="2"/>
+              </a:rPr>
+              <a:t> reasonable API</a:t>
             </a:r>
             <a:endParaRPr lang="en-US" dirty="0"/>
           </a:p>
@@ -5427,6 +5568,139 @@
 </file>
 
 <file path=ppt/slides/slide5.xml><?xml version="1.0" encoding="utf-8"?>
+<p:sld xmlns:a="http://schemas.openxmlformats.org/drawingml/2006/main" xmlns:r="http://schemas.openxmlformats.org/officeDocument/2006/relationships" xmlns:p="http://schemas.openxmlformats.org/presentationml/2006/main">
+  <p:cSld>
+    <p:spTree>
+      <p:nvGrpSpPr>
+        <p:cNvPr id="1" name=""/>
+        <p:cNvGrpSpPr/>
+        <p:nvPr/>
+      </p:nvGrpSpPr>
+      <p:grpSpPr>
+        <a:xfrm>
+          <a:off x="0" y="0"/>
+          <a:ext cx="0" cy="0"/>
+          <a:chOff x="0" y="0"/>
+          <a:chExt cx="0" cy="0"/>
+        </a:xfrm>
+      </p:grpSpPr>
+      <p:sp>
+        <p:nvSpPr>
+          <p:cNvPr id="2" name="Title 1">
+            <a:extLst>
+              <a:ext uri="{FF2B5EF4-FFF2-40B4-BE49-F238E27FC236}">
+                <a16:creationId xmlns:a16="http://schemas.microsoft.com/office/drawing/2014/main" id="{C266F341-5BBA-043E-301E-387913EC1471}"/>
+              </a:ext>
+            </a:extLst>
+          </p:cNvPr>
+          <p:cNvSpPr>
+            <a:spLocks noGrp="1"/>
+          </p:cNvSpPr>
+          <p:nvPr>
+            <p:ph type="title"/>
+          </p:nvPr>
+        </p:nvSpPr>
+        <p:spPr/>
+        <p:txBody>
+          <a:bodyPr/>
+          <a:lstStyle/>
+          <a:p>
+            <a:endParaRPr lang="en-US" dirty="0"/>
+          </a:p>
+        </p:txBody>
+      </p:sp>
+      <p:sp>
+        <p:nvSpPr>
+          <p:cNvPr id="3" name="Content Placeholder 2">
+            <a:extLst>
+              <a:ext uri="{FF2B5EF4-FFF2-40B4-BE49-F238E27FC236}">
+                <a16:creationId xmlns:a16="http://schemas.microsoft.com/office/drawing/2014/main" id="{871CC203-309F-C580-057C-3B0A30FCD371}"/>
+              </a:ext>
+            </a:extLst>
+          </p:cNvPr>
+          <p:cNvSpPr>
+            <a:spLocks noGrp="1"/>
+          </p:cNvSpPr>
+          <p:nvPr>
+            <p:ph idx="1"/>
+          </p:nvPr>
+        </p:nvSpPr>
+        <p:spPr/>
+        <p:txBody>
+          <a:bodyPr/>
+          <a:lstStyle/>
+          <a:p>
+            <a:r>
+              <a:rPr lang="en-US" dirty="0"/>
+              <a:t>In many cases, changing traversals easier than structures</a:t>
+            </a:r>
+          </a:p>
+          <a:p>
+            <a:r>
+              <a:rPr lang="en-US" dirty="0"/>
+              <a:t>So focus on traversals</a:t>
+            </a:r>
+          </a:p>
+          <a:p>
+            <a:r>
+              <a:rPr lang="en-US" dirty="0"/>
+              <a:t>Traversal transformations can use the same principles</a:t>
+            </a:r>
+          </a:p>
+          <a:p>
+            <a:r>
+              <a:rPr lang="en-US" dirty="0"/>
+              <a:t>Traversers: </a:t>
+            </a:r>
+            <a:r>
+              <a:rPr lang="en-US" dirty="0" err="1"/>
+              <a:t>kinda</a:t>
+            </a:r>
+            <a:r>
+              <a:rPr lang="en-US" dirty="0"/>
+              <a:t> like iterators or range views</a:t>
+            </a:r>
+          </a:p>
+          <a:p>
+            <a:r>
+              <a:rPr lang="en-US" dirty="0"/>
+              <a:t>Extending transformations: blocking, spans, renaming, …</a:t>
+            </a:r>
+          </a:p>
+          <a:p>
+            <a:r>
+              <a:rPr lang="en-US" dirty="0"/>
+              <a:t>Simplifies parallelization (on TBB and CUDA)</a:t>
+            </a:r>
+          </a:p>
+          <a:p>
+            <a:pPr lvl="1"/>
+            <a:r>
+              <a:rPr lang="en-US" dirty="0"/>
+              <a:t>(Named) dimensions of traversal can bind </a:t>
+            </a:r>
+            <a:r>
+              <a:rPr lang="en-US"/>
+              <a:t>to dimension of the para BE</a:t>
+            </a:r>
+            <a:endParaRPr lang="en-US" dirty="0"/>
+          </a:p>
+        </p:txBody>
+      </p:sp>
+    </p:spTree>
+    <p:extLst>
+      <p:ext uri="{BB962C8B-B14F-4D97-AF65-F5344CB8AC3E}">
+        <p14:creationId xmlns:p14="http://schemas.microsoft.com/office/powerpoint/2010/main" val="2126121211"/>
+      </p:ext>
+    </p:extLst>
+  </p:cSld>
+  <p:clrMapOvr>
+    <a:masterClrMapping/>
+  </p:clrMapOvr>
+</p:sld>
+</file>
+
+<file path=ppt/slides/slide6.xml><?xml version="1.0" encoding="utf-8"?>
 <p:sld xmlns:a="http://schemas.openxmlformats.org/drawingml/2006/main" xmlns:r="http://schemas.openxmlformats.org/officeDocument/2006/relationships" xmlns:p="http://schemas.openxmlformats.org/presentationml/2006/main">
   <p:cSld>
     <p:spTree>
@@ -5587,92 +5861,6 @@
     <p:extLst>
       <p:ext uri="{BB962C8B-B14F-4D97-AF65-F5344CB8AC3E}">
         <p14:creationId xmlns:p14="http://schemas.microsoft.com/office/powerpoint/2010/main" val="1408920348"/>
-      </p:ext>
-    </p:extLst>
-  </p:cSld>
-  <p:clrMapOvr>
-    <a:masterClrMapping/>
-  </p:clrMapOvr>
-</p:sld>
-</file>
-
-<file path=ppt/slides/slide6.xml><?xml version="1.0" encoding="utf-8"?>
-<p:sld xmlns:a="http://schemas.openxmlformats.org/drawingml/2006/main" xmlns:r="http://schemas.openxmlformats.org/officeDocument/2006/relationships" xmlns:p="http://schemas.openxmlformats.org/presentationml/2006/main">
-  <p:cSld>
-    <p:spTree>
-      <p:nvGrpSpPr>
-        <p:cNvPr id="1" name=""/>
-        <p:cNvGrpSpPr/>
-        <p:nvPr/>
-      </p:nvGrpSpPr>
-      <p:grpSpPr>
-        <a:xfrm>
-          <a:off x="0" y="0"/>
-          <a:ext cx="0" cy="0"/>
-          <a:chOff x="0" y="0"/>
-          <a:chExt cx="0" cy="0"/>
-        </a:xfrm>
-      </p:grpSpPr>
-      <p:sp>
-        <p:nvSpPr>
-          <p:cNvPr id="2" name="Title 1">
-            <a:extLst>
-              <a:ext uri="{FF2B5EF4-FFF2-40B4-BE49-F238E27FC236}">
-                <a16:creationId xmlns:a16="http://schemas.microsoft.com/office/drawing/2014/main" id="{BC500110-1A1D-46C5-865E-8C33FFF09E26}"/>
-              </a:ext>
-            </a:extLst>
-          </p:cNvPr>
-          <p:cNvSpPr>
-            <a:spLocks noGrp="1"/>
-          </p:cNvSpPr>
-          <p:nvPr>
-            <p:ph type="title"/>
-          </p:nvPr>
-        </p:nvSpPr>
-        <p:spPr/>
-        <p:txBody>
-          <a:bodyPr/>
-          <a:lstStyle/>
-          <a:p>
-            <a:r>
-              <a:rPr lang="en-US" dirty="0"/>
-              <a:t>Layout-agnostic design</a:t>
-            </a:r>
-          </a:p>
-        </p:txBody>
-      </p:sp>
-      <p:sp>
-        <p:nvSpPr>
-          <p:cNvPr id="3" name="Content Placeholder 2">
-            <a:extLst>
-              <a:ext uri="{FF2B5EF4-FFF2-40B4-BE49-F238E27FC236}">
-                <a16:creationId xmlns:a16="http://schemas.microsoft.com/office/drawing/2014/main" id="{BC98E21C-63B1-8313-A72D-D4A24D26FBA1}"/>
-              </a:ext>
-            </a:extLst>
-          </p:cNvPr>
-          <p:cNvSpPr>
-            <a:spLocks noGrp="1"/>
-          </p:cNvSpPr>
-          <p:nvPr>
-            <p:ph idx="1"/>
-          </p:nvPr>
-        </p:nvSpPr>
-        <p:spPr/>
-        <p:txBody>
-          <a:bodyPr/>
-          <a:lstStyle/>
-          <a:p>
-            <a:r>
-              <a:rPr lang="en-US" dirty="0"/>
-              <a:t>Algorithm with explicit offset calculations × Algorithm with logical indices</a:t>
-            </a:r>
-          </a:p>
-        </p:txBody>
-      </p:sp>
-    </p:spTree>
-    <p:extLst>
-      <p:ext uri="{BB962C8B-B14F-4D97-AF65-F5344CB8AC3E}">
-        <p14:creationId xmlns:p14="http://schemas.microsoft.com/office/powerpoint/2010/main" val="3503651732"/>
       </p:ext>
     </p:extLst>
   </p:cSld>
@@ -5704,7 +5892,7 @@
           <p:cNvPr id="2" name="Title 1">
             <a:extLst>
               <a:ext uri="{FF2B5EF4-FFF2-40B4-BE49-F238E27FC236}">
-                <a16:creationId xmlns:a16="http://schemas.microsoft.com/office/drawing/2014/main" id="{F794F90E-47C1-8163-3DF3-3F88A625B905}"/>
+                <a16:creationId xmlns:a16="http://schemas.microsoft.com/office/drawing/2014/main" id="{BC500110-1A1D-46C5-865E-8C33FFF09E26}"/>
               </a:ext>
             </a:extLst>
           </p:cNvPr>
@@ -5722,7 +5910,7 @@
           <a:p>
             <a:r>
               <a:rPr lang="en-US" dirty="0"/>
-              <a:t>Traversal-agnostic design</a:t>
+              <a:t>Layout-agnostic design</a:t>
             </a:r>
           </a:p>
         </p:txBody>
@@ -5732,7 +5920,7 @@
           <p:cNvPr id="3" name="Content Placeholder 2">
             <a:extLst>
               <a:ext uri="{FF2B5EF4-FFF2-40B4-BE49-F238E27FC236}">
-                <a16:creationId xmlns:a16="http://schemas.microsoft.com/office/drawing/2014/main" id="{3821D725-871B-DFB5-1476-7BE78B119576}"/>
+                <a16:creationId xmlns:a16="http://schemas.microsoft.com/office/drawing/2014/main" id="{BC98E21C-63B1-8313-A72D-D4A24D26FBA1}"/>
               </a:ext>
             </a:extLst>
           </p:cNvPr>
@@ -5750,7 +5938,7 @@
           <a:p>
             <a:r>
               <a:rPr lang="en-US" dirty="0"/>
-              <a:t>We can go even further</a:t>
+              <a:t>Algorithm with explicit offset calculations × Algorithm with logical indices</a:t>
             </a:r>
           </a:p>
         </p:txBody>
@@ -5758,7 +5946,7 @@
     </p:spTree>
     <p:extLst>
       <p:ext uri="{BB962C8B-B14F-4D97-AF65-F5344CB8AC3E}">
-        <p14:creationId xmlns:p14="http://schemas.microsoft.com/office/powerpoint/2010/main" val="3026343622"/>
+        <p14:creationId xmlns:p14="http://schemas.microsoft.com/office/powerpoint/2010/main" val="3503651732"/>
       </p:ext>
     </p:extLst>
   </p:cSld>
@@ -5790,7 +5978,7 @@
           <p:cNvPr id="2" name="Title 1">
             <a:extLst>
               <a:ext uri="{FF2B5EF4-FFF2-40B4-BE49-F238E27FC236}">
-                <a16:creationId xmlns:a16="http://schemas.microsoft.com/office/drawing/2014/main" id="{3844D8EA-565C-C8A0-F333-6EBD085AC735}"/>
+                <a16:creationId xmlns:a16="http://schemas.microsoft.com/office/drawing/2014/main" id="{F794F90E-47C1-8163-3DF3-3F88A625B905}"/>
               </a:ext>
             </a:extLst>
           </p:cNvPr>
@@ -5808,7 +5996,7 @@
           <a:p>
             <a:r>
               <a:rPr lang="en-US" dirty="0"/>
-              <a:t>Proposed abstractions</a:t>
+              <a:t>Traversal-agnostic design</a:t>
             </a:r>
           </a:p>
         </p:txBody>
@@ -5818,7 +6006,7 @@
           <p:cNvPr id="3" name="Content Placeholder 2">
             <a:extLst>
               <a:ext uri="{FF2B5EF4-FFF2-40B4-BE49-F238E27FC236}">
-                <a16:creationId xmlns:a16="http://schemas.microsoft.com/office/drawing/2014/main" id="{0B0BC514-DFF4-C541-7399-85275B2EB075}"/>
+                <a16:creationId xmlns:a16="http://schemas.microsoft.com/office/drawing/2014/main" id="{3821D725-871B-DFB5-1476-7BE78B119576}"/>
               </a:ext>
             </a:extLst>
           </p:cNvPr>
@@ -5836,99 +6024,7 @@
           <a:p>
             <a:r>
               <a:rPr lang="en-US" dirty="0"/>
-              <a:t>Layout abstractions</a:t>
-            </a:r>
-          </a:p>
-          <a:p>
-            <a:r>
-              <a:rPr lang="en-US" dirty="0"/>
-              <a:t>Traversal abstractions</a:t>
-            </a:r>
-          </a:p>
-          <a:p>
-            <a:endParaRPr lang="en-US" dirty="0"/>
-          </a:p>
-          <a:p>
-            <a:r>
-              <a:rPr lang="en-US" dirty="0"/>
-              <a:t>Extensions</a:t>
-            </a:r>
-          </a:p>
-          <a:p>
-            <a:pPr lvl="1"/>
-            <a:r>
-              <a:rPr lang="en-US" dirty="0"/>
-              <a:t>? Practical aspects; </a:t>
-            </a:r>
-            <a:r>
-              <a:rPr lang="en-US" dirty="0">
-                <a:sym typeface="Wingdings" panose="05000000000000000000" pitchFamily="2" charset="2"/>
-              </a:rPr>
-              <a:t> autotuning</a:t>
-            </a:r>
-            <a:endParaRPr lang="en-US" dirty="0"/>
-          </a:p>
-          <a:p>
-            <a:pPr lvl="1"/>
-            <a:r>
-              <a:rPr lang="en-US" dirty="0"/>
-              <a:t>Distributed computing</a:t>
-            </a:r>
-          </a:p>
-          <a:p>
-            <a:endParaRPr lang="en-US" dirty="0"/>
-          </a:p>
-          <a:p>
-            <a:r>
-              <a:rPr lang="en-US" dirty="0"/>
-              <a:t>Knowledge </a:t>
-            </a:r>
-            <a:r>
-              <a:rPr lang="en-US" dirty="0" err="1"/>
-              <a:t>neco</a:t>
-            </a:r>
-            <a:r>
-              <a:rPr lang="en-US" dirty="0"/>
-              <a:t> (</a:t>
-            </a:r>
-            <a:r>
-              <a:rPr lang="en-US" dirty="0" err="1"/>
-              <a:t>metaprogramovani</a:t>
-            </a:r>
-            <a:r>
-              <a:rPr lang="en-US" dirty="0"/>
-              <a:t>, </a:t>
-            </a:r>
-            <a:r>
-              <a:rPr lang="en-US" dirty="0" err="1"/>
-              <a:t>stavebni</a:t>
-            </a:r>
-            <a:r>
-              <a:rPr lang="en-US" dirty="0"/>
-              <a:t> </a:t>
-            </a:r>
-            <a:r>
-              <a:rPr lang="en-US" dirty="0" err="1"/>
-              <a:t>bloky</a:t>
-            </a:r>
-            <a:r>
-              <a:rPr lang="en-US" dirty="0"/>
-              <a:t>, </a:t>
-            </a:r>
-            <a:r>
-              <a:rPr lang="en-US" dirty="0" err="1"/>
-              <a:t>traversery</a:t>
-            </a:r>
-            <a:r>
-              <a:rPr lang="en-US" dirty="0"/>
-              <a:t>?)</a:t>
-            </a:r>
-          </a:p>
-          <a:p>
-            <a:pPr lvl="1"/>
-            <a:r>
-              <a:rPr lang="en-US" dirty="0"/>
-              <a:t>CA computations (</a:t>
+              <a:t>We can go even further</a:t>
             </a:r>
           </a:p>
         </p:txBody>
@@ -5936,7 +6032,7 @@
     </p:spTree>
     <p:extLst>
       <p:ext uri="{BB962C8B-B14F-4D97-AF65-F5344CB8AC3E}">
-        <p14:creationId xmlns:p14="http://schemas.microsoft.com/office/powerpoint/2010/main" val="2195190930"/>
+        <p14:creationId xmlns:p14="http://schemas.microsoft.com/office/powerpoint/2010/main" val="3026343622"/>
       </p:ext>
     </p:extLst>
   </p:cSld>
@@ -5968,7 +6064,7 @@
           <p:cNvPr id="2" name="Title 1">
             <a:extLst>
               <a:ext uri="{FF2B5EF4-FFF2-40B4-BE49-F238E27FC236}">
-                <a16:creationId xmlns:a16="http://schemas.microsoft.com/office/drawing/2014/main" id="{1CFD8E19-FCBD-3C1F-9804-55F9EF315364}"/>
+                <a16:creationId xmlns:a16="http://schemas.microsoft.com/office/drawing/2014/main" id="{3844D8EA-565C-C8A0-F333-6EBD085AC735}"/>
               </a:ext>
             </a:extLst>
           </p:cNvPr>
@@ -5986,7 +6082,7 @@
           <a:p>
             <a:r>
               <a:rPr lang="en-US" dirty="0"/>
-              <a:t>LLMs in algorithm design</a:t>
+              <a:t>Proposed abstractions</a:t>
             </a:r>
           </a:p>
         </p:txBody>
@@ -5996,7 +6092,7 @@
           <p:cNvPr id="3" name="Content Placeholder 2">
             <a:extLst>
               <a:ext uri="{FF2B5EF4-FFF2-40B4-BE49-F238E27FC236}">
-                <a16:creationId xmlns:a16="http://schemas.microsoft.com/office/drawing/2014/main" id="{64F2D09B-2F00-3457-9D41-D2EAB2BD84E5}"/>
+                <a16:creationId xmlns:a16="http://schemas.microsoft.com/office/drawing/2014/main" id="{0B0BC514-DFF4-C541-7399-85275B2EB075}"/>
               </a:ext>
             </a:extLst>
           </p:cNvPr>
@@ -6014,13 +6110,99 @@
           <a:p>
             <a:r>
               <a:rPr lang="en-US" dirty="0"/>
-              <a:t>Tutoring LLMs for CUDA optimization</a:t>
-            </a:r>
-          </a:p>
-          <a:p>
-            <a:r>
-              <a:rPr lang="en-US" dirty="0"/>
-              <a:t>LLMs and abstractions</a:t>
+              <a:t>Layout abstractions</a:t>
+            </a:r>
+          </a:p>
+          <a:p>
+            <a:r>
+              <a:rPr lang="en-US" dirty="0"/>
+              <a:t>Traversal abstractions</a:t>
+            </a:r>
+          </a:p>
+          <a:p>
+            <a:endParaRPr lang="en-US" dirty="0"/>
+          </a:p>
+          <a:p>
+            <a:r>
+              <a:rPr lang="en-US" dirty="0"/>
+              <a:t>Extensions</a:t>
+            </a:r>
+          </a:p>
+          <a:p>
+            <a:pPr lvl="1"/>
+            <a:r>
+              <a:rPr lang="en-US" dirty="0"/>
+              <a:t>? Practical aspects; </a:t>
+            </a:r>
+            <a:r>
+              <a:rPr lang="en-US" dirty="0">
+                <a:sym typeface="Wingdings" panose="05000000000000000000" pitchFamily="2" charset="2"/>
+              </a:rPr>
+              <a:t> autotuning</a:t>
+            </a:r>
+            <a:endParaRPr lang="en-US" dirty="0"/>
+          </a:p>
+          <a:p>
+            <a:pPr lvl="1"/>
+            <a:r>
+              <a:rPr lang="en-US" dirty="0"/>
+              <a:t>Distributed computing</a:t>
+            </a:r>
+          </a:p>
+          <a:p>
+            <a:endParaRPr lang="en-US" dirty="0"/>
+          </a:p>
+          <a:p>
+            <a:r>
+              <a:rPr lang="en-US" dirty="0"/>
+              <a:t>Knowledge </a:t>
+            </a:r>
+            <a:r>
+              <a:rPr lang="en-US" dirty="0" err="1"/>
+              <a:t>neco</a:t>
+            </a:r>
+            <a:r>
+              <a:rPr lang="en-US" dirty="0"/>
+              <a:t> (</a:t>
+            </a:r>
+            <a:r>
+              <a:rPr lang="en-US" dirty="0" err="1"/>
+              <a:t>metaprogramovani</a:t>
+            </a:r>
+            <a:r>
+              <a:rPr lang="en-US" dirty="0"/>
+              <a:t>, </a:t>
+            </a:r>
+            <a:r>
+              <a:rPr lang="en-US" dirty="0" err="1"/>
+              <a:t>stavebni</a:t>
+            </a:r>
+            <a:r>
+              <a:rPr lang="en-US" dirty="0"/>
+              <a:t> </a:t>
+            </a:r>
+            <a:r>
+              <a:rPr lang="en-US" dirty="0" err="1"/>
+              <a:t>bloky</a:t>
+            </a:r>
+            <a:r>
+              <a:rPr lang="en-US" dirty="0"/>
+              <a:t>, </a:t>
+            </a:r>
+            <a:r>
+              <a:rPr lang="en-US" dirty="0" err="1"/>
+              <a:t>traversery</a:t>
+            </a:r>
+            <a:r>
+              <a:rPr lang="en-US" dirty="0"/>
+              <a:t>?)</a:t>
+            </a:r>
+          </a:p>
+          <a:p>
+            <a:pPr lvl="1"/>
+            <a:r>
+              <a:rPr lang="en-US" dirty="0"/>
+              <a:t>CA computations (</a:t>
             </a:r>
           </a:p>
         </p:txBody>
@@ -6028,7 +6210,7 @@
     </p:spTree>
     <p:extLst>
       <p:ext uri="{BB962C8B-B14F-4D97-AF65-F5344CB8AC3E}">
-        <p14:creationId xmlns:p14="http://schemas.microsoft.com/office/powerpoint/2010/main" val="645810162"/>
+        <p14:creationId xmlns:p14="http://schemas.microsoft.com/office/powerpoint/2010/main" val="2195190930"/>
       </p:ext>
     </p:extLst>
   </p:cSld>

--- a/slides/Optimizing Memory Layouts and Traversal Orders in High-Performance Computing.pptx
+++ b/slides/Optimizing Memory Layouts and Traversal Orders in High-Performance Computing.pptx
@@ -12,10 +12,10 @@
     <p:sldId id="268" r:id="rId3"/>
     <p:sldId id="269" r:id="rId4"/>
     <p:sldId id="270" r:id="rId5"/>
-    <p:sldId id="271" r:id="rId6"/>
-    <p:sldId id="265" r:id="rId7"/>
-    <p:sldId id="263" r:id="rId8"/>
-    <p:sldId id="264" r:id="rId9"/>
+    <p:sldId id="263" r:id="rId6"/>
+    <p:sldId id="271" r:id="rId7"/>
+    <p:sldId id="272" r:id="rId8"/>
+    <p:sldId id="265" r:id="rId9"/>
     <p:sldId id="258" r:id="rId10"/>
     <p:sldId id="259" r:id="rId11"/>
     <p:sldId id="260" r:id="rId12"/>
@@ -128,15 +128,15 @@
             <p14:sldId id="256"/>
             <p14:sldId id="268"/>
             <p14:sldId id="269"/>
-            <p14:sldId id="270"/>
-            <p14:sldId id="271"/>
-            <p14:sldId id="265"/>
-            <p14:sldId id="263"/>
-            <p14:sldId id="264"/>
           </p14:sldIdLst>
         </p14:section>
-        <p14:section name="abstractions" id="{F6342274-5FB1-4B75-B42A-2A7654908FF8}">
+        <p14:section name="algorithms" id="{7894E90A-E282-4867-82A4-369CDB973E4E}">
           <p14:sldIdLst>
+            <p14:sldId id="270"/>
+            <p14:sldId id="263"/>
+            <p14:sldId id="271"/>
+            <p14:sldId id="272"/>
+            <p14:sldId id="265"/>
             <p14:sldId id="258"/>
           </p14:sldIdLst>
         </p14:section>
@@ -252,7 +252,7 @@
           <a:p>
             <a:fld id="{34A5C982-A1C5-4AC2-B4BF-466515DA1494}" type="datetimeFigureOut">
               <a:rPr lang="en-US" smtClean="0"/>
-              <a:t>8/23/2026</a:t>
+              <a:t>8/24/2026</a:t>
             </a:fld>
             <a:endParaRPr lang="en-US"/>
           </a:p>
@@ -584,7 +584,7 @@
           <a:p>
             <a:fld id="{FA8FD632-245B-410D-BCC4-8BF8D37AB67F}" type="slidenum">
               <a:rPr lang="en-US" smtClean="0"/>
-              <a:t>6</a:t>
+              <a:t>8</a:t>
             </a:fld>
             <a:endParaRPr lang="en-US"/>
           </a:p>
@@ -750,7 +750,7 @@
           <a:p>
             <a:fld id="{93F57E82-5604-4F8C-BCFA-F7C026884391}" type="datetimeFigureOut">
               <a:rPr lang="en-US" smtClean="0"/>
-              <a:t>8/23/2026</a:t>
+              <a:t>8/24/2026</a:t>
             </a:fld>
             <a:endParaRPr lang="en-US"/>
           </a:p>
@@ -948,7 +948,7 @@
           <a:p>
             <a:fld id="{93F57E82-5604-4F8C-BCFA-F7C026884391}" type="datetimeFigureOut">
               <a:rPr lang="en-US" smtClean="0"/>
-              <a:t>8/23/2026</a:t>
+              <a:t>8/24/2026</a:t>
             </a:fld>
             <a:endParaRPr lang="en-US"/>
           </a:p>
@@ -1156,7 +1156,7 @@
           <a:p>
             <a:fld id="{93F57E82-5604-4F8C-BCFA-F7C026884391}" type="datetimeFigureOut">
               <a:rPr lang="en-US" smtClean="0"/>
-              <a:t>8/23/2026</a:t>
+              <a:t>8/24/2026</a:t>
             </a:fld>
             <a:endParaRPr lang="en-US"/>
           </a:p>
@@ -1354,7 +1354,7 @@
           <a:p>
             <a:fld id="{93F57E82-5604-4F8C-BCFA-F7C026884391}" type="datetimeFigureOut">
               <a:rPr lang="en-US" smtClean="0"/>
-              <a:t>8/23/2026</a:t>
+              <a:t>8/24/2026</a:t>
             </a:fld>
             <a:endParaRPr lang="en-US"/>
           </a:p>
@@ -1629,7 +1629,7 @@
           <a:p>
             <a:fld id="{93F57E82-5604-4F8C-BCFA-F7C026884391}" type="datetimeFigureOut">
               <a:rPr lang="en-US" smtClean="0"/>
-              <a:t>8/23/2026</a:t>
+              <a:t>8/24/2026</a:t>
             </a:fld>
             <a:endParaRPr lang="en-US"/>
           </a:p>
@@ -1894,7 +1894,7 @@
           <a:p>
             <a:fld id="{93F57E82-5604-4F8C-BCFA-F7C026884391}" type="datetimeFigureOut">
               <a:rPr lang="en-US" smtClean="0"/>
-              <a:t>8/23/2026</a:t>
+              <a:t>8/24/2026</a:t>
             </a:fld>
             <a:endParaRPr lang="en-US"/>
           </a:p>
@@ -2306,7 +2306,7 @@
           <a:p>
             <a:fld id="{93F57E82-5604-4F8C-BCFA-F7C026884391}" type="datetimeFigureOut">
               <a:rPr lang="en-US" smtClean="0"/>
-              <a:t>8/23/2026</a:t>
+              <a:t>8/24/2026</a:t>
             </a:fld>
             <a:endParaRPr lang="en-US"/>
           </a:p>
@@ -2447,7 +2447,7 @@
           <a:p>
             <a:fld id="{93F57E82-5604-4F8C-BCFA-F7C026884391}" type="datetimeFigureOut">
               <a:rPr lang="en-US" smtClean="0"/>
-              <a:t>8/23/2026</a:t>
+              <a:t>8/24/2026</a:t>
             </a:fld>
             <a:endParaRPr lang="en-US"/>
           </a:p>
@@ -2560,7 +2560,7 @@
           <a:p>
             <a:fld id="{93F57E82-5604-4F8C-BCFA-F7C026884391}" type="datetimeFigureOut">
               <a:rPr lang="en-US" smtClean="0"/>
-              <a:t>8/23/2026</a:t>
+              <a:t>8/24/2026</a:t>
             </a:fld>
             <a:endParaRPr lang="en-US"/>
           </a:p>
@@ -2871,7 +2871,7 @@
           <a:p>
             <a:fld id="{93F57E82-5604-4F8C-BCFA-F7C026884391}" type="datetimeFigureOut">
               <a:rPr lang="en-US" smtClean="0"/>
-              <a:t>8/23/2026</a:t>
+              <a:t>8/24/2026</a:t>
             </a:fld>
             <a:endParaRPr lang="en-US"/>
           </a:p>
@@ -3159,7 +3159,7 @@
           <a:p>
             <a:fld id="{93F57E82-5604-4F8C-BCFA-F7C026884391}" type="datetimeFigureOut">
               <a:rPr lang="en-US" smtClean="0"/>
-              <a:t>8/23/2026</a:t>
+              <a:t>8/24/2026</a:t>
             </a:fld>
             <a:endParaRPr lang="en-US"/>
           </a:p>
@@ -3400,7 +3400,7 @@
           <a:p>
             <a:fld id="{93F57E82-5604-4F8C-BCFA-F7C026884391}" type="datetimeFigureOut">
               <a:rPr lang="en-US" smtClean="0"/>
-              <a:t>8/23/2026</a:t>
+              <a:t>8/24/2026</a:t>
             </a:fld>
             <a:endParaRPr lang="en-US"/>
           </a:p>
@@ -5362,7 +5362,7 @@
           <a:p>
             <a:r>
               <a:rPr lang="en-US" dirty="0"/>
-              <a:t>Small step: layout agnostic design</a:t>
+              <a:t>Small step: ?? layout agnostic design</a:t>
             </a:r>
           </a:p>
         </p:txBody>
@@ -5589,7 +5589,7 @@
           <p:cNvPr id="2" name="Title 1">
             <a:extLst>
               <a:ext uri="{FF2B5EF4-FFF2-40B4-BE49-F238E27FC236}">
-                <a16:creationId xmlns:a16="http://schemas.microsoft.com/office/drawing/2014/main" id="{C266F341-5BBA-043E-301E-387913EC1471}"/>
+                <a16:creationId xmlns:a16="http://schemas.microsoft.com/office/drawing/2014/main" id="{BC500110-1A1D-46C5-865E-8C33FFF09E26}"/>
               </a:ext>
             </a:extLst>
           </p:cNvPr>
@@ -5605,7 +5605,10 @@
           <a:bodyPr/>
           <a:lstStyle/>
           <a:p>
-            <a:endParaRPr lang="en-US" dirty="0"/>
+            <a:r>
+              <a:rPr lang="en-US" dirty="0"/>
+              <a:t>Layout-agnostic design</a:t>
+            </a:r>
           </a:p>
         </p:txBody>
       </p:sp>
@@ -5614,7 +5617,7 @@
           <p:cNvPr id="3" name="Content Placeholder 2">
             <a:extLst>
               <a:ext uri="{FF2B5EF4-FFF2-40B4-BE49-F238E27FC236}">
-                <a16:creationId xmlns:a16="http://schemas.microsoft.com/office/drawing/2014/main" id="{871CC203-309F-C580-057C-3B0A30FCD371}"/>
+                <a16:creationId xmlns:a16="http://schemas.microsoft.com/office/drawing/2014/main" id="{BC98E21C-63B1-8313-A72D-D4A24D26FBA1}"/>
               </a:ext>
             </a:extLst>
           </p:cNvPr>
@@ -5632,65 +5635,15 @@
           <a:p>
             <a:r>
               <a:rPr lang="en-US" dirty="0"/>
-              <a:t>In many cases, changing traversals easier than structures</a:t>
-            </a:r>
-          </a:p>
-          <a:p>
-            <a:r>
-              <a:rPr lang="en-US" dirty="0"/>
-              <a:t>So focus on traversals</a:t>
-            </a:r>
-          </a:p>
-          <a:p>
-            <a:r>
-              <a:rPr lang="en-US" dirty="0"/>
-              <a:t>Traversal transformations can use the same principles</a:t>
-            </a:r>
-          </a:p>
-          <a:p>
-            <a:r>
-              <a:rPr lang="en-US" dirty="0"/>
-              <a:t>Traversers: </a:t>
-            </a:r>
-            <a:r>
-              <a:rPr lang="en-US" dirty="0" err="1"/>
-              <a:t>kinda</a:t>
-            </a:r>
-            <a:r>
-              <a:rPr lang="en-US" dirty="0"/>
-              <a:t> like iterators or range views</a:t>
-            </a:r>
-          </a:p>
-          <a:p>
-            <a:r>
-              <a:rPr lang="en-US" dirty="0"/>
-              <a:t>Extending transformations: blocking, spans, renaming, …</a:t>
-            </a:r>
-          </a:p>
-          <a:p>
-            <a:r>
-              <a:rPr lang="en-US" dirty="0"/>
-              <a:t>Simplifies parallelization (on TBB and CUDA)</a:t>
-            </a:r>
-          </a:p>
-          <a:p>
-            <a:pPr lvl="1"/>
-            <a:r>
-              <a:rPr lang="en-US" dirty="0"/>
-              <a:t>(Named) dimensions of traversal can bind </a:t>
-            </a:r>
-            <a:r>
-              <a:rPr lang="en-US"/>
-              <a:t>to dimension of the para BE</a:t>
-            </a:r>
-            <a:endParaRPr lang="en-US" dirty="0"/>
+              <a:t>Algorithm with explicit offset calculations × Algorithm with logical indices</a:t>
+            </a:r>
           </a:p>
         </p:txBody>
       </p:sp>
     </p:spTree>
     <p:extLst>
       <p:ext uri="{BB962C8B-B14F-4D97-AF65-F5344CB8AC3E}">
-        <p14:creationId xmlns:p14="http://schemas.microsoft.com/office/powerpoint/2010/main" val="2126121211"/>
+        <p14:creationId xmlns:p14="http://schemas.microsoft.com/office/powerpoint/2010/main" val="3503651732"/>
       </p:ext>
     </p:extLst>
   </p:cSld>
@@ -5705,13 +5658,7 @@
   <p:cSld>
     <p:spTree>
       <p:nvGrpSpPr>
-        <p:cNvPr id="1" name="">
-          <a:extLst>
-            <a:ext uri="{FF2B5EF4-FFF2-40B4-BE49-F238E27FC236}">
-              <a16:creationId xmlns:a16="http://schemas.microsoft.com/office/drawing/2014/main" id="{EFDF7620-7AA1-EF30-FDC7-27AAC7FFE5EE}"/>
-            </a:ext>
-          </a:extLst>
-        </p:cNvPr>
+        <p:cNvPr id="1" name=""/>
         <p:cNvGrpSpPr/>
         <p:nvPr/>
       </p:nvGrpSpPr>
@@ -5728,7 +5675,7 @@
           <p:cNvPr id="2" name="Title 1">
             <a:extLst>
               <a:ext uri="{FF2B5EF4-FFF2-40B4-BE49-F238E27FC236}">
-                <a16:creationId xmlns:a16="http://schemas.microsoft.com/office/drawing/2014/main" id="{F7C42AB4-1D66-61B5-41F3-D1C814D6D79F}"/>
+                <a16:creationId xmlns:a16="http://schemas.microsoft.com/office/drawing/2014/main" id="{C266F341-5BBA-043E-301E-387913EC1471}"/>
               </a:ext>
             </a:extLst>
           </p:cNvPr>
@@ -5746,7 +5693,7 @@
           <a:p>
             <a:r>
               <a:rPr lang="en-US" dirty="0"/>
-              <a:t>M &amp; S</a:t>
+              <a:t>?? Traversal agnostic design</a:t>
             </a:r>
           </a:p>
         </p:txBody>
@@ -5756,7 +5703,7 @@
           <p:cNvPr id="3" name="Content Placeholder 2">
             <a:extLst>
               <a:ext uri="{FF2B5EF4-FFF2-40B4-BE49-F238E27FC236}">
-                <a16:creationId xmlns:a16="http://schemas.microsoft.com/office/drawing/2014/main" id="{7FC71ADE-62E2-F5C5-38A6-5FA51E07F94E}"/>
+                <a16:creationId xmlns:a16="http://schemas.microsoft.com/office/drawing/2014/main" id="{871CC203-309F-C580-057C-3B0A30FCD371}"/>
               </a:ext>
             </a:extLst>
           </p:cNvPr>
@@ -5774,85 +5721,52 @@
           <a:p>
             <a:r>
               <a:rPr lang="en-US" dirty="0"/>
-              <a:t>Motivation: GPU &amp; Cluster computing</a:t>
+              <a:t>In many cases, changing traversals easier than structures</a:t>
+            </a:r>
+          </a:p>
+          <a:p>
+            <a:r>
+              <a:rPr lang="en-US" dirty="0"/>
+              <a:t>So focus on traversals</a:t>
+            </a:r>
+          </a:p>
+          <a:p>
+            <a:r>
+              <a:rPr lang="en-US" dirty="0"/>
+              <a:t>Traversal transformations can use the same principles (knowledge transfer?)</a:t>
+            </a:r>
+          </a:p>
+          <a:p>
+            <a:r>
+              <a:rPr lang="en-US" dirty="0"/>
+              <a:t>Traversers: </a:t>
+            </a:r>
+            <a:r>
+              <a:rPr lang="en-US" dirty="0" err="1"/>
+              <a:t>kinda</a:t>
+            </a:r>
+            <a:r>
+              <a:rPr lang="en-US" dirty="0"/>
+              <a:t> like iterators or range views</a:t>
+            </a:r>
+          </a:p>
+          <a:p>
+            <a:r>
+              <a:rPr lang="en-US" dirty="0"/>
+              <a:t>Extending transformations: blocking, spans, renaming, …</a:t>
+            </a:r>
+          </a:p>
+          <a:p>
+            <a:r>
+              <a:rPr lang="en-US" dirty="0"/>
+              <a:t>Simplifies parallelization (on TBB and CUDA)</a:t>
             </a:r>
           </a:p>
           <a:p>
             <a:pPr lvl="1"/>
             <a:r>
               <a:rPr lang="en-US" dirty="0"/>
-              <a:t>Too many decisions, complex code (you don’t know) </a:t>
-            </a:r>
-            <a:r>
-              <a:rPr lang="en-US" dirty="0">
-                <a:sym typeface="Wingdings" panose="05000000000000000000" pitchFamily="2" charset="2"/>
-              </a:rPr>
-              <a:t> the problem, it is hard</a:t>
-            </a:r>
-            <a:endParaRPr lang="en-US" dirty="0"/>
-          </a:p>
-          <a:p>
-            <a:pPr lvl="2"/>
-            <a:r>
-              <a:rPr lang="en-US" dirty="0"/>
-              <a:t>layout options, traversal options, parallelization (Matice, </a:t>
-            </a:r>
-            <a:r>
-              <a:rPr lang="en-US" dirty="0" err="1"/>
-              <a:t>pruchod</a:t>
-            </a:r>
-            <a:r>
-              <a:rPr lang="en-US" dirty="0"/>
-              <a:t>; </a:t>
-            </a:r>
-            <a:r>
-              <a:rPr lang="en-US" dirty="0" err="1"/>
-              <a:t>nasobeni</a:t>
-            </a:r>
-            <a:r>
-              <a:rPr lang="en-US" dirty="0"/>
-              <a:t>?)</a:t>
-            </a:r>
-          </a:p>
-          <a:p>
-            <a:pPr lvl="2"/>
-            <a:r>
-              <a:rPr lang="en-US" dirty="0"/>
-              <a:t>parameters for the above (block sizes, …)</a:t>
-            </a:r>
-          </a:p>
-          <a:p>
-            <a:r>
-              <a:rPr lang="en-US" dirty="0"/>
-              <a:t>Our solution: Abstraction &amp; automatization </a:t>
-            </a:r>
-            <a:r>
-              <a:rPr lang="en-US" dirty="0">
-                <a:sym typeface="Wingdings" panose="05000000000000000000" pitchFamily="2" charset="2"/>
-              </a:rPr>
-              <a:t> we offer a solution</a:t>
-            </a:r>
-            <a:endParaRPr lang="en-US" dirty="0"/>
-          </a:p>
-          <a:p>
-            <a:pPr lvl="1"/>
-            <a:r>
-              <a:rPr lang="en-US" dirty="0"/>
-              <a:t>Separation of concerns, independent aspects</a:t>
-            </a:r>
-          </a:p>
-          <a:p>
-            <a:pPr lvl="1"/>
-            <a:r>
-              <a:rPr lang="en-US" dirty="0"/>
-              <a:t>Introducing layout-agnostic and traversal-agnostic algorithm design</a:t>
-            </a:r>
-          </a:p>
-          <a:p>
-            <a:pPr lvl="1"/>
-            <a:r>
-              <a:rPr lang="en-US" dirty="0"/>
-              <a:t>How the world is saved</a:t>
+              <a:t>(Named) dimensions of traversal can bind to dimension of the para BE</a:t>
             </a:r>
           </a:p>
         </p:txBody>
@@ -5860,7 +5774,7 @@
     </p:spTree>
     <p:extLst>
       <p:ext uri="{BB962C8B-B14F-4D97-AF65-F5344CB8AC3E}">
-        <p14:creationId xmlns:p14="http://schemas.microsoft.com/office/powerpoint/2010/main" val="1408920348"/>
+        <p14:creationId xmlns:p14="http://schemas.microsoft.com/office/powerpoint/2010/main" val="2126121211"/>
       </p:ext>
     </p:extLst>
   </p:cSld>
@@ -5892,7 +5806,7 @@
           <p:cNvPr id="2" name="Title 1">
             <a:extLst>
               <a:ext uri="{FF2B5EF4-FFF2-40B4-BE49-F238E27FC236}">
-                <a16:creationId xmlns:a16="http://schemas.microsoft.com/office/drawing/2014/main" id="{BC500110-1A1D-46C5-865E-8C33FFF09E26}"/>
+                <a16:creationId xmlns:a16="http://schemas.microsoft.com/office/drawing/2014/main" id="{45925ADF-B97D-3587-87BD-4182502B6656}"/>
               </a:ext>
             </a:extLst>
           </p:cNvPr>
@@ -5910,7 +5824,7 @@
           <a:p>
             <a:r>
               <a:rPr lang="en-US" dirty="0"/>
-              <a:t>Layout-agnostic design</a:t>
+              <a:t>Finalizing the automation: Autotuning</a:t>
             </a:r>
           </a:p>
         </p:txBody>
@@ -5920,7 +5834,7 @@
           <p:cNvPr id="3" name="Content Placeholder 2">
             <a:extLst>
               <a:ext uri="{FF2B5EF4-FFF2-40B4-BE49-F238E27FC236}">
-                <a16:creationId xmlns:a16="http://schemas.microsoft.com/office/drawing/2014/main" id="{BC98E21C-63B1-8313-A72D-D4A24D26FBA1}"/>
+                <a16:creationId xmlns:a16="http://schemas.microsoft.com/office/drawing/2014/main" id="{2673B8B7-D0E9-6CB9-1502-D2F6FEE0D62F}"/>
               </a:ext>
             </a:extLst>
           </p:cNvPr>
@@ -5938,15 +5852,61 @@
           <a:p>
             <a:r>
               <a:rPr lang="en-US" dirty="0"/>
-              <a:t>Algorithm with explicit offset calculations × Algorithm with logical indices</a:t>
-            </a:r>
+              <a:t>Abstraction for integrating with an </a:t>
+            </a:r>
+            <a:r>
+              <a:rPr lang="en-US" dirty="0" err="1"/>
+              <a:t>autotuner</a:t>
+            </a:r>
+            <a:endParaRPr lang="en-US" dirty="0"/>
+          </a:p>
+          <a:p>
+            <a:pPr lvl="1"/>
+            <a:r>
+              <a:rPr lang="en-US" dirty="0"/>
+              <a:t>Agnostic to the specific backend</a:t>
+            </a:r>
+          </a:p>
+          <a:p>
+            <a:pPr lvl="1"/>
+            <a:r>
+              <a:rPr lang="en-US" dirty="0"/>
+              <a:t>PoC with </a:t>
+            </a:r>
+            <a:r>
+              <a:rPr lang="en-US" dirty="0" err="1"/>
+              <a:t>OpenTuner</a:t>
+            </a:r>
+            <a:r>
+              <a:rPr lang="en-US" dirty="0"/>
+              <a:t>, </a:t>
+            </a:r>
+            <a:r>
+              <a:rPr lang="en-US" dirty="0" err="1"/>
+              <a:t>Optuna</a:t>
+            </a:r>
+            <a:r>
+              <a:rPr lang="en-US" dirty="0"/>
+              <a:t>, ATF</a:t>
+            </a:r>
+          </a:p>
+          <a:p>
+            <a:r>
+              <a:rPr lang="en-US" dirty="0"/>
+              <a:t>Autotuning enables automatic layout &amp; </a:t>
+            </a:r>
+            <a:r>
+              <a:rPr lang="en-US"/>
+              <a:t>traversal transformations</a:t>
+            </a:r>
+            <a:endParaRPr lang="en-US" dirty="0"/>
           </a:p>
         </p:txBody>
       </p:sp>
     </p:spTree>
     <p:extLst>
       <p:ext uri="{BB962C8B-B14F-4D97-AF65-F5344CB8AC3E}">
-        <p14:creationId xmlns:p14="http://schemas.microsoft.com/office/powerpoint/2010/main" val="3503651732"/>
+        <p14:creationId xmlns:p14="http://schemas.microsoft.com/office/powerpoint/2010/main" val="2958406956"/>
       </p:ext>
     </p:extLst>
   </p:cSld>
@@ -5961,7 +5921,13 @@
   <p:cSld>
     <p:spTree>
       <p:nvGrpSpPr>
-        <p:cNvPr id="1" name=""/>
+        <p:cNvPr id="1" name="">
+          <a:extLst>
+            <a:ext uri="{FF2B5EF4-FFF2-40B4-BE49-F238E27FC236}">
+              <a16:creationId xmlns:a16="http://schemas.microsoft.com/office/drawing/2014/main" id="{EFDF7620-7AA1-EF30-FDC7-27AAC7FFE5EE}"/>
+            </a:ext>
+          </a:extLst>
+        </p:cNvPr>
         <p:cNvGrpSpPr/>
         <p:nvPr/>
       </p:nvGrpSpPr>
@@ -5978,7 +5944,7 @@
           <p:cNvPr id="2" name="Title 1">
             <a:extLst>
               <a:ext uri="{FF2B5EF4-FFF2-40B4-BE49-F238E27FC236}">
-                <a16:creationId xmlns:a16="http://schemas.microsoft.com/office/drawing/2014/main" id="{F794F90E-47C1-8163-3DF3-3F88A625B905}"/>
+                <a16:creationId xmlns:a16="http://schemas.microsoft.com/office/drawing/2014/main" id="{F7C42AB4-1D66-61B5-41F3-D1C814D6D79F}"/>
               </a:ext>
             </a:extLst>
           </p:cNvPr>
@@ -5996,7 +5962,7 @@
           <a:p>
             <a:r>
               <a:rPr lang="en-US" dirty="0"/>
-              <a:t>Traversal-agnostic design</a:t>
+              <a:t>M &amp; S</a:t>
             </a:r>
           </a:p>
         </p:txBody>
@@ -6006,7 +5972,7 @@
           <p:cNvPr id="3" name="Content Placeholder 2">
             <a:extLst>
               <a:ext uri="{FF2B5EF4-FFF2-40B4-BE49-F238E27FC236}">
-                <a16:creationId xmlns:a16="http://schemas.microsoft.com/office/drawing/2014/main" id="{3821D725-871B-DFB5-1476-7BE78B119576}"/>
+                <a16:creationId xmlns:a16="http://schemas.microsoft.com/office/drawing/2014/main" id="{7FC71ADE-62E2-F5C5-38A6-5FA51E07F94E}"/>
               </a:ext>
             </a:extLst>
           </p:cNvPr>
@@ -6024,7 +5990,85 @@
           <a:p>
             <a:r>
               <a:rPr lang="en-US" dirty="0"/>
-              <a:t>We can go even further</a:t>
+              <a:t>Motivation: GPU &amp; Cluster computing</a:t>
+            </a:r>
+          </a:p>
+          <a:p>
+            <a:pPr lvl="1"/>
+            <a:r>
+              <a:rPr lang="en-US" dirty="0"/>
+              <a:t>Too many decisions, complex code (you don’t know) </a:t>
+            </a:r>
+            <a:r>
+              <a:rPr lang="en-US" dirty="0">
+                <a:sym typeface="Wingdings" panose="05000000000000000000" pitchFamily="2" charset="2"/>
+              </a:rPr>
+              <a:t> the problem, it is hard</a:t>
+            </a:r>
+            <a:endParaRPr lang="en-US" dirty="0"/>
+          </a:p>
+          <a:p>
+            <a:pPr lvl="2"/>
+            <a:r>
+              <a:rPr lang="en-US" dirty="0"/>
+              <a:t>layout options, traversal options, parallelization (Matice, </a:t>
+            </a:r>
+            <a:r>
+              <a:rPr lang="en-US" dirty="0" err="1"/>
+              <a:t>pruchod</a:t>
+            </a:r>
+            <a:r>
+              <a:rPr lang="en-US" dirty="0"/>
+              <a:t>; </a:t>
+            </a:r>
+            <a:r>
+              <a:rPr lang="en-US" dirty="0" err="1"/>
+              <a:t>nasobeni</a:t>
+            </a:r>
+            <a:r>
+              <a:rPr lang="en-US" dirty="0"/>
+              <a:t>?)</a:t>
+            </a:r>
+          </a:p>
+          <a:p>
+            <a:pPr lvl="2"/>
+            <a:r>
+              <a:rPr lang="en-US" dirty="0"/>
+              <a:t>parameters for the above (block sizes, …)</a:t>
+            </a:r>
+          </a:p>
+          <a:p>
+            <a:r>
+              <a:rPr lang="en-US" dirty="0"/>
+              <a:t>Our solution: Abstraction &amp; automatization </a:t>
+            </a:r>
+            <a:r>
+              <a:rPr lang="en-US" dirty="0">
+                <a:sym typeface="Wingdings" panose="05000000000000000000" pitchFamily="2" charset="2"/>
+              </a:rPr>
+              <a:t> we offer a solution</a:t>
+            </a:r>
+            <a:endParaRPr lang="en-US" dirty="0"/>
+          </a:p>
+          <a:p>
+            <a:pPr lvl="1"/>
+            <a:r>
+              <a:rPr lang="en-US" dirty="0"/>
+              <a:t>Separation of concerns, independent aspects</a:t>
+            </a:r>
+          </a:p>
+          <a:p>
+            <a:pPr lvl="1"/>
+            <a:r>
+              <a:rPr lang="en-US" dirty="0"/>
+              <a:t>Introducing layout-agnostic and traversal-agnostic algorithm design</a:t>
+            </a:r>
+          </a:p>
+          <a:p>
+            <a:pPr lvl="1"/>
+            <a:r>
+              <a:rPr lang="en-US" dirty="0"/>
+              <a:t>How the world is saved</a:t>
             </a:r>
           </a:p>
         </p:txBody>
@@ -6032,7 +6076,7 @@
     </p:spTree>
     <p:extLst>
       <p:ext uri="{BB962C8B-B14F-4D97-AF65-F5344CB8AC3E}">
-        <p14:creationId xmlns:p14="http://schemas.microsoft.com/office/powerpoint/2010/main" val="3026343622"/>
+        <p14:creationId xmlns:p14="http://schemas.microsoft.com/office/powerpoint/2010/main" val="1408920348"/>
       </p:ext>
     </p:extLst>
   </p:cSld>

--- a/slides/Optimizing Memory Layouts and Traversal Orders in High-Performance Computing.pptx
+++ b/slides/Optimizing Memory Layouts and Traversal Orders in High-Performance Computing.pptx
@@ -5,23 +5,32 @@
     <p:sldMasterId id="2147483648" r:id="rId1"/>
   </p:sldMasterIdLst>
   <p:notesMasterIdLst>
-    <p:notesMasterId r:id="rId16"/>
+    <p:notesMasterId r:id="rId25"/>
   </p:notesMasterIdLst>
   <p:sldIdLst>
     <p:sldId id="256" r:id="rId2"/>
     <p:sldId id="268" r:id="rId3"/>
-    <p:sldId id="269" r:id="rId4"/>
-    <p:sldId id="270" r:id="rId5"/>
-    <p:sldId id="263" r:id="rId6"/>
-    <p:sldId id="271" r:id="rId7"/>
-    <p:sldId id="272" r:id="rId8"/>
-    <p:sldId id="265" r:id="rId9"/>
-    <p:sldId id="258" r:id="rId10"/>
-    <p:sldId id="259" r:id="rId11"/>
-    <p:sldId id="260" r:id="rId12"/>
-    <p:sldId id="266" r:id="rId13"/>
-    <p:sldId id="261" r:id="rId14"/>
-    <p:sldId id="262" r:id="rId15"/>
+    <p:sldId id="277" r:id="rId4"/>
+    <p:sldId id="269" r:id="rId5"/>
+    <p:sldId id="270" r:id="rId6"/>
+    <p:sldId id="281" r:id="rId7"/>
+    <p:sldId id="263" r:id="rId8"/>
+    <p:sldId id="271" r:id="rId9"/>
+    <p:sldId id="272" r:id="rId10"/>
+    <p:sldId id="278" r:id="rId11"/>
+    <p:sldId id="265" r:id="rId12"/>
+    <p:sldId id="258" r:id="rId13"/>
+    <p:sldId id="273" r:id="rId14"/>
+    <p:sldId id="279" r:id="rId15"/>
+    <p:sldId id="274" r:id="rId16"/>
+    <p:sldId id="280" r:id="rId17"/>
+    <p:sldId id="259" r:id="rId18"/>
+    <p:sldId id="275" r:id="rId19"/>
+    <p:sldId id="276" r:id="rId20"/>
+    <p:sldId id="260" r:id="rId21"/>
+    <p:sldId id="266" r:id="rId22"/>
+    <p:sldId id="261" r:id="rId23"/>
+    <p:sldId id="262" r:id="rId24"/>
   </p:sldIdLst>
   <p:sldSz cx="12192000" cy="6858000"/>
   <p:notesSz cx="6858000" cy="9144000"/>
@@ -127,22 +136,31 @@
           <p14:sldIdLst>
             <p14:sldId id="256"/>
             <p14:sldId id="268"/>
+            <p14:sldId id="277"/>
             <p14:sldId id="269"/>
           </p14:sldIdLst>
         </p14:section>
         <p14:section name="algorithms" id="{7894E90A-E282-4867-82A4-369CDB973E4E}">
           <p14:sldIdLst>
             <p14:sldId id="270"/>
+            <p14:sldId id="281"/>
             <p14:sldId id="263"/>
             <p14:sldId id="271"/>
             <p14:sldId id="272"/>
+            <p14:sldId id="278"/>
             <p14:sldId id="265"/>
             <p14:sldId id="258"/>
+            <p14:sldId id="273"/>
+            <p14:sldId id="279"/>
+            <p14:sldId id="274"/>
+            <p14:sldId id="280"/>
           </p14:sldIdLst>
         </p14:section>
         <p14:section name="llms" id="{2FE3CF17-CBFB-48E9-A3BF-DD99B7D2F01E}">
           <p14:sldIdLst>
             <p14:sldId id="259"/>
+            <p14:sldId id="275"/>
+            <p14:sldId id="276"/>
           </p14:sldIdLst>
         </p14:section>
         <p14:section name="sw artifacts" id="{C643FBD2-A5DD-453D-B5B5-69D3884A4C2F}">
@@ -252,7 +270,7 @@
           <a:p>
             <a:fld id="{34A5C982-A1C5-4AC2-B4BF-466515DA1494}" type="datetimeFigureOut">
               <a:rPr lang="en-US" smtClean="0"/>
-              <a:t>8/24/2026</a:t>
+              <a:t>8/25/2026</a:t>
             </a:fld>
             <a:endParaRPr lang="en-US"/>
           </a:p>
@@ -563,7 +581,123 @@
           <a:bodyPr/>
           <a:lstStyle/>
           <a:p>
+            <a:r>
+              <a:rPr lang="en-US" dirty="0"/>
+              <a:t>To illustrate what we mean by memory layouts and traversal orders, let’s look at a simple example of just traversing a single matrix and initializing its elements to values that might depend on their indices.</a:t>
+            </a:r>
+          </a:p>
+          <a:p>
             <a:endParaRPr lang="en-US" dirty="0"/>
+          </a:p>
+          <a:p>
+            <a:r>
+              <a:rPr lang="en-US" dirty="0"/>
+              <a:t>?? Even this simple example can show a surprising level of complexity.</a:t>
+            </a:r>
+          </a:p>
+          <a:p>
+            <a:endParaRPr lang="en-US" dirty="0"/>
+          </a:p>
+          <a:p>
+            <a:r>
+              <a:rPr lang="en-US" dirty="0"/>
+              <a:t>For a typical *m-by-n matrix*, this is commonly expressed as an assignment nested in a two-dimensional loop nest; in this particular example, the indices are iteratively generated for the elements row by row.</a:t>
+            </a:r>
+          </a:p>
+          <a:p>
+            <a:br>
+              <a:rPr lang="en-US" dirty="0"/>
+            </a:br>
+            <a:r>
+              <a:rPr lang="en-US" dirty="0"/>
+              <a:t>(cool animation)</a:t>
+            </a:r>
+            <a:br>
+              <a:rPr lang="en-US" dirty="0"/>
+            </a:br>
+            <a:r>
+              <a:rPr lang="en-US" dirty="0"/>
+              <a:t>Notice that for the *row-major matrix layout* on the left, the algorithm tends to access elements that are close together, whereas in the other, *column-major layout*, the accessed elements are spread out further.</a:t>
+            </a:r>
+            <a:br>
+              <a:rPr lang="en-US" dirty="0"/>
+            </a:br>
+            <a:r>
+              <a:rPr lang="en-US" dirty="0"/>
+              <a:t>Thus, the algorithm expresses better *locality of reference* for the row-major layout, and we can expect a better performance as a result due to various hardware optimizations such as caching.</a:t>
+            </a:r>
+            <a:br>
+              <a:rPr lang="en-US" dirty="0"/>
+            </a:br>
+            <a:r>
+              <a:rPr lang="en-US" dirty="0"/>
+              <a:t>(?? (caching) That relies on accessed values being temporarily stored in faster memory units, automatically by the hardware)</a:t>
+            </a:r>
+          </a:p>
+          <a:p>
+            <a:endParaRPr lang="en-US" dirty="0"/>
+          </a:p>
+          <a:p>
+            <a:r>
+              <a:rPr lang="en-US" dirty="0"/>
+              <a:t>?? define locality of reference?</a:t>
+            </a:r>
+          </a:p>
+          <a:p>
+            <a:endParaRPr lang="en-US" dirty="0"/>
+          </a:p>
+          <a:p>
+            <a:r>
+              <a:rPr lang="en-US" dirty="0"/>
+              <a:t>Of course, the two layouts are the simplest layouts for matrices, and for many real-use algorithms, more elaborate layouts, such as tile-major layouts (where each matrix is stored as a series of smaller sub-matrices), may often perform even better.</a:t>
+            </a:r>
+          </a:p>
+          <a:p>
+            <a:r>
+              <a:rPr lang="en-US" dirty="0"/>
+              <a:t>?? (Similarly, the traversal may be split into multiple blocks or tiles to better utilize caching)</a:t>
+            </a:r>
+          </a:p>
+          <a:p>
+            <a:endParaRPr lang="en-US" dirty="0"/>
+          </a:p>
+          <a:p>
+            <a:r>
+              <a:rPr lang="en-US" dirty="0"/>
+              <a:t>In real-use algorithms, the situation is further complicated by factors such as algorithms having more elaborate traversal patterns, accessing multiple data structures at once, and each hardware architecture having further characteristics affecting the choice of memory layouts and traversal orders.</a:t>
+            </a:r>
+          </a:p>
+          <a:p>
+            <a:endParaRPr lang="en-US" dirty="0"/>
+          </a:p>
+          <a:p>
+            <a:r>
+              <a:rPr lang="en-US" dirty="0"/>
+              <a:t>Thus, it is typically not feasible to know the correct design choices in advance</a:t>
+            </a:r>
+          </a:p>
+          <a:p>
+            <a:r>
+              <a:rPr lang="en-US" dirty="0"/>
+              <a:t>(and even if so, hard-coding optimizations for one hardware architecture makes the code less maintainable/readable and less portable to other architectures)</a:t>
+            </a:r>
+            <a:br>
+              <a:rPr lang="en-US" dirty="0"/>
+            </a:br>
+            <a:r>
+              <a:rPr lang="en-US" dirty="0"/>
+              <a:t>?? Example</a:t>
+            </a:r>
+            <a:br>
+              <a:rPr lang="en-US" dirty="0"/>
+            </a:br>
+            <a:br>
+              <a:rPr lang="en-US" dirty="0"/>
+            </a:br>
+            <a:r>
+              <a:rPr lang="en-US" dirty="0"/>
+              <a:t>(ass bridge: our research focuses on making this automatable and simpler)</a:t>
+            </a:r>
           </a:p>
         </p:txBody>
       </p:sp>
@@ -584,7 +718,403 @@
           <a:p>
             <a:fld id="{FA8FD632-245B-410D-BCC4-8BF8D37AB67F}" type="slidenum">
               <a:rPr lang="en-US" smtClean="0"/>
-              <a:t>8</a:t>
+              <a:t>3</a:t>
+            </a:fld>
+            <a:endParaRPr lang="en-US"/>
+          </a:p>
+        </p:txBody>
+      </p:sp>
+    </p:spTree>
+    <p:extLst>
+      <p:ext uri="{BB962C8B-B14F-4D97-AF65-F5344CB8AC3E}">
+        <p14:creationId xmlns:p14="http://schemas.microsoft.com/office/powerpoint/2010/main" val="2622264098"/>
+      </p:ext>
+    </p:extLst>
+  </p:cSld>
+  <p:clrMapOvr>
+    <a:masterClrMapping/>
+  </p:clrMapOvr>
+</p:notes>
+</file>
+
+<file path=ppt/notesSlides/notesSlide2.xml><?xml version="1.0" encoding="utf-8"?>
+<p:notes xmlns:a="http://schemas.openxmlformats.org/drawingml/2006/main" xmlns:r="http://schemas.openxmlformats.org/officeDocument/2006/relationships" xmlns:p="http://schemas.openxmlformats.org/presentationml/2006/main">
+  <p:cSld>
+    <p:spTree>
+      <p:nvGrpSpPr>
+        <p:cNvPr id="1" name=""/>
+        <p:cNvGrpSpPr/>
+        <p:nvPr/>
+      </p:nvGrpSpPr>
+      <p:grpSpPr>
+        <a:xfrm>
+          <a:off x="0" y="0"/>
+          <a:ext cx="0" cy="0"/>
+          <a:chOff x="0" y="0"/>
+          <a:chExt cx="0" cy="0"/>
+        </a:xfrm>
+      </p:grpSpPr>
+      <p:sp>
+        <p:nvSpPr>
+          <p:cNvPr id="2" name="Slide Image Placeholder 1"/>
+          <p:cNvSpPr>
+            <a:spLocks noGrp="1" noRot="1" noChangeAspect="1"/>
+          </p:cNvSpPr>
+          <p:nvPr>
+            <p:ph type="sldImg"/>
+          </p:nvPr>
+        </p:nvSpPr>
+        <p:spPr/>
+      </p:sp>
+      <p:sp>
+        <p:nvSpPr>
+          <p:cNvPr id="3" name="Notes Placeholder 2"/>
+          <p:cNvSpPr>
+            <a:spLocks noGrp="1"/>
+          </p:cNvSpPr>
+          <p:nvPr>
+            <p:ph type="body" idx="1"/>
+          </p:nvPr>
+        </p:nvSpPr>
+        <p:spPr/>
+        <p:txBody>
+          <a:bodyPr/>
+          <a:lstStyle/>
+          <a:p>
+            <a:r>
+              <a:rPr lang="en-US" dirty="0"/>
+              <a:t>For this, our research focused on two (something like compatible) directions</a:t>
+            </a:r>
+          </a:p>
+          <a:p>
+            <a:endParaRPr lang="en-US" dirty="0"/>
+          </a:p>
+          <a:p>
+            <a:r>
+              <a:rPr lang="en-US" dirty="0"/>
+              <a:t>The first one was investigating and implementing abstractions that offer composable building blocks that can be used to design efficient memory layouts and traversal orders; the choices can be algorithmically automatized by techniques such as autotuning</a:t>
+            </a:r>
+          </a:p>
+          <a:p>
+            <a:endParaRPr lang="en-US" dirty="0"/>
+          </a:p>
+          <a:p>
+            <a:r>
+              <a:rPr lang="en-US" dirty="0"/>
+              <a:t>The other direction has opened with the introduction of Large Language Models (LLMs), where the LLM can provide efficient implementation details fulfilling a given API requirement</a:t>
+            </a:r>
+          </a:p>
+          <a:p>
+            <a:endParaRPr lang="en-US" dirty="0"/>
+          </a:p>
+          <a:p>
+            <a:r>
+              <a:rPr lang="en-US" dirty="0"/>
+              <a:t>(?? More yapping?</a:t>
+            </a:r>
+          </a:p>
+          <a:p>
+            <a:r>
+              <a:rPr lang="en-US" dirty="0"/>
+              <a:t>- We have investigated how to … (tutoring)</a:t>
+            </a:r>
+          </a:p>
+          <a:p>
+            <a:r>
+              <a:rPr lang="en-US" dirty="0"/>
+              <a:t>)</a:t>
+            </a:r>
+          </a:p>
+          <a:p>
+            <a:endParaRPr lang="en-US" dirty="0"/>
+          </a:p>
+          <a:p>
+            <a:r>
+              <a:rPr lang="en-US" dirty="0"/>
+              <a:t>?? Since this research area is quite broad, we have mostly focused solely on dense data structures and algorithms utilizing regular loops, as even with this limitation, the area offers interesting challenges and many opportunities for improving the state of the art</a:t>
+            </a:r>
+          </a:p>
+          <a:p>
+            <a:endParaRPr lang="en-US" dirty="0"/>
+          </a:p>
+          <a:p>
+            <a:r>
+              <a:rPr lang="en-US" dirty="0"/>
+              <a:t>(ass bridge: now focusing on the abstractions…)</a:t>
+            </a:r>
+          </a:p>
+        </p:txBody>
+      </p:sp>
+      <p:sp>
+        <p:nvSpPr>
+          <p:cNvPr id="4" name="Slide Number Placeholder 3"/>
+          <p:cNvSpPr>
+            <a:spLocks noGrp="1"/>
+          </p:cNvSpPr>
+          <p:nvPr>
+            <p:ph type="sldNum" sz="quarter" idx="5"/>
+          </p:nvPr>
+        </p:nvSpPr>
+        <p:spPr/>
+        <p:txBody>
+          <a:bodyPr/>
+          <a:lstStyle/>
+          <a:p>
+            <a:fld id="{FA8FD632-245B-410D-BCC4-8BF8D37AB67F}" type="slidenum">
+              <a:rPr lang="en-US" smtClean="0"/>
+              <a:t>4</a:t>
+            </a:fld>
+            <a:endParaRPr lang="en-US"/>
+          </a:p>
+        </p:txBody>
+      </p:sp>
+    </p:spTree>
+    <p:extLst>
+      <p:ext uri="{BB962C8B-B14F-4D97-AF65-F5344CB8AC3E}">
+        <p14:creationId xmlns:p14="http://schemas.microsoft.com/office/powerpoint/2010/main" val="4226210950"/>
+      </p:ext>
+    </p:extLst>
+  </p:cSld>
+  <p:clrMapOvr>
+    <a:masterClrMapping/>
+  </p:clrMapOvr>
+</p:notes>
+</file>
+
+<file path=ppt/notesSlides/notesSlide3.xml><?xml version="1.0" encoding="utf-8"?>
+<p:notes xmlns:a="http://schemas.openxmlformats.org/drawingml/2006/main" xmlns:r="http://schemas.openxmlformats.org/officeDocument/2006/relationships" xmlns:p="http://schemas.openxmlformats.org/presentationml/2006/main">
+  <p:cSld>
+    <p:spTree>
+      <p:nvGrpSpPr>
+        <p:cNvPr id="1" name=""/>
+        <p:cNvGrpSpPr/>
+        <p:nvPr/>
+      </p:nvGrpSpPr>
+      <p:grpSpPr>
+        <a:xfrm>
+          <a:off x="0" y="0"/>
+          <a:ext cx="0" cy="0"/>
+          <a:chOff x="0" y="0"/>
+          <a:chExt cx="0" cy="0"/>
+        </a:xfrm>
+      </p:grpSpPr>
+      <p:sp>
+        <p:nvSpPr>
+          <p:cNvPr id="2" name="Slide Image Placeholder 1"/>
+          <p:cNvSpPr>
+            <a:spLocks noGrp="1" noRot="1" noChangeAspect="1"/>
+          </p:cNvSpPr>
+          <p:nvPr>
+            <p:ph type="sldImg"/>
+          </p:nvPr>
+        </p:nvSpPr>
+        <p:spPr/>
+      </p:sp>
+      <p:sp>
+        <p:nvSpPr>
+          <p:cNvPr id="3" name="Notes Placeholder 2"/>
+          <p:cNvSpPr>
+            <a:spLocks noGrp="1"/>
+          </p:cNvSpPr>
+          <p:nvPr>
+            <p:ph type="body" idx="1"/>
+          </p:nvPr>
+        </p:nvSpPr>
+        <p:spPr/>
+        <p:txBody>
+          <a:bodyPr/>
+          <a:lstStyle/>
+          <a:p>
+            <a:endParaRPr lang="en-US" dirty="0"/>
+          </a:p>
+        </p:txBody>
+      </p:sp>
+      <p:sp>
+        <p:nvSpPr>
+          <p:cNvPr id="4" name="Slide Number Placeholder 3"/>
+          <p:cNvSpPr>
+            <a:spLocks noGrp="1"/>
+          </p:cNvSpPr>
+          <p:nvPr>
+            <p:ph type="sldNum" sz="quarter" idx="5"/>
+          </p:nvPr>
+        </p:nvSpPr>
+        <p:spPr/>
+        <p:txBody>
+          <a:bodyPr/>
+          <a:lstStyle/>
+          <a:p>
+            <a:fld id="{FA8FD632-245B-410D-BCC4-8BF8D37AB67F}" type="slidenum">
+              <a:rPr lang="en-US" smtClean="0"/>
+              <a:t>5</a:t>
+            </a:fld>
+            <a:endParaRPr lang="en-US"/>
+          </a:p>
+        </p:txBody>
+      </p:sp>
+    </p:spTree>
+    <p:extLst>
+      <p:ext uri="{BB962C8B-B14F-4D97-AF65-F5344CB8AC3E}">
+        <p14:creationId xmlns:p14="http://schemas.microsoft.com/office/powerpoint/2010/main" val="2744560177"/>
+      </p:ext>
+    </p:extLst>
+  </p:cSld>
+  <p:clrMapOvr>
+    <a:masterClrMapping/>
+  </p:clrMapOvr>
+</p:notes>
+</file>
+
+<file path=ppt/notesSlides/notesSlide4.xml><?xml version="1.0" encoding="utf-8"?>
+<p:notes xmlns:a="http://schemas.openxmlformats.org/drawingml/2006/main" xmlns:r="http://schemas.openxmlformats.org/officeDocument/2006/relationships" xmlns:p="http://schemas.openxmlformats.org/presentationml/2006/main">
+  <p:cSld>
+    <p:spTree>
+      <p:nvGrpSpPr>
+        <p:cNvPr id="1" name=""/>
+        <p:cNvGrpSpPr/>
+        <p:nvPr/>
+      </p:nvGrpSpPr>
+      <p:grpSpPr>
+        <a:xfrm>
+          <a:off x="0" y="0"/>
+          <a:ext cx="0" cy="0"/>
+          <a:chOff x="0" y="0"/>
+          <a:chExt cx="0" cy="0"/>
+        </a:xfrm>
+      </p:grpSpPr>
+      <p:sp>
+        <p:nvSpPr>
+          <p:cNvPr id="2" name="Slide Image Placeholder 1"/>
+          <p:cNvSpPr>
+            <a:spLocks noGrp="1" noRot="1" noChangeAspect="1"/>
+          </p:cNvSpPr>
+          <p:nvPr>
+            <p:ph type="sldImg"/>
+          </p:nvPr>
+        </p:nvSpPr>
+        <p:spPr/>
+      </p:sp>
+      <p:sp>
+        <p:nvSpPr>
+          <p:cNvPr id="3" name="Notes Placeholder 2"/>
+          <p:cNvSpPr>
+            <a:spLocks noGrp="1"/>
+          </p:cNvSpPr>
+          <p:nvPr>
+            <p:ph type="body" idx="1"/>
+          </p:nvPr>
+        </p:nvSpPr>
+        <p:spPr/>
+        <p:txBody>
+          <a:bodyPr/>
+          <a:lstStyle/>
+          <a:p>
+            <a:endParaRPr lang="en-US" dirty="0"/>
+          </a:p>
+        </p:txBody>
+      </p:sp>
+      <p:sp>
+        <p:nvSpPr>
+          <p:cNvPr id="4" name="Slide Number Placeholder 3"/>
+          <p:cNvSpPr>
+            <a:spLocks noGrp="1"/>
+          </p:cNvSpPr>
+          <p:nvPr>
+            <p:ph type="sldNum" sz="quarter" idx="5"/>
+          </p:nvPr>
+        </p:nvSpPr>
+        <p:spPr/>
+        <p:txBody>
+          <a:bodyPr/>
+          <a:lstStyle/>
+          <a:p>
+            <a:fld id="{FA8FD632-245B-410D-BCC4-8BF8D37AB67F}" type="slidenum">
+              <a:rPr lang="en-US" smtClean="0"/>
+              <a:t>6</a:t>
+            </a:fld>
+            <a:endParaRPr lang="en-US"/>
+          </a:p>
+        </p:txBody>
+      </p:sp>
+    </p:spTree>
+    <p:extLst>
+      <p:ext uri="{BB962C8B-B14F-4D97-AF65-F5344CB8AC3E}">
+        <p14:creationId xmlns:p14="http://schemas.microsoft.com/office/powerpoint/2010/main" val="2275437870"/>
+      </p:ext>
+    </p:extLst>
+  </p:cSld>
+  <p:clrMapOvr>
+    <a:masterClrMapping/>
+  </p:clrMapOvr>
+</p:notes>
+</file>
+
+<file path=ppt/notesSlides/notesSlide5.xml><?xml version="1.0" encoding="utf-8"?>
+<p:notes xmlns:a="http://schemas.openxmlformats.org/drawingml/2006/main" xmlns:r="http://schemas.openxmlformats.org/officeDocument/2006/relationships" xmlns:p="http://schemas.openxmlformats.org/presentationml/2006/main">
+  <p:cSld>
+    <p:spTree>
+      <p:nvGrpSpPr>
+        <p:cNvPr id="1" name=""/>
+        <p:cNvGrpSpPr/>
+        <p:nvPr/>
+      </p:nvGrpSpPr>
+      <p:grpSpPr>
+        <a:xfrm>
+          <a:off x="0" y="0"/>
+          <a:ext cx="0" cy="0"/>
+          <a:chOff x="0" y="0"/>
+          <a:chExt cx="0" cy="0"/>
+        </a:xfrm>
+      </p:grpSpPr>
+      <p:sp>
+        <p:nvSpPr>
+          <p:cNvPr id="2" name="Slide Image Placeholder 1"/>
+          <p:cNvSpPr>
+            <a:spLocks noGrp="1" noRot="1" noChangeAspect="1"/>
+          </p:cNvSpPr>
+          <p:nvPr>
+            <p:ph type="sldImg"/>
+          </p:nvPr>
+        </p:nvSpPr>
+        <p:spPr/>
+      </p:sp>
+      <p:sp>
+        <p:nvSpPr>
+          <p:cNvPr id="3" name="Notes Placeholder 2"/>
+          <p:cNvSpPr>
+            <a:spLocks noGrp="1"/>
+          </p:cNvSpPr>
+          <p:nvPr>
+            <p:ph type="body" idx="1"/>
+          </p:nvPr>
+        </p:nvSpPr>
+        <p:spPr/>
+        <p:txBody>
+          <a:bodyPr/>
+          <a:lstStyle/>
+          <a:p>
+            <a:endParaRPr lang="en-US" dirty="0"/>
+          </a:p>
+        </p:txBody>
+      </p:sp>
+      <p:sp>
+        <p:nvSpPr>
+          <p:cNvPr id="4" name="Slide Number Placeholder 3"/>
+          <p:cNvSpPr>
+            <a:spLocks noGrp="1"/>
+          </p:cNvSpPr>
+          <p:nvPr>
+            <p:ph type="sldNum" sz="quarter" idx="5"/>
+          </p:nvPr>
+        </p:nvSpPr>
+        <p:spPr/>
+        <p:txBody>
+          <a:bodyPr/>
+          <a:lstStyle/>
+          <a:p>
+            <a:fld id="{FA8FD632-245B-410D-BCC4-8BF8D37AB67F}" type="slidenum">
+              <a:rPr lang="en-US" smtClean="0"/>
+              <a:t>11</a:t>
             </a:fld>
             <a:endParaRPr lang="en-US"/>
           </a:p>
@@ -750,7 +1280,7 @@
           <a:p>
             <a:fld id="{93F57E82-5604-4F8C-BCFA-F7C026884391}" type="datetimeFigureOut">
               <a:rPr lang="en-US" smtClean="0"/>
-              <a:t>8/24/2026</a:t>
+              <a:t>8/25/2026</a:t>
             </a:fld>
             <a:endParaRPr lang="en-US"/>
           </a:p>
@@ -948,7 +1478,7 @@
           <a:p>
             <a:fld id="{93F57E82-5604-4F8C-BCFA-F7C026884391}" type="datetimeFigureOut">
               <a:rPr lang="en-US" smtClean="0"/>
-              <a:t>8/24/2026</a:t>
+              <a:t>8/25/2026</a:t>
             </a:fld>
             <a:endParaRPr lang="en-US"/>
           </a:p>
@@ -1156,7 +1686,7 @@
           <a:p>
             <a:fld id="{93F57E82-5604-4F8C-BCFA-F7C026884391}" type="datetimeFigureOut">
               <a:rPr lang="en-US" smtClean="0"/>
-              <a:t>8/24/2026</a:t>
+              <a:t>8/25/2026</a:t>
             </a:fld>
             <a:endParaRPr lang="en-US"/>
           </a:p>
@@ -1354,7 +1884,7 @@
           <a:p>
             <a:fld id="{93F57E82-5604-4F8C-BCFA-F7C026884391}" type="datetimeFigureOut">
               <a:rPr lang="en-US" smtClean="0"/>
-              <a:t>8/24/2026</a:t>
+              <a:t>8/25/2026</a:t>
             </a:fld>
             <a:endParaRPr lang="en-US"/>
           </a:p>
@@ -1629,7 +2159,7 @@
           <a:p>
             <a:fld id="{93F57E82-5604-4F8C-BCFA-F7C026884391}" type="datetimeFigureOut">
               <a:rPr lang="en-US" smtClean="0"/>
-              <a:t>8/24/2026</a:t>
+              <a:t>8/25/2026</a:t>
             </a:fld>
             <a:endParaRPr lang="en-US"/>
           </a:p>
@@ -1894,7 +2424,7 @@
           <a:p>
             <a:fld id="{93F57E82-5604-4F8C-BCFA-F7C026884391}" type="datetimeFigureOut">
               <a:rPr lang="en-US" smtClean="0"/>
-              <a:t>8/24/2026</a:t>
+              <a:t>8/25/2026</a:t>
             </a:fld>
             <a:endParaRPr lang="en-US"/>
           </a:p>
@@ -2306,7 +2836,7 @@
           <a:p>
             <a:fld id="{93F57E82-5604-4F8C-BCFA-F7C026884391}" type="datetimeFigureOut">
               <a:rPr lang="en-US" smtClean="0"/>
-              <a:t>8/24/2026</a:t>
+              <a:t>8/25/2026</a:t>
             </a:fld>
             <a:endParaRPr lang="en-US"/>
           </a:p>
@@ -2447,7 +2977,7 @@
           <a:p>
             <a:fld id="{93F57E82-5604-4F8C-BCFA-F7C026884391}" type="datetimeFigureOut">
               <a:rPr lang="en-US" smtClean="0"/>
-              <a:t>8/24/2026</a:t>
+              <a:t>8/25/2026</a:t>
             </a:fld>
             <a:endParaRPr lang="en-US"/>
           </a:p>
@@ -2560,7 +3090,7 @@
           <a:p>
             <a:fld id="{93F57E82-5604-4F8C-BCFA-F7C026884391}" type="datetimeFigureOut">
               <a:rPr lang="en-US" smtClean="0"/>
-              <a:t>8/24/2026</a:t>
+              <a:t>8/25/2026</a:t>
             </a:fld>
             <a:endParaRPr lang="en-US"/>
           </a:p>
@@ -2871,7 +3401,7 @@
           <a:p>
             <a:fld id="{93F57E82-5604-4F8C-BCFA-F7C026884391}" type="datetimeFigureOut">
               <a:rPr lang="en-US" smtClean="0"/>
-              <a:t>8/24/2026</a:t>
+              <a:t>8/25/2026</a:t>
             </a:fld>
             <a:endParaRPr lang="en-US"/>
           </a:p>
@@ -3159,7 +3689,7 @@
           <a:p>
             <a:fld id="{93F57E82-5604-4F8C-BCFA-F7C026884391}" type="datetimeFigureOut">
               <a:rPr lang="en-US" smtClean="0"/>
-              <a:t>8/24/2026</a:t>
+              <a:t>8/25/2026</a:t>
             </a:fld>
             <a:endParaRPr lang="en-US"/>
           </a:p>
@@ -3400,7 +3930,7 @@
           <a:p>
             <a:fld id="{93F57E82-5604-4F8C-BCFA-F7C026884391}" type="datetimeFigureOut">
               <a:rPr lang="en-US" smtClean="0"/>
-              <a:t>8/24/2026</a:t>
+              <a:t>8/25/2026</a:t>
             </a:fld>
             <a:endParaRPr lang="en-US"/>
           </a:p>
@@ -3841,10 +4371,10 @@
           <a:lstStyle/>
           <a:p>
             <a:r>
-              <a:rPr lang="en-US" b="1" dirty="0"/>
+              <a:rPr lang="en-US" b="1" noProof="0" dirty="0"/>
               <a:t>Optimizing Memory Layouts and Traversal Orders in HPC</a:t>
             </a:r>
-            <a:endParaRPr lang="en-US" dirty="0"/>
+            <a:endParaRPr lang="en-US" noProof="0" dirty="0"/>
           </a:p>
         </p:txBody>
       </p:sp>
@@ -3870,17 +4400,13 @@
           <a:lstStyle/>
           <a:p>
             <a:r>
-              <a:rPr lang="en-US" dirty="0"/>
-              <a:t>Ji</a:t>
-            </a:r>
-            <a:r>
-              <a:rPr lang="cs-CZ" dirty="0"/>
-              <a:t>ří Klepl</a:t>
-            </a:r>
-          </a:p>
-          <a:p>
-            <a:r>
-              <a:rPr lang="en-US" dirty="0"/>
+              <a:rPr lang="en-US" noProof="0" dirty="0"/>
+              <a:t>Jiří Klepl</a:t>
+            </a:r>
+          </a:p>
+          <a:p>
+            <a:r>
+              <a:rPr lang="en-US" noProof="0" dirty="0"/>
               <a:t>Department of Distributed and Dependable Systems</a:t>
             </a:r>
           </a:p>
@@ -3921,7 +4447,7 @@
           <p:cNvPr id="2" name="Title 1">
             <a:extLst>
               <a:ext uri="{FF2B5EF4-FFF2-40B4-BE49-F238E27FC236}">
-                <a16:creationId xmlns:a16="http://schemas.microsoft.com/office/drawing/2014/main" id="{1CFD8E19-FCBD-3C1F-9804-55F9EF315364}"/>
+                <a16:creationId xmlns:a16="http://schemas.microsoft.com/office/drawing/2014/main" id="{19C5CD64-6486-850E-0A2A-48532AE26434}"/>
               </a:ext>
             </a:extLst>
           </p:cNvPr>
@@ -3939,7 +4465,7 @@
           <a:p>
             <a:r>
               <a:rPr lang="en-US" dirty="0"/>
-              <a:t>LLMs in algorithm design</a:t>
+              <a:t>Results</a:t>
             </a:r>
           </a:p>
         </p:txBody>
@@ -3949,7 +4475,7 @@
           <p:cNvPr id="3" name="Content Placeholder 2">
             <a:extLst>
               <a:ext uri="{FF2B5EF4-FFF2-40B4-BE49-F238E27FC236}">
-                <a16:creationId xmlns:a16="http://schemas.microsoft.com/office/drawing/2014/main" id="{64F2D09B-2F00-3457-9D41-D2EAB2BD84E5}"/>
+                <a16:creationId xmlns:a16="http://schemas.microsoft.com/office/drawing/2014/main" id="{3F49C5DC-F250-ABEE-8BA5-C59E6ABD627F}"/>
               </a:ext>
             </a:extLst>
           </p:cNvPr>
@@ -3965,23 +4491,14 @@
           <a:bodyPr/>
           <a:lstStyle/>
           <a:p>
-            <a:r>
-              <a:rPr lang="en-US" dirty="0"/>
-              <a:t>Tutoring LLMs for CUDA optimization</a:t>
-            </a:r>
-          </a:p>
-          <a:p>
-            <a:r>
-              <a:rPr lang="en-US" dirty="0"/>
-              <a:t>LLMs and abstractions</a:t>
-            </a:r>
+            <a:endParaRPr lang="en-US"/>
           </a:p>
         </p:txBody>
       </p:sp>
     </p:spTree>
     <p:extLst>
       <p:ext uri="{BB962C8B-B14F-4D97-AF65-F5344CB8AC3E}">
-        <p14:creationId xmlns:p14="http://schemas.microsoft.com/office/powerpoint/2010/main" val="645810162"/>
+        <p14:creationId xmlns:p14="http://schemas.microsoft.com/office/powerpoint/2010/main" val="52204862"/>
       </p:ext>
     </p:extLst>
   </p:cSld>
@@ -3992,7 +4509,177 @@
 </file>
 
 <file path=ppt/slides/slide11.xml><?xml version="1.0" encoding="utf-8"?>
-<p:sld xmlns:a="http://schemas.openxmlformats.org/drawingml/2006/main" xmlns:r="http://schemas.openxmlformats.org/officeDocument/2006/relationships" xmlns:p="http://schemas.openxmlformats.org/presentationml/2006/main">
+<p:sld xmlns:a="http://schemas.openxmlformats.org/drawingml/2006/main" xmlns:r="http://schemas.openxmlformats.org/officeDocument/2006/relationships" xmlns:p="http://schemas.openxmlformats.org/presentationml/2006/main" show="0">
+  <p:cSld>
+    <p:spTree>
+      <p:nvGrpSpPr>
+        <p:cNvPr id="1" name="">
+          <a:extLst>
+            <a:ext uri="{FF2B5EF4-FFF2-40B4-BE49-F238E27FC236}">
+              <a16:creationId xmlns:a16="http://schemas.microsoft.com/office/drawing/2014/main" id="{EFDF7620-7AA1-EF30-FDC7-27AAC7FFE5EE}"/>
+            </a:ext>
+          </a:extLst>
+        </p:cNvPr>
+        <p:cNvGrpSpPr/>
+        <p:nvPr/>
+      </p:nvGrpSpPr>
+      <p:grpSpPr>
+        <a:xfrm>
+          <a:off x="0" y="0"/>
+          <a:ext cx="0" cy="0"/>
+          <a:chOff x="0" y="0"/>
+          <a:chExt cx="0" cy="0"/>
+        </a:xfrm>
+      </p:grpSpPr>
+      <p:sp>
+        <p:nvSpPr>
+          <p:cNvPr id="2" name="Title 1">
+            <a:extLst>
+              <a:ext uri="{FF2B5EF4-FFF2-40B4-BE49-F238E27FC236}">
+                <a16:creationId xmlns:a16="http://schemas.microsoft.com/office/drawing/2014/main" id="{F7C42AB4-1D66-61B5-41F3-D1C814D6D79F}"/>
+              </a:ext>
+            </a:extLst>
+          </p:cNvPr>
+          <p:cNvSpPr>
+            <a:spLocks noGrp="1"/>
+          </p:cNvSpPr>
+          <p:nvPr>
+            <p:ph type="title"/>
+          </p:nvPr>
+        </p:nvSpPr>
+        <p:spPr/>
+        <p:txBody>
+          <a:bodyPr/>
+          <a:lstStyle/>
+          <a:p>
+            <a:r>
+              <a:rPr lang="en-US" noProof="0" dirty="0"/>
+              <a:t>M &amp; S</a:t>
+            </a:r>
+          </a:p>
+        </p:txBody>
+      </p:sp>
+      <p:sp>
+        <p:nvSpPr>
+          <p:cNvPr id="3" name="Content Placeholder 2">
+            <a:extLst>
+              <a:ext uri="{FF2B5EF4-FFF2-40B4-BE49-F238E27FC236}">
+                <a16:creationId xmlns:a16="http://schemas.microsoft.com/office/drawing/2014/main" id="{7FC71ADE-62E2-F5C5-38A6-5FA51E07F94E}"/>
+              </a:ext>
+            </a:extLst>
+          </p:cNvPr>
+          <p:cNvSpPr>
+            <a:spLocks noGrp="1"/>
+          </p:cNvSpPr>
+          <p:nvPr>
+            <p:ph idx="1"/>
+          </p:nvPr>
+        </p:nvSpPr>
+        <p:spPr/>
+        <p:txBody>
+          <a:bodyPr/>
+          <a:lstStyle/>
+          <a:p>
+            <a:r>
+              <a:rPr lang="en-US" noProof="0" dirty="0"/>
+              <a:t>Motivation: GPU &amp; Cluster computing</a:t>
+            </a:r>
+          </a:p>
+          <a:p>
+            <a:pPr lvl="1"/>
+            <a:r>
+              <a:rPr lang="en-US" noProof="0" dirty="0"/>
+              <a:t>Too many decisions, complex code (you don’t know) </a:t>
+            </a:r>
+            <a:r>
+              <a:rPr lang="en-US" noProof="0" dirty="0">
+                <a:sym typeface="Wingdings" panose="05000000000000000000" pitchFamily="2" charset="2"/>
+              </a:rPr>
+              <a:t> the problem, it is hard</a:t>
+            </a:r>
+            <a:endParaRPr lang="en-US" noProof="0" dirty="0"/>
+          </a:p>
+          <a:p>
+            <a:pPr lvl="2"/>
+            <a:r>
+              <a:rPr lang="en-US" noProof="0" dirty="0"/>
+              <a:t>layout options, traversal options, parallelization (Matice, </a:t>
+            </a:r>
+            <a:r>
+              <a:rPr lang="en-US" noProof="0" dirty="0" err="1"/>
+              <a:t>pruchod</a:t>
+            </a:r>
+            <a:r>
+              <a:rPr lang="en-US" noProof="0" dirty="0"/>
+              <a:t>; </a:t>
+            </a:r>
+            <a:r>
+              <a:rPr lang="en-US" noProof="0" dirty="0" err="1"/>
+              <a:t>nasobeni</a:t>
+            </a:r>
+            <a:r>
+              <a:rPr lang="en-US" noProof="0" dirty="0"/>
+              <a:t>?)</a:t>
+            </a:r>
+          </a:p>
+          <a:p>
+            <a:pPr lvl="2"/>
+            <a:r>
+              <a:rPr lang="en-US" noProof="0" dirty="0"/>
+              <a:t>parameters for the above (block sizes, …)</a:t>
+            </a:r>
+          </a:p>
+          <a:p>
+            <a:r>
+              <a:rPr lang="en-US" noProof="0" dirty="0"/>
+              <a:t>Our solution: Abstraction &amp; automatization </a:t>
+            </a:r>
+            <a:r>
+              <a:rPr lang="en-US" noProof="0" dirty="0">
+                <a:sym typeface="Wingdings" panose="05000000000000000000" pitchFamily="2" charset="2"/>
+              </a:rPr>
+              <a:t> we offer a solution</a:t>
+            </a:r>
+            <a:endParaRPr lang="en-US" noProof="0" dirty="0"/>
+          </a:p>
+          <a:p>
+            <a:pPr lvl="1"/>
+            <a:r>
+              <a:rPr lang="en-US" noProof="0" dirty="0"/>
+              <a:t>Separation of concerns, independent aspects</a:t>
+            </a:r>
+          </a:p>
+          <a:p>
+            <a:pPr lvl="1"/>
+            <a:r>
+              <a:rPr lang="en-US" noProof="0" dirty="0"/>
+              <a:t>Introducing layout-agnostic and traversal-agnostic algorithm design</a:t>
+            </a:r>
+          </a:p>
+          <a:p>
+            <a:pPr lvl="1"/>
+            <a:r>
+              <a:rPr lang="en-US" noProof="0" dirty="0"/>
+              <a:t>How the world is saved</a:t>
+            </a:r>
+          </a:p>
+        </p:txBody>
+      </p:sp>
+    </p:spTree>
+    <p:extLst>
+      <p:ext uri="{BB962C8B-B14F-4D97-AF65-F5344CB8AC3E}">
+        <p14:creationId xmlns:p14="http://schemas.microsoft.com/office/powerpoint/2010/main" val="1408920348"/>
+      </p:ext>
+    </p:extLst>
+  </p:cSld>
+  <p:clrMapOvr>
+    <a:masterClrMapping/>
+  </p:clrMapOvr>
+</p:sld>
+</file>
+
+<file path=ppt/slides/slide12.xml><?xml version="1.0" encoding="utf-8"?>
+<p:sld xmlns:a="http://schemas.openxmlformats.org/drawingml/2006/main" xmlns:r="http://schemas.openxmlformats.org/officeDocument/2006/relationships" xmlns:p="http://schemas.openxmlformats.org/presentationml/2006/main" show="0">
   <p:cSld>
     <p:spTree>
       <p:nvGrpSpPr>
@@ -4013,7 +4700,7 @@
           <p:cNvPr id="2" name="Title 1">
             <a:extLst>
               <a:ext uri="{FF2B5EF4-FFF2-40B4-BE49-F238E27FC236}">
-                <a16:creationId xmlns:a16="http://schemas.microsoft.com/office/drawing/2014/main" id="{928BD501-0287-7E9D-6C52-A86B98F9EB52}"/>
+                <a16:creationId xmlns:a16="http://schemas.microsoft.com/office/drawing/2014/main" id="{3844D8EA-565C-C8A0-F333-6EBD085AC735}"/>
               </a:ext>
             </a:extLst>
           </p:cNvPr>
@@ -4030,10 +4717,9 @@
           <a:lstStyle/>
           <a:p>
             <a:r>
-              <a:rPr lang="en-US" dirty="0" err="1"/>
-              <a:t>Zahodit</a:t>
-            </a:r>
-            <a:endParaRPr lang="en-US" dirty="0"/>
+              <a:rPr lang="en-US" noProof="0" dirty="0"/>
+              <a:t>Proposed abstractions</a:t>
+            </a:r>
           </a:p>
         </p:txBody>
       </p:sp>
@@ -4042,7 +4728,7 @@
           <p:cNvPr id="3" name="Content Placeholder 2">
             <a:extLst>
               <a:ext uri="{FF2B5EF4-FFF2-40B4-BE49-F238E27FC236}">
-                <a16:creationId xmlns:a16="http://schemas.microsoft.com/office/drawing/2014/main" id="{369E5D67-EA03-A5CA-2D82-199F178CE89C}"/>
+                <a16:creationId xmlns:a16="http://schemas.microsoft.com/office/drawing/2014/main" id="{0B0BC514-DFF4-C541-7399-85275B2EB075}"/>
               </a:ext>
             </a:extLst>
           </p:cNvPr>
@@ -4059,622 +4745,108 @@
           <a:lstStyle/>
           <a:p>
             <a:r>
-              <a:rPr lang="en-US" dirty="0" err="1"/>
-              <a:t>Noarr</a:t>
-            </a:r>
-            <a:endParaRPr lang="en-US" dirty="0"/>
-          </a:p>
-          <a:p>
-            <a:r>
-              <a:rPr lang="en-US" dirty="0" err="1"/>
-              <a:t>Cellato</a:t>
-            </a:r>
-            <a:endParaRPr lang="en-US" dirty="0"/>
+              <a:rPr lang="en-US" noProof="0" dirty="0"/>
+              <a:t>Layout abstractions</a:t>
+            </a:r>
+          </a:p>
+          <a:p>
+            <a:r>
+              <a:rPr lang="en-US" noProof="0" dirty="0"/>
+              <a:t>Traversal abstractions</a:t>
+            </a:r>
+          </a:p>
+          <a:p>
+            <a:endParaRPr lang="en-US" noProof="0" dirty="0"/>
+          </a:p>
+          <a:p>
+            <a:r>
+              <a:rPr lang="en-US" noProof="0" dirty="0"/>
+              <a:t>Extensions</a:t>
+            </a:r>
+          </a:p>
+          <a:p>
+            <a:pPr lvl="1"/>
+            <a:r>
+              <a:rPr lang="en-US" noProof="0" dirty="0"/>
+              <a:t>? Practical aspects; </a:t>
+            </a:r>
+            <a:r>
+              <a:rPr lang="en-US" noProof="0" dirty="0">
+                <a:sym typeface="Wingdings" panose="05000000000000000000" pitchFamily="2" charset="2"/>
+              </a:rPr>
+              <a:t> autotuning</a:t>
+            </a:r>
+            <a:endParaRPr lang="en-US" noProof="0" dirty="0"/>
+          </a:p>
+          <a:p>
+            <a:pPr lvl="1"/>
+            <a:r>
+              <a:rPr lang="en-US" noProof="0" dirty="0"/>
+              <a:t>Distributed computing</a:t>
+            </a:r>
+          </a:p>
+          <a:p>
+            <a:endParaRPr lang="en-US" noProof="0" dirty="0"/>
+          </a:p>
+          <a:p>
+            <a:r>
+              <a:rPr lang="en-US" noProof="0" dirty="0"/>
+              <a:t>Knowledge </a:t>
+            </a:r>
+            <a:r>
+              <a:rPr lang="en-US" noProof="0" dirty="0" err="1"/>
+              <a:t>neco</a:t>
+            </a:r>
+            <a:r>
+              <a:rPr lang="en-US" noProof="0" dirty="0"/>
+              <a:t> (</a:t>
+            </a:r>
+            <a:r>
+              <a:rPr lang="en-US" noProof="0" dirty="0" err="1"/>
+              <a:t>metaprogramovani</a:t>
+            </a:r>
+            <a:r>
+              <a:rPr lang="en-US" noProof="0" dirty="0"/>
+              <a:t>, </a:t>
+            </a:r>
+            <a:r>
+              <a:rPr lang="en-US" noProof="0" dirty="0" err="1"/>
+              <a:t>stavebni</a:t>
+            </a:r>
+            <a:r>
+              <a:rPr lang="en-US" noProof="0" dirty="0"/>
+              <a:t> </a:t>
+            </a:r>
+            <a:r>
+              <a:rPr lang="en-US" noProof="0" dirty="0" err="1"/>
+              <a:t>bloky</a:t>
+            </a:r>
+            <a:r>
+              <a:rPr lang="en-US" noProof="0" dirty="0"/>
+              <a:t>, </a:t>
+            </a:r>
+            <a:r>
+              <a:rPr lang="en-US" noProof="0" dirty="0" err="1"/>
+              <a:t>traversery</a:t>
+            </a:r>
+            <a:r>
+              <a:rPr lang="en-US" noProof="0" dirty="0"/>
+              <a:t>?)</a:t>
+            </a:r>
+          </a:p>
+          <a:p>
+            <a:pPr lvl="1"/>
+            <a:r>
+              <a:rPr lang="en-US" noProof="0" dirty="0"/>
+              <a:t>CA computations (</a:t>
+            </a:r>
           </a:p>
         </p:txBody>
       </p:sp>
     </p:spTree>
     <p:extLst>
       <p:ext uri="{BB962C8B-B14F-4D97-AF65-F5344CB8AC3E}">
-        <p14:creationId xmlns:p14="http://schemas.microsoft.com/office/powerpoint/2010/main" val="4085122203"/>
-      </p:ext>
-    </p:extLst>
-  </p:cSld>
-  <p:clrMapOvr>
-    <a:masterClrMapping/>
-  </p:clrMapOvr>
-</p:sld>
-</file>
-
-<file path=ppt/slides/slide12.xml><?xml version="1.0" encoding="utf-8"?>
-<p:sld xmlns:a="http://schemas.openxmlformats.org/drawingml/2006/main" xmlns:r="http://schemas.openxmlformats.org/officeDocument/2006/relationships" xmlns:p="http://schemas.openxmlformats.org/presentationml/2006/main">
-  <p:cSld>
-    <p:spTree>
-      <p:nvGrpSpPr>
-        <p:cNvPr id="1" name=""/>
-        <p:cNvGrpSpPr/>
-        <p:nvPr/>
-      </p:nvGrpSpPr>
-      <p:grpSpPr>
-        <a:xfrm>
-          <a:off x="0" y="0"/>
-          <a:ext cx="0" cy="0"/>
-          <a:chOff x="0" y="0"/>
-          <a:chExt cx="0" cy="0"/>
-        </a:xfrm>
-      </p:grpSpPr>
-      <p:sp>
-        <p:nvSpPr>
-          <p:cNvPr id="2" name="Title 1">
-            <a:extLst>
-              <a:ext uri="{FF2B5EF4-FFF2-40B4-BE49-F238E27FC236}">
-                <a16:creationId xmlns:a16="http://schemas.microsoft.com/office/drawing/2014/main" id="{6447B745-9B50-DD90-5161-BD2A06CEA44B}"/>
-              </a:ext>
-            </a:extLst>
-          </p:cNvPr>
-          <p:cNvSpPr>
-            <a:spLocks noGrp="1"/>
-          </p:cNvSpPr>
-          <p:nvPr>
-            <p:ph type="title"/>
-          </p:nvPr>
-        </p:nvSpPr>
-        <p:spPr/>
-        <p:txBody>
-          <a:bodyPr/>
-          <a:lstStyle/>
-          <a:p>
-            <a:r>
-              <a:rPr lang="en-US" dirty="0"/>
-              <a:t>Contribution map</a:t>
-            </a:r>
-          </a:p>
-        </p:txBody>
-      </p:sp>
-      <p:sp>
-        <p:nvSpPr>
-          <p:cNvPr id="5" name="Rectangle 4">
-            <a:extLst>
-              <a:ext uri="{FF2B5EF4-FFF2-40B4-BE49-F238E27FC236}">
-                <a16:creationId xmlns:a16="http://schemas.microsoft.com/office/drawing/2014/main" id="{CB7F8197-FC2F-9C2A-050C-CCCB46D86C79}"/>
-              </a:ext>
-            </a:extLst>
-          </p:cNvPr>
-          <p:cNvSpPr/>
-          <p:nvPr/>
-        </p:nvSpPr>
-        <p:spPr>
-          <a:xfrm>
-            <a:off x="4240490" y="1406732"/>
-            <a:ext cx="3711020" cy="914400"/>
-          </a:xfrm>
-          <a:prstGeom prst="rect">
-            <a:avLst/>
-          </a:prstGeom>
-        </p:spPr>
-        <p:style>
-          <a:lnRef idx="2">
-            <a:schemeClr val="accent1">
-              <a:shade val="15000"/>
-            </a:schemeClr>
-          </a:lnRef>
-          <a:fillRef idx="1">
-            <a:schemeClr val="accent1"/>
-          </a:fillRef>
-          <a:effectRef idx="0">
-            <a:schemeClr val="accent1"/>
-          </a:effectRef>
-          <a:fontRef idx="minor">
-            <a:schemeClr val="lt1"/>
-          </a:fontRef>
-        </p:style>
-        <p:txBody>
-          <a:bodyPr rtlCol="0" anchor="ctr"/>
-          <a:lstStyle/>
-          <a:p>
-            <a:pPr algn="ctr"/>
-            <a:r>
-              <a:rPr lang="en-US" dirty="0"/>
-              <a:t>Separate algorithm design from performance optimization</a:t>
-            </a:r>
-          </a:p>
-        </p:txBody>
-      </p:sp>
-      <p:sp>
-        <p:nvSpPr>
-          <p:cNvPr id="7" name="Rectangle 6">
-            <a:extLst>
-              <a:ext uri="{FF2B5EF4-FFF2-40B4-BE49-F238E27FC236}">
-                <a16:creationId xmlns:a16="http://schemas.microsoft.com/office/drawing/2014/main" id="{60EC2A1A-B720-84BC-76D5-4751C09EA61A}"/>
-              </a:ext>
-            </a:extLst>
-          </p:cNvPr>
-          <p:cNvSpPr/>
-          <p:nvPr/>
-        </p:nvSpPr>
-        <p:spPr>
-          <a:xfrm>
-            <a:off x="150074" y="2971800"/>
-            <a:ext cx="3711020" cy="914400"/>
-          </a:xfrm>
-          <a:prstGeom prst="rect">
-            <a:avLst/>
-          </a:prstGeom>
-        </p:spPr>
-        <p:style>
-          <a:lnRef idx="2">
-            <a:schemeClr val="accent1">
-              <a:shade val="15000"/>
-            </a:schemeClr>
-          </a:lnRef>
-          <a:fillRef idx="1">
-            <a:schemeClr val="accent1"/>
-          </a:fillRef>
-          <a:effectRef idx="0">
-            <a:schemeClr val="accent1"/>
-          </a:effectRef>
-          <a:fontRef idx="minor">
-            <a:schemeClr val="lt1"/>
-          </a:fontRef>
-        </p:style>
-        <p:txBody>
-          <a:bodyPr rtlCol="0" anchor="ctr"/>
-          <a:lstStyle/>
-          <a:p>
-            <a:pPr algn="ctr"/>
-            <a:r>
-              <a:rPr lang="en-US" dirty="0"/>
-              <a:t>Layout- and traversal-agnostic abstractions</a:t>
-            </a:r>
-          </a:p>
-        </p:txBody>
-      </p:sp>
-      <p:sp>
-        <p:nvSpPr>
-          <p:cNvPr id="9" name="Rectangle 8">
-            <a:extLst>
-              <a:ext uri="{FF2B5EF4-FFF2-40B4-BE49-F238E27FC236}">
-                <a16:creationId xmlns:a16="http://schemas.microsoft.com/office/drawing/2014/main" id="{6DB7F776-4EDC-09F4-F04A-E586FC4B4500}"/>
-              </a:ext>
-            </a:extLst>
-          </p:cNvPr>
-          <p:cNvSpPr/>
-          <p:nvPr/>
-        </p:nvSpPr>
-        <p:spPr>
-          <a:xfrm>
-            <a:off x="7840178" y="2971800"/>
-            <a:ext cx="3711020" cy="914400"/>
-          </a:xfrm>
-          <a:prstGeom prst="rect">
-            <a:avLst/>
-          </a:prstGeom>
-        </p:spPr>
-        <p:style>
-          <a:lnRef idx="2">
-            <a:schemeClr val="accent1">
-              <a:shade val="15000"/>
-            </a:schemeClr>
-          </a:lnRef>
-          <a:fillRef idx="1">
-            <a:schemeClr val="accent1"/>
-          </a:fillRef>
-          <a:effectRef idx="0">
-            <a:schemeClr val="accent1"/>
-          </a:effectRef>
-          <a:fontRef idx="minor">
-            <a:schemeClr val="lt1"/>
-          </a:fontRef>
-        </p:style>
-        <p:txBody>
-          <a:bodyPr rtlCol="0" anchor="ctr"/>
-          <a:lstStyle/>
-          <a:p>
-            <a:pPr algn="ctr"/>
-            <a:r>
-              <a:rPr lang="en-US" dirty="0"/>
-              <a:t>LLM-assisted optimization</a:t>
-            </a:r>
-          </a:p>
-        </p:txBody>
-      </p:sp>
-      <p:sp>
-        <p:nvSpPr>
-          <p:cNvPr id="11" name="Rectangle 10">
-            <a:extLst>
-              <a:ext uri="{FF2B5EF4-FFF2-40B4-BE49-F238E27FC236}">
-                <a16:creationId xmlns:a16="http://schemas.microsoft.com/office/drawing/2014/main" id="{5B2B9BCB-5805-C1F1-AF45-681B37E6B83E}"/>
-              </a:ext>
-            </a:extLst>
-          </p:cNvPr>
-          <p:cNvSpPr/>
-          <p:nvPr/>
-        </p:nvSpPr>
-        <p:spPr>
-          <a:xfrm>
-            <a:off x="150074" y="4252912"/>
-            <a:ext cx="3711020" cy="914400"/>
-          </a:xfrm>
-          <a:prstGeom prst="rect">
-            <a:avLst/>
-          </a:prstGeom>
-        </p:spPr>
-        <p:style>
-          <a:lnRef idx="2">
-            <a:schemeClr val="accent1">
-              <a:shade val="15000"/>
-            </a:schemeClr>
-          </a:lnRef>
-          <a:fillRef idx="1">
-            <a:schemeClr val="accent1"/>
-          </a:fillRef>
-          <a:effectRef idx="0">
-            <a:schemeClr val="accent1"/>
-          </a:effectRef>
-          <a:fontRef idx="minor">
-            <a:schemeClr val="lt1"/>
-          </a:fontRef>
-        </p:style>
-        <p:txBody>
-          <a:bodyPr rtlCol="0" anchor="ctr"/>
-          <a:lstStyle/>
-          <a:p>
-            <a:pPr algn="ctr"/>
-            <a:r>
-              <a:rPr lang="en-US" dirty="0"/>
-              <a:t>Layout abstractions</a:t>
-            </a:r>
-          </a:p>
-        </p:txBody>
-      </p:sp>
-      <p:sp>
-        <p:nvSpPr>
-          <p:cNvPr id="13" name="Rectangle 12">
-            <a:extLst>
-              <a:ext uri="{FF2B5EF4-FFF2-40B4-BE49-F238E27FC236}">
-                <a16:creationId xmlns:a16="http://schemas.microsoft.com/office/drawing/2014/main" id="{31388E94-1EEB-E24E-1923-AA250880AF84}"/>
-              </a:ext>
-            </a:extLst>
-          </p:cNvPr>
-          <p:cNvSpPr/>
-          <p:nvPr/>
-        </p:nvSpPr>
-        <p:spPr>
-          <a:xfrm>
-            <a:off x="4240490" y="4252912"/>
-            <a:ext cx="3711020" cy="914400"/>
-          </a:xfrm>
-          <a:prstGeom prst="rect">
-            <a:avLst/>
-          </a:prstGeom>
-        </p:spPr>
-        <p:style>
-          <a:lnRef idx="2">
-            <a:schemeClr val="accent1">
-              <a:shade val="15000"/>
-            </a:schemeClr>
-          </a:lnRef>
-          <a:fillRef idx="1">
-            <a:schemeClr val="accent1"/>
-          </a:fillRef>
-          <a:effectRef idx="0">
-            <a:schemeClr val="accent1"/>
-          </a:effectRef>
-          <a:fontRef idx="minor">
-            <a:schemeClr val="lt1"/>
-          </a:fontRef>
-        </p:style>
-        <p:txBody>
-          <a:bodyPr rtlCol="0" anchor="ctr"/>
-          <a:lstStyle/>
-          <a:p>
-            <a:pPr algn="ctr"/>
-            <a:r>
-              <a:rPr lang="en-US" dirty="0"/>
-              <a:t>Traversal abstractions</a:t>
-            </a:r>
-          </a:p>
-        </p:txBody>
-      </p:sp>
-      <p:sp>
-        <p:nvSpPr>
-          <p:cNvPr id="15" name="Rectangle 14">
-            <a:extLst>
-              <a:ext uri="{FF2B5EF4-FFF2-40B4-BE49-F238E27FC236}">
-                <a16:creationId xmlns:a16="http://schemas.microsoft.com/office/drawing/2014/main" id="{DE8920A4-4430-6757-E41A-9BA9578DC80D}"/>
-              </a:ext>
-            </a:extLst>
-          </p:cNvPr>
-          <p:cNvSpPr/>
-          <p:nvPr/>
-        </p:nvSpPr>
-        <p:spPr>
-          <a:xfrm>
-            <a:off x="8330906" y="4252912"/>
-            <a:ext cx="3711020" cy="914400"/>
-          </a:xfrm>
-          <a:prstGeom prst="rect">
-            <a:avLst/>
-          </a:prstGeom>
-        </p:spPr>
-        <p:style>
-          <a:lnRef idx="2">
-            <a:schemeClr val="accent1">
-              <a:shade val="15000"/>
-            </a:schemeClr>
-          </a:lnRef>
-          <a:fillRef idx="1">
-            <a:schemeClr val="accent1"/>
-          </a:fillRef>
-          <a:effectRef idx="0">
-            <a:schemeClr val="accent1"/>
-          </a:effectRef>
-          <a:fontRef idx="minor">
-            <a:schemeClr val="lt1"/>
-          </a:fontRef>
-        </p:style>
-        <p:txBody>
-          <a:bodyPr rtlCol="0" anchor="ctr"/>
-          <a:lstStyle/>
-          <a:p>
-            <a:pPr algn="ctr"/>
-            <a:r>
-              <a:rPr lang="en-US" dirty="0"/>
-              <a:t>Practical aspects</a:t>
-            </a:r>
-          </a:p>
-        </p:txBody>
-      </p:sp>
-      <p:sp>
-        <p:nvSpPr>
-          <p:cNvPr id="17" name="Rectangle 16">
-            <a:extLst>
-              <a:ext uri="{FF2B5EF4-FFF2-40B4-BE49-F238E27FC236}">
-                <a16:creationId xmlns:a16="http://schemas.microsoft.com/office/drawing/2014/main" id="{D01E75A2-333B-DF95-544C-0ACF1B88882C}"/>
-              </a:ext>
-            </a:extLst>
-          </p:cNvPr>
-          <p:cNvSpPr/>
-          <p:nvPr/>
-        </p:nvSpPr>
-        <p:spPr>
-          <a:xfrm>
-            <a:off x="302474" y="5356288"/>
-            <a:ext cx="3711020" cy="914400"/>
-          </a:xfrm>
-          <a:prstGeom prst="rect">
-            <a:avLst/>
-          </a:prstGeom>
-        </p:spPr>
-        <p:style>
-          <a:lnRef idx="2">
-            <a:schemeClr val="accent1">
-              <a:shade val="15000"/>
-            </a:schemeClr>
-          </a:lnRef>
-          <a:fillRef idx="1">
-            <a:schemeClr val="accent1"/>
-          </a:fillRef>
-          <a:effectRef idx="0">
-            <a:schemeClr val="accent1"/>
-          </a:effectRef>
-          <a:fontRef idx="minor">
-            <a:schemeClr val="lt1"/>
-          </a:fontRef>
-        </p:style>
-        <p:txBody>
-          <a:bodyPr rtlCol="0" anchor="ctr"/>
-          <a:lstStyle/>
-          <a:p>
-            <a:pPr algn="ctr"/>
-            <a:r>
-              <a:rPr lang="en-US" dirty="0"/>
-              <a:t>Noarr structures</a:t>
-            </a:r>
-          </a:p>
-        </p:txBody>
-      </p:sp>
-      <p:sp>
-        <p:nvSpPr>
-          <p:cNvPr id="19" name="Rectangle 18">
-            <a:extLst>
-              <a:ext uri="{FF2B5EF4-FFF2-40B4-BE49-F238E27FC236}">
-                <a16:creationId xmlns:a16="http://schemas.microsoft.com/office/drawing/2014/main" id="{67736357-2F90-D241-51F6-C03C797EFFC2}"/>
-              </a:ext>
-            </a:extLst>
-          </p:cNvPr>
-          <p:cNvSpPr/>
-          <p:nvPr/>
-        </p:nvSpPr>
-        <p:spPr>
-          <a:xfrm>
-            <a:off x="454874" y="5508688"/>
-            <a:ext cx="3711020" cy="914400"/>
-          </a:xfrm>
-          <a:prstGeom prst="rect">
-            <a:avLst/>
-          </a:prstGeom>
-        </p:spPr>
-        <p:style>
-          <a:lnRef idx="2">
-            <a:schemeClr val="accent1">
-              <a:shade val="15000"/>
-            </a:schemeClr>
-          </a:lnRef>
-          <a:fillRef idx="1">
-            <a:schemeClr val="accent1"/>
-          </a:fillRef>
-          <a:effectRef idx="0">
-            <a:schemeClr val="accent1"/>
-          </a:effectRef>
-          <a:fontRef idx="minor">
-            <a:schemeClr val="lt1"/>
-          </a:fontRef>
-        </p:style>
-        <p:txBody>
-          <a:bodyPr rtlCol="0" anchor="ctr"/>
-          <a:lstStyle/>
-          <a:p>
-            <a:pPr algn="ctr"/>
-            <a:r>
-              <a:rPr lang="en-US" dirty="0"/>
-              <a:t>Noarr traversers</a:t>
-            </a:r>
-          </a:p>
-        </p:txBody>
-      </p:sp>
-      <p:sp>
-        <p:nvSpPr>
-          <p:cNvPr id="21" name="Rectangle 20">
-            <a:extLst>
-              <a:ext uri="{FF2B5EF4-FFF2-40B4-BE49-F238E27FC236}">
-                <a16:creationId xmlns:a16="http://schemas.microsoft.com/office/drawing/2014/main" id="{9EC73339-8B3D-25F4-18D5-E5821CB7CE8B}"/>
-              </a:ext>
-            </a:extLst>
-          </p:cNvPr>
-          <p:cNvSpPr/>
-          <p:nvPr/>
-        </p:nvSpPr>
-        <p:spPr>
-          <a:xfrm>
-            <a:off x="607274" y="5661088"/>
-            <a:ext cx="3711020" cy="914400"/>
-          </a:xfrm>
-          <a:prstGeom prst="rect">
-            <a:avLst/>
-          </a:prstGeom>
-        </p:spPr>
-        <p:style>
-          <a:lnRef idx="2">
-            <a:schemeClr val="accent1">
-              <a:shade val="15000"/>
-            </a:schemeClr>
-          </a:lnRef>
-          <a:fillRef idx="1">
-            <a:schemeClr val="accent1"/>
-          </a:fillRef>
-          <a:effectRef idx="0">
-            <a:schemeClr val="accent1"/>
-          </a:effectRef>
-          <a:fontRef idx="minor">
-            <a:schemeClr val="lt1"/>
-          </a:fontRef>
-        </p:style>
-        <p:txBody>
-          <a:bodyPr rtlCol="0" anchor="ctr"/>
-          <a:lstStyle/>
-          <a:p>
-            <a:pPr algn="ctr"/>
-            <a:r>
-              <a:rPr lang="en-US" dirty="0"/>
-              <a:t>Noarr tuning</a:t>
-            </a:r>
-          </a:p>
-        </p:txBody>
-      </p:sp>
-      <p:sp>
-        <p:nvSpPr>
-          <p:cNvPr id="23" name="Rectangle 22">
-            <a:extLst>
-              <a:ext uri="{FF2B5EF4-FFF2-40B4-BE49-F238E27FC236}">
-                <a16:creationId xmlns:a16="http://schemas.microsoft.com/office/drawing/2014/main" id="{63EC4F51-D7C0-1DFC-E94E-75AE185B7CC1}"/>
-              </a:ext>
-            </a:extLst>
-          </p:cNvPr>
-          <p:cNvSpPr/>
-          <p:nvPr/>
-        </p:nvSpPr>
-        <p:spPr>
-          <a:xfrm>
-            <a:off x="759674" y="5813488"/>
-            <a:ext cx="3711020" cy="914400"/>
-          </a:xfrm>
-          <a:prstGeom prst="rect">
-            <a:avLst/>
-          </a:prstGeom>
-        </p:spPr>
-        <p:style>
-          <a:lnRef idx="2">
-            <a:schemeClr val="accent1">
-              <a:shade val="15000"/>
-            </a:schemeClr>
-          </a:lnRef>
-          <a:fillRef idx="1">
-            <a:schemeClr val="accent1"/>
-          </a:fillRef>
-          <a:effectRef idx="0">
-            <a:schemeClr val="accent1"/>
-          </a:effectRef>
-          <a:fontRef idx="minor">
-            <a:schemeClr val="lt1"/>
-          </a:fontRef>
-        </p:style>
-        <p:txBody>
-          <a:bodyPr rtlCol="0" anchor="ctr"/>
-          <a:lstStyle/>
-          <a:p>
-            <a:pPr algn="ctr"/>
-            <a:r>
-              <a:rPr lang="en-US" dirty="0"/>
-              <a:t>Noarr-MPI</a:t>
-            </a:r>
-          </a:p>
-        </p:txBody>
-      </p:sp>
-      <p:sp>
-        <p:nvSpPr>
-          <p:cNvPr id="25" name="Rectangle 24">
-            <a:extLst>
-              <a:ext uri="{FF2B5EF4-FFF2-40B4-BE49-F238E27FC236}">
-                <a16:creationId xmlns:a16="http://schemas.microsoft.com/office/drawing/2014/main" id="{B7D64168-E19F-C04D-293D-CB07E85D29DA}"/>
-              </a:ext>
-            </a:extLst>
-          </p:cNvPr>
-          <p:cNvSpPr/>
-          <p:nvPr/>
-        </p:nvSpPr>
-        <p:spPr>
-          <a:xfrm>
-            <a:off x="4853138" y="5424788"/>
-            <a:ext cx="3711020" cy="914400"/>
-          </a:xfrm>
-          <a:prstGeom prst="rect">
-            <a:avLst/>
-          </a:prstGeom>
-        </p:spPr>
-        <p:style>
-          <a:lnRef idx="2">
-            <a:schemeClr val="accent1">
-              <a:shade val="15000"/>
-            </a:schemeClr>
-          </a:lnRef>
-          <a:fillRef idx="1">
-            <a:schemeClr val="accent1"/>
-          </a:fillRef>
-          <a:effectRef idx="0">
-            <a:schemeClr val="accent1"/>
-          </a:effectRef>
-          <a:fontRef idx="minor">
-            <a:schemeClr val="lt1"/>
-          </a:fontRef>
-        </p:style>
-        <p:txBody>
-          <a:bodyPr rtlCol="0" anchor="ctr"/>
-          <a:lstStyle/>
-          <a:p>
-            <a:pPr algn="ctr"/>
-            <a:r>
-              <a:rPr lang="en-US" dirty="0" err="1"/>
-              <a:t>Cellato</a:t>
-            </a:r>
-            <a:endParaRPr lang="en-US" dirty="0"/>
-          </a:p>
-        </p:txBody>
-      </p:sp>
-    </p:spTree>
-    <p:extLst>
-      <p:ext uri="{BB962C8B-B14F-4D97-AF65-F5344CB8AC3E}">
-        <p14:creationId xmlns:p14="http://schemas.microsoft.com/office/powerpoint/2010/main" val="1745489699"/>
+        <p14:creationId xmlns:p14="http://schemas.microsoft.com/office/powerpoint/2010/main" val="2195190930"/>
       </p:ext>
     </p:extLst>
   </p:cSld>
@@ -4706,7 +4878,7 @@
           <p:cNvPr id="2" name="Title 1">
             <a:extLst>
               <a:ext uri="{FF2B5EF4-FFF2-40B4-BE49-F238E27FC236}">
-                <a16:creationId xmlns:a16="http://schemas.microsoft.com/office/drawing/2014/main" id="{63B07F39-5957-124B-D20D-4A155E0E07D1}"/>
+                <a16:creationId xmlns:a16="http://schemas.microsoft.com/office/drawing/2014/main" id="{330F5328-A4E6-AC76-4627-FB90089BB6D8}"/>
               </a:ext>
             </a:extLst>
           </p:cNvPr>
@@ -4723,71 +4895,85 @@
           <a:lstStyle/>
           <a:p>
             <a:r>
+              <a:rPr lang="en-US" noProof="0" dirty="0"/>
+              <a:t>Distributed computing</a:t>
+            </a:r>
+          </a:p>
+        </p:txBody>
+      </p:sp>
+      <p:sp>
+        <p:nvSpPr>
+          <p:cNvPr id="3" name="Content Placeholder 2">
+            <a:extLst>
+              <a:ext uri="{FF2B5EF4-FFF2-40B4-BE49-F238E27FC236}">
+                <a16:creationId xmlns:a16="http://schemas.microsoft.com/office/drawing/2014/main" id="{3CA0AA2D-BF91-A9FE-E55F-A715C4DD0CC6}"/>
+              </a:ext>
+            </a:extLst>
+          </p:cNvPr>
+          <p:cNvSpPr>
+            <a:spLocks noGrp="1"/>
+          </p:cNvSpPr>
+          <p:nvPr>
+            <p:ph idx="1"/>
+          </p:nvPr>
+        </p:nvSpPr>
+        <p:spPr/>
+        <p:txBody>
+          <a:bodyPr/>
+          <a:lstStyle/>
+          <a:p>
+            <a:r>
+              <a:rPr lang="en-US" noProof="0" dirty="0"/>
+              <a:t>Many scientific computations rely on spreading the load to many nodes</a:t>
+            </a:r>
+          </a:p>
+          <a:p>
+            <a:r>
+              <a:rPr lang="en-US" noProof="0" dirty="0"/>
+              <a:t>Designing distributed computations further increases the challenge</a:t>
+            </a:r>
+          </a:p>
+          <a:p>
+            <a:r>
+              <a:rPr lang="en-US" noProof="0" dirty="0"/>
+              <a:t>Many communication patterns can be described using the same principles as layouts &amp; traversals</a:t>
+            </a:r>
+          </a:p>
+          <a:p>
+            <a:r>
+              <a:rPr lang="en-US" noProof="0" dirty="0"/>
+              <a:t>New abstraction: faster &amp; more flexible/convenient than </a:t>
+            </a:r>
+            <a:r>
+              <a:rPr lang="en-US" noProof="0" dirty="0" err="1"/>
+              <a:t>SotA</a:t>
+            </a:r>
+            <a:endParaRPr lang="en-US" noProof="0" dirty="0"/>
+          </a:p>
+          <a:p>
+            <a:pPr lvl="1"/>
+            <a:r>
+              <a:rPr lang="en-US" noProof="0" dirty="0"/>
+              <a:t>Automatically communicates the layout with the MPI backend</a:t>
+            </a:r>
+          </a:p>
+          <a:p>
+            <a:pPr lvl="1"/>
+            <a:r>
               <a:rPr lang="en-US" dirty="0"/>
-              <a:t>Summary</a:t>
-            </a:r>
-          </a:p>
-        </p:txBody>
-      </p:sp>
-      <p:sp>
-        <p:nvSpPr>
-          <p:cNvPr id="3" name="Content Placeholder 2">
-            <a:extLst>
-              <a:ext uri="{FF2B5EF4-FFF2-40B4-BE49-F238E27FC236}">
-                <a16:creationId xmlns:a16="http://schemas.microsoft.com/office/drawing/2014/main" id="{4437CB38-BBCE-B652-0445-A75C99068419}"/>
-              </a:ext>
-            </a:extLst>
-          </p:cNvPr>
-          <p:cNvSpPr>
-            <a:spLocks noGrp="1"/>
-          </p:cNvSpPr>
-          <p:nvPr>
-            <p:ph idx="1"/>
-          </p:nvPr>
-        </p:nvSpPr>
-        <p:spPr/>
-        <p:txBody>
-          <a:bodyPr/>
-          <a:lstStyle/>
-          <a:p>
-            <a:r>
-              <a:rPr lang="en-US" dirty="0"/>
-              <a:t>6 peer-reviewed publications </a:t>
-            </a:r>
-          </a:p>
-          <a:p>
-            <a:pPr lvl="1"/>
-            <a:r>
-              <a:rPr lang="en-US" dirty="0"/>
-              <a:t>2 journal articles</a:t>
-            </a:r>
-          </a:p>
-          <a:p>
-            <a:pPr lvl="1"/>
-            <a:r>
-              <a:rPr lang="en-US" dirty="0"/>
-              <a:t>3 conference papers,</a:t>
-            </a:r>
-          </a:p>
-          <a:p>
-            <a:pPr lvl="1"/>
-            <a:r>
-              <a:rPr lang="en-US" dirty="0"/>
-              <a:t>1 workshop paper</a:t>
-            </a:r>
-          </a:p>
-          <a:p>
-            <a:r>
-              <a:rPr lang="en-US" dirty="0"/>
-              <a:t>1 publication awaiting peer review</a:t>
-            </a:r>
+              <a:t>Enables optimizing the layouts on each computation node seamlessly</a:t>
+            </a:r>
+            <a:endParaRPr lang="en-US" noProof="0" dirty="0"/>
+          </a:p>
+          <a:p>
+            <a:endParaRPr lang="en-US" noProof="0" dirty="0"/>
           </a:p>
         </p:txBody>
       </p:sp>
     </p:spTree>
     <p:extLst>
       <p:ext uri="{BB962C8B-B14F-4D97-AF65-F5344CB8AC3E}">
-        <p14:creationId xmlns:p14="http://schemas.microsoft.com/office/powerpoint/2010/main" val="309417143"/>
+        <p14:creationId xmlns:p14="http://schemas.microsoft.com/office/powerpoint/2010/main" val="199449863"/>
       </p:ext>
     </p:extLst>
   </p:cSld>
@@ -4819,7 +5005,7 @@
           <p:cNvPr id="2" name="Title 1">
             <a:extLst>
               <a:ext uri="{FF2B5EF4-FFF2-40B4-BE49-F238E27FC236}">
-                <a16:creationId xmlns:a16="http://schemas.microsoft.com/office/drawing/2014/main" id="{5EFCD7CC-C2D6-52E6-02D5-F41FC5389A5C}"/>
+                <a16:creationId xmlns:a16="http://schemas.microsoft.com/office/drawing/2014/main" id="{C4A9E796-E8D3-B4A5-DE7B-322F63386F74}"/>
               </a:ext>
             </a:extLst>
           </p:cNvPr>
@@ -4835,7 +5021,10 @@
           <a:bodyPr/>
           <a:lstStyle/>
           <a:p>
-            <a:endParaRPr lang="en-US"/>
+            <a:r>
+              <a:rPr lang="en-US" dirty="0"/>
+              <a:t>Results</a:t>
+            </a:r>
           </a:p>
         </p:txBody>
       </p:sp>
@@ -4844,7 +5033,7 @@
           <p:cNvPr id="3" name="Content Placeholder 2">
             <a:extLst>
               <a:ext uri="{FF2B5EF4-FFF2-40B4-BE49-F238E27FC236}">
-                <a16:creationId xmlns:a16="http://schemas.microsoft.com/office/drawing/2014/main" id="{950373B6-1B3D-2E32-D54A-18C124620153}"/>
+                <a16:creationId xmlns:a16="http://schemas.microsoft.com/office/drawing/2014/main" id="{DBE9D86D-018E-4C50-0EFA-D7C587660587}"/>
               </a:ext>
             </a:extLst>
           </p:cNvPr>
@@ -4867,7 +5056,7 @@
     </p:spTree>
     <p:extLst>
       <p:ext uri="{BB962C8B-B14F-4D97-AF65-F5344CB8AC3E}">
-        <p14:creationId xmlns:p14="http://schemas.microsoft.com/office/powerpoint/2010/main" val="2595384929"/>
+        <p14:creationId xmlns:p14="http://schemas.microsoft.com/office/powerpoint/2010/main" val="202421867"/>
       </p:ext>
     </p:extLst>
   </p:cSld>
@@ -4877,7 +5066,7 @@
 </p:sld>
 </file>
 
-<file path=ppt/slides/slide2.xml><?xml version="1.0" encoding="utf-8"?>
+<file path=ppt/slides/slide15.xml><?xml version="1.0" encoding="utf-8"?>
 <p:sld xmlns:a="http://schemas.openxmlformats.org/drawingml/2006/main" xmlns:r="http://schemas.openxmlformats.org/officeDocument/2006/relationships" xmlns:p="http://schemas.openxmlformats.org/presentationml/2006/main">
   <p:cSld>
     <p:spTree>
@@ -4899,6 +5088,560 @@
           <p:cNvPr id="2" name="Title 1">
             <a:extLst>
               <a:ext uri="{FF2B5EF4-FFF2-40B4-BE49-F238E27FC236}">
+                <a16:creationId xmlns:a16="http://schemas.microsoft.com/office/drawing/2014/main" id="{FDB924F1-4B00-84E0-3832-4B100046AF51}"/>
+              </a:ext>
+            </a:extLst>
+          </p:cNvPr>
+          <p:cNvSpPr>
+            <a:spLocks noGrp="1"/>
+          </p:cNvSpPr>
+          <p:nvPr>
+            <p:ph type="title"/>
+          </p:nvPr>
+        </p:nvSpPr>
+        <p:spPr/>
+        <p:txBody>
+          <a:bodyPr/>
+          <a:lstStyle/>
+          <a:p>
+            <a:r>
+              <a:rPr lang="en-US" noProof="0" dirty="0"/>
+              <a:t>Cellular automata</a:t>
+            </a:r>
+          </a:p>
+        </p:txBody>
+      </p:sp>
+      <p:sp>
+        <p:nvSpPr>
+          <p:cNvPr id="3" name="Content Placeholder 2">
+            <a:extLst>
+              <a:ext uri="{FF2B5EF4-FFF2-40B4-BE49-F238E27FC236}">
+                <a16:creationId xmlns:a16="http://schemas.microsoft.com/office/drawing/2014/main" id="{F22AF8FD-4C12-AFD8-ED43-50529A45C04D}"/>
+              </a:ext>
+            </a:extLst>
+          </p:cNvPr>
+          <p:cNvSpPr>
+            <a:spLocks noGrp="1"/>
+          </p:cNvSpPr>
+          <p:nvPr>
+            <p:ph idx="1"/>
+          </p:nvPr>
+        </p:nvSpPr>
+        <p:spPr/>
+        <p:txBody>
+          <a:bodyPr/>
+          <a:lstStyle/>
+          <a:p>
+            <a:r>
+              <a:rPr lang="en-US" noProof="0" dirty="0"/>
+              <a:t>We noticed that CA commonly benefit from </a:t>
+            </a:r>
+            <a:r>
+              <a:rPr lang="en-US" noProof="0" dirty="0" err="1"/>
+              <a:t>templatable</a:t>
+            </a:r>
+            <a:r>
+              <a:rPr lang="en-US" noProof="0" dirty="0"/>
+              <a:t> design decisions</a:t>
+            </a:r>
+          </a:p>
+          <a:p>
+            <a:pPr lvl="1"/>
+            <a:r>
+              <a:rPr lang="en-US" dirty="0"/>
+              <a:t>Layout &amp; encoding options (! bit-packing)</a:t>
+            </a:r>
+          </a:p>
+          <a:p>
+            <a:pPr lvl="1"/>
+            <a:r>
+              <a:rPr lang="en-US" dirty="0"/>
+              <a:t>Evaluation options (! bit-wise vectorization)</a:t>
+            </a:r>
+          </a:p>
+          <a:p>
+            <a:pPr lvl="1"/>
+            <a:r>
+              <a:rPr lang="en-US" noProof="0" dirty="0"/>
+              <a:t>Traversal options (incl. parallelism)</a:t>
+            </a:r>
+          </a:p>
+          <a:p>
+            <a:r>
+              <a:rPr lang="en-US" noProof="0" dirty="0"/>
+              <a:t>Agnostic design of CA computation rules</a:t>
+            </a:r>
+          </a:p>
+          <a:p>
+            <a:r>
+              <a:rPr lang="en-US" dirty="0"/>
+              <a:t>Faster development, experimentation (optimization)</a:t>
+            </a:r>
+            <a:endParaRPr lang="en-US" noProof="0" dirty="0"/>
+          </a:p>
+        </p:txBody>
+      </p:sp>
+    </p:spTree>
+    <p:extLst>
+      <p:ext uri="{BB962C8B-B14F-4D97-AF65-F5344CB8AC3E}">
+        <p14:creationId xmlns:p14="http://schemas.microsoft.com/office/powerpoint/2010/main" val="3466036462"/>
+      </p:ext>
+    </p:extLst>
+  </p:cSld>
+  <p:clrMapOvr>
+    <a:masterClrMapping/>
+  </p:clrMapOvr>
+</p:sld>
+</file>
+
+<file path=ppt/slides/slide16.xml><?xml version="1.0" encoding="utf-8"?>
+<p:sld xmlns:a="http://schemas.openxmlformats.org/drawingml/2006/main" xmlns:r="http://schemas.openxmlformats.org/officeDocument/2006/relationships" xmlns:p="http://schemas.openxmlformats.org/presentationml/2006/main">
+  <p:cSld>
+    <p:spTree>
+      <p:nvGrpSpPr>
+        <p:cNvPr id="1" name=""/>
+        <p:cNvGrpSpPr/>
+        <p:nvPr/>
+      </p:nvGrpSpPr>
+      <p:grpSpPr>
+        <a:xfrm>
+          <a:off x="0" y="0"/>
+          <a:ext cx="0" cy="0"/>
+          <a:chOff x="0" y="0"/>
+          <a:chExt cx="0" cy="0"/>
+        </a:xfrm>
+      </p:grpSpPr>
+      <p:sp>
+        <p:nvSpPr>
+          <p:cNvPr id="2" name="Title 1">
+            <a:extLst>
+              <a:ext uri="{FF2B5EF4-FFF2-40B4-BE49-F238E27FC236}">
+                <a16:creationId xmlns:a16="http://schemas.microsoft.com/office/drawing/2014/main" id="{04F59CE6-2253-EE24-67C6-8EB494EB84BC}"/>
+              </a:ext>
+            </a:extLst>
+          </p:cNvPr>
+          <p:cNvSpPr>
+            <a:spLocks noGrp="1"/>
+          </p:cNvSpPr>
+          <p:nvPr>
+            <p:ph type="title"/>
+          </p:nvPr>
+        </p:nvSpPr>
+        <p:spPr/>
+        <p:txBody>
+          <a:bodyPr/>
+          <a:lstStyle/>
+          <a:p>
+            <a:r>
+              <a:rPr lang="en-US" dirty="0"/>
+              <a:t>Results</a:t>
+            </a:r>
+          </a:p>
+        </p:txBody>
+      </p:sp>
+      <p:sp>
+        <p:nvSpPr>
+          <p:cNvPr id="3" name="Content Placeholder 2">
+            <a:extLst>
+              <a:ext uri="{FF2B5EF4-FFF2-40B4-BE49-F238E27FC236}">
+                <a16:creationId xmlns:a16="http://schemas.microsoft.com/office/drawing/2014/main" id="{F1E705A3-4FDF-AB1A-A2C5-33B72A015964}"/>
+              </a:ext>
+            </a:extLst>
+          </p:cNvPr>
+          <p:cNvSpPr>
+            <a:spLocks noGrp="1"/>
+          </p:cNvSpPr>
+          <p:nvPr>
+            <p:ph idx="1"/>
+          </p:nvPr>
+        </p:nvSpPr>
+        <p:spPr/>
+        <p:txBody>
+          <a:bodyPr/>
+          <a:lstStyle/>
+          <a:p>
+            <a:endParaRPr lang="en-US"/>
+          </a:p>
+        </p:txBody>
+      </p:sp>
+    </p:spTree>
+    <p:extLst>
+      <p:ext uri="{BB962C8B-B14F-4D97-AF65-F5344CB8AC3E}">
+        <p14:creationId xmlns:p14="http://schemas.microsoft.com/office/powerpoint/2010/main" val="1310412197"/>
+      </p:ext>
+    </p:extLst>
+  </p:cSld>
+  <p:clrMapOvr>
+    <a:masterClrMapping/>
+  </p:clrMapOvr>
+</p:sld>
+</file>
+
+<file path=ppt/slides/slide17.xml><?xml version="1.0" encoding="utf-8"?>
+<p:sld xmlns:a="http://schemas.openxmlformats.org/drawingml/2006/main" xmlns:r="http://schemas.openxmlformats.org/officeDocument/2006/relationships" xmlns:p="http://schemas.openxmlformats.org/presentationml/2006/main" show="0">
+  <p:cSld>
+    <p:spTree>
+      <p:nvGrpSpPr>
+        <p:cNvPr id="1" name=""/>
+        <p:cNvGrpSpPr/>
+        <p:nvPr/>
+      </p:nvGrpSpPr>
+      <p:grpSpPr>
+        <a:xfrm>
+          <a:off x="0" y="0"/>
+          <a:ext cx="0" cy="0"/>
+          <a:chOff x="0" y="0"/>
+          <a:chExt cx="0" cy="0"/>
+        </a:xfrm>
+      </p:grpSpPr>
+      <p:sp>
+        <p:nvSpPr>
+          <p:cNvPr id="2" name="Title 1">
+            <a:extLst>
+              <a:ext uri="{FF2B5EF4-FFF2-40B4-BE49-F238E27FC236}">
+                <a16:creationId xmlns:a16="http://schemas.microsoft.com/office/drawing/2014/main" id="{1CFD8E19-FCBD-3C1F-9804-55F9EF315364}"/>
+              </a:ext>
+            </a:extLst>
+          </p:cNvPr>
+          <p:cNvSpPr>
+            <a:spLocks noGrp="1"/>
+          </p:cNvSpPr>
+          <p:nvPr>
+            <p:ph type="title"/>
+          </p:nvPr>
+        </p:nvSpPr>
+        <p:spPr/>
+        <p:txBody>
+          <a:bodyPr/>
+          <a:lstStyle/>
+          <a:p>
+            <a:r>
+              <a:rPr lang="en-US" noProof="0" dirty="0"/>
+              <a:t>LLMs in algorithm design</a:t>
+            </a:r>
+          </a:p>
+        </p:txBody>
+      </p:sp>
+      <p:sp>
+        <p:nvSpPr>
+          <p:cNvPr id="3" name="Content Placeholder 2">
+            <a:extLst>
+              <a:ext uri="{FF2B5EF4-FFF2-40B4-BE49-F238E27FC236}">
+                <a16:creationId xmlns:a16="http://schemas.microsoft.com/office/drawing/2014/main" id="{64F2D09B-2F00-3457-9D41-D2EAB2BD84E5}"/>
+              </a:ext>
+            </a:extLst>
+          </p:cNvPr>
+          <p:cNvSpPr>
+            <a:spLocks noGrp="1"/>
+          </p:cNvSpPr>
+          <p:nvPr>
+            <p:ph idx="1"/>
+          </p:nvPr>
+        </p:nvSpPr>
+        <p:spPr/>
+        <p:txBody>
+          <a:bodyPr/>
+          <a:lstStyle/>
+          <a:p>
+            <a:r>
+              <a:rPr lang="en-US" noProof="0" dirty="0"/>
+              <a:t>Tutoring LLMs for CUDA optimization</a:t>
+            </a:r>
+          </a:p>
+          <a:p>
+            <a:r>
+              <a:rPr lang="en-US" noProof="0" dirty="0"/>
+              <a:t>LLMs and abstractions</a:t>
+            </a:r>
+          </a:p>
+        </p:txBody>
+      </p:sp>
+    </p:spTree>
+    <p:extLst>
+      <p:ext uri="{BB962C8B-B14F-4D97-AF65-F5344CB8AC3E}">
+        <p14:creationId xmlns:p14="http://schemas.microsoft.com/office/powerpoint/2010/main" val="645810162"/>
+      </p:ext>
+    </p:extLst>
+  </p:cSld>
+  <p:clrMapOvr>
+    <a:masterClrMapping/>
+  </p:clrMapOvr>
+</p:sld>
+</file>
+
+<file path=ppt/slides/slide18.xml><?xml version="1.0" encoding="utf-8"?>
+<p:sld xmlns:a="http://schemas.openxmlformats.org/drawingml/2006/main" xmlns:r="http://schemas.openxmlformats.org/officeDocument/2006/relationships" xmlns:p="http://schemas.openxmlformats.org/presentationml/2006/main">
+  <p:cSld>
+    <p:spTree>
+      <p:nvGrpSpPr>
+        <p:cNvPr id="1" name=""/>
+        <p:cNvGrpSpPr/>
+        <p:nvPr/>
+      </p:nvGrpSpPr>
+      <p:grpSpPr>
+        <a:xfrm>
+          <a:off x="0" y="0"/>
+          <a:ext cx="0" cy="0"/>
+          <a:chOff x="0" y="0"/>
+          <a:chExt cx="0" cy="0"/>
+        </a:xfrm>
+      </p:grpSpPr>
+      <p:sp>
+        <p:nvSpPr>
+          <p:cNvPr id="2" name="Title 1">
+            <a:extLst>
+              <a:ext uri="{FF2B5EF4-FFF2-40B4-BE49-F238E27FC236}">
+                <a16:creationId xmlns:a16="http://schemas.microsoft.com/office/drawing/2014/main" id="{A2284D79-2E52-80F7-0541-30A0EEC45CA4}"/>
+              </a:ext>
+            </a:extLst>
+          </p:cNvPr>
+          <p:cNvSpPr>
+            <a:spLocks noGrp="1"/>
+          </p:cNvSpPr>
+          <p:nvPr>
+            <p:ph type="title"/>
+          </p:nvPr>
+        </p:nvSpPr>
+        <p:spPr/>
+        <p:txBody>
+          <a:bodyPr/>
+          <a:lstStyle/>
+          <a:p>
+            <a:r>
+              <a:rPr lang="en-US" noProof="0" dirty="0"/>
+              <a:t>Tutoring LLMs</a:t>
+            </a:r>
+          </a:p>
+        </p:txBody>
+      </p:sp>
+      <p:sp>
+        <p:nvSpPr>
+          <p:cNvPr id="3" name="Content Placeholder 2">
+            <a:extLst>
+              <a:ext uri="{FF2B5EF4-FFF2-40B4-BE49-F238E27FC236}">
+                <a16:creationId xmlns:a16="http://schemas.microsoft.com/office/drawing/2014/main" id="{5EC62719-077B-686B-2F9B-914035C8221C}"/>
+              </a:ext>
+            </a:extLst>
+          </p:cNvPr>
+          <p:cNvSpPr>
+            <a:spLocks noGrp="1"/>
+          </p:cNvSpPr>
+          <p:nvPr>
+            <p:ph idx="1"/>
+          </p:nvPr>
+        </p:nvSpPr>
+        <p:spPr/>
+        <p:txBody>
+          <a:bodyPr>
+            <a:normAutofit fontScale="92500" lnSpcReduction="20000"/>
+          </a:bodyPr>
+          <a:lstStyle/>
+          <a:p>
+            <a:r>
+              <a:rPr lang="en-US" noProof="0" dirty="0"/>
+              <a:t>The goal was always better automation/generalization of design and tuning</a:t>
+            </a:r>
+          </a:p>
+          <a:p>
+            <a:r>
+              <a:rPr lang="en-US" dirty="0"/>
+              <a:t>LLMs started to be surprisingly competent code generators</a:t>
+            </a:r>
+          </a:p>
+          <a:p>
+            <a:pPr lvl="1"/>
+            <a:r>
+              <a:rPr lang="en-US" noProof="0" dirty="0"/>
+              <a:t>Not reliable, but extremely flexible, generalizable, simple to use (e.g., understanding natural language)</a:t>
+            </a:r>
+          </a:p>
+          <a:p>
+            <a:r>
+              <a:rPr lang="en-US" dirty="0"/>
+              <a:t>Core assumption for the study: LLMs are not very good in high-</a:t>
+            </a:r>
+            <a:r>
+              <a:rPr lang="en-US" dirty="0" err="1"/>
+              <a:t>lvl</a:t>
+            </a:r>
+            <a:r>
+              <a:rPr lang="en-US" dirty="0"/>
+              <a:t> decisions</a:t>
+            </a:r>
+          </a:p>
+          <a:p>
+            <a:r>
+              <a:rPr lang="en-US" noProof="0" dirty="0"/>
+              <a:t>Tutoring = improving quality of generated code by design suggestions/directions</a:t>
+            </a:r>
+          </a:p>
+          <a:p>
+            <a:r>
+              <a:rPr lang="en-US" dirty="0"/>
+              <a:t>Key findings:</a:t>
+            </a:r>
+          </a:p>
+          <a:p>
+            <a:pPr lvl="1"/>
+            <a:r>
+              <a:rPr lang="en-US" dirty="0"/>
+              <a:t>Intricate relationship between algorithm complexity and this effect on an LLM</a:t>
+            </a:r>
+          </a:p>
+          <a:p>
+            <a:pPr lvl="1"/>
+            <a:r>
+              <a:rPr lang="en-US" noProof="0" dirty="0"/>
+              <a:t>Improvement over time: the effect changes with each new model</a:t>
+            </a:r>
+          </a:p>
+        </p:txBody>
+      </p:sp>
+    </p:spTree>
+    <p:extLst>
+      <p:ext uri="{BB962C8B-B14F-4D97-AF65-F5344CB8AC3E}">
+        <p14:creationId xmlns:p14="http://schemas.microsoft.com/office/powerpoint/2010/main" val="2667122292"/>
+      </p:ext>
+    </p:extLst>
+  </p:cSld>
+  <p:clrMapOvr>
+    <a:masterClrMapping/>
+  </p:clrMapOvr>
+</p:sld>
+</file>
+
+<file path=ppt/slides/slide19.xml><?xml version="1.0" encoding="utf-8"?>
+<p:sld xmlns:a="http://schemas.openxmlformats.org/drawingml/2006/main" xmlns:r="http://schemas.openxmlformats.org/officeDocument/2006/relationships" xmlns:p="http://schemas.openxmlformats.org/presentationml/2006/main">
+  <p:cSld>
+    <p:spTree>
+      <p:nvGrpSpPr>
+        <p:cNvPr id="1" name=""/>
+        <p:cNvGrpSpPr/>
+        <p:nvPr/>
+      </p:nvGrpSpPr>
+      <p:grpSpPr>
+        <a:xfrm>
+          <a:off x="0" y="0"/>
+          <a:ext cx="0" cy="0"/>
+          <a:chOff x="0" y="0"/>
+          <a:chExt cx="0" cy="0"/>
+        </a:xfrm>
+      </p:grpSpPr>
+      <p:sp>
+        <p:nvSpPr>
+          <p:cNvPr id="2" name="Title 1">
+            <a:extLst>
+              <a:ext uri="{FF2B5EF4-FFF2-40B4-BE49-F238E27FC236}">
+                <a16:creationId xmlns:a16="http://schemas.microsoft.com/office/drawing/2014/main" id="{F35C7E3E-09C8-2B79-8EE7-B8D1557191BE}"/>
+              </a:ext>
+            </a:extLst>
+          </p:cNvPr>
+          <p:cNvSpPr>
+            <a:spLocks noGrp="1"/>
+          </p:cNvSpPr>
+          <p:nvPr>
+            <p:ph type="title"/>
+          </p:nvPr>
+        </p:nvSpPr>
+        <p:spPr/>
+        <p:txBody>
+          <a:bodyPr/>
+          <a:lstStyle/>
+          <a:p>
+            <a:r>
+              <a:rPr lang="en-US" noProof="0" dirty="0"/>
+              <a:t>LLMs and abstractions</a:t>
+            </a:r>
+          </a:p>
+        </p:txBody>
+      </p:sp>
+      <p:sp>
+        <p:nvSpPr>
+          <p:cNvPr id="3" name="Content Placeholder 2">
+            <a:extLst>
+              <a:ext uri="{FF2B5EF4-FFF2-40B4-BE49-F238E27FC236}">
+                <a16:creationId xmlns:a16="http://schemas.microsoft.com/office/drawing/2014/main" id="{DAF33F66-B59C-C15E-3BD1-85602E9A1F9E}"/>
+              </a:ext>
+            </a:extLst>
+          </p:cNvPr>
+          <p:cNvSpPr>
+            <a:spLocks noGrp="1"/>
+          </p:cNvSpPr>
+          <p:nvPr>
+            <p:ph idx="1"/>
+          </p:nvPr>
+        </p:nvSpPr>
+        <p:spPr/>
+        <p:txBody>
+          <a:bodyPr/>
+          <a:lstStyle/>
+          <a:p>
+            <a:r>
+              <a:rPr lang="en-US" noProof="0" dirty="0"/>
+              <a:t>Key question: Layout- and traversal-agnostic abstractions help humans; do they help LLMs as well?</a:t>
+            </a:r>
+          </a:p>
+          <a:p>
+            <a:r>
+              <a:rPr lang="en-US" dirty="0"/>
+              <a:t>Key findings:</a:t>
+            </a:r>
+          </a:p>
+          <a:p>
+            <a:pPr lvl="1"/>
+            <a:r>
+              <a:rPr lang="en-US" noProof="0" dirty="0"/>
+              <a:t>Prompt specificity improves results much more</a:t>
+            </a:r>
+          </a:p>
+          <a:p>
+            <a:pPr lvl="1"/>
+            <a:r>
+              <a:rPr lang="en-US" dirty="0"/>
+              <a:t>LLMs more competent in pure C/C++</a:t>
+            </a:r>
+          </a:p>
+          <a:p>
+            <a:pPr lvl="1"/>
+            <a:endParaRPr lang="en-US" noProof="0" dirty="0"/>
+          </a:p>
+        </p:txBody>
+      </p:sp>
+    </p:spTree>
+    <p:extLst>
+      <p:ext uri="{BB962C8B-B14F-4D97-AF65-F5344CB8AC3E}">
+        <p14:creationId xmlns:p14="http://schemas.microsoft.com/office/powerpoint/2010/main" val="965653160"/>
+      </p:ext>
+    </p:extLst>
+  </p:cSld>
+  <p:clrMapOvr>
+    <a:masterClrMapping/>
+  </p:clrMapOvr>
+</p:sld>
+</file>
+
+<file path=ppt/slides/slide2.xml><?xml version="1.0" encoding="utf-8"?>
+<p:sld xmlns:a="http://schemas.openxmlformats.org/drawingml/2006/main" xmlns:r="http://schemas.openxmlformats.org/officeDocument/2006/relationships" xmlns:p="http://schemas.openxmlformats.org/presentationml/2006/main" show="0">
+  <p:cSld>
+    <p:spTree>
+      <p:nvGrpSpPr>
+        <p:cNvPr id="1" name=""/>
+        <p:cNvGrpSpPr/>
+        <p:nvPr/>
+      </p:nvGrpSpPr>
+      <p:grpSpPr>
+        <a:xfrm>
+          <a:off x="0" y="0"/>
+          <a:ext cx="0" cy="0"/>
+          <a:chOff x="0" y="0"/>
+          <a:chExt cx="0" cy="0"/>
+        </a:xfrm>
+      </p:grpSpPr>
+      <p:sp>
+        <p:nvSpPr>
+          <p:cNvPr id="2" name="Title 1">
+            <a:extLst>
+              <a:ext uri="{FF2B5EF4-FFF2-40B4-BE49-F238E27FC236}">
                 <a16:creationId xmlns:a16="http://schemas.microsoft.com/office/drawing/2014/main" id="{71043B47-263E-C46D-0276-B63FF60C41E2}"/>
               </a:ext>
             </a:extLst>
@@ -4915,7 +5658,7 @@
           <a:bodyPr/>
           <a:lstStyle/>
           <a:p>
-            <a:endParaRPr lang="en-US"/>
+            <a:endParaRPr lang="en-US" noProof="0" dirty="0"/>
           </a:p>
         </p:txBody>
       </p:sp>
@@ -4943,7 +5686,7 @@
           <a:lstStyle/>
           <a:p>
             <a:r>
-              <a:rPr lang="en-US" dirty="0">
+              <a:rPr lang="en-US" noProof="0" dirty="0">
                 <a:solidFill>
                   <a:schemeClr val="accent3"/>
                 </a:solidFill>
@@ -4951,11 +5694,11 @@
               <a:t>Data layout </a:t>
             </a:r>
             <a:r>
-              <a:rPr lang="en-US" dirty="0"/>
+              <a:rPr lang="en-US" noProof="0" dirty="0"/>
               <a:t>(matrix - row/col major), </a:t>
             </a:r>
             <a:r>
-              <a:rPr lang="en-US" dirty="0">
+              <a:rPr lang="en-US" noProof="0" dirty="0">
                 <a:solidFill>
                   <a:schemeClr val="accent3"/>
                 </a:solidFill>
@@ -4963,28 +5706,28 @@
               <a:t>traversal order </a:t>
             </a:r>
             <a:r>
-              <a:rPr lang="en-US" dirty="0"/>
+              <a:rPr lang="en-US" noProof="0" dirty="0"/>
               <a:t>(row/col-wise)</a:t>
             </a:r>
           </a:p>
           <a:p>
             <a:pPr lvl="1"/>
             <a:r>
-              <a:rPr lang="en-US" dirty="0"/>
+              <a:rPr lang="en-US" noProof="0" dirty="0"/>
               <a:t>This case: match = good; not match = not good </a:t>
             </a:r>
             <a:r>
-              <a:rPr lang="en-US" dirty="0">
+              <a:rPr lang="en-US" noProof="0" dirty="0">
                 <a:sym typeface="Wingdings" panose="05000000000000000000" pitchFamily="2" charset="2"/>
               </a:rPr>
               <a:t> idea</a:t>
             </a:r>
-            <a:endParaRPr lang="en-US" dirty="0"/>
+            <a:endParaRPr lang="en-US" noProof="0" dirty="0"/>
           </a:p>
           <a:p>
             <a:pPr lvl="2"/>
             <a:r>
-              <a:rPr lang="en-US" dirty="0">
+              <a:rPr lang="en-US" noProof="0" dirty="0">
                 <a:solidFill>
                   <a:srgbClr val="FF0000"/>
                 </a:solidFill>
@@ -4995,58 +5738,58 @@
           <a:p>
             <a:pPr lvl="1"/>
             <a:r>
-              <a:rPr lang="en-US" dirty="0"/>
+              <a:rPr lang="en-US" noProof="0" dirty="0"/>
               <a:t>Real use cases</a:t>
             </a:r>
           </a:p>
           <a:p>
             <a:pPr lvl="2"/>
             <a:r>
-              <a:rPr lang="en-US" dirty="0"/>
+              <a:rPr lang="en-US" noProof="0" dirty="0"/>
               <a:t>Algorithms more complex; </a:t>
             </a:r>
             <a:r>
-              <a:rPr lang="en-US" dirty="0" err="1"/>
+              <a:rPr lang="en-US" noProof="0" dirty="0" err="1"/>
               <a:t>eg</a:t>
             </a:r>
             <a:r>
-              <a:rPr lang="en-US" dirty="0"/>
+              <a:rPr lang="en-US" noProof="0" dirty="0"/>
               <a:t>:</a:t>
             </a:r>
           </a:p>
           <a:p>
             <a:pPr lvl="3"/>
             <a:r>
-              <a:rPr lang="en-US" dirty="0"/>
+              <a:rPr lang="en-US" noProof="0" dirty="0"/>
               <a:t>Multiple data structures</a:t>
             </a:r>
           </a:p>
           <a:p>
             <a:pPr lvl="3"/>
             <a:r>
-              <a:rPr lang="en-US" dirty="0"/>
+              <a:rPr lang="en-US" noProof="0" dirty="0"/>
               <a:t>Traversals not simple perfect loop nests</a:t>
             </a:r>
           </a:p>
           <a:p>
             <a:pPr lvl="2"/>
             <a:r>
-              <a:rPr lang="en-US" dirty="0"/>
+              <a:rPr lang="en-US" noProof="0" dirty="0"/>
               <a:t>Hardware many features; </a:t>
             </a:r>
             <a:r>
-              <a:rPr lang="en-US" dirty="0" err="1"/>
+              <a:rPr lang="en-US" noProof="0" dirty="0" err="1"/>
               <a:t>eg</a:t>
             </a:r>
             <a:r>
-              <a:rPr lang="en-US" dirty="0"/>
+              <a:rPr lang="en-US" noProof="0" dirty="0"/>
               <a:t>:</a:t>
             </a:r>
           </a:p>
           <a:p>
             <a:pPr lvl="3"/>
             <a:r>
-              <a:rPr lang="en-US" dirty="0">
+              <a:rPr lang="en-US" noProof="0" dirty="0">
                 <a:solidFill>
                   <a:schemeClr val="accent3"/>
                 </a:solidFill>
@@ -5054,21 +5797,21 @@
               <a:t>Caches</a:t>
             </a:r>
             <a:r>
-              <a:rPr lang="en-US" dirty="0"/>
+              <a:rPr lang="en-US" noProof="0" dirty="0"/>
               <a:t>, memory bandwidths/capacities, etc.</a:t>
             </a:r>
           </a:p>
           <a:p>
             <a:pPr lvl="3"/>
             <a:r>
-              <a:rPr lang="en-US" dirty="0"/>
+              <a:rPr lang="en-US" noProof="0" dirty="0"/>
               <a:t>Multiple proc. units</a:t>
             </a:r>
           </a:p>
           <a:p>
             <a:pPr lvl="2"/>
             <a:r>
-              <a:rPr lang="en-US" dirty="0">
+              <a:rPr lang="en-US" noProof="0" dirty="0">
                 <a:solidFill>
                   <a:schemeClr val="accent3"/>
                 </a:solidFill>
@@ -5076,7 +5819,7 @@
               <a:t>More optimized </a:t>
             </a:r>
             <a:r>
-              <a:rPr lang="en-US" dirty="0">
+              <a:rPr lang="en-US" noProof="0" dirty="0">
                 <a:solidFill>
                   <a:schemeClr val="accent3"/>
                 </a:solidFill>
@@ -5085,7 +5828,7 @@
               <a:t> more complex, less portable (each </a:t>
             </a:r>
             <a:r>
-              <a:rPr lang="en-US" dirty="0" err="1">
+              <a:rPr lang="en-US" noProof="0" dirty="0" err="1">
                 <a:solidFill>
                   <a:schemeClr val="accent3"/>
                 </a:solidFill>
@@ -5094,7 +5837,7 @@
               <a:t>hwarch</a:t>
             </a:r>
             <a:r>
-              <a:rPr lang="en-US" dirty="0">
+              <a:rPr lang="en-US" noProof="0" dirty="0">
                 <a:solidFill>
                   <a:schemeClr val="accent3"/>
                 </a:solidFill>
@@ -5102,7 +5845,7 @@
               </a:rPr>
               <a:t> different decisions)</a:t>
             </a:r>
-            <a:endParaRPr lang="en-US" dirty="0">
+            <a:endParaRPr lang="en-US" noProof="0" dirty="0">
               <a:solidFill>
                 <a:schemeClr val="accent3"/>
               </a:solidFill>
@@ -5111,15 +5854,23 @@
           <a:p>
             <a:pPr lvl="2"/>
             <a:r>
-              <a:rPr lang="en-US" dirty="0">
+              <a:rPr lang="en-US" noProof="0" dirty="0">
                 <a:solidFill>
                   <a:schemeClr val="accent3"/>
                 </a:solidFill>
               </a:rPr>
-              <a:t>No analytical solutions – evidence: use of </a:t>
-            </a:r>
-            <a:r>
-              <a:rPr lang="en-US" dirty="0" err="1">
+              <a:t>No analytical solutions – evidence: </a:t>
+            </a:r>
+            <a:r>
+              <a:rPr lang="en-US" b="1" noProof="0" dirty="0">
+                <a:solidFill>
+                  <a:schemeClr val="accent3"/>
+                </a:solidFill>
+              </a:rPr>
+              <a:t>use of </a:t>
+            </a:r>
+            <a:r>
+              <a:rPr lang="en-US" b="1" noProof="0" dirty="0" err="1">
                 <a:solidFill>
                   <a:schemeClr val="accent3"/>
                 </a:solidFill>
@@ -5127,7 +5878,7 @@
               <a:t>pgo</a:t>
             </a:r>
             <a:r>
-              <a:rPr lang="en-US" dirty="0">
+              <a:rPr lang="en-US" b="1" noProof="0" dirty="0">
                 <a:solidFill>
                   <a:schemeClr val="accent3"/>
                 </a:solidFill>
@@ -5135,7 +5886,7 @@
               <a:t>, autotuning, </a:t>
             </a:r>
             <a:r>
-              <a:rPr lang="en-US" dirty="0" err="1">
+              <a:rPr lang="en-US" b="1" noProof="0" dirty="0" err="1">
                 <a:solidFill>
                   <a:schemeClr val="accent3"/>
                 </a:solidFill>
@@ -5143,7 +5894,7 @@
               <a:t>ev</a:t>
             </a:r>
             <a:r>
-              <a:rPr lang="en-US" dirty="0">
+              <a:rPr lang="en-US" b="1" noProof="0" dirty="0">
                 <a:solidFill>
                   <a:schemeClr val="accent3"/>
                 </a:solidFill>
@@ -5154,7 +5905,7 @@
           <a:p>
             <a:pPr lvl="1"/>
             <a:r>
-              <a:rPr lang="en-US" dirty="0">
+              <a:rPr lang="en-US" noProof="0" dirty="0">
                 <a:solidFill>
                   <a:srgbClr val="FF0000"/>
                 </a:solidFill>
@@ -5164,7 +5915,7 @@
           </a:p>
           <a:p>
             <a:pPr lvl="1"/>
-            <a:endParaRPr lang="en-US" dirty="0"/>
+            <a:endParaRPr lang="en-US" noProof="0" dirty="0"/>
           </a:p>
         </p:txBody>
       </p:sp>
@@ -5172,6 +5923,908 @@
     <p:extLst>
       <p:ext uri="{BB962C8B-B14F-4D97-AF65-F5344CB8AC3E}">
         <p14:creationId xmlns:p14="http://schemas.microsoft.com/office/powerpoint/2010/main" val="1814957213"/>
+      </p:ext>
+    </p:extLst>
+  </p:cSld>
+  <p:clrMapOvr>
+    <a:masterClrMapping/>
+  </p:clrMapOvr>
+</p:sld>
+</file>
+
+<file path=ppt/slides/slide20.xml><?xml version="1.0" encoding="utf-8"?>
+<p:sld xmlns:a="http://schemas.openxmlformats.org/drawingml/2006/main" xmlns:r="http://schemas.openxmlformats.org/officeDocument/2006/relationships" xmlns:p="http://schemas.openxmlformats.org/presentationml/2006/main" show="0">
+  <p:cSld>
+    <p:spTree>
+      <p:nvGrpSpPr>
+        <p:cNvPr id="1" name=""/>
+        <p:cNvGrpSpPr/>
+        <p:nvPr/>
+      </p:nvGrpSpPr>
+      <p:grpSpPr>
+        <a:xfrm>
+          <a:off x="0" y="0"/>
+          <a:ext cx="0" cy="0"/>
+          <a:chOff x="0" y="0"/>
+          <a:chExt cx="0" cy="0"/>
+        </a:xfrm>
+      </p:grpSpPr>
+      <p:sp>
+        <p:nvSpPr>
+          <p:cNvPr id="2" name="Title 1">
+            <a:extLst>
+              <a:ext uri="{FF2B5EF4-FFF2-40B4-BE49-F238E27FC236}">
+                <a16:creationId xmlns:a16="http://schemas.microsoft.com/office/drawing/2014/main" id="{928BD501-0287-7E9D-6C52-A86B98F9EB52}"/>
+              </a:ext>
+            </a:extLst>
+          </p:cNvPr>
+          <p:cNvSpPr>
+            <a:spLocks noGrp="1"/>
+          </p:cNvSpPr>
+          <p:nvPr>
+            <p:ph type="title"/>
+          </p:nvPr>
+        </p:nvSpPr>
+        <p:spPr/>
+        <p:txBody>
+          <a:bodyPr/>
+          <a:lstStyle/>
+          <a:p>
+            <a:r>
+              <a:rPr lang="en-US" noProof="0" dirty="0" err="1"/>
+              <a:t>Zahodit</a:t>
+            </a:r>
+            <a:endParaRPr lang="en-US" noProof="0" dirty="0"/>
+          </a:p>
+        </p:txBody>
+      </p:sp>
+      <p:sp>
+        <p:nvSpPr>
+          <p:cNvPr id="3" name="Content Placeholder 2">
+            <a:extLst>
+              <a:ext uri="{FF2B5EF4-FFF2-40B4-BE49-F238E27FC236}">
+                <a16:creationId xmlns:a16="http://schemas.microsoft.com/office/drawing/2014/main" id="{369E5D67-EA03-A5CA-2D82-199F178CE89C}"/>
+              </a:ext>
+            </a:extLst>
+          </p:cNvPr>
+          <p:cNvSpPr>
+            <a:spLocks noGrp="1"/>
+          </p:cNvSpPr>
+          <p:nvPr>
+            <p:ph idx="1"/>
+          </p:nvPr>
+        </p:nvSpPr>
+        <p:spPr/>
+        <p:txBody>
+          <a:bodyPr/>
+          <a:lstStyle/>
+          <a:p>
+            <a:r>
+              <a:rPr lang="en-US" noProof="0" dirty="0" err="1"/>
+              <a:t>Noarr</a:t>
+            </a:r>
+            <a:endParaRPr lang="en-US" noProof="0" dirty="0"/>
+          </a:p>
+          <a:p>
+            <a:r>
+              <a:rPr lang="en-US" noProof="0" dirty="0" err="1"/>
+              <a:t>Cellato</a:t>
+            </a:r>
+            <a:endParaRPr lang="en-US" noProof="0" dirty="0"/>
+          </a:p>
+        </p:txBody>
+      </p:sp>
+    </p:spTree>
+    <p:extLst>
+      <p:ext uri="{BB962C8B-B14F-4D97-AF65-F5344CB8AC3E}">
+        <p14:creationId xmlns:p14="http://schemas.microsoft.com/office/powerpoint/2010/main" val="4085122203"/>
+      </p:ext>
+    </p:extLst>
+  </p:cSld>
+  <p:clrMapOvr>
+    <a:masterClrMapping/>
+  </p:clrMapOvr>
+</p:sld>
+</file>
+
+<file path=ppt/slides/slide21.xml><?xml version="1.0" encoding="utf-8"?>
+<p:sld xmlns:a="http://schemas.openxmlformats.org/drawingml/2006/main" xmlns:r="http://schemas.openxmlformats.org/officeDocument/2006/relationships" xmlns:p="http://schemas.openxmlformats.org/presentationml/2006/main">
+  <p:cSld>
+    <p:spTree>
+      <p:nvGrpSpPr>
+        <p:cNvPr id="1" name=""/>
+        <p:cNvGrpSpPr/>
+        <p:nvPr/>
+      </p:nvGrpSpPr>
+      <p:grpSpPr>
+        <a:xfrm>
+          <a:off x="0" y="0"/>
+          <a:ext cx="0" cy="0"/>
+          <a:chOff x="0" y="0"/>
+          <a:chExt cx="0" cy="0"/>
+        </a:xfrm>
+      </p:grpSpPr>
+      <p:sp>
+        <p:nvSpPr>
+          <p:cNvPr id="2" name="Title 1">
+            <a:extLst>
+              <a:ext uri="{FF2B5EF4-FFF2-40B4-BE49-F238E27FC236}">
+                <a16:creationId xmlns:a16="http://schemas.microsoft.com/office/drawing/2014/main" id="{6447B745-9B50-DD90-5161-BD2A06CEA44B}"/>
+              </a:ext>
+            </a:extLst>
+          </p:cNvPr>
+          <p:cNvSpPr>
+            <a:spLocks noGrp="1"/>
+          </p:cNvSpPr>
+          <p:nvPr>
+            <p:ph type="title"/>
+          </p:nvPr>
+        </p:nvSpPr>
+        <p:spPr/>
+        <p:txBody>
+          <a:bodyPr/>
+          <a:lstStyle/>
+          <a:p>
+            <a:r>
+              <a:rPr lang="en-US" noProof="0" dirty="0"/>
+              <a:t>Contribution map</a:t>
+            </a:r>
+          </a:p>
+        </p:txBody>
+      </p:sp>
+      <p:sp>
+        <p:nvSpPr>
+          <p:cNvPr id="5" name="Rectangle 4">
+            <a:extLst>
+              <a:ext uri="{FF2B5EF4-FFF2-40B4-BE49-F238E27FC236}">
+                <a16:creationId xmlns:a16="http://schemas.microsoft.com/office/drawing/2014/main" id="{CB7F8197-FC2F-9C2A-050C-CCCB46D86C79}"/>
+              </a:ext>
+            </a:extLst>
+          </p:cNvPr>
+          <p:cNvSpPr/>
+          <p:nvPr/>
+        </p:nvSpPr>
+        <p:spPr>
+          <a:xfrm>
+            <a:off x="4240490" y="1406732"/>
+            <a:ext cx="3711020" cy="914400"/>
+          </a:xfrm>
+          <a:prstGeom prst="rect">
+            <a:avLst/>
+          </a:prstGeom>
+        </p:spPr>
+        <p:style>
+          <a:lnRef idx="2">
+            <a:schemeClr val="accent1">
+              <a:shade val="15000"/>
+            </a:schemeClr>
+          </a:lnRef>
+          <a:fillRef idx="1">
+            <a:schemeClr val="accent1"/>
+          </a:fillRef>
+          <a:effectRef idx="0">
+            <a:schemeClr val="accent1"/>
+          </a:effectRef>
+          <a:fontRef idx="minor">
+            <a:schemeClr val="lt1"/>
+          </a:fontRef>
+        </p:style>
+        <p:txBody>
+          <a:bodyPr rtlCol="0" anchor="ctr"/>
+          <a:lstStyle/>
+          <a:p>
+            <a:pPr algn="ctr"/>
+            <a:r>
+              <a:rPr lang="en-US" noProof="0" dirty="0"/>
+              <a:t>Separate algorithm design from performance optimization</a:t>
+            </a:r>
+          </a:p>
+        </p:txBody>
+      </p:sp>
+      <p:sp>
+        <p:nvSpPr>
+          <p:cNvPr id="7" name="Rectangle 6">
+            <a:extLst>
+              <a:ext uri="{FF2B5EF4-FFF2-40B4-BE49-F238E27FC236}">
+                <a16:creationId xmlns:a16="http://schemas.microsoft.com/office/drawing/2014/main" id="{60EC2A1A-B720-84BC-76D5-4751C09EA61A}"/>
+              </a:ext>
+            </a:extLst>
+          </p:cNvPr>
+          <p:cNvSpPr/>
+          <p:nvPr/>
+        </p:nvSpPr>
+        <p:spPr>
+          <a:xfrm>
+            <a:off x="150074" y="2971800"/>
+            <a:ext cx="3711020" cy="914400"/>
+          </a:xfrm>
+          <a:prstGeom prst="rect">
+            <a:avLst/>
+          </a:prstGeom>
+        </p:spPr>
+        <p:style>
+          <a:lnRef idx="2">
+            <a:schemeClr val="accent1">
+              <a:shade val="15000"/>
+            </a:schemeClr>
+          </a:lnRef>
+          <a:fillRef idx="1">
+            <a:schemeClr val="accent1"/>
+          </a:fillRef>
+          <a:effectRef idx="0">
+            <a:schemeClr val="accent1"/>
+          </a:effectRef>
+          <a:fontRef idx="minor">
+            <a:schemeClr val="lt1"/>
+          </a:fontRef>
+        </p:style>
+        <p:txBody>
+          <a:bodyPr rtlCol="0" anchor="ctr"/>
+          <a:lstStyle/>
+          <a:p>
+            <a:pPr algn="ctr"/>
+            <a:r>
+              <a:rPr lang="en-US" noProof="0" dirty="0"/>
+              <a:t>Layout- and traversal-agnostic abstractions</a:t>
+            </a:r>
+          </a:p>
+        </p:txBody>
+      </p:sp>
+      <p:sp>
+        <p:nvSpPr>
+          <p:cNvPr id="9" name="Rectangle 8">
+            <a:extLst>
+              <a:ext uri="{FF2B5EF4-FFF2-40B4-BE49-F238E27FC236}">
+                <a16:creationId xmlns:a16="http://schemas.microsoft.com/office/drawing/2014/main" id="{6DB7F776-4EDC-09F4-F04A-E586FC4B4500}"/>
+              </a:ext>
+            </a:extLst>
+          </p:cNvPr>
+          <p:cNvSpPr/>
+          <p:nvPr/>
+        </p:nvSpPr>
+        <p:spPr>
+          <a:xfrm>
+            <a:off x="7840178" y="2971800"/>
+            <a:ext cx="3711020" cy="914400"/>
+          </a:xfrm>
+          <a:prstGeom prst="rect">
+            <a:avLst/>
+          </a:prstGeom>
+        </p:spPr>
+        <p:style>
+          <a:lnRef idx="2">
+            <a:schemeClr val="accent1">
+              <a:shade val="15000"/>
+            </a:schemeClr>
+          </a:lnRef>
+          <a:fillRef idx="1">
+            <a:schemeClr val="accent1"/>
+          </a:fillRef>
+          <a:effectRef idx="0">
+            <a:schemeClr val="accent1"/>
+          </a:effectRef>
+          <a:fontRef idx="minor">
+            <a:schemeClr val="lt1"/>
+          </a:fontRef>
+        </p:style>
+        <p:txBody>
+          <a:bodyPr rtlCol="0" anchor="ctr"/>
+          <a:lstStyle/>
+          <a:p>
+            <a:pPr algn="ctr"/>
+            <a:r>
+              <a:rPr lang="en-US" noProof="0" dirty="0"/>
+              <a:t>LLM-assisted optimization</a:t>
+            </a:r>
+          </a:p>
+        </p:txBody>
+      </p:sp>
+      <p:sp>
+        <p:nvSpPr>
+          <p:cNvPr id="11" name="Rectangle 10">
+            <a:extLst>
+              <a:ext uri="{FF2B5EF4-FFF2-40B4-BE49-F238E27FC236}">
+                <a16:creationId xmlns:a16="http://schemas.microsoft.com/office/drawing/2014/main" id="{5B2B9BCB-5805-C1F1-AF45-681B37E6B83E}"/>
+              </a:ext>
+            </a:extLst>
+          </p:cNvPr>
+          <p:cNvSpPr/>
+          <p:nvPr/>
+        </p:nvSpPr>
+        <p:spPr>
+          <a:xfrm>
+            <a:off x="150074" y="4252912"/>
+            <a:ext cx="3711020" cy="914400"/>
+          </a:xfrm>
+          <a:prstGeom prst="rect">
+            <a:avLst/>
+          </a:prstGeom>
+        </p:spPr>
+        <p:style>
+          <a:lnRef idx="2">
+            <a:schemeClr val="accent1">
+              <a:shade val="15000"/>
+            </a:schemeClr>
+          </a:lnRef>
+          <a:fillRef idx="1">
+            <a:schemeClr val="accent1"/>
+          </a:fillRef>
+          <a:effectRef idx="0">
+            <a:schemeClr val="accent1"/>
+          </a:effectRef>
+          <a:fontRef idx="minor">
+            <a:schemeClr val="lt1"/>
+          </a:fontRef>
+        </p:style>
+        <p:txBody>
+          <a:bodyPr rtlCol="0" anchor="ctr"/>
+          <a:lstStyle/>
+          <a:p>
+            <a:pPr algn="ctr"/>
+            <a:r>
+              <a:rPr lang="en-US" noProof="0" dirty="0"/>
+              <a:t>Layout abstractions</a:t>
+            </a:r>
+          </a:p>
+        </p:txBody>
+      </p:sp>
+      <p:sp>
+        <p:nvSpPr>
+          <p:cNvPr id="13" name="Rectangle 12">
+            <a:extLst>
+              <a:ext uri="{FF2B5EF4-FFF2-40B4-BE49-F238E27FC236}">
+                <a16:creationId xmlns:a16="http://schemas.microsoft.com/office/drawing/2014/main" id="{31388E94-1EEB-E24E-1923-AA250880AF84}"/>
+              </a:ext>
+            </a:extLst>
+          </p:cNvPr>
+          <p:cNvSpPr/>
+          <p:nvPr/>
+        </p:nvSpPr>
+        <p:spPr>
+          <a:xfrm>
+            <a:off x="4240490" y="4252912"/>
+            <a:ext cx="3711020" cy="914400"/>
+          </a:xfrm>
+          <a:prstGeom prst="rect">
+            <a:avLst/>
+          </a:prstGeom>
+        </p:spPr>
+        <p:style>
+          <a:lnRef idx="2">
+            <a:schemeClr val="accent1">
+              <a:shade val="15000"/>
+            </a:schemeClr>
+          </a:lnRef>
+          <a:fillRef idx="1">
+            <a:schemeClr val="accent1"/>
+          </a:fillRef>
+          <a:effectRef idx="0">
+            <a:schemeClr val="accent1"/>
+          </a:effectRef>
+          <a:fontRef idx="minor">
+            <a:schemeClr val="lt1"/>
+          </a:fontRef>
+        </p:style>
+        <p:txBody>
+          <a:bodyPr rtlCol="0" anchor="ctr"/>
+          <a:lstStyle/>
+          <a:p>
+            <a:pPr algn="ctr"/>
+            <a:r>
+              <a:rPr lang="en-US" noProof="0" dirty="0"/>
+              <a:t>Traversal abstractions</a:t>
+            </a:r>
+          </a:p>
+        </p:txBody>
+      </p:sp>
+      <p:sp>
+        <p:nvSpPr>
+          <p:cNvPr id="15" name="Rectangle 14">
+            <a:extLst>
+              <a:ext uri="{FF2B5EF4-FFF2-40B4-BE49-F238E27FC236}">
+                <a16:creationId xmlns:a16="http://schemas.microsoft.com/office/drawing/2014/main" id="{DE8920A4-4430-6757-E41A-9BA9578DC80D}"/>
+              </a:ext>
+            </a:extLst>
+          </p:cNvPr>
+          <p:cNvSpPr/>
+          <p:nvPr/>
+        </p:nvSpPr>
+        <p:spPr>
+          <a:xfrm>
+            <a:off x="8330906" y="4252912"/>
+            <a:ext cx="3711020" cy="914400"/>
+          </a:xfrm>
+          <a:prstGeom prst="rect">
+            <a:avLst/>
+          </a:prstGeom>
+        </p:spPr>
+        <p:style>
+          <a:lnRef idx="2">
+            <a:schemeClr val="accent1">
+              <a:shade val="15000"/>
+            </a:schemeClr>
+          </a:lnRef>
+          <a:fillRef idx="1">
+            <a:schemeClr val="accent1"/>
+          </a:fillRef>
+          <a:effectRef idx="0">
+            <a:schemeClr val="accent1"/>
+          </a:effectRef>
+          <a:fontRef idx="minor">
+            <a:schemeClr val="lt1"/>
+          </a:fontRef>
+        </p:style>
+        <p:txBody>
+          <a:bodyPr rtlCol="0" anchor="ctr"/>
+          <a:lstStyle/>
+          <a:p>
+            <a:pPr algn="ctr"/>
+            <a:r>
+              <a:rPr lang="en-US" noProof="0" dirty="0"/>
+              <a:t>Practical aspects</a:t>
+            </a:r>
+          </a:p>
+        </p:txBody>
+      </p:sp>
+      <p:sp>
+        <p:nvSpPr>
+          <p:cNvPr id="17" name="Rectangle 16">
+            <a:extLst>
+              <a:ext uri="{FF2B5EF4-FFF2-40B4-BE49-F238E27FC236}">
+                <a16:creationId xmlns:a16="http://schemas.microsoft.com/office/drawing/2014/main" id="{D01E75A2-333B-DF95-544C-0ACF1B88882C}"/>
+              </a:ext>
+            </a:extLst>
+          </p:cNvPr>
+          <p:cNvSpPr/>
+          <p:nvPr/>
+        </p:nvSpPr>
+        <p:spPr>
+          <a:xfrm>
+            <a:off x="302474" y="5356288"/>
+            <a:ext cx="3711020" cy="914400"/>
+          </a:xfrm>
+          <a:prstGeom prst="rect">
+            <a:avLst/>
+          </a:prstGeom>
+        </p:spPr>
+        <p:style>
+          <a:lnRef idx="2">
+            <a:schemeClr val="accent1">
+              <a:shade val="15000"/>
+            </a:schemeClr>
+          </a:lnRef>
+          <a:fillRef idx="1">
+            <a:schemeClr val="accent1"/>
+          </a:fillRef>
+          <a:effectRef idx="0">
+            <a:schemeClr val="accent1"/>
+          </a:effectRef>
+          <a:fontRef idx="minor">
+            <a:schemeClr val="lt1"/>
+          </a:fontRef>
+        </p:style>
+        <p:txBody>
+          <a:bodyPr rtlCol="0" anchor="ctr"/>
+          <a:lstStyle/>
+          <a:p>
+            <a:pPr algn="ctr"/>
+            <a:r>
+              <a:rPr lang="en-US" noProof="0" dirty="0" err="1"/>
+              <a:t>Noarr</a:t>
+            </a:r>
+            <a:r>
+              <a:rPr lang="en-US" noProof="0" dirty="0"/>
+              <a:t> structures</a:t>
+            </a:r>
+          </a:p>
+        </p:txBody>
+      </p:sp>
+      <p:sp>
+        <p:nvSpPr>
+          <p:cNvPr id="19" name="Rectangle 18">
+            <a:extLst>
+              <a:ext uri="{FF2B5EF4-FFF2-40B4-BE49-F238E27FC236}">
+                <a16:creationId xmlns:a16="http://schemas.microsoft.com/office/drawing/2014/main" id="{67736357-2F90-D241-51F6-C03C797EFFC2}"/>
+              </a:ext>
+            </a:extLst>
+          </p:cNvPr>
+          <p:cNvSpPr/>
+          <p:nvPr/>
+        </p:nvSpPr>
+        <p:spPr>
+          <a:xfrm>
+            <a:off x="454874" y="5508688"/>
+            <a:ext cx="3711020" cy="914400"/>
+          </a:xfrm>
+          <a:prstGeom prst="rect">
+            <a:avLst/>
+          </a:prstGeom>
+        </p:spPr>
+        <p:style>
+          <a:lnRef idx="2">
+            <a:schemeClr val="accent1">
+              <a:shade val="15000"/>
+            </a:schemeClr>
+          </a:lnRef>
+          <a:fillRef idx="1">
+            <a:schemeClr val="accent1"/>
+          </a:fillRef>
+          <a:effectRef idx="0">
+            <a:schemeClr val="accent1"/>
+          </a:effectRef>
+          <a:fontRef idx="minor">
+            <a:schemeClr val="lt1"/>
+          </a:fontRef>
+        </p:style>
+        <p:txBody>
+          <a:bodyPr rtlCol="0" anchor="ctr"/>
+          <a:lstStyle/>
+          <a:p>
+            <a:pPr algn="ctr"/>
+            <a:r>
+              <a:rPr lang="en-US" noProof="0" dirty="0" err="1"/>
+              <a:t>Noarr</a:t>
+            </a:r>
+            <a:r>
+              <a:rPr lang="en-US" noProof="0" dirty="0"/>
+              <a:t> traversers</a:t>
+            </a:r>
+          </a:p>
+        </p:txBody>
+      </p:sp>
+      <p:sp>
+        <p:nvSpPr>
+          <p:cNvPr id="21" name="Rectangle 20">
+            <a:extLst>
+              <a:ext uri="{FF2B5EF4-FFF2-40B4-BE49-F238E27FC236}">
+                <a16:creationId xmlns:a16="http://schemas.microsoft.com/office/drawing/2014/main" id="{9EC73339-8B3D-25F4-18D5-E5821CB7CE8B}"/>
+              </a:ext>
+            </a:extLst>
+          </p:cNvPr>
+          <p:cNvSpPr/>
+          <p:nvPr/>
+        </p:nvSpPr>
+        <p:spPr>
+          <a:xfrm>
+            <a:off x="607274" y="5661088"/>
+            <a:ext cx="3711020" cy="914400"/>
+          </a:xfrm>
+          <a:prstGeom prst="rect">
+            <a:avLst/>
+          </a:prstGeom>
+        </p:spPr>
+        <p:style>
+          <a:lnRef idx="2">
+            <a:schemeClr val="accent1">
+              <a:shade val="15000"/>
+            </a:schemeClr>
+          </a:lnRef>
+          <a:fillRef idx="1">
+            <a:schemeClr val="accent1"/>
+          </a:fillRef>
+          <a:effectRef idx="0">
+            <a:schemeClr val="accent1"/>
+          </a:effectRef>
+          <a:fontRef idx="minor">
+            <a:schemeClr val="lt1"/>
+          </a:fontRef>
+        </p:style>
+        <p:txBody>
+          <a:bodyPr rtlCol="0" anchor="ctr"/>
+          <a:lstStyle/>
+          <a:p>
+            <a:pPr algn="ctr"/>
+            <a:r>
+              <a:rPr lang="en-US" noProof="0" dirty="0" err="1"/>
+              <a:t>Noarr</a:t>
+            </a:r>
+            <a:r>
+              <a:rPr lang="en-US" noProof="0" dirty="0"/>
+              <a:t> tuning</a:t>
+            </a:r>
+          </a:p>
+        </p:txBody>
+      </p:sp>
+      <p:sp>
+        <p:nvSpPr>
+          <p:cNvPr id="23" name="Rectangle 22">
+            <a:extLst>
+              <a:ext uri="{FF2B5EF4-FFF2-40B4-BE49-F238E27FC236}">
+                <a16:creationId xmlns:a16="http://schemas.microsoft.com/office/drawing/2014/main" id="{63EC4F51-D7C0-1DFC-E94E-75AE185B7CC1}"/>
+              </a:ext>
+            </a:extLst>
+          </p:cNvPr>
+          <p:cNvSpPr/>
+          <p:nvPr/>
+        </p:nvSpPr>
+        <p:spPr>
+          <a:xfrm>
+            <a:off x="759674" y="5813488"/>
+            <a:ext cx="3711020" cy="914400"/>
+          </a:xfrm>
+          <a:prstGeom prst="rect">
+            <a:avLst/>
+          </a:prstGeom>
+        </p:spPr>
+        <p:style>
+          <a:lnRef idx="2">
+            <a:schemeClr val="accent1">
+              <a:shade val="15000"/>
+            </a:schemeClr>
+          </a:lnRef>
+          <a:fillRef idx="1">
+            <a:schemeClr val="accent1"/>
+          </a:fillRef>
+          <a:effectRef idx="0">
+            <a:schemeClr val="accent1"/>
+          </a:effectRef>
+          <a:fontRef idx="minor">
+            <a:schemeClr val="lt1"/>
+          </a:fontRef>
+        </p:style>
+        <p:txBody>
+          <a:bodyPr rtlCol="0" anchor="ctr"/>
+          <a:lstStyle/>
+          <a:p>
+            <a:pPr algn="ctr"/>
+            <a:r>
+              <a:rPr lang="en-US" noProof="0" dirty="0" err="1"/>
+              <a:t>Noarr</a:t>
+            </a:r>
+            <a:r>
+              <a:rPr lang="en-US" noProof="0" dirty="0"/>
+              <a:t>-MPI</a:t>
+            </a:r>
+          </a:p>
+        </p:txBody>
+      </p:sp>
+      <p:sp>
+        <p:nvSpPr>
+          <p:cNvPr id="25" name="Rectangle 24">
+            <a:extLst>
+              <a:ext uri="{FF2B5EF4-FFF2-40B4-BE49-F238E27FC236}">
+                <a16:creationId xmlns:a16="http://schemas.microsoft.com/office/drawing/2014/main" id="{B7D64168-E19F-C04D-293D-CB07E85D29DA}"/>
+              </a:ext>
+            </a:extLst>
+          </p:cNvPr>
+          <p:cNvSpPr/>
+          <p:nvPr/>
+        </p:nvSpPr>
+        <p:spPr>
+          <a:xfrm>
+            <a:off x="4853138" y="5424788"/>
+            <a:ext cx="3711020" cy="914400"/>
+          </a:xfrm>
+          <a:prstGeom prst="rect">
+            <a:avLst/>
+          </a:prstGeom>
+        </p:spPr>
+        <p:style>
+          <a:lnRef idx="2">
+            <a:schemeClr val="accent1">
+              <a:shade val="15000"/>
+            </a:schemeClr>
+          </a:lnRef>
+          <a:fillRef idx="1">
+            <a:schemeClr val="accent1"/>
+          </a:fillRef>
+          <a:effectRef idx="0">
+            <a:schemeClr val="accent1"/>
+          </a:effectRef>
+          <a:fontRef idx="minor">
+            <a:schemeClr val="lt1"/>
+          </a:fontRef>
+        </p:style>
+        <p:txBody>
+          <a:bodyPr rtlCol="0" anchor="ctr"/>
+          <a:lstStyle/>
+          <a:p>
+            <a:pPr algn="ctr"/>
+            <a:r>
+              <a:rPr lang="en-US" noProof="0" dirty="0" err="1"/>
+              <a:t>Cellato</a:t>
+            </a:r>
+            <a:endParaRPr lang="en-US" noProof="0" dirty="0"/>
+          </a:p>
+        </p:txBody>
+      </p:sp>
+    </p:spTree>
+    <p:extLst>
+      <p:ext uri="{BB962C8B-B14F-4D97-AF65-F5344CB8AC3E}">
+        <p14:creationId xmlns:p14="http://schemas.microsoft.com/office/powerpoint/2010/main" val="1745489699"/>
+      </p:ext>
+    </p:extLst>
+  </p:cSld>
+  <p:clrMapOvr>
+    <a:masterClrMapping/>
+  </p:clrMapOvr>
+</p:sld>
+</file>
+
+<file path=ppt/slides/slide22.xml><?xml version="1.0" encoding="utf-8"?>
+<p:sld xmlns:a="http://schemas.openxmlformats.org/drawingml/2006/main" xmlns:r="http://schemas.openxmlformats.org/officeDocument/2006/relationships" xmlns:p="http://schemas.openxmlformats.org/presentationml/2006/main">
+  <p:cSld>
+    <p:spTree>
+      <p:nvGrpSpPr>
+        <p:cNvPr id="1" name=""/>
+        <p:cNvGrpSpPr/>
+        <p:nvPr/>
+      </p:nvGrpSpPr>
+      <p:grpSpPr>
+        <a:xfrm>
+          <a:off x="0" y="0"/>
+          <a:ext cx="0" cy="0"/>
+          <a:chOff x="0" y="0"/>
+          <a:chExt cx="0" cy="0"/>
+        </a:xfrm>
+      </p:grpSpPr>
+      <p:sp>
+        <p:nvSpPr>
+          <p:cNvPr id="2" name="Title 1">
+            <a:extLst>
+              <a:ext uri="{FF2B5EF4-FFF2-40B4-BE49-F238E27FC236}">
+                <a16:creationId xmlns:a16="http://schemas.microsoft.com/office/drawing/2014/main" id="{63B07F39-5957-124B-D20D-4A155E0E07D1}"/>
+              </a:ext>
+            </a:extLst>
+          </p:cNvPr>
+          <p:cNvSpPr>
+            <a:spLocks noGrp="1"/>
+          </p:cNvSpPr>
+          <p:nvPr>
+            <p:ph type="title"/>
+          </p:nvPr>
+        </p:nvSpPr>
+        <p:spPr/>
+        <p:txBody>
+          <a:bodyPr/>
+          <a:lstStyle/>
+          <a:p>
+            <a:r>
+              <a:rPr lang="en-US" noProof="0" dirty="0"/>
+              <a:t>Summary</a:t>
+            </a:r>
+          </a:p>
+        </p:txBody>
+      </p:sp>
+      <p:sp>
+        <p:nvSpPr>
+          <p:cNvPr id="3" name="Content Placeholder 2">
+            <a:extLst>
+              <a:ext uri="{FF2B5EF4-FFF2-40B4-BE49-F238E27FC236}">
+                <a16:creationId xmlns:a16="http://schemas.microsoft.com/office/drawing/2014/main" id="{4437CB38-BBCE-B652-0445-A75C99068419}"/>
+              </a:ext>
+            </a:extLst>
+          </p:cNvPr>
+          <p:cNvSpPr>
+            <a:spLocks noGrp="1"/>
+          </p:cNvSpPr>
+          <p:nvPr>
+            <p:ph idx="1"/>
+          </p:nvPr>
+        </p:nvSpPr>
+        <p:spPr/>
+        <p:txBody>
+          <a:bodyPr/>
+          <a:lstStyle/>
+          <a:p>
+            <a:r>
+              <a:rPr lang="en-US" noProof="0" dirty="0"/>
+              <a:t>6 peer-reviewed publications </a:t>
+            </a:r>
+          </a:p>
+          <a:p>
+            <a:pPr lvl="1"/>
+            <a:r>
+              <a:rPr lang="en-US" noProof="0" dirty="0"/>
+              <a:t>2 journal articles</a:t>
+            </a:r>
+          </a:p>
+          <a:p>
+            <a:pPr lvl="1"/>
+            <a:r>
+              <a:rPr lang="en-US" noProof="0" dirty="0"/>
+              <a:t>3 conference papers,</a:t>
+            </a:r>
+          </a:p>
+          <a:p>
+            <a:pPr lvl="1"/>
+            <a:r>
+              <a:rPr lang="en-US" noProof="0" dirty="0"/>
+              <a:t>1 workshop paper</a:t>
+            </a:r>
+          </a:p>
+          <a:p>
+            <a:r>
+              <a:rPr lang="en-US" noProof="0" dirty="0"/>
+              <a:t>1 publication awaiting peer review</a:t>
+            </a:r>
+          </a:p>
+        </p:txBody>
+      </p:sp>
+    </p:spTree>
+    <p:extLst>
+      <p:ext uri="{BB962C8B-B14F-4D97-AF65-F5344CB8AC3E}">
+        <p14:creationId xmlns:p14="http://schemas.microsoft.com/office/powerpoint/2010/main" val="309417143"/>
+      </p:ext>
+    </p:extLst>
+  </p:cSld>
+  <p:clrMapOvr>
+    <a:masterClrMapping/>
+  </p:clrMapOvr>
+</p:sld>
+</file>
+
+<file path=ppt/slides/slide23.xml><?xml version="1.0" encoding="utf-8"?>
+<p:sld xmlns:a="http://schemas.openxmlformats.org/drawingml/2006/main" xmlns:r="http://schemas.openxmlformats.org/officeDocument/2006/relationships" xmlns:p="http://schemas.openxmlformats.org/presentationml/2006/main">
+  <p:cSld>
+    <p:spTree>
+      <p:nvGrpSpPr>
+        <p:cNvPr id="1" name=""/>
+        <p:cNvGrpSpPr/>
+        <p:nvPr/>
+      </p:nvGrpSpPr>
+      <p:grpSpPr>
+        <a:xfrm>
+          <a:off x="0" y="0"/>
+          <a:ext cx="0" cy="0"/>
+          <a:chOff x="0" y="0"/>
+          <a:chExt cx="0" cy="0"/>
+        </a:xfrm>
+      </p:grpSpPr>
+      <p:sp>
+        <p:nvSpPr>
+          <p:cNvPr id="2" name="Title 1">
+            <a:extLst>
+              <a:ext uri="{FF2B5EF4-FFF2-40B4-BE49-F238E27FC236}">
+                <a16:creationId xmlns:a16="http://schemas.microsoft.com/office/drawing/2014/main" id="{5EFCD7CC-C2D6-52E6-02D5-F41FC5389A5C}"/>
+              </a:ext>
+            </a:extLst>
+          </p:cNvPr>
+          <p:cNvSpPr>
+            <a:spLocks noGrp="1"/>
+          </p:cNvSpPr>
+          <p:nvPr>
+            <p:ph type="title"/>
+          </p:nvPr>
+        </p:nvSpPr>
+        <p:spPr/>
+        <p:txBody>
+          <a:bodyPr/>
+          <a:lstStyle/>
+          <a:p>
+            <a:endParaRPr lang="en-US" noProof="0" dirty="0"/>
+          </a:p>
+        </p:txBody>
+      </p:sp>
+      <p:sp>
+        <p:nvSpPr>
+          <p:cNvPr id="3" name="Content Placeholder 2">
+            <a:extLst>
+              <a:ext uri="{FF2B5EF4-FFF2-40B4-BE49-F238E27FC236}">
+                <a16:creationId xmlns:a16="http://schemas.microsoft.com/office/drawing/2014/main" id="{950373B6-1B3D-2E32-D54A-18C124620153}"/>
+              </a:ext>
+            </a:extLst>
+          </p:cNvPr>
+          <p:cNvSpPr>
+            <a:spLocks noGrp="1"/>
+          </p:cNvSpPr>
+          <p:nvPr>
+            <p:ph idx="1"/>
+          </p:nvPr>
+        </p:nvSpPr>
+        <p:spPr/>
+        <p:txBody>
+          <a:bodyPr/>
+          <a:lstStyle/>
+          <a:p>
+            <a:endParaRPr lang="en-US" noProof="0" dirty="0"/>
+          </a:p>
+        </p:txBody>
+      </p:sp>
+    </p:spTree>
+    <p:extLst>
+      <p:ext uri="{BB962C8B-B14F-4D97-AF65-F5344CB8AC3E}">
+        <p14:creationId xmlns:p14="http://schemas.microsoft.com/office/powerpoint/2010/main" val="2595384929"/>
       </p:ext>
     </p:extLst>
   </p:cSld>
@@ -5203,7 +6856,7 @@
           <p:cNvPr id="2" name="Title 1">
             <a:extLst>
               <a:ext uri="{FF2B5EF4-FFF2-40B4-BE49-F238E27FC236}">
-                <a16:creationId xmlns:a16="http://schemas.microsoft.com/office/drawing/2014/main" id="{9056C07C-65B7-F09E-1FC3-13A2803F54CE}"/>
+                <a16:creationId xmlns:a16="http://schemas.microsoft.com/office/drawing/2014/main" id="{FC1F16B1-5468-83FD-64C7-68045C621054}"/>
               </a:ext>
             </a:extLst>
           </p:cNvPr>
@@ -5216,103 +6869,1184 @@
         </p:nvSpPr>
         <p:spPr/>
         <p:txBody>
-          <a:bodyPr>
-            <a:normAutofit/>
+          <a:bodyPr/>
+          <a:lstStyle/>
+          <a:p>
+            <a:r>
+              <a:rPr lang="en-US" dirty="0"/>
+              <a:t>Illustrative example: traversing matrices</a:t>
+            </a:r>
+          </a:p>
+        </p:txBody>
+      </p:sp>
+      <p:grpSp>
+        <p:nvGrpSpPr>
+          <p:cNvPr id="15" name="Group 14">
+            <a:extLst>
+              <a:ext uri="{FF2B5EF4-FFF2-40B4-BE49-F238E27FC236}">
+                <a16:creationId xmlns:a16="http://schemas.microsoft.com/office/drawing/2014/main" id="{0F021F81-2E4A-FAB4-0D8F-C5CFA4E675FF}"/>
+              </a:ext>
+            </a:extLst>
+          </p:cNvPr>
+          <p:cNvGrpSpPr/>
+          <p:nvPr/>
+        </p:nvGrpSpPr>
+        <p:grpSpPr>
+          <a:xfrm>
+            <a:off x="3206984" y="1998381"/>
+            <a:ext cx="1590800" cy="1764556"/>
+            <a:chOff x="735535" y="1909480"/>
+            <a:chExt cx="1590800" cy="1764556"/>
+          </a:xfrm>
+        </p:grpSpPr>
+        <p:pic>
+          <p:nvPicPr>
+            <p:cNvPr id="4" name="Picture 3">
+              <a:extLst>
+                <a:ext uri="{FF2B5EF4-FFF2-40B4-BE49-F238E27FC236}">
+                  <a16:creationId xmlns:a16="http://schemas.microsoft.com/office/drawing/2014/main" id="{F353F98A-C5CE-9352-8E83-B1375ABB1A90}"/>
+                </a:ext>
+              </a:extLst>
+            </p:cNvPr>
+            <p:cNvPicPr>
+              <a:picLocks noChangeAspect="1"/>
+            </p:cNvPicPr>
+            <p:nvPr/>
+          </p:nvPicPr>
+          <p:blipFill>
+            <a:blip r:embed="rId3"/>
+            <a:stretch>
+              <a:fillRect/>
+            </a:stretch>
+          </p:blipFill>
+          <p:spPr>
+            <a:xfrm>
+              <a:off x="1077265" y="2432700"/>
+              <a:ext cx="1249070" cy="1241336"/>
+            </a:xfrm>
+            <a:prstGeom prst="rect">
+              <a:avLst/>
+            </a:prstGeom>
+          </p:spPr>
+        </p:pic>
+        <p:sp>
+          <p:nvSpPr>
+            <p:cNvPr id="6" name="TextBox 25">
+              <a:extLst>
+                <a:ext uri="{FF2B5EF4-FFF2-40B4-BE49-F238E27FC236}">
+                  <a16:creationId xmlns:a16="http://schemas.microsoft.com/office/drawing/2014/main" id="{94AE0714-82E6-AFC1-E7D4-36D9B568E705}"/>
+                </a:ext>
+              </a:extLst>
+            </p:cNvPr>
+            <p:cNvSpPr txBox="1"/>
+            <p:nvPr/>
+          </p:nvSpPr>
+          <p:spPr>
+            <a:xfrm>
+              <a:off x="735535" y="2793505"/>
+              <a:ext cx="222198" cy="523220"/>
+            </a:xfrm>
+            <a:prstGeom prst="rect">
+              <a:avLst/>
+            </a:prstGeom>
+            <a:noFill/>
+          </p:spPr>
+          <p:txBody>
+            <a:bodyPr wrap="square" rtlCol="0">
+              <a:spAutoFit/>
+            </a:bodyPr>
+            <a:lstStyle>
+              <a:defPPr>
+                <a:defRPr lang="en-US"/>
+              </a:defPPr>
+              <a:lvl1pPr marL="0" algn="l" defTabSz="457200" rtl="0" eaLnBrk="1" latinLnBrk="0" hangingPunct="1">
+                <a:defRPr sz="1800" kern="1200">
+                  <a:solidFill>
+                    <a:schemeClr val="tx1"/>
+                  </a:solidFill>
+                  <a:latin typeface="+mn-lt"/>
+                  <a:ea typeface="+mn-ea"/>
+                  <a:cs typeface="+mn-cs"/>
+                </a:defRPr>
+              </a:lvl1pPr>
+              <a:lvl2pPr marL="457200" algn="l" defTabSz="457200" rtl="0" eaLnBrk="1" latinLnBrk="0" hangingPunct="1">
+                <a:defRPr sz="1800" kern="1200">
+                  <a:solidFill>
+                    <a:schemeClr val="tx1"/>
+                  </a:solidFill>
+                  <a:latin typeface="+mn-lt"/>
+                  <a:ea typeface="+mn-ea"/>
+                  <a:cs typeface="+mn-cs"/>
+                </a:defRPr>
+              </a:lvl2pPr>
+              <a:lvl3pPr marL="914400" algn="l" defTabSz="457200" rtl="0" eaLnBrk="1" latinLnBrk="0" hangingPunct="1">
+                <a:defRPr sz="1800" kern="1200">
+                  <a:solidFill>
+                    <a:schemeClr val="tx1"/>
+                  </a:solidFill>
+                  <a:latin typeface="+mn-lt"/>
+                  <a:ea typeface="+mn-ea"/>
+                  <a:cs typeface="+mn-cs"/>
+                </a:defRPr>
+              </a:lvl3pPr>
+              <a:lvl4pPr marL="1371600" algn="l" defTabSz="457200" rtl="0" eaLnBrk="1" latinLnBrk="0" hangingPunct="1">
+                <a:defRPr sz="1800" kern="1200">
+                  <a:solidFill>
+                    <a:schemeClr val="tx1"/>
+                  </a:solidFill>
+                  <a:latin typeface="+mn-lt"/>
+                  <a:ea typeface="+mn-ea"/>
+                  <a:cs typeface="+mn-cs"/>
+                </a:defRPr>
+              </a:lvl4pPr>
+              <a:lvl5pPr marL="1828800" algn="l" defTabSz="457200" rtl="0" eaLnBrk="1" latinLnBrk="0" hangingPunct="1">
+                <a:defRPr sz="1800" kern="1200">
+                  <a:solidFill>
+                    <a:schemeClr val="tx1"/>
+                  </a:solidFill>
+                  <a:latin typeface="+mn-lt"/>
+                  <a:ea typeface="+mn-ea"/>
+                  <a:cs typeface="+mn-cs"/>
+                </a:defRPr>
+              </a:lvl5pPr>
+              <a:lvl6pPr marL="2286000" algn="l" defTabSz="457200" rtl="0" eaLnBrk="1" latinLnBrk="0" hangingPunct="1">
+                <a:defRPr sz="1800" kern="1200">
+                  <a:solidFill>
+                    <a:schemeClr val="tx1"/>
+                  </a:solidFill>
+                  <a:latin typeface="+mn-lt"/>
+                  <a:ea typeface="+mn-ea"/>
+                  <a:cs typeface="+mn-cs"/>
+                </a:defRPr>
+              </a:lvl6pPr>
+              <a:lvl7pPr marL="2743200" algn="l" defTabSz="457200" rtl="0" eaLnBrk="1" latinLnBrk="0" hangingPunct="1">
+                <a:defRPr sz="1800" kern="1200">
+                  <a:solidFill>
+                    <a:schemeClr val="tx1"/>
+                  </a:solidFill>
+                  <a:latin typeface="+mn-lt"/>
+                  <a:ea typeface="+mn-ea"/>
+                  <a:cs typeface="+mn-cs"/>
+                </a:defRPr>
+              </a:lvl7pPr>
+              <a:lvl8pPr marL="3200400" algn="l" defTabSz="457200" rtl="0" eaLnBrk="1" latinLnBrk="0" hangingPunct="1">
+                <a:defRPr sz="1800" kern="1200">
+                  <a:solidFill>
+                    <a:schemeClr val="tx1"/>
+                  </a:solidFill>
+                  <a:latin typeface="+mn-lt"/>
+                  <a:ea typeface="+mn-ea"/>
+                  <a:cs typeface="+mn-cs"/>
+                </a:defRPr>
+              </a:lvl8pPr>
+              <a:lvl9pPr marL="3657600" algn="l" defTabSz="457200" rtl="0" eaLnBrk="1" latinLnBrk="0" hangingPunct="1">
+                <a:defRPr sz="1800" kern="1200">
+                  <a:solidFill>
+                    <a:schemeClr val="tx1"/>
+                  </a:solidFill>
+                  <a:latin typeface="+mn-lt"/>
+                  <a:ea typeface="+mn-ea"/>
+                  <a:cs typeface="+mn-cs"/>
+                </a:defRPr>
+              </a:lvl9pPr>
+            </a:lstStyle>
+            <a:p>
+              <a:r>
+                <a:rPr lang="en-US" sz="2800" dirty="0">
+                  <a:latin typeface="Blackadder ITC" panose="04020505051007020D02" pitchFamily="82" charset="0"/>
+                </a:rPr>
+                <a:t>m</a:t>
+              </a:r>
+              <a:endParaRPr lang="sk-SK" sz="2800" dirty="0">
+                <a:latin typeface="Blackadder ITC" panose="04020505051007020D02" pitchFamily="82" charset="0"/>
+              </a:endParaRPr>
+            </a:p>
+          </p:txBody>
+        </p:sp>
+        <p:sp>
+          <p:nvSpPr>
+            <p:cNvPr id="7" name="TextBox 26">
+              <a:extLst>
+                <a:ext uri="{FF2B5EF4-FFF2-40B4-BE49-F238E27FC236}">
+                  <a16:creationId xmlns:a16="http://schemas.microsoft.com/office/drawing/2014/main" id="{0FF7A120-509C-08AF-3395-CF8D9F5CEBCA}"/>
+                </a:ext>
+              </a:extLst>
+            </p:cNvPr>
+            <p:cNvSpPr txBox="1"/>
+            <p:nvPr/>
+          </p:nvSpPr>
+          <p:spPr>
+            <a:xfrm>
+              <a:off x="1590701" y="1909480"/>
+              <a:ext cx="222198" cy="523220"/>
+            </a:xfrm>
+            <a:prstGeom prst="rect">
+              <a:avLst/>
+            </a:prstGeom>
+            <a:noFill/>
+          </p:spPr>
+          <p:txBody>
+            <a:bodyPr wrap="square" rtlCol="0">
+              <a:spAutoFit/>
+            </a:bodyPr>
+            <a:lstStyle>
+              <a:defPPr>
+                <a:defRPr lang="en-US"/>
+              </a:defPPr>
+              <a:lvl1pPr marL="0" algn="l" defTabSz="457200" rtl="0" eaLnBrk="1" latinLnBrk="0" hangingPunct="1">
+                <a:defRPr sz="1800" kern="1200">
+                  <a:solidFill>
+                    <a:schemeClr val="tx1"/>
+                  </a:solidFill>
+                  <a:latin typeface="+mn-lt"/>
+                  <a:ea typeface="+mn-ea"/>
+                  <a:cs typeface="+mn-cs"/>
+                </a:defRPr>
+              </a:lvl1pPr>
+              <a:lvl2pPr marL="457200" algn="l" defTabSz="457200" rtl="0" eaLnBrk="1" latinLnBrk="0" hangingPunct="1">
+                <a:defRPr sz="1800" kern="1200">
+                  <a:solidFill>
+                    <a:schemeClr val="tx1"/>
+                  </a:solidFill>
+                  <a:latin typeface="+mn-lt"/>
+                  <a:ea typeface="+mn-ea"/>
+                  <a:cs typeface="+mn-cs"/>
+                </a:defRPr>
+              </a:lvl2pPr>
+              <a:lvl3pPr marL="914400" algn="l" defTabSz="457200" rtl="0" eaLnBrk="1" latinLnBrk="0" hangingPunct="1">
+                <a:defRPr sz="1800" kern="1200">
+                  <a:solidFill>
+                    <a:schemeClr val="tx1"/>
+                  </a:solidFill>
+                  <a:latin typeface="+mn-lt"/>
+                  <a:ea typeface="+mn-ea"/>
+                  <a:cs typeface="+mn-cs"/>
+                </a:defRPr>
+              </a:lvl3pPr>
+              <a:lvl4pPr marL="1371600" algn="l" defTabSz="457200" rtl="0" eaLnBrk="1" latinLnBrk="0" hangingPunct="1">
+                <a:defRPr sz="1800" kern="1200">
+                  <a:solidFill>
+                    <a:schemeClr val="tx1"/>
+                  </a:solidFill>
+                  <a:latin typeface="+mn-lt"/>
+                  <a:ea typeface="+mn-ea"/>
+                  <a:cs typeface="+mn-cs"/>
+                </a:defRPr>
+              </a:lvl4pPr>
+              <a:lvl5pPr marL="1828800" algn="l" defTabSz="457200" rtl="0" eaLnBrk="1" latinLnBrk="0" hangingPunct="1">
+                <a:defRPr sz="1800" kern="1200">
+                  <a:solidFill>
+                    <a:schemeClr val="tx1"/>
+                  </a:solidFill>
+                  <a:latin typeface="+mn-lt"/>
+                  <a:ea typeface="+mn-ea"/>
+                  <a:cs typeface="+mn-cs"/>
+                </a:defRPr>
+              </a:lvl5pPr>
+              <a:lvl6pPr marL="2286000" algn="l" defTabSz="457200" rtl="0" eaLnBrk="1" latinLnBrk="0" hangingPunct="1">
+                <a:defRPr sz="1800" kern="1200">
+                  <a:solidFill>
+                    <a:schemeClr val="tx1"/>
+                  </a:solidFill>
+                  <a:latin typeface="+mn-lt"/>
+                  <a:ea typeface="+mn-ea"/>
+                  <a:cs typeface="+mn-cs"/>
+                </a:defRPr>
+              </a:lvl6pPr>
+              <a:lvl7pPr marL="2743200" algn="l" defTabSz="457200" rtl="0" eaLnBrk="1" latinLnBrk="0" hangingPunct="1">
+                <a:defRPr sz="1800" kern="1200">
+                  <a:solidFill>
+                    <a:schemeClr val="tx1"/>
+                  </a:solidFill>
+                  <a:latin typeface="+mn-lt"/>
+                  <a:ea typeface="+mn-ea"/>
+                  <a:cs typeface="+mn-cs"/>
+                </a:defRPr>
+              </a:lvl7pPr>
+              <a:lvl8pPr marL="3200400" algn="l" defTabSz="457200" rtl="0" eaLnBrk="1" latinLnBrk="0" hangingPunct="1">
+                <a:defRPr sz="1800" kern="1200">
+                  <a:solidFill>
+                    <a:schemeClr val="tx1"/>
+                  </a:solidFill>
+                  <a:latin typeface="+mn-lt"/>
+                  <a:ea typeface="+mn-ea"/>
+                  <a:cs typeface="+mn-cs"/>
+                </a:defRPr>
+              </a:lvl8pPr>
+              <a:lvl9pPr marL="3657600" algn="l" defTabSz="457200" rtl="0" eaLnBrk="1" latinLnBrk="0" hangingPunct="1">
+                <a:defRPr sz="1800" kern="1200">
+                  <a:solidFill>
+                    <a:schemeClr val="tx1"/>
+                  </a:solidFill>
+                  <a:latin typeface="+mn-lt"/>
+                  <a:ea typeface="+mn-ea"/>
+                  <a:cs typeface="+mn-cs"/>
+                </a:defRPr>
+              </a:lvl9pPr>
+            </a:lstStyle>
+            <a:p>
+              <a:r>
+                <a:rPr lang="en-US" sz="2800" dirty="0">
+                  <a:latin typeface="Blackadder ITC" panose="04020505051007020D02" pitchFamily="82" charset="0"/>
+                </a:rPr>
+                <a:t>n</a:t>
+              </a:r>
+              <a:endParaRPr lang="sk-SK" sz="2800" dirty="0">
+                <a:latin typeface="Blackadder ITC" panose="04020505051007020D02" pitchFamily="82" charset="0"/>
+              </a:endParaRPr>
+            </a:p>
+          </p:txBody>
+        </p:sp>
+      </p:grpSp>
+      <p:grpSp>
+        <p:nvGrpSpPr>
+          <p:cNvPr id="14" name="Group 13">
+            <a:extLst>
+              <a:ext uri="{FF2B5EF4-FFF2-40B4-BE49-F238E27FC236}">
+                <a16:creationId xmlns:a16="http://schemas.microsoft.com/office/drawing/2014/main" id="{E1529F6C-2638-FAF6-7573-04101D2DC4B9}"/>
+              </a:ext>
+            </a:extLst>
+          </p:cNvPr>
+          <p:cNvGrpSpPr/>
+          <p:nvPr/>
+        </p:nvGrpSpPr>
+        <p:grpSpPr>
+          <a:xfrm>
+            <a:off x="5995525" y="1998381"/>
+            <a:ext cx="1588351" cy="1758941"/>
+            <a:chOff x="3070917" y="1915095"/>
+            <a:chExt cx="1588351" cy="1758941"/>
+          </a:xfrm>
+        </p:grpSpPr>
+        <p:pic>
+          <p:nvPicPr>
+            <p:cNvPr id="5" name="Picture 4">
+              <a:extLst>
+                <a:ext uri="{FF2B5EF4-FFF2-40B4-BE49-F238E27FC236}">
+                  <a16:creationId xmlns:a16="http://schemas.microsoft.com/office/drawing/2014/main" id="{019A6B8E-0CD6-2553-0520-DF9244FCFB78}"/>
+                </a:ext>
+              </a:extLst>
+            </p:cNvPr>
+            <p:cNvPicPr>
+              <a:picLocks noChangeAspect="1"/>
+            </p:cNvPicPr>
+            <p:nvPr/>
+          </p:nvPicPr>
+          <p:blipFill>
+            <a:blip r:embed="rId3"/>
+            <a:stretch>
+              <a:fillRect/>
+            </a:stretch>
+          </p:blipFill>
+          <p:spPr>
+            <a:xfrm rot="16200000" flipH="1">
+              <a:off x="3414065" y="2428833"/>
+              <a:ext cx="1249070" cy="1241336"/>
+            </a:xfrm>
+            <a:prstGeom prst="rect">
+              <a:avLst/>
+            </a:prstGeom>
+          </p:spPr>
+        </p:pic>
+        <p:sp>
+          <p:nvSpPr>
+            <p:cNvPr id="9" name="TextBox 25">
+              <a:extLst>
+                <a:ext uri="{FF2B5EF4-FFF2-40B4-BE49-F238E27FC236}">
+                  <a16:creationId xmlns:a16="http://schemas.microsoft.com/office/drawing/2014/main" id="{E1DBC912-122E-5075-A278-511303718434}"/>
+                </a:ext>
+              </a:extLst>
+            </p:cNvPr>
+            <p:cNvSpPr txBox="1"/>
+            <p:nvPr/>
+          </p:nvSpPr>
+          <p:spPr>
+            <a:xfrm>
+              <a:off x="3070917" y="2787891"/>
+              <a:ext cx="222198" cy="523220"/>
+            </a:xfrm>
+            <a:prstGeom prst="rect">
+              <a:avLst/>
+            </a:prstGeom>
+            <a:noFill/>
+          </p:spPr>
+          <p:txBody>
+            <a:bodyPr wrap="square" rtlCol="0">
+              <a:spAutoFit/>
+            </a:bodyPr>
+            <a:lstStyle>
+              <a:defPPr>
+                <a:defRPr lang="en-US"/>
+              </a:defPPr>
+              <a:lvl1pPr marL="0" algn="l" defTabSz="457200" rtl="0" eaLnBrk="1" latinLnBrk="0" hangingPunct="1">
+                <a:defRPr sz="1800" kern="1200">
+                  <a:solidFill>
+                    <a:schemeClr val="tx1"/>
+                  </a:solidFill>
+                  <a:latin typeface="+mn-lt"/>
+                  <a:ea typeface="+mn-ea"/>
+                  <a:cs typeface="+mn-cs"/>
+                </a:defRPr>
+              </a:lvl1pPr>
+              <a:lvl2pPr marL="457200" algn="l" defTabSz="457200" rtl="0" eaLnBrk="1" latinLnBrk="0" hangingPunct="1">
+                <a:defRPr sz="1800" kern="1200">
+                  <a:solidFill>
+                    <a:schemeClr val="tx1"/>
+                  </a:solidFill>
+                  <a:latin typeface="+mn-lt"/>
+                  <a:ea typeface="+mn-ea"/>
+                  <a:cs typeface="+mn-cs"/>
+                </a:defRPr>
+              </a:lvl2pPr>
+              <a:lvl3pPr marL="914400" algn="l" defTabSz="457200" rtl="0" eaLnBrk="1" latinLnBrk="0" hangingPunct="1">
+                <a:defRPr sz="1800" kern="1200">
+                  <a:solidFill>
+                    <a:schemeClr val="tx1"/>
+                  </a:solidFill>
+                  <a:latin typeface="+mn-lt"/>
+                  <a:ea typeface="+mn-ea"/>
+                  <a:cs typeface="+mn-cs"/>
+                </a:defRPr>
+              </a:lvl3pPr>
+              <a:lvl4pPr marL="1371600" algn="l" defTabSz="457200" rtl="0" eaLnBrk="1" latinLnBrk="0" hangingPunct="1">
+                <a:defRPr sz="1800" kern="1200">
+                  <a:solidFill>
+                    <a:schemeClr val="tx1"/>
+                  </a:solidFill>
+                  <a:latin typeface="+mn-lt"/>
+                  <a:ea typeface="+mn-ea"/>
+                  <a:cs typeface="+mn-cs"/>
+                </a:defRPr>
+              </a:lvl4pPr>
+              <a:lvl5pPr marL="1828800" algn="l" defTabSz="457200" rtl="0" eaLnBrk="1" latinLnBrk="0" hangingPunct="1">
+                <a:defRPr sz="1800" kern="1200">
+                  <a:solidFill>
+                    <a:schemeClr val="tx1"/>
+                  </a:solidFill>
+                  <a:latin typeface="+mn-lt"/>
+                  <a:ea typeface="+mn-ea"/>
+                  <a:cs typeface="+mn-cs"/>
+                </a:defRPr>
+              </a:lvl5pPr>
+              <a:lvl6pPr marL="2286000" algn="l" defTabSz="457200" rtl="0" eaLnBrk="1" latinLnBrk="0" hangingPunct="1">
+                <a:defRPr sz="1800" kern="1200">
+                  <a:solidFill>
+                    <a:schemeClr val="tx1"/>
+                  </a:solidFill>
+                  <a:latin typeface="+mn-lt"/>
+                  <a:ea typeface="+mn-ea"/>
+                  <a:cs typeface="+mn-cs"/>
+                </a:defRPr>
+              </a:lvl6pPr>
+              <a:lvl7pPr marL="2743200" algn="l" defTabSz="457200" rtl="0" eaLnBrk="1" latinLnBrk="0" hangingPunct="1">
+                <a:defRPr sz="1800" kern="1200">
+                  <a:solidFill>
+                    <a:schemeClr val="tx1"/>
+                  </a:solidFill>
+                  <a:latin typeface="+mn-lt"/>
+                  <a:ea typeface="+mn-ea"/>
+                  <a:cs typeface="+mn-cs"/>
+                </a:defRPr>
+              </a:lvl7pPr>
+              <a:lvl8pPr marL="3200400" algn="l" defTabSz="457200" rtl="0" eaLnBrk="1" latinLnBrk="0" hangingPunct="1">
+                <a:defRPr sz="1800" kern="1200">
+                  <a:solidFill>
+                    <a:schemeClr val="tx1"/>
+                  </a:solidFill>
+                  <a:latin typeface="+mn-lt"/>
+                  <a:ea typeface="+mn-ea"/>
+                  <a:cs typeface="+mn-cs"/>
+                </a:defRPr>
+              </a:lvl8pPr>
+              <a:lvl9pPr marL="3657600" algn="l" defTabSz="457200" rtl="0" eaLnBrk="1" latinLnBrk="0" hangingPunct="1">
+                <a:defRPr sz="1800" kern="1200">
+                  <a:solidFill>
+                    <a:schemeClr val="tx1"/>
+                  </a:solidFill>
+                  <a:latin typeface="+mn-lt"/>
+                  <a:ea typeface="+mn-ea"/>
+                  <a:cs typeface="+mn-cs"/>
+                </a:defRPr>
+              </a:lvl9pPr>
+            </a:lstStyle>
+            <a:p>
+              <a:r>
+                <a:rPr lang="en-US" sz="2800" dirty="0">
+                  <a:latin typeface="Blackadder ITC" panose="04020505051007020D02" pitchFamily="82" charset="0"/>
+                </a:rPr>
+                <a:t>m</a:t>
+              </a:r>
+              <a:endParaRPr lang="sk-SK" sz="2800" dirty="0">
+                <a:latin typeface="Blackadder ITC" panose="04020505051007020D02" pitchFamily="82" charset="0"/>
+              </a:endParaRPr>
+            </a:p>
+          </p:txBody>
+        </p:sp>
+        <p:sp>
+          <p:nvSpPr>
+            <p:cNvPr id="11" name="TextBox 26">
+              <a:extLst>
+                <a:ext uri="{FF2B5EF4-FFF2-40B4-BE49-F238E27FC236}">
+                  <a16:creationId xmlns:a16="http://schemas.microsoft.com/office/drawing/2014/main" id="{5EB1F6F3-234C-D093-D726-133AE769EBEE}"/>
+                </a:ext>
+              </a:extLst>
+            </p:cNvPr>
+            <p:cNvSpPr txBox="1"/>
+            <p:nvPr/>
+          </p:nvSpPr>
+          <p:spPr>
+            <a:xfrm>
+              <a:off x="3931368" y="1915095"/>
+              <a:ext cx="222198" cy="523220"/>
+            </a:xfrm>
+            <a:prstGeom prst="rect">
+              <a:avLst/>
+            </a:prstGeom>
+            <a:noFill/>
+          </p:spPr>
+          <p:txBody>
+            <a:bodyPr wrap="square" rtlCol="0">
+              <a:spAutoFit/>
+            </a:bodyPr>
+            <a:lstStyle>
+              <a:defPPr>
+                <a:defRPr lang="en-US"/>
+              </a:defPPr>
+              <a:lvl1pPr marL="0" algn="l" defTabSz="457200" rtl="0" eaLnBrk="1" latinLnBrk="0" hangingPunct="1">
+                <a:defRPr sz="1800" kern="1200">
+                  <a:solidFill>
+                    <a:schemeClr val="tx1"/>
+                  </a:solidFill>
+                  <a:latin typeface="+mn-lt"/>
+                  <a:ea typeface="+mn-ea"/>
+                  <a:cs typeface="+mn-cs"/>
+                </a:defRPr>
+              </a:lvl1pPr>
+              <a:lvl2pPr marL="457200" algn="l" defTabSz="457200" rtl="0" eaLnBrk="1" latinLnBrk="0" hangingPunct="1">
+                <a:defRPr sz="1800" kern="1200">
+                  <a:solidFill>
+                    <a:schemeClr val="tx1"/>
+                  </a:solidFill>
+                  <a:latin typeface="+mn-lt"/>
+                  <a:ea typeface="+mn-ea"/>
+                  <a:cs typeface="+mn-cs"/>
+                </a:defRPr>
+              </a:lvl2pPr>
+              <a:lvl3pPr marL="914400" algn="l" defTabSz="457200" rtl="0" eaLnBrk="1" latinLnBrk="0" hangingPunct="1">
+                <a:defRPr sz="1800" kern="1200">
+                  <a:solidFill>
+                    <a:schemeClr val="tx1"/>
+                  </a:solidFill>
+                  <a:latin typeface="+mn-lt"/>
+                  <a:ea typeface="+mn-ea"/>
+                  <a:cs typeface="+mn-cs"/>
+                </a:defRPr>
+              </a:lvl3pPr>
+              <a:lvl4pPr marL="1371600" algn="l" defTabSz="457200" rtl="0" eaLnBrk="1" latinLnBrk="0" hangingPunct="1">
+                <a:defRPr sz="1800" kern="1200">
+                  <a:solidFill>
+                    <a:schemeClr val="tx1"/>
+                  </a:solidFill>
+                  <a:latin typeface="+mn-lt"/>
+                  <a:ea typeface="+mn-ea"/>
+                  <a:cs typeface="+mn-cs"/>
+                </a:defRPr>
+              </a:lvl4pPr>
+              <a:lvl5pPr marL="1828800" algn="l" defTabSz="457200" rtl="0" eaLnBrk="1" latinLnBrk="0" hangingPunct="1">
+                <a:defRPr sz="1800" kern="1200">
+                  <a:solidFill>
+                    <a:schemeClr val="tx1"/>
+                  </a:solidFill>
+                  <a:latin typeface="+mn-lt"/>
+                  <a:ea typeface="+mn-ea"/>
+                  <a:cs typeface="+mn-cs"/>
+                </a:defRPr>
+              </a:lvl5pPr>
+              <a:lvl6pPr marL="2286000" algn="l" defTabSz="457200" rtl="0" eaLnBrk="1" latinLnBrk="0" hangingPunct="1">
+                <a:defRPr sz="1800" kern="1200">
+                  <a:solidFill>
+                    <a:schemeClr val="tx1"/>
+                  </a:solidFill>
+                  <a:latin typeface="+mn-lt"/>
+                  <a:ea typeface="+mn-ea"/>
+                  <a:cs typeface="+mn-cs"/>
+                </a:defRPr>
+              </a:lvl6pPr>
+              <a:lvl7pPr marL="2743200" algn="l" defTabSz="457200" rtl="0" eaLnBrk="1" latinLnBrk="0" hangingPunct="1">
+                <a:defRPr sz="1800" kern="1200">
+                  <a:solidFill>
+                    <a:schemeClr val="tx1"/>
+                  </a:solidFill>
+                  <a:latin typeface="+mn-lt"/>
+                  <a:ea typeface="+mn-ea"/>
+                  <a:cs typeface="+mn-cs"/>
+                </a:defRPr>
+              </a:lvl7pPr>
+              <a:lvl8pPr marL="3200400" algn="l" defTabSz="457200" rtl="0" eaLnBrk="1" latinLnBrk="0" hangingPunct="1">
+                <a:defRPr sz="1800" kern="1200">
+                  <a:solidFill>
+                    <a:schemeClr val="tx1"/>
+                  </a:solidFill>
+                  <a:latin typeface="+mn-lt"/>
+                  <a:ea typeface="+mn-ea"/>
+                  <a:cs typeface="+mn-cs"/>
+                </a:defRPr>
+              </a:lvl8pPr>
+              <a:lvl9pPr marL="3657600" algn="l" defTabSz="457200" rtl="0" eaLnBrk="1" latinLnBrk="0" hangingPunct="1">
+                <a:defRPr sz="1800" kern="1200">
+                  <a:solidFill>
+                    <a:schemeClr val="tx1"/>
+                  </a:solidFill>
+                  <a:latin typeface="+mn-lt"/>
+                  <a:ea typeface="+mn-ea"/>
+                  <a:cs typeface="+mn-cs"/>
+                </a:defRPr>
+              </a:lvl9pPr>
+            </a:lstStyle>
+            <a:p>
+              <a:r>
+                <a:rPr lang="en-US" sz="2800" dirty="0">
+                  <a:latin typeface="Blackadder ITC" panose="04020505051007020D02" pitchFamily="82" charset="0"/>
+                </a:rPr>
+                <a:t>n</a:t>
+              </a:r>
+              <a:endParaRPr lang="sk-SK" sz="2800" dirty="0">
+                <a:latin typeface="Blackadder ITC" panose="04020505051007020D02" pitchFamily="82" charset="0"/>
+              </a:endParaRPr>
+            </a:p>
+          </p:txBody>
+        </p:sp>
+      </p:grpSp>
+      <mc:AlternateContent xmlns:mc="http://schemas.openxmlformats.org/markup-compatibility/2006">
+        <mc:Choice xmlns:a14="http://schemas.microsoft.com/office/drawing/2010/main" Requires="a14">
+          <p:sp>
+            <p:nvSpPr>
+              <p:cNvPr id="16" name="TextBox 15">
+                <a:extLst>
+                  <a:ext uri="{FF2B5EF4-FFF2-40B4-BE49-F238E27FC236}">
+                    <a16:creationId xmlns:a16="http://schemas.microsoft.com/office/drawing/2014/main" id="{18584B60-09B2-9CFA-E5B6-2949310DA2AF}"/>
+                  </a:ext>
+                </a:extLst>
+              </p:cNvPr>
+              <p:cNvSpPr txBox="1"/>
+              <p:nvPr/>
+            </p:nvSpPr>
+            <p:spPr>
+              <a:xfrm>
+                <a:off x="2959100" y="1712546"/>
+                <a:ext cx="6131935" cy="369332"/>
+              </a:xfrm>
+              <a:prstGeom prst="rect">
+                <a:avLst/>
+              </a:prstGeom>
+              <a:noFill/>
+            </p:spPr>
+            <p:txBody>
+              <a:bodyPr wrap="none" rtlCol="0">
+                <a:spAutoFit/>
+              </a:bodyPr>
+              <a:lstStyle/>
+              <a:p>
+                <a14:m>
+                  <m:oMath xmlns:m="http://schemas.openxmlformats.org/officeDocument/2006/math">
+                    <m:r>
+                      <a:rPr lang="en-US" b="0" i="1" smtClean="0">
+                        <a:latin typeface="Cambria Math" panose="02040503050406030204" pitchFamily="18" charset="0"/>
+                      </a:rPr>
+                      <m:t>𝑚</m:t>
+                    </m:r>
+                    <m:r>
+                      <a:rPr lang="en-US" b="0" i="1" smtClean="0">
+                        <a:latin typeface="Cambria Math" panose="02040503050406030204" pitchFamily="18" charset="0"/>
+                      </a:rPr>
+                      <m:t>×</m:t>
+                    </m:r>
+                    <m:r>
+                      <a:rPr lang="en-US" b="0" i="1" smtClean="0">
+                        <a:latin typeface="Cambria Math" panose="02040503050406030204" pitchFamily="18" charset="0"/>
+                      </a:rPr>
+                      <m:t>𝑛</m:t>
+                    </m:r>
+                  </m:oMath>
+                </a14:m>
+                <a:r>
+                  <a:rPr lang="en-US" dirty="0"/>
+                  <a:t> matrix in row-major and column-major </a:t>
+                </a:r>
+                <a:r>
+                  <a:rPr lang="en-US" i="1" dirty="0"/>
+                  <a:t>memory layout</a:t>
+                </a:r>
+              </a:p>
+            </p:txBody>
+          </p:sp>
+        </mc:Choice>
+        <mc:Fallback>
+          <p:sp>
+            <p:nvSpPr>
+              <p:cNvPr id="16" name="TextBox 15">
+                <a:extLst>
+                  <a:ext uri="{FF2B5EF4-FFF2-40B4-BE49-F238E27FC236}">
+                    <a16:creationId xmlns:a16="http://schemas.microsoft.com/office/drawing/2014/main" id="{18584B60-09B2-9CFA-E5B6-2949310DA2AF}"/>
+                  </a:ext>
+                </a:extLst>
+              </p:cNvPr>
+              <p:cNvSpPr txBox="1">
+                <a:spLocks noRot="1" noChangeAspect="1" noMove="1" noResize="1" noEditPoints="1" noAdjustHandles="1" noChangeArrowheads="1" noChangeShapeType="1" noTextEdit="1"/>
+              </p:cNvSpPr>
+              <p:nvPr/>
+            </p:nvSpPr>
+            <p:spPr>
+              <a:xfrm>
+                <a:off x="2959100" y="1712546"/>
+                <a:ext cx="6131935" cy="369332"/>
+              </a:xfrm>
+              <a:prstGeom prst="rect">
+                <a:avLst/>
+              </a:prstGeom>
+              <a:blipFill>
+                <a:blip r:embed="rId4"/>
+                <a:stretch>
+                  <a:fillRect t="-8197" r="-795" b="-26230"/>
+                </a:stretch>
+              </a:blipFill>
+            </p:spPr>
+            <p:txBody>
+              <a:bodyPr/>
+              <a:lstStyle/>
+              <a:p>
+                <a:r>
+                  <a:rPr lang="en-US">
+                    <a:noFill/>
+                  </a:rPr>
+                  <a:t> </a:t>
+                </a:r>
+              </a:p>
+            </p:txBody>
+          </p:sp>
+        </mc:Fallback>
+      </mc:AlternateContent>
+      <p:sp>
+        <p:nvSpPr>
+          <p:cNvPr id="20" name="TextBox 19">
+            <a:extLst>
+              <a:ext uri="{FF2B5EF4-FFF2-40B4-BE49-F238E27FC236}">
+                <a16:creationId xmlns:a16="http://schemas.microsoft.com/office/drawing/2014/main" id="{2272D78A-9733-44AD-5F40-F615D37E734A}"/>
+              </a:ext>
+            </a:extLst>
+          </p:cNvPr>
+          <p:cNvSpPr txBox="1"/>
+          <p:nvPr/>
+        </p:nvSpPr>
+        <p:spPr>
+          <a:xfrm>
+            <a:off x="4379598" y="4388276"/>
+            <a:ext cx="2870200" cy="634148"/>
+          </a:xfrm>
+          <a:prstGeom prst="rect">
+            <a:avLst/>
+          </a:prstGeom>
+          <a:noFill/>
+          <a:ln>
+            <a:solidFill>
+              <a:schemeClr val="tx1"/>
+            </a:solidFill>
+          </a:ln>
+        </p:spPr>
+        <p:txBody>
+          <a:bodyPr wrap="square">
+            <a:spAutoFit/>
           </a:bodyPr>
           <a:lstStyle/>
           <a:p>
+            <a:pPr>
+              <a:lnSpc>
+                <a:spcPct val="113095"/>
+              </a:lnSpc>
+              <a:buNone/>
+            </a:pPr>
+            <a:r>
+              <a:rPr lang="en-US" sz="1050" b="0" dirty="0">
+                <a:solidFill>
+                  <a:srgbClr val="AF00DB"/>
+                </a:solidFill>
+                <a:effectLst/>
+                <a:latin typeface="Fira Code" panose="020B0809050000020004" pitchFamily="49" charset="0"/>
+              </a:rPr>
+              <a:t>for</a:t>
+            </a:r>
+            <a:r>
+              <a:rPr lang="en-US" sz="1050" b="0" dirty="0">
+                <a:solidFill>
+                  <a:srgbClr val="000000"/>
+                </a:solidFill>
+                <a:effectLst/>
+                <a:latin typeface="Fira Code" panose="020B0809050000020004" pitchFamily="49" charset="0"/>
+              </a:rPr>
+              <a:t> </a:t>
+            </a:r>
+            <a:r>
+              <a:rPr lang="en-US" sz="1050" b="0" dirty="0" err="1">
+                <a:solidFill>
+                  <a:srgbClr val="001080"/>
+                </a:solidFill>
+                <a:effectLst/>
+                <a:latin typeface="Fira Code" panose="020B0809050000020004" pitchFamily="49" charset="0"/>
+              </a:rPr>
+              <a:t>i</a:t>
+            </a:r>
+            <a:r>
+              <a:rPr lang="en-US" sz="1050" b="0" dirty="0">
+                <a:solidFill>
+                  <a:srgbClr val="000000"/>
+                </a:solidFill>
+                <a:effectLst/>
+                <a:latin typeface="Fira Code" panose="020B0809050000020004" pitchFamily="49" charset="0"/>
+              </a:rPr>
+              <a:t> </a:t>
+            </a:r>
+            <a:r>
+              <a:rPr lang="en-US" sz="1050" b="0" dirty="0">
+                <a:solidFill>
+                  <a:srgbClr val="AF00DB"/>
+                </a:solidFill>
+                <a:effectLst/>
+                <a:latin typeface="Fira Code" panose="020B0809050000020004" pitchFamily="49" charset="0"/>
+              </a:rPr>
+              <a:t>in</a:t>
+            </a:r>
+            <a:r>
+              <a:rPr lang="en-US" sz="1050" b="0" dirty="0">
+                <a:solidFill>
+                  <a:srgbClr val="000000"/>
+                </a:solidFill>
+                <a:effectLst/>
+                <a:latin typeface="Fira Code" panose="020B0809050000020004" pitchFamily="49" charset="0"/>
+              </a:rPr>
+              <a:t> [</a:t>
+            </a:r>
+            <a:r>
+              <a:rPr lang="en-US" sz="1050" b="0" dirty="0">
+                <a:solidFill>
+                  <a:srgbClr val="098658"/>
+                </a:solidFill>
+                <a:effectLst/>
+                <a:latin typeface="Fira Code" panose="020B0809050000020004" pitchFamily="49" charset="0"/>
+              </a:rPr>
+              <a:t>0</a:t>
+            </a:r>
+            <a:r>
+              <a:rPr lang="en-US" sz="1050" b="0" dirty="0">
+                <a:solidFill>
+                  <a:srgbClr val="000000"/>
+                </a:solidFill>
+                <a:effectLst/>
+                <a:latin typeface="Fira Code" panose="020B0809050000020004" pitchFamily="49" charset="0"/>
+              </a:rPr>
+              <a:t>,... m - </a:t>
+            </a:r>
+            <a:r>
+              <a:rPr lang="en-US" sz="1050" b="0" dirty="0">
+                <a:solidFill>
+                  <a:srgbClr val="098658"/>
+                </a:solidFill>
+                <a:effectLst/>
+                <a:latin typeface="Fira Code" panose="020B0809050000020004" pitchFamily="49" charset="0"/>
+              </a:rPr>
+              <a:t>1</a:t>
+            </a:r>
+            <a:r>
+              <a:rPr lang="en-US" sz="1050" b="0" dirty="0">
+                <a:solidFill>
+                  <a:srgbClr val="000000"/>
+                </a:solidFill>
+                <a:effectLst/>
+                <a:latin typeface="Fira Code" panose="020B0809050000020004" pitchFamily="49" charset="0"/>
+              </a:rPr>
+              <a:t>]:</a:t>
+            </a:r>
+          </a:p>
+          <a:p>
+            <a:pPr>
+              <a:lnSpc>
+                <a:spcPct val="113095"/>
+              </a:lnSpc>
+              <a:buNone/>
+            </a:pPr>
+            <a:r>
+              <a:rPr lang="en-US" sz="1050" b="0" dirty="0">
+                <a:solidFill>
+                  <a:srgbClr val="000000"/>
+                </a:solidFill>
+                <a:effectLst/>
+                <a:latin typeface="Fira Code" panose="020B0809050000020004" pitchFamily="49" charset="0"/>
+              </a:rPr>
+              <a:t>    </a:t>
+            </a:r>
+            <a:r>
+              <a:rPr lang="en-US" sz="1050" b="0" dirty="0">
+                <a:solidFill>
+                  <a:srgbClr val="AF00DB"/>
+                </a:solidFill>
+                <a:effectLst/>
+                <a:latin typeface="Fira Code" panose="020B0809050000020004" pitchFamily="49" charset="0"/>
+              </a:rPr>
+              <a:t>for</a:t>
+            </a:r>
+            <a:r>
+              <a:rPr lang="en-US" sz="1050" b="0" dirty="0">
+                <a:solidFill>
+                  <a:srgbClr val="000000"/>
+                </a:solidFill>
+                <a:effectLst/>
+                <a:latin typeface="Fira Code" panose="020B0809050000020004" pitchFamily="49" charset="0"/>
+              </a:rPr>
+              <a:t> </a:t>
+            </a:r>
+            <a:r>
+              <a:rPr lang="en-US" sz="1050" b="0" dirty="0">
+                <a:solidFill>
+                  <a:srgbClr val="001080"/>
+                </a:solidFill>
+                <a:effectLst/>
+                <a:latin typeface="Fira Code" panose="020B0809050000020004" pitchFamily="49" charset="0"/>
+              </a:rPr>
+              <a:t>j</a:t>
+            </a:r>
+            <a:r>
+              <a:rPr lang="en-US" sz="1050" b="0" dirty="0">
+                <a:solidFill>
+                  <a:srgbClr val="000000"/>
+                </a:solidFill>
+                <a:effectLst/>
+                <a:latin typeface="Fira Code" panose="020B0809050000020004" pitchFamily="49" charset="0"/>
+              </a:rPr>
+              <a:t> </a:t>
+            </a:r>
+            <a:r>
+              <a:rPr lang="en-US" sz="1050" b="0" dirty="0">
+                <a:solidFill>
+                  <a:srgbClr val="AF00DB"/>
+                </a:solidFill>
+                <a:effectLst/>
+                <a:latin typeface="Fira Code" panose="020B0809050000020004" pitchFamily="49" charset="0"/>
+              </a:rPr>
+              <a:t>in</a:t>
+            </a:r>
+            <a:r>
+              <a:rPr lang="en-US" sz="1050" b="0" dirty="0">
+                <a:solidFill>
+                  <a:srgbClr val="000000"/>
+                </a:solidFill>
+                <a:effectLst/>
+                <a:latin typeface="Fira Code" panose="020B0809050000020004" pitchFamily="49" charset="0"/>
+              </a:rPr>
+              <a:t> [</a:t>
+            </a:r>
+            <a:r>
+              <a:rPr lang="en-US" sz="1050" b="0" dirty="0">
+                <a:solidFill>
+                  <a:srgbClr val="098658"/>
+                </a:solidFill>
+                <a:effectLst/>
+                <a:latin typeface="Fira Code" panose="020B0809050000020004" pitchFamily="49" charset="0"/>
+              </a:rPr>
+              <a:t>0</a:t>
+            </a:r>
+            <a:r>
+              <a:rPr lang="en-US" sz="1050" b="0" dirty="0">
+                <a:solidFill>
+                  <a:srgbClr val="000000"/>
+                </a:solidFill>
+                <a:effectLst/>
+                <a:latin typeface="Fira Code" panose="020B0809050000020004" pitchFamily="49" charset="0"/>
+              </a:rPr>
+              <a:t>,... n - </a:t>
+            </a:r>
+            <a:r>
+              <a:rPr lang="en-US" sz="1050" b="0" dirty="0">
+                <a:solidFill>
+                  <a:srgbClr val="098658"/>
+                </a:solidFill>
+                <a:effectLst/>
+                <a:latin typeface="Fira Code" panose="020B0809050000020004" pitchFamily="49" charset="0"/>
+              </a:rPr>
+              <a:t>1</a:t>
+            </a:r>
+            <a:r>
+              <a:rPr lang="en-US" sz="1050" b="0" dirty="0">
+                <a:solidFill>
+                  <a:srgbClr val="000000"/>
+                </a:solidFill>
+                <a:effectLst/>
+                <a:latin typeface="Fira Code" panose="020B0809050000020004" pitchFamily="49" charset="0"/>
+              </a:rPr>
+              <a:t>]:</a:t>
+            </a:r>
+          </a:p>
+          <a:p>
+            <a:pPr>
+              <a:lnSpc>
+                <a:spcPct val="113095"/>
+              </a:lnSpc>
+              <a:buNone/>
+            </a:pPr>
+            <a:r>
+              <a:rPr lang="en-US" sz="1050" b="0" dirty="0">
+                <a:solidFill>
+                  <a:srgbClr val="000000"/>
+                </a:solidFill>
+                <a:effectLst/>
+                <a:latin typeface="Fira Code" panose="020B0809050000020004" pitchFamily="49" charset="0"/>
+              </a:rPr>
+              <a:t>        matrix[</a:t>
+            </a:r>
+            <a:r>
+              <a:rPr lang="en-US" sz="1050" b="0" dirty="0" err="1">
+                <a:solidFill>
+                  <a:srgbClr val="001080"/>
+                </a:solidFill>
+                <a:effectLst/>
+                <a:latin typeface="Fira Code" panose="020B0809050000020004" pitchFamily="49" charset="0"/>
+              </a:rPr>
+              <a:t>i</a:t>
+            </a:r>
+            <a:r>
+              <a:rPr lang="en-US" sz="1050" b="0" dirty="0">
+                <a:solidFill>
+                  <a:srgbClr val="000000"/>
+                </a:solidFill>
+                <a:effectLst/>
+                <a:latin typeface="Fira Code" panose="020B0809050000020004" pitchFamily="49" charset="0"/>
+              </a:rPr>
+              <a:t>, </a:t>
+            </a:r>
+            <a:r>
+              <a:rPr lang="en-US" sz="1050" b="0" dirty="0">
+                <a:solidFill>
+                  <a:srgbClr val="001080"/>
+                </a:solidFill>
+                <a:effectLst/>
+                <a:latin typeface="Fira Code" panose="020B0809050000020004" pitchFamily="49" charset="0"/>
+              </a:rPr>
+              <a:t>j</a:t>
+            </a:r>
+            <a:r>
+              <a:rPr lang="en-US" sz="1050" b="0" dirty="0">
+                <a:solidFill>
+                  <a:srgbClr val="000000"/>
+                </a:solidFill>
+                <a:effectLst/>
+                <a:latin typeface="Fira Code" panose="020B0809050000020004" pitchFamily="49" charset="0"/>
+              </a:rPr>
+              <a:t>] = </a:t>
+            </a:r>
+            <a:r>
+              <a:rPr lang="en-US" sz="1050" b="0" dirty="0" err="1">
+                <a:solidFill>
+                  <a:srgbClr val="000000"/>
+                </a:solidFill>
+                <a:effectLst/>
+                <a:latin typeface="Fira Code" panose="020B0809050000020004" pitchFamily="49" charset="0"/>
+              </a:rPr>
+              <a:t>init</a:t>
+            </a:r>
+            <a:r>
+              <a:rPr lang="en-US" sz="1050" b="0" dirty="0">
+                <a:solidFill>
+                  <a:srgbClr val="000000"/>
+                </a:solidFill>
+                <a:effectLst/>
+                <a:latin typeface="Fira Code" panose="020B0809050000020004" pitchFamily="49" charset="0"/>
+              </a:rPr>
+              <a:t>(</a:t>
+            </a:r>
+            <a:r>
+              <a:rPr lang="en-US" sz="1050" b="0" dirty="0" err="1">
+                <a:solidFill>
+                  <a:srgbClr val="001080"/>
+                </a:solidFill>
+                <a:effectLst/>
+                <a:latin typeface="Fira Code" panose="020B0809050000020004" pitchFamily="49" charset="0"/>
+              </a:rPr>
+              <a:t>i</a:t>
+            </a:r>
+            <a:r>
+              <a:rPr lang="en-US" sz="1050" b="0" dirty="0">
+                <a:solidFill>
+                  <a:srgbClr val="000000"/>
+                </a:solidFill>
+                <a:effectLst/>
+                <a:latin typeface="Fira Code" panose="020B0809050000020004" pitchFamily="49" charset="0"/>
+              </a:rPr>
+              <a:t>, </a:t>
+            </a:r>
+            <a:r>
+              <a:rPr lang="en-US" sz="1050" b="0" dirty="0">
+                <a:solidFill>
+                  <a:srgbClr val="001080"/>
+                </a:solidFill>
+                <a:effectLst/>
+                <a:latin typeface="Fira Code" panose="020B0809050000020004" pitchFamily="49" charset="0"/>
+              </a:rPr>
+              <a:t>j</a:t>
+            </a:r>
+            <a:r>
+              <a:rPr lang="en-US" sz="1050" b="0" dirty="0">
+                <a:solidFill>
+                  <a:srgbClr val="000000"/>
+                </a:solidFill>
+                <a:effectLst/>
+                <a:latin typeface="Fira Code" panose="020B0809050000020004" pitchFamily="49" charset="0"/>
+              </a:rPr>
+              <a:t>)</a:t>
+            </a:r>
+          </a:p>
+        </p:txBody>
+      </p:sp>
+      <p:sp>
+        <p:nvSpPr>
+          <p:cNvPr id="21" name="TextBox 20">
+            <a:extLst>
+              <a:ext uri="{FF2B5EF4-FFF2-40B4-BE49-F238E27FC236}">
+                <a16:creationId xmlns:a16="http://schemas.microsoft.com/office/drawing/2014/main" id="{0A8B2928-1B7B-BAA4-93AA-EE7D017C718B}"/>
+              </a:ext>
+            </a:extLst>
+          </p:cNvPr>
+          <p:cNvSpPr txBox="1"/>
+          <p:nvPr/>
+        </p:nvSpPr>
+        <p:spPr>
+          <a:xfrm>
+            <a:off x="4727381" y="3997086"/>
+            <a:ext cx="2174634" cy="369332"/>
+          </a:xfrm>
+          <a:prstGeom prst="rect">
+            <a:avLst/>
+          </a:prstGeom>
+          <a:noFill/>
+        </p:spPr>
+        <p:txBody>
+          <a:bodyPr wrap="none" rtlCol="0">
+            <a:spAutoFit/>
+          </a:bodyPr>
+          <a:lstStyle/>
+          <a:p>
             <a:r>
               <a:rPr lang="en-US" dirty="0"/>
-              <a:t>Automatization and simplification</a:t>
-            </a:r>
-            <a:endParaRPr lang="en-US" dirty="0">
-              <a:solidFill>
-                <a:schemeClr val="accent5">
-                  <a:lumMod val="75000"/>
-                </a:schemeClr>
-              </a:solidFill>
-            </a:endParaRPr>
-          </a:p>
-        </p:txBody>
-      </p:sp>
-      <p:sp>
-        <p:nvSpPr>
-          <p:cNvPr id="3" name="Content Placeholder 2">
-            <a:extLst>
-              <a:ext uri="{FF2B5EF4-FFF2-40B4-BE49-F238E27FC236}">
-                <a16:creationId xmlns:a16="http://schemas.microsoft.com/office/drawing/2014/main" id="{E0A72CA4-DE0C-C168-CA4C-3E1D449376E7}"/>
-              </a:ext>
-            </a:extLst>
-          </p:cNvPr>
-          <p:cNvSpPr>
-            <a:spLocks noGrp="1"/>
-          </p:cNvSpPr>
-          <p:nvPr>
-            <p:ph idx="1"/>
-          </p:nvPr>
-        </p:nvSpPr>
-        <p:spPr/>
-        <p:txBody>
-          <a:bodyPr/>
-          <a:lstStyle/>
-          <a:p>
-            <a:pPr marL="514350" indent="-514350">
-              <a:buFont typeface="+mj-lt"/>
-              <a:buAutoNum type="arabicPeriod"/>
-            </a:pPr>
-            <a:r>
-              <a:rPr lang="en-US" dirty="0"/>
-              <a:t>Abstraction with swappable building blocks</a:t>
-            </a:r>
-          </a:p>
-          <a:p>
-            <a:pPr lvl="1"/>
-            <a:r>
-              <a:rPr lang="en-US" dirty="0"/>
-              <a:t>Autotuning chooses the bb</a:t>
-            </a:r>
-          </a:p>
-          <a:p>
-            <a:pPr lvl="1"/>
-            <a:r>
-              <a:rPr lang="en-US" dirty="0"/>
-              <a:t>Layout-agnosticism; traversal-agnosticism</a:t>
-            </a:r>
-          </a:p>
-          <a:p>
-            <a:pPr marL="514350" indent="-514350">
-              <a:buFont typeface="+mj-lt"/>
-              <a:buAutoNum type="arabicPeriod"/>
-            </a:pPr>
-            <a:r>
-              <a:rPr lang="en-US" dirty="0"/>
-              <a:t>LLMs</a:t>
-            </a:r>
-          </a:p>
-          <a:p>
-            <a:pPr lvl="1"/>
-            <a:r>
-              <a:rPr lang="en-US" dirty="0"/>
-              <a:t>First phase: the API is fixed, AI can do the magic</a:t>
-            </a:r>
-          </a:p>
-          <a:p>
-            <a:pPr lvl="1"/>
-            <a:r>
-              <a:rPr lang="en-US" dirty="0"/>
-              <a:t>Second phase: how to improve the magic? Do the abstractions help?</a:t>
-            </a:r>
-          </a:p>
-          <a:p>
-            <a:pPr lvl="1"/>
-            <a:endParaRPr lang="en-US" dirty="0"/>
+              <a:t>A row-wise </a:t>
+            </a:r>
+            <a:r>
+              <a:rPr lang="en-US" i="1" dirty="0"/>
+              <a:t>traversal</a:t>
+            </a:r>
           </a:p>
         </p:txBody>
       </p:sp>
     </p:spTree>
     <p:extLst>
       <p:ext uri="{BB962C8B-B14F-4D97-AF65-F5344CB8AC3E}">
-        <p14:creationId xmlns:p14="http://schemas.microsoft.com/office/powerpoint/2010/main" val="269399300"/>
+        <p14:creationId xmlns:p14="http://schemas.microsoft.com/office/powerpoint/2010/main" val="2636511652"/>
       </p:ext>
     </p:extLst>
   </p:cSld>
@@ -5344,7 +8078,7 @@
           <p:cNvPr id="2" name="Title 1">
             <a:extLst>
               <a:ext uri="{FF2B5EF4-FFF2-40B4-BE49-F238E27FC236}">
-                <a16:creationId xmlns:a16="http://schemas.microsoft.com/office/drawing/2014/main" id="{4B486C2A-DE9D-7966-AEFE-4393C57CF5AE}"/>
+                <a16:creationId xmlns:a16="http://schemas.microsoft.com/office/drawing/2014/main" id="{9056C07C-65B7-F09E-1FC3-13A2803F54CE}"/>
               </a:ext>
             </a:extLst>
           </p:cNvPr>
@@ -5353,34 +8087,6 @@
           </p:cNvSpPr>
           <p:nvPr>
             <p:ph type="title"/>
-          </p:nvPr>
-        </p:nvSpPr>
-        <p:spPr/>
-        <p:txBody>
-          <a:bodyPr/>
-          <a:lstStyle/>
-          <a:p>
-            <a:r>
-              <a:rPr lang="en-US" dirty="0"/>
-              <a:t>Small step: ?? layout agnostic design</a:t>
-            </a:r>
-          </a:p>
-        </p:txBody>
-      </p:sp>
-      <p:sp>
-        <p:nvSpPr>
-          <p:cNvPr id="3" name="Content Placeholder 2">
-            <a:extLst>
-              <a:ext uri="{FF2B5EF4-FFF2-40B4-BE49-F238E27FC236}">
-                <a16:creationId xmlns:a16="http://schemas.microsoft.com/office/drawing/2014/main" id="{003AA056-645F-427D-52A3-1F81FFA685BA}"/>
-              </a:ext>
-            </a:extLst>
-          </p:cNvPr>
-          <p:cNvSpPr>
-            <a:spLocks noGrp="1"/>
-          </p:cNvSpPr>
-          <p:nvPr>
-            <p:ph idx="1"/>
           </p:nvPr>
         </p:nvSpPr>
         <p:spPr/>
@@ -5391,173 +8097,111 @@
           <a:lstStyle/>
           <a:p>
             <a:r>
-              <a:rPr lang="en-US" dirty="0"/>
-              <a:t>For a fixed </a:t>
-            </a:r>
-            <a:r>
-              <a:rPr lang="en-US" dirty="0" err="1"/>
-              <a:t>algorithm+traversal</a:t>
-            </a:r>
-            <a:r>
-              <a:rPr lang="en-US" dirty="0"/>
-              <a:t>, allow different layouts</a:t>
+              <a:rPr lang="en-US" noProof="0" dirty="0"/>
+              <a:t>Automatization and simplification</a:t>
+            </a:r>
+            <a:endParaRPr lang="en-US" noProof="0" dirty="0">
+              <a:solidFill>
+                <a:schemeClr val="accent5">
+                  <a:lumMod val="75000"/>
+                </a:schemeClr>
+              </a:solidFill>
+            </a:endParaRPr>
+          </a:p>
+        </p:txBody>
+      </p:sp>
+      <p:sp>
+        <p:nvSpPr>
+          <p:cNvPr id="3" name="Content Placeholder 2">
+            <a:extLst>
+              <a:ext uri="{FF2B5EF4-FFF2-40B4-BE49-F238E27FC236}">
+                <a16:creationId xmlns:a16="http://schemas.microsoft.com/office/drawing/2014/main" id="{E0A72CA4-DE0C-C168-CA4C-3E1D449376E7}"/>
+              </a:ext>
+            </a:extLst>
+          </p:cNvPr>
+          <p:cNvSpPr>
+            <a:spLocks noGrp="1"/>
+          </p:cNvSpPr>
+          <p:nvPr>
+            <p:ph idx="1"/>
+          </p:nvPr>
+        </p:nvSpPr>
+        <p:spPr/>
+        <p:txBody>
+          <a:bodyPr/>
+          <a:lstStyle/>
+          <a:p>
+            <a:pPr marL="514350" indent="-514350">
+              <a:buFont typeface="+mj-lt"/>
+              <a:buAutoNum type="arabicPeriod"/>
+            </a:pPr>
+            <a:r>
+              <a:rPr lang="en-US" noProof="0" dirty="0"/>
+              <a:t>Abstraction with swappable building blocks</a:t>
             </a:r>
           </a:p>
           <a:p>
             <a:pPr lvl="1"/>
             <a:r>
-              <a:rPr lang="en-US" dirty="0"/>
-              <a:t>Not entirely new idea: </a:t>
-            </a:r>
-            <a:r>
-              <a:rPr lang="en-US" dirty="0" err="1"/>
-              <a:t>Kokkoss</a:t>
-            </a:r>
-            <a:r>
-              <a:rPr lang="en-US" dirty="0"/>
-              <a:t>::View, </a:t>
-            </a:r>
-            <a:r>
-              <a:rPr lang="en-US" dirty="0" err="1"/>
-              <a:t>numpy.ndarray</a:t>
-            </a:r>
-            <a:r>
-              <a:rPr lang="en-US" dirty="0"/>
-              <a:t>, many others</a:t>
-            </a:r>
-          </a:p>
-          <a:p>
-            <a:r>
-              <a:rPr lang="en-US" dirty="0" err="1"/>
-              <a:t>Noarr</a:t>
-            </a:r>
-            <a:r>
-              <a:rPr lang="en-US" dirty="0"/>
-              <a:t> Structures</a:t>
+              <a:rPr lang="en-US" noProof="0" dirty="0"/>
+              <a:t>Autotuning chooses the bb</a:t>
             </a:r>
           </a:p>
           <a:p>
             <a:pPr lvl="1"/>
             <a:r>
-              <a:rPr lang="en-US" dirty="0"/>
-              <a:t>Abstraction for building &amp; transforming layouts</a:t>
-            </a:r>
-          </a:p>
-          <a:p>
-            <a:pPr lvl="2"/>
-            <a:r>
-              <a:rPr lang="en-US" dirty="0"/>
-              <a:t>Separated from memory management </a:t>
-            </a:r>
-            <a:r>
-              <a:rPr lang="en-US" dirty="0">
-                <a:sym typeface="Wingdings" panose="05000000000000000000" pitchFamily="2" charset="2"/>
-              </a:rPr>
-              <a:t> can be paired with </a:t>
-            </a:r>
-            <a:r>
-              <a:rPr lang="en-US" dirty="0" err="1">
-                <a:sym typeface="Wingdings" panose="05000000000000000000" pitchFamily="2" charset="2"/>
-              </a:rPr>
-              <a:t>mmap</a:t>
-            </a:r>
-            <a:r>
-              <a:rPr lang="en-US" dirty="0">
-                <a:sym typeface="Wingdings" panose="05000000000000000000" pitchFamily="2" charset="2"/>
-              </a:rPr>
-              <a:t>, __shared__</a:t>
-            </a:r>
+              <a:rPr lang="en-US" noProof="0" dirty="0"/>
+              <a:t>Layout-agnosticism; traversal-agnosticism</a:t>
+            </a:r>
+          </a:p>
+          <a:p>
+            <a:pPr marL="514350" indent="-514350">
+              <a:buFont typeface="+mj-lt"/>
+              <a:buAutoNum type="arabicPeriod"/>
+            </a:pPr>
+            <a:endParaRPr lang="en-US" noProof="0" dirty="0"/>
+          </a:p>
+          <a:p>
+            <a:pPr marL="514350" indent="-514350">
+              <a:buFont typeface="+mj-lt"/>
+              <a:buAutoNum type="arabicPeriod"/>
+            </a:pPr>
             <a:endParaRPr lang="en-US" dirty="0"/>
           </a:p>
           <a:p>
+            <a:pPr marL="514350" indent="-514350">
+              <a:buFont typeface="+mj-lt"/>
+              <a:buAutoNum type="arabicPeriod"/>
+            </a:pPr>
+            <a:r>
+              <a:rPr lang="en-US" noProof="0" dirty="0"/>
+              <a:t>LLMs</a:t>
+            </a:r>
+          </a:p>
+          <a:p>
             <a:pPr lvl="1"/>
             <a:r>
-              <a:rPr lang="en-US" dirty="0"/>
-              <a:t>Effortless static extents </a:t>
-            </a:r>
-            <a:r>
-              <a:rPr lang="en-US" dirty="0">
-                <a:sym typeface="Wingdings" panose="05000000000000000000" pitchFamily="2" charset="2"/>
-              </a:rPr>
-              <a:t> better compiler optimizations, faster</a:t>
-            </a:r>
-          </a:p>
-          <a:p>
-            <a:pPr lvl="2"/>
-            <a:r>
-              <a:rPr lang="en-US" dirty="0"/>
-              <a:t>Static parameters encoded in type (no overhead until used)</a:t>
+              <a:rPr lang="en-US" noProof="0" dirty="0"/>
+              <a:t>First phase: the API is fixed, AI can do the magic</a:t>
             </a:r>
           </a:p>
           <a:p>
             <a:pPr lvl="1"/>
             <a:r>
-              <a:rPr lang="en-US" dirty="0"/>
-              <a:t>Based on functional composition algebra </a:t>
-            </a:r>
-            <a:r>
-              <a:rPr lang="en-US" dirty="0">
-                <a:sym typeface="Wingdings" panose="05000000000000000000" pitchFamily="2" charset="2"/>
-              </a:rPr>
-              <a:t> easily extensible/reusable</a:t>
-            </a:r>
-            <a:endParaRPr lang="en-US" dirty="0"/>
-          </a:p>
-          <a:p>
-            <a:pPr lvl="2"/>
-            <a:r>
-              <a:rPr lang="en-US" dirty="0"/>
-              <a:t>Unlike std::</a:t>
-            </a:r>
-            <a:r>
-              <a:rPr lang="en-US" dirty="0" err="1"/>
-              <a:t>mdspan</a:t>
-            </a:r>
-            <a:r>
-              <a:rPr lang="en-US" dirty="0"/>
-              <a:t> or </a:t>
-            </a:r>
-            <a:r>
-              <a:rPr lang="en-US" dirty="0" err="1"/>
-              <a:t>Kokkos</a:t>
-            </a:r>
-            <a:r>
-              <a:rPr lang="en-US" dirty="0"/>
-              <a:t>::View, others</a:t>
-            </a:r>
-          </a:p>
-          <a:p>
-            <a:pPr lvl="2"/>
-            <a:r>
-              <a:rPr lang="en-US" dirty="0"/>
-              <a:t>Later adopted by CUTLASS </a:t>
-            </a:r>
-            <a:r>
-              <a:rPr lang="en-US" dirty="0" err="1"/>
-              <a:t>CUTe</a:t>
-            </a:r>
-            <a:endParaRPr lang="en-US" dirty="0"/>
+              <a:rPr lang="en-US" noProof="0" dirty="0"/>
+              <a:t>Second phase: how to improve the magic? Do the abstractions help?</a:t>
+            </a:r>
           </a:p>
           <a:p>
             <a:pPr lvl="1"/>
-            <a:r>
-              <a:rPr lang="en-US" dirty="0"/>
-              <a:t>Named dimensions </a:t>
-            </a:r>
-            <a:r>
-              <a:rPr lang="en-US" dirty="0">
-                <a:sym typeface="Wingdings" panose="05000000000000000000" pitchFamily="2" charset="2"/>
-              </a:rPr>
-              <a:t> reasonable API</a:t>
-            </a:r>
-            <a:endParaRPr lang="en-US" dirty="0"/>
+            <a:endParaRPr lang="en-US" noProof="0" dirty="0"/>
           </a:p>
         </p:txBody>
       </p:sp>
     </p:spTree>
     <p:extLst>
       <p:ext uri="{BB962C8B-B14F-4D97-AF65-F5344CB8AC3E}">
-        <p14:creationId xmlns:p14="http://schemas.microsoft.com/office/powerpoint/2010/main" val="3515881039"/>
+        <p14:creationId xmlns:p14="http://schemas.microsoft.com/office/powerpoint/2010/main" val="269399300"/>
       </p:ext>
     </p:extLst>
   </p:cSld>
@@ -5568,7 +8212,7 @@
 </file>
 
 <file path=ppt/slides/slide5.xml><?xml version="1.0" encoding="utf-8"?>
-<p:sld xmlns:a="http://schemas.openxmlformats.org/drawingml/2006/main" xmlns:r="http://schemas.openxmlformats.org/officeDocument/2006/relationships" xmlns:p="http://schemas.openxmlformats.org/presentationml/2006/main">
+<p:sld xmlns:a="http://schemas.openxmlformats.org/drawingml/2006/main" xmlns:r="http://schemas.openxmlformats.org/officeDocument/2006/relationships" xmlns:p="http://schemas.openxmlformats.org/presentationml/2006/main" show="0">
   <p:cSld>
     <p:spTree>
       <p:nvGrpSpPr>
@@ -5589,7 +8233,7 @@
           <p:cNvPr id="2" name="Title 1">
             <a:extLst>
               <a:ext uri="{FF2B5EF4-FFF2-40B4-BE49-F238E27FC236}">
-                <a16:creationId xmlns:a16="http://schemas.microsoft.com/office/drawing/2014/main" id="{BC500110-1A1D-46C5-865E-8C33FFF09E26}"/>
+                <a16:creationId xmlns:a16="http://schemas.microsoft.com/office/drawing/2014/main" id="{4B486C2A-DE9D-7966-AEFE-4393C57CF5AE}"/>
               </a:ext>
             </a:extLst>
           </p:cNvPr>
@@ -5606,8 +8250,8 @@
           <a:lstStyle/>
           <a:p>
             <a:r>
-              <a:rPr lang="en-US" dirty="0"/>
-              <a:t>Layout-agnostic design</a:t>
+              <a:rPr lang="en-US" noProof="0" dirty="0"/>
+              <a:t>Small step: ?? layout agnostic design</a:t>
             </a:r>
           </a:p>
         </p:txBody>
@@ -5617,7 +8261,7 @@
           <p:cNvPr id="3" name="Content Placeholder 2">
             <a:extLst>
               <a:ext uri="{FF2B5EF4-FFF2-40B4-BE49-F238E27FC236}">
-                <a16:creationId xmlns:a16="http://schemas.microsoft.com/office/drawing/2014/main" id="{BC98E21C-63B1-8313-A72D-D4A24D26FBA1}"/>
+                <a16:creationId xmlns:a16="http://schemas.microsoft.com/office/drawing/2014/main" id="{003AA056-645F-427D-52A3-1F81FFA685BA}"/>
               </a:ext>
             </a:extLst>
           </p:cNvPr>
@@ -5630,20 +8274,179 @@
         </p:nvSpPr>
         <p:spPr/>
         <p:txBody>
-          <a:bodyPr/>
-          <a:lstStyle/>
-          <a:p>
-            <a:r>
-              <a:rPr lang="en-US" dirty="0"/>
-              <a:t>Algorithm with explicit offset calculations × Algorithm with logical indices</a:t>
-            </a:r>
+          <a:bodyPr>
+            <a:normAutofit/>
+          </a:bodyPr>
+          <a:lstStyle/>
+          <a:p>
+            <a:r>
+              <a:rPr lang="en-US" noProof="0" dirty="0"/>
+              <a:t>For a fixed </a:t>
+            </a:r>
+            <a:r>
+              <a:rPr lang="en-US" noProof="0" dirty="0" err="1"/>
+              <a:t>algorithm+traversal</a:t>
+            </a:r>
+            <a:r>
+              <a:rPr lang="en-US" noProof="0" dirty="0"/>
+              <a:t>, allow different layouts</a:t>
+            </a:r>
+          </a:p>
+          <a:p>
+            <a:pPr lvl="1"/>
+            <a:r>
+              <a:rPr lang="en-US" noProof="0" dirty="0"/>
+              <a:t>Not entirely new idea: </a:t>
+            </a:r>
+            <a:r>
+              <a:rPr lang="en-US" noProof="0" dirty="0" err="1"/>
+              <a:t>Kokkoss</a:t>
+            </a:r>
+            <a:r>
+              <a:rPr lang="en-US" noProof="0" dirty="0"/>
+              <a:t>::View, </a:t>
+            </a:r>
+            <a:r>
+              <a:rPr lang="en-US" noProof="0" dirty="0" err="1"/>
+              <a:t>numpy.ndarray</a:t>
+            </a:r>
+            <a:r>
+              <a:rPr lang="en-US" noProof="0" dirty="0"/>
+              <a:t>, many others</a:t>
+            </a:r>
+          </a:p>
+          <a:p>
+            <a:r>
+              <a:rPr lang="en-US" noProof="0" dirty="0" err="1"/>
+              <a:t>Noarr</a:t>
+            </a:r>
+            <a:r>
+              <a:rPr lang="en-US" noProof="0" dirty="0"/>
+              <a:t> Structures</a:t>
+            </a:r>
+          </a:p>
+          <a:p>
+            <a:pPr lvl="1"/>
+            <a:r>
+              <a:rPr lang="en-US" noProof="0" dirty="0"/>
+              <a:t>Abstraction for building &amp; transforming layouts</a:t>
+            </a:r>
+          </a:p>
+          <a:p>
+            <a:pPr lvl="2"/>
+            <a:r>
+              <a:rPr lang="en-US" noProof="0" dirty="0"/>
+              <a:t>Separated from memory management </a:t>
+            </a:r>
+            <a:r>
+              <a:rPr lang="en-US" noProof="0" dirty="0">
+                <a:sym typeface="Wingdings" panose="05000000000000000000" pitchFamily="2" charset="2"/>
+              </a:rPr>
+              <a:t> can be paired with </a:t>
+            </a:r>
+            <a:r>
+              <a:rPr lang="en-US" noProof="0" dirty="0" err="1">
+                <a:sym typeface="Wingdings" panose="05000000000000000000" pitchFamily="2" charset="2"/>
+              </a:rPr>
+              <a:t>mmap</a:t>
+            </a:r>
+            <a:r>
+              <a:rPr lang="en-US" noProof="0" dirty="0">
+                <a:sym typeface="Wingdings" panose="05000000000000000000" pitchFamily="2" charset="2"/>
+              </a:rPr>
+              <a:t>, __shared__</a:t>
+            </a:r>
+            <a:endParaRPr lang="en-US" noProof="0" dirty="0"/>
+          </a:p>
+          <a:p>
+            <a:pPr lvl="1"/>
+            <a:r>
+              <a:rPr lang="en-US" noProof="0" dirty="0"/>
+              <a:t>Effortless static extents </a:t>
+            </a:r>
+            <a:r>
+              <a:rPr lang="en-US" noProof="0" dirty="0">
+                <a:sym typeface="Wingdings" panose="05000000000000000000" pitchFamily="2" charset="2"/>
+              </a:rPr>
+              <a:t> better compiler optimizations, faster</a:t>
+            </a:r>
+          </a:p>
+          <a:p>
+            <a:pPr lvl="2"/>
+            <a:r>
+              <a:rPr lang="en-US" noProof="0" dirty="0"/>
+              <a:t>Static parameters encoded in type (no overhead until used)</a:t>
+            </a:r>
+          </a:p>
+          <a:p>
+            <a:pPr lvl="1"/>
+            <a:r>
+              <a:rPr lang="en-US" noProof="0" dirty="0"/>
+              <a:t>Based on functional composition algebra </a:t>
+            </a:r>
+            <a:r>
+              <a:rPr lang="en-US" noProof="0" dirty="0">
+                <a:sym typeface="Wingdings" panose="05000000000000000000" pitchFamily="2" charset="2"/>
+              </a:rPr>
+              <a:t> easily extensible/reusable</a:t>
+            </a:r>
+            <a:endParaRPr lang="en-US" noProof="0" dirty="0"/>
+          </a:p>
+          <a:p>
+            <a:pPr lvl="2"/>
+            <a:r>
+              <a:rPr lang="en-US" noProof="0" dirty="0"/>
+              <a:t>Unlike std::</a:t>
+            </a:r>
+            <a:r>
+              <a:rPr lang="en-US" noProof="0" dirty="0" err="1"/>
+              <a:t>mdspan</a:t>
+            </a:r>
+            <a:r>
+              <a:rPr lang="en-US" noProof="0" dirty="0"/>
+              <a:t> or </a:t>
+            </a:r>
+            <a:r>
+              <a:rPr lang="en-US" noProof="0" dirty="0" err="1"/>
+              <a:t>Kokkos</a:t>
+            </a:r>
+            <a:r>
+              <a:rPr lang="en-US" noProof="0" dirty="0"/>
+              <a:t>::View, others</a:t>
+            </a:r>
+          </a:p>
+          <a:p>
+            <a:pPr lvl="2"/>
+            <a:r>
+              <a:rPr lang="en-US" noProof="0" dirty="0"/>
+              <a:t>Later adopted by CUTLASS </a:t>
+            </a:r>
+            <a:r>
+              <a:rPr lang="en-US" noProof="0" dirty="0" err="1"/>
+              <a:t>CUTe</a:t>
+            </a:r>
+            <a:endParaRPr lang="en-US" noProof="0" dirty="0"/>
+          </a:p>
+          <a:p>
+            <a:pPr lvl="1"/>
+            <a:r>
+              <a:rPr lang="en-US" noProof="0" dirty="0"/>
+              <a:t>Named dimensions </a:t>
+            </a:r>
+            <a:r>
+              <a:rPr lang="en-US" noProof="0" dirty="0">
+                <a:sym typeface="Wingdings" panose="05000000000000000000" pitchFamily="2" charset="2"/>
+              </a:rPr>
+              <a:t> reasonable API</a:t>
+            </a:r>
+            <a:endParaRPr lang="en-US" noProof="0" dirty="0"/>
           </a:p>
         </p:txBody>
       </p:sp>
     </p:spTree>
     <p:extLst>
       <p:ext uri="{BB962C8B-B14F-4D97-AF65-F5344CB8AC3E}">
-        <p14:creationId xmlns:p14="http://schemas.microsoft.com/office/powerpoint/2010/main" val="3503651732"/>
+        <p14:creationId xmlns:p14="http://schemas.microsoft.com/office/powerpoint/2010/main" val="3515881039"/>
       </p:ext>
     </p:extLst>
   </p:cSld>
@@ -5675,7 +8478,7 @@
           <p:cNvPr id="2" name="Title 1">
             <a:extLst>
               <a:ext uri="{FF2B5EF4-FFF2-40B4-BE49-F238E27FC236}">
-                <a16:creationId xmlns:a16="http://schemas.microsoft.com/office/drawing/2014/main" id="{C266F341-5BBA-043E-301E-387913EC1471}"/>
+                <a16:creationId xmlns:a16="http://schemas.microsoft.com/office/drawing/2014/main" id="{5D32D1F9-8796-FADC-F301-4DC1CDABBDE5}"/>
               </a:ext>
             </a:extLst>
           </p:cNvPr>
@@ -5691,10 +8494,7 @@
           <a:bodyPr/>
           <a:lstStyle/>
           <a:p>
-            <a:r>
-              <a:rPr lang="en-US" dirty="0"/>
-              <a:t>?? Traversal agnostic design</a:t>
-            </a:r>
+            <a:endParaRPr lang="en-US"/>
           </a:p>
         </p:txBody>
       </p:sp>
@@ -5703,7 +8503,7 @@
           <p:cNvPr id="3" name="Content Placeholder 2">
             <a:extLst>
               <a:ext uri="{FF2B5EF4-FFF2-40B4-BE49-F238E27FC236}">
-                <a16:creationId xmlns:a16="http://schemas.microsoft.com/office/drawing/2014/main" id="{871CC203-309F-C580-057C-3B0A30FCD371}"/>
+                <a16:creationId xmlns:a16="http://schemas.microsoft.com/office/drawing/2014/main" id="{8CBA14F8-65E2-B2B1-5C12-706781C202B0}"/>
               </a:ext>
             </a:extLst>
           </p:cNvPr>
@@ -5719,62 +8519,14 @@
           <a:bodyPr/>
           <a:lstStyle/>
           <a:p>
-            <a:r>
-              <a:rPr lang="en-US" dirty="0"/>
-              <a:t>In many cases, changing traversals easier than structures</a:t>
-            </a:r>
-          </a:p>
-          <a:p>
-            <a:r>
-              <a:rPr lang="en-US" dirty="0"/>
-              <a:t>So focus on traversals</a:t>
-            </a:r>
-          </a:p>
-          <a:p>
-            <a:r>
-              <a:rPr lang="en-US" dirty="0"/>
-              <a:t>Traversal transformations can use the same principles (knowledge transfer?)</a:t>
-            </a:r>
-          </a:p>
-          <a:p>
-            <a:r>
-              <a:rPr lang="en-US" dirty="0"/>
-              <a:t>Traversers: </a:t>
-            </a:r>
-            <a:r>
-              <a:rPr lang="en-US" dirty="0" err="1"/>
-              <a:t>kinda</a:t>
-            </a:r>
-            <a:r>
-              <a:rPr lang="en-US" dirty="0"/>
-              <a:t> like iterators or range views</a:t>
-            </a:r>
-          </a:p>
-          <a:p>
-            <a:r>
-              <a:rPr lang="en-US" dirty="0"/>
-              <a:t>Extending transformations: blocking, spans, renaming, …</a:t>
-            </a:r>
-          </a:p>
-          <a:p>
-            <a:r>
-              <a:rPr lang="en-US" dirty="0"/>
-              <a:t>Simplifies parallelization (on TBB and CUDA)</a:t>
-            </a:r>
-          </a:p>
-          <a:p>
-            <a:pPr lvl="1"/>
-            <a:r>
-              <a:rPr lang="en-US" dirty="0"/>
-              <a:t>(Named) dimensions of traversal can bind to dimension of the para BE</a:t>
-            </a:r>
+            <a:endParaRPr lang="en-US"/>
           </a:p>
         </p:txBody>
       </p:sp>
     </p:spTree>
     <p:extLst>
       <p:ext uri="{BB962C8B-B14F-4D97-AF65-F5344CB8AC3E}">
-        <p14:creationId xmlns:p14="http://schemas.microsoft.com/office/powerpoint/2010/main" val="2126121211"/>
+        <p14:creationId xmlns:p14="http://schemas.microsoft.com/office/powerpoint/2010/main" val="609296826"/>
       </p:ext>
     </p:extLst>
   </p:cSld>
@@ -5785,6 +8537,92 @@
 </file>
 
 <file path=ppt/slides/slide7.xml><?xml version="1.0" encoding="utf-8"?>
+<p:sld xmlns:a="http://schemas.openxmlformats.org/drawingml/2006/main" xmlns:r="http://schemas.openxmlformats.org/officeDocument/2006/relationships" xmlns:p="http://schemas.openxmlformats.org/presentationml/2006/main" show="0">
+  <p:cSld>
+    <p:spTree>
+      <p:nvGrpSpPr>
+        <p:cNvPr id="1" name=""/>
+        <p:cNvGrpSpPr/>
+        <p:nvPr/>
+      </p:nvGrpSpPr>
+      <p:grpSpPr>
+        <a:xfrm>
+          <a:off x="0" y="0"/>
+          <a:ext cx="0" cy="0"/>
+          <a:chOff x="0" y="0"/>
+          <a:chExt cx="0" cy="0"/>
+        </a:xfrm>
+      </p:grpSpPr>
+      <p:sp>
+        <p:nvSpPr>
+          <p:cNvPr id="2" name="Title 1">
+            <a:extLst>
+              <a:ext uri="{FF2B5EF4-FFF2-40B4-BE49-F238E27FC236}">
+                <a16:creationId xmlns:a16="http://schemas.microsoft.com/office/drawing/2014/main" id="{BC500110-1A1D-46C5-865E-8C33FFF09E26}"/>
+              </a:ext>
+            </a:extLst>
+          </p:cNvPr>
+          <p:cNvSpPr>
+            <a:spLocks noGrp="1"/>
+          </p:cNvSpPr>
+          <p:nvPr>
+            <p:ph type="title"/>
+          </p:nvPr>
+        </p:nvSpPr>
+        <p:spPr/>
+        <p:txBody>
+          <a:bodyPr/>
+          <a:lstStyle/>
+          <a:p>
+            <a:r>
+              <a:rPr lang="en-US" noProof="0" dirty="0"/>
+              <a:t>Layout-agnostic design</a:t>
+            </a:r>
+          </a:p>
+        </p:txBody>
+      </p:sp>
+      <p:sp>
+        <p:nvSpPr>
+          <p:cNvPr id="3" name="Content Placeholder 2">
+            <a:extLst>
+              <a:ext uri="{FF2B5EF4-FFF2-40B4-BE49-F238E27FC236}">
+                <a16:creationId xmlns:a16="http://schemas.microsoft.com/office/drawing/2014/main" id="{BC98E21C-63B1-8313-A72D-D4A24D26FBA1}"/>
+              </a:ext>
+            </a:extLst>
+          </p:cNvPr>
+          <p:cNvSpPr>
+            <a:spLocks noGrp="1"/>
+          </p:cNvSpPr>
+          <p:nvPr>
+            <p:ph idx="1"/>
+          </p:nvPr>
+        </p:nvSpPr>
+        <p:spPr/>
+        <p:txBody>
+          <a:bodyPr/>
+          <a:lstStyle/>
+          <a:p>
+            <a:r>
+              <a:rPr lang="en-US" noProof="0" dirty="0"/>
+              <a:t>Algorithm with explicit offset calculations × Algorithm with logical indices</a:t>
+            </a:r>
+          </a:p>
+        </p:txBody>
+      </p:sp>
+    </p:spTree>
+    <p:extLst>
+      <p:ext uri="{BB962C8B-B14F-4D97-AF65-F5344CB8AC3E}">
+        <p14:creationId xmlns:p14="http://schemas.microsoft.com/office/powerpoint/2010/main" val="3503651732"/>
+      </p:ext>
+    </p:extLst>
+  </p:cSld>
+  <p:clrMapOvr>
+    <a:masterClrMapping/>
+  </p:clrMapOvr>
+</p:sld>
+</file>
+
+<file path=ppt/slides/slide8.xml><?xml version="1.0" encoding="utf-8"?>
 <p:sld xmlns:a="http://schemas.openxmlformats.org/drawingml/2006/main" xmlns:r="http://schemas.openxmlformats.org/officeDocument/2006/relationships" xmlns:p="http://schemas.openxmlformats.org/presentationml/2006/main">
   <p:cSld>
     <p:spTree>
@@ -5806,7 +8644,7 @@
           <p:cNvPr id="2" name="Title 1">
             <a:extLst>
               <a:ext uri="{FF2B5EF4-FFF2-40B4-BE49-F238E27FC236}">
-                <a16:creationId xmlns:a16="http://schemas.microsoft.com/office/drawing/2014/main" id="{45925ADF-B97D-3587-87BD-4182502B6656}"/>
+                <a16:creationId xmlns:a16="http://schemas.microsoft.com/office/drawing/2014/main" id="{C266F341-5BBA-043E-301E-387913EC1471}"/>
               </a:ext>
             </a:extLst>
           </p:cNvPr>
@@ -5823,8 +8661,8 @@
           <a:lstStyle/>
           <a:p>
             <a:r>
-              <a:rPr lang="en-US" dirty="0"/>
-              <a:t>Finalizing the automation: Autotuning</a:t>
+              <a:rPr lang="en-US" noProof="0" dirty="0"/>
+              <a:t>?? Traversal agnostic design</a:t>
             </a:r>
           </a:p>
         </p:txBody>
@@ -5834,7 +8672,7 @@
           <p:cNvPr id="3" name="Content Placeholder 2">
             <a:extLst>
               <a:ext uri="{FF2B5EF4-FFF2-40B4-BE49-F238E27FC236}">
-                <a16:creationId xmlns:a16="http://schemas.microsoft.com/office/drawing/2014/main" id="{2673B8B7-D0E9-6CB9-1502-D2F6FEE0D62F}"/>
+                <a16:creationId xmlns:a16="http://schemas.microsoft.com/office/drawing/2014/main" id="{871CC203-309F-C580-057C-3B0A30FCD371}"/>
               </a:ext>
             </a:extLst>
           </p:cNvPr>
@@ -5851,232 +8689,61 @@
           <a:lstStyle/>
           <a:p>
             <a:r>
-              <a:rPr lang="en-US" dirty="0"/>
-              <a:t>Abstraction for integrating with an </a:t>
-            </a:r>
-            <a:r>
-              <a:rPr lang="en-US" dirty="0" err="1"/>
-              <a:t>autotuner</a:t>
-            </a:r>
-            <a:endParaRPr lang="en-US" dirty="0"/>
+              <a:rPr lang="en-US" noProof="0" dirty="0"/>
+              <a:t>In many cases, changing traversals easier than structures</a:t>
+            </a:r>
+          </a:p>
+          <a:p>
+            <a:r>
+              <a:rPr lang="en-US" noProof="0" dirty="0"/>
+              <a:t>So focus on traversals</a:t>
+            </a:r>
+          </a:p>
+          <a:p>
+            <a:r>
+              <a:rPr lang="en-US" noProof="0" dirty="0"/>
+              <a:t>Traversal transformations can use the same principles (knowledge transfer?)</a:t>
+            </a:r>
+          </a:p>
+          <a:p>
+            <a:r>
+              <a:rPr lang="en-US" noProof="0" dirty="0"/>
+              <a:t>Traversers: </a:t>
+            </a:r>
+            <a:r>
+              <a:rPr lang="en-US" noProof="0" dirty="0" err="1"/>
+              <a:t>kinda</a:t>
+            </a:r>
+            <a:r>
+              <a:rPr lang="en-US" noProof="0" dirty="0"/>
+              <a:t> like iterators or range views</a:t>
+            </a:r>
+          </a:p>
+          <a:p>
+            <a:r>
+              <a:rPr lang="en-US" noProof="0" dirty="0"/>
+              <a:t>Extending transformations: blocking, spans, renaming, …</a:t>
+            </a:r>
+          </a:p>
+          <a:p>
+            <a:r>
+              <a:rPr lang="en-US" noProof="0" dirty="0"/>
+              <a:t>Simplifies parallelization (on TBB and CUDA)</a:t>
+            </a:r>
           </a:p>
           <a:p>
             <a:pPr lvl="1"/>
             <a:r>
-              <a:rPr lang="en-US" dirty="0"/>
-              <a:t>Agnostic to the specific backend</a:t>
-            </a:r>
-          </a:p>
-          <a:p>
-            <a:pPr lvl="1"/>
-            <a:r>
-              <a:rPr lang="en-US" dirty="0"/>
-              <a:t>PoC with </a:t>
-            </a:r>
-            <a:r>
-              <a:rPr lang="en-US" dirty="0" err="1"/>
-              <a:t>OpenTuner</a:t>
-            </a:r>
-            <a:r>
-              <a:rPr lang="en-US" dirty="0"/>
-              <a:t>, </a:t>
-            </a:r>
-            <a:r>
-              <a:rPr lang="en-US" dirty="0" err="1"/>
-              <a:t>Optuna</a:t>
-            </a:r>
-            <a:r>
-              <a:rPr lang="en-US" dirty="0"/>
-              <a:t>, ATF</a:t>
-            </a:r>
-          </a:p>
-          <a:p>
-            <a:r>
-              <a:rPr lang="en-US" dirty="0"/>
-              <a:t>Autotuning enables automatic layout &amp; </a:t>
-            </a:r>
-            <a:r>
-              <a:rPr lang="en-US"/>
-              <a:t>traversal transformations</a:t>
-            </a:r>
-            <a:endParaRPr lang="en-US" dirty="0"/>
+              <a:rPr lang="en-US" noProof="0" dirty="0"/>
+              <a:t>(Named) dimensions of traversal can bind to dimension of the para BE</a:t>
+            </a:r>
           </a:p>
         </p:txBody>
       </p:sp>
     </p:spTree>
     <p:extLst>
       <p:ext uri="{BB962C8B-B14F-4D97-AF65-F5344CB8AC3E}">
-        <p14:creationId xmlns:p14="http://schemas.microsoft.com/office/powerpoint/2010/main" val="2958406956"/>
-      </p:ext>
-    </p:extLst>
-  </p:cSld>
-  <p:clrMapOvr>
-    <a:masterClrMapping/>
-  </p:clrMapOvr>
-</p:sld>
-</file>
-
-<file path=ppt/slides/slide8.xml><?xml version="1.0" encoding="utf-8"?>
-<p:sld xmlns:a="http://schemas.openxmlformats.org/drawingml/2006/main" xmlns:r="http://schemas.openxmlformats.org/officeDocument/2006/relationships" xmlns:p="http://schemas.openxmlformats.org/presentationml/2006/main">
-  <p:cSld>
-    <p:spTree>
-      <p:nvGrpSpPr>
-        <p:cNvPr id="1" name="">
-          <a:extLst>
-            <a:ext uri="{FF2B5EF4-FFF2-40B4-BE49-F238E27FC236}">
-              <a16:creationId xmlns:a16="http://schemas.microsoft.com/office/drawing/2014/main" id="{EFDF7620-7AA1-EF30-FDC7-27AAC7FFE5EE}"/>
-            </a:ext>
-          </a:extLst>
-        </p:cNvPr>
-        <p:cNvGrpSpPr/>
-        <p:nvPr/>
-      </p:nvGrpSpPr>
-      <p:grpSpPr>
-        <a:xfrm>
-          <a:off x="0" y="0"/>
-          <a:ext cx="0" cy="0"/>
-          <a:chOff x="0" y="0"/>
-          <a:chExt cx="0" cy="0"/>
-        </a:xfrm>
-      </p:grpSpPr>
-      <p:sp>
-        <p:nvSpPr>
-          <p:cNvPr id="2" name="Title 1">
-            <a:extLst>
-              <a:ext uri="{FF2B5EF4-FFF2-40B4-BE49-F238E27FC236}">
-                <a16:creationId xmlns:a16="http://schemas.microsoft.com/office/drawing/2014/main" id="{F7C42AB4-1D66-61B5-41F3-D1C814D6D79F}"/>
-              </a:ext>
-            </a:extLst>
-          </p:cNvPr>
-          <p:cNvSpPr>
-            <a:spLocks noGrp="1"/>
-          </p:cNvSpPr>
-          <p:nvPr>
-            <p:ph type="title"/>
-          </p:nvPr>
-        </p:nvSpPr>
-        <p:spPr/>
-        <p:txBody>
-          <a:bodyPr/>
-          <a:lstStyle/>
-          <a:p>
-            <a:r>
-              <a:rPr lang="en-US" dirty="0"/>
-              <a:t>M &amp; S</a:t>
-            </a:r>
-          </a:p>
-        </p:txBody>
-      </p:sp>
-      <p:sp>
-        <p:nvSpPr>
-          <p:cNvPr id="3" name="Content Placeholder 2">
-            <a:extLst>
-              <a:ext uri="{FF2B5EF4-FFF2-40B4-BE49-F238E27FC236}">
-                <a16:creationId xmlns:a16="http://schemas.microsoft.com/office/drawing/2014/main" id="{7FC71ADE-62E2-F5C5-38A6-5FA51E07F94E}"/>
-              </a:ext>
-            </a:extLst>
-          </p:cNvPr>
-          <p:cNvSpPr>
-            <a:spLocks noGrp="1"/>
-          </p:cNvSpPr>
-          <p:nvPr>
-            <p:ph idx="1"/>
-          </p:nvPr>
-        </p:nvSpPr>
-        <p:spPr/>
-        <p:txBody>
-          <a:bodyPr/>
-          <a:lstStyle/>
-          <a:p>
-            <a:r>
-              <a:rPr lang="en-US" dirty="0"/>
-              <a:t>Motivation: GPU &amp; Cluster computing</a:t>
-            </a:r>
-          </a:p>
-          <a:p>
-            <a:pPr lvl="1"/>
-            <a:r>
-              <a:rPr lang="en-US" dirty="0"/>
-              <a:t>Too many decisions, complex code (you don’t know) </a:t>
-            </a:r>
-            <a:r>
-              <a:rPr lang="en-US" dirty="0">
-                <a:sym typeface="Wingdings" panose="05000000000000000000" pitchFamily="2" charset="2"/>
-              </a:rPr>
-              <a:t> the problem, it is hard</a:t>
-            </a:r>
-            <a:endParaRPr lang="en-US" dirty="0"/>
-          </a:p>
-          <a:p>
-            <a:pPr lvl="2"/>
-            <a:r>
-              <a:rPr lang="en-US" dirty="0"/>
-              <a:t>layout options, traversal options, parallelization (Matice, </a:t>
-            </a:r>
-            <a:r>
-              <a:rPr lang="en-US" dirty="0" err="1"/>
-              <a:t>pruchod</a:t>
-            </a:r>
-            <a:r>
-              <a:rPr lang="en-US" dirty="0"/>
-              <a:t>; </a:t>
-            </a:r>
-            <a:r>
-              <a:rPr lang="en-US" dirty="0" err="1"/>
-              <a:t>nasobeni</a:t>
-            </a:r>
-            <a:r>
-              <a:rPr lang="en-US" dirty="0"/>
-              <a:t>?)</a:t>
-            </a:r>
-          </a:p>
-          <a:p>
-            <a:pPr lvl="2"/>
-            <a:r>
-              <a:rPr lang="en-US" dirty="0"/>
-              <a:t>parameters for the above (block sizes, …)</a:t>
-            </a:r>
-          </a:p>
-          <a:p>
-            <a:r>
-              <a:rPr lang="en-US" dirty="0"/>
-              <a:t>Our solution: Abstraction &amp; automatization </a:t>
-            </a:r>
-            <a:r>
-              <a:rPr lang="en-US" dirty="0">
-                <a:sym typeface="Wingdings" panose="05000000000000000000" pitchFamily="2" charset="2"/>
-              </a:rPr>
-              <a:t> we offer a solution</a:t>
-            </a:r>
-            <a:endParaRPr lang="en-US" dirty="0"/>
-          </a:p>
-          <a:p>
-            <a:pPr lvl="1"/>
-            <a:r>
-              <a:rPr lang="en-US" dirty="0"/>
-              <a:t>Separation of concerns, independent aspects</a:t>
-            </a:r>
-          </a:p>
-          <a:p>
-            <a:pPr lvl="1"/>
-            <a:r>
-              <a:rPr lang="en-US" dirty="0"/>
-              <a:t>Introducing layout-agnostic and traversal-agnostic algorithm design</a:t>
-            </a:r>
-          </a:p>
-          <a:p>
-            <a:pPr lvl="1"/>
-            <a:r>
-              <a:rPr lang="en-US" dirty="0"/>
-              <a:t>How the world is saved</a:t>
-            </a:r>
-          </a:p>
-        </p:txBody>
-      </p:sp>
-    </p:spTree>
-    <p:extLst>
-      <p:ext uri="{BB962C8B-B14F-4D97-AF65-F5344CB8AC3E}">
-        <p14:creationId xmlns:p14="http://schemas.microsoft.com/office/powerpoint/2010/main" val="1408920348"/>
+        <p14:creationId xmlns:p14="http://schemas.microsoft.com/office/powerpoint/2010/main" val="2126121211"/>
       </p:ext>
     </p:extLst>
   </p:cSld>
@@ -6108,7 +8775,7 @@
           <p:cNvPr id="2" name="Title 1">
             <a:extLst>
               <a:ext uri="{FF2B5EF4-FFF2-40B4-BE49-F238E27FC236}">
-                <a16:creationId xmlns:a16="http://schemas.microsoft.com/office/drawing/2014/main" id="{3844D8EA-565C-C8A0-F333-6EBD085AC735}"/>
+                <a16:creationId xmlns:a16="http://schemas.microsoft.com/office/drawing/2014/main" id="{45925ADF-B97D-3587-87BD-4182502B6656}"/>
               </a:ext>
             </a:extLst>
           </p:cNvPr>
@@ -6125,8 +8792,8 @@
           <a:lstStyle/>
           <a:p>
             <a:r>
-              <a:rPr lang="en-US" dirty="0"/>
-              <a:t>Proposed abstractions</a:t>
+              <a:rPr lang="en-US" noProof="0" dirty="0"/>
+              <a:t>Finalizing the automation: Autotuning</a:t>
             </a:r>
           </a:p>
         </p:txBody>
@@ -6136,7 +8803,7 @@
           <p:cNvPr id="3" name="Content Placeholder 2">
             <a:extLst>
               <a:ext uri="{FF2B5EF4-FFF2-40B4-BE49-F238E27FC236}">
-                <a16:creationId xmlns:a16="http://schemas.microsoft.com/office/drawing/2014/main" id="{0B0BC514-DFF4-C541-7399-85275B2EB075}"/>
+                <a16:creationId xmlns:a16="http://schemas.microsoft.com/office/drawing/2014/main" id="{2673B8B7-D0E9-6CB9-1502-D2F6FEE0D62F}"/>
               </a:ext>
             </a:extLst>
           </p:cNvPr>
@@ -6153,100 +8820,49 @@
           <a:lstStyle/>
           <a:p>
             <a:r>
-              <a:rPr lang="en-US" dirty="0"/>
-              <a:t>Layout abstractions</a:t>
-            </a:r>
-          </a:p>
-          <a:p>
-            <a:r>
-              <a:rPr lang="en-US" dirty="0"/>
-              <a:t>Traversal abstractions</a:t>
-            </a:r>
-          </a:p>
-          <a:p>
-            <a:endParaRPr lang="en-US" dirty="0"/>
-          </a:p>
-          <a:p>
-            <a:r>
-              <a:rPr lang="en-US" dirty="0"/>
-              <a:t>Extensions</a:t>
-            </a:r>
+              <a:rPr lang="en-US" noProof="0" dirty="0"/>
+              <a:t>Abstraction for integrating with an </a:t>
+            </a:r>
+            <a:r>
+              <a:rPr lang="en-US" noProof="0" dirty="0" err="1"/>
+              <a:t>autotuner</a:t>
+            </a:r>
+            <a:endParaRPr lang="en-US" noProof="0" dirty="0"/>
           </a:p>
           <a:p>
             <a:pPr lvl="1"/>
             <a:r>
-              <a:rPr lang="en-US" dirty="0"/>
-              <a:t>? Practical aspects; </a:t>
-            </a:r>
-            <a:r>
-              <a:rPr lang="en-US" dirty="0">
-                <a:sym typeface="Wingdings" panose="05000000000000000000" pitchFamily="2" charset="2"/>
-              </a:rPr>
-              <a:t> autotuning</a:t>
-            </a:r>
-            <a:endParaRPr lang="en-US" dirty="0"/>
+              <a:rPr lang="en-US" noProof="0" dirty="0"/>
+              <a:t>Agnostic to the specific backend</a:t>
+            </a:r>
           </a:p>
           <a:p>
             <a:pPr lvl="1"/>
             <a:r>
-              <a:rPr lang="en-US" dirty="0"/>
-              <a:t>Distributed computing</a:t>
-            </a:r>
-          </a:p>
-          <a:p>
-            <a:endParaRPr lang="en-US" dirty="0"/>
-          </a:p>
-          <a:p>
-            <a:r>
-              <a:rPr lang="en-US" dirty="0"/>
-              <a:t>Knowledge </a:t>
-            </a:r>
-            <a:r>
-              <a:rPr lang="en-US" dirty="0" err="1"/>
-              <a:t>neco</a:t>
-            </a:r>
-            <a:r>
-              <a:rPr lang="en-US" dirty="0"/>
-              <a:t> (</a:t>
-            </a:r>
-            <a:r>
-              <a:rPr lang="en-US" dirty="0" err="1"/>
-              <a:t>metaprogramovani</a:t>
-            </a:r>
-            <a:r>
-              <a:rPr lang="en-US" dirty="0"/>
+              <a:rPr lang="en-US" noProof="0" dirty="0"/>
+              <a:t>PoC with </a:t>
+            </a:r>
+            <a:r>
+              <a:rPr lang="en-US" noProof="0" dirty="0" err="1"/>
+              <a:t>OpenTuner</a:t>
+            </a:r>
+            <a:r>
+              <a:rPr lang="en-US" noProof="0" dirty="0"/>
               <a:t>, </a:t>
             </a:r>
             <a:r>
-              <a:rPr lang="en-US" dirty="0" err="1"/>
-              <a:t>stavebni</a:t>
-            </a:r>
-            <a:r>
-              <a:rPr lang="en-US" dirty="0"/>
-              <a:t> </a:t>
-            </a:r>
-            <a:r>
-              <a:rPr lang="en-US" dirty="0" err="1"/>
-              <a:t>bloky</a:t>
-            </a:r>
-            <a:r>
-              <a:rPr lang="en-US" dirty="0"/>
-              <a:t>, </a:t>
-            </a:r>
-            <a:r>
-              <a:rPr lang="en-US" dirty="0" err="1"/>
-              <a:t>traversery</a:t>
-            </a:r>
-            <a:r>
-              <a:rPr lang="en-US" dirty="0"/>
-              <a:t>?)</a:t>
-            </a:r>
-          </a:p>
-          <a:p>
-            <a:pPr lvl="1"/>
-            <a:r>
-              <a:rPr lang="en-US" dirty="0"/>
-              <a:t>CA computations (</a:t>
+              <a:rPr lang="en-US" noProof="0" dirty="0" err="1"/>
+              <a:t>Optuna</a:t>
+            </a:r>
+            <a:r>
+              <a:rPr lang="en-US" noProof="0" dirty="0"/>
+              <a:t>, ATF</a:t>
+            </a:r>
+          </a:p>
+          <a:p>
+            <a:r>
+              <a:rPr lang="en-US" noProof="0" dirty="0"/>
+              <a:t>Autotuning enables automatic layout &amp; traversal transformations</a:t>
             </a:r>
           </a:p>
         </p:txBody>
@@ -6254,7 +8870,7 @@
     </p:spTree>
     <p:extLst>
       <p:ext uri="{BB962C8B-B14F-4D97-AF65-F5344CB8AC3E}">
-        <p14:creationId xmlns:p14="http://schemas.microsoft.com/office/powerpoint/2010/main" val="2195190930"/>
+        <p14:creationId xmlns:p14="http://schemas.microsoft.com/office/powerpoint/2010/main" val="2958406956"/>
       </p:ext>
     </p:extLst>
   </p:cSld>

--- a/slides/Optimizing Memory Layouts and Traversal Orders in High-Performance Computing.pptx
+++ b/slides/Optimizing Memory Layouts and Traversal Orders in High-Performance Computing.pptx
@@ -5,7 +5,7 @@
     <p:sldMasterId id="2147483648" r:id="rId1"/>
   </p:sldMasterIdLst>
   <p:notesMasterIdLst>
-    <p:notesMasterId r:id="rId25"/>
+    <p:notesMasterId r:id="rId26"/>
   </p:notesMasterIdLst>
   <p:sldIdLst>
     <p:sldId id="256" r:id="rId2"/>
@@ -14,23 +14,24 @@
     <p:sldId id="269" r:id="rId5"/>
     <p:sldId id="270" r:id="rId6"/>
     <p:sldId id="281" r:id="rId7"/>
-    <p:sldId id="263" r:id="rId8"/>
-    <p:sldId id="271" r:id="rId9"/>
-    <p:sldId id="272" r:id="rId10"/>
-    <p:sldId id="278" r:id="rId11"/>
-    <p:sldId id="265" r:id="rId12"/>
-    <p:sldId id="258" r:id="rId13"/>
-    <p:sldId id="273" r:id="rId14"/>
-    <p:sldId id="279" r:id="rId15"/>
-    <p:sldId id="274" r:id="rId16"/>
-    <p:sldId id="280" r:id="rId17"/>
-    <p:sldId id="259" r:id="rId18"/>
-    <p:sldId id="275" r:id="rId19"/>
-    <p:sldId id="276" r:id="rId20"/>
-    <p:sldId id="260" r:id="rId21"/>
-    <p:sldId id="266" r:id="rId22"/>
-    <p:sldId id="261" r:id="rId23"/>
-    <p:sldId id="262" r:id="rId24"/>
+    <p:sldId id="282" r:id="rId8"/>
+    <p:sldId id="263" r:id="rId9"/>
+    <p:sldId id="271" r:id="rId10"/>
+    <p:sldId id="272" r:id="rId11"/>
+    <p:sldId id="278" r:id="rId12"/>
+    <p:sldId id="265" r:id="rId13"/>
+    <p:sldId id="258" r:id="rId14"/>
+    <p:sldId id="273" r:id="rId15"/>
+    <p:sldId id="279" r:id="rId16"/>
+    <p:sldId id="274" r:id="rId17"/>
+    <p:sldId id="280" r:id="rId18"/>
+    <p:sldId id="259" r:id="rId19"/>
+    <p:sldId id="275" r:id="rId20"/>
+    <p:sldId id="276" r:id="rId21"/>
+    <p:sldId id="260" r:id="rId22"/>
+    <p:sldId id="266" r:id="rId23"/>
+    <p:sldId id="261" r:id="rId24"/>
+    <p:sldId id="262" r:id="rId25"/>
   </p:sldIdLst>
   <p:sldSz cx="12192000" cy="6858000"/>
   <p:notesSz cx="6858000" cy="9144000"/>
@@ -144,6 +145,7 @@
           <p14:sldIdLst>
             <p14:sldId id="270"/>
             <p14:sldId id="281"/>
+            <p14:sldId id="282"/>
             <p14:sldId id="263"/>
             <p14:sldId id="271"/>
             <p14:sldId id="272"/>
@@ -1009,7 +1011,118 @@
           <a:bodyPr/>
           <a:lstStyle/>
           <a:p>
+            <a:r>
+              <a:rPr lang="en-US" dirty="0"/>
+              <a:t>/*</a:t>
+            </a:r>
+          </a:p>
+          <a:p>
+            <a:r>
+              <a:rPr lang="en-US" dirty="0"/>
+              <a:t>As the first contribution of our research, we have devised an abstraction for building and transforming memory layouts that enable the design of layout-agnostic algorithms as well as the reuse of the defined layouts.</a:t>
+            </a:r>
+          </a:p>
+          <a:p>
             <a:endParaRPr lang="en-US" dirty="0"/>
+          </a:p>
+          <a:p>
+            <a:r>
+              <a:rPr lang="en-US" dirty="0"/>
+              <a:t>In real-use algorithms</a:t>
+            </a:r>
+            <a:br>
+              <a:rPr lang="en-US" dirty="0"/>
+            </a:br>
+            <a:r>
+              <a:rPr lang="en-US" dirty="0"/>
+              <a:t>- dimensions have semantic value</a:t>
+            </a:r>
+            <a:br>
+              <a:rPr lang="en-US" dirty="0"/>
+            </a:br>
+            <a:r>
+              <a:rPr lang="en-US" dirty="0"/>
+              <a:t>- a data access more often depends on the semantic (logic) structure than on a specific memory offset</a:t>
+            </a:r>
+            <a:br>
+              <a:rPr lang="en-US" dirty="0"/>
+            </a:br>
+            <a:r>
+              <a:rPr lang="en-US" dirty="0"/>
+              <a:t>- traversals cover the semantic space rather than a set of abstract coordinates</a:t>
+            </a:r>
+          </a:p>
+          <a:p>
+            <a:r>
+              <a:rPr lang="en-US" dirty="0"/>
+              <a:t>*/</a:t>
+            </a:r>
+          </a:p>
+          <a:p>
+            <a:endParaRPr lang="en-US" dirty="0"/>
+          </a:p>
+          <a:p>
+            <a:r>
+              <a:rPr lang="en-US" dirty="0"/>
+              <a:t>At the beginning of our research, we focused on devising abstractions that would enable a more seamless design of algorithms amenable to source-level optimizations allowing for user-direction and automation.</a:t>
+            </a:r>
+          </a:p>
+          <a:p>
+            <a:endParaRPr lang="en-US" dirty="0"/>
+          </a:p>
+          <a:p>
+            <a:r>
+              <a:rPr lang="en-US" dirty="0"/>
+              <a:t>If we slightly optimize a standard matrix multiplication algorithm, we might end up with something similar to the shown code.</a:t>
+            </a:r>
+          </a:p>
+          <a:p>
+            <a:r>
+              <a:rPr lang="en-US" dirty="0"/>
+              <a:t>At first view, it is difficult to see that it is actually a three-dimensional traversal performed in a tiled manner, accessing elements in row-major or column-major layouts.</a:t>
+            </a:r>
+          </a:p>
+          <a:p>
+            <a:br>
+              <a:rPr lang="en-US" dirty="0"/>
+            </a:br>
+            <a:br>
+              <a:rPr lang="en-US" dirty="0"/>
+            </a:br>
+            <a:r>
+              <a:rPr lang="en-US" dirty="0"/>
+              <a:t>[v without runtime overhead]</a:t>
+            </a:r>
+            <a:br>
+              <a:rPr lang="en-US" dirty="0"/>
+            </a:br>
+            <a:endParaRPr lang="en-US" dirty="0"/>
+          </a:p>
+          <a:p>
+            <a:r>
+              <a:rPr lang="en-US" dirty="0"/>
+              <a:t>Our research iteratively progressed to a point where we can encode the semantic logical structure of layouts independently of the physical layout, naming the dimensions for specifying the logical API that is common to the layouts sharing the same dimensions.</a:t>
+            </a:r>
+          </a:p>
+          <a:p>
+            <a:r>
+              <a:rPr lang="en-US" dirty="0"/>
+              <a:t>This makes the structures more resistant to simple errors and encodes further information that then allows using these names to either identify common dimensions of different structures and thus automatically infer traversals over them, or specify transformations of these traversals.</a:t>
+            </a:r>
+            <a:br>
+              <a:rPr lang="en-US" dirty="0"/>
+            </a:br>
+            <a:r>
+              <a:rPr lang="en-US" dirty="0"/>
+              <a:t>This then allows us to compact the difficult-to-maintain version of the matrix multiplication algorithm into a more compact and semantic code.</a:t>
+            </a:r>
+            <a:br>
+              <a:rPr lang="en-US" dirty="0"/>
+            </a:br>
+            <a:r>
+              <a:rPr lang="en-US" dirty="0"/>
+              <a:t>(The first three rows directly match, then we simply specify we want to traverse the combined space of the three structures, and specify the action that should happen for each point of the space; the order directive then specifies the tiling optimization)</a:t>
+            </a:r>
           </a:p>
         </p:txBody>
       </p:sp>
@@ -1093,7 +1206,42 @@
           <a:bodyPr/>
           <a:lstStyle/>
           <a:p>
+            <a:r>
+              <a:rPr lang="en-US" dirty="0"/>
+              <a:t>In our first contribution, we focused on abstractions for encoding the memory layouts so that they separate the logical structure used in the algorithms from the physical memory layout. Our research is not the only effort on this, as nowadays,</a:t>
+            </a:r>
+            <a:br>
+              <a:rPr lang="en-US" dirty="0"/>
+            </a:br>
+            <a:r>
+              <a:rPr lang="en-US" dirty="0"/>
+              <a:t>We can see similar efforts in the C++ standard with the introduction of </a:t>
+            </a:r>
+            <a:r>
+              <a:rPr lang="en-US" dirty="0" err="1"/>
+              <a:t>mdspans</a:t>
+            </a:r>
+            <a:r>
+              <a:rPr lang="en-US" dirty="0"/>
+              <a:t> that offer flexible interfaces for later introduced linear algebra functions, or </a:t>
+            </a:r>
+            <a:r>
+              <a:rPr lang="en-US" dirty="0" err="1"/>
+              <a:t>CUTe</a:t>
+            </a:r>
+            <a:r>
+              <a:rPr lang="en-US" dirty="0"/>
+              <a:t> layouts used for optimizing GPU kernels in the CUTLASS framework.</a:t>
+            </a:r>
+          </a:p>
+          <a:p>
             <a:endParaRPr lang="en-US" dirty="0"/>
+          </a:p>
+          <a:p>
+            <a:r>
+              <a:rPr lang="en-US" dirty="0"/>
+              <a:t>Our approach is characteristic in defining the layouts via semantic building blocks (such as scalar that names a single value or array that extends a given layout with one named dimension) that are freely composable and allow for defining derived layouts.</a:t>
+            </a:r>
           </a:p>
         </p:txBody>
       </p:sp>
@@ -1114,7 +1262,91 @@
           <a:p>
             <a:fld id="{FA8FD632-245B-410D-BCC4-8BF8D37AB67F}" type="slidenum">
               <a:rPr lang="en-US" smtClean="0"/>
-              <a:t>11</a:t>
+              <a:t>7</a:t>
+            </a:fld>
+            <a:endParaRPr lang="en-US"/>
+          </a:p>
+        </p:txBody>
+      </p:sp>
+    </p:spTree>
+    <p:extLst>
+      <p:ext uri="{BB962C8B-B14F-4D97-AF65-F5344CB8AC3E}">
+        <p14:creationId xmlns:p14="http://schemas.microsoft.com/office/powerpoint/2010/main" val="471300310"/>
+      </p:ext>
+    </p:extLst>
+  </p:cSld>
+  <p:clrMapOvr>
+    <a:masterClrMapping/>
+  </p:clrMapOvr>
+</p:notes>
+</file>
+
+<file path=ppt/notesSlides/notesSlide6.xml><?xml version="1.0" encoding="utf-8"?>
+<p:notes xmlns:a="http://schemas.openxmlformats.org/drawingml/2006/main" xmlns:r="http://schemas.openxmlformats.org/officeDocument/2006/relationships" xmlns:p="http://schemas.openxmlformats.org/presentationml/2006/main">
+  <p:cSld>
+    <p:spTree>
+      <p:nvGrpSpPr>
+        <p:cNvPr id="1" name=""/>
+        <p:cNvGrpSpPr/>
+        <p:nvPr/>
+      </p:nvGrpSpPr>
+      <p:grpSpPr>
+        <a:xfrm>
+          <a:off x="0" y="0"/>
+          <a:ext cx="0" cy="0"/>
+          <a:chOff x="0" y="0"/>
+          <a:chExt cx="0" cy="0"/>
+        </a:xfrm>
+      </p:grpSpPr>
+      <p:sp>
+        <p:nvSpPr>
+          <p:cNvPr id="2" name="Slide Image Placeholder 1"/>
+          <p:cNvSpPr>
+            <a:spLocks noGrp="1" noRot="1" noChangeAspect="1"/>
+          </p:cNvSpPr>
+          <p:nvPr>
+            <p:ph type="sldImg"/>
+          </p:nvPr>
+        </p:nvSpPr>
+        <p:spPr/>
+      </p:sp>
+      <p:sp>
+        <p:nvSpPr>
+          <p:cNvPr id="3" name="Notes Placeholder 2"/>
+          <p:cNvSpPr>
+            <a:spLocks noGrp="1"/>
+          </p:cNvSpPr>
+          <p:nvPr>
+            <p:ph type="body" idx="1"/>
+          </p:nvPr>
+        </p:nvSpPr>
+        <p:spPr/>
+        <p:txBody>
+          <a:bodyPr/>
+          <a:lstStyle/>
+          <a:p>
+            <a:endParaRPr lang="en-US" dirty="0"/>
+          </a:p>
+        </p:txBody>
+      </p:sp>
+      <p:sp>
+        <p:nvSpPr>
+          <p:cNvPr id="4" name="Slide Number Placeholder 3"/>
+          <p:cNvSpPr>
+            <a:spLocks noGrp="1"/>
+          </p:cNvSpPr>
+          <p:nvPr>
+            <p:ph type="sldNum" sz="quarter" idx="5"/>
+          </p:nvPr>
+        </p:nvSpPr>
+        <p:spPr/>
+        <p:txBody>
+          <a:bodyPr/>
+          <a:lstStyle/>
+          <a:p>
+            <a:fld id="{FA8FD632-245B-410D-BCC4-8BF8D37AB67F}" type="slidenum">
+              <a:rPr lang="en-US" smtClean="0"/>
+              <a:t>12</a:t>
             </a:fld>
             <a:endParaRPr lang="en-US"/>
           </a:p>
@@ -4447,6 +4679,133 @@
           <p:cNvPr id="2" name="Title 1">
             <a:extLst>
               <a:ext uri="{FF2B5EF4-FFF2-40B4-BE49-F238E27FC236}">
+                <a16:creationId xmlns:a16="http://schemas.microsoft.com/office/drawing/2014/main" id="{45925ADF-B97D-3587-87BD-4182502B6656}"/>
+              </a:ext>
+            </a:extLst>
+          </p:cNvPr>
+          <p:cNvSpPr>
+            <a:spLocks noGrp="1"/>
+          </p:cNvSpPr>
+          <p:nvPr>
+            <p:ph type="title"/>
+          </p:nvPr>
+        </p:nvSpPr>
+        <p:spPr/>
+        <p:txBody>
+          <a:bodyPr/>
+          <a:lstStyle/>
+          <a:p>
+            <a:r>
+              <a:rPr lang="en-US" noProof="0" dirty="0"/>
+              <a:t>Finalizing the automation: Autotuning</a:t>
+            </a:r>
+          </a:p>
+        </p:txBody>
+      </p:sp>
+      <p:sp>
+        <p:nvSpPr>
+          <p:cNvPr id="3" name="Content Placeholder 2">
+            <a:extLst>
+              <a:ext uri="{FF2B5EF4-FFF2-40B4-BE49-F238E27FC236}">
+                <a16:creationId xmlns:a16="http://schemas.microsoft.com/office/drawing/2014/main" id="{2673B8B7-D0E9-6CB9-1502-D2F6FEE0D62F}"/>
+              </a:ext>
+            </a:extLst>
+          </p:cNvPr>
+          <p:cNvSpPr>
+            <a:spLocks noGrp="1"/>
+          </p:cNvSpPr>
+          <p:nvPr>
+            <p:ph idx="1"/>
+          </p:nvPr>
+        </p:nvSpPr>
+        <p:spPr/>
+        <p:txBody>
+          <a:bodyPr/>
+          <a:lstStyle/>
+          <a:p>
+            <a:r>
+              <a:rPr lang="en-US" noProof="0" dirty="0"/>
+              <a:t>Abstraction for integrating with an </a:t>
+            </a:r>
+            <a:r>
+              <a:rPr lang="en-US" noProof="0" dirty="0" err="1"/>
+              <a:t>autotuner</a:t>
+            </a:r>
+            <a:endParaRPr lang="en-US" noProof="0" dirty="0"/>
+          </a:p>
+          <a:p>
+            <a:pPr lvl="1"/>
+            <a:r>
+              <a:rPr lang="en-US" noProof="0" dirty="0"/>
+              <a:t>Agnostic to the specific backend</a:t>
+            </a:r>
+          </a:p>
+          <a:p>
+            <a:pPr lvl="1"/>
+            <a:r>
+              <a:rPr lang="en-US" noProof="0" dirty="0"/>
+              <a:t>PoC with </a:t>
+            </a:r>
+            <a:r>
+              <a:rPr lang="en-US" noProof="0" dirty="0" err="1"/>
+              <a:t>OpenTuner</a:t>
+            </a:r>
+            <a:r>
+              <a:rPr lang="en-US" noProof="0" dirty="0"/>
+              <a:t>, </a:t>
+            </a:r>
+            <a:r>
+              <a:rPr lang="en-US" noProof="0" dirty="0" err="1"/>
+              <a:t>Optuna</a:t>
+            </a:r>
+            <a:r>
+              <a:rPr lang="en-US" noProof="0" dirty="0"/>
+              <a:t>, ATF</a:t>
+            </a:r>
+          </a:p>
+          <a:p>
+            <a:r>
+              <a:rPr lang="en-US" noProof="0" dirty="0"/>
+              <a:t>Autotuning enables automatic layout &amp; traversal transformations</a:t>
+            </a:r>
+          </a:p>
+        </p:txBody>
+      </p:sp>
+    </p:spTree>
+    <p:extLst>
+      <p:ext uri="{BB962C8B-B14F-4D97-AF65-F5344CB8AC3E}">
+        <p14:creationId xmlns:p14="http://schemas.microsoft.com/office/powerpoint/2010/main" val="2958406956"/>
+      </p:ext>
+    </p:extLst>
+  </p:cSld>
+  <p:clrMapOvr>
+    <a:masterClrMapping/>
+  </p:clrMapOvr>
+</p:sld>
+</file>
+
+<file path=ppt/slides/slide11.xml><?xml version="1.0" encoding="utf-8"?>
+<p:sld xmlns:a="http://schemas.openxmlformats.org/drawingml/2006/main" xmlns:r="http://schemas.openxmlformats.org/officeDocument/2006/relationships" xmlns:p="http://schemas.openxmlformats.org/presentationml/2006/main">
+  <p:cSld>
+    <p:spTree>
+      <p:nvGrpSpPr>
+        <p:cNvPr id="1" name=""/>
+        <p:cNvGrpSpPr/>
+        <p:nvPr/>
+      </p:nvGrpSpPr>
+      <p:grpSpPr>
+        <a:xfrm>
+          <a:off x="0" y="0"/>
+          <a:ext cx="0" cy="0"/>
+          <a:chOff x="0" y="0"/>
+          <a:chExt cx="0" cy="0"/>
+        </a:xfrm>
+      </p:grpSpPr>
+      <p:sp>
+        <p:nvSpPr>
+          <p:cNvPr id="2" name="Title 1">
+            <a:extLst>
+              <a:ext uri="{FF2B5EF4-FFF2-40B4-BE49-F238E27FC236}">
                 <a16:creationId xmlns:a16="http://schemas.microsoft.com/office/drawing/2014/main" id="{19C5CD64-6486-850E-0A2A-48532AE26434}"/>
               </a:ext>
             </a:extLst>
@@ -4508,7 +4867,7 @@
 </p:sld>
 </file>
 
-<file path=ppt/slides/slide11.xml><?xml version="1.0" encoding="utf-8"?>
+<file path=ppt/slides/slide12.xml><?xml version="1.0" encoding="utf-8"?>
 <p:sld xmlns:a="http://schemas.openxmlformats.org/drawingml/2006/main" xmlns:r="http://schemas.openxmlformats.org/officeDocument/2006/relationships" xmlns:p="http://schemas.openxmlformats.org/presentationml/2006/main" show="0">
   <p:cSld>
     <p:spTree>
@@ -4678,7 +5037,7 @@
 </p:sld>
 </file>
 
-<file path=ppt/slides/slide12.xml><?xml version="1.0" encoding="utf-8"?>
+<file path=ppt/slides/slide13.xml><?xml version="1.0" encoding="utf-8"?>
 <p:sld xmlns:a="http://schemas.openxmlformats.org/drawingml/2006/main" xmlns:r="http://schemas.openxmlformats.org/officeDocument/2006/relationships" xmlns:p="http://schemas.openxmlformats.org/presentationml/2006/main" show="0">
   <p:cSld>
     <p:spTree>
@@ -4847,133 +5206,6 @@
     <p:extLst>
       <p:ext uri="{BB962C8B-B14F-4D97-AF65-F5344CB8AC3E}">
         <p14:creationId xmlns:p14="http://schemas.microsoft.com/office/powerpoint/2010/main" val="2195190930"/>
-      </p:ext>
-    </p:extLst>
-  </p:cSld>
-  <p:clrMapOvr>
-    <a:masterClrMapping/>
-  </p:clrMapOvr>
-</p:sld>
-</file>
-
-<file path=ppt/slides/slide13.xml><?xml version="1.0" encoding="utf-8"?>
-<p:sld xmlns:a="http://schemas.openxmlformats.org/drawingml/2006/main" xmlns:r="http://schemas.openxmlformats.org/officeDocument/2006/relationships" xmlns:p="http://schemas.openxmlformats.org/presentationml/2006/main">
-  <p:cSld>
-    <p:spTree>
-      <p:nvGrpSpPr>
-        <p:cNvPr id="1" name=""/>
-        <p:cNvGrpSpPr/>
-        <p:nvPr/>
-      </p:nvGrpSpPr>
-      <p:grpSpPr>
-        <a:xfrm>
-          <a:off x="0" y="0"/>
-          <a:ext cx="0" cy="0"/>
-          <a:chOff x="0" y="0"/>
-          <a:chExt cx="0" cy="0"/>
-        </a:xfrm>
-      </p:grpSpPr>
-      <p:sp>
-        <p:nvSpPr>
-          <p:cNvPr id="2" name="Title 1">
-            <a:extLst>
-              <a:ext uri="{FF2B5EF4-FFF2-40B4-BE49-F238E27FC236}">
-                <a16:creationId xmlns:a16="http://schemas.microsoft.com/office/drawing/2014/main" id="{330F5328-A4E6-AC76-4627-FB90089BB6D8}"/>
-              </a:ext>
-            </a:extLst>
-          </p:cNvPr>
-          <p:cNvSpPr>
-            <a:spLocks noGrp="1"/>
-          </p:cNvSpPr>
-          <p:nvPr>
-            <p:ph type="title"/>
-          </p:nvPr>
-        </p:nvSpPr>
-        <p:spPr/>
-        <p:txBody>
-          <a:bodyPr/>
-          <a:lstStyle/>
-          <a:p>
-            <a:r>
-              <a:rPr lang="en-US" noProof="0" dirty="0"/>
-              <a:t>Distributed computing</a:t>
-            </a:r>
-          </a:p>
-        </p:txBody>
-      </p:sp>
-      <p:sp>
-        <p:nvSpPr>
-          <p:cNvPr id="3" name="Content Placeholder 2">
-            <a:extLst>
-              <a:ext uri="{FF2B5EF4-FFF2-40B4-BE49-F238E27FC236}">
-                <a16:creationId xmlns:a16="http://schemas.microsoft.com/office/drawing/2014/main" id="{3CA0AA2D-BF91-A9FE-E55F-A715C4DD0CC6}"/>
-              </a:ext>
-            </a:extLst>
-          </p:cNvPr>
-          <p:cNvSpPr>
-            <a:spLocks noGrp="1"/>
-          </p:cNvSpPr>
-          <p:nvPr>
-            <p:ph idx="1"/>
-          </p:nvPr>
-        </p:nvSpPr>
-        <p:spPr/>
-        <p:txBody>
-          <a:bodyPr/>
-          <a:lstStyle/>
-          <a:p>
-            <a:r>
-              <a:rPr lang="en-US" noProof="0" dirty="0"/>
-              <a:t>Many scientific computations rely on spreading the load to many nodes</a:t>
-            </a:r>
-          </a:p>
-          <a:p>
-            <a:r>
-              <a:rPr lang="en-US" noProof="0" dirty="0"/>
-              <a:t>Designing distributed computations further increases the challenge</a:t>
-            </a:r>
-          </a:p>
-          <a:p>
-            <a:r>
-              <a:rPr lang="en-US" noProof="0" dirty="0"/>
-              <a:t>Many communication patterns can be described using the same principles as layouts &amp; traversals</a:t>
-            </a:r>
-          </a:p>
-          <a:p>
-            <a:r>
-              <a:rPr lang="en-US" noProof="0" dirty="0"/>
-              <a:t>New abstraction: faster &amp; more flexible/convenient than </a:t>
-            </a:r>
-            <a:r>
-              <a:rPr lang="en-US" noProof="0" dirty="0" err="1"/>
-              <a:t>SotA</a:t>
-            </a:r>
-            <a:endParaRPr lang="en-US" noProof="0" dirty="0"/>
-          </a:p>
-          <a:p>
-            <a:pPr lvl="1"/>
-            <a:r>
-              <a:rPr lang="en-US" noProof="0" dirty="0"/>
-              <a:t>Automatically communicates the layout with the MPI backend</a:t>
-            </a:r>
-          </a:p>
-          <a:p>
-            <a:pPr lvl="1"/>
-            <a:r>
-              <a:rPr lang="en-US" dirty="0"/>
-              <a:t>Enables optimizing the layouts on each computation node seamlessly</a:t>
-            </a:r>
-            <a:endParaRPr lang="en-US" noProof="0" dirty="0"/>
-          </a:p>
-          <a:p>
-            <a:endParaRPr lang="en-US" noProof="0" dirty="0"/>
-          </a:p>
-        </p:txBody>
-      </p:sp>
-    </p:spTree>
-    <p:extLst>
-      <p:ext uri="{BB962C8B-B14F-4D97-AF65-F5344CB8AC3E}">
-        <p14:creationId xmlns:p14="http://schemas.microsoft.com/office/powerpoint/2010/main" val="199449863"/>
       </p:ext>
     </p:extLst>
   </p:cSld>
@@ -5005,7 +5237,7 @@
           <p:cNvPr id="2" name="Title 1">
             <a:extLst>
               <a:ext uri="{FF2B5EF4-FFF2-40B4-BE49-F238E27FC236}">
-                <a16:creationId xmlns:a16="http://schemas.microsoft.com/office/drawing/2014/main" id="{C4A9E796-E8D3-B4A5-DE7B-322F63386F74}"/>
+                <a16:creationId xmlns:a16="http://schemas.microsoft.com/office/drawing/2014/main" id="{330F5328-A4E6-AC76-4627-FB90089BB6D8}"/>
               </a:ext>
             </a:extLst>
           </p:cNvPr>
@@ -5022,8 +5254,8 @@
           <a:lstStyle/>
           <a:p>
             <a:r>
-              <a:rPr lang="en-US" dirty="0"/>
-              <a:t>Results</a:t>
+              <a:rPr lang="en-US" noProof="0" dirty="0"/>
+              <a:t>Distributed computing</a:t>
             </a:r>
           </a:p>
         </p:txBody>
@@ -5033,7 +5265,7 @@
           <p:cNvPr id="3" name="Content Placeholder 2">
             <a:extLst>
               <a:ext uri="{FF2B5EF4-FFF2-40B4-BE49-F238E27FC236}">
-                <a16:creationId xmlns:a16="http://schemas.microsoft.com/office/drawing/2014/main" id="{DBE9D86D-018E-4C50-0EFA-D7C587660587}"/>
+                <a16:creationId xmlns:a16="http://schemas.microsoft.com/office/drawing/2014/main" id="{3CA0AA2D-BF91-A9FE-E55F-A715C4DD0CC6}"/>
               </a:ext>
             </a:extLst>
           </p:cNvPr>
@@ -5049,14 +5281,58 @@
           <a:bodyPr/>
           <a:lstStyle/>
           <a:p>
-            <a:endParaRPr lang="en-US"/>
+            <a:r>
+              <a:rPr lang="en-US" noProof="0" dirty="0"/>
+              <a:t>Many scientific computations rely on spreading the load to many nodes</a:t>
+            </a:r>
+          </a:p>
+          <a:p>
+            <a:r>
+              <a:rPr lang="en-US" noProof="0" dirty="0"/>
+              <a:t>Designing distributed computations further increases the challenge</a:t>
+            </a:r>
+          </a:p>
+          <a:p>
+            <a:r>
+              <a:rPr lang="en-US" noProof="0" dirty="0"/>
+              <a:t>Many communication patterns can be described using the same principles as layouts &amp; traversals</a:t>
+            </a:r>
+          </a:p>
+          <a:p>
+            <a:r>
+              <a:rPr lang="en-US" noProof="0" dirty="0"/>
+              <a:t>New abstraction: faster &amp; more flexible/convenient than </a:t>
+            </a:r>
+            <a:r>
+              <a:rPr lang="en-US" noProof="0" dirty="0" err="1"/>
+              <a:t>SotA</a:t>
+            </a:r>
+            <a:endParaRPr lang="en-US" noProof="0" dirty="0"/>
+          </a:p>
+          <a:p>
+            <a:pPr lvl="1"/>
+            <a:r>
+              <a:rPr lang="en-US" noProof="0" dirty="0"/>
+              <a:t>Automatically communicates the layout with the MPI backend</a:t>
+            </a:r>
+          </a:p>
+          <a:p>
+            <a:pPr lvl="1"/>
+            <a:r>
+              <a:rPr lang="en-US" dirty="0"/>
+              <a:t>Enables optimizing the layouts on each computation node seamlessly</a:t>
+            </a:r>
+            <a:endParaRPr lang="en-US" noProof="0" dirty="0"/>
+          </a:p>
+          <a:p>
+            <a:endParaRPr lang="en-US" noProof="0" dirty="0"/>
           </a:p>
         </p:txBody>
       </p:sp>
     </p:spTree>
     <p:extLst>
       <p:ext uri="{BB962C8B-B14F-4D97-AF65-F5344CB8AC3E}">
-        <p14:creationId xmlns:p14="http://schemas.microsoft.com/office/powerpoint/2010/main" val="202421867"/>
+        <p14:creationId xmlns:p14="http://schemas.microsoft.com/office/powerpoint/2010/main" val="199449863"/>
       </p:ext>
     </p:extLst>
   </p:cSld>
@@ -5088,7 +5364,7 @@
           <p:cNvPr id="2" name="Title 1">
             <a:extLst>
               <a:ext uri="{FF2B5EF4-FFF2-40B4-BE49-F238E27FC236}">
-                <a16:creationId xmlns:a16="http://schemas.microsoft.com/office/drawing/2014/main" id="{FDB924F1-4B00-84E0-3832-4B100046AF51}"/>
+                <a16:creationId xmlns:a16="http://schemas.microsoft.com/office/drawing/2014/main" id="{C4A9E796-E8D3-B4A5-DE7B-322F63386F74}"/>
               </a:ext>
             </a:extLst>
           </p:cNvPr>
@@ -5105,8 +5381,8 @@
           <a:lstStyle/>
           <a:p>
             <a:r>
-              <a:rPr lang="en-US" noProof="0" dirty="0"/>
-              <a:t>Cellular automata</a:t>
+              <a:rPr lang="en-US" dirty="0"/>
+              <a:t>Results</a:t>
             </a:r>
           </a:p>
         </p:txBody>
@@ -5116,7 +5392,7 @@
           <p:cNvPr id="3" name="Content Placeholder 2">
             <a:extLst>
               <a:ext uri="{FF2B5EF4-FFF2-40B4-BE49-F238E27FC236}">
-                <a16:creationId xmlns:a16="http://schemas.microsoft.com/office/drawing/2014/main" id="{F22AF8FD-4C12-AFD8-ED43-50529A45C04D}"/>
+                <a16:creationId xmlns:a16="http://schemas.microsoft.com/office/drawing/2014/main" id="{DBE9D86D-018E-4C50-0EFA-D7C587660587}"/>
               </a:ext>
             </a:extLst>
           </p:cNvPr>
@@ -5132,59 +5408,14 @@
           <a:bodyPr/>
           <a:lstStyle/>
           <a:p>
-            <a:r>
-              <a:rPr lang="en-US" noProof="0" dirty="0"/>
-              <a:t>We noticed that CA commonly benefit from </a:t>
-            </a:r>
-            <a:r>
-              <a:rPr lang="en-US" noProof="0" dirty="0" err="1"/>
-              <a:t>templatable</a:t>
-            </a:r>
-            <a:r>
-              <a:rPr lang="en-US" noProof="0" dirty="0"/>
-              <a:t> design decisions</a:t>
-            </a:r>
-          </a:p>
-          <a:p>
-            <a:pPr lvl="1"/>
-            <a:r>
-              <a:rPr lang="en-US" dirty="0"/>
-              <a:t>Layout &amp; encoding options (! bit-packing)</a:t>
-            </a:r>
-          </a:p>
-          <a:p>
-            <a:pPr lvl="1"/>
-            <a:r>
-              <a:rPr lang="en-US" dirty="0"/>
-              <a:t>Evaluation options (! bit-wise vectorization)</a:t>
-            </a:r>
-          </a:p>
-          <a:p>
-            <a:pPr lvl="1"/>
-            <a:r>
-              <a:rPr lang="en-US" noProof="0" dirty="0"/>
-              <a:t>Traversal options (incl. parallelism)</a:t>
-            </a:r>
-          </a:p>
-          <a:p>
-            <a:r>
-              <a:rPr lang="en-US" noProof="0" dirty="0"/>
-              <a:t>Agnostic design of CA computation rules</a:t>
-            </a:r>
-          </a:p>
-          <a:p>
-            <a:r>
-              <a:rPr lang="en-US" dirty="0"/>
-              <a:t>Faster development, experimentation (optimization)</a:t>
-            </a:r>
-            <a:endParaRPr lang="en-US" noProof="0" dirty="0"/>
+            <a:endParaRPr lang="en-US"/>
           </a:p>
         </p:txBody>
       </p:sp>
     </p:spTree>
     <p:extLst>
       <p:ext uri="{BB962C8B-B14F-4D97-AF65-F5344CB8AC3E}">
-        <p14:creationId xmlns:p14="http://schemas.microsoft.com/office/powerpoint/2010/main" val="3466036462"/>
+        <p14:creationId xmlns:p14="http://schemas.microsoft.com/office/powerpoint/2010/main" val="202421867"/>
       </p:ext>
     </p:extLst>
   </p:cSld>
@@ -5216,6 +5447,134 @@
           <p:cNvPr id="2" name="Title 1">
             <a:extLst>
               <a:ext uri="{FF2B5EF4-FFF2-40B4-BE49-F238E27FC236}">
+                <a16:creationId xmlns:a16="http://schemas.microsoft.com/office/drawing/2014/main" id="{FDB924F1-4B00-84E0-3832-4B100046AF51}"/>
+              </a:ext>
+            </a:extLst>
+          </p:cNvPr>
+          <p:cNvSpPr>
+            <a:spLocks noGrp="1"/>
+          </p:cNvSpPr>
+          <p:nvPr>
+            <p:ph type="title"/>
+          </p:nvPr>
+        </p:nvSpPr>
+        <p:spPr/>
+        <p:txBody>
+          <a:bodyPr/>
+          <a:lstStyle/>
+          <a:p>
+            <a:r>
+              <a:rPr lang="en-US" noProof="0" dirty="0"/>
+              <a:t>Cellular automata</a:t>
+            </a:r>
+          </a:p>
+        </p:txBody>
+      </p:sp>
+      <p:sp>
+        <p:nvSpPr>
+          <p:cNvPr id="3" name="Content Placeholder 2">
+            <a:extLst>
+              <a:ext uri="{FF2B5EF4-FFF2-40B4-BE49-F238E27FC236}">
+                <a16:creationId xmlns:a16="http://schemas.microsoft.com/office/drawing/2014/main" id="{F22AF8FD-4C12-AFD8-ED43-50529A45C04D}"/>
+              </a:ext>
+            </a:extLst>
+          </p:cNvPr>
+          <p:cNvSpPr>
+            <a:spLocks noGrp="1"/>
+          </p:cNvSpPr>
+          <p:nvPr>
+            <p:ph idx="1"/>
+          </p:nvPr>
+        </p:nvSpPr>
+        <p:spPr/>
+        <p:txBody>
+          <a:bodyPr/>
+          <a:lstStyle/>
+          <a:p>
+            <a:r>
+              <a:rPr lang="en-US" noProof="0" dirty="0"/>
+              <a:t>We noticed that CA commonly benefit from </a:t>
+            </a:r>
+            <a:r>
+              <a:rPr lang="en-US" noProof="0" dirty="0" err="1"/>
+              <a:t>templatable</a:t>
+            </a:r>
+            <a:r>
+              <a:rPr lang="en-US" noProof="0" dirty="0"/>
+              <a:t> design decisions</a:t>
+            </a:r>
+          </a:p>
+          <a:p>
+            <a:pPr lvl="1"/>
+            <a:r>
+              <a:rPr lang="en-US" dirty="0"/>
+              <a:t>Layout &amp; encoding options (! bit-packing)</a:t>
+            </a:r>
+          </a:p>
+          <a:p>
+            <a:pPr lvl="1"/>
+            <a:r>
+              <a:rPr lang="en-US" dirty="0"/>
+              <a:t>Evaluation options (! bit-wise vectorization)</a:t>
+            </a:r>
+          </a:p>
+          <a:p>
+            <a:pPr lvl="1"/>
+            <a:r>
+              <a:rPr lang="en-US" noProof="0" dirty="0"/>
+              <a:t>Traversal options (incl. parallelism)</a:t>
+            </a:r>
+          </a:p>
+          <a:p>
+            <a:r>
+              <a:rPr lang="en-US" noProof="0" dirty="0"/>
+              <a:t>Agnostic design of CA computation rules</a:t>
+            </a:r>
+          </a:p>
+          <a:p>
+            <a:r>
+              <a:rPr lang="en-US" dirty="0"/>
+              <a:t>Faster development, experimentation (optimization)</a:t>
+            </a:r>
+            <a:endParaRPr lang="en-US" noProof="0" dirty="0"/>
+          </a:p>
+        </p:txBody>
+      </p:sp>
+    </p:spTree>
+    <p:extLst>
+      <p:ext uri="{BB962C8B-B14F-4D97-AF65-F5344CB8AC3E}">
+        <p14:creationId xmlns:p14="http://schemas.microsoft.com/office/powerpoint/2010/main" val="3466036462"/>
+      </p:ext>
+    </p:extLst>
+  </p:cSld>
+  <p:clrMapOvr>
+    <a:masterClrMapping/>
+  </p:clrMapOvr>
+</p:sld>
+</file>
+
+<file path=ppt/slides/slide17.xml><?xml version="1.0" encoding="utf-8"?>
+<p:sld xmlns:a="http://schemas.openxmlformats.org/drawingml/2006/main" xmlns:r="http://schemas.openxmlformats.org/officeDocument/2006/relationships" xmlns:p="http://schemas.openxmlformats.org/presentationml/2006/main">
+  <p:cSld>
+    <p:spTree>
+      <p:nvGrpSpPr>
+        <p:cNvPr id="1" name=""/>
+        <p:cNvGrpSpPr/>
+        <p:nvPr/>
+      </p:nvGrpSpPr>
+      <p:grpSpPr>
+        <a:xfrm>
+          <a:off x="0" y="0"/>
+          <a:ext cx="0" cy="0"/>
+          <a:chOff x="0" y="0"/>
+          <a:chExt cx="0" cy="0"/>
+        </a:xfrm>
+      </p:grpSpPr>
+      <p:sp>
+        <p:nvSpPr>
+          <p:cNvPr id="2" name="Title 1">
+            <a:extLst>
+              <a:ext uri="{FF2B5EF4-FFF2-40B4-BE49-F238E27FC236}">
                 <a16:creationId xmlns:a16="http://schemas.microsoft.com/office/drawing/2014/main" id="{04F59CE6-2253-EE24-67C6-8EB494EB84BC}"/>
               </a:ext>
             </a:extLst>
@@ -5277,7 +5636,7 @@
 </p:sld>
 </file>
 
-<file path=ppt/slides/slide17.xml><?xml version="1.0" encoding="utf-8"?>
+<file path=ppt/slides/slide18.xml><?xml version="1.0" encoding="utf-8"?>
 <p:sld xmlns:a="http://schemas.openxmlformats.org/drawingml/2006/main" xmlns:r="http://schemas.openxmlformats.org/officeDocument/2006/relationships" xmlns:p="http://schemas.openxmlformats.org/presentationml/2006/main" show="0">
   <p:cSld>
     <p:spTree>
@@ -5360,147 +5719,6 @@
     <p:extLst>
       <p:ext uri="{BB962C8B-B14F-4D97-AF65-F5344CB8AC3E}">
         <p14:creationId xmlns:p14="http://schemas.microsoft.com/office/powerpoint/2010/main" val="645810162"/>
-      </p:ext>
-    </p:extLst>
-  </p:cSld>
-  <p:clrMapOvr>
-    <a:masterClrMapping/>
-  </p:clrMapOvr>
-</p:sld>
-</file>
-
-<file path=ppt/slides/slide18.xml><?xml version="1.0" encoding="utf-8"?>
-<p:sld xmlns:a="http://schemas.openxmlformats.org/drawingml/2006/main" xmlns:r="http://schemas.openxmlformats.org/officeDocument/2006/relationships" xmlns:p="http://schemas.openxmlformats.org/presentationml/2006/main">
-  <p:cSld>
-    <p:spTree>
-      <p:nvGrpSpPr>
-        <p:cNvPr id="1" name=""/>
-        <p:cNvGrpSpPr/>
-        <p:nvPr/>
-      </p:nvGrpSpPr>
-      <p:grpSpPr>
-        <a:xfrm>
-          <a:off x="0" y="0"/>
-          <a:ext cx="0" cy="0"/>
-          <a:chOff x="0" y="0"/>
-          <a:chExt cx="0" cy="0"/>
-        </a:xfrm>
-      </p:grpSpPr>
-      <p:sp>
-        <p:nvSpPr>
-          <p:cNvPr id="2" name="Title 1">
-            <a:extLst>
-              <a:ext uri="{FF2B5EF4-FFF2-40B4-BE49-F238E27FC236}">
-                <a16:creationId xmlns:a16="http://schemas.microsoft.com/office/drawing/2014/main" id="{A2284D79-2E52-80F7-0541-30A0EEC45CA4}"/>
-              </a:ext>
-            </a:extLst>
-          </p:cNvPr>
-          <p:cNvSpPr>
-            <a:spLocks noGrp="1"/>
-          </p:cNvSpPr>
-          <p:nvPr>
-            <p:ph type="title"/>
-          </p:nvPr>
-        </p:nvSpPr>
-        <p:spPr/>
-        <p:txBody>
-          <a:bodyPr/>
-          <a:lstStyle/>
-          <a:p>
-            <a:r>
-              <a:rPr lang="en-US" noProof="0" dirty="0"/>
-              <a:t>Tutoring LLMs</a:t>
-            </a:r>
-          </a:p>
-        </p:txBody>
-      </p:sp>
-      <p:sp>
-        <p:nvSpPr>
-          <p:cNvPr id="3" name="Content Placeholder 2">
-            <a:extLst>
-              <a:ext uri="{FF2B5EF4-FFF2-40B4-BE49-F238E27FC236}">
-                <a16:creationId xmlns:a16="http://schemas.microsoft.com/office/drawing/2014/main" id="{5EC62719-077B-686B-2F9B-914035C8221C}"/>
-              </a:ext>
-            </a:extLst>
-          </p:cNvPr>
-          <p:cNvSpPr>
-            <a:spLocks noGrp="1"/>
-          </p:cNvSpPr>
-          <p:nvPr>
-            <p:ph idx="1"/>
-          </p:nvPr>
-        </p:nvSpPr>
-        <p:spPr/>
-        <p:txBody>
-          <a:bodyPr>
-            <a:normAutofit fontScale="92500" lnSpcReduction="20000"/>
-          </a:bodyPr>
-          <a:lstStyle/>
-          <a:p>
-            <a:r>
-              <a:rPr lang="en-US" noProof="0" dirty="0"/>
-              <a:t>The goal was always better automation/generalization of design and tuning</a:t>
-            </a:r>
-          </a:p>
-          <a:p>
-            <a:r>
-              <a:rPr lang="en-US" dirty="0"/>
-              <a:t>LLMs started to be surprisingly competent code generators</a:t>
-            </a:r>
-          </a:p>
-          <a:p>
-            <a:pPr lvl="1"/>
-            <a:r>
-              <a:rPr lang="en-US" noProof="0" dirty="0"/>
-              <a:t>Not reliable, but extremely flexible, generalizable, simple to use (e.g., understanding natural language)</a:t>
-            </a:r>
-          </a:p>
-          <a:p>
-            <a:r>
-              <a:rPr lang="en-US" dirty="0"/>
-              <a:t>Core assumption for the study: LLMs are not very good in high-</a:t>
-            </a:r>
-            <a:r>
-              <a:rPr lang="en-US" dirty="0" err="1"/>
-              <a:t>lvl</a:t>
-            </a:r>
-            <a:r>
-              <a:rPr lang="en-US" dirty="0"/>
-              <a:t> decisions</a:t>
-            </a:r>
-          </a:p>
-          <a:p>
-            <a:r>
-              <a:rPr lang="en-US" noProof="0" dirty="0"/>
-              <a:t>Tutoring = improving quality of generated code by design suggestions/directions</a:t>
-            </a:r>
-          </a:p>
-          <a:p>
-            <a:r>
-              <a:rPr lang="en-US" dirty="0"/>
-              <a:t>Key findings:</a:t>
-            </a:r>
-          </a:p>
-          <a:p>
-            <a:pPr lvl="1"/>
-            <a:r>
-              <a:rPr lang="en-US" dirty="0"/>
-              <a:t>Intricate relationship between algorithm complexity and this effect on an LLM</a:t>
-            </a:r>
-          </a:p>
-          <a:p>
-            <a:pPr lvl="1"/>
-            <a:r>
-              <a:rPr lang="en-US" noProof="0" dirty="0"/>
-              <a:t>Improvement over time: the effect changes with each new model</a:t>
-            </a:r>
-          </a:p>
-        </p:txBody>
-      </p:sp>
-    </p:spTree>
-    <p:extLst>
-      <p:ext uri="{BB962C8B-B14F-4D97-AF65-F5344CB8AC3E}">
-        <p14:creationId xmlns:p14="http://schemas.microsoft.com/office/powerpoint/2010/main" val="2667122292"/>
       </p:ext>
     </p:extLst>
   </p:cSld>
@@ -5532,7 +5750,7 @@
           <p:cNvPr id="2" name="Title 1">
             <a:extLst>
               <a:ext uri="{FF2B5EF4-FFF2-40B4-BE49-F238E27FC236}">
-                <a16:creationId xmlns:a16="http://schemas.microsoft.com/office/drawing/2014/main" id="{F35C7E3E-09C8-2B79-8EE7-B8D1557191BE}"/>
+                <a16:creationId xmlns:a16="http://schemas.microsoft.com/office/drawing/2014/main" id="{A2284D79-2E52-80F7-0541-30A0EEC45CA4}"/>
               </a:ext>
             </a:extLst>
           </p:cNvPr>
@@ -5550,7 +5768,7 @@
           <a:p>
             <a:r>
               <a:rPr lang="en-US" noProof="0" dirty="0"/>
-              <a:t>LLMs and abstractions</a:t>
+              <a:t>Tutoring LLMs</a:t>
             </a:r>
           </a:p>
         </p:txBody>
@@ -5560,7 +5778,7 @@
           <p:cNvPr id="3" name="Content Placeholder 2">
             <a:extLst>
               <a:ext uri="{FF2B5EF4-FFF2-40B4-BE49-F238E27FC236}">
-                <a16:creationId xmlns:a16="http://schemas.microsoft.com/office/drawing/2014/main" id="{DAF33F66-B59C-C15E-3BD1-85602E9A1F9E}"/>
+                <a16:creationId xmlns:a16="http://schemas.microsoft.com/office/drawing/2014/main" id="{5EC62719-077B-686B-2F9B-914035C8221C}"/>
               </a:ext>
             </a:extLst>
           </p:cNvPr>
@@ -5573,12 +5791,47 @@
         </p:nvSpPr>
         <p:spPr/>
         <p:txBody>
-          <a:bodyPr/>
+          <a:bodyPr>
+            <a:normAutofit fontScale="92500" lnSpcReduction="20000"/>
+          </a:bodyPr>
           <a:lstStyle/>
           <a:p>
             <a:r>
               <a:rPr lang="en-US" noProof="0" dirty="0"/>
-              <a:t>Key question: Layout- and traversal-agnostic abstractions help humans; do they help LLMs as well?</a:t>
+              <a:t>The goal was always better automation/generalization of design and tuning</a:t>
+            </a:r>
+          </a:p>
+          <a:p>
+            <a:r>
+              <a:rPr lang="en-US" dirty="0"/>
+              <a:t>LLMs started to be surprisingly competent code generators</a:t>
+            </a:r>
+          </a:p>
+          <a:p>
+            <a:pPr lvl="1"/>
+            <a:r>
+              <a:rPr lang="en-US" noProof="0" dirty="0"/>
+              <a:t>Not reliable, but extremely flexible, generalizable, simple to use (e.g., understanding natural language)</a:t>
+            </a:r>
+          </a:p>
+          <a:p>
+            <a:r>
+              <a:rPr lang="en-US" dirty="0"/>
+              <a:t>Core assumption for the study: LLMs are not very good in high-</a:t>
+            </a:r>
+            <a:r>
+              <a:rPr lang="en-US" dirty="0" err="1"/>
+              <a:t>lvl</a:t>
+            </a:r>
+            <a:r>
+              <a:rPr lang="en-US" dirty="0"/>
+              <a:t> decisions</a:t>
+            </a:r>
+          </a:p>
+          <a:p>
+            <a:r>
+              <a:rPr lang="en-US" noProof="0" dirty="0"/>
+              <a:t>Tutoring = improving quality of generated code by design suggestions/directions</a:t>
             </a:r>
           </a:p>
           <a:p>
@@ -5590,27 +5843,23 @@
           <a:p>
             <a:pPr lvl="1"/>
             <a:r>
+              <a:rPr lang="en-US" dirty="0"/>
+              <a:t>Intricate relationship between algorithm complexity and this effect on an LLM</a:t>
+            </a:r>
+          </a:p>
+          <a:p>
+            <a:pPr lvl="1"/>
+            <a:r>
               <a:rPr lang="en-US" noProof="0" dirty="0"/>
-              <a:t>Prompt specificity improves results much more</a:t>
-            </a:r>
-          </a:p>
-          <a:p>
-            <a:pPr lvl="1"/>
-            <a:r>
-              <a:rPr lang="en-US" dirty="0"/>
-              <a:t>LLMs more competent in pure C/C++</a:t>
-            </a:r>
-          </a:p>
-          <a:p>
-            <a:pPr lvl="1"/>
-            <a:endParaRPr lang="en-US" noProof="0" dirty="0"/>
+              <a:t>Improvement over time: the effect changes with each new model</a:t>
+            </a:r>
           </a:p>
         </p:txBody>
       </p:sp>
     </p:spTree>
     <p:extLst>
       <p:ext uri="{BB962C8B-B14F-4D97-AF65-F5344CB8AC3E}">
-        <p14:creationId xmlns:p14="http://schemas.microsoft.com/office/powerpoint/2010/main" val="965653160"/>
+        <p14:creationId xmlns:p14="http://schemas.microsoft.com/office/powerpoint/2010/main" val="2667122292"/>
       </p:ext>
     </p:extLst>
   </p:cSld>
@@ -5933,6 +6182,116 @@
 </file>
 
 <file path=ppt/slides/slide20.xml><?xml version="1.0" encoding="utf-8"?>
+<p:sld xmlns:a="http://schemas.openxmlformats.org/drawingml/2006/main" xmlns:r="http://schemas.openxmlformats.org/officeDocument/2006/relationships" xmlns:p="http://schemas.openxmlformats.org/presentationml/2006/main">
+  <p:cSld>
+    <p:spTree>
+      <p:nvGrpSpPr>
+        <p:cNvPr id="1" name=""/>
+        <p:cNvGrpSpPr/>
+        <p:nvPr/>
+      </p:nvGrpSpPr>
+      <p:grpSpPr>
+        <a:xfrm>
+          <a:off x="0" y="0"/>
+          <a:ext cx="0" cy="0"/>
+          <a:chOff x="0" y="0"/>
+          <a:chExt cx="0" cy="0"/>
+        </a:xfrm>
+      </p:grpSpPr>
+      <p:sp>
+        <p:nvSpPr>
+          <p:cNvPr id="2" name="Title 1">
+            <a:extLst>
+              <a:ext uri="{FF2B5EF4-FFF2-40B4-BE49-F238E27FC236}">
+                <a16:creationId xmlns:a16="http://schemas.microsoft.com/office/drawing/2014/main" id="{F35C7E3E-09C8-2B79-8EE7-B8D1557191BE}"/>
+              </a:ext>
+            </a:extLst>
+          </p:cNvPr>
+          <p:cNvSpPr>
+            <a:spLocks noGrp="1"/>
+          </p:cNvSpPr>
+          <p:nvPr>
+            <p:ph type="title"/>
+          </p:nvPr>
+        </p:nvSpPr>
+        <p:spPr/>
+        <p:txBody>
+          <a:bodyPr/>
+          <a:lstStyle/>
+          <a:p>
+            <a:r>
+              <a:rPr lang="en-US" noProof="0" dirty="0"/>
+              <a:t>LLMs and abstractions</a:t>
+            </a:r>
+          </a:p>
+        </p:txBody>
+      </p:sp>
+      <p:sp>
+        <p:nvSpPr>
+          <p:cNvPr id="3" name="Content Placeholder 2">
+            <a:extLst>
+              <a:ext uri="{FF2B5EF4-FFF2-40B4-BE49-F238E27FC236}">
+                <a16:creationId xmlns:a16="http://schemas.microsoft.com/office/drawing/2014/main" id="{DAF33F66-B59C-C15E-3BD1-85602E9A1F9E}"/>
+              </a:ext>
+            </a:extLst>
+          </p:cNvPr>
+          <p:cNvSpPr>
+            <a:spLocks noGrp="1"/>
+          </p:cNvSpPr>
+          <p:nvPr>
+            <p:ph idx="1"/>
+          </p:nvPr>
+        </p:nvSpPr>
+        <p:spPr/>
+        <p:txBody>
+          <a:bodyPr/>
+          <a:lstStyle/>
+          <a:p>
+            <a:r>
+              <a:rPr lang="en-US" noProof="0" dirty="0"/>
+              <a:t>Key question: Layout- and traversal-agnostic abstractions help humans; do they help LLMs as well?</a:t>
+            </a:r>
+          </a:p>
+          <a:p>
+            <a:r>
+              <a:rPr lang="en-US" dirty="0"/>
+              <a:t>Key findings:</a:t>
+            </a:r>
+          </a:p>
+          <a:p>
+            <a:pPr lvl="1"/>
+            <a:r>
+              <a:rPr lang="en-US" noProof="0" dirty="0"/>
+              <a:t>Prompt specificity improves results much more</a:t>
+            </a:r>
+          </a:p>
+          <a:p>
+            <a:pPr lvl="1"/>
+            <a:r>
+              <a:rPr lang="en-US" dirty="0"/>
+              <a:t>LLMs more competent in pure C/C++</a:t>
+            </a:r>
+          </a:p>
+          <a:p>
+            <a:pPr lvl="1"/>
+            <a:endParaRPr lang="en-US" noProof="0" dirty="0"/>
+          </a:p>
+        </p:txBody>
+      </p:sp>
+    </p:spTree>
+    <p:extLst>
+      <p:ext uri="{BB962C8B-B14F-4D97-AF65-F5344CB8AC3E}">
+        <p14:creationId xmlns:p14="http://schemas.microsoft.com/office/powerpoint/2010/main" val="965653160"/>
+      </p:ext>
+    </p:extLst>
+  </p:cSld>
+  <p:clrMapOvr>
+    <a:masterClrMapping/>
+  </p:clrMapOvr>
+</p:sld>
+</file>
+
+<file path=ppt/slides/slide21.xml><?xml version="1.0" encoding="utf-8"?>
 <p:sld xmlns:a="http://schemas.openxmlformats.org/drawingml/2006/main" xmlns:r="http://schemas.openxmlformats.org/officeDocument/2006/relationships" xmlns:p="http://schemas.openxmlformats.org/presentationml/2006/main" show="0">
   <p:cSld>
     <p:spTree>
@@ -6018,620 +6377,6 @@
     <p:extLst>
       <p:ext uri="{BB962C8B-B14F-4D97-AF65-F5344CB8AC3E}">
         <p14:creationId xmlns:p14="http://schemas.microsoft.com/office/powerpoint/2010/main" val="4085122203"/>
-      </p:ext>
-    </p:extLst>
-  </p:cSld>
-  <p:clrMapOvr>
-    <a:masterClrMapping/>
-  </p:clrMapOvr>
-</p:sld>
-</file>
-
-<file path=ppt/slides/slide21.xml><?xml version="1.0" encoding="utf-8"?>
-<p:sld xmlns:a="http://schemas.openxmlformats.org/drawingml/2006/main" xmlns:r="http://schemas.openxmlformats.org/officeDocument/2006/relationships" xmlns:p="http://schemas.openxmlformats.org/presentationml/2006/main">
-  <p:cSld>
-    <p:spTree>
-      <p:nvGrpSpPr>
-        <p:cNvPr id="1" name=""/>
-        <p:cNvGrpSpPr/>
-        <p:nvPr/>
-      </p:nvGrpSpPr>
-      <p:grpSpPr>
-        <a:xfrm>
-          <a:off x="0" y="0"/>
-          <a:ext cx="0" cy="0"/>
-          <a:chOff x="0" y="0"/>
-          <a:chExt cx="0" cy="0"/>
-        </a:xfrm>
-      </p:grpSpPr>
-      <p:sp>
-        <p:nvSpPr>
-          <p:cNvPr id="2" name="Title 1">
-            <a:extLst>
-              <a:ext uri="{FF2B5EF4-FFF2-40B4-BE49-F238E27FC236}">
-                <a16:creationId xmlns:a16="http://schemas.microsoft.com/office/drawing/2014/main" id="{6447B745-9B50-DD90-5161-BD2A06CEA44B}"/>
-              </a:ext>
-            </a:extLst>
-          </p:cNvPr>
-          <p:cNvSpPr>
-            <a:spLocks noGrp="1"/>
-          </p:cNvSpPr>
-          <p:nvPr>
-            <p:ph type="title"/>
-          </p:nvPr>
-        </p:nvSpPr>
-        <p:spPr/>
-        <p:txBody>
-          <a:bodyPr/>
-          <a:lstStyle/>
-          <a:p>
-            <a:r>
-              <a:rPr lang="en-US" noProof="0" dirty="0"/>
-              <a:t>Contribution map</a:t>
-            </a:r>
-          </a:p>
-        </p:txBody>
-      </p:sp>
-      <p:sp>
-        <p:nvSpPr>
-          <p:cNvPr id="5" name="Rectangle 4">
-            <a:extLst>
-              <a:ext uri="{FF2B5EF4-FFF2-40B4-BE49-F238E27FC236}">
-                <a16:creationId xmlns:a16="http://schemas.microsoft.com/office/drawing/2014/main" id="{CB7F8197-FC2F-9C2A-050C-CCCB46D86C79}"/>
-              </a:ext>
-            </a:extLst>
-          </p:cNvPr>
-          <p:cNvSpPr/>
-          <p:nvPr/>
-        </p:nvSpPr>
-        <p:spPr>
-          <a:xfrm>
-            <a:off x="4240490" y="1406732"/>
-            <a:ext cx="3711020" cy="914400"/>
-          </a:xfrm>
-          <a:prstGeom prst="rect">
-            <a:avLst/>
-          </a:prstGeom>
-        </p:spPr>
-        <p:style>
-          <a:lnRef idx="2">
-            <a:schemeClr val="accent1">
-              <a:shade val="15000"/>
-            </a:schemeClr>
-          </a:lnRef>
-          <a:fillRef idx="1">
-            <a:schemeClr val="accent1"/>
-          </a:fillRef>
-          <a:effectRef idx="0">
-            <a:schemeClr val="accent1"/>
-          </a:effectRef>
-          <a:fontRef idx="minor">
-            <a:schemeClr val="lt1"/>
-          </a:fontRef>
-        </p:style>
-        <p:txBody>
-          <a:bodyPr rtlCol="0" anchor="ctr"/>
-          <a:lstStyle/>
-          <a:p>
-            <a:pPr algn="ctr"/>
-            <a:r>
-              <a:rPr lang="en-US" noProof="0" dirty="0"/>
-              <a:t>Separate algorithm design from performance optimization</a:t>
-            </a:r>
-          </a:p>
-        </p:txBody>
-      </p:sp>
-      <p:sp>
-        <p:nvSpPr>
-          <p:cNvPr id="7" name="Rectangle 6">
-            <a:extLst>
-              <a:ext uri="{FF2B5EF4-FFF2-40B4-BE49-F238E27FC236}">
-                <a16:creationId xmlns:a16="http://schemas.microsoft.com/office/drawing/2014/main" id="{60EC2A1A-B720-84BC-76D5-4751C09EA61A}"/>
-              </a:ext>
-            </a:extLst>
-          </p:cNvPr>
-          <p:cNvSpPr/>
-          <p:nvPr/>
-        </p:nvSpPr>
-        <p:spPr>
-          <a:xfrm>
-            <a:off x="150074" y="2971800"/>
-            <a:ext cx="3711020" cy="914400"/>
-          </a:xfrm>
-          <a:prstGeom prst="rect">
-            <a:avLst/>
-          </a:prstGeom>
-        </p:spPr>
-        <p:style>
-          <a:lnRef idx="2">
-            <a:schemeClr val="accent1">
-              <a:shade val="15000"/>
-            </a:schemeClr>
-          </a:lnRef>
-          <a:fillRef idx="1">
-            <a:schemeClr val="accent1"/>
-          </a:fillRef>
-          <a:effectRef idx="0">
-            <a:schemeClr val="accent1"/>
-          </a:effectRef>
-          <a:fontRef idx="minor">
-            <a:schemeClr val="lt1"/>
-          </a:fontRef>
-        </p:style>
-        <p:txBody>
-          <a:bodyPr rtlCol="0" anchor="ctr"/>
-          <a:lstStyle/>
-          <a:p>
-            <a:pPr algn="ctr"/>
-            <a:r>
-              <a:rPr lang="en-US" noProof="0" dirty="0"/>
-              <a:t>Layout- and traversal-agnostic abstractions</a:t>
-            </a:r>
-          </a:p>
-        </p:txBody>
-      </p:sp>
-      <p:sp>
-        <p:nvSpPr>
-          <p:cNvPr id="9" name="Rectangle 8">
-            <a:extLst>
-              <a:ext uri="{FF2B5EF4-FFF2-40B4-BE49-F238E27FC236}">
-                <a16:creationId xmlns:a16="http://schemas.microsoft.com/office/drawing/2014/main" id="{6DB7F776-4EDC-09F4-F04A-E586FC4B4500}"/>
-              </a:ext>
-            </a:extLst>
-          </p:cNvPr>
-          <p:cNvSpPr/>
-          <p:nvPr/>
-        </p:nvSpPr>
-        <p:spPr>
-          <a:xfrm>
-            <a:off x="7840178" y="2971800"/>
-            <a:ext cx="3711020" cy="914400"/>
-          </a:xfrm>
-          <a:prstGeom prst="rect">
-            <a:avLst/>
-          </a:prstGeom>
-        </p:spPr>
-        <p:style>
-          <a:lnRef idx="2">
-            <a:schemeClr val="accent1">
-              <a:shade val="15000"/>
-            </a:schemeClr>
-          </a:lnRef>
-          <a:fillRef idx="1">
-            <a:schemeClr val="accent1"/>
-          </a:fillRef>
-          <a:effectRef idx="0">
-            <a:schemeClr val="accent1"/>
-          </a:effectRef>
-          <a:fontRef idx="minor">
-            <a:schemeClr val="lt1"/>
-          </a:fontRef>
-        </p:style>
-        <p:txBody>
-          <a:bodyPr rtlCol="0" anchor="ctr"/>
-          <a:lstStyle/>
-          <a:p>
-            <a:pPr algn="ctr"/>
-            <a:r>
-              <a:rPr lang="en-US" noProof="0" dirty="0"/>
-              <a:t>LLM-assisted optimization</a:t>
-            </a:r>
-          </a:p>
-        </p:txBody>
-      </p:sp>
-      <p:sp>
-        <p:nvSpPr>
-          <p:cNvPr id="11" name="Rectangle 10">
-            <a:extLst>
-              <a:ext uri="{FF2B5EF4-FFF2-40B4-BE49-F238E27FC236}">
-                <a16:creationId xmlns:a16="http://schemas.microsoft.com/office/drawing/2014/main" id="{5B2B9BCB-5805-C1F1-AF45-681B37E6B83E}"/>
-              </a:ext>
-            </a:extLst>
-          </p:cNvPr>
-          <p:cNvSpPr/>
-          <p:nvPr/>
-        </p:nvSpPr>
-        <p:spPr>
-          <a:xfrm>
-            <a:off x="150074" y="4252912"/>
-            <a:ext cx="3711020" cy="914400"/>
-          </a:xfrm>
-          <a:prstGeom prst="rect">
-            <a:avLst/>
-          </a:prstGeom>
-        </p:spPr>
-        <p:style>
-          <a:lnRef idx="2">
-            <a:schemeClr val="accent1">
-              <a:shade val="15000"/>
-            </a:schemeClr>
-          </a:lnRef>
-          <a:fillRef idx="1">
-            <a:schemeClr val="accent1"/>
-          </a:fillRef>
-          <a:effectRef idx="0">
-            <a:schemeClr val="accent1"/>
-          </a:effectRef>
-          <a:fontRef idx="minor">
-            <a:schemeClr val="lt1"/>
-          </a:fontRef>
-        </p:style>
-        <p:txBody>
-          <a:bodyPr rtlCol="0" anchor="ctr"/>
-          <a:lstStyle/>
-          <a:p>
-            <a:pPr algn="ctr"/>
-            <a:r>
-              <a:rPr lang="en-US" noProof="0" dirty="0"/>
-              <a:t>Layout abstractions</a:t>
-            </a:r>
-          </a:p>
-        </p:txBody>
-      </p:sp>
-      <p:sp>
-        <p:nvSpPr>
-          <p:cNvPr id="13" name="Rectangle 12">
-            <a:extLst>
-              <a:ext uri="{FF2B5EF4-FFF2-40B4-BE49-F238E27FC236}">
-                <a16:creationId xmlns:a16="http://schemas.microsoft.com/office/drawing/2014/main" id="{31388E94-1EEB-E24E-1923-AA250880AF84}"/>
-              </a:ext>
-            </a:extLst>
-          </p:cNvPr>
-          <p:cNvSpPr/>
-          <p:nvPr/>
-        </p:nvSpPr>
-        <p:spPr>
-          <a:xfrm>
-            <a:off x="4240490" y="4252912"/>
-            <a:ext cx="3711020" cy="914400"/>
-          </a:xfrm>
-          <a:prstGeom prst="rect">
-            <a:avLst/>
-          </a:prstGeom>
-        </p:spPr>
-        <p:style>
-          <a:lnRef idx="2">
-            <a:schemeClr val="accent1">
-              <a:shade val="15000"/>
-            </a:schemeClr>
-          </a:lnRef>
-          <a:fillRef idx="1">
-            <a:schemeClr val="accent1"/>
-          </a:fillRef>
-          <a:effectRef idx="0">
-            <a:schemeClr val="accent1"/>
-          </a:effectRef>
-          <a:fontRef idx="minor">
-            <a:schemeClr val="lt1"/>
-          </a:fontRef>
-        </p:style>
-        <p:txBody>
-          <a:bodyPr rtlCol="0" anchor="ctr"/>
-          <a:lstStyle/>
-          <a:p>
-            <a:pPr algn="ctr"/>
-            <a:r>
-              <a:rPr lang="en-US" noProof="0" dirty="0"/>
-              <a:t>Traversal abstractions</a:t>
-            </a:r>
-          </a:p>
-        </p:txBody>
-      </p:sp>
-      <p:sp>
-        <p:nvSpPr>
-          <p:cNvPr id="15" name="Rectangle 14">
-            <a:extLst>
-              <a:ext uri="{FF2B5EF4-FFF2-40B4-BE49-F238E27FC236}">
-                <a16:creationId xmlns:a16="http://schemas.microsoft.com/office/drawing/2014/main" id="{DE8920A4-4430-6757-E41A-9BA9578DC80D}"/>
-              </a:ext>
-            </a:extLst>
-          </p:cNvPr>
-          <p:cNvSpPr/>
-          <p:nvPr/>
-        </p:nvSpPr>
-        <p:spPr>
-          <a:xfrm>
-            <a:off x="8330906" y="4252912"/>
-            <a:ext cx="3711020" cy="914400"/>
-          </a:xfrm>
-          <a:prstGeom prst="rect">
-            <a:avLst/>
-          </a:prstGeom>
-        </p:spPr>
-        <p:style>
-          <a:lnRef idx="2">
-            <a:schemeClr val="accent1">
-              <a:shade val="15000"/>
-            </a:schemeClr>
-          </a:lnRef>
-          <a:fillRef idx="1">
-            <a:schemeClr val="accent1"/>
-          </a:fillRef>
-          <a:effectRef idx="0">
-            <a:schemeClr val="accent1"/>
-          </a:effectRef>
-          <a:fontRef idx="minor">
-            <a:schemeClr val="lt1"/>
-          </a:fontRef>
-        </p:style>
-        <p:txBody>
-          <a:bodyPr rtlCol="0" anchor="ctr"/>
-          <a:lstStyle/>
-          <a:p>
-            <a:pPr algn="ctr"/>
-            <a:r>
-              <a:rPr lang="en-US" noProof="0" dirty="0"/>
-              <a:t>Practical aspects</a:t>
-            </a:r>
-          </a:p>
-        </p:txBody>
-      </p:sp>
-      <p:sp>
-        <p:nvSpPr>
-          <p:cNvPr id="17" name="Rectangle 16">
-            <a:extLst>
-              <a:ext uri="{FF2B5EF4-FFF2-40B4-BE49-F238E27FC236}">
-                <a16:creationId xmlns:a16="http://schemas.microsoft.com/office/drawing/2014/main" id="{D01E75A2-333B-DF95-544C-0ACF1B88882C}"/>
-              </a:ext>
-            </a:extLst>
-          </p:cNvPr>
-          <p:cNvSpPr/>
-          <p:nvPr/>
-        </p:nvSpPr>
-        <p:spPr>
-          <a:xfrm>
-            <a:off x="302474" y="5356288"/>
-            <a:ext cx="3711020" cy="914400"/>
-          </a:xfrm>
-          <a:prstGeom prst="rect">
-            <a:avLst/>
-          </a:prstGeom>
-        </p:spPr>
-        <p:style>
-          <a:lnRef idx="2">
-            <a:schemeClr val="accent1">
-              <a:shade val="15000"/>
-            </a:schemeClr>
-          </a:lnRef>
-          <a:fillRef idx="1">
-            <a:schemeClr val="accent1"/>
-          </a:fillRef>
-          <a:effectRef idx="0">
-            <a:schemeClr val="accent1"/>
-          </a:effectRef>
-          <a:fontRef idx="minor">
-            <a:schemeClr val="lt1"/>
-          </a:fontRef>
-        </p:style>
-        <p:txBody>
-          <a:bodyPr rtlCol="0" anchor="ctr"/>
-          <a:lstStyle/>
-          <a:p>
-            <a:pPr algn="ctr"/>
-            <a:r>
-              <a:rPr lang="en-US" noProof="0" dirty="0" err="1"/>
-              <a:t>Noarr</a:t>
-            </a:r>
-            <a:r>
-              <a:rPr lang="en-US" noProof="0" dirty="0"/>
-              <a:t> structures</a:t>
-            </a:r>
-          </a:p>
-        </p:txBody>
-      </p:sp>
-      <p:sp>
-        <p:nvSpPr>
-          <p:cNvPr id="19" name="Rectangle 18">
-            <a:extLst>
-              <a:ext uri="{FF2B5EF4-FFF2-40B4-BE49-F238E27FC236}">
-                <a16:creationId xmlns:a16="http://schemas.microsoft.com/office/drawing/2014/main" id="{67736357-2F90-D241-51F6-C03C797EFFC2}"/>
-              </a:ext>
-            </a:extLst>
-          </p:cNvPr>
-          <p:cNvSpPr/>
-          <p:nvPr/>
-        </p:nvSpPr>
-        <p:spPr>
-          <a:xfrm>
-            <a:off x="454874" y="5508688"/>
-            <a:ext cx="3711020" cy="914400"/>
-          </a:xfrm>
-          <a:prstGeom prst="rect">
-            <a:avLst/>
-          </a:prstGeom>
-        </p:spPr>
-        <p:style>
-          <a:lnRef idx="2">
-            <a:schemeClr val="accent1">
-              <a:shade val="15000"/>
-            </a:schemeClr>
-          </a:lnRef>
-          <a:fillRef idx="1">
-            <a:schemeClr val="accent1"/>
-          </a:fillRef>
-          <a:effectRef idx="0">
-            <a:schemeClr val="accent1"/>
-          </a:effectRef>
-          <a:fontRef idx="minor">
-            <a:schemeClr val="lt1"/>
-          </a:fontRef>
-        </p:style>
-        <p:txBody>
-          <a:bodyPr rtlCol="0" anchor="ctr"/>
-          <a:lstStyle/>
-          <a:p>
-            <a:pPr algn="ctr"/>
-            <a:r>
-              <a:rPr lang="en-US" noProof="0" dirty="0" err="1"/>
-              <a:t>Noarr</a:t>
-            </a:r>
-            <a:r>
-              <a:rPr lang="en-US" noProof="0" dirty="0"/>
-              <a:t> traversers</a:t>
-            </a:r>
-          </a:p>
-        </p:txBody>
-      </p:sp>
-      <p:sp>
-        <p:nvSpPr>
-          <p:cNvPr id="21" name="Rectangle 20">
-            <a:extLst>
-              <a:ext uri="{FF2B5EF4-FFF2-40B4-BE49-F238E27FC236}">
-                <a16:creationId xmlns:a16="http://schemas.microsoft.com/office/drawing/2014/main" id="{9EC73339-8B3D-25F4-18D5-E5821CB7CE8B}"/>
-              </a:ext>
-            </a:extLst>
-          </p:cNvPr>
-          <p:cNvSpPr/>
-          <p:nvPr/>
-        </p:nvSpPr>
-        <p:spPr>
-          <a:xfrm>
-            <a:off x="607274" y="5661088"/>
-            <a:ext cx="3711020" cy="914400"/>
-          </a:xfrm>
-          <a:prstGeom prst="rect">
-            <a:avLst/>
-          </a:prstGeom>
-        </p:spPr>
-        <p:style>
-          <a:lnRef idx="2">
-            <a:schemeClr val="accent1">
-              <a:shade val="15000"/>
-            </a:schemeClr>
-          </a:lnRef>
-          <a:fillRef idx="1">
-            <a:schemeClr val="accent1"/>
-          </a:fillRef>
-          <a:effectRef idx="0">
-            <a:schemeClr val="accent1"/>
-          </a:effectRef>
-          <a:fontRef idx="minor">
-            <a:schemeClr val="lt1"/>
-          </a:fontRef>
-        </p:style>
-        <p:txBody>
-          <a:bodyPr rtlCol="0" anchor="ctr"/>
-          <a:lstStyle/>
-          <a:p>
-            <a:pPr algn="ctr"/>
-            <a:r>
-              <a:rPr lang="en-US" noProof="0" dirty="0" err="1"/>
-              <a:t>Noarr</a:t>
-            </a:r>
-            <a:r>
-              <a:rPr lang="en-US" noProof="0" dirty="0"/>
-              <a:t> tuning</a:t>
-            </a:r>
-          </a:p>
-        </p:txBody>
-      </p:sp>
-      <p:sp>
-        <p:nvSpPr>
-          <p:cNvPr id="23" name="Rectangle 22">
-            <a:extLst>
-              <a:ext uri="{FF2B5EF4-FFF2-40B4-BE49-F238E27FC236}">
-                <a16:creationId xmlns:a16="http://schemas.microsoft.com/office/drawing/2014/main" id="{63EC4F51-D7C0-1DFC-E94E-75AE185B7CC1}"/>
-              </a:ext>
-            </a:extLst>
-          </p:cNvPr>
-          <p:cNvSpPr/>
-          <p:nvPr/>
-        </p:nvSpPr>
-        <p:spPr>
-          <a:xfrm>
-            <a:off x="759674" y="5813488"/>
-            <a:ext cx="3711020" cy="914400"/>
-          </a:xfrm>
-          <a:prstGeom prst="rect">
-            <a:avLst/>
-          </a:prstGeom>
-        </p:spPr>
-        <p:style>
-          <a:lnRef idx="2">
-            <a:schemeClr val="accent1">
-              <a:shade val="15000"/>
-            </a:schemeClr>
-          </a:lnRef>
-          <a:fillRef idx="1">
-            <a:schemeClr val="accent1"/>
-          </a:fillRef>
-          <a:effectRef idx="0">
-            <a:schemeClr val="accent1"/>
-          </a:effectRef>
-          <a:fontRef idx="minor">
-            <a:schemeClr val="lt1"/>
-          </a:fontRef>
-        </p:style>
-        <p:txBody>
-          <a:bodyPr rtlCol="0" anchor="ctr"/>
-          <a:lstStyle/>
-          <a:p>
-            <a:pPr algn="ctr"/>
-            <a:r>
-              <a:rPr lang="en-US" noProof="0" dirty="0" err="1"/>
-              <a:t>Noarr</a:t>
-            </a:r>
-            <a:r>
-              <a:rPr lang="en-US" noProof="0" dirty="0"/>
-              <a:t>-MPI</a:t>
-            </a:r>
-          </a:p>
-        </p:txBody>
-      </p:sp>
-      <p:sp>
-        <p:nvSpPr>
-          <p:cNvPr id="25" name="Rectangle 24">
-            <a:extLst>
-              <a:ext uri="{FF2B5EF4-FFF2-40B4-BE49-F238E27FC236}">
-                <a16:creationId xmlns:a16="http://schemas.microsoft.com/office/drawing/2014/main" id="{B7D64168-E19F-C04D-293D-CB07E85D29DA}"/>
-              </a:ext>
-            </a:extLst>
-          </p:cNvPr>
-          <p:cNvSpPr/>
-          <p:nvPr/>
-        </p:nvSpPr>
-        <p:spPr>
-          <a:xfrm>
-            <a:off x="4853138" y="5424788"/>
-            <a:ext cx="3711020" cy="914400"/>
-          </a:xfrm>
-          <a:prstGeom prst="rect">
-            <a:avLst/>
-          </a:prstGeom>
-        </p:spPr>
-        <p:style>
-          <a:lnRef idx="2">
-            <a:schemeClr val="accent1">
-              <a:shade val="15000"/>
-            </a:schemeClr>
-          </a:lnRef>
-          <a:fillRef idx="1">
-            <a:schemeClr val="accent1"/>
-          </a:fillRef>
-          <a:effectRef idx="0">
-            <a:schemeClr val="accent1"/>
-          </a:effectRef>
-          <a:fontRef idx="minor">
-            <a:schemeClr val="lt1"/>
-          </a:fontRef>
-        </p:style>
-        <p:txBody>
-          <a:bodyPr rtlCol="0" anchor="ctr"/>
-          <a:lstStyle/>
-          <a:p>
-            <a:pPr algn="ctr"/>
-            <a:r>
-              <a:rPr lang="en-US" noProof="0" dirty="0" err="1"/>
-              <a:t>Cellato</a:t>
-            </a:r>
-            <a:endParaRPr lang="en-US" noProof="0" dirty="0"/>
-          </a:p>
-        </p:txBody>
-      </p:sp>
-    </p:spTree>
-    <p:extLst>
-      <p:ext uri="{BB962C8B-B14F-4D97-AF65-F5344CB8AC3E}">
-        <p14:creationId xmlns:p14="http://schemas.microsoft.com/office/powerpoint/2010/main" val="1745489699"/>
       </p:ext>
     </p:extLst>
   </p:cSld>
@@ -6663,6 +6408,620 @@
           <p:cNvPr id="2" name="Title 1">
             <a:extLst>
               <a:ext uri="{FF2B5EF4-FFF2-40B4-BE49-F238E27FC236}">
+                <a16:creationId xmlns:a16="http://schemas.microsoft.com/office/drawing/2014/main" id="{6447B745-9B50-DD90-5161-BD2A06CEA44B}"/>
+              </a:ext>
+            </a:extLst>
+          </p:cNvPr>
+          <p:cNvSpPr>
+            <a:spLocks noGrp="1"/>
+          </p:cNvSpPr>
+          <p:nvPr>
+            <p:ph type="title"/>
+          </p:nvPr>
+        </p:nvSpPr>
+        <p:spPr/>
+        <p:txBody>
+          <a:bodyPr/>
+          <a:lstStyle/>
+          <a:p>
+            <a:r>
+              <a:rPr lang="en-US" noProof="0" dirty="0"/>
+              <a:t>Contribution map</a:t>
+            </a:r>
+          </a:p>
+        </p:txBody>
+      </p:sp>
+      <p:sp>
+        <p:nvSpPr>
+          <p:cNvPr id="5" name="Rectangle 4">
+            <a:extLst>
+              <a:ext uri="{FF2B5EF4-FFF2-40B4-BE49-F238E27FC236}">
+                <a16:creationId xmlns:a16="http://schemas.microsoft.com/office/drawing/2014/main" id="{CB7F8197-FC2F-9C2A-050C-CCCB46D86C79}"/>
+              </a:ext>
+            </a:extLst>
+          </p:cNvPr>
+          <p:cNvSpPr/>
+          <p:nvPr/>
+        </p:nvSpPr>
+        <p:spPr>
+          <a:xfrm>
+            <a:off x="4240490" y="1406732"/>
+            <a:ext cx="3711020" cy="914400"/>
+          </a:xfrm>
+          <a:prstGeom prst="rect">
+            <a:avLst/>
+          </a:prstGeom>
+        </p:spPr>
+        <p:style>
+          <a:lnRef idx="2">
+            <a:schemeClr val="accent1">
+              <a:shade val="15000"/>
+            </a:schemeClr>
+          </a:lnRef>
+          <a:fillRef idx="1">
+            <a:schemeClr val="accent1"/>
+          </a:fillRef>
+          <a:effectRef idx="0">
+            <a:schemeClr val="accent1"/>
+          </a:effectRef>
+          <a:fontRef idx="minor">
+            <a:schemeClr val="lt1"/>
+          </a:fontRef>
+        </p:style>
+        <p:txBody>
+          <a:bodyPr rtlCol="0" anchor="ctr"/>
+          <a:lstStyle/>
+          <a:p>
+            <a:pPr algn="ctr"/>
+            <a:r>
+              <a:rPr lang="en-US" noProof="0" dirty="0"/>
+              <a:t>Separate algorithm design from performance optimization</a:t>
+            </a:r>
+          </a:p>
+        </p:txBody>
+      </p:sp>
+      <p:sp>
+        <p:nvSpPr>
+          <p:cNvPr id="7" name="Rectangle 6">
+            <a:extLst>
+              <a:ext uri="{FF2B5EF4-FFF2-40B4-BE49-F238E27FC236}">
+                <a16:creationId xmlns:a16="http://schemas.microsoft.com/office/drawing/2014/main" id="{60EC2A1A-B720-84BC-76D5-4751C09EA61A}"/>
+              </a:ext>
+            </a:extLst>
+          </p:cNvPr>
+          <p:cNvSpPr/>
+          <p:nvPr/>
+        </p:nvSpPr>
+        <p:spPr>
+          <a:xfrm>
+            <a:off x="150074" y="2971800"/>
+            <a:ext cx="3711020" cy="914400"/>
+          </a:xfrm>
+          <a:prstGeom prst="rect">
+            <a:avLst/>
+          </a:prstGeom>
+        </p:spPr>
+        <p:style>
+          <a:lnRef idx="2">
+            <a:schemeClr val="accent1">
+              <a:shade val="15000"/>
+            </a:schemeClr>
+          </a:lnRef>
+          <a:fillRef idx="1">
+            <a:schemeClr val="accent1"/>
+          </a:fillRef>
+          <a:effectRef idx="0">
+            <a:schemeClr val="accent1"/>
+          </a:effectRef>
+          <a:fontRef idx="minor">
+            <a:schemeClr val="lt1"/>
+          </a:fontRef>
+        </p:style>
+        <p:txBody>
+          <a:bodyPr rtlCol="0" anchor="ctr"/>
+          <a:lstStyle/>
+          <a:p>
+            <a:pPr algn="ctr"/>
+            <a:r>
+              <a:rPr lang="en-US" noProof="0" dirty="0"/>
+              <a:t>Layout- and traversal-agnostic abstractions</a:t>
+            </a:r>
+          </a:p>
+        </p:txBody>
+      </p:sp>
+      <p:sp>
+        <p:nvSpPr>
+          <p:cNvPr id="9" name="Rectangle 8">
+            <a:extLst>
+              <a:ext uri="{FF2B5EF4-FFF2-40B4-BE49-F238E27FC236}">
+                <a16:creationId xmlns:a16="http://schemas.microsoft.com/office/drawing/2014/main" id="{6DB7F776-4EDC-09F4-F04A-E586FC4B4500}"/>
+              </a:ext>
+            </a:extLst>
+          </p:cNvPr>
+          <p:cNvSpPr/>
+          <p:nvPr/>
+        </p:nvSpPr>
+        <p:spPr>
+          <a:xfrm>
+            <a:off x="7840178" y="2971800"/>
+            <a:ext cx="3711020" cy="914400"/>
+          </a:xfrm>
+          <a:prstGeom prst="rect">
+            <a:avLst/>
+          </a:prstGeom>
+        </p:spPr>
+        <p:style>
+          <a:lnRef idx="2">
+            <a:schemeClr val="accent1">
+              <a:shade val="15000"/>
+            </a:schemeClr>
+          </a:lnRef>
+          <a:fillRef idx="1">
+            <a:schemeClr val="accent1"/>
+          </a:fillRef>
+          <a:effectRef idx="0">
+            <a:schemeClr val="accent1"/>
+          </a:effectRef>
+          <a:fontRef idx="minor">
+            <a:schemeClr val="lt1"/>
+          </a:fontRef>
+        </p:style>
+        <p:txBody>
+          <a:bodyPr rtlCol="0" anchor="ctr"/>
+          <a:lstStyle/>
+          <a:p>
+            <a:pPr algn="ctr"/>
+            <a:r>
+              <a:rPr lang="en-US" noProof="0" dirty="0"/>
+              <a:t>LLM-assisted optimization</a:t>
+            </a:r>
+          </a:p>
+        </p:txBody>
+      </p:sp>
+      <p:sp>
+        <p:nvSpPr>
+          <p:cNvPr id="11" name="Rectangle 10">
+            <a:extLst>
+              <a:ext uri="{FF2B5EF4-FFF2-40B4-BE49-F238E27FC236}">
+                <a16:creationId xmlns:a16="http://schemas.microsoft.com/office/drawing/2014/main" id="{5B2B9BCB-5805-C1F1-AF45-681B37E6B83E}"/>
+              </a:ext>
+            </a:extLst>
+          </p:cNvPr>
+          <p:cNvSpPr/>
+          <p:nvPr/>
+        </p:nvSpPr>
+        <p:spPr>
+          <a:xfrm>
+            <a:off x="150074" y="4252912"/>
+            <a:ext cx="3711020" cy="914400"/>
+          </a:xfrm>
+          <a:prstGeom prst="rect">
+            <a:avLst/>
+          </a:prstGeom>
+        </p:spPr>
+        <p:style>
+          <a:lnRef idx="2">
+            <a:schemeClr val="accent1">
+              <a:shade val="15000"/>
+            </a:schemeClr>
+          </a:lnRef>
+          <a:fillRef idx="1">
+            <a:schemeClr val="accent1"/>
+          </a:fillRef>
+          <a:effectRef idx="0">
+            <a:schemeClr val="accent1"/>
+          </a:effectRef>
+          <a:fontRef idx="minor">
+            <a:schemeClr val="lt1"/>
+          </a:fontRef>
+        </p:style>
+        <p:txBody>
+          <a:bodyPr rtlCol="0" anchor="ctr"/>
+          <a:lstStyle/>
+          <a:p>
+            <a:pPr algn="ctr"/>
+            <a:r>
+              <a:rPr lang="en-US" noProof="0" dirty="0"/>
+              <a:t>Layout abstractions</a:t>
+            </a:r>
+          </a:p>
+        </p:txBody>
+      </p:sp>
+      <p:sp>
+        <p:nvSpPr>
+          <p:cNvPr id="13" name="Rectangle 12">
+            <a:extLst>
+              <a:ext uri="{FF2B5EF4-FFF2-40B4-BE49-F238E27FC236}">
+                <a16:creationId xmlns:a16="http://schemas.microsoft.com/office/drawing/2014/main" id="{31388E94-1EEB-E24E-1923-AA250880AF84}"/>
+              </a:ext>
+            </a:extLst>
+          </p:cNvPr>
+          <p:cNvSpPr/>
+          <p:nvPr/>
+        </p:nvSpPr>
+        <p:spPr>
+          <a:xfrm>
+            <a:off x="4240490" y="4252912"/>
+            <a:ext cx="3711020" cy="914400"/>
+          </a:xfrm>
+          <a:prstGeom prst="rect">
+            <a:avLst/>
+          </a:prstGeom>
+        </p:spPr>
+        <p:style>
+          <a:lnRef idx="2">
+            <a:schemeClr val="accent1">
+              <a:shade val="15000"/>
+            </a:schemeClr>
+          </a:lnRef>
+          <a:fillRef idx="1">
+            <a:schemeClr val="accent1"/>
+          </a:fillRef>
+          <a:effectRef idx="0">
+            <a:schemeClr val="accent1"/>
+          </a:effectRef>
+          <a:fontRef idx="minor">
+            <a:schemeClr val="lt1"/>
+          </a:fontRef>
+        </p:style>
+        <p:txBody>
+          <a:bodyPr rtlCol="0" anchor="ctr"/>
+          <a:lstStyle/>
+          <a:p>
+            <a:pPr algn="ctr"/>
+            <a:r>
+              <a:rPr lang="en-US" noProof="0" dirty="0"/>
+              <a:t>Traversal abstractions</a:t>
+            </a:r>
+          </a:p>
+        </p:txBody>
+      </p:sp>
+      <p:sp>
+        <p:nvSpPr>
+          <p:cNvPr id="15" name="Rectangle 14">
+            <a:extLst>
+              <a:ext uri="{FF2B5EF4-FFF2-40B4-BE49-F238E27FC236}">
+                <a16:creationId xmlns:a16="http://schemas.microsoft.com/office/drawing/2014/main" id="{DE8920A4-4430-6757-E41A-9BA9578DC80D}"/>
+              </a:ext>
+            </a:extLst>
+          </p:cNvPr>
+          <p:cNvSpPr/>
+          <p:nvPr/>
+        </p:nvSpPr>
+        <p:spPr>
+          <a:xfrm>
+            <a:off x="8330906" y="4252912"/>
+            <a:ext cx="3711020" cy="914400"/>
+          </a:xfrm>
+          <a:prstGeom prst="rect">
+            <a:avLst/>
+          </a:prstGeom>
+        </p:spPr>
+        <p:style>
+          <a:lnRef idx="2">
+            <a:schemeClr val="accent1">
+              <a:shade val="15000"/>
+            </a:schemeClr>
+          </a:lnRef>
+          <a:fillRef idx="1">
+            <a:schemeClr val="accent1"/>
+          </a:fillRef>
+          <a:effectRef idx="0">
+            <a:schemeClr val="accent1"/>
+          </a:effectRef>
+          <a:fontRef idx="minor">
+            <a:schemeClr val="lt1"/>
+          </a:fontRef>
+        </p:style>
+        <p:txBody>
+          <a:bodyPr rtlCol="0" anchor="ctr"/>
+          <a:lstStyle/>
+          <a:p>
+            <a:pPr algn="ctr"/>
+            <a:r>
+              <a:rPr lang="en-US" noProof="0" dirty="0"/>
+              <a:t>Practical aspects</a:t>
+            </a:r>
+          </a:p>
+        </p:txBody>
+      </p:sp>
+      <p:sp>
+        <p:nvSpPr>
+          <p:cNvPr id="17" name="Rectangle 16">
+            <a:extLst>
+              <a:ext uri="{FF2B5EF4-FFF2-40B4-BE49-F238E27FC236}">
+                <a16:creationId xmlns:a16="http://schemas.microsoft.com/office/drawing/2014/main" id="{D01E75A2-333B-DF95-544C-0ACF1B88882C}"/>
+              </a:ext>
+            </a:extLst>
+          </p:cNvPr>
+          <p:cNvSpPr/>
+          <p:nvPr/>
+        </p:nvSpPr>
+        <p:spPr>
+          <a:xfrm>
+            <a:off x="302474" y="5356288"/>
+            <a:ext cx="3711020" cy="914400"/>
+          </a:xfrm>
+          <a:prstGeom prst="rect">
+            <a:avLst/>
+          </a:prstGeom>
+        </p:spPr>
+        <p:style>
+          <a:lnRef idx="2">
+            <a:schemeClr val="accent1">
+              <a:shade val="15000"/>
+            </a:schemeClr>
+          </a:lnRef>
+          <a:fillRef idx="1">
+            <a:schemeClr val="accent1"/>
+          </a:fillRef>
+          <a:effectRef idx="0">
+            <a:schemeClr val="accent1"/>
+          </a:effectRef>
+          <a:fontRef idx="minor">
+            <a:schemeClr val="lt1"/>
+          </a:fontRef>
+        </p:style>
+        <p:txBody>
+          <a:bodyPr rtlCol="0" anchor="ctr"/>
+          <a:lstStyle/>
+          <a:p>
+            <a:pPr algn="ctr"/>
+            <a:r>
+              <a:rPr lang="en-US" noProof="0" dirty="0" err="1"/>
+              <a:t>Noarr</a:t>
+            </a:r>
+            <a:r>
+              <a:rPr lang="en-US" noProof="0" dirty="0"/>
+              <a:t> structures</a:t>
+            </a:r>
+          </a:p>
+        </p:txBody>
+      </p:sp>
+      <p:sp>
+        <p:nvSpPr>
+          <p:cNvPr id="19" name="Rectangle 18">
+            <a:extLst>
+              <a:ext uri="{FF2B5EF4-FFF2-40B4-BE49-F238E27FC236}">
+                <a16:creationId xmlns:a16="http://schemas.microsoft.com/office/drawing/2014/main" id="{67736357-2F90-D241-51F6-C03C797EFFC2}"/>
+              </a:ext>
+            </a:extLst>
+          </p:cNvPr>
+          <p:cNvSpPr/>
+          <p:nvPr/>
+        </p:nvSpPr>
+        <p:spPr>
+          <a:xfrm>
+            <a:off x="454874" y="5508688"/>
+            <a:ext cx="3711020" cy="914400"/>
+          </a:xfrm>
+          <a:prstGeom prst="rect">
+            <a:avLst/>
+          </a:prstGeom>
+        </p:spPr>
+        <p:style>
+          <a:lnRef idx="2">
+            <a:schemeClr val="accent1">
+              <a:shade val="15000"/>
+            </a:schemeClr>
+          </a:lnRef>
+          <a:fillRef idx="1">
+            <a:schemeClr val="accent1"/>
+          </a:fillRef>
+          <a:effectRef idx="0">
+            <a:schemeClr val="accent1"/>
+          </a:effectRef>
+          <a:fontRef idx="minor">
+            <a:schemeClr val="lt1"/>
+          </a:fontRef>
+        </p:style>
+        <p:txBody>
+          <a:bodyPr rtlCol="0" anchor="ctr"/>
+          <a:lstStyle/>
+          <a:p>
+            <a:pPr algn="ctr"/>
+            <a:r>
+              <a:rPr lang="en-US" noProof="0" dirty="0" err="1"/>
+              <a:t>Noarr</a:t>
+            </a:r>
+            <a:r>
+              <a:rPr lang="en-US" noProof="0" dirty="0"/>
+              <a:t> traversers</a:t>
+            </a:r>
+          </a:p>
+        </p:txBody>
+      </p:sp>
+      <p:sp>
+        <p:nvSpPr>
+          <p:cNvPr id="21" name="Rectangle 20">
+            <a:extLst>
+              <a:ext uri="{FF2B5EF4-FFF2-40B4-BE49-F238E27FC236}">
+                <a16:creationId xmlns:a16="http://schemas.microsoft.com/office/drawing/2014/main" id="{9EC73339-8B3D-25F4-18D5-E5821CB7CE8B}"/>
+              </a:ext>
+            </a:extLst>
+          </p:cNvPr>
+          <p:cNvSpPr/>
+          <p:nvPr/>
+        </p:nvSpPr>
+        <p:spPr>
+          <a:xfrm>
+            <a:off x="607274" y="5661088"/>
+            <a:ext cx="3711020" cy="914400"/>
+          </a:xfrm>
+          <a:prstGeom prst="rect">
+            <a:avLst/>
+          </a:prstGeom>
+        </p:spPr>
+        <p:style>
+          <a:lnRef idx="2">
+            <a:schemeClr val="accent1">
+              <a:shade val="15000"/>
+            </a:schemeClr>
+          </a:lnRef>
+          <a:fillRef idx="1">
+            <a:schemeClr val="accent1"/>
+          </a:fillRef>
+          <a:effectRef idx="0">
+            <a:schemeClr val="accent1"/>
+          </a:effectRef>
+          <a:fontRef idx="minor">
+            <a:schemeClr val="lt1"/>
+          </a:fontRef>
+        </p:style>
+        <p:txBody>
+          <a:bodyPr rtlCol="0" anchor="ctr"/>
+          <a:lstStyle/>
+          <a:p>
+            <a:pPr algn="ctr"/>
+            <a:r>
+              <a:rPr lang="en-US" noProof="0" dirty="0" err="1"/>
+              <a:t>Noarr</a:t>
+            </a:r>
+            <a:r>
+              <a:rPr lang="en-US" noProof="0" dirty="0"/>
+              <a:t> tuning</a:t>
+            </a:r>
+          </a:p>
+        </p:txBody>
+      </p:sp>
+      <p:sp>
+        <p:nvSpPr>
+          <p:cNvPr id="23" name="Rectangle 22">
+            <a:extLst>
+              <a:ext uri="{FF2B5EF4-FFF2-40B4-BE49-F238E27FC236}">
+                <a16:creationId xmlns:a16="http://schemas.microsoft.com/office/drawing/2014/main" id="{63EC4F51-D7C0-1DFC-E94E-75AE185B7CC1}"/>
+              </a:ext>
+            </a:extLst>
+          </p:cNvPr>
+          <p:cNvSpPr/>
+          <p:nvPr/>
+        </p:nvSpPr>
+        <p:spPr>
+          <a:xfrm>
+            <a:off x="759674" y="5813488"/>
+            <a:ext cx="3711020" cy="914400"/>
+          </a:xfrm>
+          <a:prstGeom prst="rect">
+            <a:avLst/>
+          </a:prstGeom>
+        </p:spPr>
+        <p:style>
+          <a:lnRef idx="2">
+            <a:schemeClr val="accent1">
+              <a:shade val="15000"/>
+            </a:schemeClr>
+          </a:lnRef>
+          <a:fillRef idx="1">
+            <a:schemeClr val="accent1"/>
+          </a:fillRef>
+          <a:effectRef idx="0">
+            <a:schemeClr val="accent1"/>
+          </a:effectRef>
+          <a:fontRef idx="minor">
+            <a:schemeClr val="lt1"/>
+          </a:fontRef>
+        </p:style>
+        <p:txBody>
+          <a:bodyPr rtlCol="0" anchor="ctr"/>
+          <a:lstStyle/>
+          <a:p>
+            <a:pPr algn="ctr"/>
+            <a:r>
+              <a:rPr lang="en-US" noProof="0" dirty="0" err="1"/>
+              <a:t>Noarr</a:t>
+            </a:r>
+            <a:r>
+              <a:rPr lang="en-US" noProof="0" dirty="0"/>
+              <a:t>-MPI</a:t>
+            </a:r>
+          </a:p>
+        </p:txBody>
+      </p:sp>
+      <p:sp>
+        <p:nvSpPr>
+          <p:cNvPr id="25" name="Rectangle 24">
+            <a:extLst>
+              <a:ext uri="{FF2B5EF4-FFF2-40B4-BE49-F238E27FC236}">
+                <a16:creationId xmlns:a16="http://schemas.microsoft.com/office/drawing/2014/main" id="{B7D64168-E19F-C04D-293D-CB07E85D29DA}"/>
+              </a:ext>
+            </a:extLst>
+          </p:cNvPr>
+          <p:cNvSpPr/>
+          <p:nvPr/>
+        </p:nvSpPr>
+        <p:spPr>
+          <a:xfrm>
+            <a:off x="4853138" y="5424788"/>
+            <a:ext cx="3711020" cy="914400"/>
+          </a:xfrm>
+          <a:prstGeom prst="rect">
+            <a:avLst/>
+          </a:prstGeom>
+        </p:spPr>
+        <p:style>
+          <a:lnRef idx="2">
+            <a:schemeClr val="accent1">
+              <a:shade val="15000"/>
+            </a:schemeClr>
+          </a:lnRef>
+          <a:fillRef idx="1">
+            <a:schemeClr val="accent1"/>
+          </a:fillRef>
+          <a:effectRef idx="0">
+            <a:schemeClr val="accent1"/>
+          </a:effectRef>
+          <a:fontRef idx="minor">
+            <a:schemeClr val="lt1"/>
+          </a:fontRef>
+        </p:style>
+        <p:txBody>
+          <a:bodyPr rtlCol="0" anchor="ctr"/>
+          <a:lstStyle/>
+          <a:p>
+            <a:pPr algn="ctr"/>
+            <a:r>
+              <a:rPr lang="en-US" noProof="0" dirty="0" err="1"/>
+              <a:t>Cellato</a:t>
+            </a:r>
+            <a:endParaRPr lang="en-US" noProof="0" dirty="0"/>
+          </a:p>
+        </p:txBody>
+      </p:sp>
+    </p:spTree>
+    <p:extLst>
+      <p:ext uri="{BB962C8B-B14F-4D97-AF65-F5344CB8AC3E}">
+        <p14:creationId xmlns:p14="http://schemas.microsoft.com/office/powerpoint/2010/main" val="1745489699"/>
+      </p:ext>
+    </p:extLst>
+  </p:cSld>
+  <p:clrMapOvr>
+    <a:masterClrMapping/>
+  </p:clrMapOvr>
+</p:sld>
+</file>
+
+<file path=ppt/slides/slide23.xml><?xml version="1.0" encoding="utf-8"?>
+<p:sld xmlns:a="http://schemas.openxmlformats.org/drawingml/2006/main" xmlns:r="http://schemas.openxmlformats.org/officeDocument/2006/relationships" xmlns:p="http://schemas.openxmlformats.org/presentationml/2006/main">
+  <p:cSld>
+    <p:spTree>
+      <p:nvGrpSpPr>
+        <p:cNvPr id="1" name=""/>
+        <p:cNvGrpSpPr/>
+        <p:nvPr/>
+      </p:nvGrpSpPr>
+      <p:grpSpPr>
+        <a:xfrm>
+          <a:off x="0" y="0"/>
+          <a:ext cx="0" cy="0"/>
+          <a:chOff x="0" y="0"/>
+          <a:chExt cx="0" cy="0"/>
+        </a:xfrm>
+      </p:grpSpPr>
+      <p:sp>
+        <p:nvSpPr>
+          <p:cNvPr id="2" name="Title 1">
+            <a:extLst>
+              <a:ext uri="{FF2B5EF4-FFF2-40B4-BE49-F238E27FC236}">
                 <a16:creationId xmlns:a16="http://schemas.microsoft.com/office/drawing/2014/main" id="{63B07F39-5957-124B-D20D-4A155E0E07D1}"/>
               </a:ext>
             </a:extLst>
@@ -6754,7 +7113,7 @@
 </p:sld>
 </file>
 
-<file path=ppt/slides/slide23.xml><?xml version="1.0" encoding="utf-8"?>
+<file path=ppt/slides/slide24.xml><?xml version="1.0" encoding="utf-8"?>
 <p:sld xmlns:a="http://schemas.openxmlformats.org/drawingml/2006/main" xmlns:r="http://schemas.openxmlformats.org/officeDocument/2006/relationships" xmlns:p="http://schemas.openxmlformats.org/presentationml/2006/main">
   <p:cSld>
     <p:spTree>
@@ -8494,32 +8853,3513 @@
           <a:bodyPr/>
           <a:lstStyle/>
           <a:p>
-            <a:endParaRPr lang="en-US"/>
-          </a:p>
-        </p:txBody>
-      </p:sp>
-      <p:sp>
-        <p:nvSpPr>
-          <p:cNvPr id="3" name="Content Placeholder 2">
+            <a:r>
+              <a:rPr lang="en-US" dirty="0"/>
+              <a:t>Layout- and Traversal-agnostic design</a:t>
+            </a:r>
+          </a:p>
+        </p:txBody>
+      </p:sp>
+      <p:sp>
+        <p:nvSpPr>
+          <p:cNvPr id="7" name="TextBox 6">
             <a:extLst>
               <a:ext uri="{FF2B5EF4-FFF2-40B4-BE49-F238E27FC236}">
-                <a16:creationId xmlns:a16="http://schemas.microsoft.com/office/drawing/2014/main" id="{8CBA14F8-65E2-B2B1-5C12-706781C202B0}"/>
+                <a16:creationId xmlns:a16="http://schemas.microsoft.com/office/drawing/2014/main" id="{0CF186D6-25A7-ABCC-FC6B-5488C25449EB}"/>
               </a:ext>
             </a:extLst>
           </p:cNvPr>
-          <p:cNvSpPr>
-            <a:spLocks noGrp="1"/>
-          </p:cNvSpPr>
-          <p:nvPr>
-            <p:ph idx="1"/>
-          </p:nvPr>
-        </p:nvSpPr>
-        <p:spPr/>
-        <p:txBody>
-          <a:bodyPr/>
+          <p:cNvSpPr txBox="1"/>
+          <p:nvPr/>
+        </p:nvSpPr>
+        <p:spPr>
+          <a:xfrm>
+            <a:off x="458758" y="1685833"/>
+            <a:ext cx="5322570" cy="2095061"/>
+          </a:xfrm>
+          <a:prstGeom prst="rect">
+            <a:avLst/>
+          </a:prstGeom>
+          <a:noFill/>
+          <a:ln>
+            <a:solidFill>
+              <a:schemeClr val="tx1"/>
+            </a:solidFill>
+          </a:ln>
+        </p:spPr>
+        <p:txBody>
+          <a:bodyPr wrap="square">
+            <a:spAutoFit/>
+          </a:bodyPr>
           <a:lstStyle/>
           <a:p>
-            <a:endParaRPr lang="en-US"/>
+            <a:pPr>
+              <a:lnSpc>
+                <a:spcPct val="113095"/>
+              </a:lnSpc>
+              <a:buNone/>
+            </a:pPr>
+            <a:r>
+              <a:rPr lang="en-US" sz="1050" b="0" dirty="0">
+                <a:solidFill>
+                  <a:srgbClr val="0000FF"/>
+                </a:solidFill>
+                <a:effectLst/>
+                <a:latin typeface="Fira Code" panose="020B0809050000020004" pitchFamily="49" charset="0"/>
+              </a:rPr>
+              <a:t>int</a:t>
+            </a:r>
+            <a:r>
+              <a:rPr lang="en-US" sz="1050" b="0" dirty="0">
+                <a:solidFill>
+                  <a:srgbClr val="000000"/>
+                </a:solidFill>
+                <a:effectLst/>
+                <a:latin typeface="Fira Code" panose="020B0809050000020004" pitchFamily="49" charset="0"/>
+              </a:rPr>
+              <a:t> </a:t>
+            </a:r>
+            <a:r>
+              <a:rPr lang="en-US" sz="1050" b="0" dirty="0">
+                <a:solidFill>
+                  <a:srgbClr val="001080"/>
+                </a:solidFill>
+                <a:effectLst/>
+                <a:latin typeface="Fira Code" panose="020B0809050000020004" pitchFamily="49" charset="0"/>
+              </a:rPr>
+              <a:t>C</a:t>
+            </a:r>
+            <a:r>
+              <a:rPr lang="en-US" sz="1050" b="0" dirty="0">
+                <a:solidFill>
+                  <a:srgbClr val="000000"/>
+                </a:solidFill>
+                <a:effectLst/>
+                <a:latin typeface="Fira Code" panose="020B0809050000020004" pitchFamily="49" charset="0"/>
+              </a:rPr>
+              <a:t>[</a:t>
+            </a:r>
+            <a:r>
+              <a:rPr lang="en-US" sz="1050" b="0" dirty="0">
+                <a:solidFill>
+                  <a:srgbClr val="0070C1"/>
+                </a:solidFill>
+                <a:effectLst/>
+                <a:latin typeface="Fira Code" panose="020B0809050000020004" pitchFamily="49" charset="0"/>
+              </a:rPr>
+              <a:t>N</a:t>
+            </a:r>
+            <a:r>
+              <a:rPr lang="en-US" sz="1050" b="0" dirty="0">
+                <a:solidFill>
+                  <a:srgbClr val="000000"/>
+                </a:solidFill>
+                <a:effectLst/>
+                <a:latin typeface="Fira Code" panose="020B0809050000020004" pitchFamily="49" charset="0"/>
+              </a:rPr>
+              <a:t> * </a:t>
+            </a:r>
+            <a:r>
+              <a:rPr lang="en-US" sz="1050" b="0" dirty="0">
+                <a:solidFill>
+                  <a:srgbClr val="0070C1"/>
+                </a:solidFill>
+                <a:effectLst/>
+                <a:latin typeface="Fira Code" panose="020B0809050000020004" pitchFamily="49" charset="0"/>
+              </a:rPr>
+              <a:t>M</a:t>
+            </a:r>
+            <a:r>
+              <a:rPr lang="en-US" sz="1050" b="0" dirty="0">
+                <a:solidFill>
+                  <a:srgbClr val="000000"/>
+                </a:solidFill>
+                <a:effectLst/>
+                <a:latin typeface="Fira Code" panose="020B0809050000020004" pitchFamily="49" charset="0"/>
+              </a:rPr>
+              <a:t>];</a:t>
+            </a:r>
+          </a:p>
+          <a:p>
+            <a:pPr>
+              <a:lnSpc>
+                <a:spcPct val="113095"/>
+              </a:lnSpc>
+              <a:buNone/>
+            </a:pPr>
+            <a:r>
+              <a:rPr lang="en-US" sz="1050" b="0" dirty="0">
+                <a:solidFill>
+                  <a:srgbClr val="0000FF"/>
+                </a:solidFill>
+                <a:effectLst/>
+                <a:latin typeface="Fira Code" panose="020B0809050000020004" pitchFamily="49" charset="0"/>
+              </a:rPr>
+              <a:t>int</a:t>
+            </a:r>
+            <a:r>
+              <a:rPr lang="en-US" sz="1050" b="0" dirty="0">
+                <a:solidFill>
+                  <a:srgbClr val="000000"/>
+                </a:solidFill>
+                <a:effectLst/>
+                <a:latin typeface="Fira Code" panose="020B0809050000020004" pitchFamily="49" charset="0"/>
+              </a:rPr>
+              <a:t> </a:t>
+            </a:r>
+            <a:r>
+              <a:rPr lang="en-US" sz="1050" b="0" dirty="0">
+                <a:solidFill>
+                  <a:srgbClr val="001080"/>
+                </a:solidFill>
+                <a:effectLst/>
+                <a:latin typeface="Fira Code" panose="020B0809050000020004" pitchFamily="49" charset="0"/>
+              </a:rPr>
+              <a:t>A</a:t>
+            </a:r>
+            <a:r>
+              <a:rPr lang="en-US" sz="1050" b="0" dirty="0">
+                <a:solidFill>
+                  <a:srgbClr val="000000"/>
+                </a:solidFill>
+                <a:effectLst/>
+                <a:latin typeface="Fira Code" panose="020B0809050000020004" pitchFamily="49" charset="0"/>
+              </a:rPr>
+              <a:t>[</a:t>
+            </a:r>
+            <a:r>
+              <a:rPr lang="en-US" sz="1050" b="0" dirty="0">
+                <a:solidFill>
+                  <a:srgbClr val="0070C1"/>
+                </a:solidFill>
+                <a:effectLst/>
+                <a:latin typeface="Fira Code" panose="020B0809050000020004" pitchFamily="49" charset="0"/>
+              </a:rPr>
+              <a:t>N</a:t>
+            </a:r>
+            <a:r>
+              <a:rPr lang="en-US" sz="1050" b="0" dirty="0">
+                <a:solidFill>
+                  <a:srgbClr val="000000"/>
+                </a:solidFill>
+                <a:effectLst/>
+                <a:latin typeface="Fira Code" panose="020B0809050000020004" pitchFamily="49" charset="0"/>
+              </a:rPr>
+              <a:t> * </a:t>
+            </a:r>
+            <a:r>
+              <a:rPr lang="en-US" sz="1050" b="0" dirty="0">
+                <a:solidFill>
+                  <a:srgbClr val="0070C1"/>
+                </a:solidFill>
+                <a:effectLst/>
+                <a:latin typeface="Fira Code" panose="020B0809050000020004" pitchFamily="49" charset="0"/>
+              </a:rPr>
+              <a:t>K</a:t>
+            </a:r>
+            <a:r>
+              <a:rPr lang="en-US" sz="1050" b="0" dirty="0">
+                <a:solidFill>
+                  <a:srgbClr val="000000"/>
+                </a:solidFill>
+                <a:effectLst/>
+                <a:latin typeface="Fira Code" panose="020B0809050000020004" pitchFamily="49" charset="0"/>
+              </a:rPr>
+              <a:t>];</a:t>
+            </a:r>
+          </a:p>
+          <a:p>
+            <a:pPr>
+              <a:lnSpc>
+                <a:spcPct val="113095"/>
+              </a:lnSpc>
+              <a:buNone/>
+            </a:pPr>
+            <a:r>
+              <a:rPr lang="en-US" sz="1050" b="0" dirty="0">
+                <a:solidFill>
+                  <a:srgbClr val="0000FF"/>
+                </a:solidFill>
+                <a:effectLst/>
+                <a:latin typeface="Fira Code" panose="020B0809050000020004" pitchFamily="49" charset="0"/>
+              </a:rPr>
+              <a:t>int</a:t>
+            </a:r>
+            <a:r>
+              <a:rPr lang="en-US" sz="1050" b="0" dirty="0">
+                <a:solidFill>
+                  <a:srgbClr val="000000"/>
+                </a:solidFill>
+                <a:effectLst/>
+                <a:latin typeface="Fira Code" panose="020B0809050000020004" pitchFamily="49" charset="0"/>
+              </a:rPr>
+              <a:t> </a:t>
+            </a:r>
+            <a:r>
+              <a:rPr lang="en-US" sz="1050" b="0" dirty="0">
+                <a:solidFill>
+                  <a:srgbClr val="001080"/>
+                </a:solidFill>
+                <a:effectLst/>
+                <a:latin typeface="Fira Code" panose="020B0809050000020004" pitchFamily="49" charset="0"/>
+              </a:rPr>
+              <a:t>B</a:t>
+            </a:r>
+            <a:r>
+              <a:rPr lang="en-US" sz="1050" b="0" dirty="0">
+                <a:solidFill>
+                  <a:srgbClr val="000000"/>
+                </a:solidFill>
+                <a:effectLst/>
+                <a:latin typeface="Fira Code" panose="020B0809050000020004" pitchFamily="49" charset="0"/>
+              </a:rPr>
+              <a:t>[</a:t>
+            </a:r>
+            <a:r>
+              <a:rPr lang="en-US" sz="1050" b="0" dirty="0">
+                <a:solidFill>
+                  <a:srgbClr val="0070C1"/>
+                </a:solidFill>
+                <a:effectLst/>
+                <a:latin typeface="Fira Code" panose="020B0809050000020004" pitchFamily="49" charset="0"/>
+              </a:rPr>
+              <a:t>K</a:t>
+            </a:r>
+            <a:r>
+              <a:rPr lang="en-US" sz="1050" b="0" dirty="0">
+                <a:solidFill>
+                  <a:srgbClr val="000000"/>
+                </a:solidFill>
+                <a:effectLst/>
+                <a:latin typeface="Fira Code" panose="020B0809050000020004" pitchFamily="49" charset="0"/>
+              </a:rPr>
+              <a:t> * </a:t>
+            </a:r>
+            <a:r>
+              <a:rPr lang="en-US" sz="1050" b="0" dirty="0">
+                <a:solidFill>
+                  <a:srgbClr val="0070C1"/>
+                </a:solidFill>
+                <a:effectLst/>
+                <a:latin typeface="Fira Code" panose="020B0809050000020004" pitchFamily="49" charset="0"/>
+              </a:rPr>
+              <a:t>M</a:t>
+            </a:r>
+            <a:r>
+              <a:rPr lang="en-US" sz="1050" b="0" dirty="0">
+                <a:solidFill>
+                  <a:srgbClr val="000000"/>
+                </a:solidFill>
+                <a:effectLst/>
+                <a:latin typeface="Fira Code" panose="020B0809050000020004" pitchFamily="49" charset="0"/>
+              </a:rPr>
+              <a:t>];</a:t>
+            </a:r>
+          </a:p>
+          <a:p>
+            <a:pPr>
+              <a:lnSpc>
+                <a:spcPct val="113095"/>
+              </a:lnSpc>
+              <a:buNone/>
+            </a:pPr>
+            <a:br>
+              <a:rPr lang="en-US" sz="1050" b="0" dirty="0">
+                <a:solidFill>
+                  <a:srgbClr val="000000"/>
+                </a:solidFill>
+                <a:effectLst/>
+                <a:latin typeface="Fira Code" panose="020B0809050000020004" pitchFamily="49" charset="0"/>
+              </a:rPr>
+            </a:br>
+            <a:endParaRPr lang="en-US" sz="1050" b="0" dirty="0">
+              <a:solidFill>
+                <a:srgbClr val="000000"/>
+              </a:solidFill>
+              <a:effectLst/>
+              <a:latin typeface="Fira Code" panose="020B0809050000020004" pitchFamily="49" charset="0"/>
+            </a:endParaRPr>
+          </a:p>
+          <a:p>
+            <a:pPr>
+              <a:lnSpc>
+                <a:spcPct val="113095"/>
+              </a:lnSpc>
+              <a:buNone/>
+            </a:pPr>
+            <a:r>
+              <a:rPr lang="en-US" sz="1050" b="0" dirty="0">
+                <a:solidFill>
+                  <a:srgbClr val="AF00DB"/>
+                </a:solidFill>
+                <a:effectLst/>
+                <a:latin typeface="Fira Code" panose="020B0809050000020004" pitchFamily="49" charset="0"/>
+              </a:rPr>
+              <a:t>for</a:t>
+            </a:r>
+            <a:r>
+              <a:rPr lang="en-US" sz="1050" b="0" dirty="0">
+                <a:solidFill>
+                  <a:srgbClr val="000000"/>
+                </a:solidFill>
+                <a:effectLst/>
+                <a:latin typeface="Fira Code" panose="020B0809050000020004" pitchFamily="49" charset="0"/>
+              </a:rPr>
+              <a:t> (</a:t>
+            </a:r>
+            <a:r>
+              <a:rPr lang="en-US" sz="1050" b="0" dirty="0" err="1">
+                <a:solidFill>
+                  <a:srgbClr val="267F99"/>
+                </a:solidFill>
+                <a:effectLst/>
+                <a:latin typeface="Fira Code" panose="020B0809050000020004" pitchFamily="49" charset="0"/>
+              </a:rPr>
+              <a:t>size_t</a:t>
+            </a:r>
+            <a:r>
+              <a:rPr lang="en-US" sz="1050" b="0" dirty="0">
+                <a:solidFill>
+                  <a:srgbClr val="000000"/>
+                </a:solidFill>
+                <a:effectLst/>
+                <a:latin typeface="Fira Code" panose="020B0809050000020004" pitchFamily="49" charset="0"/>
+              </a:rPr>
+              <a:t> </a:t>
+            </a:r>
+            <a:r>
+              <a:rPr lang="en-US" sz="1050" b="0" dirty="0">
+                <a:solidFill>
+                  <a:srgbClr val="001080"/>
+                </a:solidFill>
+                <a:effectLst/>
+                <a:latin typeface="Fira Code" panose="020B0809050000020004" pitchFamily="49" charset="0"/>
+              </a:rPr>
+              <a:t>I</a:t>
+            </a:r>
+            <a:r>
+              <a:rPr lang="en-US" sz="1050" b="0" dirty="0">
+                <a:solidFill>
+                  <a:srgbClr val="000000"/>
+                </a:solidFill>
+                <a:effectLst/>
+                <a:latin typeface="Fira Code" panose="020B0809050000020004" pitchFamily="49" charset="0"/>
+              </a:rPr>
+              <a:t> = </a:t>
+            </a:r>
+            <a:r>
+              <a:rPr lang="en-US" sz="1050" b="0" dirty="0">
+                <a:solidFill>
+                  <a:srgbClr val="098658"/>
+                </a:solidFill>
+                <a:effectLst/>
+                <a:latin typeface="Fira Code" panose="020B0809050000020004" pitchFamily="49" charset="0"/>
+              </a:rPr>
+              <a:t>0</a:t>
+            </a:r>
+            <a:r>
+              <a:rPr lang="en-US" sz="1050" b="0" dirty="0">
+                <a:solidFill>
+                  <a:srgbClr val="000000"/>
+                </a:solidFill>
+                <a:effectLst/>
+                <a:latin typeface="Fira Code" panose="020B0809050000020004" pitchFamily="49" charset="0"/>
+              </a:rPr>
+              <a:t>; </a:t>
+            </a:r>
+            <a:r>
+              <a:rPr lang="en-US" sz="1050" b="0" dirty="0">
+                <a:solidFill>
+                  <a:srgbClr val="001080"/>
+                </a:solidFill>
+                <a:effectLst/>
+                <a:latin typeface="Fira Code" panose="020B0809050000020004" pitchFamily="49" charset="0"/>
+              </a:rPr>
+              <a:t>I</a:t>
+            </a:r>
+            <a:r>
+              <a:rPr lang="en-US" sz="1050" b="0" dirty="0">
+                <a:solidFill>
+                  <a:srgbClr val="000000"/>
+                </a:solidFill>
+                <a:effectLst/>
+                <a:latin typeface="Fira Code" panose="020B0809050000020004" pitchFamily="49" charset="0"/>
+              </a:rPr>
+              <a:t> &lt; </a:t>
+            </a:r>
+            <a:r>
+              <a:rPr lang="en-US" sz="1050" b="0" dirty="0">
+                <a:solidFill>
+                  <a:srgbClr val="0070C1"/>
+                </a:solidFill>
+                <a:effectLst/>
+                <a:latin typeface="Fira Code" panose="020B0809050000020004" pitchFamily="49" charset="0"/>
+              </a:rPr>
+              <a:t>N</a:t>
+            </a:r>
+            <a:r>
+              <a:rPr lang="en-US" sz="1050" b="0" dirty="0">
+                <a:solidFill>
+                  <a:srgbClr val="000000"/>
+                </a:solidFill>
+                <a:effectLst/>
+                <a:latin typeface="Fira Code" panose="020B0809050000020004" pitchFamily="49" charset="0"/>
+              </a:rPr>
+              <a:t>; </a:t>
+            </a:r>
+            <a:r>
+              <a:rPr lang="en-US" sz="1050" b="0" dirty="0">
+                <a:solidFill>
+                  <a:srgbClr val="001080"/>
+                </a:solidFill>
+                <a:effectLst/>
+                <a:latin typeface="Fira Code" panose="020B0809050000020004" pitchFamily="49" charset="0"/>
+              </a:rPr>
+              <a:t>I</a:t>
+            </a:r>
+            <a:r>
+              <a:rPr lang="en-US" sz="1050" b="0" dirty="0">
+                <a:solidFill>
+                  <a:srgbClr val="000000"/>
+                </a:solidFill>
+                <a:effectLst/>
+                <a:latin typeface="Fira Code" panose="020B0809050000020004" pitchFamily="49" charset="0"/>
+              </a:rPr>
+              <a:t> += </a:t>
+            </a:r>
+            <a:r>
+              <a:rPr lang="en-US" sz="1050" b="0" dirty="0">
+                <a:solidFill>
+                  <a:srgbClr val="098658"/>
+                </a:solidFill>
+                <a:effectLst/>
+                <a:latin typeface="Fira Code" panose="020B0809050000020004" pitchFamily="49" charset="0"/>
+              </a:rPr>
+              <a:t>16</a:t>
+            </a:r>
+            <a:r>
+              <a:rPr lang="en-US" sz="1050" b="0" dirty="0">
+                <a:solidFill>
+                  <a:srgbClr val="000000"/>
+                </a:solidFill>
+                <a:effectLst/>
+                <a:latin typeface="Fira Code" panose="020B0809050000020004" pitchFamily="49" charset="0"/>
+              </a:rPr>
+              <a:t>)</a:t>
+            </a:r>
+          </a:p>
+          <a:p>
+            <a:pPr>
+              <a:lnSpc>
+                <a:spcPct val="113095"/>
+              </a:lnSpc>
+              <a:buNone/>
+            </a:pPr>
+            <a:r>
+              <a:rPr lang="en-US" sz="1050" b="0" dirty="0">
+                <a:solidFill>
+                  <a:srgbClr val="000000"/>
+                </a:solidFill>
+                <a:effectLst/>
+                <a:latin typeface="Fira Code" panose="020B0809050000020004" pitchFamily="49" charset="0"/>
+              </a:rPr>
+              <a:t>    </a:t>
+            </a:r>
+            <a:r>
+              <a:rPr lang="en-US" sz="1050" b="0" dirty="0">
+                <a:solidFill>
+                  <a:srgbClr val="AF00DB"/>
+                </a:solidFill>
+                <a:effectLst/>
+                <a:latin typeface="Fira Code" panose="020B0809050000020004" pitchFamily="49" charset="0"/>
+              </a:rPr>
+              <a:t>for</a:t>
+            </a:r>
+            <a:r>
+              <a:rPr lang="en-US" sz="1050" b="0" dirty="0">
+                <a:solidFill>
+                  <a:srgbClr val="000000"/>
+                </a:solidFill>
+                <a:effectLst/>
+                <a:latin typeface="Fira Code" panose="020B0809050000020004" pitchFamily="49" charset="0"/>
+              </a:rPr>
+              <a:t> (</a:t>
+            </a:r>
+            <a:r>
+              <a:rPr lang="en-US" sz="1050" b="0" dirty="0" err="1">
+                <a:solidFill>
+                  <a:srgbClr val="267F99"/>
+                </a:solidFill>
+                <a:effectLst/>
+                <a:latin typeface="Fira Code" panose="020B0809050000020004" pitchFamily="49" charset="0"/>
+              </a:rPr>
+              <a:t>size_t</a:t>
+            </a:r>
+            <a:r>
+              <a:rPr lang="en-US" sz="1050" b="0" dirty="0">
+                <a:solidFill>
+                  <a:srgbClr val="000000"/>
+                </a:solidFill>
+                <a:effectLst/>
+                <a:latin typeface="Fira Code" panose="020B0809050000020004" pitchFamily="49" charset="0"/>
+              </a:rPr>
+              <a:t> </a:t>
+            </a:r>
+            <a:r>
+              <a:rPr lang="en-US" sz="1050" b="0" dirty="0">
+                <a:solidFill>
+                  <a:srgbClr val="001080"/>
+                </a:solidFill>
+                <a:effectLst/>
+                <a:latin typeface="Fira Code" panose="020B0809050000020004" pitchFamily="49" charset="0"/>
+              </a:rPr>
+              <a:t>J</a:t>
+            </a:r>
+            <a:r>
+              <a:rPr lang="en-US" sz="1050" b="0" dirty="0">
+                <a:solidFill>
+                  <a:srgbClr val="000000"/>
+                </a:solidFill>
+                <a:effectLst/>
+                <a:latin typeface="Fira Code" panose="020B0809050000020004" pitchFamily="49" charset="0"/>
+              </a:rPr>
+              <a:t> = </a:t>
+            </a:r>
+            <a:r>
+              <a:rPr lang="en-US" sz="1050" b="0" dirty="0">
+                <a:solidFill>
+                  <a:srgbClr val="098658"/>
+                </a:solidFill>
+                <a:effectLst/>
+                <a:latin typeface="Fira Code" panose="020B0809050000020004" pitchFamily="49" charset="0"/>
+              </a:rPr>
+              <a:t>0</a:t>
+            </a:r>
+            <a:r>
+              <a:rPr lang="en-US" sz="1050" b="0" dirty="0">
+                <a:solidFill>
+                  <a:srgbClr val="000000"/>
+                </a:solidFill>
+                <a:effectLst/>
+                <a:latin typeface="Fira Code" panose="020B0809050000020004" pitchFamily="49" charset="0"/>
+              </a:rPr>
+              <a:t>; </a:t>
+            </a:r>
+            <a:r>
+              <a:rPr lang="en-US" sz="1050" b="0" dirty="0">
+                <a:solidFill>
+                  <a:srgbClr val="001080"/>
+                </a:solidFill>
+                <a:effectLst/>
+                <a:latin typeface="Fira Code" panose="020B0809050000020004" pitchFamily="49" charset="0"/>
+              </a:rPr>
+              <a:t>J</a:t>
+            </a:r>
+            <a:r>
+              <a:rPr lang="en-US" sz="1050" b="0" dirty="0">
+                <a:solidFill>
+                  <a:srgbClr val="000000"/>
+                </a:solidFill>
+                <a:effectLst/>
+                <a:latin typeface="Fira Code" panose="020B0809050000020004" pitchFamily="49" charset="0"/>
+              </a:rPr>
+              <a:t> &lt; </a:t>
+            </a:r>
+            <a:r>
+              <a:rPr lang="en-US" sz="1050" b="0" dirty="0">
+                <a:solidFill>
+                  <a:srgbClr val="0070C1"/>
+                </a:solidFill>
+                <a:effectLst/>
+                <a:latin typeface="Fira Code" panose="020B0809050000020004" pitchFamily="49" charset="0"/>
+              </a:rPr>
+              <a:t>M</a:t>
+            </a:r>
+            <a:r>
+              <a:rPr lang="en-US" sz="1050" b="0" dirty="0">
+                <a:solidFill>
+                  <a:srgbClr val="000000"/>
+                </a:solidFill>
+                <a:effectLst/>
+                <a:latin typeface="Fira Code" panose="020B0809050000020004" pitchFamily="49" charset="0"/>
+              </a:rPr>
+              <a:t>; </a:t>
+            </a:r>
+            <a:r>
+              <a:rPr lang="en-US" sz="1050" b="0" dirty="0">
+                <a:solidFill>
+                  <a:srgbClr val="001080"/>
+                </a:solidFill>
+                <a:effectLst/>
+                <a:latin typeface="Fira Code" panose="020B0809050000020004" pitchFamily="49" charset="0"/>
+              </a:rPr>
+              <a:t>J</a:t>
+            </a:r>
+            <a:r>
+              <a:rPr lang="en-US" sz="1050" b="0" dirty="0">
+                <a:solidFill>
+                  <a:srgbClr val="000000"/>
+                </a:solidFill>
+                <a:effectLst/>
+                <a:latin typeface="Fira Code" panose="020B0809050000020004" pitchFamily="49" charset="0"/>
+              </a:rPr>
+              <a:t> += </a:t>
+            </a:r>
+            <a:r>
+              <a:rPr lang="en-US" sz="1050" b="0" dirty="0">
+                <a:solidFill>
+                  <a:srgbClr val="098658"/>
+                </a:solidFill>
+                <a:effectLst/>
+                <a:latin typeface="Fira Code" panose="020B0809050000020004" pitchFamily="49" charset="0"/>
+              </a:rPr>
+              <a:t>16</a:t>
+            </a:r>
+            <a:r>
+              <a:rPr lang="en-US" sz="1050" b="0" dirty="0">
+                <a:solidFill>
+                  <a:srgbClr val="000000"/>
+                </a:solidFill>
+                <a:effectLst/>
+                <a:latin typeface="Fira Code" panose="020B0809050000020004" pitchFamily="49" charset="0"/>
+              </a:rPr>
+              <a:t>)</a:t>
+            </a:r>
+          </a:p>
+          <a:p>
+            <a:pPr>
+              <a:lnSpc>
+                <a:spcPct val="113095"/>
+              </a:lnSpc>
+              <a:buNone/>
+            </a:pPr>
+            <a:r>
+              <a:rPr lang="en-US" sz="1050" b="0" dirty="0">
+                <a:solidFill>
+                  <a:srgbClr val="000000"/>
+                </a:solidFill>
+                <a:effectLst/>
+                <a:latin typeface="Fira Code" panose="020B0809050000020004" pitchFamily="49" charset="0"/>
+              </a:rPr>
+              <a:t>        </a:t>
+            </a:r>
+            <a:r>
+              <a:rPr lang="en-US" sz="1050" b="0" dirty="0">
+                <a:solidFill>
+                  <a:srgbClr val="AF00DB"/>
+                </a:solidFill>
+                <a:effectLst/>
+                <a:latin typeface="Fira Code" panose="020B0809050000020004" pitchFamily="49" charset="0"/>
+              </a:rPr>
+              <a:t>for</a:t>
+            </a:r>
+            <a:r>
+              <a:rPr lang="en-US" sz="1050" b="0" dirty="0">
+                <a:solidFill>
+                  <a:srgbClr val="000000"/>
+                </a:solidFill>
+                <a:effectLst/>
+                <a:latin typeface="Fira Code" panose="020B0809050000020004" pitchFamily="49" charset="0"/>
+              </a:rPr>
+              <a:t> (</a:t>
+            </a:r>
+            <a:r>
+              <a:rPr lang="en-US" sz="1050" b="0" dirty="0" err="1">
+                <a:solidFill>
+                  <a:srgbClr val="267F99"/>
+                </a:solidFill>
+                <a:effectLst/>
+                <a:latin typeface="Fira Code" panose="020B0809050000020004" pitchFamily="49" charset="0"/>
+              </a:rPr>
+              <a:t>size_t</a:t>
+            </a:r>
+            <a:r>
+              <a:rPr lang="en-US" sz="1050" b="0" dirty="0">
+                <a:solidFill>
+                  <a:srgbClr val="000000"/>
+                </a:solidFill>
+                <a:effectLst/>
+                <a:latin typeface="Fira Code" panose="020B0809050000020004" pitchFamily="49" charset="0"/>
+              </a:rPr>
+              <a:t> </a:t>
+            </a:r>
+            <a:r>
+              <a:rPr lang="en-US" sz="1050" b="0" dirty="0" err="1">
+                <a:solidFill>
+                  <a:srgbClr val="001080"/>
+                </a:solidFill>
+                <a:effectLst/>
+                <a:latin typeface="Fira Code" panose="020B0809050000020004" pitchFamily="49" charset="0"/>
+              </a:rPr>
+              <a:t>i</a:t>
+            </a:r>
+            <a:r>
+              <a:rPr lang="en-US" sz="1050" b="0" dirty="0">
+                <a:solidFill>
+                  <a:srgbClr val="000000"/>
+                </a:solidFill>
+                <a:effectLst/>
+                <a:latin typeface="Fira Code" panose="020B0809050000020004" pitchFamily="49" charset="0"/>
+              </a:rPr>
+              <a:t> = </a:t>
+            </a:r>
+            <a:r>
+              <a:rPr lang="en-US" sz="1050" b="0" dirty="0">
+                <a:solidFill>
+                  <a:srgbClr val="001080"/>
+                </a:solidFill>
+                <a:effectLst/>
+                <a:latin typeface="Fira Code" panose="020B0809050000020004" pitchFamily="49" charset="0"/>
+              </a:rPr>
+              <a:t>I</a:t>
+            </a:r>
+            <a:r>
+              <a:rPr lang="en-US" sz="1050" b="0" dirty="0">
+                <a:solidFill>
+                  <a:srgbClr val="000000"/>
+                </a:solidFill>
+                <a:effectLst/>
+                <a:latin typeface="Fira Code" panose="020B0809050000020004" pitchFamily="49" charset="0"/>
+              </a:rPr>
+              <a:t>; </a:t>
+            </a:r>
+            <a:r>
+              <a:rPr lang="en-US" sz="1050" b="0" dirty="0" err="1">
+                <a:solidFill>
+                  <a:srgbClr val="001080"/>
+                </a:solidFill>
+                <a:effectLst/>
+                <a:latin typeface="Fira Code" panose="020B0809050000020004" pitchFamily="49" charset="0"/>
+              </a:rPr>
+              <a:t>i</a:t>
+            </a:r>
+            <a:r>
+              <a:rPr lang="en-US" sz="1050" b="0" dirty="0">
+                <a:solidFill>
+                  <a:srgbClr val="000000"/>
+                </a:solidFill>
+                <a:effectLst/>
+                <a:latin typeface="Fira Code" panose="020B0809050000020004" pitchFamily="49" charset="0"/>
+              </a:rPr>
+              <a:t> &lt; </a:t>
+            </a:r>
+            <a:r>
+              <a:rPr lang="en-US" sz="1050" b="0" dirty="0">
+                <a:solidFill>
+                  <a:srgbClr val="001080"/>
+                </a:solidFill>
+                <a:effectLst/>
+                <a:latin typeface="Fira Code" panose="020B0809050000020004" pitchFamily="49" charset="0"/>
+              </a:rPr>
+              <a:t>I</a:t>
+            </a:r>
+            <a:r>
+              <a:rPr lang="en-US" sz="1050" b="0" dirty="0">
+                <a:solidFill>
+                  <a:srgbClr val="000000"/>
+                </a:solidFill>
+                <a:effectLst/>
+                <a:latin typeface="Fira Code" panose="020B0809050000020004" pitchFamily="49" charset="0"/>
+              </a:rPr>
+              <a:t> + </a:t>
+            </a:r>
+            <a:r>
+              <a:rPr lang="en-US" sz="1050" b="0" dirty="0">
+                <a:solidFill>
+                  <a:srgbClr val="098658"/>
+                </a:solidFill>
+                <a:effectLst/>
+                <a:latin typeface="Fira Code" panose="020B0809050000020004" pitchFamily="49" charset="0"/>
+              </a:rPr>
+              <a:t>16</a:t>
+            </a:r>
+            <a:r>
+              <a:rPr lang="en-US" sz="1050" b="0" dirty="0">
+                <a:solidFill>
+                  <a:srgbClr val="000000"/>
+                </a:solidFill>
+                <a:effectLst/>
+                <a:latin typeface="Fira Code" panose="020B0809050000020004" pitchFamily="49" charset="0"/>
+              </a:rPr>
+              <a:t>; ++</a:t>
+            </a:r>
+            <a:r>
+              <a:rPr lang="en-US" sz="1050" b="0" dirty="0" err="1">
+                <a:solidFill>
+                  <a:srgbClr val="001080"/>
+                </a:solidFill>
+                <a:effectLst/>
+                <a:latin typeface="Fira Code" panose="020B0809050000020004" pitchFamily="49" charset="0"/>
+              </a:rPr>
+              <a:t>i</a:t>
+            </a:r>
+            <a:r>
+              <a:rPr lang="en-US" sz="1050" b="0" dirty="0">
+                <a:solidFill>
+                  <a:srgbClr val="000000"/>
+                </a:solidFill>
+                <a:effectLst/>
+                <a:latin typeface="Fira Code" panose="020B0809050000020004" pitchFamily="49" charset="0"/>
+              </a:rPr>
+              <a:t>)</a:t>
+            </a:r>
+          </a:p>
+          <a:p>
+            <a:pPr>
+              <a:lnSpc>
+                <a:spcPct val="113095"/>
+              </a:lnSpc>
+              <a:buNone/>
+            </a:pPr>
+            <a:r>
+              <a:rPr lang="en-US" sz="1050" b="0" dirty="0">
+                <a:solidFill>
+                  <a:srgbClr val="000000"/>
+                </a:solidFill>
+                <a:effectLst/>
+                <a:latin typeface="Fira Code" panose="020B0809050000020004" pitchFamily="49" charset="0"/>
+              </a:rPr>
+              <a:t>            </a:t>
+            </a:r>
+            <a:r>
+              <a:rPr lang="en-US" sz="1050" b="0" dirty="0">
+                <a:solidFill>
+                  <a:srgbClr val="AF00DB"/>
+                </a:solidFill>
+                <a:effectLst/>
+                <a:latin typeface="Fira Code" panose="020B0809050000020004" pitchFamily="49" charset="0"/>
+              </a:rPr>
+              <a:t>for</a:t>
+            </a:r>
+            <a:r>
+              <a:rPr lang="en-US" sz="1050" b="0" dirty="0">
+                <a:solidFill>
+                  <a:srgbClr val="000000"/>
+                </a:solidFill>
+                <a:effectLst/>
+                <a:latin typeface="Fira Code" panose="020B0809050000020004" pitchFamily="49" charset="0"/>
+              </a:rPr>
+              <a:t> (</a:t>
+            </a:r>
+            <a:r>
+              <a:rPr lang="en-US" sz="1050" b="0" dirty="0" err="1">
+                <a:solidFill>
+                  <a:srgbClr val="267F99"/>
+                </a:solidFill>
+                <a:effectLst/>
+                <a:latin typeface="Fira Code" panose="020B0809050000020004" pitchFamily="49" charset="0"/>
+              </a:rPr>
+              <a:t>size_t</a:t>
+            </a:r>
+            <a:r>
+              <a:rPr lang="en-US" sz="1050" b="0" dirty="0">
+                <a:solidFill>
+                  <a:srgbClr val="000000"/>
+                </a:solidFill>
+                <a:effectLst/>
+                <a:latin typeface="Fira Code" panose="020B0809050000020004" pitchFamily="49" charset="0"/>
+              </a:rPr>
+              <a:t> </a:t>
+            </a:r>
+            <a:r>
+              <a:rPr lang="en-US" sz="1050" b="0" dirty="0">
+                <a:solidFill>
+                  <a:srgbClr val="001080"/>
+                </a:solidFill>
+                <a:effectLst/>
+                <a:latin typeface="Fira Code" panose="020B0809050000020004" pitchFamily="49" charset="0"/>
+              </a:rPr>
+              <a:t>j</a:t>
+            </a:r>
+            <a:r>
+              <a:rPr lang="en-US" sz="1050" b="0" dirty="0">
+                <a:solidFill>
+                  <a:srgbClr val="000000"/>
+                </a:solidFill>
+                <a:effectLst/>
+                <a:latin typeface="Fira Code" panose="020B0809050000020004" pitchFamily="49" charset="0"/>
+              </a:rPr>
+              <a:t> = </a:t>
+            </a:r>
+            <a:r>
+              <a:rPr lang="en-US" sz="1050" b="0" dirty="0">
+                <a:solidFill>
+                  <a:srgbClr val="001080"/>
+                </a:solidFill>
+                <a:effectLst/>
+                <a:latin typeface="Fira Code" panose="020B0809050000020004" pitchFamily="49" charset="0"/>
+              </a:rPr>
+              <a:t>J</a:t>
+            </a:r>
+            <a:r>
+              <a:rPr lang="en-US" sz="1050" b="0" dirty="0">
+                <a:solidFill>
+                  <a:srgbClr val="000000"/>
+                </a:solidFill>
+                <a:effectLst/>
+                <a:latin typeface="Fira Code" panose="020B0809050000020004" pitchFamily="49" charset="0"/>
+              </a:rPr>
+              <a:t>; </a:t>
+            </a:r>
+            <a:r>
+              <a:rPr lang="en-US" sz="1050" b="0" dirty="0">
+                <a:solidFill>
+                  <a:srgbClr val="001080"/>
+                </a:solidFill>
+                <a:effectLst/>
+                <a:latin typeface="Fira Code" panose="020B0809050000020004" pitchFamily="49" charset="0"/>
+              </a:rPr>
+              <a:t>j</a:t>
+            </a:r>
+            <a:r>
+              <a:rPr lang="en-US" sz="1050" b="0" dirty="0">
+                <a:solidFill>
+                  <a:srgbClr val="000000"/>
+                </a:solidFill>
+                <a:effectLst/>
+                <a:latin typeface="Fira Code" panose="020B0809050000020004" pitchFamily="49" charset="0"/>
+              </a:rPr>
+              <a:t> &lt; </a:t>
+            </a:r>
+            <a:r>
+              <a:rPr lang="en-US" sz="1050" b="0" dirty="0">
+                <a:solidFill>
+                  <a:srgbClr val="001080"/>
+                </a:solidFill>
+                <a:effectLst/>
+                <a:latin typeface="Fira Code" panose="020B0809050000020004" pitchFamily="49" charset="0"/>
+              </a:rPr>
+              <a:t>J</a:t>
+            </a:r>
+            <a:r>
+              <a:rPr lang="en-US" sz="1050" b="0" dirty="0">
+                <a:solidFill>
+                  <a:srgbClr val="000000"/>
+                </a:solidFill>
+                <a:effectLst/>
+                <a:latin typeface="Fira Code" panose="020B0809050000020004" pitchFamily="49" charset="0"/>
+              </a:rPr>
+              <a:t> + </a:t>
+            </a:r>
+            <a:r>
+              <a:rPr lang="en-US" sz="1050" b="0" dirty="0">
+                <a:solidFill>
+                  <a:srgbClr val="098658"/>
+                </a:solidFill>
+                <a:effectLst/>
+                <a:latin typeface="Fira Code" panose="020B0809050000020004" pitchFamily="49" charset="0"/>
+              </a:rPr>
+              <a:t>16</a:t>
+            </a:r>
+            <a:r>
+              <a:rPr lang="en-US" sz="1050" b="0" dirty="0">
+                <a:solidFill>
+                  <a:srgbClr val="000000"/>
+                </a:solidFill>
+                <a:effectLst/>
+                <a:latin typeface="Fira Code" panose="020B0809050000020004" pitchFamily="49" charset="0"/>
+              </a:rPr>
+              <a:t>; ++</a:t>
+            </a:r>
+            <a:r>
+              <a:rPr lang="en-US" sz="1050" b="0" dirty="0">
+                <a:solidFill>
+                  <a:srgbClr val="001080"/>
+                </a:solidFill>
+                <a:effectLst/>
+                <a:latin typeface="Fira Code" panose="020B0809050000020004" pitchFamily="49" charset="0"/>
+              </a:rPr>
+              <a:t>j</a:t>
+            </a:r>
+            <a:r>
+              <a:rPr lang="en-US" sz="1050" b="0" dirty="0">
+                <a:solidFill>
+                  <a:srgbClr val="000000"/>
+                </a:solidFill>
+                <a:effectLst/>
+                <a:latin typeface="Fira Code" panose="020B0809050000020004" pitchFamily="49" charset="0"/>
+              </a:rPr>
+              <a:t>)</a:t>
+            </a:r>
+          </a:p>
+          <a:p>
+            <a:pPr>
+              <a:lnSpc>
+                <a:spcPct val="113095"/>
+              </a:lnSpc>
+              <a:buNone/>
+            </a:pPr>
+            <a:r>
+              <a:rPr lang="en-US" sz="1050" b="0" dirty="0">
+                <a:solidFill>
+                  <a:srgbClr val="000000"/>
+                </a:solidFill>
+                <a:effectLst/>
+                <a:latin typeface="Fira Code" panose="020B0809050000020004" pitchFamily="49" charset="0"/>
+              </a:rPr>
+              <a:t>                </a:t>
+            </a:r>
+            <a:r>
+              <a:rPr lang="en-US" sz="1050" b="0" dirty="0">
+                <a:solidFill>
+                  <a:srgbClr val="AF00DB"/>
+                </a:solidFill>
+                <a:effectLst/>
+                <a:latin typeface="Fira Code" panose="020B0809050000020004" pitchFamily="49" charset="0"/>
+              </a:rPr>
+              <a:t>for</a:t>
+            </a:r>
+            <a:r>
+              <a:rPr lang="en-US" sz="1050" b="0" dirty="0">
+                <a:solidFill>
+                  <a:srgbClr val="000000"/>
+                </a:solidFill>
+                <a:effectLst/>
+                <a:latin typeface="Fira Code" panose="020B0809050000020004" pitchFamily="49" charset="0"/>
+              </a:rPr>
+              <a:t> (</a:t>
+            </a:r>
+            <a:r>
+              <a:rPr lang="en-US" sz="1050" b="0" dirty="0" err="1">
+                <a:solidFill>
+                  <a:srgbClr val="267F99"/>
+                </a:solidFill>
+                <a:effectLst/>
+                <a:latin typeface="Fira Code" panose="020B0809050000020004" pitchFamily="49" charset="0"/>
+              </a:rPr>
+              <a:t>size_t</a:t>
+            </a:r>
+            <a:r>
+              <a:rPr lang="en-US" sz="1050" b="0" dirty="0">
+                <a:solidFill>
+                  <a:srgbClr val="000000"/>
+                </a:solidFill>
+                <a:effectLst/>
+                <a:latin typeface="Fira Code" panose="020B0809050000020004" pitchFamily="49" charset="0"/>
+              </a:rPr>
+              <a:t> </a:t>
+            </a:r>
+            <a:r>
+              <a:rPr lang="en-US" sz="1050" b="0" dirty="0">
+                <a:solidFill>
+                  <a:srgbClr val="001080"/>
+                </a:solidFill>
+                <a:effectLst/>
+                <a:latin typeface="Fira Code" panose="020B0809050000020004" pitchFamily="49" charset="0"/>
+              </a:rPr>
+              <a:t>k</a:t>
+            </a:r>
+            <a:r>
+              <a:rPr lang="en-US" sz="1050" b="0" dirty="0">
+                <a:solidFill>
+                  <a:srgbClr val="000000"/>
+                </a:solidFill>
+                <a:effectLst/>
+                <a:latin typeface="Fira Code" panose="020B0809050000020004" pitchFamily="49" charset="0"/>
+              </a:rPr>
+              <a:t> = </a:t>
+            </a:r>
+            <a:r>
+              <a:rPr lang="en-US" sz="1050" b="0" dirty="0">
+                <a:solidFill>
+                  <a:srgbClr val="098658"/>
+                </a:solidFill>
+                <a:effectLst/>
+                <a:latin typeface="Fira Code" panose="020B0809050000020004" pitchFamily="49" charset="0"/>
+              </a:rPr>
+              <a:t>0</a:t>
+            </a:r>
+            <a:r>
+              <a:rPr lang="en-US" sz="1050" b="0" dirty="0">
+                <a:solidFill>
+                  <a:srgbClr val="000000"/>
+                </a:solidFill>
+                <a:effectLst/>
+                <a:latin typeface="Fira Code" panose="020B0809050000020004" pitchFamily="49" charset="0"/>
+              </a:rPr>
+              <a:t>; </a:t>
+            </a:r>
+            <a:r>
+              <a:rPr lang="en-US" sz="1050" b="0" dirty="0">
+                <a:solidFill>
+                  <a:srgbClr val="001080"/>
+                </a:solidFill>
+                <a:effectLst/>
+                <a:latin typeface="Fira Code" panose="020B0809050000020004" pitchFamily="49" charset="0"/>
+              </a:rPr>
+              <a:t>k</a:t>
+            </a:r>
+            <a:r>
+              <a:rPr lang="en-US" sz="1050" b="0" dirty="0">
+                <a:solidFill>
+                  <a:srgbClr val="000000"/>
+                </a:solidFill>
+                <a:effectLst/>
+                <a:latin typeface="Fira Code" panose="020B0809050000020004" pitchFamily="49" charset="0"/>
+              </a:rPr>
+              <a:t> &lt; </a:t>
+            </a:r>
+            <a:r>
+              <a:rPr lang="en-US" sz="1050" b="0" dirty="0">
+                <a:solidFill>
+                  <a:srgbClr val="0070C1"/>
+                </a:solidFill>
+                <a:effectLst/>
+                <a:latin typeface="Fira Code" panose="020B0809050000020004" pitchFamily="49" charset="0"/>
+              </a:rPr>
+              <a:t>K</a:t>
+            </a:r>
+            <a:r>
+              <a:rPr lang="en-US" sz="1050" b="0" dirty="0">
+                <a:solidFill>
+                  <a:srgbClr val="000000"/>
+                </a:solidFill>
+                <a:effectLst/>
+                <a:latin typeface="Fira Code" panose="020B0809050000020004" pitchFamily="49" charset="0"/>
+              </a:rPr>
+              <a:t>; ++</a:t>
+            </a:r>
+            <a:r>
+              <a:rPr lang="en-US" sz="1050" b="0" dirty="0">
+                <a:solidFill>
+                  <a:srgbClr val="001080"/>
+                </a:solidFill>
+                <a:effectLst/>
+                <a:latin typeface="Fira Code" panose="020B0809050000020004" pitchFamily="49" charset="0"/>
+              </a:rPr>
+              <a:t>k</a:t>
+            </a:r>
+            <a:r>
+              <a:rPr lang="en-US" sz="1050" b="0" dirty="0">
+                <a:solidFill>
+                  <a:srgbClr val="000000"/>
+                </a:solidFill>
+                <a:effectLst/>
+                <a:latin typeface="Fira Code" panose="020B0809050000020004" pitchFamily="49" charset="0"/>
+              </a:rPr>
+              <a:t>)</a:t>
+            </a:r>
+          </a:p>
+          <a:p>
+            <a:pPr>
+              <a:lnSpc>
+                <a:spcPct val="113095"/>
+              </a:lnSpc>
+              <a:buNone/>
+            </a:pPr>
+            <a:r>
+              <a:rPr lang="en-US" sz="1050" b="0" dirty="0">
+                <a:solidFill>
+                  <a:srgbClr val="000000"/>
+                </a:solidFill>
+                <a:effectLst/>
+                <a:latin typeface="Fira Code" panose="020B0809050000020004" pitchFamily="49" charset="0"/>
+              </a:rPr>
+              <a:t>                    </a:t>
+            </a:r>
+            <a:r>
+              <a:rPr lang="en-US" sz="1050" b="0" dirty="0">
+                <a:solidFill>
+                  <a:srgbClr val="001080"/>
+                </a:solidFill>
+                <a:effectLst/>
+                <a:latin typeface="Fira Code" panose="020B0809050000020004" pitchFamily="49" charset="0"/>
+              </a:rPr>
+              <a:t>C</a:t>
+            </a:r>
+            <a:r>
+              <a:rPr lang="en-US" sz="1050" b="0" dirty="0">
+                <a:solidFill>
+                  <a:srgbClr val="000000"/>
+                </a:solidFill>
+                <a:effectLst/>
+                <a:latin typeface="Fira Code" panose="020B0809050000020004" pitchFamily="49" charset="0"/>
+              </a:rPr>
+              <a:t>[</a:t>
+            </a:r>
+            <a:r>
+              <a:rPr lang="en-US" sz="1050" b="0" dirty="0" err="1">
+                <a:solidFill>
+                  <a:srgbClr val="001080"/>
+                </a:solidFill>
+                <a:effectLst/>
+                <a:latin typeface="Fira Code" panose="020B0809050000020004" pitchFamily="49" charset="0"/>
+              </a:rPr>
+              <a:t>i</a:t>
+            </a:r>
+            <a:r>
+              <a:rPr lang="en-US" sz="1050" b="0" dirty="0">
+                <a:solidFill>
+                  <a:srgbClr val="000000"/>
+                </a:solidFill>
+                <a:effectLst/>
+                <a:latin typeface="Fira Code" panose="020B0809050000020004" pitchFamily="49" charset="0"/>
+              </a:rPr>
+              <a:t> * </a:t>
+            </a:r>
+            <a:r>
+              <a:rPr lang="en-US" sz="1050" b="0" dirty="0">
+                <a:solidFill>
+                  <a:srgbClr val="0070C1"/>
+                </a:solidFill>
+                <a:effectLst/>
+                <a:latin typeface="Fira Code" panose="020B0809050000020004" pitchFamily="49" charset="0"/>
+              </a:rPr>
+              <a:t>N</a:t>
+            </a:r>
+            <a:r>
+              <a:rPr lang="en-US" sz="1050" b="0" dirty="0">
+                <a:solidFill>
+                  <a:srgbClr val="000000"/>
+                </a:solidFill>
+                <a:effectLst/>
+                <a:latin typeface="Fira Code" panose="020B0809050000020004" pitchFamily="49" charset="0"/>
+              </a:rPr>
+              <a:t> + </a:t>
+            </a:r>
+            <a:r>
+              <a:rPr lang="en-US" sz="1050" b="0" dirty="0">
+                <a:solidFill>
+                  <a:srgbClr val="001080"/>
+                </a:solidFill>
+                <a:effectLst/>
+                <a:latin typeface="Fira Code" panose="020B0809050000020004" pitchFamily="49" charset="0"/>
+              </a:rPr>
+              <a:t>j</a:t>
+            </a:r>
+            <a:r>
+              <a:rPr lang="en-US" sz="1050" b="0" dirty="0">
+                <a:solidFill>
+                  <a:srgbClr val="000000"/>
+                </a:solidFill>
+                <a:effectLst/>
+                <a:latin typeface="Fira Code" panose="020B0809050000020004" pitchFamily="49" charset="0"/>
+              </a:rPr>
+              <a:t>] += </a:t>
+            </a:r>
+            <a:r>
+              <a:rPr lang="en-US" sz="1050" b="0" dirty="0">
+                <a:solidFill>
+                  <a:srgbClr val="001080"/>
+                </a:solidFill>
+                <a:effectLst/>
+                <a:latin typeface="Fira Code" panose="020B0809050000020004" pitchFamily="49" charset="0"/>
+              </a:rPr>
+              <a:t>A</a:t>
+            </a:r>
+            <a:r>
+              <a:rPr lang="en-US" sz="1050" b="0" dirty="0">
+                <a:solidFill>
+                  <a:srgbClr val="000000"/>
+                </a:solidFill>
+                <a:effectLst/>
+                <a:latin typeface="Fira Code" panose="020B0809050000020004" pitchFamily="49" charset="0"/>
+              </a:rPr>
+              <a:t>[</a:t>
+            </a:r>
+            <a:r>
+              <a:rPr lang="en-US" sz="1050" b="0" dirty="0" err="1">
+                <a:solidFill>
+                  <a:srgbClr val="001080"/>
+                </a:solidFill>
+                <a:effectLst/>
+                <a:latin typeface="Fira Code" panose="020B0809050000020004" pitchFamily="49" charset="0"/>
+              </a:rPr>
+              <a:t>i</a:t>
+            </a:r>
+            <a:r>
+              <a:rPr lang="en-US" sz="1050" b="0" dirty="0">
+                <a:solidFill>
+                  <a:srgbClr val="000000"/>
+                </a:solidFill>
+                <a:effectLst/>
+                <a:latin typeface="Fira Code" panose="020B0809050000020004" pitchFamily="49" charset="0"/>
+              </a:rPr>
+              <a:t> * </a:t>
+            </a:r>
+            <a:r>
+              <a:rPr lang="en-US" sz="1050" b="0" dirty="0">
+                <a:solidFill>
+                  <a:srgbClr val="0070C1"/>
+                </a:solidFill>
+                <a:effectLst/>
+                <a:latin typeface="Fira Code" panose="020B0809050000020004" pitchFamily="49" charset="0"/>
+              </a:rPr>
+              <a:t>K</a:t>
+            </a:r>
+            <a:r>
+              <a:rPr lang="en-US" sz="1050" b="0" dirty="0">
+                <a:solidFill>
+                  <a:srgbClr val="000000"/>
+                </a:solidFill>
+                <a:effectLst/>
+                <a:latin typeface="Fira Code" panose="020B0809050000020004" pitchFamily="49" charset="0"/>
+              </a:rPr>
+              <a:t> + </a:t>
+            </a:r>
+            <a:r>
+              <a:rPr lang="en-US" sz="1050" b="0" dirty="0">
+                <a:solidFill>
+                  <a:srgbClr val="001080"/>
+                </a:solidFill>
+                <a:effectLst/>
+                <a:latin typeface="Fira Code" panose="020B0809050000020004" pitchFamily="49" charset="0"/>
+              </a:rPr>
+              <a:t>k</a:t>
+            </a:r>
+            <a:r>
+              <a:rPr lang="en-US" sz="1050" b="0" dirty="0">
+                <a:solidFill>
+                  <a:srgbClr val="000000"/>
+                </a:solidFill>
+                <a:effectLst/>
+                <a:latin typeface="Fira Code" panose="020B0809050000020004" pitchFamily="49" charset="0"/>
+              </a:rPr>
+              <a:t>] * </a:t>
+            </a:r>
+            <a:r>
+              <a:rPr lang="en-US" sz="1050" b="0" dirty="0">
+                <a:solidFill>
+                  <a:srgbClr val="001080"/>
+                </a:solidFill>
+                <a:effectLst/>
+                <a:latin typeface="Fira Code" panose="020B0809050000020004" pitchFamily="49" charset="0"/>
+              </a:rPr>
+              <a:t>B</a:t>
+            </a:r>
+            <a:r>
+              <a:rPr lang="en-US" sz="1050" b="0" dirty="0">
+                <a:solidFill>
+                  <a:srgbClr val="000000"/>
+                </a:solidFill>
+                <a:effectLst/>
+                <a:latin typeface="Fira Code" panose="020B0809050000020004" pitchFamily="49" charset="0"/>
+              </a:rPr>
+              <a:t>[</a:t>
+            </a:r>
+            <a:r>
+              <a:rPr lang="en-US" sz="1050" b="0" dirty="0">
+                <a:solidFill>
+                  <a:srgbClr val="001080"/>
+                </a:solidFill>
+                <a:effectLst/>
+                <a:latin typeface="Fira Code" panose="020B0809050000020004" pitchFamily="49" charset="0"/>
+              </a:rPr>
+              <a:t>k</a:t>
+            </a:r>
+            <a:r>
+              <a:rPr lang="en-US" sz="1050" b="0" dirty="0">
+                <a:solidFill>
+                  <a:srgbClr val="000000"/>
+                </a:solidFill>
+                <a:effectLst/>
+                <a:latin typeface="Fira Code" panose="020B0809050000020004" pitchFamily="49" charset="0"/>
+              </a:rPr>
+              <a:t> * </a:t>
+            </a:r>
+            <a:r>
+              <a:rPr lang="en-US" sz="1050" b="0" dirty="0">
+                <a:solidFill>
+                  <a:srgbClr val="0070C1"/>
+                </a:solidFill>
+                <a:effectLst/>
+                <a:latin typeface="Fira Code" panose="020B0809050000020004" pitchFamily="49" charset="0"/>
+              </a:rPr>
+              <a:t>M</a:t>
+            </a:r>
+            <a:r>
+              <a:rPr lang="en-US" sz="1050" b="0" dirty="0">
+                <a:solidFill>
+                  <a:srgbClr val="000000"/>
+                </a:solidFill>
+                <a:effectLst/>
+                <a:latin typeface="Fira Code" panose="020B0809050000020004" pitchFamily="49" charset="0"/>
+              </a:rPr>
+              <a:t> + </a:t>
+            </a:r>
+            <a:r>
+              <a:rPr lang="en-US" sz="1050" b="0" dirty="0">
+                <a:solidFill>
+                  <a:srgbClr val="001080"/>
+                </a:solidFill>
+                <a:effectLst/>
+                <a:latin typeface="Fira Code" panose="020B0809050000020004" pitchFamily="49" charset="0"/>
+              </a:rPr>
+              <a:t>j</a:t>
+            </a:r>
+            <a:r>
+              <a:rPr lang="en-US" sz="1050" b="0" dirty="0">
+                <a:solidFill>
+                  <a:srgbClr val="000000"/>
+                </a:solidFill>
+                <a:effectLst/>
+                <a:latin typeface="Fira Code" panose="020B0809050000020004" pitchFamily="49" charset="0"/>
+              </a:rPr>
+              <a:t>];</a:t>
+            </a:r>
+          </a:p>
+        </p:txBody>
+      </p:sp>
+      <p:sp>
+        <p:nvSpPr>
+          <p:cNvPr id="11" name="TextBox 10">
+            <a:extLst>
+              <a:ext uri="{FF2B5EF4-FFF2-40B4-BE49-F238E27FC236}">
+                <a16:creationId xmlns:a16="http://schemas.microsoft.com/office/drawing/2014/main" id="{4418C5DE-B552-F324-0BF5-F984480C4846}"/>
+              </a:ext>
+            </a:extLst>
+          </p:cNvPr>
+          <p:cNvSpPr txBox="1"/>
+          <p:nvPr/>
+        </p:nvSpPr>
+        <p:spPr>
+          <a:xfrm>
+            <a:off x="6266583" y="4459386"/>
+            <a:ext cx="5322570" cy="1912447"/>
+          </a:xfrm>
+          <a:prstGeom prst="rect">
+            <a:avLst/>
+          </a:prstGeom>
+          <a:noFill/>
+          <a:ln>
+            <a:solidFill>
+              <a:schemeClr val="tx1"/>
+            </a:solidFill>
+          </a:ln>
+        </p:spPr>
+        <p:txBody>
+          <a:bodyPr wrap="square">
+            <a:spAutoFit/>
+          </a:bodyPr>
+          <a:lstStyle/>
+          <a:p>
+            <a:pPr>
+              <a:lnSpc>
+                <a:spcPct val="113095"/>
+              </a:lnSpc>
+              <a:buNone/>
+            </a:pPr>
+            <a:r>
+              <a:rPr lang="en-US" sz="1050" b="0" dirty="0">
+                <a:solidFill>
+                  <a:srgbClr val="267F99"/>
+                </a:solidFill>
+                <a:effectLst/>
+                <a:latin typeface="Fira Code" panose="020B0809050000020004" pitchFamily="49" charset="0"/>
+              </a:rPr>
+              <a:t>auto</a:t>
+            </a:r>
+            <a:r>
+              <a:rPr lang="en-US" sz="1050" b="0" dirty="0">
+                <a:solidFill>
+                  <a:srgbClr val="000000"/>
+                </a:solidFill>
+                <a:effectLst/>
+                <a:latin typeface="Fira Code" panose="020B0809050000020004" pitchFamily="49" charset="0"/>
+              </a:rPr>
+              <a:t> </a:t>
+            </a:r>
+            <a:r>
+              <a:rPr lang="en-US" sz="1050" b="0" dirty="0">
+                <a:solidFill>
+                  <a:srgbClr val="001080"/>
+                </a:solidFill>
+                <a:effectLst/>
+                <a:latin typeface="Fira Code" panose="020B0809050000020004" pitchFamily="49" charset="0"/>
+              </a:rPr>
+              <a:t>C</a:t>
+            </a:r>
+            <a:r>
+              <a:rPr lang="en-US" sz="1050" b="0" dirty="0">
+                <a:solidFill>
+                  <a:srgbClr val="000000"/>
+                </a:solidFill>
+                <a:effectLst/>
+                <a:latin typeface="Fira Code" panose="020B0809050000020004" pitchFamily="49" charset="0"/>
+              </a:rPr>
+              <a:t> = </a:t>
+            </a:r>
+            <a:r>
+              <a:rPr lang="en-US" sz="1050" b="0" dirty="0" err="1">
+                <a:solidFill>
+                  <a:srgbClr val="267F99"/>
+                </a:solidFill>
+                <a:effectLst/>
+                <a:latin typeface="Fira Code" panose="020B0809050000020004" pitchFamily="49" charset="0"/>
+              </a:rPr>
+              <a:t>MultiDimArray</a:t>
+            </a:r>
+            <a:r>
+              <a:rPr lang="en-US" sz="1050" b="0" dirty="0">
+                <a:solidFill>
+                  <a:srgbClr val="000000"/>
+                </a:solidFill>
+                <a:effectLst/>
+                <a:latin typeface="Fira Code" panose="020B0809050000020004" pitchFamily="49" charset="0"/>
+              </a:rPr>
+              <a:t>&lt;</a:t>
+            </a:r>
+            <a:r>
+              <a:rPr lang="en-US" sz="1050" b="0" dirty="0">
+                <a:solidFill>
+                  <a:srgbClr val="A31515"/>
+                </a:solidFill>
+                <a:effectLst/>
+                <a:latin typeface="Fira Code" panose="020B0809050000020004" pitchFamily="49" charset="0"/>
+              </a:rPr>
+              <a:t>'N'</a:t>
+            </a:r>
+            <a:r>
+              <a:rPr lang="en-US" sz="1050" b="0" dirty="0">
+                <a:solidFill>
+                  <a:srgbClr val="000000"/>
+                </a:solidFill>
+                <a:effectLst/>
+                <a:latin typeface="Fira Code" panose="020B0809050000020004" pitchFamily="49" charset="0"/>
+              </a:rPr>
+              <a:t>, </a:t>
+            </a:r>
+            <a:r>
+              <a:rPr lang="en-US" sz="1050" b="0" dirty="0">
+                <a:solidFill>
+                  <a:srgbClr val="A31515"/>
+                </a:solidFill>
+                <a:effectLst/>
+                <a:latin typeface="Fira Code" panose="020B0809050000020004" pitchFamily="49" charset="0"/>
+              </a:rPr>
+              <a:t>'M’</a:t>
+            </a:r>
+            <a:r>
+              <a:rPr lang="en-US" sz="1050" b="0" dirty="0">
+                <a:solidFill>
+                  <a:srgbClr val="000000"/>
+                </a:solidFill>
+                <a:effectLst/>
+                <a:latin typeface="Fira Code" panose="020B0809050000020004" pitchFamily="49" charset="0"/>
+              </a:rPr>
+              <a:t>&gt;();</a:t>
+            </a:r>
+          </a:p>
+          <a:p>
+            <a:pPr>
+              <a:lnSpc>
+                <a:spcPct val="113095"/>
+              </a:lnSpc>
+              <a:buNone/>
+            </a:pPr>
+            <a:r>
+              <a:rPr lang="en-US" sz="1050" b="0" dirty="0">
+                <a:solidFill>
+                  <a:srgbClr val="267F99"/>
+                </a:solidFill>
+                <a:effectLst/>
+                <a:latin typeface="Fira Code" panose="020B0809050000020004" pitchFamily="49" charset="0"/>
+              </a:rPr>
+              <a:t>auto</a:t>
+            </a:r>
+            <a:r>
+              <a:rPr lang="en-US" sz="1050" b="0" dirty="0">
+                <a:solidFill>
+                  <a:srgbClr val="000000"/>
+                </a:solidFill>
+                <a:effectLst/>
+                <a:latin typeface="Fira Code" panose="020B0809050000020004" pitchFamily="49" charset="0"/>
+              </a:rPr>
+              <a:t> </a:t>
+            </a:r>
+            <a:r>
+              <a:rPr lang="en-US" sz="1050" b="0" dirty="0">
+                <a:solidFill>
+                  <a:srgbClr val="001080"/>
+                </a:solidFill>
+                <a:effectLst/>
+                <a:latin typeface="Fira Code" panose="020B0809050000020004" pitchFamily="49" charset="0"/>
+              </a:rPr>
+              <a:t>A</a:t>
+            </a:r>
+            <a:r>
+              <a:rPr lang="en-US" sz="1050" b="0" dirty="0">
+                <a:solidFill>
+                  <a:srgbClr val="000000"/>
+                </a:solidFill>
+                <a:effectLst/>
+                <a:latin typeface="Fira Code" panose="020B0809050000020004" pitchFamily="49" charset="0"/>
+              </a:rPr>
+              <a:t> = </a:t>
+            </a:r>
+            <a:r>
+              <a:rPr lang="en-US" sz="1050" b="0" dirty="0" err="1">
+                <a:solidFill>
+                  <a:srgbClr val="267F99"/>
+                </a:solidFill>
+                <a:effectLst/>
+                <a:latin typeface="Fira Code" panose="020B0809050000020004" pitchFamily="49" charset="0"/>
+              </a:rPr>
+              <a:t>MultiDimArray</a:t>
+            </a:r>
+            <a:r>
+              <a:rPr lang="en-US" sz="1050" b="0" dirty="0">
+                <a:solidFill>
+                  <a:srgbClr val="000000"/>
+                </a:solidFill>
+                <a:effectLst/>
+                <a:latin typeface="Fira Code" panose="020B0809050000020004" pitchFamily="49" charset="0"/>
+              </a:rPr>
+              <a:t>&lt;</a:t>
+            </a:r>
+            <a:r>
+              <a:rPr lang="en-US" sz="1050" b="0" dirty="0">
+                <a:solidFill>
+                  <a:srgbClr val="A31515"/>
+                </a:solidFill>
+                <a:effectLst/>
+                <a:latin typeface="Fira Code" panose="020B0809050000020004" pitchFamily="49" charset="0"/>
+              </a:rPr>
+              <a:t>'N'</a:t>
+            </a:r>
+            <a:r>
+              <a:rPr lang="en-US" sz="1050" b="0" dirty="0">
+                <a:solidFill>
+                  <a:srgbClr val="000000"/>
+                </a:solidFill>
+                <a:effectLst/>
+                <a:latin typeface="Fira Code" panose="020B0809050000020004" pitchFamily="49" charset="0"/>
+              </a:rPr>
+              <a:t>, </a:t>
+            </a:r>
+            <a:r>
+              <a:rPr lang="en-US" sz="1050" b="0" dirty="0">
+                <a:solidFill>
+                  <a:srgbClr val="A31515"/>
+                </a:solidFill>
+                <a:effectLst/>
+                <a:latin typeface="Fira Code" panose="020B0809050000020004" pitchFamily="49" charset="0"/>
+              </a:rPr>
+              <a:t>'K’</a:t>
+            </a:r>
+            <a:r>
+              <a:rPr lang="en-US" sz="1050" b="0" dirty="0">
+                <a:solidFill>
+                  <a:srgbClr val="000000"/>
+                </a:solidFill>
+                <a:effectLst/>
+                <a:latin typeface="Fira Code" panose="020B0809050000020004" pitchFamily="49" charset="0"/>
+              </a:rPr>
+              <a:t>&gt;();</a:t>
+            </a:r>
+          </a:p>
+          <a:p>
+            <a:pPr>
+              <a:lnSpc>
+                <a:spcPct val="113095"/>
+              </a:lnSpc>
+              <a:buNone/>
+            </a:pPr>
+            <a:r>
+              <a:rPr lang="en-US" sz="1050" b="0" dirty="0">
+                <a:solidFill>
+                  <a:srgbClr val="267F99"/>
+                </a:solidFill>
+                <a:effectLst/>
+                <a:latin typeface="Fira Code" panose="020B0809050000020004" pitchFamily="49" charset="0"/>
+              </a:rPr>
+              <a:t>auto</a:t>
+            </a:r>
+            <a:r>
+              <a:rPr lang="en-US" sz="1050" b="0" dirty="0">
+                <a:solidFill>
+                  <a:srgbClr val="000000"/>
+                </a:solidFill>
+                <a:effectLst/>
+                <a:latin typeface="Fira Code" panose="020B0809050000020004" pitchFamily="49" charset="0"/>
+              </a:rPr>
+              <a:t> </a:t>
+            </a:r>
+            <a:r>
+              <a:rPr lang="en-US" sz="1050" b="0" dirty="0">
+                <a:solidFill>
+                  <a:srgbClr val="001080"/>
+                </a:solidFill>
+                <a:effectLst/>
+                <a:latin typeface="Fira Code" panose="020B0809050000020004" pitchFamily="49" charset="0"/>
+              </a:rPr>
+              <a:t>B</a:t>
+            </a:r>
+            <a:r>
+              <a:rPr lang="en-US" sz="1050" b="0" dirty="0">
+                <a:solidFill>
+                  <a:srgbClr val="000000"/>
+                </a:solidFill>
+                <a:effectLst/>
+                <a:latin typeface="Fira Code" panose="020B0809050000020004" pitchFamily="49" charset="0"/>
+              </a:rPr>
+              <a:t> = </a:t>
+            </a:r>
+            <a:r>
+              <a:rPr lang="en-US" sz="1050" b="0" dirty="0" err="1">
+                <a:solidFill>
+                  <a:srgbClr val="267F99"/>
+                </a:solidFill>
+                <a:effectLst/>
+                <a:latin typeface="Fira Code" panose="020B0809050000020004" pitchFamily="49" charset="0"/>
+              </a:rPr>
+              <a:t>MultiDimArray</a:t>
+            </a:r>
+            <a:r>
+              <a:rPr lang="en-US" sz="1050" b="0" dirty="0">
+                <a:solidFill>
+                  <a:srgbClr val="000000"/>
+                </a:solidFill>
+                <a:effectLst/>
+                <a:latin typeface="Fira Code" panose="020B0809050000020004" pitchFamily="49" charset="0"/>
+              </a:rPr>
+              <a:t>&lt;</a:t>
+            </a:r>
+            <a:r>
+              <a:rPr lang="en-US" sz="1050" b="0" dirty="0">
+                <a:solidFill>
+                  <a:srgbClr val="A31515"/>
+                </a:solidFill>
+                <a:effectLst/>
+                <a:latin typeface="Fira Code" panose="020B0809050000020004" pitchFamily="49" charset="0"/>
+              </a:rPr>
+              <a:t>'K'</a:t>
+            </a:r>
+            <a:r>
+              <a:rPr lang="en-US" sz="1050" b="0" dirty="0">
+                <a:solidFill>
+                  <a:srgbClr val="000000"/>
+                </a:solidFill>
+                <a:effectLst/>
+                <a:latin typeface="Fira Code" panose="020B0809050000020004" pitchFamily="49" charset="0"/>
+              </a:rPr>
+              <a:t>, </a:t>
+            </a:r>
+            <a:r>
+              <a:rPr lang="en-US" sz="1050" b="0" dirty="0">
+                <a:solidFill>
+                  <a:srgbClr val="A31515"/>
+                </a:solidFill>
+                <a:effectLst/>
+                <a:latin typeface="Fira Code" panose="020B0809050000020004" pitchFamily="49" charset="0"/>
+              </a:rPr>
+              <a:t>'M’</a:t>
+            </a:r>
+            <a:r>
+              <a:rPr lang="en-US" sz="1050" b="0" dirty="0">
+                <a:solidFill>
+                  <a:srgbClr val="000000"/>
+                </a:solidFill>
+                <a:effectLst/>
+                <a:latin typeface="Fira Code" panose="020B0809050000020004" pitchFamily="49" charset="0"/>
+              </a:rPr>
+              <a:t>&gt;();</a:t>
+            </a:r>
+          </a:p>
+          <a:p>
+            <a:pPr>
+              <a:lnSpc>
+                <a:spcPct val="113095"/>
+              </a:lnSpc>
+              <a:buNone/>
+            </a:pPr>
+            <a:br>
+              <a:rPr lang="en-US" sz="1050" b="0" dirty="0">
+                <a:solidFill>
+                  <a:srgbClr val="000000"/>
+                </a:solidFill>
+                <a:effectLst/>
+                <a:latin typeface="Fira Code" panose="020B0809050000020004" pitchFamily="49" charset="0"/>
+              </a:rPr>
+            </a:br>
+            <a:endParaRPr lang="en-US" sz="1050" b="0" dirty="0">
+              <a:solidFill>
+                <a:srgbClr val="000000"/>
+              </a:solidFill>
+              <a:effectLst/>
+              <a:latin typeface="Fira Code" panose="020B0809050000020004" pitchFamily="49" charset="0"/>
+            </a:endParaRPr>
+          </a:p>
+          <a:p>
+            <a:pPr>
+              <a:lnSpc>
+                <a:spcPct val="113095"/>
+              </a:lnSpc>
+              <a:buNone/>
+            </a:pPr>
+            <a:r>
+              <a:rPr lang="en-US" sz="1050" b="0" dirty="0">
+                <a:solidFill>
+                  <a:srgbClr val="267F99"/>
+                </a:solidFill>
+                <a:effectLst/>
+                <a:latin typeface="Fira Code" panose="020B0809050000020004" pitchFamily="49" charset="0"/>
+              </a:rPr>
+              <a:t>Traversal</a:t>
+            </a:r>
+            <a:r>
+              <a:rPr lang="en-US" sz="1050" b="0" dirty="0">
+                <a:solidFill>
+                  <a:srgbClr val="000000"/>
+                </a:solidFill>
+                <a:effectLst/>
+                <a:latin typeface="Fira Code" panose="020B0809050000020004" pitchFamily="49" charset="0"/>
+              </a:rPr>
+              <a:t>(</a:t>
+            </a:r>
+            <a:r>
+              <a:rPr lang="en-US" sz="1050" b="0" dirty="0">
+                <a:solidFill>
+                  <a:srgbClr val="001080"/>
+                </a:solidFill>
+                <a:effectLst/>
+                <a:latin typeface="Fira Code" panose="020B0809050000020004" pitchFamily="49" charset="0"/>
+              </a:rPr>
+              <a:t>A</a:t>
+            </a:r>
+            <a:r>
+              <a:rPr lang="en-US" sz="1050" b="0" dirty="0">
+                <a:solidFill>
+                  <a:srgbClr val="000000"/>
+                </a:solidFill>
+                <a:effectLst/>
+                <a:latin typeface="Fira Code" panose="020B0809050000020004" pitchFamily="49" charset="0"/>
+              </a:rPr>
+              <a:t>, </a:t>
+            </a:r>
+            <a:r>
+              <a:rPr lang="en-US" sz="1050" b="0" dirty="0">
+                <a:solidFill>
+                  <a:srgbClr val="001080"/>
+                </a:solidFill>
+                <a:effectLst/>
+                <a:latin typeface="Fira Code" panose="020B0809050000020004" pitchFamily="49" charset="0"/>
+              </a:rPr>
+              <a:t>B</a:t>
+            </a:r>
+            <a:r>
+              <a:rPr lang="en-US" sz="1050" b="0" dirty="0">
+                <a:solidFill>
+                  <a:srgbClr val="000000"/>
+                </a:solidFill>
+                <a:effectLst/>
+                <a:latin typeface="Fira Code" panose="020B0809050000020004" pitchFamily="49" charset="0"/>
+              </a:rPr>
+              <a:t>, </a:t>
+            </a:r>
+            <a:r>
+              <a:rPr lang="en-US" sz="1050" b="0" dirty="0">
+                <a:solidFill>
+                  <a:srgbClr val="001080"/>
+                </a:solidFill>
+                <a:effectLst/>
+                <a:latin typeface="Fira Code" panose="020B0809050000020004" pitchFamily="49" charset="0"/>
+              </a:rPr>
+              <a:t>C</a:t>
+            </a:r>
+            <a:r>
+              <a:rPr lang="en-US" sz="1050" b="0" dirty="0">
+                <a:solidFill>
+                  <a:srgbClr val="000000"/>
+                </a:solidFill>
+                <a:effectLst/>
+                <a:latin typeface="Fira Code" panose="020B0809050000020004" pitchFamily="49" charset="0"/>
+              </a:rPr>
+              <a:t>)</a:t>
+            </a:r>
+          </a:p>
+          <a:p>
+            <a:pPr>
+              <a:lnSpc>
+                <a:spcPct val="113095"/>
+              </a:lnSpc>
+              <a:buNone/>
+            </a:pPr>
+            <a:r>
+              <a:rPr lang="en-US" sz="1050" b="0" dirty="0">
+                <a:solidFill>
+                  <a:srgbClr val="000000"/>
+                </a:solidFill>
+                <a:effectLst/>
+                <a:latin typeface="Fira Code" panose="020B0809050000020004" pitchFamily="49" charset="0"/>
+              </a:rPr>
+              <a:t>    .</a:t>
+            </a:r>
+            <a:r>
+              <a:rPr lang="en-US" sz="1050" b="0" dirty="0">
+                <a:solidFill>
+                  <a:srgbClr val="795E26"/>
+                </a:solidFill>
+                <a:effectLst/>
+                <a:latin typeface="Fira Code" panose="020B0809050000020004" pitchFamily="49" charset="0"/>
+              </a:rPr>
+              <a:t>order</a:t>
+            </a:r>
+            <a:r>
+              <a:rPr lang="en-US" sz="1050" b="0" dirty="0">
+                <a:solidFill>
+                  <a:srgbClr val="000000"/>
+                </a:solidFill>
+                <a:effectLst/>
+                <a:latin typeface="Fira Code" panose="020B0809050000020004" pitchFamily="49" charset="0"/>
+              </a:rPr>
+              <a:t>(</a:t>
+            </a:r>
+            <a:r>
+              <a:rPr lang="en-US" sz="1050" b="0" dirty="0" err="1">
+                <a:solidFill>
+                  <a:srgbClr val="267F99"/>
+                </a:solidFill>
+                <a:effectLst/>
+                <a:latin typeface="Fira Code" panose="020B0809050000020004" pitchFamily="49" charset="0"/>
+              </a:rPr>
+              <a:t>ByTiles</a:t>
+            </a:r>
+            <a:r>
+              <a:rPr lang="en-US" sz="1050" b="0" dirty="0">
+                <a:solidFill>
+                  <a:srgbClr val="000000"/>
+                </a:solidFill>
+                <a:effectLst/>
+                <a:latin typeface="Fira Code" panose="020B0809050000020004" pitchFamily="49" charset="0"/>
+              </a:rPr>
+              <a:t>&lt;</a:t>
+            </a:r>
+            <a:r>
+              <a:rPr lang="en-US" sz="1050" b="0" dirty="0">
+                <a:solidFill>
+                  <a:srgbClr val="A31515"/>
+                </a:solidFill>
+                <a:effectLst/>
+                <a:latin typeface="Fira Code" panose="020B0809050000020004" pitchFamily="49" charset="0"/>
+              </a:rPr>
+              <a:t>'N'</a:t>
+            </a:r>
+            <a:r>
+              <a:rPr lang="en-US" sz="1050" b="0" dirty="0">
+                <a:solidFill>
+                  <a:srgbClr val="000000"/>
+                </a:solidFill>
+                <a:effectLst/>
+                <a:latin typeface="Fira Code" panose="020B0809050000020004" pitchFamily="49" charset="0"/>
+              </a:rPr>
+              <a:t>, </a:t>
+            </a:r>
+            <a:r>
+              <a:rPr lang="en-US" sz="1050" b="0" dirty="0">
+                <a:solidFill>
+                  <a:srgbClr val="A31515"/>
+                </a:solidFill>
+                <a:effectLst/>
+                <a:latin typeface="Fira Code" panose="020B0809050000020004" pitchFamily="49" charset="0"/>
+              </a:rPr>
+              <a:t>'M’</a:t>
+            </a:r>
+            <a:r>
+              <a:rPr lang="en-US" sz="1050" b="0" dirty="0">
+                <a:solidFill>
+                  <a:srgbClr val="000000"/>
+                </a:solidFill>
+                <a:effectLst/>
+                <a:latin typeface="Fira Code" panose="020B0809050000020004" pitchFamily="49" charset="0"/>
+              </a:rPr>
+              <a:t>&gt;(</a:t>
+            </a:r>
+            <a:r>
+              <a:rPr lang="en-US" sz="1050" dirty="0">
+                <a:solidFill>
+                  <a:srgbClr val="098658"/>
+                </a:solidFill>
+                <a:latin typeface="Fira Code" panose="020B0809050000020004" pitchFamily="49" charset="0"/>
+              </a:rPr>
+              <a:t>16</a:t>
+            </a:r>
+            <a:r>
+              <a:rPr lang="en-US" sz="1050" b="0" dirty="0">
+                <a:solidFill>
+                  <a:srgbClr val="000000"/>
+                </a:solidFill>
+                <a:effectLst/>
+                <a:latin typeface="Fira Code" panose="020B0809050000020004" pitchFamily="49" charset="0"/>
+              </a:rPr>
+              <a:t>, </a:t>
+            </a:r>
+            <a:r>
+              <a:rPr lang="en-US" sz="1050" dirty="0">
+                <a:solidFill>
+                  <a:srgbClr val="098658"/>
+                </a:solidFill>
+                <a:latin typeface="Fira Code" panose="020B0809050000020004" pitchFamily="49" charset="0"/>
+              </a:rPr>
+              <a:t>16</a:t>
+            </a:r>
+            <a:r>
+              <a:rPr lang="en-US" sz="1050" b="0" dirty="0">
+                <a:solidFill>
+                  <a:srgbClr val="000000"/>
+                </a:solidFill>
+                <a:effectLst/>
+                <a:latin typeface="Fira Code" panose="020B0809050000020004" pitchFamily="49" charset="0"/>
+              </a:rPr>
+              <a:t>))</a:t>
+            </a:r>
+          </a:p>
+          <a:p>
+            <a:pPr>
+              <a:lnSpc>
+                <a:spcPct val="113095"/>
+              </a:lnSpc>
+              <a:buNone/>
+            </a:pPr>
+            <a:r>
+              <a:rPr lang="en-US" sz="1050" b="0" dirty="0">
+                <a:solidFill>
+                  <a:srgbClr val="000000"/>
+                </a:solidFill>
+                <a:effectLst/>
+                <a:latin typeface="Fira Code" panose="020B0809050000020004" pitchFamily="49" charset="0"/>
+              </a:rPr>
+              <a:t>    .</a:t>
+            </a:r>
+            <a:r>
+              <a:rPr lang="en-US" sz="1050" b="0" dirty="0" err="1">
+                <a:solidFill>
+                  <a:srgbClr val="795E26"/>
+                </a:solidFill>
+                <a:effectLst/>
+                <a:latin typeface="Fira Code" panose="020B0809050000020004" pitchFamily="49" charset="0"/>
+              </a:rPr>
+              <a:t>for_each</a:t>
+            </a:r>
+            <a:r>
+              <a:rPr lang="en-US" sz="1050" dirty="0">
+                <a:solidFill>
+                  <a:srgbClr val="000000"/>
+                </a:solidFill>
+                <a:latin typeface="Fira Code" panose="020B0809050000020004" pitchFamily="49" charset="0"/>
+              </a:rPr>
+              <a:t>(</a:t>
+            </a:r>
+            <a:br>
+              <a:rPr lang="en-US" sz="1050" dirty="0">
+                <a:solidFill>
+                  <a:srgbClr val="000000"/>
+                </a:solidFill>
+                <a:latin typeface="Fira Code" panose="020B0809050000020004" pitchFamily="49" charset="0"/>
+              </a:rPr>
+            </a:br>
+            <a:r>
+              <a:rPr lang="en-US" sz="1050" dirty="0">
+                <a:solidFill>
+                  <a:srgbClr val="000000"/>
+                </a:solidFill>
+                <a:latin typeface="Fira Code" panose="020B0809050000020004" pitchFamily="49" charset="0"/>
+              </a:rPr>
+              <a:t>        </a:t>
+            </a:r>
+            <a:r>
+              <a:rPr lang="en-US" sz="1050" b="0" dirty="0">
+                <a:solidFill>
+                  <a:srgbClr val="000000"/>
+                </a:solidFill>
+                <a:effectLst/>
+                <a:latin typeface="Fira Code" panose="020B0809050000020004" pitchFamily="49" charset="0"/>
+              </a:rPr>
+              <a:t>[&amp;](</a:t>
+            </a:r>
+            <a:r>
+              <a:rPr lang="en-US" sz="1050" b="0" dirty="0">
+                <a:solidFill>
+                  <a:srgbClr val="267F99"/>
+                </a:solidFill>
+                <a:effectLst/>
+                <a:latin typeface="Fira Code" panose="020B0809050000020004" pitchFamily="49" charset="0"/>
+              </a:rPr>
+              <a:t>auto</a:t>
+            </a:r>
+            <a:r>
+              <a:rPr lang="en-US" sz="1050" b="0" dirty="0">
+                <a:solidFill>
+                  <a:srgbClr val="000000"/>
+                </a:solidFill>
+                <a:effectLst/>
+                <a:latin typeface="Fira Code" panose="020B0809050000020004" pitchFamily="49" charset="0"/>
+              </a:rPr>
+              <a:t> </a:t>
+            </a:r>
+            <a:r>
+              <a:rPr lang="en-US" sz="1050" b="0" dirty="0">
+                <a:solidFill>
+                  <a:srgbClr val="001080"/>
+                </a:solidFill>
+                <a:effectLst/>
+                <a:latin typeface="Fira Code" panose="020B0809050000020004" pitchFamily="49" charset="0"/>
+              </a:rPr>
+              <a:t>index</a:t>
+            </a:r>
+            <a:r>
+              <a:rPr lang="en-US" sz="1050" b="0" dirty="0">
+                <a:solidFill>
+                  <a:srgbClr val="000000"/>
+                </a:solidFill>
+                <a:effectLst/>
+                <a:latin typeface="Fira Code" panose="020B0809050000020004" pitchFamily="49" charset="0"/>
+              </a:rPr>
+              <a:t>) { </a:t>
+            </a:r>
+            <a:r>
+              <a:rPr lang="en-US" sz="1050" b="0" dirty="0">
+                <a:solidFill>
+                  <a:srgbClr val="001080"/>
+                </a:solidFill>
+                <a:effectLst/>
+                <a:latin typeface="Fira Code" panose="020B0809050000020004" pitchFamily="49" charset="0"/>
+              </a:rPr>
+              <a:t>C</a:t>
+            </a:r>
+            <a:r>
+              <a:rPr lang="en-US" sz="1050" b="0" dirty="0">
+                <a:solidFill>
+                  <a:srgbClr val="000000"/>
+                </a:solidFill>
+                <a:effectLst/>
+                <a:latin typeface="Fira Code" panose="020B0809050000020004" pitchFamily="49" charset="0"/>
+              </a:rPr>
+              <a:t>[</a:t>
+            </a:r>
+            <a:r>
+              <a:rPr lang="en-US" sz="1050" b="0" dirty="0">
+                <a:solidFill>
+                  <a:srgbClr val="001080"/>
+                </a:solidFill>
+                <a:effectLst/>
+                <a:latin typeface="Fira Code" panose="020B0809050000020004" pitchFamily="49" charset="0"/>
+              </a:rPr>
+              <a:t>index</a:t>
+            </a:r>
+            <a:r>
+              <a:rPr lang="en-US" sz="1050" b="0" dirty="0">
+                <a:solidFill>
+                  <a:srgbClr val="000000"/>
+                </a:solidFill>
+                <a:effectLst/>
+                <a:latin typeface="Fira Code" panose="020B0809050000020004" pitchFamily="49" charset="0"/>
+              </a:rPr>
+              <a:t>] += </a:t>
+            </a:r>
+            <a:r>
+              <a:rPr lang="en-US" sz="1050" b="0" dirty="0">
+                <a:solidFill>
+                  <a:srgbClr val="001080"/>
+                </a:solidFill>
+                <a:effectLst/>
+                <a:latin typeface="Fira Code" panose="020B0809050000020004" pitchFamily="49" charset="0"/>
+              </a:rPr>
+              <a:t>A</a:t>
+            </a:r>
+            <a:r>
+              <a:rPr lang="en-US" sz="1050" b="0" dirty="0">
+                <a:solidFill>
+                  <a:srgbClr val="000000"/>
+                </a:solidFill>
+                <a:effectLst/>
+                <a:latin typeface="Fira Code" panose="020B0809050000020004" pitchFamily="49" charset="0"/>
+              </a:rPr>
+              <a:t>[</a:t>
+            </a:r>
+            <a:r>
+              <a:rPr lang="en-US" sz="1050" b="0" dirty="0">
+                <a:solidFill>
+                  <a:srgbClr val="001080"/>
+                </a:solidFill>
+                <a:effectLst/>
+                <a:latin typeface="Fira Code" panose="020B0809050000020004" pitchFamily="49" charset="0"/>
+              </a:rPr>
+              <a:t>index</a:t>
+            </a:r>
+            <a:r>
+              <a:rPr lang="en-US" sz="1050" b="0" dirty="0">
+                <a:solidFill>
+                  <a:srgbClr val="000000"/>
+                </a:solidFill>
+                <a:effectLst/>
+                <a:latin typeface="Fira Code" panose="020B0809050000020004" pitchFamily="49" charset="0"/>
+              </a:rPr>
+              <a:t>] * </a:t>
+            </a:r>
+            <a:r>
+              <a:rPr lang="en-US" sz="1050" b="0" dirty="0">
+                <a:solidFill>
+                  <a:srgbClr val="001080"/>
+                </a:solidFill>
+                <a:effectLst/>
+                <a:latin typeface="Fira Code" panose="020B0809050000020004" pitchFamily="49" charset="0"/>
+              </a:rPr>
+              <a:t>B</a:t>
+            </a:r>
+            <a:r>
+              <a:rPr lang="en-US" sz="1050" b="0" dirty="0">
+                <a:solidFill>
+                  <a:srgbClr val="000000"/>
+                </a:solidFill>
+                <a:effectLst/>
+                <a:latin typeface="Fira Code" panose="020B0809050000020004" pitchFamily="49" charset="0"/>
+              </a:rPr>
+              <a:t>[</a:t>
+            </a:r>
+            <a:r>
+              <a:rPr lang="en-US" sz="1050" b="0" dirty="0">
+                <a:solidFill>
+                  <a:srgbClr val="001080"/>
+                </a:solidFill>
+                <a:effectLst/>
+                <a:latin typeface="Fira Code" panose="020B0809050000020004" pitchFamily="49" charset="0"/>
+              </a:rPr>
+              <a:t>index</a:t>
+            </a:r>
+            <a:r>
+              <a:rPr lang="en-US" sz="1050" b="0" dirty="0">
+                <a:solidFill>
+                  <a:srgbClr val="000000"/>
+                </a:solidFill>
+                <a:effectLst/>
+                <a:latin typeface="Fira Code" panose="020B0809050000020004" pitchFamily="49" charset="0"/>
+              </a:rPr>
+              <a:t>]; }</a:t>
+            </a:r>
+            <a:br>
+              <a:rPr lang="en-US" sz="1050" dirty="0">
+                <a:solidFill>
+                  <a:srgbClr val="000000"/>
+                </a:solidFill>
+                <a:latin typeface="Fira Code" panose="020B0809050000020004" pitchFamily="49" charset="0"/>
+              </a:rPr>
+            </a:br>
+            <a:r>
+              <a:rPr lang="en-US" sz="1050" dirty="0">
+                <a:solidFill>
+                  <a:srgbClr val="000000"/>
+                </a:solidFill>
+                <a:latin typeface="Fira Code" panose="020B0809050000020004" pitchFamily="49" charset="0"/>
+              </a:rPr>
+              <a:t>    </a:t>
+            </a:r>
+            <a:r>
+              <a:rPr lang="en-US" sz="1050" b="0" dirty="0">
+                <a:solidFill>
+                  <a:srgbClr val="000000"/>
+                </a:solidFill>
+                <a:effectLst/>
+                <a:latin typeface="Fira Code" panose="020B0809050000020004" pitchFamily="49" charset="0"/>
+              </a:rPr>
+              <a:t>);</a:t>
+            </a:r>
+          </a:p>
+        </p:txBody>
+      </p:sp>
+      <p:sp>
+        <p:nvSpPr>
+          <p:cNvPr id="15" name="TextBox 14">
+            <a:extLst>
+              <a:ext uri="{FF2B5EF4-FFF2-40B4-BE49-F238E27FC236}">
+                <a16:creationId xmlns:a16="http://schemas.microsoft.com/office/drawing/2014/main" id="{B84D94B0-4678-CCB0-75F4-4E127B361C61}"/>
+              </a:ext>
+            </a:extLst>
+          </p:cNvPr>
+          <p:cNvSpPr txBox="1"/>
+          <p:nvPr/>
+        </p:nvSpPr>
+        <p:spPr>
+          <a:xfrm>
+            <a:off x="6266583" y="2082598"/>
+            <a:ext cx="4981401" cy="816762"/>
+          </a:xfrm>
+          <a:prstGeom prst="rect">
+            <a:avLst/>
+          </a:prstGeom>
+          <a:noFill/>
+          <a:ln>
+            <a:solidFill>
+              <a:schemeClr val="tx1"/>
+            </a:solidFill>
+          </a:ln>
+        </p:spPr>
+        <p:txBody>
+          <a:bodyPr wrap="square">
+            <a:spAutoFit/>
+          </a:bodyPr>
+          <a:lstStyle/>
+          <a:p>
+            <a:pPr>
+              <a:lnSpc>
+                <a:spcPct val="113095"/>
+              </a:lnSpc>
+              <a:buNone/>
+            </a:pPr>
+            <a:r>
+              <a:rPr lang="en-US" sz="1050" b="0" dirty="0">
+                <a:solidFill>
+                  <a:srgbClr val="AF00DB"/>
+                </a:solidFill>
+                <a:effectLst/>
+                <a:latin typeface="Fira Code" panose="020B0809050000020004" pitchFamily="49" charset="0"/>
+              </a:rPr>
+              <a:t>for</a:t>
+            </a:r>
+            <a:r>
+              <a:rPr lang="en-US" sz="1050" b="0" dirty="0">
+                <a:solidFill>
+                  <a:srgbClr val="000000"/>
+                </a:solidFill>
+                <a:effectLst/>
+                <a:latin typeface="Fira Code" panose="020B0809050000020004" pitchFamily="49" charset="0"/>
+              </a:rPr>
+              <a:t> (</a:t>
+            </a:r>
+            <a:r>
+              <a:rPr lang="en-US" sz="1050" b="0" dirty="0" err="1">
+                <a:solidFill>
+                  <a:srgbClr val="267F99"/>
+                </a:solidFill>
+                <a:effectLst/>
+                <a:latin typeface="Fira Code" panose="020B0809050000020004" pitchFamily="49" charset="0"/>
+              </a:rPr>
+              <a:t>size_t</a:t>
+            </a:r>
+            <a:r>
+              <a:rPr lang="en-US" sz="1050" b="0" dirty="0">
+                <a:solidFill>
+                  <a:srgbClr val="000000"/>
+                </a:solidFill>
+                <a:effectLst/>
+                <a:latin typeface="Fira Code" panose="020B0809050000020004" pitchFamily="49" charset="0"/>
+              </a:rPr>
+              <a:t> </a:t>
+            </a:r>
+            <a:r>
+              <a:rPr lang="en-US" sz="1050" b="0" dirty="0" err="1">
+                <a:solidFill>
+                  <a:srgbClr val="001080"/>
+                </a:solidFill>
+                <a:effectLst/>
+                <a:latin typeface="Fira Code" panose="020B0809050000020004" pitchFamily="49" charset="0"/>
+              </a:rPr>
+              <a:t>i</a:t>
+            </a:r>
+            <a:r>
+              <a:rPr lang="en-US" sz="1050" b="0" dirty="0">
+                <a:solidFill>
+                  <a:srgbClr val="000000"/>
+                </a:solidFill>
+                <a:effectLst/>
+                <a:latin typeface="Fira Code" panose="020B0809050000020004" pitchFamily="49" charset="0"/>
+              </a:rPr>
+              <a:t> = </a:t>
+            </a:r>
+            <a:r>
+              <a:rPr lang="en-US" sz="1050" b="0" dirty="0">
+                <a:solidFill>
+                  <a:srgbClr val="098658"/>
+                </a:solidFill>
+                <a:effectLst/>
+                <a:latin typeface="Fira Code" panose="020B0809050000020004" pitchFamily="49" charset="0"/>
+              </a:rPr>
+              <a:t>0</a:t>
+            </a:r>
+            <a:r>
+              <a:rPr lang="en-US" sz="1050" b="0" dirty="0">
+                <a:solidFill>
+                  <a:srgbClr val="000000"/>
+                </a:solidFill>
+                <a:effectLst/>
+                <a:latin typeface="Fira Code" panose="020B0809050000020004" pitchFamily="49" charset="0"/>
+              </a:rPr>
+              <a:t>; </a:t>
+            </a:r>
+            <a:r>
+              <a:rPr lang="en-US" sz="1050" b="0" dirty="0" err="1">
+                <a:solidFill>
+                  <a:srgbClr val="001080"/>
+                </a:solidFill>
+                <a:effectLst/>
+                <a:latin typeface="Fira Code" panose="020B0809050000020004" pitchFamily="49" charset="0"/>
+              </a:rPr>
+              <a:t>i</a:t>
+            </a:r>
+            <a:r>
+              <a:rPr lang="en-US" sz="1050" b="0" dirty="0">
+                <a:solidFill>
+                  <a:srgbClr val="000000"/>
+                </a:solidFill>
+                <a:effectLst/>
+                <a:latin typeface="Fira Code" panose="020B0809050000020004" pitchFamily="49" charset="0"/>
+              </a:rPr>
+              <a:t> &lt; </a:t>
+            </a:r>
+            <a:r>
+              <a:rPr lang="en-US" sz="1050" b="0" dirty="0">
+                <a:solidFill>
+                  <a:srgbClr val="0070C1"/>
+                </a:solidFill>
+                <a:effectLst/>
+                <a:latin typeface="Fira Code" panose="020B0809050000020004" pitchFamily="49" charset="0"/>
+              </a:rPr>
+              <a:t>N</a:t>
+            </a:r>
+            <a:r>
+              <a:rPr lang="en-US" sz="1050" b="0" dirty="0">
+                <a:solidFill>
+                  <a:srgbClr val="000000"/>
+                </a:solidFill>
+                <a:effectLst/>
+                <a:latin typeface="Fira Code" panose="020B0809050000020004" pitchFamily="49" charset="0"/>
+              </a:rPr>
+              <a:t>; ++</a:t>
+            </a:r>
+            <a:r>
+              <a:rPr lang="en-US" sz="1050" b="0" dirty="0" err="1">
+                <a:solidFill>
+                  <a:srgbClr val="001080"/>
+                </a:solidFill>
+                <a:effectLst/>
+                <a:latin typeface="Fira Code" panose="020B0809050000020004" pitchFamily="49" charset="0"/>
+              </a:rPr>
+              <a:t>i</a:t>
+            </a:r>
+            <a:r>
+              <a:rPr lang="en-US" sz="1050" b="0" dirty="0">
+                <a:solidFill>
+                  <a:srgbClr val="000000"/>
+                </a:solidFill>
+                <a:effectLst/>
+                <a:latin typeface="Fira Code" panose="020B0809050000020004" pitchFamily="49" charset="0"/>
+              </a:rPr>
+              <a:t>)</a:t>
+            </a:r>
+          </a:p>
+          <a:p>
+            <a:pPr>
+              <a:lnSpc>
+                <a:spcPct val="113095"/>
+              </a:lnSpc>
+              <a:buNone/>
+            </a:pPr>
+            <a:r>
+              <a:rPr lang="en-US" sz="1050" b="0" dirty="0">
+                <a:solidFill>
+                  <a:srgbClr val="000000"/>
+                </a:solidFill>
+                <a:effectLst/>
+                <a:latin typeface="Fira Code" panose="020B0809050000020004" pitchFamily="49" charset="0"/>
+              </a:rPr>
+              <a:t>    </a:t>
+            </a:r>
+            <a:r>
+              <a:rPr lang="en-US" sz="1050" b="0" dirty="0">
+                <a:solidFill>
+                  <a:srgbClr val="AF00DB"/>
+                </a:solidFill>
+                <a:effectLst/>
+                <a:latin typeface="Fira Code" panose="020B0809050000020004" pitchFamily="49" charset="0"/>
+              </a:rPr>
+              <a:t>for</a:t>
+            </a:r>
+            <a:r>
+              <a:rPr lang="en-US" sz="1050" b="0" dirty="0">
+                <a:solidFill>
+                  <a:srgbClr val="000000"/>
+                </a:solidFill>
+                <a:effectLst/>
+                <a:latin typeface="Fira Code" panose="020B0809050000020004" pitchFamily="49" charset="0"/>
+              </a:rPr>
+              <a:t> (</a:t>
+            </a:r>
+            <a:r>
+              <a:rPr lang="en-US" sz="1050" b="0" dirty="0" err="1">
+                <a:solidFill>
+                  <a:srgbClr val="267F99"/>
+                </a:solidFill>
+                <a:effectLst/>
+                <a:latin typeface="Fira Code" panose="020B0809050000020004" pitchFamily="49" charset="0"/>
+              </a:rPr>
+              <a:t>size_t</a:t>
+            </a:r>
+            <a:r>
+              <a:rPr lang="en-US" sz="1050" b="0" dirty="0">
+                <a:solidFill>
+                  <a:srgbClr val="000000"/>
+                </a:solidFill>
+                <a:effectLst/>
+                <a:latin typeface="Fira Code" panose="020B0809050000020004" pitchFamily="49" charset="0"/>
+              </a:rPr>
+              <a:t> </a:t>
+            </a:r>
+            <a:r>
+              <a:rPr lang="en-US" sz="1050" b="0" dirty="0">
+                <a:solidFill>
+                  <a:srgbClr val="001080"/>
+                </a:solidFill>
+                <a:effectLst/>
+                <a:latin typeface="Fira Code" panose="020B0809050000020004" pitchFamily="49" charset="0"/>
+              </a:rPr>
+              <a:t>j</a:t>
+            </a:r>
+            <a:r>
+              <a:rPr lang="en-US" sz="1050" b="0" dirty="0">
+                <a:solidFill>
+                  <a:srgbClr val="000000"/>
+                </a:solidFill>
+                <a:effectLst/>
+                <a:latin typeface="Fira Code" panose="020B0809050000020004" pitchFamily="49" charset="0"/>
+              </a:rPr>
+              <a:t> = </a:t>
+            </a:r>
+            <a:r>
+              <a:rPr lang="en-US" sz="1050" b="0" dirty="0">
+                <a:solidFill>
+                  <a:srgbClr val="098658"/>
+                </a:solidFill>
+                <a:effectLst/>
+                <a:latin typeface="Fira Code" panose="020B0809050000020004" pitchFamily="49" charset="0"/>
+              </a:rPr>
+              <a:t>0</a:t>
+            </a:r>
+            <a:r>
+              <a:rPr lang="en-US" sz="1050" b="0" dirty="0">
+                <a:solidFill>
+                  <a:srgbClr val="000000"/>
+                </a:solidFill>
+                <a:effectLst/>
+                <a:latin typeface="Fira Code" panose="020B0809050000020004" pitchFamily="49" charset="0"/>
+              </a:rPr>
+              <a:t>; </a:t>
+            </a:r>
+            <a:r>
+              <a:rPr lang="en-US" sz="1050" b="0" dirty="0">
+                <a:solidFill>
+                  <a:srgbClr val="001080"/>
+                </a:solidFill>
+                <a:effectLst/>
+                <a:latin typeface="Fira Code" panose="020B0809050000020004" pitchFamily="49" charset="0"/>
+              </a:rPr>
+              <a:t>j</a:t>
+            </a:r>
+            <a:r>
+              <a:rPr lang="en-US" sz="1050" b="0" dirty="0">
+                <a:solidFill>
+                  <a:srgbClr val="000000"/>
+                </a:solidFill>
+                <a:effectLst/>
+                <a:latin typeface="Fira Code" panose="020B0809050000020004" pitchFamily="49" charset="0"/>
+              </a:rPr>
+              <a:t> &lt; </a:t>
+            </a:r>
+            <a:r>
+              <a:rPr lang="en-US" sz="1050" b="0" dirty="0">
+                <a:solidFill>
+                  <a:srgbClr val="0070C1"/>
+                </a:solidFill>
+                <a:effectLst/>
+                <a:latin typeface="Fira Code" panose="020B0809050000020004" pitchFamily="49" charset="0"/>
+              </a:rPr>
+              <a:t>M</a:t>
+            </a:r>
+            <a:r>
+              <a:rPr lang="en-US" sz="1050" b="0" dirty="0">
+                <a:solidFill>
+                  <a:srgbClr val="000000"/>
+                </a:solidFill>
+                <a:effectLst/>
+                <a:latin typeface="Fira Code" panose="020B0809050000020004" pitchFamily="49" charset="0"/>
+              </a:rPr>
+              <a:t>; ++</a:t>
+            </a:r>
+            <a:r>
+              <a:rPr lang="en-US" sz="1050" b="0" dirty="0">
+                <a:solidFill>
+                  <a:srgbClr val="001080"/>
+                </a:solidFill>
+                <a:effectLst/>
+                <a:latin typeface="Fira Code" panose="020B0809050000020004" pitchFamily="49" charset="0"/>
+              </a:rPr>
+              <a:t>j</a:t>
+            </a:r>
+            <a:r>
+              <a:rPr lang="en-US" sz="1050" b="0" dirty="0">
+                <a:solidFill>
+                  <a:srgbClr val="000000"/>
+                </a:solidFill>
+                <a:effectLst/>
+                <a:latin typeface="Fira Code" panose="020B0809050000020004" pitchFamily="49" charset="0"/>
+              </a:rPr>
+              <a:t>)</a:t>
+            </a:r>
+          </a:p>
+          <a:p>
+            <a:pPr>
+              <a:lnSpc>
+                <a:spcPct val="113095"/>
+              </a:lnSpc>
+              <a:buNone/>
+            </a:pPr>
+            <a:r>
+              <a:rPr lang="en-US" sz="1050" b="0" dirty="0">
+                <a:solidFill>
+                  <a:srgbClr val="000000"/>
+                </a:solidFill>
+                <a:effectLst/>
+                <a:latin typeface="Fira Code" panose="020B0809050000020004" pitchFamily="49" charset="0"/>
+              </a:rPr>
+              <a:t>        </a:t>
+            </a:r>
+            <a:r>
+              <a:rPr lang="en-US" sz="1050" b="0" dirty="0">
+                <a:solidFill>
+                  <a:srgbClr val="AF00DB"/>
+                </a:solidFill>
+                <a:effectLst/>
+                <a:latin typeface="Fira Code" panose="020B0809050000020004" pitchFamily="49" charset="0"/>
+              </a:rPr>
+              <a:t>for</a:t>
+            </a:r>
+            <a:r>
+              <a:rPr lang="en-US" sz="1050" b="0" dirty="0">
+                <a:solidFill>
+                  <a:srgbClr val="000000"/>
+                </a:solidFill>
+                <a:effectLst/>
+                <a:latin typeface="Fira Code" panose="020B0809050000020004" pitchFamily="49" charset="0"/>
+              </a:rPr>
+              <a:t> (</a:t>
+            </a:r>
+            <a:r>
+              <a:rPr lang="en-US" sz="1050" b="0" dirty="0" err="1">
+                <a:solidFill>
+                  <a:srgbClr val="267F99"/>
+                </a:solidFill>
+                <a:effectLst/>
+                <a:latin typeface="Fira Code" panose="020B0809050000020004" pitchFamily="49" charset="0"/>
+              </a:rPr>
+              <a:t>size_t</a:t>
+            </a:r>
+            <a:r>
+              <a:rPr lang="en-US" sz="1050" b="0" dirty="0">
+                <a:solidFill>
+                  <a:srgbClr val="000000"/>
+                </a:solidFill>
+                <a:effectLst/>
+                <a:latin typeface="Fira Code" panose="020B0809050000020004" pitchFamily="49" charset="0"/>
+              </a:rPr>
+              <a:t> </a:t>
+            </a:r>
+            <a:r>
+              <a:rPr lang="en-US" sz="1050" b="0" dirty="0">
+                <a:solidFill>
+                  <a:srgbClr val="001080"/>
+                </a:solidFill>
+                <a:effectLst/>
+                <a:latin typeface="Fira Code" panose="020B0809050000020004" pitchFamily="49" charset="0"/>
+              </a:rPr>
+              <a:t>k</a:t>
+            </a:r>
+            <a:r>
+              <a:rPr lang="en-US" sz="1050" b="0" dirty="0">
+                <a:solidFill>
+                  <a:srgbClr val="000000"/>
+                </a:solidFill>
+                <a:effectLst/>
+                <a:latin typeface="Fira Code" panose="020B0809050000020004" pitchFamily="49" charset="0"/>
+              </a:rPr>
+              <a:t> = </a:t>
+            </a:r>
+            <a:r>
+              <a:rPr lang="en-US" sz="1050" b="0" dirty="0">
+                <a:solidFill>
+                  <a:srgbClr val="098658"/>
+                </a:solidFill>
+                <a:effectLst/>
+                <a:latin typeface="Fira Code" panose="020B0809050000020004" pitchFamily="49" charset="0"/>
+              </a:rPr>
+              <a:t>0</a:t>
+            </a:r>
+            <a:r>
+              <a:rPr lang="en-US" sz="1050" b="0" dirty="0">
+                <a:solidFill>
+                  <a:srgbClr val="000000"/>
+                </a:solidFill>
+                <a:effectLst/>
+                <a:latin typeface="Fira Code" panose="020B0809050000020004" pitchFamily="49" charset="0"/>
+              </a:rPr>
+              <a:t>; </a:t>
+            </a:r>
+            <a:r>
+              <a:rPr lang="en-US" sz="1050" b="0" dirty="0">
+                <a:solidFill>
+                  <a:srgbClr val="001080"/>
+                </a:solidFill>
+                <a:effectLst/>
+                <a:latin typeface="Fira Code" panose="020B0809050000020004" pitchFamily="49" charset="0"/>
+              </a:rPr>
+              <a:t>k</a:t>
+            </a:r>
+            <a:r>
+              <a:rPr lang="en-US" sz="1050" b="0" dirty="0">
+                <a:solidFill>
+                  <a:srgbClr val="000000"/>
+                </a:solidFill>
+                <a:effectLst/>
+                <a:latin typeface="Fira Code" panose="020B0809050000020004" pitchFamily="49" charset="0"/>
+              </a:rPr>
+              <a:t> &lt; </a:t>
+            </a:r>
+            <a:r>
+              <a:rPr lang="en-US" sz="1050" b="0" dirty="0">
+                <a:solidFill>
+                  <a:srgbClr val="0070C1"/>
+                </a:solidFill>
+                <a:effectLst/>
+                <a:latin typeface="Fira Code" panose="020B0809050000020004" pitchFamily="49" charset="0"/>
+              </a:rPr>
+              <a:t>K</a:t>
+            </a:r>
+            <a:r>
+              <a:rPr lang="en-US" sz="1050" b="0" dirty="0">
+                <a:solidFill>
+                  <a:srgbClr val="000000"/>
+                </a:solidFill>
+                <a:effectLst/>
+                <a:latin typeface="Fira Code" panose="020B0809050000020004" pitchFamily="49" charset="0"/>
+              </a:rPr>
+              <a:t>; ++</a:t>
+            </a:r>
+            <a:r>
+              <a:rPr lang="en-US" sz="1050" b="0" dirty="0">
+                <a:solidFill>
+                  <a:srgbClr val="001080"/>
+                </a:solidFill>
+                <a:effectLst/>
+                <a:latin typeface="Fira Code" panose="020B0809050000020004" pitchFamily="49" charset="0"/>
+              </a:rPr>
+              <a:t>k</a:t>
+            </a:r>
+            <a:r>
+              <a:rPr lang="en-US" sz="1050" b="0" dirty="0">
+                <a:solidFill>
+                  <a:srgbClr val="000000"/>
+                </a:solidFill>
+                <a:effectLst/>
+                <a:latin typeface="Fira Code" panose="020B0809050000020004" pitchFamily="49" charset="0"/>
+              </a:rPr>
+              <a:t>)</a:t>
+            </a:r>
+          </a:p>
+          <a:p>
+            <a:pPr>
+              <a:lnSpc>
+                <a:spcPct val="113095"/>
+              </a:lnSpc>
+              <a:buNone/>
+            </a:pPr>
+            <a:r>
+              <a:rPr lang="en-US" sz="1050" b="0" dirty="0">
+                <a:solidFill>
+                  <a:srgbClr val="000000"/>
+                </a:solidFill>
+                <a:effectLst/>
+                <a:latin typeface="Fira Code" panose="020B0809050000020004" pitchFamily="49" charset="0"/>
+              </a:rPr>
+              <a:t>            </a:t>
+            </a:r>
+            <a:r>
+              <a:rPr lang="en-US" sz="1050" b="0" dirty="0" err="1">
+                <a:solidFill>
+                  <a:srgbClr val="001080"/>
+                </a:solidFill>
+                <a:effectLst/>
+                <a:latin typeface="Fira Code" panose="020B0809050000020004" pitchFamily="49" charset="0"/>
+              </a:rPr>
+              <a:t>accessC</a:t>
+            </a:r>
+            <a:r>
+              <a:rPr lang="en-US" sz="1050" b="0" dirty="0">
+                <a:solidFill>
+                  <a:srgbClr val="000000"/>
+                </a:solidFill>
+                <a:effectLst/>
+                <a:latin typeface="Fira Code" panose="020B0809050000020004" pitchFamily="49" charset="0"/>
+              </a:rPr>
+              <a:t>(</a:t>
+            </a:r>
+            <a:r>
+              <a:rPr lang="en-US" sz="1050" b="0" dirty="0" err="1">
+                <a:solidFill>
+                  <a:srgbClr val="001080"/>
+                </a:solidFill>
+                <a:effectLst/>
+                <a:latin typeface="Fira Code" panose="020B0809050000020004" pitchFamily="49" charset="0"/>
+              </a:rPr>
+              <a:t>i</a:t>
+            </a:r>
+            <a:r>
+              <a:rPr lang="en-US" sz="1050" b="0" dirty="0">
+                <a:solidFill>
+                  <a:srgbClr val="000000"/>
+                </a:solidFill>
+                <a:effectLst/>
+                <a:latin typeface="Fira Code" panose="020B0809050000020004" pitchFamily="49" charset="0"/>
+              </a:rPr>
+              <a:t>, </a:t>
+            </a:r>
+            <a:r>
+              <a:rPr lang="en-US" sz="1050" b="0" dirty="0">
+                <a:solidFill>
+                  <a:srgbClr val="001080"/>
+                </a:solidFill>
+                <a:effectLst/>
+                <a:latin typeface="Fira Code" panose="020B0809050000020004" pitchFamily="49" charset="0"/>
+              </a:rPr>
+              <a:t>j</a:t>
+            </a:r>
+            <a:r>
+              <a:rPr lang="en-US" sz="1050" b="0" dirty="0">
+                <a:solidFill>
+                  <a:srgbClr val="000000"/>
+                </a:solidFill>
+                <a:effectLst/>
+                <a:latin typeface="Fira Code" panose="020B0809050000020004" pitchFamily="49" charset="0"/>
+              </a:rPr>
+              <a:t>) += </a:t>
+            </a:r>
+            <a:r>
+              <a:rPr lang="en-US" sz="1050" b="0" dirty="0" err="1">
+                <a:solidFill>
+                  <a:srgbClr val="001080"/>
+                </a:solidFill>
+                <a:effectLst/>
+                <a:latin typeface="Fira Code" panose="020B0809050000020004" pitchFamily="49" charset="0"/>
+              </a:rPr>
+              <a:t>accessA</a:t>
+            </a:r>
+            <a:r>
+              <a:rPr lang="en-US" sz="1050" b="0" dirty="0">
+                <a:solidFill>
+                  <a:srgbClr val="000000"/>
+                </a:solidFill>
+                <a:effectLst/>
+                <a:latin typeface="Fira Code" panose="020B0809050000020004" pitchFamily="49" charset="0"/>
+              </a:rPr>
+              <a:t>(</a:t>
+            </a:r>
+            <a:r>
+              <a:rPr lang="en-US" sz="1050" b="0" dirty="0" err="1">
+                <a:solidFill>
+                  <a:srgbClr val="001080"/>
+                </a:solidFill>
+                <a:effectLst/>
+                <a:latin typeface="Fira Code" panose="020B0809050000020004" pitchFamily="49" charset="0"/>
+              </a:rPr>
+              <a:t>i</a:t>
+            </a:r>
+            <a:r>
+              <a:rPr lang="en-US" sz="1050" b="0" dirty="0">
+                <a:solidFill>
+                  <a:srgbClr val="000000"/>
+                </a:solidFill>
+                <a:effectLst/>
+                <a:latin typeface="Fira Code" panose="020B0809050000020004" pitchFamily="49" charset="0"/>
+              </a:rPr>
+              <a:t>, </a:t>
+            </a:r>
+            <a:r>
+              <a:rPr lang="en-US" sz="1050" b="0" dirty="0">
+                <a:solidFill>
+                  <a:srgbClr val="001080"/>
+                </a:solidFill>
+                <a:effectLst/>
+                <a:latin typeface="Fira Code" panose="020B0809050000020004" pitchFamily="49" charset="0"/>
+              </a:rPr>
+              <a:t>k</a:t>
+            </a:r>
+            <a:r>
+              <a:rPr lang="en-US" sz="1050" b="0" dirty="0">
+                <a:solidFill>
+                  <a:srgbClr val="000000"/>
+                </a:solidFill>
+                <a:effectLst/>
+                <a:latin typeface="Fira Code" panose="020B0809050000020004" pitchFamily="49" charset="0"/>
+              </a:rPr>
+              <a:t>) * </a:t>
+            </a:r>
+            <a:r>
+              <a:rPr lang="en-US" sz="1050" b="0" dirty="0" err="1">
+                <a:solidFill>
+                  <a:srgbClr val="001080"/>
+                </a:solidFill>
+                <a:effectLst/>
+                <a:latin typeface="Fira Code" panose="020B0809050000020004" pitchFamily="49" charset="0"/>
+              </a:rPr>
+              <a:t>accessB</a:t>
+            </a:r>
+            <a:r>
+              <a:rPr lang="en-US" sz="1050" b="0" dirty="0">
+                <a:solidFill>
+                  <a:srgbClr val="000000"/>
+                </a:solidFill>
+                <a:effectLst/>
+                <a:latin typeface="Fira Code" panose="020B0809050000020004" pitchFamily="49" charset="0"/>
+              </a:rPr>
+              <a:t>(</a:t>
+            </a:r>
+            <a:r>
+              <a:rPr lang="en-US" sz="1050" b="0" dirty="0">
+                <a:solidFill>
+                  <a:srgbClr val="001080"/>
+                </a:solidFill>
+                <a:effectLst/>
+                <a:latin typeface="Fira Code" panose="020B0809050000020004" pitchFamily="49" charset="0"/>
+              </a:rPr>
+              <a:t>k</a:t>
+            </a:r>
+            <a:r>
+              <a:rPr lang="en-US" sz="1050" b="0" dirty="0">
+                <a:solidFill>
+                  <a:srgbClr val="000000"/>
+                </a:solidFill>
+                <a:effectLst/>
+                <a:latin typeface="Fira Code" panose="020B0809050000020004" pitchFamily="49" charset="0"/>
+              </a:rPr>
+              <a:t>, </a:t>
+            </a:r>
+            <a:r>
+              <a:rPr lang="en-US" sz="1050" b="0" dirty="0">
+                <a:solidFill>
+                  <a:srgbClr val="001080"/>
+                </a:solidFill>
+                <a:effectLst/>
+                <a:latin typeface="Fira Code" panose="020B0809050000020004" pitchFamily="49" charset="0"/>
+              </a:rPr>
+              <a:t>j</a:t>
+            </a:r>
+            <a:r>
+              <a:rPr lang="en-US" sz="1050" b="0" dirty="0">
+                <a:solidFill>
+                  <a:srgbClr val="000000"/>
+                </a:solidFill>
+                <a:effectLst/>
+                <a:latin typeface="Fira Code" panose="020B0809050000020004" pitchFamily="49" charset="0"/>
+              </a:rPr>
+              <a:t>);</a:t>
+            </a:r>
+          </a:p>
+        </p:txBody>
+      </p:sp>
+      <p:sp>
+        <p:nvSpPr>
+          <p:cNvPr id="19" name="TextBox 18">
+            <a:extLst>
+              <a:ext uri="{FF2B5EF4-FFF2-40B4-BE49-F238E27FC236}">
+                <a16:creationId xmlns:a16="http://schemas.microsoft.com/office/drawing/2014/main" id="{6BB35EA4-A471-A6FC-E9D0-7054843CDA81}"/>
+              </a:ext>
+            </a:extLst>
+          </p:cNvPr>
+          <p:cNvSpPr txBox="1"/>
+          <p:nvPr/>
+        </p:nvSpPr>
+        <p:spPr>
+          <a:xfrm>
+            <a:off x="550203" y="4824615"/>
+            <a:ext cx="3847230" cy="1181990"/>
+          </a:xfrm>
+          <a:prstGeom prst="rect">
+            <a:avLst/>
+          </a:prstGeom>
+          <a:noFill/>
+          <a:ln>
+            <a:solidFill>
+              <a:schemeClr val="tx1"/>
+            </a:solidFill>
+          </a:ln>
+        </p:spPr>
+        <p:txBody>
+          <a:bodyPr wrap="square">
+            <a:spAutoFit/>
+          </a:bodyPr>
+          <a:lstStyle/>
+          <a:p>
+            <a:pPr>
+              <a:lnSpc>
+                <a:spcPct val="113095"/>
+              </a:lnSpc>
+              <a:buNone/>
+            </a:pPr>
+            <a:r>
+              <a:rPr lang="en-US" sz="1050" b="0" dirty="0">
+                <a:solidFill>
+                  <a:srgbClr val="267F99"/>
+                </a:solidFill>
+                <a:effectLst/>
+                <a:latin typeface="Fira Code" panose="020B0809050000020004" pitchFamily="49" charset="0"/>
+              </a:rPr>
+              <a:t>auto</a:t>
+            </a:r>
+            <a:r>
+              <a:rPr lang="en-US" sz="1050" b="0" dirty="0">
+                <a:solidFill>
+                  <a:srgbClr val="000000"/>
+                </a:solidFill>
+                <a:effectLst/>
+                <a:latin typeface="Fira Code" panose="020B0809050000020004" pitchFamily="49" charset="0"/>
+              </a:rPr>
+              <a:t> </a:t>
+            </a:r>
+            <a:r>
+              <a:rPr lang="en-US" sz="1050" b="0" dirty="0" err="1">
+                <a:solidFill>
+                  <a:srgbClr val="001080"/>
+                </a:solidFill>
+                <a:effectLst/>
+                <a:latin typeface="Fira Code" panose="020B0809050000020004" pitchFamily="49" charset="0"/>
+              </a:rPr>
+              <a:t>RowMajor</a:t>
+            </a:r>
+            <a:r>
+              <a:rPr lang="en-US" sz="1050" b="0" dirty="0">
+                <a:solidFill>
+                  <a:srgbClr val="000000"/>
+                </a:solidFill>
+                <a:effectLst/>
+                <a:latin typeface="Fira Code" panose="020B0809050000020004" pitchFamily="49" charset="0"/>
+              </a:rPr>
+              <a:t> = </a:t>
+            </a:r>
+            <a:r>
+              <a:rPr lang="en-US" sz="1050" b="0" dirty="0" err="1">
+                <a:solidFill>
+                  <a:srgbClr val="267F99"/>
+                </a:solidFill>
+                <a:effectLst/>
+                <a:latin typeface="Fira Code" panose="020B0809050000020004" pitchFamily="49" charset="0"/>
+              </a:rPr>
+              <a:t>MultiDimArray</a:t>
+            </a:r>
+            <a:r>
+              <a:rPr lang="en-US" sz="1050" b="0" dirty="0">
+                <a:solidFill>
+                  <a:srgbClr val="000000"/>
+                </a:solidFill>
+                <a:effectLst/>
+                <a:latin typeface="Fira Code" panose="020B0809050000020004" pitchFamily="49" charset="0"/>
+              </a:rPr>
+              <a:t>&lt;</a:t>
+            </a:r>
+            <a:r>
+              <a:rPr lang="en-US" sz="1050" b="0" dirty="0">
+                <a:solidFill>
+                  <a:srgbClr val="A31515"/>
+                </a:solidFill>
+                <a:effectLst/>
+                <a:latin typeface="Fira Code" panose="020B0809050000020004" pitchFamily="49" charset="0"/>
+              </a:rPr>
+              <a:t>'N'</a:t>
+            </a:r>
+            <a:r>
+              <a:rPr lang="en-US" sz="1050" b="0" dirty="0">
+                <a:solidFill>
+                  <a:srgbClr val="000000"/>
+                </a:solidFill>
+                <a:effectLst/>
+                <a:latin typeface="Fira Code" panose="020B0809050000020004" pitchFamily="49" charset="0"/>
+              </a:rPr>
+              <a:t>, </a:t>
+            </a:r>
+            <a:r>
+              <a:rPr lang="en-US" sz="1050" b="0" dirty="0">
+                <a:solidFill>
+                  <a:srgbClr val="A31515"/>
+                </a:solidFill>
+                <a:effectLst/>
+                <a:latin typeface="Fira Code" panose="020B0809050000020004" pitchFamily="49" charset="0"/>
+              </a:rPr>
+              <a:t>'M'</a:t>
+            </a:r>
+            <a:r>
+              <a:rPr lang="en-US" sz="1050" b="0" dirty="0">
+                <a:solidFill>
+                  <a:srgbClr val="000000"/>
+                </a:solidFill>
+                <a:effectLst/>
+                <a:latin typeface="Fira Code" panose="020B0809050000020004" pitchFamily="49" charset="0"/>
+              </a:rPr>
+              <a:t>&gt;();</a:t>
+            </a:r>
+          </a:p>
+          <a:p>
+            <a:pPr>
+              <a:lnSpc>
+                <a:spcPct val="113095"/>
+              </a:lnSpc>
+              <a:buNone/>
+            </a:pPr>
+            <a:r>
+              <a:rPr lang="en-US" sz="1050" b="0" dirty="0">
+                <a:solidFill>
+                  <a:srgbClr val="267F99"/>
+                </a:solidFill>
+                <a:effectLst/>
+                <a:latin typeface="Fira Code" panose="020B0809050000020004" pitchFamily="49" charset="0"/>
+              </a:rPr>
+              <a:t>auto</a:t>
+            </a:r>
+            <a:r>
+              <a:rPr lang="en-US" sz="1050" b="0" dirty="0">
+                <a:solidFill>
+                  <a:srgbClr val="000000"/>
+                </a:solidFill>
+                <a:effectLst/>
+                <a:latin typeface="Fira Code" panose="020B0809050000020004" pitchFamily="49" charset="0"/>
+              </a:rPr>
+              <a:t> </a:t>
+            </a:r>
+            <a:r>
+              <a:rPr lang="en-US" sz="1050" b="0" dirty="0" err="1">
+                <a:solidFill>
+                  <a:srgbClr val="001080"/>
+                </a:solidFill>
+                <a:effectLst/>
+                <a:latin typeface="Fira Code" panose="020B0809050000020004" pitchFamily="49" charset="0"/>
+              </a:rPr>
+              <a:t>ColMajor</a:t>
+            </a:r>
+            <a:r>
+              <a:rPr lang="en-US" sz="1050" b="0" dirty="0">
+                <a:solidFill>
+                  <a:srgbClr val="000000"/>
+                </a:solidFill>
+                <a:effectLst/>
+                <a:latin typeface="Fira Code" panose="020B0809050000020004" pitchFamily="49" charset="0"/>
+              </a:rPr>
+              <a:t> = </a:t>
+            </a:r>
+            <a:r>
+              <a:rPr lang="en-US" sz="1050" b="0" dirty="0" err="1">
+                <a:solidFill>
+                  <a:srgbClr val="267F99"/>
+                </a:solidFill>
+                <a:effectLst/>
+                <a:latin typeface="Fira Code" panose="020B0809050000020004" pitchFamily="49" charset="0"/>
+              </a:rPr>
+              <a:t>MultiDimArray</a:t>
+            </a:r>
+            <a:r>
+              <a:rPr lang="en-US" sz="1050" b="0" dirty="0">
+                <a:solidFill>
+                  <a:srgbClr val="000000"/>
+                </a:solidFill>
+                <a:effectLst/>
+                <a:latin typeface="Fira Code" panose="020B0809050000020004" pitchFamily="49" charset="0"/>
+              </a:rPr>
+              <a:t>&lt;</a:t>
+            </a:r>
+            <a:r>
+              <a:rPr lang="en-US" sz="1050" b="0" dirty="0">
+                <a:solidFill>
+                  <a:srgbClr val="A31515"/>
+                </a:solidFill>
+                <a:effectLst/>
+                <a:latin typeface="Fira Code" panose="020B0809050000020004" pitchFamily="49" charset="0"/>
+              </a:rPr>
+              <a:t>'M'</a:t>
+            </a:r>
+            <a:r>
+              <a:rPr lang="en-US" sz="1050" b="0" dirty="0">
+                <a:solidFill>
+                  <a:srgbClr val="000000"/>
+                </a:solidFill>
+                <a:effectLst/>
+                <a:latin typeface="Fira Code" panose="020B0809050000020004" pitchFamily="49" charset="0"/>
+              </a:rPr>
+              <a:t>, </a:t>
+            </a:r>
+            <a:r>
+              <a:rPr lang="en-US" sz="1050" b="0" dirty="0">
+                <a:solidFill>
+                  <a:srgbClr val="A31515"/>
+                </a:solidFill>
+                <a:effectLst/>
+                <a:latin typeface="Fira Code" panose="020B0809050000020004" pitchFamily="49" charset="0"/>
+              </a:rPr>
+              <a:t>'N'</a:t>
+            </a:r>
+            <a:r>
+              <a:rPr lang="en-US" sz="1050" b="0" dirty="0">
+                <a:solidFill>
+                  <a:srgbClr val="000000"/>
+                </a:solidFill>
+                <a:effectLst/>
+                <a:latin typeface="Fira Code" panose="020B0809050000020004" pitchFamily="49" charset="0"/>
+              </a:rPr>
+              <a:t>&gt;();</a:t>
+            </a:r>
+          </a:p>
+          <a:p>
+            <a:pPr>
+              <a:lnSpc>
+                <a:spcPct val="113095"/>
+              </a:lnSpc>
+              <a:buNone/>
+            </a:pPr>
+            <a:br>
+              <a:rPr lang="en-US" sz="1050" b="0" dirty="0">
+                <a:solidFill>
+                  <a:srgbClr val="000000"/>
+                </a:solidFill>
+                <a:effectLst/>
+                <a:latin typeface="Fira Code" panose="020B0809050000020004" pitchFamily="49" charset="0"/>
+              </a:rPr>
+            </a:br>
+            <a:r>
+              <a:rPr lang="en-US" sz="1050" b="0" dirty="0">
+                <a:solidFill>
+                  <a:srgbClr val="267F99"/>
+                </a:solidFill>
+                <a:effectLst/>
+                <a:latin typeface="Fira Code" panose="020B0809050000020004" pitchFamily="49" charset="0"/>
+              </a:rPr>
+              <a:t>auto</a:t>
+            </a:r>
+            <a:r>
+              <a:rPr lang="en-US" sz="1050" b="0" dirty="0">
+                <a:solidFill>
+                  <a:srgbClr val="000000"/>
+                </a:solidFill>
+                <a:effectLst/>
+                <a:latin typeface="Fira Code" panose="020B0809050000020004" pitchFamily="49" charset="0"/>
+              </a:rPr>
+              <a:t> </a:t>
+            </a:r>
+            <a:r>
+              <a:rPr lang="en-US" sz="1050" b="0" dirty="0" err="1">
+                <a:solidFill>
+                  <a:srgbClr val="001080"/>
+                </a:solidFill>
+                <a:effectLst/>
+                <a:latin typeface="Fira Code" panose="020B0809050000020004" pitchFamily="49" charset="0"/>
+              </a:rPr>
+              <a:t>idx</a:t>
+            </a:r>
+            <a:r>
+              <a:rPr lang="en-US" sz="1050" b="0" dirty="0">
+                <a:solidFill>
+                  <a:srgbClr val="000000"/>
+                </a:solidFill>
+                <a:effectLst/>
+                <a:latin typeface="Fira Code" panose="020B0809050000020004" pitchFamily="49" charset="0"/>
+              </a:rPr>
+              <a:t> = </a:t>
+            </a:r>
+            <a:r>
+              <a:rPr lang="en-US" sz="1050" b="0" dirty="0" err="1">
+                <a:solidFill>
+                  <a:srgbClr val="267F99"/>
+                </a:solidFill>
+                <a:effectLst/>
+                <a:latin typeface="Fira Code" panose="020B0809050000020004" pitchFamily="49" charset="0"/>
+              </a:rPr>
+              <a:t>Idx</a:t>
+            </a:r>
+            <a:r>
+              <a:rPr lang="en-US" sz="1050" b="0" dirty="0">
+                <a:solidFill>
+                  <a:srgbClr val="000000"/>
+                </a:solidFill>
+                <a:effectLst/>
+                <a:latin typeface="Fira Code" panose="020B0809050000020004" pitchFamily="49" charset="0"/>
+              </a:rPr>
+              <a:t>&lt;</a:t>
+            </a:r>
+            <a:r>
+              <a:rPr lang="en-US" sz="1050" b="0" dirty="0">
+                <a:solidFill>
+                  <a:srgbClr val="A31515"/>
+                </a:solidFill>
+                <a:effectLst/>
+                <a:latin typeface="Fira Code" panose="020B0809050000020004" pitchFamily="49" charset="0"/>
+              </a:rPr>
+              <a:t>'N'</a:t>
+            </a:r>
+            <a:r>
+              <a:rPr lang="en-US" sz="1050" b="0" dirty="0">
+                <a:solidFill>
+                  <a:srgbClr val="000000"/>
+                </a:solidFill>
+                <a:effectLst/>
+                <a:latin typeface="Fira Code" panose="020B0809050000020004" pitchFamily="49" charset="0"/>
+              </a:rPr>
+              <a:t>, </a:t>
+            </a:r>
+            <a:r>
+              <a:rPr lang="en-US" sz="1050" b="0" dirty="0">
+                <a:solidFill>
+                  <a:srgbClr val="A31515"/>
+                </a:solidFill>
+                <a:effectLst/>
+                <a:latin typeface="Fira Code" panose="020B0809050000020004" pitchFamily="49" charset="0"/>
+              </a:rPr>
+              <a:t>'M'</a:t>
+            </a:r>
+            <a:r>
+              <a:rPr lang="en-US" sz="1050" b="0" dirty="0">
+                <a:solidFill>
+                  <a:srgbClr val="000000"/>
+                </a:solidFill>
+                <a:effectLst/>
+                <a:latin typeface="Fira Code" panose="020B0809050000020004" pitchFamily="49" charset="0"/>
+              </a:rPr>
+              <a:t>&gt;(</a:t>
+            </a:r>
+            <a:r>
+              <a:rPr lang="en-US" sz="1050" b="0" dirty="0">
+                <a:solidFill>
+                  <a:srgbClr val="098658"/>
+                </a:solidFill>
+                <a:effectLst/>
+                <a:latin typeface="Fira Code" panose="020B0809050000020004" pitchFamily="49" charset="0"/>
+              </a:rPr>
+              <a:t>4</a:t>
+            </a:r>
+            <a:r>
+              <a:rPr lang="en-US" sz="1050" b="0" dirty="0">
+                <a:solidFill>
+                  <a:srgbClr val="000000"/>
+                </a:solidFill>
+                <a:effectLst/>
+                <a:latin typeface="Fira Code" panose="020B0809050000020004" pitchFamily="49" charset="0"/>
+              </a:rPr>
+              <a:t>, </a:t>
+            </a:r>
+            <a:r>
+              <a:rPr lang="en-US" sz="1050" b="0" dirty="0">
+                <a:solidFill>
+                  <a:srgbClr val="098658"/>
+                </a:solidFill>
+                <a:effectLst/>
+                <a:latin typeface="Fira Code" panose="020B0809050000020004" pitchFamily="49" charset="0"/>
+              </a:rPr>
+              <a:t>5</a:t>
+            </a:r>
+            <a:r>
+              <a:rPr lang="en-US" sz="1050" b="0" dirty="0">
+                <a:solidFill>
+                  <a:srgbClr val="000000"/>
+                </a:solidFill>
+                <a:effectLst/>
+                <a:latin typeface="Fira Code" panose="020B0809050000020004" pitchFamily="49" charset="0"/>
+              </a:rPr>
+              <a:t>);</a:t>
+            </a:r>
+          </a:p>
+          <a:p>
+            <a:pPr>
+              <a:lnSpc>
+                <a:spcPct val="113095"/>
+              </a:lnSpc>
+              <a:buNone/>
+            </a:pPr>
+            <a:endParaRPr lang="en-US" sz="1050" b="0" dirty="0">
+              <a:solidFill>
+                <a:srgbClr val="001080"/>
+              </a:solidFill>
+              <a:effectLst/>
+              <a:latin typeface="Fira Code" panose="020B0809050000020004" pitchFamily="49" charset="0"/>
+            </a:endParaRPr>
+          </a:p>
+          <a:p>
+            <a:pPr>
+              <a:lnSpc>
+                <a:spcPct val="113095"/>
+              </a:lnSpc>
+              <a:buNone/>
+            </a:pPr>
+            <a:r>
+              <a:rPr lang="en-US" sz="1050" b="0" dirty="0" err="1">
+                <a:solidFill>
+                  <a:srgbClr val="001080"/>
+                </a:solidFill>
+                <a:effectLst/>
+                <a:latin typeface="Fira Code" panose="020B0809050000020004" pitchFamily="49" charset="0"/>
+              </a:rPr>
+              <a:t>RowMajor</a:t>
+            </a:r>
+            <a:r>
+              <a:rPr lang="en-US" sz="1050" b="0" dirty="0">
+                <a:solidFill>
+                  <a:srgbClr val="000000"/>
+                </a:solidFill>
+                <a:effectLst/>
+                <a:latin typeface="Fira Code" panose="020B0809050000020004" pitchFamily="49" charset="0"/>
+              </a:rPr>
+              <a:t>[</a:t>
+            </a:r>
+            <a:r>
+              <a:rPr lang="en-US" sz="1050" b="0" dirty="0" err="1">
+                <a:solidFill>
+                  <a:srgbClr val="001080"/>
+                </a:solidFill>
+                <a:effectLst/>
+                <a:latin typeface="Fira Code" panose="020B0809050000020004" pitchFamily="49" charset="0"/>
+              </a:rPr>
+              <a:t>idx</a:t>
+            </a:r>
+            <a:r>
+              <a:rPr lang="en-US" sz="1050" b="0" dirty="0">
+                <a:solidFill>
+                  <a:srgbClr val="000000"/>
+                </a:solidFill>
+                <a:effectLst/>
+                <a:latin typeface="Fira Code" panose="020B0809050000020004" pitchFamily="49" charset="0"/>
+              </a:rPr>
+              <a:t>] = </a:t>
+            </a:r>
+            <a:r>
+              <a:rPr lang="en-US" sz="1050" b="0" dirty="0" err="1">
+                <a:solidFill>
+                  <a:srgbClr val="001080"/>
+                </a:solidFill>
+                <a:effectLst/>
+                <a:latin typeface="Fira Code" panose="020B0809050000020004" pitchFamily="49" charset="0"/>
+              </a:rPr>
+              <a:t>ColMajor</a:t>
+            </a:r>
+            <a:r>
+              <a:rPr lang="en-US" sz="1050" b="0" dirty="0">
+                <a:solidFill>
+                  <a:srgbClr val="000000"/>
+                </a:solidFill>
+                <a:effectLst/>
+                <a:latin typeface="Fira Code" panose="020B0809050000020004" pitchFamily="49" charset="0"/>
+              </a:rPr>
+              <a:t>[</a:t>
+            </a:r>
+            <a:r>
+              <a:rPr lang="en-US" sz="1050" b="0" dirty="0" err="1">
+                <a:solidFill>
+                  <a:srgbClr val="001080"/>
+                </a:solidFill>
+                <a:effectLst/>
+                <a:latin typeface="Fira Code" panose="020B0809050000020004" pitchFamily="49" charset="0"/>
+              </a:rPr>
+              <a:t>idx</a:t>
+            </a:r>
+            <a:r>
+              <a:rPr lang="en-US" sz="1050" b="0" dirty="0">
+                <a:solidFill>
+                  <a:srgbClr val="000000"/>
+                </a:solidFill>
+                <a:effectLst/>
+                <a:latin typeface="Fira Code" panose="020B0809050000020004" pitchFamily="49" charset="0"/>
+              </a:rPr>
+              <a:t>];</a:t>
+            </a:r>
           </a:p>
         </p:txBody>
       </p:sp>
@@ -8537,6 +12377,61 @@
 </file>
 
 <file path=ppt/slides/slide7.xml><?xml version="1.0" encoding="utf-8"?>
+<p:sld xmlns:a="http://schemas.openxmlformats.org/drawingml/2006/main" xmlns:r="http://schemas.openxmlformats.org/officeDocument/2006/relationships" xmlns:p="http://schemas.openxmlformats.org/presentationml/2006/main">
+  <p:cSld>
+    <p:spTree>
+      <p:nvGrpSpPr>
+        <p:cNvPr id="1" name=""/>
+        <p:cNvGrpSpPr/>
+        <p:nvPr/>
+      </p:nvGrpSpPr>
+      <p:grpSpPr>
+        <a:xfrm>
+          <a:off x="0" y="0"/>
+          <a:ext cx="0" cy="0"/>
+          <a:chOff x="0" y="0"/>
+          <a:chExt cx="0" cy="0"/>
+        </a:xfrm>
+      </p:grpSpPr>
+      <p:sp>
+        <p:nvSpPr>
+          <p:cNvPr id="2" name="Title 1">
+            <a:extLst>
+              <a:ext uri="{FF2B5EF4-FFF2-40B4-BE49-F238E27FC236}">
+                <a16:creationId xmlns:a16="http://schemas.microsoft.com/office/drawing/2014/main" id="{094BCE46-A1EC-E0ED-AC97-840E25FF6D77}"/>
+              </a:ext>
+            </a:extLst>
+          </p:cNvPr>
+          <p:cNvSpPr>
+            <a:spLocks noGrp="1"/>
+          </p:cNvSpPr>
+          <p:nvPr>
+            <p:ph type="title"/>
+          </p:nvPr>
+        </p:nvSpPr>
+        <p:spPr/>
+        <p:txBody>
+          <a:bodyPr/>
+          <a:lstStyle/>
+          <a:p>
+            <a:endParaRPr lang="en-US"/>
+          </a:p>
+        </p:txBody>
+      </p:sp>
+    </p:spTree>
+    <p:extLst>
+      <p:ext uri="{BB962C8B-B14F-4D97-AF65-F5344CB8AC3E}">
+        <p14:creationId xmlns:p14="http://schemas.microsoft.com/office/powerpoint/2010/main" val="2215939684"/>
+      </p:ext>
+    </p:extLst>
+  </p:cSld>
+  <p:clrMapOvr>
+    <a:masterClrMapping/>
+  </p:clrMapOvr>
+</p:sld>
+</file>
+
+<file path=ppt/slides/slide8.xml><?xml version="1.0" encoding="utf-8"?>
 <p:sld xmlns:a="http://schemas.openxmlformats.org/drawingml/2006/main" xmlns:r="http://schemas.openxmlformats.org/officeDocument/2006/relationships" xmlns:p="http://schemas.openxmlformats.org/presentationml/2006/main" show="0">
   <p:cSld>
     <p:spTree>
@@ -8613,137 +12508,6 @@
     <p:extLst>
       <p:ext uri="{BB962C8B-B14F-4D97-AF65-F5344CB8AC3E}">
         <p14:creationId xmlns:p14="http://schemas.microsoft.com/office/powerpoint/2010/main" val="3503651732"/>
-      </p:ext>
-    </p:extLst>
-  </p:cSld>
-  <p:clrMapOvr>
-    <a:masterClrMapping/>
-  </p:clrMapOvr>
-</p:sld>
-</file>
-
-<file path=ppt/slides/slide8.xml><?xml version="1.0" encoding="utf-8"?>
-<p:sld xmlns:a="http://schemas.openxmlformats.org/drawingml/2006/main" xmlns:r="http://schemas.openxmlformats.org/officeDocument/2006/relationships" xmlns:p="http://schemas.openxmlformats.org/presentationml/2006/main">
-  <p:cSld>
-    <p:spTree>
-      <p:nvGrpSpPr>
-        <p:cNvPr id="1" name=""/>
-        <p:cNvGrpSpPr/>
-        <p:nvPr/>
-      </p:nvGrpSpPr>
-      <p:grpSpPr>
-        <a:xfrm>
-          <a:off x="0" y="0"/>
-          <a:ext cx="0" cy="0"/>
-          <a:chOff x="0" y="0"/>
-          <a:chExt cx="0" cy="0"/>
-        </a:xfrm>
-      </p:grpSpPr>
-      <p:sp>
-        <p:nvSpPr>
-          <p:cNvPr id="2" name="Title 1">
-            <a:extLst>
-              <a:ext uri="{FF2B5EF4-FFF2-40B4-BE49-F238E27FC236}">
-                <a16:creationId xmlns:a16="http://schemas.microsoft.com/office/drawing/2014/main" id="{C266F341-5BBA-043E-301E-387913EC1471}"/>
-              </a:ext>
-            </a:extLst>
-          </p:cNvPr>
-          <p:cNvSpPr>
-            <a:spLocks noGrp="1"/>
-          </p:cNvSpPr>
-          <p:nvPr>
-            <p:ph type="title"/>
-          </p:nvPr>
-        </p:nvSpPr>
-        <p:spPr/>
-        <p:txBody>
-          <a:bodyPr/>
-          <a:lstStyle/>
-          <a:p>
-            <a:r>
-              <a:rPr lang="en-US" noProof="0" dirty="0"/>
-              <a:t>?? Traversal agnostic design</a:t>
-            </a:r>
-          </a:p>
-        </p:txBody>
-      </p:sp>
-      <p:sp>
-        <p:nvSpPr>
-          <p:cNvPr id="3" name="Content Placeholder 2">
-            <a:extLst>
-              <a:ext uri="{FF2B5EF4-FFF2-40B4-BE49-F238E27FC236}">
-                <a16:creationId xmlns:a16="http://schemas.microsoft.com/office/drawing/2014/main" id="{871CC203-309F-C580-057C-3B0A30FCD371}"/>
-              </a:ext>
-            </a:extLst>
-          </p:cNvPr>
-          <p:cNvSpPr>
-            <a:spLocks noGrp="1"/>
-          </p:cNvSpPr>
-          <p:nvPr>
-            <p:ph idx="1"/>
-          </p:nvPr>
-        </p:nvSpPr>
-        <p:spPr/>
-        <p:txBody>
-          <a:bodyPr/>
-          <a:lstStyle/>
-          <a:p>
-            <a:r>
-              <a:rPr lang="en-US" noProof="0" dirty="0"/>
-              <a:t>In many cases, changing traversals easier than structures</a:t>
-            </a:r>
-          </a:p>
-          <a:p>
-            <a:r>
-              <a:rPr lang="en-US" noProof="0" dirty="0"/>
-              <a:t>So focus on traversals</a:t>
-            </a:r>
-          </a:p>
-          <a:p>
-            <a:r>
-              <a:rPr lang="en-US" noProof="0" dirty="0"/>
-              <a:t>Traversal transformations can use the same principles (knowledge transfer?)</a:t>
-            </a:r>
-          </a:p>
-          <a:p>
-            <a:r>
-              <a:rPr lang="en-US" noProof="0" dirty="0"/>
-              <a:t>Traversers: </a:t>
-            </a:r>
-            <a:r>
-              <a:rPr lang="en-US" noProof="0" dirty="0" err="1"/>
-              <a:t>kinda</a:t>
-            </a:r>
-            <a:r>
-              <a:rPr lang="en-US" noProof="0" dirty="0"/>
-              <a:t> like iterators or range views</a:t>
-            </a:r>
-          </a:p>
-          <a:p>
-            <a:r>
-              <a:rPr lang="en-US" noProof="0" dirty="0"/>
-              <a:t>Extending transformations: blocking, spans, renaming, …</a:t>
-            </a:r>
-          </a:p>
-          <a:p>
-            <a:r>
-              <a:rPr lang="en-US" noProof="0" dirty="0"/>
-              <a:t>Simplifies parallelization (on TBB and CUDA)</a:t>
-            </a:r>
-          </a:p>
-          <a:p>
-            <a:pPr lvl="1"/>
-            <a:r>
-              <a:rPr lang="en-US" noProof="0" dirty="0"/>
-              <a:t>(Named) dimensions of traversal can bind to dimension of the para BE</a:t>
-            </a:r>
-          </a:p>
-        </p:txBody>
-      </p:sp>
-    </p:spTree>
-    <p:extLst>
-      <p:ext uri="{BB962C8B-B14F-4D97-AF65-F5344CB8AC3E}">
-        <p14:creationId xmlns:p14="http://schemas.microsoft.com/office/powerpoint/2010/main" val="2126121211"/>
       </p:ext>
     </p:extLst>
   </p:cSld>
@@ -8775,7 +12539,7 @@
           <p:cNvPr id="2" name="Title 1">
             <a:extLst>
               <a:ext uri="{FF2B5EF4-FFF2-40B4-BE49-F238E27FC236}">
-                <a16:creationId xmlns:a16="http://schemas.microsoft.com/office/drawing/2014/main" id="{45925ADF-B97D-3587-87BD-4182502B6656}"/>
+                <a16:creationId xmlns:a16="http://schemas.microsoft.com/office/drawing/2014/main" id="{C266F341-5BBA-043E-301E-387913EC1471}"/>
               </a:ext>
             </a:extLst>
           </p:cNvPr>
@@ -8793,7 +12557,7 @@
           <a:p>
             <a:r>
               <a:rPr lang="en-US" noProof="0" dirty="0"/>
-              <a:t>Finalizing the automation: Autotuning</a:t>
+              <a:t>?? Traversal agnostic design</a:t>
             </a:r>
           </a:p>
         </p:txBody>
@@ -8803,7 +12567,7 @@
           <p:cNvPr id="3" name="Content Placeholder 2">
             <a:extLst>
               <a:ext uri="{FF2B5EF4-FFF2-40B4-BE49-F238E27FC236}">
-                <a16:creationId xmlns:a16="http://schemas.microsoft.com/office/drawing/2014/main" id="{2673B8B7-D0E9-6CB9-1502-D2F6FEE0D62F}"/>
+                <a16:creationId xmlns:a16="http://schemas.microsoft.com/office/drawing/2014/main" id="{871CC203-309F-C580-057C-3B0A30FCD371}"/>
               </a:ext>
             </a:extLst>
           </p:cNvPr>
@@ -8821,48 +12585,52 @@
           <a:p>
             <a:r>
               <a:rPr lang="en-US" noProof="0" dirty="0"/>
-              <a:t>Abstraction for integrating with an </a:t>
+              <a:t>In many cases, changing traversals easier than structures</a:t>
+            </a:r>
+          </a:p>
+          <a:p>
+            <a:r>
+              <a:rPr lang="en-US" noProof="0" dirty="0"/>
+              <a:t>So focus on traversals</a:t>
+            </a:r>
+          </a:p>
+          <a:p>
+            <a:r>
+              <a:rPr lang="en-US" noProof="0" dirty="0"/>
+              <a:t>Traversal transformations can use the same principles (knowledge transfer?)</a:t>
+            </a:r>
+          </a:p>
+          <a:p>
+            <a:r>
+              <a:rPr lang="en-US" noProof="0" dirty="0"/>
+              <a:t>Traversers: </a:t>
             </a:r>
             <a:r>
               <a:rPr lang="en-US" noProof="0" dirty="0" err="1"/>
-              <a:t>autotuner</a:t>
-            </a:r>
-            <a:endParaRPr lang="en-US" noProof="0" dirty="0"/>
+              <a:t>kinda</a:t>
+            </a:r>
+            <a:r>
+              <a:rPr lang="en-US" noProof="0" dirty="0"/>
+              <a:t> like iterators or range views</a:t>
+            </a:r>
+          </a:p>
+          <a:p>
+            <a:r>
+              <a:rPr lang="en-US" noProof="0" dirty="0"/>
+              <a:t>Extending transformations: blocking, spans, renaming, …</a:t>
+            </a:r>
+          </a:p>
+          <a:p>
+            <a:r>
+              <a:rPr lang="en-US" noProof="0" dirty="0"/>
+              <a:t>Simplifies parallelization (on TBB and CUDA)</a:t>
+            </a:r>
           </a:p>
           <a:p>
             <a:pPr lvl="1"/>
             <a:r>
               <a:rPr lang="en-US" noProof="0" dirty="0"/>
-              <a:t>Agnostic to the specific backend</a:t>
-            </a:r>
-          </a:p>
-          <a:p>
-            <a:pPr lvl="1"/>
-            <a:r>
-              <a:rPr lang="en-US" noProof="0" dirty="0"/>
-              <a:t>PoC with </a:t>
-            </a:r>
-            <a:r>
-              <a:rPr lang="en-US" noProof="0" dirty="0" err="1"/>
-              <a:t>OpenTuner</a:t>
-            </a:r>
-            <a:r>
-              <a:rPr lang="en-US" noProof="0" dirty="0"/>
-              <a:t>, </a:t>
-            </a:r>
-            <a:r>
-              <a:rPr lang="en-US" noProof="0" dirty="0" err="1"/>
-              <a:t>Optuna</a:t>
-            </a:r>
-            <a:r>
-              <a:rPr lang="en-US" noProof="0" dirty="0"/>
-              <a:t>, ATF</a:t>
-            </a:r>
-          </a:p>
-          <a:p>
-            <a:r>
-              <a:rPr lang="en-US" noProof="0" dirty="0"/>
-              <a:t>Autotuning enables automatic layout &amp; traversal transformations</a:t>
+              <a:t>(Named) dimensions of traversal can bind to dimension of the para BE</a:t>
             </a:r>
           </a:p>
         </p:txBody>
@@ -8870,7 +12638,7 @@
     </p:spTree>
     <p:extLst>
       <p:ext uri="{BB962C8B-B14F-4D97-AF65-F5344CB8AC3E}">
-        <p14:creationId xmlns:p14="http://schemas.microsoft.com/office/powerpoint/2010/main" val="2958406956"/>
+        <p14:creationId xmlns:p14="http://schemas.microsoft.com/office/powerpoint/2010/main" val="2126121211"/>
       </p:ext>
     </p:extLst>
   </p:cSld>

--- a/slides/Optimizing Memory Layouts and Traversal Orders in High-Performance Computing.pptx
+++ b/slides/Optimizing Memory Layouts and Traversal Orders in High-Performance Computing.pptx
@@ -5,7 +5,7 @@
     <p:sldMasterId id="2147483648" r:id="rId1"/>
   </p:sldMasterIdLst>
   <p:notesMasterIdLst>
-    <p:notesMasterId r:id="rId26"/>
+    <p:notesMasterId r:id="rId29"/>
   </p:notesMasterIdLst>
   <p:sldIdLst>
     <p:sldId id="256" r:id="rId2"/>
@@ -17,21 +17,24 @@
     <p:sldId id="282" r:id="rId8"/>
     <p:sldId id="263" r:id="rId9"/>
     <p:sldId id="271" r:id="rId10"/>
-    <p:sldId id="272" r:id="rId11"/>
-    <p:sldId id="278" r:id="rId12"/>
-    <p:sldId id="265" r:id="rId13"/>
-    <p:sldId id="258" r:id="rId14"/>
-    <p:sldId id="273" r:id="rId15"/>
-    <p:sldId id="279" r:id="rId16"/>
-    <p:sldId id="274" r:id="rId17"/>
-    <p:sldId id="280" r:id="rId18"/>
-    <p:sldId id="259" r:id="rId19"/>
-    <p:sldId id="275" r:id="rId20"/>
-    <p:sldId id="276" r:id="rId21"/>
-    <p:sldId id="260" r:id="rId22"/>
-    <p:sldId id="266" r:id="rId23"/>
-    <p:sldId id="261" r:id="rId24"/>
-    <p:sldId id="262" r:id="rId25"/>
+    <p:sldId id="283" r:id="rId11"/>
+    <p:sldId id="284" r:id="rId12"/>
+    <p:sldId id="272" r:id="rId13"/>
+    <p:sldId id="285" r:id="rId14"/>
+    <p:sldId id="278" r:id="rId15"/>
+    <p:sldId id="265" r:id="rId16"/>
+    <p:sldId id="258" r:id="rId17"/>
+    <p:sldId id="273" r:id="rId18"/>
+    <p:sldId id="279" r:id="rId19"/>
+    <p:sldId id="274" r:id="rId20"/>
+    <p:sldId id="280" r:id="rId21"/>
+    <p:sldId id="259" r:id="rId22"/>
+    <p:sldId id="275" r:id="rId23"/>
+    <p:sldId id="276" r:id="rId24"/>
+    <p:sldId id="260" r:id="rId25"/>
+    <p:sldId id="266" r:id="rId26"/>
+    <p:sldId id="261" r:id="rId27"/>
+    <p:sldId id="262" r:id="rId28"/>
   </p:sldIdLst>
   <p:sldSz cx="12192000" cy="6858000"/>
   <p:notesSz cx="6858000" cy="9144000"/>
@@ -148,7 +151,10 @@
             <p14:sldId id="282"/>
             <p14:sldId id="263"/>
             <p14:sldId id="271"/>
+            <p14:sldId id="283"/>
+            <p14:sldId id="284"/>
             <p14:sldId id="272"/>
+            <p14:sldId id="285"/>
             <p14:sldId id="278"/>
             <p14:sldId id="265"/>
             <p14:sldId id="258"/>
@@ -739,6 +745,90 @@
 </p:notes>
 </file>
 
+<file path=ppt/notesSlides/notesSlide10.xml><?xml version="1.0" encoding="utf-8"?>
+<p:notes xmlns:a="http://schemas.openxmlformats.org/drawingml/2006/main" xmlns:r="http://schemas.openxmlformats.org/officeDocument/2006/relationships" xmlns:p="http://schemas.openxmlformats.org/presentationml/2006/main">
+  <p:cSld>
+    <p:spTree>
+      <p:nvGrpSpPr>
+        <p:cNvPr id="1" name=""/>
+        <p:cNvGrpSpPr/>
+        <p:nvPr/>
+      </p:nvGrpSpPr>
+      <p:grpSpPr>
+        <a:xfrm>
+          <a:off x="0" y="0"/>
+          <a:ext cx="0" cy="0"/>
+          <a:chOff x="0" y="0"/>
+          <a:chExt cx="0" cy="0"/>
+        </a:xfrm>
+      </p:grpSpPr>
+      <p:sp>
+        <p:nvSpPr>
+          <p:cNvPr id="2" name="Slide Image Placeholder 1"/>
+          <p:cNvSpPr>
+            <a:spLocks noGrp="1" noRot="1" noChangeAspect="1"/>
+          </p:cNvSpPr>
+          <p:nvPr>
+            <p:ph type="sldImg"/>
+          </p:nvPr>
+        </p:nvSpPr>
+        <p:spPr/>
+      </p:sp>
+      <p:sp>
+        <p:nvSpPr>
+          <p:cNvPr id="3" name="Notes Placeholder 2"/>
+          <p:cNvSpPr>
+            <a:spLocks noGrp="1"/>
+          </p:cNvSpPr>
+          <p:nvPr>
+            <p:ph type="body" idx="1"/>
+          </p:nvPr>
+        </p:nvSpPr>
+        <p:spPr/>
+        <p:txBody>
+          <a:bodyPr/>
+          <a:lstStyle/>
+          <a:p>
+            <a:endParaRPr lang="en-US" dirty="0"/>
+          </a:p>
+        </p:txBody>
+      </p:sp>
+      <p:sp>
+        <p:nvSpPr>
+          <p:cNvPr id="4" name="Slide Number Placeholder 3"/>
+          <p:cNvSpPr>
+            <a:spLocks noGrp="1"/>
+          </p:cNvSpPr>
+          <p:nvPr>
+            <p:ph type="sldNum" sz="quarter" idx="5"/>
+          </p:nvPr>
+        </p:nvSpPr>
+        <p:spPr/>
+        <p:txBody>
+          <a:bodyPr/>
+          <a:lstStyle/>
+          <a:p>
+            <a:fld id="{FA8FD632-245B-410D-BCC4-8BF8D37AB67F}" type="slidenum">
+              <a:rPr lang="en-US" smtClean="0"/>
+              <a:t>15</a:t>
+            </a:fld>
+            <a:endParaRPr lang="en-US"/>
+          </a:p>
+        </p:txBody>
+      </p:sp>
+    </p:spTree>
+    <p:extLst>
+      <p:ext uri="{BB962C8B-B14F-4D97-AF65-F5344CB8AC3E}">
+        <p14:creationId xmlns:p14="http://schemas.microsoft.com/office/powerpoint/2010/main" val="936605202"/>
+      </p:ext>
+    </p:extLst>
+  </p:cSld>
+  <p:clrMapOvr>
+    <a:masterClrMapping/>
+  </p:clrMapOvr>
+</p:notes>
+</file>
+
 <file path=ppt/notesSlides/notesSlide2.xml><?xml version="1.0" encoding="utf-8"?>
 <p:notes xmlns:a="http://schemas.openxmlformats.org/drawingml/2006/main" xmlns:r="http://schemas.openxmlformats.org/officeDocument/2006/relationships" xmlns:p="http://schemas.openxmlformats.org/presentationml/2006/main">
   <p:cSld>
@@ -1240,7 +1330,64 @@
           <a:p>
             <a:r>
               <a:rPr lang="en-US" dirty="0"/>
-              <a:t>Our approach is characteristic in defining the layouts via semantic building blocks (such as scalar that names a single value or array that extends a given layout with one named dimension) that are freely composable and allow for defining derived layouts.</a:t>
+              <a:t>?? Should I avoid </a:t>
+            </a:r>
+            <a:r>
+              <a:rPr lang="en-US" dirty="0" err="1"/>
+              <a:t>Noarr</a:t>
+            </a:r>
+            <a:r>
+              <a:rPr lang="en-US" dirty="0"/>
+              <a:t> structures and proto-structures?</a:t>
+            </a:r>
+          </a:p>
+          <a:p>
+            <a:endParaRPr lang="en-US" dirty="0"/>
+          </a:p>
+          <a:p>
+            <a:r>
+              <a:rPr lang="en-US" dirty="0"/>
+              <a:t>Our approach is characteristic in defining the layouts via semantic building blocks (such as scalar that names a single value or vector that extends a given layout with one named dimension) that are freely composable and allow for defining derived layouts.</a:t>
+            </a:r>
+          </a:p>
+          <a:p>
+            <a:r>
+              <a:rPr lang="en-US" dirty="0"/>
+              <a:t>The abstraction further allows seamlessly encoding static constants as compile-time values that are encoded in the type of the resulting object rather than its runtime representation, which also allows for further optimizations.</a:t>
+            </a:r>
+          </a:p>
+          <a:p>
+            <a:endParaRPr lang="en-US" dirty="0"/>
+          </a:p>
+          <a:p>
+            <a:r>
+              <a:rPr lang="en-US" dirty="0"/>
+              <a:t>Note that these building blocks, as shown, just define the layouts with no implied binding to actual memory yet. This is important, as it allows us to pair the layout specification with automatically acquired memory</a:t>
+            </a:r>
+            <a:br>
+              <a:rPr lang="en-US" dirty="0"/>
+            </a:br>
+            <a:r>
+              <a:rPr lang="en-US" dirty="0"/>
+              <a:t>as well as with externally managed memory to offer a view of some data that might live in a special memory, such as GPU shared memory or a memory-mapped file.</a:t>
+            </a:r>
+          </a:p>
+          <a:p>
+            <a:endParaRPr lang="en-US" dirty="0"/>
+          </a:p>
+          <a:p>
+            <a:r>
+              <a:rPr lang="en-US" dirty="0"/>
+              <a:t>The flexible composability allows us to easily define reusable, more complex transformations, various substructures, or unsized templates for later specified layouts.</a:t>
+            </a:r>
+          </a:p>
+          <a:p>
+            <a:endParaRPr lang="en-US" dirty="0"/>
+          </a:p>
+          <a:p>
+            <a:r>
+              <a:rPr lang="en-US" dirty="0"/>
+              <a:t>Most importantly,  it allows us to achieve layout-agnostic design.</a:t>
             </a:r>
           </a:p>
         </p:txBody>
@@ -1325,7 +1472,65 @@
           <a:bodyPr/>
           <a:lstStyle/>
           <a:p>
+            <a:r>
+              <a:rPr lang="en-US" dirty="0"/>
+              <a:t>After carefully assessing how the principles play into defining layout-agnostic algorithms, we have extended the approach for traversals as well.</a:t>
+            </a:r>
+          </a:p>
+          <a:p>
             <a:endParaRPr lang="en-US" dirty="0"/>
+          </a:p>
+          <a:p>
+            <a:r>
+              <a:rPr lang="en-US" dirty="0"/>
+              <a:t>For that, we have devised a traverser abstraction. An adaptation of an idea of an iterator for multi-dimensional layouts and traversals.</a:t>
+            </a:r>
+          </a:p>
+          <a:p>
+            <a:endParaRPr lang="en-US" dirty="0"/>
+          </a:p>
+          <a:p>
+            <a:r>
+              <a:rPr lang="en-US" dirty="0"/>
+              <a:t>A traverser is created from one or multiple data structures and then generates index points for accessing their shared space.</a:t>
+            </a:r>
+            <a:br>
+              <a:rPr lang="en-US" dirty="0"/>
+            </a:br>
+            <a:br>
+              <a:rPr lang="en-US" dirty="0"/>
+            </a:br>
+            <a:r>
+              <a:rPr lang="en-US" dirty="0"/>
+              <a:t>For a single structure, this mirrors a simple for-each algorithm;</a:t>
+            </a:r>
+            <a:br>
+              <a:rPr lang="en-US" dirty="0"/>
+            </a:br>
+            <a:br>
+              <a:rPr lang="en-US" dirty="0"/>
+            </a:br>
+            <a:r>
+              <a:rPr lang="en-US" dirty="0"/>
+              <a:t>If two structures share the same space, the traverser can be used to simply copy the data from one structure to the other</a:t>
+            </a:r>
+          </a:p>
+          <a:p>
+            <a:endParaRPr lang="en-US" dirty="0"/>
+          </a:p>
+          <a:p>
+            <a:r>
+              <a:rPr lang="en-US" dirty="0"/>
+              <a:t>If the traversed structures have (partially) independent index spaces, the traverser infers the shared space as the cartesian product of the unique dimensions of all the </a:t>
+            </a:r>
+            <a:r>
+              <a:rPr lang="en-US" dirty="0" err="1"/>
+              <a:t>structurtes</a:t>
+            </a:r>
+            <a:r>
+              <a:rPr lang="en-US" dirty="0"/>
+              <a:t>. This can define, for example, the matrix multiplication algorithm.</a:t>
+            </a:r>
           </a:p>
         </p:txBody>
       </p:sp>
@@ -1346,7 +1551,7 @@
           <a:p>
             <a:fld id="{FA8FD632-245B-410D-BCC4-8BF8D37AB67F}" type="slidenum">
               <a:rPr lang="en-US" smtClean="0"/>
-              <a:t>12</a:t>
+              <a:t>10</a:t>
             </a:fld>
             <a:endParaRPr lang="en-US"/>
           </a:p>
@@ -1355,7 +1560,351 @@
     </p:spTree>
     <p:extLst>
       <p:ext uri="{BB962C8B-B14F-4D97-AF65-F5344CB8AC3E}">
-        <p14:creationId xmlns:p14="http://schemas.microsoft.com/office/powerpoint/2010/main" val="936605202"/>
+        <p14:creationId xmlns:p14="http://schemas.microsoft.com/office/powerpoint/2010/main" val="2965894532"/>
+      </p:ext>
+    </p:extLst>
+  </p:cSld>
+  <p:clrMapOvr>
+    <a:masterClrMapping/>
+  </p:clrMapOvr>
+</p:notes>
+</file>
+
+<file path=ppt/notesSlides/notesSlide7.xml><?xml version="1.0" encoding="utf-8"?>
+<p:notes xmlns:a="http://schemas.openxmlformats.org/drawingml/2006/main" xmlns:r="http://schemas.openxmlformats.org/officeDocument/2006/relationships" xmlns:p="http://schemas.openxmlformats.org/presentationml/2006/main">
+  <p:cSld>
+    <p:spTree>
+      <p:nvGrpSpPr>
+        <p:cNvPr id="1" name=""/>
+        <p:cNvGrpSpPr/>
+        <p:nvPr/>
+      </p:nvGrpSpPr>
+      <p:grpSpPr>
+        <a:xfrm>
+          <a:off x="0" y="0"/>
+          <a:ext cx="0" cy="0"/>
+          <a:chOff x="0" y="0"/>
+          <a:chExt cx="0" cy="0"/>
+        </a:xfrm>
+      </p:grpSpPr>
+      <p:sp>
+        <p:nvSpPr>
+          <p:cNvPr id="2" name="Slide Image Placeholder 1"/>
+          <p:cNvSpPr>
+            <a:spLocks noGrp="1" noRot="1" noChangeAspect="1"/>
+          </p:cNvSpPr>
+          <p:nvPr>
+            <p:ph type="sldImg"/>
+          </p:nvPr>
+        </p:nvSpPr>
+        <p:spPr/>
+      </p:sp>
+      <p:sp>
+        <p:nvSpPr>
+          <p:cNvPr id="3" name="Notes Placeholder 2"/>
+          <p:cNvSpPr>
+            <a:spLocks noGrp="1"/>
+          </p:cNvSpPr>
+          <p:nvPr>
+            <p:ph type="body" idx="1"/>
+          </p:nvPr>
+        </p:nvSpPr>
+        <p:spPr/>
+        <p:txBody>
+          <a:bodyPr/>
+          <a:lstStyle/>
+          <a:p>
+            <a:r>
+              <a:rPr lang="en-US" dirty="0"/>
+              <a:t>This wouldn’t be very useful just like that.</a:t>
+            </a:r>
+            <a:br>
+              <a:rPr lang="en-US" dirty="0"/>
+            </a:br>
+            <a:br>
+              <a:rPr lang="en-US" dirty="0"/>
+            </a:br>
+            <a:r>
+              <a:rPr lang="en-US" dirty="0"/>
+              <a:t>The important part is that we can use the same principles for building memory layouts to specify transformations of the traversal orders as well.</a:t>
+            </a:r>
+          </a:p>
+          <a:p>
+            <a:r>
+              <a:rPr lang="en-US" dirty="0"/>
+              <a:t>This significantly improves the </a:t>
+            </a:r>
+            <a:r>
+              <a:rPr lang="en-US" dirty="0" err="1"/>
+              <a:t>expressibility</a:t>
+            </a:r>
+            <a:r>
+              <a:rPr lang="en-US" dirty="0"/>
+              <a:t> of the earlier work for optimizations, because oftentimes it is much easier to modify the (internal) traversal order of an algorithm</a:t>
+            </a:r>
+            <a:br>
+              <a:rPr lang="en-US" dirty="0"/>
+            </a:br>
+            <a:r>
+              <a:rPr lang="en-US" dirty="0"/>
+              <a:t>rather than the memory layouts of the data structures that might be prescribed by the expected API.</a:t>
+            </a:r>
+          </a:p>
+          <a:p>
+            <a:endParaRPr lang="en-US" dirty="0"/>
+          </a:p>
+          <a:p>
+            <a:r>
+              <a:rPr lang="en-US" dirty="0"/>
+              <a:t>We have also shown that this approach is very useful for specifying parallelization of the computation. We have showcased this on frameworks such as OpenMP and TBB,</a:t>
+            </a:r>
+            <a:br>
+              <a:rPr lang="en-US" dirty="0"/>
+            </a:br>
+            <a:r>
+              <a:rPr lang="en-US" dirty="0"/>
+              <a:t>and in more detail in the CUDA framework for general-purpose GPU programming. There, we have shown that the principles pair well with multiple design specifics of</a:t>
+            </a:r>
+            <a:br>
+              <a:rPr lang="en-US" dirty="0"/>
+            </a:br>
+            <a:r>
+              <a:rPr lang="en-US" dirty="0"/>
+              <a:t>CUDA programming, such as binding different threads and blocks to the dimensions of the computation and privatizing the data in the GPU shared memory.</a:t>
+            </a:r>
+          </a:p>
+        </p:txBody>
+      </p:sp>
+      <p:sp>
+        <p:nvSpPr>
+          <p:cNvPr id="4" name="Slide Number Placeholder 3"/>
+          <p:cNvSpPr>
+            <a:spLocks noGrp="1"/>
+          </p:cNvSpPr>
+          <p:nvPr>
+            <p:ph type="sldNum" sz="quarter" idx="5"/>
+          </p:nvPr>
+        </p:nvSpPr>
+        <p:spPr/>
+        <p:txBody>
+          <a:bodyPr/>
+          <a:lstStyle/>
+          <a:p>
+            <a:fld id="{FA8FD632-245B-410D-BCC4-8BF8D37AB67F}" type="slidenum">
+              <a:rPr lang="en-US" smtClean="0"/>
+              <a:t>11</a:t>
+            </a:fld>
+            <a:endParaRPr lang="en-US"/>
+          </a:p>
+        </p:txBody>
+      </p:sp>
+    </p:spTree>
+    <p:extLst>
+      <p:ext uri="{BB962C8B-B14F-4D97-AF65-F5344CB8AC3E}">
+        <p14:creationId xmlns:p14="http://schemas.microsoft.com/office/powerpoint/2010/main" val="1417471270"/>
+      </p:ext>
+    </p:extLst>
+  </p:cSld>
+  <p:clrMapOvr>
+    <a:masterClrMapping/>
+  </p:clrMapOvr>
+</p:notes>
+</file>
+
+<file path=ppt/notesSlides/notesSlide8.xml><?xml version="1.0" encoding="utf-8"?>
+<p:notes xmlns:a="http://schemas.openxmlformats.org/drawingml/2006/main" xmlns:r="http://schemas.openxmlformats.org/officeDocument/2006/relationships" xmlns:p="http://schemas.openxmlformats.org/presentationml/2006/main">
+  <p:cSld>
+    <p:spTree>
+      <p:nvGrpSpPr>
+        <p:cNvPr id="1" name=""/>
+        <p:cNvGrpSpPr/>
+        <p:nvPr/>
+      </p:nvGrpSpPr>
+      <p:grpSpPr>
+        <a:xfrm>
+          <a:off x="0" y="0"/>
+          <a:ext cx="0" cy="0"/>
+          <a:chOff x="0" y="0"/>
+          <a:chExt cx="0" cy="0"/>
+        </a:xfrm>
+      </p:grpSpPr>
+      <p:sp>
+        <p:nvSpPr>
+          <p:cNvPr id="2" name="Slide Image Placeholder 1"/>
+          <p:cNvSpPr>
+            <a:spLocks noGrp="1" noRot="1" noChangeAspect="1"/>
+          </p:cNvSpPr>
+          <p:nvPr>
+            <p:ph type="sldImg"/>
+          </p:nvPr>
+        </p:nvSpPr>
+        <p:spPr/>
+      </p:sp>
+      <p:sp>
+        <p:nvSpPr>
+          <p:cNvPr id="3" name="Notes Placeholder 2"/>
+          <p:cNvSpPr>
+            <a:spLocks noGrp="1"/>
+          </p:cNvSpPr>
+          <p:nvPr>
+            <p:ph type="body" idx="1"/>
+          </p:nvPr>
+        </p:nvSpPr>
+        <p:spPr/>
+        <p:txBody>
+          <a:bodyPr/>
+          <a:lstStyle/>
+          <a:p>
+            <a:r>
+              <a:rPr lang="en-US" dirty="0"/>
+              <a:t>So, these two stages have provided the groundwork for enabling seamless and automatable code optimization in C++ that is fully transparent and directable by the user.</a:t>
+            </a:r>
+          </a:p>
+          <a:p>
+            <a:endParaRPr lang="en-US" dirty="0"/>
+          </a:p>
+          <a:p>
+            <a:r>
+              <a:rPr lang="en-US" dirty="0"/>
+              <a:t>We have finalized this effort by implementing an autotuning interface that allows for specifying the tuned parameters in the same code as the algorithm.</a:t>
+            </a:r>
+          </a:p>
+          <a:p>
+            <a:r>
+              <a:rPr lang="en-US" dirty="0"/>
+              <a:t>This interface was designed to pair well with the abstractions.</a:t>
+            </a:r>
+          </a:p>
+          <a:p>
+            <a:endParaRPr lang="en-US" dirty="0"/>
+          </a:p>
+          <a:p>
+            <a:r>
+              <a:rPr lang="en-US" dirty="0"/>
+              <a:t>(Oh god I don’t know how to continue </a:t>
+            </a:r>
+            <a:r>
+              <a:rPr lang="en-US" dirty="0" err="1"/>
+              <a:t>rn</a:t>
+            </a:r>
+            <a:r>
+              <a:rPr lang="en-US" dirty="0"/>
+              <a:t>)</a:t>
+            </a:r>
+          </a:p>
+        </p:txBody>
+      </p:sp>
+      <p:sp>
+        <p:nvSpPr>
+          <p:cNvPr id="4" name="Slide Number Placeholder 3"/>
+          <p:cNvSpPr>
+            <a:spLocks noGrp="1"/>
+          </p:cNvSpPr>
+          <p:nvPr>
+            <p:ph type="sldNum" sz="quarter" idx="5"/>
+          </p:nvPr>
+        </p:nvSpPr>
+        <p:spPr/>
+        <p:txBody>
+          <a:bodyPr/>
+          <a:lstStyle/>
+          <a:p>
+            <a:fld id="{FA8FD632-245B-410D-BCC4-8BF8D37AB67F}" type="slidenum">
+              <a:rPr lang="en-US" smtClean="0"/>
+              <a:t>13</a:t>
+            </a:fld>
+            <a:endParaRPr lang="en-US"/>
+          </a:p>
+        </p:txBody>
+      </p:sp>
+    </p:spTree>
+    <p:extLst>
+      <p:ext uri="{BB962C8B-B14F-4D97-AF65-F5344CB8AC3E}">
+        <p14:creationId xmlns:p14="http://schemas.microsoft.com/office/powerpoint/2010/main" val="4181065700"/>
+      </p:ext>
+    </p:extLst>
+  </p:cSld>
+  <p:clrMapOvr>
+    <a:masterClrMapping/>
+  </p:clrMapOvr>
+</p:notes>
+</file>
+
+<file path=ppt/notesSlides/notesSlide9.xml><?xml version="1.0" encoding="utf-8"?>
+<p:notes xmlns:a="http://schemas.openxmlformats.org/drawingml/2006/main" xmlns:r="http://schemas.openxmlformats.org/officeDocument/2006/relationships" xmlns:p="http://schemas.openxmlformats.org/presentationml/2006/main">
+  <p:cSld>
+    <p:spTree>
+      <p:nvGrpSpPr>
+        <p:cNvPr id="1" name=""/>
+        <p:cNvGrpSpPr/>
+        <p:nvPr/>
+      </p:nvGrpSpPr>
+      <p:grpSpPr>
+        <a:xfrm>
+          <a:off x="0" y="0"/>
+          <a:ext cx="0" cy="0"/>
+          <a:chOff x="0" y="0"/>
+          <a:chExt cx="0" cy="0"/>
+        </a:xfrm>
+      </p:grpSpPr>
+      <p:sp>
+        <p:nvSpPr>
+          <p:cNvPr id="2" name="Slide Image Placeholder 1"/>
+          <p:cNvSpPr>
+            <a:spLocks noGrp="1" noRot="1" noChangeAspect="1"/>
+          </p:cNvSpPr>
+          <p:nvPr>
+            <p:ph type="sldImg"/>
+          </p:nvPr>
+        </p:nvSpPr>
+        <p:spPr/>
+      </p:sp>
+      <p:sp>
+        <p:nvSpPr>
+          <p:cNvPr id="3" name="Notes Placeholder 2"/>
+          <p:cNvSpPr>
+            <a:spLocks noGrp="1"/>
+          </p:cNvSpPr>
+          <p:nvPr>
+            <p:ph type="body" idx="1"/>
+          </p:nvPr>
+        </p:nvSpPr>
+        <p:spPr/>
+        <p:txBody>
+          <a:bodyPr/>
+          <a:lstStyle/>
+          <a:p>
+            <a:endParaRPr lang="en-US" dirty="0"/>
+          </a:p>
+        </p:txBody>
+      </p:sp>
+      <p:sp>
+        <p:nvSpPr>
+          <p:cNvPr id="4" name="Slide Number Placeholder 3"/>
+          <p:cNvSpPr>
+            <a:spLocks noGrp="1"/>
+          </p:cNvSpPr>
+          <p:nvPr>
+            <p:ph type="sldNum" sz="quarter" idx="5"/>
+          </p:nvPr>
+        </p:nvSpPr>
+        <p:spPr/>
+        <p:txBody>
+          <a:bodyPr/>
+          <a:lstStyle/>
+          <a:p>
+            <a:fld id="{FA8FD632-245B-410D-BCC4-8BF8D37AB67F}" type="slidenum">
+              <a:rPr lang="en-US" smtClean="0"/>
+              <a:t>14</a:t>
+            </a:fld>
+            <a:endParaRPr lang="en-US"/>
+          </a:p>
+        </p:txBody>
+      </p:sp>
+    </p:spTree>
+    <p:extLst>
+      <p:ext uri="{BB962C8B-B14F-4D97-AF65-F5344CB8AC3E}">
+        <p14:creationId xmlns:p14="http://schemas.microsoft.com/office/powerpoint/2010/main" val="2770268430"/>
       </p:ext>
     </p:extLst>
   </p:cSld>
@@ -4679,7 +5228,7 @@
           <p:cNvPr id="2" name="Title 1">
             <a:extLst>
               <a:ext uri="{FF2B5EF4-FFF2-40B4-BE49-F238E27FC236}">
-                <a16:creationId xmlns:a16="http://schemas.microsoft.com/office/drawing/2014/main" id="{45925ADF-B97D-3587-87BD-4182502B6656}"/>
+                <a16:creationId xmlns:a16="http://schemas.microsoft.com/office/drawing/2014/main" id="{5B5C81CB-0D4D-015E-A6C7-6724860C9F8E}"/>
               </a:ext>
             </a:extLst>
           </p:cNvPr>
@@ -4695,10 +5244,7 @@
           <a:bodyPr/>
           <a:lstStyle/>
           <a:p>
-            <a:r>
-              <a:rPr lang="en-US" noProof="0" dirty="0"/>
-              <a:t>Finalizing the automation: Autotuning</a:t>
-            </a:r>
+            <a:endParaRPr lang="en-US"/>
           </a:p>
         </p:txBody>
       </p:sp>
@@ -4707,7 +5253,7 @@
           <p:cNvPr id="3" name="Content Placeholder 2">
             <a:extLst>
               <a:ext uri="{FF2B5EF4-FFF2-40B4-BE49-F238E27FC236}">
-                <a16:creationId xmlns:a16="http://schemas.microsoft.com/office/drawing/2014/main" id="{2673B8B7-D0E9-6CB9-1502-D2F6FEE0D62F}"/>
+                <a16:creationId xmlns:a16="http://schemas.microsoft.com/office/drawing/2014/main" id="{FF3BADD0-775D-00AB-6065-683027A95B87}"/>
               </a:ext>
             </a:extLst>
           </p:cNvPr>
@@ -4723,58 +5269,14 @@
           <a:bodyPr/>
           <a:lstStyle/>
           <a:p>
-            <a:r>
-              <a:rPr lang="en-US" noProof="0" dirty="0"/>
-              <a:t>Abstraction for integrating with an </a:t>
-            </a:r>
-            <a:r>
-              <a:rPr lang="en-US" noProof="0" dirty="0" err="1"/>
-              <a:t>autotuner</a:t>
-            </a:r>
-            <a:endParaRPr lang="en-US" noProof="0" dirty="0"/>
-          </a:p>
-          <a:p>
-            <a:pPr lvl="1"/>
-            <a:r>
-              <a:rPr lang="en-US" noProof="0" dirty="0"/>
-              <a:t>Agnostic to the specific backend</a:t>
-            </a:r>
-          </a:p>
-          <a:p>
-            <a:pPr lvl="1"/>
-            <a:r>
-              <a:rPr lang="en-US" noProof="0" dirty="0"/>
-              <a:t>PoC with </a:t>
-            </a:r>
-            <a:r>
-              <a:rPr lang="en-US" noProof="0" dirty="0" err="1"/>
-              <a:t>OpenTuner</a:t>
-            </a:r>
-            <a:r>
-              <a:rPr lang="en-US" noProof="0" dirty="0"/>
-              <a:t>, </a:t>
-            </a:r>
-            <a:r>
-              <a:rPr lang="en-US" noProof="0" dirty="0" err="1"/>
-              <a:t>Optuna</a:t>
-            </a:r>
-            <a:r>
-              <a:rPr lang="en-US" noProof="0" dirty="0"/>
-              <a:t>, ATF</a:t>
-            </a:r>
-          </a:p>
-          <a:p>
-            <a:r>
-              <a:rPr lang="en-US" noProof="0" dirty="0"/>
-              <a:t>Autotuning enables automatic layout &amp; traversal transformations</a:t>
-            </a:r>
+            <a:endParaRPr lang="en-US"/>
           </a:p>
         </p:txBody>
       </p:sp>
     </p:spTree>
     <p:extLst>
       <p:ext uri="{BB962C8B-B14F-4D97-AF65-F5344CB8AC3E}">
-        <p14:creationId xmlns:p14="http://schemas.microsoft.com/office/powerpoint/2010/main" val="2958406956"/>
+        <p14:creationId xmlns:p14="http://schemas.microsoft.com/office/powerpoint/2010/main" val="1912447851"/>
       </p:ext>
     </p:extLst>
   </p:cSld>
@@ -4806,7 +5308,7 @@
           <p:cNvPr id="2" name="Title 1">
             <a:extLst>
               <a:ext uri="{FF2B5EF4-FFF2-40B4-BE49-F238E27FC236}">
-                <a16:creationId xmlns:a16="http://schemas.microsoft.com/office/drawing/2014/main" id="{19C5CD64-6486-850E-0A2A-48532AE26434}"/>
+                <a16:creationId xmlns:a16="http://schemas.microsoft.com/office/drawing/2014/main" id="{A6E67ECF-9BA1-2BE7-0036-A36004137A20}"/>
               </a:ext>
             </a:extLst>
           </p:cNvPr>
@@ -4822,10 +5324,7 @@
           <a:bodyPr/>
           <a:lstStyle/>
           <a:p>
-            <a:r>
-              <a:rPr lang="en-US" dirty="0"/>
-              <a:t>Results</a:t>
-            </a:r>
+            <a:endParaRPr lang="en-US"/>
           </a:p>
         </p:txBody>
       </p:sp>
@@ -4834,7 +5333,7 @@
           <p:cNvPr id="3" name="Content Placeholder 2">
             <a:extLst>
               <a:ext uri="{FF2B5EF4-FFF2-40B4-BE49-F238E27FC236}">
-                <a16:creationId xmlns:a16="http://schemas.microsoft.com/office/drawing/2014/main" id="{3F49C5DC-F250-ABEE-8BA5-C59E6ABD627F}"/>
+                <a16:creationId xmlns:a16="http://schemas.microsoft.com/office/drawing/2014/main" id="{9D95407F-A5F5-76A5-4E06-750FA9FB53DC}"/>
               </a:ext>
             </a:extLst>
           </p:cNvPr>
@@ -4857,7 +5356,7 @@
     </p:spTree>
     <p:extLst>
       <p:ext uri="{BB962C8B-B14F-4D97-AF65-F5344CB8AC3E}">
-        <p14:creationId xmlns:p14="http://schemas.microsoft.com/office/powerpoint/2010/main" val="52204862"/>
+        <p14:creationId xmlns:p14="http://schemas.microsoft.com/office/powerpoint/2010/main" val="1117610032"/>
       </p:ext>
     </p:extLst>
   </p:cSld>
@@ -4868,176 +5367,6 @@
 </file>
 
 <file path=ppt/slides/slide12.xml><?xml version="1.0" encoding="utf-8"?>
-<p:sld xmlns:a="http://schemas.openxmlformats.org/drawingml/2006/main" xmlns:r="http://schemas.openxmlformats.org/officeDocument/2006/relationships" xmlns:p="http://schemas.openxmlformats.org/presentationml/2006/main" show="0">
-  <p:cSld>
-    <p:spTree>
-      <p:nvGrpSpPr>
-        <p:cNvPr id="1" name="">
-          <a:extLst>
-            <a:ext uri="{FF2B5EF4-FFF2-40B4-BE49-F238E27FC236}">
-              <a16:creationId xmlns:a16="http://schemas.microsoft.com/office/drawing/2014/main" id="{EFDF7620-7AA1-EF30-FDC7-27AAC7FFE5EE}"/>
-            </a:ext>
-          </a:extLst>
-        </p:cNvPr>
-        <p:cNvGrpSpPr/>
-        <p:nvPr/>
-      </p:nvGrpSpPr>
-      <p:grpSpPr>
-        <a:xfrm>
-          <a:off x="0" y="0"/>
-          <a:ext cx="0" cy="0"/>
-          <a:chOff x="0" y="0"/>
-          <a:chExt cx="0" cy="0"/>
-        </a:xfrm>
-      </p:grpSpPr>
-      <p:sp>
-        <p:nvSpPr>
-          <p:cNvPr id="2" name="Title 1">
-            <a:extLst>
-              <a:ext uri="{FF2B5EF4-FFF2-40B4-BE49-F238E27FC236}">
-                <a16:creationId xmlns:a16="http://schemas.microsoft.com/office/drawing/2014/main" id="{F7C42AB4-1D66-61B5-41F3-D1C814D6D79F}"/>
-              </a:ext>
-            </a:extLst>
-          </p:cNvPr>
-          <p:cNvSpPr>
-            <a:spLocks noGrp="1"/>
-          </p:cNvSpPr>
-          <p:nvPr>
-            <p:ph type="title"/>
-          </p:nvPr>
-        </p:nvSpPr>
-        <p:spPr/>
-        <p:txBody>
-          <a:bodyPr/>
-          <a:lstStyle/>
-          <a:p>
-            <a:r>
-              <a:rPr lang="en-US" noProof="0" dirty="0"/>
-              <a:t>M &amp; S</a:t>
-            </a:r>
-          </a:p>
-        </p:txBody>
-      </p:sp>
-      <p:sp>
-        <p:nvSpPr>
-          <p:cNvPr id="3" name="Content Placeholder 2">
-            <a:extLst>
-              <a:ext uri="{FF2B5EF4-FFF2-40B4-BE49-F238E27FC236}">
-                <a16:creationId xmlns:a16="http://schemas.microsoft.com/office/drawing/2014/main" id="{7FC71ADE-62E2-F5C5-38A6-5FA51E07F94E}"/>
-              </a:ext>
-            </a:extLst>
-          </p:cNvPr>
-          <p:cNvSpPr>
-            <a:spLocks noGrp="1"/>
-          </p:cNvSpPr>
-          <p:nvPr>
-            <p:ph idx="1"/>
-          </p:nvPr>
-        </p:nvSpPr>
-        <p:spPr/>
-        <p:txBody>
-          <a:bodyPr/>
-          <a:lstStyle/>
-          <a:p>
-            <a:r>
-              <a:rPr lang="en-US" noProof="0" dirty="0"/>
-              <a:t>Motivation: GPU &amp; Cluster computing</a:t>
-            </a:r>
-          </a:p>
-          <a:p>
-            <a:pPr lvl="1"/>
-            <a:r>
-              <a:rPr lang="en-US" noProof="0" dirty="0"/>
-              <a:t>Too many decisions, complex code (you don’t know) </a:t>
-            </a:r>
-            <a:r>
-              <a:rPr lang="en-US" noProof="0" dirty="0">
-                <a:sym typeface="Wingdings" panose="05000000000000000000" pitchFamily="2" charset="2"/>
-              </a:rPr>
-              <a:t> the problem, it is hard</a:t>
-            </a:r>
-            <a:endParaRPr lang="en-US" noProof="0" dirty="0"/>
-          </a:p>
-          <a:p>
-            <a:pPr lvl="2"/>
-            <a:r>
-              <a:rPr lang="en-US" noProof="0" dirty="0"/>
-              <a:t>layout options, traversal options, parallelization (Matice, </a:t>
-            </a:r>
-            <a:r>
-              <a:rPr lang="en-US" noProof="0" dirty="0" err="1"/>
-              <a:t>pruchod</a:t>
-            </a:r>
-            <a:r>
-              <a:rPr lang="en-US" noProof="0" dirty="0"/>
-              <a:t>; </a:t>
-            </a:r>
-            <a:r>
-              <a:rPr lang="en-US" noProof="0" dirty="0" err="1"/>
-              <a:t>nasobeni</a:t>
-            </a:r>
-            <a:r>
-              <a:rPr lang="en-US" noProof="0" dirty="0"/>
-              <a:t>?)</a:t>
-            </a:r>
-          </a:p>
-          <a:p>
-            <a:pPr lvl="2"/>
-            <a:r>
-              <a:rPr lang="en-US" noProof="0" dirty="0"/>
-              <a:t>parameters for the above (block sizes, …)</a:t>
-            </a:r>
-          </a:p>
-          <a:p>
-            <a:r>
-              <a:rPr lang="en-US" noProof="0" dirty="0"/>
-              <a:t>Our solution: Abstraction &amp; automatization </a:t>
-            </a:r>
-            <a:r>
-              <a:rPr lang="en-US" noProof="0" dirty="0">
-                <a:sym typeface="Wingdings" panose="05000000000000000000" pitchFamily="2" charset="2"/>
-              </a:rPr>
-              <a:t> we offer a solution</a:t>
-            </a:r>
-            <a:endParaRPr lang="en-US" noProof="0" dirty="0"/>
-          </a:p>
-          <a:p>
-            <a:pPr lvl="1"/>
-            <a:r>
-              <a:rPr lang="en-US" noProof="0" dirty="0"/>
-              <a:t>Separation of concerns, independent aspects</a:t>
-            </a:r>
-          </a:p>
-          <a:p>
-            <a:pPr lvl="1"/>
-            <a:r>
-              <a:rPr lang="en-US" noProof="0" dirty="0"/>
-              <a:t>Introducing layout-agnostic and traversal-agnostic algorithm design</a:t>
-            </a:r>
-          </a:p>
-          <a:p>
-            <a:pPr lvl="1"/>
-            <a:r>
-              <a:rPr lang="en-US" noProof="0" dirty="0"/>
-              <a:t>How the world is saved</a:t>
-            </a:r>
-          </a:p>
-        </p:txBody>
-      </p:sp>
-    </p:spTree>
-    <p:extLst>
-      <p:ext uri="{BB962C8B-B14F-4D97-AF65-F5344CB8AC3E}">
-        <p14:creationId xmlns:p14="http://schemas.microsoft.com/office/powerpoint/2010/main" val="1408920348"/>
-      </p:ext>
-    </p:extLst>
-  </p:cSld>
-  <p:clrMapOvr>
-    <a:masterClrMapping/>
-  </p:clrMapOvr>
-</p:sld>
-</file>
-
-<file path=ppt/slides/slide13.xml><?xml version="1.0" encoding="utf-8"?>
 <p:sld xmlns:a="http://schemas.openxmlformats.org/drawingml/2006/main" xmlns:r="http://schemas.openxmlformats.org/officeDocument/2006/relationships" xmlns:p="http://schemas.openxmlformats.org/presentationml/2006/main" show="0">
   <p:cSld>
     <p:spTree>
@@ -5059,7 +5388,7 @@
           <p:cNvPr id="2" name="Title 1">
             <a:extLst>
               <a:ext uri="{FF2B5EF4-FFF2-40B4-BE49-F238E27FC236}">
-                <a16:creationId xmlns:a16="http://schemas.microsoft.com/office/drawing/2014/main" id="{3844D8EA-565C-C8A0-F333-6EBD085AC735}"/>
+                <a16:creationId xmlns:a16="http://schemas.microsoft.com/office/drawing/2014/main" id="{45925ADF-B97D-3587-87BD-4182502B6656}"/>
               </a:ext>
             </a:extLst>
           </p:cNvPr>
@@ -5077,7 +5406,7 @@
           <a:p>
             <a:r>
               <a:rPr lang="en-US" noProof="0" dirty="0"/>
-              <a:t>Proposed abstractions</a:t>
+              <a:t>Finalizing the automation: Autotuning</a:t>
             </a:r>
           </a:p>
         </p:txBody>
@@ -5087,7 +5416,7 @@
           <p:cNvPr id="3" name="Content Placeholder 2">
             <a:extLst>
               <a:ext uri="{FF2B5EF4-FFF2-40B4-BE49-F238E27FC236}">
-                <a16:creationId xmlns:a16="http://schemas.microsoft.com/office/drawing/2014/main" id="{0B0BC514-DFF4-C541-7399-85275B2EB075}"/>
+                <a16:creationId xmlns:a16="http://schemas.microsoft.com/office/drawing/2014/main" id="{2673B8B7-D0E9-6CB9-1502-D2F6FEE0D62F}"/>
               </a:ext>
             </a:extLst>
           </p:cNvPr>
@@ -5105,64 +5434,30 @@
           <a:p>
             <a:r>
               <a:rPr lang="en-US" noProof="0" dirty="0"/>
-              <a:t>Layout abstractions</a:t>
-            </a:r>
-          </a:p>
-          <a:p>
+              <a:t>Abstraction for integrating with an </a:t>
+            </a:r>
+            <a:r>
+              <a:rPr lang="en-US" noProof="0" dirty="0" err="1"/>
+              <a:t>autotuner</a:t>
+            </a:r>
+            <a:endParaRPr lang="en-US" noProof="0" dirty="0"/>
+          </a:p>
+          <a:p>
+            <a:pPr lvl="1"/>
             <a:r>
               <a:rPr lang="en-US" noProof="0" dirty="0"/>
-              <a:t>Traversal abstractions</a:t>
-            </a:r>
-          </a:p>
-          <a:p>
-            <a:endParaRPr lang="en-US" noProof="0" dirty="0"/>
-          </a:p>
-          <a:p>
+              <a:t>Agnostic to the specific backend</a:t>
+            </a:r>
+          </a:p>
+          <a:p>
+            <a:pPr lvl="1"/>
             <a:r>
               <a:rPr lang="en-US" noProof="0" dirty="0"/>
-              <a:t>Extensions</a:t>
-            </a:r>
-          </a:p>
-          <a:p>
-            <a:pPr lvl="1"/>
-            <a:r>
-              <a:rPr lang="en-US" noProof="0" dirty="0"/>
-              <a:t>? Practical aspects; </a:t>
-            </a:r>
-            <a:r>
-              <a:rPr lang="en-US" noProof="0" dirty="0">
-                <a:sym typeface="Wingdings" panose="05000000000000000000" pitchFamily="2" charset="2"/>
-              </a:rPr>
-              <a:t> autotuning</a:t>
-            </a:r>
-            <a:endParaRPr lang="en-US" noProof="0" dirty="0"/>
-          </a:p>
-          <a:p>
-            <a:pPr lvl="1"/>
-            <a:r>
-              <a:rPr lang="en-US" noProof="0" dirty="0"/>
-              <a:t>Distributed computing</a:t>
-            </a:r>
-          </a:p>
-          <a:p>
-            <a:endParaRPr lang="en-US" noProof="0" dirty="0"/>
-          </a:p>
-          <a:p>
-            <a:r>
-              <a:rPr lang="en-US" noProof="0" dirty="0"/>
-              <a:t>Knowledge </a:t>
+              <a:t>PoC with </a:t>
             </a:r>
             <a:r>
               <a:rPr lang="en-US" noProof="0" dirty="0" err="1"/>
-              <a:t>neco</a:t>
-            </a:r>
-            <a:r>
-              <a:rPr lang="en-US" noProof="0" dirty="0"/>
-              <a:t> (</a:t>
-            </a:r>
-            <a:r>
-              <a:rPr lang="en-US" noProof="0" dirty="0" err="1"/>
-              <a:t>metaprogramovani</a:t>
+              <a:t>OpenTuner</a:t>
             </a:r>
             <a:r>
               <a:rPr lang="en-US" noProof="0" dirty="0"/>
@@ -5170,34 +5465,17 @@
             </a:r>
             <a:r>
               <a:rPr lang="en-US" noProof="0" dirty="0" err="1"/>
-              <a:t>stavebni</a:t>
+              <a:t>Optuna</a:t>
             </a:r>
             <a:r>
               <a:rPr lang="en-US" noProof="0" dirty="0"/>
-              <a:t> </a:t>
-            </a:r>
-            <a:r>
-              <a:rPr lang="en-US" noProof="0" dirty="0" err="1"/>
-              <a:t>bloky</a:t>
-            </a:r>
+              <a:t>, ATF</a:t>
+            </a:r>
+          </a:p>
+          <a:p>
             <a:r>
               <a:rPr lang="en-US" noProof="0" dirty="0"/>
-              <a:t>, </a:t>
-            </a:r>
-            <a:r>
-              <a:rPr lang="en-US" noProof="0" dirty="0" err="1"/>
-              <a:t>traversery</a:t>
-            </a:r>
-            <a:r>
-              <a:rPr lang="en-US" noProof="0" dirty="0"/>
-              <a:t>?)</a:t>
-            </a:r>
-          </a:p>
-          <a:p>
-            <a:pPr lvl="1"/>
-            <a:r>
-              <a:rPr lang="en-US" noProof="0" dirty="0"/>
-              <a:t>CA computations (</a:t>
+              <a:t>Autotuning enables automatic layout &amp; traversal transformations</a:t>
             </a:r>
           </a:p>
         </p:txBody>
@@ -5205,7 +5483,87 @@
     </p:spTree>
     <p:extLst>
       <p:ext uri="{BB962C8B-B14F-4D97-AF65-F5344CB8AC3E}">
-        <p14:creationId xmlns:p14="http://schemas.microsoft.com/office/powerpoint/2010/main" val="2195190930"/>
+        <p14:creationId xmlns:p14="http://schemas.microsoft.com/office/powerpoint/2010/main" val="2958406956"/>
+      </p:ext>
+    </p:extLst>
+  </p:cSld>
+  <p:clrMapOvr>
+    <a:masterClrMapping/>
+  </p:clrMapOvr>
+</p:sld>
+</file>
+
+<file path=ppt/slides/slide13.xml><?xml version="1.0" encoding="utf-8"?>
+<p:sld xmlns:a="http://schemas.openxmlformats.org/drawingml/2006/main" xmlns:r="http://schemas.openxmlformats.org/officeDocument/2006/relationships" xmlns:p="http://schemas.openxmlformats.org/presentationml/2006/main">
+  <p:cSld>
+    <p:spTree>
+      <p:nvGrpSpPr>
+        <p:cNvPr id="1" name=""/>
+        <p:cNvGrpSpPr/>
+        <p:nvPr/>
+      </p:nvGrpSpPr>
+      <p:grpSpPr>
+        <a:xfrm>
+          <a:off x="0" y="0"/>
+          <a:ext cx="0" cy="0"/>
+          <a:chOff x="0" y="0"/>
+          <a:chExt cx="0" cy="0"/>
+        </a:xfrm>
+      </p:grpSpPr>
+      <p:sp>
+        <p:nvSpPr>
+          <p:cNvPr id="2" name="Title 1">
+            <a:extLst>
+              <a:ext uri="{FF2B5EF4-FFF2-40B4-BE49-F238E27FC236}">
+                <a16:creationId xmlns:a16="http://schemas.microsoft.com/office/drawing/2014/main" id="{F7D2CDF9-1A11-349C-B79A-D01E2C327669}"/>
+              </a:ext>
+            </a:extLst>
+          </p:cNvPr>
+          <p:cNvSpPr>
+            <a:spLocks noGrp="1"/>
+          </p:cNvSpPr>
+          <p:nvPr>
+            <p:ph type="title"/>
+          </p:nvPr>
+        </p:nvSpPr>
+        <p:spPr/>
+        <p:txBody>
+          <a:bodyPr/>
+          <a:lstStyle/>
+          <a:p>
+            <a:endParaRPr lang="en-US"/>
+          </a:p>
+        </p:txBody>
+      </p:sp>
+      <p:sp>
+        <p:nvSpPr>
+          <p:cNvPr id="3" name="Content Placeholder 2">
+            <a:extLst>
+              <a:ext uri="{FF2B5EF4-FFF2-40B4-BE49-F238E27FC236}">
+                <a16:creationId xmlns:a16="http://schemas.microsoft.com/office/drawing/2014/main" id="{5E99F6D3-B032-B769-4CDC-FF1CDC691535}"/>
+              </a:ext>
+            </a:extLst>
+          </p:cNvPr>
+          <p:cNvSpPr>
+            <a:spLocks noGrp="1"/>
+          </p:cNvSpPr>
+          <p:nvPr>
+            <p:ph idx="1"/>
+          </p:nvPr>
+        </p:nvSpPr>
+        <p:spPr/>
+        <p:txBody>
+          <a:bodyPr/>
+          <a:lstStyle/>
+          <a:p>
+            <a:endParaRPr lang="en-US"/>
+          </a:p>
+        </p:txBody>
+      </p:sp>
+    </p:spTree>
+    <p:extLst>
+      <p:ext uri="{BB962C8B-B14F-4D97-AF65-F5344CB8AC3E}">
+        <p14:creationId xmlns:p14="http://schemas.microsoft.com/office/powerpoint/2010/main" val="189335898"/>
       </p:ext>
     </p:extLst>
   </p:cSld>
@@ -5237,7 +5595,7 @@
           <p:cNvPr id="2" name="Title 1">
             <a:extLst>
               <a:ext uri="{FF2B5EF4-FFF2-40B4-BE49-F238E27FC236}">
-                <a16:creationId xmlns:a16="http://schemas.microsoft.com/office/drawing/2014/main" id="{330F5328-A4E6-AC76-4627-FB90089BB6D8}"/>
+                <a16:creationId xmlns:a16="http://schemas.microsoft.com/office/drawing/2014/main" id="{19C5CD64-6486-850E-0A2A-48532AE26434}"/>
               </a:ext>
             </a:extLst>
           </p:cNvPr>
@@ -5254,8 +5612,8 @@
           <a:lstStyle/>
           <a:p>
             <a:r>
-              <a:rPr lang="en-US" noProof="0" dirty="0"/>
-              <a:t>Distributed computing</a:t>
+              <a:rPr lang="en-US" dirty="0"/>
+              <a:t>Results</a:t>
             </a:r>
           </a:p>
         </p:txBody>
@@ -5265,7 +5623,7 @@
           <p:cNvPr id="3" name="Content Placeholder 2">
             <a:extLst>
               <a:ext uri="{FF2B5EF4-FFF2-40B4-BE49-F238E27FC236}">
-                <a16:creationId xmlns:a16="http://schemas.microsoft.com/office/drawing/2014/main" id="{3CA0AA2D-BF91-A9FE-E55F-A715C4DD0CC6}"/>
+                <a16:creationId xmlns:a16="http://schemas.microsoft.com/office/drawing/2014/main" id="{3F49C5DC-F250-ABEE-8BA5-C59E6ABD627F}"/>
               </a:ext>
             </a:extLst>
           </p:cNvPr>
@@ -5281,58 +5639,14 @@
           <a:bodyPr/>
           <a:lstStyle/>
           <a:p>
-            <a:r>
-              <a:rPr lang="en-US" noProof="0" dirty="0"/>
-              <a:t>Many scientific computations rely on spreading the load to many nodes</a:t>
-            </a:r>
-          </a:p>
-          <a:p>
-            <a:r>
-              <a:rPr lang="en-US" noProof="0" dirty="0"/>
-              <a:t>Designing distributed computations further increases the challenge</a:t>
-            </a:r>
-          </a:p>
-          <a:p>
-            <a:r>
-              <a:rPr lang="en-US" noProof="0" dirty="0"/>
-              <a:t>Many communication patterns can be described using the same principles as layouts &amp; traversals</a:t>
-            </a:r>
-          </a:p>
-          <a:p>
-            <a:r>
-              <a:rPr lang="en-US" noProof="0" dirty="0"/>
-              <a:t>New abstraction: faster &amp; more flexible/convenient than </a:t>
-            </a:r>
-            <a:r>
-              <a:rPr lang="en-US" noProof="0" dirty="0" err="1"/>
-              <a:t>SotA</a:t>
-            </a:r>
-            <a:endParaRPr lang="en-US" noProof="0" dirty="0"/>
-          </a:p>
-          <a:p>
-            <a:pPr lvl="1"/>
-            <a:r>
-              <a:rPr lang="en-US" noProof="0" dirty="0"/>
-              <a:t>Automatically communicates the layout with the MPI backend</a:t>
-            </a:r>
-          </a:p>
-          <a:p>
-            <a:pPr lvl="1"/>
-            <a:r>
-              <a:rPr lang="en-US" dirty="0"/>
-              <a:t>Enables optimizing the layouts on each computation node seamlessly</a:t>
-            </a:r>
-            <a:endParaRPr lang="en-US" noProof="0" dirty="0"/>
-          </a:p>
-          <a:p>
-            <a:endParaRPr lang="en-US" noProof="0" dirty="0"/>
+            <a:endParaRPr lang="en-US"/>
           </a:p>
         </p:txBody>
       </p:sp>
     </p:spTree>
     <p:extLst>
       <p:ext uri="{BB962C8B-B14F-4D97-AF65-F5344CB8AC3E}">
-        <p14:creationId xmlns:p14="http://schemas.microsoft.com/office/powerpoint/2010/main" val="199449863"/>
+        <p14:creationId xmlns:p14="http://schemas.microsoft.com/office/powerpoint/2010/main" val="52204862"/>
       </p:ext>
     </p:extLst>
   </p:cSld>
@@ -5343,7 +5657,177 @@
 </file>
 
 <file path=ppt/slides/slide15.xml><?xml version="1.0" encoding="utf-8"?>
-<p:sld xmlns:a="http://schemas.openxmlformats.org/drawingml/2006/main" xmlns:r="http://schemas.openxmlformats.org/officeDocument/2006/relationships" xmlns:p="http://schemas.openxmlformats.org/presentationml/2006/main">
+<p:sld xmlns:a="http://schemas.openxmlformats.org/drawingml/2006/main" xmlns:r="http://schemas.openxmlformats.org/officeDocument/2006/relationships" xmlns:p="http://schemas.openxmlformats.org/presentationml/2006/main" show="0">
+  <p:cSld>
+    <p:spTree>
+      <p:nvGrpSpPr>
+        <p:cNvPr id="1" name="">
+          <a:extLst>
+            <a:ext uri="{FF2B5EF4-FFF2-40B4-BE49-F238E27FC236}">
+              <a16:creationId xmlns:a16="http://schemas.microsoft.com/office/drawing/2014/main" id="{EFDF7620-7AA1-EF30-FDC7-27AAC7FFE5EE}"/>
+            </a:ext>
+          </a:extLst>
+        </p:cNvPr>
+        <p:cNvGrpSpPr/>
+        <p:nvPr/>
+      </p:nvGrpSpPr>
+      <p:grpSpPr>
+        <a:xfrm>
+          <a:off x="0" y="0"/>
+          <a:ext cx="0" cy="0"/>
+          <a:chOff x="0" y="0"/>
+          <a:chExt cx="0" cy="0"/>
+        </a:xfrm>
+      </p:grpSpPr>
+      <p:sp>
+        <p:nvSpPr>
+          <p:cNvPr id="2" name="Title 1">
+            <a:extLst>
+              <a:ext uri="{FF2B5EF4-FFF2-40B4-BE49-F238E27FC236}">
+                <a16:creationId xmlns:a16="http://schemas.microsoft.com/office/drawing/2014/main" id="{F7C42AB4-1D66-61B5-41F3-D1C814D6D79F}"/>
+              </a:ext>
+            </a:extLst>
+          </p:cNvPr>
+          <p:cNvSpPr>
+            <a:spLocks noGrp="1"/>
+          </p:cNvSpPr>
+          <p:nvPr>
+            <p:ph type="title"/>
+          </p:nvPr>
+        </p:nvSpPr>
+        <p:spPr/>
+        <p:txBody>
+          <a:bodyPr/>
+          <a:lstStyle/>
+          <a:p>
+            <a:r>
+              <a:rPr lang="en-US" noProof="0" dirty="0"/>
+              <a:t>M &amp; S</a:t>
+            </a:r>
+          </a:p>
+        </p:txBody>
+      </p:sp>
+      <p:sp>
+        <p:nvSpPr>
+          <p:cNvPr id="3" name="Content Placeholder 2">
+            <a:extLst>
+              <a:ext uri="{FF2B5EF4-FFF2-40B4-BE49-F238E27FC236}">
+                <a16:creationId xmlns:a16="http://schemas.microsoft.com/office/drawing/2014/main" id="{7FC71ADE-62E2-F5C5-38A6-5FA51E07F94E}"/>
+              </a:ext>
+            </a:extLst>
+          </p:cNvPr>
+          <p:cNvSpPr>
+            <a:spLocks noGrp="1"/>
+          </p:cNvSpPr>
+          <p:nvPr>
+            <p:ph idx="1"/>
+          </p:nvPr>
+        </p:nvSpPr>
+        <p:spPr/>
+        <p:txBody>
+          <a:bodyPr/>
+          <a:lstStyle/>
+          <a:p>
+            <a:r>
+              <a:rPr lang="en-US" noProof="0" dirty="0"/>
+              <a:t>Motivation: GPU &amp; Cluster computing</a:t>
+            </a:r>
+          </a:p>
+          <a:p>
+            <a:pPr lvl="1"/>
+            <a:r>
+              <a:rPr lang="en-US" noProof="0" dirty="0"/>
+              <a:t>Too many decisions, complex code (you don’t know) </a:t>
+            </a:r>
+            <a:r>
+              <a:rPr lang="en-US" noProof="0" dirty="0">
+                <a:sym typeface="Wingdings" panose="05000000000000000000" pitchFamily="2" charset="2"/>
+              </a:rPr>
+              <a:t> the problem, it is hard</a:t>
+            </a:r>
+            <a:endParaRPr lang="en-US" noProof="0" dirty="0"/>
+          </a:p>
+          <a:p>
+            <a:pPr lvl="2"/>
+            <a:r>
+              <a:rPr lang="en-US" noProof="0" dirty="0"/>
+              <a:t>layout options, traversal options, parallelization (Matice, </a:t>
+            </a:r>
+            <a:r>
+              <a:rPr lang="en-US" noProof="0" dirty="0" err="1"/>
+              <a:t>pruchod</a:t>
+            </a:r>
+            <a:r>
+              <a:rPr lang="en-US" noProof="0" dirty="0"/>
+              <a:t>; </a:t>
+            </a:r>
+            <a:r>
+              <a:rPr lang="en-US" noProof="0" dirty="0" err="1"/>
+              <a:t>nasobeni</a:t>
+            </a:r>
+            <a:r>
+              <a:rPr lang="en-US" noProof="0" dirty="0"/>
+              <a:t>?)</a:t>
+            </a:r>
+          </a:p>
+          <a:p>
+            <a:pPr lvl="2"/>
+            <a:r>
+              <a:rPr lang="en-US" noProof="0" dirty="0"/>
+              <a:t>parameters for the above (block sizes, …)</a:t>
+            </a:r>
+          </a:p>
+          <a:p>
+            <a:r>
+              <a:rPr lang="en-US" noProof="0" dirty="0"/>
+              <a:t>Our solution: Abstraction &amp; automatization </a:t>
+            </a:r>
+            <a:r>
+              <a:rPr lang="en-US" noProof="0" dirty="0">
+                <a:sym typeface="Wingdings" panose="05000000000000000000" pitchFamily="2" charset="2"/>
+              </a:rPr>
+              <a:t> we offer a solution</a:t>
+            </a:r>
+            <a:endParaRPr lang="en-US" noProof="0" dirty="0"/>
+          </a:p>
+          <a:p>
+            <a:pPr lvl="1"/>
+            <a:r>
+              <a:rPr lang="en-US" noProof="0" dirty="0"/>
+              <a:t>Separation of concerns, independent aspects</a:t>
+            </a:r>
+          </a:p>
+          <a:p>
+            <a:pPr lvl="1"/>
+            <a:r>
+              <a:rPr lang="en-US" noProof="0" dirty="0"/>
+              <a:t>Introducing layout-agnostic and traversal-agnostic algorithm design</a:t>
+            </a:r>
+          </a:p>
+          <a:p>
+            <a:pPr lvl="1"/>
+            <a:r>
+              <a:rPr lang="en-US" noProof="0" dirty="0"/>
+              <a:t>How the world is saved</a:t>
+            </a:r>
+          </a:p>
+        </p:txBody>
+      </p:sp>
+    </p:spTree>
+    <p:extLst>
+      <p:ext uri="{BB962C8B-B14F-4D97-AF65-F5344CB8AC3E}">
+        <p14:creationId xmlns:p14="http://schemas.microsoft.com/office/powerpoint/2010/main" val="1408920348"/>
+      </p:ext>
+    </p:extLst>
+  </p:cSld>
+  <p:clrMapOvr>
+    <a:masterClrMapping/>
+  </p:clrMapOvr>
+</p:sld>
+</file>
+
+<file path=ppt/slides/slide16.xml><?xml version="1.0" encoding="utf-8"?>
+<p:sld xmlns:a="http://schemas.openxmlformats.org/drawingml/2006/main" xmlns:r="http://schemas.openxmlformats.org/officeDocument/2006/relationships" xmlns:p="http://schemas.openxmlformats.org/presentationml/2006/main" show="0">
   <p:cSld>
     <p:spTree>
       <p:nvGrpSpPr>
@@ -5364,7 +5848,7 @@
           <p:cNvPr id="2" name="Title 1">
             <a:extLst>
               <a:ext uri="{FF2B5EF4-FFF2-40B4-BE49-F238E27FC236}">
-                <a16:creationId xmlns:a16="http://schemas.microsoft.com/office/drawing/2014/main" id="{C4A9E796-E8D3-B4A5-DE7B-322F63386F74}"/>
+                <a16:creationId xmlns:a16="http://schemas.microsoft.com/office/drawing/2014/main" id="{3844D8EA-565C-C8A0-F333-6EBD085AC735}"/>
               </a:ext>
             </a:extLst>
           </p:cNvPr>
@@ -5381,8 +5865,8 @@
           <a:lstStyle/>
           <a:p>
             <a:r>
-              <a:rPr lang="en-US" dirty="0"/>
-              <a:t>Results</a:t>
+              <a:rPr lang="en-US" noProof="0" dirty="0"/>
+              <a:t>Proposed abstractions</a:t>
             </a:r>
           </a:p>
         </p:txBody>
@@ -5392,7 +5876,7 @@
           <p:cNvPr id="3" name="Content Placeholder 2">
             <a:extLst>
               <a:ext uri="{FF2B5EF4-FFF2-40B4-BE49-F238E27FC236}">
-                <a16:creationId xmlns:a16="http://schemas.microsoft.com/office/drawing/2014/main" id="{DBE9D86D-018E-4C50-0EFA-D7C587660587}"/>
+                <a16:creationId xmlns:a16="http://schemas.microsoft.com/office/drawing/2014/main" id="{0B0BC514-DFF4-C541-7399-85275B2EB075}"/>
               </a:ext>
             </a:extLst>
           </p:cNvPr>
@@ -5408,142 +5892,109 @@
           <a:bodyPr/>
           <a:lstStyle/>
           <a:p>
-            <a:endParaRPr lang="en-US"/>
+            <a:r>
+              <a:rPr lang="en-US" noProof="0" dirty="0"/>
+              <a:t>Layout abstractions</a:t>
+            </a:r>
+          </a:p>
+          <a:p>
+            <a:r>
+              <a:rPr lang="en-US" noProof="0" dirty="0"/>
+              <a:t>Traversal abstractions</a:t>
+            </a:r>
+          </a:p>
+          <a:p>
+            <a:endParaRPr lang="en-US" noProof="0" dirty="0"/>
+          </a:p>
+          <a:p>
+            <a:r>
+              <a:rPr lang="en-US" noProof="0" dirty="0"/>
+              <a:t>Extensions</a:t>
+            </a:r>
+          </a:p>
+          <a:p>
+            <a:pPr lvl="1"/>
+            <a:r>
+              <a:rPr lang="en-US" noProof="0" dirty="0"/>
+              <a:t>? Practical aspects; </a:t>
+            </a:r>
+            <a:r>
+              <a:rPr lang="en-US" noProof="0" dirty="0">
+                <a:sym typeface="Wingdings" panose="05000000000000000000" pitchFamily="2" charset="2"/>
+              </a:rPr>
+              <a:t> autotuning</a:t>
+            </a:r>
+            <a:endParaRPr lang="en-US" noProof="0" dirty="0"/>
+          </a:p>
+          <a:p>
+            <a:pPr lvl="1"/>
+            <a:r>
+              <a:rPr lang="en-US" noProof="0" dirty="0"/>
+              <a:t>Distributed computing</a:t>
+            </a:r>
+          </a:p>
+          <a:p>
+            <a:endParaRPr lang="en-US" noProof="0" dirty="0"/>
+          </a:p>
+          <a:p>
+            <a:r>
+              <a:rPr lang="en-US" noProof="0" dirty="0"/>
+              <a:t>Knowledge </a:t>
+            </a:r>
+            <a:r>
+              <a:rPr lang="en-US" noProof="0" dirty="0" err="1"/>
+              <a:t>neco</a:t>
+            </a:r>
+            <a:r>
+              <a:rPr lang="en-US" noProof="0" dirty="0"/>
+              <a:t> (</a:t>
+            </a:r>
+            <a:r>
+              <a:rPr lang="en-US" noProof="0" dirty="0" err="1"/>
+              <a:t>metaprogramovani</a:t>
+            </a:r>
+            <a:r>
+              <a:rPr lang="en-US" noProof="0" dirty="0"/>
+              <a:t>, </a:t>
+            </a:r>
+            <a:r>
+              <a:rPr lang="en-US" noProof="0" dirty="0" err="1"/>
+              <a:t>stavebni</a:t>
+            </a:r>
+            <a:r>
+              <a:rPr lang="en-US" noProof="0" dirty="0"/>
+              <a:t> </a:t>
+            </a:r>
+            <a:r>
+              <a:rPr lang="en-US" noProof="0" dirty="0" err="1"/>
+              <a:t>bloky</a:t>
+            </a:r>
+            <a:r>
+              <a:rPr lang="en-US" noProof="0" dirty="0"/>
+              <a:t>, </a:t>
+            </a:r>
+            <a:r>
+              <a:rPr lang="en-US" noProof="0" dirty="0" err="1"/>
+              <a:t>traversery</a:t>
+            </a:r>
+            <a:r>
+              <a:rPr lang="en-US" noProof="0" dirty="0"/>
+              <a:t>?)</a:t>
+            </a:r>
+          </a:p>
+          <a:p>
+            <a:pPr lvl="1"/>
+            <a:r>
+              <a:rPr lang="en-US" noProof="0" dirty="0"/>
+              <a:t>CA computations (</a:t>
+            </a:r>
           </a:p>
         </p:txBody>
       </p:sp>
     </p:spTree>
     <p:extLst>
       <p:ext uri="{BB962C8B-B14F-4D97-AF65-F5344CB8AC3E}">
-        <p14:creationId xmlns:p14="http://schemas.microsoft.com/office/powerpoint/2010/main" val="202421867"/>
-      </p:ext>
-    </p:extLst>
-  </p:cSld>
-  <p:clrMapOvr>
-    <a:masterClrMapping/>
-  </p:clrMapOvr>
-</p:sld>
-</file>
-
-<file path=ppt/slides/slide16.xml><?xml version="1.0" encoding="utf-8"?>
-<p:sld xmlns:a="http://schemas.openxmlformats.org/drawingml/2006/main" xmlns:r="http://schemas.openxmlformats.org/officeDocument/2006/relationships" xmlns:p="http://schemas.openxmlformats.org/presentationml/2006/main">
-  <p:cSld>
-    <p:spTree>
-      <p:nvGrpSpPr>
-        <p:cNvPr id="1" name=""/>
-        <p:cNvGrpSpPr/>
-        <p:nvPr/>
-      </p:nvGrpSpPr>
-      <p:grpSpPr>
-        <a:xfrm>
-          <a:off x="0" y="0"/>
-          <a:ext cx="0" cy="0"/>
-          <a:chOff x="0" y="0"/>
-          <a:chExt cx="0" cy="0"/>
-        </a:xfrm>
-      </p:grpSpPr>
-      <p:sp>
-        <p:nvSpPr>
-          <p:cNvPr id="2" name="Title 1">
-            <a:extLst>
-              <a:ext uri="{FF2B5EF4-FFF2-40B4-BE49-F238E27FC236}">
-                <a16:creationId xmlns:a16="http://schemas.microsoft.com/office/drawing/2014/main" id="{FDB924F1-4B00-84E0-3832-4B100046AF51}"/>
-              </a:ext>
-            </a:extLst>
-          </p:cNvPr>
-          <p:cNvSpPr>
-            <a:spLocks noGrp="1"/>
-          </p:cNvSpPr>
-          <p:nvPr>
-            <p:ph type="title"/>
-          </p:nvPr>
-        </p:nvSpPr>
-        <p:spPr/>
-        <p:txBody>
-          <a:bodyPr/>
-          <a:lstStyle/>
-          <a:p>
-            <a:r>
-              <a:rPr lang="en-US" noProof="0" dirty="0"/>
-              <a:t>Cellular automata</a:t>
-            </a:r>
-          </a:p>
-        </p:txBody>
-      </p:sp>
-      <p:sp>
-        <p:nvSpPr>
-          <p:cNvPr id="3" name="Content Placeholder 2">
-            <a:extLst>
-              <a:ext uri="{FF2B5EF4-FFF2-40B4-BE49-F238E27FC236}">
-                <a16:creationId xmlns:a16="http://schemas.microsoft.com/office/drawing/2014/main" id="{F22AF8FD-4C12-AFD8-ED43-50529A45C04D}"/>
-              </a:ext>
-            </a:extLst>
-          </p:cNvPr>
-          <p:cNvSpPr>
-            <a:spLocks noGrp="1"/>
-          </p:cNvSpPr>
-          <p:nvPr>
-            <p:ph idx="1"/>
-          </p:nvPr>
-        </p:nvSpPr>
-        <p:spPr/>
-        <p:txBody>
-          <a:bodyPr/>
-          <a:lstStyle/>
-          <a:p>
-            <a:r>
-              <a:rPr lang="en-US" noProof="0" dirty="0"/>
-              <a:t>We noticed that CA commonly benefit from </a:t>
-            </a:r>
-            <a:r>
-              <a:rPr lang="en-US" noProof="0" dirty="0" err="1"/>
-              <a:t>templatable</a:t>
-            </a:r>
-            <a:r>
-              <a:rPr lang="en-US" noProof="0" dirty="0"/>
-              <a:t> design decisions</a:t>
-            </a:r>
-          </a:p>
-          <a:p>
-            <a:pPr lvl="1"/>
-            <a:r>
-              <a:rPr lang="en-US" dirty="0"/>
-              <a:t>Layout &amp; encoding options (! bit-packing)</a:t>
-            </a:r>
-          </a:p>
-          <a:p>
-            <a:pPr lvl="1"/>
-            <a:r>
-              <a:rPr lang="en-US" dirty="0"/>
-              <a:t>Evaluation options (! bit-wise vectorization)</a:t>
-            </a:r>
-          </a:p>
-          <a:p>
-            <a:pPr lvl="1"/>
-            <a:r>
-              <a:rPr lang="en-US" noProof="0" dirty="0"/>
-              <a:t>Traversal options (incl. parallelism)</a:t>
-            </a:r>
-          </a:p>
-          <a:p>
-            <a:r>
-              <a:rPr lang="en-US" noProof="0" dirty="0"/>
-              <a:t>Agnostic design of CA computation rules</a:t>
-            </a:r>
-          </a:p>
-          <a:p>
-            <a:r>
-              <a:rPr lang="en-US" dirty="0"/>
-              <a:t>Faster development, experimentation (optimization)</a:t>
-            </a:r>
-            <a:endParaRPr lang="en-US" noProof="0" dirty="0"/>
-          </a:p>
-        </p:txBody>
-      </p:sp>
-    </p:spTree>
-    <p:extLst>
-      <p:ext uri="{BB962C8B-B14F-4D97-AF65-F5344CB8AC3E}">
-        <p14:creationId xmlns:p14="http://schemas.microsoft.com/office/powerpoint/2010/main" val="3466036462"/>
+        <p14:creationId xmlns:p14="http://schemas.microsoft.com/office/powerpoint/2010/main" val="2195190930"/>
       </p:ext>
     </p:extLst>
   </p:cSld>
@@ -5575,7 +6026,7 @@
           <p:cNvPr id="2" name="Title 1">
             <a:extLst>
               <a:ext uri="{FF2B5EF4-FFF2-40B4-BE49-F238E27FC236}">
-                <a16:creationId xmlns:a16="http://schemas.microsoft.com/office/drawing/2014/main" id="{04F59CE6-2253-EE24-67C6-8EB494EB84BC}"/>
+                <a16:creationId xmlns:a16="http://schemas.microsoft.com/office/drawing/2014/main" id="{330F5328-A4E6-AC76-4627-FB90089BB6D8}"/>
               </a:ext>
             </a:extLst>
           </p:cNvPr>
@@ -5592,8 +6043,8 @@
           <a:lstStyle/>
           <a:p>
             <a:r>
-              <a:rPr lang="en-US" dirty="0"/>
-              <a:t>Results</a:t>
+              <a:rPr lang="en-US" noProof="0" dirty="0"/>
+              <a:t>Distributed computing</a:t>
             </a:r>
           </a:p>
         </p:txBody>
@@ -5603,7 +6054,7 @@
           <p:cNvPr id="3" name="Content Placeholder 2">
             <a:extLst>
               <a:ext uri="{FF2B5EF4-FFF2-40B4-BE49-F238E27FC236}">
-                <a16:creationId xmlns:a16="http://schemas.microsoft.com/office/drawing/2014/main" id="{F1E705A3-4FDF-AB1A-A2C5-33B72A015964}"/>
+                <a16:creationId xmlns:a16="http://schemas.microsoft.com/office/drawing/2014/main" id="{3CA0AA2D-BF91-A9FE-E55F-A715C4DD0CC6}"/>
               </a:ext>
             </a:extLst>
           </p:cNvPr>
@@ -5619,14 +6070,58 @@
           <a:bodyPr/>
           <a:lstStyle/>
           <a:p>
-            <a:endParaRPr lang="en-US"/>
+            <a:r>
+              <a:rPr lang="en-US" noProof="0" dirty="0"/>
+              <a:t>Many scientific computations rely on spreading the load to many nodes</a:t>
+            </a:r>
+          </a:p>
+          <a:p>
+            <a:r>
+              <a:rPr lang="en-US" noProof="0" dirty="0"/>
+              <a:t>Designing distributed computations further increases the challenge</a:t>
+            </a:r>
+          </a:p>
+          <a:p>
+            <a:r>
+              <a:rPr lang="en-US" noProof="0" dirty="0"/>
+              <a:t>Many communication patterns can be described using the same principles as layouts &amp; traversals</a:t>
+            </a:r>
+          </a:p>
+          <a:p>
+            <a:r>
+              <a:rPr lang="en-US" noProof="0" dirty="0"/>
+              <a:t>New abstraction: faster &amp; more flexible/convenient than </a:t>
+            </a:r>
+            <a:r>
+              <a:rPr lang="en-US" noProof="0" dirty="0" err="1"/>
+              <a:t>SotA</a:t>
+            </a:r>
+            <a:endParaRPr lang="en-US" noProof="0" dirty="0"/>
+          </a:p>
+          <a:p>
+            <a:pPr lvl="1"/>
+            <a:r>
+              <a:rPr lang="en-US" noProof="0" dirty="0"/>
+              <a:t>Automatically communicates the layout with the MPI backend</a:t>
+            </a:r>
+          </a:p>
+          <a:p>
+            <a:pPr lvl="1"/>
+            <a:r>
+              <a:rPr lang="en-US" dirty="0"/>
+              <a:t>Enables optimizing the layouts on each computation node seamlessly</a:t>
+            </a:r>
+            <a:endParaRPr lang="en-US" noProof="0" dirty="0"/>
+          </a:p>
+          <a:p>
+            <a:endParaRPr lang="en-US" noProof="0" dirty="0"/>
           </a:p>
         </p:txBody>
       </p:sp>
     </p:spTree>
     <p:extLst>
       <p:ext uri="{BB962C8B-B14F-4D97-AF65-F5344CB8AC3E}">
-        <p14:creationId xmlns:p14="http://schemas.microsoft.com/office/powerpoint/2010/main" val="1310412197"/>
+        <p14:creationId xmlns:p14="http://schemas.microsoft.com/office/powerpoint/2010/main" val="199449863"/>
       </p:ext>
     </p:extLst>
   </p:cSld>
@@ -5637,7 +6132,7 @@
 </file>
 
 <file path=ppt/slides/slide18.xml><?xml version="1.0" encoding="utf-8"?>
-<p:sld xmlns:a="http://schemas.openxmlformats.org/drawingml/2006/main" xmlns:r="http://schemas.openxmlformats.org/officeDocument/2006/relationships" xmlns:p="http://schemas.openxmlformats.org/presentationml/2006/main" show="0">
+<p:sld xmlns:a="http://schemas.openxmlformats.org/drawingml/2006/main" xmlns:r="http://schemas.openxmlformats.org/officeDocument/2006/relationships" xmlns:p="http://schemas.openxmlformats.org/presentationml/2006/main">
   <p:cSld>
     <p:spTree>
       <p:nvGrpSpPr>
@@ -5658,7 +6153,7 @@
           <p:cNvPr id="2" name="Title 1">
             <a:extLst>
               <a:ext uri="{FF2B5EF4-FFF2-40B4-BE49-F238E27FC236}">
-                <a16:creationId xmlns:a16="http://schemas.microsoft.com/office/drawing/2014/main" id="{1CFD8E19-FCBD-3C1F-9804-55F9EF315364}"/>
+                <a16:creationId xmlns:a16="http://schemas.microsoft.com/office/drawing/2014/main" id="{C4A9E796-E8D3-B4A5-DE7B-322F63386F74}"/>
               </a:ext>
             </a:extLst>
           </p:cNvPr>
@@ -5675,8 +6170,8 @@
           <a:lstStyle/>
           <a:p>
             <a:r>
-              <a:rPr lang="en-US" noProof="0" dirty="0"/>
-              <a:t>LLMs in algorithm design</a:t>
+              <a:rPr lang="en-US" dirty="0"/>
+              <a:t>Results</a:t>
             </a:r>
           </a:p>
         </p:txBody>
@@ -5686,7 +6181,7 @@
           <p:cNvPr id="3" name="Content Placeholder 2">
             <a:extLst>
               <a:ext uri="{FF2B5EF4-FFF2-40B4-BE49-F238E27FC236}">
-                <a16:creationId xmlns:a16="http://schemas.microsoft.com/office/drawing/2014/main" id="{64F2D09B-2F00-3457-9D41-D2EAB2BD84E5}"/>
+                <a16:creationId xmlns:a16="http://schemas.microsoft.com/office/drawing/2014/main" id="{DBE9D86D-018E-4C50-0EFA-D7C587660587}"/>
               </a:ext>
             </a:extLst>
           </p:cNvPr>
@@ -5702,23 +6197,14 @@
           <a:bodyPr/>
           <a:lstStyle/>
           <a:p>
-            <a:r>
-              <a:rPr lang="en-US" noProof="0" dirty="0"/>
-              <a:t>Tutoring LLMs for CUDA optimization</a:t>
-            </a:r>
-          </a:p>
-          <a:p>
-            <a:r>
-              <a:rPr lang="en-US" noProof="0" dirty="0"/>
-              <a:t>LLMs and abstractions</a:t>
-            </a:r>
+            <a:endParaRPr lang="en-US"/>
           </a:p>
         </p:txBody>
       </p:sp>
     </p:spTree>
     <p:extLst>
       <p:ext uri="{BB962C8B-B14F-4D97-AF65-F5344CB8AC3E}">
-        <p14:creationId xmlns:p14="http://schemas.microsoft.com/office/powerpoint/2010/main" val="645810162"/>
+        <p14:creationId xmlns:p14="http://schemas.microsoft.com/office/powerpoint/2010/main" val="202421867"/>
       </p:ext>
     </p:extLst>
   </p:cSld>
@@ -5750,7 +6236,7 @@
           <p:cNvPr id="2" name="Title 1">
             <a:extLst>
               <a:ext uri="{FF2B5EF4-FFF2-40B4-BE49-F238E27FC236}">
-                <a16:creationId xmlns:a16="http://schemas.microsoft.com/office/drawing/2014/main" id="{A2284D79-2E52-80F7-0541-30A0EEC45CA4}"/>
+                <a16:creationId xmlns:a16="http://schemas.microsoft.com/office/drawing/2014/main" id="{FDB924F1-4B00-84E0-3832-4B100046AF51}"/>
               </a:ext>
             </a:extLst>
           </p:cNvPr>
@@ -5768,7 +6254,7 @@
           <a:p>
             <a:r>
               <a:rPr lang="en-US" noProof="0" dirty="0"/>
-              <a:t>Tutoring LLMs</a:t>
+              <a:t>Cellular automata</a:t>
             </a:r>
           </a:p>
         </p:txBody>
@@ -5778,7 +6264,7 @@
           <p:cNvPr id="3" name="Content Placeholder 2">
             <a:extLst>
               <a:ext uri="{FF2B5EF4-FFF2-40B4-BE49-F238E27FC236}">
-                <a16:creationId xmlns:a16="http://schemas.microsoft.com/office/drawing/2014/main" id="{5EC62719-077B-686B-2F9B-914035C8221C}"/>
+                <a16:creationId xmlns:a16="http://schemas.microsoft.com/office/drawing/2014/main" id="{F22AF8FD-4C12-AFD8-ED43-50529A45C04D}"/>
               </a:ext>
             </a:extLst>
           </p:cNvPr>
@@ -5791,75 +6277,62 @@
         </p:nvSpPr>
         <p:spPr/>
         <p:txBody>
-          <a:bodyPr>
-            <a:normAutofit fontScale="92500" lnSpcReduction="20000"/>
-          </a:bodyPr>
+          <a:bodyPr/>
           <a:lstStyle/>
           <a:p>
             <a:r>
               <a:rPr lang="en-US" noProof="0" dirty="0"/>
-              <a:t>The goal was always better automation/generalization of design and tuning</a:t>
-            </a:r>
-          </a:p>
-          <a:p>
+              <a:t>We noticed that CA commonly benefit from </a:t>
+            </a:r>
+            <a:r>
+              <a:rPr lang="en-US" noProof="0" dirty="0" err="1"/>
+              <a:t>templatable</a:t>
+            </a:r>
+            <a:r>
+              <a:rPr lang="en-US" noProof="0" dirty="0"/>
+              <a:t> design decisions</a:t>
+            </a:r>
+          </a:p>
+          <a:p>
+            <a:pPr lvl="1"/>
             <a:r>
               <a:rPr lang="en-US" dirty="0"/>
-              <a:t>LLMs started to be surprisingly competent code generators</a:t>
+              <a:t>Layout &amp; encoding options (! bit-packing)</a:t>
             </a:r>
           </a:p>
           <a:p>
             <a:pPr lvl="1"/>
             <a:r>
+              <a:rPr lang="en-US" dirty="0"/>
+              <a:t>Evaluation options (! bit-wise vectorization)</a:t>
+            </a:r>
+          </a:p>
+          <a:p>
+            <a:pPr lvl="1"/>
+            <a:r>
               <a:rPr lang="en-US" noProof="0" dirty="0"/>
-              <a:t>Not reliable, but extremely flexible, generalizable, simple to use (e.g., understanding natural language)</a:t>
+              <a:t>Traversal options (incl. parallelism)</a:t>
+            </a:r>
+          </a:p>
+          <a:p>
+            <a:r>
+              <a:rPr lang="en-US" noProof="0" dirty="0"/>
+              <a:t>Agnostic design of CA computation rules</a:t>
             </a:r>
           </a:p>
           <a:p>
             <a:r>
               <a:rPr lang="en-US" dirty="0"/>
-              <a:t>Core assumption for the study: LLMs are not very good in high-</a:t>
-            </a:r>
-            <a:r>
-              <a:rPr lang="en-US" dirty="0" err="1"/>
-              <a:t>lvl</a:t>
-            </a:r>
-            <a:r>
-              <a:rPr lang="en-US" dirty="0"/>
-              <a:t> decisions</a:t>
-            </a:r>
-          </a:p>
-          <a:p>
-            <a:r>
-              <a:rPr lang="en-US" noProof="0" dirty="0"/>
-              <a:t>Tutoring = improving quality of generated code by design suggestions/directions</a:t>
-            </a:r>
-          </a:p>
-          <a:p>
-            <a:r>
-              <a:rPr lang="en-US" dirty="0"/>
-              <a:t>Key findings:</a:t>
-            </a:r>
-          </a:p>
-          <a:p>
-            <a:pPr lvl="1"/>
-            <a:r>
-              <a:rPr lang="en-US" dirty="0"/>
-              <a:t>Intricate relationship between algorithm complexity and this effect on an LLM</a:t>
-            </a:r>
-          </a:p>
-          <a:p>
-            <a:pPr lvl="1"/>
-            <a:r>
-              <a:rPr lang="en-US" noProof="0" dirty="0"/>
-              <a:t>Improvement over time: the effect changes with each new model</a:t>
-            </a:r>
+              <a:t>Faster development, experimentation (optimization)</a:t>
+            </a:r>
+            <a:endParaRPr lang="en-US" noProof="0" dirty="0"/>
           </a:p>
         </p:txBody>
       </p:sp>
     </p:spTree>
     <p:extLst>
       <p:ext uri="{BB962C8B-B14F-4D97-AF65-F5344CB8AC3E}">
-        <p14:creationId xmlns:p14="http://schemas.microsoft.com/office/powerpoint/2010/main" val="2667122292"/>
+        <p14:creationId xmlns:p14="http://schemas.microsoft.com/office/powerpoint/2010/main" val="3466036462"/>
       </p:ext>
     </p:extLst>
   </p:cSld>
@@ -6203,7 +6676,7 @@
           <p:cNvPr id="2" name="Title 1">
             <a:extLst>
               <a:ext uri="{FF2B5EF4-FFF2-40B4-BE49-F238E27FC236}">
-                <a16:creationId xmlns:a16="http://schemas.microsoft.com/office/drawing/2014/main" id="{F35C7E3E-09C8-2B79-8EE7-B8D1557191BE}"/>
+                <a16:creationId xmlns:a16="http://schemas.microsoft.com/office/drawing/2014/main" id="{04F59CE6-2253-EE24-67C6-8EB494EB84BC}"/>
               </a:ext>
             </a:extLst>
           </p:cNvPr>
@@ -6220,8 +6693,8 @@
           <a:lstStyle/>
           <a:p>
             <a:r>
-              <a:rPr lang="en-US" noProof="0" dirty="0"/>
-              <a:t>LLMs and abstractions</a:t>
+              <a:rPr lang="en-US" dirty="0"/>
+              <a:t>Results</a:t>
             </a:r>
           </a:p>
         </p:txBody>
@@ -6231,7 +6704,7 @@
           <p:cNvPr id="3" name="Content Placeholder 2">
             <a:extLst>
               <a:ext uri="{FF2B5EF4-FFF2-40B4-BE49-F238E27FC236}">
-                <a16:creationId xmlns:a16="http://schemas.microsoft.com/office/drawing/2014/main" id="{DAF33F66-B59C-C15E-3BD1-85602E9A1F9E}"/>
+                <a16:creationId xmlns:a16="http://schemas.microsoft.com/office/drawing/2014/main" id="{F1E705A3-4FDF-AB1A-A2C5-33B72A015964}"/>
               </a:ext>
             </a:extLst>
           </p:cNvPr>
@@ -6247,41 +6720,14 @@
           <a:bodyPr/>
           <a:lstStyle/>
           <a:p>
-            <a:r>
-              <a:rPr lang="en-US" noProof="0" dirty="0"/>
-              <a:t>Key question: Layout- and traversal-agnostic abstractions help humans; do they help LLMs as well?</a:t>
-            </a:r>
-          </a:p>
-          <a:p>
-            <a:r>
-              <a:rPr lang="en-US" dirty="0"/>
-              <a:t>Key findings:</a:t>
-            </a:r>
-          </a:p>
-          <a:p>
-            <a:pPr lvl="1"/>
-            <a:r>
-              <a:rPr lang="en-US" noProof="0" dirty="0"/>
-              <a:t>Prompt specificity improves results much more</a:t>
-            </a:r>
-          </a:p>
-          <a:p>
-            <a:pPr lvl="1"/>
-            <a:r>
-              <a:rPr lang="en-US" dirty="0"/>
-              <a:t>LLMs more competent in pure C/C++</a:t>
-            </a:r>
-          </a:p>
-          <a:p>
-            <a:pPr lvl="1"/>
-            <a:endParaRPr lang="en-US" noProof="0" dirty="0"/>
+            <a:endParaRPr lang="en-US"/>
           </a:p>
         </p:txBody>
       </p:sp>
     </p:spTree>
     <p:extLst>
       <p:ext uri="{BB962C8B-B14F-4D97-AF65-F5344CB8AC3E}">
-        <p14:creationId xmlns:p14="http://schemas.microsoft.com/office/powerpoint/2010/main" val="965653160"/>
+        <p14:creationId xmlns:p14="http://schemas.microsoft.com/office/powerpoint/2010/main" val="1310412197"/>
       </p:ext>
     </p:extLst>
   </p:cSld>
@@ -6313,7 +6759,7 @@
           <p:cNvPr id="2" name="Title 1">
             <a:extLst>
               <a:ext uri="{FF2B5EF4-FFF2-40B4-BE49-F238E27FC236}">
-                <a16:creationId xmlns:a16="http://schemas.microsoft.com/office/drawing/2014/main" id="{928BD501-0287-7E9D-6C52-A86B98F9EB52}"/>
+                <a16:creationId xmlns:a16="http://schemas.microsoft.com/office/drawing/2014/main" id="{1CFD8E19-FCBD-3C1F-9804-55F9EF315364}"/>
               </a:ext>
             </a:extLst>
           </p:cNvPr>
@@ -6330,10 +6776,9 @@
           <a:lstStyle/>
           <a:p>
             <a:r>
-              <a:rPr lang="en-US" noProof="0" dirty="0" err="1"/>
-              <a:t>Zahodit</a:t>
-            </a:r>
-            <a:endParaRPr lang="en-US" noProof="0" dirty="0"/>
+              <a:rPr lang="en-US" noProof="0" dirty="0"/>
+              <a:t>LLMs in algorithm design</a:t>
+            </a:r>
           </a:p>
         </p:txBody>
       </p:sp>
@@ -6342,7 +6787,7 @@
           <p:cNvPr id="3" name="Content Placeholder 2">
             <a:extLst>
               <a:ext uri="{FF2B5EF4-FFF2-40B4-BE49-F238E27FC236}">
-                <a16:creationId xmlns:a16="http://schemas.microsoft.com/office/drawing/2014/main" id="{369E5D67-EA03-A5CA-2D82-199F178CE89C}"/>
+                <a16:creationId xmlns:a16="http://schemas.microsoft.com/office/drawing/2014/main" id="{64F2D09B-2F00-3457-9D41-D2EAB2BD84E5}"/>
               </a:ext>
             </a:extLst>
           </p:cNvPr>
@@ -6359,24 +6804,22 @@
           <a:lstStyle/>
           <a:p>
             <a:r>
-              <a:rPr lang="en-US" noProof="0" dirty="0" err="1"/>
-              <a:t>Noarr</a:t>
-            </a:r>
-            <a:endParaRPr lang="en-US" noProof="0" dirty="0"/>
-          </a:p>
-          <a:p>
-            <a:r>
-              <a:rPr lang="en-US" noProof="0" dirty="0" err="1"/>
-              <a:t>Cellato</a:t>
-            </a:r>
-            <a:endParaRPr lang="en-US" noProof="0" dirty="0"/>
+              <a:rPr lang="en-US" noProof="0" dirty="0"/>
+              <a:t>Tutoring LLMs for CUDA optimization</a:t>
+            </a:r>
+          </a:p>
+          <a:p>
+            <a:r>
+              <a:rPr lang="en-US" noProof="0" dirty="0"/>
+              <a:t>LLMs and abstractions</a:t>
+            </a:r>
           </a:p>
         </p:txBody>
       </p:sp>
     </p:spTree>
     <p:extLst>
       <p:ext uri="{BB962C8B-B14F-4D97-AF65-F5344CB8AC3E}">
-        <p14:creationId xmlns:p14="http://schemas.microsoft.com/office/powerpoint/2010/main" val="4085122203"/>
+        <p14:creationId xmlns:p14="http://schemas.microsoft.com/office/powerpoint/2010/main" val="645810162"/>
       </p:ext>
     </p:extLst>
   </p:cSld>
@@ -6408,7 +6851,7 @@
           <p:cNvPr id="2" name="Title 1">
             <a:extLst>
               <a:ext uri="{FF2B5EF4-FFF2-40B4-BE49-F238E27FC236}">
-                <a16:creationId xmlns:a16="http://schemas.microsoft.com/office/drawing/2014/main" id="{6447B745-9B50-DD90-5161-BD2A06CEA44B}"/>
+                <a16:creationId xmlns:a16="http://schemas.microsoft.com/office/drawing/2014/main" id="{A2284D79-2E52-80F7-0541-30A0EEC45CA4}"/>
               </a:ext>
             </a:extLst>
           </p:cNvPr>
@@ -6426,571 +6869,98 @@
           <a:p>
             <a:r>
               <a:rPr lang="en-US" noProof="0" dirty="0"/>
-              <a:t>Contribution map</a:t>
-            </a:r>
-          </a:p>
-        </p:txBody>
-      </p:sp>
-      <p:sp>
-        <p:nvSpPr>
-          <p:cNvPr id="5" name="Rectangle 4">
+              <a:t>Tutoring LLMs</a:t>
+            </a:r>
+          </a:p>
+        </p:txBody>
+      </p:sp>
+      <p:sp>
+        <p:nvSpPr>
+          <p:cNvPr id="3" name="Content Placeholder 2">
             <a:extLst>
               <a:ext uri="{FF2B5EF4-FFF2-40B4-BE49-F238E27FC236}">
-                <a16:creationId xmlns:a16="http://schemas.microsoft.com/office/drawing/2014/main" id="{CB7F8197-FC2F-9C2A-050C-CCCB46D86C79}"/>
+                <a16:creationId xmlns:a16="http://schemas.microsoft.com/office/drawing/2014/main" id="{5EC62719-077B-686B-2F9B-914035C8221C}"/>
               </a:ext>
             </a:extLst>
           </p:cNvPr>
-          <p:cNvSpPr/>
-          <p:nvPr/>
-        </p:nvSpPr>
-        <p:spPr>
-          <a:xfrm>
-            <a:off x="4240490" y="1406732"/>
-            <a:ext cx="3711020" cy="914400"/>
-          </a:xfrm>
-          <a:prstGeom prst="rect">
-            <a:avLst/>
-          </a:prstGeom>
-        </p:spPr>
-        <p:style>
-          <a:lnRef idx="2">
-            <a:schemeClr val="accent1">
-              <a:shade val="15000"/>
-            </a:schemeClr>
-          </a:lnRef>
-          <a:fillRef idx="1">
-            <a:schemeClr val="accent1"/>
-          </a:fillRef>
-          <a:effectRef idx="0">
-            <a:schemeClr val="accent1"/>
-          </a:effectRef>
-          <a:fontRef idx="minor">
-            <a:schemeClr val="lt1"/>
-          </a:fontRef>
-        </p:style>
-        <p:txBody>
-          <a:bodyPr rtlCol="0" anchor="ctr"/>
+          <p:cNvSpPr>
+            <a:spLocks noGrp="1"/>
+          </p:cNvSpPr>
+          <p:nvPr>
+            <p:ph idx="1"/>
+          </p:nvPr>
+        </p:nvSpPr>
+        <p:spPr/>
+        <p:txBody>
+          <a:bodyPr>
+            <a:normAutofit fontScale="92500" lnSpcReduction="20000"/>
+          </a:bodyPr>
           <a:lstStyle/>
           <a:p>
-            <a:pPr algn="ctr"/>
             <a:r>
               <a:rPr lang="en-US" noProof="0" dirty="0"/>
-              <a:t>Separate algorithm design from performance optimization</a:t>
-            </a:r>
-          </a:p>
-        </p:txBody>
-      </p:sp>
-      <p:sp>
-        <p:nvSpPr>
-          <p:cNvPr id="7" name="Rectangle 6">
-            <a:extLst>
-              <a:ext uri="{FF2B5EF4-FFF2-40B4-BE49-F238E27FC236}">
-                <a16:creationId xmlns:a16="http://schemas.microsoft.com/office/drawing/2014/main" id="{60EC2A1A-B720-84BC-76D5-4751C09EA61A}"/>
-              </a:ext>
-            </a:extLst>
-          </p:cNvPr>
-          <p:cNvSpPr/>
-          <p:nvPr/>
-        </p:nvSpPr>
-        <p:spPr>
-          <a:xfrm>
-            <a:off x="150074" y="2971800"/>
-            <a:ext cx="3711020" cy="914400"/>
-          </a:xfrm>
-          <a:prstGeom prst="rect">
-            <a:avLst/>
-          </a:prstGeom>
-        </p:spPr>
-        <p:style>
-          <a:lnRef idx="2">
-            <a:schemeClr val="accent1">
-              <a:shade val="15000"/>
-            </a:schemeClr>
-          </a:lnRef>
-          <a:fillRef idx="1">
-            <a:schemeClr val="accent1"/>
-          </a:fillRef>
-          <a:effectRef idx="0">
-            <a:schemeClr val="accent1"/>
-          </a:effectRef>
-          <a:fontRef idx="minor">
-            <a:schemeClr val="lt1"/>
-          </a:fontRef>
-        </p:style>
-        <p:txBody>
-          <a:bodyPr rtlCol="0" anchor="ctr"/>
-          <a:lstStyle/>
-          <a:p>
-            <a:pPr algn="ctr"/>
+              <a:t>The goal was always better automation/generalization of design and tuning</a:t>
+            </a:r>
+          </a:p>
+          <a:p>
+            <a:r>
+              <a:rPr lang="en-US" dirty="0"/>
+              <a:t>LLMs started to be surprisingly competent code generators</a:t>
+            </a:r>
+          </a:p>
+          <a:p>
+            <a:pPr lvl="1"/>
             <a:r>
               <a:rPr lang="en-US" noProof="0" dirty="0"/>
-              <a:t>Layout- and traversal-agnostic abstractions</a:t>
-            </a:r>
-          </a:p>
-        </p:txBody>
-      </p:sp>
-      <p:sp>
-        <p:nvSpPr>
-          <p:cNvPr id="9" name="Rectangle 8">
-            <a:extLst>
-              <a:ext uri="{FF2B5EF4-FFF2-40B4-BE49-F238E27FC236}">
-                <a16:creationId xmlns:a16="http://schemas.microsoft.com/office/drawing/2014/main" id="{6DB7F776-4EDC-09F4-F04A-E586FC4B4500}"/>
-              </a:ext>
-            </a:extLst>
-          </p:cNvPr>
-          <p:cNvSpPr/>
-          <p:nvPr/>
-        </p:nvSpPr>
-        <p:spPr>
-          <a:xfrm>
-            <a:off x="7840178" y="2971800"/>
-            <a:ext cx="3711020" cy="914400"/>
-          </a:xfrm>
-          <a:prstGeom prst="rect">
-            <a:avLst/>
-          </a:prstGeom>
-        </p:spPr>
-        <p:style>
-          <a:lnRef idx="2">
-            <a:schemeClr val="accent1">
-              <a:shade val="15000"/>
-            </a:schemeClr>
-          </a:lnRef>
-          <a:fillRef idx="1">
-            <a:schemeClr val="accent1"/>
-          </a:fillRef>
-          <a:effectRef idx="0">
-            <a:schemeClr val="accent1"/>
-          </a:effectRef>
-          <a:fontRef idx="minor">
-            <a:schemeClr val="lt1"/>
-          </a:fontRef>
-        </p:style>
-        <p:txBody>
-          <a:bodyPr rtlCol="0" anchor="ctr"/>
-          <a:lstStyle/>
-          <a:p>
-            <a:pPr algn="ctr"/>
+              <a:t>Not reliable, but extremely flexible, generalizable, simple to use (e.g., understanding natural language)</a:t>
+            </a:r>
+          </a:p>
+          <a:p>
+            <a:r>
+              <a:rPr lang="en-US" dirty="0"/>
+              <a:t>Core assumption for the study: LLMs are not very good in high-</a:t>
+            </a:r>
+            <a:r>
+              <a:rPr lang="en-US" dirty="0" err="1"/>
+              <a:t>lvl</a:t>
+            </a:r>
+            <a:r>
+              <a:rPr lang="en-US" dirty="0"/>
+              <a:t> decisions</a:t>
+            </a:r>
+          </a:p>
+          <a:p>
             <a:r>
               <a:rPr lang="en-US" noProof="0" dirty="0"/>
-              <a:t>LLM-assisted optimization</a:t>
-            </a:r>
-          </a:p>
-        </p:txBody>
-      </p:sp>
-      <p:sp>
-        <p:nvSpPr>
-          <p:cNvPr id="11" name="Rectangle 10">
-            <a:extLst>
-              <a:ext uri="{FF2B5EF4-FFF2-40B4-BE49-F238E27FC236}">
-                <a16:creationId xmlns:a16="http://schemas.microsoft.com/office/drawing/2014/main" id="{5B2B9BCB-5805-C1F1-AF45-681B37E6B83E}"/>
-              </a:ext>
-            </a:extLst>
-          </p:cNvPr>
-          <p:cNvSpPr/>
-          <p:nvPr/>
-        </p:nvSpPr>
-        <p:spPr>
-          <a:xfrm>
-            <a:off x="150074" y="4252912"/>
-            <a:ext cx="3711020" cy="914400"/>
-          </a:xfrm>
-          <a:prstGeom prst="rect">
-            <a:avLst/>
-          </a:prstGeom>
-        </p:spPr>
-        <p:style>
-          <a:lnRef idx="2">
-            <a:schemeClr val="accent1">
-              <a:shade val="15000"/>
-            </a:schemeClr>
-          </a:lnRef>
-          <a:fillRef idx="1">
-            <a:schemeClr val="accent1"/>
-          </a:fillRef>
-          <a:effectRef idx="0">
-            <a:schemeClr val="accent1"/>
-          </a:effectRef>
-          <a:fontRef idx="minor">
-            <a:schemeClr val="lt1"/>
-          </a:fontRef>
-        </p:style>
-        <p:txBody>
-          <a:bodyPr rtlCol="0" anchor="ctr"/>
-          <a:lstStyle/>
-          <a:p>
-            <a:pPr algn="ctr"/>
+              <a:t>Tutoring = improving quality of generated code by design suggestions/directions</a:t>
+            </a:r>
+          </a:p>
+          <a:p>
+            <a:r>
+              <a:rPr lang="en-US" dirty="0"/>
+              <a:t>Key findings:</a:t>
+            </a:r>
+          </a:p>
+          <a:p>
+            <a:pPr lvl="1"/>
+            <a:r>
+              <a:rPr lang="en-US" dirty="0"/>
+              <a:t>Intricate relationship between algorithm complexity and this effect on an LLM</a:t>
+            </a:r>
+          </a:p>
+          <a:p>
+            <a:pPr lvl="1"/>
             <a:r>
               <a:rPr lang="en-US" noProof="0" dirty="0"/>
-              <a:t>Layout abstractions</a:t>
-            </a:r>
-          </a:p>
-        </p:txBody>
-      </p:sp>
-      <p:sp>
-        <p:nvSpPr>
-          <p:cNvPr id="13" name="Rectangle 12">
-            <a:extLst>
-              <a:ext uri="{FF2B5EF4-FFF2-40B4-BE49-F238E27FC236}">
-                <a16:creationId xmlns:a16="http://schemas.microsoft.com/office/drawing/2014/main" id="{31388E94-1EEB-E24E-1923-AA250880AF84}"/>
-              </a:ext>
-            </a:extLst>
-          </p:cNvPr>
-          <p:cNvSpPr/>
-          <p:nvPr/>
-        </p:nvSpPr>
-        <p:spPr>
-          <a:xfrm>
-            <a:off x="4240490" y="4252912"/>
-            <a:ext cx="3711020" cy="914400"/>
-          </a:xfrm>
-          <a:prstGeom prst="rect">
-            <a:avLst/>
-          </a:prstGeom>
-        </p:spPr>
-        <p:style>
-          <a:lnRef idx="2">
-            <a:schemeClr val="accent1">
-              <a:shade val="15000"/>
-            </a:schemeClr>
-          </a:lnRef>
-          <a:fillRef idx="1">
-            <a:schemeClr val="accent1"/>
-          </a:fillRef>
-          <a:effectRef idx="0">
-            <a:schemeClr val="accent1"/>
-          </a:effectRef>
-          <a:fontRef idx="minor">
-            <a:schemeClr val="lt1"/>
-          </a:fontRef>
-        </p:style>
-        <p:txBody>
-          <a:bodyPr rtlCol="0" anchor="ctr"/>
-          <a:lstStyle/>
-          <a:p>
-            <a:pPr algn="ctr"/>
-            <a:r>
-              <a:rPr lang="en-US" noProof="0" dirty="0"/>
-              <a:t>Traversal abstractions</a:t>
-            </a:r>
-          </a:p>
-        </p:txBody>
-      </p:sp>
-      <p:sp>
-        <p:nvSpPr>
-          <p:cNvPr id="15" name="Rectangle 14">
-            <a:extLst>
-              <a:ext uri="{FF2B5EF4-FFF2-40B4-BE49-F238E27FC236}">
-                <a16:creationId xmlns:a16="http://schemas.microsoft.com/office/drawing/2014/main" id="{DE8920A4-4430-6757-E41A-9BA9578DC80D}"/>
-              </a:ext>
-            </a:extLst>
-          </p:cNvPr>
-          <p:cNvSpPr/>
-          <p:nvPr/>
-        </p:nvSpPr>
-        <p:spPr>
-          <a:xfrm>
-            <a:off x="8330906" y="4252912"/>
-            <a:ext cx="3711020" cy="914400"/>
-          </a:xfrm>
-          <a:prstGeom prst="rect">
-            <a:avLst/>
-          </a:prstGeom>
-        </p:spPr>
-        <p:style>
-          <a:lnRef idx="2">
-            <a:schemeClr val="accent1">
-              <a:shade val="15000"/>
-            </a:schemeClr>
-          </a:lnRef>
-          <a:fillRef idx="1">
-            <a:schemeClr val="accent1"/>
-          </a:fillRef>
-          <a:effectRef idx="0">
-            <a:schemeClr val="accent1"/>
-          </a:effectRef>
-          <a:fontRef idx="minor">
-            <a:schemeClr val="lt1"/>
-          </a:fontRef>
-        </p:style>
-        <p:txBody>
-          <a:bodyPr rtlCol="0" anchor="ctr"/>
-          <a:lstStyle/>
-          <a:p>
-            <a:pPr algn="ctr"/>
-            <a:r>
-              <a:rPr lang="en-US" noProof="0" dirty="0"/>
-              <a:t>Practical aspects</a:t>
-            </a:r>
-          </a:p>
-        </p:txBody>
-      </p:sp>
-      <p:sp>
-        <p:nvSpPr>
-          <p:cNvPr id="17" name="Rectangle 16">
-            <a:extLst>
-              <a:ext uri="{FF2B5EF4-FFF2-40B4-BE49-F238E27FC236}">
-                <a16:creationId xmlns:a16="http://schemas.microsoft.com/office/drawing/2014/main" id="{D01E75A2-333B-DF95-544C-0ACF1B88882C}"/>
-              </a:ext>
-            </a:extLst>
-          </p:cNvPr>
-          <p:cNvSpPr/>
-          <p:nvPr/>
-        </p:nvSpPr>
-        <p:spPr>
-          <a:xfrm>
-            <a:off x="302474" y="5356288"/>
-            <a:ext cx="3711020" cy="914400"/>
-          </a:xfrm>
-          <a:prstGeom prst="rect">
-            <a:avLst/>
-          </a:prstGeom>
-        </p:spPr>
-        <p:style>
-          <a:lnRef idx="2">
-            <a:schemeClr val="accent1">
-              <a:shade val="15000"/>
-            </a:schemeClr>
-          </a:lnRef>
-          <a:fillRef idx="1">
-            <a:schemeClr val="accent1"/>
-          </a:fillRef>
-          <a:effectRef idx="0">
-            <a:schemeClr val="accent1"/>
-          </a:effectRef>
-          <a:fontRef idx="minor">
-            <a:schemeClr val="lt1"/>
-          </a:fontRef>
-        </p:style>
-        <p:txBody>
-          <a:bodyPr rtlCol="0" anchor="ctr"/>
-          <a:lstStyle/>
-          <a:p>
-            <a:pPr algn="ctr"/>
-            <a:r>
-              <a:rPr lang="en-US" noProof="0" dirty="0" err="1"/>
-              <a:t>Noarr</a:t>
-            </a:r>
-            <a:r>
-              <a:rPr lang="en-US" noProof="0" dirty="0"/>
-              <a:t> structures</a:t>
-            </a:r>
-          </a:p>
-        </p:txBody>
-      </p:sp>
-      <p:sp>
-        <p:nvSpPr>
-          <p:cNvPr id="19" name="Rectangle 18">
-            <a:extLst>
-              <a:ext uri="{FF2B5EF4-FFF2-40B4-BE49-F238E27FC236}">
-                <a16:creationId xmlns:a16="http://schemas.microsoft.com/office/drawing/2014/main" id="{67736357-2F90-D241-51F6-C03C797EFFC2}"/>
-              </a:ext>
-            </a:extLst>
-          </p:cNvPr>
-          <p:cNvSpPr/>
-          <p:nvPr/>
-        </p:nvSpPr>
-        <p:spPr>
-          <a:xfrm>
-            <a:off x="454874" y="5508688"/>
-            <a:ext cx="3711020" cy="914400"/>
-          </a:xfrm>
-          <a:prstGeom prst="rect">
-            <a:avLst/>
-          </a:prstGeom>
-        </p:spPr>
-        <p:style>
-          <a:lnRef idx="2">
-            <a:schemeClr val="accent1">
-              <a:shade val="15000"/>
-            </a:schemeClr>
-          </a:lnRef>
-          <a:fillRef idx="1">
-            <a:schemeClr val="accent1"/>
-          </a:fillRef>
-          <a:effectRef idx="0">
-            <a:schemeClr val="accent1"/>
-          </a:effectRef>
-          <a:fontRef idx="minor">
-            <a:schemeClr val="lt1"/>
-          </a:fontRef>
-        </p:style>
-        <p:txBody>
-          <a:bodyPr rtlCol="0" anchor="ctr"/>
-          <a:lstStyle/>
-          <a:p>
-            <a:pPr algn="ctr"/>
-            <a:r>
-              <a:rPr lang="en-US" noProof="0" dirty="0" err="1"/>
-              <a:t>Noarr</a:t>
-            </a:r>
-            <a:r>
-              <a:rPr lang="en-US" noProof="0" dirty="0"/>
-              <a:t> traversers</a:t>
-            </a:r>
-          </a:p>
-        </p:txBody>
-      </p:sp>
-      <p:sp>
-        <p:nvSpPr>
-          <p:cNvPr id="21" name="Rectangle 20">
-            <a:extLst>
-              <a:ext uri="{FF2B5EF4-FFF2-40B4-BE49-F238E27FC236}">
-                <a16:creationId xmlns:a16="http://schemas.microsoft.com/office/drawing/2014/main" id="{9EC73339-8B3D-25F4-18D5-E5821CB7CE8B}"/>
-              </a:ext>
-            </a:extLst>
-          </p:cNvPr>
-          <p:cNvSpPr/>
-          <p:nvPr/>
-        </p:nvSpPr>
-        <p:spPr>
-          <a:xfrm>
-            <a:off x="607274" y="5661088"/>
-            <a:ext cx="3711020" cy="914400"/>
-          </a:xfrm>
-          <a:prstGeom prst="rect">
-            <a:avLst/>
-          </a:prstGeom>
-        </p:spPr>
-        <p:style>
-          <a:lnRef idx="2">
-            <a:schemeClr val="accent1">
-              <a:shade val="15000"/>
-            </a:schemeClr>
-          </a:lnRef>
-          <a:fillRef idx="1">
-            <a:schemeClr val="accent1"/>
-          </a:fillRef>
-          <a:effectRef idx="0">
-            <a:schemeClr val="accent1"/>
-          </a:effectRef>
-          <a:fontRef idx="minor">
-            <a:schemeClr val="lt1"/>
-          </a:fontRef>
-        </p:style>
-        <p:txBody>
-          <a:bodyPr rtlCol="0" anchor="ctr"/>
-          <a:lstStyle/>
-          <a:p>
-            <a:pPr algn="ctr"/>
-            <a:r>
-              <a:rPr lang="en-US" noProof="0" dirty="0" err="1"/>
-              <a:t>Noarr</a:t>
-            </a:r>
-            <a:r>
-              <a:rPr lang="en-US" noProof="0" dirty="0"/>
-              <a:t> tuning</a:t>
-            </a:r>
-          </a:p>
-        </p:txBody>
-      </p:sp>
-      <p:sp>
-        <p:nvSpPr>
-          <p:cNvPr id="23" name="Rectangle 22">
-            <a:extLst>
-              <a:ext uri="{FF2B5EF4-FFF2-40B4-BE49-F238E27FC236}">
-                <a16:creationId xmlns:a16="http://schemas.microsoft.com/office/drawing/2014/main" id="{63EC4F51-D7C0-1DFC-E94E-75AE185B7CC1}"/>
-              </a:ext>
-            </a:extLst>
-          </p:cNvPr>
-          <p:cNvSpPr/>
-          <p:nvPr/>
-        </p:nvSpPr>
-        <p:spPr>
-          <a:xfrm>
-            <a:off x="759674" y="5813488"/>
-            <a:ext cx="3711020" cy="914400"/>
-          </a:xfrm>
-          <a:prstGeom prst="rect">
-            <a:avLst/>
-          </a:prstGeom>
-        </p:spPr>
-        <p:style>
-          <a:lnRef idx="2">
-            <a:schemeClr val="accent1">
-              <a:shade val="15000"/>
-            </a:schemeClr>
-          </a:lnRef>
-          <a:fillRef idx="1">
-            <a:schemeClr val="accent1"/>
-          </a:fillRef>
-          <a:effectRef idx="0">
-            <a:schemeClr val="accent1"/>
-          </a:effectRef>
-          <a:fontRef idx="minor">
-            <a:schemeClr val="lt1"/>
-          </a:fontRef>
-        </p:style>
-        <p:txBody>
-          <a:bodyPr rtlCol="0" anchor="ctr"/>
-          <a:lstStyle/>
-          <a:p>
-            <a:pPr algn="ctr"/>
-            <a:r>
-              <a:rPr lang="en-US" noProof="0" dirty="0" err="1"/>
-              <a:t>Noarr</a:t>
-            </a:r>
-            <a:r>
-              <a:rPr lang="en-US" noProof="0" dirty="0"/>
-              <a:t>-MPI</a:t>
-            </a:r>
-          </a:p>
-        </p:txBody>
-      </p:sp>
-      <p:sp>
-        <p:nvSpPr>
-          <p:cNvPr id="25" name="Rectangle 24">
-            <a:extLst>
-              <a:ext uri="{FF2B5EF4-FFF2-40B4-BE49-F238E27FC236}">
-                <a16:creationId xmlns:a16="http://schemas.microsoft.com/office/drawing/2014/main" id="{B7D64168-E19F-C04D-293D-CB07E85D29DA}"/>
-              </a:ext>
-            </a:extLst>
-          </p:cNvPr>
-          <p:cNvSpPr/>
-          <p:nvPr/>
-        </p:nvSpPr>
-        <p:spPr>
-          <a:xfrm>
-            <a:off x="4853138" y="5424788"/>
-            <a:ext cx="3711020" cy="914400"/>
-          </a:xfrm>
-          <a:prstGeom prst="rect">
-            <a:avLst/>
-          </a:prstGeom>
-        </p:spPr>
-        <p:style>
-          <a:lnRef idx="2">
-            <a:schemeClr val="accent1">
-              <a:shade val="15000"/>
-            </a:schemeClr>
-          </a:lnRef>
-          <a:fillRef idx="1">
-            <a:schemeClr val="accent1"/>
-          </a:fillRef>
-          <a:effectRef idx="0">
-            <a:schemeClr val="accent1"/>
-          </a:effectRef>
-          <a:fontRef idx="minor">
-            <a:schemeClr val="lt1"/>
-          </a:fontRef>
-        </p:style>
-        <p:txBody>
-          <a:bodyPr rtlCol="0" anchor="ctr"/>
-          <a:lstStyle/>
-          <a:p>
-            <a:pPr algn="ctr"/>
-            <a:r>
-              <a:rPr lang="en-US" noProof="0" dirty="0" err="1"/>
-              <a:t>Cellato</a:t>
-            </a:r>
-            <a:endParaRPr lang="en-US" noProof="0" dirty="0"/>
+              <a:t>Improvement over time: the effect changes with each new model</a:t>
+            </a:r>
           </a:p>
         </p:txBody>
       </p:sp>
     </p:spTree>
     <p:extLst>
       <p:ext uri="{BB962C8B-B14F-4D97-AF65-F5344CB8AC3E}">
-        <p14:creationId xmlns:p14="http://schemas.microsoft.com/office/powerpoint/2010/main" val="1745489699"/>
+        <p14:creationId xmlns:p14="http://schemas.microsoft.com/office/powerpoint/2010/main" val="2667122292"/>
       </p:ext>
     </p:extLst>
   </p:cSld>
@@ -7022,6 +6992,825 @@
           <p:cNvPr id="2" name="Title 1">
             <a:extLst>
               <a:ext uri="{FF2B5EF4-FFF2-40B4-BE49-F238E27FC236}">
+                <a16:creationId xmlns:a16="http://schemas.microsoft.com/office/drawing/2014/main" id="{F35C7E3E-09C8-2B79-8EE7-B8D1557191BE}"/>
+              </a:ext>
+            </a:extLst>
+          </p:cNvPr>
+          <p:cNvSpPr>
+            <a:spLocks noGrp="1"/>
+          </p:cNvSpPr>
+          <p:nvPr>
+            <p:ph type="title"/>
+          </p:nvPr>
+        </p:nvSpPr>
+        <p:spPr/>
+        <p:txBody>
+          <a:bodyPr/>
+          <a:lstStyle/>
+          <a:p>
+            <a:r>
+              <a:rPr lang="en-US" noProof="0" dirty="0"/>
+              <a:t>LLMs and abstractions</a:t>
+            </a:r>
+          </a:p>
+        </p:txBody>
+      </p:sp>
+      <p:sp>
+        <p:nvSpPr>
+          <p:cNvPr id="3" name="Content Placeholder 2">
+            <a:extLst>
+              <a:ext uri="{FF2B5EF4-FFF2-40B4-BE49-F238E27FC236}">
+                <a16:creationId xmlns:a16="http://schemas.microsoft.com/office/drawing/2014/main" id="{DAF33F66-B59C-C15E-3BD1-85602E9A1F9E}"/>
+              </a:ext>
+            </a:extLst>
+          </p:cNvPr>
+          <p:cNvSpPr>
+            <a:spLocks noGrp="1"/>
+          </p:cNvSpPr>
+          <p:nvPr>
+            <p:ph idx="1"/>
+          </p:nvPr>
+        </p:nvSpPr>
+        <p:spPr/>
+        <p:txBody>
+          <a:bodyPr/>
+          <a:lstStyle/>
+          <a:p>
+            <a:r>
+              <a:rPr lang="en-US" noProof="0" dirty="0"/>
+              <a:t>Key question: Layout- and traversal-agnostic abstractions help humans; do they help LLMs as well?</a:t>
+            </a:r>
+          </a:p>
+          <a:p>
+            <a:r>
+              <a:rPr lang="en-US" dirty="0"/>
+              <a:t>Key findings:</a:t>
+            </a:r>
+          </a:p>
+          <a:p>
+            <a:pPr lvl="1"/>
+            <a:r>
+              <a:rPr lang="en-US" noProof="0" dirty="0"/>
+              <a:t>Prompt specificity improves results much more</a:t>
+            </a:r>
+          </a:p>
+          <a:p>
+            <a:pPr lvl="1"/>
+            <a:r>
+              <a:rPr lang="en-US" dirty="0"/>
+              <a:t>LLMs more competent in pure C/C++</a:t>
+            </a:r>
+          </a:p>
+          <a:p>
+            <a:pPr lvl="1"/>
+            <a:endParaRPr lang="en-US" noProof="0" dirty="0"/>
+          </a:p>
+        </p:txBody>
+      </p:sp>
+    </p:spTree>
+    <p:extLst>
+      <p:ext uri="{BB962C8B-B14F-4D97-AF65-F5344CB8AC3E}">
+        <p14:creationId xmlns:p14="http://schemas.microsoft.com/office/powerpoint/2010/main" val="965653160"/>
+      </p:ext>
+    </p:extLst>
+  </p:cSld>
+  <p:clrMapOvr>
+    <a:masterClrMapping/>
+  </p:clrMapOvr>
+</p:sld>
+</file>
+
+<file path=ppt/slides/slide24.xml><?xml version="1.0" encoding="utf-8"?>
+<p:sld xmlns:a="http://schemas.openxmlformats.org/drawingml/2006/main" xmlns:r="http://schemas.openxmlformats.org/officeDocument/2006/relationships" xmlns:p="http://schemas.openxmlformats.org/presentationml/2006/main" show="0">
+  <p:cSld>
+    <p:spTree>
+      <p:nvGrpSpPr>
+        <p:cNvPr id="1" name=""/>
+        <p:cNvGrpSpPr/>
+        <p:nvPr/>
+      </p:nvGrpSpPr>
+      <p:grpSpPr>
+        <a:xfrm>
+          <a:off x="0" y="0"/>
+          <a:ext cx="0" cy="0"/>
+          <a:chOff x="0" y="0"/>
+          <a:chExt cx="0" cy="0"/>
+        </a:xfrm>
+      </p:grpSpPr>
+      <p:sp>
+        <p:nvSpPr>
+          <p:cNvPr id="2" name="Title 1">
+            <a:extLst>
+              <a:ext uri="{FF2B5EF4-FFF2-40B4-BE49-F238E27FC236}">
+                <a16:creationId xmlns:a16="http://schemas.microsoft.com/office/drawing/2014/main" id="{928BD501-0287-7E9D-6C52-A86B98F9EB52}"/>
+              </a:ext>
+            </a:extLst>
+          </p:cNvPr>
+          <p:cNvSpPr>
+            <a:spLocks noGrp="1"/>
+          </p:cNvSpPr>
+          <p:nvPr>
+            <p:ph type="title"/>
+          </p:nvPr>
+        </p:nvSpPr>
+        <p:spPr/>
+        <p:txBody>
+          <a:bodyPr/>
+          <a:lstStyle/>
+          <a:p>
+            <a:r>
+              <a:rPr lang="en-US" noProof="0" dirty="0" err="1"/>
+              <a:t>Zahodit</a:t>
+            </a:r>
+            <a:endParaRPr lang="en-US" noProof="0" dirty="0"/>
+          </a:p>
+        </p:txBody>
+      </p:sp>
+      <p:sp>
+        <p:nvSpPr>
+          <p:cNvPr id="3" name="Content Placeholder 2">
+            <a:extLst>
+              <a:ext uri="{FF2B5EF4-FFF2-40B4-BE49-F238E27FC236}">
+                <a16:creationId xmlns:a16="http://schemas.microsoft.com/office/drawing/2014/main" id="{369E5D67-EA03-A5CA-2D82-199F178CE89C}"/>
+              </a:ext>
+            </a:extLst>
+          </p:cNvPr>
+          <p:cNvSpPr>
+            <a:spLocks noGrp="1"/>
+          </p:cNvSpPr>
+          <p:nvPr>
+            <p:ph idx="1"/>
+          </p:nvPr>
+        </p:nvSpPr>
+        <p:spPr/>
+        <p:txBody>
+          <a:bodyPr/>
+          <a:lstStyle/>
+          <a:p>
+            <a:r>
+              <a:rPr lang="en-US" noProof="0" dirty="0" err="1"/>
+              <a:t>Noarr</a:t>
+            </a:r>
+            <a:endParaRPr lang="en-US" noProof="0" dirty="0"/>
+          </a:p>
+          <a:p>
+            <a:r>
+              <a:rPr lang="en-US" noProof="0" dirty="0" err="1"/>
+              <a:t>Cellato</a:t>
+            </a:r>
+            <a:endParaRPr lang="en-US" noProof="0" dirty="0"/>
+          </a:p>
+        </p:txBody>
+      </p:sp>
+    </p:spTree>
+    <p:extLst>
+      <p:ext uri="{BB962C8B-B14F-4D97-AF65-F5344CB8AC3E}">
+        <p14:creationId xmlns:p14="http://schemas.microsoft.com/office/powerpoint/2010/main" val="4085122203"/>
+      </p:ext>
+    </p:extLst>
+  </p:cSld>
+  <p:clrMapOvr>
+    <a:masterClrMapping/>
+  </p:clrMapOvr>
+</p:sld>
+</file>
+
+<file path=ppt/slides/slide25.xml><?xml version="1.0" encoding="utf-8"?>
+<p:sld xmlns:a="http://schemas.openxmlformats.org/drawingml/2006/main" xmlns:r="http://schemas.openxmlformats.org/officeDocument/2006/relationships" xmlns:p="http://schemas.openxmlformats.org/presentationml/2006/main">
+  <p:cSld>
+    <p:spTree>
+      <p:nvGrpSpPr>
+        <p:cNvPr id="1" name=""/>
+        <p:cNvGrpSpPr/>
+        <p:nvPr/>
+      </p:nvGrpSpPr>
+      <p:grpSpPr>
+        <a:xfrm>
+          <a:off x="0" y="0"/>
+          <a:ext cx="0" cy="0"/>
+          <a:chOff x="0" y="0"/>
+          <a:chExt cx="0" cy="0"/>
+        </a:xfrm>
+      </p:grpSpPr>
+      <p:sp>
+        <p:nvSpPr>
+          <p:cNvPr id="2" name="Title 1">
+            <a:extLst>
+              <a:ext uri="{FF2B5EF4-FFF2-40B4-BE49-F238E27FC236}">
+                <a16:creationId xmlns:a16="http://schemas.microsoft.com/office/drawing/2014/main" id="{6447B745-9B50-DD90-5161-BD2A06CEA44B}"/>
+              </a:ext>
+            </a:extLst>
+          </p:cNvPr>
+          <p:cNvSpPr>
+            <a:spLocks noGrp="1"/>
+          </p:cNvSpPr>
+          <p:nvPr>
+            <p:ph type="title"/>
+          </p:nvPr>
+        </p:nvSpPr>
+        <p:spPr/>
+        <p:txBody>
+          <a:bodyPr/>
+          <a:lstStyle/>
+          <a:p>
+            <a:r>
+              <a:rPr lang="en-US" noProof="0" dirty="0"/>
+              <a:t>Contribution map</a:t>
+            </a:r>
+          </a:p>
+        </p:txBody>
+      </p:sp>
+      <p:sp>
+        <p:nvSpPr>
+          <p:cNvPr id="5" name="Rectangle 4">
+            <a:extLst>
+              <a:ext uri="{FF2B5EF4-FFF2-40B4-BE49-F238E27FC236}">
+                <a16:creationId xmlns:a16="http://schemas.microsoft.com/office/drawing/2014/main" id="{CB7F8197-FC2F-9C2A-050C-CCCB46D86C79}"/>
+              </a:ext>
+            </a:extLst>
+          </p:cNvPr>
+          <p:cNvSpPr/>
+          <p:nvPr/>
+        </p:nvSpPr>
+        <p:spPr>
+          <a:xfrm>
+            <a:off x="4240490" y="1406732"/>
+            <a:ext cx="3711020" cy="914400"/>
+          </a:xfrm>
+          <a:prstGeom prst="rect">
+            <a:avLst/>
+          </a:prstGeom>
+        </p:spPr>
+        <p:style>
+          <a:lnRef idx="2">
+            <a:schemeClr val="accent1">
+              <a:shade val="15000"/>
+            </a:schemeClr>
+          </a:lnRef>
+          <a:fillRef idx="1">
+            <a:schemeClr val="accent1"/>
+          </a:fillRef>
+          <a:effectRef idx="0">
+            <a:schemeClr val="accent1"/>
+          </a:effectRef>
+          <a:fontRef idx="minor">
+            <a:schemeClr val="lt1"/>
+          </a:fontRef>
+        </p:style>
+        <p:txBody>
+          <a:bodyPr rtlCol="0" anchor="ctr"/>
+          <a:lstStyle/>
+          <a:p>
+            <a:pPr algn="ctr"/>
+            <a:r>
+              <a:rPr lang="en-US" noProof="0" dirty="0"/>
+              <a:t>Separate algorithm design from performance optimization</a:t>
+            </a:r>
+          </a:p>
+        </p:txBody>
+      </p:sp>
+      <p:sp>
+        <p:nvSpPr>
+          <p:cNvPr id="7" name="Rectangle 6">
+            <a:extLst>
+              <a:ext uri="{FF2B5EF4-FFF2-40B4-BE49-F238E27FC236}">
+                <a16:creationId xmlns:a16="http://schemas.microsoft.com/office/drawing/2014/main" id="{60EC2A1A-B720-84BC-76D5-4751C09EA61A}"/>
+              </a:ext>
+            </a:extLst>
+          </p:cNvPr>
+          <p:cNvSpPr/>
+          <p:nvPr/>
+        </p:nvSpPr>
+        <p:spPr>
+          <a:xfrm>
+            <a:off x="150074" y="2971800"/>
+            <a:ext cx="3711020" cy="914400"/>
+          </a:xfrm>
+          <a:prstGeom prst="rect">
+            <a:avLst/>
+          </a:prstGeom>
+        </p:spPr>
+        <p:style>
+          <a:lnRef idx="2">
+            <a:schemeClr val="accent1">
+              <a:shade val="15000"/>
+            </a:schemeClr>
+          </a:lnRef>
+          <a:fillRef idx="1">
+            <a:schemeClr val="accent1"/>
+          </a:fillRef>
+          <a:effectRef idx="0">
+            <a:schemeClr val="accent1"/>
+          </a:effectRef>
+          <a:fontRef idx="minor">
+            <a:schemeClr val="lt1"/>
+          </a:fontRef>
+        </p:style>
+        <p:txBody>
+          <a:bodyPr rtlCol="0" anchor="ctr"/>
+          <a:lstStyle/>
+          <a:p>
+            <a:pPr algn="ctr"/>
+            <a:r>
+              <a:rPr lang="en-US" noProof="0" dirty="0"/>
+              <a:t>Layout- and traversal-agnostic abstractions</a:t>
+            </a:r>
+          </a:p>
+        </p:txBody>
+      </p:sp>
+      <p:sp>
+        <p:nvSpPr>
+          <p:cNvPr id="9" name="Rectangle 8">
+            <a:extLst>
+              <a:ext uri="{FF2B5EF4-FFF2-40B4-BE49-F238E27FC236}">
+                <a16:creationId xmlns:a16="http://schemas.microsoft.com/office/drawing/2014/main" id="{6DB7F776-4EDC-09F4-F04A-E586FC4B4500}"/>
+              </a:ext>
+            </a:extLst>
+          </p:cNvPr>
+          <p:cNvSpPr/>
+          <p:nvPr/>
+        </p:nvSpPr>
+        <p:spPr>
+          <a:xfrm>
+            <a:off x="7840178" y="2971800"/>
+            <a:ext cx="3711020" cy="914400"/>
+          </a:xfrm>
+          <a:prstGeom prst="rect">
+            <a:avLst/>
+          </a:prstGeom>
+        </p:spPr>
+        <p:style>
+          <a:lnRef idx="2">
+            <a:schemeClr val="accent1">
+              <a:shade val="15000"/>
+            </a:schemeClr>
+          </a:lnRef>
+          <a:fillRef idx="1">
+            <a:schemeClr val="accent1"/>
+          </a:fillRef>
+          <a:effectRef idx="0">
+            <a:schemeClr val="accent1"/>
+          </a:effectRef>
+          <a:fontRef idx="minor">
+            <a:schemeClr val="lt1"/>
+          </a:fontRef>
+        </p:style>
+        <p:txBody>
+          <a:bodyPr rtlCol="0" anchor="ctr"/>
+          <a:lstStyle/>
+          <a:p>
+            <a:pPr algn="ctr"/>
+            <a:r>
+              <a:rPr lang="en-US" noProof="0" dirty="0"/>
+              <a:t>LLM-assisted optimization</a:t>
+            </a:r>
+          </a:p>
+        </p:txBody>
+      </p:sp>
+      <p:sp>
+        <p:nvSpPr>
+          <p:cNvPr id="11" name="Rectangle 10">
+            <a:extLst>
+              <a:ext uri="{FF2B5EF4-FFF2-40B4-BE49-F238E27FC236}">
+                <a16:creationId xmlns:a16="http://schemas.microsoft.com/office/drawing/2014/main" id="{5B2B9BCB-5805-C1F1-AF45-681B37E6B83E}"/>
+              </a:ext>
+            </a:extLst>
+          </p:cNvPr>
+          <p:cNvSpPr/>
+          <p:nvPr/>
+        </p:nvSpPr>
+        <p:spPr>
+          <a:xfrm>
+            <a:off x="150074" y="4252912"/>
+            <a:ext cx="3711020" cy="914400"/>
+          </a:xfrm>
+          <a:prstGeom prst="rect">
+            <a:avLst/>
+          </a:prstGeom>
+        </p:spPr>
+        <p:style>
+          <a:lnRef idx="2">
+            <a:schemeClr val="accent1">
+              <a:shade val="15000"/>
+            </a:schemeClr>
+          </a:lnRef>
+          <a:fillRef idx="1">
+            <a:schemeClr val="accent1"/>
+          </a:fillRef>
+          <a:effectRef idx="0">
+            <a:schemeClr val="accent1"/>
+          </a:effectRef>
+          <a:fontRef idx="minor">
+            <a:schemeClr val="lt1"/>
+          </a:fontRef>
+        </p:style>
+        <p:txBody>
+          <a:bodyPr rtlCol="0" anchor="ctr"/>
+          <a:lstStyle/>
+          <a:p>
+            <a:pPr algn="ctr"/>
+            <a:r>
+              <a:rPr lang="en-US" noProof="0" dirty="0"/>
+              <a:t>Layout abstractions</a:t>
+            </a:r>
+          </a:p>
+        </p:txBody>
+      </p:sp>
+      <p:sp>
+        <p:nvSpPr>
+          <p:cNvPr id="13" name="Rectangle 12">
+            <a:extLst>
+              <a:ext uri="{FF2B5EF4-FFF2-40B4-BE49-F238E27FC236}">
+                <a16:creationId xmlns:a16="http://schemas.microsoft.com/office/drawing/2014/main" id="{31388E94-1EEB-E24E-1923-AA250880AF84}"/>
+              </a:ext>
+            </a:extLst>
+          </p:cNvPr>
+          <p:cNvSpPr/>
+          <p:nvPr/>
+        </p:nvSpPr>
+        <p:spPr>
+          <a:xfrm>
+            <a:off x="4240490" y="4252912"/>
+            <a:ext cx="3711020" cy="914400"/>
+          </a:xfrm>
+          <a:prstGeom prst="rect">
+            <a:avLst/>
+          </a:prstGeom>
+        </p:spPr>
+        <p:style>
+          <a:lnRef idx="2">
+            <a:schemeClr val="accent1">
+              <a:shade val="15000"/>
+            </a:schemeClr>
+          </a:lnRef>
+          <a:fillRef idx="1">
+            <a:schemeClr val="accent1"/>
+          </a:fillRef>
+          <a:effectRef idx="0">
+            <a:schemeClr val="accent1"/>
+          </a:effectRef>
+          <a:fontRef idx="minor">
+            <a:schemeClr val="lt1"/>
+          </a:fontRef>
+        </p:style>
+        <p:txBody>
+          <a:bodyPr rtlCol="0" anchor="ctr"/>
+          <a:lstStyle/>
+          <a:p>
+            <a:pPr algn="ctr"/>
+            <a:r>
+              <a:rPr lang="en-US" noProof="0" dirty="0"/>
+              <a:t>Traversal abstractions</a:t>
+            </a:r>
+          </a:p>
+        </p:txBody>
+      </p:sp>
+      <p:sp>
+        <p:nvSpPr>
+          <p:cNvPr id="15" name="Rectangle 14">
+            <a:extLst>
+              <a:ext uri="{FF2B5EF4-FFF2-40B4-BE49-F238E27FC236}">
+                <a16:creationId xmlns:a16="http://schemas.microsoft.com/office/drawing/2014/main" id="{DE8920A4-4430-6757-E41A-9BA9578DC80D}"/>
+              </a:ext>
+            </a:extLst>
+          </p:cNvPr>
+          <p:cNvSpPr/>
+          <p:nvPr/>
+        </p:nvSpPr>
+        <p:spPr>
+          <a:xfrm>
+            <a:off x="8330906" y="4252912"/>
+            <a:ext cx="3711020" cy="914400"/>
+          </a:xfrm>
+          <a:prstGeom prst="rect">
+            <a:avLst/>
+          </a:prstGeom>
+        </p:spPr>
+        <p:style>
+          <a:lnRef idx="2">
+            <a:schemeClr val="accent1">
+              <a:shade val="15000"/>
+            </a:schemeClr>
+          </a:lnRef>
+          <a:fillRef idx="1">
+            <a:schemeClr val="accent1"/>
+          </a:fillRef>
+          <a:effectRef idx="0">
+            <a:schemeClr val="accent1"/>
+          </a:effectRef>
+          <a:fontRef idx="minor">
+            <a:schemeClr val="lt1"/>
+          </a:fontRef>
+        </p:style>
+        <p:txBody>
+          <a:bodyPr rtlCol="0" anchor="ctr"/>
+          <a:lstStyle/>
+          <a:p>
+            <a:pPr algn="ctr"/>
+            <a:r>
+              <a:rPr lang="en-US" noProof="0" dirty="0"/>
+              <a:t>Practical aspects</a:t>
+            </a:r>
+          </a:p>
+        </p:txBody>
+      </p:sp>
+      <p:sp>
+        <p:nvSpPr>
+          <p:cNvPr id="17" name="Rectangle 16">
+            <a:extLst>
+              <a:ext uri="{FF2B5EF4-FFF2-40B4-BE49-F238E27FC236}">
+                <a16:creationId xmlns:a16="http://schemas.microsoft.com/office/drawing/2014/main" id="{D01E75A2-333B-DF95-544C-0ACF1B88882C}"/>
+              </a:ext>
+            </a:extLst>
+          </p:cNvPr>
+          <p:cNvSpPr/>
+          <p:nvPr/>
+        </p:nvSpPr>
+        <p:spPr>
+          <a:xfrm>
+            <a:off x="302474" y="5356288"/>
+            <a:ext cx="3711020" cy="914400"/>
+          </a:xfrm>
+          <a:prstGeom prst="rect">
+            <a:avLst/>
+          </a:prstGeom>
+        </p:spPr>
+        <p:style>
+          <a:lnRef idx="2">
+            <a:schemeClr val="accent1">
+              <a:shade val="15000"/>
+            </a:schemeClr>
+          </a:lnRef>
+          <a:fillRef idx="1">
+            <a:schemeClr val="accent1"/>
+          </a:fillRef>
+          <a:effectRef idx="0">
+            <a:schemeClr val="accent1"/>
+          </a:effectRef>
+          <a:fontRef idx="minor">
+            <a:schemeClr val="lt1"/>
+          </a:fontRef>
+        </p:style>
+        <p:txBody>
+          <a:bodyPr rtlCol="0" anchor="ctr"/>
+          <a:lstStyle/>
+          <a:p>
+            <a:pPr algn="ctr"/>
+            <a:r>
+              <a:rPr lang="en-US" noProof="0" dirty="0" err="1"/>
+              <a:t>Noarr</a:t>
+            </a:r>
+            <a:r>
+              <a:rPr lang="en-US" noProof="0" dirty="0"/>
+              <a:t> structures</a:t>
+            </a:r>
+          </a:p>
+        </p:txBody>
+      </p:sp>
+      <p:sp>
+        <p:nvSpPr>
+          <p:cNvPr id="19" name="Rectangle 18">
+            <a:extLst>
+              <a:ext uri="{FF2B5EF4-FFF2-40B4-BE49-F238E27FC236}">
+                <a16:creationId xmlns:a16="http://schemas.microsoft.com/office/drawing/2014/main" id="{67736357-2F90-D241-51F6-C03C797EFFC2}"/>
+              </a:ext>
+            </a:extLst>
+          </p:cNvPr>
+          <p:cNvSpPr/>
+          <p:nvPr/>
+        </p:nvSpPr>
+        <p:spPr>
+          <a:xfrm>
+            <a:off x="454874" y="5508688"/>
+            <a:ext cx="3711020" cy="914400"/>
+          </a:xfrm>
+          <a:prstGeom prst="rect">
+            <a:avLst/>
+          </a:prstGeom>
+        </p:spPr>
+        <p:style>
+          <a:lnRef idx="2">
+            <a:schemeClr val="accent1">
+              <a:shade val="15000"/>
+            </a:schemeClr>
+          </a:lnRef>
+          <a:fillRef idx="1">
+            <a:schemeClr val="accent1"/>
+          </a:fillRef>
+          <a:effectRef idx="0">
+            <a:schemeClr val="accent1"/>
+          </a:effectRef>
+          <a:fontRef idx="minor">
+            <a:schemeClr val="lt1"/>
+          </a:fontRef>
+        </p:style>
+        <p:txBody>
+          <a:bodyPr rtlCol="0" anchor="ctr"/>
+          <a:lstStyle/>
+          <a:p>
+            <a:pPr algn="ctr"/>
+            <a:r>
+              <a:rPr lang="en-US" noProof="0" dirty="0" err="1"/>
+              <a:t>Noarr</a:t>
+            </a:r>
+            <a:r>
+              <a:rPr lang="en-US" noProof="0" dirty="0"/>
+              <a:t> traversers</a:t>
+            </a:r>
+          </a:p>
+        </p:txBody>
+      </p:sp>
+      <p:sp>
+        <p:nvSpPr>
+          <p:cNvPr id="21" name="Rectangle 20">
+            <a:extLst>
+              <a:ext uri="{FF2B5EF4-FFF2-40B4-BE49-F238E27FC236}">
+                <a16:creationId xmlns:a16="http://schemas.microsoft.com/office/drawing/2014/main" id="{9EC73339-8B3D-25F4-18D5-E5821CB7CE8B}"/>
+              </a:ext>
+            </a:extLst>
+          </p:cNvPr>
+          <p:cNvSpPr/>
+          <p:nvPr/>
+        </p:nvSpPr>
+        <p:spPr>
+          <a:xfrm>
+            <a:off x="607274" y="5661088"/>
+            <a:ext cx="3711020" cy="914400"/>
+          </a:xfrm>
+          <a:prstGeom prst="rect">
+            <a:avLst/>
+          </a:prstGeom>
+        </p:spPr>
+        <p:style>
+          <a:lnRef idx="2">
+            <a:schemeClr val="accent1">
+              <a:shade val="15000"/>
+            </a:schemeClr>
+          </a:lnRef>
+          <a:fillRef idx="1">
+            <a:schemeClr val="accent1"/>
+          </a:fillRef>
+          <a:effectRef idx="0">
+            <a:schemeClr val="accent1"/>
+          </a:effectRef>
+          <a:fontRef idx="minor">
+            <a:schemeClr val="lt1"/>
+          </a:fontRef>
+        </p:style>
+        <p:txBody>
+          <a:bodyPr rtlCol="0" anchor="ctr"/>
+          <a:lstStyle/>
+          <a:p>
+            <a:pPr algn="ctr"/>
+            <a:r>
+              <a:rPr lang="en-US" noProof="0" dirty="0" err="1"/>
+              <a:t>Noarr</a:t>
+            </a:r>
+            <a:r>
+              <a:rPr lang="en-US" noProof="0" dirty="0"/>
+              <a:t> tuning</a:t>
+            </a:r>
+          </a:p>
+        </p:txBody>
+      </p:sp>
+      <p:sp>
+        <p:nvSpPr>
+          <p:cNvPr id="23" name="Rectangle 22">
+            <a:extLst>
+              <a:ext uri="{FF2B5EF4-FFF2-40B4-BE49-F238E27FC236}">
+                <a16:creationId xmlns:a16="http://schemas.microsoft.com/office/drawing/2014/main" id="{63EC4F51-D7C0-1DFC-E94E-75AE185B7CC1}"/>
+              </a:ext>
+            </a:extLst>
+          </p:cNvPr>
+          <p:cNvSpPr/>
+          <p:nvPr/>
+        </p:nvSpPr>
+        <p:spPr>
+          <a:xfrm>
+            <a:off x="759674" y="5813488"/>
+            <a:ext cx="3711020" cy="914400"/>
+          </a:xfrm>
+          <a:prstGeom prst="rect">
+            <a:avLst/>
+          </a:prstGeom>
+        </p:spPr>
+        <p:style>
+          <a:lnRef idx="2">
+            <a:schemeClr val="accent1">
+              <a:shade val="15000"/>
+            </a:schemeClr>
+          </a:lnRef>
+          <a:fillRef idx="1">
+            <a:schemeClr val="accent1"/>
+          </a:fillRef>
+          <a:effectRef idx="0">
+            <a:schemeClr val="accent1"/>
+          </a:effectRef>
+          <a:fontRef idx="minor">
+            <a:schemeClr val="lt1"/>
+          </a:fontRef>
+        </p:style>
+        <p:txBody>
+          <a:bodyPr rtlCol="0" anchor="ctr"/>
+          <a:lstStyle/>
+          <a:p>
+            <a:pPr algn="ctr"/>
+            <a:r>
+              <a:rPr lang="en-US" noProof="0" dirty="0" err="1"/>
+              <a:t>Noarr</a:t>
+            </a:r>
+            <a:r>
+              <a:rPr lang="en-US" noProof="0" dirty="0"/>
+              <a:t>-MPI</a:t>
+            </a:r>
+          </a:p>
+        </p:txBody>
+      </p:sp>
+      <p:sp>
+        <p:nvSpPr>
+          <p:cNvPr id="25" name="Rectangle 24">
+            <a:extLst>
+              <a:ext uri="{FF2B5EF4-FFF2-40B4-BE49-F238E27FC236}">
+                <a16:creationId xmlns:a16="http://schemas.microsoft.com/office/drawing/2014/main" id="{B7D64168-E19F-C04D-293D-CB07E85D29DA}"/>
+              </a:ext>
+            </a:extLst>
+          </p:cNvPr>
+          <p:cNvSpPr/>
+          <p:nvPr/>
+        </p:nvSpPr>
+        <p:spPr>
+          <a:xfrm>
+            <a:off x="4853138" y="5424788"/>
+            <a:ext cx="3711020" cy="914400"/>
+          </a:xfrm>
+          <a:prstGeom prst="rect">
+            <a:avLst/>
+          </a:prstGeom>
+        </p:spPr>
+        <p:style>
+          <a:lnRef idx="2">
+            <a:schemeClr val="accent1">
+              <a:shade val="15000"/>
+            </a:schemeClr>
+          </a:lnRef>
+          <a:fillRef idx="1">
+            <a:schemeClr val="accent1"/>
+          </a:fillRef>
+          <a:effectRef idx="0">
+            <a:schemeClr val="accent1"/>
+          </a:effectRef>
+          <a:fontRef idx="minor">
+            <a:schemeClr val="lt1"/>
+          </a:fontRef>
+        </p:style>
+        <p:txBody>
+          <a:bodyPr rtlCol="0" anchor="ctr"/>
+          <a:lstStyle/>
+          <a:p>
+            <a:pPr algn="ctr"/>
+            <a:r>
+              <a:rPr lang="en-US" noProof="0" dirty="0" err="1"/>
+              <a:t>Cellato</a:t>
+            </a:r>
+            <a:endParaRPr lang="en-US" noProof="0" dirty="0"/>
+          </a:p>
+        </p:txBody>
+      </p:sp>
+    </p:spTree>
+    <p:extLst>
+      <p:ext uri="{BB962C8B-B14F-4D97-AF65-F5344CB8AC3E}">
+        <p14:creationId xmlns:p14="http://schemas.microsoft.com/office/powerpoint/2010/main" val="1745489699"/>
+      </p:ext>
+    </p:extLst>
+  </p:cSld>
+  <p:clrMapOvr>
+    <a:masterClrMapping/>
+  </p:clrMapOvr>
+</p:sld>
+</file>
+
+<file path=ppt/slides/slide26.xml><?xml version="1.0" encoding="utf-8"?>
+<p:sld xmlns:a="http://schemas.openxmlformats.org/drawingml/2006/main" xmlns:r="http://schemas.openxmlformats.org/officeDocument/2006/relationships" xmlns:p="http://schemas.openxmlformats.org/presentationml/2006/main">
+  <p:cSld>
+    <p:spTree>
+      <p:nvGrpSpPr>
+        <p:cNvPr id="1" name=""/>
+        <p:cNvGrpSpPr/>
+        <p:nvPr/>
+      </p:nvGrpSpPr>
+      <p:grpSpPr>
+        <a:xfrm>
+          <a:off x="0" y="0"/>
+          <a:ext cx="0" cy="0"/>
+          <a:chOff x="0" y="0"/>
+          <a:chExt cx="0" cy="0"/>
+        </a:xfrm>
+      </p:grpSpPr>
+      <p:sp>
+        <p:nvSpPr>
+          <p:cNvPr id="2" name="Title 1">
+            <a:extLst>
+              <a:ext uri="{FF2B5EF4-FFF2-40B4-BE49-F238E27FC236}">
                 <a16:creationId xmlns:a16="http://schemas.microsoft.com/office/drawing/2014/main" id="{63B07F39-5957-124B-D20D-4A155E0E07D1}"/>
               </a:ext>
             </a:extLst>
@@ -7113,7 +7902,7 @@
 </p:sld>
 </file>
 
-<file path=ppt/slides/slide24.xml><?xml version="1.0" encoding="utf-8"?>
+<file path=ppt/slides/slide27.xml><?xml version="1.0" encoding="utf-8"?>
 <p:sld xmlns:a="http://schemas.openxmlformats.org/drawingml/2006/main" xmlns:r="http://schemas.openxmlformats.org/officeDocument/2006/relationships" xmlns:p="http://schemas.openxmlformats.org/presentationml/2006/main">
   <p:cSld>
     <p:spTree>
@@ -12518,7 +13307,7 @@
 </file>
 
 <file path=ppt/slides/slide9.xml><?xml version="1.0" encoding="utf-8"?>
-<p:sld xmlns:a="http://schemas.openxmlformats.org/drawingml/2006/main" xmlns:r="http://schemas.openxmlformats.org/officeDocument/2006/relationships" xmlns:p="http://schemas.openxmlformats.org/presentationml/2006/main">
+<p:sld xmlns:a="http://schemas.openxmlformats.org/drawingml/2006/main" xmlns:r="http://schemas.openxmlformats.org/officeDocument/2006/relationships" xmlns:p="http://schemas.openxmlformats.org/presentationml/2006/main" show="0">
   <p:cSld>
     <p:spTree>
       <p:nvGrpSpPr>

--- a/slides/Optimizing Memory Layouts and Traversal Orders in High-Performance Computing.pptx
+++ b/slides/Optimizing Memory Layouts and Traversal Orders in High-Performance Computing.pptx
@@ -5,7 +5,7 @@
     <p:sldMasterId id="2147483648" r:id="rId1"/>
   </p:sldMasterIdLst>
   <p:notesMasterIdLst>
-    <p:notesMasterId r:id="rId29"/>
+    <p:notesMasterId r:id="rId32"/>
   </p:notesMasterIdLst>
   <p:sldIdLst>
     <p:sldId id="256" r:id="rId2"/>
@@ -25,16 +25,19 @@
     <p:sldId id="265" r:id="rId16"/>
     <p:sldId id="258" r:id="rId17"/>
     <p:sldId id="273" r:id="rId18"/>
-    <p:sldId id="279" r:id="rId19"/>
-    <p:sldId id="274" r:id="rId20"/>
-    <p:sldId id="280" r:id="rId21"/>
-    <p:sldId id="259" r:id="rId22"/>
-    <p:sldId id="275" r:id="rId23"/>
-    <p:sldId id="276" r:id="rId24"/>
-    <p:sldId id="260" r:id="rId25"/>
-    <p:sldId id="266" r:id="rId26"/>
-    <p:sldId id="261" r:id="rId27"/>
-    <p:sldId id="262" r:id="rId28"/>
+    <p:sldId id="286" r:id="rId19"/>
+    <p:sldId id="279" r:id="rId20"/>
+    <p:sldId id="274" r:id="rId21"/>
+    <p:sldId id="287" r:id="rId22"/>
+    <p:sldId id="280" r:id="rId23"/>
+    <p:sldId id="259" r:id="rId24"/>
+    <p:sldId id="275" r:id="rId25"/>
+    <p:sldId id="288" r:id="rId26"/>
+    <p:sldId id="276" r:id="rId27"/>
+    <p:sldId id="260" r:id="rId28"/>
+    <p:sldId id="266" r:id="rId29"/>
+    <p:sldId id="261" r:id="rId30"/>
+    <p:sldId id="262" r:id="rId31"/>
   </p:sldIdLst>
   <p:sldSz cx="12192000" cy="6858000"/>
   <p:notesSz cx="6858000" cy="9144000"/>
@@ -159,8 +162,10 @@
             <p14:sldId id="265"/>
             <p14:sldId id="258"/>
             <p14:sldId id="273"/>
+            <p14:sldId id="286"/>
             <p14:sldId id="279"/>
             <p14:sldId id="274"/>
+            <p14:sldId id="287"/>
             <p14:sldId id="280"/>
           </p14:sldIdLst>
         </p14:section>
@@ -168,6 +173,7 @@
           <p14:sldIdLst>
             <p14:sldId id="259"/>
             <p14:sldId id="275"/>
+            <p14:sldId id="288"/>
             <p14:sldId id="276"/>
           </p14:sldIdLst>
         </p14:section>
@@ -820,6 +826,518 @@
     <p:extLst>
       <p:ext uri="{BB962C8B-B14F-4D97-AF65-F5344CB8AC3E}">
         <p14:creationId xmlns:p14="http://schemas.microsoft.com/office/powerpoint/2010/main" val="936605202"/>
+      </p:ext>
+    </p:extLst>
+  </p:cSld>
+  <p:clrMapOvr>
+    <a:masterClrMapping/>
+  </p:clrMapOvr>
+</p:notes>
+</file>
+
+<file path=ppt/notesSlides/notesSlide11.xml><?xml version="1.0" encoding="utf-8"?>
+<p:notes xmlns:a="http://schemas.openxmlformats.org/drawingml/2006/main" xmlns:r="http://schemas.openxmlformats.org/officeDocument/2006/relationships" xmlns:p="http://schemas.openxmlformats.org/presentationml/2006/main">
+  <p:cSld>
+    <p:spTree>
+      <p:nvGrpSpPr>
+        <p:cNvPr id="1" name=""/>
+        <p:cNvGrpSpPr/>
+        <p:nvPr/>
+      </p:nvGrpSpPr>
+      <p:grpSpPr>
+        <a:xfrm>
+          <a:off x="0" y="0"/>
+          <a:ext cx="0" cy="0"/>
+          <a:chOff x="0" y="0"/>
+          <a:chExt cx="0" cy="0"/>
+        </a:xfrm>
+      </p:grpSpPr>
+      <p:sp>
+        <p:nvSpPr>
+          <p:cNvPr id="2" name="Slide Image Placeholder 1"/>
+          <p:cNvSpPr>
+            <a:spLocks noGrp="1" noRot="1" noChangeAspect="1"/>
+          </p:cNvSpPr>
+          <p:nvPr>
+            <p:ph type="sldImg"/>
+          </p:nvPr>
+        </p:nvSpPr>
+        <p:spPr/>
+      </p:sp>
+      <p:sp>
+        <p:nvSpPr>
+          <p:cNvPr id="3" name="Notes Placeholder 2"/>
+          <p:cNvSpPr>
+            <a:spLocks noGrp="1"/>
+          </p:cNvSpPr>
+          <p:nvPr>
+            <p:ph type="body" idx="1"/>
+          </p:nvPr>
+        </p:nvSpPr>
+        <p:spPr/>
+        <p:txBody>
+          <a:bodyPr/>
+          <a:lstStyle/>
+          <a:p>
+            <a:r>
+              <a:rPr lang="en-US" dirty="0"/>
+              <a:t>(HPC?)</a:t>
+            </a:r>
+            <a:br>
+              <a:rPr lang="en-US" dirty="0"/>
+            </a:br>
+            <a:r>
+              <a:rPr lang="en-US" dirty="0"/>
+              <a:t>Since many scientific computing algorithms run in a distributed manner on larger clusters, which further complicates the design,</a:t>
+            </a:r>
+            <a:br>
+              <a:rPr lang="en-US" dirty="0"/>
+            </a:br>
+            <a:r>
+              <a:rPr lang="en-US" dirty="0"/>
+              <a:t>we have investigated how the principles from the abstractions work in the context of distributed computing.</a:t>
+            </a:r>
+          </a:p>
+          <a:p>
+            <a:endParaRPr lang="en-US" dirty="0"/>
+          </a:p>
+          <a:p>
+            <a:r>
+              <a:rPr lang="en-US" dirty="0"/>
+              <a:t>For this, we have chosen MPI, which is the most predominant technology used to distribute general computing tasks in C++ (as well as Fortran).</a:t>
+            </a:r>
+          </a:p>
+          <a:p>
+            <a:endParaRPr lang="en-US" dirty="0"/>
+          </a:p>
+          <a:p>
+            <a:r>
+              <a:rPr lang="en-US" dirty="0"/>
+              <a:t>(data distribution patterns?)</a:t>
+            </a:r>
+          </a:p>
+          <a:p>
+            <a:r>
+              <a:rPr lang="en-US" dirty="0"/>
+              <a:t>We have observed that many communication patterns, as well as data scattering patterns, can be described using the same building blocks used for describing layout and traversal transformations.</a:t>
+            </a:r>
+          </a:p>
+          <a:p>
+            <a:endParaRPr lang="en-US" dirty="0"/>
+          </a:p>
+          <a:p>
+            <a:r>
+              <a:rPr lang="en-US" dirty="0"/>
+              <a:t>This extension of the abstractions allows binding various dimensions of layouts and traversals to specific MPI communicators (which can specify an abstract topology of computation nodes)</a:t>
+            </a:r>
+            <a:br>
+              <a:rPr lang="en-US" dirty="0"/>
+            </a:br>
+            <a:r>
+              <a:rPr lang="en-US" dirty="0"/>
+              <a:t>and layout specifications to native MPI types in such a way that they are communicated in a layout-agnostic way.</a:t>
+            </a:r>
+          </a:p>
+          <a:p>
+            <a:endParaRPr lang="en-US" dirty="0"/>
+          </a:p>
+          <a:p>
+            <a:r>
+              <a:rPr lang="en-US" dirty="0"/>
+              <a:t>This allows, for example, for automatic distribution of data that can then be computed locally, and the local results can be gathered to the final result.</a:t>
+            </a:r>
+          </a:p>
+        </p:txBody>
+      </p:sp>
+      <p:sp>
+        <p:nvSpPr>
+          <p:cNvPr id="4" name="Slide Number Placeholder 3"/>
+          <p:cNvSpPr>
+            <a:spLocks noGrp="1"/>
+          </p:cNvSpPr>
+          <p:nvPr>
+            <p:ph type="sldNum" sz="quarter" idx="5"/>
+          </p:nvPr>
+        </p:nvSpPr>
+        <p:spPr/>
+        <p:txBody>
+          <a:bodyPr/>
+          <a:lstStyle/>
+          <a:p>
+            <a:fld id="{FA8FD632-245B-410D-BCC4-8BF8D37AB67F}" type="slidenum">
+              <a:rPr lang="en-US" smtClean="0"/>
+              <a:t>18</a:t>
+            </a:fld>
+            <a:endParaRPr lang="en-US"/>
+          </a:p>
+        </p:txBody>
+      </p:sp>
+    </p:spTree>
+    <p:extLst>
+      <p:ext uri="{BB962C8B-B14F-4D97-AF65-F5344CB8AC3E}">
+        <p14:creationId xmlns:p14="http://schemas.microsoft.com/office/powerpoint/2010/main" val="2194942836"/>
+      </p:ext>
+    </p:extLst>
+  </p:cSld>
+  <p:clrMapOvr>
+    <a:masterClrMapping/>
+  </p:clrMapOvr>
+</p:notes>
+</file>
+
+<file path=ppt/notesSlides/notesSlide12.xml><?xml version="1.0" encoding="utf-8"?>
+<p:notes xmlns:a="http://schemas.openxmlformats.org/drawingml/2006/main" xmlns:r="http://schemas.openxmlformats.org/officeDocument/2006/relationships" xmlns:p="http://schemas.openxmlformats.org/presentationml/2006/main">
+  <p:cSld>
+    <p:spTree>
+      <p:nvGrpSpPr>
+        <p:cNvPr id="1" name=""/>
+        <p:cNvGrpSpPr/>
+        <p:nvPr/>
+      </p:nvGrpSpPr>
+      <p:grpSpPr>
+        <a:xfrm>
+          <a:off x="0" y="0"/>
+          <a:ext cx="0" cy="0"/>
+          <a:chOff x="0" y="0"/>
+          <a:chExt cx="0" cy="0"/>
+        </a:xfrm>
+      </p:grpSpPr>
+      <p:sp>
+        <p:nvSpPr>
+          <p:cNvPr id="2" name="Slide Image Placeholder 1"/>
+          <p:cNvSpPr>
+            <a:spLocks noGrp="1" noRot="1" noChangeAspect="1"/>
+          </p:cNvSpPr>
+          <p:nvPr>
+            <p:ph type="sldImg"/>
+          </p:nvPr>
+        </p:nvSpPr>
+        <p:spPr/>
+      </p:sp>
+      <p:sp>
+        <p:nvSpPr>
+          <p:cNvPr id="3" name="Notes Placeholder 2"/>
+          <p:cNvSpPr>
+            <a:spLocks noGrp="1"/>
+          </p:cNvSpPr>
+          <p:nvPr>
+            <p:ph type="body" idx="1"/>
+          </p:nvPr>
+        </p:nvSpPr>
+        <p:spPr/>
+        <p:txBody>
+          <a:bodyPr/>
+          <a:lstStyle/>
+          <a:p>
+            <a:r>
+              <a:rPr lang="en-US" dirty="0"/>
+              <a:t>In parallel with the earlier development, we have looked into whether the same design principles can be applied to more specific domains.</a:t>
+            </a:r>
+          </a:p>
+          <a:p>
+            <a:endParaRPr lang="en-US" dirty="0"/>
+          </a:p>
+          <a:p>
+            <a:r>
+              <a:rPr lang="en-US" dirty="0"/>
+              <a:t>(Why are they cool? Is that just a random area?)</a:t>
+            </a:r>
+          </a:p>
+          <a:p>
+            <a:r>
+              <a:rPr lang="en-US" dirty="0"/>
+              <a:t>One domain of our particular interest was Cellular Automata simulation. These can be characterized as stencil computations on grids where each cell has a discrete state space.</a:t>
+            </a:r>
+          </a:p>
+          <a:p>
+            <a:r>
+              <a:rPr lang="en-US" dirty="0"/>
+              <a:t>Such computations are characterized by the following properties:</a:t>
+            </a:r>
+          </a:p>
+          <a:p>
+            <a:pPr marL="171450" indent="-171450">
+              <a:buFontTx/>
+              <a:buChar char="-"/>
+            </a:pPr>
+            <a:r>
+              <a:rPr lang="en-US" dirty="0"/>
+              <a:t>The grid (may be multidimensional; commonly 2D or 3D rectangular) &lt;- image</a:t>
+            </a:r>
+          </a:p>
+          <a:p>
+            <a:pPr marL="171450" indent="-171450">
+              <a:buFontTx/>
+              <a:buChar char="-"/>
+            </a:pPr>
+            <a:r>
+              <a:rPr lang="en-US" dirty="0"/>
+              <a:t>Definition of the neighborhood of each cell (typically Moore or von Neumann neighborhood) &lt;- image</a:t>
+            </a:r>
+          </a:p>
+          <a:p>
+            <a:pPr marL="171450" indent="-171450">
+              <a:buFontTx/>
+              <a:buChar char="-"/>
+            </a:pPr>
+            <a:r>
+              <a:rPr lang="en-US" dirty="0"/>
+              <a:t>Definition of the computation – this involves defining the state space for the cells and the update rule that depends on the neighborhood and updates the cell state</a:t>
+            </a:r>
+          </a:p>
+          <a:p>
+            <a:pPr marL="171450" indent="-171450">
+              <a:buFontTx/>
+              <a:buChar char="-"/>
+            </a:pPr>
+            <a:endParaRPr lang="en-US" dirty="0"/>
+          </a:p>
+          <a:p>
+            <a:pPr marL="0" indent="0">
+              <a:buFontTx/>
+              <a:buNone/>
+            </a:pPr>
+            <a:r>
+              <a:rPr lang="en-US" dirty="0"/>
+              <a:t>The computation then involves updates of the grid in discrete time steps.</a:t>
+            </a:r>
+          </a:p>
+          <a:p>
+            <a:pPr marL="0" indent="0">
+              <a:buFontTx/>
+              <a:buNone/>
+            </a:pPr>
+            <a:endParaRPr lang="en-US" dirty="0"/>
+          </a:p>
+          <a:p>
+            <a:pPr marL="0" indent="0">
+              <a:buFontTx/>
+              <a:buNone/>
+            </a:pPr>
+            <a:r>
+              <a:rPr lang="en-US" dirty="0"/>
+              <a:t>---</a:t>
+            </a:r>
+          </a:p>
+          <a:p>
+            <a:pPr marL="0" indent="0">
+              <a:buFontTx/>
+              <a:buNone/>
+            </a:pPr>
+            <a:endParaRPr lang="en-US" dirty="0"/>
+          </a:p>
+          <a:p>
+            <a:pPr marL="0" indent="0">
+              <a:buFontTx/>
+              <a:buNone/>
+            </a:pPr>
+            <a:r>
+              <a:rPr lang="en-US" dirty="0"/>
+              <a:t>We have found out that a very impressive speedup of these computations can be achieved by applying the earlier principles of layout- and traversal-agnostic design on a slightly deeper level.</a:t>
+            </a:r>
+          </a:p>
+          <a:p>
+            <a:pPr marL="0" indent="0">
+              <a:buFontTx/>
+              <a:buNone/>
+            </a:pPr>
+            <a:endParaRPr lang="en-US" dirty="0"/>
+          </a:p>
+          <a:p>
+            <a:pPr marL="0" indent="0">
+              <a:buFontTx/>
+              <a:buNone/>
+            </a:pPr>
+            <a:r>
+              <a:rPr lang="en-US" dirty="0"/>
+              <a:t>We can specify the update rule in an abstract way that is agnostic to the whole evaluation (including layouts as well as specific instructions), then we can pair this specification with templated components that automatically implement an efficient computation of the automaton.</a:t>
+            </a:r>
+          </a:p>
+          <a:p>
+            <a:pPr marL="0" indent="0">
+              <a:buFontTx/>
+              <a:buNone/>
+            </a:pPr>
+            <a:r>
+              <a:rPr lang="en-US" dirty="0"/>
+              <a:t>For this, we have devised 4 separate abstractions (components):</a:t>
+            </a:r>
+          </a:p>
+          <a:p>
+            <a:pPr marL="171450" indent="-171450">
+              <a:buFontTx/>
+              <a:buChar char="-"/>
+            </a:pPr>
+            <a:r>
+              <a:rPr lang="en-US" dirty="0"/>
+              <a:t>Memory layout:</a:t>
+            </a:r>
+          </a:p>
+          <a:p>
+            <a:pPr marL="171450" indent="-171450">
+              <a:buFontTx/>
+              <a:buChar char="-"/>
+            </a:pPr>
+            <a:r>
+              <a:rPr lang="en-US" dirty="0"/>
+              <a:t>Evaluator:</a:t>
+            </a:r>
+          </a:p>
+          <a:p>
+            <a:pPr marL="171450" indent="-171450">
+              <a:buFontTx/>
+              <a:buChar char="-"/>
+            </a:pPr>
+            <a:r>
+              <a:rPr lang="en-US" dirty="0"/>
+              <a:t>Traverser:</a:t>
+            </a:r>
+          </a:p>
+          <a:p>
+            <a:pPr marL="171450" indent="-171450">
+              <a:buFontTx/>
+              <a:buChar char="-"/>
+            </a:pPr>
+            <a:endParaRPr lang="en-US" dirty="0"/>
+          </a:p>
+          <a:p>
+            <a:pPr marL="0" indent="0">
+              <a:buFontTx/>
+              <a:buNone/>
+            </a:pPr>
+            <a:r>
+              <a:rPr lang="en-US" dirty="0"/>
+              <a:t>This enables faster development and prototyping of the automatons, and simplifies experimental exploration of different optimization techniques</a:t>
+            </a:r>
+          </a:p>
+        </p:txBody>
+      </p:sp>
+      <p:sp>
+        <p:nvSpPr>
+          <p:cNvPr id="4" name="Slide Number Placeholder 3"/>
+          <p:cNvSpPr>
+            <a:spLocks noGrp="1"/>
+          </p:cNvSpPr>
+          <p:nvPr>
+            <p:ph type="sldNum" sz="quarter" idx="5"/>
+          </p:nvPr>
+        </p:nvSpPr>
+        <p:spPr/>
+        <p:txBody>
+          <a:bodyPr/>
+          <a:lstStyle/>
+          <a:p>
+            <a:fld id="{FA8FD632-245B-410D-BCC4-8BF8D37AB67F}" type="slidenum">
+              <a:rPr lang="en-US" smtClean="0"/>
+              <a:t>21</a:t>
+            </a:fld>
+            <a:endParaRPr lang="en-US"/>
+          </a:p>
+        </p:txBody>
+      </p:sp>
+    </p:spTree>
+    <p:extLst>
+      <p:ext uri="{BB962C8B-B14F-4D97-AF65-F5344CB8AC3E}">
+        <p14:creationId xmlns:p14="http://schemas.microsoft.com/office/powerpoint/2010/main" val="3622550000"/>
+      </p:ext>
+    </p:extLst>
+  </p:cSld>
+  <p:clrMapOvr>
+    <a:masterClrMapping/>
+  </p:clrMapOvr>
+</p:notes>
+</file>
+
+<file path=ppt/notesSlides/notesSlide13.xml><?xml version="1.0" encoding="utf-8"?>
+<p:notes xmlns:a="http://schemas.openxmlformats.org/drawingml/2006/main" xmlns:r="http://schemas.openxmlformats.org/officeDocument/2006/relationships" xmlns:p="http://schemas.openxmlformats.org/presentationml/2006/main">
+  <p:cSld>
+    <p:spTree>
+      <p:nvGrpSpPr>
+        <p:cNvPr id="1" name=""/>
+        <p:cNvGrpSpPr/>
+        <p:nvPr/>
+      </p:nvGrpSpPr>
+      <p:grpSpPr>
+        <a:xfrm>
+          <a:off x="0" y="0"/>
+          <a:ext cx="0" cy="0"/>
+          <a:chOff x="0" y="0"/>
+          <a:chExt cx="0" cy="0"/>
+        </a:xfrm>
+      </p:grpSpPr>
+      <p:sp>
+        <p:nvSpPr>
+          <p:cNvPr id="2" name="Slide Image Placeholder 1"/>
+          <p:cNvSpPr>
+            <a:spLocks noGrp="1" noRot="1" noChangeAspect="1"/>
+          </p:cNvSpPr>
+          <p:nvPr>
+            <p:ph type="sldImg"/>
+          </p:nvPr>
+        </p:nvSpPr>
+        <p:spPr/>
+      </p:sp>
+      <p:sp>
+        <p:nvSpPr>
+          <p:cNvPr id="3" name="Notes Placeholder 2"/>
+          <p:cNvSpPr>
+            <a:spLocks noGrp="1"/>
+          </p:cNvSpPr>
+          <p:nvPr>
+            <p:ph type="body" idx="1"/>
+          </p:nvPr>
+        </p:nvSpPr>
+        <p:spPr/>
+        <p:txBody>
+          <a:bodyPr/>
+          <a:lstStyle/>
+          <a:p>
+            <a:r>
+              <a:rPr lang="en-US" dirty="0"/>
+              <a:t>(case study?) </a:t>
+            </a:r>
+            <a:br>
+              <a:rPr lang="en-US" dirty="0"/>
+            </a:br>
+            <a:r>
+              <a:rPr lang="en-US" dirty="0"/>
+              <a:t>A slight detour from our regular schedule of abstractions is our study of LLMs in HPC </a:t>
+            </a:r>
+            <a:r>
+              <a:rPr lang="en-US"/>
+              <a:t>algorithm design.</a:t>
+            </a:r>
+            <a:endParaRPr lang="en-US" dirty="0"/>
+          </a:p>
+        </p:txBody>
+      </p:sp>
+      <p:sp>
+        <p:nvSpPr>
+          <p:cNvPr id="4" name="Slide Number Placeholder 3"/>
+          <p:cNvSpPr>
+            <a:spLocks noGrp="1"/>
+          </p:cNvSpPr>
+          <p:nvPr>
+            <p:ph type="sldNum" sz="quarter" idx="5"/>
+          </p:nvPr>
+        </p:nvSpPr>
+        <p:spPr/>
+        <p:txBody>
+          <a:bodyPr/>
+          <a:lstStyle/>
+          <a:p>
+            <a:fld id="{FA8FD632-245B-410D-BCC4-8BF8D37AB67F}" type="slidenum">
+              <a:rPr lang="en-US" smtClean="0"/>
+              <a:t>25</a:t>
+            </a:fld>
+            <a:endParaRPr lang="en-US"/>
+          </a:p>
+        </p:txBody>
+      </p:sp>
+    </p:spTree>
+    <p:extLst>
+      <p:ext uri="{BB962C8B-B14F-4D97-AF65-F5344CB8AC3E}">
+        <p14:creationId xmlns:p14="http://schemas.microsoft.com/office/powerpoint/2010/main" val="4235059812"/>
       </p:ext>
     </p:extLst>
   </p:cSld>
@@ -6005,7 +6523,7 @@
 </file>
 
 <file path=ppt/slides/slide17.xml><?xml version="1.0" encoding="utf-8"?>
-<p:sld xmlns:a="http://schemas.openxmlformats.org/drawingml/2006/main" xmlns:r="http://schemas.openxmlformats.org/officeDocument/2006/relationships" xmlns:p="http://schemas.openxmlformats.org/presentationml/2006/main">
+<p:sld xmlns:a="http://schemas.openxmlformats.org/drawingml/2006/main" xmlns:r="http://schemas.openxmlformats.org/officeDocument/2006/relationships" xmlns:p="http://schemas.openxmlformats.org/presentationml/2006/main" show="0">
   <p:cSld>
     <p:spTree>
       <p:nvGrpSpPr>
@@ -6153,7 +6671,7 @@
           <p:cNvPr id="2" name="Title 1">
             <a:extLst>
               <a:ext uri="{FF2B5EF4-FFF2-40B4-BE49-F238E27FC236}">
-                <a16:creationId xmlns:a16="http://schemas.microsoft.com/office/drawing/2014/main" id="{C4A9E796-E8D3-B4A5-DE7B-322F63386F74}"/>
+                <a16:creationId xmlns:a16="http://schemas.microsoft.com/office/drawing/2014/main" id="{A6D76DF5-558B-3919-32B0-4F3084964F76}"/>
               </a:ext>
             </a:extLst>
           </p:cNvPr>
@@ -6169,10 +6687,7 @@
           <a:bodyPr/>
           <a:lstStyle/>
           <a:p>
-            <a:r>
-              <a:rPr lang="en-US" dirty="0"/>
-              <a:t>Results</a:t>
-            </a:r>
+            <a:endParaRPr lang="en-US"/>
           </a:p>
         </p:txBody>
       </p:sp>
@@ -6181,7 +6696,7 @@
           <p:cNvPr id="3" name="Content Placeholder 2">
             <a:extLst>
               <a:ext uri="{FF2B5EF4-FFF2-40B4-BE49-F238E27FC236}">
-                <a16:creationId xmlns:a16="http://schemas.microsoft.com/office/drawing/2014/main" id="{DBE9D86D-018E-4C50-0EFA-D7C587660587}"/>
+                <a16:creationId xmlns:a16="http://schemas.microsoft.com/office/drawing/2014/main" id="{80667283-B3C4-C4F1-4079-B937054AF857}"/>
               </a:ext>
             </a:extLst>
           </p:cNvPr>
@@ -6204,7 +6719,7 @@
     </p:spTree>
     <p:extLst>
       <p:ext uri="{BB962C8B-B14F-4D97-AF65-F5344CB8AC3E}">
-        <p14:creationId xmlns:p14="http://schemas.microsoft.com/office/powerpoint/2010/main" val="202421867"/>
+        <p14:creationId xmlns:p14="http://schemas.microsoft.com/office/powerpoint/2010/main" val="3399022007"/>
       </p:ext>
     </p:extLst>
   </p:cSld>
@@ -6236,7 +6751,7 @@
           <p:cNvPr id="2" name="Title 1">
             <a:extLst>
               <a:ext uri="{FF2B5EF4-FFF2-40B4-BE49-F238E27FC236}">
-                <a16:creationId xmlns:a16="http://schemas.microsoft.com/office/drawing/2014/main" id="{FDB924F1-4B00-84E0-3832-4B100046AF51}"/>
+                <a16:creationId xmlns:a16="http://schemas.microsoft.com/office/drawing/2014/main" id="{C4A9E796-E8D3-B4A5-DE7B-322F63386F74}"/>
               </a:ext>
             </a:extLst>
           </p:cNvPr>
@@ -6253,8 +6768,8 @@
           <a:lstStyle/>
           <a:p>
             <a:r>
-              <a:rPr lang="en-US" noProof="0" dirty="0"/>
-              <a:t>Cellular automata</a:t>
+              <a:rPr lang="en-US" dirty="0"/>
+              <a:t>Results</a:t>
             </a:r>
           </a:p>
         </p:txBody>
@@ -6264,7 +6779,7 @@
           <p:cNvPr id="3" name="Content Placeholder 2">
             <a:extLst>
               <a:ext uri="{FF2B5EF4-FFF2-40B4-BE49-F238E27FC236}">
-                <a16:creationId xmlns:a16="http://schemas.microsoft.com/office/drawing/2014/main" id="{F22AF8FD-4C12-AFD8-ED43-50529A45C04D}"/>
+                <a16:creationId xmlns:a16="http://schemas.microsoft.com/office/drawing/2014/main" id="{DBE9D86D-018E-4C50-0EFA-D7C587660587}"/>
               </a:ext>
             </a:extLst>
           </p:cNvPr>
@@ -6280,59 +6795,14 @@
           <a:bodyPr/>
           <a:lstStyle/>
           <a:p>
-            <a:r>
-              <a:rPr lang="en-US" noProof="0" dirty="0"/>
-              <a:t>We noticed that CA commonly benefit from </a:t>
-            </a:r>
-            <a:r>
-              <a:rPr lang="en-US" noProof="0" dirty="0" err="1"/>
-              <a:t>templatable</a:t>
-            </a:r>
-            <a:r>
-              <a:rPr lang="en-US" noProof="0" dirty="0"/>
-              <a:t> design decisions</a:t>
-            </a:r>
-          </a:p>
-          <a:p>
-            <a:pPr lvl="1"/>
-            <a:r>
-              <a:rPr lang="en-US" dirty="0"/>
-              <a:t>Layout &amp; encoding options (! bit-packing)</a:t>
-            </a:r>
-          </a:p>
-          <a:p>
-            <a:pPr lvl="1"/>
-            <a:r>
-              <a:rPr lang="en-US" dirty="0"/>
-              <a:t>Evaluation options (! bit-wise vectorization)</a:t>
-            </a:r>
-          </a:p>
-          <a:p>
-            <a:pPr lvl="1"/>
-            <a:r>
-              <a:rPr lang="en-US" noProof="0" dirty="0"/>
-              <a:t>Traversal options (incl. parallelism)</a:t>
-            </a:r>
-          </a:p>
-          <a:p>
-            <a:r>
-              <a:rPr lang="en-US" noProof="0" dirty="0"/>
-              <a:t>Agnostic design of CA computation rules</a:t>
-            </a:r>
-          </a:p>
-          <a:p>
-            <a:r>
-              <a:rPr lang="en-US" dirty="0"/>
-              <a:t>Faster development, experimentation (optimization)</a:t>
-            </a:r>
-            <a:endParaRPr lang="en-US" noProof="0" dirty="0"/>
+            <a:endParaRPr lang="en-US"/>
           </a:p>
         </p:txBody>
       </p:sp>
     </p:spTree>
     <p:extLst>
       <p:ext uri="{BB962C8B-B14F-4D97-AF65-F5344CB8AC3E}">
-        <p14:creationId xmlns:p14="http://schemas.microsoft.com/office/powerpoint/2010/main" val="3466036462"/>
+        <p14:creationId xmlns:p14="http://schemas.microsoft.com/office/powerpoint/2010/main" val="202421867"/>
       </p:ext>
     </p:extLst>
   </p:cSld>
@@ -6655,6 +7125,134 @@
 </file>
 
 <file path=ppt/slides/slide20.xml><?xml version="1.0" encoding="utf-8"?>
+<p:sld xmlns:a="http://schemas.openxmlformats.org/drawingml/2006/main" xmlns:r="http://schemas.openxmlformats.org/officeDocument/2006/relationships" xmlns:p="http://schemas.openxmlformats.org/presentationml/2006/main" show="0">
+  <p:cSld>
+    <p:spTree>
+      <p:nvGrpSpPr>
+        <p:cNvPr id="1" name=""/>
+        <p:cNvGrpSpPr/>
+        <p:nvPr/>
+      </p:nvGrpSpPr>
+      <p:grpSpPr>
+        <a:xfrm>
+          <a:off x="0" y="0"/>
+          <a:ext cx="0" cy="0"/>
+          <a:chOff x="0" y="0"/>
+          <a:chExt cx="0" cy="0"/>
+        </a:xfrm>
+      </p:grpSpPr>
+      <p:sp>
+        <p:nvSpPr>
+          <p:cNvPr id="2" name="Title 1">
+            <a:extLst>
+              <a:ext uri="{FF2B5EF4-FFF2-40B4-BE49-F238E27FC236}">
+                <a16:creationId xmlns:a16="http://schemas.microsoft.com/office/drawing/2014/main" id="{FDB924F1-4B00-84E0-3832-4B100046AF51}"/>
+              </a:ext>
+            </a:extLst>
+          </p:cNvPr>
+          <p:cNvSpPr>
+            <a:spLocks noGrp="1"/>
+          </p:cNvSpPr>
+          <p:nvPr>
+            <p:ph type="title"/>
+          </p:nvPr>
+        </p:nvSpPr>
+        <p:spPr/>
+        <p:txBody>
+          <a:bodyPr/>
+          <a:lstStyle/>
+          <a:p>
+            <a:r>
+              <a:rPr lang="en-US" noProof="0" dirty="0"/>
+              <a:t>Cellular automata</a:t>
+            </a:r>
+          </a:p>
+        </p:txBody>
+      </p:sp>
+      <p:sp>
+        <p:nvSpPr>
+          <p:cNvPr id="3" name="Content Placeholder 2">
+            <a:extLst>
+              <a:ext uri="{FF2B5EF4-FFF2-40B4-BE49-F238E27FC236}">
+                <a16:creationId xmlns:a16="http://schemas.microsoft.com/office/drawing/2014/main" id="{F22AF8FD-4C12-AFD8-ED43-50529A45C04D}"/>
+              </a:ext>
+            </a:extLst>
+          </p:cNvPr>
+          <p:cNvSpPr>
+            <a:spLocks noGrp="1"/>
+          </p:cNvSpPr>
+          <p:nvPr>
+            <p:ph idx="1"/>
+          </p:nvPr>
+        </p:nvSpPr>
+        <p:spPr/>
+        <p:txBody>
+          <a:bodyPr/>
+          <a:lstStyle/>
+          <a:p>
+            <a:r>
+              <a:rPr lang="en-US" noProof="0" dirty="0"/>
+              <a:t>We noticed that CA commonly benefit from </a:t>
+            </a:r>
+            <a:r>
+              <a:rPr lang="en-US" noProof="0" dirty="0" err="1"/>
+              <a:t>templatable</a:t>
+            </a:r>
+            <a:r>
+              <a:rPr lang="en-US" noProof="0" dirty="0"/>
+              <a:t> design decisions</a:t>
+            </a:r>
+          </a:p>
+          <a:p>
+            <a:pPr lvl="1"/>
+            <a:r>
+              <a:rPr lang="en-US" dirty="0"/>
+              <a:t>Layout &amp; encoding options (! bit-packing)</a:t>
+            </a:r>
+          </a:p>
+          <a:p>
+            <a:pPr lvl="1"/>
+            <a:r>
+              <a:rPr lang="en-US" dirty="0"/>
+              <a:t>Evaluation options (! bit-wise vectorization)</a:t>
+            </a:r>
+          </a:p>
+          <a:p>
+            <a:pPr lvl="1"/>
+            <a:r>
+              <a:rPr lang="en-US" noProof="0" dirty="0"/>
+              <a:t>Traversal options (incl. parallelism)</a:t>
+            </a:r>
+          </a:p>
+          <a:p>
+            <a:r>
+              <a:rPr lang="en-US" noProof="0" dirty="0"/>
+              <a:t>Agnostic design of CA computation rules</a:t>
+            </a:r>
+          </a:p>
+          <a:p>
+            <a:r>
+              <a:rPr lang="en-US" dirty="0"/>
+              <a:t>Faster development, experimentation (optimization)</a:t>
+            </a:r>
+            <a:endParaRPr lang="en-US" noProof="0" dirty="0"/>
+          </a:p>
+        </p:txBody>
+      </p:sp>
+    </p:spTree>
+    <p:extLst>
+      <p:ext uri="{BB962C8B-B14F-4D97-AF65-F5344CB8AC3E}">
+        <p14:creationId xmlns:p14="http://schemas.microsoft.com/office/powerpoint/2010/main" val="3466036462"/>
+      </p:ext>
+    </p:extLst>
+  </p:cSld>
+  <p:clrMapOvr>
+    <a:masterClrMapping/>
+  </p:clrMapOvr>
+</p:sld>
+</file>
+
+<file path=ppt/slides/slide21.xml><?xml version="1.0" encoding="utf-8"?>
 <p:sld xmlns:a="http://schemas.openxmlformats.org/drawingml/2006/main" xmlns:r="http://schemas.openxmlformats.org/officeDocument/2006/relationships" xmlns:p="http://schemas.openxmlformats.org/presentationml/2006/main">
   <p:cSld>
     <p:spTree>
@@ -6676,7 +7274,7 @@
           <p:cNvPr id="2" name="Title 1">
             <a:extLst>
               <a:ext uri="{FF2B5EF4-FFF2-40B4-BE49-F238E27FC236}">
-                <a16:creationId xmlns:a16="http://schemas.microsoft.com/office/drawing/2014/main" id="{04F59CE6-2253-EE24-67C6-8EB494EB84BC}"/>
+                <a16:creationId xmlns:a16="http://schemas.microsoft.com/office/drawing/2014/main" id="{C2B8227E-92C1-58EB-DF13-B5786997FFC4}"/>
               </a:ext>
             </a:extLst>
           </p:cNvPr>
@@ -6692,10 +7290,7 @@
           <a:bodyPr/>
           <a:lstStyle/>
           <a:p>
-            <a:r>
-              <a:rPr lang="en-US" dirty="0"/>
-              <a:t>Results</a:t>
-            </a:r>
+            <a:endParaRPr lang="en-US"/>
           </a:p>
         </p:txBody>
       </p:sp>
@@ -6704,7 +7299,7 @@
           <p:cNvPr id="3" name="Content Placeholder 2">
             <a:extLst>
               <a:ext uri="{FF2B5EF4-FFF2-40B4-BE49-F238E27FC236}">
-                <a16:creationId xmlns:a16="http://schemas.microsoft.com/office/drawing/2014/main" id="{F1E705A3-4FDF-AB1A-A2C5-33B72A015964}"/>
+                <a16:creationId xmlns:a16="http://schemas.microsoft.com/office/drawing/2014/main" id="{EBA74A47-DB48-A852-0AED-B35ABEBAE0A9}"/>
               </a:ext>
             </a:extLst>
           </p:cNvPr>
@@ -6727,99 +7322,7 @@
     </p:spTree>
     <p:extLst>
       <p:ext uri="{BB962C8B-B14F-4D97-AF65-F5344CB8AC3E}">
-        <p14:creationId xmlns:p14="http://schemas.microsoft.com/office/powerpoint/2010/main" val="1310412197"/>
-      </p:ext>
-    </p:extLst>
-  </p:cSld>
-  <p:clrMapOvr>
-    <a:masterClrMapping/>
-  </p:clrMapOvr>
-</p:sld>
-</file>
-
-<file path=ppt/slides/slide21.xml><?xml version="1.0" encoding="utf-8"?>
-<p:sld xmlns:a="http://schemas.openxmlformats.org/drawingml/2006/main" xmlns:r="http://schemas.openxmlformats.org/officeDocument/2006/relationships" xmlns:p="http://schemas.openxmlformats.org/presentationml/2006/main" show="0">
-  <p:cSld>
-    <p:spTree>
-      <p:nvGrpSpPr>
-        <p:cNvPr id="1" name=""/>
-        <p:cNvGrpSpPr/>
-        <p:nvPr/>
-      </p:nvGrpSpPr>
-      <p:grpSpPr>
-        <a:xfrm>
-          <a:off x="0" y="0"/>
-          <a:ext cx="0" cy="0"/>
-          <a:chOff x="0" y="0"/>
-          <a:chExt cx="0" cy="0"/>
-        </a:xfrm>
-      </p:grpSpPr>
-      <p:sp>
-        <p:nvSpPr>
-          <p:cNvPr id="2" name="Title 1">
-            <a:extLst>
-              <a:ext uri="{FF2B5EF4-FFF2-40B4-BE49-F238E27FC236}">
-                <a16:creationId xmlns:a16="http://schemas.microsoft.com/office/drawing/2014/main" id="{1CFD8E19-FCBD-3C1F-9804-55F9EF315364}"/>
-              </a:ext>
-            </a:extLst>
-          </p:cNvPr>
-          <p:cNvSpPr>
-            <a:spLocks noGrp="1"/>
-          </p:cNvSpPr>
-          <p:nvPr>
-            <p:ph type="title"/>
-          </p:nvPr>
-        </p:nvSpPr>
-        <p:spPr/>
-        <p:txBody>
-          <a:bodyPr/>
-          <a:lstStyle/>
-          <a:p>
-            <a:r>
-              <a:rPr lang="en-US" noProof="0" dirty="0"/>
-              <a:t>LLMs in algorithm design</a:t>
-            </a:r>
-          </a:p>
-        </p:txBody>
-      </p:sp>
-      <p:sp>
-        <p:nvSpPr>
-          <p:cNvPr id="3" name="Content Placeholder 2">
-            <a:extLst>
-              <a:ext uri="{FF2B5EF4-FFF2-40B4-BE49-F238E27FC236}">
-                <a16:creationId xmlns:a16="http://schemas.microsoft.com/office/drawing/2014/main" id="{64F2D09B-2F00-3457-9D41-D2EAB2BD84E5}"/>
-              </a:ext>
-            </a:extLst>
-          </p:cNvPr>
-          <p:cNvSpPr>
-            <a:spLocks noGrp="1"/>
-          </p:cNvSpPr>
-          <p:nvPr>
-            <p:ph idx="1"/>
-          </p:nvPr>
-        </p:nvSpPr>
-        <p:spPr/>
-        <p:txBody>
-          <a:bodyPr/>
-          <a:lstStyle/>
-          <a:p>
-            <a:r>
-              <a:rPr lang="en-US" noProof="0" dirty="0"/>
-              <a:t>Tutoring LLMs for CUDA optimization</a:t>
-            </a:r>
-          </a:p>
-          <a:p>
-            <a:r>
-              <a:rPr lang="en-US" noProof="0" dirty="0"/>
-              <a:t>LLMs and abstractions</a:t>
-            </a:r>
-          </a:p>
-        </p:txBody>
-      </p:sp>
-    </p:spTree>
-    <p:extLst>
-      <p:ext uri="{BB962C8B-B14F-4D97-AF65-F5344CB8AC3E}">
-        <p14:creationId xmlns:p14="http://schemas.microsoft.com/office/powerpoint/2010/main" val="645810162"/>
+        <p14:creationId xmlns:p14="http://schemas.microsoft.com/office/powerpoint/2010/main" val="2630539974"/>
       </p:ext>
     </p:extLst>
   </p:cSld>
@@ -6851,7 +7354,7 @@
           <p:cNvPr id="2" name="Title 1">
             <a:extLst>
               <a:ext uri="{FF2B5EF4-FFF2-40B4-BE49-F238E27FC236}">
-                <a16:creationId xmlns:a16="http://schemas.microsoft.com/office/drawing/2014/main" id="{A2284D79-2E52-80F7-0541-30A0EEC45CA4}"/>
+                <a16:creationId xmlns:a16="http://schemas.microsoft.com/office/drawing/2014/main" id="{04F59CE6-2253-EE24-67C6-8EB494EB84BC}"/>
               </a:ext>
             </a:extLst>
           </p:cNvPr>
@@ -6868,8 +7371,8 @@
           <a:lstStyle/>
           <a:p>
             <a:r>
-              <a:rPr lang="en-US" noProof="0" dirty="0"/>
-              <a:t>Tutoring LLMs</a:t>
+              <a:rPr lang="en-US" dirty="0"/>
+              <a:t>Results</a:t>
             </a:r>
           </a:p>
         </p:txBody>
@@ -6879,7 +7382,7 @@
           <p:cNvPr id="3" name="Content Placeholder 2">
             <a:extLst>
               <a:ext uri="{FF2B5EF4-FFF2-40B4-BE49-F238E27FC236}">
-                <a16:creationId xmlns:a16="http://schemas.microsoft.com/office/drawing/2014/main" id="{5EC62719-077B-686B-2F9B-914035C8221C}"/>
+                <a16:creationId xmlns:a16="http://schemas.microsoft.com/office/drawing/2014/main" id="{F1E705A3-4FDF-AB1A-A2C5-33B72A015964}"/>
               </a:ext>
             </a:extLst>
           </p:cNvPr>
@@ -6892,75 +7395,17 @@
         </p:nvSpPr>
         <p:spPr/>
         <p:txBody>
-          <a:bodyPr>
-            <a:normAutofit fontScale="92500" lnSpcReduction="20000"/>
-          </a:bodyPr>
+          <a:bodyPr/>
           <a:lstStyle/>
           <a:p>
-            <a:r>
-              <a:rPr lang="en-US" noProof="0" dirty="0"/>
-              <a:t>The goal was always better automation/generalization of design and tuning</a:t>
-            </a:r>
-          </a:p>
-          <a:p>
-            <a:r>
-              <a:rPr lang="en-US" dirty="0"/>
-              <a:t>LLMs started to be surprisingly competent code generators</a:t>
-            </a:r>
-          </a:p>
-          <a:p>
-            <a:pPr lvl="1"/>
-            <a:r>
-              <a:rPr lang="en-US" noProof="0" dirty="0"/>
-              <a:t>Not reliable, but extremely flexible, generalizable, simple to use (e.g., understanding natural language)</a:t>
-            </a:r>
-          </a:p>
-          <a:p>
-            <a:r>
-              <a:rPr lang="en-US" dirty="0"/>
-              <a:t>Core assumption for the study: LLMs are not very good in high-</a:t>
-            </a:r>
-            <a:r>
-              <a:rPr lang="en-US" dirty="0" err="1"/>
-              <a:t>lvl</a:t>
-            </a:r>
-            <a:r>
-              <a:rPr lang="en-US" dirty="0"/>
-              <a:t> decisions</a:t>
-            </a:r>
-          </a:p>
-          <a:p>
-            <a:r>
-              <a:rPr lang="en-US" noProof="0" dirty="0"/>
-              <a:t>Tutoring = improving quality of generated code by design suggestions/directions</a:t>
-            </a:r>
-          </a:p>
-          <a:p>
-            <a:r>
-              <a:rPr lang="en-US" dirty="0"/>
-              <a:t>Key findings:</a:t>
-            </a:r>
-          </a:p>
-          <a:p>
-            <a:pPr lvl="1"/>
-            <a:r>
-              <a:rPr lang="en-US" dirty="0"/>
-              <a:t>Intricate relationship between algorithm complexity and this effect on an LLM</a:t>
-            </a:r>
-          </a:p>
-          <a:p>
-            <a:pPr lvl="1"/>
-            <a:r>
-              <a:rPr lang="en-US" noProof="0" dirty="0"/>
-              <a:t>Improvement over time: the effect changes with each new model</a:t>
-            </a:r>
+            <a:endParaRPr lang="en-US"/>
           </a:p>
         </p:txBody>
       </p:sp>
     </p:spTree>
     <p:extLst>
       <p:ext uri="{BB962C8B-B14F-4D97-AF65-F5344CB8AC3E}">
-        <p14:creationId xmlns:p14="http://schemas.microsoft.com/office/powerpoint/2010/main" val="2667122292"/>
+        <p14:creationId xmlns:p14="http://schemas.microsoft.com/office/powerpoint/2010/main" val="1310412197"/>
       </p:ext>
     </p:extLst>
   </p:cSld>
@@ -6971,7 +7416,7 @@
 </file>
 
 <file path=ppt/slides/slide23.xml><?xml version="1.0" encoding="utf-8"?>
-<p:sld xmlns:a="http://schemas.openxmlformats.org/drawingml/2006/main" xmlns:r="http://schemas.openxmlformats.org/officeDocument/2006/relationships" xmlns:p="http://schemas.openxmlformats.org/presentationml/2006/main">
+<p:sld xmlns:a="http://schemas.openxmlformats.org/drawingml/2006/main" xmlns:r="http://schemas.openxmlformats.org/officeDocument/2006/relationships" xmlns:p="http://schemas.openxmlformats.org/presentationml/2006/main" show="0">
   <p:cSld>
     <p:spTree>
       <p:nvGrpSpPr>
@@ -6992,7 +7437,7 @@
           <p:cNvPr id="2" name="Title 1">
             <a:extLst>
               <a:ext uri="{FF2B5EF4-FFF2-40B4-BE49-F238E27FC236}">
-                <a16:creationId xmlns:a16="http://schemas.microsoft.com/office/drawing/2014/main" id="{F35C7E3E-09C8-2B79-8EE7-B8D1557191BE}"/>
+                <a16:creationId xmlns:a16="http://schemas.microsoft.com/office/drawing/2014/main" id="{1CFD8E19-FCBD-3C1F-9804-55F9EF315364}"/>
               </a:ext>
             </a:extLst>
           </p:cNvPr>
@@ -7010,7 +7455,7 @@
           <a:p>
             <a:r>
               <a:rPr lang="en-US" noProof="0" dirty="0"/>
-              <a:t>LLMs and abstractions</a:t>
+              <a:t>LLMs in algorithm design</a:t>
             </a:r>
           </a:p>
         </p:txBody>
@@ -7020,7 +7465,7 @@
           <p:cNvPr id="3" name="Content Placeholder 2">
             <a:extLst>
               <a:ext uri="{FF2B5EF4-FFF2-40B4-BE49-F238E27FC236}">
-                <a16:creationId xmlns:a16="http://schemas.microsoft.com/office/drawing/2014/main" id="{DAF33F66-B59C-C15E-3BD1-85602E9A1F9E}"/>
+                <a16:creationId xmlns:a16="http://schemas.microsoft.com/office/drawing/2014/main" id="{64F2D09B-2F00-3457-9D41-D2EAB2BD84E5}"/>
               </a:ext>
             </a:extLst>
           </p:cNvPr>
@@ -7038,39 +7483,21 @@
           <a:p>
             <a:r>
               <a:rPr lang="en-US" noProof="0" dirty="0"/>
-              <a:t>Key question: Layout- and traversal-agnostic abstractions help humans; do they help LLMs as well?</a:t>
-            </a:r>
-          </a:p>
-          <a:p>
-            <a:r>
-              <a:rPr lang="en-US" dirty="0"/>
-              <a:t>Key findings:</a:t>
-            </a:r>
-          </a:p>
-          <a:p>
-            <a:pPr lvl="1"/>
+              <a:t>Tutoring LLMs for CUDA optimization</a:t>
+            </a:r>
+          </a:p>
+          <a:p>
             <a:r>
               <a:rPr lang="en-US" noProof="0" dirty="0"/>
-              <a:t>Prompt specificity improves results much more</a:t>
-            </a:r>
-          </a:p>
-          <a:p>
-            <a:pPr lvl="1"/>
-            <a:r>
-              <a:rPr lang="en-US" dirty="0"/>
-              <a:t>LLMs more competent in pure C/C++</a:t>
-            </a:r>
-          </a:p>
-          <a:p>
-            <a:pPr lvl="1"/>
-            <a:endParaRPr lang="en-US" noProof="0" dirty="0"/>
+              <a:t>LLMs and abstractions</a:t>
+            </a:r>
           </a:p>
         </p:txBody>
       </p:sp>
     </p:spTree>
     <p:extLst>
       <p:ext uri="{BB962C8B-B14F-4D97-AF65-F5344CB8AC3E}">
-        <p14:creationId xmlns:p14="http://schemas.microsoft.com/office/powerpoint/2010/main" val="965653160"/>
+        <p14:creationId xmlns:p14="http://schemas.microsoft.com/office/powerpoint/2010/main" val="645810162"/>
       </p:ext>
     </p:extLst>
   </p:cSld>
@@ -7102,7 +7529,7 @@
           <p:cNvPr id="2" name="Title 1">
             <a:extLst>
               <a:ext uri="{FF2B5EF4-FFF2-40B4-BE49-F238E27FC236}">
-                <a16:creationId xmlns:a16="http://schemas.microsoft.com/office/drawing/2014/main" id="{928BD501-0287-7E9D-6C52-A86B98F9EB52}"/>
+                <a16:creationId xmlns:a16="http://schemas.microsoft.com/office/drawing/2014/main" id="{A2284D79-2E52-80F7-0541-30A0EEC45CA4}"/>
               </a:ext>
             </a:extLst>
           </p:cNvPr>
@@ -7119,10 +7546,9 @@
           <a:lstStyle/>
           <a:p>
             <a:r>
-              <a:rPr lang="en-US" noProof="0" dirty="0" err="1"/>
-              <a:t>Zahodit</a:t>
-            </a:r>
-            <a:endParaRPr lang="en-US" noProof="0" dirty="0"/>
+              <a:rPr lang="en-US" noProof="0" dirty="0"/>
+              <a:t>Tutoring LLMs</a:t>
+            </a:r>
           </a:p>
         </p:txBody>
       </p:sp>
@@ -7131,7 +7557,7 @@
           <p:cNvPr id="3" name="Content Placeholder 2">
             <a:extLst>
               <a:ext uri="{FF2B5EF4-FFF2-40B4-BE49-F238E27FC236}">
-                <a16:creationId xmlns:a16="http://schemas.microsoft.com/office/drawing/2014/main" id="{369E5D67-EA03-A5CA-2D82-199F178CE89C}"/>
+                <a16:creationId xmlns:a16="http://schemas.microsoft.com/office/drawing/2014/main" id="{5EC62719-077B-686B-2F9B-914035C8221C}"/>
               </a:ext>
             </a:extLst>
           </p:cNvPr>
@@ -7144,28 +7570,75 @@
         </p:nvSpPr>
         <p:spPr/>
         <p:txBody>
-          <a:bodyPr/>
+          <a:bodyPr>
+            <a:normAutofit fontScale="92500" lnSpcReduction="20000"/>
+          </a:bodyPr>
           <a:lstStyle/>
           <a:p>
             <a:r>
-              <a:rPr lang="en-US" noProof="0" dirty="0" err="1"/>
-              <a:t>Noarr</a:t>
-            </a:r>
-            <a:endParaRPr lang="en-US" noProof="0" dirty="0"/>
-          </a:p>
-          <a:p>
-            <a:r>
-              <a:rPr lang="en-US" noProof="0" dirty="0" err="1"/>
-              <a:t>Cellato</a:t>
-            </a:r>
-            <a:endParaRPr lang="en-US" noProof="0" dirty="0"/>
+              <a:rPr lang="en-US" noProof="0" dirty="0"/>
+              <a:t>The goal was always better automation/generalization of design and tuning</a:t>
+            </a:r>
+          </a:p>
+          <a:p>
+            <a:r>
+              <a:rPr lang="en-US" dirty="0"/>
+              <a:t>LLMs started to be surprisingly competent code generators</a:t>
+            </a:r>
+          </a:p>
+          <a:p>
+            <a:pPr lvl="1"/>
+            <a:r>
+              <a:rPr lang="en-US" noProof="0" dirty="0"/>
+              <a:t>Not reliable, but extremely flexible, generalizable, simple to use (e.g., understanding natural language)</a:t>
+            </a:r>
+          </a:p>
+          <a:p>
+            <a:r>
+              <a:rPr lang="en-US" dirty="0"/>
+              <a:t>Core assumption for the study: LLMs are not very good in high-</a:t>
+            </a:r>
+            <a:r>
+              <a:rPr lang="en-US" dirty="0" err="1"/>
+              <a:t>lvl</a:t>
+            </a:r>
+            <a:r>
+              <a:rPr lang="en-US" dirty="0"/>
+              <a:t> decisions</a:t>
+            </a:r>
+          </a:p>
+          <a:p>
+            <a:r>
+              <a:rPr lang="en-US" noProof="0" dirty="0"/>
+              <a:t>Tutoring = improving quality of generated code by design suggestions/directions</a:t>
+            </a:r>
+          </a:p>
+          <a:p>
+            <a:r>
+              <a:rPr lang="en-US" dirty="0"/>
+              <a:t>Key findings:</a:t>
+            </a:r>
+          </a:p>
+          <a:p>
+            <a:pPr lvl="1"/>
+            <a:r>
+              <a:rPr lang="en-US" dirty="0"/>
+              <a:t>Intricate relationship between algorithm complexity and this effect on an LLM</a:t>
+            </a:r>
+          </a:p>
+          <a:p>
+            <a:pPr lvl="1"/>
+            <a:r>
+              <a:rPr lang="en-US" noProof="0" dirty="0"/>
+              <a:t>Improvement over time: the effect changes with each new model</a:t>
+            </a:r>
           </a:p>
         </p:txBody>
       </p:sp>
     </p:spTree>
     <p:extLst>
       <p:ext uri="{BB962C8B-B14F-4D97-AF65-F5344CB8AC3E}">
-        <p14:creationId xmlns:p14="http://schemas.microsoft.com/office/powerpoint/2010/main" val="4085122203"/>
+        <p14:creationId xmlns:p14="http://schemas.microsoft.com/office/powerpoint/2010/main" val="2667122292"/>
       </p:ext>
     </p:extLst>
   </p:cSld>
@@ -7197,7 +7670,7 @@
           <p:cNvPr id="2" name="Title 1">
             <a:extLst>
               <a:ext uri="{FF2B5EF4-FFF2-40B4-BE49-F238E27FC236}">
-                <a16:creationId xmlns:a16="http://schemas.microsoft.com/office/drawing/2014/main" id="{6447B745-9B50-DD90-5161-BD2A06CEA44B}"/>
+                <a16:creationId xmlns:a16="http://schemas.microsoft.com/office/drawing/2014/main" id="{E0D1D975-7AEF-41C8-9128-2012304DE08F}"/>
               </a:ext>
             </a:extLst>
           </p:cNvPr>
@@ -7213,573 +7686,39 @@
           <a:bodyPr/>
           <a:lstStyle/>
           <a:p>
-            <a:r>
-              <a:rPr lang="en-US" noProof="0" dirty="0"/>
-              <a:t>Contribution map</a:t>
-            </a:r>
-          </a:p>
-        </p:txBody>
-      </p:sp>
-      <p:sp>
-        <p:nvSpPr>
-          <p:cNvPr id="5" name="Rectangle 4">
+            <a:endParaRPr lang="en-US"/>
+          </a:p>
+        </p:txBody>
+      </p:sp>
+      <p:sp>
+        <p:nvSpPr>
+          <p:cNvPr id="3" name="Content Placeholder 2">
             <a:extLst>
               <a:ext uri="{FF2B5EF4-FFF2-40B4-BE49-F238E27FC236}">
-                <a16:creationId xmlns:a16="http://schemas.microsoft.com/office/drawing/2014/main" id="{CB7F8197-FC2F-9C2A-050C-CCCB46D86C79}"/>
+                <a16:creationId xmlns:a16="http://schemas.microsoft.com/office/drawing/2014/main" id="{698A8FBF-DBBB-B9D8-3585-DB6EB62FE7E4}"/>
               </a:ext>
             </a:extLst>
           </p:cNvPr>
-          <p:cNvSpPr/>
-          <p:nvPr/>
-        </p:nvSpPr>
-        <p:spPr>
-          <a:xfrm>
-            <a:off x="4240490" y="1406732"/>
-            <a:ext cx="3711020" cy="914400"/>
-          </a:xfrm>
-          <a:prstGeom prst="rect">
-            <a:avLst/>
-          </a:prstGeom>
-        </p:spPr>
-        <p:style>
-          <a:lnRef idx="2">
-            <a:schemeClr val="accent1">
-              <a:shade val="15000"/>
-            </a:schemeClr>
-          </a:lnRef>
-          <a:fillRef idx="1">
-            <a:schemeClr val="accent1"/>
-          </a:fillRef>
-          <a:effectRef idx="0">
-            <a:schemeClr val="accent1"/>
-          </a:effectRef>
-          <a:fontRef idx="minor">
-            <a:schemeClr val="lt1"/>
-          </a:fontRef>
-        </p:style>
-        <p:txBody>
-          <a:bodyPr rtlCol="0" anchor="ctr"/>
+          <p:cNvSpPr>
+            <a:spLocks noGrp="1"/>
+          </p:cNvSpPr>
+          <p:nvPr>
+            <p:ph idx="1"/>
+          </p:nvPr>
+        </p:nvSpPr>
+        <p:spPr/>
+        <p:txBody>
+          <a:bodyPr/>
           <a:lstStyle/>
           <a:p>
-            <a:pPr algn="ctr"/>
-            <a:r>
-              <a:rPr lang="en-US" noProof="0" dirty="0"/>
-              <a:t>Separate algorithm design from performance optimization</a:t>
-            </a:r>
-          </a:p>
-        </p:txBody>
-      </p:sp>
-      <p:sp>
-        <p:nvSpPr>
-          <p:cNvPr id="7" name="Rectangle 6">
-            <a:extLst>
-              <a:ext uri="{FF2B5EF4-FFF2-40B4-BE49-F238E27FC236}">
-                <a16:creationId xmlns:a16="http://schemas.microsoft.com/office/drawing/2014/main" id="{60EC2A1A-B720-84BC-76D5-4751C09EA61A}"/>
-              </a:ext>
-            </a:extLst>
-          </p:cNvPr>
-          <p:cNvSpPr/>
-          <p:nvPr/>
-        </p:nvSpPr>
-        <p:spPr>
-          <a:xfrm>
-            <a:off x="150074" y="2971800"/>
-            <a:ext cx="3711020" cy="914400"/>
-          </a:xfrm>
-          <a:prstGeom prst="rect">
-            <a:avLst/>
-          </a:prstGeom>
-        </p:spPr>
-        <p:style>
-          <a:lnRef idx="2">
-            <a:schemeClr val="accent1">
-              <a:shade val="15000"/>
-            </a:schemeClr>
-          </a:lnRef>
-          <a:fillRef idx="1">
-            <a:schemeClr val="accent1"/>
-          </a:fillRef>
-          <a:effectRef idx="0">
-            <a:schemeClr val="accent1"/>
-          </a:effectRef>
-          <a:fontRef idx="minor">
-            <a:schemeClr val="lt1"/>
-          </a:fontRef>
-        </p:style>
-        <p:txBody>
-          <a:bodyPr rtlCol="0" anchor="ctr"/>
-          <a:lstStyle/>
-          <a:p>
-            <a:pPr algn="ctr"/>
-            <a:r>
-              <a:rPr lang="en-US" noProof="0" dirty="0"/>
-              <a:t>Layout- and traversal-agnostic abstractions</a:t>
-            </a:r>
-          </a:p>
-        </p:txBody>
-      </p:sp>
-      <p:sp>
-        <p:nvSpPr>
-          <p:cNvPr id="9" name="Rectangle 8">
-            <a:extLst>
-              <a:ext uri="{FF2B5EF4-FFF2-40B4-BE49-F238E27FC236}">
-                <a16:creationId xmlns:a16="http://schemas.microsoft.com/office/drawing/2014/main" id="{6DB7F776-4EDC-09F4-F04A-E586FC4B4500}"/>
-              </a:ext>
-            </a:extLst>
-          </p:cNvPr>
-          <p:cNvSpPr/>
-          <p:nvPr/>
-        </p:nvSpPr>
-        <p:spPr>
-          <a:xfrm>
-            <a:off x="7840178" y="2971800"/>
-            <a:ext cx="3711020" cy="914400"/>
-          </a:xfrm>
-          <a:prstGeom prst="rect">
-            <a:avLst/>
-          </a:prstGeom>
-        </p:spPr>
-        <p:style>
-          <a:lnRef idx="2">
-            <a:schemeClr val="accent1">
-              <a:shade val="15000"/>
-            </a:schemeClr>
-          </a:lnRef>
-          <a:fillRef idx="1">
-            <a:schemeClr val="accent1"/>
-          </a:fillRef>
-          <a:effectRef idx="0">
-            <a:schemeClr val="accent1"/>
-          </a:effectRef>
-          <a:fontRef idx="minor">
-            <a:schemeClr val="lt1"/>
-          </a:fontRef>
-        </p:style>
-        <p:txBody>
-          <a:bodyPr rtlCol="0" anchor="ctr"/>
-          <a:lstStyle/>
-          <a:p>
-            <a:pPr algn="ctr"/>
-            <a:r>
-              <a:rPr lang="en-US" noProof="0" dirty="0"/>
-              <a:t>LLM-assisted optimization</a:t>
-            </a:r>
-          </a:p>
-        </p:txBody>
-      </p:sp>
-      <p:sp>
-        <p:nvSpPr>
-          <p:cNvPr id="11" name="Rectangle 10">
-            <a:extLst>
-              <a:ext uri="{FF2B5EF4-FFF2-40B4-BE49-F238E27FC236}">
-                <a16:creationId xmlns:a16="http://schemas.microsoft.com/office/drawing/2014/main" id="{5B2B9BCB-5805-C1F1-AF45-681B37E6B83E}"/>
-              </a:ext>
-            </a:extLst>
-          </p:cNvPr>
-          <p:cNvSpPr/>
-          <p:nvPr/>
-        </p:nvSpPr>
-        <p:spPr>
-          <a:xfrm>
-            <a:off x="150074" y="4252912"/>
-            <a:ext cx="3711020" cy="914400"/>
-          </a:xfrm>
-          <a:prstGeom prst="rect">
-            <a:avLst/>
-          </a:prstGeom>
-        </p:spPr>
-        <p:style>
-          <a:lnRef idx="2">
-            <a:schemeClr val="accent1">
-              <a:shade val="15000"/>
-            </a:schemeClr>
-          </a:lnRef>
-          <a:fillRef idx="1">
-            <a:schemeClr val="accent1"/>
-          </a:fillRef>
-          <a:effectRef idx="0">
-            <a:schemeClr val="accent1"/>
-          </a:effectRef>
-          <a:fontRef idx="minor">
-            <a:schemeClr val="lt1"/>
-          </a:fontRef>
-        </p:style>
-        <p:txBody>
-          <a:bodyPr rtlCol="0" anchor="ctr"/>
-          <a:lstStyle/>
-          <a:p>
-            <a:pPr algn="ctr"/>
-            <a:r>
-              <a:rPr lang="en-US" noProof="0" dirty="0"/>
-              <a:t>Layout abstractions</a:t>
-            </a:r>
-          </a:p>
-        </p:txBody>
-      </p:sp>
-      <p:sp>
-        <p:nvSpPr>
-          <p:cNvPr id="13" name="Rectangle 12">
-            <a:extLst>
-              <a:ext uri="{FF2B5EF4-FFF2-40B4-BE49-F238E27FC236}">
-                <a16:creationId xmlns:a16="http://schemas.microsoft.com/office/drawing/2014/main" id="{31388E94-1EEB-E24E-1923-AA250880AF84}"/>
-              </a:ext>
-            </a:extLst>
-          </p:cNvPr>
-          <p:cNvSpPr/>
-          <p:nvPr/>
-        </p:nvSpPr>
-        <p:spPr>
-          <a:xfrm>
-            <a:off x="4240490" y="4252912"/>
-            <a:ext cx="3711020" cy="914400"/>
-          </a:xfrm>
-          <a:prstGeom prst="rect">
-            <a:avLst/>
-          </a:prstGeom>
-        </p:spPr>
-        <p:style>
-          <a:lnRef idx="2">
-            <a:schemeClr val="accent1">
-              <a:shade val="15000"/>
-            </a:schemeClr>
-          </a:lnRef>
-          <a:fillRef idx="1">
-            <a:schemeClr val="accent1"/>
-          </a:fillRef>
-          <a:effectRef idx="0">
-            <a:schemeClr val="accent1"/>
-          </a:effectRef>
-          <a:fontRef idx="minor">
-            <a:schemeClr val="lt1"/>
-          </a:fontRef>
-        </p:style>
-        <p:txBody>
-          <a:bodyPr rtlCol="0" anchor="ctr"/>
-          <a:lstStyle/>
-          <a:p>
-            <a:pPr algn="ctr"/>
-            <a:r>
-              <a:rPr lang="en-US" noProof="0" dirty="0"/>
-              <a:t>Traversal abstractions</a:t>
-            </a:r>
-          </a:p>
-        </p:txBody>
-      </p:sp>
-      <p:sp>
-        <p:nvSpPr>
-          <p:cNvPr id="15" name="Rectangle 14">
-            <a:extLst>
-              <a:ext uri="{FF2B5EF4-FFF2-40B4-BE49-F238E27FC236}">
-                <a16:creationId xmlns:a16="http://schemas.microsoft.com/office/drawing/2014/main" id="{DE8920A4-4430-6757-E41A-9BA9578DC80D}"/>
-              </a:ext>
-            </a:extLst>
-          </p:cNvPr>
-          <p:cNvSpPr/>
-          <p:nvPr/>
-        </p:nvSpPr>
-        <p:spPr>
-          <a:xfrm>
-            <a:off x="8330906" y="4252912"/>
-            <a:ext cx="3711020" cy="914400"/>
-          </a:xfrm>
-          <a:prstGeom prst="rect">
-            <a:avLst/>
-          </a:prstGeom>
-        </p:spPr>
-        <p:style>
-          <a:lnRef idx="2">
-            <a:schemeClr val="accent1">
-              <a:shade val="15000"/>
-            </a:schemeClr>
-          </a:lnRef>
-          <a:fillRef idx="1">
-            <a:schemeClr val="accent1"/>
-          </a:fillRef>
-          <a:effectRef idx="0">
-            <a:schemeClr val="accent1"/>
-          </a:effectRef>
-          <a:fontRef idx="minor">
-            <a:schemeClr val="lt1"/>
-          </a:fontRef>
-        </p:style>
-        <p:txBody>
-          <a:bodyPr rtlCol="0" anchor="ctr"/>
-          <a:lstStyle/>
-          <a:p>
-            <a:pPr algn="ctr"/>
-            <a:r>
-              <a:rPr lang="en-US" noProof="0" dirty="0"/>
-              <a:t>Practical aspects</a:t>
-            </a:r>
-          </a:p>
-        </p:txBody>
-      </p:sp>
-      <p:sp>
-        <p:nvSpPr>
-          <p:cNvPr id="17" name="Rectangle 16">
-            <a:extLst>
-              <a:ext uri="{FF2B5EF4-FFF2-40B4-BE49-F238E27FC236}">
-                <a16:creationId xmlns:a16="http://schemas.microsoft.com/office/drawing/2014/main" id="{D01E75A2-333B-DF95-544C-0ACF1B88882C}"/>
-              </a:ext>
-            </a:extLst>
-          </p:cNvPr>
-          <p:cNvSpPr/>
-          <p:nvPr/>
-        </p:nvSpPr>
-        <p:spPr>
-          <a:xfrm>
-            <a:off x="302474" y="5356288"/>
-            <a:ext cx="3711020" cy="914400"/>
-          </a:xfrm>
-          <a:prstGeom prst="rect">
-            <a:avLst/>
-          </a:prstGeom>
-        </p:spPr>
-        <p:style>
-          <a:lnRef idx="2">
-            <a:schemeClr val="accent1">
-              <a:shade val="15000"/>
-            </a:schemeClr>
-          </a:lnRef>
-          <a:fillRef idx="1">
-            <a:schemeClr val="accent1"/>
-          </a:fillRef>
-          <a:effectRef idx="0">
-            <a:schemeClr val="accent1"/>
-          </a:effectRef>
-          <a:fontRef idx="minor">
-            <a:schemeClr val="lt1"/>
-          </a:fontRef>
-        </p:style>
-        <p:txBody>
-          <a:bodyPr rtlCol="0" anchor="ctr"/>
-          <a:lstStyle/>
-          <a:p>
-            <a:pPr algn="ctr"/>
-            <a:r>
-              <a:rPr lang="en-US" noProof="0" dirty="0" err="1"/>
-              <a:t>Noarr</a:t>
-            </a:r>
-            <a:r>
-              <a:rPr lang="en-US" noProof="0" dirty="0"/>
-              <a:t> structures</a:t>
-            </a:r>
-          </a:p>
-        </p:txBody>
-      </p:sp>
-      <p:sp>
-        <p:nvSpPr>
-          <p:cNvPr id="19" name="Rectangle 18">
-            <a:extLst>
-              <a:ext uri="{FF2B5EF4-FFF2-40B4-BE49-F238E27FC236}">
-                <a16:creationId xmlns:a16="http://schemas.microsoft.com/office/drawing/2014/main" id="{67736357-2F90-D241-51F6-C03C797EFFC2}"/>
-              </a:ext>
-            </a:extLst>
-          </p:cNvPr>
-          <p:cNvSpPr/>
-          <p:nvPr/>
-        </p:nvSpPr>
-        <p:spPr>
-          <a:xfrm>
-            <a:off x="454874" y="5508688"/>
-            <a:ext cx="3711020" cy="914400"/>
-          </a:xfrm>
-          <a:prstGeom prst="rect">
-            <a:avLst/>
-          </a:prstGeom>
-        </p:spPr>
-        <p:style>
-          <a:lnRef idx="2">
-            <a:schemeClr val="accent1">
-              <a:shade val="15000"/>
-            </a:schemeClr>
-          </a:lnRef>
-          <a:fillRef idx="1">
-            <a:schemeClr val="accent1"/>
-          </a:fillRef>
-          <a:effectRef idx="0">
-            <a:schemeClr val="accent1"/>
-          </a:effectRef>
-          <a:fontRef idx="minor">
-            <a:schemeClr val="lt1"/>
-          </a:fontRef>
-        </p:style>
-        <p:txBody>
-          <a:bodyPr rtlCol="0" anchor="ctr"/>
-          <a:lstStyle/>
-          <a:p>
-            <a:pPr algn="ctr"/>
-            <a:r>
-              <a:rPr lang="en-US" noProof="0" dirty="0" err="1"/>
-              <a:t>Noarr</a:t>
-            </a:r>
-            <a:r>
-              <a:rPr lang="en-US" noProof="0" dirty="0"/>
-              <a:t> traversers</a:t>
-            </a:r>
-          </a:p>
-        </p:txBody>
-      </p:sp>
-      <p:sp>
-        <p:nvSpPr>
-          <p:cNvPr id="21" name="Rectangle 20">
-            <a:extLst>
-              <a:ext uri="{FF2B5EF4-FFF2-40B4-BE49-F238E27FC236}">
-                <a16:creationId xmlns:a16="http://schemas.microsoft.com/office/drawing/2014/main" id="{9EC73339-8B3D-25F4-18D5-E5821CB7CE8B}"/>
-              </a:ext>
-            </a:extLst>
-          </p:cNvPr>
-          <p:cNvSpPr/>
-          <p:nvPr/>
-        </p:nvSpPr>
-        <p:spPr>
-          <a:xfrm>
-            <a:off x="607274" y="5661088"/>
-            <a:ext cx="3711020" cy="914400"/>
-          </a:xfrm>
-          <a:prstGeom prst="rect">
-            <a:avLst/>
-          </a:prstGeom>
-        </p:spPr>
-        <p:style>
-          <a:lnRef idx="2">
-            <a:schemeClr val="accent1">
-              <a:shade val="15000"/>
-            </a:schemeClr>
-          </a:lnRef>
-          <a:fillRef idx="1">
-            <a:schemeClr val="accent1"/>
-          </a:fillRef>
-          <a:effectRef idx="0">
-            <a:schemeClr val="accent1"/>
-          </a:effectRef>
-          <a:fontRef idx="minor">
-            <a:schemeClr val="lt1"/>
-          </a:fontRef>
-        </p:style>
-        <p:txBody>
-          <a:bodyPr rtlCol="0" anchor="ctr"/>
-          <a:lstStyle/>
-          <a:p>
-            <a:pPr algn="ctr"/>
-            <a:r>
-              <a:rPr lang="en-US" noProof="0" dirty="0" err="1"/>
-              <a:t>Noarr</a:t>
-            </a:r>
-            <a:r>
-              <a:rPr lang="en-US" noProof="0" dirty="0"/>
-              <a:t> tuning</a:t>
-            </a:r>
-          </a:p>
-        </p:txBody>
-      </p:sp>
-      <p:sp>
-        <p:nvSpPr>
-          <p:cNvPr id="23" name="Rectangle 22">
-            <a:extLst>
-              <a:ext uri="{FF2B5EF4-FFF2-40B4-BE49-F238E27FC236}">
-                <a16:creationId xmlns:a16="http://schemas.microsoft.com/office/drawing/2014/main" id="{63EC4F51-D7C0-1DFC-E94E-75AE185B7CC1}"/>
-              </a:ext>
-            </a:extLst>
-          </p:cNvPr>
-          <p:cNvSpPr/>
-          <p:nvPr/>
-        </p:nvSpPr>
-        <p:spPr>
-          <a:xfrm>
-            <a:off x="759674" y="5813488"/>
-            <a:ext cx="3711020" cy="914400"/>
-          </a:xfrm>
-          <a:prstGeom prst="rect">
-            <a:avLst/>
-          </a:prstGeom>
-        </p:spPr>
-        <p:style>
-          <a:lnRef idx="2">
-            <a:schemeClr val="accent1">
-              <a:shade val="15000"/>
-            </a:schemeClr>
-          </a:lnRef>
-          <a:fillRef idx="1">
-            <a:schemeClr val="accent1"/>
-          </a:fillRef>
-          <a:effectRef idx="0">
-            <a:schemeClr val="accent1"/>
-          </a:effectRef>
-          <a:fontRef idx="minor">
-            <a:schemeClr val="lt1"/>
-          </a:fontRef>
-        </p:style>
-        <p:txBody>
-          <a:bodyPr rtlCol="0" anchor="ctr"/>
-          <a:lstStyle/>
-          <a:p>
-            <a:pPr algn="ctr"/>
-            <a:r>
-              <a:rPr lang="en-US" noProof="0" dirty="0" err="1"/>
-              <a:t>Noarr</a:t>
-            </a:r>
-            <a:r>
-              <a:rPr lang="en-US" noProof="0" dirty="0"/>
-              <a:t>-MPI</a:t>
-            </a:r>
-          </a:p>
-        </p:txBody>
-      </p:sp>
-      <p:sp>
-        <p:nvSpPr>
-          <p:cNvPr id="25" name="Rectangle 24">
-            <a:extLst>
-              <a:ext uri="{FF2B5EF4-FFF2-40B4-BE49-F238E27FC236}">
-                <a16:creationId xmlns:a16="http://schemas.microsoft.com/office/drawing/2014/main" id="{B7D64168-E19F-C04D-293D-CB07E85D29DA}"/>
-              </a:ext>
-            </a:extLst>
-          </p:cNvPr>
-          <p:cNvSpPr/>
-          <p:nvPr/>
-        </p:nvSpPr>
-        <p:spPr>
-          <a:xfrm>
-            <a:off x="4853138" y="5424788"/>
-            <a:ext cx="3711020" cy="914400"/>
-          </a:xfrm>
-          <a:prstGeom prst="rect">
-            <a:avLst/>
-          </a:prstGeom>
-        </p:spPr>
-        <p:style>
-          <a:lnRef idx="2">
-            <a:schemeClr val="accent1">
-              <a:shade val="15000"/>
-            </a:schemeClr>
-          </a:lnRef>
-          <a:fillRef idx="1">
-            <a:schemeClr val="accent1"/>
-          </a:fillRef>
-          <a:effectRef idx="0">
-            <a:schemeClr val="accent1"/>
-          </a:effectRef>
-          <a:fontRef idx="minor">
-            <a:schemeClr val="lt1"/>
-          </a:fontRef>
-        </p:style>
-        <p:txBody>
-          <a:bodyPr rtlCol="0" anchor="ctr"/>
-          <a:lstStyle/>
-          <a:p>
-            <a:pPr algn="ctr"/>
-            <a:r>
-              <a:rPr lang="en-US" noProof="0" dirty="0" err="1"/>
-              <a:t>Cellato</a:t>
-            </a:r>
-            <a:endParaRPr lang="en-US" noProof="0" dirty="0"/>
+            <a:endParaRPr lang="en-US"/>
           </a:p>
         </p:txBody>
       </p:sp>
     </p:spTree>
     <p:extLst>
       <p:ext uri="{BB962C8B-B14F-4D97-AF65-F5344CB8AC3E}">
-        <p14:creationId xmlns:p14="http://schemas.microsoft.com/office/powerpoint/2010/main" val="1745489699"/>
+        <p14:creationId xmlns:p14="http://schemas.microsoft.com/office/powerpoint/2010/main" val="2245250575"/>
       </p:ext>
     </p:extLst>
   </p:cSld>
@@ -7811,7 +7750,7 @@
           <p:cNvPr id="2" name="Title 1">
             <a:extLst>
               <a:ext uri="{FF2B5EF4-FFF2-40B4-BE49-F238E27FC236}">
-                <a16:creationId xmlns:a16="http://schemas.microsoft.com/office/drawing/2014/main" id="{63B07F39-5957-124B-D20D-4A155E0E07D1}"/>
+                <a16:creationId xmlns:a16="http://schemas.microsoft.com/office/drawing/2014/main" id="{F35C7E3E-09C8-2B79-8EE7-B8D1557191BE}"/>
               </a:ext>
             </a:extLst>
           </p:cNvPr>
@@ -7829,7 +7768,7 @@
           <a:p>
             <a:r>
               <a:rPr lang="en-US" noProof="0" dirty="0"/>
-              <a:t>Summary</a:t>
+              <a:t>LLMs and abstractions</a:t>
             </a:r>
           </a:p>
         </p:txBody>
@@ -7839,7 +7778,7 @@
           <p:cNvPr id="3" name="Content Placeholder 2">
             <a:extLst>
               <a:ext uri="{FF2B5EF4-FFF2-40B4-BE49-F238E27FC236}">
-                <a16:creationId xmlns:a16="http://schemas.microsoft.com/office/drawing/2014/main" id="{4437CB38-BBCE-B652-0445-A75C99068419}"/>
+                <a16:creationId xmlns:a16="http://schemas.microsoft.com/office/drawing/2014/main" id="{DAF33F66-B59C-C15E-3BD1-85602E9A1F9E}"/>
               </a:ext>
             </a:extLst>
           </p:cNvPr>
@@ -7857,42 +7796,39 @@
           <a:p>
             <a:r>
               <a:rPr lang="en-US" noProof="0" dirty="0"/>
-              <a:t>6 peer-reviewed publications </a:t>
+              <a:t>Key question: Layout- and traversal-agnostic abstractions help humans; do they help LLMs as well?</a:t>
+            </a:r>
+          </a:p>
+          <a:p>
+            <a:r>
+              <a:rPr lang="en-US" dirty="0"/>
+              <a:t>Key findings:</a:t>
             </a:r>
           </a:p>
           <a:p>
             <a:pPr lvl="1"/>
             <a:r>
               <a:rPr lang="en-US" noProof="0" dirty="0"/>
-              <a:t>2 journal articles</a:t>
+              <a:t>Prompt specificity improves results much more</a:t>
             </a:r>
           </a:p>
           <a:p>
             <a:pPr lvl="1"/>
             <a:r>
-              <a:rPr lang="en-US" noProof="0" dirty="0"/>
-              <a:t>3 conference papers,</a:t>
+              <a:rPr lang="en-US" dirty="0"/>
+              <a:t>LLMs more competent in pure C/C++</a:t>
             </a:r>
           </a:p>
           <a:p>
             <a:pPr lvl="1"/>
-            <a:r>
-              <a:rPr lang="en-US" noProof="0" dirty="0"/>
-              <a:t>1 workshop paper</a:t>
-            </a:r>
-          </a:p>
-          <a:p>
-            <a:r>
-              <a:rPr lang="en-US" noProof="0" dirty="0"/>
-              <a:t>1 publication awaiting peer review</a:t>
-            </a:r>
+            <a:endParaRPr lang="en-US" noProof="0" dirty="0"/>
           </a:p>
         </p:txBody>
       </p:sp>
     </p:spTree>
     <p:extLst>
       <p:ext uri="{BB962C8B-B14F-4D97-AF65-F5344CB8AC3E}">
-        <p14:creationId xmlns:p14="http://schemas.microsoft.com/office/powerpoint/2010/main" val="309417143"/>
+        <p14:creationId xmlns:p14="http://schemas.microsoft.com/office/powerpoint/2010/main" val="965653160"/>
       </p:ext>
     </p:extLst>
   </p:cSld>
@@ -7903,6 +7839,101 @@
 </file>
 
 <file path=ppt/slides/slide27.xml><?xml version="1.0" encoding="utf-8"?>
+<p:sld xmlns:a="http://schemas.openxmlformats.org/drawingml/2006/main" xmlns:r="http://schemas.openxmlformats.org/officeDocument/2006/relationships" xmlns:p="http://schemas.openxmlformats.org/presentationml/2006/main" show="0">
+  <p:cSld>
+    <p:spTree>
+      <p:nvGrpSpPr>
+        <p:cNvPr id="1" name=""/>
+        <p:cNvGrpSpPr/>
+        <p:nvPr/>
+      </p:nvGrpSpPr>
+      <p:grpSpPr>
+        <a:xfrm>
+          <a:off x="0" y="0"/>
+          <a:ext cx="0" cy="0"/>
+          <a:chOff x="0" y="0"/>
+          <a:chExt cx="0" cy="0"/>
+        </a:xfrm>
+      </p:grpSpPr>
+      <p:sp>
+        <p:nvSpPr>
+          <p:cNvPr id="2" name="Title 1">
+            <a:extLst>
+              <a:ext uri="{FF2B5EF4-FFF2-40B4-BE49-F238E27FC236}">
+                <a16:creationId xmlns:a16="http://schemas.microsoft.com/office/drawing/2014/main" id="{928BD501-0287-7E9D-6C52-A86B98F9EB52}"/>
+              </a:ext>
+            </a:extLst>
+          </p:cNvPr>
+          <p:cNvSpPr>
+            <a:spLocks noGrp="1"/>
+          </p:cNvSpPr>
+          <p:nvPr>
+            <p:ph type="title"/>
+          </p:nvPr>
+        </p:nvSpPr>
+        <p:spPr/>
+        <p:txBody>
+          <a:bodyPr/>
+          <a:lstStyle/>
+          <a:p>
+            <a:r>
+              <a:rPr lang="en-US" noProof="0" dirty="0" err="1"/>
+              <a:t>Zahodit</a:t>
+            </a:r>
+            <a:endParaRPr lang="en-US" noProof="0" dirty="0"/>
+          </a:p>
+        </p:txBody>
+      </p:sp>
+      <p:sp>
+        <p:nvSpPr>
+          <p:cNvPr id="3" name="Content Placeholder 2">
+            <a:extLst>
+              <a:ext uri="{FF2B5EF4-FFF2-40B4-BE49-F238E27FC236}">
+                <a16:creationId xmlns:a16="http://schemas.microsoft.com/office/drawing/2014/main" id="{369E5D67-EA03-A5CA-2D82-199F178CE89C}"/>
+              </a:ext>
+            </a:extLst>
+          </p:cNvPr>
+          <p:cNvSpPr>
+            <a:spLocks noGrp="1"/>
+          </p:cNvSpPr>
+          <p:nvPr>
+            <p:ph idx="1"/>
+          </p:nvPr>
+        </p:nvSpPr>
+        <p:spPr/>
+        <p:txBody>
+          <a:bodyPr/>
+          <a:lstStyle/>
+          <a:p>
+            <a:r>
+              <a:rPr lang="en-US" noProof="0" dirty="0" err="1"/>
+              <a:t>Noarr</a:t>
+            </a:r>
+            <a:endParaRPr lang="en-US" noProof="0" dirty="0"/>
+          </a:p>
+          <a:p>
+            <a:r>
+              <a:rPr lang="en-US" noProof="0" dirty="0" err="1"/>
+              <a:t>Cellato</a:t>
+            </a:r>
+            <a:endParaRPr lang="en-US" noProof="0" dirty="0"/>
+          </a:p>
+        </p:txBody>
+      </p:sp>
+    </p:spTree>
+    <p:extLst>
+      <p:ext uri="{BB962C8B-B14F-4D97-AF65-F5344CB8AC3E}">
+        <p14:creationId xmlns:p14="http://schemas.microsoft.com/office/powerpoint/2010/main" val="4085122203"/>
+      </p:ext>
+    </p:extLst>
+  </p:cSld>
+  <p:clrMapOvr>
+    <a:masterClrMapping/>
+  </p:clrMapOvr>
+</p:sld>
+</file>
+
+<file path=ppt/slides/slide28.xml><?xml version="1.0" encoding="utf-8"?>
 <p:sld xmlns:a="http://schemas.openxmlformats.org/drawingml/2006/main" xmlns:r="http://schemas.openxmlformats.org/officeDocument/2006/relationships" xmlns:p="http://schemas.openxmlformats.org/presentationml/2006/main">
   <p:cSld>
     <p:spTree>
@@ -7924,7 +7955,7 @@
           <p:cNvPr id="2" name="Title 1">
             <a:extLst>
               <a:ext uri="{FF2B5EF4-FFF2-40B4-BE49-F238E27FC236}">
-                <a16:creationId xmlns:a16="http://schemas.microsoft.com/office/drawing/2014/main" id="{5EFCD7CC-C2D6-52E6-02D5-F41FC5389A5C}"/>
+                <a16:creationId xmlns:a16="http://schemas.microsoft.com/office/drawing/2014/main" id="{6447B745-9B50-DD90-5161-BD2A06CEA44B}"/>
               </a:ext>
             </a:extLst>
           </p:cNvPr>
@@ -7940,7 +7971,624 @@
           <a:bodyPr/>
           <a:lstStyle/>
           <a:p>
+            <a:r>
+              <a:rPr lang="en-US" noProof="0" dirty="0"/>
+              <a:t>Contribution map</a:t>
+            </a:r>
+          </a:p>
+        </p:txBody>
+      </p:sp>
+      <p:sp>
+        <p:nvSpPr>
+          <p:cNvPr id="5" name="Rectangle 4">
+            <a:extLst>
+              <a:ext uri="{FF2B5EF4-FFF2-40B4-BE49-F238E27FC236}">
+                <a16:creationId xmlns:a16="http://schemas.microsoft.com/office/drawing/2014/main" id="{CB7F8197-FC2F-9C2A-050C-CCCB46D86C79}"/>
+              </a:ext>
+            </a:extLst>
+          </p:cNvPr>
+          <p:cNvSpPr/>
+          <p:nvPr/>
+        </p:nvSpPr>
+        <p:spPr>
+          <a:xfrm>
+            <a:off x="4240490" y="1406732"/>
+            <a:ext cx="3711020" cy="914400"/>
+          </a:xfrm>
+          <a:prstGeom prst="rect">
+            <a:avLst/>
+          </a:prstGeom>
+        </p:spPr>
+        <p:style>
+          <a:lnRef idx="2">
+            <a:schemeClr val="accent1">
+              <a:shade val="15000"/>
+            </a:schemeClr>
+          </a:lnRef>
+          <a:fillRef idx="1">
+            <a:schemeClr val="accent1"/>
+          </a:fillRef>
+          <a:effectRef idx="0">
+            <a:schemeClr val="accent1"/>
+          </a:effectRef>
+          <a:fontRef idx="minor">
+            <a:schemeClr val="lt1"/>
+          </a:fontRef>
+        </p:style>
+        <p:txBody>
+          <a:bodyPr rtlCol="0" anchor="ctr"/>
+          <a:lstStyle/>
+          <a:p>
+            <a:pPr algn="ctr"/>
+            <a:r>
+              <a:rPr lang="en-US" noProof="0" dirty="0"/>
+              <a:t>Separate algorithm design from performance optimization</a:t>
+            </a:r>
+          </a:p>
+        </p:txBody>
+      </p:sp>
+      <p:sp>
+        <p:nvSpPr>
+          <p:cNvPr id="7" name="Rectangle 6">
+            <a:extLst>
+              <a:ext uri="{FF2B5EF4-FFF2-40B4-BE49-F238E27FC236}">
+                <a16:creationId xmlns:a16="http://schemas.microsoft.com/office/drawing/2014/main" id="{60EC2A1A-B720-84BC-76D5-4751C09EA61A}"/>
+              </a:ext>
+            </a:extLst>
+          </p:cNvPr>
+          <p:cNvSpPr/>
+          <p:nvPr/>
+        </p:nvSpPr>
+        <p:spPr>
+          <a:xfrm>
+            <a:off x="150074" y="2971800"/>
+            <a:ext cx="3711020" cy="914400"/>
+          </a:xfrm>
+          <a:prstGeom prst="rect">
+            <a:avLst/>
+          </a:prstGeom>
+        </p:spPr>
+        <p:style>
+          <a:lnRef idx="2">
+            <a:schemeClr val="accent1">
+              <a:shade val="15000"/>
+            </a:schemeClr>
+          </a:lnRef>
+          <a:fillRef idx="1">
+            <a:schemeClr val="accent1"/>
+          </a:fillRef>
+          <a:effectRef idx="0">
+            <a:schemeClr val="accent1"/>
+          </a:effectRef>
+          <a:fontRef idx="minor">
+            <a:schemeClr val="lt1"/>
+          </a:fontRef>
+        </p:style>
+        <p:txBody>
+          <a:bodyPr rtlCol="0" anchor="ctr"/>
+          <a:lstStyle/>
+          <a:p>
+            <a:pPr algn="ctr"/>
+            <a:r>
+              <a:rPr lang="en-US" noProof="0" dirty="0"/>
+              <a:t>Layout- and traversal-agnostic abstractions</a:t>
+            </a:r>
+          </a:p>
+        </p:txBody>
+      </p:sp>
+      <p:sp>
+        <p:nvSpPr>
+          <p:cNvPr id="9" name="Rectangle 8">
+            <a:extLst>
+              <a:ext uri="{FF2B5EF4-FFF2-40B4-BE49-F238E27FC236}">
+                <a16:creationId xmlns:a16="http://schemas.microsoft.com/office/drawing/2014/main" id="{6DB7F776-4EDC-09F4-F04A-E586FC4B4500}"/>
+              </a:ext>
+            </a:extLst>
+          </p:cNvPr>
+          <p:cNvSpPr/>
+          <p:nvPr/>
+        </p:nvSpPr>
+        <p:spPr>
+          <a:xfrm>
+            <a:off x="7840178" y="2971800"/>
+            <a:ext cx="3711020" cy="914400"/>
+          </a:xfrm>
+          <a:prstGeom prst="rect">
+            <a:avLst/>
+          </a:prstGeom>
+        </p:spPr>
+        <p:style>
+          <a:lnRef idx="2">
+            <a:schemeClr val="accent1">
+              <a:shade val="15000"/>
+            </a:schemeClr>
+          </a:lnRef>
+          <a:fillRef idx="1">
+            <a:schemeClr val="accent1"/>
+          </a:fillRef>
+          <a:effectRef idx="0">
+            <a:schemeClr val="accent1"/>
+          </a:effectRef>
+          <a:fontRef idx="minor">
+            <a:schemeClr val="lt1"/>
+          </a:fontRef>
+        </p:style>
+        <p:txBody>
+          <a:bodyPr rtlCol="0" anchor="ctr"/>
+          <a:lstStyle/>
+          <a:p>
+            <a:pPr algn="ctr"/>
+            <a:r>
+              <a:rPr lang="en-US" noProof="0" dirty="0"/>
+              <a:t>LLM-assisted optimization</a:t>
+            </a:r>
+          </a:p>
+        </p:txBody>
+      </p:sp>
+      <p:sp>
+        <p:nvSpPr>
+          <p:cNvPr id="11" name="Rectangle 10">
+            <a:extLst>
+              <a:ext uri="{FF2B5EF4-FFF2-40B4-BE49-F238E27FC236}">
+                <a16:creationId xmlns:a16="http://schemas.microsoft.com/office/drawing/2014/main" id="{5B2B9BCB-5805-C1F1-AF45-681B37E6B83E}"/>
+              </a:ext>
+            </a:extLst>
+          </p:cNvPr>
+          <p:cNvSpPr/>
+          <p:nvPr/>
+        </p:nvSpPr>
+        <p:spPr>
+          <a:xfrm>
+            <a:off x="150074" y="4252912"/>
+            <a:ext cx="3711020" cy="914400"/>
+          </a:xfrm>
+          <a:prstGeom prst="rect">
+            <a:avLst/>
+          </a:prstGeom>
+        </p:spPr>
+        <p:style>
+          <a:lnRef idx="2">
+            <a:schemeClr val="accent1">
+              <a:shade val="15000"/>
+            </a:schemeClr>
+          </a:lnRef>
+          <a:fillRef idx="1">
+            <a:schemeClr val="accent1"/>
+          </a:fillRef>
+          <a:effectRef idx="0">
+            <a:schemeClr val="accent1"/>
+          </a:effectRef>
+          <a:fontRef idx="minor">
+            <a:schemeClr val="lt1"/>
+          </a:fontRef>
+        </p:style>
+        <p:txBody>
+          <a:bodyPr rtlCol="0" anchor="ctr"/>
+          <a:lstStyle/>
+          <a:p>
+            <a:pPr algn="ctr"/>
+            <a:r>
+              <a:rPr lang="en-US" noProof="0" dirty="0"/>
+              <a:t>Layout abstractions</a:t>
+            </a:r>
+          </a:p>
+        </p:txBody>
+      </p:sp>
+      <p:sp>
+        <p:nvSpPr>
+          <p:cNvPr id="13" name="Rectangle 12">
+            <a:extLst>
+              <a:ext uri="{FF2B5EF4-FFF2-40B4-BE49-F238E27FC236}">
+                <a16:creationId xmlns:a16="http://schemas.microsoft.com/office/drawing/2014/main" id="{31388E94-1EEB-E24E-1923-AA250880AF84}"/>
+              </a:ext>
+            </a:extLst>
+          </p:cNvPr>
+          <p:cNvSpPr/>
+          <p:nvPr/>
+        </p:nvSpPr>
+        <p:spPr>
+          <a:xfrm>
+            <a:off x="4240490" y="4252912"/>
+            <a:ext cx="3711020" cy="914400"/>
+          </a:xfrm>
+          <a:prstGeom prst="rect">
+            <a:avLst/>
+          </a:prstGeom>
+        </p:spPr>
+        <p:style>
+          <a:lnRef idx="2">
+            <a:schemeClr val="accent1">
+              <a:shade val="15000"/>
+            </a:schemeClr>
+          </a:lnRef>
+          <a:fillRef idx="1">
+            <a:schemeClr val="accent1"/>
+          </a:fillRef>
+          <a:effectRef idx="0">
+            <a:schemeClr val="accent1"/>
+          </a:effectRef>
+          <a:fontRef idx="minor">
+            <a:schemeClr val="lt1"/>
+          </a:fontRef>
+        </p:style>
+        <p:txBody>
+          <a:bodyPr rtlCol="0" anchor="ctr"/>
+          <a:lstStyle/>
+          <a:p>
+            <a:pPr algn="ctr"/>
+            <a:r>
+              <a:rPr lang="en-US" noProof="0" dirty="0"/>
+              <a:t>Traversal abstractions</a:t>
+            </a:r>
+          </a:p>
+        </p:txBody>
+      </p:sp>
+      <p:sp>
+        <p:nvSpPr>
+          <p:cNvPr id="15" name="Rectangle 14">
+            <a:extLst>
+              <a:ext uri="{FF2B5EF4-FFF2-40B4-BE49-F238E27FC236}">
+                <a16:creationId xmlns:a16="http://schemas.microsoft.com/office/drawing/2014/main" id="{DE8920A4-4430-6757-E41A-9BA9578DC80D}"/>
+              </a:ext>
+            </a:extLst>
+          </p:cNvPr>
+          <p:cNvSpPr/>
+          <p:nvPr/>
+        </p:nvSpPr>
+        <p:spPr>
+          <a:xfrm>
+            <a:off x="8330906" y="4252912"/>
+            <a:ext cx="3711020" cy="914400"/>
+          </a:xfrm>
+          <a:prstGeom prst="rect">
+            <a:avLst/>
+          </a:prstGeom>
+        </p:spPr>
+        <p:style>
+          <a:lnRef idx="2">
+            <a:schemeClr val="accent1">
+              <a:shade val="15000"/>
+            </a:schemeClr>
+          </a:lnRef>
+          <a:fillRef idx="1">
+            <a:schemeClr val="accent1"/>
+          </a:fillRef>
+          <a:effectRef idx="0">
+            <a:schemeClr val="accent1"/>
+          </a:effectRef>
+          <a:fontRef idx="minor">
+            <a:schemeClr val="lt1"/>
+          </a:fontRef>
+        </p:style>
+        <p:txBody>
+          <a:bodyPr rtlCol="0" anchor="ctr"/>
+          <a:lstStyle/>
+          <a:p>
+            <a:pPr algn="ctr"/>
+            <a:r>
+              <a:rPr lang="en-US" noProof="0" dirty="0"/>
+              <a:t>Practical aspects</a:t>
+            </a:r>
+          </a:p>
+        </p:txBody>
+      </p:sp>
+      <p:sp>
+        <p:nvSpPr>
+          <p:cNvPr id="17" name="Rectangle 16">
+            <a:extLst>
+              <a:ext uri="{FF2B5EF4-FFF2-40B4-BE49-F238E27FC236}">
+                <a16:creationId xmlns:a16="http://schemas.microsoft.com/office/drawing/2014/main" id="{D01E75A2-333B-DF95-544C-0ACF1B88882C}"/>
+              </a:ext>
+            </a:extLst>
+          </p:cNvPr>
+          <p:cNvSpPr/>
+          <p:nvPr/>
+        </p:nvSpPr>
+        <p:spPr>
+          <a:xfrm>
+            <a:off x="302474" y="5356288"/>
+            <a:ext cx="3711020" cy="914400"/>
+          </a:xfrm>
+          <a:prstGeom prst="rect">
+            <a:avLst/>
+          </a:prstGeom>
+        </p:spPr>
+        <p:style>
+          <a:lnRef idx="2">
+            <a:schemeClr val="accent1">
+              <a:shade val="15000"/>
+            </a:schemeClr>
+          </a:lnRef>
+          <a:fillRef idx="1">
+            <a:schemeClr val="accent1"/>
+          </a:fillRef>
+          <a:effectRef idx="0">
+            <a:schemeClr val="accent1"/>
+          </a:effectRef>
+          <a:fontRef idx="minor">
+            <a:schemeClr val="lt1"/>
+          </a:fontRef>
+        </p:style>
+        <p:txBody>
+          <a:bodyPr rtlCol="0" anchor="ctr"/>
+          <a:lstStyle/>
+          <a:p>
+            <a:pPr algn="ctr"/>
+            <a:r>
+              <a:rPr lang="en-US" noProof="0" dirty="0" err="1"/>
+              <a:t>Noarr</a:t>
+            </a:r>
+            <a:r>
+              <a:rPr lang="en-US" noProof="0" dirty="0"/>
+              <a:t> structures</a:t>
+            </a:r>
+          </a:p>
+        </p:txBody>
+      </p:sp>
+      <p:sp>
+        <p:nvSpPr>
+          <p:cNvPr id="19" name="Rectangle 18">
+            <a:extLst>
+              <a:ext uri="{FF2B5EF4-FFF2-40B4-BE49-F238E27FC236}">
+                <a16:creationId xmlns:a16="http://schemas.microsoft.com/office/drawing/2014/main" id="{67736357-2F90-D241-51F6-C03C797EFFC2}"/>
+              </a:ext>
+            </a:extLst>
+          </p:cNvPr>
+          <p:cNvSpPr/>
+          <p:nvPr/>
+        </p:nvSpPr>
+        <p:spPr>
+          <a:xfrm>
+            <a:off x="454874" y="5508688"/>
+            <a:ext cx="3711020" cy="914400"/>
+          </a:xfrm>
+          <a:prstGeom prst="rect">
+            <a:avLst/>
+          </a:prstGeom>
+        </p:spPr>
+        <p:style>
+          <a:lnRef idx="2">
+            <a:schemeClr val="accent1">
+              <a:shade val="15000"/>
+            </a:schemeClr>
+          </a:lnRef>
+          <a:fillRef idx="1">
+            <a:schemeClr val="accent1"/>
+          </a:fillRef>
+          <a:effectRef idx="0">
+            <a:schemeClr val="accent1"/>
+          </a:effectRef>
+          <a:fontRef idx="minor">
+            <a:schemeClr val="lt1"/>
+          </a:fontRef>
+        </p:style>
+        <p:txBody>
+          <a:bodyPr rtlCol="0" anchor="ctr"/>
+          <a:lstStyle/>
+          <a:p>
+            <a:pPr algn="ctr"/>
+            <a:r>
+              <a:rPr lang="en-US" noProof="0" dirty="0" err="1"/>
+              <a:t>Noarr</a:t>
+            </a:r>
+            <a:r>
+              <a:rPr lang="en-US" noProof="0" dirty="0"/>
+              <a:t> traversers</a:t>
+            </a:r>
+          </a:p>
+        </p:txBody>
+      </p:sp>
+      <p:sp>
+        <p:nvSpPr>
+          <p:cNvPr id="21" name="Rectangle 20">
+            <a:extLst>
+              <a:ext uri="{FF2B5EF4-FFF2-40B4-BE49-F238E27FC236}">
+                <a16:creationId xmlns:a16="http://schemas.microsoft.com/office/drawing/2014/main" id="{9EC73339-8B3D-25F4-18D5-E5821CB7CE8B}"/>
+              </a:ext>
+            </a:extLst>
+          </p:cNvPr>
+          <p:cNvSpPr/>
+          <p:nvPr/>
+        </p:nvSpPr>
+        <p:spPr>
+          <a:xfrm>
+            <a:off x="607274" y="5661088"/>
+            <a:ext cx="3711020" cy="914400"/>
+          </a:xfrm>
+          <a:prstGeom prst="rect">
+            <a:avLst/>
+          </a:prstGeom>
+        </p:spPr>
+        <p:style>
+          <a:lnRef idx="2">
+            <a:schemeClr val="accent1">
+              <a:shade val="15000"/>
+            </a:schemeClr>
+          </a:lnRef>
+          <a:fillRef idx="1">
+            <a:schemeClr val="accent1"/>
+          </a:fillRef>
+          <a:effectRef idx="0">
+            <a:schemeClr val="accent1"/>
+          </a:effectRef>
+          <a:fontRef idx="minor">
+            <a:schemeClr val="lt1"/>
+          </a:fontRef>
+        </p:style>
+        <p:txBody>
+          <a:bodyPr rtlCol="0" anchor="ctr"/>
+          <a:lstStyle/>
+          <a:p>
+            <a:pPr algn="ctr"/>
+            <a:r>
+              <a:rPr lang="en-US" noProof="0" dirty="0" err="1"/>
+              <a:t>Noarr</a:t>
+            </a:r>
+            <a:r>
+              <a:rPr lang="en-US" noProof="0" dirty="0"/>
+              <a:t> tuning</a:t>
+            </a:r>
+          </a:p>
+        </p:txBody>
+      </p:sp>
+      <p:sp>
+        <p:nvSpPr>
+          <p:cNvPr id="23" name="Rectangle 22">
+            <a:extLst>
+              <a:ext uri="{FF2B5EF4-FFF2-40B4-BE49-F238E27FC236}">
+                <a16:creationId xmlns:a16="http://schemas.microsoft.com/office/drawing/2014/main" id="{63EC4F51-D7C0-1DFC-E94E-75AE185B7CC1}"/>
+              </a:ext>
+            </a:extLst>
+          </p:cNvPr>
+          <p:cNvSpPr/>
+          <p:nvPr/>
+        </p:nvSpPr>
+        <p:spPr>
+          <a:xfrm>
+            <a:off x="759674" y="5813488"/>
+            <a:ext cx="3711020" cy="914400"/>
+          </a:xfrm>
+          <a:prstGeom prst="rect">
+            <a:avLst/>
+          </a:prstGeom>
+        </p:spPr>
+        <p:style>
+          <a:lnRef idx="2">
+            <a:schemeClr val="accent1">
+              <a:shade val="15000"/>
+            </a:schemeClr>
+          </a:lnRef>
+          <a:fillRef idx="1">
+            <a:schemeClr val="accent1"/>
+          </a:fillRef>
+          <a:effectRef idx="0">
+            <a:schemeClr val="accent1"/>
+          </a:effectRef>
+          <a:fontRef idx="minor">
+            <a:schemeClr val="lt1"/>
+          </a:fontRef>
+        </p:style>
+        <p:txBody>
+          <a:bodyPr rtlCol="0" anchor="ctr"/>
+          <a:lstStyle/>
+          <a:p>
+            <a:pPr algn="ctr"/>
+            <a:r>
+              <a:rPr lang="en-US" noProof="0" dirty="0" err="1"/>
+              <a:t>Noarr</a:t>
+            </a:r>
+            <a:r>
+              <a:rPr lang="en-US" noProof="0" dirty="0"/>
+              <a:t>-MPI</a:t>
+            </a:r>
+          </a:p>
+        </p:txBody>
+      </p:sp>
+      <p:sp>
+        <p:nvSpPr>
+          <p:cNvPr id="25" name="Rectangle 24">
+            <a:extLst>
+              <a:ext uri="{FF2B5EF4-FFF2-40B4-BE49-F238E27FC236}">
+                <a16:creationId xmlns:a16="http://schemas.microsoft.com/office/drawing/2014/main" id="{B7D64168-E19F-C04D-293D-CB07E85D29DA}"/>
+              </a:ext>
+            </a:extLst>
+          </p:cNvPr>
+          <p:cNvSpPr/>
+          <p:nvPr/>
+        </p:nvSpPr>
+        <p:spPr>
+          <a:xfrm>
+            <a:off x="4853138" y="5424788"/>
+            <a:ext cx="3711020" cy="914400"/>
+          </a:xfrm>
+          <a:prstGeom prst="rect">
+            <a:avLst/>
+          </a:prstGeom>
+        </p:spPr>
+        <p:style>
+          <a:lnRef idx="2">
+            <a:schemeClr val="accent1">
+              <a:shade val="15000"/>
+            </a:schemeClr>
+          </a:lnRef>
+          <a:fillRef idx="1">
+            <a:schemeClr val="accent1"/>
+          </a:fillRef>
+          <a:effectRef idx="0">
+            <a:schemeClr val="accent1"/>
+          </a:effectRef>
+          <a:fontRef idx="minor">
+            <a:schemeClr val="lt1"/>
+          </a:fontRef>
+        </p:style>
+        <p:txBody>
+          <a:bodyPr rtlCol="0" anchor="ctr"/>
+          <a:lstStyle/>
+          <a:p>
+            <a:pPr algn="ctr"/>
+            <a:r>
+              <a:rPr lang="en-US" noProof="0" dirty="0" err="1"/>
+              <a:t>Cellato</a:t>
+            </a:r>
             <a:endParaRPr lang="en-US" noProof="0" dirty="0"/>
+          </a:p>
+        </p:txBody>
+      </p:sp>
+    </p:spTree>
+    <p:extLst>
+      <p:ext uri="{BB962C8B-B14F-4D97-AF65-F5344CB8AC3E}">
+        <p14:creationId xmlns:p14="http://schemas.microsoft.com/office/powerpoint/2010/main" val="1745489699"/>
+      </p:ext>
+    </p:extLst>
+  </p:cSld>
+  <p:clrMapOvr>
+    <a:masterClrMapping/>
+  </p:clrMapOvr>
+</p:sld>
+</file>
+
+<file path=ppt/slides/slide29.xml><?xml version="1.0" encoding="utf-8"?>
+<p:sld xmlns:a="http://schemas.openxmlformats.org/drawingml/2006/main" xmlns:r="http://schemas.openxmlformats.org/officeDocument/2006/relationships" xmlns:p="http://schemas.openxmlformats.org/presentationml/2006/main">
+  <p:cSld>
+    <p:spTree>
+      <p:nvGrpSpPr>
+        <p:cNvPr id="1" name=""/>
+        <p:cNvGrpSpPr/>
+        <p:nvPr/>
+      </p:nvGrpSpPr>
+      <p:grpSpPr>
+        <a:xfrm>
+          <a:off x="0" y="0"/>
+          <a:ext cx="0" cy="0"/>
+          <a:chOff x="0" y="0"/>
+          <a:chExt cx="0" cy="0"/>
+        </a:xfrm>
+      </p:grpSpPr>
+      <p:sp>
+        <p:nvSpPr>
+          <p:cNvPr id="2" name="Title 1">
+            <a:extLst>
+              <a:ext uri="{FF2B5EF4-FFF2-40B4-BE49-F238E27FC236}">
+                <a16:creationId xmlns:a16="http://schemas.microsoft.com/office/drawing/2014/main" id="{63B07F39-5957-124B-D20D-4A155E0E07D1}"/>
+              </a:ext>
+            </a:extLst>
+          </p:cNvPr>
+          <p:cNvSpPr>
+            <a:spLocks noGrp="1"/>
+          </p:cNvSpPr>
+          <p:nvPr>
+            <p:ph type="title"/>
+          </p:nvPr>
+        </p:nvSpPr>
+        <p:spPr/>
+        <p:txBody>
+          <a:bodyPr/>
+          <a:lstStyle/>
+          <a:p>
+            <a:r>
+              <a:rPr lang="en-US" noProof="0" dirty="0"/>
+              <a:t>Summary</a:t>
+            </a:r>
           </a:p>
         </p:txBody>
       </p:sp>
@@ -7949,7 +8597,7 @@
           <p:cNvPr id="3" name="Content Placeholder 2">
             <a:extLst>
               <a:ext uri="{FF2B5EF4-FFF2-40B4-BE49-F238E27FC236}">
-                <a16:creationId xmlns:a16="http://schemas.microsoft.com/office/drawing/2014/main" id="{950373B6-1B3D-2E32-D54A-18C124620153}"/>
+                <a16:creationId xmlns:a16="http://schemas.microsoft.com/office/drawing/2014/main" id="{4437CB38-BBCE-B652-0445-A75C99068419}"/>
               </a:ext>
             </a:extLst>
           </p:cNvPr>
@@ -7965,14 +8613,44 @@
           <a:bodyPr/>
           <a:lstStyle/>
           <a:p>
-            <a:endParaRPr lang="en-US" noProof="0" dirty="0"/>
+            <a:r>
+              <a:rPr lang="en-US" noProof="0" dirty="0"/>
+              <a:t>6 peer-reviewed publications </a:t>
+            </a:r>
+          </a:p>
+          <a:p>
+            <a:pPr lvl="1"/>
+            <a:r>
+              <a:rPr lang="en-US" noProof="0" dirty="0"/>
+              <a:t>2 journal articles</a:t>
+            </a:r>
+          </a:p>
+          <a:p>
+            <a:pPr lvl="1"/>
+            <a:r>
+              <a:rPr lang="en-US" noProof="0" dirty="0"/>
+              <a:t>3 conference papers,</a:t>
+            </a:r>
+          </a:p>
+          <a:p>
+            <a:pPr lvl="1"/>
+            <a:r>
+              <a:rPr lang="en-US" noProof="0" dirty="0"/>
+              <a:t>1 workshop paper</a:t>
+            </a:r>
+          </a:p>
+          <a:p>
+            <a:r>
+              <a:rPr lang="en-US" noProof="0" dirty="0"/>
+              <a:t>1 publication awaiting peer review</a:t>
+            </a:r>
           </a:p>
         </p:txBody>
       </p:sp>
     </p:spTree>
     <p:extLst>
       <p:ext uri="{BB962C8B-B14F-4D97-AF65-F5344CB8AC3E}">
-        <p14:creationId xmlns:p14="http://schemas.microsoft.com/office/powerpoint/2010/main" val="2595384929"/>
+        <p14:creationId xmlns:p14="http://schemas.microsoft.com/office/powerpoint/2010/main" val="309417143"/>
       </p:ext>
     </p:extLst>
   </p:cSld>
@@ -9204,6 +9882,86 @@
 </p:sld>
 </file>
 
+<file path=ppt/slides/slide30.xml><?xml version="1.0" encoding="utf-8"?>
+<p:sld xmlns:a="http://schemas.openxmlformats.org/drawingml/2006/main" xmlns:r="http://schemas.openxmlformats.org/officeDocument/2006/relationships" xmlns:p="http://schemas.openxmlformats.org/presentationml/2006/main">
+  <p:cSld>
+    <p:spTree>
+      <p:nvGrpSpPr>
+        <p:cNvPr id="1" name=""/>
+        <p:cNvGrpSpPr/>
+        <p:nvPr/>
+      </p:nvGrpSpPr>
+      <p:grpSpPr>
+        <a:xfrm>
+          <a:off x="0" y="0"/>
+          <a:ext cx="0" cy="0"/>
+          <a:chOff x="0" y="0"/>
+          <a:chExt cx="0" cy="0"/>
+        </a:xfrm>
+      </p:grpSpPr>
+      <p:sp>
+        <p:nvSpPr>
+          <p:cNvPr id="2" name="Title 1">
+            <a:extLst>
+              <a:ext uri="{FF2B5EF4-FFF2-40B4-BE49-F238E27FC236}">
+                <a16:creationId xmlns:a16="http://schemas.microsoft.com/office/drawing/2014/main" id="{5EFCD7CC-C2D6-52E6-02D5-F41FC5389A5C}"/>
+              </a:ext>
+            </a:extLst>
+          </p:cNvPr>
+          <p:cNvSpPr>
+            <a:spLocks noGrp="1"/>
+          </p:cNvSpPr>
+          <p:nvPr>
+            <p:ph type="title"/>
+          </p:nvPr>
+        </p:nvSpPr>
+        <p:spPr/>
+        <p:txBody>
+          <a:bodyPr/>
+          <a:lstStyle/>
+          <a:p>
+            <a:endParaRPr lang="en-US" noProof="0" dirty="0"/>
+          </a:p>
+        </p:txBody>
+      </p:sp>
+      <p:sp>
+        <p:nvSpPr>
+          <p:cNvPr id="3" name="Content Placeholder 2">
+            <a:extLst>
+              <a:ext uri="{FF2B5EF4-FFF2-40B4-BE49-F238E27FC236}">
+                <a16:creationId xmlns:a16="http://schemas.microsoft.com/office/drawing/2014/main" id="{950373B6-1B3D-2E32-D54A-18C124620153}"/>
+              </a:ext>
+            </a:extLst>
+          </p:cNvPr>
+          <p:cNvSpPr>
+            <a:spLocks noGrp="1"/>
+          </p:cNvSpPr>
+          <p:nvPr>
+            <p:ph idx="1"/>
+          </p:nvPr>
+        </p:nvSpPr>
+        <p:spPr/>
+        <p:txBody>
+          <a:bodyPr/>
+          <a:lstStyle/>
+          <a:p>
+            <a:endParaRPr lang="en-US" noProof="0" dirty="0"/>
+          </a:p>
+        </p:txBody>
+      </p:sp>
+    </p:spTree>
+    <p:extLst>
+      <p:ext uri="{BB962C8B-B14F-4D97-AF65-F5344CB8AC3E}">
+        <p14:creationId xmlns:p14="http://schemas.microsoft.com/office/powerpoint/2010/main" val="2595384929"/>
+      </p:ext>
+    </p:extLst>
+  </p:cSld>
+  <p:clrMapOvr>
+    <a:masterClrMapping/>
+  </p:clrMapOvr>
+</p:sld>
+</file>
+
 <file path=ppt/slides/slide4.xml><?xml version="1.0" encoding="utf-8"?>
 <p:sld xmlns:a="http://schemas.openxmlformats.org/drawingml/2006/main" xmlns:r="http://schemas.openxmlformats.org/officeDocument/2006/relationships" xmlns:p="http://schemas.openxmlformats.org/presentationml/2006/main">
   <p:cSld>

--- a/slides/Optimizing Memory Layouts and Traversal Orders in High-Performance Computing.pptx
+++ b/slides/Optimizing Memory Layouts and Traversal Orders in High-Performance Computing.pptx
@@ -1301,13 +1301,104 @@
             </a:br>
             <a:r>
               <a:rPr lang="en-US" dirty="0"/>
-              <a:t>A slight detour from our regular schedule of abstractions is our study of LLMs in HPC </a:t>
-            </a:r>
-            <a:r>
-              <a:rPr lang="en-US"/>
-              <a:t>algorithm design.</a:t>
-            </a:r>
+              <a:t>A slight detour from our regular schedule of abstractions is our study of LLMs in HPC algorithm design. This work reacted to the recent introduction of LLM models in the area of software design.</a:t>
+            </a:r>
+          </a:p>
+          <a:p>
             <a:endParaRPr lang="en-US" dirty="0"/>
+          </a:p>
+          <a:p>
+            <a:r>
+              <a:rPr lang="en-US" dirty="0"/>
+              <a:t>(?? groundwork for the following work?)</a:t>
+            </a:r>
+          </a:p>
+          <a:p>
+            <a:endParaRPr lang="en-US" dirty="0"/>
+          </a:p>
+          <a:p>
+            <a:r>
+              <a:rPr lang="en-US" dirty="0"/>
+              <a:t>At the time of the study, LLM models were still regarded as incapable of high-level reasoning on efficient algorithm design, roughly fulfilling the role of a junior-level programmer.</a:t>
+            </a:r>
+            <a:br>
+              <a:rPr lang="en-US" dirty="0"/>
+            </a:br>
+            <a:r>
+              <a:rPr lang="en-US" dirty="0"/>
+              <a:t>We have evaluated a state of the art reasoning LLM on three well-known algorithms (histogram computation, Game of Life simulation, and </a:t>
+            </a:r>
+            <a:r>
+              <a:rPr lang="en-US" dirty="0" err="1"/>
+              <a:t>kNN</a:t>
+            </a:r>
+            <a:r>
+              <a:rPr lang="en-US" dirty="0"/>
+              <a:t> search) to find out whether an</a:t>
+            </a:r>
+            <a:br>
+              <a:rPr lang="en-US" dirty="0"/>
+            </a:br>
+            <a:r>
+              <a:rPr lang="en-US" dirty="0"/>
+              <a:t>LLM is capable of generating a highly efficient code for them, and whether the quality improves with more suggestions or even specific instructions (tutoring).</a:t>
+            </a:r>
+            <a:br>
+              <a:rPr lang="en-US" dirty="0"/>
+            </a:br>
+            <a:br>
+              <a:rPr lang="en-US" dirty="0"/>
+            </a:br>
+            <a:r>
+              <a:rPr lang="en-US" dirty="0"/>
+              <a:t>We found that histogram and </a:t>
+            </a:r>
+            <a:r>
+              <a:rPr lang="en-US" dirty="0" err="1"/>
+              <a:t>GoL</a:t>
+            </a:r>
+            <a:r>
+              <a:rPr lang="en-US" dirty="0"/>
+              <a:t> roughly fitted the complexity of algorithms for which the LLM indeed improves with tutoring; however the </a:t>
+            </a:r>
+            <a:r>
+              <a:rPr lang="en-US" dirty="0" err="1"/>
+              <a:t>kNN</a:t>
+            </a:r>
+            <a:r>
+              <a:rPr lang="en-US" dirty="0"/>
+              <a:t> algorithm was too complex for the LLM to</a:t>
+            </a:r>
+            <a:br>
+              <a:rPr lang="en-US" dirty="0"/>
+            </a:br>
+            <a:r>
+              <a:rPr lang="en-US" dirty="0"/>
+              <a:t>implement even with specific instructions. The situation has changed with each new generation of LLMs since then, and GPT-5 has managed to get better with tutoring on the </a:t>
+            </a:r>
+            <a:r>
+              <a:rPr lang="en-US" dirty="0" err="1"/>
+              <a:t>kNN</a:t>
+            </a:r>
+            <a:r>
+              <a:rPr lang="en-US" dirty="0"/>
+              <a:t> algorithm,</a:t>
+            </a:r>
+            <a:br>
+              <a:rPr lang="en-US" dirty="0"/>
+            </a:br>
+            <a:r>
+              <a:rPr lang="en-US" dirty="0"/>
+              <a:t>while fully saturating the </a:t>
+            </a:r>
+            <a:r>
+              <a:rPr lang="en-US" dirty="0" err="1"/>
+              <a:t>GoL</a:t>
+            </a:r>
+            <a:r>
+              <a:rPr lang="en-US" dirty="0"/>
+              <a:t> algorithm, even with very vague instructions.</a:t>
+            </a:r>
           </a:p>
         </p:txBody>
       </p:sp>
@@ -1338,6 +1429,106 @@
     <p:extLst>
       <p:ext uri="{BB962C8B-B14F-4D97-AF65-F5344CB8AC3E}">
         <p14:creationId xmlns:p14="http://schemas.microsoft.com/office/powerpoint/2010/main" val="4235059812"/>
+      </p:ext>
+    </p:extLst>
+  </p:cSld>
+  <p:clrMapOvr>
+    <a:masterClrMapping/>
+  </p:clrMapOvr>
+</p:notes>
+</file>
+
+<file path=ppt/notesSlides/notesSlide14.xml><?xml version="1.0" encoding="utf-8"?>
+<p:notes xmlns:a="http://schemas.openxmlformats.org/drawingml/2006/main" xmlns:r="http://schemas.openxmlformats.org/officeDocument/2006/relationships" xmlns:p="http://schemas.openxmlformats.org/presentationml/2006/main">
+  <p:cSld>
+    <p:spTree>
+      <p:nvGrpSpPr>
+        <p:cNvPr id="1" name=""/>
+        <p:cNvGrpSpPr/>
+        <p:nvPr/>
+      </p:nvGrpSpPr>
+      <p:grpSpPr>
+        <a:xfrm>
+          <a:off x="0" y="0"/>
+          <a:ext cx="0" cy="0"/>
+          <a:chOff x="0" y="0"/>
+          <a:chExt cx="0" cy="0"/>
+        </a:xfrm>
+      </p:grpSpPr>
+      <p:sp>
+        <p:nvSpPr>
+          <p:cNvPr id="2" name="Slide Image Placeholder 1"/>
+          <p:cNvSpPr>
+            <a:spLocks noGrp="1" noRot="1" noChangeAspect="1"/>
+          </p:cNvSpPr>
+          <p:nvPr>
+            <p:ph type="sldImg"/>
+          </p:nvPr>
+        </p:nvSpPr>
+        <p:spPr/>
+      </p:sp>
+      <p:sp>
+        <p:nvSpPr>
+          <p:cNvPr id="3" name="Notes Placeholder 2"/>
+          <p:cNvSpPr>
+            <a:spLocks noGrp="1"/>
+          </p:cNvSpPr>
+          <p:nvPr>
+            <p:ph type="body" idx="1"/>
+          </p:nvPr>
+        </p:nvSpPr>
+        <p:spPr/>
+        <p:txBody>
+          <a:bodyPr/>
+          <a:lstStyle/>
+          <a:p>
+            <a:r>
+              <a:rPr lang="en-US" dirty="0"/>
+              <a:t>Following up on the recent improvements of LLMs since our previous work, we have become interested in whether their capability</a:t>
+            </a:r>
+            <a:br>
+              <a:rPr lang="en-US" dirty="0"/>
+            </a:br>
+            <a:r>
+              <a:rPr lang="en-US" dirty="0"/>
+              <a:t>improves with abstractions that allow user-directed optimizations of the code in a similar manner to our abstractions.</a:t>
+            </a:r>
+          </a:p>
+          <a:p>
+            <a:endParaRPr lang="en-US"/>
+          </a:p>
+          <a:p>
+            <a:endParaRPr lang="en-US" dirty="0"/>
+          </a:p>
+        </p:txBody>
+      </p:sp>
+      <p:sp>
+        <p:nvSpPr>
+          <p:cNvPr id="4" name="Slide Number Placeholder 3"/>
+          <p:cNvSpPr>
+            <a:spLocks noGrp="1"/>
+          </p:cNvSpPr>
+          <p:nvPr>
+            <p:ph type="sldNum" sz="quarter" idx="5"/>
+          </p:nvPr>
+        </p:nvSpPr>
+        <p:spPr/>
+        <p:txBody>
+          <a:bodyPr/>
+          <a:lstStyle/>
+          <a:p>
+            <a:fld id="{FA8FD632-245B-410D-BCC4-8BF8D37AB67F}" type="slidenum">
+              <a:rPr lang="en-US" smtClean="0"/>
+              <a:t>26</a:t>
+            </a:fld>
+            <a:endParaRPr lang="en-US"/>
+          </a:p>
+        </p:txBody>
+      </p:sp>
+    </p:spTree>
+    <p:extLst>
+      <p:ext uri="{BB962C8B-B14F-4D97-AF65-F5344CB8AC3E}">
+        <p14:creationId xmlns:p14="http://schemas.microsoft.com/office/powerpoint/2010/main" val="215031226"/>
       </p:ext>
     </p:extLst>
   </p:cSld>

--- a/slides/Optimizing Memory Layouts and Traversal Orders in High-Performance Computing.pptx
+++ b/slides/Optimizing Memory Layouts and Traversal Orders in High-Performance Computing.pptx
@@ -1491,13 +1491,113 @@
             </a:br>
             <a:r>
               <a:rPr lang="en-US" dirty="0"/>
-              <a:t>improves with abstractions that allow user-directed optimizations of the code in a similar manner to our abstractions.</a:t>
-            </a:r>
-          </a:p>
-          <a:p>
-            <a:endParaRPr lang="en-US"/>
-          </a:p>
-          <a:p>
+              <a:t>further improves with abstractions that allow user-directed optimizations of the code in a similar manner to our abstractions.</a:t>
+            </a:r>
+          </a:p>
+          <a:p>
+            <a:endParaRPr lang="en-US" dirty="0"/>
+          </a:p>
+          <a:p>
+            <a:r>
+              <a:rPr lang="en-US" dirty="0"/>
+              <a:t>We have made a study with 3 different abstractions (Halide, Exo, </a:t>
+            </a:r>
+            <a:r>
+              <a:rPr lang="en-US" dirty="0" err="1"/>
+              <a:t>Noarr</a:t>
+            </a:r>
+            <a:r>
+              <a:rPr lang="en-US" dirty="0"/>
+              <a:t>), evaluating a state of the art LLM on the </a:t>
+            </a:r>
+            <a:r>
+              <a:rPr lang="en-US" dirty="0" err="1"/>
+              <a:t>PolyBench</a:t>
+            </a:r>
+            <a:r>
+              <a:rPr lang="en-US" dirty="0"/>
+              <a:t>/C suite;</a:t>
+            </a:r>
+            <a:br>
+              <a:rPr lang="en-US" dirty="0"/>
+            </a:br>
+            <a:r>
+              <a:rPr lang="en-US" dirty="0"/>
+              <a:t>the workflow consisted of 2 generation steps (translation and optimization) combined with an algorithmic selection of the best translation.</a:t>
+            </a:r>
+          </a:p>
+          <a:p>
+            <a:endParaRPr lang="en-US" dirty="0"/>
+          </a:p>
+          <a:p>
+            <a:r>
+              <a:rPr lang="en-US" dirty="0"/>
+              <a:t>This was made to ensure that the LLM would have a working translation to use as a basis for its optimization attempt, as, at the time of the study,</a:t>
+            </a:r>
+          </a:p>
+          <a:p>
+            <a:r>
+              <a:rPr lang="en-US" dirty="0"/>
+              <a:t>it wasn’t feasible to put the entire programming reference for the given abstraction within the LLM’s limited context window.</a:t>
+            </a:r>
+          </a:p>
+          <a:p>
+            <a:endParaRPr lang="en-US" dirty="0"/>
+          </a:p>
+          <a:p>
+            <a:r>
+              <a:rPr lang="en-US" dirty="0"/>
+              <a:t>The prompts were supplied with one example of the translation (/optimization?) to further compensate for the limitation of its context window.</a:t>
+            </a:r>
+          </a:p>
+          <a:p>
+            <a:endParaRPr lang="en-US" dirty="0"/>
+          </a:p>
+          <a:p>
+            <a:r>
+              <a:rPr lang="en-US" dirty="0"/>
+              <a:t>We have compared a naïve prompt (just to optimize the given computation) with more specific prompts giving general optimization hints,</a:t>
+            </a:r>
+            <a:br>
+              <a:rPr lang="en-US" dirty="0"/>
+            </a:br>
+            <a:r>
+              <a:rPr lang="en-US" dirty="0"/>
+              <a:t>and an alternative approach based on first writing an abstract optimization strategy and then implementing it in the second request.</a:t>
+            </a:r>
+          </a:p>
+          <a:p>
+            <a:endParaRPr lang="en-US" dirty="0"/>
+          </a:p>
+          <a:p>
+            <a:r>
+              <a:rPr lang="en-US" dirty="0"/>
+              <a:t>All these combinations of abstractions and prompts were also compared to applying the same methodology to the C baseline.</a:t>
+            </a:r>
+          </a:p>
+          <a:p>
+            <a:endParaRPr lang="en-US" dirty="0"/>
+          </a:p>
+          <a:p>
+            <a:r>
+              <a:rPr lang="en-US" dirty="0"/>
+              <a:t>Very unsurprisingly, more specific prompts performed better across all abstractions and C, but at the same time,</a:t>
+            </a:r>
+            <a:br>
+              <a:rPr lang="en-US"/>
+            </a:br>
+            <a:r>
+              <a:rPr lang="en-US"/>
+              <a:t>pure C </a:t>
+            </a:r>
+            <a:r>
+              <a:rPr lang="en-US" dirty="0"/>
+              <a:t>optimization attempts performed better than </a:t>
+            </a:r>
+            <a:r>
+              <a:rPr lang="en-US"/>
+              <a:t>any abstraction.</a:t>
+            </a:r>
             <a:endParaRPr lang="en-US" dirty="0"/>
           </a:p>
         </p:txBody>

--- a/slides/Optimizing Memory Layouts and Traversal Orders in High-Performance Computing.pptx
+++ b/slides/Optimizing Memory Layouts and Traversal Orders in High-Performance Computing.pptx
@@ -5,7 +5,7 @@
     <p:sldMasterId id="2147483648" r:id="rId1"/>
   </p:sldMasterIdLst>
   <p:notesMasterIdLst>
-    <p:notesMasterId r:id="rId36"/>
+    <p:notesMasterId r:id="rId31"/>
   </p:notesMasterIdLst>
   <p:sldIdLst>
     <p:sldId id="256" r:id="rId2"/>
@@ -22,26 +22,21 @@
     <p:sldId id="272" r:id="rId13"/>
     <p:sldId id="285" r:id="rId14"/>
     <p:sldId id="278" r:id="rId15"/>
-    <p:sldId id="265" r:id="rId16"/>
-    <p:sldId id="258" r:id="rId17"/>
-    <p:sldId id="273" r:id="rId18"/>
-    <p:sldId id="286" r:id="rId19"/>
-    <p:sldId id="289" r:id="rId20"/>
-    <p:sldId id="290" r:id="rId21"/>
-    <p:sldId id="279" r:id="rId22"/>
-    <p:sldId id="274" r:id="rId23"/>
-    <p:sldId id="287" r:id="rId24"/>
-    <p:sldId id="280" r:id="rId25"/>
-    <p:sldId id="259" r:id="rId26"/>
-    <p:sldId id="275" r:id="rId27"/>
-    <p:sldId id="288" r:id="rId28"/>
-    <p:sldId id="291" r:id="rId29"/>
-    <p:sldId id="276" r:id="rId30"/>
-    <p:sldId id="292" r:id="rId31"/>
-    <p:sldId id="260" r:id="rId32"/>
-    <p:sldId id="266" r:id="rId33"/>
-    <p:sldId id="261" r:id="rId34"/>
-    <p:sldId id="262" r:id="rId35"/>
+    <p:sldId id="273" r:id="rId16"/>
+    <p:sldId id="286" r:id="rId17"/>
+    <p:sldId id="289" r:id="rId18"/>
+    <p:sldId id="290" r:id="rId19"/>
+    <p:sldId id="279" r:id="rId20"/>
+    <p:sldId id="274" r:id="rId21"/>
+    <p:sldId id="287" r:id="rId22"/>
+    <p:sldId id="280" r:id="rId23"/>
+    <p:sldId id="288" r:id="rId24"/>
+    <p:sldId id="291" r:id="rId25"/>
+    <p:sldId id="276" r:id="rId26"/>
+    <p:sldId id="292" r:id="rId27"/>
+    <p:sldId id="266" r:id="rId28"/>
+    <p:sldId id="261" r:id="rId29"/>
+    <p:sldId id="262" r:id="rId30"/>
   </p:sldIdLst>
   <p:sldSz cx="12192000" cy="6858000"/>
   <p:notesSz cx="6858000" cy="9144000"/>
@@ -163,8 +158,6 @@
             <p14:sldId id="272"/>
             <p14:sldId id="285"/>
             <p14:sldId id="278"/>
-            <p14:sldId id="265"/>
-            <p14:sldId id="258"/>
             <p14:sldId id="273"/>
             <p14:sldId id="286"/>
             <p14:sldId id="289"/>
@@ -177,17 +170,10 @@
         </p14:section>
         <p14:section name="llms" id="{2FE3CF17-CBFB-48E9-A3BF-DD99B7D2F01E}">
           <p14:sldIdLst>
-            <p14:sldId id="259"/>
-            <p14:sldId id="275"/>
             <p14:sldId id="288"/>
             <p14:sldId id="291"/>
             <p14:sldId id="276"/>
             <p14:sldId id="292"/>
-          </p14:sldIdLst>
-        </p14:section>
-        <p14:section name="sw artifacts" id="{C643FBD2-A5DD-453D-B5B5-69D3884A4C2F}">
-          <p14:sldIdLst>
-            <p14:sldId id="260"/>
           </p14:sldIdLst>
         </p14:section>
         <p14:section name="summary" id="{D3BAAF83-51D3-4EFD-B7CC-7BA6DAC4A838}">
@@ -662,7 +648,7 @@
           <a:p>
             <a:r>
               <a:rPr lang="en-US" dirty="0"/>
-              <a:t>?? define locality of reference?</a:t>
+              <a:t>(?? define locality of reference?)</a:t>
             </a:r>
           </a:p>
           <a:p>
@@ -677,7 +663,7 @@
           <a:p>
             <a:r>
               <a:rPr lang="en-US" dirty="0"/>
-              <a:t>?? (Similarly, the traversal may be split into multiple blocks or tiles to better utilize caching)</a:t>
+              <a:t>(?? (Similarly, the traversal may be split into multiple blocks or tiles to better utilize caching))</a:t>
             </a:r>
           </a:p>
           <a:p>
@@ -702,13 +688,30 @@
             <a:r>
               <a:rPr lang="en-US" dirty="0"/>
               <a:t>(and even if so, hard-coding optimizations for one hardware architecture makes the code less maintainable/readable and less portable to other architectures)</a:t>
+            </a:r>
+          </a:p>
+          <a:p>
+            <a:endParaRPr lang="en-US" dirty="0"/>
+          </a:p>
+          <a:p>
+            <a:r>
+              <a:rPr lang="en-US" dirty="0"/>
+              <a:t>(? PGO, polyhedral optimization, autotuning, </a:t>
+            </a:r>
+            <a:r>
+              <a:rPr lang="en-US" dirty="0" err="1"/>
+              <a:t>etc</a:t>
+            </a:r>
+            <a:r>
+              <a:rPr lang="en-US" dirty="0"/>
+              <a:t>)</a:t>
             </a:r>
             <a:br>
               <a:rPr lang="en-US" dirty="0"/>
             </a:br>
             <a:r>
               <a:rPr lang="en-US" dirty="0"/>
-              <a:t>?? Example</a:t>
+              <a:t>(?? Example)</a:t>
             </a:r>
             <a:br>
               <a:rPr lang="en-US" dirty="0"/>
@@ -803,7 +806,73 @@
           <a:bodyPr/>
           <a:lstStyle/>
           <a:p>
+            <a:r>
+              <a:rPr lang="en-US" dirty="0"/>
+              <a:t>(HPC?)</a:t>
+            </a:r>
+            <a:br>
+              <a:rPr lang="en-US" dirty="0"/>
+            </a:br>
+            <a:r>
+              <a:rPr lang="en-US" dirty="0"/>
+              <a:t>Since many scientific computing algorithms run in a distributed manner on larger clusters, which further complicates the design,</a:t>
+            </a:r>
+            <a:br>
+              <a:rPr lang="en-US" dirty="0"/>
+            </a:br>
+            <a:r>
+              <a:rPr lang="en-US" dirty="0"/>
+              <a:t>we have investigated how the principles from the abstractions work in the context of distributed computing.</a:t>
+            </a:r>
+          </a:p>
+          <a:p>
             <a:endParaRPr lang="en-US" dirty="0"/>
+          </a:p>
+          <a:p>
+            <a:r>
+              <a:rPr lang="en-US" dirty="0"/>
+              <a:t>For this, we have chosen MPI, which is the most predominant technology used to distribute general computing tasks in C++ (as well as Fortran).</a:t>
+            </a:r>
+          </a:p>
+          <a:p>
+            <a:endParaRPr lang="en-US" dirty="0"/>
+          </a:p>
+          <a:p>
+            <a:r>
+              <a:rPr lang="en-US" dirty="0"/>
+              <a:t>(data distribution patterns?)</a:t>
+            </a:r>
+          </a:p>
+          <a:p>
+            <a:r>
+              <a:rPr lang="en-US" dirty="0"/>
+              <a:t>We have observed that many communication patterns, as well as data scattering patterns, can be described using the same building blocks used for describing layout and traversal transformations.</a:t>
+            </a:r>
+          </a:p>
+          <a:p>
+            <a:endParaRPr lang="en-US" dirty="0"/>
+          </a:p>
+          <a:p>
+            <a:r>
+              <a:rPr lang="en-US" dirty="0"/>
+              <a:t>This extension of the abstractions allows binding various dimensions of layouts and traversals to specific MPI communicators (which can specify an abstract topology of computation nodes)</a:t>
+            </a:r>
+            <a:br>
+              <a:rPr lang="en-US" dirty="0"/>
+            </a:br>
+            <a:r>
+              <a:rPr lang="en-US" dirty="0"/>
+              <a:t>and layout specifications to native MPI types in such a way that they are communicated in a layout-agnostic way.</a:t>
+            </a:r>
+          </a:p>
+          <a:p>
+            <a:endParaRPr lang="en-US" dirty="0"/>
+          </a:p>
+          <a:p>
+            <a:r>
+              <a:rPr lang="en-US" dirty="0"/>
+              <a:t>This allows, for example, for automatic distribution of data that can then be computed locally, and the local results can be gathered to the final result.</a:t>
+            </a:r>
           </a:p>
         </p:txBody>
       </p:sp>
@@ -824,157 +893,7 @@
           <a:p>
             <a:fld id="{FA8FD632-245B-410D-BCC4-8BF8D37AB67F}" type="slidenum">
               <a:rPr lang="en-US" smtClean="0"/>
-              <a:t>15</a:t>
-            </a:fld>
-            <a:endParaRPr lang="en-US"/>
-          </a:p>
-        </p:txBody>
-      </p:sp>
-    </p:spTree>
-    <p:extLst>
-      <p:ext uri="{BB962C8B-B14F-4D97-AF65-F5344CB8AC3E}">
-        <p14:creationId xmlns:p14="http://schemas.microsoft.com/office/powerpoint/2010/main" val="936605202"/>
-      </p:ext>
-    </p:extLst>
-  </p:cSld>
-  <p:clrMapOvr>
-    <a:masterClrMapping/>
-  </p:clrMapOvr>
-</p:notes>
-</file>
-
-<file path=ppt/notesSlides/notesSlide11.xml><?xml version="1.0" encoding="utf-8"?>
-<p:notes xmlns:a="http://schemas.openxmlformats.org/drawingml/2006/main" xmlns:r="http://schemas.openxmlformats.org/officeDocument/2006/relationships" xmlns:p="http://schemas.openxmlformats.org/presentationml/2006/main">
-  <p:cSld>
-    <p:spTree>
-      <p:nvGrpSpPr>
-        <p:cNvPr id="1" name=""/>
-        <p:cNvGrpSpPr/>
-        <p:nvPr/>
-      </p:nvGrpSpPr>
-      <p:grpSpPr>
-        <a:xfrm>
-          <a:off x="0" y="0"/>
-          <a:ext cx="0" cy="0"/>
-          <a:chOff x="0" y="0"/>
-          <a:chExt cx="0" cy="0"/>
-        </a:xfrm>
-      </p:grpSpPr>
-      <p:sp>
-        <p:nvSpPr>
-          <p:cNvPr id="2" name="Slide Image Placeholder 1"/>
-          <p:cNvSpPr>
-            <a:spLocks noGrp="1" noRot="1" noChangeAspect="1"/>
-          </p:cNvSpPr>
-          <p:nvPr>
-            <p:ph type="sldImg"/>
-          </p:nvPr>
-        </p:nvSpPr>
-        <p:spPr/>
-      </p:sp>
-      <p:sp>
-        <p:nvSpPr>
-          <p:cNvPr id="3" name="Notes Placeholder 2"/>
-          <p:cNvSpPr>
-            <a:spLocks noGrp="1"/>
-          </p:cNvSpPr>
-          <p:nvPr>
-            <p:ph type="body" idx="1"/>
-          </p:nvPr>
-        </p:nvSpPr>
-        <p:spPr/>
-        <p:txBody>
-          <a:bodyPr/>
-          <a:lstStyle/>
-          <a:p>
-            <a:r>
-              <a:rPr lang="en-US" dirty="0"/>
-              <a:t>(HPC?)</a:t>
-            </a:r>
-            <a:br>
-              <a:rPr lang="en-US" dirty="0"/>
-            </a:br>
-            <a:r>
-              <a:rPr lang="en-US" dirty="0"/>
-              <a:t>Since many scientific computing algorithms run in a distributed manner on larger clusters, which further complicates the design,</a:t>
-            </a:r>
-            <a:br>
-              <a:rPr lang="en-US" dirty="0"/>
-            </a:br>
-            <a:r>
-              <a:rPr lang="en-US" dirty="0"/>
-              <a:t>we have investigated how the principles from the abstractions work in the context of distributed computing.</a:t>
-            </a:r>
-          </a:p>
-          <a:p>
-            <a:endParaRPr lang="en-US" dirty="0"/>
-          </a:p>
-          <a:p>
-            <a:r>
-              <a:rPr lang="en-US" dirty="0"/>
-              <a:t>For this, we have chosen MPI, which is the most predominant technology used to distribute general computing tasks in C++ (as well as Fortran).</a:t>
-            </a:r>
-          </a:p>
-          <a:p>
-            <a:endParaRPr lang="en-US" dirty="0"/>
-          </a:p>
-          <a:p>
-            <a:r>
-              <a:rPr lang="en-US" dirty="0"/>
-              <a:t>(data distribution patterns?)</a:t>
-            </a:r>
-          </a:p>
-          <a:p>
-            <a:r>
-              <a:rPr lang="en-US" dirty="0"/>
-              <a:t>We have observed that many communication patterns, as well as data scattering patterns, can be described using the same building blocks used for describing layout and traversal transformations.</a:t>
-            </a:r>
-          </a:p>
-          <a:p>
-            <a:endParaRPr lang="en-US" dirty="0"/>
-          </a:p>
-          <a:p>
-            <a:r>
-              <a:rPr lang="en-US" dirty="0"/>
-              <a:t>This extension of the abstractions allows binding various dimensions of layouts and traversals to specific MPI communicators (which can specify an abstract topology of computation nodes)</a:t>
-            </a:r>
-            <a:br>
-              <a:rPr lang="en-US" dirty="0"/>
-            </a:br>
-            <a:r>
-              <a:rPr lang="en-US" dirty="0"/>
-              <a:t>and layout specifications to native MPI types in such a way that they are communicated in a layout-agnostic way.</a:t>
-            </a:r>
-          </a:p>
-          <a:p>
-            <a:endParaRPr lang="en-US" dirty="0"/>
-          </a:p>
-          <a:p>
-            <a:r>
-              <a:rPr lang="en-US" dirty="0"/>
-              <a:t>This allows, for example, for automatic distribution of data that can then be computed locally, and the local results can be gathered to the final result.</a:t>
-            </a:r>
-          </a:p>
-        </p:txBody>
-      </p:sp>
-      <p:sp>
-        <p:nvSpPr>
-          <p:cNvPr id="4" name="Slide Number Placeholder 3"/>
-          <p:cNvSpPr>
-            <a:spLocks noGrp="1"/>
-          </p:cNvSpPr>
-          <p:nvPr>
-            <p:ph type="sldNum" sz="quarter" idx="5"/>
-          </p:nvPr>
-        </p:nvSpPr>
-        <p:spPr/>
-        <p:txBody>
-          <a:bodyPr/>
-          <a:lstStyle/>
-          <a:p>
-            <a:fld id="{FA8FD632-245B-410D-BCC4-8BF8D37AB67F}" type="slidenum">
-              <a:rPr lang="en-US" smtClean="0"/>
-              <a:t>18</a:t>
+              <a:t>16</a:t>
             </a:fld>
             <a:endParaRPr lang="en-US"/>
           </a:p>
@@ -993,7 +912,7 @@
 </p:notes>
 </file>
 
-<file path=ppt/notesSlides/notesSlide12.xml><?xml version="1.0" encoding="utf-8"?>
+<file path=ppt/notesSlides/notesSlide11.xml><?xml version="1.0" encoding="utf-8"?>
 <p:notes xmlns:a="http://schemas.openxmlformats.org/drawingml/2006/main" xmlns:r="http://schemas.openxmlformats.org/officeDocument/2006/relationships" xmlns:p="http://schemas.openxmlformats.org/presentationml/2006/main">
   <p:cSld>
     <p:spTree>
@@ -1148,7 +1067,7 @@
           <a:p>
             <a:fld id="{FA8FD632-245B-410D-BCC4-8BF8D37AB67F}" type="slidenum">
               <a:rPr lang="en-US" smtClean="0"/>
-              <a:t>19</a:t>
+              <a:t>17</a:t>
             </a:fld>
             <a:endParaRPr lang="en-US"/>
           </a:p>
@@ -1167,7 +1086,7 @@
 </p:notes>
 </file>
 
-<file path=ppt/notesSlides/notesSlide13.xml><?xml version="1.0" encoding="utf-8"?>
+<file path=ppt/notesSlides/notesSlide12.xml><?xml version="1.0" encoding="utf-8"?>
 <p:notes xmlns:a="http://schemas.openxmlformats.org/drawingml/2006/main" xmlns:r="http://schemas.openxmlformats.org/officeDocument/2006/relationships" xmlns:p="http://schemas.openxmlformats.org/presentationml/2006/main">
   <p:cSld>
     <p:spTree>
@@ -1331,7 +1250,7 @@
           <a:p>
             <a:fld id="{FA8FD632-245B-410D-BCC4-8BF8D37AB67F}" type="slidenum">
               <a:rPr lang="en-US" smtClean="0"/>
-              <a:t>20</a:t>
+              <a:t>18</a:t>
             </a:fld>
             <a:endParaRPr lang="en-US"/>
           </a:p>
@@ -1341,6 +1260,102 @@
     <p:extLst>
       <p:ext uri="{BB962C8B-B14F-4D97-AF65-F5344CB8AC3E}">
         <p14:creationId xmlns:p14="http://schemas.microsoft.com/office/powerpoint/2010/main" val="1485590865"/>
+      </p:ext>
+    </p:extLst>
+  </p:cSld>
+  <p:clrMapOvr>
+    <a:masterClrMapping/>
+  </p:clrMapOvr>
+</p:notes>
+</file>
+
+<file path=ppt/notesSlides/notesSlide13.xml><?xml version="1.0" encoding="utf-8"?>
+<p:notes xmlns:a="http://schemas.openxmlformats.org/drawingml/2006/main" xmlns:r="http://schemas.openxmlformats.org/officeDocument/2006/relationships" xmlns:p="http://schemas.openxmlformats.org/presentationml/2006/main">
+  <p:cSld>
+    <p:spTree>
+      <p:nvGrpSpPr>
+        <p:cNvPr id="1" name=""/>
+        <p:cNvGrpSpPr/>
+        <p:nvPr/>
+      </p:nvGrpSpPr>
+      <p:grpSpPr>
+        <a:xfrm>
+          <a:off x="0" y="0"/>
+          <a:ext cx="0" cy="0"/>
+          <a:chOff x="0" y="0"/>
+          <a:chExt cx="0" cy="0"/>
+        </a:xfrm>
+      </p:grpSpPr>
+      <p:sp>
+        <p:nvSpPr>
+          <p:cNvPr id="2" name="Slide Image Placeholder 1"/>
+          <p:cNvSpPr>
+            <a:spLocks noGrp="1" noRot="1" noChangeAspect="1"/>
+          </p:cNvSpPr>
+          <p:nvPr>
+            <p:ph type="sldImg"/>
+          </p:nvPr>
+        </p:nvSpPr>
+        <p:spPr/>
+      </p:sp>
+      <p:sp>
+        <p:nvSpPr>
+          <p:cNvPr id="3" name="Notes Placeholder 2"/>
+          <p:cNvSpPr>
+            <a:spLocks noGrp="1"/>
+          </p:cNvSpPr>
+          <p:nvPr>
+            <p:ph type="body" idx="1"/>
+          </p:nvPr>
+        </p:nvSpPr>
+        <p:spPr/>
+        <p:txBody>
+          <a:bodyPr/>
+          <a:lstStyle/>
+          <a:p>
+            <a:r>
+              <a:rPr lang="en-US" dirty="0"/>
+              <a:t>We have compared the state of the art C++ bindings for MPI in how they manage to seamlessly enable layout-agnostic communication of data over MPI</a:t>
+            </a:r>
+          </a:p>
+          <a:p>
+            <a:endParaRPr lang="en-US" dirty="0"/>
+          </a:p>
+          <a:p>
+            <a:r>
+              <a:rPr lang="en-US" dirty="0"/>
+              <a:t>This requires that the framework encodes the layout correctly so it is automatically transformed between the two end-points</a:t>
+            </a:r>
+          </a:p>
+        </p:txBody>
+      </p:sp>
+      <p:sp>
+        <p:nvSpPr>
+          <p:cNvPr id="4" name="Slide Number Placeholder 3"/>
+          <p:cNvSpPr>
+            <a:spLocks noGrp="1"/>
+          </p:cNvSpPr>
+          <p:nvPr>
+            <p:ph type="sldNum" sz="quarter" idx="5"/>
+          </p:nvPr>
+        </p:nvSpPr>
+        <p:spPr/>
+        <p:txBody>
+          <a:bodyPr/>
+          <a:lstStyle/>
+          <a:p>
+            <a:fld id="{FA8FD632-245B-410D-BCC4-8BF8D37AB67F}" type="slidenum">
+              <a:rPr lang="en-US" smtClean="0"/>
+              <a:t>19</a:t>
+            </a:fld>
+            <a:endParaRPr lang="en-US"/>
+          </a:p>
+        </p:txBody>
+      </p:sp>
+    </p:spTree>
+    <p:extLst>
+      <p:ext uri="{BB962C8B-B14F-4D97-AF65-F5344CB8AC3E}">
+        <p14:creationId xmlns:p14="http://schemas.microsoft.com/office/powerpoint/2010/main" val="2799059215"/>
       </p:ext>
     </p:extLst>
   </p:cSld>
@@ -1396,7 +1411,7 @@
           <a:p>
             <a:r>
               <a:rPr lang="en-US" dirty="0"/>
-              <a:t>We have compared the state of the art C++ bindings for MPI in how they manage to seamlessly enable layout-agnostic communication of data over MPI</a:t>
+              <a:t>In parallel with the earlier development, we have looked into whether the same design principles can be applied to more specific domains.</a:t>
             </a:r>
           </a:p>
           <a:p>
@@ -1405,7 +1420,199 @@
           <a:p>
             <a:r>
               <a:rPr lang="en-US" dirty="0"/>
-              <a:t>This requires that the framework encodes the layout correctly so it is automatically transformed between the two end-points</a:t>
+              <a:t>(Why are they cool? Is that just a random area?)</a:t>
+            </a:r>
+          </a:p>
+          <a:p>
+            <a:r>
+              <a:rPr lang="en-US" dirty="0"/>
+              <a:t>One domain of our particular interest was Cellular Automata simulation. These can be characterized as stencil computations on grids where each cell has a discrete state space.</a:t>
+            </a:r>
+          </a:p>
+          <a:p>
+            <a:r>
+              <a:rPr lang="en-US" dirty="0"/>
+              <a:t>Such computations are characterized by the following properties:</a:t>
+            </a:r>
+          </a:p>
+          <a:p>
+            <a:pPr marL="171450" indent="-171450">
+              <a:buFontTx/>
+              <a:buChar char="-"/>
+            </a:pPr>
+            <a:r>
+              <a:rPr lang="en-US" dirty="0"/>
+              <a:t>The grid (may be multidimensional; commonly 2D or 3D rectangular) &lt;- image</a:t>
+            </a:r>
+          </a:p>
+          <a:p>
+            <a:pPr marL="171450" indent="-171450">
+              <a:buFontTx/>
+              <a:buChar char="-"/>
+            </a:pPr>
+            <a:r>
+              <a:rPr lang="en-US" dirty="0"/>
+              <a:t>Definition of the neighborhood of each cell (typically Moore or von Neumann neighborhood) &lt;- image</a:t>
+            </a:r>
+          </a:p>
+          <a:p>
+            <a:pPr marL="171450" indent="-171450">
+              <a:buFontTx/>
+              <a:buChar char="-"/>
+            </a:pPr>
+            <a:r>
+              <a:rPr lang="en-US" dirty="0"/>
+              <a:t>Definition of the computation – this involves defining the state space for the cells and the update rule that depends on the neighborhood and updates the cell state</a:t>
+            </a:r>
+          </a:p>
+          <a:p>
+            <a:pPr marL="171450" indent="-171450">
+              <a:buFontTx/>
+              <a:buChar char="-"/>
+            </a:pPr>
+            <a:endParaRPr lang="en-US" dirty="0"/>
+          </a:p>
+          <a:p>
+            <a:pPr marL="0" indent="0">
+              <a:buFontTx/>
+              <a:buNone/>
+            </a:pPr>
+            <a:r>
+              <a:rPr lang="en-US" dirty="0"/>
+              <a:t>The computation then involves updates of the grid in discrete time steps.</a:t>
+            </a:r>
+          </a:p>
+          <a:p>
+            <a:pPr marL="0" indent="0">
+              <a:buFontTx/>
+              <a:buNone/>
+            </a:pPr>
+            <a:endParaRPr lang="en-US" dirty="0"/>
+          </a:p>
+          <a:p>
+            <a:pPr marL="0" indent="0">
+              <a:buFontTx/>
+              <a:buNone/>
+            </a:pPr>
+            <a:r>
+              <a:rPr lang="en-US" dirty="0"/>
+              <a:t>(In our earlier work on Cellular automata, we have improved on </a:t>
+            </a:r>
+            <a:r>
+              <a:rPr lang="en-US" dirty="0" err="1"/>
+              <a:t>sota</a:t>
+            </a:r>
+            <a:r>
+              <a:rPr lang="en-US" dirty="0"/>
+              <a:t> using bit-level encoding of the states and bitwise evaluation)</a:t>
+            </a:r>
+          </a:p>
+          <a:p>
+            <a:pPr marL="0" indent="0">
+              <a:buFontTx/>
+              <a:buNone/>
+            </a:pPr>
+            <a:endParaRPr lang="en-US" dirty="0"/>
+          </a:p>
+          <a:p>
+            <a:pPr marL="0" indent="0">
+              <a:buFontTx/>
+              <a:buNone/>
+            </a:pPr>
+            <a:r>
+              <a:rPr lang="en-US" dirty="0"/>
+              <a:t>---</a:t>
+            </a:r>
+          </a:p>
+          <a:p>
+            <a:pPr marL="0" indent="0">
+              <a:buFontTx/>
+              <a:buNone/>
+            </a:pPr>
+            <a:endParaRPr lang="en-US" dirty="0"/>
+          </a:p>
+          <a:p>
+            <a:pPr marL="0" indent="0">
+              <a:buFontTx/>
+              <a:buNone/>
+            </a:pPr>
+            <a:r>
+              <a:rPr lang="en-US" dirty="0"/>
+              <a:t>We have found out that a very impressive speedup of these computations can be achieved by applying the earlier principles of layout- and traversal-agnostic design on a slightly deeper level.</a:t>
+            </a:r>
+          </a:p>
+          <a:p>
+            <a:pPr marL="0" indent="0">
+              <a:buFontTx/>
+              <a:buNone/>
+            </a:pPr>
+            <a:endParaRPr lang="en-US" dirty="0"/>
+          </a:p>
+          <a:p>
+            <a:pPr marL="0" indent="0">
+              <a:buFontTx/>
+              <a:buNone/>
+            </a:pPr>
+            <a:r>
+              <a:rPr lang="en-US" dirty="0"/>
+              <a:t>We can specify the update rule in an abstract way that is agnostic to the whole evaluation (including layouts as well as specific instructions), then we can pair this specification with templated components that automatically implement an efficient computation of the automaton.</a:t>
+            </a:r>
+          </a:p>
+          <a:p>
+            <a:pPr marL="0" indent="0">
+              <a:buFontTx/>
+              <a:buNone/>
+            </a:pPr>
+            <a:r>
+              <a:rPr lang="en-US" dirty="0"/>
+              <a:t>For this, we have devised 4 separate abstractions (components):</a:t>
+            </a:r>
+          </a:p>
+          <a:p>
+            <a:pPr marL="171450" indent="-171450">
+              <a:buFontTx/>
+              <a:buChar char="-"/>
+            </a:pPr>
+            <a:r>
+              <a:rPr lang="en-US" dirty="0"/>
+              <a:t>Memory layout:</a:t>
+            </a:r>
+          </a:p>
+          <a:p>
+            <a:pPr marL="171450" indent="-171450">
+              <a:buFontTx/>
+              <a:buChar char="-"/>
+            </a:pPr>
+            <a:r>
+              <a:rPr lang="en-US" dirty="0"/>
+              <a:t>Evaluator:</a:t>
+            </a:r>
+          </a:p>
+          <a:p>
+            <a:pPr marL="171450" indent="-171450">
+              <a:buFontTx/>
+              <a:buChar char="-"/>
+            </a:pPr>
+            <a:r>
+              <a:rPr lang="en-US" dirty="0"/>
+              <a:t>Traverser:</a:t>
+            </a:r>
+          </a:p>
+          <a:p>
+            <a:pPr marL="171450" indent="-171450">
+              <a:buFontTx/>
+              <a:buChar char="-"/>
+            </a:pPr>
+            <a:endParaRPr lang="en-US" dirty="0"/>
+          </a:p>
+          <a:p>
+            <a:pPr marL="0" indent="0">
+              <a:buFontTx/>
+              <a:buNone/>
+            </a:pPr>
+            <a:r>
+              <a:rPr lang="en-US" dirty="0"/>
+              <a:t>This enables faster development and prototyping of the automatons, and simplifies experimental exploration of different optimization techniques</a:t>
             </a:r>
           </a:p>
         </p:txBody>
@@ -1436,7 +1643,7 @@
     </p:spTree>
     <p:extLst>
       <p:ext uri="{BB962C8B-B14F-4D97-AF65-F5344CB8AC3E}">
-        <p14:creationId xmlns:p14="http://schemas.microsoft.com/office/powerpoint/2010/main" val="2799059215"/>
+        <p14:creationId xmlns:p14="http://schemas.microsoft.com/office/powerpoint/2010/main" val="3622550000"/>
       </p:ext>
     </p:extLst>
   </p:cSld>
@@ -1492,7 +1699,7 @@
           <a:p>
             <a:r>
               <a:rPr lang="en-US" dirty="0"/>
-              <a:t>In parallel with the earlier development, we have looked into whether the same design principles can be applied to more specific domains.</a:t>
+              <a:t>We have confirmed that for the standard memory layout, evaluator, and traverser, which mirrors a baseline implementation, the abstraction does not introduce any overhead over the naturally written algorithm in C++ or CUDA, while introducing flexibility in automatic user-directed optimization.</a:t>
             </a:r>
           </a:p>
           <a:p>
@@ -1501,174 +1708,15 @@
           <a:p>
             <a:r>
               <a:rPr lang="en-US" dirty="0"/>
-              <a:t>(Why are they cool? Is that just a random area?)</a:t>
-            </a:r>
-          </a:p>
-          <a:p>
+              <a:t>In our follow-up work, we evaluate more efficient evaluators that use the bit plane encoding and bitwise vectorization of the computations to bring </a:t>
+            </a:r>
+            <a:r>
+              <a:rPr lang="en-US" dirty="0" err="1"/>
+              <a:t>speeeeed</a:t>
+            </a:r>
             <a:r>
               <a:rPr lang="en-US" dirty="0"/>
-              <a:t>One domain of our particular interest was Cellular Automata simulation. These can be characterized as stencil computations on grids where each cell has a discrete state space.</a:t>
-            </a:r>
-          </a:p>
-          <a:p>
-            <a:r>
-              <a:rPr lang="en-US" dirty="0"/>
-              <a:t>Such computations are characterized by the following properties:</a:t>
-            </a:r>
-          </a:p>
-          <a:p>
-            <a:pPr marL="171450" indent="-171450">
-              <a:buFontTx/>
-              <a:buChar char="-"/>
-            </a:pPr>
-            <a:r>
-              <a:rPr lang="en-US" dirty="0"/>
-              <a:t>The grid (may be multidimensional; commonly 2D or 3D rectangular) &lt;- image</a:t>
-            </a:r>
-          </a:p>
-          <a:p>
-            <a:pPr marL="171450" indent="-171450">
-              <a:buFontTx/>
-              <a:buChar char="-"/>
-            </a:pPr>
-            <a:r>
-              <a:rPr lang="en-US" dirty="0"/>
-              <a:t>Definition of the neighborhood of each cell (typically Moore or von Neumann neighborhood) &lt;- image</a:t>
-            </a:r>
-          </a:p>
-          <a:p>
-            <a:pPr marL="171450" indent="-171450">
-              <a:buFontTx/>
-              <a:buChar char="-"/>
-            </a:pPr>
-            <a:r>
-              <a:rPr lang="en-US" dirty="0"/>
-              <a:t>Definition of the computation – this involves defining the state space for the cells and the update rule that depends on the neighborhood and updates the cell state</a:t>
-            </a:r>
-          </a:p>
-          <a:p>
-            <a:pPr marL="171450" indent="-171450">
-              <a:buFontTx/>
-              <a:buChar char="-"/>
-            </a:pPr>
-            <a:endParaRPr lang="en-US" dirty="0"/>
-          </a:p>
-          <a:p>
-            <a:pPr marL="0" indent="0">
-              <a:buFontTx/>
-              <a:buNone/>
-            </a:pPr>
-            <a:r>
-              <a:rPr lang="en-US" dirty="0"/>
-              <a:t>The computation then involves updates of the grid in discrete time steps.</a:t>
-            </a:r>
-          </a:p>
-          <a:p>
-            <a:pPr marL="0" indent="0">
-              <a:buFontTx/>
-              <a:buNone/>
-            </a:pPr>
-            <a:endParaRPr lang="en-US" dirty="0"/>
-          </a:p>
-          <a:p>
-            <a:pPr marL="0" indent="0">
-              <a:buFontTx/>
-              <a:buNone/>
-            </a:pPr>
-            <a:r>
-              <a:rPr lang="en-US" dirty="0"/>
-              <a:t>---</a:t>
-            </a:r>
-          </a:p>
-          <a:p>
-            <a:pPr marL="0" indent="0">
-              <a:buFontTx/>
-              <a:buNone/>
-            </a:pPr>
-            <a:endParaRPr lang="en-US" dirty="0"/>
-          </a:p>
-          <a:p>
-            <a:pPr marL="0" indent="0">
-              <a:buFontTx/>
-              <a:buNone/>
-            </a:pPr>
-            <a:r>
-              <a:rPr lang="en-US" dirty="0"/>
-              <a:t>We have found out that a very impressive speedup of these computations can be achieved by applying the earlier principles of layout- and traversal-agnostic design on a slightly deeper level.</a:t>
-            </a:r>
-          </a:p>
-          <a:p>
-            <a:pPr marL="0" indent="0">
-              <a:buFontTx/>
-              <a:buNone/>
-            </a:pPr>
-            <a:endParaRPr lang="en-US" dirty="0"/>
-          </a:p>
-          <a:p>
-            <a:pPr marL="0" indent="0">
-              <a:buFontTx/>
-              <a:buNone/>
-            </a:pPr>
-            <a:r>
-              <a:rPr lang="en-US" dirty="0"/>
-              <a:t>We can specify the update rule in an abstract way that is agnostic to the whole evaluation (including layouts as well as specific instructions), then we can pair this specification with templated components that automatically implement an efficient computation of the automaton.</a:t>
-            </a:r>
-          </a:p>
-          <a:p>
-            <a:pPr marL="0" indent="0">
-              <a:buFontTx/>
-              <a:buNone/>
-            </a:pPr>
-            <a:r>
-              <a:rPr lang="en-US" dirty="0"/>
-              <a:t>For this, we have devised 4 separate abstractions (components):</a:t>
-            </a:r>
-          </a:p>
-          <a:p>
-            <a:pPr marL="171450" indent="-171450">
-              <a:buFontTx/>
-              <a:buChar char="-"/>
-            </a:pPr>
-            <a:r>
-              <a:rPr lang="en-US" dirty="0"/>
-              <a:t>Memory layout:</a:t>
-            </a:r>
-          </a:p>
-          <a:p>
-            <a:pPr marL="171450" indent="-171450">
-              <a:buFontTx/>
-              <a:buChar char="-"/>
-            </a:pPr>
-            <a:r>
-              <a:rPr lang="en-US" dirty="0"/>
-              <a:t>Evaluator:</a:t>
-            </a:r>
-          </a:p>
-          <a:p>
-            <a:pPr marL="171450" indent="-171450">
-              <a:buFontTx/>
-              <a:buChar char="-"/>
-            </a:pPr>
-            <a:r>
-              <a:rPr lang="en-US" dirty="0"/>
-              <a:t>Traverser:</a:t>
-            </a:r>
-          </a:p>
-          <a:p>
-            <a:pPr marL="171450" indent="-171450">
-              <a:buFontTx/>
-              <a:buChar char="-"/>
-            </a:pPr>
-            <a:endParaRPr lang="en-US" dirty="0"/>
-          </a:p>
-          <a:p>
-            <a:pPr marL="0" indent="0">
-              <a:buFontTx/>
-              <a:buNone/>
-            </a:pPr>
-            <a:r>
-              <a:rPr lang="en-US" dirty="0"/>
-              <a:t>This enables faster development and prototyping of the automatons, and simplifies experimental exploration of different optimization techniques</a:t>
+              <a:t>.</a:t>
             </a:r>
           </a:p>
         </p:txBody>
@@ -1690,7 +1738,7 @@
           <a:p>
             <a:fld id="{FA8FD632-245B-410D-BCC4-8BF8D37AB67F}" type="slidenum">
               <a:rPr lang="en-US" smtClean="0"/>
-              <a:t>23</a:t>
+              <a:t>22</a:t>
             </a:fld>
             <a:endParaRPr lang="en-US"/>
           </a:p>
@@ -1699,7 +1747,7 @@
     </p:spTree>
     <p:extLst>
       <p:ext uri="{BB962C8B-B14F-4D97-AF65-F5344CB8AC3E}">
-        <p14:creationId xmlns:p14="http://schemas.microsoft.com/office/powerpoint/2010/main" val="3622550000"/>
+        <p14:creationId xmlns:p14="http://schemas.microsoft.com/office/powerpoint/2010/main" val="1504701067"/>
       </p:ext>
     </p:extLst>
   </p:cSld>
@@ -1755,7 +1803,14 @@
           <a:p>
             <a:r>
               <a:rPr lang="en-US" dirty="0"/>
-              <a:t>We have confirmed that for the standard memory layout, evaluator, and traverser, which mirrors a baseline implementation, the abstraction does not introduce any overhead over the naturally written algorithm in C++ or CUDA, while introducing flexibility in automatic user-directed optimization.</a:t>
+              <a:t>(case study?) </a:t>
+            </a:r>
+            <a:br>
+              <a:rPr lang="en-US" dirty="0"/>
+            </a:br>
+            <a:r>
+              <a:rPr lang="en-US" dirty="0"/>
+              <a:t>A slight detour from our regular schedule of abstractions is our study of LLMs in HPC algorithm design. This work reacted to the recent introduction of LLM models in the area of software design.</a:t>
             </a:r>
           </a:p>
           <a:p>
@@ -1764,15 +1819,94 @@
           <a:p>
             <a:r>
               <a:rPr lang="en-US" dirty="0"/>
-              <a:t>In our follow-up work, we evaluate more efficient evaluators that use the bit plane encoding and bitwise vectorization of the computations to bring </a:t>
+              <a:t>(?? groundwork for the following work?)</a:t>
+            </a:r>
+          </a:p>
+          <a:p>
+            <a:endParaRPr lang="en-US" dirty="0"/>
+          </a:p>
+          <a:p>
+            <a:r>
+              <a:rPr lang="en-US" dirty="0"/>
+              <a:t>At the time of the study, LLM models were still regarded as incapable of high-level reasoning on efficient algorithm design, roughly fulfilling the role of a junior-level programmer.</a:t>
+            </a:r>
+            <a:br>
+              <a:rPr lang="en-US" dirty="0"/>
+            </a:br>
+            <a:r>
+              <a:rPr lang="en-US" dirty="0"/>
+              <a:t>We have evaluated a state of the art reasoning LLM on three well-known algorithms (histogram computation, Game of Life simulation, and </a:t>
             </a:r>
             <a:r>
               <a:rPr lang="en-US" dirty="0" err="1"/>
-              <a:t>speeeeed</a:t>
+              <a:t>kNN</a:t>
             </a:r>
             <a:r>
               <a:rPr lang="en-US" dirty="0"/>
-              <a:t>.</a:t>
+              <a:t> search) to find out whether an</a:t>
+            </a:r>
+            <a:br>
+              <a:rPr lang="en-US" dirty="0"/>
+            </a:br>
+            <a:r>
+              <a:rPr lang="en-US" dirty="0"/>
+              <a:t>LLM is capable of generating a highly efficient code for them without any hints, and whether the quality improves with more suggestions, and approaches expert-written code with specific instructions for the design (tutoring).</a:t>
+            </a:r>
+            <a:br>
+              <a:rPr lang="en-US" dirty="0"/>
+            </a:br>
+            <a:br>
+              <a:rPr lang="en-US" dirty="0"/>
+            </a:br>
+            <a:r>
+              <a:rPr lang="en-US" dirty="0"/>
+              <a:t>We found that histogram and </a:t>
+            </a:r>
+            <a:r>
+              <a:rPr lang="en-US" dirty="0" err="1"/>
+              <a:t>GoL</a:t>
+            </a:r>
+            <a:r>
+              <a:rPr lang="en-US" dirty="0"/>
+              <a:t> roughly fitted the complexity of algorithms for which the LLM indeed improves with tutoring; however the </a:t>
+            </a:r>
+            <a:r>
+              <a:rPr lang="en-US" dirty="0" err="1"/>
+              <a:t>kNN</a:t>
+            </a:r>
+            <a:r>
+              <a:rPr lang="en-US" dirty="0"/>
+              <a:t> algorithm was too complex for the LLM to</a:t>
+            </a:r>
+            <a:br>
+              <a:rPr lang="en-US" dirty="0"/>
+            </a:br>
+            <a:r>
+              <a:rPr lang="en-US" dirty="0"/>
+              <a:t>implement even with specific instructions. The situation has changed with each new generation of LLMs since then, and GPT-5 has managed to get better with tutoring on the </a:t>
+            </a:r>
+            <a:r>
+              <a:rPr lang="en-US" dirty="0" err="1"/>
+              <a:t>kNN</a:t>
+            </a:r>
+            <a:r>
+              <a:rPr lang="en-US" dirty="0"/>
+              <a:t> algorithm,</a:t>
+            </a:r>
+            <a:br>
+              <a:rPr lang="en-US" dirty="0"/>
+            </a:br>
+            <a:r>
+              <a:rPr lang="en-US" dirty="0"/>
+              <a:t>while fully saturating the </a:t>
+            </a:r>
+            <a:r>
+              <a:rPr lang="en-US" dirty="0" err="1"/>
+              <a:t>GoL</a:t>
+            </a:r>
+            <a:r>
+              <a:rPr lang="en-US" dirty="0"/>
+              <a:t> algorithm, even with very vague instructions.</a:t>
             </a:r>
           </a:p>
         </p:txBody>
@@ -1794,197 +1928,7 @@
           <a:p>
             <a:fld id="{FA8FD632-245B-410D-BCC4-8BF8D37AB67F}" type="slidenum">
               <a:rPr lang="en-US" smtClean="0"/>
-              <a:t>24</a:t>
-            </a:fld>
-            <a:endParaRPr lang="en-US"/>
-          </a:p>
-        </p:txBody>
-      </p:sp>
-    </p:spTree>
-    <p:extLst>
-      <p:ext uri="{BB962C8B-B14F-4D97-AF65-F5344CB8AC3E}">
-        <p14:creationId xmlns:p14="http://schemas.microsoft.com/office/powerpoint/2010/main" val="1504701067"/>
-      </p:ext>
-    </p:extLst>
-  </p:cSld>
-  <p:clrMapOvr>
-    <a:masterClrMapping/>
-  </p:clrMapOvr>
-</p:notes>
-</file>
-
-<file path=ppt/notesSlides/notesSlide17.xml><?xml version="1.0" encoding="utf-8"?>
-<p:notes xmlns:a="http://schemas.openxmlformats.org/drawingml/2006/main" xmlns:r="http://schemas.openxmlformats.org/officeDocument/2006/relationships" xmlns:p="http://schemas.openxmlformats.org/presentationml/2006/main">
-  <p:cSld>
-    <p:spTree>
-      <p:nvGrpSpPr>
-        <p:cNvPr id="1" name=""/>
-        <p:cNvGrpSpPr/>
-        <p:nvPr/>
-      </p:nvGrpSpPr>
-      <p:grpSpPr>
-        <a:xfrm>
-          <a:off x="0" y="0"/>
-          <a:ext cx="0" cy="0"/>
-          <a:chOff x="0" y="0"/>
-          <a:chExt cx="0" cy="0"/>
-        </a:xfrm>
-      </p:grpSpPr>
-      <p:sp>
-        <p:nvSpPr>
-          <p:cNvPr id="2" name="Slide Image Placeholder 1"/>
-          <p:cNvSpPr>
-            <a:spLocks noGrp="1" noRot="1" noChangeAspect="1"/>
-          </p:cNvSpPr>
-          <p:nvPr>
-            <p:ph type="sldImg"/>
-          </p:nvPr>
-        </p:nvSpPr>
-        <p:spPr/>
-      </p:sp>
-      <p:sp>
-        <p:nvSpPr>
-          <p:cNvPr id="3" name="Notes Placeholder 2"/>
-          <p:cNvSpPr>
-            <a:spLocks noGrp="1"/>
-          </p:cNvSpPr>
-          <p:nvPr>
-            <p:ph type="body" idx="1"/>
-          </p:nvPr>
-        </p:nvSpPr>
-        <p:spPr/>
-        <p:txBody>
-          <a:bodyPr/>
-          <a:lstStyle/>
-          <a:p>
-            <a:r>
-              <a:rPr lang="en-US" dirty="0"/>
-              <a:t>(case study?) </a:t>
-            </a:r>
-            <a:br>
-              <a:rPr lang="en-US" dirty="0"/>
-            </a:br>
-            <a:r>
-              <a:rPr lang="en-US" dirty="0"/>
-              <a:t>A slight detour from our regular schedule of abstractions is our study of LLMs in HPC algorithm design. This work reacted to the recent introduction of LLM models in the area of software design.</a:t>
-            </a:r>
-          </a:p>
-          <a:p>
-            <a:endParaRPr lang="en-US" dirty="0"/>
-          </a:p>
-          <a:p>
-            <a:r>
-              <a:rPr lang="en-US" dirty="0"/>
-              <a:t>(?? groundwork for the following work?)</a:t>
-            </a:r>
-          </a:p>
-          <a:p>
-            <a:endParaRPr lang="en-US" dirty="0"/>
-          </a:p>
-          <a:p>
-            <a:r>
-              <a:rPr lang="en-US" dirty="0"/>
-              <a:t>At the time of the study, LLM models were still regarded as incapable of high-level reasoning on efficient algorithm design, roughly fulfilling the role of a junior-level programmer.</a:t>
-            </a:r>
-            <a:br>
-              <a:rPr lang="en-US" dirty="0"/>
-            </a:br>
-            <a:r>
-              <a:rPr lang="en-US" dirty="0"/>
-              <a:t>We have evaluated a state of the art reasoning LLM on three well-known algorithms (histogram computation, Game of Life simulation, and </a:t>
-            </a:r>
-            <a:r>
-              <a:rPr lang="en-US" dirty="0" err="1"/>
-              <a:t>kNN</a:t>
-            </a:r>
-            <a:r>
-              <a:rPr lang="en-US" dirty="0"/>
-              <a:t> search) to find out whether an</a:t>
-            </a:r>
-            <a:br>
-              <a:rPr lang="en-US" dirty="0"/>
-            </a:br>
-            <a:r>
-              <a:rPr lang="en-US" dirty="0"/>
-              <a:t>LLM is capable of generating a highly efficient code for them without any hints, and whether the quality improves with more suggestions, and approaches expert-written code with specific instructions for the design (tutoring).</a:t>
-            </a:r>
-            <a:br>
-              <a:rPr lang="en-US" dirty="0"/>
-            </a:br>
-            <a:br>
-              <a:rPr lang="en-US" dirty="0"/>
-            </a:br>
-            <a:r>
-              <a:rPr lang="en-US" dirty="0"/>
-              <a:t>We found that histogram and </a:t>
-            </a:r>
-            <a:r>
-              <a:rPr lang="en-US" dirty="0" err="1"/>
-              <a:t>GoL</a:t>
-            </a:r>
-            <a:r>
-              <a:rPr lang="en-US" dirty="0"/>
-              <a:t> roughly fitted the complexity of algorithms for which the LLM indeed improves with tutoring; however the </a:t>
-            </a:r>
-            <a:r>
-              <a:rPr lang="en-US" dirty="0" err="1"/>
-              <a:t>kNN</a:t>
-            </a:r>
-            <a:r>
-              <a:rPr lang="en-US" dirty="0"/>
-              <a:t> algorithm was too complex for the LLM to</a:t>
-            </a:r>
-            <a:br>
-              <a:rPr lang="en-US" dirty="0"/>
-            </a:br>
-            <a:r>
-              <a:rPr lang="en-US" dirty="0"/>
-              <a:t>implement even with specific instructions. The situation has changed with each new generation of LLMs since then, and GPT-5 has managed to get better with tutoring on the </a:t>
-            </a:r>
-            <a:r>
-              <a:rPr lang="en-US" dirty="0" err="1"/>
-              <a:t>kNN</a:t>
-            </a:r>
-            <a:r>
-              <a:rPr lang="en-US" dirty="0"/>
-              <a:t> algorithm,</a:t>
-            </a:r>
-            <a:br>
-              <a:rPr lang="en-US" dirty="0"/>
-            </a:br>
-            <a:r>
-              <a:rPr lang="en-US" dirty="0"/>
-              <a:t>while fully saturating the </a:t>
-            </a:r>
-            <a:r>
-              <a:rPr lang="en-US" dirty="0" err="1"/>
-              <a:t>GoL</a:t>
-            </a:r>
-            <a:r>
-              <a:rPr lang="en-US" dirty="0"/>
-              <a:t> algorithm, even with very vague instructions.</a:t>
-            </a:r>
-          </a:p>
-        </p:txBody>
-      </p:sp>
-      <p:sp>
-        <p:nvSpPr>
-          <p:cNvPr id="4" name="Slide Number Placeholder 3"/>
-          <p:cNvSpPr>
-            <a:spLocks noGrp="1"/>
-          </p:cNvSpPr>
-          <p:nvPr>
-            <p:ph type="sldNum" sz="quarter" idx="5"/>
-          </p:nvPr>
-        </p:nvSpPr>
-        <p:spPr/>
-        <p:txBody>
-          <a:bodyPr/>
-          <a:lstStyle/>
-          <a:p>
-            <a:fld id="{FA8FD632-245B-410D-BCC4-8BF8D37AB67F}" type="slidenum">
-              <a:rPr lang="en-US" smtClean="0"/>
-              <a:t>27</a:t>
+              <a:t>23</a:t>
             </a:fld>
             <a:endParaRPr lang="en-US"/>
           </a:p>
@@ -2003,7 +1947,7 @@
 </p:notes>
 </file>
 
-<file path=ppt/notesSlides/notesSlide18.xml><?xml version="1.0" encoding="utf-8"?>
+<file path=ppt/notesSlides/notesSlide17.xml><?xml version="1.0" encoding="utf-8"?>
 <p:notes xmlns:a="http://schemas.openxmlformats.org/drawingml/2006/main" xmlns:r="http://schemas.openxmlformats.org/officeDocument/2006/relationships" xmlns:p="http://schemas.openxmlformats.org/presentationml/2006/main">
   <p:cSld>
     <p:spTree>
@@ -2198,7 +2142,7 @@
           <a:p>
             <a:fld id="{FA8FD632-245B-410D-BCC4-8BF8D37AB67F}" type="slidenum">
               <a:rPr lang="en-US" smtClean="0"/>
-              <a:t>28</a:t>
+              <a:t>24</a:t>
             </a:fld>
             <a:endParaRPr lang="en-US"/>
           </a:p>
@@ -2217,7 +2161,7 @@
 </p:notes>
 </file>
 
-<file path=ppt/notesSlides/notesSlide19.xml><?xml version="1.0" encoding="utf-8"?>
+<file path=ppt/notesSlides/notesSlide18.xml><?xml version="1.0" encoding="utf-8"?>
 <p:notes xmlns:a="http://schemas.openxmlformats.org/drawingml/2006/main" xmlns:r="http://schemas.openxmlformats.org/officeDocument/2006/relationships" xmlns:p="http://schemas.openxmlformats.org/presentationml/2006/main">
   <p:cSld>
     <p:spTree>
@@ -2389,7 +2333,7 @@
           <a:p>
             <a:fld id="{FA8FD632-245B-410D-BCC4-8BF8D37AB67F}" type="slidenum">
               <a:rPr lang="en-US" smtClean="0"/>
-              <a:t>29</a:t>
+              <a:t>25</a:t>
             </a:fld>
             <a:endParaRPr lang="en-US"/>
           </a:p>
@@ -2408,151 +2352,7 @@
 </p:notes>
 </file>
 
-<file path=ppt/notesSlides/notesSlide2.xml><?xml version="1.0" encoding="utf-8"?>
-<p:notes xmlns:a="http://schemas.openxmlformats.org/drawingml/2006/main" xmlns:r="http://schemas.openxmlformats.org/officeDocument/2006/relationships" xmlns:p="http://schemas.openxmlformats.org/presentationml/2006/main">
-  <p:cSld>
-    <p:spTree>
-      <p:nvGrpSpPr>
-        <p:cNvPr id="1" name=""/>
-        <p:cNvGrpSpPr/>
-        <p:nvPr/>
-      </p:nvGrpSpPr>
-      <p:grpSpPr>
-        <a:xfrm>
-          <a:off x="0" y="0"/>
-          <a:ext cx="0" cy="0"/>
-          <a:chOff x="0" y="0"/>
-          <a:chExt cx="0" cy="0"/>
-        </a:xfrm>
-      </p:grpSpPr>
-      <p:sp>
-        <p:nvSpPr>
-          <p:cNvPr id="2" name="Slide Image Placeholder 1"/>
-          <p:cNvSpPr>
-            <a:spLocks noGrp="1" noRot="1" noChangeAspect="1"/>
-          </p:cNvSpPr>
-          <p:nvPr>
-            <p:ph type="sldImg"/>
-          </p:nvPr>
-        </p:nvSpPr>
-        <p:spPr/>
-      </p:sp>
-      <p:sp>
-        <p:nvSpPr>
-          <p:cNvPr id="3" name="Notes Placeholder 2"/>
-          <p:cNvSpPr>
-            <a:spLocks noGrp="1"/>
-          </p:cNvSpPr>
-          <p:nvPr>
-            <p:ph type="body" idx="1"/>
-          </p:nvPr>
-        </p:nvSpPr>
-        <p:spPr/>
-        <p:txBody>
-          <a:bodyPr/>
-          <a:lstStyle/>
-          <a:p>
-            <a:r>
-              <a:rPr lang="en-US" dirty="0"/>
-              <a:t>For this, our research focused on two (something like compatible) directions</a:t>
-            </a:r>
-          </a:p>
-          <a:p>
-            <a:endParaRPr lang="en-US" dirty="0"/>
-          </a:p>
-          <a:p>
-            <a:r>
-              <a:rPr lang="en-US" dirty="0"/>
-              <a:t>The first one was investigating and implementing abstractions that offer composable building blocks that can be used to design efficient memory layouts and traversal orders; the choices can be algorithmically automatized by techniques such as autotuning</a:t>
-            </a:r>
-          </a:p>
-          <a:p>
-            <a:endParaRPr lang="en-US" dirty="0"/>
-          </a:p>
-          <a:p>
-            <a:r>
-              <a:rPr lang="en-US" dirty="0"/>
-              <a:t>The other direction has opened with the introduction of Large Language Models (LLMs), where the LLM can provide efficient implementation details fulfilling a given API requirement</a:t>
-            </a:r>
-          </a:p>
-          <a:p>
-            <a:endParaRPr lang="en-US" dirty="0"/>
-          </a:p>
-          <a:p>
-            <a:r>
-              <a:rPr lang="en-US" dirty="0"/>
-              <a:t>(?? More yapping?</a:t>
-            </a:r>
-          </a:p>
-          <a:p>
-            <a:r>
-              <a:rPr lang="en-US" dirty="0"/>
-              <a:t>- We have investigated how to … (tutoring)</a:t>
-            </a:r>
-          </a:p>
-          <a:p>
-            <a:r>
-              <a:rPr lang="en-US" dirty="0"/>
-              <a:t>)</a:t>
-            </a:r>
-          </a:p>
-          <a:p>
-            <a:endParaRPr lang="en-US" dirty="0"/>
-          </a:p>
-          <a:p>
-            <a:r>
-              <a:rPr lang="en-US" dirty="0"/>
-              <a:t>?? Since this research area is quite broad, we have mostly focused solely on dense data structures and algorithms utilizing regular loops, as even with this limitation, the area offers interesting challenges and many opportunities for improving the state of the art</a:t>
-            </a:r>
-          </a:p>
-          <a:p>
-            <a:endParaRPr lang="en-US" dirty="0"/>
-          </a:p>
-          <a:p>
-            <a:r>
-              <a:rPr lang="en-US" dirty="0"/>
-              <a:t>(ass bridge: now focusing on the abstractions…)</a:t>
-            </a:r>
-          </a:p>
-        </p:txBody>
-      </p:sp>
-      <p:sp>
-        <p:nvSpPr>
-          <p:cNvPr id="4" name="Slide Number Placeholder 3"/>
-          <p:cNvSpPr>
-            <a:spLocks noGrp="1"/>
-          </p:cNvSpPr>
-          <p:nvPr>
-            <p:ph type="sldNum" sz="quarter" idx="5"/>
-          </p:nvPr>
-        </p:nvSpPr>
-        <p:spPr/>
-        <p:txBody>
-          <a:bodyPr/>
-          <a:lstStyle/>
-          <a:p>
-            <a:fld id="{FA8FD632-245B-410D-BCC4-8BF8D37AB67F}" type="slidenum">
-              <a:rPr lang="en-US" smtClean="0"/>
-              <a:t>4</a:t>
-            </a:fld>
-            <a:endParaRPr lang="en-US"/>
-          </a:p>
-        </p:txBody>
-      </p:sp>
-    </p:spTree>
-    <p:extLst>
-      <p:ext uri="{BB962C8B-B14F-4D97-AF65-F5344CB8AC3E}">
-        <p14:creationId xmlns:p14="http://schemas.microsoft.com/office/powerpoint/2010/main" val="4226210950"/>
-      </p:ext>
-    </p:extLst>
-  </p:cSld>
-  <p:clrMapOvr>
-    <a:masterClrMapping/>
-  </p:clrMapOvr>
-</p:notes>
-</file>
-
-<file path=ppt/notesSlides/notesSlide20.xml><?xml version="1.0" encoding="utf-8"?>
+<file path=ppt/notesSlides/notesSlide19.xml><?xml version="1.0" encoding="utf-8"?>
 <p:notes xmlns:a="http://schemas.openxmlformats.org/drawingml/2006/main" xmlns:r="http://schemas.openxmlformats.org/officeDocument/2006/relationships" xmlns:p="http://schemas.openxmlformats.org/presentationml/2006/main">
   <p:cSld>
     <p:spTree>
@@ -2748,7 +2548,7 @@
           <a:p>
             <a:fld id="{FA8FD632-245B-410D-BCC4-8BF8D37AB67F}" type="slidenum">
               <a:rPr lang="en-US" smtClean="0"/>
-              <a:t>30</a:t>
+              <a:t>26</a:t>
             </a:fld>
             <a:endParaRPr lang="en-US"/>
           </a:p>
@@ -2767,7 +2567,7 @@
 </p:notes>
 </file>
 
-<file path=ppt/notesSlides/notesSlide21.xml><?xml version="1.0" encoding="utf-8"?>
+<file path=ppt/notesSlides/notesSlide2.xml><?xml version="1.0" encoding="utf-8"?>
 <p:notes xmlns:a="http://schemas.openxmlformats.org/drawingml/2006/main" xmlns:r="http://schemas.openxmlformats.org/officeDocument/2006/relationships" xmlns:p="http://schemas.openxmlformats.org/presentationml/2006/main">
   <p:cSld>
     <p:spTree>
@@ -2813,19 +2613,65 @@
           <a:p>
             <a:r>
               <a:rPr lang="en-US" dirty="0"/>
-              <a:t>Still haven’t </a:t>
-            </a:r>
-            <a:r>
-              <a:rPr lang="en-US"/>
-              <a:t>done this one </a:t>
-            </a:r>
-            <a:r>
-              <a:rPr lang="en-US">
-                <a:sym typeface="Wingdings" panose="05000000000000000000" pitchFamily="2" charset="2"/>
-              </a:rPr>
-              <a:t></a:t>
-            </a:r>
-            <a:endParaRPr lang="en-US"/>
+              <a:t>For this, our research focused on two (something like compatible) directions</a:t>
+            </a:r>
+          </a:p>
+          <a:p>
+            <a:endParaRPr lang="en-US" dirty="0"/>
+          </a:p>
+          <a:p>
+            <a:r>
+              <a:rPr lang="en-US" dirty="0"/>
+              <a:t>The first one was investigating and implementing abstractions that offer composable building blocks that can be used to design efficient memory layouts and traversal orders; the choices can be algorithmically automatized by techniques such as autotuning</a:t>
+            </a:r>
+          </a:p>
+          <a:p>
+            <a:endParaRPr lang="en-US" dirty="0"/>
+          </a:p>
+          <a:p>
+            <a:r>
+              <a:rPr lang="en-US" dirty="0"/>
+              <a:t>The other direction has opened with the introduction of Large Language Models (LLMs), where the LLM can provide efficient implementation details fulfilling a given API requirement</a:t>
+            </a:r>
+          </a:p>
+          <a:p>
+            <a:endParaRPr lang="en-US" dirty="0"/>
+          </a:p>
+          <a:p>
+            <a:r>
+              <a:rPr lang="en-US" dirty="0"/>
+              <a:t>(?? More yapping?</a:t>
+            </a:r>
+          </a:p>
+          <a:p>
+            <a:r>
+              <a:rPr lang="en-US" dirty="0"/>
+              <a:t>- We have investigated how to … (tutoring)</a:t>
+            </a:r>
+          </a:p>
+          <a:p>
+            <a:r>
+              <a:rPr lang="en-US" dirty="0"/>
+              <a:t>)</a:t>
+            </a:r>
+          </a:p>
+          <a:p>
+            <a:endParaRPr lang="en-US" dirty="0"/>
+          </a:p>
+          <a:p>
+            <a:r>
+              <a:rPr lang="en-US" dirty="0"/>
+              <a:t>?? Since this research area is quite broad, we have mostly focused solely on dense data structures and algorithms utilizing regular loops, as even with this limitation, the area offers interesting challenges and many opportunities for improving the state of the art</a:t>
+            </a:r>
+          </a:p>
+          <a:p>
+            <a:endParaRPr lang="en-US" dirty="0"/>
+          </a:p>
+          <a:p>
+            <a:r>
+              <a:rPr lang="en-US" dirty="0"/>
+              <a:t>(ass bridge: now focusing on the abstractions…)</a:t>
+            </a:r>
           </a:p>
         </p:txBody>
       </p:sp>
@@ -2846,7 +2692,105 @@
           <a:p>
             <a:fld id="{FA8FD632-245B-410D-BCC4-8BF8D37AB67F}" type="slidenum">
               <a:rPr lang="en-US" smtClean="0"/>
-              <a:t>32</a:t>
+              <a:t>4</a:t>
+            </a:fld>
+            <a:endParaRPr lang="en-US"/>
+          </a:p>
+        </p:txBody>
+      </p:sp>
+    </p:spTree>
+    <p:extLst>
+      <p:ext uri="{BB962C8B-B14F-4D97-AF65-F5344CB8AC3E}">
+        <p14:creationId xmlns:p14="http://schemas.microsoft.com/office/powerpoint/2010/main" val="4226210950"/>
+      </p:ext>
+    </p:extLst>
+  </p:cSld>
+  <p:clrMapOvr>
+    <a:masterClrMapping/>
+  </p:clrMapOvr>
+</p:notes>
+</file>
+
+<file path=ppt/notesSlides/notesSlide20.xml><?xml version="1.0" encoding="utf-8"?>
+<p:notes xmlns:a="http://schemas.openxmlformats.org/drawingml/2006/main" xmlns:r="http://schemas.openxmlformats.org/officeDocument/2006/relationships" xmlns:p="http://schemas.openxmlformats.org/presentationml/2006/main">
+  <p:cSld>
+    <p:spTree>
+      <p:nvGrpSpPr>
+        <p:cNvPr id="1" name=""/>
+        <p:cNvGrpSpPr/>
+        <p:nvPr/>
+      </p:nvGrpSpPr>
+      <p:grpSpPr>
+        <a:xfrm>
+          <a:off x="0" y="0"/>
+          <a:ext cx="0" cy="0"/>
+          <a:chOff x="0" y="0"/>
+          <a:chExt cx="0" cy="0"/>
+        </a:xfrm>
+      </p:grpSpPr>
+      <p:sp>
+        <p:nvSpPr>
+          <p:cNvPr id="2" name="Slide Image Placeholder 1"/>
+          <p:cNvSpPr>
+            <a:spLocks noGrp="1" noRot="1" noChangeAspect="1"/>
+          </p:cNvSpPr>
+          <p:nvPr>
+            <p:ph type="sldImg"/>
+          </p:nvPr>
+        </p:nvSpPr>
+        <p:spPr/>
+      </p:sp>
+      <p:sp>
+        <p:nvSpPr>
+          <p:cNvPr id="3" name="Notes Placeholder 2"/>
+          <p:cNvSpPr>
+            <a:spLocks noGrp="1"/>
+          </p:cNvSpPr>
+          <p:nvPr>
+            <p:ph type="body" idx="1"/>
+          </p:nvPr>
+        </p:nvSpPr>
+        <p:spPr/>
+        <p:txBody>
+          <a:bodyPr/>
+          <a:lstStyle/>
+          <a:p>
+            <a:r>
+              <a:rPr lang="en-US" dirty="0"/>
+              <a:t>Still haven’t </a:t>
+            </a:r>
+            <a:r>
+              <a:rPr lang="en-US"/>
+              <a:t>done this one </a:t>
+            </a:r>
+            <a:r>
+              <a:rPr lang="en-US">
+                <a:sym typeface="Wingdings" panose="05000000000000000000" pitchFamily="2" charset="2"/>
+              </a:rPr>
+              <a:t></a:t>
+            </a:r>
+            <a:endParaRPr lang="en-US"/>
+          </a:p>
+        </p:txBody>
+      </p:sp>
+      <p:sp>
+        <p:nvSpPr>
+          <p:cNvPr id="4" name="Slide Number Placeholder 3"/>
+          <p:cNvSpPr>
+            <a:spLocks noGrp="1"/>
+          </p:cNvSpPr>
+          <p:nvPr>
+            <p:ph type="sldNum" sz="quarter" idx="5"/>
+          </p:nvPr>
+        </p:nvSpPr>
+        <p:spPr/>
+        <p:txBody>
+          <a:bodyPr/>
+          <a:lstStyle/>
+          <a:p>
+            <a:fld id="{FA8FD632-245B-410D-BCC4-8BF8D37AB67F}" type="slidenum">
+              <a:rPr lang="en-US" smtClean="0"/>
+              <a:t>27</a:t>
             </a:fld>
             <a:endParaRPr lang="en-US"/>
           </a:p>
@@ -11970,7 +11914,10 @@
           <a:lstStyle/>
           <a:p>
             <a:pPr algn="ctr"/>
-            <a:endParaRPr lang="en-US" noProof="0" dirty="0"/>
+            <a:r>
+              <a:rPr lang="en-US" noProof="0" dirty="0"/>
+              <a:t>Tuning parameters</a:t>
+            </a:r>
           </a:p>
         </p:txBody>
       </p:sp>
@@ -12016,7 +11963,10 @@
           <a:lstStyle/>
           <a:p>
             <a:pPr algn="ctr"/>
-            <a:endParaRPr lang="en-US" noProof="0" dirty="0"/>
+            <a:r>
+              <a:rPr lang="en-US" noProof="0" dirty="0"/>
+              <a:t>code</a:t>
+            </a:r>
           </a:p>
         </p:txBody>
       </p:sp>
@@ -12101,7 +12051,10 @@
           <a:lstStyle/>
           <a:p>
             <a:pPr algn="ctr"/>
-            <a:endParaRPr lang="en-US" noProof="0" dirty="0"/>
+            <a:r>
+              <a:rPr lang="en-US" noProof="0" dirty="0"/>
+              <a:t>Optimized application</a:t>
+            </a:r>
           </a:p>
         </p:txBody>
       </p:sp>
@@ -12362,354 +12315,6 @@
   <p:cSld>
     <p:spTree>
       <p:nvGrpSpPr>
-        <p:cNvPr id="1" name="">
-          <a:extLst>
-            <a:ext uri="{FF2B5EF4-FFF2-40B4-BE49-F238E27FC236}">
-              <a16:creationId xmlns:a16="http://schemas.microsoft.com/office/drawing/2014/main" id="{EFDF7620-7AA1-EF30-FDC7-27AAC7FFE5EE}"/>
-            </a:ext>
-          </a:extLst>
-        </p:cNvPr>
-        <p:cNvGrpSpPr/>
-        <p:nvPr/>
-      </p:nvGrpSpPr>
-      <p:grpSpPr>
-        <a:xfrm>
-          <a:off x="0" y="0"/>
-          <a:ext cx="0" cy="0"/>
-          <a:chOff x="0" y="0"/>
-          <a:chExt cx="0" cy="0"/>
-        </a:xfrm>
-      </p:grpSpPr>
-      <p:sp>
-        <p:nvSpPr>
-          <p:cNvPr id="2" name="Title 1">
-            <a:extLst>
-              <a:ext uri="{FF2B5EF4-FFF2-40B4-BE49-F238E27FC236}">
-                <a16:creationId xmlns:a16="http://schemas.microsoft.com/office/drawing/2014/main" id="{F7C42AB4-1D66-61B5-41F3-D1C814D6D79F}"/>
-              </a:ext>
-            </a:extLst>
-          </p:cNvPr>
-          <p:cNvSpPr>
-            <a:spLocks noGrp="1"/>
-          </p:cNvSpPr>
-          <p:nvPr>
-            <p:ph type="title"/>
-          </p:nvPr>
-        </p:nvSpPr>
-        <p:spPr/>
-        <p:txBody>
-          <a:bodyPr/>
-          <a:lstStyle/>
-          <a:p>
-            <a:r>
-              <a:rPr lang="en-US" noProof="0" dirty="0"/>
-              <a:t>M &amp; S</a:t>
-            </a:r>
-          </a:p>
-        </p:txBody>
-      </p:sp>
-      <p:sp>
-        <p:nvSpPr>
-          <p:cNvPr id="3" name="Content Placeholder 2">
-            <a:extLst>
-              <a:ext uri="{FF2B5EF4-FFF2-40B4-BE49-F238E27FC236}">
-                <a16:creationId xmlns:a16="http://schemas.microsoft.com/office/drawing/2014/main" id="{7FC71ADE-62E2-F5C5-38A6-5FA51E07F94E}"/>
-              </a:ext>
-            </a:extLst>
-          </p:cNvPr>
-          <p:cNvSpPr>
-            <a:spLocks noGrp="1"/>
-          </p:cNvSpPr>
-          <p:nvPr>
-            <p:ph idx="1"/>
-          </p:nvPr>
-        </p:nvSpPr>
-        <p:spPr/>
-        <p:txBody>
-          <a:bodyPr/>
-          <a:lstStyle/>
-          <a:p>
-            <a:r>
-              <a:rPr lang="en-US" noProof="0" dirty="0"/>
-              <a:t>Motivation: GPU &amp; Cluster computing</a:t>
-            </a:r>
-          </a:p>
-          <a:p>
-            <a:pPr lvl="1"/>
-            <a:r>
-              <a:rPr lang="en-US" noProof="0" dirty="0"/>
-              <a:t>Too many decisions, complex code (you don’t know) </a:t>
-            </a:r>
-            <a:r>
-              <a:rPr lang="en-US" noProof="0" dirty="0">
-                <a:sym typeface="Wingdings" panose="05000000000000000000" pitchFamily="2" charset="2"/>
-              </a:rPr>
-              <a:t> the problem, it is hard</a:t>
-            </a:r>
-            <a:endParaRPr lang="en-US" noProof="0" dirty="0"/>
-          </a:p>
-          <a:p>
-            <a:pPr lvl="2"/>
-            <a:r>
-              <a:rPr lang="en-US" noProof="0" dirty="0"/>
-              <a:t>layout options, traversal options, parallelization (Matice, </a:t>
-            </a:r>
-            <a:r>
-              <a:rPr lang="en-US" noProof="0" dirty="0" err="1"/>
-              <a:t>pruchod</a:t>
-            </a:r>
-            <a:r>
-              <a:rPr lang="en-US" noProof="0" dirty="0"/>
-              <a:t>; </a:t>
-            </a:r>
-            <a:r>
-              <a:rPr lang="en-US" noProof="0" dirty="0" err="1"/>
-              <a:t>nasobeni</a:t>
-            </a:r>
-            <a:r>
-              <a:rPr lang="en-US" noProof="0" dirty="0"/>
-              <a:t>?)</a:t>
-            </a:r>
-          </a:p>
-          <a:p>
-            <a:pPr lvl="2"/>
-            <a:r>
-              <a:rPr lang="en-US" noProof="0" dirty="0"/>
-              <a:t>parameters for the above (block sizes, …)</a:t>
-            </a:r>
-          </a:p>
-          <a:p>
-            <a:r>
-              <a:rPr lang="en-US" noProof="0" dirty="0"/>
-              <a:t>Our solution: Abstraction &amp; automatization </a:t>
-            </a:r>
-            <a:r>
-              <a:rPr lang="en-US" noProof="0" dirty="0">
-                <a:sym typeface="Wingdings" panose="05000000000000000000" pitchFamily="2" charset="2"/>
-              </a:rPr>
-              <a:t> we offer a solution</a:t>
-            </a:r>
-            <a:endParaRPr lang="en-US" noProof="0" dirty="0"/>
-          </a:p>
-          <a:p>
-            <a:pPr lvl="1"/>
-            <a:r>
-              <a:rPr lang="en-US" noProof="0" dirty="0"/>
-              <a:t>Separation of concerns, independent aspects</a:t>
-            </a:r>
-          </a:p>
-          <a:p>
-            <a:pPr lvl="1"/>
-            <a:r>
-              <a:rPr lang="en-US" noProof="0" dirty="0"/>
-              <a:t>Introducing layout-agnostic and traversal-agnostic algorithm design</a:t>
-            </a:r>
-          </a:p>
-          <a:p>
-            <a:pPr lvl="1"/>
-            <a:r>
-              <a:rPr lang="en-US" noProof="0" dirty="0"/>
-              <a:t>How the world is saved</a:t>
-            </a:r>
-          </a:p>
-        </p:txBody>
-      </p:sp>
-    </p:spTree>
-    <p:extLst>
-      <p:ext uri="{BB962C8B-B14F-4D97-AF65-F5344CB8AC3E}">
-        <p14:creationId xmlns:p14="http://schemas.microsoft.com/office/powerpoint/2010/main" val="1408920348"/>
-      </p:ext>
-    </p:extLst>
-  </p:cSld>
-  <p:clrMapOvr>
-    <a:masterClrMapping/>
-  </p:clrMapOvr>
-</p:sld>
-</file>
-
-<file path=ppt/slides/slide16.xml><?xml version="1.0" encoding="utf-8"?>
-<p:sld xmlns:a="http://schemas.openxmlformats.org/drawingml/2006/main" xmlns:r="http://schemas.openxmlformats.org/officeDocument/2006/relationships" xmlns:p="http://schemas.openxmlformats.org/presentationml/2006/main" show="0">
-  <p:cSld>
-    <p:spTree>
-      <p:nvGrpSpPr>
-        <p:cNvPr id="1" name=""/>
-        <p:cNvGrpSpPr/>
-        <p:nvPr/>
-      </p:nvGrpSpPr>
-      <p:grpSpPr>
-        <a:xfrm>
-          <a:off x="0" y="0"/>
-          <a:ext cx="0" cy="0"/>
-          <a:chOff x="0" y="0"/>
-          <a:chExt cx="0" cy="0"/>
-        </a:xfrm>
-      </p:grpSpPr>
-      <p:sp>
-        <p:nvSpPr>
-          <p:cNvPr id="2" name="Title 1">
-            <a:extLst>
-              <a:ext uri="{FF2B5EF4-FFF2-40B4-BE49-F238E27FC236}">
-                <a16:creationId xmlns:a16="http://schemas.microsoft.com/office/drawing/2014/main" id="{3844D8EA-565C-C8A0-F333-6EBD085AC735}"/>
-              </a:ext>
-            </a:extLst>
-          </p:cNvPr>
-          <p:cNvSpPr>
-            <a:spLocks noGrp="1"/>
-          </p:cNvSpPr>
-          <p:nvPr>
-            <p:ph type="title"/>
-          </p:nvPr>
-        </p:nvSpPr>
-        <p:spPr/>
-        <p:txBody>
-          <a:bodyPr/>
-          <a:lstStyle/>
-          <a:p>
-            <a:r>
-              <a:rPr lang="en-US" noProof="0" dirty="0"/>
-              <a:t>Proposed abstractions</a:t>
-            </a:r>
-          </a:p>
-        </p:txBody>
-      </p:sp>
-      <p:sp>
-        <p:nvSpPr>
-          <p:cNvPr id="3" name="Content Placeholder 2">
-            <a:extLst>
-              <a:ext uri="{FF2B5EF4-FFF2-40B4-BE49-F238E27FC236}">
-                <a16:creationId xmlns:a16="http://schemas.microsoft.com/office/drawing/2014/main" id="{0B0BC514-DFF4-C541-7399-85275B2EB075}"/>
-              </a:ext>
-            </a:extLst>
-          </p:cNvPr>
-          <p:cNvSpPr>
-            <a:spLocks noGrp="1"/>
-          </p:cNvSpPr>
-          <p:nvPr>
-            <p:ph idx="1"/>
-          </p:nvPr>
-        </p:nvSpPr>
-        <p:spPr/>
-        <p:txBody>
-          <a:bodyPr/>
-          <a:lstStyle/>
-          <a:p>
-            <a:r>
-              <a:rPr lang="en-US" noProof="0" dirty="0"/>
-              <a:t>Layout abstractions</a:t>
-            </a:r>
-          </a:p>
-          <a:p>
-            <a:r>
-              <a:rPr lang="en-US" noProof="0" dirty="0"/>
-              <a:t>Traversal abstractions</a:t>
-            </a:r>
-          </a:p>
-          <a:p>
-            <a:endParaRPr lang="en-US" noProof="0" dirty="0"/>
-          </a:p>
-          <a:p>
-            <a:r>
-              <a:rPr lang="en-US" noProof="0" dirty="0"/>
-              <a:t>Extensions</a:t>
-            </a:r>
-          </a:p>
-          <a:p>
-            <a:pPr lvl="1"/>
-            <a:r>
-              <a:rPr lang="en-US" noProof="0" dirty="0"/>
-              <a:t>? Practical aspects; </a:t>
-            </a:r>
-            <a:r>
-              <a:rPr lang="en-US" noProof="0" dirty="0">
-                <a:sym typeface="Wingdings" panose="05000000000000000000" pitchFamily="2" charset="2"/>
-              </a:rPr>
-              <a:t> autotuning</a:t>
-            </a:r>
-            <a:endParaRPr lang="en-US" noProof="0" dirty="0"/>
-          </a:p>
-          <a:p>
-            <a:pPr lvl="1"/>
-            <a:r>
-              <a:rPr lang="en-US" noProof="0" dirty="0"/>
-              <a:t>Distributed computing</a:t>
-            </a:r>
-          </a:p>
-          <a:p>
-            <a:endParaRPr lang="en-US" noProof="0" dirty="0"/>
-          </a:p>
-          <a:p>
-            <a:r>
-              <a:rPr lang="en-US" noProof="0" dirty="0"/>
-              <a:t>Knowledge </a:t>
-            </a:r>
-            <a:r>
-              <a:rPr lang="en-US" noProof="0" dirty="0" err="1"/>
-              <a:t>neco</a:t>
-            </a:r>
-            <a:r>
-              <a:rPr lang="en-US" noProof="0" dirty="0"/>
-              <a:t> (</a:t>
-            </a:r>
-            <a:r>
-              <a:rPr lang="en-US" noProof="0" dirty="0" err="1"/>
-              <a:t>metaprogramovani</a:t>
-            </a:r>
-            <a:r>
-              <a:rPr lang="en-US" noProof="0" dirty="0"/>
-              <a:t>, </a:t>
-            </a:r>
-            <a:r>
-              <a:rPr lang="en-US" noProof="0" dirty="0" err="1"/>
-              <a:t>stavebni</a:t>
-            </a:r>
-            <a:r>
-              <a:rPr lang="en-US" noProof="0" dirty="0"/>
-              <a:t> </a:t>
-            </a:r>
-            <a:r>
-              <a:rPr lang="en-US" noProof="0" dirty="0" err="1"/>
-              <a:t>bloky</a:t>
-            </a:r>
-            <a:r>
-              <a:rPr lang="en-US" noProof="0" dirty="0"/>
-              <a:t>, </a:t>
-            </a:r>
-            <a:r>
-              <a:rPr lang="en-US" noProof="0" dirty="0" err="1"/>
-              <a:t>traversery</a:t>
-            </a:r>
-            <a:r>
-              <a:rPr lang="en-US" noProof="0" dirty="0"/>
-              <a:t>?)</a:t>
-            </a:r>
-          </a:p>
-          <a:p>
-            <a:pPr lvl="1"/>
-            <a:r>
-              <a:rPr lang="en-US" noProof="0" dirty="0"/>
-              <a:t>CA computations (</a:t>
-            </a:r>
-          </a:p>
-        </p:txBody>
-      </p:sp>
-    </p:spTree>
-    <p:extLst>
-      <p:ext uri="{BB962C8B-B14F-4D97-AF65-F5344CB8AC3E}">
-        <p14:creationId xmlns:p14="http://schemas.microsoft.com/office/powerpoint/2010/main" val="2195190930"/>
-      </p:ext>
-    </p:extLst>
-  </p:cSld>
-  <p:clrMapOvr>
-    <a:masterClrMapping/>
-  </p:clrMapOvr>
-</p:sld>
-</file>
-
-<file path=ppt/slides/slide17.xml><?xml version="1.0" encoding="utf-8"?>
-<p:sld xmlns:a="http://schemas.openxmlformats.org/drawingml/2006/main" xmlns:r="http://schemas.openxmlformats.org/officeDocument/2006/relationships" xmlns:p="http://schemas.openxmlformats.org/presentationml/2006/main" show="0">
-  <p:cSld>
-    <p:spTree>
-      <p:nvGrpSpPr>
         <p:cNvPr id="1" name=""/>
         <p:cNvGrpSpPr/>
         <p:nvPr/>
@@ -12831,7 +12436,7 @@
 </p:sld>
 </file>
 
-<file path=ppt/slides/slide18.xml><?xml version="1.0" encoding="utf-8"?>
+<file path=ppt/slides/slide16.xml><?xml version="1.0" encoding="utf-8"?>
 <p:sld xmlns:a="http://schemas.openxmlformats.org/drawingml/2006/main" xmlns:r="http://schemas.openxmlformats.org/officeDocument/2006/relationships" xmlns:p="http://schemas.openxmlformats.org/presentationml/2006/main">
   <p:cSld>
     <p:spTree>
@@ -13432,7 +13037,7 @@
 </p:sld>
 </file>
 
-<file path=ppt/slides/slide19.xml><?xml version="1.0" encoding="utf-8"?>
+<file path=ppt/slides/slide17.xml><?xml version="1.0" encoding="utf-8"?>
 <p:sld xmlns:a="http://schemas.openxmlformats.org/drawingml/2006/main" xmlns:r="http://schemas.openxmlformats.org/officeDocument/2006/relationships" xmlns:p="http://schemas.openxmlformats.org/presentationml/2006/main">
   <p:cSld>
     <p:spTree>
@@ -14973,319 +14578,7 @@
 </p:sld>
 </file>
 
-<file path=ppt/slides/slide2.xml><?xml version="1.0" encoding="utf-8"?>
-<p:sld xmlns:a="http://schemas.openxmlformats.org/drawingml/2006/main" xmlns:r="http://schemas.openxmlformats.org/officeDocument/2006/relationships" xmlns:p="http://schemas.openxmlformats.org/presentationml/2006/main" show="0">
-  <p:cSld>
-    <p:spTree>
-      <p:nvGrpSpPr>
-        <p:cNvPr id="1" name=""/>
-        <p:cNvGrpSpPr/>
-        <p:nvPr/>
-      </p:nvGrpSpPr>
-      <p:grpSpPr>
-        <a:xfrm>
-          <a:off x="0" y="0"/>
-          <a:ext cx="0" cy="0"/>
-          <a:chOff x="0" y="0"/>
-          <a:chExt cx="0" cy="0"/>
-        </a:xfrm>
-      </p:grpSpPr>
-      <p:sp>
-        <p:nvSpPr>
-          <p:cNvPr id="2" name="Title 1">
-            <a:extLst>
-              <a:ext uri="{FF2B5EF4-FFF2-40B4-BE49-F238E27FC236}">
-                <a16:creationId xmlns:a16="http://schemas.microsoft.com/office/drawing/2014/main" id="{71043B47-263E-C46D-0276-B63FF60C41E2}"/>
-              </a:ext>
-            </a:extLst>
-          </p:cNvPr>
-          <p:cNvSpPr>
-            <a:spLocks noGrp="1"/>
-          </p:cNvSpPr>
-          <p:nvPr>
-            <p:ph type="title"/>
-          </p:nvPr>
-        </p:nvSpPr>
-        <p:spPr/>
-        <p:txBody>
-          <a:bodyPr/>
-          <a:lstStyle/>
-          <a:p>
-            <a:endParaRPr lang="en-US" noProof="0" dirty="0"/>
-          </a:p>
-        </p:txBody>
-      </p:sp>
-      <p:sp>
-        <p:nvSpPr>
-          <p:cNvPr id="3" name="Content Placeholder 2">
-            <a:extLst>
-              <a:ext uri="{FF2B5EF4-FFF2-40B4-BE49-F238E27FC236}">
-                <a16:creationId xmlns:a16="http://schemas.microsoft.com/office/drawing/2014/main" id="{AFF2A90F-7540-DC59-26EA-C4E197B07663}"/>
-              </a:ext>
-            </a:extLst>
-          </p:cNvPr>
-          <p:cNvSpPr>
-            <a:spLocks noGrp="1"/>
-          </p:cNvSpPr>
-          <p:nvPr>
-            <p:ph idx="1"/>
-          </p:nvPr>
-        </p:nvSpPr>
-        <p:spPr/>
-        <p:txBody>
-          <a:bodyPr>
-            <a:normAutofit lnSpcReduction="10000"/>
-          </a:bodyPr>
-          <a:lstStyle/>
-          <a:p>
-            <a:r>
-              <a:rPr lang="en-US" noProof="0" dirty="0">
-                <a:solidFill>
-                  <a:schemeClr val="accent3"/>
-                </a:solidFill>
-              </a:rPr>
-              <a:t>Data layout </a:t>
-            </a:r>
-            <a:r>
-              <a:rPr lang="en-US" noProof="0" dirty="0"/>
-              <a:t>(matrix - row/col major), </a:t>
-            </a:r>
-            <a:r>
-              <a:rPr lang="en-US" noProof="0" dirty="0">
-                <a:solidFill>
-                  <a:schemeClr val="accent3"/>
-                </a:solidFill>
-              </a:rPr>
-              <a:t>traversal order </a:t>
-            </a:r>
-            <a:r>
-              <a:rPr lang="en-US" noProof="0" dirty="0"/>
-              <a:t>(row/col-wise)</a:t>
-            </a:r>
-          </a:p>
-          <a:p>
-            <a:pPr lvl="1"/>
-            <a:r>
-              <a:rPr lang="en-US" noProof="0" dirty="0"/>
-              <a:t>This case: match = good; not match = not good </a:t>
-            </a:r>
-            <a:r>
-              <a:rPr lang="en-US" noProof="0" dirty="0">
-                <a:sym typeface="Wingdings" panose="05000000000000000000" pitchFamily="2" charset="2"/>
-              </a:rPr>
-              <a:t> idea</a:t>
-            </a:r>
-            <a:endParaRPr lang="en-US" noProof="0" dirty="0"/>
-          </a:p>
-          <a:p>
-            <a:pPr lvl="2"/>
-            <a:r>
-              <a:rPr lang="en-US" noProof="0" dirty="0">
-                <a:solidFill>
-                  <a:srgbClr val="FF0000"/>
-                </a:solidFill>
-              </a:rPr>
-              <a:t>Sometimes can change both </a:t>
-            </a:r>
-          </a:p>
-          <a:p>
-            <a:pPr lvl="1"/>
-            <a:r>
-              <a:rPr lang="en-US" noProof="0" dirty="0"/>
-              <a:t>Real use cases</a:t>
-            </a:r>
-          </a:p>
-          <a:p>
-            <a:pPr lvl="2"/>
-            <a:r>
-              <a:rPr lang="en-US" noProof="0" dirty="0"/>
-              <a:t>Algorithms more complex; </a:t>
-            </a:r>
-            <a:r>
-              <a:rPr lang="en-US" noProof="0" dirty="0" err="1"/>
-              <a:t>eg</a:t>
-            </a:r>
-            <a:r>
-              <a:rPr lang="en-US" noProof="0" dirty="0"/>
-              <a:t>:</a:t>
-            </a:r>
-          </a:p>
-          <a:p>
-            <a:pPr lvl="3"/>
-            <a:r>
-              <a:rPr lang="en-US" noProof="0" dirty="0"/>
-              <a:t>Multiple data structures</a:t>
-            </a:r>
-          </a:p>
-          <a:p>
-            <a:pPr lvl="3"/>
-            <a:r>
-              <a:rPr lang="en-US" noProof="0" dirty="0"/>
-              <a:t>Traversals not simple perfect loop nests</a:t>
-            </a:r>
-          </a:p>
-          <a:p>
-            <a:pPr lvl="2"/>
-            <a:r>
-              <a:rPr lang="en-US" noProof="0" dirty="0"/>
-              <a:t>Hardware many features; </a:t>
-            </a:r>
-            <a:r>
-              <a:rPr lang="en-US" noProof="0" dirty="0" err="1"/>
-              <a:t>eg</a:t>
-            </a:r>
-            <a:r>
-              <a:rPr lang="en-US" noProof="0" dirty="0"/>
-              <a:t>:</a:t>
-            </a:r>
-          </a:p>
-          <a:p>
-            <a:pPr lvl="3"/>
-            <a:r>
-              <a:rPr lang="en-US" noProof="0" dirty="0">
-                <a:solidFill>
-                  <a:schemeClr val="accent3"/>
-                </a:solidFill>
-              </a:rPr>
-              <a:t>Caches</a:t>
-            </a:r>
-            <a:r>
-              <a:rPr lang="en-US" noProof="0" dirty="0"/>
-              <a:t>, memory bandwidths/capacities, etc.</a:t>
-            </a:r>
-          </a:p>
-          <a:p>
-            <a:pPr lvl="3"/>
-            <a:r>
-              <a:rPr lang="en-US" noProof="0" dirty="0"/>
-              <a:t>Multiple proc. units</a:t>
-            </a:r>
-          </a:p>
-          <a:p>
-            <a:pPr lvl="2"/>
-            <a:r>
-              <a:rPr lang="en-US" noProof="0" dirty="0">
-                <a:solidFill>
-                  <a:schemeClr val="accent3"/>
-                </a:solidFill>
-              </a:rPr>
-              <a:t>More optimized </a:t>
-            </a:r>
-            <a:r>
-              <a:rPr lang="en-US" noProof="0" dirty="0">
-                <a:solidFill>
-                  <a:schemeClr val="accent3"/>
-                </a:solidFill>
-                <a:sym typeface="Wingdings" panose="05000000000000000000" pitchFamily="2" charset="2"/>
-              </a:rPr>
-              <a:t> more complex, less portable (each </a:t>
-            </a:r>
-            <a:r>
-              <a:rPr lang="en-US" noProof="0" dirty="0" err="1">
-                <a:solidFill>
-                  <a:schemeClr val="accent3"/>
-                </a:solidFill>
-                <a:sym typeface="Wingdings" panose="05000000000000000000" pitchFamily="2" charset="2"/>
-              </a:rPr>
-              <a:t>hwarch</a:t>
-            </a:r>
-            <a:r>
-              <a:rPr lang="en-US" noProof="0" dirty="0">
-                <a:solidFill>
-                  <a:schemeClr val="accent3"/>
-                </a:solidFill>
-                <a:sym typeface="Wingdings" panose="05000000000000000000" pitchFamily="2" charset="2"/>
-              </a:rPr>
-              <a:t> different decisions)</a:t>
-            </a:r>
-            <a:endParaRPr lang="en-US" noProof="0" dirty="0">
-              <a:solidFill>
-                <a:schemeClr val="accent3"/>
-              </a:solidFill>
-            </a:endParaRPr>
-          </a:p>
-          <a:p>
-            <a:pPr lvl="2"/>
-            <a:r>
-              <a:rPr lang="en-US" noProof="0" dirty="0">
-                <a:solidFill>
-                  <a:schemeClr val="accent3"/>
-                </a:solidFill>
-              </a:rPr>
-              <a:t>No analytical solutions – evidence: </a:t>
-            </a:r>
-            <a:r>
-              <a:rPr lang="en-US" b="1" noProof="0" dirty="0">
-                <a:solidFill>
-                  <a:schemeClr val="accent3"/>
-                </a:solidFill>
-              </a:rPr>
-              <a:t>use of </a:t>
-            </a:r>
-            <a:r>
-              <a:rPr lang="en-US" b="1" noProof="0" dirty="0" err="1">
-                <a:solidFill>
-                  <a:schemeClr val="accent3"/>
-                </a:solidFill>
-              </a:rPr>
-              <a:t>pgo</a:t>
-            </a:r>
-            <a:r>
-              <a:rPr lang="en-US" b="1" noProof="0" dirty="0">
-                <a:solidFill>
-                  <a:schemeClr val="accent3"/>
-                </a:solidFill>
-              </a:rPr>
-              <a:t>, autotuning, </a:t>
-            </a:r>
-            <a:r>
-              <a:rPr lang="en-US" b="1" noProof="0" dirty="0" err="1">
-                <a:solidFill>
-                  <a:schemeClr val="accent3"/>
-                </a:solidFill>
-              </a:rPr>
-              <a:t>ev</a:t>
-            </a:r>
-            <a:r>
-              <a:rPr lang="en-US" b="1" noProof="0" dirty="0">
-                <a:solidFill>
-                  <a:schemeClr val="accent3"/>
-                </a:solidFill>
-              </a:rPr>
-              <a:t>. alg., etc.</a:t>
-            </a:r>
-          </a:p>
-          <a:p>
-            <a:pPr lvl="1"/>
-            <a:r>
-              <a:rPr lang="en-US" noProof="0" dirty="0">
-                <a:solidFill>
-                  <a:srgbClr val="FF0000"/>
-                </a:solidFill>
-              </a:rPr>
-              <a:t>Real-world data, dimensions ~~ semantic meaning (image x, y, channel)</a:t>
-            </a:r>
-          </a:p>
-          <a:p>
-            <a:pPr lvl="1"/>
-            <a:endParaRPr lang="en-US" noProof="0" dirty="0"/>
-          </a:p>
-        </p:txBody>
-      </p:sp>
-    </p:spTree>
-    <p:extLst>
-      <p:ext uri="{BB962C8B-B14F-4D97-AF65-F5344CB8AC3E}">
-        <p14:creationId xmlns:p14="http://schemas.microsoft.com/office/powerpoint/2010/main" val="1814957213"/>
-      </p:ext>
-    </p:extLst>
-  </p:cSld>
-  <p:clrMapOvr>
-    <a:masterClrMapping/>
-  </p:clrMapOvr>
-</p:sld>
-</file>
-
-<file path=ppt/slides/slide20.xml><?xml version="1.0" encoding="utf-8"?>
+<file path=ppt/slides/slide18.xml><?xml version="1.0" encoding="utf-8"?>
 <p:sld xmlns:a="http://schemas.openxmlformats.org/drawingml/2006/main" xmlns:r="http://schemas.openxmlformats.org/officeDocument/2006/relationships" xmlns:p="http://schemas.openxmlformats.org/presentationml/2006/main">
   <p:cSld>
     <p:spTree>
@@ -15696,7 +14989,7 @@
 </p:sld>
 </file>
 
-<file path=ppt/slides/slide21.xml><?xml version="1.0" encoding="utf-8"?>
+<file path=ppt/slides/slide19.xml><?xml version="1.0" encoding="utf-8"?>
 <p:sld xmlns:a="http://schemas.openxmlformats.org/drawingml/2006/main" xmlns:r="http://schemas.openxmlformats.org/officeDocument/2006/relationships" xmlns:p="http://schemas.openxmlformats.org/presentationml/2006/main">
   <p:cSld>
     <p:spTree>
@@ -15814,7 +15107,319 @@
 </p:sld>
 </file>
 
-<file path=ppt/slides/slide22.xml><?xml version="1.0" encoding="utf-8"?>
+<file path=ppt/slides/slide2.xml><?xml version="1.0" encoding="utf-8"?>
+<p:sld xmlns:a="http://schemas.openxmlformats.org/drawingml/2006/main" xmlns:r="http://schemas.openxmlformats.org/officeDocument/2006/relationships" xmlns:p="http://schemas.openxmlformats.org/presentationml/2006/main" show="0">
+  <p:cSld>
+    <p:spTree>
+      <p:nvGrpSpPr>
+        <p:cNvPr id="1" name=""/>
+        <p:cNvGrpSpPr/>
+        <p:nvPr/>
+      </p:nvGrpSpPr>
+      <p:grpSpPr>
+        <a:xfrm>
+          <a:off x="0" y="0"/>
+          <a:ext cx="0" cy="0"/>
+          <a:chOff x="0" y="0"/>
+          <a:chExt cx="0" cy="0"/>
+        </a:xfrm>
+      </p:grpSpPr>
+      <p:sp>
+        <p:nvSpPr>
+          <p:cNvPr id="2" name="Title 1">
+            <a:extLst>
+              <a:ext uri="{FF2B5EF4-FFF2-40B4-BE49-F238E27FC236}">
+                <a16:creationId xmlns:a16="http://schemas.microsoft.com/office/drawing/2014/main" id="{71043B47-263E-C46D-0276-B63FF60C41E2}"/>
+              </a:ext>
+            </a:extLst>
+          </p:cNvPr>
+          <p:cNvSpPr>
+            <a:spLocks noGrp="1"/>
+          </p:cNvSpPr>
+          <p:nvPr>
+            <p:ph type="title"/>
+          </p:nvPr>
+        </p:nvSpPr>
+        <p:spPr/>
+        <p:txBody>
+          <a:bodyPr/>
+          <a:lstStyle/>
+          <a:p>
+            <a:endParaRPr lang="en-US" noProof="0" dirty="0"/>
+          </a:p>
+        </p:txBody>
+      </p:sp>
+      <p:sp>
+        <p:nvSpPr>
+          <p:cNvPr id="3" name="Content Placeholder 2">
+            <a:extLst>
+              <a:ext uri="{FF2B5EF4-FFF2-40B4-BE49-F238E27FC236}">
+                <a16:creationId xmlns:a16="http://schemas.microsoft.com/office/drawing/2014/main" id="{AFF2A90F-7540-DC59-26EA-C4E197B07663}"/>
+              </a:ext>
+            </a:extLst>
+          </p:cNvPr>
+          <p:cNvSpPr>
+            <a:spLocks noGrp="1"/>
+          </p:cNvSpPr>
+          <p:nvPr>
+            <p:ph idx="1"/>
+          </p:nvPr>
+        </p:nvSpPr>
+        <p:spPr/>
+        <p:txBody>
+          <a:bodyPr>
+            <a:normAutofit lnSpcReduction="10000"/>
+          </a:bodyPr>
+          <a:lstStyle/>
+          <a:p>
+            <a:r>
+              <a:rPr lang="en-US" noProof="0" dirty="0">
+                <a:solidFill>
+                  <a:schemeClr val="accent3"/>
+                </a:solidFill>
+              </a:rPr>
+              <a:t>Data layout </a:t>
+            </a:r>
+            <a:r>
+              <a:rPr lang="en-US" noProof="0" dirty="0"/>
+              <a:t>(matrix - row/col major), </a:t>
+            </a:r>
+            <a:r>
+              <a:rPr lang="en-US" noProof="0" dirty="0">
+                <a:solidFill>
+                  <a:schemeClr val="accent3"/>
+                </a:solidFill>
+              </a:rPr>
+              <a:t>traversal order </a:t>
+            </a:r>
+            <a:r>
+              <a:rPr lang="en-US" noProof="0" dirty="0"/>
+              <a:t>(row/col-wise)</a:t>
+            </a:r>
+          </a:p>
+          <a:p>
+            <a:pPr lvl="1"/>
+            <a:r>
+              <a:rPr lang="en-US" noProof="0" dirty="0"/>
+              <a:t>This case: match = good; not match = not good </a:t>
+            </a:r>
+            <a:r>
+              <a:rPr lang="en-US" noProof="0" dirty="0">
+                <a:sym typeface="Wingdings" panose="05000000000000000000" pitchFamily="2" charset="2"/>
+              </a:rPr>
+              <a:t> idea</a:t>
+            </a:r>
+            <a:endParaRPr lang="en-US" noProof="0" dirty="0"/>
+          </a:p>
+          <a:p>
+            <a:pPr lvl="2"/>
+            <a:r>
+              <a:rPr lang="en-US" noProof="0" dirty="0">
+                <a:solidFill>
+                  <a:srgbClr val="FF0000"/>
+                </a:solidFill>
+              </a:rPr>
+              <a:t>Sometimes can change both </a:t>
+            </a:r>
+          </a:p>
+          <a:p>
+            <a:pPr lvl="1"/>
+            <a:r>
+              <a:rPr lang="en-US" noProof="0" dirty="0"/>
+              <a:t>Real use cases</a:t>
+            </a:r>
+          </a:p>
+          <a:p>
+            <a:pPr lvl="2"/>
+            <a:r>
+              <a:rPr lang="en-US" noProof="0" dirty="0"/>
+              <a:t>Algorithms more complex; </a:t>
+            </a:r>
+            <a:r>
+              <a:rPr lang="en-US" noProof="0" dirty="0" err="1"/>
+              <a:t>eg</a:t>
+            </a:r>
+            <a:r>
+              <a:rPr lang="en-US" noProof="0" dirty="0"/>
+              <a:t>:</a:t>
+            </a:r>
+          </a:p>
+          <a:p>
+            <a:pPr lvl="3"/>
+            <a:r>
+              <a:rPr lang="en-US" noProof="0" dirty="0"/>
+              <a:t>Multiple data structures</a:t>
+            </a:r>
+          </a:p>
+          <a:p>
+            <a:pPr lvl="3"/>
+            <a:r>
+              <a:rPr lang="en-US" noProof="0" dirty="0"/>
+              <a:t>Traversals not simple perfect loop nests</a:t>
+            </a:r>
+          </a:p>
+          <a:p>
+            <a:pPr lvl="2"/>
+            <a:r>
+              <a:rPr lang="en-US" noProof="0" dirty="0"/>
+              <a:t>Hardware many features; </a:t>
+            </a:r>
+            <a:r>
+              <a:rPr lang="en-US" noProof="0" dirty="0" err="1"/>
+              <a:t>eg</a:t>
+            </a:r>
+            <a:r>
+              <a:rPr lang="en-US" noProof="0" dirty="0"/>
+              <a:t>:</a:t>
+            </a:r>
+          </a:p>
+          <a:p>
+            <a:pPr lvl="3"/>
+            <a:r>
+              <a:rPr lang="en-US" noProof="0" dirty="0">
+                <a:solidFill>
+                  <a:schemeClr val="accent3"/>
+                </a:solidFill>
+              </a:rPr>
+              <a:t>Caches</a:t>
+            </a:r>
+            <a:r>
+              <a:rPr lang="en-US" noProof="0" dirty="0"/>
+              <a:t>, memory bandwidths/capacities, etc.</a:t>
+            </a:r>
+          </a:p>
+          <a:p>
+            <a:pPr lvl="3"/>
+            <a:r>
+              <a:rPr lang="en-US" noProof="0" dirty="0"/>
+              <a:t>Multiple proc. units</a:t>
+            </a:r>
+          </a:p>
+          <a:p>
+            <a:pPr lvl="2"/>
+            <a:r>
+              <a:rPr lang="en-US" noProof="0" dirty="0">
+                <a:solidFill>
+                  <a:schemeClr val="accent3"/>
+                </a:solidFill>
+              </a:rPr>
+              <a:t>More optimized </a:t>
+            </a:r>
+            <a:r>
+              <a:rPr lang="en-US" noProof="0" dirty="0">
+                <a:solidFill>
+                  <a:schemeClr val="accent3"/>
+                </a:solidFill>
+                <a:sym typeface="Wingdings" panose="05000000000000000000" pitchFamily="2" charset="2"/>
+              </a:rPr>
+              <a:t> more complex, less portable (each </a:t>
+            </a:r>
+            <a:r>
+              <a:rPr lang="en-US" noProof="0" dirty="0" err="1">
+                <a:solidFill>
+                  <a:schemeClr val="accent3"/>
+                </a:solidFill>
+                <a:sym typeface="Wingdings" panose="05000000000000000000" pitchFamily="2" charset="2"/>
+              </a:rPr>
+              <a:t>hwarch</a:t>
+            </a:r>
+            <a:r>
+              <a:rPr lang="en-US" noProof="0" dirty="0">
+                <a:solidFill>
+                  <a:schemeClr val="accent3"/>
+                </a:solidFill>
+                <a:sym typeface="Wingdings" panose="05000000000000000000" pitchFamily="2" charset="2"/>
+              </a:rPr>
+              <a:t> different decisions)</a:t>
+            </a:r>
+            <a:endParaRPr lang="en-US" noProof="0" dirty="0">
+              <a:solidFill>
+                <a:schemeClr val="accent3"/>
+              </a:solidFill>
+            </a:endParaRPr>
+          </a:p>
+          <a:p>
+            <a:pPr lvl="2"/>
+            <a:r>
+              <a:rPr lang="en-US" noProof="0" dirty="0">
+                <a:solidFill>
+                  <a:schemeClr val="accent3"/>
+                </a:solidFill>
+              </a:rPr>
+              <a:t>No analytical solutions – evidence: </a:t>
+            </a:r>
+            <a:r>
+              <a:rPr lang="en-US" b="1" noProof="0" dirty="0">
+                <a:solidFill>
+                  <a:schemeClr val="accent3"/>
+                </a:solidFill>
+              </a:rPr>
+              <a:t>use of </a:t>
+            </a:r>
+            <a:r>
+              <a:rPr lang="en-US" b="1" noProof="0" dirty="0" err="1">
+                <a:solidFill>
+                  <a:schemeClr val="accent3"/>
+                </a:solidFill>
+              </a:rPr>
+              <a:t>pgo</a:t>
+            </a:r>
+            <a:r>
+              <a:rPr lang="en-US" b="1" noProof="0" dirty="0">
+                <a:solidFill>
+                  <a:schemeClr val="accent3"/>
+                </a:solidFill>
+              </a:rPr>
+              <a:t>, autotuning, </a:t>
+            </a:r>
+            <a:r>
+              <a:rPr lang="en-US" b="1" noProof="0" dirty="0" err="1">
+                <a:solidFill>
+                  <a:schemeClr val="accent3"/>
+                </a:solidFill>
+              </a:rPr>
+              <a:t>ev</a:t>
+            </a:r>
+            <a:r>
+              <a:rPr lang="en-US" b="1" noProof="0" dirty="0">
+                <a:solidFill>
+                  <a:schemeClr val="accent3"/>
+                </a:solidFill>
+              </a:rPr>
+              <a:t>. alg., etc.</a:t>
+            </a:r>
+          </a:p>
+          <a:p>
+            <a:pPr lvl="1"/>
+            <a:r>
+              <a:rPr lang="en-US" noProof="0" dirty="0">
+                <a:solidFill>
+                  <a:srgbClr val="FF0000"/>
+                </a:solidFill>
+              </a:rPr>
+              <a:t>Real-world data, dimensions ~~ semantic meaning (image x, y, channel)</a:t>
+            </a:r>
+          </a:p>
+          <a:p>
+            <a:pPr lvl="1"/>
+            <a:endParaRPr lang="en-US" noProof="0" dirty="0"/>
+          </a:p>
+        </p:txBody>
+      </p:sp>
+    </p:spTree>
+    <p:extLst>
+      <p:ext uri="{BB962C8B-B14F-4D97-AF65-F5344CB8AC3E}">
+        <p14:creationId xmlns:p14="http://schemas.microsoft.com/office/powerpoint/2010/main" val="1814957213"/>
+      </p:ext>
+    </p:extLst>
+  </p:cSld>
+  <p:clrMapOvr>
+    <a:masterClrMapping/>
+  </p:clrMapOvr>
+</p:sld>
+</file>
+
+<file path=ppt/slides/slide20.xml><?xml version="1.0" encoding="utf-8"?>
 <p:sld xmlns:a="http://schemas.openxmlformats.org/drawingml/2006/main" xmlns:r="http://schemas.openxmlformats.org/officeDocument/2006/relationships" xmlns:p="http://schemas.openxmlformats.org/presentationml/2006/main" show="0">
   <p:cSld>
     <p:spTree>
@@ -15941,7 +15546,7 @@
 </p:sld>
 </file>
 
-<file path=ppt/slides/slide23.xml><?xml version="1.0" encoding="utf-8"?>
+<file path=ppt/slides/slide21.xml><?xml version="1.0" encoding="utf-8"?>
 <p:sld xmlns:a="http://schemas.openxmlformats.org/drawingml/2006/main" xmlns:r="http://schemas.openxmlformats.org/officeDocument/2006/relationships" xmlns:p="http://schemas.openxmlformats.org/presentationml/2006/main">
   <p:cSld>
     <p:spTree>
@@ -15997,7 +15602,7 @@
         </p:nvSpPr>
         <p:spPr>
           <a:xfrm>
-            <a:off x="4781005" y="3265714"/>
+            <a:off x="4696098" y="3518264"/>
             <a:ext cx="2420983" cy="1236617"/>
           </a:xfrm>
           <a:prstGeom prst="rect">
@@ -16824,7 +16429,7 @@
         </p:nvSpPr>
         <p:spPr>
           <a:xfrm>
-            <a:off x="5638416" y="4591597"/>
+            <a:off x="6329723" y="4365862"/>
             <a:ext cx="2019300" cy="646331"/>
           </a:xfrm>
           <a:prstGeom prst="rect">
@@ -16906,7 +16511,7 @@
 </p:sld>
 </file>
 
-<file path=ppt/slides/slide24.xml><?xml version="1.0" encoding="utf-8"?>
+<file path=ppt/slides/slide22.xml><?xml version="1.0" encoding="utf-8"?>
 <p:sld xmlns:a="http://schemas.openxmlformats.org/drawingml/2006/main" xmlns:r="http://schemas.openxmlformats.org/officeDocument/2006/relationships" xmlns:p="http://schemas.openxmlformats.org/presentationml/2006/main">
   <p:cSld>
     <p:spTree>
@@ -17024,240 +16629,7 @@
 </p:sld>
 </file>
 
-<file path=ppt/slides/slide25.xml><?xml version="1.0" encoding="utf-8"?>
-<p:sld xmlns:a="http://schemas.openxmlformats.org/drawingml/2006/main" xmlns:r="http://schemas.openxmlformats.org/officeDocument/2006/relationships" xmlns:p="http://schemas.openxmlformats.org/presentationml/2006/main" show="0">
-  <p:cSld>
-    <p:spTree>
-      <p:nvGrpSpPr>
-        <p:cNvPr id="1" name=""/>
-        <p:cNvGrpSpPr/>
-        <p:nvPr/>
-      </p:nvGrpSpPr>
-      <p:grpSpPr>
-        <a:xfrm>
-          <a:off x="0" y="0"/>
-          <a:ext cx="0" cy="0"/>
-          <a:chOff x="0" y="0"/>
-          <a:chExt cx="0" cy="0"/>
-        </a:xfrm>
-      </p:grpSpPr>
-      <p:sp>
-        <p:nvSpPr>
-          <p:cNvPr id="2" name="Title 1">
-            <a:extLst>
-              <a:ext uri="{FF2B5EF4-FFF2-40B4-BE49-F238E27FC236}">
-                <a16:creationId xmlns:a16="http://schemas.microsoft.com/office/drawing/2014/main" id="{1CFD8E19-FCBD-3C1F-9804-55F9EF315364}"/>
-              </a:ext>
-            </a:extLst>
-          </p:cNvPr>
-          <p:cNvSpPr>
-            <a:spLocks noGrp="1"/>
-          </p:cNvSpPr>
-          <p:nvPr>
-            <p:ph type="title"/>
-          </p:nvPr>
-        </p:nvSpPr>
-        <p:spPr/>
-        <p:txBody>
-          <a:bodyPr/>
-          <a:lstStyle/>
-          <a:p>
-            <a:r>
-              <a:rPr lang="en-US" noProof="0" dirty="0"/>
-              <a:t>LLMs in algorithm design</a:t>
-            </a:r>
-          </a:p>
-        </p:txBody>
-      </p:sp>
-      <p:sp>
-        <p:nvSpPr>
-          <p:cNvPr id="3" name="Content Placeholder 2">
-            <a:extLst>
-              <a:ext uri="{FF2B5EF4-FFF2-40B4-BE49-F238E27FC236}">
-                <a16:creationId xmlns:a16="http://schemas.microsoft.com/office/drawing/2014/main" id="{64F2D09B-2F00-3457-9D41-D2EAB2BD84E5}"/>
-              </a:ext>
-            </a:extLst>
-          </p:cNvPr>
-          <p:cNvSpPr>
-            <a:spLocks noGrp="1"/>
-          </p:cNvSpPr>
-          <p:nvPr>
-            <p:ph idx="1"/>
-          </p:nvPr>
-        </p:nvSpPr>
-        <p:spPr/>
-        <p:txBody>
-          <a:bodyPr/>
-          <a:lstStyle/>
-          <a:p>
-            <a:r>
-              <a:rPr lang="en-US" noProof="0" dirty="0"/>
-              <a:t>Tutoring LLMs for CUDA optimization</a:t>
-            </a:r>
-          </a:p>
-          <a:p>
-            <a:r>
-              <a:rPr lang="en-US" noProof="0" dirty="0"/>
-              <a:t>LLMs and abstractions</a:t>
-            </a:r>
-          </a:p>
-        </p:txBody>
-      </p:sp>
-    </p:spTree>
-    <p:extLst>
-      <p:ext uri="{BB962C8B-B14F-4D97-AF65-F5344CB8AC3E}">
-        <p14:creationId xmlns:p14="http://schemas.microsoft.com/office/powerpoint/2010/main" val="645810162"/>
-      </p:ext>
-    </p:extLst>
-  </p:cSld>
-  <p:clrMapOvr>
-    <a:masterClrMapping/>
-  </p:clrMapOvr>
-</p:sld>
-</file>
-
-<file path=ppt/slides/slide26.xml><?xml version="1.0" encoding="utf-8"?>
-<p:sld xmlns:a="http://schemas.openxmlformats.org/drawingml/2006/main" xmlns:r="http://schemas.openxmlformats.org/officeDocument/2006/relationships" xmlns:p="http://schemas.openxmlformats.org/presentationml/2006/main" show="0">
-  <p:cSld>
-    <p:spTree>
-      <p:nvGrpSpPr>
-        <p:cNvPr id="1" name=""/>
-        <p:cNvGrpSpPr/>
-        <p:nvPr/>
-      </p:nvGrpSpPr>
-      <p:grpSpPr>
-        <a:xfrm>
-          <a:off x="0" y="0"/>
-          <a:ext cx="0" cy="0"/>
-          <a:chOff x="0" y="0"/>
-          <a:chExt cx="0" cy="0"/>
-        </a:xfrm>
-      </p:grpSpPr>
-      <p:sp>
-        <p:nvSpPr>
-          <p:cNvPr id="2" name="Title 1">
-            <a:extLst>
-              <a:ext uri="{FF2B5EF4-FFF2-40B4-BE49-F238E27FC236}">
-                <a16:creationId xmlns:a16="http://schemas.microsoft.com/office/drawing/2014/main" id="{A2284D79-2E52-80F7-0541-30A0EEC45CA4}"/>
-              </a:ext>
-            </a:extLst>
-          </p:cNvPr>
-          <p:cNvSpPr>
-            <a:spLocks noGrp="1"/>
-          </p:cNvSpPr>
-          <p:nvPr>
-            <p:ph type="title"/>
-          </p:nvPr>
-        </p:nvSpPr>
-        <p:spPr/>
-        <p:txBody>
-          <a:bodyPr/>
-          <a:lstStyle/>
-          <a:p>
-            <a:r>
-              <a:rPr lang="en-US" noProof="0" dirty="0"/>
-              <a:t>Tutoring LLMs</a:t>
-            </a:r>
-          </a:p>
-        </p:txBody>
-      </p:sp>
-      <p:sp>
-        <p:nvSpPr>
-          <p:cNvPr id="3" name="Content Placeholder 2">
-            <a:extLst>
-              <a:ext uri="{FF2B5EF4-FFF2-40B4-BE49-F238E27FC236}">
-                <a16:creationId xmlns:a16="http://schemas.microsoft.com/office/drawing/2014/main" id="{5EC62719-077B-686B-2F9B-914035C8221C}"/>
-              </a:ext>
-            </a:extLst>
-          </p:cNvPr>
-          <p:cNvSpPr>
-            <a:spLocks noGrp="1"/>
-          </p:cNvSpPr>
-          <p:nvPr>
-            <p:ph idx="1"/>
-          </p:nvPr>
-        </p:nvSpPr>
-        <p:spPr/>
-        <p:txBody>
-          <a:bodyPr>
-            <a:normAutofit fontScale="92500" lnSpcReduction="20000"/>
-          </a:bodyPr>
-          <a:lstStyle/>
-          <a:p>
-            <a:r>
-              <a:rPr lang="en-US" noProof="0" dirty="0"/>
-              <a:t>The goal was always better automation/generalization of design and tuning</a:t>
-            </a:r>
-          </a:p>
-          <a:p>
-            <a:r>
-              <a:rPr lang="en-US" noProof="0" dirty="0"/>
-              <a:t>LLMs started to be surprisingly competent code generators</a:t>
-            </a:r>
-          </a:p>
-          <a:p>
-            <a:pPr lvl="1"/>
-            <a:r>
-              <a:rPr lang="en-US" noProof="0" dirty="0"/>
-              <a:t>Not reliable, but extremely flexible, generalizable, simple to use (e.g., understanding natural language)</a:t>
-            </a:r>
-          </a:p>
-          <a:p>
-            <a:r>
-              <a:rPr lang="en-US" noProof="0" dirty="0"/>
-              <a:t>Core assumption for the study: LLMs are not very good in high-</a:t>
-            </a:r>
-            <a:r>
-              <a:rPr lang="en-US" noProof="0" dirty="0" err="1"/>
-              <a:t>lvl</a:t>
-            </a:r>
-            <a:r>
-              <a:rPr lang="en-US" noProof="0" dirty="0"/>
-              <a:t> decisions</a:t>
-            </a:r>
-          </a:p>
-          <a:p>
-            <a:r>
-              <a:rPr lang="en-US" noProof="0" dirty="0"/>
-              <a:t>Tutoring = improving quality of generated code by design suggestions/directions</a:t>
-            </a:r>
-          </a:p>
-          <a:p>
-            <a:r>
-              <a:rPr lang="en-US" noProof="0" dirty="0"/>
-              <a:t>Key findings:</a:t>
-            </a:r>
-          </a:p>
-          <a:p>
-            <a:pPr lvl="1"/>
-            <a:r>
-              <a:rPr lang="en-US" noProof="0" dirty="0"/>
-              <a:t>Intricate relationship between algorithm complexity and this effect on an LLM</a:t>
-            </a:r>
-          </a:p>
-          <a:p>
-            <a:pPr lvl="1"/>
-            <a:r>
-              <a:rPr lang="en-US" noProof="0" dirty="0"/>
-              <a:t>Improvement over time: the effect changes with each new model</a:t>
-            </a:r>
-          </a:p>
-        </p:txBody>
-      </p:sp>
-    </p:spTree>
-    <p:extLst>
-      <p:ext uri="{BB962C8B-B14F-4D97-AF65-F5344CB8AC3E}">
-        <p14:creationId xmlns:p14="http://schemas.microsoft.com/office/powerpoint/2010/main" val="2667122292"/>
-      </p:ext>
-    </p:extLst>
-  </p:cSld>
-  <p:clrMapOvr>
-    <a:masterClrMapping/>
-  </p:clrMapOvr>
-</p:sld>
-</file>
-
-<file path=ppt/slides/slide27.xml><?xml version="1.0" encoding="utf-8"?>
+<file path=ppt/slides/slide23.xml><?xml version="1.0" encoding="utf-8"?>
 <p:sld xmlns:a="http://schemas.openxmlformats.org/drawingml/2006/main" xmlns:r="http://schemas.openxmlformats.org/officeDocument/2006/relationships" xmlns:p="http://schemas.openxmlformats.org/presentationml/2006/main">
   <p:cSld>
     <p:spTree>
@@ -17923,7 +17295,7 @@
 </p:sld>
 </file>
 
-<file path=ppt/slides/slide28.xml><?xml version="1.0" encoding="utf-8"?>
+<file path=ppt/slides/slide24.xml><?xml version="1.0" encoding="utf-8"?>
 <p:sld xmlns:a="http://schemas.openxmlformats.org/drawingml/2006/main" xmlns:r="http://schemas.openxmlformats.org/officeDocument/2006/relationships" xmlns:p="http://schemas.openxmlformats.org/presentationml/2006/main">
   <p:cSld>
     <p:spTree>
@@ -18291,7 +17663,7 @@
 </p:sld>
 </file>
 
-<file path=ppt/slides/slide29.xml><?xml version="1.0" encoding="utf-8"?>
+<file path=ppt/slides/slide25.xml><?xml version="1.0" encoding="utf-8"?>
 <p:sld xmlns:a="http://schemas.openxmlformats.org/drawingml/2006/main" xmlns:r="http://schemas.openxmlformats.org/officeDocument/2006/relationships" xmlns:p="http://schemas.openxmlformats.org/presentationml/2006/main">
   <p:cSld>
     <p:spTree>
@@ -18392,6 +17764,1474 @@
     <p:extLst>
       <p:ext uri="{BB962C8B-B14F-4D97-AF65-F5344CB8AC3E}">
         <p14:creationId xmlns:p14="http://schemas.microsoft.com/office/powerpoint/2010/main" val="965653160"/>
+      </p:ext>
+    </p:extLst>
+  </p:cSld>
+  <p:clrMapOvr>
+    <a:masterClrMapping/>
+  </p:clrMapOvr>
+</p:sld>
+</file>
+
+<file path=ppt/slides/slide26.xml><?xml version="1.0" encoding="utf-8"?>
+<p:sld xmlns:a="http://schemas.openxmlformats.org/drawingml/2006/main" xmlns:r="http://schemas.openxmlformats.org/officeDocument/2006/relationships" xmlns:p="http://schemas.openxmlformats.org/presentationml/2006/main">
+  <p:cSld>
+    <p:spTree>
+      <p:nvGrpSpPr>
+        <p:cNvPr id="1" name="">
+          <a:extLst>
+            <a:ext uri="{FF2B5EF4-FFF2-40B4-BE49-F238E27FC236}">
+              <a16:creationId xmlns:a16="http://schemas.microsoft.com/office/drawing/2014/main" id="{941FC1E0-2FFD-A509-1AF0-959A0AFC5AFE}"/>
+            </a:ext>
+          </a:extLst>
+        </p:cNvPr>
+        <p:cNvGrpSpPr/>
+        <p:nvPr/>
+      </p:nvGrpSpPr>
+      <p:grpSpPr>
+        <a:xfrm>
+          <a:off x="0" y="0"/>
+          <a:ext cx="0" cy="0"/>
+          <a:chOff x="0" y="0"/>
+          <a:chExt cx="0" cy="0"/>
+        </a:xfrm>
+      </p:grpSpPr>
+      <p:sp>
+        <p:nvSpPr>
+          <p:cNvPr id="2" name="Title 1">
+            <a:extLst>
+              <a:ext uri="{FF2B5EF4-FFF2-40B4-BE49-F238E27FC236}">
+                <a16:creationId xmlns:a16="http://schemas.microsoft.com/office/drawing/2014/main" id="{65B428A2-491C-5FCA-EF3B-F536FBDAC5CA}"/>
+              </a:ext>
+            </a:extLst>
+          </p:cNvPr>
+          <p:cNvSpPr>
+            <a:spLocks noGrp="1"/>
+          </p:cNvSpPr>
+          <p:nvPr>
+            <p:ph type="title"/>
+          </p:nvPr>
+        </p:nvSpPr>
+        <p:spPr/>
+        <p:txBody>
+          <a:bodyPr/>
+          <a:lstStyle/>
+          <a:p>
+            <a:r>
+              <a:rPr lang="en-US" noProof="0" dirty="0"/>
+              <a:t>LLMs and abstractions</a:t>
+            </a:r>
+          </a:p>
+        </p:txBody>
+      </p:sp>
+      <p:pic>
+        <p:nvPicPr>
+          <p:cNvPr id="8" name="Picture 7">
+            <a:extLst>
+              <a:ext uri="{FF2B5EF4-FFF2-40B4-BE49-F238E27FC236}">
+                <a16:creationId xmlns:a16="http://schemas.microsoft.com/office/drawing/2014/main" id="{6BEAAA05-114E-208D-DFDE-367639786C54}"/>
+              </a:ext>
+            </a:extLst>
+          </p:cNvPr>
+          <p:cNvPicPr>
+            <a:picLocks noChangeAspect="1"/>
+          </p:cNvPicPr>
+          <p:nvPr/>
+        </p:nvPicPr>
+        <p:blipFill>
+          <a:blip r:embed="rId3"/>
+          <a:stretch>
+            <a:fillRect/>
+          </a:stretch>
+        </p:blipFill>
+        <p:spPr>
+          <a:xfrm>
+            <a:off x="4894948" y="1912727"/>
+            <a:ext cx="6725589" cy="2229161"/>
+          </a:xfrm>
+          <a:prstGeom prst="rect">
+            <a:avLst/>
+          </a:prstGeom>
+        </p:spPr>
+      </p:pic>
+      <p:pic>
+        <p:nvPicPr>
+          <p:cNvPr id="10" name="Picture 9">
+            <a:extLst>
+              <a:ext uri="{FF2B5EF4-FFF2-40B4-BE49-F238E27FC236}">
+                <a16:creationId xmlns:a16="http://schemas.microsoft.com/office/drawing/2014/main" id="{379CBEDB-3399-E476-B2E1-91035860BDD2}"/>
+              </a:ext>
+            </a:extLst>
+          </p:cNvPr>
+          <p:cNvPicPr>
+            <a:picLocks noChangeAspect="1"/>
+          </p:cNvPicPr>
+          <p:nvPr/>
+        </p:nvPicPr>
+        <p:blipFill>
+          <a:blip r:embed="rId4"/>
+          <a:stretch>
+            <a:fillRect/>
+          </a:stretch>
+        </p:blipFill>
+        <p:spPr>
+          <a:xfrm>
+            <a:off x="5161686" y="4677223"/>
+            <a:ext cx="6192114" cy="1286054"/>
+          </a:xfrm>
+          <a:prstGeom prst="rect">
+            <a:avLst/>
+          </a:prstGeom>
+        </p:spPr>
+      </p:pic>
+      <p:sp>
+        <p:nvSpPr>
+          <p:cNvPr id="11" name="TextBox 10">
+            <a:extLst>
+              <a:ext uri="{FF2B5EF4-FFF2-40B4-BE49-F238E27FC236}">
+                <a16:creationId xmlns:a16="http://schemas.microsoft.com/office/drawing/2014/main" id="{6C8FEF91-6DF2-D9C1-3C7C-927FC8555CBE}"/>
+              </a:ext>
+            </a:extLst>
+          </p:cNvPr>
+          <p:cNvSpPr txBox="1"/>
+          <p:nvPr/>
+        </p:nvSpPr>
+        <p:spPr>
+          <a:xfrm>
+            <a:off x="9915828" y="1530781"/>
+            <a:ext cx="2036455" cy="369332"/>
+          </a:xfrm>
+          <a:prstGeom prst="rect">
+            <a:avLst/>
+          </a:prstGeom>
+          <a:noFill/>
+        </p:spPr>
+        <p:txBody>
+          <a:bodyPr wrap="none" rtlCol="0">
+            <a:spAutoFit/>
+          </a:bodyPr>
+          <a:lstStyle/>
+          <a:p>
+            <a:r>
+              <a:rPr lang="en-US" dirty="0"/>
+              <a:t>Which result best?</a:t>
+            </a:r>
+          </a:p>
+        </p:txBody>
+      </p:sp>
+      <p:sp>
+        <p:nvSpPr>
+          <p:cNvPr id="13" name="TextBox 12">
+            <a:extLst>
+              <a:ext uri="{FF2B5EF4-FFF2-40B4-BE49-F238E27FC236}">
+                <a16:creationId xmlns:a16="http://schemas.microsoft.com/office/drawing/2014/main" id="{13079C7E-EBE6-48C6-EAFC-9F6D960ED3AA}"/>
+              </a:ext>
+            </a:extLst>
+          </p:cNvPr>
+          <p:cNvSpPr txBox="1"/>
+          <p:nvPr/>
+        </p:nvSpPr>
+        <p:spPr>
+          <a:xfrm>
+            <a:off x="8567916" y="4082521"/>
+            <a:ext cx="2256387" cy="369332"/>
+          </a:xfrm>
+          <a:prstGeom prst="rect">
+            <a:avLst/>
+          </a:prstGeom>
+          <a:noFill/>
+        </p:spPr>
+        <p:txBody>
+          <a:bodyPr wrap="none" rtlCol="0">
+            <a:spAutoFit/>
+          </a:bodyPr>
+          <a:lstStyle/>
+          <a:p>
+            <a:r>
+              <a:rPr lang="en-US" dirty="0"/>
+              <a:t>What prompt to use?</a:t>
+            </a:r>
+          </a:p>
+        </p:txBody>
+      </p:sp>
+      <p:sp>
+        <p:nvSpPr>
+          <p:cNvPr id="15" name="TextBox 14">
+            <a:extLst>
+              <a:ext uri="{FF2B5EF4-FFF2-40B4-BE49-F238E27FC236}">
+                <a16:creationId xmlns:a16="http://schemas.microsoft.com/office/drawing/2014/main" id="{7DBBF6DB-A3F4-9BDA-784B-07863D703169}"/>
+              </a:ext>
+            </a:extLst>
+          </p:cNvPr>
+          <p:cNvSpPr txBox="1"/>
+          <p:nvPr/>
+        </p:nvSpPr>
+        <p:spPr>
+          <a:xfrm>
+            <a:off x="6252538" y="6003981"/>
+            <a:ext cx="3840218" cy="369332"/>
+          </a:xfrm>
+          <a:prstGeom prst="rect">
+            <a:avLst/>
+          </a:prstGeom>
+          <a:noFill/>
+        </p:spPr>
+        <p:txBody>
+          <a:bodyPr wrap="none" rtlCol="0">
+            <a:spAutoFit/>
+          </a:bodyPr>
+          <a:lstStyle/>
+          <a:p>
+            <a:r>
+              <a:rPr lang="en-US" dirty="0"/>
+              <a:t>Split the optimization into two steps?</a:t>
+            </a:r>
+          </a:p>
+        </p:txBody>
+      </p:sp>
+      <p:sp>
+        <p:nvSpPr>
+          <p:cNvPr id="16" name="Rectangle 15">
+            <a:extLst>
+              <a:ext uri="{FF2B5EF4-FFF2-40B4-BE49-F238E27FC236}">
+                <a16:creationId xmlns:a16="http://schemas.microsoft.com/office/drawing/2014/main" id="{6BB90353-381A-4006-0220-9E9CA9C30D3B}"/>
+              </a:ext>
+            </a:extLst>
+          </p:cNvPr>
+          <p:cNvSpPr/>
+          <p:nvPr/>
+        </p:nvSpPr>
+        <p:spPr>
+          <a:xfrm>
+            <a:off x="2794082" y="1377392"/>
+            <a:ext cx="2100866" cy="716096"/>
+          </a:xfrm>
+          <a:prstGeom prst="rect">
+            <a:avLst/>
+          </a:prstGeom>
+        </p:spPr>
+        <p:style>
+          <a:lnRef idx="2">
+            <a:schemeClr val="accent1">
+              <a:shade val="15000"/>
+            </a:schemeClr>
+          </a:lnRef>
+          <a:fillRef idx="1">
+            <a:schemeClr val="accent1"/>
+          </a:fillRef>
+          <a:effectRef idx="0">
+            <a:schemeClr val="accent1"/>
+          </a:effectRef>
+          <a:fontRef idx="minor">
+            <a:schemeClr val="lt1"/>
+          </a:fontRef>
+        </p:style>
+        <p:txBody>
+          <a:bodyPr rtlCol="0" anchor="ctr"/>
+          <a:lstStyle/>
+          <a:p>
+            <a:pPr algn="ctr"/>
+            <a:r>
+              <a:rPr lang="en-US" dirty="0"/>
+              <a:t>Baseline</a:t>
+            </a:r>
+          </a:p>
+        </p:txBody>
+      </p:sp>
+      <p:sp>
+        <p:nvSpPr>
+          <p:cNvPr id="18" name="Rectangle 17">
+            <a:extLst>
+              <a:ext uri="{FF2B5EF4-FFF2-40B4-BE49-F238E27FC236}">
+                <a16:creationId xmlns:a16="http://schemas.microsoft.com/office/drawing/2014/main" id="{0990C0B6-58D9-15D3-CB0B-5D196176BDE0}"/>
+              </a:ext>
+            </a:extLst>
+          </p:cNvPr>
+          <p:cNvSpPr/>
+          <p:nvPr/>
+        </p:nvSpPr>
+        <p:spPr>
+          <a:xfrm>
+            <a:off x="154861" y="3407949"/>
+            <a:ext cx="2100866" cy="716096"/>
+          </a:xfrm>
+          <a:prstGeom prst="rect">
+            <a:avLst/>
+          </a:prstGeom>
+        </p:spPr>
+        <p:style>
+          <a:lnRef idx="2">
+            <a:schemeClr val="accent1">
+              <a:shade val="15000"/>
+            </a:schemeClr>
+          </a:lnRef>
+          <a:fillRef idx="1">
+            <a:schemeClr val="accent1"/>
+          </a:fillRef>
+          <a:effectRef idx="0">
+            <a:schemeClr val="accent1"/>
+          </a:effectRef>
+          <a:fontRef idx="minor">
+            <a:schemeClr val="lt1"/>
+          </a:fontRef>
+        </p:style>
+        <p:txBody>
+          <a:bodyPr rtlCol="0" anchor="ctr"/>
+          <a:lstStyle/>
+          <a:p>
+            <a:pPr algn="ctr"/>
+            <a:r>
+              <a:rPr lang="en-US" dirty="0"/>
+              <a:t>Documentation</a:t>
+            </a:r>
+            <a:br>
+              <a:rPr lang="en-US" dirty="0"/>
+            </a:br>
+            <a:r>
+              <a:rPr lang="en-US" dirty="0"/>
+              <a:t>&amp; language hints</a:t>
+            </a:r>
+          </a:p>
+        </p:txBody>
+      </p:sp>
+      <p:sp>
+        <p:nvSpPr>
+          <p:cNvPr id="20" name="Rectangle 19">
+            <a:extLst>
+              <a:ext uri="{FF2B5EF4-FFF2-40B4-BE49-F238E27FC236}">
+                <a16:creationId xmlns:a16="http://schemas.microsoft.com/office/drawing/2014/main" id="{3C98BE57-2A38-89A9-7FDE-296070049AA0}"/>
+              </a:ext>
+            </a:extLst>
+          </p:cNvPr>
+          <p:cNvSpPr/>
+          <p:nvPr/>
+        </p:nvSpPr>
+        <p:spPr>
+          <a:xfrm>
+            <a:off x="154861" y="4330022"/>
+            <a:ext cx="2100866" cy="716096"/>
+          </a:xfrm>
+          <a:prstGeom prst="rect">
+            <a:avLst/>
+          </a:prstGeom>
+        </p:spPr>
+        <p:style>
+          <a:lnRef idx="2">
+            <a:schemeClr val="accent1">
+              <a:shade val="15000"/>
+            </a:schemeClr>
+          </a:lnRef>
+          <a:fillRef idx="1">
+            <a:schemeClr val="accent1"/>
+          </a:fillRef>
+          <a:effectRef idx="0">
+            <a:schemeClr val="accent1"/>
+          </a:effectRef>
+          <a:fontRef idx="minor">
+            <a:schemeClr val="lt1"/>
+          </a:fontRef>
+        </p:style>
+        <p:txBody>
+          <a:bodyPr rtlCol="0" anchor="ctr"/>
+          <a:lstStyle/>
+          <a:p>
+            <a:pPr algn="ctr"/>
+            <a:r>
+              <a:rPr lang="en-US" dirty="0"/>
+              <a:t>Example</a:t>
+            </a:r>
+          </a:p>
+        </p:txBody>
+      </p:sp>
+      <p:sp>
+        <p:nvSpPr>
+          <p:cNvPr id="22" name="Rectangle 21">
+            <a:extLst>
+              <a:ext uri="{FF2B5EF4-FFF2-40B4-BE49-F238E27FC236}">
+                <a16:creationId xmlns:a16="http://schemas.microsoft.com/office/drawing/2014/main" id="{01DC6561-6C17-08E8-D1C2-54DD23B3B420}"/>
+              </a:ext>
+            </a:extLst>
+          </p:cNvPr>
+          <p:cNvSpPr/>
+          <p:nvPr/>
+        </p:nvSpPr>
+        <p:spPr>
+          <a:xfrm>
+            <a:off x="154861" y="2485876"/>
+            <a:ext cx="2100866" cy="716096"/>
+          </a:xfrm>
+          <a:prstGeom prst="rect">
+            <a:avLst/>
+          </a:prstGeom>
+        </p:spPr>
+        <p:style>
+          <a:lnRef idx="2">
+            <a:schemeClr val="accent6">
+              <a:shade val="15000"/>
+            </a:schemeClr>
+          </a:lnRef>
+          <a:fillRef idx="1">
+            <a:schemeClr val="accent6"/>
+          </a:fillRef>
+          <a:effectRef idx="0">
+            <a:schemeClr val="accent6"/>
+          </a:effectRef>
+          <a:fontRef idx="minor">
+            <a:schemeClr val="lt1"/>
+          </a:fontRef>
+        </p:style>
+        <p:txBody>
+          <a:bodyPr rtlCol="0" anchor="ctr"/>
+          <a:lstStyle/>
+          <a:p>
+            <a:pPr algn="ctr"/>
+            <a:r>
+              <a:rPr lang="en-US" dirty="0"/>
+              <a:t>Optimization</a:t>
+            </a:r>
+            <a:br>
+              <a:rPr lang="en-US" dirty="0"/>
+            </a:br>
+            <a:r>
+              <a:rPr lang="en-US" dirty="0"/>
+              <a:t>hints</a:t>
+            </a:r>
+          </a:p>
+        </p:txBody>
+      </p:sp>
+      <p:sp>
+        <p:nvSpPr>
+          <p:cNvPr id="24" name="Rectangle 23">
+            <a:extLst>
+              <a:ext uri="{FF2B5EF4-FFF2-40B4-BE49-F238E27FC236}">
+                <a16:creationId xmlns:a16="http://schemas.microsoft.com/office/drawing/2014/main" id="{0F4FB06D-29AA-ACC7-5573-C05802998A47}"/>
+              </a:ext>
+            </a:extLst>
+          </p:cNvPr>
+          <p:cNvSpPr/>
+          <p:nvPr/>
+        </p:nvSpPr>
+        <p:spPr>
+          <a:xfrm>
+            <a:off x="2783437" y="5776779"/>
+            <a:ext cx="2100866" cy="716096"/>
+          </a:xfrm>
+          <a:prstGeom prst="rect">
+            <a:avLst/>
+          </a:prstGeom>
+        </p:spPr>
+        <p:style>
+          <a:lnRef idx="2">
+            <a:schemeClr val="accent2">
+              <a:shade val="15000"/>
+            </a:schemeClr>
+          </a:lnRef>
+          <a:fillRef idx="1">
+            <a:schemeClr val="accent2"/>
+          </a:fillRef>
+          <a:effectRef idx="0">
+            <a:schemeClr val="accent2"/>
+          </a:effectRef>
+          <a:fontRef idx="minor">
+            <a:schemeClr val="lt1"/>
+          </a:fontRef>
+        </p:style>
+        <p:txBody>
+          <a:bodyPr rtlCol="0" anchor="ctr"/>
+          <a:lstStyle/>
+          <a:p>
+            <a:pPr algn="ctr"/>
+            <a:r>
+              <a:rPr lang="en-US" dirty="0"/>
+              <a:t>Optimized</a:t>
+            </a:r>
+          </a:p>
+        </p:txBody>
+      </p:sp>
+      <p:sp>
+        <p:nvSpPr>
+          <p:cNvPr id="26" name="Right Brace 25">
+            <a:extLst>
+              <a:ext uri="{FF2B5EF4-FFF2-40B4-BE49-F238E27FC236}">
+                <a16:creationId xmlns:a16="http://schemas.microsoft.com/office/drawing/2014/main" id="{119D77B4-5A36-5A3B-B93D-EE6AB9478E3C}"/>
+              </a:ext>
+            </a:extLst>
+          </p:cNvPr>
+          <p:cNvSpPr/>
+          <p:nvPr/>
+        </p:nvSpPr>
+        <p:spPr>
+          <a:xfrm>
+            <a:off x="2335576" y="2485876"/>
+            <a:ext cx="649995" cy="2713331"/>
+          </a:xfrm>
+          <a:prstGeom prst="rightBrace">
+            <a:avLst/>
+          </a:prstGeom>
+        </p:spPr>
+        <p:style>
+          <a:lnRef idx="2">
+            <a:schemeClr val="accent1"/>
+          </a:lnRef>
+          <a:fillRef idx="0">
+            <a:schemeClr val="accent1"/>
+          </a:fillRef>
+          <a:effectRef idx="1">
+            <a:schemeClr val="accent1"/>
+          </a:effectRef>
+          <a:fontRef idx="minor">
+            <a:schemeClr val="tx1"/>
+          </a:fontRef>
+        </p:style>
+        <p:txBody>
+          <a:bodyPr rtlCol="0" anchor="ctr"/>
+          <a:lstStyle/>
+          <a:p>
+            <a:pPr algn="ctr"/>
+            <a:endParaRPr lang="en-US"/>
+          </a:p>
+        </p:txBody>
+      </p:sp>
+      <p:cxnSp>
+        <p:nvCxnSpPr>
+          <p:cNvPr id="28" name="Straight Arrow Connector 27">
+            <a:extLst>
+              <a:ext uri="{FF2B5EF4-FFF2-40B4-BE49-F238E27FC236}">
+                <a16:creationId xmlns:a16="http://schemas.microsoft.com/office/drawing/2014/main" id="{D64A32AA-01B4-1559-9337-81C50A0E8F3B}"/>
+              </a:ext>
+            </a:extLst>
+          </p:cNvPr>
+          <p:cNvCxnSpPr>
+            <a:cxnSpLocks/>
+          </p:cNvCxnSpPr>
+          <p:nvPr/>
+        </p:nvCxnSpPr>
+        <p:spPr>
+          <a:xfrm>
+            <a:off x="3833870" y="2335576"/>
+            <a:ext cx="0" cy="1093424"/>
+          </a:xfrm>
+          <a:prstGeom prst="straightConnector1">
+            <a:avLst/>
+          </a:prstGeom>
+          <a:ln>
+            <a:tailEnd type="triangle"/>
+          </a:ln>
+        </p:spPr>
+        <p:style>
+          <a:lnRef idx="2">
+            <a:schemeClr val="accent1"/>
+          </a:lnRef>
+          <a:fillRef idx="0">
+            <a:schemeClr val="accent1"/>
+          </a:fillRef>
+          <a:effectRef idx="1">
+            <a:schemeClr val="accent1"/>
+          </a:effectRef>
+          <a:fontRef idx="minor">
+            <a:schemeClr val="tx1"/>
+          </a:fontRef>
+        </p:style>
+      </p:cxnSp>
+      <p:cxnSp>
+        <p:nvCxnSpPr>
+          <p:cNvPr id="29" name="Straight Arrow Connector 28">
+            <a:extLst>
+              <a:ext uri="{FF2B5EF4-FFF2-40B4-BE49-F238E27FC236}">
+                <a16:creationId xmlns:a16="http://schemas.microsoft.com/office/drawing/2014/main" id="{A60EB943-7476-58D7-D62F-785FE459D2DD}"/>
+              </a:ext>
+            </a:extLst>
+          </p:cNvPr>
+          <p:cNvCxnSpPr/>
+          <p:nvPr/>
+        </p:nvCxnSpPr>
+        <p:spPr>
+          <a:xfrm>
+            <a:off x="3843051" y="4396123"/>
+            <a:ext cx="0" cy="1299990"/>
+          </a:xfrm>
+          <a:prstGeom prst="straightConnector1">
+            <a:avLst/>
+          </a:prstGeom>
+          <a:ln>
+            <a:tailEnd type="triangle"/>
+          </a:ln>
+        </p:spPr>
+        <p:style>
+          <a:lnRef idx="2">
+            <a:schemeClr val="accent1"/>
+          </a:lnRef>
+          <a:fillRef idx="0">
+            <a:schemeClr val="accent1"/>
+          </a:fillRef>
+          <a:effectRef idx="1">
+            <a:schemeClr val="accent1"/>
+          </a:effectRef>
+          <a:fontRef idx="minor">
+            <a:schemeClr val="tx1"/>
+          </a:fontRef>
+        </p:style>
+      </p:cxnSp>
+      <p:sp>
+        <p:nvSpPr>
+          <p:cNvPr id="31" name="Oval 30">
+            <a:extLst>
+              <a:ext uri="{FF2B5EF4-FFF2-40B4-BE49-F238E27FC236}">
+                <a16:creationId xmlns:a16="http://schemas.microsoft.com/office/drawing/2014/main" id="{4FED10ED-91FE-8EF9-51E0-AC558579369F}"/>
+              </a:ext>
+            </a:extLst>
+          </p:cNvPr>
+          <p:cNvSpPr/>
+          <p:nvPr/>
+        </p:nvSpPr>
+        <p:spPr>
+          <a:xfrm>
+            <a:off x="3183503" y="3609689"/>
+            <a:ext cx="1322024" cy="728725"/>
+          </a:xfrm>
+          <a:prstGeom prst="ellipse">
+            <a:avLst/>
+          </a:prstGeom>
+        </p:spPr>
+        <p:style>
+          <a:lnRef idx="2">
+            <a:schemeClr val="accent1">
+              <a:shade val="15000"/>
+            </a:schemeClr>
+          </a:lnRef>
+          <a:fillRef idx="1">
+            <a:schemeClr val="accent1"/>
+          </a:fillRef>
+          <a:effectRef idx="0">
+            <a:schemeClr val="accent1"/>
+          </a:effectRef>
+          <a:fontRef idx="minor">
+            <a:schemeClr val="lt1"/>
+          </a:fontRef>
+        </p:style>
+        <p:txBody>
+          <a:bodyPr rtlCol="0" anchor="ctr"/>
+          <a:lstStyle/>
+          <a:p>
+            <a:pPr algn="ctr"/>
+            <a:r>
+              <a:rPr lang="en-US" dirty="0"/>
+              <a:t>LLM</a:t>
+            </a:r>
+          </a:p>
+        </p:txBody>
+      </p:sp>
+    </p:spTree>
+    <p:extLst>
+      <p:ext uri="{BB962C8B-B14F-4D97-AF65-F5344CB8AC3E}">
+        <p14:creationId xmlns:p14="http://schemas.microsoft.com/office/powerpoint/2010/main" val="2135555303"/>
+      </p:ext>
+    </p:extLst>
+  </p:cSld>
+  <p:clrMapOvr>
+    <a:masterClrMapping/>
+  </p:clrMapOvr>
+</p:sld>
+</file>
+
+<file path=ppt/slides/slide27.xml><?xml version="1.0" encoding="utf-8"?>
+<p:sld xmlns:a="http://schemas.openxmlformats.org/drawingml/2006/main" xmlns:r="http://schemas.openxmlformats.org/officeDocument/2006/relationships" xmlns:p="http://schemas.openxmlformats.org/presentationml/2006/main">
+  <p:cSld>
+    <p:spTree>
+      <p:nvGrpSpPr>
+        <p:cNvPr id="1" name=""/>
+        <p:cNvGrpSpPr/>
+        <p:nvPr/>
+      </p:nvGrpSpPr>
+      <p:grpSpPr>
+        <a:xfrm>
+          <a:off x="0" y="0"/>
+          <a:ext cx="0" cy="0"/>
+          <a:chOff x="0" y="0"/>
+          <a:chExt cx="0" cy="0"/>
+        </a:xfrm>
+      </p:grpSpPr>
+      <p:sp>
+        <p:nvSpPr>
+          <p:cNvPr id="2" name="Title 1">
+            <a:extLst>
+              <a:ext uri="{FF2B5EF4-FFF2-40B4-BE49-F238E27FC236}">
+                <a16:creationId xmlns:a16="http://schemas.microsoft.com/office/drawing/2014/main" id="{6447B745-9B50-DD90-5161-BD2A06CEA44B}"/>
+              </a:ext>
+            </a:extLst>
+          </p:cNvPr>
+          <p:cNvSpPr>
+            <a:spLocks noGrp="1"/>
+          </p:cNvSpPr>
+          <p:nvPr>
+            <p:ph type="title"/>
+          </p:nvPr>
+        </p:nvSpPr>
+        <p:spPr/>
+        <p:txBody>
+          <a:bodyPr/>
+          <a:lstStyle/>
+          <a:p>
+            <a:r>
+              <a:rPr lang="en-US" noProof="0" dirty="0"/>
+              <a:t>Contribution map</a:t>
+            </a:r>
+          </a:p>
+        </p:txBody>
+      </p:sp>
+      <p:sp>
+        <p:nvSpPr>
+          <p:cNvPr id="5" name="Rectangle 4">
+            <a:extLst>
+              <a:ext uri="{FF2B5EF4-FFF2-40B4-BE49-F238E27FC236}">
+                <a16:creationId xmlns:a16="http://schemas.microsoft.com/office/drawing/2014/main" id="{CB7F8197-FC2F-9C2A-050C-CCCB46D86C79}"/>
+              </a:ext>
+            </a:extLst>
+          </p:cNvPr>
+          <p:cNvSpPr/>
+          <p:nvPr/>
+        </p:nvSpPr>
+        <p:spPr>
+          <a:xfrm>
+            <a:off x="4240490" y="1406732"/>
+            <a:ext cx="3711020" cy="914400"/>
+          </a:xfrm>
+          <a:prstGeom prst="rect">
+            <a:avLst/>
+          </a:prstGeom>
+        </p:spPr>
+        <p:style>
+          <a:lnRef idx="2">
+            <a:schemeClr val="accent1">
+              <a:shade val="15000"/>
+            </a:schemeClr>
+          </a:lnRef>
+          <a:fillRef idx="1">
+            <a:schemeClr val="accent1"/>
+          </a:fillRef>
+          <a:effectRef idx="0">
+            <a:schemeClr val="accent1"/>
+          </a:effectRef>
+          <a:fontRef idx="minor">
+            <a:schemeClr val="lt1"/>
+          </a:fontRef>
+        </p:style>
+        <p:txBody>
+          <a:bodyPr rtlCol="0" anchor="ctr"/>
+          <a:lstStyle/>
+          <a:p>
+            <a:pPr algn="ctr"/>
+            <a:r>
+              <a:rPr lang="en-US" noProof="0" dirty="0"/>
+              <a:t>Separate algorithm design from performance optimization</a:t>
+            </a:r>
+          </a:p>
+        </p:txBody>
+      </p:sp>
+      <p:sp>
+        <p:nvSpPr>
+          <p:cNvPr id="7" name="Rectangle 6">
+            <a:extLst>
+              <a:ext uri="{FF2B5EF4-FFF2-40B4-BE49-F238E27FC236}">
+                <a16:creationId xmlns:a16="http://schemas.microsoft.com/office/drawing/2014/main" id="{60EC2A1A-B720-84BC-76D5-4751C09EA61A}"/>
+              </a:ext>
+            </a:extLst>
+          </p:cNvPr>
+          <p:cNvSpPr/>
+          <p:nvPr/>
+        </p:nvSpPr>
+        <p:spPr>
+          <a:xfrm>
+            <a:off x="150074" y="2971800"/>
+            <a:ext cx="3711020" cy="914400"/>
+          </a:xfrm>
+          <a:prstGeom prst="rect">
+            <a:avLst/>
+          </a:prstGeom>
+        </p:spPr>
+        <p:style>
+          <a:lnRef idx="2">
+            <a:schemeClr val="accent1">
+              <a:shade val="15000"/>
+            </a:schemeClr>
+          </a:lnRef>
+          <a:fillRef idx="1">
+            <a:schemeClr val="accent1"/>
+          </a:fillRef>
+          <a:effectRef idx="0">
+            <a:schemeClr val="accent1"/>
+          </a:effectRef>
+          <a:fontRef idx="minor">
+            <a:schemeClr val="lt1"/>
+          </a:fontRef>
+        </p:style>
+        <p:txBody>
+          <a:bodyPr rtlCol="0" anchor="ctr"/>
+          <a:lstStyle/>
+          <a:p>
+            <a:pPr algn="ctr"/>
+            <a:r>
+              <a:rPr lang="en-US" noProof="0" dirty="0"/>
+              <a:t>Layout- and traversal-agnostic abstractions</a:t>
+            </a:r>
+          </a:p>
+        </p:txBody>
+      </p:sp>
+      <p:sp>
+        <p:nvSpPr>
+          <p:cNvPr id="9" name="Rectangle 8">
+            <a:extLst>
+              <a:ext uri="{FF2B5EF4-FFF2-40B4-BE49-F238E27FC236}">
+                <a16:creationId xmlns:a16="http://schemas.microsoft.com/office/drawing/2014/main" id="{6DB7F776-4EDC-09F4-F04A-E586FC4B4500}"/>
+              </a:ext>
+            </a:extLst>
+          </p:cNvPr>
+          <p:cNvSpPr/>
+          <p:nvPr/>
+        </p:nvSpPr>
+        <p:spPr>
+          <a:xfrm>
+            <a:off x="7840178" y="2971800"/>
+            <a:ext cx="3711020" cy="914400"/>
+          </a:xfrm>
+          <a:prstGeom prst="rect">
+            <a:avLst/>
+          </a:prstGeom>
+        </p:spPr>
+        <p:style>
+          <a:lnRef idx="2">
+            <a:schemeClr val="accent1">
+              <a:shade val="15000"/>
+            </a:schemeClr>
+          </a:lnRef>
+          <a:fillRef idx="1">
+            <a:schemeClr val="accent1"/>
+          </a:fillRef>
+          <a:effectRef idx="0">
+            <a:schemeClr val="accent1"/>
+          </a:effectRef>
+          <a:fontRef idx="minor">
+            <a:schemeClr val="lt1"/>
+          </a:fontRef>
+        </p:style>
+        <p:txBody>
+          <a:bodyPr rtlCol="0" anchor="ctr"/>
+          <a:lstStyle/>
+          <a:p>
+            <a:pPr algn="ctr"/>
+            <a:r>
+              <a:rPr lang="en-US" noProof="0" dirty="0"/>
+              <a:t>LLM-assisted optimization</a:t>
+            </a:r>
+          </a:p>
+        </p:txBody>
+      </p:sp>
+      <p:sp>
+        <p:nvSpPr>
+          <p:cNvPr id="11" name="Rectangle 10">
+            <a:extLst>
+              <a:ext uri="{FF2B5EF4-FFF2-40B4-BE49-F238E27FC236}">
+                <a16:creationId xmlns:a16="http://schemas.microsoft.com/office/drawing/2014/main" id="{5B2B9BCB-5805-C1F1-AF45-681B37E6B83E}"/>
+              </a:ext>
+            </a:extLst>
+          </p:cNvPr>
+          <p:cNvSpPr/>
+          <p:nvPr/>
+        </p:nvSpPr>
+        <p:spPr>
+          <a:xfrm>
+            <a:off x="150074" y="4252912"/>
+            <a:ext cx="3711020" cy="914400"/>
+          </a:xfrm>
+          <a:prstGeom prst="rect">
+            <a:avLst/>
+          </a:prstGeom>
+        </p:spPr>
+        <p:style>
+          <a:lnRef idx="2">
+            <a:schemeClr val="accent1">
+              <a:shade val="15000"/>
+            </a:schemeClr>
+          </a:lnRef>
+          <a:fillRef idx="1">
+            <a:schemeClr val="accent1"/>
+          </a:fillRef>
+          <a:effectRef idx="0">
+            <a:schemeClr val="accent1"/>
+          </a:effectRef>
+          <a:fontRef idx="minor">
+            <a:schemeClr val="lt1"/>
+          </a:fontRef>
+        </p:style>
+        <p:txBody>
+          <a:bodyPr rtlCol="0" anchor="ctr"/>
+          <a:lstStyle/>
+          <a:p>
+            <a:pPr algn="ctr"/>
+            <a:r>
+              <a:rPr lang="en-US" noProof="0" dirty="0"/>
+              <a:t>Layout abstractions</a:t>
+            </a:r>
+          </a:p>
+        </p:txBody>
+      </p:sp>
+      <p:sp>
+        <p:nvSpPr>
+          <p:cNvPr id="13" name="Rectangle 12">
+            <a:extLst>
+              <a:ext uri="{FF2B5EF4-FFF2-40B4-BE49-F238E27FC236}">
+                <a16:creationId xmlns:a16="http://schemas.microsoft.com/office/drawing/2014/main" id="{31388E94-1EEB-E24E-1923-AA250880AF84}"/>
+              </a:ext>
+            </a:extLst>
+          </p:cNvPr>
+          <p:cNvSpPr/>
+          <p:nvPr/>
+        </p:nvSpPr>
+        <p:spPr>
+          <a:xfrm>
+            <a:off x="4240490" y="4252912"/>
+            <a:ext cx="3711020" cy="914400"/>
+          </a:xfrm>
+          <a:prstGeom prst="rect">
+            <a:avLst/>
+          </a:prstGeom>
+        </p:spPr>
+        <p:style>
+          <a:lnRef idx="2">
+            <a:schemeClr val="accent1">
+              <a:shade val="15000"/>
+            </a:schemeClr>
+          </a:lnRef>
+          <a:fillRef idx="1">
+            <a:schemeClr val="accent1"/>
+          </a:fillRef>
+          <a:effectRef idx="0">
+            <a:schemeClr val="accent1"/>
+          </a:effectRef>
+          <a:fontRef idx="minor">
+            <a:schemeClr val="lt1"/>
+          </a:fontRef>
+        </p:style>
+        <p:txBody>
+          <a:bodyPr rtlCol="0" anchor="ctr"/>
+          <a:lstStyle/>
+          <a:p>
+            <a:pPr algn="ctr"/>
+            <a:r>
+              <a:rPr lang="en-US" noProof="0" dirty="0"/>
+              <a:t>Traversal abstractions</a:t>
+            </a:r>
+          </a:p>
+        </p:txBody>
+      </p:sp>
+      <p:sp>
+        <p:nvSpPr>
+          <p:cNvPr id="15" name="Rectangle 14">
+            <a:extLst>
+              <a:ext uri="{FF2B5EF4-FFF2-40B4-BE49-F238E27FC236}">
+                <a16:creationId xmlns:a16="http://schemas.microsoft.com/office/drawing/2014/main" id="{DE8920A4-4430-6757-E41A-9BA9578DC80D}"/>
+              </a:ext>
+            </a:extLst>
+          </p:cNvPr>
+          <p:cNvSpPr/>
+          <p:nvPr/>
+        </p:nvSpPr>
+        <p:spPr>
+          <a:xfrm>
+            <a:off x="8330906" y="4252912"/>
+            <a:ext cx="3711020" cy="914400"/>
+          </a:xfrm>
+          <a:prstGeom prst="rect">
+            <a:avLst/>
+          </a:prstGeom>
+        </p:spPr>
+        <p:style>
+          <a:lnRef idx="2">
+            <a:schemeClr val="accent1">
+              <a:shade val="15000"/>
+            </a:schemeClr>
+          </a:lnRef>
+          <a:fillRef idx="1">
+            <a:schemeClr val="accent1"/>
+          </a:fillRef>
+          <a:effectRef idx="0">
+            <a:schemeClr val="accent1"/>
+          </a:effectRef>
+          <a:fontRef idx="minor">
+            <a:schemeClr val="lt1"/>
+          </a:fontRef>
+        </p:style>
+        <p:txBody>
+          <a:bodyPr rtlCol="0" anchor="ctr"/>
+          <a:lstStyle/>
+          <a:p>
+            <a:pPr algn="ctr"/>
+            <a:r>
+              <a:rPr lang="en-US" noProof="0" dirty="0"/>
+              <a:t>Practical aspects</a:t>
+            </a:r>
+          </a:p>
+        </p:txBody>
+      </p:sp>
+      <p:sp>
+        <p:nvSpPr>
+          <p:cNvPr id="17" name="Rectangle 16">
+            <a:extLst>
+              <a:ext uri="{FF2B5EF4-FFF2-40B4-BE49-F238E27FC236}">
+                <a16:creationId xmlns:a16="http://schemas.microsoft.com/office/drawing/2014/main" id="{D01E75A2-333B-DF95-544C-0ACF1B88882C}"/>
+              </a:ext>
+            </a:extLst>
+          </p:cNvPr>
+          <p:cNvSpPr/>
+          <p:nvPr/>
+        </p:nvSpPr>
+        <p:spPr>
+          <a:xfrm>
+            <a:off x="302474" y="5356288"/>
+            <a:ext cx="3711020" cy="914400"/>
+          </a:xfrm>
+          <a:prstGeom prst="rect">
+            <a:avLst/>
+          </a:prstGeom>
+        </p:spPr>
+        <p:style>
+          <a:lnRef idx="2">
+            <a:schemeClr val="accent1">
+              <a:shade val="15000"/>
+            </a:schemeClr>
+          </a:lnRef>
+          <a:fillRef idx="1">
+            <a:schemeClr val="accent1"/>
+          </a:fillRef>
+          <a:effectRef idx="0">
+            <a:schemeClr val="accent1"/>
+          </a:effectRef>
+          <a:fontRef idx="minor">
+            <a:schemeClr val="lt1"/>
+          </a:fontRef>
+        </p:style>
+        <p:txBody>
+          <a:bodyPr rtlCol="0" anchor="ctr"/>
+          <a:lstStyle/>
+          <a:p>
+            <a:pPr algn="ctr"/>
+            <a:r>
+              <a:rPr lang="en-US" noProof="0" dirty="0" err="1"/>
+              <a:t>Noarr</a:t>
+            </a:r>
+            <a:r>
+              <a:rPr lang="en-US" noProof="0" dirty="0"/>
+              <a:t> structures</a:t>
+            </a:r>
+          </a:p>
+        </p:txBody>
+      </p:sp>
+      <p:sp>
+        <p:nvSpPr>
+          <p:cNvPr id="19" name="Rectangle 18">
+            <a:extLst>
+              <a:ext uri="{FF2B5EF4-FFF2-40B4-BE49-F238E27FC236}">
+                <a16:creationId xmlns:a16="http://schemas.microsoft.com/office/drawing/2014/main" id="{67736357-2F90-D241-51F6-C03C797EFFC2}"/>
+              </a:ext>
+            </a:extLst>
+          </p:cNvPr>
+          <p:cNvSpPr/>
+          <p:nvPr/>
+        </p:nvSpPr>
+        <p:spPr>
+          <a:xfrm>
+            <a:off x="454874" y="5508688"/>
+            <a:ext cx="3711020" cy="914400"/>
+          </a:xfrm>
+          <a:prstGeom prst="rect">
+            <a:avLst/>
+          </a:prstGeom>
+        </p:spPr>
+        <p:style>
+          <a:lnRef idx="2">
+            <a:schemeClr val="accent1">
+              <a:shade val="15000"/>
+            </a:schemeClr>
+          </a:lnRef>
+          <a:fillRef idx="1">
+            <a:schemeClr val="accent1"/>
+          </a:fillRef>
+          <a:effectRef idx="0">
+            <a:schemeClr val="accent1"/>
+          </a:effectRef>
+          <a:fontRef idx="minor">
+            <a:schemeClr val="lt1"/>
+          </a:fontRef>
+        </p:style>
+        <p:txBody>
+          <a:bodyPr rtlCol="0" anchor="ctr"/>
+          <a:lstStyle/>
+          <a:p>
+            <a:pPr algn="ctr"/>
+            <a:r>
+              <a:rPr lang="en-US" noProof="0" dirty="0" err="1"/>
+              <a:t>Noarr</a:t>
+            </a:r>
+            <a:r>
+              <a:rPr lang="en-US" noProof="0" dirty="0"/>
+              <a:t> traversers</a:t>
+            </a:r>
+          </a:p>
+        </p:txBody>
+      </p:sp>
+      <p:sp>
+        <p:nvSpPr>
+          <p:cNvPr id="21" name="Rectangle 20">
+            <a:extLst>
+              <a:ext uri="{FF2B5EF4-FFF2-40B4-BE49-F238E27FC236}">
+                <a16:creationId xmlns:a16="http://schemas.microsoft.com/office/drawing/2014/main" id="{9EC73339-8B3D-25F4-18D5-E5821CB7CE8B}"/>
+              </a:ext>
+            </a:extLst>
+          </p:cNvPr>
+          <p:cNvSpPr/>
+          <p:nvPr/>
+        </p:nvSpPr>
+        <p:spPr>
+          <a:xfrm>
+            <a:off x="607274" y="5661088"/>
+            <a:ext cx="3711020" cy="914400"/>
+          </a:xfrm>
+          <a:prstGeom prst="rect">
+            <a:avLst/>
+          </a:prstGeom>
+        </p:spPr>
+        <p:style>
+          <a:lnRef idx="2">
+            <a:schemeClr val="accent1">
+              <a:shade val="15000"/>
+            </a:schemeClr>
+          </a:lnRef>
+          <a:fillRef idx="1">
+            <a:schemeClr val="accent1"/>
+          </a:fillRef>
+          <a:effectRef idx="0">
+            <a:schemeClr val="accent1"/>
+          </a:effectRef>
+          <a:fontRef idx="minor">
+            <a:schemeClr val="lt1"/>
+          </a:fontRef>
+        </p:style>
+        <p:txBody>
+          <a:bodyPr rtlCol="0" anchor="ctr"/>
+          <a:lstStyle/>
+          <a:p>
+            <a:pPr algn="ctr"/>
+            <a:r>
+              <a:rPr lang="en-US" noProof="0" dirty="0" err="1"/>
+              <a:t>Noarr</a:t>
+            </a:r>
+            <a:r>
+              <a:rPr lang="en-US" noProof="0" dirty="0"/>
+              <a:t> tuning</a:t>
+            </a:r>
+          </a:p>
+        </p:txBody>
+      </p:sp>
+      <p:sp>
+        <p:nvSpPr>
+          <p:cNvPr id="23" name="Rectangle 22">
+            <a:extLst>
+              <a:ext uri="{FF2B5EF4-FFF2-40B4-BE49-F238E27FC236}">
+                <a16:creationId xmlns:a16="http://schemas.microsoft.com/office/drawing/2014/main" id="{63EC4F51-D7C0-1DFC-E94E-75AE185B7CC1}"/>
+              </a:ext>
+            </a:extLst>
+          </p:cNvPr>
+          <p:cNvSpPr/>
+          <p:nvPr/>
+        </p:nvSpPr>
+        <p:spPr>
+          <a:xfrm>
+            <a:off x="759674" y="5813488"/>
+            <a:ext cx="3711020" cy="914400"/>
+          </a:xfrm>
+          <a:prstGeom prst="rect">
+            <a:avLst/>
+          </a:prstGeom>
+        </p:spPr>
+        <p:style>
+          <a:lnRef idx="2">
+            <a:schemeClr val="accent1">
+              <a:shade val="15000"/>
+            </a:schemeClr>
+          </a:lnRef>
+          <a:fillRef idx="1">
+            <a:schemeClr val="accent1"/>
+          </a:fillRef>
+          <a:effectRef idx="0">
+            <a:schemeClr val="accent1"/>
+          </a:effectRef>
+          <a:fontRef idx="minor">
+            <a:schemeClr val="lt1"/>
+          </a:fontRef>
+        </p:style>
+        <p:txBody>
+          <a:bodyPr rtlCol="0" anchor="ctr"/>
+          <a:lstStyle/>
+          <a:p>
+            <a:pPr algn="ctr"/>
+            <a:r>
+              <a:rPr lang="en-US" noProof="0" dirty="0" err="1"/>
+              <a:t>Noarr</a:t>
+            </a:r>
+            <a:r>
+              <a:rPr lang="en-US" noProof="0" dirty="0"/>
+              <a:t>-MPI</a:t>
+            </a:r>
+          </a:p>
+        </p:txBody>
+      </p:sp>
+      <p:sp>
+        <p:nvSpPr>
+          <p:cNvPr id="25" name="Rectangle 24">
+            <a:extLst>
+              <a:ext uri="{FF2B5EF4-FFF2-40B4-BE49-F238E27FC236}">
+                <a16:creationId xmlns:a16="http://schemas.microsoft.com/office/drawing/2014/main" id="{B7D64168-E19F-C04D-293D-CB07E85D29DA}"/>
+              </a:ext>
+            </a:extLst>
+          </p:cNvPr>
+          <p:cNvSpPr/>
+          <p:nvPr/>
+        </p:nvSpPr>
+        <p:spPr>
+          <a:xfrm>
+            <a:off x="4853138" y="5424788"/>
+            <a:ext cx="3711020" cy="914400"/>
+          </a:xfrm>
+          <a:prstGeom prst="rect">
+            <a:avLst/>
+          </a:prstGeom>
+        </p:spPr>
+        <p:style>
+          <a:lnRef idx="2">
+            <a:schemeClr val="accent1">
+              <a:shade val="15000"/>
+            </a:schemeClr>
+          </a:lnRef>
+          <a:fillRef idx="1">
+            <a:schemeClr val="accent1"/>
+          </a:fillRef>
+          <a:effectRef idx="0">
+            <a:schemeClr val="accent1"/>
+          </a:effectRef>
+          <a:fontRef idx="minor">
+            <a:schemeClr val="lt1"/>
+          </a:fontRef>
+        </p:style>
+        <p:txBody>
+          <a:bodyPr rtlCol="0" anchor="ctr"/>
+          <a:lstStyle/>
+          <a:p>
+            <a:pPr algn="ctr"/>
+            <a:r>
+              <a:rPr lang="en-US" noProof="0" dirty="0" err="1"/>
+              <a:t>Cellato</a:t>
+            </a:r>
+            <a:endParaRPr lang="en-US" noProof="0" dirty="0"/>
+          </a:p>
+        </p:txBody>
+      </p:sp>
+    </p:spTree>
+    <p:extLst>
+      <p:ext uri="{BB962C8B-B14F-4D97-AF65-F5344CB8AC3E}">
+        <p14:creationId xmlns:p14="http://schemas.microsoft.com/office/powerpoint/2010/main" val="1745489699"/>
+      </p:ext>
+    </p:extLst>
+  </p:cSld>
+  <p:clrMapOvr>
+    <a:masterClrMapping/>
+  </p:clrMapOvr>
+</p:sld>
+</file>
+
+<file path=ppt/slides/slide28.xml><?xml version="1.0" encoding="utf-8"?>
+<p:sld xmlns:a="http://schemas.openxmlformats.org/drawingml/2006/main" xmlns:r="http://schemas.openxmlformats.org/officeDocument/2006/relationships" xmlns:p="http://schemas.openxmlformats.org/presentationml/2006/main" show="0">
+  <p:cSld>
+    <p:spTree>
+      <p:nvGrpSpPr>
+        <p:cNvPr id="1" name=""/>
+        <p:cNvGrpSpPr/>
+        <p:nvPr/>
+      </p:nvGrpSpPr>
+      <p:grpSpPr>
+        <a:xfrm>
+          <a:off x="0" y="0"/>
+          <a:ext cx="0" cy="0"/>
+          <a:chOff x="0" y="0"/>
+          <a:chExt cx="0" cy="0"/>
+        </a:xfrm>
+      </p:grpSpPr>
+      <p:sp>
+        <p:nvSpPr>
+          <p:cNvPr id="2" name="Title 1">
+            <a:extLst>
+              <a:ext uri="{FF2B5EF4-FFF2-40B4-BE49-F238E27FC236}">
+                <a16:creationId xmlns:a16="http://schemas.microsoft.com/office/drawing/2014/main" id="{63B07F39-5957-124B-D20D-4A155E0E07D1}"/>
+              </a:ext>
+            </a:extLst>
+          </p:cNvPr>
+          <p:cNvSpPr>
+            <a:spLocks noGrp="1"/>
+          </p:cNvSpPr>
+          <p:nvPr>
+            <p:ph type="title"/>
+          </p:nvPr>
+        </p:nvSpPr>
+        <p:spPr/>
+        <p:txBody>
+          <a:bodyPr/>
+          <a:lstStyle/>
+          <a:p>
+            <a:r>
+              <a:rPr lang="en-US" noProof="0" dirty="0"/>
+              <a:t>Summary</a:t>
+            </a:r>
+          </a:p>
+        </p:txBody>
+      </p:sp>
+      <p:sp>
+        <p:nvSpPr>
+          <p:cNvPr id="3" name="Content Placeholder 2">
+            <a:extLst>
+              <a:ext uri="{FF2B5EF4-FFF2-40B4-BE49-F238E27FC236}">
+                <a16:creationId xmlns:a16="http://schemas.microsoft.com/office/drawing/2014/main" id="{4437CB38-BBCE-B652-0445-A75C99068419}"/>
+              </a:ext>
+            </a:extLst>
+          </p:cNvPr>
+          <p:cNvSpPr>
+            <a:spLocks noGrp="1"/>
+          </p:cNvSpPr>
+          <p:nvPr>
+            <p:ph idx="1"/>
+          </p:nvPr>
+        </p:nvSpPr>
+        <p:spPr/>
+        <p:txBody>
+          <a:bodyPr/>
+          <a:lstStyle/>
+          <a:p>
+            <a:r>
+              <a:rPr lang="en-US" noProof="0" dirty="0"/>
+              <a:t>6 peer-reviewed publications </a:t>
+            </a:r>
+          </a:p>
+          <a:p>
+            <a:pPr lvl="1"/>
+            <a:r>
+              <a:rPr lang="en-US" noProof="0" dirty="0"/>
+              <a:t>2 journal articles</a:t>
+            </a:r>
+          </a:p>
+          <a:p>
+            <a:pPr lvl="1"/>
+            <a:r>
+              <a:rPr lang="en-US" noProof="0" dirty="0"/>
+              <a:t>3 conference papers,</a:t>
+            </a:r>
+          </a:p>
+          <a:p>
+            <a:pPr lvl="1"/>
+            <a:r>
+              <a:rPr lang="en-US" noProof="0" dirty="0"/>
+              <a:t>1 workshop paper</a:t>
+            </a:r>
+          </a:p>
+          <a:p>
+            <a:r>
+              <a:rPr lang="en-US" noProof="0" dirty="0"/>
+              <a:t>1 publication awaiting peer review</a:t>
+            </a:r>
+          </a:p>
+        </p:txBody>
+      </p:sp>
+    </p:spTree>
+    <p:extLst>
+      <p:ext uri="{BB962C8B-B14F-4D97-AF65-F5344CB8AC3E}">
+        <p14:creationId xmlns:p14="http://schemas.microsoft.com/office/powerpoint/2010/main" val="309417143"/>
+      </p:ext>
+    </p:extLst>
+  </p:cSld>
+  <p:clrMapOvr>
+    <a:masterClrMapping/>
+  </p:clrMapOvr>
+</p:sld>
+</file>
+
+<file path=ppt/slides/slide29.xml><?xml version="1.0" encoding="utf-8"?>
+<p:sld xmlns:a="http://schemas.openxmlformats.org/drawingml/2006/main" xmlns:r="http://schemas.openxmlformats.org/officeDocument/2006/relationships" xmlns:p="http://schemas.openxmlformats.org/presentationml/2006/main">
+  <p:cSld>
+    <p:spTree>
+      <p:nvGrpSpPr>
+        <p:cNvPr id="1" name=""/>
+        <p:cNvGrpSpPr/>
+        <p:nvPr/>
+      </p:nvGrpSpPr>
+      <p:grpSpPr>
+        <a:xfrm>
+          <a:off x="0" y="0"/>
+          <a:ext cx="0" cy="0"/>
+          <a:chOff x="0" y="0"/>
+          <a:chExt cx="0" cy="0"/>
+        </a:xfrm>
+      </p:grpSpPr>
+      <p:sp>
+        <p:nvSpPr>
+          <p:cNvPr id="2" name="Title 1">
+            <a:extLst>
+              <a:ext uri="{FF2B5EF4-FFF2-40B4-BE49-F238E27FC236}">
+                <a16:creationId xmlns:a16="http://schemas.microsoft.com/office/drawing/2014/main" id="{5EFCD7CC-C2D6-52E6-02D5-F41FC5389A5C}"/>
+              </a:ext>
+            </a:extLst>
+          </p:cNvPr>
+          <p:cNvSpPr>
+            <a:spLocks noGrp="1"/>
+          </p:cNvSpPr>
+          <p:nvPr>
+            <p:ph type="title"/>
+          </p:nvPr>
+        </p:nvSpPr>
+        <p:spPr/>
+        <p:txBody>
+          <a:bodyPr/>
+          <a:lstStyle/>
+          <a:p>
+            <a:endParaRPr lang="en-US" noProof="0" dirty="0"/>
+          </a:p>
+        </p:txBody>
+      </p:sp>
+      <p:sp>
+        <p:nvSpPr>
+          <p:cNvPr id="3" name="Content Placeholder 2">
+            <a:extLst>
+              <a:ext uri="{FF2B5EF4-FFF2-40B4-BE49-F238E27FC236}">
+                <a16:creationId xmlns:a16="http://schemas.microsoft.com/office/drawing/2014/main" id="{950373B6-1B3D-2E32-D54A-18C124620153}"/>
+              </a:ext>
+            </a:extLst>
+          </p:cNvPr>
+          <p:cNvSpPr>
+            <a:spLocks noGrp="1"/>
+          </p:cNvSpPr>
+          <p:nvPr>
+            <p:ph idx="1"/>
+          </p:nvPr>
+        </p:nvSpPr>
+        <p:spPr/>
+        <p:txBody>
+          <a:bodyPr/>
+          <a:lstStyle/>
+          <a:p>
+            <a:endParaRPr lang="en-US" noProof="0" dirty="0"/>
+          </a:p>
+        </p:txBody>
+      </p:sp>
+    </p:spTree>
+    <p:extLst>
+      <p:ext uri="{BB962C8B-B14F-4D97-AF65-F5344CB8AC3E}">
+        <p14:creationId xmlns:p14="http://schemas.microsoft.com/office/powerpoint/2010/main" val="2595384929"/>
       </p:ext>
     </p:extLst>
   </p:cSld>
@@ -19072,8 +19912,8 @@
           </p:txBody>
         </p:sp>
       </p:grpSp>
-      <mc:AlternateContent xmlns:mc="http://schemas.openxmlformats.org/markup-compatibility/2006">
-        <mc:Choice xmlns:a14="http://schemas.microsoft.com/office/drawing/2010/main" Requires="a14">
+      <mc:AlternateContent xmlns:mc="http://schemas.openxmlformats.org/markup-compatibility/2006" xmlns:a14="http://schemas.microsoft.com/office/drawing/2010/main">
+        <mc:Choice Requires="a14">
           <p:sp>
             <p:nvSpPr>
               <p:cNvPr id="16" name="TextBox 15">
@@ -19136,7 +19976,7 @@
             </p:txBody>
           </p:sp>
         </mc:Choice>
-        <mc:Fallback>
+        <mc:Fallback xmlns="">
           <p:sp>
             <p:nvSpPr>
               <p:cNvPr id="16" name="TextBox 15">
@@ -19602,1569 +20442,6 @@
     <p:extLst>
       <p:ext uri="{BB962C8B-B14F-4D97-AF65-F5344CB8AC3E}">
         <p14:creationId xmlns:p14="http://schemas.microsoft.com/office/powerpoint/2010/main" val="2636511652"/>
-      </p:ext>
-    </p:extLst>
-  </p:cSld>
-  <p:clrMapOvr>
-    <a:masterClrMapping/>
-  </p:clrMapOvr>
-</p:sld>
-</file>
-
-<file path=ppt/slides/slide30.xml><?xml version="1.0" encoding="utf-8"?>
-<p:sld xmlns:a="http://schemas.openxmlformats.org/drawingml/2006/main" xmlns:r="http://schemas.openxmlformats.org/officeDocument/2006/relationships" xmlns:p="http://schemas.openxmlformats.org/presentationml/2006/main">
-  <p:cSld>
-    <p:spTree>
-      <p:nvGrpSpPr>
-        <p:cNvPr id="1" name="">
-          <a:extLst>
-            <a:ext uri="{FF2B5EF4-FFF2-40B4-BE49-F238E27FC236}">
-              <a16:creationId xmlns:a16="http://schemas.microsoft.com/office/drawing/2014/main" id="{941FC1E0-2FFD-A509-1AF0-959A0AFC5AFE}"/>
-            </a:ext>
-          </a:extLst>
-        </p:cNvPr>
-        <p:cNvGrpSpPr/>
-        <p:nvPr/>
-      </p:nvGrpSpPr>
-      <p:grpSpPr>
-        <a:xfrm>
-          <a:off x="0" y="0"/>
-          <a:ext cx="0" cy="0"/>
-          <a:chOff x="0" y="0"/>
-          <a:chExt cx="0" cy="0"/>
-        </a:xfrm>
-      </p:grpSpPr>
-      <p:sp>
-        <p:nvSpPr>
-          <p:cNvPr id="2" name="Title 1">
-            <a:extLst>
-              <a:ext uri="{FF2B5EF4-FFF2-40B4-BE49-F238E27FC236}">
-                <a16:creationId xmlns:a16="http://schemas.microsoft.com/office/drawing/2014/main" id="{65B428A2-491C-5FCA-EF3B-F536FBDAC5CA}"/>
-              </a:ext>
-            </a:extLst>
-          </p:cNvPr>
-          <p:cNvSpPr>
-            <a:spLocks noGrp="1"/>
-          </p:cNvSpPr>
-          <p:nvPr>
-            <p:ph type="title"/>
-          </p:nvPr>
-        </p:nvSpPr>
-        <p:spPr/>
-        <p:txBody>
-          <a:bodyPr/>
-          <a:lstStyle/>
-          <a:p>
-            <a:r>
-              <a:rPr lang="en-US" noProof="0" dirty="0"/>
-              <a:t>LLMs and abstractions</a:t>
-            </a:r>
-          </a:p>
-        </p:txBody>
-      </p:sp>
-      <p:pic>
-        <p:nvPicPr>
-          <p:cNvPr id="8" name="Picture 7">
-            <a:extLst>
-              <a:ext uri="{FF2B5EF4-FFF2-40B4-BE49-F238E27FC236}">
-                <a16:creationId xmlns:a16="http://schemas.microsoft.com/office/drawing/2014/main" id="{6BEAAA05-114E-208D-DFDE-367639786C54}"/>
-              </a:ext>
-            </a:extLst>
-          </p:cNvPr>
-          <p:cNvPicPr>
-            <a:picLocks noChangeAspect="1"/>
-          </p:cNvPicPr>
-          <p:nvPr/>
-        </p:nvPicPr>
-        <p:blipFill>
-          <a:blip r:embed="rId3"/>
-          <a:stretch>
-            <a:fillRect/>
-          </a:stretch>
-        </p:blipFill>
-        <p:spPr>
-          <a:xfrm>
-            <a:off x="4894948" y="1912727"/>
-            <a:ext cx="6725589" cy="2229161"/>
-          </a:xfrm>
-          <a:prstGeom prst="rect">
-            <a:avLst/>
-          </a:prstGeom>
-        </p:spPr>
-      </p:pic>
-      <p:pic>
-        <p:nvPicPr>
-          <p:cNvPr id="10" name="Picture 9">
-            <a:extLst>
-              <a:ext uri="{FF2B5EF4-FFF2-40B4-BE49-F238E27FC236}">
-                <a16:creationId xmlns:a16="http://schemas.microsoft.com/office/drawing/2014/main" id="{379CBEDB-3399-E476-B2E1-91035860BDD2}"/>
-              </a:ext>
-            </a:extLst>
-          </p:cNvPr>
-          <p:cNvPicPr>
-            <a:picLocks noChangeAspect="1"/>
-          </p:cNvPicPr>
-          <p:nvPr/>
-        </p:nvPicPr>
-        <p:blipFill>
-          <a:blip r:embed="rId4"/>
-          <a:stretch>
-            <a:fillRect/>
-          </a:stretch>
-        </p:blipFill>
-        <p:spPr>
-          <a:xfrm>
-            <a:off x="5161686" y="4677223"/>
-            <a:ext cx="6192114" cy="1286054"/>
-          </a:xfrm>
-          <a:prstGeom prst="rect">
-            <a:avLst/>
-          </a:prstGeom>
-        </p:spPr>
-      </p:pic>
-      <p:sp>
-        <p:nvSpPr>
-          <p:cNvPr id="11" name="TextBox 10">
-            <a:extLst>
-              <a:ext uri="{FF2B5EF4-FFF2-40B4-BE49-F238E27FC236}">
-                <a16:creationId xmlns:a16="http://schemas.microsoft.com/office/drawing/2014/main" id="{6C8FEF91-6DF2-D9C1-3C7C-927FC8555CBE}"/>
-              </a:ext>
-            </a:extLst>
-          </p:cNvPr>
-          <p:cNvSpPr txBox="1"/>
-          <p:nvPr/>
-        </p:nvSpPr>
-        <p:spPr>
-          <a:xfrm>
-            <a:off x="9915828" y="1530781"/>
-            <a:ext cx="2036455" cy="369332"/>
-          </a:xfrm>
-          <a:prstGeom prst="rect">
-            <a:avLst/>
-          </a:prstGeom>
-          <a:noFill/>
-        </p:spPr>
-        <p:txBody>
-          <a:bodyPr wrap="none" rtlCol="0">
-            <a:spAutoFit/>
-          </a:bodyPr>
-          <a:lstStyle/>
-          <a:p>
-            <a:r>
-              <a:rPr lang="en-US" dirty="0"/>
-              <a:t>Which result best?</a:t>
-            </a:r>
-          </a:p>
-        </p:txBody>
-      </p:sp>
-      <p:sp>
-        <p:nvSpPr>
-          <p:cNvPr id="13" name="TextBox 12">
-            <a:extLst>
-              <a:ext uri="{FF2B5EF4-FFF2-40B4-BE49-F238E27FC236}">
-                <a16:creationId xmlns:a16="http://schemas.microsoft.com/office/drawing/2014/main" id="{13079C7E-EBE6-48C6-EAFC-9F6D960ED3AA}"/>
-              </a:ext>
-            </a:extLst>
-          </p:cNvPr>
-          <p:cNvSpPr txBox="1"/>
-          <p:nvPr/>
-        </p:nvSpPr>
-        <p:spPr>
-          <a:xfrm>
-            <a:off x="8567916" y="4082521"/>
-            <a:ext cx="2256387" cy="369332"/>
-          </a:xfrm>
-          <a:prstGeom prst="rect">
-            <a:avLst/>
-          </a:prstGeom>
-          <a:noFill/>
-        </p:spPr>
-        <p:txBody>
-          <a:bodyPr wrap="none" rtlCol="0">
-            <a:spAutoFit/>
-          </a:bodyPr>
-          <a:lstStyle/>
-          <a:p>
-            <a:r>
-              <a:rPr lang="en-US" dirty="0"/>
-              <a:t>What prompt to use?</a:t>
-            </a:r>
-          </a:p>
-        </p:txBody>
-      </p:sp>
-      <p:sp>
-        <p:nvSpPr>
-          <p:cNvPr id="15" name="TextBox 14">
-            <a:extLst>
-              <a:ext uri="{FF2B5EF4-FFF2-40B4-BE49-F238E27FC236}">
-                <a16:creationId xmlns:a16="http://schemas.microsoft.com/office/drawing/2014/main" id="{7DBBF6DB-A3F4-9BDA-784B-07863D703169}"/>
-              </a:ext>
-            </a:extLst>
-          </p:cNvPr>
-          <p:cNvSpPr txBox="1"/>
-          <p:nvPr/>
-        </p:nvSpPr>
-        <p:spPr>
-          <a:xfrm>
-            <a:off x="6252538" y="6003981"/>
-            <a:ext cx="3840218" cy="369332"/>
-          </a:xfrm>
-          <a:prstGeom prst="rect">
-            <a:avLst/>
-          </a:prstGeom>
-          <a:noFill/>
-        </p:spPr>
-        <p:txBody>
-          <a:bodyPr wrap="none" rtlCol="0">
-            <a:spAutoFit/>
-          </a:bodyPr>
-          <a:lstStyle/>
-          <a:p>
-            <a:r>
-              <a:rPr lang="en-US" dirty="0"/>
-              <a:t>Split the optimization into two steps?</a:t>
-            </a:r>
-          </a:p>
-        </p:txBody>
-      </p:sp>
-      <p:sp>
-        <p:nvSpPr>
-          <p:cNvPr id="16" name="Rectangle 15">
-            <a:extLst>
-              <a:ext uri="{FF2B5EF4-FFF2-40B4-BE49-F238E27FC236}">
-                <a16:creationId xmlns:a16="http://schemas.microsoft.com/office/drawing/2014/main" id="{6BB90353-381A-4006-0220-9E9CA9C30D3B}"/>
-              </a:ext>
-            </a:extLst>
-          </p:cNvPr>
-          <p:cNvSpPr/>
-          <p:nvPr/>
-        </p:nvSpPr>
-        <p:spPr>
-          <a:xfrm>
-            <a:off x="2794082" y="1377392"/>
-            <a:ext cx="2100866" cy="716096"/>
-          </a:xfrm>
-          <a:prstGeom prst="rect">
-            <a:avLst/>
-          </a:prstGeom>
-        </p:spPr>
-        <p:style>
-          <a:lnRef idx="2">
-            <a:schemeClr val="accent1">
-              <a:shade val="15000"/>
-            </a:schemeClr>
-          </a:lnRef>
-          <a:fillRef idx="1">
-            <a:schemeClr val="accent1"/>
-          </a:fillRef>
-          <a:effectRef idx="0">
-            <a:schemeClr val="accent1"/>
-          </a:effectRef>
-          <a:fontRef idx="minor">
-            <a:schemeClr val="lt1"/>
-          </a:fontRef>
-        </p:style>
-        <p:txBody>
-          <a:bodyPr rtlCol="0" anchor="ctr"/>
-          <a:lstStyle/>
-          <a:p>
-            <a:pPr algn="ctr"/>
-            <a:r>
-              <a:rPr lang="en-US" dirty="0"/>
-              <a:t>Baseline</a:t>
-            </a:r>
-          </a:p>
-        </p:txBody>
-      </p:sp>
-      <p:sp>
-        <p:nvSpPr>
-          <p:cNvPr id="18" name="Rectangle 17">
-            <a:extLst>
-              <a:ext uri="{FF2B5EF4-FFF2-40B4-BE49-F238E27FC236}">
-                <a16:creationId xmlns:a16="http://schemas.microsoft.com/office/drawing/2014/main" id="{0990C0B6-58D9-15D3-CB0B-5D196176BDE0}"/>
-              </a:ext>
-            </a:extLst>
-          </p:cNvPr>
-          <p:cNvSpPr/>
-          <p:nvPr/>
-        </p:nvSpPr>
-        <p:spPr>
-          <a:xfrm>
-            <a:off x="154861" y="3407949"/>
-            <a:ext cx="2100866" cy="716096"/>
-          </a:xfrm>
-          <a:prstGeom prst="rect">
-            <a:avLst/>
-          </a:prstGeom>
-        </p:spPr>
-        <p:style>
-          <a:lnRef idx="2">
-            <a:schemeClr val="accent1">
-              <a:shade val="15000"/>
-            </a:schemeClr>
-          </a:lnRef>
-          <a:fillRef idx="1">
-            <a:schemeClr val="accent1"/>
-          </a:fillRef>
-          <a:effectRef idx="0">
-            <a:schemeClr val="accent1"/>
-          </a:effectRef>
-          <a:fontRef idx="minor">
-            <a:schemeClr val="lt1"/>
-          </a:fontRef>
-        </p:style>
-        <p:txBody>
-          <a:bodyPr rtlCol="0" anchor="ctr"/>
-          <a:lstStyle/>
-          <a:p>
-            <a:pPr algn="ctr"/>
-            <a:r>
-              <a:rPr lang="en-US" dirty="0"/>
-              <a:t>Documentation</a:t>
-            </a:r>
-            <a:br>
-              <a:rPr lang="en-US" dirty="0"/>
-            </a:br>
-            <a:r>
-              <a:rPr lang="en-US" dirty="0"/>
-              <a:t>&amp; language hints</a:t>
-            </a:r>
-          </a:p>
-        </p:txBody>
-      </p:sp>
-      <p:sp>
-        <p:nvSpPr>
-          <p:cNvPr id="20" name="Rectangle 19">
-            <a:extLst>
-              <a:ext uri="{FF2B5EF4-FFF2-40B4-BE49-F238E27FC236}">
-                <a16:creationId xmlns:a16="http://schemas.microsoft.com/office/drawing/2014/main" id="{3C98BE57-2A38-89A9-7FDE-296070049AA0}"/>
-              </a:ext>
-            </a:extLst>
-          </p:cNvPr>
-          <p:cNvSpPr/>
-          <p:nvPr/>
-        </p:nvSpPr>
-        <p:spPr>
-          <a:xfrm>
-            <a:off x="154861" y="4330022"/>
-            <a:ext cx="2100866" cy="716096"/>
-          </a:xfrm>
-          <a:prstGeom prst="rect">
-            <a:avLst/>
-          </a:prstGeom>
-        </p:spPr>
-        <p:style>
-          <a:lnRef idx="2">
-            <a:schemeClr val="accent1">
-              <a:shade val="15000"/>
-            </a:schemeClr>
-          </a:lnRef>
-          <a:fillRef idx="1">
-            <a:schemeClr val="accent1"/>
-          </a:fillRef>
-          <a:effectRef idx="0">
-            <a:schemeClr val="accent1"/>
-          </a:effectRef>
-          <a:fontRef idx="minor">
-            <a:schemeClr val="lt1"/>
-          </a:fontRef>
-        </p:style>
-        <p:txBody>
-          <a:bodyPr rtlCol="0" anchor="ctr"/>
-          <a:lstStyle/>
-          <a:p>
-            <a:pPr algn="ctr"/>
-            <a:r>
-              <a:rPr lang="en-US" dirty="0"/>
-              <a:t>Example</a:t>
-            </a:r>
-          </a:p>
-        </p:txBody>
-      </p:sp>
-      <p:sp>
-        <p:nvSpPr>
-          <p:cNvPr id="22" name="Rectangle 21">
-            <a:extLst>
-              <a:ext uri="{FF2B5EF4-FFF2-40B4-BE49-F238E27FC236}">
-                <a16:creationId xmlns:a16="http://schemas.microsoft.com/office/drawing/2014/main" id="{01DC6561-6C17-08E8-D1C2-54DD23B3B420}"/>
-              </a:ext>
-            </a:extLst>
-          </p:cNvPr>
-          <p:cNvSpPr/>
-          <p:nvPr/>
-        </p:nvSpPr>
-        <p:spPr>
-          <a:xfrm>
-            <a:off x="154861" y="2485876"/>
-            <a:ext cx="2100866" cy="716096"/>
-          </a:xfrm>
-          <a:prstGeom prst="rect">
-            <a:avLst/>
-          </a:prstGeom>
-        </p:spPr>
-        <p:style>
-          <a:lnRef idx="2">
-            <a:schemeClr val="accent6">
-              <a:shade val="15000"/>
-            </a:schemeClr>
-          </a:lnRef>
-          <a:fillRef idx="1">
-            <a:schemeClr val="accent6"/>
-          </a:fillRef>
-          <a:effectRef idx="0">
-            <a:schemeClr val="accent6"/>
-          </a:effectRef>
-          <a:fontRef idx="minor">
-            <a:schemeClr val="lt1"/>
-          </a:fontRef>
-        </p:style>
-        <p:txBody>
-          <a:bodyPr rtlCol="0" anchor="ctr"/>
-          <a:lstStyle/>
-          <a:p>
-            <a:pPr algn="ctr"/>
-            <a:r>
-              <a:rPr lang="en-US" dirty="0"/>
-              <a:t>Optimization</a:t>
-            </a:r>
-            <a:br>
-              <a:rPr lang="en-US" dirty="0"/>
-            </a:br>
-            <a:r>
-              <a:rPr lang="en-US" dirty="0"/>
-              <a:t>hints</a:t>
-            </a:r>
-          </a:p>
-        </p:txBody>
-      </p:sp>
-      <p:sp>
-        <p:nvSpPr>
-          <p:cNvPr id="24" name="Rectangle 23">
-            <a:extLst>
-              <a:ext uri="{FF2B5EF4-FFF2-40B4-BE49-F238E27FC236}">
-                <a16:creationId xmlns:a16="http://schemas.microsoft.com/office/drawing/2014/main" id="{0F4FB06D-29AA-ACC7-5573-C05802998A47}"/>
-              </a:ext>
-            </a:extLst>
-          </p:cNvPr>
-          <p:cNvSpPr/>
-          <p:nvPr/>
-        </p:nvSpPr>
-        <p:spPr>
-          <a:xfrm>
-            <a:off x="2783437" y="5776779"/>
-            <a:ext cx="2100866" cy="716096"/>
-          </a:xfrm>
-          <a:prstGeom prst="rect">
-            <a:avLst/>
-          </a:prstGeom>
-        </p:spPr>
-        <p:style>
-          <a:lnRef idx="2">
-            <a:schemeClr val="accent2">
-              <a:shade val="15000"/>
-            </a:schemeClr>
-          </a:lnRef>
-          <a:fillRef idx="1">
-            <a:schemeClr val="accent2"/>
-          </a:fillRef>
-          <a:effectRef idx="0">
-            <a:schemeClr val="accent2"/>
-          </a:effectRef>
-          <a:fontRef idx="minor">
-            <a:schemeClr val="lt1"/>
-          </a:fontRef>
-        </p:style>
-        <p:txBody>
-          <a:bodyPr rtlCol="0" anchor="ctr"/>
-          <a:lstStyle/>
-          <a:p>
-            <a:pPr algn="ctr"/>
-            <a:r>
-              <a:rPr lang="en-US" dirty="0"/>
-              <a:t>Optimized</a:t>
-            </a:r>
-          </a:p>
-        </p:txBody>
-      </p:sp>
-      <p:sp>
-        <p:nvSpPr>
-          <p:cNvPr id="26" name="Right Brace 25">
-            <a:extLst>
-              <a:ext uri="{FF2B5EF4-FFF2-40B4-BE49-F238E27FC236}">
-                <a16:creationId xmlns:a16="http://schemas.microsoft.com/office/drawing/2014/main" id="{119D77B4-5A36-5A3B-B93D-EE6AB9478E3C}"/>
-              </a:ext>
-            </a:extLst>
-          </p:cNvPr>
-          <p:cNvSpPr/>
-          <p:nvPr/>
-        </p:nvSpPr>
-        <p:spPr>
-          <a:xfrm>
-            <a:off x="2335576" y="2485876"/>
-            <a:ext cx="649995" cy="2713331"/>
-          </a:xfrm>
-          <a:prstGeom prst="rightBrace">
-            <a:avLst/>
-          </a:prstGeom>
-        </p:spPr>
-        <p:style>
-          <a:lnRef idx="2">
-            <a:schemeClr val="accent1"/>
-          </a:lnRef>
-          <a:fillRef idx="0">
-            <a:schemeClr val="accent1"/>
-          </a:fillRef>
-          <a:effectRef idx="1">
-            <a:schemeClr val="accent1"/>
-          </a:effectRef>
-          <a:fontRef idx="minor">
-            <a:schemeClr val="tx1"/>
-          </a:fontRef>
-        </p:style>
-        <p:txBody>
-          <a:bodyPr rtlCol="0" anchor="ctr"/>
-          <a:lstStyle/>
-          <a:p>
-            <a:pPr algn="ctr"/>
-            <a:endParaRPr lang="en-US"/>
-          </a:p>
-        </p:txBody>
-      </p:sp>
-      <p:cxnSp>
-        <p:nvCxnSpPr>
-          <p:cNvPr id="28" name="Straight Arrow Connector 27">
-            <a:extLst>
-              <a:ext uri="{FF2B5EF4-FFF2-40B4-BE49-F238E27FC236}">
-                <a16:creationId xmlns:a16="http://schemas.microsoft.com/office/drawing/2014/main" id="{D64A32AA-01B4-1559-9337-81C50A0E8F3B}"/>
-              </a:ext>
-            </a:extLst>
-          </p:cNvPr>
-          <p:cNvCxnSpPr>
-            <a:cxnSpLocks/>
-          </p:cNvCxnSpPr>
-          <p:nvPr/>
-        </p:nvCxnSpPr>
-        <p:spPr>
-          <a:xfrm>
-            <a:off x="3833870" y="2335576"/>
-            <a:ext cx="0" cy="1093424"/>
-          </a:xfrm>
-          <a:prstGeom prst="straightConnector1">
-            <a:avLst/>
-          </a:prstGeom>
-          <a:ln>
-            <a:tailEnd type="triangle"/>
-          </a:ln>
-        </p:spPr>
-        <p:style>
-          <a:lnRef idx="2">
-            <a:schemeClr val="accent1"/>
-          </a:lnRef>
-          <a:fillRef idx="0">
-            <a:schemeClr val="accent1"/>
-          </a:fillRef>
-          <a:effectRef idx="1">
-            <a:schemeClr val="accent1"/>
-          </a:effectRef>
-          <a:fontRef idx="minor">
-            <a:schemeClr val="tx1"/>
-          </a:fontRef>
-        </p:style>
-      </p:cxnSp>
-      <p:cxnSp>
-        <p:nvCxnSpPr>
-          <p:cNvPr id="29" name="Straight Arrow Connector 28">
-            <a:extLst>
-              <a:ext uri="{FF2B5EF4-FFF2-40B4-BE49-F238E27FC236}">
-                <a16:creationId xmlns:a16="http://schemas.microsoft.com/office/drawing/2014/main" id="{A60EB943-7476-58D7-D62F-785FE459D2DD}"/>
-              </a:ext>
-            </a:extLst>
-          </p:cNvPr>
-          <p:cNvCxnSpPr/>
-          <p:nvPr/>
-        </p:nvCxnSpPr>
-        <p:spPr>
-          <a:xfrm>
-            <a:off x="3843051" y="4396123"/>
-            <a:ext cx="0" cy="1299990"/>
-          </a:xfrm>
-          <a:prstGeom prst="straightConnector1">
-            <a:avLst/>
-          </a:prstGeom>
-          <a:ln>
-            <a:tailEnd type="triangle"/>
-          </a:ln>
-        </p:spPr>
-        <p:style>
-          <a:lnRef idx="2">
-            <a:schemeClr val="accent1"/>
-          </a:lnRef>
-          <a:fillRef idx="0">
-            <a:schemeClr val="accent1"/>
-          </a:fillRef>
-          <a:effectRef idx="1">
-            <a:schemeClr val="accent1"/>
-          </a:effectRef>
-          <a:fontRef idx="minor">
-            <a:schemeClr val="tx1"/>
-          </a:fontRef>
-        </p:style>
-      </p:cxnSp>
-      <p:sp>
-        <p:nvSpPr>
-          <p:cNvPr id="31" name="Oval 30">
-            <a:extLst>
-              <a:ext uri="{FF2B5EF4-FFF2-40B4-BE49-F238E27FC236}">
-                <a16:creationId xmlns:a16="http://schemas.microsoft.com/office/drawing/2014/main" id="{4FED10ED-91FE-8EF9-51E0-AC558579369F}"/>
-              </a:ext>
-            </a:extLst>
-          </p:cNvPr>
-          <p:cNvSpPr/>
-          <p:nvPr/>
-        </p:nvSpPr>
-        <p:spPr>
-          <a:xfrm>
-            <a:off x="3183503" y="3609689"/>
-            <a:ext cx="1322024" cy="728725"/>
-          </a:xfrm>
-          <a:prstGeom prst="ellipse">
-            <a:avLst/>
-          </a:prstGeom>
-        </p:spPr>
-        <p:style>
-          <a:lnRef idx="2">
-            <a:schemeClr val="accent1">
-              <a:shade val="15000"/>
-            </a:schemeClr>
-          </a:lnRef>
-          <a:fillRef idx="1">
-            <a:schemeClr val="accent1"/>
-          </a:fillRef>
-          <a:effectRef idx="0">
-            <a:schemeClr val="accent1"/>
-          </a:effectRef>
-          <a:fontRef idx="minor">
-            <a:schemeClr val="lt1"/>
-          </a:fontRef>
-        </p:style>
-        <p:txBody>
-          <a:bodyPr rtlCol="0" anchor="ctr"/>
-          <a:lstStyle/>
-          <a:p>
-            <a:pPr algn="ctr"/>
-            <a:r>
-              <a:rPr lang="en-US" dirty="0"/>
-              <a:t>LLM</a:t>
-            </a:r>
-          </a:p>
-        </p:txBody>
-      </p:sp>
-    </p:spTree>
-    <p:extLst>
-      <p:ext uri="{BB962C8B-B14F-4D97-AF65-F5344CB8AC3E}">
-        <p14:creationId xmlns:p14="http://schemas.microsoft.com/office/powerpoint/2010/main" val="2135555303"/>
-      </p:ext>
-    </p:extLst>
-  </p:cSld>
-  <p:clrMapOvr>
-    <a:masterClrMapping/>
-  </p:clrMapOvr>
-</p:sld>
-</file>
-
-<file path=ppt/slides/slide31.xml><?xml version="1.0" encoding="utf-8"?>
-<p:sld xmlns:a="http://schemas.openxmlformats.org/drawingml/2006/main" xmlns:r="http://schemas.openxmlformats.org/officeDocument/2006/relationships" xmlns:p="http://schemas.openxmlformats.org/presentationml/2006/main" show="0">
-  <p:cSld>
-    <p:spTree>
-      <p:nvGrpSpPr>
-        <p:cNvPr id="1" name=""/>
-        <p:cNvGrpSpPr/>
-        <p:nvPr/>
-      </p:nvGrpSpPr>
-      <p:grpSpPr>
-        <a:xfrm>
-          <a:off x="0" y="0"/>
-          <a:ext cx="0" cy="0"/>
-          <a:chOff x="0" y="0"/>
-          <a:chExt cx="0" cy="0"/>
-        </a:xfrm>
-      </p:grpSpPr>
-      <p:sp>
-        <p:nvSpPr>
-          <p:cNvPr id="2" name="Title 1">
-            <a:extLst>
-              <a:ext uri="{FF2B5EF4-FFF2-40B4-BE49-F238E27FC236}">
-                <a16:creationId xmlns:a16="http://schemas.microsoft.com/office/drawing/2014/main" id="{928BD501-0287-7E9D-6C52-A86B98F9EB52}"/>
-              </a:ext>
-            </a:extLst>
-          </p:cNvPr>
-          <p:cNvSpPr>
-            <a:spLocks noGrp="1"/>
-          </p:cNvSpPr>
-          <p:nvPr>
-            <p:ph type="title"/>
-          </p:nvPr>
-        </p:nvSpPr>
-        <p:spPr/>
-        <p:txBody>
-          <a:bodyPr/>
-          <a:lstStyle/>
-          <a:p>
-            <a:r>
-              <a:rPr lang="en-US" noProof="0" dirty="0" err="1"/>
-              <a:t>Zahodit</a:t>
-            </a:r>
-            <a:endParaRPr lang="en-US" noProof="0" dirty="0"/>
-          </a:p>
-        </p:txBody>
-      </p:sp>
-      <p:sp>
-        <p:nvSpPr>
-          <p:cNvPr id="3" name="Content Placeholder 2">
-            <a:extLst>
-              <a:ext uri="{FF2B5EF4-FFF2-40B4-BE49-F238E27FC236}">
-                <a16:creationId xmlns:a16="http://schemas.microsoft.com/office/drawing/2014/main" id="{369E5D67-EA03-A5CA-2D82-199F178CE89C}"/>
-              </a:ext>
-            </a:extLst>
-          </p:cNvPr>
-          <p:cNvSpPr>
-            <a:spLocks noGrp="1"/>
-          </p:cNvSpPr>
-          <p:nvPr>
-            <p:ph idx="1"/>
-          </p:nvPr>
-        </p:nvSpPr>
-        <p:spPr/>
-        <p:txBody>
-          <a:bodyPr/>
-          <a:lstStyle/>
-          <a:p>
-            <a:r>
-              <a:rPr lang="en-US" noProof="0" dirty="0" err="1"/>
-              <a:t>Noarr</a:t>
-            </a:r>
-            <a:endParaRPr lang="en-US" noProof="0" dirty="0"/>
-          </a:p>
-          <a:p>
-            <a:r>
-              <a:rPr lang="en-US" noProof="0" dirty="0" err="1"/>
-              <a:t>Cellato</a:t>
-            </a:r>
-            <a:endParaRPr lang="en-US" noProof="0" dirty="0"/>
-          </a:p>
-        </p:txBody>
-      </p:sp>
-    </p:spTree>
-    <p:extLst>
-      <p:ext uri="{BB962C8B-B14F-4D97-AF65-F5344CB8AC3E}">
-        <p14:creationId xmlns:p14="http://schemas.microsoft.com/office/powerpoint/2010/main" val="4085122203"/>
-      </p:ext>
-    </p:extLst>
-  </p:cSld>
-  <p:clrMapOvr>
-    <a:masterClrMapping/>
-  </p:clrMapOvr>
-</p:sld>
-</file>
-
-<file path=ppt/slides/slide32.xml><?xml version="1.0" encoding="utf-8"?>
-<p:sld xmlns:a="http://schemas.openxmlformats.org/drawingml/2006/main" xmlns:r="http://schemas.openxmlformats.org/officeDocument/2006/relationships" xmlns:p="http://schemas.openxmlformats.org/presentationml/2006/main">
-  <p:cSld>
-    <p:spTree>
-      <p:nvGrpSpPr>
-        <p:cNvPr id="1" name=""/>
-        <p:cNvGrpSpPr/>
-        <p:nvPr/>
-      </p:nvGrpSpPr>
-      <p:grpSpPr>
-        <a:xfrm>
-          <a:off x="0" y="0"/>
-          <a:ext cx="0" cy="0"/>
-          <a:chOff x="0" y="0"/>
-          <a:chExt cx="0" cy="0"/>
-        </a:xfrm>
-      </p:grpSpPr>
-      <p:sp>
-        <p:nvSpPr>
-          <p:cNvPr id="2" name="Title 1">
-            <a:extLst>
-              <a:ext uri="{FF2B5EF4-FFF2-40B4-BE49-F238E27FC236}">
-                <a16:creationId xmlns:a16="http://schemas.microsoft.com/office/drawing/2014/main" id="{6447B745-9B50-DD90-5161-BD2A06CEA44B}"/>
-              </a:ext>
-            </a:extLst>
-          </p:cNvPr>
-          <p:cNvSpPr>
-            <a:spLocks noGrp="1"/>
-          </p:cNvSpPr>
-          <p:nvPr>
-            <p:ph type="title"/>
-          </p:nvPr>
-        </p:nvSpPr>
-        <p:spPr/>
-        <p:txBody>
-          <a:bodyPr/>
-          <a:lstStyle/>
-          <a:p>
-            <a:r>
-              <a:rPr lang="en-US" noProof="0" dirty="0"/>
-              <a:t>Contribution map</a:t>
-            </a:r>
-          </a:p>
-        </p:txBody>
-      </p:sp>
-      <p:sp>
-        <p:nvSpPr>
-          <p:cNvPr id="5" name="Rectangle 4">
-            <a:extLst>
-              <a:ext uri="{FF2B5EF4-FFF2-40B4-BE49-F238E27FC236}">
-                <a16:creationId xmlns:a16="http://schemas.microsoft.com/office/drawing/2014/main" id="{CB7F8197-FC2F-9C2A-050C-CCCB46D86C79}"/>
-              </a:ext>
-            </a:extLst>
-          </p:cNvPr>
-          <p:cNvSpPr/>
-          <p:nvPr/>
-        </p:nvSpPr>
-        <p:spPr>
-          <a:xfrm>
-            <a:off x="4240490" y="1406732"/>
-            <a:ext cx="3711020" cy="914400"/>
-          </a:xfrm>
-          <a:prstGeom prst="rect">
-            <a:avLst/>
-          </a:prstGeom>
-        </p:spPr>
-        <p:style>
-          <a:lnRef idx="2">
-            <a:schemeClr val="accent1">
-              <a:shade val="15000"/>
-            </a:schemeClr>
-          </a:lnRef>
-          <a:fillRef idx="1">
-            <a:schemeClr val="accent1"/>
-          </a:fillRef>
-          <a:effectRef idx="0">
-            <a:schemeClr val="accent1"/>
-          </a:effectRef>
-          <a:fontRef idx="minor">
-            <a:schemeClr val="lt1"/>
-          </a:fontRef>
-        </p:style>
-        <p:txBody>
-          <a:bodyPr rtlCol="0" anchor="ctr"/>
-          <a:lstStyle/>
-          <a:p>
-            <a:pPr algn="ctr"/>
-            <a:r>
-              <a:rPr lang="en-US" noProof="0" dirty="0"/>
-              <a:t>Separate algorithm design from performance optimization</a:t>
-            </a:r>
-          </a:p>
-        </p:txBody>
-      </p:sp>
-      <p:sp>
-        <p:nvSpPr>
-          <p:cNvPr id="7" name="Rectangle 6">
-            <a:extLst>
-              <a:ext uri="{FF2B5EF4-FFF2-40B4-BE49-F238E27FC236}">
-                <a16:creationId xmlns:a16="http://schemas.microsoft.com/office/drawing/2014/main" id="{60EC2A1A-B720-84BC-76D5-4751C09EA61A}"/>
-              </a:ext>
-            </a:extLst>
-          </p:cNvPr>
-          <p:cNvSpPr/>
-          <p:nvPr/>
-        </p:nvSpPr>
-        <p:spPr>
-          <a:xfrm>
-            <a:off x="150074" y="2971800"/>
-            <a:ext cx="3711020" cy="914400"/>
-          </a:xfrm>
-          <a:prstGeom prst="rect">
-            <a:avLst/>
-          </a:prstGeom>
-        </p:spPr>
-        <p:style>
-          <a:lnRef idx="2">
-            <a:schemeClr val="accent1">
-              <a:shade val="15000"/>
-            </a:schemeClr>
-          </a:lnRef>
-          <a:fillRef idx="1">
-            <a:schemeClr val="accent1"/>
-          </a:fillRef>
-          <a:effectRef idx="0">
-            <a:schemeClr val="accent1"/>
-          </a:effectRef>
-          <a:fontRef idx="minor">
-            <a:schemeClr val="lt1"/>
-          </a:fontRef>
-        </p:style>
-        <p:txBody>
-          <a:bodyPr rtlCol="0" anchor="ctr"/>
-          <a:lstStyle/>
-          <a:p>
-            <a:pPr algn="ctr"/>
-            <a:r>
-              <a:rPr lang="en-US" noProof="0" dirty="0"/>
-              <a:t>Layout- and traversal-agnostic abstractions</a:t>
-            </a:r>
-          </a:p>
-        </p:txBody>
-      </p:sp>
-      <p:sp>
-        <p:nvSpPr>
-          <p:cNvPr id="9" name="Rectangle 8">
-            <a:extLst>
-              <a:ext uri="{FF2B5EF4-FFF2-40B4-BE49-F238E27FC236}">
-                <a16:creationId xmlns:a16="http://schemas.microsoft.com/office/drawing/2014/main" id="{6DB7F776-4EDC-09F4-F04A-E586FC4B4500}"/>
-              </a:ext>
-            </a:extLst>
-          </p:cNvPr>
-          <p:cNvSpPr/>
-          <p:nvPr/>
-        </p:nvSpPr>
-        <p:spPr>
-          <a:xfrm>
-            <a:off x="7840178" y="2971800"/>
-            <a:ext cx="3711020" cy="914400"/>
-          </a:xfrm>
-          <a:prstGeom prst="rect">
-            <a:avLst/>
-          </a:prstGeom>
-        </p:spPr>
-        <p:style>
-          <a:lnRef idx="2">
-            <a:schemeClr val="accent1">
-              <a:shade val="15000"/>
-            </a:schemeClr>
-          </a:lnRef>
-          <a:fillRef idx="1">
-            <a:schemeClr val="accent1"/>
-          </a:fillRef>
-          <a:effectRef idx="0">
-            <a:schemeClr val="accent1"/>
-          </a:effectRef>
-          <a:fontRef idx="minor">
-            <a:schemeClr val="lt1"/>
-          </a:fontRef>
-        </p:style>
-        <p:txBody>
-          <a:bodyPr rtlCol="0" anchor="ctr"/>
-          <a:lstStyle/>
-          <a:p>
-            <a:pPr algn="ctr"/>
-            <a:r>
-              <a:rPr lang="en-US" noProof="0" dirty="0"/>
-              <a:t>LLM-assisted optimization</a:t>
-            </a:r>
-          </a:p>
-        </p:txBody>
-      </p:sp>
-      <p:sp>
-        <p:nvSpPr>
-          <p:cNvPr id="11" name="Rectangle 10">
-            <a:extLst>
-              <a:ext uri="{FF2B5EF4-FFF2-40B4-BE49-F238E27FC236}">
-                <a16:creationId xmlns:a16="http://schemas.microsoft.com/office/drawing/2014/main" id="{5B2B9BCB-5805-C1F1-AF45-681B37E6B83E}"/>
-              </a:ext>
-            </a:extLst>
-          </p:cNvPr>
-          <p:cNvSpPr/>
-          <p:nvPr/>
-        </p:nvSpPr>
-        <p:spPr>
-          <a:xfrm>
-            <a:off x="150074" y="4252912"/>
-            <a:ext cx="3711020" cy="914400"/>
-          </a:xfrm>
-          <a:prstGeom prst="rect">
-            <a:avLst/>
-          </a:prstGeom>
-        </p:spPr>
-        <p:style>
-          <a:lnRef idx="2">
-            <a:schemeClr val="accent1">
-              <a:shade val="15000"/>
-            </a:schemeClr>
-          </a:lnRef>
-          <a:fillRef idx="1">
-            <a:schemeClr val="accent1"/>
-          </a:fillRef>
-          <a:effectRef idx="0">
-            <a:schemeClr val="accent1"/>
-          </a:effectRef>
-          <a:fontRef idx="minor">
-            <a:schemeClr val="lt1"/>
-          </a:fontRef>
-        </p:style>
-        <p:txBody>
-          <a:bodyPr rtlCol="0" anchor="ctr"/>
-          <a:lstStyle/>
-          <a:p>
-            <a:pPr algn="ctr"/>
-            <a:r>
-              <a:rPr lang="en-US" noProof="0" dirty="0"/>
-              <a:t>Layout abstractions</a:t>
-            </a:r>
-          </a:p>
-        </p:txBody>
-      </p:sp>
-      <p:sp>
-        <p:nvSpPr>
-          <p:cNvPr id="13" name="Rectangle 12">
-            <a:extLst>
-              <a:ext uri="{FF2B5EF4-FFF2-40B4-BE49-F238E27FC236}">
-                <a16:creationId xmlns:a16="http://schemas.microsoft.com/office/drawing/2014/main" id="{31388E94-1EEB-E24E-1923-AA250880AF84}"/>
-              </a:ext>
-            </a:extLst>
-          </p:cNvPr>
-          <p:cNvSpPr/>
-          <p:nvPr/>
-        </p:nvSpPr>
-        <p:spPr>
-          <a:xfrm>
-            <a:off x="4240490" y="4252912"/>
-            <a:ext cx="3711020" cy="914400"/>
-          </a:xfrm>
-          <a:prstGeom prst="rect">
-            <a:avLst/>
-          </a:prstGeom>
-        </p:spPr>
-        <p:style>
-          <a:lnRef idx="2">
-            <a:schemeClr val="accent1">
-              <a:shade val="15000"/>
-            </a:schemeClr>
-          </a:lnRef>
-          <a:fillRef idx="1">
-            <a:schemeClr val="accent1"/>
-          </a:fillRef>
-          <a:effectRef idx="0">
-            <a:schemeClr val="accent1"/>
-          </a:effectRef>
-          <a:fontRef idx="minor">
-            <a:schemeClr val="lt1"/>
-          </a:fontRef>
-        </p:style>
-        <p:txBody>
-          <a:bodyPr rtlCol="0" anchor="ctr"/>
-          <a:lstStyle/>
-          <a:p>
-            <a:pPr algn="ctr"/>
-            <a:r>
-              <a:rPr lang="en-US" noProof="0" dirty="0"/>
-              <a:t>Traversal abstractions</a:t>
-            </a:r>
-          </a:p>
-        </p:txBody>
-      </p:sp>
-      <p:sp>
-        <p:nvSpPr>
-          <p:cNvPr id="15" name="Rectangle 14">
-            <a:extLst>
-              <a:ext uri="{FF2B5EF4-FFF2-40B4-BE49-F238E27FC236}">
-                <a16:creationId xmlns:a16="http://schemas.microsoft.com/office/drawing/2014/main" id="{DE8920A4-4430-6757-E41A-9BA9578DC80D}"/>
-              </a:ext>
-            </a:extLst>
-          </p:cNvPr>
-          <p:cNvSpPr/>
-          <p:nvPr/>
-        </p:nvSpPr>
-        <p:spPr>
-          <a:xfrm>
-            <a:off x="8330906" y="4252912"/>
-            <a:ext cx="3711020" cy="914400"/>
-          </a:xfrm>
-          <a:prstGeom prst="rect">
-            <a:avLst/>
-          </a:prstGeom>
-        </p:spPr>
-        <p:style>
-          <a:lnRef idx="2">
-            <a:schemeClr val="accent1">
-              <a:shade val="15000"/>
-            </a:schemeClr>
-          </a:lnRef>
-          <a:fillRef idx="1">
-            <a:schemeClr val="accent1"/>
-          </a:fillRef>
-          <a:effectRef idx="0">
-            <a:schemeClr val="accent1"/>
-          </a:effectRef>
-          <a:fontRef idx="minor">
-            <a:schemeClr val="lt1"/>
-          </a:fontRef>
-        </p:style>
-        <p:txBody>
-          <a:bodyPr rtlCol="0" anchor="ctr"/>
-          <a:lstStyle/>
-          <a:p>
-            <a:pPr algn="ctr"/>
-            <a:r>
-              <a:rPr lang="en-US" noProof="0" dirty="0"/>
-              <a:t>Practical aspects</a:t>
-            </a:r>
-          </a:p>
-        </p:txBody>
-      </p:sp>
-      <p:sp>
-        <p:nvSpPr>
-          <p:cNvPr id="17" name="Rectangle 16">
-            <a:extLst>
-              <a:ext uri="{FF2B5EF4-FFF2-40B4-BE49-F238E27FC236}">
-                <a16:creationId xmlns:a16="http://schemas.microsoft.com/office/drawing/2014/main" id="{D01E75A2-333B-DF95-544C-0ACF1B88882C}"/>
-              </a:ext>
-            </a:extLst>
-          </p:cNvPr>
-          <p:cNvSpPr/>
-          <p:nvPr/>
-        </p:nvSpPr>
-        <p:spPr>
-          <a:xfrm>
-            <a:off x="302474" y="5356288"/>
-            <a:ext cx="3711020" cy="914400"/>
-          </a:xfrm>
-          <a:prstGeom prst="rect">
-            <a:avLst/>
-          </a:prstGeom>
-        </p:spPr>
-        <p:style>
-          <a:lnRef idx="2">
-            <a:schemeClr val="accent1">
-              <a:shade val="15000"/>
-            </a:schemeClr>
-          </a:lnRef>
-          <a:fillRef idx="1">
-            <a:schemeClr val="accent1"/>
-          </a:fillRef>
-          <a:effectRef idx="0">
-            <a:schemeClr val="accent1"/>
-          </a:effectRef>
-          <a:fontRef idx="minor">
-            <a:schemeClr val="lt1"/>
-          </a:fontRef>
-        </p:style>
-        <p:txBody>
-          <a:bodyPr rtlCol="0" anchor="ctr"/>
-          <a:lstStyle/>
-          <a:p>
-            <a:pPr algn="ctr"/>
-            <a:r>
-              <a:rPr lang="en-US" noProof="0" dirty="0" err="1"/>
-              <a:t>Noarr</a:t>
-            </a:r>
-            <a:r>
-              <a:rPr lang="en-US" noProof="0" dirty="0"/>
-              <a:t> structures</a:t>
-            </a:r>
-          </a:p>
-        </p:txBody>
-      </p:sp>
-      <p:sp>
-        <p:nvSpPr>
-          <p:cNvPr id="19" name="Rectangle 18">
-            <a:extLst>
-              <a:ext uri="{FF2B5EF4-FFF2-40B4-BE49-F238E27FC236}">
-                <a16:creationId xmlns:a16="http://schemas.microsoft.com/office/drawing/2014/main" id="{67736357-2F90-D241-51F6-C03C797EFFC2}"/>
-              </a:ext>
-            </a:extLst>
-          </p:cNvPr>
-          <p:cNvSpPr/>
-          <p:nvPr/>
-        </p:nvSpPr>
-        <p:spPr>
-          <a:xfrm>
-            <a:off x="454874" y="5508688"/>
-            <a:ext cx="3711020" cy="914400"/>
-          </a:xfrm>
-          <a:prstGeom prst="rect">
-            <a:avLst/>
-          </a:prstGeom>
-        </p:spPr>
-        <p:style>
-          <a:lnRef idx="2">
-            <a:schemeClr val="accent1">
-              <a:shade val="15000"/>
-            </a:schemeClr>
-          </a:lnRef>
-          <a:fillRef idx="1">
-            <a:schemeClr val="accent1"/>
-          </a:fillRef>
-          <a:effectRef idx="0">
-            <a:schemeClr val="accent1"/>
-          </a:effectRef>
-          <a:fontRef idx="minor">
-            <a:schemeClr val="lt1"/>
-          </a:fontRef>
-        </p:style>
-        <p:txBody>
-          <a:bodyPr rtlCol="0" anchor="ctr"/>
-          <a:lstStyle/>
-          <a:p>
-            <a:pPr algn="ctr"/>
-            <a:r>
-              <a:rPr lang="en-US" noProof="0" dirty="0" err="1"/>
-              <a:t>Noarr</a:t>
-            </a:r>
-            <a:r>
-              <a:rPr lang="en-US" noProof="0" dirty="0"/>
-              <a:t> traversers</a:t>
-            </a:r>
-          </a:p>
-        </p:txBody>
-      </p:sp>
-      <p:sp>
-        <p:nvSpPr>
-          <p:cNvPr id="21" name="Rectangle 20">
-            <a:extLst>
-              <a:ext uri="{FF2B5EF4-FFF2-40B4-BE49-F238E27FC236}">
-                <a16:creationId xmlns:a16="http://schemas.microsoft.com/office/drawing/2014/main" id="{9EC73339-8B3D-25F4-18D5-E5821CB7CE8B}"/>
-              </a:ext>
-            </a:extLst>
-          </p:cNvPr>
-          <p:cNvSpPr/>
-          <p:nvPr/>
-        </p:nvSpPr>
-        <p:spPr>
-          <a:xfrm>
-            <a:off x="607274" y="5661088"/>
-            <a:ext cx="3711020" cy="914400"/>
-          </a:xfrm>
-          <a:prstGeom prst="rect">
-            <a:avLst/>
-          </a:prstGeom>
-        </p:spPr>
-        <p:style>
-          <a:lnRef idx="2">
-            <a:schemeClr val="accent1">
-              <a:shade val="15000"/>
-            </a:schemeClr>
-          </a:lnRef>
-          <a:fillRef idx="1">
-            <a:schemeClr val="accent1"/>
-          </a:fillRef>
-          <a:effectRef idx="0">
-            <a:schemeClr val="accent1"/>
-          </a:effectRef>
-          <a:fontRef idx="minor">
-            <a:schemeClr val="lt1"/>
-          </a:fontRef>
-        </p:style>
-        <p:txBody>
-          <a:bodyPr rtlCol="0" anchor="ctr"/>
-          <a:lstStyle/>
-          <a:p>
-            <a:pPr algn="ctr"/>
-            <a:r>
-              <a:rPr lang="en-US" noProof="0" dirty="0" err="1"/>
-              <a:t>Noarr</a:t>
-            </a:r>
-            <a:r>
-              <a:rPr lang="en-US" noProof="0" dirty="0"/>
-              <a:t> tuning</a:t>
-            </a:r>
-          </a:p>
-        </p:txBody>
-      </p:sp>
-      <p:sp>
-        <p:nvSpPr>
-          <p:cNvPr id="23" name="Rectangle 22">
-            <a:extLst>
-              <a:ext uri="{FF2B5EF4-FFF2-40B4-BE49-F238E27FC236}">
-                <a16:creationId xmlns:a16="http://schemas.microsoft.com/office/drawing/2014/main" id="{63EC4F51-D7C0-1DFC-E94E-75AE185B7CC1}"/>
-              </a:ext>
-            </a:extLst>
-          </p:cNvPr>
-          <p:cNvSpPr/>
-          <p:nvPr/>
-        </p:nvSpPr>
-        <p:spPr>
-          <a:xfrm>
-            <a:off x="759674" y="5813488"/>
-            <a:ext cx="3711020" cy="914400"/>
-          </a:xfrm>
-          <a:prstGeom prst="rect">
-            <a:avLst/>
-          </a:prstGeom>
-        </p:spPr>
-        <p:style>
-          <a:lnRef idx="2">
-            <a:schemeClr val="accent1">
-              <a:shade val="15000"/>
-            </a:schemeClr>
-          </a:lnRef>
-          <a:fillRef idx="1">
-            <a:schemeClr val="accent1"/>
-          </a:fillRef>
-          <a:effectRef idx="0">
-            <a:schemeClr val="accent1"/>
-          </a:effectRef>
-          <a:fontRef idx="minor">
-            <a:schemeClr val="lt1"/>
-          </a:fontRef>
-        </p:style>
-        <p:txBody>
-          <a:bodyPr rtlCol="0" anchor="ctr"/>
-          <a:lstStyle/>
-          <a:p>
-            <a:pPr algn="ctr"/>
-            <a:r>
-              <a:rPr lang="en-US" noProof="0" dirty="0" err="1"/>
-              <a:t>Noarr</a:t>
-            </a:r>
-            <a:r>
-              <a:rPr lang="en-US" noProof="0" dirty="0"/>
-              <a:t>-MPI</a:t>
-            </a:r>
-          </a:p>
-        </p:txBody>
-      </p:sp>
-      <p:sp>
-        <p:nvSpPr>
-          <p:cNvPr id="25" name="Rectangle 24">
-            <a:extLst>
-              <a:ext uri="{FF2B5EF4-FFF2-40B4-BE49-F238E27FC236}">
-                <a16:creationId xmlns:a16="http://schemas.microsoft.com/office/drawing/2014/main" id="{B7D64168-E19F-C04D-293D-CB07E85D29DA}"/>
-              </a:ext>
-            </a:extLst>
-          </p:cNvPr>
-          <p:cNvSpPr/>
-          <p:nvPr/>
-        </p:nvSpPr>
-        <p:spPr>
-          <a:xfrm>
-            <a:off x="4853138" y="5424788"/>
-            <a:ext cx="3711020" cy="914400"/>
-          </a:xfrm>
-          <a:prstGeom prst="rect">
-            <a:avLst/>
-          </a:prstGeom>
-        </p:spPr>
-        <p:style>
-          <a:lnRef idx="2">
-            <a:schemeClr val="accent1">
-              <a:shade val="15000"/>
-            </a:schemeClr>
-          </a:lnRef>
-          <a:fillRef idx="1">
-            <a:schemeClr val="accent1"/>
-          </a:fillRef>
-          <a:effectRef idx="0">
-            <a:schemeClr val="accent1"/>
-          </a:effectRef>
-          <a:fontRef idx="minor">
-            <a:schemeClr val="lt1"/>
-          </a:fontRef>
-        </p:style>
-        <p:txBody>
-          <a:bodyPr rtlCol="0" anchor="ctr"/>
-          <a:lstStyle/>
-          <a:p>
-            <a:pPr algn="ctr"/>
-            <a:r>
-              <a:rPr lang="en-US" noProof="0" dirty="0" err="1"/>
-              <a:t>Cellato</a:t>
-            </a:r>
-            <a:endParaRPr lang="en-US" noProof="0" dirty="0"/>
-          </a:p>
-        </p:txBody>
-      </p:sp>
-    </p:spTree>
-    <p:extLst>
-      <p:ext uri="{BB962C8B-B14F-4D97-AF65-F5344CB8AC3E}">
-        <p14:creationId xmlns:p14="http://schemas.microsoft.com/office/powerpoint/2010/main" val="1745489699"/>
-      </p:ext>
-    </p:extLst>
-  </p:cSld>
-  <p:clrMapOvr>
-    <a:masterClrMapping/>
-  </p:clrMapOvr>
-</p:sld>
-</file>
-
-<file path=ppt/slides/slide33.xml><?xml version="1.0" encoding="utf-8"?>
-<p:sld xmlns:a="http://schemas.openxmlformats.org/drawingml/2006/main" xmlns:r="http://schemas.openxmlformats.org/officeDocument/2006/relationships" xmlns:p="http://schemas.openxmlformats.org/presentationml/2006/main" show="0">
-  <p:cSld>
-    <p:spTree>
-      <p:nvGrpSpPr>
-        <p:cNvPr id="1" name=""/>
-        <p:cNvGrpSpPr/>
-        <p:nvPr/>
-      </p:nvGrpSpPr>
-      <p:grpSpPr>
-        <a:xfrm>
-          <a:off x="0" y="0"/>
-          <a:ext cx="0" cy="0"/>
-          <a:chOff x="0" y="0"/>
-          <a:chExt cx="0" cy="0"/>
-        </a:xfrm>
-      </p:grpSpPr>
-      <p:sp>
-        <p:nvSpPr>
-          <p:cNvPr id="2" name="Title 1">
-            <a:extLst>
-              <a:ext uri="{FF2B5EF4-FFF2-40B4-BE49-F238E27FC236}">
-                <a16:creationId xmlns:a16="http://schemas.microsoft.com/office/drawing/2014/main" id="{63B07F39-5957-124B-D20D-4A155E0E07D1}"/>
-              </a:ext>
-            </a:extLst>
-          </p:cNvPr>
-          <p:cNvSpPr>
-            <a:spLocks noGrp="1"/>
-          </p:cNvSpPr>
-          <p:nvPr>
-            <p:ph type="title"/>
-          </p:nvPr>
-        </p:nvSpPr>
-        <p:spPr/>
-        <p:txBody>
-          <a:bodyPr/>
-          <a:lstStyle/>
-          <a:p>
-            <a:r>
-              <a:rPr lang="en-US" noProof="0" dirty="0"/>
-              <a:t>Summary</a:t>
-            </a:r>
-          </a:p>
-        </p:txBody>
-      </p:sp>
-      <p:sp>
-        <p:nvSpPr>
-          <p:cNvPr id="3" name="Content Placeholder 2">
-            <a:extLst>
-              <a:ext uri="{FF2B5EF4-FFF2-40B4-BE49-F238E27FC236}">
-                <a16:creationId xmlns:a16="http://schemas.microsoft.com/office/drawing/2014/main" id="{4437CB38-BBCE-B652-0445-A75C99068419}"/>
-              </a:ext>
-            </a:extLst>
-          </p:cNvPr>
-          <p:cNvSpPr>
-            <a:spLocks noGrp="1"/>
-          </p:cNvSpPr>
-          <p:nvPr>
-            <p:ph idx="1"/>
-          </p:nvPr>
-        </p:nvSpPr>
-        <p:spPr/>
-        <p:txBody>
-          <a:bodyPr/>
-          <a:lstStyle/>
-          <a:p>
-            <a:r>
-              <a:rPr lang="en-US" noProof="0" dirty="0"/>
-              <a:t>6 peer-reviewed publications </a:t>
-            </a:r>
-          </a:p>
-          <a:p>
-            <a:pPr lvl="1"/>
-            <a:r>
-              <a:rPr lang="en-US" noProof="0" dirty="0"/>
-              <a:t>2 journal articles</a:t>
-            </a:r>
-          </a:p>
-          <a:p>
-            <a:pPr lvl="1"/>
-            <a:r>
-              <a:rPr lang="en-US" noProof="0" dirty="0"/>
-              <a:t>3 conference papers,</a:t>
-            </a:r>
-          </a:p>
-          <a:p>
-            <a:pPr lvl="1"/>
-            <a:r>
-              <a:rPr lang="en-US" noProof="0" dirty="0"/>
-              <a:t>1 workshop paper</a:t>
-            </a:r>
-          </a:p>
-          <a:p>
-            <a:r>
-              <a:rPr lang="en-US" noProof="0" dirty="0"/>
-              <a:t>1 publication awaiting peer review</a:t>
-            </a:r>
-          </a:p>
-        </p:txBody>
-      </p:sp>
-    </p:spTree>
-    <p:extLst>
-      <p:ext uri="{BB962C8B-B14F-4D97-AF65-F5344CB8AC3E}">
-        <p14:creationId xmlns:p14="http://schemas.microsoft.com/office/powerpoint/2010/main" val="309417143"/>
-      </p:ext>
-    </p:extLst>
-  </p:cSld>
-  <p:clrMapOvr>
-    <a:masterClrMapping/>
-  </p:clrMapOvr>
-</p:sld>
-</file>
-
-<file path=ppt/slides/slide34.xml><?xml version="1.0" encoding="utf-8"?>
-<p:sld xmlns:a="http://schemas.openxmlformats.org/drawingml/2006/main" xmlns:r="http://schemas.openxmlformats.org/officeDocument/2006/relationships" xmlns:p="http://schemas.openxmlformats.org/presentationml/2006/main">
-  <p:cSld>
-    <p:spTree>
-      <p:nvGrpSpPr>
-        <p:cNvPr id="1" name=""/>
-        <p:cNvGrpSpPr/>
-        <p:nvPr/>
-      </p:nvGrpSpPr>
-      <p:grpSpPr>
-        <a:xfrm>
-          <a:off x="0" y="0"/>
-          <a:ext cx="0" cy="0"/>
-          <a:chOff x="0" y="0"/>
-          <a:chExt cx="0" cy="0"/>
-        </a:xfrm>
-      </p:grpSpPr>
-      <p:sp>
-        <p:nvSpPr>
-          <p:cNvPr id="2" name="Title 1">
-            <a:extLst>
-              <a:ext uri="{FF2B5EF4-FFF2-40B4-BE49-F238E27FC236}">
-                <a16:creationId xmlns:a16="http://schemas.microsoft.com/office/drawing/2014/main" id="{5EFCD7CC-C2D6-52E6-02D5-F41FC5389A5C}"/>
-              </a:ext>
-            </a:extLst>
-          </p:cNvPr>
-          <p:cNvSpPr>
-            <a:spLocks noGrp="1"/>
-          </p:cNvSpPr>
-          <p:nvPr>
-            <p:ph type="title"/>
-          </p:nvPr>
-        </p:nvSpPr>
-        <p:spPr/>
-        <p:txBody>
-          <a:bodyPr/>
-          <a:lstStyle/>
-          <a:p>
-            <a:endParaRPr lang="en-US" noProof="0" dirty="0"/>
-          </a:p>
-        </p:txBody>
-      </p:sp>
-      <p:sp>
-        <p:nvSpPr>
-          <p:cNvPr id="3" name="Content Placeholder 2">
-            <a:extLst>
-              <a:ext uri="{FF2B5EF4-FFF2-40B4-BE49-F238E27FC236}">
-                <a16:creationId xmlns:a16="http://schemas.microsoft.com/office/drawing/2014/main" id="{950373B6-1B3D-2E32-D54A-18C124620153}"/>
-              </a:ext>
-            </a:extLst>
-          </p:cNvPr>
-          <p:cNvSpPr>
-            <a:spLocks noGrp="1"/>
-          </p:cNvSpPr>
-          <p:nvPr>
-            <p:ph idx="1"/>
-          </p:nvPr>
-        </p:nvSpPr>
-        <p:spPr/>
-        <p:txBody>
-          <a:bodyPr/>
-          <a:lstStyle/>
-          <a:p>
-            <a:endParaRPr lang="en-US" noProof="0" dirty="0"/>
-          </a:p>
-        </p:txBody>
-      </p:sp>
-    </p:spTree>
-    <p:extLst>
-      <p:ext uri="{BB962C8B-B14F-4D97-AF65-F5344CB8AC3E}">
-        <p14:creationId xmlns:p14="http://schemas.microsoft.com/office/powerpoint/2010/main" val="2595384929"/>
       </p:ext>
     </p:extLst>
   </p:cSld>

--- a/slides/Optimizing Memory Layouts and Traversal Orders in High-Performance Computing.pptx
+++ b/slides/Optimizing Memory Layouts and Traversal Orders in High-Performance Computing.pptx
@@ -20,10 +20,10 @@
     <p:sldId id="278" r:id="rId11"/>
     <p:sldId id="300" r:id="rId12"/>
     <p:sldId id="286" r:id="rId13"/>
-    <p:sldId id="289" r:id="rId14"/>
-    <p:sldId id="290" r:id="rId15"/>
-    <p:sldId id="279" r:id="rId16"/>
-    <p:sldId id="287" r:id="rId17"/>
+    <p:sldId id="290" r:id="rId14"/>
+    <p:sldId id="279" r:id="rId15"/>
+    <p:sldId id="287" r:id="rId16"/>
+    <p:sldId id="301" r:id="rId17"/>
     <p:sldId id="280" r:id="rId18"/>
     <p:sldId id="295" r:id="rId19"/>
     <p:sldId id="288" r:id="rId20"/>
@@ -164,10 +164,10 @@
             <p14:sldId id="278"/>
             <p14:sldId id="300"/>
             <p14:sldId id="286"/>
-            <p14:sldId id="289"/>
             <p14:sldId id="290"/>
             <p14:sldId id="279"/>
             <p14:sldId id="287"/>
+            <p14:sldId id="301"/>
             <p14:sldId id="280"/>
           </p14:sldIdLst>
         </p14:section>
@@ -227,6 +227,9 @@
         </p15:guide>
       </p15:sldGuideLst>
     </p:ext>
+    <p:ext uri="{2D200454-40CA-4A62-9FC3-DE9A4176ACB9}">
+      <p15:notesGuideLst xmlns:p15="http://schemas.microsoft.com/office/powerpoint/2012/main"/>
+    </p:ext>
   </p:extLst>
 </p:presentation>
 </file>
@@ -313,7 +316,7 @@
           <a:p>
             <a:fld id="{34A5C982-A1C5-4AC2-B4BF-466515DA1494}" type="datetimeFigureOut">
               <a:rPr lang="en-US" smtClean="0"/>
-              <a:t>8/26/2026</a:t>
+              <a:t>8/27/2026</a:t>
             </a:fld>
             <a:endParaRPr lang="en-US"/>
           </a:p>
@@ -727,7 +730,15 @@
             </a:r>
             <a:r>
               <a:rPr lang="en-US" dirty="0"/>
-              <a:t>/C suite.</a:t>
+              <a:t>/C suite, reimplementing each algorithm using </a:t>
+            </a:r>
+            <a:r>
+              <a:rPr lang="en-US" dirty="0" err="1"/>
+              <a:t>Noarr</a:t>
+            </a:r>
+            <a:r>
+              <a:rPr lang="en-US" dirty="0"/>
+              <a:t> to confirm they do not pose any runtime overhead.</a:t>
             </a:r>
           </a:p>
           <a:p>
@@ -736,16 +747,50 @@
           <a:p>
             <a:r>
               <a:rPr lang="en-US" dirty="0"/>
-              <a:t>W have confirmed that the abstractions do not pose any runtime overhead and they keep the programming complexity in practical algorithms low enough.</a:t>
+              <a:t>The plot shows speedups of the </a:t>
+            </a:r>
+            <a:r>
+              <a:rPr lang="en-US" dirty="0" err="1"/>
+              <a:t>Noarr</a:t>
+            </a:r>
+            <a:r>
+              <a:rPr lang="en-US" dirty="0"/>
+              <a:t> </a:t>
+            </a:r>
+            <a:r>
+              <a:rPr lang="en-US" dirty="0" err="1"/>
+              <a:t>reimplementations</a:t>
+            </a:r>
+            <a:r>
+              <a:rPr lang="en-US" dirty="0"/>
+              <a:t> compared to the C baselines, most implementations perform exactly the same, showing no runtime overhead;</a:t>
+            </a:r>
+            <a:br>
+              <a:rPr lang="en-US" dirty="0"/>
+            </a:br>
+            <a:r>
+              <a:rPr lang="en-US" dirty="0"/>
+              <a:t>there are few minor outliers introduced by differences in compiler optimizations.</a:t>
             </a:r>
           </a:p>
           <a:p>
             <a:endParaRPr lang="en-US" dirty="0"/>
           </a:p>
           <a:p>
-            <a:r>
-              <a:rPr lang="en-US" dirty="0"/>
-              <a:t>Most importantly, as shown before the complexity doesn’t significantly increase with introducing further optimizations to the code.</a:t>
+            <a:endParaRPr lang="en-US" dirty="0"/>
+          </a:p>
+          <a:p>
+            <a:r>
+              <a:rPr lang="en-US" dirty="0"/>
+              <a:t>For parallelization, we have reimplemented OpenMP/TBB parallel modifications of some algorithms as well as </a:t>
+            </a:r>
+            <a:r>
+              <a:rPr lang="en-US" dirty="0" err="1"/>
+              <a:t>PolyBench</a:t>
+            </a:r>
+            <a:r>
+              <a:rPr lang="en-US" dirty="0"/>
+              <a:t>/GPU suite.</a:t>
             </a:r>
           </a:p>
         </p:txBody>
@@ -859,15 +904,14 @@
           <a:p>
             <a:r>
               <a:rPr lang="en-US" dirty="0"/>
-              <a:t>We have evaluated the abstractions on the </a:t>
-            </a:r>
-            <a:r>
-              <a:rPr lang="en-US" dirty="0" err="1"/>
-              <a:t>PolyBench</a:t>
-            </a:r>
-            <a:r>
-              <a:rPr lang="en-US" dirty="0"/>
-              <a:t>/C suite.</a:t>
+              <a:t>The programming complexity in practical algorithms is kept low enough;</a:t>
+            </a:r>
+            <a:br>
+              <a:rPr lang="en-US" dirty="0"/>
+            </a:br>
+            <a:r>
+              <a:rPr lang="en-US" dirty="0"/>
+              <a:t>the code is more verbose, as the abstraction encodes more information overall (such as names of dimensions), but contains slightly less complex control flow, and significantly simpler indexation.</a:t>
             </a:r>
           </a:p>
           <a:p>
@@ -876,16 +920,14 @@
           <a:p>
             <a:r>
               <a:rPr lang="en-US" dirty="0"/>
-              <a:t>W have confirmed that the abstractions do not pose any runtime overhead and they keep the programming complexity in practical algorithms low enough.</a:t>
-            </a:r>
-          </a:p>
-          <a:p>
-            <a:endParaRPr lang="en-US" dirty="0"/>
-          </a:p>
-          <a:p>
-            <a:r>
-              <a:rPr lang="en-US" dirty="0"/>
-              <a:t>Most importantly, as shown before the complexity doesn’t significantly increase with introducing further optimizations to the code.</a:t>
+              <a:t>On top of these metrics, the resulting code is more flexible in changing different layouts or traversals,</a:t>
+            </a:r>
+            <a:br>
+              <a:rPr lang="en-US" dirty="0"/>
+            </a:br>
+            <a:r>
+              <a:rPr lang="en-US" dirty="0"/>
+              <a:t>and the approach improves type safety of the expressions by checking correctly paired dimensions.</a:t>
             </a:r>
           </a:p>
         </p:txBody>
@@ -978,21 +1020,56 @@
           <a:p>
             <a:r>
               <a:rPr lang="en-US" dirty="0"/>
-              <a:t>(HPC?)</a:t>
+              <a:t>(key idea: distributed computing can benefit from layout-agnostic design)</a:t>
+            </a:r>
+          </a:p>
+          <a:p>
+            <a:endParaRPr lang="en-US" dirty="0"/>
+          </a:p>
+          <a:p>
+            <a:r>
+              <a:rPr lang="en-US" dirty="0"/>
+              <a:t>Many scientific computing algorithms run in a distributed manner on clusters with many computation nodes, which further complicates the design of applications.</a:t>
+            </a:r>
+          </a:p>
+          <a:p>
+            <a:endParaRPr lang="en-US" dirty="0"/>
+          </a:p>
+          <a:p>
+            <a:r>
+              <a:rPr lang="en-US" dirty="0"/>
+              <a:t>We have thus investigated how the principles from the abstractions work in the context of distributed computing;</a:t>
+            </a:r>
+          </a:p>
+          <a:p>
+            <a:r>
+              <a:rPr lang="en-US" dirty="0"/>
+              <a:t>Specifically using MPI, which is the most predominant technology used to distribute general computing tasks in C++.</a:t>
+            </a:r>
+          </a:p>
+          <a:p>
+            <a:endParaRPr lang="en-US" dirty="0"/>
+          </a:p>
+          <a:p>
+            <a:r>
+              <a:rPr lang="en-US" dirty="0"/>
+              <a:t>Many work distribution patterns, including data communication, can be described using the building blocks for layouts and traversals.</a:t>
+            </a:r>
+          </a:p>
+          <a:p>
+            <a:endParaRPr lang="en-US" dirty="0"/>
+          </a:p>
+          <a:p>
+            <a:r>
+              <a:rPr lang="en-US" dirty="0"/>
+              <a:t>So, let’s reuse the initialization algorithm and distribute it using MPI; initializing each tile of the data on a separate compute node</a:t>
             </a:r>
             <a:br>
               <a:rPr lang="en-US" dirty="0"/>
             </a:br>
             <a:r>
               <a:rPr lang="en-US" dirty="0"/>
-              <a:t>Since many scientific computing algorithms run in a distributed manner on larger clusters, which further complicates the design,</a:t>
-            </a:r>
-            <a:br>
-              <a:rPr lang="en-US" dirty="0"/>
-            </a:br>
-            <a:r>
-              <a:rPr lang="en-US" dirty="0"/>
-              <a:t>we have investigated how the principles from the abstractions work in the context of distributed computing.</a:t>
+              <a:t>and then gathering the tiles into fully initialized data.</a:t>
             </a:r>
           </a:p>
           <a:p>
@@ -1001,7 +1078,41 @@
           <a:p>
             <a:r>
               <a:rPr lang="en-US" dirty="0"/>
-              <a:t>For this, we have chosen MPI, which is the most predominant technology used to distribute general computing tasks in C++ (as well as Fortran).</a:t>
+              <a:t>This requires two core pieces:</a:t>
+            </a:r>
+          </a:p>
+          <a:p>
+            <a:pPr marL="228600" indent="-228600">
+              <a:buAutoNum type="arabicPeriod"/>
+            </a:pPr>
+            <a:r>
+              <a:rPr lang="en-US" dirty="0"/>
+              <a:t>Binding </a:t>
+            </a:r>
+            <a:r>
+              <a:rPr lang="en-US" dirty="0" err="1"/>
+              <a:t>Noarr</a:t>
+            </a:r>
+            <a:r>
+              <a:rPr lang="en-US" dirty="0"/>
+              <a:t> dimensions to MPI communicators that describe the abstract topology of different computation nodes.</a:t>
+            </a:r>
+          </a:p>
+          <a:p>
+            <a:pPr marL="228600" indent="-228600">
+              <a:buAutoNum type="arabicPeriod"/>
+            </a:pPr>
+            <a:r>
+              <a:rPr lang="en-US" dirty="0"/>
+              <a:t>Translating </a:t>
+            </a:r>
+            <a:r>
+              <a:rPr lang="en-US" dirty="0" err="1"/>
+              <a:t>Noarr</a:t>
+            </a:r>
+            <a:r>
+              <a:rPr lang="en-US" dirty="0"/>
+              <a:t> layouts into appropriate MPI datatypes.</a:t>
             </a:r>
           </a:p>
           <a:p>
@@ -1010,38 +1121,7 @@
           <a:p>
             <a:r>
               <a:rPr lang="en-US" dirty="0"/>
-              <a:t>(data distribution patterns?)</a:t>
-            </a:r>
-          </a:p>
-          <a:p>
-            <a:r>
-              <a:rPr lang="en-US" dirty="0"/>
-              <a:t>We have observed that many communication patterns, as well as data scattering patterns, can be described using the same building blocks used for describing layout and traversal transformations.</a:t>
-            </a:r>
-          </a:p>
-          <a:p>
-            <a:endParaRPr lang="en-US" dirty="0"/>
-          </a:p>
-          <a:p>
-            <a:r>
-              <a:rPr lang="en-US" dirty="0"/>
-              <a:t>This extension of the abstractions allows binding various dimensions of layouts and traversals to specific MPI communicators (which can specify an abstract topology of computation nodes)</a:t>
-            </a:r>
-            <a:br>
-              <a:rPr lang="en-US" dirty="0"/>
-            </a:br>
-            <a:r>
-              <a:rPr lang="en-US" dirty="0"/>
-              <a:t>and layout specifications to native MPI types in such a way that they are communicated in a layout-agnostic way.</a:t>
-            </a:r>
-          </a:p>
-          <a:p>
-            <a:endParaRPr lang="en-US" dirty="0"/>
-          </a:p>
-          <a:p>
-            <a:r>
-              <a:rPr lang="en-US" dirty="0"/>
-              <a:t>This allows, for example, for automatic distribution of data that can then be computed locally, and the local results can be gathered to the final result.</a:t>
+              <a:t>This allows for automatic distribution of data that can then be computed locally, and the local results can be gathered to the final result.</a:t>
             </a:r>
           </a:p>
         </p:txBody>
@@ -1083,180 +1163,6 @@
 </file>
 
 <file path=ppt/notesSlides/notesSlide13.xml><?xml version="1.0" encoding="utf-8"?>
-<p:notes xmlns:a="http://schemas.openxmlformats.org/drawingml/2006/main" xmlns:r="http://schemas.openxmlformats.org/officeDocument/2006/relationships" xmlns:p="http://schemas.openxmlformats.org/presentationml/2006/main">
-  <p:cSld>
-    <p:spTree>
-      <p:nvGrpSpPr>
-        <p:cNvPr id="1" name="">
-          <a:extLst>
-            <a:ext uri="{FF2B5EF4-FFF2-40B4-BE49-F238E27FC236}">
-              <a16:creationId xmlns:a16="http://schemas.microsoft.com/office/drawing/2014/main" id="{18AF212E-CA72-C4AE-F1F7-07F014BF7A85}"/>
-            </a:ext>
-          </a:extLst>
-        </p:cNvPr>
-        <p:cNvGrpSpPr/>
-        <p:nvPr/>
-      </p:nvGrpSpPr>
-      <p:grpSpPr>
-        <a:xfrm>
-          <a:off x="0" y="0"/>
-          <a:ext cx="0" cy="0"/>
-          <a:chOff x="0" y="0"/>
-          <a:chExt cx="0" cy="0"/>
-        </a:xfrm>
-      </p:grpSpPr>
-      <p:sp>
-        <p:nvSpPr>
-          <p:cNvPr id="2" name="Slide Image Placeholder 1">
-            <a:extLst>
-              <a:ext uri="{FF2B5EF4-FFF2-40B4-BE49-F238E27FC236}">
-                <a16:creationId xmlns:a16="http://schemas.microsoft.com/office/drawing/2014/main" id="{FCD45C23-66BB-0E7A-7EE0-D0C799A93506}"/>
-              </a:ext>
-            </a:extLst>
-          </p:cNvPr>
-          <p:cNvSpPr>
-            <a:spLocks noGrp="1" noRot="1" noChangeAspect="1"/>
-          </p:cNvSpPr>
-          <p:nvPr>
-            <p:ph type="sldImg"/>
-          </p:nvPr>
-        </p:nvSpPr>
-        <p:spPr/>
-      </p:sp>
-      <p:sp>
-        <p:nvSpPr>
-          <p:cNvPr id="3" name="Notes Placeholder 2">
-            <a:extLst>
-              <a:ext uri="{FF2B5EF4-FFF2-40B4-BE49-F238E27FC236}">
-                <a16:creationId xmlns:a16="http://schemas.microsoft.com/office/drawing/2014/main" id="{7E3EA43A-1FCE-3D60-414E-B5842CCCFD66}"/>
-              </a:ext>
-            </a:extLst>
-          </p:cNvPr>
-          <p:cNvSpPr>
-            <a:spLocks noGrp="1"/>
-          </p:cNvSpPr>
-          <p:nvPr>
-            <p:ph type="body" idx="1"/>
-          </p:nvPr>
-        </p:nvSpPr>
-        <p:spPr/>
-        <p:txBody>
-          <a:bodyPr/>
-          <a:lstStyle/>
-          <a:p>
-            <a:r>
-              <a:rPr lang="en-US" dirty="0"/>
-              <a:t>(HPC?)</a:t>
-            </a:r>
-            <a:br>
-              <a:rPr lang="en-US" dirty="0"/>
-            </a:br>
-            <a:r>
-              <a:rPr lang="en-US" dirty="0"/>
-              <a:t>Since many scientific computing algorithms run in a distributed manner on larger clusters, which further complicates the design,</a:t>
-            </a:r>
-            <a:br>
-              <a:rPr lang="en-US" dirty="0"/>
-            </a:br>
-            <a:r>
-              <a:rPr lang="en-US" dirty="0"/>
-              <a:t>we have investigated how the principles from the abstractions work in the context of distributed computing.</a:t>
-            </a:r>
-          </a:p>
-          <a:p>
-            <a:endParaRPr lang="en-US" dirty="0"/>
-          </a:p>
-          <a:p>
-            <a:r>
-              <a:rPr lang="en-US" dirty="0"/>
-              <a:t>For this, we have chosen MPI, which is the most predominant technology used to distribute general computing tasks in C++ (as well as Fortran).</a:t>
-            </a:r>
-          </a:p>
-          <a:p>
-            <a:endParaRPr lang="en-US" dirty="0"/>
-          </a:p>
-          <a:p>
-            <a:r>
-              <a:rPr lang="en-US" dirty="0"/>
-              <a:t>(data distribution patterns?)</a:t>
-            </a:r>
-          </a:p>
-          <a:p>
-            <a:r>
-              <a:rPr lang="en-US" dirty="0"/>
-              <a:t>We have observed that many communication patterns, as well as data scattering patterns, can be described using the same building blocks used for describing layout and traversal transformations.</a:t>
-            </a:r>
-          </a:p>
-          <a:p>
-            <a:endParaRPr lang="en-US" dirty="0"/>
-          </a:p>
-          <a:p>
-            <a:r>
-              <a:rPr lang="en-US" dirty="0"/>
-              <a:t>This extension of the abstractions allows binding various dimensions of layouts and traversals to specific MPI communicators (which can specify an abstract topology of computation nodes)</a:t>
-            </a:r>
-            <a:br>
-              <a:rPr lang="en-US" dirty="0"/>
-            </a:br>
-            <a:r>
-              <a:rPr lang="en-US" dirty="0"/>
-              <a:t>and layout specifications to native MPI types in such a way that they are communicated in a layout-agnostic way.</a:t>
-            </a:r>
-          </a:p>
-          <a:p>
-            <a:endParaRPr lang="en-US" dirty="0"/>
-          </a:p>
-          <a:p>
-            <a:r>
-              <a:rPr lang="en-US" dirty="0"/>
-              <a:t>This allows, for example, for automatic distribution of data that can then be computed locally, and the local results can be gathered to the final result.</a:t>
-            </a:r>
-          </a:p>
-        </p:txBody>
-      </p:sp>
-      <p:sp>
-        <p:nvSpPr>
-          <p:cNvPr id="4" name="Slide Number Placeholder 3">
-            <a:extLst>
-              <a:ext uri="{FF2B5EF4-FFF2-40B4-BE49-F238E27FC236}">
-                <a16:creationId xmlns:a16="http://schemas.microsoft.com/office/drawing/2014/main" id="{E12739F2-1F87-864F-92FD-DE6DD7B3BBE1}"/>
-              </a:ext>
-            </a:extLst>
-          </p:cNvPr>
-          <p:cNvSpPr>
-            <a:spLocks noGrp="1"/>
-          </p:cNvSpPr>
-          <p:nvPr>
-            <p:ph type="sldNum" sz="quarter" idx="5"/>
-          </p:nvPr>
-        </p:nvSpPr>
-        <p:spPr/>
-        <p:txBody>
-          <a:bodyPr/>
-          <a:lstStyle/>
-          <a:p>
-            <a:fld id="{FA8FD632-245B-410D-BCC4-8BF8D37AB67F}" type="slidenum">
-              <a:rPr lang="en-US" smtClean="0"/>
-              <a:t>13</a:t>
-            </a:fld>
-            <a:endParaRPr lang="en-US"/>
-          </a:p>
-        </p:txBody>
-      </p:sp>
-    </p:spTree>
-    <p:extLst>
-      <p:ext uri="{BB962C8B-B14F-4D97-AF65-F5344CB8AC3E}">
-        <p14:creationId xmlns:p14="http://schemas.microsoft.com/office/powerpoint/2010/main" val="72828287"/>
-      </p:ext>
-    </p:extLst>
-  </p:cSld>
-  <p:clrMapOvr>
-    <a:masterClrMapping/>
-  </p:clrMapOvr>
-</p:notes>
-</file>
-
-<file path=ppt/notesSlides/notesSlide14.xml><?xml version="1.0" encoding="utf-8"?>
 <p:notes xmlns:a="http://schemas.openxmlformats.org/drawingml/2006/main" xmlns:r="http://schemas.openxmlformats.org/officeDocument/2006/relationships" xmlns:p="http://schemas.openxmlformats.org/presentationml/2006/main">
   <p:cSld>
     <p:spTree>
@@ -1320,21 +1226,7 @@
           <a:p>
             <a:r>
               <a:rPr lang="en-US" dirty="0"/>
-              <a:t>(HPC?)</a:t>
-            </a:r>
-            <a:br>
-              <a:rPr lang="en-US" dirty="0"/>
-            </a:br>
-            <a:r>
-              <a:rPr lang="en-US" dirty="0"/>
-              <a:t>Since many scientific computing algorithms run in a distributed manner on larger clusters, which further complicates the design,</a:t>
-            </a:r>
-            <a:br>
-              <a:rPr lang="en-US" dirty="0"/>
-            </a:br>
-            <a:r>
-              <a:rPr lang="en-US" dirty="0"/>
-              <a:t>we have investigated how the principles from the abstractions work in the context of distributed computing.</a:t>
+              <a:t>(key idea: </a:t>
             </a:r>
           </a:p>
           <a:p>
@@ -1343,56 +1235,13 @@
           <a:p>
             <a:r>
               <a:rPr lang="en-US" dirty="0"/>
-              <a:t>For this, we have chosen MPI, which is the most predominant technology used to distribute general computing tasks in C++ (as well as Fortran).</a:t>
-            </a:r>
-          </a:p>
-          <a:p>
-            <a:endParaRPr lang="en-US" dirty="0"/>
-          </a:p>
-          <a:p>
-            <a:r>
-              <a:rPr lang="en-US" dirty="0"/>
-              <a:t>(data distribution patterns?)</a:t>
-            </a:r>
-          </a:p>
-          <a:p>
-            <a:r>
-              <a:rPr lang="en-US" dirty="0"/>
-              <a:t>We have observed that many communication patterns, as well as data scattering patterns, can be described using the same building blocks used for describing layout and traversal transformations.</a:t>
-            </a:r>
-          </a:p>
-          <a:p>
-            <a:endParaRPr lang="en-US" dirty="0"/>
-          </a:p>
-          <a:p>
-            <a:r>
-              <a:rPr lang="en-US" dirty="0"/>
-              <a:t>This extension of the abstractions allows binding various dimensions of layouts and traversals to specific MPI communicators (which can specify an abstract topology of computation nodes)</a:t>
-            </a:r>
-            <a:br>
-              <a:rPr lang="en-US" dirty="0"/>
-            </a:br>
-            <a:r>
-              <a:rPr lang="en-US" dirty="0"/>
-              <a:t>and layout specifications to native MPI types in such a way that they are communicated in a layout-agnostic way.</a:t>
-            </a:r>
-          </a:p>
-          <a:p>
-            <a:endParaRPr lang="en-US" dirty="0"/>
-          </a:p>
-          <a:p>
-            <a:r>
-              <a:rPr lang="en-US" dirty="0"/>
-              <a:t>This allows, for example, for automatic distribution of data that can then be computed locally, and the local results can be gathered to the final result.</a:t>
-            </a:r>
-          </a:p>
-          <a:p>
-            <a:endParaRPr lang="en-US" dirty="0"/>
-          </a:p>
-          <a:p>
-            <a:r>
-              <a:rPr lang="en-US" dirty="0"/>
-              <a:t>It also enables automatic transformation of the data if the memory layouts on the opposing end-points differ. If this was done naively. the MPI backend would corrupt the data</a:t>
+              <a:t>It also enables automatic transformation of the data if the memory layouts on the opposing end-points differ (perhaps due to optimization).</a:t>
+            </a:r>
+          </a:p>
+          <a:p>
+            <a:r>
+              <a:rPr lang="en-US" dirty="0"/>
+              <a:t>If this was done naively. the MPI backend would corrupt the data by preserving the physical layout and not the logical structure.</a:t>
             </a:r>
           </a:p>
         </p:txBody>
@@ -1420,7 +1269,7 @@
           <a:p>
             <a:fld id="{FA8FD632-245B-410D-BCC4-8BF8D37AB67F}" type="slidenum">
               <a:rPr lang="en-US" smtClean="0"/>
-              <a:t>14</a:t>
+              <a:t>13</a:t>
             </a:fld>
             <a:endParaRPr lang="en-US"/>
           </a:p>
@@ -1430,6 +1279,102 @@
     <p:extLst>
       <p:ext uri="{BB962C8B-B14F-4D97-AF65-F5344CB8AC3E}">
         <p14:creationId xmlns:p14="http://schemas.microsoft.com/office/powerpoint/2010/main" val="1485590865"/>
+      </p:ext>
+    </p:extLst>
+  </p:cSld>
+  <p:clrMapOvr>
+    <a:masterClrMapping/>
+  </p:clrMapOvr>
+</p:notes>
+</file>
+
+<file path=ppt/notesSlides/notesSlide14.xml><?xml version="1.0" encoding="utf-8"?>
+<p:notes xmlns:a="http://schemas.openxmlformats.org/drawingml/2006/main" xmlns:r="http://schemas.openxmlformats.org/officeDocument/2006/relationships" xmlns:p="http://schemas.openxmlformats.org/presentationml/2006/main">
+  <p:cSld>
+    <p:spTree>
+      <p:nvGrpSpPr>
+        <p:cNvPr id="1" name=""/>
+        <p:cNvGrpSpPr/>
+        <p:nvPr/>
+      </p:nvGrpSpPr>
+      <p:grpSpPr>
+        <a:xfrm>
+          <a:off x="0" y="0"/>
+          <a:ext cx="0" cy="0"/>
+          <a:chOff x="0" y="0"/>
+          <a:chExt cx="0" cy="0"/>
+        </a:xfrm>
+      </p:grpSpPr>
+      <p:sp>
+        <p:nvSpPr>
+          <p:cNvPr id="2" name="Slide Image Placeholder 1"/>
+          <p:cNvSpPr>
+            <a:spLocks noGrp="1" noRot="1" noChangeAspect="1"/>
+          </p:cNvSpPr>
+          <p:nvPr>
+            <p:ph type="sldImg"/>
+          </p:nvPr>
+        </p:nvSpPr>
+        <p:spPr/>
+      </p:sp>
+      <p:sp>
+        <p:nvSpPr>
+          <p:cNvPr id="3" name="Notes Placeholder 2"/>
+          <p:cNvSpPr>
+            <a:spLocks noGrp="1"/>
+          </p:cNvSpPr>
+          <p:nvPr>
+            <p:ph type="body" idx="1"/>
+          </p:nvPr>
+        </p:nvSpPr>
+        <p:spPr/>
+        <p:txBody>
+          <a:bodyPr/>
+          <a:lstStyle/>
+          <a:p>
+            <a:r>
+              <a:rPr lang="en-US" dirty="0"/>
+              <a:t>We have compared the state of the art C++ bindings for MPI in how they manage to seamlessly enable layout-agnostic communication of data over MPI</a:t>
+            </a:r>
+          </a:p>
+          <a:p>
+            <a:endParaRPr lang="en-US" dirty="0"/>
+          </a:p>
+          <a:p>
+            <a:r>
+              <a:rPr lang="en-US" dirty="0"/>
+              <a:t>This requires that the framework encodes the layout correctly so it is automatically transformed between the two end-points</a:t>
+            </a:r>
+          </a:p>
+        </p:txBody>
+      </p:sp>
+      <p:sp>
+        <p:nvSpPr>
+          <p:cNvPr id="4" name="Slide Number Placeholder 3"/>
+          <p:cNvSpPr>
+            <a:spLocks noGrp="1"/>
+          </p:cNvSpPr>
+          <p:nvPr>
+            <p:ph type="sldNum" sz="quarter" idx="5"/>
+          </p:nvPr>
+        </p:nvSpPr>
+        <p:spPr/>
+        <p:txBody>
+          <a:bodyPr/>
+          <a:lstStyle/>
+          <a:p>
+            <a:fld id="{FA8FD632-245B-410D-BCC4-8BF8D37AB67F}" type="slidenum">
+              <a:rPr lang="en-US" smtClean="0"/>
+              <a:t>14</a:t>
+            </a:fld>
+            <a:endParaRPr lang="en-US"/>
+          </a:p>
+        </p:txBody>
+      </p:sp>
+    </p:spTree>
+    <p:extLst>
+      <p:ext uri="{BB962C8B-B14F-4D97-AF65-F5344CB8AC3E}">
+        <p14:creationId xmlns:p14="http://schemas.microsoft.com/office/powerpoint/2010/main" val="2799059215"/>
       </p:ext>
     </p:extLst>
   </p:cSld>
@@ -1485,7 +1430,7 @@
           <a:p>
             <a:r>
               <a:rPr lang="en-US" dirty="0"/>
-              <a:t>We have compared the state of the art C++ bindings for MPI in how they manage to seamlessly enable layout-agnostic communication of data over MPI</a:t>
+              <a:t>(key idea: knowledge transfer to cellular automata simulation)</a:t>
             </a:r>
           </a:p>
           <a:p>
@@ -1494,8 +1439,22 @@
           <a:p>
             <a:r>
               <a:rPr lang="en-US" dirty="0"/>
-              <a:t>This requires that the framework encodes the layout correctly so it is automatically transformed between the two end-points</a:t>
-            </a:r>
+              <a:t>Covering all major aspects of general-purpose HPC programming, we studied application of the principles to more specific domains.</a:t>
+            </a:r>
+          </a:p>
+          <a:p>
+            <a:endParaRPr lang="en-US" dirty="0"/>
+          </a:p>
+          <a:p>
+            <a:r>
+              <a:rPr lang="en-US" dirty="0"/>
+              <a:t>One domain from our past research that could adapt the abstractions was cellular </a:t>
+            </a:r>
+            <a:r>
+              <a:rPr lang="en-US"/>
+              <a:t>automata simulation.</a:t>
+            </a:r>
+            <a:endParaRPr lang="en-US" dirty="0"/>
           </a:p>
         </p:txBody>
       </p:sp>
@@ -1525,7 +1484,7 @@
     </p:spTree>
     <p:extLst>
       <p:ext uri="{BB962C8B-B14F-4D97-AF65-F5344CB8AC3E}">
-        <p14:creationId xmlns:p14="http://schemas.microsoft.com/office/powerpoint/2010/main" val="2799059215"/>
+        <p14:creationId xmlns:p14="http://schemas.microsoft.com/office/powerpoint/2010/main" val="3622550000"/>
       </p:ext>
     </p:extLst>
   </p:cSld>
@@ -1540,7 +1499,13 @@
   <p:cSld>
     <p:spTree>
       <p:nvGrpSpPr>
-        <p:cNvPr id="1" name=""/>
+        <p:cNvPr id="1" name="">
+          <a:extLst>
+            <a:ext uri="{FF2B5EF4-FFF2-40B4-BE49-F238E27FC236}">
+              <a16:creationId xmlns:a16="http://schemas.microsoft.com/office/drawing/2014/main" id="{41EC8EC8-C761-6316-9007-65774C0EF92D}"/>
+            </a:ext>
+          </a:extLst>
+        </p:cNvPr>
         <p:cNvGrpSpPr/>
         <p:nvPr/>
       </p:nvGrpSpPr>
@@ -1554,7 +1519,13 @@
       </p:grpSpPr>
       <p:sp>
         <p:nvSpPr>
-          <p:cNvPr id="2" name="Slide Image Placeholder 1"/>
+          <p:cNvPr id="2" name="Slide Image Placeholder 1">
+            <a:extLst>
+              <a:ext uri="{FF2B5EF4-FFF2-40B4-BE49-F238E27FC236}">
+                <a16:creationId xmlns:a16="http://schemas.microsoft.com/office/drawing/2014/main" id="{A06D4C2F-ECB5-B564-853A-3799BCE82E41}"/>
+              </a:ext>
+            </a:extLst>
+          </p:cNvPr>
           <p:cNvSpPr>
             <a:spLocks noGrp="1" noRot="1" noChangeAspect="1"/>
           </p:cNvSpPr>
@@ -1566,7 +1537,13 @@
       </p:sp>
       <p:sp>
         <p:nvSpPr>
-          <p:cNvPr id="3" name="Notes Placeholder 2"/>
+          <p:cNvPr id="3" name="Notes Placeholder 2">
+            <a:extLst>
+              <a:ext uri="{FF2B5EF4-FFF2-40B4-BE49-F238E27FC236}">
+                <a16:creationId xmlns:a16="http://schemas.microsoft.com/office/drawing/2014/main" id="{886ABE99-5BBC-6BD4-946D-2A3F2D9A892F}"/>
+              </a:ext>
+            </a:extLst>
+          </p:cNvPr>
           <p:cNvSpPr>
             <a:spLocks noGrp="1"/>
           </p:cNvSpPr>
@@ -1789,7 +1766,13 @@
       </p:sp>
       <p:sp>
         <p:nvSpPr>
-          <p:cNvPr id="4" name="Slide Number Placeholder 3"/>
+          <p:cNvPr id="4" name="Slide Number Placeholder 3">
+            <a:extLst>
+              <a:ext uri="{FF2B5EF4-FFF2-40B4-BE49-F238E27FC236}">
+                <a16:creationId xmlns:a16="http://schemas.microsoft.com/office/drawing/2014/main" id="{81D4FAE5-6724-7186-6EBE-71006EA2D593}"/>
+              </a:ext>
+            </a:extLst>
+          </p:cNvPr>
           <p:cNvSpPr>
             <a:spLocks noGrp="1"/>
           </p:cNvSpPr>
@@ -1813,7 +1796,7 @@
     </p:spTree>
     <p:extLst>
       <p:ext uri="{BB962C8B-B14F-4D97-AF65-F5344CB8AC3E}">
-        <p14:creationId xmlns:p14="http://schemas.microsoft.com/office/powerpoint/2010/main" val="3622550000"/>
+        <p14:creationId xmlns:p14="http://schemas.microsoft.com/office/powerpoint/2010/main" val="71228729"/>
       </p:ext>
     </p:extLst>
   </p:cSld>
@@ -5124,7 +5107,7 @@
           <a:p>
             <a:fld id="{B82E97BC-A89E-4CE1-A4AA-4F62BE5183B8}" type="datetime1">
               <a:rPr lang="en-US" smtClean="0"/>
-              <a:t>8/26/2026</a:t>
+              <a:t>8/27/2026</a:t>
             </a:fld>
             <a:endParaRPr lang="en-US" dirty="0"/>
           </a:p>
@@ -5322,7 +5305,7 @@
           <a:p>
             <a:fld id="{6653D07F-EA1B-48C7-9BD0-6BED24C9ED67}" type="datetime1">
               <a:rPr lang="en-US" smtClean="0"/>
-              <a:t>8/26/2026</a:t>
+              <a:t>8/27/2026</a:t>
             </a:fld>
             <a:endParaRPr lang="en-US"/>
           </a:p>
@@ -5530,7 +5513,7 @@
           <a:p>
             <a:fld id="{FDA4DF48-C056-4522-9BC2-031A9D197A93}" type="datetime1">
               <a:rPr lang="en-US" smtClean="0"/>
-              <a:t>8/26/2026</a:t>
+              <a:t>8/27/2026</a:t>
             </a:fld>
             <a:endParaRPr lang="en-US"/>
           </a:p>
@@ -5728,7 +5711,7 @@
           <a:p>
             <a:fld id="{358C28A6-2969-482E-9A3B-5E13FCD8DD03}" type="datetime1">
               <a:rPr lang="en-US" smtClean="0"/>
-              <a:t>8/26/2026</a:t>
+              <a:t>8/27/2026</a:t>
             </a:fld>
             <a:endParaRPr lang="en-US"/>
           </a:p>
@@ -6003,7 +5986,7 @@
           <a:p>
             <a:fld id="{34463B7D-19AB-44BF-8DCC-FDF87A48CBC2}" type="datetime1">
               <a:rPr lang="en-US" smtClean="0"/>
-              <a:t>8/26/2026</a:t>
+              <a:t>8/27/2026</a:t>
             </a:fld>
             <a:endParaRPr lang="en-US"/>
           </a:p>
@@ -6268,7 +6251,7 @@
           <a:p>
             <a:fld id="{149987F8-7DF8-4BA7-9208-8F32E5310AB4}" type="datetime1">
               <a:rPr lang="en-US" smtClean="0"/>
-              <a:t>8/26/2026</a:t>
+              <a:t>8/27/2026</a:t>
             </a:fld>
             <a:endParaRPr lang="en-US"/>
           </a:p>
@@ -6680,7 +6663,7 @@
           <a:p>
             <a:fld id="{D64A8A3C-441E-40C3-8DCE-8F1C2EB0BADE}" type="datetime1">
               <a:rPr lang="en-US" smtClean="0"/>
-              <a:t>8/26/2026</a:t>
+              <a:t>8/27/2026</a:t>
             </a:fld>
             <a:endParaRPr lang="en-US"/>
           </a:p>
@@ -6821,7 +6804,7 @@
           <a:p>
             <a:fld id="{1AB26190-46ED-4A0C-A5E8-CDBCA5C2D5C3}" type="datetime1">
               <a:rPr lang="en-US" smtClean="0"/>
-              <a:t>8/26/2026</a:t>
+              <a:t>8/27/2026</a:t>
             </a:fld>
             <a:endParaRPr lang="en-US"/>
           </a:p>
@@ -6934,7 +6917,7 @@
           <a:p>
             <a:fld id="{2E4D20BF-4C0E-41E5-B4FC-9D48FCD3AF33}" type="datetime1">
               <a:rPr lang="en-US" smtClean="0"/>
-              <a:t>8/26/2026</a:t>
+              <a:t>8/27/2026</a:t>
             </a:fld>
             <a:endParaRPr lang="en-US"/>
           </a:p>
@@ -7245,7 +7228,7 @@
           <a:p>
             <a:fld id="{BEACC2DC-9E3A-44FF-B316-55456058A0CC}" type="datetime1">
               <a:rPr lang="en-US" smtClean="0"/>
-              <a:t>8/26/2026</a:t>
+              <a:t>8/27/2026</a:t>
             </a:fld>
             <a:endParaRPr lang="en-US"/>
           </a:p>
@@ -7533,7 +7516,7 @@
           <a:p>
             <a:fld id="{A4FE5055-4E7B-4EEB-A9E4-14CB598FDB7C}" type="datetime1">
               <a:rPr lang="en-US" smtClean="0"/>
-              <a:t>8/26/2026</a:t>
+              <a:t>8/27/2026</a:t>
             </a:fld>
             <a:endParaRPr lang="en-US"/>
           </a:p>
@@ -7774,7 +7757,7 @@
           <a:p>
             <a:fld id="{FDEB8912-975C-4DE8-9A59-8B9C133AEEC5}" type="datetime1">
               <a:rPr lang="en-US" smtClean="0"/>
-              <a:t>8/26/2026</a:t>
+              <a:t>8/27/2026</a:t>
             </a:fld>
             <a:endParaRPr lang="en-US"/>
           </a:p>
@@ -8280,7 +8263,7 @@
           <a:p>
             <a:fld id="{A606699D-645B-483D-AF03-42C342BFDBA5}" type="datetime1">
               <a:rPr lang="en-US" smtClean="0"/>
-              <a:t>8/26/2026</a:t>
+              <a:t>8/27/2026</a:t>
             </a:fld>
             <a:endParaRPr lang="en-US" dirty="0"/>
           </a:p>
@@ -8442,7 +8425,7 @@
         </p:blipFill>
         <p:spPr>
           <a:xfrm>
-            <a:off x="2905836" y="252614"/>
+            <a:off x="412017" y="2181326"/>
             <a:ext cx="4875384" cy="3176386"/>
           </a:xfrm>
           <a:prstGeom prst="rect">
@@ -8472,44 +8455,14 @@
         </p:blipFill>
         <p:spPr>
           <a:xfrm>
-            <a:off x="2276224" y="3794899"/>
-            <a:ext cx="5117746" cy="2045562"/>
+            <a:off x="5362217" y="2626979"/>
+            <a:ext cx="6675976" cy="2668386"/>
           </a:xfrm>
           <a:prstGeom prst="rect">
             <a:avLst/>
           </a:prstGeom>
         </p:spPr>
       </p:pic>
-      <p:pic>
-        <p:nvPicPr>
-          <p:cNvPr id="9" name="Picture 8">
-            <a:extLst>
-              <a:ext uri="{FF2B5EF4-FFF2-40B4-BE49-F238E27FC236}">
-                <a16:creationId xmlns:a16="http://schemas.microsoft.com/office/drawing/2014/main" id="{8C93F01F-DFCF-8FF5-BB0F-F31857B0A67F}"/>
-              </a:ext>
-            </a:extLst>
-          </p:cNvPr>
-          <p:cNvPicPr>
-            <a:picLocks noChangeAspect="1"/>
-          </p:cNvPicPr>
-          <p:nvPr/>
-        </p:nvPicPr>
-        <p:blipFill>
-          <a:blip r:embed="rId5"/>
-          <a:stretch>
-            <a:fillRect/>
-          </a:stretch>
-        </p:blipFill>
-        <p:spPr>
-          <a:xfrm>
-            <a:off x="7775531" y="2569047"/>
-            <a:ext cx="4410780" cy="2248633"/>
-          </a:xfrm>
-          <a:prstGeom prst="rect">
-            <a:avLst/>
-          </a:prstGeom>
-        </p:spPr>
-      </p:pic>
       <p:sp>
         <p:nvSpPr>
           <p:cNvPr id="3" name="Date Placeholder 2">
@@ -8533,7 +8486,7 @@
           <a:p>
             <a:fld id="{1A21DD6E-5048-4D3D-823A-657D259BCC38}" type="datetime1">
               <a:rPr lang="en-US" smtClean="0"/>
-              <a:t>8/26/2026</a:t>
+              <a:t>8/27/2026</a:t>
             </a:fld>
             <a:endParaRPr lang="en-US"/>
           </a:p>
@@ -8565,6 +8518,183 @@
               <a:t>10</a:t>
             </a:fld>
             <a:endParaRPr lang="en-US"/>
+          </a:p>
+        </p:txBody>
+      </p:sp>
+      <p:sp>
+        <p:nvSpPr>
+          <p:cNvPr id="6" name="TextBox 5">
+            <a:extLst>
+              <a:ext uri="{FF2B5EF4-FFF2-40B4-BE49-F238E27FC236}">
+                <a16:creationId xmlns:a16="http://schemas.microsoft.com/office/drawing/2014/main" id="{C48EE12D-A54F-6CFD-63D4-ED8425AA5254}"/>
+              </a:ext>
+            </a:extLst>
+          </p:cNvPr>
+          <p:cNvSpPr txBox="1"/>
+          <p:nvPr/>
+        </p:nvSpPr>
+        <p:spPr>
+          <a:xfrm>
+            <a:off x="2209800" y="1913901"/>
+            <a:ext cx="1472775" cy="369332"/>
+          </a:xfrm>
+          <a:prstGeom prst="rect">
+            <a:avLst/>
+          </a:prstGeom>
+          <a:noFill/>
+        </p:spPr>
+        <p:txBody>
+          <a:bodyPr wrap="none" rtlCol="0">
+            <a:spAutoFit/>
+          </a:bodyPr>
+          <a:lstStyle/>
+          <a:p>
+            <a:r>
+              <a:rPr lang="en-US" dirty="0" err="1"/>
+              <a:t>PolyBench</a:t>
+            </a:r>
+            <a:r>
+              <a:rPr lang="en-US" dirty="0"/>
+              <a:t>/C</a:t>
+            </a:r>
+          </a:p>
+        </p:txBody>
+      </p:sp>
+      <p:sp>
+        <p:nvSpPr>
+          <p:cNvPr id="10" name="TextBox 9">
+            <a:extLst>
+              <a:ext uri="{FF2B5EF4-FFF2-40B4-BE49-F238E27FC236}">
+                <a16:creationId xmlns:a16="http://schemas.microsoft.com/office/drawing/2014/main" id="{5C94ADD4-4CFC-E812-3B36-B6402C655DF5}"/>
+              </a:ext>
+            </a:extLst>
+          </p:cNvPr>
+          <p:cNvSpPr txBox="1"/>
+          <p:nvPr/>
+        </p:nvSpPr>
+        <p:spPr>
+          <a:xfrm>
+            <a:off x="6561938" y="1920380"/>
+            <a:ext cx="1626098" cy="646331"/>
+          </a:xfrm>
+          <a:prstGeom prst="rect">
+            <a:avLst/>
+          </a:prstGeom>
+          <a:noFill/>
+        </p:spPr>
+        <p:txBody>
+          <a:bodyPr wrap="square" rtlCol="0">
+            <a:spAutoFit/>
+          </a:bodyPr>
+          <a:lstStyle/>
+          <a:p>
+            <a:pPr algn="ctr"/>
+            <a:r>
+              <a:rPr lang="en-US" dirty="0" err="1"/>
+              <a:t>PolyBench</a:t>
+            </a:r>
+            <a:r>
+              <a:rPr lang="en-US" dirty="0"/>
+              <a:t>/C</a:t>
+            </a:r>
+            <a:br>
+              <a:rPr lang="en-US" dirty="0"/>
+            </a:br>
+            <a:r>
+              <a:rPr lang="en-US" dirty="0"/>
+              <a:t>subset</a:t>
+            </a:r>
+          </a:p>
+        </p:txBody>
+      </p:sp>
+      <p:sp>
+        <p:nvSpPr>
+          <p:cNvPr id="11" name="Right Brace 10">
+            <a:extLst>
+              <a:ext uri="{FF2B5EF4-FFF2-40B4-BE49-F238E27FC236}">
+                <a16:creationId xmlns:a16="http://schemas.microsoft.com/office/drawing/2014/main" id="{9FEFA2A7-B28D-4893-B5BE-441513E53224}"/>
+              </a:ext>
+            </a:extLst>
+          </p:cNvPr>
+          <p:cNvSpPr/>
+          <p:nvPr/>
+        </p:nvSpPr>
+        <p:spPr>
+          <a:xfrm rot="16200000">
+            <a:off x="7182452" y="686211"/>
+            <a:ext cx="241068" cy="3881536"/>
+          </a:xfrm>
+          <a:prstGeom prst="rightBrace">
+            <a:avLst/>
+          </a:prstGeom>
+        </p:spPr>
+        <p:style>
+          <a:lnRef idx="2">
+            <a:schemeClr val="accent1"/>
+          </a:lnRef>
+          <a:fillRef idx="0">
+            <a:schemeClr val="accent1"/>
+          </a:fillRef>
+          <a:effectRef idx="1">
+            <a:schemeClr val="accent1"/>
+          </a:effectRef>
+          <a:fontRef idx="minor">
+            <a:schemeClr val="tx1"/>
+          </a:fontRef>
+        </p:style>
+        <p:txBody>
+          <a:bodyPr rtlCol="0" anchor="ctr"/>
+          <a:lstStyle/>
+          <a:p>
+            <a:pPr algn="ctr"/>
+            <a:endParaRPr lang="en-US"/>
+          </a:p>
+        </p:txBody>
+      </p:sp>
+      <p:sp>
+        <p:nvSpPr>
+          <p:cNvPr id="15" name="TextBox 14">
+            <a:extLst>
+              <a:ext uri="{FF2B5EF4-FFF2-40B4-BE49-F238E27FC236}">
+                <a16:creationId xmlns:a16="http://schemas.microsoft.com/office/drawing/2014/main" id="{073698DB-93D9-A5F0-02CC-BCBD40643F77}"/>
+              </a:ext>
+            </a:extLst>
+          </p:cNvPr>
+          <p:cNvSpPr txBox="1"/>
+          <p:nvPr/>
+        </p:nvSpPr>
+        <p:spPr>
+          <a:xfrm>
+            <a:off x="10402276" y="2080020"/>
+            <a:ext cx="1903048" cy="646331"/>
+          </a:xfrm>
+          <a:prstGeom prst="rect">
+            <a:avLst/>
+          </a:prstGeom>
+          <a:noFill/>
+        </p:spPr>
+        <p:txBody>
+          <a:bodyPr wrap="square" rtlCol="0">
+            <a:spAutoFit/>
+          </a:bodyPr>
+          <a:lstStyle/>
+          <a:p>
+            <a:pPr algn="ctr"/>
+            <a:r>
+              <a:rPr lang="en-US" dirty="0" err="1"/>
+              <a:t>PolyBench</a:t>
+            </a:r>
+            <a:r>
+              <a:rPr lang="en-US" dirty="0"/>
+              <a:t>/GPU</a:t>
+            </a:r>
+            <a:br>
+              <a:rPr lang="en-US" dirty="0"/>
+            </a:br>
+            <a:r>
+              <a:rPr lang="en-US" dirty="0"/>
+              <a:t>subset</a:t>
+            </a:r>
           </a:p>
         </p:txBody>
       </p:sp>
@@ -8632,96 +8762,85 @@
           </a:p>
         </p:txBody>
       </p:sp>
-      <p:pic>
-        <p:nvPicPr>
-          <p:cNvPr id="5" name="Picture 4">
-            <a:extLst>
-              <a:ext uri="{FF2B5EF4-FFF2-40B4-BE49-F238E27FC236}">
-                <a16:creationId xmlns:a16="http://schemas.microsoft.com/office/drawing/2014/main" id="{6276DF54-E926-E8AD-3FB1-9C733E0FCF55}"/>
-              </a:ext>
-            </a:extLst>
-          </p:cNvPr>
-          <p:cNvPicPr>
-            <a:picLocks noChangeAspect="1"/>
-          </p:cNvPicPr>
-          <p:nvPr/>
-        </p:nvPicPr>
-        <p:blipFill>
-          <a:blip r:embed="rId3"/>
-          <a:stretch>
-            <a:fillRect/>
-          </a:stretch>
-        </p:blipFill>
-        <p:spPr>
-          <a:xfrm>
-            <a:off x="2905836" y="252614"/>
-            <a:ext cx="4875384" cy="3176386"/>
-          </a:xfrm>
-          <a:prstGeom prst="rect">
-            <a:avLst/>
-          </a:prstGeom>
-        </p:spPr>
-      </p:pic>
-      <p:pic>
-        <p:nvPicPr>
-          <p:cNvPr id="7" name="Picture 6">
-            <a:extLst>
-              <a:ext uri="{FF2B5EF4-FFF2-40B4-BE49-F238E27FC236}">
-                <a16:creationId xmlns:a16="http://schemas.microsoft.com/office/drawing/2014/main" id="{A81FB269-1472-2EB3-14ED-8FB4C84D1F4F}"/>
-              </a:ext>
-            </a:extLst>
-          </p:cNvPr>
-          <p:cNvPicPr>
-            <a:picLocks noChangeAspect="1"/>
-          </p:cNvPicPr>
-          <p:nvPr/>
-        </p:nvPicPr>
-        <p:blipFill>
-          <a:blip r:embed="rId4"/>
-          <a:stretch>
-            <a:fillRect/>
-          </a:stretch>
-        </p:blipFill>
-        <p:spPr>
-          <a:xfrm>
-            <a:off x="2276224" y="3794899"/>
-            <a:ext cx="5117746" cy="2045562"/>
-          </a:xfrm>
-          <a:prstGeom prst="rect">
-            <a:avLst/>
-          </a:prstGeom>
-        </p:spPr>
-      </p:pic>
-      <p:pic>
-        <p:nvPicPr>
-          <p:cNvPr id="9" name="Picture 8">
-            <a:extLst>
-              <a:ext uri="{FF2B5EF4-FFF2-40B4-BE49-F238E27FC236}">
-                <a16:creationId xmlns:a16="http://schemas.microsoft.com/office/drawing/2014/main" id="{F04FE17F-EA26-4159-D3FA-E24B481BB466}"/>
-              </a:ext>
-            </a:extLst>
-          </p:cNvPr>
-          <p:cNvPicPr>
-            <a:picLocks noChangeAspect="1"/>
-          </p:cNvPicPr>
-          <p:nvPr/>
-        </p:nvPicPr>
-        <p:blipFill>
-          <a:blip r:embed="rId5"/>
-          <a:stretch>
-            <a:fillRect/>
-          </a:stretch>
-        </p:blipFill>
-        <p:spPr>
-          <a:xfrm>
-            <a:off x="7775531" y="2569047"/>
-            <a:ext cx="4410780" cy="2248633"/>
-          </a:xfrm>
-          <a:prstGeom prst="rect">
-            <a:avLst/>
-          </a:prstGeom>
-        </p:spPr>
-      </p:pic>
+      <p:sp>
+        <p:nvSpPr>
+          <p:cNvPr id="16" name="Content Placeholder 15">
+            <a:extLst>
+              <a:ext uri="{FF2B5EF4-FFF2-40B4-BE49-F238E27FC236}">
+                <a16:creationId xmlns:a16="http://schemas.microsoft.com/office/drawing/2014/main" id="{90D10BE1-6FF6-CFAF-522A-ABB1D189E365}"/>
+              </a:ext>
+            </a:extLst>
+          </p:cNvPr>
+          <p:cNvSpPr>
+            <a:spLocks noGrp="1"/>
+          </p:cNvSpPr>
+          <p:nvPr>
+            <p:ph idx="1"/>
+          </p:nvPr>
+        </p:nvSpPr>
+        <p:spPr/>
+        <p:txBody>
+          <a:bodyPr/>
+          <a:lstStyle/>
+          <a:p>
+            <a:r>
+              <a:rPr lang="en-US" dirty="0">
+                <a:solidFill>
+                  <a:srgbClr val="C00000"/>
+                </a:solidFill>
+              </a:rPr>
+              <a:t>Slightly more verbose</a:t>
+            </a:r>
+          </a:p>
+          <a:p>
+            <a:r>
+              <a:rPr lang="en-US" dirty="0">
+                <a:solidFill>
+                  <a:schemeClr val="accent6"/>
+                </a:solidFill>
+              </a:rPr>
+              <a:t>Less complex control flow</a:t>
+            </a:r>
+          </a:p>
+          <a:p>
+            <a:r>
+              <a:rPr lang="en-US" dirty="0">
+                <a:solidFill>
+                  <a:srgbClr val="0070C0"/>
+                </a:solidFill>
+              </a:rPr>
+              <a:t>Easier indexation</a:t>
+            </a:r>
+          </a:p>
+          <a:p>
+            <a:endParaRPr lang="en-US" dirty="0">
+              <a:solidFill>
+                <a:srgbClr val="0070C0"/>
+              </a:solidFill>
+            </a:endParaRPr>
+          </a:p>
+          <a:p>
+            <a:pPr>
+              <a:buFont typeface="Aptos" panose="020B0004020202020204" pitchFamily="34" charset="0"/>
+              <a:buChar char="+"/>
+            </a:pPr>
+            <a:r>
+              <a:rPr lang="en-US" dirty="0"/>
+              <a:t>Higher flexibility</a:t>
+            </a:r>
+          </a:p>
+          <a:p>
+            <a:pPr>
+              <a:buFont typeface="Aptos" panose="020B0004020202020204" pitchFamily="34" charset="0"/>
+              <a:buChar char="+"/>
+            </a:pPr>
+            <a:r>
+              <a:rPr lang="en-US" dirty="0"/>
+              <a:t>Type safety (checked dimensions)</a:t>
+            </a:r>
+          </a:p>
+        </p:txBody>
+      </p:sp>
       <p:sp>
         <p:nvSpPr>
           <p:cNvPr id="3" name="Date Placeholder 2">
@@ -8745,7 +8864,7 @@
           <a:p>
             <a:fld id="{426C01F6-8E80-4F75-81D6-E35CABA351AD}" type="datetime1">
               <a:rPr lang="en-US" smtClean="0"/>
-              <a:t>8/26/2026</a:t>
+              <a:t>8/27/2026</a:t>
             </a:fld>
             <a:endParaRPr lang="en-US"/>
           </a:p>
@@ -8780,6 +8899,265 @@
           </a:p>
         </p:txBody>
       </p:sp>
+      <p:grpSp>
+        <p:nvGrpSpPr>
+          <p:cNvPr id="15" name="Group 14">
+            <a:extLst>
+              <a:ext uri="{FF2B5EF4-FFF2-40B4-BE49-F238E27FC236}">
+                <a16:creationId xmlns:a16="http://schemas.microsoft.com/office/drawing/2014/main" id="{06199549-C2F9-0F20-FD16-454B08B67F83}"/>
+              </a:ext>
+            </a:extLst>
+          </p:cNvPr>
+          <p:cNvGrpSpPr/>
+          <p:nvPr/>
+        </p:nvGrpSpPr>
+        <p:grpSpPr>
+          <a:xfrm>
+            <a:off x="5521626" y="1230285"/>
+            <a:ext cx="6339251" cy="3310304"/>
+            <a:chOff x="5048957" y="2128473"/>
+            <a:chExt cx="5592052" cy="2920123"/>
+          </a:xfrm>
+        </p:grpSpPr>
+        <p:pic>
+          <p:nvPicPr>
+            <p:cNvPr id="9" name="Picture 8">
+              <a:extLst>
+                <a:ext uri="{FF2B5EF4-FFF2-40B4-BE49-F238E27FC236}">
+                  <a16:creationId xmlns:a16="http://schemas.microsoft.com/office/drawing/2014/main" id="{F04FE17F-EA26-4159-D3FA-E24B481BB466}"/>
+                </a:ext>
+              </a:extLst>
+            </p:cNvPr>
+            <p:cNvPicPr>
+              <a:picLocks noChangeAspect="1"/>
+            </p:cNvPicPr>
+            <p:nvPr/>
+          </p:nvPicPr>
+          <p:blipFill>
+            <a:blip r:embed="rId3"/>
+            <a:stretch>
+              <a:fillRect/>
+            </a:stretch>
+          </p:blipFill>
+          <p:spPr>
+            <a:xfrm>
+              <a:off x="5048957" y="2128473"/>
+              <a:ext cx="5592052" cy="2850850"/>
+            </a:xfrm>
+            <a:prstGeom prst="rect">
+              <a:avLst/>
+            </a:prstGeom>
+          </p:spPr>
+        </p:pic>
+        <p:sp>
+          <p:nvSpPr>
+            <p:cNvPr id="6" name="Oval 5">
+              <a:extLst>
+                <a:ext uri="{FF2B5EF4-FFF2-40B4-BE49-F238E27FC236}">
+                  <a16:creationId xmlns:a16="http://schemas.microsoft.com/office/drawing/2014/main" id="{A32B97BC-3800-ACC5-7BFA-50147B7B6D49}"/>
+                </a:ext>
+              </a:extLst>
+            </p:cNvPr>
+            <p:cNvSpPr/>
+            <p:nvPr/>
+          </p:nvSpPr>
+          <p:spPr>
+            <a:xfrm>
+              <a:off x="9667703" y="2348513"/>
+              <a:ext cx="806334" cy="677321"/>
+            </a:xfrm>
+            <a:prstGeom prst="ellipse">
+              <a:avLst/>
+            </a:prstGeom>
+            <a:noFill/>
+            <a:ln w="28575">
+              <a:solidFill>
+                <a:srgbClr val="FF0000"/>
+              </a:solidFill>
+            </a:ln>
+          </p:spPr>
+          <p:style>
+            <a:lnRef idx="2">
+              <a:schemeClr val="accent1">
+                <a:shade val="15000"/>
+              </a:schemeClr>
+            </a:lnRef>
+            <a:fillRef idx="1">
+              <a:schemeClr val="accent1"/>
+            </a:fillRef>
+            <a:effectRef idx="0">
+              <a:schemeClr val="accent1"/>
+            </a:effectRef>
+            <a:fontRef idx="minor">
+              <a:schemeClr val="lt1"/>
+            </a:fontRef>
+          </p:style>
+          <p:txBody>
+            <a:bodyPr rtlCol="0" anchor="ctr"/>
+            <a:lstStyle/>
+            <a:p>
+              <a:pPr algn="ctr"/>
+              <a:endParaRPr lang="en-US"/>
+            </a:p>
+          </p:txBody>
+        </p:sp>
+        <p:sp>
+          <p:nvSpPr>
+            <p:cNvPr id="10" name="Oval 9">
+              <a:extLst>
+                <a:ext uri="{FF2B5EF4-FFF2-40B4-BE49-F238E27FC236}">
+                  <a16:creationId xmlns:a16="http://schemas.microsoft.com/office/drawing/2014/main" id="{D26600D9-4B00-4F31-3A6D-E2596CFC7619}"/>
+                </a:ext>
+              </a:extLst>
+            </p:cNvPr>
+            <p:cNvSpPr/>
+            <p:nvPr/>
+          </p:nvSpPr>
+          <p:spPr>
+            <a:xfrm>
+              <a:off x="9667703" y="3418199"/>
+              <a:ext cx="806334" cy="206149"/>
+            </a:xfrm>
+            <a:prstGeom prst="ellipse">
+              <a:avLst/>
+            </a:prstGeom>
+            <a:noFill/>
+            <a:ln w="38100">
+              <a:solidFill>
+                <a:schemeClr val="accent6"/>
+              </a:solidFill>
+            </a:ln>
+          </p:spPr>
+          <p:style>
+            <a:lnRef idx="2">
+              <a:schemeClr val="accent1">
+                <a:shade val="15000"/>
+              </a:schemeClr>
+            </a:lnRef>
+            <a:fillRef idx="1">
+              <a:schemeClr val="accent1"/>
+            </a:fillRef>
+            <a:effectRef idx="0">
+              <a:schemeClr val="accent1"/>
+            </a:effectRef>
+            <a:fontRef idx="minor">
+              <a:schemeClr val="lt1"/>
+            </a:fontRef>
+          </p:style>
+          <p:txBody>
+            <a:bodyPr rtlCol="0" anchor="ctr"/>
+            <a:lstStyle/>
+            <a:p>
+              <a:pPr algn="ctr"/>
+              <a:endParaRPr lang="en-US"/>
+            </a:p>
+          </p:txBody>
+        </p:sp>
+        <p:sp>
+          <p:nvSpPr>
+            <p:cNvPr id="12" name="Oval 11">
+              <a:extLst>
+                <a:ext uri="{FF2B5EF4-FFF2-40B4-BE49-F238E27FC236}">
+                  <a16:creationId xmlns:a16="http://schemas.microsoft.com/office/drawing/2014/main" id="{8A10C763-DA46-14E6-7C8A-BA0BEDAC3678}"/>
+                </a:ext>
+              </a:extLst>
+            </p:cNvPr>
+            <p:cNvSpPr/>
+            <p:nvPr/>
+          </p:nvSpPr>
+          <p:spPr>
+            <a:xfrm>
+              <a:off x="9667703" y="4114800"/>
+              <a:ext cx="806334" cy="502751"/>
+            </a:xfrm>
+            <a:prstGeom prst="ellipse">
+              <a:avLst/>
+            </a:prstGeom>
+            <a:noFill/>
+            <a:ln w="28575">
+              <a:solidFill>
+                <a:srgbClr val="FF0000"/>
+              </a:solidFill>
+            </a:ln>
+          </p:spPr>
+          <p:style>
+            <a:lnRef idx="2">
+              <a:schemeClr val="accent1">
+                <a:shade val="15000"/>
+              </a:schemeClr>
+            </a:lnRef>
+            <a:fillRef idx="1">
+              <a:schemeClr val="accent1"/>
+            </a:fillRef>
+            <a:effectRef idx="0">
+              <a:schemeClr val="accent1"/>
+            </a:effectRef>
+            <a:fontRef idx="minor">
+              <a:schemeClr val="lt1"/>
+            </a:fontRef>
+          </p:style>
+          <p:txBody>
+            <a:bodyPr rtlCol="0" anchor="ctr"/>
+            <a:lstStyle/>
+            <a:p>
+              <a:pPr algn="ctr"/>
+              <a:endParaRPr lang="en-US"/>
+            </a:p>
+          </p:txBody>
+        </p:sp>
+        <p:sp>
+          <p:nvSpPr>
+            <p:cNvPr id="14" name="Oval 13">
+              <a:extLst>
+                <a:ext uri="{FF2B5EF4-FFF2-40B4-BE49-F238E27FC236}">
+                  <a16:creationId xmlns:a16="http://schemas.microsoft.com/office/drawing/2014/main" id="{1370E709-4729-0F29-3C2F-A7DF2A616475}"/>
+                </a:ext>
+              </a:extLst>
+            </p:cNvPr>
+            <p:cNvSpPr/>
+            <p:nvPr/>
+          </p:nvSpPr>
+          <p:spPr>
+            <a:xfrm>
+              <a:off x="9667703" y="4545845"/>
+              <a:ext cx="806334" cy="502751"/>
+            </a:xfrm>
+            <a:prstGeom prst="ellipse">
+              <a:avLst/>
+            </a:prstGeom>
+            <a:noFill/>
+            <a:ln w="38100">
+              <a:solidFill>
+                <a:schemeClr val="accent4"/>
+              </a:solidFill>
+            </a:ln>
+          </p:spPr>
+          <p:style>
+            <a:lnRef idx="2">
+              <a:schemeClr val="accent1">
+                <a:shade val="15000"/>
+              </a:schemeClr>
+            </a:lnRef>
+            <a:fillRef idx="1">
+              <a:schemeClr val="accent1"/>
+            </a:fillRef>
+            <a:effectRef idx="0">
+              <a:schemeClr val="accent1"/>
+            </a:effectRef>
+            <a:fontRef idx="minor">
+              <a:schemeClr val="lt1"/>
+            </a:fontRef>
+          </p:style>
+          <p:txBody>
+            <a:bodyPr rtlCol="0" anchor="ctr"/>
+            <a:lstStyle/>
+            <a:p>
+              <a:pPr algn="ctr"/>
+              <a:endParaRPr lang="en-US"/>
+            </a:p>
+          </p:txBody>
+        </p:sp>
+      </p:grpSp>
     </p:spTree>
     <p:extLst>
       <p:ext uri="{BB962C8B-B14F-4D97-AF65-F5344CB8AC3E}">
@@ -8831,61 +9209,36 @@
           <a:bodyPr/>
           <a:lstStyle/>
           <a:p>
-            <a:endParaRPr lang="en-US" noProof="0" dirty="0"/>
-          </a:p>
-        </p:txBody>
-      </p:sp>
-      <p:sp>
-        <p:nvSpPr>
-          <p:cNvPr id="19" name="TextBox 18">
-            <a:extLst>
-              <a:ext uri="{FF2B5EF4-FFF2-40B4-BE49-F238E27FC236}">
-                <a16:creationId xmlns:a16="http://schemas.microsoft.com/office/drawing/2014/main" id="{A5213A0B-F2B1-2FBF-0110-D745941C8165}"/>
-              </a:ext>
-            </a:extLst>
-          </p:cNvPr>
-          <p:cNvSpPr txBox="1"/>
+            <a:r>
+              <a:rPr lang="en-US" noProof="0" dirty="0"/>
+              <a:t>Distributed</a:t>
+            </a:r>
+            <a:br>
+              <a:rPr lang="en-US" noProof="0" dirty="0"/>
+            </a:br>
+            <a:r>
+              <a:rPr lang="en-US" noProof="0" dirty="0"/>
+              <a:t>initialization</a:t>
+            </a:r>
+          </a:p>
+        </p:txBody>
+      </p:sp>
+      <p:sp>
+        <p:nvSpPr>
+          <p:cNvPr id="20" name="Rectangle 19">
+            <a:extLst>
+              <a:ext uri="{FF2B5EF4-FFF2-40B4-BE49-F238E27FC236}">
+                <a16:creationId xmlns:a16="http://schemas.microsoft.com/office/drawing/2014/main" id="{68DE49E3-54DC-3782-623E-9216D46CB5CE}"/>
+              </a:ext>
+            </a:extLst>
+          </p:cNvPr>
+          <p:cNvSpPr/>
           <p:nvPr/>
         </p:nvSpPr>
         <p:spPr>
           <a:xfrm>
-            <a:off x="5068379" y="3357547"/>
-            <a:ext cx="1037463" cy="369332"/>
-          </a:xfrm>
-          <a:prstGeom prst="rect">
-            <a:avLst/>
-          </a:prstGeom>
-          <a:noFill/>
-        </p:spPr>
-        <p:txBody>
-          <a:bodyPr wrap="none" rtlCol="0">
-            <a:spAutoFit/>
-          </a:bodyPr>
-          <a:lstStyle/>
-          <a:p>
-            <a:r>
-              <a:rPr lang="en-US" noProof="0" dirty="0"/>
-              <a:t>MPI type</a:t>
-            </a:r>
-          </a:p>
-        </p:txBody>
-      </p:sp>
-      <p:sp>
-        <p:nvSpPr>
-          <p:cNvPr id="20" name="Rectangle 19">
-            <a:extLst>
-              <a:ext uri="{FF2B5EF4-FFF2-40B4-BE49-F238E27FC236}">
-                <a16:creationId xmlns:a16="http://schemas.microsoft.com/office/drawing/2014/main" id="{68DE49E3-54DC-3782-623E-9216D46CB5CE}"/>
-              </a:ext>
-            </a:extLst>
-          </p:cNvPr>
-          <p:cNvSpPr/>
-          <p:nvPr/>
-        </p:nvSpPr>
-        <p:spPr>
-          <a:xfrm>
-            <a:off x="975360" y="2865120"/>
-            <a:ext cx="3457303" cy="2708366"/>
+            <a:off x="1075129" y="2865120"/>
+            <a:ext cx="3457303" cy="2931924"/>
           </a:xfrm>
           <a:prstGeom prst="rect">
             <a:avLst/>
@@ -8934,8 +9287,8 @@
         </p:nvCxnSpPr>
         <p:spPr>
           <a:xfrm>
-            <a:off x="2704012" y="2865120"/>
-            <a:ext cx="0" cy="2708366"/>
+            <a:off x="2803781" y="2865120"/>
+            <a:ext cx="0" cy="2931924"/>
           </a:xfrm>
           <a:prstGeom prst="line">
             <a:avLst/>
@@ -8972,14 +9325,12 @@
           </p:cNvPr>
           <p:cNvCxnSpPr>
             <a:cxnSpLocks/>
-            <a:stCxn id="20" idx="1"/>
-            <a:endCxn id="20" idx="3"/>
           </p:cNvCxnSpPr>
           <p:nvPr/>
         </p:nvCxnSpPr>
         <p:spPr>
           <a:xfrm>
-            <a:off x="975360" y="4219303"/>
+            <a:off x="1075128" y="3838224"/>
             <a:ext cx="3457303" cy="0"/>
           </a:xfrm>
           <a:prstGeom prst="line">
@@ -9006,50 +9357,6 @@
           </a:fontRef>
         </p:style>
       </p:cxnSp>
-      <p:sp>
-        <p:nvSpPr>
-          <p:cNvPr id="33" name="Right Brace 32">
-            <a:extLst>
-              <a:ext uri="{FF2B5EF4-FFF2-40B4-BE49-F238E27FC236}">
-                <a16:creationId xmlns:a16="http://schemas.microsoft.com/office/drawing/2014/main" id="{EEEB8DE7-AB06-ECAC-C59A-47F2BA36D502}"/>
-              </a:ext>
-            </a:extLst>
-          </p:cNvPr>
-          <p:cNvSpPr/>
-          <p:nvPr/>
-        </p:nvSpPr>
-        <p:spPr>
-          <a:xfrm>
-            <a:off x="4580708" y="2865123"/>
-            <a:ext cx="339626" cy="1354180"/>
-          </a:xfrm>
-          <a:prstGeom prst="rightBrace">
-            <a:avLst/>
-          </a:prstGeom>
-        </p:spPr>
-        <p:style>
-          <a:lnRef idx="2">
-            <a:schemeClr val="accent1"/>
-          </a:lnRef>
-          <a:fillRef idx="0">
-            <a:schemeClr val="accent1"/>
-          </a:fillRef>
-          <a:effectRef idx="1">
-            <a:schemeClr val="accent1"/>
-          </a:effectRef>
-          <a:fontRef idx="minor">
-            <a:schemeClr val="tx1"/>
-          </a:fontRef>
-        </p:style>
-        <p:txBody>
-          <a:bodyPr rtlCol="0" anchor="ctr"/>
-          <a:lstStyle/>
-          <a:p>
-            <a:pPr algn="ctr"/>
-            <a:endParaRPr lang="en-US" noProof="0" dirty="0"/>
-          </a:p>
-        </p:txBody>
-      </p:sp>
       <p:cxnSp>
         <p:nvCxnSpPr>
           <p:cNvPr id="35" name="Straight Connector 34">
@@ -9059,13 +9366,15 @@
               </a:ext>
             </a:extLst>
           </p:cNvPr>
-          <p:cNvCxnSpPr/>
+          <p:cNvCxnSpPr>
+            <a:cxnSpLocks/>
+          </p:cNvCxnSpPr>
           <p:nvPr/>
         </p:nvCxnSpPr>
         <p:spPr>
-          <a:xfrm>
-            <a:off x="1776549" y="3622766"/>
-            <a:ext cx="3810561" cy="2542903"/>
+          <a:xfrm flipH="1" flipV="1">
+            <a:off x="838200" y="2485505"/>
+            <a:ext cx="938349" cy="1137261"/>
           </a:xfrm>
           <a:prstGeom prst="line">
             <a:avLst/>
@@ -9106,9 +9415,9 @@
           <p:nvPr/>
         </p:nvCxnSpPr>
         <p:spPr>
-          <a:xfrm>
-            <a:off x="3587931" y="3622766"/>
-            <a:ext cx="1999179" cy="2542903"/>
+          <a:xfrm flipV="1">
+            <a:off x="3587931" y="2394065"/>
+            <a:ext cx="228202" cy="1228701"/>
           </a:xfrm>
           <a:prstGeom prst="line">
             <a:avLst/>
@@ -9149,9 +9458,9 @@
           <p:nvPr/>
         </p:nvCxnSpPr>
         <p:spPr>
-          <a:xfrm>
-            <a:off x="1776549" y="5042263"/>
-            <a:ext cx="3810561" cy="1109118"/>
+          <a:xfrm flipH="1">
+            <a:off x="981516" y="4417583"/>
+            <a:ext cx="728828" cy="42675"/>
           </a:xfrm>
           <a:prstGeom prst="line">
             <a:avLst/>
@@ -9191,8 +9500,8 @@
         </p:nvSpPr>
         <p:spPr>
           <a:xfrm>
-            <a:off x="5621944" y="5981003"/>
-            <a:ext cx="3115661" cy="369332"/>
+            <a:off x="6776428" y="716132"/>
+            <a:ext cx="3461910" cy="369332"/>
           </a:xfrm>
           <a:prstGeom prst="rect">
             <a:avLst/>
@@ -9205,6 +9514,9 @@
           </a:bodyPr>
           <a:lstStyle/>
           <a:p>
+            <a:pPr marL="342900" indent="-342900">
+              <a:buAutoNum type="arabicPeriod"/>
+            </a:pPr>
             <a:r>
               <a:rPr lang="en-US" noProof="0" dirty="0"/>
               <a:t>Binding to MPI communicator</a:t>
@@ -9214,10 +9526,111 @@
       </p:sp>
       <p:sp>
         <p:nvSpPr>
-          <p:cNvPr id="44" name="TextBox 43">
-            <a:extLst>
-              <a:ext uri="{FF2B5EF4-FFF2-40B4-BE49-F238E27FC236}">
-                <a16:creationId xmlns:a16="http://schemas.microsoft.com/office/drawing/2014/main" id="{00612D55-36C9-6C61-DF21-5AA00D7D6F03}"/>
+          <p:cNvPr id="2" name="Date Placeholder 1">
+            <a:extLst>
+              <a:ext uri="{FF2B5EF4-FFF2-40B4-BE49-F238E27FC236}">
+                <a16:creationId xmlns:a16="http://schemas.microsoft.com/office/drawing/2014/main" id="{29057125-4E7B-776B-DCD0-38C2BDDEA0EE}"/>
+              </a:ext>
+            </a:extLst>
+          </p:cNvPr>
+          <p:cNvSpPr>
+            <a:spLocks noGrp="1"/>
+          </p:cNvSpPr>
+          <p:nvPr>
+            <p:ph type="dt" sz="half" idx="10"/>
+          </p:nvPr>
+        </p:nvSpPr>
+        <p:spPr/>
+        <p:txBody>
+          <a:bodyPr/>
+          <a:lstStyle/>
+          <a:p>
+            <a:fld id="{6D8553D1-8D82-4D70-AAA7-91480DF3CCDB}" type="datetime1">
+              <a:rPr lang="en-US" smtClean="0"/>
+              <a:t>8/27/2026</a:t>
+            </a:fld>
+            <a:endParaRPr lang="en-US"/>
+          </a:p>
+        </p:txBody>
+      </p:sp>
+      <p:sp>
+        <p:nvSpPr>
+          <p:cNvPr id="3" name="Slide Number Placeholder 2">
+            <a:extLst>
+              <a:ext uri="{FF2B5EF4-FFF2-40B4-BE49-F238E27FC236}">
+                <a16:creationId xmlns:a16="http://schemas.microsoft.com/office/drawing/2014/main" id="{850D6802-E8E6-C834-23FA-38D2C05CB2AB}"/>
+              </a:ext>
+            </a:extLst>
+          </p:cNvPr>
+          <p:cNvSpPr>
+            <a:spLocks noGrp="1"/>
+          </p:cNvSpPr>
+          <p:nvPr>
+            <p:ph type="sldNum" sz="quarter" idx="12"/>
+          </p:nvPr>
+        </p:nvSpPr>
+        <p:spPr/>
+        <p:txBody>
+          <a:bodyPr/>
+          <a:lstStyle/>
+          <a:p>
+            <a:fld id="{DA0BB241-1B5F-4309-9407-9EEA04D9598D}" type="slidenum">
+              <a:rPr lang="en-US" smtClean="0"/>
+              <a:t>12</a:t>
+            </a:fld>
+            <a:endParaRPr lang="en-US"/>
+          </a:p>
+        </p:txBody>
+      </p:sp>
+      <p:cxnSp>
+        <p:nvCxnSpPr>
+          <p:cNvPr id="8" name="Straight Connector 7">
+            <a:extLst>
+              <a:ext uri="{FF2B5EF4-FFF2-40B4-BE49-F238E27FC236}">
+                <a16:creationId xmlns:a16="http://schemas.microsoft.com/office/drawing/2014/main" id="{ED003267-ED43-03B4-278E-5280E26920E3}"/>
+              </a:ext>
+            </a:extLst>
+          </p:cNvPr>
+          <p:cNvCxnSpPr>
+            <a:cxnSpLocks/>
+          </p:cNvCxnSpPr>
+          <p:nvPr/>
+        </p:nvCxnSpPr>
+        <p:spPr>
+          <a:xfrm>
+            <a:off x="3546388" y="4401480"/>
+            <a:ext cx="1020023" cy="65621"/>
+          </a:xfrm>
+          <a:prstGeom prst="line">
+            <a:avLst/>
+          </a:prstGeom>
+          <a:ln>
+            <a:solidFill>
+              <a:schemeClr val="tx1"/>
+            </a:solidFill>
+          </a:ln>
+        </p:spPr>
+        <p:style>
+          <a:lnRef idx="2">
+            <a:schemeClr val="accent1"/>
+          </a:lnRef>
+          <a:fillRef idx="0">
+            <a:schemeClr val="accent1"/>
+          </a:fillRef>
+          <a:effectRef idx="1">
+            <a:schemeClr val="accent1"/>
+          </a:effectRef>
+          <a:fontRef idx="minor">
+            <a:schemeClr val="tx1"/>
+          </a:fontRef>
+        </p:style>
+      </p:cxnSp>
+      <p:sp>
+        <p:nvSpPr>
+          <p:cNvPr id="11" name="TextBox 10">
+            <a:extLst>
+              <a:ext uri="{FF2B5EF4-FFF2-40B4-BE49-F238E27FC236}">
+                <a16:creationId xmlns:a16="http://schemas.microsoft.com/office/drawing/2014/main" id="{B5296D5F-A05B-5F58-38B3-8D1590117EB3}"/>
               </a:ext>
             </a:extLst>
           </p:cNvPr>
@@ -9226,8 +9639,8 @@
         </p:nvSpPr>
         <p:spPr>
           <a:xfrm>
-            <a:off x="1776549" y="2211977"/>
-            <a:ext cx="1398268" cy="369332"/>
+            <a:off x="460852" y="2024733"/>
+            <a:ext cx="1253869" cy="369332"/>
           </a:xfrm>
           <a:prstGeom prst="rect">
             <a:avLst/>
@@ -9241,35 +9654,18 @@
           <a:lstStyle/>
           <a:p>
             <a:r>
-              <a:rPr lang="en-US" noProof="0" dirty="0">
-                <a:solidFill>
-                  <a:srgbClr val="FF0000"/>
-                </a:solidFill>
-              </a:rPr>
-              <a:t>TODO </a:t>
-            </a:r>
-            <a:r>
-              <a:rPr lang="en-US" noProof="0" dirty="0" err="1">
-                <a:solidFill>
-                  <a:srgbClr val="FF0000"/>
-                </a:solidFill>
-              </a:rPr>
-              <a:t>Noarr</a:t>
-            </a:r>
-            <a:endParaRPr lang="en-US" noProof="0" dirty="0">
-              <a:solidFill>
-                <a:srgbClr val="FF0000"/>
-              </a:solidFill>
-            </a:endParaRPr>
-          </a:p>
-        </p:txBody>
-      </p:sp>
-      <p:sp>
-        <p:nvSpPr>
-          <p:cNvPr id="46" name="TextBox 45">
-            <a:extLst>
-              <a:ext uri="{FF2B5EF4-FFF2-40B4-BE49-F238E27FC236}">
-                <a16:creationId xmlns:a16="http://schemas.microsoft.com/office/drawing/2014/main" id="{4C65FA3D-9669-4004-2E6D-A1DA7F591C7C}"/>
+              <a:rPr lang="en-US" dirty="0"/>
+              <a:t>Node 0 tile</a:t>
+            </a:r>
+          </a:p>
+        </p:txBody>
+      </p:sp>
+      <p:sp>
+        <p:nvSpPr>
+          <p:cNvPr id="13" name="TextBox 12">
+            <a:extLst>
+              <a:ext uri="{FF2B5EF4-FFF2-40B4-BE49-F238E27FC236}">
+                <a16:creationId xmlns:a16="http://schemas.microsoft.com/office/drawing/2014/main" id="{E01F05D8-0601-7358-07BD-D86E1609A0BD}"/>
               </a:ext>
             </a:extLst>
           </p:cNvPr>
@@ -9278,8 +9674,8 @@
         </p:nvSpPr>
         <p:spPr>
           <a:xfrm>
-            <a:off x="6388299" y="3357547"/>
-            <a:ext cx="2638992" cy="369332"/>
+            <a:off x="3567424" y="2055580"/>
+            <a:ext cx="1253869" cy="369332"/>
           </a:xfrm>
           <a:prstGeom prst="rect">
             <a:avLst/>
@@ -9293,22 +9689,18 @@
           <a:lstStyle/>
           <a:p>
             <a:r>
-              <a:rPr lang="en-US" noProof="0" dirty="0">
-                <a:solidFill>
-                  <a:srgbClr val="FF0000"/>
-                </a:solidFill>
-              </a:rPr>
-              <a:t>TODO actual description</a:t>
-            </a:r>
-          </a:p>
-        </p:txBody>
-      </p:sp>
-      <p:sp>
-        <p:nvSpPr>
-          <p:cNvPr id="48" name="TextBox 47">
-            <a:extLst>
-              <a:ext uri="{FF2B5EF4-FFF2-40B4-BE49-F238E27FC236}">
-                <a16:creationId xmlns:a16="http://schemas.microsoft.com/office/drawing/2014/main" id="{F5881909-F7F8-DD2C-3387-287BA8E13CE5}"/>
+              <a:rPr lang="en-US" dirty="0"/>
+              <a:t>Node 1 tile</a:t>
+            </a:r>
+          </a:p>
+        </p:txBody>
+      </p:sp>
+      <p:sp>
+        <p:nvSpPr>
+          <p:cNvPr id="15" name="TextBox 14">
+            <a:extLst>
+              <a:ext uri="{FF2B5EF4-FFF2-40B4-BE49-F238E27FC236}">
+                <a16:creationId xmlns:a16="http://schemas.microsoft.com/office/drawing/2014/main" id="{9F061358-0F0F-A077-E956-FC8F9870197C}"/>
               </a:ext>
             </a:extLst>
           </p:cNvPr>
@@ -9317,8 +9709,8 @@
         </p:nvSpPr>
         <p:spPr>
           <a:xfrm>
-            <a:off x="5860278" y="6308209"/>
-            <a:ext cx="2074735" cy="369332"/>
+            <a:off x="-76502" y="4166154"/>
+            <a:ext cx="1253869" cy="369332"/>
           </a:xfrm>
           <a:prstGeom prst="rect">
             <a:avLst/>
@@ -9332,22 +9724,18 @@
           <a:lstStyle/>
           <a:p>
             <a:r>
-              <a:rPr lang="en-US" noProof="0" dirty="0">
-                <a:solidFill>
-                  <a:srgbClr val="FF0000"/>
-                </a:solidFill>
-              </a:rPr>
-              <a:t>TODO the mapping</a:t>
-            </a:r>
-          </a:p>
-        </p:txBody>
-      </p:sp>
-      <p:sp>
-        <p:nvSpPr>
-          <p:cNvPr id="50" name="TextBox 49">
-            <a:extLst>
-              <a:ext uri="{FF2B5EF4-FFF2-40B4-BE49-F238E27FC236}">
-                <a16:creationId xmlns:a16="http://schemas.microsoft.com/office/drawing/2014/main" id="{F37A857B-EB77-6965-42EF-0448615590BE}"/>
+              <a:rPr lang="en-US" dirty="0"/>
+              <a:t>Node 2 tile</a:t>
+            </a:r>
+          </a:p>
+        </p:txBody>
+      </p:sp>
+      <p:sp>
+        <p:nvSpPr>
+          <p:cNvPr id="17" name="TextBox 16">
+            <a:extLst>
+              <a:ext uri="{FF2B5EF4-FFF2-40B4-BE49-F238E27FC236}">
+                <a16:creationId xmlns:a16="http://schemas.microsoft.com/office/drawing/2014/main" id="{C63BF661-92F9-FB3E-6644-A624F3682A41}"/>
               </a:ext>
             </a:extLst>
           </p:cNvPr>
@@ -9356,8 +9744,8 @@
         </p:nvSpPr>
         <p:spPr>
           <a:xfrm>
-            <a:off x="7536678" y="4299943"/>
-            <a:ext cx="3880229" cy="369332"/>
+            <a:off x="4566411" y="4319175"/>
+            <a:ext cx="1253869" cy="369332"/>
           </a:xfrm>
           <a:prstGeom prst="rect">
             <a:avLst/>
@@ -9371,74 +9759,1381 @@
           <a:lstStyle/>
           <a:p>
             <a:r>
+              <a:rPr lang="en-US" dirty="0"/>
+              <a:t>Node 3 tile</a:t>
+            </a:r>
+          </a:p>
+        </p:txBody>
+      </p:sp>
+      <p:sp>
+        <p:nvSpPr>
+          <p:cNvPr id="21" name="TextBox 20">
+            <a:extLst>
+              <a:ext uri="{FF2B5EF4-FFF2-40B4-BE49-F238E27FC236}">
+                <a16:creationId xmlns:a16="http://schemas.microsoft.com/office/drawing/2014/main" id="{E9081B18-2097-F218-444D-8457FDAFE687}"/>
+              </a:ext>
+            </a:extLst>
+          </p:cNvPr>
+          <p:cNvSpPr txBox="1"/>
+          <p:nvPr/>
+        </p:nvSpPr>
+        <p:spPr>
+          <a:xfrm>
+            <a:off x="6776428" y="4773837"/>
+            <a:ext cx="5023363" cy="369332"/>
+          </a:xfrm>
+          <a:prstGeom prst="rect">
+            <a:avLst/>
+          </a:prstGeom>
+          <a:noFill/>
+        </p:spPr>
+        <p:txBody>
+          <a:bodyPr wrap="none" rtlCol="0">
+            <a:spAutoFit/>
+          </a:bodyPr>
+          <a:lstStyle/>
+          <a:p>
+            <a:pPr marL="342900" indent="-342900">
+              <a:buFont typeface="+mj-lt"/>
+              <a:buAutoNum type="arabicPeriod" startAt="2"/>
+            </a:pPr>
+            <a:r>
+              <a:rPr lang="en-US" noProof="0" dirty="0"/>
+              <a:t>Automatic Layout </a:t>
+            </a:r>
+            <a:r>
               <a:rPr lang="en-US" noProof="0" dirty="0">
-                <a:solidFill>
-                  <a:srgbClr val="FF0000"/>
-                </a:solidFill>
-              </a:rPr>
-              <a:t>TODO this can be done automatically</a:t>
-            </a:r>
-          </a:p>
-        </p:txBody>
-      </p:sp>
-      <p:sp>
-        <p:nvSpPr>
-          <p:cNvPr id="2" name="Date Placeholder 1">
-            <a:extLst>
-              <a:ext uri="{FF2B5EF4-FFF2-40B4-BE49-F238E27FC236}">
-                <a16:creationId xmlns:a16="http://schemas.microsoft.com/office/drawing/2014/main" id="{29057125-4E7B-776B-DCD0-38C2BDDEA0EE}"/>
-              </a:ext>
-            </a:extLst>
-          </p:cNvPr>
-          <p:cNvSpPr>
-            <a:spLocks noGrp="1"/>
-          </p:cNvSpPr>
-          <p:nvPr>
-            <p:ph type="dt" sz="half" idx="10"/>
-          </p:nvPr>
-        </p:nvSpPr>
-        <p:spPr/>
-        <p:txBody>
-          <a:bodyPr/>
-          <a:lstStyle/>
-          <a:p>
-            <a:fld id="{6D8553D1-8D82-4D70-AAA7-91480DF3CCDB}" type="datetime1">
-              <a:rPr lang="en-US" smtClean="0"/>
-              <a:t>8/26/2026</a:t>
-            </a:fld>
+                <a:sym typeface="Wingdings" panose="05000000000000000000" pitchFamily="2" charset="2"/>
+              </a:rPr>
+              <a:t> MPI datatype translation</a:t>
+            </a:r>
+            <a:endParaRPr lang="en-US" noProof="0" dirty="0"/>
+          </a:p>
+        </p:txBody>
+      </p:sp>
+      <p:sp>
+        <p:nvSpPr>
+          <p:cNvPr id="25" name="TextBox 24">
+            <a:extLst>
+              <a:ext uri="{FF2B5EF4-FFF2-40B4-BE49-F238E27FC236}">
+                <a16:creationId xmlns:a16="http://schemas.microsoft.com/office/drawing/2014/main" id="{770A04A5-C71E-DF2C-A354-3E03F875058A}"/>
+              </a:ext>
+            </a:extLst>
+          </p:cNvPr>
+          <p:cNvSpPr txBox="1"/>
+          <p:nvPr/>
+        </p:nvSpPr>
+        <p:spPr>
+          <a:xfrm>
+            <a:off x="4807390" y="1085464"/>
+            <a:ext cx="7708119" cy="3212418"/>
+          </a:xfrm>
+          <a:prstGeom prst="rect">
+            <a:avLst/>
+          </a:prstGeom>
+          <a:noFill/>
+          <a:ln>
+            <a:solidFill>
+              <a:schemeClr val="tx1"/>
+            </a:solidFill>
+          </a:ln>
+        </p:spPr>
+        <p:txBody>
+          <a:bodyPr wrap="square">
+            <a:spAutoFit/>
+          </a:bodyPr>
+          <a:lstStyle/>
+          <a:p>
+            <a:pPr>
+              <a:lnSpc>
+                <a:spcPct val="113095"/>
+              </a:lnSpc>
+              <a:buNone/>
+            </a:pPr>
+            <a:r>
+              <a:rPr lang="en-US" b="0" dirty="0">
+                <a:solidFill>
+                  <a:srgbClr val="267F99"/>
+                </a:solidFill>
+                <a:effectLst/>
+                <a:latin typeface="Fira Code" panose="020B0809050000020004" pitchFamily="49" charset="0"/>
+              </a:rPr>
+              <a:t>auto</a:t>
+            </a:r>
+            <a:r>
+              <a:rPr lang="en-US" b="0" dirty="0">
+                <a:solidFill>
+                  <a:srgbClr val="000000"/>
+                </a:solidFill>
+                <a:effectLst/>
+                <a:latin typeface="Fira Code" panose="020B0809050000020004" pitchFamily="49" charset="0"/>
+              </a:rPr>
+              <a:t> </a:t>
+            </a:r>
+            <a:r>
+              <a:rPr lang="en-US" b="0" dirty="0" err="1">
+                <a:solidFill>
+                  <a:srgbClr val="001080"/>
+                </a:solidFill>
+                <a:effectLst/>
+                <a:latin typeface="Fira Code" panose="020B0809050000020004" pitchFamily="49" charset="0"/>
+              </a:rPr>
+              <a:t>trav</a:t>
+            </a:r>
+            <a:r>
+              <a:rPr lang="en-US" b="0" dirty="0">
+                <a:solidFill>
+                  <a:srgbClr val="000000"/>
+                </a:solidFill>
+                <a:effectLst/>
+                <a:latin typeface="Fira Code" panose="020B0809050000020004" pitchFamily="49" charset="0"/>
+              </a:rPr>
+              <a:t> = </a:t>
+            </a:r>
+            <a:r>
+              <a:rPr lang="en-US" b="0" dirty="0">
+                <a:solidFill>
+                  <a:srgbClr val="795E26"/>
+                </a:solidFill>
+                <a:effectLst/>
+                <a:latin typeface="Fira Code" panose="020B0809050000020004" pitchFamily="49" charset="0"/>
+              </a:rPr>
+              <a:t>traverser</a:t>
+            </a:r>
+            <a:r>
+              <a:rPr lang="en-US" b="0" dirty="0">
+                <a:solidFill>
+                  <a:srgbClr val="000000"/>
+                </a:solidFill>
+                <a:effectLst/>
+                <a:latin typeface="Fira Code" panose="020B0809050000020004" pitchFamily="49" charset="0"/>
+              </a:rPr>
+              <a:t>(</a:t>
+            </a:r>
+            <a:r>
+              <a:rPr lang="en-US" b="0" dirty="0">
+                <a:solidFill>
+                  <a:srgbClr val="0070C1"/>
+                </a:solidFill>
+                <a:effectLst/>
+                <a:latin typeface="Fira Code" panose="020B0809050000020004" pitchFamily="49" charset="0"/>
+              </a:rPr>
+              <a:t>Data</a:t>
+            </a:r>
+            <a:r>
+              <a:rPr lang="en-US" b="0" dirty="0">
+                <a:solidFill>
+                  <a:srgbClr val="000000"/>
+                </a:solidFill>
+                <a:effectLst/>
+                <a:latin typeface="Fira Code" panose="020B0809050000020004" pitchFamily="49" charset="0"/>
+              </a:rPr>
+              <a:t>)</a:t>
+            </a:r>
+          </a:p>
+          <a:p>
+            <a:pPr>
+              <a:lnSpc>
+                <a:spcPct val="113095"/>
+              </a:lnSpc>
+              <a:buNone/>
+            </a:pPr>
+            <a:r>
+              <a:rPr lang="en-US" b="0" dirty="0">
+                <a:solidFill>
+                  <a:srgbClr val="000000"/>
+                </a:solidFill>
+                <a:effectLst/>
+                <a:latin typeface="Fira Code" panose="020B0809050000020004" pitchFamily="49" charset="0"/>
+              </a:rPr>
+              <a:t>          ^ </a:t>
+            </a:r>
+            <a:r>
+              <a:rPr lang="en-US" b="0" dirty="0" err="1">
+                <a:solidFill>
+                  <a:srgbClr val="795E26"/>
+                </a:solidFill>
+                <a:effectLst/>
+                <a:latin typeface="Fira Code" panose="020B0809050000020004" pitchFamily="49" charset="0"/>
+              </a:rPr>
+              <a:t>set_length</a:t>
+            </a:r>
+            <a:r>
+              <a:rPr lang="en-US" b="0" dirty="0">
+                <a:solidFill>
+                  <a:srgbClr val="000000"/>
+                </a:solidFill>
+                <a:effectLst/>
+                <a:latin typeface="Fira Code" panose="020B0809050000020004" pitchFamily="49" charset="0"/>
+              </a:rPr>
+              <a:t>&lt;</a:t>
+            </a:r>
+            <a:r>
+              <a:rPr lang="en-US" b="0" dirty="0">
+                <a:solidFill>
+                  <a:srgbClr val="A31515"/>
+                </a:solidFill>
+                <a:effectLst/>
+                <a:latin typeface="Fira Code" panose="020B0809050000020004" pitchFamily="49" charset="0"/>
+              </a:rPr>
+              <a:t>'I'</a:t>
+            </a:r>
+            <a:r>
+              <a:rPr lang="en-US" b="0" dirty="0">
+                <a:solidFill>
+                  <a:srgbClr val="000000"/>
+                </a:solidFill>
+                <a:effectLst/>
+                <a:latin typeface="Fira Code" panose="020B0809050000020004" pitchFamily="49" charset="0"/>
+              </a:rPr>
+              <a:t>&gt;(</a:t>
+            </a:r>
+            <a:r>
+              <a:rPr lang="en-US" b="0" dirty="0">
+                <a:solidFill>
+                  <a:srgbClr val="0070C1"/>
+                </a:solidFill>
+                <a:effectLst/>
+                <a:latin typeface="Fira Code" panose="020B0809050000020004" pitchFamily="49" charset="0"/>
+              </a:rPr>
+              <a:t>2</a:t>
+            </a:r>
+            <a:r>
+              <a:rPr lang="en-US" b="0" dirty="0">
+                <a:solidFill>
+                  <a:srgbClr val="000000"/>
+                </a:solidFill>
+                <a:effectLst/>
+                <a:latin typeface="Fira Code" panose="020B0809050000020004" pitchFamily="49" charset="0"/>
+              </a:rPr>
+              <a:t>)</a:t>
+            </a:r>
+          </a:p>
+          <a:p>
+            <a:pPr>
+              <a:lnSpc>
+                <a:spcPct val="113095"/>
+              </a:lnSpc>
+              <a:buNone/>
+            </a:pPr>
+            <a:r>
+              <a:rPr lang="en-US" b="0" dirty="0">
+                <a:solidFill>
+                  <a:srgbClr val="000000"/>
+                </a:solidFill>
+                <a:effectLst/>
+                <a:latin typeface="Fira Code" panose="020B0809050000020004" pitchFamily="49" charset="0"/>
+              </a:rPr>
+              <a:t>          ^ </a:t>
+            </a:r>
+            <a:r>
+              <a:rPr lang="en-US" b="0" dirty="0" err="1">
+                <a:solidFill>
+                  <a:srgbClr val="795E26"/>
+                </a:solidFill>
+                <a:effectLst/>
+                <a:latin typeface="Fira Code" panose="020B0809050000020004" pitchFamily="49" charset="0"/>
+              </a:rPr>
+              <a:t>merge_blocks</a:t>
+            </a:r>
+            <a:r>
+              <a:rPr lang="en-US" b="0" dirty="0">
+                <a:solidFill>
+                  <a:srgbClr val="000000"/>
+                </a:solidFill>
+                <a:effectLst/>
+                <a:latin typeface="Fira Code" panose="020B0809050000020004" pitchFamily="49" charset="0"/>
+              </a:rPr>
+              <a:t>&lt;</a:t>
+            </a:r>
+            <a:r>
+              <a:rPr lang="en-US" b="0" dirty="0">
+                <a:solidFill>
+                  <a:srgbClr val="A31515"/>
+                </a:solidFill>
+                <a:effectLst/>
+                <a:latin typeface="Fira Code" panose="020B0809050000020004" pitchFamily="49" charset="0"/>
+              </a:rPr>
+              <a:t>'I'</a:t>
+            </a:r>
+            <a:r>
+              <a:rPr lang="en-US" b="0" dirty="0">
+                <a:solidFill>
+                  <a:srgbClr val="000000"/>
+                </a:solidFill>
+                <a:effectLst/>
+                <a:latin typeface="Fira Code" panose="020B0809050000020004" pitchFamily="49" charset="0"/>
+              </a:rPr>
+              <a:t>, </a:t>
+            </a:r>
+            <a:r>
+              <a:rPr lang="en-US" b="0" dirty="0">
+                <a:solidFill>
+                  <a:srgbClr val="A31515"/>
+                </a:solidFill>
+                <a:effectLst/>
+                <a:latin typeface="Fira Code" panose="020B0809050000020004" pitchFamily="49" charset="0"/>
+              </a:rPr>
+              <a:t>'J'</a:t>
+            </a:r>
+            <a:r>
+              <a:rPr lang="en-US" b="0" dirty="0">
+                <a:solidFill>
+                  <a:srgbClr val="000000"/>
+                </a:solidFill>
+                <a:effectLst/>
+                <a:latin typeface="Fira Code" panose="020B0809050000020004" pitchFamily="49" charset="0"/>
+              </a:rPr>
+              <a:t>, </a:t>
+            </a:r>
+            <a:r>
+              <a:rPr lang="en-US" b="0" dirty="0">
+                <a:solidFill>
+                  <a:srgbClr val="A31515"/>
+                </a:solidFill>
+                <a:effectLst/>
+                <a:latin typeface="Fira Code" panose="020B0809050000020004" pitchFamily="49" charset="0"/>
+              </a:rPr>
+              <a:t>'r'</a:t>
+            </a:r>
+            <a:r>
+              <a:rPr lang="en-US" b="0" dirty="0">
+                <a:solidFill>
+                  <a:srgbClr val="000000"/>
+                </a:solidFill>
+                <a:effectLst/>
+                <a:latin typeface="Fira Code" panose="020B0809050000020004" pitchFamily="49" charset="0"/>
+              </a:rPr>
+              <a:t>&gt;();</a:t>
+            </a:r>
+          </a:p>
+          <a:p>
+            <a:pPr>
+              <a:lnSpc>
+                <a:spcPct val="113095"/>
+              </a:lnSpc>
+              <a:buNone/>
+            </a:pPr>
+            <a:endParaRPr lang="en-US" b="0" dirty="0">
+              <a:solidFill>
+                <a:srgbClr val="000000"/>
+              </a:solidFill>
+              <a:effectLst/>
+              <a:latin typeface="Fira Code" panose="020B0809050000020004" pitchFamily="49" charset="0"/>
+            </a:endParaRPr>
+          </a:p>
+          <a:p>
+            <a:pPr>
+              <a:lnSpc>
+                <a:spcPct val="113095"/>
+              </a:lnSpc>
+              <a:buNone/>
+            </a:pPr>
+            <a:r>
+              <a:rPr lang="en-US" b="0" dirty="0">
+                <a:solidFill>
+                  <a:srgbClr val="267F99"/>
+                </a:solidFill>
+                <a:effectLst/>
+                <a:latin typeface="Fira Code" panose="020B0809050000020004" pitchFamily="49" charset="0"/>
+              </a:rPr>
+              <a:t>auto</a:t>
+            </a:r>
+            <a:r>
+              <a:rPr lang="en-US" b="0" dirty="0">
+                <a:solidFill>
+                  <a:srgbClr val="000000"/>
+                </a:solidFill>
+                <a:effectLst/>
+                <a:latin typeface="Fira Code" panose="020B0809050000020004" pitchFamily="49" charset="0"/>
+              </a:rPr>
+              <a:t> </a:t>
+            </a:r>
+            <a:r>
+              <a:rPr lang="en-US" b="0" dirty="0" err="1">
+                <a:solidFill>
+                  <a:srgbClr val="001080"/>
+                </a:solidFill>
+                <a:effectLst/>
+                <a:latin typeface="Fira Code" panose="020B0809050000020004" pitchFamily="49" charset="0"/>
+              </a:rPr>
+              <a:t>MPItrav</a:t>
+            </a:r>
+            <a:r>
+              <a:rPr lang="en-US" b="0" dirty="0">
+                <a:solidFill>
+                  <a:srgbClr val="000000"/>
+                </a:solidFill>
+                <a:effectLst/>
+                <a:latin typeface="Fira Code" panose="020B0809050000020004" pitchFamily="49" charset="0"/>
+              </a:rPr>
+              <a:t> = </a:t>
+            </a:r>
+            <a:r>
+              <a:rPr lang="en-US" b="0" dirty="0" err="1">
+                <a:solidFill>
+                  <a:srgbClr val="795E26"/>
+                </a:solidFill>
+                <a:effectLst/>
+                <a:latin typeface="Fira Code" panose="020B0809050000020004" pitchFamily="49" charset="0"/>
+              </a:rPr>
+              <a:t>mpi_traverser</a:t>
+            </a:r>
+            <a:r>
+              <a:rPr lang="en-US" b="0" dirty="0">
+                <a:solidFill>
+                  <a:srgbClr val="000000"/>
+                </a:solidFill>
+                <a:effectLst/>
+                <a:latin typeface="Fira Code" panose="020B0809050000020004" pitchFamily="49" charset="0"/>
+              </a:rPr>
+              <a:t>&lt;</a:t>
+            </a:r>
+            <a:r>
+              <a:rPr lang="en-US" b="0" dirty="0">
+                <a:solidFill>
+                  <a:srgbClr val="A31515"/>
+                </a:solidFill>
+                <a:effectLst/>
+                <a:latin typeface="Fira Code" panose="020B0809050000020004" pitchFamily="49" charset="0"/>
+              </a:rPr>
+              <a:t>'r'</a:t>
+            </a:r>
+            <a:r>
+              <a:rPr lang="en-US" b="0" dirty="0">
+                <a:solidFill>
+                  <a:srgbClr val="000000"/>
+                </a:solidFill>
+                <a:effectLst/>
+                <a:latin typeface="Fira Code" panose="020B0809050000020004" pitchFamily="49" charset="0"/>
+              </a:rPr>
+              <a:t>&gt;(</a:t>
+            </a:r>
+            <a:r>
+              <a:rPr lang="en-US" b="0" dirty="0" err="1">
+                <a:solidFill>
+                  <a:srgbClr val="001080"/>
+                </a:solidFill>
+                <a:effectLst/>
+                <a:latin typeface="Fira Code" panose="020B0809050000020004" pitchFamily="49" charset="0"/>
+              </a:rPr>
+              <a:t>trav</a:t>
+            </a:r>
+            <a:r>
+              <a:rPr lang="en-US" b="0" dirty="0">
+                <a:solidFill>
+                  <a:srgbClr val="000000"/>
+                </a:solidFill>
+                <a:effectLst/>
+                <a:latin typeface="Fira Code" panose="020B0809050000020004" pitchFamily="49" charset="0"/>
+              </a:rPr>
+              <a:t>, </a:t>
+            </a:r>
+            <a:r>
+              <a:rPr lang="en-US" b="0" dirty="0">
+                <a:solidFill>
+                  <a:srgbClr val="0000FF"/>
+                </a:solidFill>
+                <a:effectLst/>
+                <a:latin typeface="Fira Code" panose="020B0809050000020004" pitchFamily="49" charset="0"/>
+              </a:rPr>
+              <a:t>COMM_WORLD</a:t>
+            </a:r>
+            <a:r>
+              <a:rPr lang="en-US" b="0" dirty="0">
+                <a:solidFill>
+                  <a:srgbClr val="000000"/>
+                </a:solidFill>
+                <a:effectLst/>
+                <a:latin typeface="Fira Code" panose="020B0809050000020004" pitchFamily="49" charset="0"/>
+              </a:rPr>
+              <a:t>);</a:t>
+            </a:r>
+          </a:p>
+          <a:p>
+            <a:pPr>
+              <a:lnSpc>
+                <a:spcPct val="113095"/>
+              </a:lnSpc>
+              <a:buNone/>
+            </a:pPr>
+            <a:endParaRPr lang="en-US" dirty="0">
+              <a:solidFill>
+                <a:srgbClr val="000000"/>
+              </a:solidFill>
+              <a:latin typeface="Fira Code" panose="020B0809050000020004" pitchFamily="49" charset="0"/>
+            </a:endParaRPr>
+          </a:p>
+          <a:p>
+            <a:pPr>
+              <a:lnSpc>
+                <a:spcPct val="113095"/>
+              </a:lnSpc>
+              <a:buNone/>
+            </a:pPr>
+            <a:endParaRPr lang="en-US" dirty="0">
+              <a:solidFill>
+                <a:srgbClr val="000000"/>
+              </a:solidFill>
+              <a:latin typeface="Fira Code" panose="020B0809050000020004" pitchFamily="49" charset="0"/>
+            </a:endParaRPr>
+          </a:p>
+          <a:p>
+            <a:pPr>
+              <a:lnSpc>
+                <a:spcPct val="113095"/>
+              </a:lnSpc>
+              <a:buNone/>
+            </a:pPr>
+            <a:r>
+              <a:rPr lang="en-US" sz="1800" b="0" dirty="0" err="1">
+                <a:solidFill>
+                  <a:srgbClr val="001080"/>
+                </a:solidFill>
+                <a:effectLst/>
+                <a:latin typeface="Fira Code" panose="020B0809050000020004" pitchFamily="49" charset="0"/>
+              </a:rPr>
+              <a:t>MPItrav</a:t>
+            </a:r>
+            <a:r>
+              <a:rPr lang="en-US" sz="1800" b="0" dirty="0">
+                <a:solidFill>
+                  <a:srgbClr val="000000"/>
+                </a:solidFill>
+                <a:effectLst/>
+                <a:latin typeface="Fira Code" panose="020B0809050000020004" pitchFamily="49" charset="0"/>
+              </a:rPr>
+              <a:t> | [&amp;](</a:t>
+            </a:r>
+            <a:r>
+              <a:rPr lang="en-US" sz="1800" b="0" dirty="0">
+                <a:solidFill>
+                  <a:srgbClr val="267F99"/>
+                </a:solidFill>
+                <a:effectLst/>
+                <a:latin typeface="Fira Code" panose="020B0809050000020004" pitchFamily="49" charset="0"/>
+              </a:rPr>
+              <a:t>auto</a:t>
+            </a:r>
+            <a:r>
+              <a:rPr lang="en-US" sz="1800" b="0" dirty="0">
+                <a:solidFill>
+                  <a:srgbClr val="000000"/>
+                </a:solidFill>
+                <a:effectLst/>
+                <a:latin typeface="Fira Code" panose="020B0809050000020004" pitchFamily="49" charset="0"/>
+              </a:rPr>
+              <a:t> </a:t>
+            </a:r>
+            <a:r>
+              <a:rPr lang="en-US" sz="1800" b="0" dirty="0">
+                <a:solidFill>
+                  <a:srgbClr val="001080"/>
+                </a:solidFill>
+                <a:effectLst/>
+                <a:latin typeface="Fira Code" panose="020B0809050000020004" pitchFamily="49" charset="0"/>
+              </a:rPr>
+              <a:t>index</a:t>
+            </a:r>
+            <a:r>
+              <a:rPr lang="en-US" sz="1800" b="0" dirty="0">
+                <a:solidFill>
+                  <a:srgbClr val="000000"/>
+                </a:solidFill>
+                <a:effectLst/>
+                <a:latin typeface="Fira Code" panose="020B0809050000020004" pitchFamily="49" charset="0"/>
+              </a:rPr>
+              <a:t>) {</a:t>
+            </a:r>
+          </a:p>
+          <a:p>
+            <a:pPr>
+              <a:lnSpc>
+                <a:spcPct val="113095"/>
+              </a:lnSpc>
+              <a:buNone/>
+            </a:pPr>
+            <a:r>
+              <a:rPr lang="en-US" sz="1800" b="0" dirty="0">
+                <a:solidFill>
+                  <a:srgbClr val="000000"/>
+                </a:solidFill>
+                <a:effectLst/>
+                <a:latin typeface="Fira Code" panose="020B0809050000020004" pitchFamily="49" charset="0"/>
+              </a:rPr>
+              <a:t>    </a:t>
+            </a:r>
+            <a:r>
+              <a:rPr lang="en-US" sz="1800" b="0" dirty="0">
+                <a:solidFill>
+                  <a:srgbClr val="0070C1"/>
+                </a:solidFill>
+                <a:effectLst/>
+                <a:latin typeface="Fira Code" panose="020B0809050000020004" pitchFamily="49" charset="0"/>
+              </a:rPr>
+              <a:t>Tile</a:t>
+            </a:r>
+            <a:r>
+              <a:rPr lang="en-US" sz="1800" b="0" dirty="0">
+                <a:solidFill>
+                  <a:srgbClr val="000000"/>
+                </a:solidFill>
+                <a:effectLst/>
+                <a:latin typeface="Fira Code" panose="020B0809050000020004" pitchFamily="49" charset="0"/>
+              </a:rPr>
+              <a:t>[</a:t>
+            </a:r>
+            <a:r>
+              <a:rPr lang="en-US" sz="1800" b="0" dirty="0">
+                <a:solidFill>
+                  <a:srgbClr val="001080"/>
+                </a:solidFill>
+                <a:effectLst/>
+                <a:latin typeface="Fira Code" panose="020B0809050000020004" pitchFamily="49" charset="0"/>
+              </a:rPr>
+              <a:t>index</a:t>
+            </a:r>
+            <a:r>
+              <a:rPr lang="en-US" sz="1800" b="0" dirty="0">
+                <a:solidFill>
+                  <a:srgbClr val="000000"/>
+                </a:solidFill>
+                <a:effectLst/>
+                <a:latin typeface="Fira Code" panose="020B0809050000020004" pitchFamily="49" charset="0"/>
+              </a:rPr>
+              <a:t>] = </a:t>
+            </a:r>
+            <a:r>
+              <a:rPr lang="en-US" sz="1800" b="0" dirty="0" err="1">
+                <a:solidFill>
+                  <a:srgbClr val="795E26"/>
+                </a:solidFill>
+                <a:effectLst/>
+                <a:latin typeface="Fira Code" panose="020B0809050000020004" pitchFamily="49" charset="0"/>
+              </a:rPr>
+              <a:t>init</a:t>
+            </a:r>
+            <a:r>
+              <a:rPr lang="en-US" sz="1800" b="0" dirty="0">
+                <a:solidFill>
+                  <a:srgbClr val="000000"/>
+                </a:solidFill>
+                <a:effectLst/>
+                <a:latin typeface="Fira Code" panose="020B0809050000020004" pitchFamily="49" charset="0"/>
+              </a:rPr>
+              <a:t>(</a:t>
+            </a:r>
+            <a:r>
+              <a:rPr lang="en-US" sz="1800" b="0" dirty="0">
+                <a:solidFill>
+                  <a:srgbClr val="001080"/>
+                </a:solidFill>
+                <a:effectLst/>
+                <a:latin typeface="Fira Code" panose="020B0809050000020004" pitchFamily="49" charset="0"/>
+              </a:rPr>
+              <a:t>index</a:t>
+            </a:r>
+            <a:r>
+              <a:rPr lang="en-US" sz="1800" b="0" dirty="0">
+                <a:solidFill>
+                  <a:srgbClr val="000000"/>
+                </a:solidFill>
+                <a:effectLst/>
+                <a:latin typeface="Fira Code" panose="020B0809050000020004" pitchFamily="49" charset="0"/>
+              </a:rPr>
+              <a:t>);</a:t>
+            </a:r>
+          </a:p>
+          <a:p>
+            <a:pPr>
+              <a:lnSpc>
+                <a:spcPct val="113095"/>
+              </a:lnSpc>
+              <a:buNone/>
+            </a:pPr>
+            <a:r>
+              <a:rPr lang="en-US" sz="1800" b="0" dirty="0">
+                <a:solidFill>
+                  <a:srgbClr val="000000"/>
+                </a:solidFill>
+                <a:effectLst/>
+                <a:latin typeface="Fira Code" panose="020B0809050000020004" pitchFamily="49" charset="0"/>
+              </a:rPr>
+              <a:t>};</a:t>
+            </a:r>
+          </a:p>
+        </p:txBody>
+      </p:sp>
+      <p:sp>
+        <p:nvSpPr>
+          <p:cNvPr id="27" name="Right Brace 26">
+            <a:extLst>
+              <a:ext uri="{FF2B5EF4-FFF2-40B4-BE49-F238E27FC236}">
+                <a16:creationId xmlns:a16="http://schemas.microsoft.com/office/drawing/2014/main" id="{5FFAABDD-4201-74E7-5C87-B5FE95CC8D61}"/>
+              </a:ext>
+            </a:extLst>
+          </p:cNvPr>
+          <p:cNvSpPr/>
+          <p:nvPr/>
+        </p:nvSpPr>
+        <p:spPr>
+          <a:xfrm>
+            <a:off x="10553111" y="1176246"/>
+            <a:ext cx="324197" cy="954039"/>
+          </a:xfrm>
+          <a:prstGeom prst="rightBrace">
+            <a:avLst/>
+          </a:prstGeom>
+        </p:spPr>
+        <p:style>
+          <a:lnRef idx="2">
+            <a:schemeClr val="accent1"/>
+          </a:lnRef>
+          <a:fillRef idx="0">
+            <a:schemeClr val="accent1"/>
+          </a:fillRef>
+          <a:effectRef idx="1">
+            <a:schemeClr val="accent1"/>
+          </a:effectRef>
+          <a:fontRef idx="minor">
+            <a:schemeClr val="tx1"/>
+          </a:fontRef>
+        </p:style>
+        <p:txBody>
+          <a:bodyPr rtlCol="0" anchor="ctr"/>
+          <a:lstStyle/>
+          <a:p>
+            <a:pPr algn="ctr"/>
             <a:endParaRPr lang="en-US"/>
           </a:p>
         </p:txBody>
       </p:sp>
       <p:sp>
         <p:nvSpPr>
-          <p:cNvPr id="3" name="Slide Number Placeholder 2">
-            <a:extLst>
-              <a:ext uri="{FF2B5EF4-FFF2-40B4-BE49-F238E27FC236}">
-                <a16:creationId xmlns:a16="http://schemas.microsoft.com/office/drawing/2014/main" id="{850D6802-E8E6-C834-23FA-38D2C05CB2AB}"/>
-              </a:ext>
-            </a:extLst>
-          </p:cNvPr>
-          <p:cNvSpPr>
-            <a:spLocks noGrp="1"/>
-          </p:cNvSpPr>
-          <p:nvPr>
-            <p:ph type="sldNum" sz="quarter" idx="12"/>
-          </p:nvPr>
-        </p:nvSpPr>
-        <p:spPr/>
-        <p:txBody>
-          <a:bodyPr/>
-          <a:lstStyle/>
-          <a:p>
-            <a:fld id="{DA0BB241-1B5F-4309-9407-9EEA04D9598D}" type="slidenum">
-              <a:rPr lang="en-US" smtClean="0"/>
-              <a:t>12</a:t>
-            </a:fld>
+          <p:cNvPr id="30" name="TextBox 29">
+            <a:extLst>
+              <a:ext uri="{FF2B5EF4-FFF2-40B4-BE49-F238E27FC236}">
+                <a16:creationId xmlns:a16="http://schemas.microsoft.com/office/drawing/2014/main" id="{F1C7236A-2A5F-5DB5-FFC2-747FA4DCCD3C}"/>
+              </a:ext>
+            </a:extLst>
+          </p:cNvPr>
+          <p:cNvSpPr txBox="1"/>
+          <p:nvPr/>
+        </p:nvSpPr>
+        <p:spPr>
+          <a:xfrm>
+            <a:off x="10857636" y="1284214"/>
+            <a:ext cx="1104790" cy="646331"/>
+          </a:xfrm>
+          <a:prstGeom prst="rect">
+            <a:avLst/>
+          </a:prstGeom>
+          <a:noFill/>
+        </p:spPr>
+        <p:txBody>
+          <a:bodyPr wrap="none" rtlCol="0">
+            <a:spAutoFit/>
+          </a:bodyPr>
+          <a:lstStyle/>
+          <a:p>
+            <a:r>
+              <a:rPr lang="en-US" noProof="0" dirty="0"/>
+              <a:t>Encoding</a:t>
+            </a:r>
+            <a:br>
+              <a:rPr lang="en-US" noProof="0" dirty="0"/>
+            </a:br>
+            <a:r>
+              <a:rPr lang="en-US" noProof="0" dirty="0"/>
+              <a:t>topology</a:t>
+            </a:r>
+          </a:p>
+        </p:txBody>
+      </p:sp>
+      <p:sp>
+        <p:nvSpPr>
+          <p:cNvPr id="38" name="Oval 37">
+            <a:extLst>
+              <a:ext uri="{FF2B5EF4-FFF2-40B4-BE49-F238E27FC236}">
+                <a16:creationId xmlns:a16="http://schemas.microsoft.com/office/drawing/2014/main" id="{865CC931-F0E1-737A-536F-453E24B23690}"/>
+              </a:ext>
+            </a:extLst>
+          </p:cNvPr>
+          <p:cNvSpPr/>
+          <p:nvPr/>
+        </p:nvSpPr>
+        <p:spPr>
+          <a:xfrm>
+            <a:off x="4626043" y="2128305"/>
+            <a:ext cx="7554186" cy="851308"/>
+          </a:xfrm>
+          <a:prstGeom prst="ellipse">
+            <a:avLst/>
+          </a:prstGeom>
+          <a:noFill/>
+          <a:ln>
+            <a:solidFill>
+              <a:srgbClr val="FF0000"/>
+            </a:solidFill>
+          </a:ln>
+        </p:spPr>
+        <p:style>
+          <a:lnRef idx="2">
+            <a:schemeClr val="accent1">
+              <a:shade val="15000"/>
+            </a:schemeClr>
+          </a:lnRef>
+          <a:fillRef idx="1">
+            <a:schemeClr val="accent1"/>
+          </a:fillRef>
+          <a:effectRef idx="0">
+            <a:schemeClr val="accent1"/>
+          </a:effectRef>
+          <a:fontRef idx="minor">
+            <a:schemeClr val="lt1"/>
+          </a:fontRef>
+        </p:style>
+        <p:txBody>
+          <a:bodyPr rtlCol="0" anchor="ctr"/>
+          <a:lstStyle/>
+          <a:p>
+            <a:pPr algn="ctr"/>
             <a:endParaRPr lang="en-US"/>
           </a:p>
         </p:txBody>
       </p:sp>
+      <p:sp>
+        <p:nvSpPr>
+          <p:cNvPr id="45" name="TextBox 44">
+            <a:extLst>
+              <a:ext uri="{FF2B5EF4-FFF2-40B4-BE49-F238E27FC236}">
+                <a16:creationId xmlns:a16="http://schemas.microsoft.com/office/drawing/2014/main" id="{835AFA3F-B4AF-ABF4-9BB4-CE1EE90FCB8C}"/>
+              </a:ext>
+            </a:extLst>
+          </p:cNvPr>
+          <p:cNvSpPr txBox="1"/>
+          <p:nvPr/>
+        </p:nvSpPr>
+        <p:spPr>
+          <a:xfrm>
+            <a:off x="6795126" y="5143169"/>
+            <a:ext cx="4839852" cy="395108"/>
+          </a:xfrm>
+          <a:prstGeom prst="rect">
+            <a:avLst/>
+          </a:prstGeom>
+          <a:noFill/>
+        </p:spPr>
+        <p:txBody>
+          <a:bodyPr wrap="square">
+            <a:spAutoFit/>
+          </a:bodyPr>
+          <a:lstStyle/>
+          <a:p>
+            <a:pPr>
+              <a:lnSpc>
+                <a:spcPct val="113095"/>
+              </a:lnSpc>
+              <a:buNone/>
+            </a:pPr>
+            <a:r>
+              <a:rPr lang="en-US" b="0" dirty="0">
+                <a:solidFill>
+                  <a:srgbClr val="795E26"/>
+                </a:solidFill>
+                <a:effectLst/>
+                <a:latin typeface="Fira Code" panose="020B0809050000020004" pitchFamily="49" charset="0"/>
+              </a:rPr>
+              <a:t>gather</a:t>
+            </a:r>
+            <a:r>
+              <a:rPr lang="en-US" b="0" dirty="0">
+                <a:solidFill>
+                  <a:srgbClr val="000000"/>
+                </a:solidFill>
+                <a:effectLst/>
+                <a:latin typeface="Fira Code" panose="020B0809050000020004" pitchFamily="49" charset="0"/>
+              </a:rPr>
+              <a:t>(</a:t>
+            </a:r>
+            <a:r>
+              <a:rPr lang="en-US" dirty="0">
+                <a:solidFill>
+                  <a:srgbClr val="0070C1"/>
+                </a:solidFill>
+                <a:latin typeface="Fira Code" panose="020B0809050000020004" pitchFamily="49" charset="0"/>
+              </a:rPr>
+              <a:t>Tile</a:t>
+            </a:r>
+            <a:r>
+              <a:rPr lang="en-US" dirty="0">
+                <a:solidFill>
+                  <a:srgbClr val="000000"/>
+                </a:solidFill>
+                <a:latin typeface="Fira Code" panose="020B0809050000020004" pitchFamily="49" charset="0"/>
+              </a:rPr>
+              <a:t>, </a:t>
+            </a:r>
+            <a:r>
+              <a:rPr lang="en-US" dirty="0">
+                <a:solidFill>
+                  <a:srgbClr val="0070C1"/>
+                </a:solidFill>
+                <a:latin typeface="Fira Code" panose="020B0809050000020004" pitchFamily="49" charset="0"/>
+              </a:rPr>
+              <a:t>Data</a:t>
+            </a:r>
+            <a:r>
+              <a:rPr lang="en-US" dirty="0">
+                <a:solidFill>
+                  <a:srgbClr val="000000"/>
+                </a:solidFill>
+                <a:latin typeface="Fira Code" panose="020B0809050000020004" pitchFamily="49" charset="0"/>
+              </a:rPr>
+              <a:t>, </a:t>
+            </a:r>
+            <a:r>
+              <a:rPr lang="en-US" b="0" dirty="0">
+                <a:solidFill>
+                  <a:srgbClr val="0070C1"/>
+                </a:solidFill>
+                <a:effectLst/>
+                <a:latin typeface="Fira Code" panose="020B0809050000020004" pitchFamily="49" charset="0"/>
+              </a:rPr>
+              <a:t>root</a:t>
+            </a:r>
+            <a:r>
+              <a:rPr lang="en-US" b="0" dirty="0">
+                <a:solidFill>
+                  <a:srgbClr val="000000"/>
+                </a:solidFill>
+                <a:effectLst/>
+                <a:latin typeface="Fira Code" panose="020B0809050000020004" pitchFamily="49" charset="0"/>
+              </a:rPr>
+              <a:t>, </a:t>
+            </a:r>
+            <a:r>
+              <a:rPr lang="en-US" dirty="0" err="1">
+                <a:solidFill>
+                  <a:srgbClr val="001080"/>
+                </a:solidFill>
+                <a:latin typeface="Fira Code" panose="020B0809050000020004" pitchFamily="49" charset="0"/>
+              </a:rPr>
+              <a:t>MPItrav</a:t>
+            </a:r>
+            <a:r>
+              <a:rPr lang="en-US" b="0" dirty="0">
+                <a:solidFill>
+                  <a:srgbClr val="000000"/>
+                </a:solidFill>
+                <a:effectLst/>
+                <a:latin typeface="Fira Code" panose="020B0809050000020004" pitchFamily="49" charset="0"/>
+              </a:rPr>
+              <a:t>);</a:t>
+            </a:r>
+          </a:p>
+        </p:txBody>
+      </p:sp>
+      <p:sp>
+        <p:nvSpPr>
+          <p:cNvPr id="49" name="Right Brace 48">
+            <a:extLst>
+              <a:ext uri="{FF2B5EF4-FFF2-40B4-BE49-F238E27FC236}">
+                <a16:creationId xmlns:a16="http://schemas.microsoft.com/office/drawing/2014/main" id="{329DFC7F-1CD7-D907-ACE7-DF5BC3131277}"/>
+              </a:ext>
+            </a:extLst>
+          </p:cNvPr>
+          <p:cNvSpPr/>
+          <p:nvPr/>
+        </p:nvSpPr>
+        <p:spPr>
+          <a:xfrm>
+            <a:off x="9001402" y="3348945"/>
+            <a:ext cx="324197" cy="913500"/>
+          </a:xfrm>
+          <a:prstGeom prst="rightBrace">
+            <a:avLst/>
+          </a:prstGeom>
+        </p:spPr>
+        <p:style>
+          <a:lnRef idx="2">
+            <a:schemeClr val="accent1"/>
+          </a:lnRef>
+          <a:fillRef idx="0">
+            <a:schemeClr val="accent1"/>
+          </a:fillRef>
+          <a:effectRef idx="1">
+            <a:schemeClr val="accent1"/>
+          </a:effectRef>
+          <a:fontRef idx="minor">
+            <a:schemeClr val="tx1"/>
+          </a:fontRef>
+        </p:style>
+        <p:txBody>
+          <a:bodyPr rtlCol="0" anchor="ctr"/>
+          <a:lstStyle/>
+          <a:p>
+            <a:pPr algn="ctr"/>
+            <a:endParaRPr lang="en-US"/>
+          </a:p>
+        </p:txBody>
+      </p:sp>
+      <p:sp>
+        <p:nvSpPr>
+          <p:cNvPr id="52" name="TextBox 51">
+            <a:extLst>
+              <a:ext uri="{FF2B5EF4-FFF2-40B4-BE49-F238E27FC236}">
+                <a16:creationId xmlns:a16="http://schemas.microsoft.com/office/drawing/2014/main" id="{BDF331C8-C8ED-B5C4-3373-8B0D250696A0}"/>
+              </a:ext>
+            </a:extLst>
+          </p:cNvPr>
+          <p:cNvSpPr txBox="1"/>
+          <p:nvPr/>
+        </p:nvSpPr>
+        <p:spPr>
+          <a:xfrm>
+            <a:off x="9325599" y="3622766"/>
+            <a:ext cx="2392941" cy="369332"/>
+          </a:xfrm>
+          <a:prstGeom prst="rect">
+            <a:avLst/>
+          </a:prstGeom>
+          <a:noFill/>
+        </p:spPr>
+        <p:txBody>
+          <a:bodyPr wrap="square" rtlCol="0">
+            <a:spAutoFit/>
+          </a:bodyPr>
+          <a:lstStyle/>
+          <a:p>
+            <a:r>
+              <a:rPr lang="en-US" noProof="0" dirty="0"/>
+              <a:t>Writes to the local tile </a:t>
+            </a:r>
+          </a:p>
+        </p:txBody>
+      </p:sp>
+      <p:sp>
+        <p:nvSpPr>
+          <p:cNvPr id="54" name="Right Brace 53">
+            <a:extLst>
+              <a:ext uri="{FF2B5EF4-FFF2-40B4-BE49-F238E27FC236}">
+                <a16:creationId xmlns:a16="http://schemas.microsoft.com/office/drawing/2014/main" id="{FBD68E4F-2E96-6FDC-0CB9-90A5A2A5CA64}"/>
+              </a:ext>
+            </a:extLst>
+          </p:cNvPr>
+          <p:cNvSpPr/>
+          <p:nvPr/>
+        </p:nvSpPr>
+        <p:spPr>
+          <a:xfrm rot="5400000">
+            <a:off x="9132420" y="3281535"/>
+            <a:ext cx="169251" cy="4631184"/>
+          </a:xfrm>
+          <a:prstGeom prst="rightBrace">
+            <a:avLst/>
+          </a:prstGeom>
+        </p:spPr>
+        <p:style>
+          <a:lnRef idx="2">
+            <a:schemeClr val="accent1"/>
+          </a:lnRef>
+          <a:fillRef idx="0">
+            <a:schemeClr val="accent1"/>
+          </a:fillRef>
+          <a:effectRef idx="1">
+            <a:schemeClr val="accent1"/>
+          </a:effectRef>
+          <a:fontRef idx="minor">
+            <a:schemeClr val="tx1"/>
+          </a:fontRef>
+        </p:style>
+        <p:txBody>
+          <a:bodyPr rtlCol="0" anchor="ctr"/>
+          <a:lstStyle/>
+          <a:p>
+            <a:pPr algn="ctr"/>
+            <a:endParaRPr lang="en-US"/>
+          </a:p>
+        </p:txBody>
+      </p:sp>
+      <p:sp>
+        <p:nvSpPr>
+          <p:cNvPr id="56" name="TextBox 55">
+            <a:extLst>
+              <a:ext uri="{FF2B5EF4-FFF2-40B4-BE49-F238E27FC236}">
+                <a16:creationId xmlns:a16="http://schemas.microsoft.com/office/drawing/2014/main" id="{FA4348FA-14AF-AE42-2449-6C4790D0706A}"/>
+              </a:ext>
+            </a:extLst>
+          </p:cNvPr>
+          <p:cNvSpPr txBox="1"/>
+          <p:nvPr/>
+        </p:nvSpPr>
+        <p:spPr>
+          <a:xfrm>
+            <a:off x="7481162" y="5745321"/>
+            <a:ext cx="3467779" cy="369332"/>
+          </a:xfrm>
+          <a:prstGeom prst="rect">
+            <a:avLst/>
+          </a:prstGeom>
+          <a:noFill/>
+        </p:spPr>
+        <p:txBody>
+          <a:bodyPr wrap="square" rtlCol="0">
+            <a:spAutoFit/>
+          </a:bodyPr>
+          <a:lstStyle/>
+          <a:p>
+            <a:pPr algn="ctr"/>
+            <a:r>
+              <a:rPr lang="en-US" noProof="0" dirty="0"/>
+              <a:t>Gathers the tiles into the result</a:t>
+            </a:r>
+          </a:p>
+        </p:txBody>
+      </p:sp>
+      <p:sp>
+        <p:nvSpPr>
+          <p:cNvPr id="58" name="TextBox 57">
+            <a:extLst>
+              <a:ext uri="{FF2B5EF4-FFF2-40B4-BE49-F238E27FC236}">
+                <a16:creationId xmlns:a16="http://schemas.microsoft.com/office/drawing/2014/main" id="{896E893B-6C24-AD2E-1DF6-311727C79C3C}"/>
+              </a:ext>
+            </a:extLst>
+          </p:cNvPr>
+          <p:cNvSpPr txBox="1"/>
+          <p:nvPr/>
+        </p:nvSpPr>
+        <p:spPr>
+          <a:xfrm>
+            <a:off x="2354911" y="2376056"/>
+            <a:ext cx="897740" cy="369332"/>
+          </a:xfrm>
+          <a:prstGeom prst="rect">
+            <a:avLst/>
+          </a:prstGeom>
+          <a:noFill/>
+        </p:spPr>
+        <p:txBody>
+          <a:bodyPr wrap="square">
+            <a:spAutoFit/>
+          </a:bodyPr>
+          <a:lstStyle/>
+          <a:p>
+            <a:r>
+              <a:rPr lang="en-US" sz="1800" b="0" dirty="0">
+                <a:solidFill>
+                  <a:srgbClr val="0070C1"/>
+                </a:solidFill>
+                <a:effectLst/>
+                <a:latin typeface="Fira Code" panose="020B0809050000020004" pitchFamily="49" charset="0"/>
+              </a:rPr>
+              <a:t>Data</a:t>
+            </a:r>
+            <a:endParaRPr lang="en-US" dirty="0"/>
+          </a:p>
+        </p:txBody>
+      </p:sp>
+      <p:cxnSp>
+        <p:nvCxnSpPr>
+          <p:cNvPr id="59" name="Straight Connector 58">
+            <a:extLst>
+              <a:ext uri="{FF2B5EF4-FFF2-40B4-BE49-F238E27FC236}">
+                <a16:creationId xmlns:a16="http://schemas.microsoft.com/office/drawing/2014/main" id="{8AA48A78-4D0D-D4CE-F1D8-AB2AB7880A21}"/>
+              </a:ext>
+            </a:extLst>
+          </p:cNvPr>
+          <p:cNvCxnSpPr>
+            <a:cxnSpLocks/>
+          </p:cNvCxnSpPr>
+          <p:nvPr/>
+        </p:nvCxnSpPr>
+        <p:spPr>
+          <a:xfrm>
+            <a:off x="1075127" y="4835623"/>
+            <a:ext cx="3457303" cy="0"/>
+          </a:xfrm>
+          <a:prstGeom prst="line">
+            <a:avLst/>
+          </a:prstGeom>
+          <a:ln>
+            <a:solidFill>
+              <a:schemeClr val="tx1"/>
+            </a:solidFill>
+          </a:ln>
+        </p:spPr>
+        <p:style>
+          <a:lnRef idx="2">
+            <a:schemeClr val="accent1"/>
+          </a:lnRef>
+          <a:fillRef idx="0">
+            <a:schemeClr val="accent1"/>
+          </a:fillRef>
+          <a:effectRef idx="1">
+            <a:schemeClr val="accent1"/>
+          </a:effectRef>
+          <a:fontRef idx="minor">
+            <a:schemeClr val="tx1"/>
+          </a:fontRef>
+        </p:style>
+      </p:cxnSp>
+      <p:cxnSp>
+        <p:nvCxnSpPr>
+          <p:cNvPr id="65" name="Straight Connector 64">
+            <a:extLst>
+              <a:ext uri="{FF2B5EF4-FFF2-40B4-BE49-F238E27FC236}">
+                <a16:creationId xmlns:a16="http://schemas.microsoft.com/office/drawing/2014/main" id="{E011014B-915E-8EB8-9EEA-F373326AF674}"/>
+              </a:ext>
+            </a:extLst>
+          </p:cNvPr>
+          <p:cNvCxnSpPr>
+            <a:cxnSpLocks/>
+          </p:cNvCxnSpPr>
+          <p:nvPr/>
+        </p:nvCxnSpPr>
+        <p:spPr>
+          <a:xfrm flipH="1">
+            <a:off x="1109108" y="5562873"/>
+            <a:ext cx="747410" cy="420622"/>
+          </a:xfrm>
+          <a:prstGeom prst="line">
+            <a:avLst/>
+          </a:prstGeom>
+          <a:ln>
+            <a:solidFill>
+              <a:schemeClr val="tx1"/>
+            </a:solidFill>
+          </a:ln>
+        </p:spPr>
+        <p:style>
+          <a:lnRef idx="2">
+            <a:schemeClr val="accent1"/>
+          </a:lnRef>
+          <a:fillRef idx="0">
+            <a:schemeClr val="accent1"/>
+          </a:fillRef>
+          <a:effectRef idx="1">
+            <a:schemeClr val="accent1"/>
+          </a:effectRef>
+          <a:fontRef idx="minor">
+            <a:schemeClr val="tx1"/>
+          </a:fontRef>
+        </p:style>
+      </p:cxnSp>
+      <p:sp>
+        <p:nvSpPr>
+          <p:cNvPr id="67" name="TextBox 66">
+            <a:extLst>
+              <a:ext uri="{FF2B5EF4-FFF2-40B4-BE49-F238E27FC236}">
+                <a16:creationId xmlns:a16="http://schemas.microsoft.com/office/drawing/2014/main" id="{F428AF86-07EC-BFD9-FDA1-8725D8AC3848}"/>
+              </a:ext>
+            </a:extLst>
+          </p:cNvPr>
+          <p:cNvSpPr txBox="1"/>
+          <p:nvPr/>
+        </p:nvSpPr>
+        <p:spPr>
+          <a:xfrm>
+            <a:off x="205541" y="5990975"/>
+            <a:ext cx="1253869" cy="369332"/>
+          </a:xfrm>
+          <a:prstGeom prst="rect">
+            <a:avLst/>
+          </a:prstGeom>
+          <a:noFill/>
+        </p:spPr>
+        <p:txBody>
+          <a:bodyPr wrap="none" rtlCol="0">
+            <a:spAutoFit/>
+          </a:bodyPr>
+          <a:lstStyle/>
+          <a:p>
+            <a:r>
+              <a:rPr lang="en-US" dirty="0"/>
+              <a:t>Node 4 tile</a:t>
+            </a:r>
+          </a:p>
+        </p:txBody>
+      </p:sp>
+      <p:sp>
+        <p:nvSpPr>
+          <p:cNvPr id="70" name="TextBox 69">
+            <a:extLst>
+              <a:ext uri="{FF2B5EF4-FFF2-40B4-BE49-F238E27FC236}">
+                <a16:creationId xmlns:a16="http://schemas.microsoft.com/office/drawing/2014/main" id="{6E3CBF0D-5F3F-C340-AD1E-3E9E4A50D783}"/>
+              </a:ext>
+            </a:extLst>
+          </p:cNvPr>
+          <p:cNvSpPr txBox="1"/>
+          <p:nvPr/>
+        </p:nvSpPr>
+        <p:spPr>
+          <a:xfrm>
+            <a:off x="4125994" y="5938255"/>
+            <a:ext cx="1253869" cy="369332"/>
+          </a:xfrm>
+          <a:prstGeom prst="rect">
+            <a:avLst/>
+          </a:prstGeom>
+          <a:noFill/>
+        </p:spPr>
+        <p:txBody>
+          <a:bodyPr wrap="none" rtlCol="0">
+            <a:spAutoFit/>
+          </a:bodyPr>
+          <a:lstStyle/>
+          <a:p>
+            <a:r>
+              <a:rPr lang="en-US" dirty="0"/>
+              <a:t>Node 5 tile</a:t>
+            </a:r>
+          </a:p>
+        </p:txBody>
+      </p:sp>
+      <p:cxnSp>
+        <p:nvCxnSpPr>
+          <p:cNvPr id="72" name="Straight Connector 71">
+            <a:extLst>
+              <a:ext uri="{FF2B5EF4-FFF2-40B4-BE49-F238E27FC236}">
+                <a16:creationId xmlns:a16="http://schemas.microsoft.com/office/drawing/2014/main" id="{54C91492-52A6-78AF-5BA4-FE8654664AB4}"/>
+              </a:ext>
+            </a:extLst>
+          </p:cNvPr>
+          <p:cNvCxnSpPr>
+            <a:cxnSpLocks/>
+          </p:cNvCxnSpPr>
+          <p:nvPr/>
+        </p:nvCxnSpPr>
+        <p:spPr>
+          <a:xfrm flipH="1" flipV="1">
+            <a:off x="3728886" y="5679959"/>
+            <a:ext cx="837525" cy="311016"/>
+          </a:xfrm>
+          <a:prstGeom prst="line">
+            <a:avLst/>
+          </a:prstGeom>
+          <a:ln>
+            <a:solidFill>
+              <a:schemeClr val="tx1"/>
+            </a:solidFill>
+          </a:ln>
+        </p:spPr>
+        <p:style>
+          <a:lnRef idx="2">
+            <a:schemeClr val="accent1"/>
+          </a:lnRef>
+          <a:fillRef idx="0">
+            <a:schemeClr val="accent1"/>
+          </a:fillRef>
+          <a:effectRef idx="1">
+            <a:schemeClr val="accent1"/>
+          </a:effectRef>
+          <a:fontRef idx="minor">
+            <a:schemeClr val="tx1"/>
+          </a:fontRef>
+        </p:style>
+      </p:cxnSp>
     </p:spTree>
     <p:extLst>
       <p:ext uri="{BB962C8B-B14F-4D97-AF65-F5344CB8AC3E}">
@@ -9460,7 +11155,7 @@
         <p:cNvPr id="1" name="">
           <a:extLst>
             <a:ext uri="{FF2B5EF4-FFF2-40B4-BE49-F238E27FC236}">
-              <a16:creationId xmlns:a16="http://schemas.microsoft.com/office/drawing/2014/main" id="{84229051-C55D-C6C6-0632-56BEDC62718B}"/>
+              <a16:creationId xmlns:a16="http://schemas.microsoft.com/office/drawing/2014/main" id="{0B5D3D26-2B4F-0ACB-E3E2-25555241B154}"/>
             </a:ext>
           </a:extLst>
         </p:cNvPr>
@@ -9480,7 +11175,7 @@
           <p:cNvPr id="4" name="Title 3">
             <a:extLst>
               <a:ext uri="{FF2B5EF4-FFF2-40B4-BE49-F238E27FC236}">
-                <a16:creationId xmlns:a16="http://schemas.microsoft.com/office/drawing/2014/main" id="{CAF9FE65-1712-5072-CF69-47E693209BEE}"/>
+                <a16:creationId xmlns:a16="http://schemas.microsoft.com/office/drawing/2014/main" id="{CE775342-3158-BFC3-939C-F28445402BA4}"/>
               </a:ext>
             </a:extLst>
           </p:cNvPr>
@@ -9505,7 +11200,7 @@
           <p:cNvPr id="6" name="TextBox 5">
             <a:extLst>
               <a:ext uri="{FF2B5EF4-FFF2-40B4-BE49-F238E27FC236}">
-                <a16:creationId xmlns:a16="http://schemas.microsoft.com/office/drawing/2014/main" id="{8F88950C-287E-7FB4-0D76-46A8FCD9878F}"/>
+                <a16:creationId xmlns:a16="http://schemas.microsoft.com/office/drawing/2014/main" id="{C1A4FEEA-F6A5-2F0C-61D6-D842A122ADD5}"/>
               </a:ext>
             </a:extLst>
           </p:cNvPr>
@@ -9514,8 +11209,8 @@
         </p:nvSpPr>
         <p:spPr>
           <a:xfrm>
-            <a:off x="838200" y="3280230"/>
-            <a:ext cx="4781006" cy="2095061"/>
+            <a:off x="5317591" y="1027906"/>
+            <a:ext cx="1924951" cy="369332"/>
           </a:xfrm>
           <a:prstGeom prst="rect">
             <a:avLst/>
@@ -9523,1204 +11218,32 @@
           <a:noFill/>
         </p:spPr>
         <p:txBody>
-          <a:bodyPr wrap="square">
+          <a:bodyPr wrap="none" rtlCol="0">
             <a:spAutoFit/>
           </a:bodyPr>
           <a:lstStyle/>
           <a:p>
-            <a:pPr>
-              <a:lnSpc>
-                <a:spcPct val="113095"/>
-              </a:lnSpc>
-              <a:buNone/>
-            </a:pPr>
-            <a:r>
-              <a:rPr lang="en-US" sz="1050" b="0" noProof="0" dirty="0">
-                <a:solidFill>
-                  <a:srgbClr val="267F99"/>
-                </a:solidFill>
-                <a:effectLst/>
-                <a:latin typeface="Fira Code" panose="020B0809050000020004" pitchFamily="49" charset="0"/>
-              </a:rPr>
-              <a:t>auto</a:t>
-            </a:r>
-            <a:r>
-              <a:rPr lang="en-US" sz="1050" b="0" noProof="0" dirty="0">
-                <a:solidFill>
-                  <a:srgbClr val="000000"/>
-                </a:solidFill>
-                <a:effectLst/>
-                <a:latin typeface="Fira Code" panose="020B0809050000020004" pitchFamily="49" charset="0"/>
-              </a:rPr>
-              <a:t> </a:t>
-            </a:r>
-            <a:r>
-              <a:rPr lang="en-US" sz="1050" b="0" noProof="0" dirty="0">
-                <a:solidFill>
-                  <a:srgbClr val="001080"/>
-                </a:solidFill>
-                <a:effectLst/>
-                <a:latin typeface="Fira Code" panose="020B0809050000020004" pitchFamily="49" charset="0"/>
-              </a:rPr>
-              <a:t>C</a:t>
-            </a:r>
-            <a:r>
-              <a:rPr lang="en-US" sz="1050" b="0" noProof="0" dirty="0">
-                <a:solidFill>
-                  <a:srgbClr val="000000"/>
-                </a:solidFill>
-                <a:effectLst/>
-                <a:latin typeface="Fira Code" panose="020B0809050000020004" pitchFamily="49" charset="0"/>
-              </a:rPr>
-              <a:t> = </a:t>
-            </a:r>
-            <a:r>
-              <a:rPr lang="en-US" sz="1050" b="0" noProof="0" dirty="0">
-                <a:solidFill>
-                  <a:srgbClr val="795E26"/>
-                </a:solidFill>
-                <a:effectLst/>
-                <a:latin typeface="Fira Code" panose="020B0809050000020004" pitchFamily="49" charset="0"/>
-              </a:rPr>
-              <a:t>bag</a:t>
-            </a:r>
-            <a:r>
-              <a:rPr lang="en-US" sz="1050" b="0" noProof="0" dirty="0">
-                <a:solidFill>
-                  <a:srgbClr val="000000"/>
-                </a:solidFill>
-                <a:effectLst/>
-                <a:latin typeface="Fira Code" panose="020B0809050000020004" pitchFamily="49" charset="0"/>
-              </a:rPr>
-              <a:t>(</a:t>
-            </a:r>
-            <a:r>
-              <a:rPr lang="en-US" sz="1050" b="0" noProof="0" dirty="0">
-                <a:solidFill>
-                  <a:srgbClr val="267F99"/>
-                </a:solidFill>
-                <a:effectLst/>
-                <a:latin typeface="Fira Code" panose="020B0809050000020004" pitchFamily="49" charset="0"/>
-              </a:rPr>
-              <a:t>scalar</a:t>
-            </a:r>
-            <a:r>
-              <a:rPr lang="en-US" sz="1050" b="0" noProof="0" dirty="0">
-                <a:solidFill>
-                  <a:srgbClr val="000000"/>
-                </a:solidFill>
-                <a:effectLst/>
-                <a:latin typeface="Fira Code" panose="020B0809050000020004" pitchFamily="49" charset="0"/>
-              </a:rPr>
-              <a:t>&lt;</a:t>
-            </a:r>
-            <a:r>
-              <a:rPr lang="en-US" sz="1050" b="0" noProof="0" dirty="0">
-                <a:solidFill>
-                  <a:srgbClr val="0000FF"/>
-                </a:solidFill>
-                <a:effectLst/>
-                <a:latin typeface="Fira Code" panose="020B0809050000020004" pitchFamily="49" charset="0"/>
-              </a:rPr>
-              <a:t>float</a:t>
-            </a:r>
-            <a:r>
-              <a:rPr lang="en-US" sz="1050" b="0" noProof="0" dirty="0">
-                <a:solidFill>
-                  <a:srgbClr val="000000"/>
-                </a:solidFill>
-                <a:effectLst/>
-                <a:latin typeface="Fira Code" panose="020B0809050000020004" pitchFamily="49" charset="0"/>
-              </a:rPr>
-              <a:t>&gt;() ^ </a:t>
-            </a:r>
-            <a:r>
-              <a:rPr lang="en-US" sz="1050" b="0" noProof="0" dirty="0">
-                <a:solidFill>
-                  <a:srgbClr val="795E26"/>
-                </a:solidFill>
-                <a:effectLst/>
-                <a:latin typeface="Fira Code" panose="020B0809050000020004" pitchFamily="49" charset="0"/>
-              </a:rPr>
-              <a:t>vectors</a:t>
-            </a:r>
-            <a:r>
-              <a:rPr lang="en-US" sz="1050" b="0" noProof="0" dirty="0">
-                <a:solidFill>
-                  <a:srgbClr val="000000"/>
-                </a:solidFill>
-                <a:effectLst/>
-                <a:latin typeface="Fira Code" panose="020B0809050000020004" pitchFamily="49" charset="0"/>
-              </a:rPr>
-              <a:t>&lt;</a:t>
-            </a:r>
-            <a:r>
-              <a:rPr lang="en-US" sz="1050" b="0" noProof="0" dirty="0">
-                <a:solidFill>
-                  <a:srgbClr val="A31515"/>
-                </a:solidFill>
-                <a:effectLst/>
-                <a:latin typeface="Fira Code" panose="020B0809050000020004" pitchFamily="49" charset="0"/>
-              </a:rPr>
-              <a:t>'m'</a:t>
-            </a:r>
-            <a:r>
-              <a:rPr lang="en-US" sz="1050" b="0" noProof="0" dirty="0">
-                <a:solidFill>
-                  <a:srgbClr val="000000"/>
-                </a:solidFill>
-                <a:effectLst/>
-                <a:latin typeface="Fira Code" panose="020B0809050000020004" pitchFamily="49" charset="0"/>
-              </a:rPr>
-              <a:t>, </a:t>
-            </a:r>
-            <a:r>
-              <a:rPr lang="en-US" sz="1050" b="0" noProof="0" dirty="0">
-                <a:solidFill>
-                  <a:srgbClr val="A31515"/>
-                </a:solidFill>
-                <a:effectLst/>
-                <a:latin typeface="Fira Code" panose="020B0809050000020004" pitchFamily="49" charset="0"/>
-              </a:rPr>
-              <a:t>'n'</a:t>
-            </a:r>
-            <a:r>
-              <a:rPr lang="en-US" sz="1050" b="0" noProof="0" dirty="0">
-                <a:solidFill>
-                  <a:srgbClr val="000000"/>
-                </a:solidFill>
-                <a:effectLst/>
-                <a:latin typeface="Fira Code" panose="020B0809050000020004" pitchFamily="49" charset="0"/>
-              </a:rPr>
-              <a:t>&gt;(</a:t>
-            </a:r>
-            <a:r>
-              <a:rPr lang="en-US" sz="1050" b="0" noProof="0" dirty="0">
-                <a:solidFill>
-                  <a:srgbClr val="0070C1"/>
-                </a:solidFill>
-                <a:effectLst/>
-                <a:latin typeface="Fira Code" panose="020B0809050000020004" pitchFamily="49" charset="0"/>
-              </a:rPr>
-              <a:t>M</a:t>
-            </a:r>
-            <a:r>
-              <a:rPr lang="en-US" sz="1050" b="0" noProof="0" dirty="0">
-                <a:solidFill>
-                  <a:srgbClr val="000000"/>
-                </a:solidFill>
-                <a:effectLst/>
-                <a:latin typeface="Fira Code" panose="020B0809050000020004" pitchFamily="49" charset="0"/>
-              </a:rPr>
-              <a:t>, </a:t>
-            </a:r>
-            <a:r>
-              <a:rPr lang="en-US" sz="1050" b="0" noProof="0" dirty="0">
-                <a:solidFill>
-                  <a:srgbClr val="0070C1"/>
-                </a:solidFill>
-                <a:effectLst/>
-                <a:latin typeface="Fira Code" panose="020B0809050000020004" pitchFamily="49" charset="0"/>
-              </a:rPr>
-              <a:t>N</a:t>
-            </a:r>
-            <a:r>
-              <a:rPr lang="en-US" sz="1050" b="0" noProof="0" dirty="0">
-                <a:solidFill>
-                  <a:srgbClr val="000000"/>
-                </a:solidFill>
-                <a:effectLst/>
-                <a:latin typeface="Fira Code" panose="020B0809050000020004" pitchFamily="49" charset="0"/>
-              </a:rPr>
-              <a:t>));</a:t>
-            </a:r>
-          </a:p>
-          <a:p>
-            <a:pPr>
-              <a:lnSpc>
-                <a:spcPct val="113095"/>
-              </a:lnSpc>
-              <a:buNone/>
-            </a:pPr>
-            <a:r>
-              <a:rPr lang="en-US" sz="1050" b="0" noProof="0" dirty="0">
-                <a:solidFill>
-                  <a:srgbClr val="267F99"/>
-                </a:solidFill>
-                <a:effectLst/>
-                <a:latin typeface="Fira Code" panose="020B0809050000020004" pitchFamily="49" charset="0"/>
-              </a:rPr>
-              <a:t>auto</a:t>
-            </a:r>
-            <a:r>
-              <a:rPr lang="en-US" sz="1050" b="0" noProof="0" dirty="0">
-                <a:solidFill>
-                  <a:srgbClr val="000000"/>
-                </a:solidFill>
-                <a:effectLst/>
-                <a:latin typeface="Fira Code" panose="020B0809050000020004" pitchFamily="49" charset="0"/>
-              </a:rPr>
-              <a:t> </a:t>
-            </a:r>
-            <a:r>
-              <a:rPr lang="en-US" sz="1050" b="0" noProof="0" dirty="0">
-                <a:solidFill>
-                  <a:srgbClr val="001080"/>
-                </a:solidFill>
-                <a:effectLst/>
-                <a:latin typeface="Fira Code" panose="020B0809050000020004" pitchFamily="49" charset="0"/>
-              </a:rPr>
-              <a:t>A</a:t>
-            </a:r>
-            <a:r>
-              <a:rPr lang="en-US" sz="1050" b="0" noProof="0" dirty="0">
-                <a:solidFill>
-                  <a:srgbClr val="000000"/>
-                </a:solidFill>
-                <a:effectLst/>
-                <a:latin typeface="Fira Code" panose="020B0809050000020004" pitchFamily="49" charset="0"/>
-              </a:rPr>
-              <a:t> = </a:t>
-            </a:r>
-            <a:r>
-              <a:rPr lang="en-US" sz="1050" b="0" noProof="0" dirty="0">
-                <a:solidFill>
-                  <a:srgbClr val="795E26"/>
-                </a:solidFill>
-                <a:effectLst/>
-                <a:latin typeface="Fira Code" panose="020B0809050000020004" pitchFamily="49" charset="0"/>
-              </a:rPr>
-              <a:t>bag</a:t>
-            </a:r>
-            <a:r>
-              <a:rPr lang="en-US" sz="1050" b="0" noProof="0" dirty="0">
-                <a:solidFill>
-                  <a:srgbClr val="000000"/>
-                </a:solidFill>
-                <a:effectLst/>
-                <a:latin typeface="Fira Code" panose="020B0809050000020004" pitchFamily="49" charset="0"/>
-              </a:rPr>
-              <a:t>(</a:t>
-            </a:r>
-            <a:r>
-              <a:rPr lang="en-US" sz="1050" b="0" noProof="0" dirty="0">
-                <a:solidFill>
-                  <a:srgbClr val="267F99"/>
-                </a:solidFill>
-                <a:effectLst/>
-                <a:latin typeface="Fira Code" panose="020B0809050000020004" pitchFamily="49" charset="0"/>
-              </a:rPr>
-              <a:t>scalar</a:t>
-            </a:r>
-            <a:r>
-              <a:rPr lang="en-US" sz="1050" b="0" noProof="0" dirty="0">
-                <a:solidFill>
-                  <a:srgbClr val="000000"/>
-                </a:solidFill>
-                <a:effectLst/>
-                <a:latin typeface="Fira Code" panose="020B0809050000020004" pitchFamily="49" charset="0"/>
-              </a:rPr>
-              <a:t>&lt;</a:t>
-            </a:r>
-            <a:r>
-              <a:rPr lang="en-US" sz="1050" b="0" noProof="0" dirty="0">
-                <a:solidFill>
-                  <a:srgbClr val="0000FF"/>
-                </a:solidFill>
-                <a:effectLst/>
-                <a:latin typeface="Fira Code" panose="020B0809050000020004" pitchFamily="49" charset="0"/>
-              </a:rPr>
-              <a:t>float</a:t>
-            </a:r>
-            <a:r>
-              <a:rPr lang="en-US" sz="1050" b="0" noProof="0" dirty="0">
-                <a:solidFill>
-                  <a:srgbClr val="000000"/>
-                </a:solidFill>
-                <a:effectLst/>
-                <a:latin typeface="Fira Code" panose="020B0809050000020004" pitchFamily="49" charset="0"/>
-              </a:rPr>
-              <a:t>&gt;() ^ </a:t>
-            </a:r>
-            <a:r>
-              <a:rPr lang="en-US" sz="1050" b="0" noProof="0" dirty="0">
-                <a:solidFill>
-                  <a:srgbClr val="795E26"/>
-                </a:solidFill>
-                <a:effectLst/>
-                <a:latin typeface="Fira Code" panose="020B0809050000020004" pitchFamily="49" charset="0"/>
-              </a:rPr>
-              <a:t>vectors</a:t>
-            </a:r>
-            <a:r>
-              <a:rPr lang="en-US" sz="1050" b="0" noProof="0" dirty="0">
-                <a:solidFill>
-                  <a:srgbClr val="000000"/>
-                </a:solidFill>
-                <a:effectLst/>
-                <a:latin typeface="Fira Code" panose="020B0809050000020004" pitchFamily="49" charset="0"/>
-              </a:rPr>
-              <a:t>&lt;</a:t>
-            </a:r>
-            <a:r>
-              <a:rPr lang="en-US" sz="1050" b="0" noProof="0" dirty="0">
-                <a:solidFill>
-                  <a:srgbClr val="A31515"/>
-                </a:solidFill>
-                <a:effectLst/>
-                <a:latin typeface="Fira Code" panose="020B0809050000020004" pitchFamily="49" charset="0"/>
-              </a:rPr>
-              <a:t>'m'</a:t>
-            </a:r>
-            <a:r>
-              <a:rPr lang="en-US" sz="1050" b="0" noProof="0" dirty="0">
-                <a:solidFill>
-                  <a:srgbClr val="000000"/>
-                </a:solidFill>
-                <a:effectLst/>
-                <a:latin typeface="Fira Code" panose="020B0809050000020004" pitchFamily="49" charset="0"/>
-              </a:rPr>
-              <a:t>, </a:t>
-            </a:r>
-            <a:r>
-              <a:rPr lang="en-US" sz="1050" b="0" noProof="0" dirty="0">
-                <a:solidFill>
-                  <a:srgbClr val="A31515"/>
-                </a:solidFill>
-                <a:effectLst/>
-                <a:latin typeface="Fira Code" panose="020B0809050000020004" pitchFamily="49" charset="0"/>
-              </a:rPr>
-              <a:t>'k'</a:t>
-            </a:r>
-            <a:r>
-              <a:rPr lang="en-US" sz="1050" b="0" noProof="0" dirty="0">
-                <a:solidFill>
-                  <a:srgbClr val="000000"/>
-                </a:solidFill>
-                <a:effectLst/>
-                <a:latin typeface="Fira Code" panose="020B0809050000020004" pitchFamily="49" charset="0"/>
-              </a:rPr>
-              <a:t>&gt;(</a:t>
-            </a:r>
-            <a:r>
-              <a:rPr lang="en-US" sz="1050" b="0" noProof="0" dirty="0">
-                <a:solidFill>
-                  <a:srgbClr val="0070C1"/>
-                </a:solidFill>
-                <a:effectLst/>
-                <a:latin typeface="Fira Code" panose="020B0809050000020004" pitchFamily="49" charset="0"/>
-              </a:rPr>
-              <a:t>M</a:t>
-            </a:r>
-            <a:r>
-              <a:rPr lang="en-US" sz="1050" b="0" noProof="0" dirty="0">
-                <a:solidFill>
-                  <a:srgbClr val="000000"/>
-                </a:solidFill>
-                <a:effectLst/>
-                <a:latin typeface="Fira Code" panose="020B0809050000020004" pitchFamily="49" charset="0"/>
-              </a:rPr>
-              <a:t>, </a:t>
-            </a:r>
-            <a:r>
-              <a:rPr lang="en-US" sz="1050" b="0" noProof="0" dirty="0">
-                <a:solidFill>
-                  <a:srgbClr val="0070C1"/>
-                </a:solidFill>
-                <a:effectLst/>
-                <a:latin typeface="Fira Code" panose="020B0809050000020004" pitchFamily="49" charset="0"/>
-              </a:rPr>
-              <a:t>K</a:t>
-            </a:r>
-            <a:r>
-              <a:rPr lang="en-US" sz="1050" b="0" noProof="0" dirty="0">
-                <a:solidFill>
-                  <a:srgbClr val="000000"/>
-                </a:solidFill>
-                <a:effectLst/>
-                <a:latin typeface="Fira Code" panose="020B0809050000020004" pitchFamily="49" charset="0"/>
-              </a:rPr>
-              <a:t>));</a:t>
-            </a:r>
-          </a:p>
-          <a:p>
-            <a:pPr>
-              <a:lnSpc>
-                <a:spcPct val="113095"/>
-              </a:lnSpc>
-              <a:buNone/>
-            </a:pPr>
-            <a:r>
-              <a:rPr lang="en-US" sz="1050" b="0" noProof="0" dirty="0">
-                <a:solidFill>
-                  <a:srgbClr val="267F99"/>
-                </a:solidFill>
-                <a:effectLst/>
-                <a:latin typeface="Fira Code" panose="020B0809050000020004" pitchFamily="49" charset="0"/>
-              </a:rPr>
-              <a:t>auto</a:t>
-            </a:r>
-            <a:r>
-              <a:rPr lang="en-US" sz="1050" b="0" noProof="0" dirty="0">
-                <a:solidFill>
-                  <a:srgbClr val="000000"/>
-                </a:solidFill>
-                <a:effectLst/>
-                <a:latin typeface="Fira Code" panose="020B0809050000020004" pitchFamily="49" charset="0"/>
-              </a:rPr>
-              <a:t> </a:t>
-            </a:r>
-            <a:r>
-              <a:rPr lang="en-US" sz="1050" b="0" noProof="0" dirty="0">
-                <a:solidFill>
-                  <a:srgbClr val="001080"/>
-                </a:solidFill>
-                <a:effectLst/>
-                <a:latin typeface="Fira Code" panose="020B0809050000020004" pitchFamily="49" charset="0"/>
-              </a:rPr>
-              <a:t>B</a:t>
-            </a:r>
-            <a:r>
-              <a:rPr lang="en-US" sz="1050" b="0" noProof="0" dirty="0">
-                <a:solidFill>
-                  <a:srgbClr val="000000"/>
-                </a:solidFill>
-                <a:effectLst/>
-                <a:latin typeface="Fira Code" panose="020B0809050000020004" pitchFamily="49" charset="0"/>
-              </a:rPr>
-              <a:t> = </a:t>
-            </a:r>
-            <a:r>
-              <a:rPr lang="en-US" sz="1050" b="0" noProof="0" dirty="0">
-                <a:solidFill>
-                  <a:srgbClr val="795E26"/>
-                </a:solidFill>
-                <a:effectLst/>
-                <a:latin typeface="Fira Code" panose="020B0809050000020004" pitchFamily="49" charset="0"/>
-              </a:rPr>
-              <a:t>bag</a:t>
-            </a:r>
-            <a:r>
-              <a:rPr lang="en-US" sz="1050" b="0" noProof="0" dirty="0">
-                <a:solidFill>
-                  <a:srgbClr val="000000"/>
-                </a:solidFill>
-                <a:effectLst/>
-                <a:latin typeface="Fira Code" panose="020B0809050000020004" pitchFamily="49" charset="0"/>
-              </a:rPr>
-              <a:t>(</a:t>
-            </a:r>
-            <a:r>
-              <a:rPr lang="en-US" sz="1050" b="0" noProof="0" dirty="0">
-                <a:solidFill>
-                  <a:srgbClr val="267F99"/>
-                </a:solidFill>
-                <a:effectLst/>
-                <a:latin typeface="Fira Code" panose="020B0809050000020004" pitchFamily="49" charset="0"/>
-              </a:rPr>
-              <a:t>scalar</a:t>
-            </a:r>
-            <a:r>
-              <a:rPr lang="en-US" sz="1050" b="0" noProof="0" dirty="0">
-                <a:solidFill>
-                  <a:srgbClr val="000000"/>
-                </a:solidFill>
-                <a:effectLst/>
-                <a:latin typeface="Fira Code" panose="020B0809050000020004" pitchFamily="49" charset="0"/>
-              </a:rPr>
-              <a:t>&lt;</a:t>
-            </a:r>
-            <a:r>
-              <a:rPr lang="en-US" sz="1050" b="0" noProof="0" dirty="0">
-                <a:solidFill>
-                  <a:srgbClr val="0000FF"/>
-                </a:solidFill>
-                <a:effectLst/>
-                <a:latin typeface="Fira Code" panose="020B0809050000020004" pitchFamily="49" charset="0"/>
-              </a:rPr>
-              <a:t>float</a:t>
-            </a:r>
-            <a:r>
-              <a:rPr lang="en-US" sz="1050" b="0" noProof="0" dirty="0">
-                <a:solidFill>
-                  <a:srgbClr val="000000"/>
-                </a:solidFill>
-                <a:effectLst/>
-                <a:latin typeface="Fira Code" panose="020B0809050000020004" pitchFamily="49" charset="0"/>
-              </a:rPr>
-              <a:t>&gt;() ^ </a:t>
-            </a:r>
-            <a:r>
-              <a:rPr lang="en-US" sz="1050" b="0" noProof="0" dirty="0">
-                <a:solidFill>
-                  <a:srgbClr val="795E26"/>
-                </a:solidFill>
-                <a:effectLst/>
-                <a:latin typeface="Fira Code" panose="020B0809050000020004" pitchFamily="49" charset="0"/>
-              </a:rPr>
-              <a:t>vectors</a:t>
-            </a:r>
-            <a:r>
-              <a:rPr lang="en-US" sz="1050" b="0" noProof="0" dirty="0">
-                <a:solidFill>
-                  <a:srgbClr val="000000"/>
-                </a:solidFill>
-                <a:effectLst/>
-                <a:latin typeface="Fira Code" panose="020B0809050000020004" pitchFamily="49" charset="0"/>
-              </a:rPr>
-              <a:t>&lt;</a:t>
-            </a:r>
-            <a:r>
-              <a:rPr lang="en-US" sz="1050" b="0" noProof="0" dirty="0">
-                <a:solidFill>
-                  <a:srgbClr val="A31515"/>
-                </a:solidFill>
-                <a:effectLst/>
-                <a:latin typeface="Fira Code" panose="020B0809050000020004" pitchFamily="49" charset="0"/>
-              </a:rPr>
-              <a:t>'k'</a:t>
-            </a:r>
-            <a:r>
-              <a:rPr lang="en-US" sz="1050" b="0" noProof="0" dirty="0">
-                <a:solidFill>
-                  <a:srgbClr val="000000"/>
-                </a:solidFill>
-                <a:effectLst/>
-                <a:latin typeface="Fira Code" panose="020B0809050000020004" pitchFamily="49" charset="0"/>
-              </a:rPr>
-              <a:t>, </a:t>
-            </a:r>
-            <a:r>
-              <a:rPr lang="en-US" sz="1050" b="0" noProof="0" dirty="0">
-                <a:solidFill>
-                  <a:srgbClr val="A31515"/>
-                </a:solidFill>
-                <a:effectLst/>
-                <a:latin typeface="Fira Code" panose="020B0809050000020004" pitchFamily="49" charset="0"/>
-              </a:rPr>
-              <a:t>'n'</a:t>
-            </a:r>
-            <a:r>
-              <a:rPr lang="en-US" sz="1050" b="0" noProof="0" dirty="0">
-                <a:solidFill>
-                  <a:srgbClr val="000000"/>
-                </a:solidFill>
-                <a:effectLst/>
-                <a:latin typeface="Fira Code" panose="020B0809050000020004" pitchFamily="49" charset="0"/>
-              </a:rPr>
-              <a:t>&gt;(</a:t>
-            </a:r>
-            <a:r>
-              <a:rPr lang="en-US" sz="1050" b="0" noProof="0" dirty="0">
-                <a:solidFill>
-                  <a:srgbClr val="0070C1"/>
-                </a:solidFill>
-                <a:effectLst/>
-                <a:latin typeface="Fira Code" panose="020B0809050000020004" pitchFamily="49" charset="0"/>
-              </a:rPr>
-              <a:t>K</a:t>
-            </a:r>
-            <a:r>
-              <a:rPr lang="en-US" sz="1050" b="0" noProof="0" dirty="0">
-                <a:solidFill>
-                  <a:srgbClr val="000000"/>
-                </a:solidFill>
-                <a:effectLst/>
-                <a:latin typeface="Fira Code" panose="020B0809050000020004" pitchFamily="49" charset="0"/>
-              </a:rPr>
-              <a:t>, </a:t>
-            </a:r>
-            <a:r>
-              <a:rPr lang="en-US" sz="1050" b="0" noProof="0" dirty="0">
-                <a:solidFill>
-                  <a:srgbClr val="0070C1"/>
-                </a:solidFill>
-                <a:effectLst/>
-                <a:latin typeface="Fira Code" panose="020B0809050000020004" pitchFamily="49" charset="0"/>
-              </a:rPr>
-              <a:t>N</a:t>
-            </a:r>
-            <a:r>
-              <a:rPr lang="en-US" sz="1050" b="0" noProof="0" dirty="0">
-                <a:solidFill>
-                  <a:srgbClr val="000000"/>
-                </a:solidFill>
-                <a:effectLst/>
-                <a:latin typeface="Fira Code" panose="020B0809050000020004" pitchFamily="49" charset="0"/>
-              </a:rPr>
-              <a:t>));</a:t>
-            </a:r>
-          </a:p>
-          <a:p>
-            <a:pPr>
-              <a:lnSpc>
-                <a:spcPct val="113095"/>
-              </a:lnSpc>
-              <a:buNone/>
-            </a:pPr>
-            <a:br>
-              <a:rPr lang="en-US" sz="1050" b="0" noProof="0" dirty="0">
-                <a:solidFill>
-                  <a:srgbClr val="000000"/>
-                </a:solidFill>
-                <a:effectLst/>
-                <a:latin typeface="Fira Code" panose="020B0809050000020004" pitchFamily="49" charset="0"/>
-              </a:rPr>
-            </a:br>
-            <a:r>
-              <a:rPr lang="en-US" sz="1050" b="0" noProof="0" dirty="0">
-                <a:solidFill>
-                  <a:srgbClr val="267F99"/>
-                </a:solidFill>
-                <a:effectLst/>
-                <a:latin typeface="Fira Code" panose="020B0809050000020004" pitchFamily="49" charset="0"/>
-              </a:rPr>
-              <a:t>auto</a:t>
-            </a:r>
-            <a:r>
-              <a:rPr lang="en-US" sz="1050" b="0" noProof="0" dirty="0">
-                <a:solidFill>
-                  <a:srgbClr val="000000"/>
-                </a:solidFill>
-                <a:effectLst/>
-                <a:latin typeface="Fira Code" panose="020B0809050000020004" pitchFamily="49" charset="0"/>
-              </a:rPr>
-              <a:t> </a:t>
-            </a:r>
-            <a:r>
-              <a:rPr lang="en-US" sz="1050" b="0" noProof="0" dirty="0" err="1">
-                <a:solidFill>
-                  <a:srgbClr val="001080"/>
-                </a:solidFill>
-                <a:effectLst/>
-                <a:latin typeface="Fira Code" panose="020B0809050000020004" pitchFamily="49" charset="0"/>
-              </a:rPr>
-              <a:t>by_tiles</a:t>
-            </a:r>
-            <a:r>
-              <a:rPr lang="en-US" sz="1050" b="0" noProof="0" dirty="0">
-                <a:solidFill>
-                  <a:srgbClr val="000000"/>
-                </a:solidFill>
-                <a:effectLst/>
-                <a:latin typeface="Fira Code" panose="020B0809050000020004" pitchFamily="49" charset="0"/>
-              </a:rPr>
-              <a:t> = </a:t>
-            </a:r>
-            <a:r>
-              <a:rPr lang="en-US" sz="1050" noProof="0" dirty="0" err="1">
-                <a:solidFill>
-                  <a:srgbClr val="795E26"/>
-                </a:solidFill>
-                <a:latin typeface="Fira Code" panose="020B0809050000020004" pitchFamily="49" charset="0"/>
-              </a:rPr>
-              <a:t>into_blocks</a:t>
-            </a:r>
-            <a:r>
-              <a:rPr lang="en-US" sz="1050" noProof="0" dirty="0">
-                <a:solidFill>
-                  <a:srgbClr val="000000"/>
-                </a:solidFill>
-                <a:latin typeface="Fira Code" panose="020B0809050000020004" pitchFamily="49" charset="0"/>
-              </a:rPr>
-              <a:t>&lt;</a:t>
-            </a:r>
-            <a:r>
-              <a:rPr lang="en-US" sz="1050" noProof="0" dirty="0">
-                <a:solidFill>
-                  <a:srgbClr val="A31515"/>
-                </a:solidFill>
-                <a:latin typeface="Fira Code" panose="020B0809050000020004" pitchFamily="49" charset="0"/>
-              </a:rPr>
-              <a:t>'m'</a:t>
-            </a:r>
-            <a:r>
-              <a:rPr lang="en-US" sz="1050" noProof="0" dirty="0">
-                <a:solidFill>
-                  <a:srgbClr val="000000"/>
-                </a:solidFill>
-                <a:latin typeface="Fira Code" panose="020B0809050000020004" pitchFamily="49" charset="0"/>
-              </a:rPr>
-              <a:t>, </a:t>
-            </a:r>
-            <a:r>
-              <a:rPr lang="en-US" sz="1050" noProof="0" dirty="0">
-                <a:solidFill>
-                  <a:srgbClr val="A31515"/>
-                </a:solidFill>
-                <a:latin typeface="Fira Code" panose="020B0809050000020004" pitchFamily="49" charset="0"/>
-              </a:rPr>
-              <a:t>'M'</a:t>
-            </a:r>
-            <a:r>
-              <a:rPr lang="en-US" sz="1050" noProof="0" dirty="0">
-                <a:solidFill>
-                  <a:srgbClr val="000000"/>
-                </a:solidFill>
-                <a:latin typeface="Fira Code" panose="020B0809050000020004" pitchFamily="49" charset="0"/>
-              </a:rPr>
-              <a:t>&gt;() ^</a:t>
-            </a:r>
-            <a:br>
-              <a:rPr lang="en-US" sz="1050" noProof="0" dirty="0">
-                <a:solidFill>
-                  <a:srgbClr val="000000"/>
-                </a:solidFill>
-                <a:latin typeface="Fira Code" panose="020B0809050000020004" pitchFamily="49" charset="0"/>
-              </a:rPr>
-            </a:br>
-            <a:r>
-              <a:rPr lang="en-US" sz="1050" noProof="0" dirty="0">
-                <a:solidFill>
-                  <a:srgbClr val="000000"/>
-                </a:solidFill>
-                <a:latin typeface="Fira Code" panose="020B0809050000020004" pitchFamily="49" charset="0"/>
-              </a:rPr>
-              <a:t>                </a:t>
-            </a:r>
-            <a:r>
-              <a:rPr lang="en-US" sz="1050" noProof="0" dirty="0" err="1">
-                <a:solidFill>
-                  <a:srgbClr val="795E26"/>
-                </a:solidFill>
-                <a:latin typeface="Fira Code" panose="020B0809050000020004" pitchFamily="49" charset="0"/>
-              </a:rPr>
-              <a:t>mpi_bind</a:t>
-            </a:r>
-            <a:r>
-              <a:rPr lang="en-US" sz="1050" noProof="0" dirty="0">
-                <a:solidFill>
-                  <a:srgbClr val="000000"/>
-                </a:solidFill>
-                <a:latin typeface="Fira Code" panose="020B0809050000020004" pitchFamily="49" charset="0"/>
-              </a:rPr>
-              <a:t>&lt;</a:t>
-            </a:r>
-            <a:r>
-              <a:rPr lang="en-US" sz="1050" noProof="0" dirty="0">
-                <a:solidFill>
-                  <a:srgbClr val="A31515"/>
-                </a:solidFill>
-                <a:latin typeface="Fira Code" panose="020B0809050000020004" pitchFamily="49" charset="0"/>
-              </a:rPr>
-              <a:t>'M’</a:t>
-            </a:r>
-            <a:r>
-              <a:rPr lang="en-US" sz="1050" noProof="0" dirty="0">
-                <a:solidFill>
-                  <a:srgbClr val="000000"/>
-                </a:solidFill>
-                <a:latin typeface="Fira Code" panose="020B0809050000020004" pitchFamily="49" charset="0"/>
-              </a:rPr>
-              <a:t>&gt;(COMMUNICATOR) ^</a:t>
-            </a:r>
-            <a:endParaRPr lang="en-US" sz="1050" b="0" noProof="0" dirty="0">
-              <a:solidFill>
-                <a:srgbClr val="000000"/>
-              </a:solidFill>
-              <a:effectLst/>
-              <a:latin typeface="Fira Code" panose="020B0809050000020004" pitchFamily="49" charset="0"/>
-            </a:endParaRPr>
-          </a:p>
-          <a:p>
-            <a:pPr>
-              <a:lnSpc>
-                <a:spcPct val="113095"/>
-              </a:lnSpc>
-              <a:buNone/>
-            </a:pPr>
-            <a:r>
-              <a:rPr lang="en-US" sz="1050" b="0" noProof="0" dirty="0">
-                <a:solidFill>
-                  <a:srgbClr val="000000"/>
-                </a:solidFill>
-                <a:effectLst/>
-                <a:latin typeface="Fira Code" panose="020B0809050000020004" pitchFamily="49" charset="0"/>
-              </a:rPr>
-              <a:t>                </a:t>
-            </a:r>
-            <a:r>
-              <a:rPr lang="en-US" sz="1050" b="0" noProof="0" dirty="0">
-                <a:solidFill>
-                  <a:srgbClr val="795E26"/>
-                </a:solidFill>
-                <a:effectLst/>
-                <a:latin typeface="Fira Code" panose="020B0809050000020004" pitchFamily="49" charset="0"/>
-              </a:rPr>
-              <a:t>hoist</a:t>
-            </a:r>
-            <a:r>
-              <a:rPr lang="en-US" sz="1050" b="0" noProof="0" dirty="0">
-                <a:solidFill>
-                  <a:srgbClr val="000000"/>
-                </a:solidFill>
-                <a:effectLst/>
-                <a:latin typeface="Fira Code" panose="020B0809050000020004" pitchFamily="49" charset="0"/>
-              </a:rPr>
-              <a:t>&lt;</a:t>
-            </a:r>
-            <a:r>
-              <a:rPr lang="en-US" sz="1050" b="0" noProof="0" dirty="0">
-                <a:solidFill>
-                  <a:srgbClr val="A31515"/>
-                </a:solidFill>
-                <a:effectLst/>
-                <a:latin typeface="Fira Code" panose="020B0809050000020004" pitchFamily="49" charset="0"/>
-              </a:rPr>
-              <a:t>'M'</a:t>
-            </a:r>
-            <a:r>
-              <a:rPr lang="en-US" sz="1050" b="0" noProof="0" dirty="0">
-                <a:solidFill>
-                  <a:srgbClr val="000000"/>
-                </a:solidFill>
-                <a:effectLst/>
-                <a:latin typeface="Fira Code" panose="020B0809050000020004" pitchFamily="49" charset="0"/>
-              </a:rPr>
-              <a:t>, </a:t>
-            </a:r>
-            <a:r>
-              <a:rPr lang="en-US" sz="1050" b="0" noProof="0" dirty="0">
-                <a:solidFill>
-                  <a:srgbClr val="A31515"/>
-                </a:solidFill>
-                <a:effectLst/>
-                <a:latin typeface="Fira Code" panose="020B0809050000020004" pitchFamily="49" charset="0"/>
-              </a:rPr>
-              <a:t>'N'</a:t>
-            </a:r>
-            <a:r>
-              <a:rPr lang="en-US" sz="1050" b="0" noProof="0" dirty="0">
-                <a:solidFill>
-                  <a:srgbClr val="000000"/>
-                </a:solidFill>
-                <a:effectLst/>
-                <a:latin typeface="Fira Code" panose="020B0809050000020004" pitchFamily="49" charset="0"/>
-              </a:rPr>
-              <a:t>&gt;();</a:t>
-            </a:r>
-          </a:p>
-          <a:p>
-            <a:pPr>
-              <a:lnSpc>
-                <a:spcPct val="113095"/>
-              </a:lnSpc>
-              <a:buNone/>
-            </a:pPr>
-            <a:br>
-              <a:rPr lang="en-US" sz="1050" b="0" noProof="0" dirty="0">
-                <a:solidFill>
-                  <a:srgbClr val="000000"/>
-                </a:solidFill>
-                <a:effectLst/>
-                <a:latin typeface="Fira Code" panose="020B0809050000020004" pitchFamily="49" charset="0"/>
-              </a:rPr>
-            </a:br>
-            <a:r>
-              <a:rPr lang="en-US" sz="1050" b="0" noProof="0" dirty="0">
-                <a:solidFill>
-                  <a:srgbClr val="795E26"/>
-                </a:solidFill>
-                <a:effectLst/>
-                <a:latin typeface="Fira Code" panose="020B0809050000020004" pitchFamily="49" charset="0"/>
-              </a:rPr>
-              <a:t>traverser</a:t>
-            </a:r>
-            <a:r>
-              <a:rPr lang="en-US" sz="1050" b="0" noProof="0" dirty="0">
-                <a:solidFill>
-                  <a:srgbClr val="000000"/>
-                </a:solidFill>
-                <a:effectLst/>
-                <a:latin typeface="Fira Code" panose="020B0809050000020004" pitchFamily="49" charset="0"/>
-              </a:rPr>
-              <a:t>(</a:t>
-            </a:r>
-            <a:r>
-              <a:rPr lang="en-US" sz="1050" b="0" noProof="0" dirty="0">
-                <a:solidFill>
-                  <a:srgbClr val="001080"/>
-                </a:solidFill>
-                <a:effectLst/>
-                <a:latin typeface="Fira Code" panose="020B0809050000020004" pitchFamily="49" charset="0"/>
-              </a:rPr>
-              <a:t>C</a:t>
-            </a:r>
-            <a:r>
-              <a:rPr lang="en-US" sz="1050" b="0" noProof="0" dirty="0">
-                <a:solidFill>
-                  <a:srgbClr val="000000"/>
-                </a:solidFill>
-                <a:effectLst/>
-                <a:latin typeface="Fira Code" panose="020B0809050000020004" pitchFamily="49" charset="0"/>
-              </a:rPr>
-              <a:t>, </a:t>
-            </a:r>
-            <a:r>
-              <a:rPr lang="en-US" sz="1050" b="0" noProof="0" dirty="0">
-                <a:solidFill>
-                  <a:srgbClr val="001080"/>
-                </a:solidFill>
-                <a:effectLst/>
-                <a:latin typeface="Fira Code" panose="020B0809050000020004" pitchFamily="49" charset="0"/>
-              </a:rPr>
-              <a:t>B</a:t>
-            </a:r>
-            <a:r>
-              <a:rPr lang="en-US" sz="1050" b="0" noProof="0" dirty="0">
-                <a:solidFill>
-                  <a:srgbClr val="000000"/>
-                </a:solidFill>
-                <a:effectLst/>
-                <a:latin typeface="Fira Code" panose="020B0809050000020004" pitchFamily="49" charset="0"/>
-              </a:rPr>
-              <a:t>, </a:t>
-            </a:r>
-            <a:r>
-              <a:rPr lang="en-US" sz="1050" b="0" noProof="0" dirty="0">
-                <a:solidFill>
-                  <a:srgbClr val="001080"/>
-                </a:solidFill>
-                <a:effectLst/>
-                <a:latin typeface="Fira Code" panose="020B0809050000020004" pitchFamily="49" charset="0"/>
-              </a:rPr>
-              <a:t>A</a:t>
-            </a:r>
-            <a:r>
-              <a:rPr lang="en-US" sz="1050" b="0" noProof="0" dirty="0">
-                <a:solidFill>
-                  <a:srgbClr val="000000"/>
-                </a:solidFill>
-                <a:effectLst/>
-                <a:latin typeface="Fira Code" panose="020B0809050000020004" pitchFamily="49" charset="0"/>
-              </a:rPr>
-              <a:t>) ^ </a:t>
-            </a:r>
-            <a:r>
-              <a:rPr lang="en-US" sz="1050" b="0" noProof="0" dirty="0" err="1">
-                <a:solidFill>
-                  <a:srgbClr val="001080"/>
-                </a:solidFill>
-                <a:effectLst/>
-                <a:latin typeface="Fira Code" panose="020B0809050000020004" pitchFamily="49" charset="0"/>
-              </a:rPr>
-              <a:t>by_tiles</a:t>
-            </a:r>
-            <a:r>
-              <a:rPr lang="en-US" sz="1050" b="0" noProof="0" dirty="0">
-                <a:solidFill>
-                  <a:srgbClr val="000000"/>
-                </a:solidFill>
-                <a:effectLst/>
-                <a:latin typeface="Fira Code" panose="020B0809050000020004" pitchFamily="49" charset="0"/>
-              </a:rPr>
-              <a:t> | [&amp;](</a:t>
-            </a:r>
-            <a:r>
-              <a:rPr lang="en-US" sz="1050" b="0" noProof="0" dirty="0">
-                <a:solidFill>
-                  <a:srgbClr val="267F99"/>
-                </a:solidFill>
-                <a:effectLst/>
-                <a:latin typeface="Fira Code" panose="020B0809050000020004" pitchFamily="49" charset="0"/>
-              </a:rPr>
-              <a:t>auto</a:t>
-            </a:r>
-            <a:r>
-              <a:rPr lang="en-US" sz="1050" b="0" noProof="0" dirty="0">
-                <a:solidFill>
-                  <a:srgbClr val="000000"/>
-                </a:solidFill>
-                <a:effectLst/>
-                <a:latin typeface="Fira Code" panose="020B0809050000020004" pitchFamily="49" charset="0"/>
-              </a:rPr>
-              <a:t> </a:t>
-            </a:r>
-            <a:r>
-              <a:rPr lang="en-US" sz="1050" b="0" noProof="0" dirty="0">
-                <a:solidFill>
-                  <a:srgbClr val="001080"/>
-                </a:solidFill>
-                <a:effectLst/>
-                <a:latin typeface="Fira Code" panose="020B0809050000020004" pitchFamily="49" charset="0"/>
-              </a:rPr>
-              <a:t>index</a:t>
-            </a:r>
-            <a:r>
-              <a:rPr lang="en-US" sz="1050" b="0" noProof="0" dirty="0">
-                <a:solidFill>
-                  <a:srgbClr val="000000"/>
-                </a:solidFill>
-                <a:effectLst/>
-                <a:latin typeface="Fira Code" panose="020B0809050000020004" pitchFamily="49" charset="0"/>
-              </a:rPr>
-              <a:t>) {</a:t>
-            </a:r>
-          </a:p>
-          <a:p>
-            <a:pPr>
-              <a:lnSpc>
-                <a:spcPct val="113095"/>
-              </a:lnSpc>
-              <a:buNone/>
-            </a:pPr>
-            <a:r>
-              <a:rPr lang="en-US" sz="1050" b="0" noProof="0" dirty="0">
-                <a:solidFill>
-                  <a:srgbClr val="000000"/>
-                </a:solidFill>
-                <a:effectLst/>
-                <a:latin typeface="Fira Code" panose="020B0809050000020004" pitchFamily="49" charset="0"/>
-              </a:rPr>
-              <a:t>    </a:t>
-            </a:r>
-            <a:r>
-              <a:rPr lang="en-US" sz="1050" b="0" noProof="0" dirty="0">
-                <a:solidFill>
-                  <a:srgbClr val="001080"/>
-                </a:solidFill>
-                <a:effectLst/>
-                <a:latin typeface="Fira Code" panose="020B0809050000020004" pitchFamily="49" charset="0"/>
-              </a:rPr>
-              <a:t>C</a:t>
-            </a:r>
-            <a:r>
-              <a:rPr lang="en-US" sz="1050" b="0" noProof="0" dirty="0">
-                <a:solidFill>
-                  <a:srgbClr val="000000"/>
-                </a:solidFill>
-                <a:effectLst/>
-                <a:latin typeface="Fira Code" panose="020B0809050000020004" pitchFamily="49" charset="0"/>
-              </a:rPr>
-              <a:t>[</a:t>
-            </a:r>
-            <a:r>
-              <a:rPr lang="en-US" sz="1050" b="0" noProof="0" dirty="0">
-                <a:solidFill>
-                  <a:srgbClr val="001080"/>
-                </a:solidFill>
-                <a:effectLst/>
-                <a:latin typeface="Fira Code" panose="020B0809050000020004" pitchFamily="49" charset="0"/>
-              </a:rPr>
-              <a:t>index</a:t>
-            </a:r>
-            <a:r>
-              <a:rPr lang="en-US" sz="1050" b="0" noProof="0" dirty="0">
-                <a:solidFill>
-                  <a:srgbClr val="000000"/>
-                </a:solidFill>
-                <a:effectLst/>
-                <a:latin typeface="Fira Code" panose="020B0809050000020004" pitchFamily="49" charset="0"/>
-              </a:rPr>
-              <a:t>] += </a:t>
-            </a:r>
-            <a:r>
-              <a:rPr lang="en-US" sz="1050" b="0" noProof="0" dirty="0">
-                <a:solidFill>
-                  <a:srgbClr val="001080"/>
-                </a:solidFill>
-                <a:effectLst/>
-                <a:latin typeface="Fira Code" panose="020B0809050000020004" pitchFamily="49" charset="0"/>
-              </a:rPr>
-              <a:t>A</a:t>
-            </a:r>
-            <a:r>
-              <a:rPr lang="en-US" sz="1050" b="0" noProof="0" dirty="0">
-                <a:solidFill>
-                  <a:srgbClr val="000000"/>
-                </a:solidFill>
-                <a:effectLst/>
-                <a:latin typeface="Fira Code" panose="020B0809050000020004" pitchFamily="49" charset="0"/>
-              </a:rPr>
-              <a:t>[</a:t>
-            </a:r>
-            <a:r>
-              <a:rPr lang="en-US" sz="1050" b="0" noProof="0" dirty="0">
-                <a:solidFill>
-                  <a:srgbClr val="001080"/>
-                </a:solidFill>
-                <a:effectLst/>
-                <a:latin typeface="Fira Code" panose="020B0809050000020004" pitchFamily="49" charset="0"/>
-              </a:rPr>
-              <a:t>index</a:t>
-            </a:r>
-            <a:r>
-              <a:rPr lang="en-US" sz="1050" b="0" noProof="0" dirty="0">
-                <a:solidFill>
-                  <a:srgbClr val="000000"/>
-                </a:solidFill>
-                <a:effectLst/>
-                <a:latin typeface="Fira Code" panose="020B0809050000020004" pitchFamily="49" charset="0"/>
-              </a:rPr>
-              <a:t>] * </a:t>
-            </a:r>
-            <a:r>
-              <a:rPr lang="en-US" sz="1050" b="0" noProof="0" dirty="0">
-                <a:solidFill>
-                  <a:srgbClr val="001080"/>
-                </a:solidFill>
-                <a:effectLst/>
-                <a:latin typeface="Fira Code" panose="020B0809050000020004" pitchFamily="49" charset="0"/>
-              </a:rPr>
-              <a:t>B</a:t>
-            </a:r>
-            <a:r>
-              <a:rPr lang="en-US" sz="1050" b="0" noProof="0" dirty="0">
-                <a:solidFill>
-                  <a:srgbClr val="000000"/>
-                </a:solidFill>
-                <a:effectLst/>
-                <a:latin typeface="Fira Code" panose="020B0809050000020004" pitchFamily="49" charset="0"/>
-              </a:rPr>
-              <a:t>[</a:t>
-            </a:r>
-            <a:r>
-              <a:rPr lang="en-US" sz="1050" b="0" noProof="0" dirty="0">
-                <a:solidFill>
-                  <a:srgbClr val="001080"/>
-                </a:solidFill>
-                <a:effectLst/>
-                <a:latin typeface="Fira Code" panose="020B0809050000020004" pitchFamily="49" charset="0"/>
-              </a:rPr>
-              <a:t>index</a:t>
-            </a:r>
-            <a:r>
-              <a:rPr lang="en-US" sz="1050" b="0" noProof="0" dirty="0">
-                <a:solidFill>
-                  <a:srgbClr val="000000"/>
-                </a:solidFill>
-                <a:effectLst/>
-                <a:latin typeface="Fira Code" panose="020B0809050000020004" pitchFamily="49" charset="0"/>
-              </a:rPr>
-              <a:t>];</a:t>
-            </a:r>
-          </a:p>
-          <a:p>
-            <a:pPr>
-              <a:lnSpc>
-                <a:spcPct val="113095"/>
-              </a:lnSpc>
-              <a:buNone/>
-            </a:pPr>
-            <a:r>
-              <a:rPr lang="en-US" sz="1050" b="0" noProof="0" dirty="0">
-                <a:solidFill>
-                  <a:srgbClr val="000000"/>
-                </a:solidFill>
-                <a:effectLst/>
-                <a:latin typeface="Fira Code" panose="020B0809050000020004" pitchFamily="49" charset="0"/>
-              </a:rPr>
-              <a:t>};</a:t>
-            </a:r>
-          </a:p>
-        </p:txBody>
-      </p:sp>
-      <p:sp>
-        <p:nvSpPr>
-          <p:cNvPr id="7" name="TextBox 6">
-            <a:extLst>
-              <a:ext uri="{FF2B5EF4-FFF2-40B4-BE49-F238E27FC236}">
-                <a16:creationId xmlns:a16="http://schemas.microsoft.com/office/drawing/2014/main" id="{03BE4FC0-B7FD-D320-3766-50AA66B9FE4E}"/>
+            <a:r>
+              <a:rPr lang="en-US" noProof="0" dirty="0"/>
+              <a:t>send(</a:t>
+            </a:r>
+            <a:r>
+              <a:rPr lang="en-US" noProof="0" dirty="0" err="1"/>
+              <a:t>row_major</a:t>
+            </a:r>
+            <a:r>
+              <a:rPr lang="en-US" noProof="0" dirty="0"/>
+              <a:t>);</a:t>
+            </a:r>
+          </a:p>
+        </p:txBody>
+      </p:sp>
+      <p:sp>
+        <p:nvSpPr>
+          <p:cNvPr id="8" name="TextBox 7">
+            <a:extLst>
+              <a:ext uri="{FF2B5EF4-FFF2-40B4-BE49-F238E27FC236}">
+                <a16:creationId xmlns:a16="http://schemas.microsoft.com/office/drawing/2014/main" id="{C10BA276-D3D5-43CD-BA0F-E78D4E84387D}"/>
               </a:ext>
             </a:extLst>
           </p:cNvPr>
@@ -10729,8 +11252,8 @@
         </p:nvSpPr>
         <p:spPr>
           <a:xfrm>
-            <a:off x="4282440" y="3936274"/>
-            <a:ext cx="2673532" cy="646331"/>
+            <a:off x="8530610" y="3220748"/>
+            <a:ext cx="1798377" cy="369332"/>
           </a:xfrm>
           <a:prstGeom prst="rect">
             <a:avLst/>
@@ -10738,38 +11261,335 @@
           <a:noFill/>
         </p:spPr>
         <p:txBody>
-          <a:bodyPr wrap="square" rtlCol="0">
+          <a:bodyPr wrap="none" rtlCol="0">
             <a:spAutoFit/>
           </a:bodyPr>
           <a:lstStyle/>
           <a:p>
             <a:r>
-              <a:rPr lang="en-US" noProof="0" dirty="0">
-                <a:solidFill>
-                  <a:srgbClr val="FF0000"/>
-                </a:solidFill>
-              </a:rPr>
-              <a:t>TODO: COPY FROM THE ARTIFACT</a:t>
+              <a:rPr lang="en-US" noProof="0" dirty="0" err="1"/>
+              <a:t>recv</a:t>
+            </a:r>
+            <a:r>
+              <a:rPr lang="en-US" noProof="0" dirty="0"/>
+              <a:t>(</a:t>
+            </a:r>
+            <a:r>
+              <a:rPr lang="en-US" noProof="0" dirty="0" err="1"/>
+              <a:t>col_major</a:t>
+            </a:r>
+            <a:r>
+              <a:rPr lang="en-US" noProof="0" dirty="0"/>
+              <a:t>);</a:t>
+            </a:r>
+          </a:p>
+        </p:txBody>
+      </p:sp>
+      <p:sp>
+        <p:nvSpPr>
+          <p:cNvPr id="13" name="TextBox 12">
+            <a:extLst>
+              <a:ext uri="{FF2B5EF4-FFF2-40B4-BE49-F238E27FC236}">
+                <a16:creationId xmlns:a16="http://schemas.microsoft.com/office/drawing/2014/main" id="{439C9CAD-9E1E-7EC1-4429-D017CA1092E1}"/>
+              </a:ext>
+            </a:extLst>
+          </p:cNvPr>
+          <p:cNvSpPr txBox="1"/>
+          <p:nvPr/>
+        </p:nvSpPr>
+        <p:spPr>
+          <a:xfrm>
+            <a:off x="1057696" y="4769331"/>
+            <a:ext cx="626454" cy="369332"/>
+          </a:xfrm>
+          <a:prstGeom prst="rect">
+            <a:avLst/>
+          </a:prstGeom>
+          <a:noFill/>
+        </p:spPr>
+        <p:txBody>
+          <a:bodyPr wrap="none" rtlCol="0">
+            <a:spAutoFit/>
+          </a:bodyPr>
+          <a:lstStyle/>
+          <a:p>
+            <a:r>
+              <a:rPr lang="en-US" noProof="0" dirty="0"/>
+              <a:t>ours</a:t>
+            </a:r>
+          </a:p>
+        </p:txBody>
+      </p:sp>
+      <p:sp>
+        <p:nvSpPr>
+          <p:cNvPr id="14" name="TextBox 13">
+            <a:extLst>
+              <a:ext uri="{FF2B5EF4-FFF2-40B4-BE49-F238E27FC236}">
+                <a16:creationId xmlns:a16="http://schemas.microsoft.com/office/drawing/2014/main" id="{662521EF-5391-2B3B-B4E1-631E6C4FEF95}"/>
+              </a:ext>
+            </a:extLst>
+          </p:cNvPr>
+          <p:cNvSpPr txBox="1"/>
+          <p:nvPr/>
+        </p:nvSpPr>
+        <p:spPr>
+          <a:xfrm>
+            <a:off x="10531434" y="4679949"/>
+            <a:ext cx="713016" cy="369332"/>
+          </a:xfrm>
+          <a:prstGeom prst="rect">
+            <a:avLst/>
+          </a:prstGeom>
+          <a:noFill/>
+        </p:spPr>
+        <p:txBody>
+          <a:bodyPr wrap="none" rtlCol="0">
+            <a:spAutoFit/>
+          </a:bodyPr>
+          <a:lstStyle/>
+          <a:p>
+            <a:r>
+              <a:rPr lang="en-US" noProof="0" dirty="0"/>
+              <a:t>naive</a:t>
+            </a:r>
+          </a:p>
+        </p:txBody>
+      </p:sp>
+      <p:sp>
+        <p:nvSpPr>
+          <p:cNvPr id="3" name="Date Placeholder 2">
+            <a:extLst>
+              <a:ext uri="{FF2B5EF4-FFF2-40B4-BE49-F238E27FC236}">
+                <a16:creationId xmlns:a16="http://schemas.microsoft.com/office/drawing/2014/main" id="{95F10516-14DF-329F-F9DD-AD879766DCDB}"/>
+              </a:ext>
+            </a:extLst>
+          </p:cNvPr>
+          <p:cNvSpPr>
+            <a:spLocks noGrp="1"/>
+          </p:cNvSpPr>
+          <p:nvPr>
+            <p:ph type="dt" sz="half" idx="10"/>
+          </p:nvPr>
+        </p:nvSpPr>
+        <p:spPr/>
+        <p:txBody>
+          <a:bodyPr/>
+          <a:lstStyle/>
+          <a:p>
+            <a:fld id="{2B64091F-5E68-4514-9CCC-EC8E47A52419}" type="datetime1">
+              <a:rPr lang="en-US" smtClean="0"/>
+              <a:t>8/27/2026</a:t>
+            </a:fld>
+            <a:endParaRPr lang="en-US"/>
+          </a:p>
+        </p:txBody>
+      </p:sp>
+      <p:sp>
+        <p:nvSpPr>
+          <p:cNvPr id="7" name="Slide Number Placeholder 6">
+            <a:extLst>
+              <a:ext uri="{FF2B5EF4-FFF2-40B4-BE49-F238E27FC236}">
+                <a16:creationId xmlns:a16="http://schemas.microsoft.com/office/drawing/2014/main" id="{4E29A66E-8887-529B-AA75-343549185834}"/>
+              </a:ext>
+            </a:extLst>
+          </p:cNvPr>
+          <p:cNvSpPr>
+            <a:spLocks noGrp="1"/>
+          </p:cNvSpPr>
+          <p:nvPr>
+            <p:ph type="sldNum" sz="quarter" idx="12"/>
+          </p:nvPr>
+        </p:nvSpPr>
+        <p:spPr/>
+        <p:txBody>
+          <a:bodyPr/>
+          <a:lstStyle/>
+          <a:p>
+            <a:fld id="{DA0BB241-1B5F-4309-9407-9EEA04D9598D}" type="slidenum">
+              <a:rPr lang="en-US" smtClean="0"/>
+              <a:t>13</a:t>
+            </a:fld>
+            <a:endParaRPr lang="en-US"/>
+          </a:p>
+        </p:txBody>
+      </p:sp>
+      <p:pic>
+        <p:nvPicPr>
+          <p:cNvPr id="18" name="Graphic 17">
+            <a:extLst>
+              <a:ext uri="{FF2B5EF4-FFF2-40B4-BE49-F238E27FC236}">
+                <a16:creationId xmlns:a16="http://schemas.microsoft.com/office/drawing/2014/main" id="{06EB6A87-C410-9B14-96CD-100480173550}"/>
+              </a:ext>
+            </a:extLst>
+          </p:cNvPr>
+          <p:cNvPicPr>
+            <a:picLocks noChangeAspect="1"/>
+          </p:cNvPicPr>
+          <p:nvPr/>
+        </p:nvPicPr>
+        <p:blipFill>
+          <a:blip>
+            <a:extLst>
+              <a:ext uri="{96DAC541-7B7A-43D3-8B79-37D633B846F1}">
+                <asvg:svgBlip xmlns:asvg="http://schemas.microsoft.com/office/drawing/2016/SVG/main" r:embed="rId3"/>
+              </a:ext>
+            </a:extLst>
+          </a:blip>
+          <a:srcRect t="1" r="59919" b="62224"/>
+          <a:stretch>
+            <a:fillRect/>
+          </a:stretch>
+        </p:blipFill>
+        <p:spPr>
+          <a:xfrm>
+            <a:off x="4780368" y="1442644"/>
+            <a:ext cx="2631264" cy="1986356"/>
+          </a:xfrm>
+          <a:prstGeom prst="rect">
+            <a:avLst/>
+          </a:prstGeom>
+        </p:spPr>
+      </p:pic>
+      <p:pic>
+        <p:nvPicPr>
+          <p:cNvPr id="20" name="Graphic 19">
+            <a:extLst>
+              <a:ext uri="{FF2B5EF4-FFF2-40B4-BE49-F238E27FC236}">
+                <a16:creationId xmlns:a16="http://schemas.microsoft.com/office/drawing/2014/main" id="{B3AE9794-A1E1-1CB2-4E89-0355A8BF2AAB}"/>
+              </a:ext>
+            </a:extLst>
+          </p:cNvPr>
+          <p:cNvPicPr>
+            <a:picLocks noChangeAspect="1"/>
+          </p:cNvPicPr>
+          <p:nvPr/>
+        </p:nvPicPr>
+        <p:blipFill>
+          <a:blip>
+            <a:extLst>
+              <a:ext uri="{96DAC541-7B7A-43D3-8B79-37D633B846F1}">
+                <asvg:svgBlip xmlns:asvg="http://schemas.microsoft.com/office/drawing/2016/SVG/main" r:embed="rId3"/>
+              </a:ext>
+            </a:extLst>
+          </a:blip>
+          <a:srcRect l="69206" b="49586"/>
+          <a:stretch>
+            <a:fillRect/>
+          </a:stretch>
+        </p:blipFill>
+        <p:spPr>
+          <a:xfrm>
+            <a:off x="8419049" y="3628516"/>
+            <a:ext cx="2021500" cy="2650962"/>
+          </a:xfrm>
+          <a:prstGeom prst="rect">
+            <a:avLst/>
+          </a:prstGeom>
+        </p:spPr>
+      </p:pic>
+      <p:pic>
+        <p:nvPicPr>
+          <p:cNvPr id="22" name="Graphic 21">
+            <a:extLst>
+              <a:ext uri="{FF2B5EF4-FFF2-40B4-BE49-F238E27FC236}">
+                <a16:creationId xmlns:a16="http://schemas.microsoft.com/office/drawing/2014/main" id="{51998753-317E-8821-611A-BAD4E67A202C}"/>
+              </a:ext>
+            </a:extLst>
+          </p:cNvPr>
+          <p:cNvPicPr>
+            <a:picLocks noChangeAspect="1"/>
+          </p:cNvPicPr>
+          <p:nvPr/>
+        </p:nvPicPr>
+        <p:blipFill>
+          <a:blip>
+            <a:extLst>
+              <a:ext uri="{96DAC541-7B7A-43D3-8B79-37D633B846F1}">
+                <asvg:svgBlip xmlns:asvg="http://schemas.microsoft.com/office/drawing/2016/SVG/main" r:embed="rId3"/>
+              </a:ext>
+            </a:extLst>
+          </a:blip>
+          <a:srcRect t="49586" r="69685"/>
+          <a:stretch>
+            <a:fillRect/>
+          </a:stretch>
+        </p:blipFill>
+        <p:spPr>
+          <a:xfrm>
+            <a:off x="1937956" y="3539134"/>
+            <a:ext cx="1990102" cy="2650962"/>
+          </a:xfrm>
+          <a:prstGeom prst="rect">
+            <a:avLst/>
+          </a:prstGeom>
+        </p:spPr>
+      </p:pic>
+      <p:sp>
+        <p:nvSpPr>
+          <p:cNvPr id="26" name="TextBox 25">
+            <a:extLst>
+              <a:ext uri="{FF2B5EF4-FFF2-40B4-BE49-F238E27FC236}">
+                <a16:creationId xmlns:a16="http://schemas.microsoft.com/office/drawing/2014/main" id="{961FBEC7-CB4A-332B-8305-81A140E2B4BC}"/>
+              </a:ext>
+            </a:extLst>
+          </p:cNvPr>
+          <p:cNvSpPr txBox="1"/>
+          <p:nvPr/>
+        </p:nvSpPr>
+        <p:spPr>
+          <a:xfrm>
+            <a:off x="2072983" y="3134200"/>
+            <a:ext cx="1798377" cy="369332"/>
+          </a:xfrm>
+          <a:prstGeom prst="rect">
+            <a:avLst/>
+          </a:prstGeom>
+          <a:noFill/>
+        </p:spPr>
+        <p:txBody>
+          <a:bodyPr wrap="none" rtlCol="0">
+            <a:spAutoFit/>
+          </a:bodyPr>
+          <a:lstStyle/>
+          <a:p>
+            <a:r>
+              <a:rPr lang="en-US" noProof="0" dirty="0" err="1"/>
+              <a:t>recv</a:t>
+            </a:r>
+            <a:r>
+              <a:rPr lang="en-US" noProof="0" dirty="0"/>
+              <a:t>(</a:t>
+            </a:r>
+            <a:r>
+              <a:rPr lang="en-US" noProof="0" dirty="0" err="1"/>
+              <a:t>col_major</a:t>
+            </a:r>
+            <a:r>
+              <a:rPr lang="en-US" noProof="0" dirty="0"/>
+              <a:t>);</a:t>
             </a:r>
           </a:p>
         </p:txBody>
       </p:sp>
       <p:cxnSp>
         <p:nvCxnSpPr>
-          <p:cNvPr id="9" name="Straight Arrow Connector 8">
-            <a:extLst>
-              <a:ext uri="{FF2B5EF4-FFF2-40B4-BE49-F238E27FC236}">
-                <a16:creationId xmlns:a16="http://schemas.microsoft.com/office/drawing/2014/main" id="{B99C109E-171A-6E48-B037-3009F35E3E49}"/>
-              </a:ext>
-            </a:extLst>
-          </p:cNvPr>
-          <p:cNvCxnSpPr/>
+          <p:cNvPr id="28" name="Straight Arrow Connector 27">
+            <a:extLst>
+              <a:ext uri="{FF2B5EF4-FFF2-40B4-BE49-F238E27FC236}">
+                <a16:creationId xmlns:a16="http://schemas.microsoft.com/office/drawing/2014/main" id="{2045E9BC-7505-AE12-2FF8-B6E23CAD3D28}"/>
+              </a:ext>
+            </a:extLst>
+          </p:cNvPr>
+          <p:cNvCxnSpPr>
+            <a:stCxn id="18" idx="2"/>
+            <a:endCxn id="22" idx="3"/>
+          </p:cNvCxnSpPr>
           <p:nvPr/>
         </p:nvCxnSpPr>
         <p:spPr>
-          <a:xfrm flipV="1">
-            <a:off x="6096000" y="2760617"/>
-            <a:ext cx="2194560" cy="748937"/>
+          <a:xfrm flipH="1">
+            <a:off x="3928058" y="3429000"/>
+            <a:ext cx="2167942" cy="1435615"/>
           </a:xfrm>
           <a:prstGeom prst="straightConnector1">
             <a:avLst/>
@@ -10795,22 +11615,23 @@
       </p:cxnSp>
       <p:cxnSp>
         <p:nvCxnSpPr>
-          <p:cNvPr id="10" name="Straight Arrow Connector 9">
-            <a:extLst>
-              <a:ext uri="{FF2B5EF4-FFF2-40B4-BE49-F238E27FC236}">
-                <a16:creationId xmlns:a16="http://schemas.microsoft.com/office/drawing/2014/main" id="{FCAEE460-F635-1C27-9B25-A6B4548995A8}"/>
+          <p:cNvPr id="30" name="Straight Arrow Connector 29">
+            <a:extLst>
+              <a:ext uri="{FF2B5EF4-FFF2-40B4-BE49-F238E27FC236}">
+                <a16:creationId xmlns:a16="http://schemas.microsoft.com/office/drawing/2014/main" id="{3BDE0C27-4E21-7450-D688-E0A67CB04B34}"/>
               </a:ext>
             </a:extLst>
           </p:cNvPr>
           <p:cNvCxnSpPr>
-            <a:cxnSpLocks/>
+            <a:stCxn id="18" idx="2"/>
+            <a:endCxn id="20" idx="1"/>
           </p:cNvCxnSpPr>
           <p:nvPr/>
         </p:nvCxnSpPr>
         <p:spPr>
           <a:xfrm>
-            <a:off x="6955972" y="4258491"/>
-            <a:ext cx="1395548" cy="948"/>
+            <a:off x="6096000" y="3429000"/>
+            <a:ext cx="2323049" cy="1524997"/>
           </a:xfrm>
           <a:prstGeom prst="straightConnector1">
             <a:avLst/>
@@ -10834,53 +11655,12 @@
           </a:fontRef>
         </p:style>
       </p:cxnSp>
-      <p:cxnSp>
-        <p:nvCxnSpPr>
-          <p:cNvPr id="12" name="Straight Arrow Connector 11">
-            <a:extLst>
-              <a:ext uri="{FF2B5EF4-FFF2-40B4-BE49-F238E27FC236}">
-                <a16:creationId xmlns:a16="http://schemas.microsoft.com/office/drawing/2014/main" id="{DFDAD778-041C-142A-9B74-7A0854065A9D}"/>
-              </a:ext>
-            </a:extLst>
-          </p:cNvPr>
-          <p:cNvCxnSpPr>
-            <a:cxnSpLocks/>
-          </p:cNvCxnSpPr>
-          <p:nvPr/>
-        </p:nvCxnSpPr>
-        <p:spPr>
-          <a:xfrm>
-            <a:off x="6751320" y="5008376"/>
-            <a:ext cx="1539240" cy="669613"/>
-          </a:xfrm>
-          <a:prstGeom prst="straightConnector1">
-            <a:avLst/>
-          </a:prstGeom>
-          <a:ln>
-            <a:tailEnd type="triangle"/>
-          </a:ln>
-        </p:spPr>
-        <p:style>
-          <a:lnRef idx="2">
-            <a:schemeClr val="accent1"/>
-          </a:lnRef>
-          <a:fillRef idx="0">
-            <a:schemeClr val="accent1"/>
-          </a:fillRef>
-          <a:effectRef idx="1">
-            <a:schemeClr val="accent1"/>
-          </a:effectRef>
-          <a:fontRef idx="minor">
-            <a:schemeClr val="tx1"/>
-          </a:fontRef>
-        </p:style>
-      </p:cxnSp>
-      <p:sp>
-        <p:nvSpPr>
-          <p:cNvPr id="14" name="TextBox 13">
-            <a:extLst>
-              <a:ext uri="{FF2B5EF4-FFF2-40B4-BE49-F238E27FC236}">
-                <a16:creationId xmlns:a16="http://schemas.microsoft.com/office/drawing/2014/main" id="{99BE1F9E-2544-9BDB-5CC7-E47187F05A6E}"/>
+      <p:sp>
+        <p:nvSpPr>
+          <p:cNvPr id="31" name="TextBox 30">
+            <a:extLst>
+              <a:ext uri="{FF2B5EF4-FFF2-40B4-BE49-F238E27FC236}">
+                <a16:creationId xmlns:a16="http://schemas.microsoft.com/office/drawing/2014/main" id="{AE4C11DF-8744-F535-8D96-016E3870A3DE}"/>
               </a:ext>
             </a:extLst>
           </p:cNvPr>
@@ -10888,9 +11668,9 @@
           <p:nvPr/>
         </p:nvSpPr>
         <p:spPr>
-          <a:xfrm>
-            <a:off x="8429898" y="2575951"/>
-            <a:ext cx="904671" cy="369332"/>
+          <a:xfrm rot="2037324">
+            <a:off x="6007681" y="4254601"/>
+            <a:ext cx="2698431" cy="369332"/>
           </a:xfrm>
           <a:prstGeom prst="rect">
             <a:avLst/>
@@ -10904,18 +11684,18 @@
           <a:lstStyle/>
           <a:p>
             <a:r>
-              <a:rPr lang="en-US" noProof="0" dirty="0"/>
-              <a:t>Scatter</a:t>
-            </a:r>
-          </a:p>
-        </p:txBody>
-      </p:sp>
-      <p:sp>
-        <p:nvSpPr>
-          <p:cNvPr id="16" name="TextBox 15">
-            <a:extLst>
-              <a:ext uri="{FF2B5EF4-FFF2-40B4-BE49-F238E27FC236}">
-                <a16:creationId xmlns:a16="http://schemas.microsoft.com/office/drawing/2014/main" id="{ED7CD3EF-9BE9-5D50-D214-6FD467C00A95}"/>
+              <a:rPr lang="en-US" dirty="0"/>
+              <a:t>Preserves physical layout</a:t>
+            </a:r>
+          </a:p>
+        </p:txBody>
+      </p:sp>
+      <p:sp>
+        <p:nvSpPr>
+          <p:cNvPr id="33" name="TextBox 32">
+            <a:extLst>
+              <a:ext uri="{FF2B5EF4-FFF2-40B4-BE49-F238E27FC236}">
+                <a16:creationId xmlns:a16="http://schemas.microsoft.com/office/drawing/2014/main" id="{C246AED9-F132-9733-D20A-38A72DC05DB0}"/>
               </a:ext>
             </a:extLst>
           </p:cNvPr>
@@ -10923,9 +11703,9 @@
           <p:nvPr/>
         </p:nvSpPr>
         <p:spPr>
-          <a:xfrm>
-            <a:off x="8429897" y="4073825"/>
-            <a:ext cx="1122871" cy="369332"/>
+          <a:xfrm rot="19575917">
+            <a:off x="3645637" y="4096535"/>
+            <a:ext cx="2822824" cy="369332"/>
           </a:xfrm>
           <a:prstGeom prst="rect">
             <a:avLst/>
@@ -10939,109 +11719,16 @@
           <a:lstStyle/>
           <a:p>
             <a:r>
-              <a:rPr lang="en-US" noProof="0" dirty="0"/>
-              <a:t>Compute</a:t>
-            </a:r>
-          </a:p>
-        </p:txBody>
-      </p:sp>
-      <p:sp>
-        <p:nvSpPr>
-          <p:cNvPr id="18" name="TextBox 17">
-            <a:extLst>
-              <a:ext uri="{FF2B5EF4-FFF2-40B4-BE49-F238E27FC236}">
-                <a16:creationId xmlns:a16="http://schemas.microsoft.com/office/drawing/2014/main" id="{63B12673-26DD-6FEE-1502-219CF700DF05}"/>
-              </a:ext>
-            </a:extLst>
-          </p:cNvPr>
-          <p:cNvSpPr txBox="1"/>
-          <p:nvPr/>
-        </p:nvSpPr>
-        <p:spPr>
-          <a:xfrm>
-            <a:off x="8447081" y="5493323"/>
-            <a:ext cx="870303" cy="369332"/>
-          </a:xfrm>
-          <a:prstGeom prst="rect">
-            <a:avLst/>
-          </a:prstGeom>
-          <a:noFill/>
-        </p:spPr>
-        <p:txBody>
-          <a:bodyPr wrap="none" rtlCol="0">
-            <a:spAutoFit/>
-          </a:bodyPr>
-          <a:lstStyle/>
-          <a:p>
-            <a:r>
-              <a:rPr lang="en-US" noProof="0" dirty="0"/>
-              <a:t>Gather</a:t>
-            </a:r>
-          </a:p>
-        </p:txBody>
-      </p:sp>
-      <p:sp>
-        <p:nvSpPr>
-          <p:cNvPr id="2" name="Date Placeholder 1">
-            <a:extLst>
-              <a:ext uri="{FF2B5EF4-FFF2-40B4-BE49-F238E27FC236}">
-                <a16:creationId xmlns:a16="http://schemas.microsoft.com/office/drawing/2014/main" id="{AB76C1E0-CD3C-9F4D-50D4-C3DCA8305A7A}"/>
-              </a:ext>
-            </a:extLst>
-          </p:cNvPr>
-          <p:cNvSpPr>
-            <a:spLocks noGrp="1"/>
-          </p:cNvSpPr>
-          <p:nvPr>
-            <p:ph type="dt" sz="half" idx="10"/>
-          </p:nvPr>
-        </p:nvSpPr>
-        <p:spPr/>
-        <p:txBody>
-          <a:bodyPr/>
-          <a:lstStyle/>
-          <a:p>
-            <a:fld id="{2B279B89-4195-46F9-9E41-36E91C37E941}" type="datetime1">
-              <a:rPr lang="en-US" smtClean="0"/>
-              <a:t>8/26/2026</a:t>
-            </a:fld>
-            <a:endParaRPr lang="en-US"/>
-          </a:p>
-        </p:txBody>
-      </p:sp>
-      <p:sp>
-        <p:nvSpPr>
-          <p:cNvPr id="3" name="Slide Number Placeholder 2">
-            <a:extLst>
-              <a:ext uri="{FF2B5EF4-FFF2-40B4-BE49-F238E27FC236}">
-                <a16:creationId xmlns:a16="http://schemas.microsoft.com/office/drawing/2014/main" id="{4C400892-F505-BD5D-E895-F0CA131C174A}"/>
-              </a:ext>
-            </a:extLst>
-          </p:cNvPr>
-          <p:cNvSpPr>
-            <a:spLocks noGrp="1"/>
-          </p:cNvSpPr>
-          <p:nvPr>
-            <p:ph type="sldNum" sz="quarter" idx="12"/>
-          </p:nvPr>
-        </p:nvSpPr>
-        <p:spPr/>
-        <p:txBody>
-          <a:bodyPr/>
-          <a:lstStyle/>
-          <a:p>
-            <a:fld id="{DA0BB241-1B5F-4309-9407-9EEA04D9598D}" type="slidenum">
-              <a:rPr lang="en-US" smtClean="0"/>
-              <a:t>13</a:t>
-            </a:fld>
-            <a:endParaRPr lang="en-US"/>
+              <a:rPr lang="en-US" dirty="0"/>
+              <a:t>Preserves logical structure</a:t>
+            </a:r>
           </a:p>
         </p:txBody>
       </p:sp>
     </p:spTree>
     <p:extLst>
       <p:ext uri="{BB962C8B-B14F-4D97-AF65-F5344CB8AC3E}">
-        <p14:creationId xmlns:p14="http://schemas.microsoft.com/office/powerpoint/2010/main" val="3576227170"/>
+        <p14:creationId xmlns:p14="http://schemas.microsoft.com/office/powerpoint/2010/main" val="1484151549"/>
       </p:ext>
     </p:extLst>
   </p:cSld>
@@ -11054,15 +11741,17 @@
 <file path=ppt/slides/slide14.xml><?xml version="1.0" encoding="utf-8"?>
 <p:sld xmlns:a="http://schemas.openxmlformats.org/drawingml/2006/main" xmlns:r="http://schemas.openxmlformats.org/officeDocument/2006/relationships" xmlns:p="http://schemas.openxmlformats.org/presentationml/2006/main">
   <p:cSld>
+    <p:bg>
+      <p:bgPr>
+        <a:solidFill>
+          <a:srgbClr val="FFFF00"/>
+        </a:solidFill>
+        <a:effectLst/>
+      </p:bgPr>
+    </p:bg>
     <p:spTree>
       <p:nvGrpSpPr>
-        <p:cNvPr id="1" name="">
-          <a:extLst>
-            <a:ext uri="{FF2B5EF4-FFF2-40B4-BE49-F238E27FC236}">
-              <a16:creationId xmlns:a16="http://schemas.microsoft.com/office/drawing/2014/main" id="{0B5D3D26-2B4F-0ACB-E3E2-25555241B154}"/>
-            </a:ext>
-          </a:extLst>
-        </p:cNvPr>
+        <p:cNvPr id="1" name=""/>
         <p:cNvGrpSpPr/>
         <p:nvPr/>
       </p:nvGrpSpPr>
@@ -11076,10 +11765,10 @@
       </p:grpSpPr>
       <p:sp>
         <p:nvSpPr>
-          <p:cNvPr id="4" name="Title 3">
-            <a:extLst>
-              <a:ext uri="{FF2B5EF4-FFF2-40B4-BE49-F238E27FC236}">
-                <a16:creationId xmlns:a16="http://schemas.microsoft.com/office/drawing/2014/main" id="{CE775342-3158-BFC3-939C-F28445402BA4}"/>
+          <p:cNvPr id="2" name="Title 1">
+            <a:extLst>
+              <a:ext uri="{FF2B5EF4-FFF2-40B4-BE49-F238E27FC236}">
+                <a16:creationId xmlns:a16="http://schemas.microsoft.com/office/drawing/2014/main" id="{C4A9E796-E8D3-B4A5-DE7B-322F63386F74}"/>
               </a:ext>
             </a:extLst>
           </p:cNvPr>
@@ -11095,366 +11784,79 @@
           <a:bodyPr/>
           <a:lstStyle/>
           <a:p>
-            <a:endParaRPr lang="en-US" noProof="0" dirty="0"/>
-          </a:p>
-        </p:txBody>
-      </p:sp>
-      <p:sp>
-        <p:nvSpPr>
-          <p:cNvPr id="2" name="Rectangle 1">
-            <a:extLst>
-              <a:ext uri="{FF2B5EF4-FFF2-40B4-BE49-F238E27FC236}">
-                <a16:creationId xmlns:a16="http://schemas.microsoft.com/office/drawing/2014/main" id="{5078614E-A6EB-B58F-B6F8-B17BCC956B35}"/>
-              </a:ext>
-            </a:extLst>
-          </p:cNvPr>
-          <p:cNvSpPr/>
+            <a:r>
+              <a:rPr lang="en-US" noProof="0" dirty="0"/>
+              <a:t>Results</a:t>
+            </a:r>
+          </a:p>
+        </p:txBody>
+      </p:sp>
+      <p:pic>
+        <p:nvPicPr>
+          <p:cNvPr id="5" name="Picture 4">
+            <a:extLst>
+              <a:ext uri="{FF2B5EF4-FFF2-40B4-BE49-F238E27FC236}">
+                <a16:creationId xmlns:a16="http://schemas.microsoft.com/office/drawing/2014/main" id="{D43B218F-11A7-3C72-B764-CB088CE45925}"/>
+              </a:ext>
+            </a:extLst>
+          </p:cNvPr>
+          <p:cNvPicPr>
+            <a:picLocks noChangeAspect="1"/>
+          </p:cNvPicPr>
           <p:nvPr/>
-        </p:nvSpPr>
+        </p:nvPicPr>
+        <p:blipFill>
+          <a:blip r:embed="rId3"/>
+          <a:stretch>
+            <a:fillRect/>
+          </a:stretch>
+        </p:blipFill>
         <p:spPr>
           <a:xfrm>
-            <a:off x="1480457" y="2592977"/>
-            <a:ext cx="1968137" cy="2360023"/>
+            <a:off x="2940615" y="3429000"/>
+            <a:ext cx="8602275" cy="2924583"/>
           </a:xfrm>
           <a:prstGeom prst="rect">
             <a:avLst/>
           </a:prstGeom>
         </p:spPr>
-        <p:style>
-          <a:lnRef idx="2">
-            <a:schemeClr val="accent1">
-              <a:shade val="15000"/>
-            </a:schemeClr>
-          </a:lnRef>
-          <a:fillRef idx="1">
-            <a:schemeClr val="accent1"/>
-          </a:fillRef>
-          <a:effectRef idx="0">
-            <a:schemeClr val="accent1"/>
-          </a:effectRef>
-          <a:fontRef idx="minor">
-            <a:schemeClr val="lt1"/>
-          </a:fontRef>
-        </p:style>
-        <p:txBody>
-          <a:bodyPr rtlCol="0" anchor="ctr"/>
-          <a:lstStyle/>
-          <a:p>
-            <a:pPr algn="ctr"/>
-            <a:endParaRPr lang="en-US" noProof="0" dirty="0"/>
-          </a:p>
-        </p:txBody>
-      </p:sp>
-      <p:sp>
-        <p:nvSpPr>
-          <p:cNvPr id="5" name="Rectangle 4">
-            <a:extLst>
-              <a:ext uri="{FF2B5EF4-FFF2-40B4-BE49-F238E27FC236}">
-                <a16:creationId xmlns:a16="http://schemas.microsoft.com/office/drawing/2014/main" id="{EF378A81-CAFE-54BD-887A-F06DC9BF4A37}"/>
-              </a:ext>
-            </a:extLst>
-          </p:cNvPr>
-          <p:cNvSpPr/>
+      </p:pic>
+      <p:pic>
+        <p:nvPicPr>
+          <p:cNvPr id="7" name="Picture 6">
+            <a:extLst>
+              <a:ext uri="{FF2B5EF4-FFF2-40B4-BE49-F238E27FC236}">
+                <a16:creationId xmlns:a16="http://schemas.microsoft.com/office/drawing/2014/main" id="{1C406B68-4369-7351-330F-FAD27DE0E126}"/>
+              </a:ext>
+            </a:extLst>
+          </p:cNvPr>
+          <p:cNvPicPr>
+            <a:picLocks noChangeAspect="1"/>
+          </p:cNvPicPr>
           <p:nvPr/>
-        </p:nvSpPr>
+        </p:nvPicPr>
+        <p:blipFill>
+          <a:blip r:embed="rId4"/>
+          <a:stretch>
+            <a:fillRect/>
+          </a:stretch>
+        </p:blipFill>
         <p:spPr>
-          <a:xfrm rot="16200000">
-            <a:off x="7863841" y="2521131"/>
-            <a:ext cx="1968137" cy="2360023"/>
+          <a:xfrm>
+            <a:off x="4121330" y="1293295"/>
+            <a:ext cx="6725589" cy="1886213"/>
           </a:xfrm>
           <a:prstGeom prst="rect">
             <a:avLst/>
           </a:prstGeom>
         </p:spPr>
-        <p:style>
-          <a:lnRef idx="2">
-            <a:schemeClr val="accent1">
-              <a:shade val="15000"/>
-            </a:schemeClr>
-          </a:lnRef>
-          <a:fillRef idx="1">
-            <a:schemeClr val="accent1"/>
-          </a:fillRef>
-          <a:effectRef idx="0">
-            <a:schemeClr val="accent1"/>
-          </a:effectRef>
-          <a:fontRef idx="minor">
-            <a:schemeClr val="lt1"/>
-          </a:fontRef>
-        </p:style>
-        <p:txBody>
-          <a:bodyPr rtlCol="0" anchor="ctr"/>
-          <a:lstStyle/>
-          <a:p>
-            <a:pPr algn="ctr"/>
-            <a:endParaRPr lang="en-US" noProof="0" dirty="0"/>
-          </a:p>
-        </p:txBody>
-      </p:sp>
-      <p:sp>
-        <p:nvSpPr>
-          <p:cNvPr id="6" name="TextBox 5">
-            <a:extLst>
-              <a:ext uri="{FF2B5EF4-FFF2-40B4-BE49-F238E27FC236}">
-                <a16:creationId xmlns:a16="http://schemas.microsoft.com/office/drawing/2014/main" id="{C1A4FEEA-F6A5-2F0C-61D6-D842A122ADD5}"/>
-              </a:ext>
-            </a:extLst>
-          </p:cNvPr>
-          <p:cNvSpPr txBox="1"/>
-          <p:nvPr/>
-        </p:nvSpPr>
-        <p:spPr>
-          <a:xfrm>
-            <a:off x="1523643" y="2081348"/>
-            <a:ext cx="1924951" cy="369332"/>
-          </a:xfrm>
-          <a:prstGeom prst="rect">
-            <a:avLst/>
-          </a:prstGeom>
-          <a:noFill/>
-        </p:spPr>
-        <p:txBody>
-          <a:bodyPr wrap="none" rtlCol="0">
-            <a:spAutoFit/>
-          </a:bodyPr>
-          <a:lstStyle/>
-          <a:p>
-            <a:r>
-              <a:rPr lang="en-US" noProof="0" dirty="0"/>
-              <a:t>send(</a:t>
-            </a:r>
-            <a:r>
-              <a:rPr lang="en-US" noProof="0" dirty="0" err="1"/>
-              <a:t>row_major</a:t>
-            </a:r>
-            <a:r>
-              <a:rPr lang="en-US" noProof="0" dirty="0"/>
-              <a:t>);</a:t>
-            </a:r>
-          </a:p>
-        </p:txBody>
-      </p:sp>
-      <p:sp>
-        <p:nvSpPr>
-          <p:cNvPr id="8" name="TextBox 7">
-            <a:extLst>
-              <a:ext uri="{FF2B5EF4-FFF2-40B4-BE49-F238E27FC236}">
-                <a16:creationId xmlns:a16="http://schemas.microsoft.com/office/drawing/2014/main" id="{C10BA276-D3D5-43CD-BA0F-E78D4E84387D}"/>
-              </a:ext>
-            </a:extLst>
-          </p:cNvPr>
-          <p:cNvSpPr txBox="1"/>
-          <p:nvPr/>
-        </p:nvSpPr>
-        <p:spPr>
-          <a:xfrm>
-            <a:off x="7948720" y="2284215"/>
-            <a:ext cx="1798377" cy="369332"/>
-          </a:xfrm>
-          <a:prstGeom prst="rect">
-            <a:avLst/>
-          </a:prstGeom>
-          <a:noFill/>
-        </p:spPr>
-        <p:txBody>
-          <a:bodyPr wrap="none" rtlCol="0">
-            <a:spAutoFit/>
-          </a:bodyPr>
-          <a:lstStyle/>
-          <a:p>
-            <a:r>
-              <a:rPr lang="en-US" noProof="0" dirty="0" err="1"/>
-              <a:t>recv</a:t>
-            </a:r>
-            <a:r>
-              <a:rPr lang="en-US" noProof="0" dirty="0"/>
-              <a:t>(</a:t>
-            </a:r>
-            <a:r>
-              <a:rPr lang="en-US" noProof="0" dirty="0" err="1"/>
-              <a:t>col_major</a:t>
-            </a:r>
-            <a:r>
-              <a:rPr lang="en-US" noProof="0" dirty="0"/>
-              <a:t>);</a:t>
-            </a:r>
-          </a:p>
-        </p:txBody>
-      </p:sp>
-      <p:sp>
-        <p:nvSpPr>
-          <p:cNvPr id="10" name="Rectangle 9">
-            <a:extLst>
-              <a:ext uri="{FF2B5EF4-FFF2-40B4-BE49-F238E27FC236}">
-                <a16:creationId xmlns:a16="http://schemas.microsoft.com/office/drawing/2014/main" id="{92B3BAE0-1817-336E-2191-5401BAB3AF67}"/>
-              </a:ext>
-            </a:extLst>
-          </p:cNvPr>
-          <p:cNvSpPr/>
-          <p:nvPr/>
-        </p:nvSpPr>
-        <p:spPr>
-          <a:xfrm>
-            <a:off x="1606731" y="5016527"/>
-            <a:ext cx="1968137" cy="2360023"/>
-          </a:xfrm>
-          <a:prstGeom prst="rect">
-            <a:avLst/>
-          </a:prstGeom>
-          <a:solidFill>
-            <a:srgbClr val="FF0000"/>
-          </a:solidFill>
-        </p:spPr>
-        <p:style>
-          <a:lnRef idx="2">
-            <a:schemeClr val="accent1">
-              <a:shade val="15000"/>
-            </a:schemeClr>
-          </a:lnRef>
-          <a:fillRef idx="1">
-            <a:schemeClr val="accent1"/>
-          </a:fillRef>
-          <a:effectRef idx="0">
-            <a:schemeClr val="accent1"/>
-          </a:effectRef>
-          <a:fontRef idx="minor">
-            <a:schemeClr val="lt1"/>
-          </a:fontRef>
-        </p:style>
-        <p:txBody>
-          <a:bodyPr rtlCol="0" anchor="ctr"/>
-          <a:lstStyle/>
-          <a:p>
-            <a:pPr algn="ctr"/>
-            <a:endParaRPr lang="en-US" noProof="0" dirty="0"/>
-          </a:p>
-        </p:txBody>
-      </p:sp>
-      <p:sp>
-        <p:nvSpPr>
-          <p:cNvPr id="12" name="Rectangle 11">
-            <a:extLst>
-              <a:ext uri="{FF2B5EF4-FFF2-40B4-BE49-F238E27FC236}">
-                <a16:creationId xmlns:a16="http://schemas.microsoft.com/office/drawing/2014/main" id="{C75B32D4-98DA-65FF-8827-23DC482C05DB}"/>
-              </a:ext>
-            </a:extLst>
-          </p:cNvPr>
-          <p:cNvSpPr/>
-          <p:nvPr/>
-        </p:nvSpPr>
-        <p:spPr>
-          <a:xfrm rot="16200000">
-            <a:off x="7990115" y="4944681"/>
-            <a:ext cx="1968137" cy="2360023"/>
-          </a:xfrm>
-          <a:prstGeom prst="rect">
-            <a:avLst/>
-          </a:prstGeom>
-          <a:solidFill>
-            <a:srgbClr val="FF0000"/>
-          </a:solidFill>
-        </p:spPr>
-        <p:style>
-          <a:lnRef idx="2">
-            <a:schemeClr val="accent1">
-              <a:shade val="15000"/>
-            </a:schemeClr>
-          </a:lnRef>
-          <a:fillRef idx="1">
-            <a:schemeClr val="accent1"/>
-          </a:fillRef>
-          <a:effectRef idx="0">
-            <a:schemeClr val="accent1"/>
-          </a:effectRef>
-          <a:fontRef idx="minor">
-            <a:schemeClr val="lt1"/>
-          </a:fontRef>
-        </p:style>
-        <p:txBody>
-          <a:bodyPr rtlCol="0" anchor="ctr"/>
-          <a:lstStyle/>
-          <a:p>
-            <a:pPr algn="ctr"/>
-            <a:endParaRPr lang="en-US" noProof="0" dirty="0"/>
-          </a:p>
-        </p:txBody>
-      </p:sp>
-      <p:sp>
-        <p:nvSpPr>
-          <p:cNvPr id="13" name="TextBox 12">
-            <a:extLst>
-              <a:ext uri="{FF2B5EF4-FFF2-40B4-BE49-F238E27FC236}">
-                <a16:creationId xmlns:a16="http://schemas.microsoft.com/office/drawing/2014/main" id="{439C9CAD-9E1E-7EC1-4429-D017CA1092E1}"/>
-              </a:ext>
-            </a:extLst>
-          </p:cNvPr>
-          <p:cNvSpPr txBox="1"/>
-          <p:nvPr/>
-        </p:nvSpPr>
-        <p:spPr>
-          <a:xfrm>
-            <a:off x="5164183" y="3962400"/>
-            <a:ext cx="425116" cy="369332"/>
-          </a:xfrm>
-          <a:prstGeom prst="rect">
-            <a:avLst/>
-          </a:prstGeom>
-          <a:noFill/>
-        </p:spPr>
-        <p:txBody>
-          <a:bodyPr wrap="none" rtlCol="0">
-            <a:spAutoFit/>
-          </a:bodyPr>
-          <a:lstStyle/>
-          <a:p>
-            <a:r>
-              <a:rPr lang="en-US" noProof="0" dirty="0"/>
-              <a:t>us</a:t>
-            </a:r>
-          </a:p>
-        </p:txBody>
-      </p:sp>
-      <p:sp>
-        <p:nvSpPr>
-          <p:cNvPr id="14" name="TextBox 13">
-            <a:extLst>
-              <a:ext uri="{FF2B5EF4-FFF2-40B4-BE49-F238E27FC236}">
-                <a16:creationId xmlns:a16="http://schemas.microsoft.com/office/drawing/2014/main" id="{662521EF-5391-2B3B-B4E1-631E6C4FEF95}"/>
-              </a:ext>
-            </a:extLst>
-          </p:cNvPr>
-          <p:cNvSpPr txBox="1"/>
-          <p:nvPr/>
-        </p:nvSpPr>
-        <p:spPr>
-          <a:xfrm>
-            <a:off x="5103223" y="6096000"/>
-            <a:ext cx="713016" cy="369332"/>
-          </a:xfrm>
-          <a:prstGeom prst="rect">
-            <a:avLst/>
-          </a:prstGeom>
-          <a:noFill/>
-        </p:spPr>
-        <p:txBody>
-          <a:bodyPr wrap="none" rtlCol="0">
-            <a:spAutoFit/>
-          </a:bodyPr>
-          <a:lstStyle/>
-          <a:p>
-            <a:r>
-              <a:rPr lang="en-US" noProof="0" dirty="0"/>
-              <a:t>naive</a:t>
-            </a:r>
-          </a:p>
-        </p:txBody>
-      </p:sp>
+      </p:pic>
       <p:sp>
         <p:nvSpPr>
           <p:cNvPr id="3" name="Date Placeholder 2">
             <a:extLst>
               <a:ext uri="{FF2B5EF4-FFF2-40B4-BE49-F238E27FC236}">
-                <a16:creationId xmlns:a16="http://schemas.microsoft.com/office/drawing/2014/main" id="{95F10516-14DF-329F-F9DD-AD879766DCDB}"/>
+                <a16:creationId xmlns:a16="http://schemas.microsoft.com/office/drawing/2014/main" id="{E10A9B0C-32AC-B4DC-D921-8746913B5E36}"/>
               </a:ext>
             </a:extLst>
           </p:cNvPr>
@@ -11470,9 +11872,9 @@
           <a:bodyPr/>
           <a:lstStyle/>
           <a:p>
-            <a:fld id="{2B64091F-5E68-4514-9CCC-EC8E47A52419}" type="datetime1">
+            <a:fld id="{D2B8A75C-05AF-4892-8E0E-22A5D3C1A1D7}" type="datetime1">
               <a:rPr lang="en-US" smtClean="0"/>
-              <a:t>8/26/2026</a:t>
+              <a:t>8/27/2026</a:t>
             </a:fld>
             <a:endParaRPr lang="en-US"/>
           </a:p>
@@ -11480,10 +11882,10 @@
       </p:sp>
       <p:sp>
         <p:nvSpPr>
-          <p:cNvPr id="7" name="Slide Number Placeholder 6">
-            <a:extLst>
-              <a:ext uri="{FF2B5EF4-FFF2-40B4-BE49-F238E27FC236}">
-                <a16:creationId xmlns:a16="http://schemas.microsoft.com/office/drawing/2014/main" id="{4E29A66E-8887-529B-AA75-343549185834}"/>
+          <p:cNvPr id="4" name="Slide Number Placeholder 3">
+            <a:extLst>
+              <a:ext uri="{FF2B5EF4-FFF2-40B4-BE49-F238E27FC236}">
+                <a16:creationId xmlns:a16="http://schemas.microsoft.com/office/drawing/2014/main" id="{AB163094-AC61-E3F3-BAF8-AC409B2B6F0A}"/>
               </a:ext>
             </a:extLst>
           </p:cNvPr>
@@ -11510,7 +11912,7 @@
     </p:spTree>
     <p:extLst>
       <p:ext uri="{BB962C8B-B14F-4D97-AF65-F5344CB8AC3E}">
-        <p14:creationId xmlns:p14="http://schemas.microsoft.com/office/powerpoint/2010/main" val="1484151549"/>
+        <p14:creationId xmlns:p14="http://schemas.microsoft.com/office/powerpoint/2010/main" val="202421867"/>
       </p:ext>
     </p:extLst>
   </p:cSld>
@@ -11539,182 +11941,6 @@
       </p:grpSpPr>
       <p:sp>
         <p:nvSpPr>
-          <p:cNvPr id="2" name="Title 1">
-            <a:extLst>
-              <a:ext uri="{FF2B5EF4-FFF2-40B4-BE49-F238E27FC236}">
-                <a16:creationId xmlns:a16="http://schemas.microsoft.com/office/drawing/2014/main" id="{C4A9E796-E8D3-B4A5-DE7B-322F63386F74}"/>
-              </a:ext>
-            </a:extLst>
-          </p:cNvPr>
-          <p:cNvSpPr>
-            <a:spLocks noGrp="1"/>
-          </p:cNvSpPr>
-          <p:nvPr>
-            <p:ph type="title"/>
-          </p:nvPr>
-        </p:nvSpPr>
-        <p:spPr/>
-        <p:txBody>
-          <a:bodyPr/>
-          <a:lstStyle/>
-          <a:p>
-            <a:r>
-              <a:rPr lang="en-US" noProof="0" dirty="0"/>
-              <a:t>Results</a:t>
-            </a:r>
-          </a:p>
-        </p:txBody>
-      </p:sp>
-      <p:pic>
-        <p:nvPicPr>
-          <p:cNvPr id="5" name="Picture 4">
-            <a:extLst>
-              <a:ext uri="{FF2B5EF4-FFF2-40B4-BE49-F238E27FC236}">
-                <a16:creationId xmlns:a16="http://schemas.microsoft.com/office/drawing/2014/main" id="{D43B218F-11A7-3C72-B764-CB088CE45925}"/>
-              </a:ext>
-            </a:extLst>
-          </p:cNvPr>
-          <p:cNvPicPr>
-            <a:picLocks noChangeAspect="1"/>
-          </p:cNvPicPr>
-          <p:nvPr/>
-        </p:nvPicPr>
-        <p:blipFill>
-          <a:blip r:embed="rId3"/>
-          <a:stretch>
-            <a:fillRect/>
-          </a:stretch>
-        </p:blipFill>
-        <p:spPr>
-          <a:xfrm>
-            <a:off x="2940615" y="3429000"/>
-            <a:ext cx="8602275" cy="2924583"/>
-          </a:xfrm>
-          <a:prstGeom prst="rect">
-            <a:avLst/>
-          </a:prstGeom>
-        </p:spPr>
-      </p:pic>
-      <p:pic>
-        <p:nvPicPr>
-          <p:cNvPr id="7" name="Picture 6">
-            <a:extLst>
-              <a:ext uri="{FF2B5EF4-FFF2-40B4-BE49-F238E27FC236}">
-                <a16:creationId xmlns:a16="http://schemas.microsoft.com/office/drawing/2014/main" id="{1C406B68-4369-7351-330F-FAD27DE0E126}"/>
-              </a:ext>
-            </a:extLst>
-          </p:cNvPr>
-          <p:cNvPicPr>
-            <a:picLocks noChangeAspect="1"/>
-          </p:cNvPicPr>
-          <p:nvPr/>
-        </p:nvPicPr>
-        <p:blipFill>
-          <a:blip r:embed="rId4"/>
-          <a:stretch>
-            <a:fillRect/>
-          </a:stretch>
-        </p:blipFill>
-        <p:spPr>
-          <a:xfrm>
-            <a:off x="4121330" y="1293295"/>
-            <a:ext cx="6725589" cy="1886213"/>
-          </a:xfrm>
-          <a:prstGeom prst="rect">
-            <a:avLst/>
-          </a:prstGeom>
-        </p:spPr>
-      </p:pic>
-      <p:sp>
-        <p:nvSpPr>
-          <p:cNvPr id="3" name="Date Placeholder 2">
-            <a:extLst>
-              <a:ext uri="{FF2B5EF4-FFF2-40B4-BE49-F238E27FC236}">
-                <a16:creationId xmlns:a16="http://schemas.microsoft.com/office/drawing/2014/main" id="{E10A9B0C-32AC-B4DC-D921-8746913B5E36}"/>
-              </a:ext>
-            </a:extLst>
-          </p:cNvPr>
-          <p:cNvSpPr>
-            <a:spLocks noGrp="1"/>
-          </p:cNvSpPr>
-          <p:nvPr>
-            <p:ph type="dt" sz="half" idx="10"/>
-          </p:nvPr>
-        </p:nvSpPr>
-        <p:spPr/>
-        <p:txBody>
-          <a:bodyPr/>
-          <a:lstStyle/>
-          <a:p>
-            <a:fld id="{D2B8A75C-05AF-4892-8E0E-22A5D3C1A1D7}" type="datetime1">
-              <a:rPr lang="en-US" smtClean="0"/>
-              <a:t>8/26/2026</a:t>
-            </a:fld>
-            <a:endParaRPr lang="en-US"/>
-          </a:p>
-        </p:txBody>
-      </p:sp>
-      <p:sp>
-        <p:nvSpPr>
-          <p:cNvPr id="4" name="Slide Number Placeholder 3">
-            <a:extLst>
-              <a:ext uri="{FF2B5EF4-FFF2-40B4-BE49-F238E27FC236}">
-                <a16:creationId xmlns:a16="http://schemas.microsoft.com/office/drawing/2014/main" id="{AB163094-AC61-E3F3-BAF8-AC409B2B6F0A}"/>
-              </a:ext>
-            </a:extLst>
-          </p:cNvPr>
-          <p:cNvSpPr>
-            <a:spLocks noGrp="1"/>
-          </p:cNvSpPr>
-          <p:nvPr>
-            <p:ph type="sldNum" sz="quarter" idx="12"/>
-          </p:nvPr>
-        </p:nvSpPr>
-        <p:spPr/>
-        <p:txBody>
-          <a:bodyPr/>
-          <a:lstStyle/>
-          <a:p>
-            <a:fld id="{DA0BB241-1B5F-4309-9407-9EEA04D9598D}" type="slidenum">
-              <a:rPr lang="en-US" smtClean="0"/>
-              <a:t>15</a:t>
-            </a:fld>
-            <a:endParaRPr lang="en-US"/>
-          </a:p>
-        </p:txBody>
-      </p:sp>
-    </p:spTree>
-    <p:extLst>
-      <p:ext uri="{BB962C8B-B14F-4D97-AF65-F5344CB8AC3E}">
-        <p14:creationId xmlns:p14="http://schemas.microsoft.com/office/powerpoint/2010/main" val="202421867"/>
-      </p:ext>
-    </p:extLst>
-  </p:cSld>
-  <p:clrMapOvr>
-    <a:masterClrMapping/>
-  </p:clrMapOvr>
-</p:sld>
-</file>
-
-<file path=ppt/slides/slide16.xml><?xml version="1.0" encoding="utf-8"?>
-<p:sld xmlns:a="http://schemas.openxmlformats.org/drawingml/2006/main" xmlns:r="http://schemas.openxmlformats.org/officeDocument/2006/relationships" xmlns:p="http://schemas.openxmlformats.org/presentationml/2006/main">
-  <p:cSld>
-    <p:spTree>
-      <p:nvGrpSpPr>
-        <p:cNvPr id="1" name=""/>
-        <p:cNvGrpSpPr/>
-        <p:nvPr/>
-      </p:nvGrpSpPr>
-      <p:grpSpPr>
-        <a:xfrm>
-          <a:off x="0" y="0"/>
-          <a:ext cx="0" cy="0"/>
-          <a:chOff x="0" y="0"/>
-          <a:chExt cx="0" cy="0"/>
-        </a:xfrm>
-      </p:grpSpPr>
-      <p:sp>
-        <p:nvSpPr>
           <p:cNvPr id="4" name="Title 3">
             <a:extLst>
               <a:ext uri="{FF2B5EF4-FFF2-40B4-BE49-F238E27FC236}">
@@ -12671,7 +12897,7 @@
           <a:p>
             <a:fld id="{3282519B-8553-4EB5-804E-C162E89AEEEB}" type="datetime1">
               <a:rPr lang="en-US" smtClean="0"/>
-              <a:t>8/26/2026</a:t>
+              <a:t>8/27/2026</a:t>
             </a:fld>
             <a:endParaRPr lang="en-US"/>
           </a:p>
@@ -12700,7 +12926,7 @@
           <a:p>
             <a:fld id="{DA0BB241-1B5F-4309-9407-9EEA04D9598D}" type="slidenum">
               <a:rPr lang="en-US" smtClean="0"/>
-              <a:t>16</a:t>
+              <a:t>15</a:t>
             </a:fld>
             <a:endParaRPr lang="en-US"/>
           </a:p>
@@ -12710,6 +12936,1035 @@
     <p:extLst>
       <p:ext uri="{BB962C8B-B14F-4D97-AF65-F5344CB8AC3E}">
         <p14:creationId xmlns:p14="http://schemas.microsoft.com/office/powerpoint/2010/main" val="2630539974"/>
+      </p:ext>
+    </p:extLst>
+  </p:cSld>
+  <p:clrMapOvr>
+    <a:masterClrMapping/>
+  </p:clrMapOvr>
+</p:sld>
+</file>
+
+<file path=ppt/slides/slide16.xml><?xml version="1.0" encoding="utf-8"?>
+<p:sld xmlns:a="http://schemas.openxmlformats.org/drawingml/2006/main" xmlns:r="http://schemas.openxmlformats.org/officeDocument/2006/relationships" xmlns:p="http://schemas.openxmlformats.org/presentationml/2006/main">
+  <p:cSld>
+    <p:spTree>
+      <p:nvGrpSpPr>
+        <p:cNvPr id="1" name="">
+          <a:extLst>
+            <a:ext uri="{FF2B5EF4-FFF2-40B4-BE49-F238E27FC236}">
+              <a16:creationId xmlns:a16="http://schemas.microsoft.com/office/drawing/2014/main" id="{1B8BC79E-0B1F-5D1D-A8A6-170A8D00B104}"/>
+            </a:ext>
+          </a:extLst>
+        </p:cNvPr>
+        <p:cNvGrpSpPr/>
+        <p:nvPr/>
+      </p:nvGrpSpPr>
+      <p:grpSpPr>
+        <a:xfrm>
+          <a:off x="0" y="0"/>
+          <a:ext cx="0" cy="0"/>
+          <a:chOff x="0" y="0"/>
+          <a:chExt cx="0" cy="0"/>
+        </a:xfrm>
+      </p:grpSpPr>
+      <p:sp>
+        <p:nvSpPr>
+          <p:cNvPr id="4" name="Title 3">
+            <a:extLst>
+              <a:ext uri="{FF2B5EF4-FFF2-40B4-BE49-F238E27FC236}">
+                <a16:creationId xmlns:a16="http://schemas.microsoft.com/office/drawing/2014/main" id="{2A15B60C-3C0A-6CF3-9721-64F51CB83FD9}"/>
+              </a:ext>
+            </a:extLst>
+          </p:cNvPr>
+          <p:cNvSpPr>
+            <a:spLocks noGrp="1"/>
+          </p:cNvSpPr>
+          <p:nvPr>
+            <p:ph type="title"/>
+          </p:nvPr>
+        </p:nvSpPr>
+        <p:spPr/>
+        <p:txBody>
+          <a:bodyPr/>
+          <a:lstStyle/>
+          <a:p>
+            <a:endParaRPr lang="en-US" noProof="0" dirty="0"/>
+          </a:p>
+        </p:txBody>
+      </p:sp>
+      <p:sp>
+        <p:nvSpPr>
+          <p:cNvPr id="5" name="Rectangle 4">
+            <a:extLst>
+              <a:ext uri="{FF2B5EF4-FFF2-40B4-BE49-F238E27FC236}">
+                <a16:creationId xmlns:a16="http://schemas.microsoft.com/office/drawing/2014/main" id="{B998C859-7EF5-3FE2-35CD-2027D974CDAB}"/>
+              </a:ext>
+            </a:extLst>
+          </p:cNvPr>
+          <p:cNvSpPr/>
+          <p:nvPr/>
+        </p:nvSpPr>
+        <p:spPr>
+          <a:xfrm>
+            <a:off x="4696098" y="3518264"/>
+            <a:ext cx="2420983" cy="1236617"/>
+          </a:xfrm>
+          <a:prstGeom prst="rect">
+            <a:avLst/>
+          </a:prstGeom>
+        </p:spPr>
+        <p:style>
+          <a:lnRef idx="2">
+            <a:schemeClr val="accent1">
+              <a:shade val="15000"/>
+            </a:schemeClr>
+          </a:lnRef>
+          <a:fillRef idx="1">
+            <a:schemeClr val="accent1"/>
+          </a:fillRef>
+          <a:effectRef idx="0">
+            <a:schemeClr val="accent1"/>
+          </a:effectRef>
+          <a:fontRef idx="minor">
+            <a:schemeClr val="lt1"/>
+          </a:fontRef>
+        </p:style>
+        <p:txBody>
+          <a:bodyPr rtlCol="0" anchor="ctr"/>
+          <a:lstStyle/>
+          <a:p>
+            <a:pPr algn="ctr"/>
+            <a:r>
+              <a:rPr lang="en-US" noProof="0" dirty="0"/>
+              <a:t>computation</a:t>
+            </a:r>
+          </a:p>
+        </p:txBody>
+      </p:sp>
+      <p:sp>
+        <p:nvSpPr>
+          <p:cNvPr id="7" name="Rectangle 6">
+            <a:extLst>
+              <a:ext uri="{FF2B5EF4-FFF2-40B4-BE49-F238E27FC236}">
+                <a16:creationId xmlns:a16="http://schemas.microsoft.com/office/drawing/2014/main" id="{0243BB3B-7799-CC89-C15D-09629EEE8CAC}"/>
+              </a:ext>
+            </a:extLst>
+          </p:cNvPr>
+          <p:cNvSpPr/>
+          <p:nvPr/>
+        </p:nvSpPr>
+        <p:spPr>
+          <a:xfrm>
+            <a:off x="1109254" y="4302035"/>
+            <a:ext cx="2420983" cy="1236617"/>
+          </a:xfrm>
+          <a:prstGeom prst="rect">
+            <a:avLst/>
+          </a:prstGeom>
+        </p:spPr>
+        <p:style>
+          <a:lnRef idx="2">
+            <a:schemeClr val="accent1">
+              <a:shade val="15000"/>
+            </a:schemeClr>
+          </a:lnRef>
+          <a:fillRef idx="1">
+            <a:schemeClr val="accent1"/>
+          </a:fillRef>
+          <a:effectRef idx="0">
+            <a:schemeClr val="accent1"/>
+          </a:effectRef>
+          <a:fontRef idx="minor">
+            <a:schemeClr val="lt1"/>
+          </a:fontRef>
+        </p:style>
+        <p:txBody>
+          <a:bodyPr rtlCol="0" anchor="ctr"/>
+          <a:lstStyle/>
+          <a:p>
+            <a:pPr algn="ctr"/>
+            <a:r>
+              <a:rPr lang="en-US" noProof="0" dirty="0"/>
+              <a:t>Challenging code without abstractions</a:t>
+            </a:r>
+          </a:p>
+        </p:txBody>
+      </p:sp>
+      <p:sp>
+        <p:nvSpPr>
+          <p:cNvPr id="9" name="Rectangle 8">
+            <a:extLst>
+              <a:ext uri="{FF2B5EF4-FFF2-40B4-BE49-F238E27FC236}">
+                <a16:creationId xmlns:a16="http://schemas.microsoft.com/office/drawing/2014/main" id="{A3CA4778-7DF8-3E04-D795-16DC5D1DC699}"/>
+              </a:ext>
+            </a:extLst>
+          </p:cNvPr>
+          <p:cNvSpPr/>
+          <p:nvPr/>
+        </p:nvSpPr>
+        <p:spPr>
+          <a:xfrm>
+            <a:off x="7528560" y="2103120"/>
+            <a:ext cx="2420983" cy="1236617"/>
+          </a:xfrm>
+          <a:prstGeom prst="rect">
+            <a:avLst/>
+          </a:prstGeom>
+        </p:spPr>
+        <p:style>
+          <a:lnRef idx="2">
+            <a:schemeClr val="accent1">
+              <a:shade val="15000"/>
+            </a:schemeClr>
+          </a:lnRef>
+          <a:fillRef idx="1">
+            <a:schemeClr val="accent1"/>
+          </a:fillRef>
+          <a:effectRef idx="0">
+            <a:schemeClr val="accent1"/>
+          </a:effectRef>
+          <a:fontRef idx="minor">
+            <a:schemeClr val="lt1"/>
+          </a:fontRef>
+        </p:style>
+        <p:txBody>
+          <a:bodyPr rtlCol="0" anchor="ctr"/>
+          <a:lstStyle/>
+          <a:p>
+            <a:pPr algn="ctr"/>
+            <a:r>
+              <a:rPr lang="en-US" noProof="0" dirty="0"/>
+              <a:t>Memory layout</a:t>
+            </a:r>
+          </a:p>
+        </p:txBody>
+      </p:sp>
+      <p:sp>
+        <p:nvSpPr>
+          <p:cNvPr id="11" name="Rectangle 10">
+            <a:extLst>
+              <a:ext uri="{FF2B5EF4-FFF2-40B4-BE49-F238E27FC236}">
+                <a16:creationId xmlns:a16="http://schemas.microsoft.com/office/drawing/2014/main" id="{4D3A9371-0618-4139-FE79-A8EB0D3EF695}"/>
+              </a:ext>
+            </a:extLst>
+          </p:cNvPr>
+          <p:cNvSpPr/>
+          <p:nvPr/>
+        </p:nvSpPr>
+        <p:spPr>
+          <a:xfrm>
+            <a:off x="7528560" y="3518264"/>
+            <a:ext cx="2420983" cy="1236617"/>
+          </a:xfrm>
+          <a:prstGeom prst="rect">
+            <a:avLst/>
+          </a:prstGeom>
+        </p:spPr>
+        <p:style>
+          <a:lnRef idx="2">
+            <a:schemeClr val="accent1">
+              <a:shade val="15000"/>
+            </a:schemeClr>
+          </a:lnRef>
+          <a:fillRef idx="1">
+            <a:schemeClr val="accent1"/>
+          </a:fillRef>
+          <a:effectRef idx="0">
+            <a:schemeClr val="accent1"/>
+          </a:effectRef>
+          <a:fontRef idx="minor">
+            <a:schemeClr val="lt1"/>
+          </a:fontRef>
+        </p:style>
+        <p:txBody>
+          <a:bodyPr rtlCol="0" anchor="ctr"/>
+          <a:lstStyle/>
+          <a:p>
+            <a:pPr algn="ctr"/>
+            <a:r>
+              <a:rPr lang="en-US" noProof="0" dirty="0"/>
+              <a:t>evaluator</a:t>
+            </a:r>
+          </a:p>
+        </p:txBody>
+      </p:sp>
+      <p:sp>
+        <p:nvSpPr>
+          <p:cNvPr id="13" name="Rectangle 12">
+            <a:extLst>
+              <a:ext uri="{FF2B5EF4-FFF2-40B4-BE49-F238E27FC236}">
+                <a16:creationId xmlns:a16="http://schemas.microsoft.com/office/drawing/2014/main" id="{19069C35-7FDE-3009-6C44-B416BD3D4490}"/>
+              </a:ext>
+            </a:extLst>
+          </p:cNvPr>
+          <p:cNvSpPr/>
+          <p:nvPr/>
+        </p:nvSpPr>
+        <p:spPr>
+          <a:xfrm>
+            <a:off x="7528559" y="4950826"/>
+            <a:ext cx="2420983" cy="1236617"/>
+          </a:xfrm>
+          <a:prstGeom prst="rect">
+            <a:avLst/>
+          </a:prstGeom>
+        </p:spPr>
+        <p:style>
+          <a:lnRef idx="2">
+            <a:schemeClr val="accent1">
+              <a:shade val="15000"/>
+            </a:schemeClr>
+          </a:lnRef>
+          <a:fillRef idx="1">
+            <a:schemeClr val="accent1"/>
+          </a:fillRef>
+          <a:effectRef idx="0">
+            <a:schemeClr val="accent1"/>
+          </a:effectRef>
+          <a:fontRef idx="minor">
+            <a:schemeClr val="lt1"/>
+          </a:fontRef>
+        </p:style>
+        <p:txBody>
+          <a:bodyPr rtlCol="0" anchor="ctr"/>
+          <a:lstStyle/>
+          <a:p>
+            <a:pPr algn="ctr"/>
+            <a:r>
+              <a:rPr lang="en-US" noProof="0" dirty="0"/>
+              <a:t>traverser</a:t>
+            </a:r>
+          </a:p>
+        </p:txBody>
+      </p:sp>
+      <p:sp>
+        <p:nvSpPr>
+          <p:cNvPr id="15" name="Rectangle 14">
+            <a:extLst>
+              <a:ext uri="{FF2B5EF4-FFF2-40B4-BE49-F238E27FC236}">
+                <a16:creationId xmlns:a16="http://schemas.microsoft.com/office/drawing/2014/main" id="{9B42DE37-883C-4DA1-0DC9-3737166C371B}"/>
+              </a:ext>
+            </a:extLst>
+          </p:cNvPr>
+          <p:cNvSpPr/>
+          <p:nvPr/>
+        </p:nvSpPr>
+        <p:spPr>
+          <a:xfrm>
+            <a:off x="10441576" y="3518264"/>
+            <a:ext cx="2420983" cy="1236617"/>
+          </a:xfrm>
+          <a:prstGeom prst="rect">
+            <a:avLst/>
+          </a:prstGeom>
+        </p:spPr>
+        <p:style>
+          <a:lnRef idx="2">
+            <a:schemeClr val="accent1">
+              <a:shade val="15000"/>
+            </a:schemeClr>
+          </a:lnRef>
+          <a:fillRef idx="1">
+            <a:schemeClr val="accent1"/>
+          </a:fillRef>
+          <a:effectRef idx="0">
+            <a:schemeClr val="accent1"/>
+          </a:effectRef>
+          <a:fontRef idx="minor">
+            <a:schemeClr val="lt1"/>
+          </a:fontRef>
+        </p:style>
+        <p:txBody>
+          <a:bodyPr rtlCol="0" anchor="ctr"/>
+          <a:lstStyle/>
+          <a:p>
+            <a:pPr algn="ctr"/>
+            <a:r>
+              <a:rPr lang="en-US" noProof="0" dirty="0"/>
+              <a:t>Challenging code without abstractions</a:t>
+            </a:r>
+            <a:br>
+              <a:rPr lang="en-US" noProof="0" dirty="0"/>
+            </a:br>
+            <a:r>
+              <a:rPr lang="en-US" noProof="0" dirty="0"/>
+              <a:t>generated automatically</a:t>
+            </a:r>
+          </a:p>
+        </p:txBody>
+      </p:sp>
+      <p:sp>
+        <p:nvSpPr>
+          <p:cNvPr id="16" name="Arrow: Right 15">
+            <a:extLst>
+              <a:ext uri="{FF2B5EF4-FFF2-40B4-BE49-F238E27FC236}">
+                <a16:creationId xmlns:a16="http://schemas.microsoft.com/office/drawing/2014/main" id="{7B7036A0-4E18-60A0-8EF6-1184393731FF}"/>
+              </a:ext>
+            </a:extLst>
+          </p:cNvPr>
+          <p:cNvSpPr/>
+          <p:nvPr/>
+        </p:nvSpPr>
+        <p:spPr>
+          <a:xfrm>
+            <a:off x="10110651" y="3944983"/>
+            <a:ext cx="165464" cy="422366"/>
+          </a:xfrm>
+          <a:prstGeom prst="rightArrow">
+            <a:avLst/>
+          </a:prstGeom>
+        </p:spPr>
+        <p:style>
+          <a:lnRef idx="2">
+            <a:schemeClr val="accent1">
+              <a:shade val="15000"/>
+            </a:schemeClr>
+          </a:lnRef>
+          <a:fillRef idx="1">
+            <a:schemeClr val="accent1"/>
+          </a:fillRef>
+          <a:effectRef idx="0">
+            <a:schemeClr val="accent1"/>
+          </a:effectRef>
+          <a:fontRef idx="minor">
+            <a:schemeClr val="lt1"/>
+          </a:fontRef>
+        </p:style>
+        <p:txBody>
+          <a:bodyPr rtlCol="0" anchor="ctr"/>
+          <a:lstStyle/>
+          <a:p>
+            <a:pPr algn="ctr"/>
+            <a:endParaRPr lang="en-US" noProof="0" dirty="0"/>
+          </a:p>
+        </p:txBody>
+      </p:sp>
+      <p:sp>
+        <p:nvSpPr>
+          <p:cNvPr id="18" name="Arrow: Right 17">
+            <a:extLst>
+              <a:ext uri="{FF2B5EF4-FFF2-40B4-BE49-F238E27FC236}">
+                <a16:creationId xmlns:a16="http://schemas.microsoft.com/office/drawing/2014/main" id="{3A11C929-E308-0238-EBC8-A1DD58040025}"/>
+              </a:ext>
+            </a:extLst>
+          </p:cNvPr>
+          <p:cNvSpPr/>
+          <p:nvPr/>
+        </p:nvSpPr>
+        <p:spPr>
+          <a:xfrm>
+            <a:off x="7282542" y="3870960"/>
+            <a:ext cx="165464" cy="422366"/>
+          </a:xfrm>
+          <a:prstGeom prst="rightArrow">
+            <a:avLst/>
+          </a:prstGeom>
+        </p:spPr>
+        <p:style>
+          <a:lnRef idx="2">
+            <a:schemeClr val="accent1">
+              <a:shade val="15000"/>
+            </a:schemeClr>
+          </a:lnRef>
+          <a:fillRef idx="1">
+            <a:schemeClr val="accent1"/>
+          </a:fillRef>
+          <a:effectRef idx="0">
+            <a:schemeClr val="accent1"/>
+          </a:effectRef>
+          <a:fontRef idx="minor">
+            <a:schemeClr val="lt1"/>
+          </a:fontRef>
+        </p:style>
+        <p:txBody>
+          <a:bodyPr rtlCol="0" anchor="ctr"/>
+          <a:lstStyle/>
+          <a:p>
+            <a:pPr algn="ctr"/>
+            <a:endParaRPr lang="en-US" noProof="0" dirty="0"/>
+          </a:p>
+        </p:txBody>
+      </p:sp>
+      <p:sp>
+        <p:nvSpPr>
+          <p:cNvPr id="19" name="Rectangle 18">
+            <a:extLst>
+              <a:ext uri="{FF2B5EF4-FFF2-40B4-BE49-F238E27FC236}">
+                <a16:creationId xmlns:a16="http://schemas.microsoft.com/office/drawing/2014/main" id="{6B6D1F59-04AE-E6FB-2AF2-D07E96762EC5}"/>
+              </a:ext>
+            </a:extLst>
+          </p:cNvPr>
+          <p:cNvSpPr/>
+          <p:nvPr/>
+        </p:nvSpPr>
+        <p:spPr>
+          <a:xfrm>
+            <a:off x="838200" y="2103120"/>
+            <a:ext cx="1404257" cy="971006"/>
+          </a:xfrm>
+          <a:prstGeom prst="rect">
+            <a:avLst/>
+          </a:prstGeom>
+        </p:spPr>
+        <p:style>
+          <a:lnRef idx="2">
+            <a:schemeClr val="accent1">
+              <a:shade val="15000"/>
+            </a:schemeClr>
+          </a:lnRef>
+          <a:fillRef idx="1">
+            <a:schemeClr val="accent1"/>
+          </a:fillRef>
+          <a:effectRef idx="0">
+            <a:schemeClr val="accent1"/>
+          </a:effectRef>
+          <a:fontRef idx="minor">
+            <a:schemeClr val="lt1"/>
+          </a:fontRef>
+        </p:style>
+        <p:txBody>
+          <a:bodyPr rtlCol="0" anchor="ctr"/>
+          <a:lstStyle/>
+          <a:p>
+            <a:pPr algn="ctr"/>
+            <a:r>
+              <a:rPr lang="en-US" noProof="0" dirty="0"/>
+              <a:t>Kluzak pred</a:t>
+            </a:r>
+          </a:p>
+        </p:txBody>
+      </p:sp>
+      <p:sp>
+        <p:nvSpPr>
+          <p:cNvPr id="21" name="Rectangle 20">
+            <a:extLst>
+              <a:ext uri="{FF2B5EF4-FFF2-40B4-BE49-F238E27FC236}">
+                <a16:creationId xmlns:a16="http://schemas.microsoft.com/office/drawing/2014/main" id="{1A06E9A3-B8EE-ABF1-6538-9E35B7A48DD2}"/>
+              </a:ext>
+            </a:extLst>
+          </p:cNvPr>
+          <p:cNvSpPr/>
+          <p:nvPr/>
+        </p:nvSpPr>
+        <p:spPr>
+          <a:xfrm>
+            <a:off x="2394857" y="2118973"/>
+            <a:ext cx="1404257" cy="971006"/>
+          </a:xfrm>
+          <a:prstGeom prst="rect">
+            <a:avLst/>
+          </a:prstGeom>
+        </p:spPr>
+        <p:style>
+          <a:lnRef idx="2">
+            <a:schemeClr val="accent1">
+              <a:shade val="15000"/>
+            </a:schemeClr>
+          </a:lnRef>
+          <a:fillRef idx="1">
+            <a:schemeClr val="accent1"/>
+          </a:fillRef>
+          <a:effectRef idx="0">
+            <a:schemeClr val="accent1"/>
+          </a:effectRef>
+          <a:fontRef idx="minor">
+            <a:schemeClr val="lt1"/>
+          </a:fontRef>
+        </p:style>
+        <p:txBody>
+          <a:bodyPr rtlCol="0" anchor="ctr"/>
+          <a:lstStyle/>
+          <a:p>
+            <a:pPr algn="ctr"/>
+            <a:r>
+              <a:rPr lang="en-US" noProof="0" dirty="0"/>
+              <a:t>Kluzak po</a:t>
+            </a:r>
+          </a:p>
+        </p:txBody>
+      </p:sp>
+      <p:sp>
+        <p:nvSpPr>
+          <p:cNvPr id="23" name="Rectangle 22">
+            <a:extLst>
+              <a:ext uri="{FF2B5EF4-FFF2-40B4-BE49-F238E27FC236}">
+                <a16:creationId xmlns:a16="http://schemas.microsoft.com/office/drawing/2014/main" id="{BDEC5311-5338-A7A6-5157-81A4E01AF55B}"/>
+              </a:ext>
+            </a:extLst>
+          </p:cNvPr>
+          <p:cNvSpPr/>
+          <p:nvPr/>
+        </p:nvSpPr>
+        <p:spPr>
+          <a:xfrm>
+            <a:off x="3961312" y="2103120"/>
+            <a:ext cx="1404257" cy="971006"/>
+          </a:xfrm>
+          <a:prstGeom prst="rect">
+            <a:avLst/>
+          </a:prstGeom>
+        </p:spPr>
+        <p:style>
+          <a:lnRef idx="2">
+            <a:schemeClr val="accent1">
+              <a:shade val="15000"/>
+            </a:schemeClr>
+          </a:lnRef>
+          <a:fillRef idx="1">
+            <a:schemeClr val="accent1"/>
+          </a:fillRef>
+          <a:effectRef idx="0">
+            <a:schemeClr val="accent1"/>
+          </a:effectRef>
+          <a:fontRef idx="minor">
+            <a:schemeClr val="lt1"/>
+          </a:fontRef>
+        </p:style>
+        <p:txBody>
+          <a:bodyPr rtlCol="0" anchor="ctr"/>
+          <a:lstStyle/>
+          <a:p>
+            <a:pPr algn="ctr"/>
+            <a:r>
+              <a:rPr lang="en-US" noProof="0" dirty="0"/>
+              <a:t>Kluzak </a:t>
+            </a:r>
+            <a:r>
+              <a:rPr lang="en-US" noProof="0" dirty="0" err="1"/>
+              <a:t>popo</a:t>
+            </a:r>
+            <a:endParaRPr lang="en-US" noProof="0" dirty="0"/>
+          </a:p>
+        </p:txBody>
+      </p:sp>
+      <p:sp>
+        <p:nvSpPr>
+          <p:cNvPr id="24" name="TextBox 23">
+            <a:extLst>
+              <a:ext uri="{FF2B5EF4-FFF2-40B4-BE49-F238E27FC236}">
+                <a16:creationId xmlns:a16="http://schemas.microsoft.com/office/drawing/2014/main" id="{C933D5DD-A50A-B20C-4398-3738228FC548}"/>
+              </a:ext>
+            </a:extLst>
+          </p:cNvPr>
+          <p:cNvSpPr txBox="1"/>
+          <p:nvPr/>
+        </p:nvSpPr>
+        <p:spPr>
+          <a:xfrm>
+            <a:off x="952194" y="1749641"/>
+            <a:ext cx="4451475" cy="369332"/>
+          </a:xfrm>
+          <a:prstGeom prst="rect">
+            <a:avLst/>
+          </a:prstGeom>
+          <a:noFill/>
+        </p:spPr>
+        <p:txBody>
+          <a:bodyPr wrap="none" rtlCol="0">
+            <a:spAutoFit/>
+          </a:bodyPr>
+          <a:lstStyle/>
+          <a:p>
+            <a:r>
+              <a:rPr lang="en-US" noProof="0" dirty="0" err="1"/>
+              <a:t>Postupna</a:t>
+            </a:r>
+            <a:r>
+              <a:rPr lang="en-US" noProof="0" dirty="0"/>
+              <a:t> </a:t>
+            </a:r>
+            <a:r>
+              <a:rPr lang="en-US" noProof="0" dirty="0" err="1"/>
+              <a:t>animace</a:t>
+            </a:r>
+            <a:r>
+              <a:rPr lang="en-US" noProof="0" dirty="0"/>
+              <a:t> s </a:t>
+            </a:r>
+            <a:r>
+              <a:rPr lang="en-US" noProof="0" dirty="0" err="1"/>
+              <a:t>neighborhoodama</a:t>
+            </a:r>
+            <a:r>
+              <a:rPr lang="en-US" noProof="0" dirty="0"/>
+              <a:t> </a:t>
+            </a:r>
+            <a:r>
+              <a:rPr lang="en-US" noProof="0" dirty="0" err="1"/>
+              <a:t>atd</a:t>
+            </a:r>
+            <a:endParaRPr lang="en-US" noProof="0" dirty="0"/>
+          </a:p>
+        </p:txBody>
+      </p:sp>
+      <p:sp>
+        <p:nvSpPr>
+          <p:cNvPr id="25" name="TextBox 24">
+            <a:extLst>
+              <a:ext uri="{FF2B5EF4-FFF2-40B4-BE49-F238E27FC236}">
+                <a16:creationId xmlns:a16="http://schemas.microsoft.com/office/drawing/2014/main" id="{EA094E39-1AA2-CB10-8700-31B9B8149FD1}"/>
+              </a:ext>
+            </a:extLst>
+          </p:cNvPr>
+          <p:cNvSpPr txBox="1"/>
+          <p:nvPr/>
+        </p:nvSpPr>
+        <p:spPr>
+          <a:xfrm>
+            <a:off x="5817326" y="1976846"/>
+            <a:ext cx="830740" cy="369332"/>
+          </a:xfrm>
+          <a:prstGeom prst="rect">
+            <a:avLst/>
+          </a:prstGeom>
+          <a:noFill/>
+        </p:spPr>
+        <p:txBody>
+          <a:bodyPr wrap="none" rtlCol="0">
+            <a:spAutoFit/>
+          </a:bodyPr>
+          <a:lstStyle/>
+          <a:p>
+            <a:r>
+              <a:rPr lang="en-US" noProof="0" dirty="0" err="1"/>
+              <a:t>moore</a:t>
+            </a:r>
+            <a:endParaRPr lang="en-US" noProof="0" dirty="0"/>
+          </a:p>
+        </p:txBody>
+      </p:sp>
+      <p:sp>
+        <p:nvSpPr>
+          <p:cNvPr id="26" name="TextBox 25">
+            <a:extLst>
+              <a:ext uri="{FF2B5EF4-FFF2-40B4-BE49-F238E27FC236}">
+                <a16:creationId xmlns:a16="http://schemas.microsoft.com/office/drawing/2014/main" id="{0FB6A547-99C6-850C-697A-AFE4403BF041}"/>
+              </a:ext>
+            </a:extLst>
+          </p:cNvPr>
+          <p:cNvSpPr txBox="1"/>
+          <p:nvPr/>
+        </p:nvSpPr>
+        <p:spPr>
+          <a:xfrm>
+            <a:off x="5843451" y="2542903"/>
+            <a:ext cx="1135247" cy="369332"/>
+          </a:xfrm>
+          <a:prstGeom prst="rect">
+            <a:avLst/>
+          </a:prstGeom>
+          <a:noFill/>
+        </p:spPr>
+        <p:txBody>
+          <a:bodyPr wrap="none" rtlCol="0">
+            <a:spAutoFit/>
+          </a:bodyPr>
+          <a:lstStyle/>
+          <a:p>
+            <a:r>
+              <a:rPr lang="en-US" noProof="0" dirty="0" err="1"/>
+              <a:t>neumann</a:t>
+            </a:r>
+            <a:endParaRPr lang="en-US" noProof="0" dirty="0"/>
+          </a:p>
+        </p:txBody>
+      </p:sp>
+      <p:sp>
+        <p:nvSpPr>
+          <p:cNvPr id="27" name="TextBox 26">
+            <a:extLst>
+              <a:ext uri="{FF2B5EF4-FFF2-40B4-BE49-F238E27FC236}">
+                <a16:creationId xmlns:a16="http://schemas.microsoft.com/office/drawing/2014/main" id="{8C77B6F3-AE3D-AF55-8ED2-BC42EBF08953}"/>
+              </a:ext>
+            </a:extLst>
+          </p:cNvPr>
+          <p:cNvSpPr txBox="1"/>
+          <p:nvPr/>
+        </p:nvSpPr>
+        <p:spPr>
+          <a:xfrm>
+            <a:off x="922411" y="3193648"/>
+            <a:ext cx="3144492" cy="923330"/>
+          </a:xfrm>
+          <a:prstGeom prst="rect">
+            <a:avLst/>
+          </a:prstGeom>
+          <a:noFill/>
+        </p:spPr>
+        <p:txBody>
+          <a:bodyPr wrap="square" rtlCol="0">
+            <a:spAutoFit/>
+          </a:bodyPr>
+          <a:lstStyle/>
+          <a:p>
+            <a:r>
+              <a:rPr lang="en-US" noProof="0" dirty="0"/>
+              <a:t>Matika </a:t>
+            </a:r>
+            <a:r>
+              <a:rPr lang="en-US" noProof="0" dirty="0" err="1"/>
+              <a:t>tady</a:t>
+            </a:r>
+            <a:r>
+              <a:rPr lang="en-US" noProof="0" dirty="0"/>
+              <a:t> </a:t>
+            </a:r>
+            <a:r>
+              <a:rPr lang="en-US" noProof="0" dirty="0" err="1"/>
+              <a:t>blikne</a:t>
+            </a:r>
+            <a:r>
+              <a:rPr lang="en-US" noProof="0" dirty="0"/>
+              <a:t> </a:t>
+            </a:r>
+            <a:r>
+              <a:rPr lang="en-US" noProof="0" dirty="0" err="1"/>
+              <a:t>kdyz</a:t>
+            </a:r>
+            <a:r>
+              <a:rPr lang="en-US" noProof="0" dirty="0"/>
+              <a:t> se </a:t>
+            </a:r>
+            <a:r>
+              <a:rPr lang="en-US" noProof="0" dirty="0" err="1"/>
+              <a:t>bude</a:t>
+            </a:r>
+            <a:r>
+              <a:rPr lang="en-US" noProof="0" dirty="0"/>
+              <a:t> </a:t>
+            </a:r>
+            <a:r>
+              <a:rPr lang="en-US" noProof="0" dirty="0" err="1"/>
+              <a:t>mluvit</a:t>
+            </a:r>
+            <a:r>
+              <a:rPr lang="en-US" noProof="0" dirty="0"/>
+              <a:t> o tech </a:t>
+            </a:r>
+            <a:r>
+              <a:rPr lang="en-US" noProof="0" dirty="0" err="1"/>
+              <a:t>pravidlech</a:t>
+            </a:r>
+            <a:br>
+              <a:rPr lang="en-US" noProof="0" dirty="0"/>
+            </a:br>
+            <a:r>
+              <a:rPr lang="en-US" noProof="0" dirty="0"/>
+              <a:t>v </a:t>
+            </a:r>
+            <a:r>
+              <a:rPr lang="en-US" noProof="0" dirty="0" err="1"/>
+              <a:t>obr</a:t>
+            </a:r>
+            <a:r>
+              <a:rPr lang="en-US" noProof="0" dirty="0"/>
+              <a:t> </a:t>
+            </a:r>
+            <a:r>
+              <a:rPr lang="en-US" noProof="0" dirty="0" err="1"/>
+              <a:t>vyse</a:t>
+            </a:r>
+            <a:r>
+              <a:rPr lang="en-US" noProof="0" dirty="0"/>
+              <a:t> </a:t>
+            </a:r>
+            <a:r>
+              <a:rPr lang="en-US" noProof="0" dirty="0" err="1"/>
+              <a:t>vyznacenej</a:t>
+            </a:r>
+            <a:r>
+              <a:rPr lang="en-US" noProof="0" dirty="0"/>
+              <a:t> </a:t>
+            </a:r>
+            <a:r>
+              <a:rPr lang="en-US" noProof="0" dirty="0" err="1"/>
+              <a:t>effekt</a:t>
+            </a:r>
+            <a:endParaRPr lang="en-US" noProof="0" dirty="0"/>
+          </a:p>
+        </p:txBody>
+      </p:sp>
+      <p:sp>
+        <p:nvSpPr>
+          <p:cNvPr id="28" name="TextBox 27">
+            <a:extLst>
+              <a:ext uri="{FF2B5EF4-FFF2-40B4-BE49-F238E27FC236}">
+                <a16:creationId xmlns:a16="http://schemas.microsoft.com/office/drawing/2014/main" id="{C52A3FBE-19B9-E73A-11F0-D0DCDDF5D89B}"/>
+              </a:ext>
+            </a:extLst>
+          </p:cNvPr>
+          <p:cNvSpPr txBox="1"/>
+          <p:nvPr/>
+        </p:nvSpPr>
+        <p:spPr>
+          <a:xfrm>
+            <a:off x="10093235" y="2290354"/>
+            <a:ext cx="2019300" cy="646331"/>
+          </a:xfrm>
+          <a:prstGeom prst="rect">
+            <a:avLst/>
+          </a:prstGeom>
+          <a:noFill/>
+        </p:spPr>
+        <p:txBody>
+          <a:bodyPr wrap="square" rtlCol="0">
+            <a:spAutoFit/>
+          </a:bodyPr>
+          <a:lstStyle/>
+          <a:p>
+            <a:r>
+              <a:rPr lang="en-US" noProof="0" dirty="0"/>
+              <a:t>Very cool is bit plane encoding</a:t>
+            </a:r>
+          </a:p>
+        </p:txBody>
+      </p:sp>
+      <p:sp>
+        <p:nvSpPr>
+          <p:cNvPr id="30" name="TextBox 29">
+            <a:extLst>
+              <a:ext uri="{FF2B5EF4-FFF2-40B4-BE49-F238E27FC236}">
+                <a16:creationId xmlns:a16="http://schemas.microsoft.com/office/drawing/2014/main" id="{45E437EE-15DB-A18E-6B96-19C605DA1F63}"/>
+              </a:ext>
+            </a:extLst>
+          </p:cNvPr>
+          <p:cNvSpPr txBox="1"/>
+          <p:nvPr/>
+        </p:nvSpPr>
+        <p:spPr>
+          <a:xfrm>
+            <a:off x="6329723" y="4365862"/>
+            <a:ext cx="2019300" cy="646331"/>
+          </a:xfrm>
+          <a:prstGeom prst="rect">
+            <a:avLst/>
+          </a:prstGeom>
+          <a:noFill/>
+        </p:spPr>
+        <p:txBody>
+          <a:bodyPr wrap="square" rtlCol="0">
+            <a:spAutoFit/>
+          </a:bodyPr>
+          <a:lstStyle/>
+          <a:p>
+            <a:r>
+              <a:rPr lang="en-US" noProof="0" dirty="0"/>
+              <a:t>Very cool is bit wise vectorization</a:t>
+            </a:r>
+          </a:p>
+        </p:txBody>
+      </p:sp>
+      <p:sp>
+        <p:nvSpPr>
+          <p:cNvPr id="32" name="TextBox 31">
+            <a:extLst>
+              <a:ext uri="{FF2B5EF4-FFF2-40B4-BE49-F238E27FC236}">
+                <a16:creationId xmlns:a16="http://schemas.microsoft.com/office/drawing/2014/main" id="{27728C73-1D4E-F3E1-BFD7-FC72CEE25592}"/>
+              </a:ext>
+            </a:extLst>
+          </p:cNvPr>
+          <p:cNvSpPr txBox="1"/>
+          <p:nvPr/>
+        </p:nvSpPr>
+        <p:spPr>
+          <a:xfrm>
+            <a:off x="10276115" y="5375647"/>
+            <a:ext cx="2019300" cy="646331"/>
+          </a:xfrm>
+          <a:prstGeom prst="rect">
+            <a:avLst/>
+          </a:prstGeom>
+          <a:noFill/>
+        </p:spPr>
+        <p:txBody>
+          <a:bodyPr wrap="square" rtlCol="0">
+            <a:spAutoFit/>
+          </a:bodyPr>
+          <a:lstStyle/>
+          <a:p>
+            <a:r>
+              <a:rPr lang="en-US" noProof="0" dirty="0"/>
+              <a:t>Very cool is </a:t>
+            </a:r>
+            <a:r>
+              <a:rPr lang="en-US" noProof="0" dirty="0" err="1"/>
+              <a:t>gpu</a:t>
+            </a:r>
+            <a:r>
+              <a:rPr lang="en-US" noProof="0" dirty="0"/>
+              <a:t> </a:t>
+            </a:r>
+            <a:r>
+              <a:rPr lang="en-US" noProof="0" dirty="0" err="1"/>
+              <a:t>paralysation</a:t>
+            </a:r>
+            <a:endParaRPr lang="en-US" noProof="0" dirty="0"/>
+          </a:p>
+        </p:txBody>
+      </p:sp>
+      <p:sp>
+        <p:nvSpPr>
+          <p:cNvPr id="2" name="Date Placeholder 1">
+            <a:extLst>
+              <a:ext uri="{FF2B5EF4-FFF2-40B4-BE49-F238E27FC236}">
+                <a16:creationId xmlns:a16="http://schemas.microsoft.com/office/drawing/2014/main" id="{07681815-8359-124C-8370-4C1D3746CB11}"/>
+              </a:ext>
+            </a:extLst>
+          </p:cNvPr>
+          <p:cNvSpPr>
+            <a:spLocks noGrp="1"/>
+          </p:cNvSpPr>
+          <p:nvPr>
+            <p:ph type="dt" sz="half" idx="10"/>
+          </p:nvPr>
+        </p:nvSpPr>
+        <p:spPr/>
+        <p:txBody>
+          <a:bodyPr/>
+          <a:lstStyle/>
+          <a:p>
+            <a:fld id="{3282519B-8553-4EB5-804E-C162E89AEEEB}" type="datetime1">
+              <a:rPr lang="en-US" smtClean="0"/>
+              <a:t>8/27/2026</a:t>
+            </a:fld>
+            <a:endParaRPr lang="en-US"/>
+          </a:p>
+        </p:txBody>
+      </p:sp>
+      <p:sp>
+        <p:nvSpPr>
+          <p:cNvPr id="3" name="Slide Number Placeholder 2">
+            <a:extLst>
+              <a:ext uri="{FF2B5EF4-FFF2-40B4-BE49-F238E27FC236}">
+                <a16:creationId xmlns:a16="http://schemas.microsoft.com/office/drawing/2014/main" id="{9471A806-B349-E090-C5CD-05D07FE5EEBB}"/>
+              </a:ext>
+            </a:extLst>
+          </p:cNvPr>
+          <p:cNvSpPr>
+            <a:spLocks noGrp="1"/>
+          </p:cNvSpPr>
+          <p:nvPr>
+            <p:ph type="sldNum" sz="quarter" idx="12"/>
+          </p:nvPr>
+        </p:nvSpPr>
+        <p:spPr/>
+        <p:txBody>
+          <a:bodyPr/>
+          <a:lstStyle/>
+          <a:p>
+            <a:fld id="{DA0BB241-1B5F-4309-9407-9EEA04D9598D}" type="slidenum">
+              <a:rPr lang="en-US" smtClean="0"/>
+              <a:t>16</a:t>
+            </a:fld>
+            <a:endParaRPr lang="en-US"/>
+          </a:p>
+        </p:txBody>
+      </p:sp>
+    </p:spTree>
+    <p:extLst>
+      <p:ext uri="{BB962C8B-B14F-4D97-AF65-F5344CB8AC3E}">
+        <p14:creationId xmlns:p14="http://schemas.microsoft.com/office/powerpoint/2010/main" val="18541046"/>
       </p:ext>
     </p:extLst>
   </p:cSld>
@@ -12847,7 +14102,7 @@
           <a:p>
             <a:fld id="{78C2F5E9-57E3-4F5E-A80F-B6C9DE65874A}" type="datetime1">
               <a:rPr lang="en-US" smtClean="0"/>
-              <a:t>8/26/2026</a:t>
+              <a:t>8/27/2026</a:t>
             </a:fld>
             <a:endParaRPr lang="en-US"/>
           </a:p>
@@ -12963,7 +14218,7 @@
           <a:p>
             <a:fld id="{33B56853-0028-4549-B0D0-953613129C64}" type="datetime1">
               <a:rPr lang="en-US" smtClean="0"/>
-              <a:t>8/26/2026</a:t>
+              <a:t>8/27/2026</a:t>
             </a:fld>
             <a:endParaRPr lang="en-US"/>
           </a:p>
@@ -13014,6 +14269,14 @@
 <file path=ppt/slides/slide19.xml><?xml version="1.0" encoding="utf-8"?>
 <p:sld xmlns:a="http://schemas.openxmlformats.org/drawingml/2006/main" xmlns:r="http://schemas.openxmlformats.org/officeDocument/2006/relationships" xmlns:p="http://schemas.openxmlformats.org/presentationml/2006/main">
   <p:cSld>
+    <p:bg>
+      <p:bgPr>
+        <a:solidFill>
+          <a:srgbClr val="FF0000"/>
+        </a:solidFill>
+        <a:effectLst/>
+      </p:bgPr>
+    </p:bg>
     <p:spTree>
       <p:nvGrpSpPr>
         <p:cNvPr id="1" name=""/>
@@ -13687,7 +14950,7 @@
           <a:p>
             <a:fld id="{472E5813-EC9F-4C36-A7F2-49C469A5F96E}" type="datetime1">
               <a:rPr lang="en-US" smtClean="0"/>
-              <a:t>8/26/2026</a:t>
+              <a:t>8/27/2026</a:t>
             </a:fld>
             <a:endParaRPr lang="en-US"/>
           </a:p>
@@ -13828,7 +15091,7 @@
           <a:p>
             <a:fld id="{0DAFEF2F-EB87-44F5-8698-5E050EDDA902}" type="datetime1">
               <a:rPr lang="en-US" smtClean="0"/>
-              <a:t>8/26/2026</a:t>
+              <a:t>8/27/2026</a:t>
             </a:fld>
             <a:endParaRPr lang="en-US"/>
           </a:p>
@@ -13879,6 +15142,14 @@
 <file path=ppt/slides/slide20.xml><?xml version="1.0" encoding="utf-8"?>
 <p:sld xmlns:a="http://schemas.openxmlformats.org/drawingml/2006/main" xmlns:r="http://schemas.openxmlformats.org/officeDocument/2006/relationships" xmlns:p="http://schemas.openxmlformats.org/presentationml/2006/main">
   <p:cSld>
+    <p:bg>
+      <p:bgPr>
+        <a:solidFill>
+          <a:srgbClr val="FFFF00"/>
+        </a:solidFill>
+        <a:effectLst/>
+      </p:bgPr>
+    </p:bg>
     <p:spTree>
       <p:nvGrpSpPr>
         <p:cNvPr id="1" name="">
@@ -14254,7 +15525,7 @@
           <a:p>
             <a:fld id="{15A7FB29-F852-41FB-A0DF-F798C9C0E438}" type="datetime1">
               <a:rPr lang="en-US" smtClean="0"/>
-              <a:t>8/26/2026</a:t>
+              <a:t>8/27/2026</a:t>
             </a:fld>
             <a:endParaRPr lang="en-US"/>
           </a:p>
@@ -14305,6 +15576,14 @@
 <file path=ppt/slides/slide21.xml><?xml version="1.0" encoding="utf-8"?>
 <p:sld xmlns:a="http://schemas.openxmlformats.org/drawingml/2006/main" xmlns:r="http://schemas.openxmlformats.org/officeDocument/2006/relationships" xmlns:p="http://schemas.openxmlformats.org/presentationml/2006/main">
   <p:cSld>
+    <p:bg>
+      <p:bgPr>
+        <a:solidFill>
+          <a:srgbClr val="FF0000"/>
+        </a:solidFill>
+        <a:effectLst/>
+      </p:bgPr>
+    </p:bg>
     <p:spTree>
       <p:nvGrpSpPr>
         <p:cNvPr id="1" name=""/>
@@ -14422,7 +15701,7 @@
           <a:p>
             <a:fld id="{3679F7FC-6925-4E77-836B-08C753873575}" type="datetime1">
               <a:rPr lang="en-US" smtClean="0"/>
-              <a:t>8/26/2026</a:t>
+              <a:t>8/27/2026</a:t>
             </a:fld>
             <a:endParaRPr lang="en-US"/>
           </a:p>
@@ -14473,6 +15752,14 @@
 <file path=ppt/slides/slide22.xml><?xml version="1.0" encoding="utf-8"?>
 <p:sld xmlns:a="http://schemas.openxmlformats.org/drawingml/2006/main" xmlns:r="http://schemas.openxmlformats.org/officeDocument/2006/relationships" xmlns:p="http://schemas.openxmlformats.org/presentationml/2006/main">
   <p:cSld>
+    <p:bg>
+      <p:bgPr>
+        <a:solidFill>
+          <a:srgbClr val="FF0000"/>
+        </a:solidFill>
+        <a:effectLst/>
+      </p:bgPr>
+    </p:bg>
     <p:spTree>
       <p:nvGrpSpPr>
         <p:cNvPr id="1" name="">
@@ -15141,7 +16428,7 @@
           <a:p>
             <a:fld id="{66C26781-F21E-4E26-95C7-6AA65F82040A}" type="datetime1">
               <a:rPr lang="en-US" smtClean="0"/>
-              <a:t>8/26/2026</a:t>
+              <a:t>8/27/2026</a:t>
             </a:fld>
             <a:endParaRPr lang="en-US"/>
           </a:p>
@@ -15813,7 +17100,7 @@
           <a:p>
             <a:fld id="{6DAC1E11-C476-4762-AFFB-C3D6ECD7A44E}" type="datetime1">
               <a:rPr lang="en-US" smtClean="0"/>
-              <a:t>8/26/2026</a:t>
+              <a:t>8/27/2026</a:t>
             </a:fld>
             <a:endParaRPr lang="en-US"/>
           </a:p>
@@ -15951,7 +17238,7 @@
           <a:p>
             <a:fld id="{0601A530-81CA-410E-A053-EF7BD11F8EF0}" type="datetime1">
               <a:rPr lang="en-US" smtClean="0"/>
-              <a:t>8/26/2026</a:t>
+              <a:t>8/27/2026</a:t>
             </a:fld>
             <a:endParaRPr lang="en-US"/>
           </a:p>
@@ -16124,7 +17411,7 @@
           <a:p>
             <a:fld id="{7E613BD8-21F3-4985-8518-9695229365CF}" type="datetime1">
               <a:rPr lang="en-US" smtClean="0"/>
-              <a:t>8/26/2026</a:t>
+              <a:t>8/27/2026</a:t>
             </a:fld>
             <a:endParaRPr lang="en-US"/>
           </a:p>
@@ -16494,7 +17781,7 @@
           <a:p>
             <a:fld id="{45E36CB7-A93D-43BE-8BB6-C052593CEBF8}" type="datetime1">
               <a:rPr lang="en-US" smtClean="0"/>
-              <a:t>8/26/2026</a:t>
+              <a:t>8/27/2026</a:t>
             </a:fld>
             <a:endParaRPr lang="en-US"/>
           </a:p>
@@ -16707,7 +17994,7 @@
           <a:p>
             <a:fld id="{30885205-738E-4A4A-8BB1-8BAC2707FAE8}" type="datetime1">
               <a:rPr lang="en-US" smtClean="0"/>
-              <a:t>8/26/2026</a:t>
+              <a:t>8/27/2026</a:t>
             </a:fld>
             <a:endParaRPr lang="en-US"/>
           </a:p>
@@ -17010,7 +18297,7 @@
           <a:p>
             <a:fld id="{DD030E09-6E2C-4368-9FBA-17C16E68A1B0}" type="datetime1">
               <a:rPr lang="en-US" smtClean="0"/>
-              <a:t>8/26/2026</a:t>
+              <a:t>8/27/2026</a:t>
             </a:fld>
             <a:endParaRPr lang="en-US"/>
           </a:p>
@@ -20629,7 +21916,7 @@
           <a:p>
             <a:fld id="{6F744CC8-C10C-4EAA-A7F7-D06B365ADE34}" type="datetime1">
               <a:rPr lang="en-US" smtClean="0"/>
-              <a:t>8/26/2026</a:t>
+              <a:t>8/27/2026</a:t>
             </a:fld>
             <a:endParaRPr lang="en-US"/>
           </a:p>
@@ -21905,7 +23192,7 @@
           <a:p>
             <a:fld id="{4A613F15-5634-45C6-B470-EBFC7B0054B0}" type="datetime1">
               <a:rPr lang="en-US" smtClean="0"/>
-              <a:t>8/26/2026</a:t>
+              <a:t>8/27/2026</a:t>
             </a:fld>
             <a:endParaRPr lang="en-US"/>
           </a:p>
@@ -25160,7 +26447,7 @@
           <a:p>
             <a:fld id="{BECC5278-1265-4E1B-8A3B-54BBD2CB9178}" type="datetime1">
               <a:rPr lang="en-US" smtClean="0"/>
-              <a:t>8/26/2026</a:t>
+              <a:t>8/27/2026</a:t>
             </a:fld>
             <a:endParaRPr lang="en-US"/>
           </a:p>
@@ -25304,7 +26591,7 @@
           <a:p>
             <a:fld id="{9728143D-0936-4662-84A5-C4AA8AA29B13}" type="datetime1">
               <a:rPr lang="en-US" smtClean="0"/>
-              <a:t>8/26/2026</a:t>
+              <a:t>8/27/2026</a:t>
             </a:fld>
             <a:endParaRPr lang="en-US"/>
           </a:p>
@@ -25493,7 +26780,7 @@
           <a:p>
             <a:fld id="{45521FF1-6AD4-41E9-A392-E960909D3B84}" type="datetime1">
               <a:rPr lang="en-US" smtClean="0"/>
-              <a:t>8/26/2026</a:t>
+              <a:t>8/27/2026</a:t>
             </a:fld>
             <a:endParaRPr lang="en-US"/>
           </a:p>
@@ -25609,7 +26896,7 @@
           <a:p>
             <a:fld id="{6F8B54AC-F7B0-4D97-865A-C5C2A5DC80D3}" type="datetime1">
               <a:rPr lang="en-US" smtClean="0"/>
-              <a:t>8/26/2026</a:t>
+              <a:t>8/27/2026</a:t>
             </a:fld>
             <a:endParaRPr lang="en-US"/>
           </a:p>
@@ -25794,7 +27081,7 @@
           <a:p>
             <a:fld id="{7498A365-4C92-434C-A578-88C2CD9CB8CD}" type="datetime1">
               <a:rPr lang="en-US" smtClean="0"/>
-              <a:t>8/26/2026</a:t>
+              <a:t>8/27/2026</a:t>
             </a:fld>
             <a:endParaRPr lang="en-US"/>
           </a:p>
@@ -25978,7 +27265,7 @@
           <a:p>
             <a:fld id="{F38D2CE3-9198-4CB2-A7D0-FF7AC24156EC}" type="datetime1">
               <a:rPr lang="en-US" smtClean="0"/>
-              <a:t>8/26/2026</a:t>
+              <a:t>8/27/2026</a:t>
             </a:fld>
             <a:endParaRPr lang="en-US"/>
           </a:p>
@@ -26163,7 +27450,7 @@
           <a:p>
             <a:fld id="{38B63626-FB7E-43AF-A630-48547F65CAA9}" type="datetime1">
               <a:rPr lang="en-US" smtClean="0"/>
-              <a:t>8/26/2026</a:t>
+              <a:t>8/27/2026</a:t>
             </a:fld>
             <a:endParaRPr lang="en-US"/>
           </a:p>
@@ -26334,7 +27621,7 @@
           <a:p>
             <a:fld id="{00EBD793-3DFE-450E-811C-0EAC8F7BDC8B}" type="datetime1">
               <a:rPr lang="en-US" smtClean="0"/>
-              <a:t>8/26/2026</a:t>
+              <a:t>8/27/2026</a:t>
             </a:fld>
             <a:endParaRPr lang="en-US"/>
           </a:p>
@@ -27137,7 +28424,7 @@
           <a:p>
             <a:fld id="{938C8B4D-7ED9-4C51-A12C-8A3FEA1E5194}" type="datetime1">
               <a:rPr lang="en-US" smtClean="0"/>
-              <a:t>8/26/2026</a:t>
+              <a:t>8/27/2026</a:t>
             </a:fld>
             <a:endParaRPr lang="en-US"/>
           </a:p>
@@ -27259,420 +28546,6 @@
       </p:pic>
       <p:sp>
         <p:nvSpPr>
-          <p:cNvPr id="6" name="TextBox 5">
-            <a:extLst>
-              <a:ext uri="{FF2B5EF4-FFF2-40B4-BE49-F238E27FC236}">
-                <a16:creationId xmlns:a16="http://schemas.microsoft.com/office/drawing/2014/main" id="{A28F9A7A-4E68-17F0-FD80-992DB87E748C}"/>
-              </a:ext>
-            </a:extLst>
-          </p:cNvPr>
-          <p:cNvSpPr txBox="1"/>
-          <p:nvPr/>
-        </p:nvSpPr>
-        <p:spPr>
-          <a:xfrm>
-            <a:off x="4543100" y="3030894"/>
-            <a:ext cx="3903812" cy="1330108"/>
-          </a:xfrm>
-          <a:prstGeom prst="rect">
-            <a:avLst/>
-          </a:prstGeom>
-          <a:noFill/>
-        </p:spPr>
-        <p:txBody>
-          <a:bodyPr wrap="square">
-            <a:spAutoFit/>
-          </a:bodyPr>
-          <a:lstStyle/>
-          <a:p>
-            <a:pPr>
-              <a:lnSpc>
-                <a:spcPct val="200000"/>
-              </a:lnSpc>
-              <a:buNone/>
-            </a:pPr>
-            <a:r>
-              <a:rPr lang="en-US" sz="1400" b="0" noProof="0" dirty="0">
-                <a:solidFill>
-                  <a:srgbClr val="267F99"/>
-                </a:solidFill>
-                <a:effectLst/>
-                <a:latin typeface="Fira Code" panose="020B0809050000020004" pitchFamily="49" charset="0"/>
-              </a:rPr>
-              <a:t>auto</a:t>
-            </a:r>
-            <a:r>
-              <a:rPr lang="en-US" sz="1400" b="0" noProof="0" dirty="0">
-                <a:solidFill>
-                  <a:srgbClr val="000000"/>
-                </a:solidFill>
-                <a:effectLst/>
-                <a:latin typeface="Fira Code" panose="020B0809050000020004" pitchFamily="49" charset="0"/>
-              </a:rPr>
-              <a:t> </a:t>
-            </a:r>
-            <a:r>
-              <a:rPr lang="en-US" sz="1400" b="0" noProof="0" dirty="0">
-                <a:solidFill>
-                  <a:srgbClr val="001080"/>
-                </a:solidFill>
-                <a:effectLst/>
-                <a:latin typeface="Fira Code" panose="020B0809050000020004" pitchFamily="49" charset="0"/>
-              </a:rPr>
-              <a:t>layout</a:t>
-            </a:r>
-            <a:r>
-              <a:rPr lang="en-US" sz="1400" b="0" noProof="0" dirty="0">
-                <a:solidFill>
-                  <a:srgbClr val="000000"/>
-                </a:solidFill>
-                <a:effectLst/>
-                <a:latin typeface="Fira Code" panose="020B0809050000020004" pitchFamily="49" charset="0"/>
-              </a:rPr>
-              <a:t> = </a:t>
-            </a:r>
-            <a:r>
-              <a:rPr lang="en-US" sz="1400" b="0" noProof="0" dirty="0">
-                <a:solidFill>
-                  <a:srgbClr val="267F99"/>
-                </a:solidFill>
-                <a:effectLst/>
-                <a:latin typeface="Fira Code" panose="020B0809050000020004" pitchFamily="49" charset="0"/>
-              </a:rPr>
-              <a:t>scalar</a:t>
-            </a:r>
-            <a:r>
-              <a:rPr lang="en-US" sz="1400" b="0" noProof="0" dirty="0">
-                <a:solidFill>
-                  <a:srgbClr val="000000"/>
-                </a:solidFill>
-                <a:effectLst/>
-                <a:latin typeface="Fira Code" panose="020B0809050000020004" pitchFamily="49" charset="0"/>
-              </a:rPr>
-              <a:t>&lt;</a:t>
-            </a:r>
-            <a:r>
-              <a:rPr lang="en-US" sz="1400" b="0" noProof="0" dirty="0">
-                <a:solidFill>
-                  <a:srgbClr val="0000FF"/>
-                </a:solidFill>
-                <a:effectLst/>
-                <a:latin typeface="Fira Code" panose="020B0809050000020004" pitchFamily="49" charset="0"/>
-              </a:rPr>
-              <a:t>float</a:t>
-            </a:r>
-            <a:r>
-              <a:rPr lang="en-US" sz="1400" b="0" noProof="0" dirty="0">
-                <a:solidFill>
-                  <a:srgbClr val="000000"/>
-                </a:solidFill>
-                <a:effectLst/>
-                <a:latin typeface="Fira Code" panose="020B0809050000020004" pitchFamily="49" charset="0"/>
-              </a:rPr>
-              <a:t>&gt;() ^</a:t>
-            </a:r>
-          </a:p>
-          <a:p>
-            <a:pPr>
-              <a:lnSpc>
-                <a:spcPct val="200000"/>
-              </a:lnSpc>
-              <a:buNone/>
-            </a:pPr>
-            <a:r>
-              <a:rPr lang="en-US" sz="1400" b="0" noProof="0" dirty="0">
-                <a:solidFill>
-                  <a:srgbClr val="000000"/>
-                </a:solidFill>
-                <a:effectLst/>
-                <a:latin typeface="Fira Code" panose="020B0809050000020004" pitchFamily="49" charset="0"/>
-              </a:rPr>
-              <a:t>              </a:t>
-            </a:r>
-            <a:r>
-              <a:rPr lang="en-US" sz="1400" b="0" noProof="0" dirty="0">
-                <a:solidFill>
-                  <a:srgbClr val="795E26"/>
-                </a:solidFill>
-                <a:effectLst/>
-                <a:latin typeface="Fira Code" panose="020B0809050000020004" pitchFamily="49" charset="0"/>
-              </a:rPr>
-              <a:t>vector</a:t>
-            </a:r>
-            <a:r>
-              <a:rPr lang="en-US" sz="1400" b="0" noProof="0" dirty="0">
-                <a:solidFill>
-                  <a:srgbClr val="000000"/>
-                </a:solidFill>
-                <a:effectLst/>
-                <a:latin typeface="Fira Code" panose="020B0809050000020004" pitchFamily="49" charset="0"/>
-              </a:rPr>
-              <a:t>&lt;</a:t>
-            </a:r>
-            <a:r>
-              <a:rPr lang="en-US" sz="1400" b="0" noProof="0" dirty="0">
-                <a:solidFill>
-                  <a:srgbClr val="A31515"/>
-                </a:solidFill>
-                <a:effectLst/>
-                <a:latin typeface="Fira Code" panose="020B0809050000020004" pitchFamily="49" charset="0"/>
-              </a:rPr>
-              <a:t>'m'</a:t>
-            </a:r>
-            <a:r>
-              <a:rPr lang="en-US" sz="1400" b="0" noProof="0" dirty="0">
-                <a:solidFill>
-                  <a:srgbClr val="000000"/>
-                </a:solidFill>
-                <a:effectLst/>
-                <a:latin typeface="Fira Code" panose="020B0809050000020004" pitchFamily="49" charset="0"/>
-              </a:rPr>
-              <a:t>&gt;(</a:t>
-            </a:r>
-            <a:r>
-              <a:rPr lang="en-US" sz="1400" b="0" noProof="0" dirty="0">
-                <a:solidFill>
-                  <a:srgbClr val="0070C1"/>
-                </a:solidFill>
-                <a:effectLst/>
-                <a:latin typeface="Fira Code" panose="020B0809050000020004" pitchFamily="49" charset="0"/>
-              </a:rPr>
-              <a:t>M</a:t>
-            </a:r>
-            <a:r>
-              <a:rPr lang="en-US" sz="1400" b="0" noProof="0" dirty="0">
-                <a:solidFill>
-                  <a:srgbClr val="000000"/>
-                </a:solidFill>
-                <a:effectLst/>
-                <a:latin typeface="Fira Code" panose="020B0809050000020004" pitchFamily="49" charset="0"/>
-              </a:rPr>
-              <a:t>)  ^</a:t>
-            </a:r>
-          </a:p>
-          <a:p>
-            <a:pPr>
-              <a:lnSpc>
-                <a:spcPct val="200000"/>
-              </a:lnSpc>
-              <a:buNone/>
-            </a:pPr>
-            <a:r>
-              <a:rPr lang="en-US" sz="1400" b="0" noProof="0" dirty="0">
-                <a:solidFill>
-                  <a:srgbClr val="000000"/>
-                </a:solidFill>
-                <a:effectLst/>
-                <a:latin typeface="Fira Code" panose="020B0809050000020004" pitchFamily="49" charset="0"/>
-              </a:rPr>
-              <a:t>              </a:t>
-            </a:r>
-            <a:r>
-              <a:rPr lang="en-US" sz="1400" b="0" noProof="0" dirty="0">
-                <a:solidFill>
-                  <a:srgbClr val="795E26"/>
-                </a:solidFill>
-                <a:effectLst/>
-                <a:latin typeface="Fira Code" panose="020B0809050000020004" pitchFamily="49" charset="0"/>
-              </a:rPr>
-              <a:t>vector</a:t>
-            </a:r>
-            <a:r>
-              <a:rPr lang="en-US" sz="1400" b="0" noProof="0" dirty="0">
-                <a:solidFill>
-                  <a:srgbClr val="000000"/>
-                </a:solidFill>
-                <a:effectLst/>
-                <a:latin typeface="Fira Code" panose="020B0809050000020004" pitchFamily="49" charset="0"/>
-              </a:rPr>
-              <a:t>&lt;</a:t>
-            </a:r>
-            <a:r>
-              <a:rPr lang="en-US" sz="1400" b="0" noProof="0" dirty="0">
-                <a:solidFill>
-                  <a:srgbClr val="A31515"/>
-                </a:solidFill>
-                <a:effectLst/>
-                <a:latin typeface="Fira Code" panose="020B0809050000020004" pitchFamily="49" charset="0"/>
-              </a:rPr>
-              <a:t>'n'</a:t>
-            </a:r>
-            <a:r>
-              <a:rPr lang="en-US" sz="1400" b="0" noProof="0" dirty="0">
-                <a:solidFill>
-                  <a:srgbClr val="000000"/>
-                </a:solidFill>
-                <a:effectLst/>
-                <a:latin typeface="Fira Code" panose="020B0809050000020004" pitchFamily="49" charset="0"/>
-              </a:rPr>
-              <a:t>&gt;(</a:t>
-            </a:r>
-            <a:r>
-              <a:rPr lang="en-US" sz="1400" b="0" noProof="0" dirty="0">
-                <a:solidFill>
-                  <a:srgbClr val="0070C1"/>
-                </a:solidFill>
-                <a:effectLst/>
-                <a:latin typeface="Fira Code" panose="020B0809050000020004" pitchFamily="49" charset="0"/>
-              </a:rPr>
-              <a:t>N</a:t>
-            </a:r>
-            <a:r>
-              <a:rPr lang="en-US" sz="1400" b="0" noProof="0" dirty="0">
-                <a:solidFill>
-                  <a:srgbClr val="000000"/>
-                </a:solidFill>
-                <a:effectLst/>
-                <a:latin typeface="Fira Code" panose="020B0809050000020004" pitchFamily="49" charset="0"/>
-              </a:rPr>
-              <a:t>);</a:t>
-            </a:r>
-          </a:p>
-        </p:txBody>
-      </p:sp>
-      <p:sp>
-        <p:nvSpPr>
-          <p:cNvPr id="8" name="Rectangle 7">
-            <a:extLst>
-              <a:ext uri="{FF2B5EF4-FFF2-40B4-BE49-F238E27FC236}">
-                <a16:creationId xmlns:a16="http://schemas.microsoft.com/office/drawing/2014/main" id="{FA23D42A-BB3F-3EFA-4CCB-5A700F8F468C}"/>
-              </a:ext>
-            </a:extLst>
-          </p:cNvPr>
-          <p:cNvSpPr/>
-          <p:nvPr/>
-        </p:nvSpPr>
-        <p:spPr>
-          <a:xfrm>
-            <a:off x="6037812" y="3113605"/>
-            <a:ext cx="1698171" cy="435428"/>
-          </a:xfrm>
-          <a:prstGeom prst="rect">
-            <a:avLst/>
-          </a:prstGeom>
-          <a:noFill/>
-        </p:spPr>
-        <p:style>
-          <a:lnRef idx="2">
-            <a:schemeClr val="accent1">
-              <a:shade val="15000"/>
-            </a:schemeClr>
-          </a:lnRef>
-          <a:fillRef idx="1">
-            <a:schemeClr val="accent1"/>
-          </a:fillRef>
-          <a:effectRef idx="0">
-            <a:schemeClr val="accent1"/>
-          </a:effectRef>
-          <a:fontRef idx="minor">
-            <a:schemeClr val="lt1"/>
-          </a:fontRef>
-        </p:style>
-        <p:txBody>
-          <a:bodyPr rtlCol="0" anchor="ctr"/>
-          <a:lstStyle/>
-          <a:p>
-            <a:pPr algn="ctr"/>
-            <a:endParaRPr lang="en-US" noProof="0" dirty="0"/>
-          </a:p>
-        </p:txBody>
-      </p:sp>
-      <p:sp>
-        <p:nvSpPr>
-          <p:cNvPr id="10" name="Rectangle 9">
-            <a:extLst>
-              <a:ext uri="{FF2B5EF4-FFF2-40B4-BE49-F238E27FC236}">
-                <a16:creationId xmlns:a16="http://schemas.microsoft.com/office/drawing/2014/main" id="{99D5C1C8-80D9-8C99-35CE-890BA17FBF13}"/>
-              </a:ext>
-            </a:extLst>
-          </p:cNvPr>
-          <p:cNvSpPr/>
-          <p:nvPr/>
-        </p:nvSpPr>
-        <p:spPr>
-          <a:xfrm>
-            <a:off x="6037811" y="3571000"/>
-            <a:ext cx="1698171" cy="435428"/>
-          </a:xfrm>
-          <a:prstGeom prst="rect">
-            <a:avLst/>
-          </a:prstGeom>
-          <a:noFill/>
-        </p:spPr>
-        <p:style>
-          <a:lnRef idx="2">
-            <a:schemeClr val="accent1">
-              <a:shade val="15000"/>
-            </a:schemeClr>
-          </a:lnRef>
-          <a:fillRef idx="1">
-            <a:schemeClr val="accent1"/>
-          </a:fillRef>
-          <a:effectRef idx="0">
-            <a:schemeClr val="accent1"/>
-          </a:effectRef>
-          <a:fontRef idx="minor">
-            <a:schemeClr val="lt1"/>
-          </a:fontRef>
-        </p:style>
-        <p:txBody>
-          <a:bodyPr rtlCol="0" anchor="ctr"/>
-          <a:lstStyle/>
-          <a:p>
-            <a:pPr algn="ctr"/>
-            <a:endParaRPr lang="en-US" noProof="0" dirty="0"/>
-          </a:p>
-        </p:txBody>
-      </p:sp>
-      <p:sp>
-        <p:nvSpPr>
-          <p:cNvPr id="12" name="Rectangle 11">
-            <a:extLst>
-              <a:ext uri="{FF2B5EF4-FFF2-40B4-BE49-F238E27FC236}">
-                <a16:creationId xmlns:a16="http://schemas.microsoft.com/office/drawing/2014/main" id="{BC8AC22D-D974-2FFF-B64D-6B0E1C0C6D26}"/>
-              </a:ext>
-            </a:extLst>
-          </p:cNvPr>
-          <p:cNvSpPr/>
-          <p:nvPr/>
-        </p:nvSpPr>
-        <p:spPr>
-          <a:xfrm>
-            <a:off x="6037811" y="4040264"/>
-            <a:ext cx="1698171" cy="435428"/>
-          </a:xfrm>
-          <a:prstGeom prst="rect">
-            <a:avLst/>
-          </a:prstGeom>
-          <a:noFill/>
-        </p:spPr>
-        <p:style>
-          <a:lnRef idx="2">
-            <a:schemeClr val="accent1">
-              <a:shade val="15000"/>
-            </a:schemeClr>
-          </a:lnRef>
-          <a:fillRef idx="1">
-            <a:schemeClr val="accent1"/>
-          </a:fillRef>
-          <a:effectRef idx="0">
-            <a:schemeClr val="accent1"/>
-          </a:effectRef>
-          <a:fontRef idx="minor">
-            <a:schemeClr val="lt1"/>
-          </a:fontRef>
-        </p:style>
-        <p:txBody>
-          <a:bodyPr rtlCol="0" anchor="ctr"/>
-          <a:lstStyle/>
-          <a:p>
-            <a:pPr algn="ctr"/>
-            <a:endParaRPr lang="en-US" noProof="0" dirty="0"/>
-          </a:p>
-        </p:txBody>
-      </p:sp>
-      <p:sp>
-        <p:nvSpPr>
           <p:cNvPr id="14" name="TextBox 13">
             <a:extLst>
               <a:ext uri="{FF2B5EF4-FFF2-40B4-BE49-F238E27FC236}">
@@ -27885,50 +28758,485 @@
           </a:p>
         </p:txBody>
       </p:sp>
-      <p:sp>
-        <p:nvSpPr>
-          <p:cNvPr id="18" name="Right Brace 17">
-            <a:extLst>
-              <a:ext uri="{FF2B5EF4-FFF2-40B4-BE49-F238E27FC236}">
-                <a16:creationId xmlns:a16="http://schemas.microsoft.com/office/drawing/2014/main" id="{D66E5204-4017-2EAF-4A60-5194514D442A}"/>
-              </a:ext>
-            </a:extLst>
-          </p:cNvPr>
-          <p:cNvSpPr/>
+      <p:grpSp>
+        <p:nvGrpSpPr>
+          <p:cNvPr id="3" name="Group 2">
+            <a:extLst>
+              <a:ext uri="{FF2B5EF4-FFF2-40B4-BE49-F238E27FC236}">
+                <a16:creationId xmlns:a16="http://schemas.microsoft.com/office/drawing/2014/main" id="{EEAADB24-4B4C-362D-862F-891719F80794}"/>
+              </a:ext>
+            </a:extLst>
+          </p:cNvPr>
+          <p:cNvGrpSpPr/>
           <p:nvPr/>
-        </p:nvSpPr>
-        <p:spPr>
-          <a:xfrm rot="16200000">
-            <a:off x="7058495" y="2820887"/>
-            <a:ext cx="156743" cy="689175"/>
+        </p:nvGrpSpPr>
+        <p:grpSpPr>
+          <a:xfrm>
+            <a:off x="4543100" y="3030894"/>
+            <a:ext cx="3903812" cy="1444798"/>
+            <a:chOff x="4543100" y="3030894"/>
+            <a:chExt cx="3903812" cy="1444798"/>
           </a:xfrm>
-          <a:prstGeom prst="rightBrace">
-            <a:avLst/>
-          </a:prstGeom>
-        </p:spPr>
-        <p:style>
-          <a:lnRef idx="2">
-            <a:schemeClr val="accent1"/>
-          </a:lnRef>
-          <a:fillRef idx="0">
-            <a:schemeClr val="accent1"/>
-          </a:fillRef>
-          <a:effectRef idx="1">
-            <a:schemeClr val="accent1"/>
-          </a:effectRef>
-          <a:fontRef idx="minor">
-            <a:schemeClr val="tx1"/>
-          </a:fontRef>
-        </p:style>
-        <p:txBody>
-          <a:bodyPr rtlCol="0" anchor="ctr"/>
-          <a:lstStyle/>
-          <a:p>
-            <a:pPr algn="ctr"/>
-            <a:endParaRPr lang="en-US"/>
-          </a:p>
-        </p:txBody>
-      </p:sp>
+        </p:grpSpPr>
+        <p:sp>
+          <p:nvSpPr>
+            <p:cNvPr id="6" name="TextBox 5">
+              <a:extLst>
+                <a:ext uri="{FF2B5EF4-FFF2-40B4-BE49-F238E27FC236}">
+                  <a16:creationId xmlns:a16="http://schemas.microsoft.com/office/drawing/2014/main" id="{A28F9A7A-4E68-17F0-FD80-992DB87E748C}"/>
+                </a:ext>
+              </a:extLst>
+            </p:cNvPr>
+            <p:cNvSpPr txBox="1"/>
+            <p:nvPr/>
+          </p:nvSpPr>
+          <p:spPr>
+            <a:xfrm>
+              <a:off x="4543100" y="3030894"/>
+              <a:ext cx="3903812" cy="1330108"/>
+            </a:xfrm>
+            <a:prstGeom prst="rect">
+              <a:avLst/>
+            </a:prstGeom>
+            <a:noFill/>
+          </p:spPr>
+          <p:txBody>
+            <a:bodyPr wrap="square">
+              <a:spAutoFit/>
+            </a:bodyPr>
+            <a:lstStyle/>
+            <a:p>
+              <a:pPr>
+                <a:lnSpc>
+                  <a:spcPct val="200000"/>
+                </a:lnSpc>
+                <a:buNone/>
+              </a:pPr>
+              <a:r>
+                <a:rPr lang="en-US" sz="1400" b="0" noProof="0" dirty="0">
+                  <a:solidFill>
+                    <a:srgbClr val="267F99"/>
+                  </a:solidFill>
+                  <a:effectLst/>
+                  <a:latin typeface="Fira Code" panose="020B0809050000020004" pitchFamily="49" charset="0"/>
+                </a:rPr>
+                <a:t>auto</a:t>
+              </a:r>
+              <a:r>
+                <a:rPr lang="en-US" sz="1400" b="0" noProof="0" dirty="0">
+                  <a:solidFill>
+                    <a:srgbClr val="000000"/>
+                  </a:solidFill>
+                  <a:effectLst/>
+                  <a:latin typeface="Fira Code" panose="020B0809050000020004" pitchFamily="49" charset="0"/>
+                </a:rPr>
+                <a:t> </a:t>
+              </a:r>
+              <a:r>
+                <a:rPr lang="en-US" sz="1400" b="0" noProof="0" dirty="0">
+                  <a:solidFill>
+                    <a:srgbClr val="001080"/>
+                  </a:solidFill>
+                  <a:effectLst/>
+                  <a:latin typeface="Fira Code" panose="020B0809050000020004" pitchFamily="49" charset="0"/>
+                </a:rPr>
+                <a:t>layout</a:t>
+              </a:r>
+              <a:r>
+                <a:rPr lang="en-US" sz="1400" b="0" noProof="0" dirty="0">
+                  <a:solidFill>
+                    <a:srgbClr val="000000"/>
+                  </a:solidFill>
+                  <a:effectLst/>
+                  <a:latin typeface="Fira Code" panose="020B0809050000020004" pitchFamily="49" charset="0"/>
+                </a:rPr>
+                <a:t> = </a:t>
+              </a:r>
+              <a:r>
+                <a:rPr lang="en-US" sz="1400" b="0" noProof="0" dirty="0">
+                  <a:solidFill>
+                    <a:srgbClr val="267F99"/>
+                  </a:solidFill>
+                  <a:effectLst/>
+                  <a:latin typeface="Fira Code" panose="020B0809050000020004" pitchFamily="49" charset="0"/>
+                </a:rPr>
+                <a:t>scalar</a:t>
+              </a:r>
+              <a:r>
+                <a:rPr lang="en-US" sz="1400" b="0" noProof="0" dirty="0">
+                  <a:solidFill>
+                    <a:srgbClr val="000000"/>
+                  </a:solidFill>
+                  <a:effectLst/>
+                  <a:latin typeface="Fira Code" panose="020B0809050000020004" pitchFamily="49" charset="0"/>
+                </a:rPr>
+                <a:t>&lt;</a:t>
+              </a:r>
+              <a:r>
+                <a:rPr lang="en-US" sz="1400" b="0" noProof="0" dirty="0">
+                  <a:solidFill>
+                    <a:srgbClr val="0000FF"/>
+                  </a:solidFill>
+                  <a:effectLst/>
+                  <a:latin typeface="Fira Code" panose="020B0809050000020004" pitchFamily="49" charset="0"/>
+                </a:rPr>
+                <a:t>float</a:t>
+              </a:r>
+              <a:r>
+                <a:rPr lang="en-US" sz="1400" b="0" noProof="0" dirty="0">
+                  <a:solidFill>
+                    <a:srgbClr val="000000"/>
+                  </a:solidFill>
+                  <a:effectLst/>
+                  <a:latin typeface="Fira Code" panose="020B0809050000020004" pitchFamily="49" charset="0"/>
+                </a:rPr>
+                <a:t>&gt;() ^</a:t>
+              </a:r>
+            </a:p>
+            <a:p>
+              <a:pPr>
+                <a:lnSpc>
+                  <a:spcPct val="200000"/>
+                </a:lnSpc>
+                <a:buNone/>
+              </a:pPr>
+              <a:r>
+                <a:rPr lang="en-US" sz="1400" b="0" noProof="0" dirty="0">
+                  <a:solidFill>
+                    <a:srgbClr val="000000"/>
+                  </a:solidFill>
+                  <a:effectLst/>
+                  <a:latin typeface="Fira Code" panose="020B0809050000020004" pitchFamily="49" charset="0"/>
+                </a:rPr>
+                <a:t>              </a:t>
+              </a:r>
+              <a:r>
+                <a:rPr lang="en-US" sz="1400" b="0" noProof="0" dirty="0">
+                  <a:solidFill>
+                    <a:srgbClr val="795E26"/>
+                  </a:solidFill>
+                  <a:effectLst/>
+                  <a:latin typeface="Fira Code" panose="020B0809050000020004" pitchFamily="49" charset="0"/>
+                </a:rPr>
+                <a:t>vector</a:t>
+              </a:r>
+              <a:r>
+                <a:rPr lang="en-US" sz="1400" b="0" noProof="0" dirty="0">
+                  <a:solidFill>
+                    <a:srgbClr val="000000"/>
+                  </a:solidFill>
+                  <a:effectLst/>
+                  <a:latin typeface="Fira Code" panose="020B0809050000020004" pitchFamily="49" charset="0"/>
+                </a:rPr>
+                <a:t>&lt;</a:t>
+              </a:r>
+              <a:r>
+                <a:rPr lang="en-US" sz="1400" b="0" noProof="0" dirty="0">
+                  <a:solidFill>
+                    <a:srgbClr val="A31515"/>
+                  </a:solidFill>
+                  <a:effectLst/>
+                  <a:latin typeface="Fira Code" panose="020B0809050000020004" pitchFamily="49" charset="0"/>
+                </a:rPr>
+                <a:t>'m'</a:t>
+              </a:r>
+              <a:r>
+                <a:rPr lang="en-US" sz="1400" b="0" noProof="0" dirty="0">
+                  <a:solidFill>
+                    <a:srgbClr val="000000"/>
+                  </a:solidFill>
+                  <a:effectLst/>
+                  <a:latin typeface="Fira Code" panose="020B0809050000020004" pitchFamily="49" charset="0"/>
+                </a:rPr>
+                <a:t>&gt;(</a:t>
+              </a:r>
+              <a:r>
+                <a:rPr lang="en-US" sz="1400" b="0" noProof="0" dirty="0">
+                  <a:solidFill>
+                    <a:srgbClr val="0070C1"/>
+                  </a:solidFill>
+                  <a:effectLst/>
+                  <a:latin typeface="Fira Code" panose="020B0809050000020004" pitchFamily="49" charset="0"/>
+                </a:rPr>
+                <a:t>M</a:t>
+              </a:r>
+              <a:r>
+                <a:rPr lang="en-US" sz="1400" b="0" noProof="0" dirty="0">
+                  <a:solidFill>
+                    <a:srgbClr val="000000"/>
+                  </a:solidFill>
+                  <a:effectLst/>
+                  <a:latin typeface="Fira Code" panose="020B0809050000020004" pitchFamily="49" charset="0"/>
+                </a:rPr>
+                <a:t>)  ^</a:t>
+              </a:r>
+            </a:p>
+            <a:p>
+              <a:pPr>
+                <a:lnSpc>
+                  <a:spcPct val="200000"/>
+                </a:lnSpc>
+                <a:buNone/>
+              </a:pPr>
+              <a:r>
+                <a:rPr lang="en-US" sz="1400" b="0" noProof="0" dirty="0">
+                  <a:solidFill>
+                    <a:srgbClr val="000000"/>
+                  </a:solidFill>
+                  <a:effectLst/>
+                  <a:latin typeface="Fira Code" panose="020B0809050000020004" pitchFamily="49" charset="0"/>
+                </a:rPr>
+                <a:t>              </a:t>
+              </a:r>
+              <a:r>
+                <a:rPr lang="en-US" sz="1400" b="0" noProof="0" dirty="0">
+                  <a:solidFill>
+                    <a:srgbClr val="795E26"/>
+                  </a:solidFill>
+                  <a:effectLst/>
+                  <a:latin typeface="Fira Code" panose="020B0809050000020004" pitchFamily="49" charset="0"/>
+                </a:rPr>
+                <a:t>vector</a:t>
+              </a:r>
+              <a:r>
+                <a:rPr lang="en-US" sz="1400" b="0" noProof="0" dirty="0">
+                  <a:solidFill>
+                    <a:srgbClr val="000000"/>
+                  </a:solidFill>
+                  <a:effectLst/>
+                  <a:latin typeface="Fira Code" panose="020B0809050000020004" pitchFamily="49" charset="0"/>
+                </a:rPr>
+                <a:t>&lt;</a:t>
+              </a:r>
+              <a:r>
+                <a:rPr lang="en-US" sz="1400" b="0" noProof="0" dirty="0">
+                  <a:solidFill>
+                    <a:srgbClr val="A31515"/>
+                  </a:solidFill>
+                  <a:effectLst/>
+                  <a:latin typeface="Fira Code" panose="020B0809050000020004" pitchFamily="49" charset="0"/>
+                </a:rPr>
+                <a:t>'n'</a:t>
+              </a:r>
+              <a:r>
+                <a:rPr lang="en-US" sz="1400" b="0" noProof="0" dirty="0">
+                  <a:solidFill>
+                    <a:srgbClr val="000000"/>
+                  </a:solidFill>
+                  <a:effectLst/>
+                  <a:latin typeface="Fira Code" panose="020B0809050000020004" pitchFamily="49" charset="0"/>
+                </a:rPr>
+                <a:t>&gt;(</a:t>
+              </a:r>
+              <a:r>
+                <a:rPr lang="en-US" sz="1400" b="0" noProof="0" dirty="0">
+                  <a:solidFill>
+                    <a:srgbClr val="0070C1"/>
+                  </a:solidFill>
+                  <a:effectLst/>
+                  <a:latin typeface="Fira Code" panose="020B0809050000020004" pitchFamily="49" charset="0"/>
+                </a:rPr>
+                <a:t>N</a:t>
+              </a:r>
+              <a:r>
+                <a:rPr lang="en-US" sz="1400" b="0" noProof="0" dirty="0">
+                  <a:solidFill>
+                    <a:srgbClr val="000000"/>
+                  </a:solidFill>
+                  <a:effectLst/>
+                  <a:latin typeface="Fira Code" panose="020B0809050000020004" pitchFamily="49" charset="0"/>
+                </a:rPr>
+                <a:t>);</a:t>
+              </a:r>
+            </a:p>
+          </p:txBody>
+        </p:sp>
+        <p:sp>
+          <p:nvSpPr>
+            <p:cNvPr id="8" name="Rectangle 7">
+              <a:extLst>
+                <a:ext uri="{FF2B5EF4-FFF2-40B4-BE49-F238E27FC236}">
+                  <a16:creationId xmlns:a16="http://schemas.microsoft.com/office/drawing/2014/main" id="{FA23D42A-BB3F-3EFA-4CCB-5A700F8F468C}"/>
+                </a:ext>
+              </a:extLst>
+            </p:cNvPr>
+            <p:cNvSpPr/>
+            <p:nvPr/>
+          </p:nvSpPr>
+          <p:spPr>
+            <a:xfrm>
+              <a:off x="6037812" y="3113605"/>
+              <a:ext cx="1698171" cy="435428"/>
+            </a:xfrm>
+            <a:prstGeom prst="rect">
+              <a:avLst/>
+            </a:prstGeom>
+            <a:noFill/>
+          </p:spPr>
+          <p:style>
+            <a:lnRef idx="2">
+              <a:schemeClr val="accent1">
+                <a:shade val="15000"/>
+              </a:schemeClr>
+            </a:lnRef>
+            <a:fillRef idx="1">
+              <a:schemeClr val="accent1"/>
+            </a:fillRef>
+            <a:effectRef idx="0">
+              <a:schemeClr val="accent1"/>
+            </a:effectRef>
+            <a:fontRef idx="minor">
+              <a:schemeClr val="lt1"/>
+            </a:fontRef>
+          </p:style>
+          <p:txBody>
+            <a:bodyPr rtlCol="0" anchor="ctr"/>
+            <a:lstStyle/>
+            <a:p>
+              <a:pPr algn="ctr"/>
+              <a:endParaRPr lang="en-US" noProof="0" dirty="0"/>
+            </a:p>
+          </p:txBody>
+        </p:sp>
+        <p:sp>
+          <p:nvSpPr>
+            <p:cNvPr id="10" name="Rectangle 9">
+              <a:extLst>
+                <a:ext uri="{FF2B5EF4-FFF2-40B4-BE49-F238E27FC236}">
+                  <a16:creationId xmlns:a16="http://schemas.microsoft.com/office/drawing/2014/main" id="{99D5C1C8-80D9-8C99-35CE-890BA17FBF13}"/>
+                </a:ext>
+              </a:extLst>
+            </p:cNvPr>
+            <p:cNvSpPr/>
+            <p:nvPr/>
+          </p:nvSpPr>
+          <p:spPr>
+            <a:xfrm>
+              <a:off x="6037811" y="3571000"/>
+              <a:ext cx="1698171" cy="435428"/>
+            </a:xfrm>
+            <a:prstGeom prst="rect">
+              <a:avLst/>
+            </a:prstGeom>
+            <a:noFill/>
+          </p:spPr>
+          <p:style>
+            <a:lnRef idx="2">
+              <a:schemeClr val="accent1">
+                <a:shade val="15000"/>
+              </a:schemeClr>
+            </a:lnRef>
+            <a:fillRef idx="1">
+              <a:schemeClr val="accent1"/>
+            </a:fillRef>
+            <a:effectRef idx="0">
+              <a:schemeClr val="accent1"/>
+            </a:effectRef>
+            <a:fontRef idx="minor">
+              <a:schemeClr val="lt1"/>
+            </a:fontRef>
+          </p:style>
+          <p:txBody>
+            <a:bodyPr rtlCol="0" anchor="ctr"/>
+            <a:lstStyle/>
+            <a:p>
+              <a:pPr algn="ctr"/>
+              <a:endParaRPr lang="en-US" noProof="0" dirty="0"/>
+            </a:p>
+          </p:txBody>
+        </p:sp>
+        <p:sp>
+          <p:nvSpPr>
+            <p:cNvPr id="12" name="Rectangle 11">
+              <a:extLst>
+                <a:ext uri="{FF2B5EF4-FFF2-40B4-BE49-F238E27FC236}">
+                  <a16:creationId xmlns:a16="http://schemas.microsoft.com/office/drawing/2014/main" id="{BC8AC22D-D974-2FFF-B64D-6B0E1C0C6D26}"/>
+                </a:ext>
+              </a:extLst>
+            </p:cNvPr>
+            <p:cNvSpPr/>
+            <p:nvPr/>
+          </p:nvSpPr>
+          <p:spPr>
+            <a:xfrm>
+              <a:off x="6037811" y="4040264"/>
+              <a:ext cx="1698171" cy="435428"/>
+            </a:xfrm>
+            <a:prstGeom prst="rect">
+              <a:avLst/>
+            </a:prstGeom>
+            <a:noFill/>
+          </p:spPr>
+          <p:style>
+            <a:lnRef idx="2">
+              <a:schemeClr val="accent1">
+                <a:shade val="15000"/>
+              </a:schemeClr>
+            </a:lnRef>
+            <a:fillRef idx="1">
+              <a:schemeClr val="accent1"/>
+            </a:fillRef>
+            <a:effectRef idx="0">
+              <a:schemeClr val="accent1"/>
+            </a:effectRef>
+            <a:fontRef idx="minor">
+              <a:schemeClr val="lt1"/>
+            </a:fontRef>
+          </p:style>
+          <p:txBody>
+            <a:bodyPr rtlCol="0" anchor="ctr"/>
+            <a:lstStyle/>
+            <a:p>
+              <a:pPr algn="ctr"/>
+              <a:endParaRPr lang="en-US" noProof="0" dirty="0"/>
+            </a:p>
+          </p:txBody>
+        </p:sp>
+        <p:sp>
+          <p:nvSpPr>
+            <p:cNvPr id="18" name="Right Brace 17">
+              <a:extLst>
+                <a:ext uri="{FF2B5EF4-FFF2-40B4-BE49-F238E27FC236}">
+                  <a16:creationId xmlns:a16="http://schemas.microsoft.com/office/drawing/2014/main" id="{D66E5204-4017-2EAF-4A60-5194514D442A}"/>
+                </a:ext>
+              </a:extLst>
+            </p:cNvPr>
+            <p:cNvSpPr/>
+            <p:nvPr/>
+          </p:nvSpPr>
+          <p:spPr>
+            <a:xfrm rot="16200000">
+              <a:off x="7058495" y="2820887"/>
+              <a:ext cx="156743" cy="689175"/>
+            </a:xfrm>
+            <a:prstGeom prst="rightBrace">
+              <a:avLst/>
+            </a:prstGeom>
+          </p:spPr>
+          <p:style>
+            <a:lnRef idx="2">
+              <a:schemeClr val="accent1"/>
+            </a:lnRef>
+            <a:fillRef idx="0">
+              <a:schemeClr val="accent1"/>
+            </a:fillRef>
+            <a:effectRef idx="1">
+              <a:schemeClr val="accent1"/>
+            </a:effectRef>
+            <a:fontRef idx="minor">
+              <a:schemeClr val="tx1"/>
+            </a:fontRef>
+          </p:style>
+          <p:txBody>
+            <a:bodyPr rtlCol="0" anchor="ctr"/>
+            <a:lstStyle/>
+            <a:p>
+              <a:pPr algn="ctr"/>
+              <a:endParaRPr lang="en-US"/>
+            </a:p>
+          </p:txBody>
+        </p:sp>
+      </p:grpSp>
       <p:sp>
         <p:nvSpPr>
           <p:cNvPr id="19" name="TextBox 18">
@@ -28483,7 +29791,7 @@
           <a:p>
             <a:fld id="{2A57731D-07D7-4C44-A482-993035AAE3B2}" type="datetime1">
               <a:rPr lang="en-US" smtClean="0"/>
-              <a:t>8/26/2026</a:t>
+              <a:t>8/27/2026</a:t>
             </a:fld>
             <a:endParaRPr lang="en-US"/>
           </a:p>
@@ -29437,7 +30745,7 @@
           <a:p>
             <a:fld id="{60762CC1-CEC8-4962-8ADE-D01B91546622}" type="datetime1">
               <a:rPr lang="en-US" smtClean="0"/>
-              <a:t>8/26/2026</a:t>
+              <a:t>8/27/2026</a:t>
             </a:fld>
             <a:endParaRPr lang="en-US"/>
           </a:p>
@@ -31473,7 +32781,7 @@
           <a:p>
             <a:fld id="{EDBD1638-F548-41E6-A67D-BF07DFBF4593}" type="datetime1">
               <a:rPr lang="en-US" smtClean="0"/>
-              <a:t>8/26/2026</a:t>
+              <a:t>8/27/2026</a:t>
             </a:fld>
             <a:endParaRPr lang="en-US"/>
           </a:p>
@@ -32278,532 +33586,6 @@
           </a:fontRef>
         </p:style>
       </p:cxnSp>
-      <p:sp>
-        <p:nvSpPr>
-          <p:cNvPr id="13" name="TextBox 12">
-            <a:extLst>
-              <a:ext uri="{FF2B5EF4-FFF2-40B4-BE49-F238E27FC236}">
-                <a16:creationId xmlns:a16="http://schemas.microsoft.com/office/drawing/2014/main" id="{F1D88C1D-F06F-5ACA-392E-B0B03F940713}"/>
-              </a:ext>
-            </a:extLst>
-          </p:cNvPr>
-          <p:cNvSpPr txBox="1"/>
-          <p:nvPr/>
-        </p:nvSpPr>
-        <p:spPr>
-          <a:xfrm>
-            <a:off x="7079772" y="3214970"/>
-            <a:ext cx="4106291" cy="634148"/>
-          </a:xfrm>
-          <a:prstGeom prst="rect">
-            <a:avLst/>
-          </a:prstGeom>
-          <a:noFill/>
-          <a:ln>
-            <a:solidFill>
-              <a:schemeClr val="tx1"/>
-            </a:solidFill>
-          </a:ln>
-        </p:spPr>
-        <p:txBody>
-          <a:bodyPr wrap="square">
-            <a:spAutoFit/>
-          </a:bodyPr>
-          <a:lstStyle/>
-          <a:p>
-            <a:pPr>
-              <a:lnSpc>
-                <a:spcPct val="113095"/>
-              </a:lnSpc>
-              <a:buNone/>
-            </a:pPr>
-            <a:r>
-              <a:rPr lang="en-US" sz="1050" b="0" dirty="0" err="1">
-                <a:solidFill>
-                  <a:srgbClr val="795E26"/>
-                </a:solidFill>
-                <a:effectLst/>
-                <a:latin typeface="Fira Code" panose="020B0809050000020004" pitchFamily="49" charset="0"/>
-              </a:rPr>
-              <a:t>omp_for_each</a:t>
-            </a:r>
-            <a:r>
-              <a:rPr lang="en-US" sz="1050" dirty="0">
-                <a:solidFill>
-                  <a:srgbClr val="000000"/>
-                </a:solidFill>
-                <a:latin typeface="Fira Code" panose="020B0809050000020004" pitchFamily="49" charset="0"/>
-              </a:rPr>
-              <a:t>(</a:t>
-            </a:r>
-            <a:r>
-              <a:rPr lang="en-US" sz="1050" b="0" noProof="0" dirty="0">
-                <a:solidFill>
-                  <a:srgbClr val="795E26"/>
-                </a:solidFill>
-                <a:effectLst/>
-                <a:latin typeface="Fira Code" panose="020B0809050000020004" pitchFamily="49" charset="0"/>
-              </a:rPr>
-              <a:t>traverser</a:t>
-            </a:r>
-            <a:r>
-              <a:rPr lang="en-US" sz="1050" b="0" noProof="0" dirty="0">
-                <a:solidFill>
-                  <a:srgbClr val="000000"/>
-                </a:solidFill>
-                <a:effectLst/>
-                <a:latin typeface="Fira Code" panose="020B0809050000020004" pitchFamily="49" charset="0"/>
-              </a:rPr>
-              <a:t>(</a:t>
-            </a:r>
-            <a:r>
-              <a:rPr lang="en-US" sz="1050" b="0" noProof="0" dirty="0">
-                <a:solidFill>
-                  <a:srgbClr val="001080"/>
-                </a:solidFill>
-                <a:effectLst/>
-                <a:latin typeface="Fira Code" panose="020B0809050000020004" pitchFamily="49" charset="0"/>
-              </a:rPr>
-              <a:t>matrix</a:t>
-            </a:r>
-            <a:r>
-              <a:rPr lang="en-US" sz="1050" b="0" noProof="0" dirty="0">
-                <a:solidFill>
-                  <a:srgbClr val="000000"/>
-                </a:solidFill>
-                <a:effectLst/>
-                <a:latin typeface="Fira Code" panose="020B0809050000020004" pitchFamily="49" charset="0"/>
-              </a:rPr>
-              <a:t>), [&amp;](</a:t>
-            </a:r>
-            <a:r>
-              <a:rPr lang="en-US" sz="1050" b="0" noProof="0" dirty="0">
-                <a:solidFill>
-                  <a:srgbClr val="267F99"/>
-                </a:solidFill>
-                <a:effectLst/>
-                <a:latin typeface="Fira Code" panose="020B0809050000020004" pitchFamily="49" charset="0"/>
-              </a:rPr>
-              <a:t>auto</a:t>
-            </a:r>
-            <a:r>
-              <a:rPr lang="en-US" sz="1050" b="0" noProof="0" dirty="0">
-                <a:solidFill>
-                  <a:srgbClr val="000000"/>
-                </a:solidFill>
-                <a:effectLst/>
-                <a:latin typeface="Fira Code" panose="020B0809050000020004" pitchFamily="49" charset="0"/>
-              </a:rPr>
-              <a:t> </a:t>
-            </a:r>
-            <a:r>
-              <a:rPr lang="en-US" sz="1050" b="0" noProof="0" dirty="0">
-                <a:solidFill>
-                  <a:srgbClr val="001080"/>
-                </a:solidFill>
-                <a:effectLst/>
-                <a:latin typeface="Fira Code" panose="020B0809050000020004" pitchFamily="49" charset="0"/>
-              </a:rPr>
-              <a:t>index</a:t>
-            </a:r>
-            <a:r>
-              <a:rPr lang="en-US" sz="1050" b="0" noProof="0" dirty="0">
-                <a:solidFill>
-                  <a:srgbClr val="000000"/>
-                </a:solidFill>
-                <a:effectLst/>
-                <a:latin typeface="Fira Code" panose="020B0809050000020004" pitchFamily="49" charset="0"/>
-              </a:rPr>
-              <a:t>) {</a:t>
-            </a:r>
-          </a:p>
-          <a:p>
-            <a:pPr>
-              <a:lnSpc>
-                <a:spcPct val="113095"/>
-              </a:lnSpc>
-              <a:buNone/>
-            </a:pPr>
-            <a:r>
-              <a:rPr lang="en-US" sz="1050" b="0" noProof="0" dirty="0">
-                <a:solidFill>
-                  <a:srgbClr val="000000"/>
-                </a:solidFill>
-                <a:effectLst/>
-                <a:latin typeface="Fira Code" panose="020B0809050000020004" pitchFamily="49" charset="0"/>
-              </a:rPr>
-              <a:t>    </a:t>
-            </a:r>
-            <a:r>
-              <a:rPr lang="en-US" sz="1050" b="0" noProof="0" dirty="0">
-                <a:solidFill>
-                  <a:srgbClr val="001080"/>
-                </a:solidFill>
-                <a:effectLst/>
-                <a:latin typeface="Fira Code" panose="020B0809050000020004" pitchFamily="49" charset="0"/>
-              </a:rPr>
-              <a:t>matrix</a:t>
-            </a:r>
-            <a:r>
-              <a:rPr lang="en-US" sz="1050" b="0" noProof="0" dirty="0">
-                <a:solidFill>
-                  <a:srgbClr val="000000"/>
-                </a:solidFill>
-                <a:effectLst/>
-                <a:latin typeface="Fira Code" panose="020B0809050000020004" pitchFamily="49" charset="0"/>
-              </a:rPr>
-              <a:t>[</a:t>
-            </a:r>
-            <a:r>
-              <a:rPr lang="en-US" sz="1050" b="0" noProof="0" dirty="0">
-                <a:solidFill>
-                  <a:srgbClr val="001080"/>
-                </a:solidFill>
-                <a:effectLst/>
-                <a:latin typeface="Fira Code" panose="020B0809050000020004" pitchFamily="49" charset="0"/>
-              </a:rPr>
-              <a:t>index</a:t>
-            </a:r>
-            <a:r>
-              <a:rPr lang="en-US" sz="1050" b="0" noProof="0" dirty="0">
-                <a:solidFill>
-                  <a:srgbClr val="000000"/>
-                </a:solidFill>
-                <a:effectLst/>
-                <a:latin typeface="Fira Code" panose="020B0809050000020004" pitchFamily="49" charset="0"/>
-              </a:rPr>
-              <a:t>] = </a:t>
-            </a:r>
-            <a:r>
-              <a:rPr lang="en-US" sz="1050" dirty="0" err="1">
-                <a:solidFill>
-                  <a:srgbClr val="795E26"/>
-                </a:solidFill>
-                <a:latin typeface="Fira Code" panose="020B0809050000020004" pitchFamily="49" charset="0"/>
-              </a:rPr>
-              <a:t>init</a:t>
-            </a:r>
-            <a:r>
-              <a:rPr lang="en-US" sz="1050" dirty="0">
-                <a:solidFill>
-                  <a:srgbClr val="000000"/>
-                </a:solidFill>
-                <a:latin typeface="Fira Code" panose="020B0809050000020004" pitchFamily="49" charset="0"/>
-              </a:rPr>
-              <a:t>(</a:t>
-            </a:r>
-            <a:r>
-              <a:rPr lang="en-US" sz="1050" dirty="0">
-                <a:solidFill>
-                  <a:srgbClr val="001080"/>
-                </a:solidFill>
-                <a:latin typeface="Fira Code" panose="020B0809050000020004" pitchFamily="49" charset="0"/>
-              </a:rPr>
-              <a:t>index</a:t>
-            </a:r>
-            <a:r>
-              <a:rPr lang="en-US" sz="1050" dirty="0">
-                <a:solidFill>
-                  <a:srgbClr val="000000"/>
-                </a:solidFill>
-                <a:latin typeface="Fira Code" panose="020B0809050000020004" pitchFamily="49" charset="0"/>
-              </a:rPr>
-              <a:t>)</a:t>
-            </a:r>
-            <a:r>
-              <a:rPr lang="en-US" sz="1050" b="0" noProof="0" dirty="0">
-                <a:solidFill>
-                  <a:srgbClr val="000000"/>
-                </a:solidFill>
-                <a:effectLst/>
-                <a:latin typeface="Fira Code" panose="020B0809050000020004" pitchFamily="49" charset="0"/>
-              </a:rPr>
-              <a:t>;</a:t>
-            </a:r>
-          </a:p>
-          <a:p>
-            <a:pPr>
-              <a:lnSpc>
-                <a:spcPct val="113095"/>
-              </a:lnSpc>
-              <a:buNone/>
-            </a:pPr>
-            <a:r>
-              <a:rPr lang="en-US" sz="1050" b="0" noProof="0" dirty="0">
-                <a:solidFill>
-                  <a:srgbClr val="000000"/>
-                </a:solidFill>
-                <a:effectLst/>
-                <a:latin typeface="Fira Code" panose="020B0809050000020004" pitchFamily="49" charset="0"/>
-              </a:rPr>
-              <a:t>});</a:t>
-            </a:r>
-          </a:p>
-        </p:txBody>
-      </p:sp>
-      <p:sp>
-        <p:nvSpPr>
-          <p:cNvPr id="15" name="TextBox 14">
-            <a:extLst>
-              <a:ext uri="{FF2B5EF4-FFF2-40B4-BE49-F238E27FC236}">
-                <a16:creationId xmlns:a16="http://schemas.microsoft.com/office/drawing/2014/main" id="{FC04F895-4DAA-A566-47D4-C9E4F4C00E4B}"/>
-              </a:ext>
-            </a:extLst>
-          </p:cNvPr>
-          <p:cNvSpPr txBox="1"/>
-          <p:nvPr/>
-        </p:nvSpPr>
-        <p:spPr>
-          <a:xfrm>
-            <a:off x="7079772" y="4182753"/>
-            <a:ext cx="4106291" cy="634148"/>
-          </a:xfrm>
-          <a:prstGeom prst="rect">
-            <a:avLst/>
-          </a:prstGeom>
-          <a:noFill/>
-          <a:ln>
-            <a:solidFill>
-              <a:schemeClr val="tx1"/>
-            </a:solidFill>
-          </a:ln>
-        </p:spPr>
-        <p:txBody>
-          <a:bodyPr wrap="square">
-            <a:spAutoFit/>
-          </a:bodyPr>
-          <a:lstStyle/>
-          <a:p>
-            <a:pPr>
-              <a:lnSpc>
-                <a:spcPct val="113095"/>
-              </a:lnSpc>
-              <a:buNone/>
-            </a:pPr>
-            <a:r>
-              <a:rPr lang="en-US" sz="1050" b="0" dirty="0" err="1">
-                <a:solidFill>
-                  <a:srgbClr val="795E26"/>
-                </a:solidFill>
-                <a:effectLst/>
-                <a:latin typeface="Fira Code" panose="020B0809050000020004" pitchFamily="49" charset="0"/>
-              </a:rPr>
-              <a:t>tbb_for_each</a:t>
-            </a:r>
-            <a:r>
-              <a:rPr lang="en-US" sz="1050" dirty="0">
-                <a:solidFill>
-                  <a:srgbClr val="000000"/>
-                </a:solidFill>
-                <a:latin typeface="Fira Code" panose="020B0809050000020004" pitchFamily="49" charset="0"/>
-              </a:rPr>
-              <a:t>(</a:t>
-            </a:r>
-            <a:r>
-              <a:rPr lang="en-US" sz="1050" b="0" noProof="0" dirty="0">
-                <a:solidFill>
-                  <a:srgbClr val="795E26"/>
-                </a:solidFill>
-                <a:effectLst/>
-                <a:latin typeface="Fira Code" panose="020B0809050000020004" pitchFamily="49" charset="0"/>
-              </a:rPr>
-              <a:t>traverser</a:t>
-            </a:r>
-            <a:r>
-              <a:rPr lang="en-US" sz="1050" b="0" noProof="0" dirty="0">
-                <a:solidFill>
-                  <a:srgbClr val="000000"/>
-                </a:solidFill>
-                <a:effectLst/>
-                <a:latin typeface="Fira Code" panose="020B0809050000020004" pitchFamily="49" charset="0"/>
-              </a:rPr>
-              <a:t>(</a:t>
-            </a:r>
-            <a:r>
-              <a:rPr lang="en-US" sz="1050" b="0" noProof="0" dirty="0">
-                <a:solidFill>
-                  <a:srgbClr val="001080"/>
-                </a:solidFill>
-                <a:effectLst/>
-                <a:latin typeface="Fira Code" panose="020B0809050000020004" pitchFamily="49" charset="0"/>
-              </a:rPr>
-              <a:t>matrix</a:t>
-            </a:r>
-            <a:r>
-              <a:rPr lang="en-US" sz="1050" b="0" noProof="0" dirty="0">
-                <a:solidFill>
-                  <a:srgbClr val="000000"/>
-                </a:solidFill>
-                <a:effectLst/>
-                <a:latin typeface="Fira Code" panose="020B0809050000020004" pitchFamily="49" charset="0"/>
-              </a:rPr>
-              <a:t>), [&amp;](</a:t>
-            </a:r>
-            <a:r>
-              <a:rPr lang="en-US" sz="1050" b="0" noProof="0" dirty="0">
-                <a:solidFill>
-                  <a:srgbClr val="267F99"/>
-                </a:solidFill>
-                <a:effectLst/>
-                <a:latin typeface="Fira Code" panose="020B0809050000020004" pitchFamily="49" charset="0"/>
-              </a:rPr>
-              <a:t>auto</a:t>
-            </a:r>
-            <a:r>
-              <a:rPr lang="en-US" sz="1050" b="0" noProof="0" dirty="0">
-                <a:solidFill>
-                  <a:srgbClr val="000000"/>
-                </a:solidFill>
-                <a:effectLst/>
-                <a:latin typeface="Fira Code" panose="020B0809050000020004" pitchFamily="49" charset="0"/>
-              </a:rPr>
-              <a:t> </a:t>
-            </a:r>
-            <a:r>
-              <a:rPr lang="en-US" sz="1050" b="0" noProof="0" dirty="0">
-                <a:solidFill>
-                  <a:srgbClr val="001080"/>
-                </a:solidFill>
-                <a:effectLst/>
-                <a:latin typeface="Fira Code" panose="020B0809050000020004" pitchFamily="49" charset="0"/>
-              </a:rPr>
-              <a:t>index</a:t>
-            </a:r>
-            <a:r>
-              <a:rPr lang="en-US" sz="1050" b="0" noProof="0" dirty="0">
-                <a:solidFill>
-                  <a:srgbClr val="000000"/>
-                </a:solidFill>
-                <a:effectLst/>
-                <a:latin typeface="Fira Code" panose="020B0809050000020004" pitchFamily="49" charset="0"/>
-              </a:rPr>
-              <a:t>) {</a:t>
-            </a:r>
-          </a:p>
-          <a:p>
-            <a:pPr>
-              <a:lnSpc>
-                <a:spcPct val="113095"/>
-              </a:lnSpc>
-              <a:buNone/>
-            </a:pPr>
-            <a:r>
-              <a:rPr lang="en-US" sz="1050" b="0" noProof="0" dirty="0">
-                <a:solidFill>
-                  <a:srgbClr val="000000"/>
-                </a:solidFill>
-                <a:effectLst/>
-                <a:latin typeface="Fira Code" panose="020B0809050000020004" pitchFamily="49" charset="0"/>
-              </a:rPr>
-              <a:t>    </a:t>
-            </a:r>
-            <a:r>
-              <a:rPr lang="en-US" sz="1050" b="0" noProof="0" dirty="0">
-                <a:solidFill>
-                  <a:srgbClr val="001080"/>
-                </a:solidFill>
-                <a:effectLst/>
-                <a:latin typeface="Fira Code" panose="020B0809050000020004" pitchFamily="49" charset="0"/>
-              </a:rPr>
-              <a:t>matrix</a:t>
-            </a:r>
-            <a:r>
-              <a:rPr lang="en-US" sz="1050" b="0" noProof="0" dirty="0">
-                <a:solidFill>
-                  <a:srgbClr val="000000"/>
-                </a:solidFill>
-                <a:effectLst/>
-                <a:latin typeface="Fira Code" panose="020B0809050000020004" pitchFamily="49" charset="0"/>
-              </a:rPr>
-              <a:t>[</a:t>
-            </a:r>
-            <a:r>
-              <a:rPr lang="en-US" sz="1050" b="0" noProof="0" dirty="0">
-                <a:solidFill>
-                  <a:srgbClr val="001080"/>
-                </a:solidFill>
-                <a:effectLst/>
-                <a:latin typeface="Fira Code" panose="020B0809050000020004" pitchFamily="49" charset="0"/>
-              </a:rPr>
-              <a:t>index</a:t>
-            </a:r>
-            <a:r>
-              <a:rPr lang="en-US" sz="1050" b="0" noProof="0" dirty="0">
-                <a:solidFill>
-                  <a:srgbClr val="000000"/>
-                </a:solidFill>
-                <a:effectLst/>
-                <a:latin typeface="Fira Code" panose="020B0809050000020004" pitchFamily="49" charset="0"/>
-              </a:rPr>
-              <a:t>] = </a:t>
-            </a:r>
-            <a:r>
-              <a:rPr lang="en-US" sz="1050" dirty="0" err="1">
-                <a:solidFill>
-                  <a:srgbClr val="795E26"/>
-                </a:solidFill>
-                <a:latin typeface="Fira Code" panose="020B0809050000020004" pitchFamily="49" charset="0"/>
-              </a:rPr>
-              <a:t>init</a:t>
-            </a:r>
-            <a:r>
-              <a:rPr lang="en-US" sz="1050" dirty="0">
-                <a:solidFill>
-                  <a:srgbClr val="000000"/>
-                </a:solidFill>
-                <a:latin typeface="Fira Code" panose="020B0809050000020004" pitchFamily="49" charset="0"/>
-              </a:rPr>
-              <a:t>(</a:t>
-            </a:r>
-            <a:r>
-              <a:rPr lang="en-US" sz="1050" dirty="0">
-                <a:solidFill>
-                  <a:srgbClr val="001080"/>
-                </a:solidFill>
-                <a:latin typeface="Fira Code" panose="020B0809050000020004" pitchFamily="49" charset="0"/>
-              </a:rPr>
-              <a:t>index</a:t>
-            </a:r>
-            <a:r>
-              <a:rPr lang="en-US" sz="1050" dirty="0">
-                <a:solidFill>
-                  <a:srgbClr val="000000"/>
-                </a:solidFill>
-                <a:latin typeface="Fira Code" panose="020B0809050000020004" pitchFamily="49" charset="0"/>
-              </a:rPr>
-              <a:t>)</a:t>
-            </a:r>
-            <a:r>
-              <a:rPr lang="en-US" sz="1050" b="0" noProof="0" dirty="0">
-                <a:solidFill>
-                  <a:srgbClr val="000000"/>
-                </a:solidFill>
-                <a:effectLst/>
-                <a:latin typeface="Fira Code" panose="020B0809050000020004" pitchFamily="49" charset="0"/>
-              </a:rPr>
-              <a:t>;</a:t>
-            </a:r>
-          </a:p>
-          <a:p>
-            <a:pPr>
-              <a:lnSpc>
-                <a:spcPct val="113095"/>
-              </a:lnSpc>
-              <a:buNone/>
-            </a:pPr>
-            <a:r>
-              <a:rPr lang="en-US" sz="1050" b="0" noProof="0" dirty="0">
-                <a:solidFill>
-                  <a:srgbClr val="000000"/>
-                </a:solidFill>
-                <a:effectLst/>
-                <a:latin typeface="Fira Code" panose="020B0809050000020004" pitchFamily="49" charset="0"/>
-              </a:rPr>
-              <a:t>});</a:t>
-            </a:r>
-          </a:p>
-        </p:txBody>
-      </p:sp>
       <p:sp>
         <p:nvSpPr>
           <p:cNvPr id="17" name="TextBox 16">
@@ -33091,54 +33873,601 @@
           </a:fontRef>
         </p:style>
       </p:cxnSp>
-      <p:sp>
-        <p:nvSpPr>
-          <p:cNvPr id="20" name="Rectangle 19">
-            <a:extLst>
-              <a:ext uri="{FF2B5EF4-FFF2-40B4-BE49-F238E27FC236}">
-                <a16:creationId xmlns:a16="http://schemas.microsoft.com/office/drawing/2014/main" id="{E2DC5447-092D-F842-C746-A6D6C5FE1A74}"/>
-              </a:ext>
-            </a:extLst>
-          </p:cNvPr>
-          <p:cNvSpPr/>
+      <p:grpSp>
+        <p:nvGrpSpPr>
+          <p:cNvPr id="2" name="Group 1">
+            <a:extLst>
+              <a:ext uri="{FF2B5EF4-FFF2-40B4-BE49-F238E27FC236}">
+                <a16:creationId xmlns:a16="http://schemas.microsoft.com/office/drawing/2014/main" id="{4915A9C6-A6D8-702B-6337-4504A626F924}"/>
+              </a:ext>
+            </a:extLst>
+          </p:cNvPr>
+          <p:cNvGrpSpPr/>
           <p:nvPr/>
-        </p:nvSpPr>
-        <p:spPr>
+        </p:nvGrpSpPr>
+        <p:grpSpPr>
           <a:xfrm>
             <a:off x="6833062" y="3108961"/>
             <a:ext cx="4589819" cy="1803862"/>
+            <a:chOff x="6833062" y="3108961"/>
+            <a:chExt cx="4589819" cy="1803862"/>
           </a:xfrm>
-          <a:prstGeom prst="rect">
-            <a:avLst/>
-          </a:prstGeom>
-          <a:noFill/>
-          <a:ln w="3175"/>
-        </p:spPr>
-        <p:style>
-          <a:lnRef idx="2">
-            <a:schemeClr val="accent1">
-              <a:shade val="15000"/>
-            </a:schemeClr>
-          </a:lnRef>
-          <a:fillRef idx="1">
-            <a:schemeClr val="accent1"/>
-          </a:fillRef>
-          <a:effectRef idx="0">
-            <a:schemeClr val="accent1"/>
-          </a:effectRef>
-          <a:fontRef idx="minor">
-            <a:schemeClr val="lt1"/>
-          </a:fontRef>
-        </p:style>
-        <p:txBody>
-          <a:bodyPr rtlCol="0" anchor="ctr"/>
-          <a:lstStyle/>
-          <a:p>
-            <a:pPr algn="ctr"/>
-            <a:endParaRPr lang="en-US"/>
-          </a:p>
-        </p:txBody>
-      </p:sp>
+        </p:grpSpPr>
+        <p:sp>
+          <p:nvSpPr>
+            <p:cNvPr id="13" name="TextBox 12">
+              <a:extLst>
+                <a:ext uri="{FF2B5EF4-FFF2-40B4-BE49-F238E27FC236}">
+                  <a16:creationId xmlns:a16="http://schemas.microsoft.com/office/drawing/2014/main" id="{F1D88C1D-F06F-5ACA-392E-B0B03F940713}"/>
+                </a:ext>
+              </a:extLst>
+            </p:cNvPr>
+            <p:cNvSpPr txBox="1"/>
+            <p:nvPr/>
+          </p:nvSpPr>
+          <p:spPr>
+            <a:xfrm>
+              <a:off x="7079772" y="3214970"/>
+              <a:ext cx="4106291" cy="634148"/>
+            </a:xfrm>
+            <a:prstGeom prst="rect">
+              <a:avLst/>
+            </a:prstGeom>
+            <a:noFill/>
+            <a:ln>
+              <a:solidFill>
+                <a:schemeClr val="tx1"/>
+              </a:solidFill>
+            </a:ln>
+          </p:spPr>
+          <p:txBody>
+            <a:bodyPr wrap="square">
+              <a:spAutoFit/>
+            </a:bodyPr>
+            <a:lstStyle/>
+            <a:p>
+              <a:pPr>
+                <a:lnSpc>
+                  <a:spcPct val="113095"/>
+                </a:lnSpc>
+                <a:buNone/>
+              </a:pPr>
+              <a:r>
+                <a:rPr lang="en-US" sz="1050" b="0" dirty="0" err="1">
+                  <a:solidFill>
+                    <a:srgbClr val="795E26"/>
+                  </a:solidFill>
+                  <a:effectLst/>
+                  <a:latin typeface="Fira Code" panose="020B0809050000020004" pitchFamily="49" charset="0"/>
+                </a:rPr>
+                <a:t>omp_for_each</a:t>
+              </a:r>
+              <a:r>
+                <a:rPr lang="en-US" sz="1050" dirty="0">
+                  <a:solidFill>
+                    <a:srgbClr val="000000"/>
+                  </a:solidFill>
+                  <a:latin typeface="Fira Code" panose="020B0809050000020004" pitchFamily="49" charset="0"/>
+                </a:rPr>
+                <a:t>(</a:t>
+              </a:r>
+              <a:r>
+                <a:rPr lang="en-US" sz="1050" b="0" noProof="0" dirty="0">
+                  <a:solidFill>
+                    <a:srgbClr val="795E26"/>
+                  </a:solidFill>
+                  <a:effectLst/>
+                  <a:latin typeface="Fira Code" panose="020B0809050000020004" pitchFamily="49" charset="0"/>
+                </a:rPr>
+                <a:t>traverser</a:t>
+              </a:r>
+              <a:r>
+                <a:rPr lang="en-US" sz="1050" b="0" noProof="0" dirty="0">
+                  <a:solidFill>
+                    <a:srgbClr val="000000"/>
+                  </a:solidFill>
+                  <a:effectLst/>
+                  <a:latin typeface="Fira Code" panose="020B0809050000020004" pitchFamily="49" charset="0"/>
+                </a:rPr>
+                <a:t>(</a:t>
+              </a:r>
+              <a:r>
+                <a:rPr lang="en-US" sz="1050" b="0" noProof="0" dirty="0">
+                  <a:solidFill>
+                    <a:srgbClr val="001080"/>
+                  </a:solidFill>
+                  <a:effectLst/>
+                  <a:latin typeface="Fira Code" panose="020B0809050000020004" pitchFamily="49" charset="0"/>
+                </a:rPr>
+                <a:t>matrix</a:t>
+              </a:r>
+              <a:r>
+                <a:rPr lang="en-US" sz="1050" b="0" noProof="0" dirty="0">
+                  <a:solidFill>
+                    <a:srgbClr val="000000"/>
+                  </a:solidFill>
+                  <a:effectLst/>
+                  <a:latin typeface="Fira Code" panose="020B0809050000020004" pitchFamily="49" charset="0"/>
+                </a:rPr>
+                <a:t>), [&amp;](</a:t>
+              </a:r>
+              <a:r>
+                <a:rPr lang="en-US" sz="1050" b="0" noProof="0" dirty="0">
+                  <a:solidFill>
+                    <a:srgbClr val="267F99"/>
+                  </a:solidFill>
+                  <a:effectLst/>
+                  <a:latin typeface="Fira Code" panose="020B0809050000020004" pitchFamily="49" charset="0"/>
+                </a:rPr>
+                <a:t>auto</a:t>
+              </a:r>
+              <a:r>
+                <a:rPr lang="en-US" sz="1050" b="0" noProof="0" dirty="0">
+                  <a:solidFill>
+                    <a:srgbClr val="000000"/>
+                  </a:solidFill>
+                  <a:effectLst/>
+                  <a:latin typeface="Fira Code" panose="020B0809050000020004" pitchFamily="49" charset="0"/>
+                </a:rPr>
+                <a:t> </a:t>
+              </a:r>
+              <a:r>
+                <a:rPr lang="en-US" sz="1050" b="0" noProof="0" dirty="0">
+                  <a:solidFill>
+                    <a:srgbClr val="001080"/>
+                  </a:solidFill>
+                  <a:effectLst/>
+                  <a:latin typeface="Fira Code" panose="020B0809050000020004" pitchFamily="49" charset="0"/>
+                </a:rPr>
+                <a:t>index</a:t>
+              </a:r>
+              <a:r>
+                <a:rPr lang="en-US" sz="1050" b="0" noProof="0" dirty="0">
+                  <a:solidFill>
+                    <a:srgbClr val="000000"/>
+                  </a:solidFill>
+                  <a:effectLst/>
+                  <a:latin typeface="Fira Code" panose="020B0809050000020004" pitchFamily="49" charset="0"/>
+                </a:rPr>
+                <a:t>) {</a:t>
+              </a:r>
+            </a:p>
+            <a:p>
+              <a:pPr>
+                <a:lnSpc>
+                  <a:spcPct val="113095"/>
+                </a:lnSpc>
+                <a:buNone/>
+              </a:pPr>
+              <a:r>
+                <a:rPr lang="en-US" sz="1050" b="0" noProof="0" dirty="0">
+                  <a:solidFill>
+                    <a:srgbClr val="000000"/>
+                  </a:solidFill>
+                  <a:effectLst/>
+                  <a:latin typeface="Fira Code" panose="020B0809050000020004" pitchFamily="49" charset="0"/>
+                </a:rPr>
+                <a:t>    </a:t>
+              </a:r>
+              <a:r>
+                <a:rPr lang="en-US" sz="1050" b="0" noProof="0" dirty="0">
+                  <a:solidFill>
+                    <a:srgbClr val="001080"/>
+                  </a:solidFill>
+                  <a:effectLst/>
+                  <a:latin typeface="Fira Code" panose="020B0809050000020004" pitchFamily="49" charset="0"/>
+                </a:rPr>
+                <a:t>matrix</a:t>
+              </a:r>
+              <a:r>
+                <a:rPr lang="en-US" sz="1050" b="0" noProof="0" dirty="0">
+                  <a:solidFill>
+                    <a:srgbClr val="000000"/>
+                  </a:solidFill>
+                  <a:effectLst/>
+                  <a:latin typeface="Fira Code" panose="020B0809050000020004" pitchFamily="49" charset="0"/>
+                </a:rPr>
+                <a:t>[</a:t>
+              </a:r>
+              <a:r>
+                <a:rPr lang="en-US" sz="1050" b="0" noProof="0" dirty="0">
+                  <a:solidFill>
+                    <a:srgbClr val="001080"/>
+                  </a:solidFill>
+                  <a:effectLst/>
+                  <a:latin typeface="Fira Code" panose="020B0809050000020004" pitchFamily="49" charset="0"/>
+                </a:rPr>
+                <a:t>index</a:t>
+              </a:r>
+              <a:r>
+                <a:rPr lang="en-US" sz="1050" b="0" noProof="0" dirty="0">
+                  <a:solidFill>
+                    <a:srgbClr val="000000"/>
+                  </a:solidFill>
+                  <a:effectLst/>
+                  <a:latin typeface="Fira Code" panose="020B0809050000020004" pitchFamily="49" charset="0"/>
+                </a:rPr>
+                <a:t>] = </a:t>
+              </a:r>
+              <a:r>
+                <a:rPr lang="en-US" sz="1050" dirty="0" err="1">
+                  <a:solidFill>
+                    <a:srgbClr val="795E26"/>
+                  </a:solidFill>
+                  <a:latin typeface="Fira Code" panose="020B0809050000020004" pitchFamily="49" charset="0"/>
+                </a:rPr>
+                <a:t>init</a:t>
+              </a:r>
+              <a:r>
+                <a:rPr lang="en-US" sz="1050" dirty="0">
+                  <a:solidFill>
+                    <a:srgbClr val="000000"/>
+                  </a:solidFill>
+                  <a:latin typeface="Fira Code" panose="020B0809050000020004" pitchFamily="49" charset="0"/>
+                </a:rPr>
+                <a:t>(</a:t>
+              </a:r>
+              <a:r>
+                <a:rPr lang="en-US" sz="1050" dirty="0">
+                  <a:solidFill>
+                    <a:srgbClr val="001080"/>
+                  </a:solidFill>
+                  <a:latin typeface="Fira Code" panose="020B0809050000020004" pitchFamily="49" charset="0"/>
+                </a:rPr>
+                <a:t>index</a:t>
+              </a:r>
+              <a:r>
+                <a:rPr lang="en-US" sz="1050" dirty="0">
+                  <a:solidFill>
+                    <a:srgbClr val="000000"/>
+                  </a:solidFill>
+                  <a:latin typeface="Fira Code" panose="020B0809050000020004" pitchFamily="49" charset="0"/>
+                </a:rPr>
+                <a:t>)</a:t>
+              </a:r>
+              <a:r>
+                <a:rPr lang="en-US" sz="1050" b="0" noProof="0" dirty="0">
+                  <a:solidFill>
+                    <a:srgbClr val="000000"/>
+                  </a:solidFill>
+                  <a:effectLst/>
+                  <a:latin typeface="Fira Code" panose="020B0809050000020004" pitchFamily="49" charset="0"/>
+                </a:rPr>
+                <a:t>;</a:t>
+              </a:r>
+            </a:p>
+            <a:p>
+              <a:pPr>
+                <a:lnSpc>
+                  <a:spcPct val="113095"/>
+                </a:lnSpc>
+                <a:buNone/>
+              </a:pPr>
+              <a:r>
+                <a:rPr lang="en-US" sz="1050" b="0" noProof="0" dirty="0">
+                  <a:solidFill>
+                    <a:srgbClr val="000000"/>
+                  </a:solidFill>
+                  <a:effectLst/>
+                  <a:latin typeface="Fira Code" panose="020B0809050000020004" pitchFamily="49" charset="0"/>
+                </a:rPr>
+                <a:t>});</a:t>
+              </a:r>
+            </a:p>
+          </p:txBody>
+        </p:sp>
+        <p:sp>
+          <p:nvSpPr>
+            <p:cNvPr id="15" name="TextBox 14">
+              <a:extLst>
+                <a:ext uri="{FF2B5EF4-FFF2-40B4-BE49-F238E27FC236}">
+                  <a16:creationId xmlns:a16="http://schemas.microsoft.com/office/drawing/2014/main" id="{FC04F895-4DAA-A566-47D4-C9E4F4C00E4B}"/>
+                </a:ext>
+              </a:extLst>
+            </p:cNvPr>
+            <p:cNvSpPr txBox="1"/>
+            <p:nvPr/>
+          </p:nvSpPr>
+          <p:spPr>
+            <a:xfrm>
+              <a:off x="7079772" y="4182753"/>
+              <a:ext cx="4106291" cy="634148"/>
+            </a:xfrm>
+            <a:prstGeom prst="rect">
+              <a:avLst/>
+            </a:prstGeom>
+            <a:noFill/>
+            <a:ln>
+              <a:solidFill>
+                <a:schemeClr val="tx1"/>
+              </a:solidFill>
+            </a:ln>
+          </p:spPr>
+          <p:txBody>
+            <a:bodyPr wrap="square">
+              <a:spAutoFit/>
+            </a:bodyPr>
+            <a:lstStyle/>
+            <a:p>
+              <a:pPr>
+                <a:lnSpc>
+                  <a:spcPct val="113095"/>
+                </a:lnSpc>
+                <a:buNone/>
+              </a:pPr>
+              <a:r>
+                <a:rPr lang="en-US" sz="1050" b="0" dirty="0" err="1">
+                  <a:solidFill>
+                    <a:srgbClr val="795E26"/>
+                  </a:solidFill>
+                  <a:effectLst/>
+                  <a:latin typeface="Fira Code" panose="020B0809050000020004" pitchFamily="49" charset="0"/>
+                </a:rPr>
+                <a:t>tbb_for_each</a:t>
+              </a:r>
+              <a:r>
+                <a:rPr lang="en-US" sz="1050" dirty="0">
+                  <a:solidFill>
+                    <a:srgbClr val="000000"/>
+                  </a:solidFill>
+                  <a:latin typeface="Fira Code" panose="020B0809050000020004" pitchFamily="49" charset="0"/>
+                </a:rPr>
+                <a:t>(</a:t>
+              </a:r>
+              <a:r>
+                <a:rPr lang="en-US" sz="1050" b="0" noProof="0" dirty="0">
+                  <a:solidFill>
+                    <a:srgbClr val="795E26"/>
+                  </a:solidFill>
+                  <a:effectLst/>
+                  <a:latin typeface="Fira Code" panose="020B0809050000020004" pitchFamily="49" charset="0"/>
+                </a:rPr>
+                <a:t>traverser</a:t>
+              </a:r>
+              <a:r>
+                <a:rPr lang="en-US" sz="1050" b="0" noProof="0" dirty="0">
+                  <a:solidFill>
+                    <a:srgbClr val="000000"/>
+                  </a:solidFill>
+                  <a:effectLst/>
+                  <a:latin typeface="Fira Code" panose="020B0809050000020004" pitchFamily="49" charset="0"/>
+                </a:rPr>
+                <a:t>(</a:t>
+              </a:r>
+              <a:r>
+                <a:rPr lang="en-US" sz="1050" b="0" noProof="0" dirty="0">
+                  <a:solidFill>
+                    <a:srgbClr val="001080"/>
+                  </a:solidFill>
+                  <a:effectLst/>
+                  <a:latin typeface="Fira Code" panose="020B0809050000020004" pitchFamily="49" charset="0"/>
+                </a:rPr>
+                <a:t>matrix</a:t>
+              </a:r>
+              <a:r>
+                <a:rPr lang="en-US" sz="1050" b="0" noProof="0" dirty="0">
+                  <a:solidFill>
+                    <a:srgbClr val="000000"/>
+                  </a:solidFill>
+                  <a:effectLst/>
+                  <a:latin typeface="Fira Code" panose="020B0809050000020004" pitchFamily="49" charset="0"/>
+                </a:rPr>
+                <a:t>), [&amp;](</a:t>
+              </a:r>
+              <a:r>
+                <a:rPr lang="en-US" sz="1050" b="0" noProof="0" dirty="0">
+                  <a:solidFill>
+                    <a:srgbClr val="267F99"/>
+                  </a:solidFill>
+                  <a:effectLst/>
+                  <a:latin typeface="Fira Code" panose="020B0809050000020004" pitchFamily="49" charset="0"/>
+                </a:rPr>
+                <a:t>auto</a:t>
+              </a:r>
+              <a:r>
+                <a:rPr lang="en-US" sz="1050" b="0" noProof="0" dirty="0">
+                  <a:solidFill>
+                    <a:srgbClr val="000000"/>
+                  </a:solidFill>
+                  <a:effectLst/>
+                  <a:latin typeface="Fira Code" panose="020B0809050000020004" pitchFamily="49" charset="0"/>
+                </a:rPr>
+                <a:t> </a:t>
+              </a:r>
+              <a:r>
+                <a:rPr lang="en-US" sz="1050" b="0" noProof="0" dirty="0">
+                  <a:solidFill>
+                    <a:srgbClr val="001080"/>
+                  </a:solidFill>
+                  <a:effectLst/>
+                  <a:latin typeface="Fira Code" panose="020B0809050000020004" pitchFamily="49" charset="0"/>
+                </a:rPr>
+                <a:t>index</a:t>
+              </a:r>
+              <a:r>
+                <a:rPr lang="en-US" sz="1050" b="0" noProof="0" dirty="0">
+                  <a:solidFill>
+                    <a:srgbClr val="000000"/>
+                  </a:solidFill>
+                  <a:effectLst/>
+                  <a:latin typeface="Fira Code" panose="020B0809050000020004" pitchFamily="49" charset="0"/>
+                </a:rPr>
+                <a:t>) {</a:t>
+              </a:r>
+            </a:p>
+            <a:p>
+              <a:pPr>
+                <a:lnSpc>
+                  <a:spcPct val="113095"/>
+                </a:lnSpc>
+                <a:buNone/>
+              </a:pPr>
+              <a:r>
+                <a:rPr lang="en-US" sz="1050" b="0" noProof="0" dirty="0">
+                  <a:solidFill>
+                    <a:srgbClr val="000000"/>
+                  </a:solidFill>
+                  <a:effectLst/>
+                  <a:latin typeface="Fira Code" panose="020B0809050000020004" pitchFamily="49" charset="0"/>
+                </a:rPr>
+                <a:t>    </a:t>
+              </a:r>
+              <a:r>
+                <a:rPr lang="en-US" sz="1050" b="0" noProof="0" dirty="0">
+                  <a:solidFill>
+                    <a:srgbClr val="001080"/>
+                  </a:solidFill>
+                  <a:effectLst/>
+                  <a:latin typeface="Fira Code" panose="020B0809050000020004" pitchFamily="49" charset="0"/>
+                </a:rPr>
+                <a:t>matrix</a:t>
+              </a:r>
+              <a:r>
+                <a:rPr lang="en-US" sz="1050" b="0" noProof="0" dirty="0">
+                  <a:solidFill>
+                    <a:srgbClr val="000000"/>
+                  </a:solidFill>
+                  <a:effectLst/>
+                  <a:latin typeface="Fira Code" panose="020B0809050000020004" pitchFamily="49" charset="0"/>
+                </a:rPr>
+                <a:t>[</a:t>
+              </a:r>
+              <a:r>
+                <a:rPr lang="en-US" sz="1050" b="0" noProof="0" dirty="0">
+                  <a:solidFill>
+                    <a:srgbClr val="001080"/>
+                  </a:solidFill>
+                  <a:effectLst/>
+                  <a:latin typeface="Fira Code" panose="020B0809050000020004" pitchFamily="49" charset="0"/>
+                </a:rPr>
+                <a:t>index</a:t>
+              </a:r>
+              <a:r>
+                <a:rPr lang="en-US" sz="1050" b="0" noProof="0" dirty="0">
+                  <a:solidFill>
+                    <a:srgbClr val="000000"/>
+                  </a:solidFill>
+                  <a:effectLst/>
+                  <a:latin typeface="Fira Code" panose="020B0809050000020004" pitchFamily="49" charset="0"/>
+                </a:rPr>
+                <a:t>] = </a:t>
+              </a:r>
+              <a:r>
+                <a:rPr lang="en-US" sz="1050" dirty="0" err="1">
+                  <a:solidFill>
+                    <a:srgbClr val="795E26"/>
+                  </a:solidFill>
+                  <a:latin typeface="Fira Code" panose="020B0809050000020004" pitchFamily="49" charset="0"/>
+                </a:rPr>
+                <a:t>init</a:t>
+              </a:r>
+              <a:r>
+                <a:rPr lang="en-US" sz="1050" dirty="0">
+                  <a:solidFill>
+                    <a:srgbClr val="000000"/>
+                  </a:solidFill>
+                  <a:latin typeface="Fira Code" panose="020B0809050000020004" pitchFamily="49" charset="0"/>
+                </a:rPr>
+                <a:t>(</a:t>
+              </a:r>
+              <a:r>
+                <a:rPr lang="en-US" sz="1050" dirty="0">
+                  <a:solidFill>
+                    <a:srgbClr val="001080"/>
+                  </a:solidFill>
+                  <a:latin typeface="Fira Code" panose="020B0809050000020004" pitchFamily="49" charset="0"/>
+                </a:rPr>
+                <a:t>index</a:t>
+              </a:r>
+              <a:r>
+                <a:rPr lang="en-US" sz="1050" dirty="0">
+                  <a:solidFill>
+                    <a:srgbClr val="000000"/>
+                  </a:solidFill>
+                  <a:latin typeface="Fira Code" panose="020B0809050000020004" pitchFamily="49" charset="0"/>
+                </a:rPr>
+                <a:t>)</a:t>
+              </a:r>
+              <a:r>
+                <a:rPr lang="en-US" sz="1050" b="0" noProof="0" dirty="0">
+                  <a:solidFill>
+                    <a:srgbClr val="000000"/>
+                  </a:solidFill>
+                  <a:effectLst/>
+                  <a:latin typeface="Fira Code" panose="020B0809050000020004" pitchFamily="49" charset="0"/>
+                </a:rPr>
+                <a:t>;</a:t>
+              </a:r>
+            </a:p>
+            <a:p>
+              <a:pPr>
+                <a:lnSpc>
+                  <a:spcPct val="113095"/>
+                </a:lnSpc>
+                <a:buNone/>
+              </a:pPr>
+              <a:r>
+                <a:rPr lang="en-US" sz="1050" b="0" noProof="0" dirty="0">
+                  <a:solidFill>
+                    <a:srgbClr val="000000"/>
+                  </a:solidFill>
+                  <a:effectLst/>
+                  <a:latin typeface="Fira Code" panose="020B0809050000020004" pitchFamily="49" charset="0"/>
+                </a:rPr>
+                <a:t>});</a:t>
+              </a:r>
+            </a:p>
+          </p:txBody>
+        </p:sp>
+        <p:sp>
+          <p:nvSpPr>
+            <p:cNvPr id="20" name="Rectangle 19">
+              <a:extLst>
+                <a:ext uri="{FF2B5EF4-FFF2-40B4-BE49-F238E27FC236}">
+                  <a16:creationId xmlns:a16="http://schemas.microsoft.com/office/drawing/2014/main" id="{E2DC5447-092D-F842-C746-A6D6C5FE1A74}"/>
+                </a:ext>
+              </a:extLst>
+            </p:cNvPr>
+            <p:cNvSpPr/>
+            <p:nvPr/>
+          </p:nvSpPr>
+          <p:spPr>
+            <a:xfrm>
+              <a:off x="6833062" y="3108961"/>
+              <a:ext cx="4589819" cy="1803862"/>
+            </a:xfrm>
+            <a:prstGeom prst="rect">
+              <a:avLst/>
+            </a:prstGeom>
+            <a:noFill/>
+            <a:ln w="3175"/>
+          </p:spPr>
+          <p:style>
+            <a:lnRef idx="2">
+              <a:schemeClr val="accent1">
+                <a:shade val="15000"/>
+              </a:schemeClr>
+            </a:lnRef>
+            <a:fillRef idx="1">
+              <a:schemeClr val="accent1"/>
+            </a:fillRef>
+            <a:effectRef idx="0">
+              <a:schemeClr val="accent1"/>
+            </a:effectRef>
+            <a:fontRef idx="minor">
+              <a:schemeClr val="lt1"/>
+            </a:fontRef>
+          </p:style>
+          <p:txBody>
+            <a:bodyPr rtlCol="0" anchor="ctr"/>
+            <a:lstStyle/>
+            <a:p>
+              <a:pPr algn="ctr"/>
+              <a:endParaRPr lang="en-US"/>
+            </a:p>
+          </p:txBody>
+        </p:sp>
+      </p:grpSp>
       <p:sp>
         <p:nvSpPr>
           <p:cNvPr id="26" name="Date Placeholder 25">
@@ -33162,7 +34491,7 @@
           <a:p>
             <a:fld id="{8BB690F1-35CC-4B34-B898-A35702C2DAD5}" type="datetime1">
               <a:rPr lang="en-US" smtClean="0"/>
-              <a:t>8/26/2026</a:t>
+              <a:t>8/27/2026</a:t>
             </a:fld>
             <a:endParaRPr lang="en-US"/>
           </a:p>
@@ -33213,6 +34542,14 @@
 <file path=ppt/slides/slide9.xml><?xml version="1.0" encoding="utf-8"?>
 <p:sld xmlns:a="http://schemas.openxmlformats.org/drawingml/2006/main" xmlns:r="http://schemas.openxmlformats.org/officeDocument/2006/relationships" xmlns:p="http://schemas.openxmlformats.org/presentationml/2006/main">
   <p:cSld>
+    <p:bg>
+      <p:bgPr>
+        <a:solidFill>
+          <a:srgbClr val="FF0000"/>
+        </a:solidFill>
+        <a:effectLst/>
+      </p:bgPr>
+    </p:bg>
     <p:spTree>
       <p:nvGrpSpPr>
         <p:cNvPr id="1" name=""/>
@@ -33589,7 +34926,7 @@
           <a:p>
             <a:fld id="{B7D82220-9CE2-4BC9-B6C9-7A7531EEF273}" type="datetime1">
               <a:rPr lang="en-US" smtClean="0"/>
-              <a:t>8/26/2026</a:t>
+              <a:t>8/27/2026</a:t>
             </a:fld>
             <a:endParaRPr lang="en-US"/>
           </a:p>

--- a/slides/Optimizing Memory Layouts and Traversal Orders in High-Performance Computing.pptx
+++ b/slides/Optimizing Memory Layouts and Traversal Orders in High-Performance Computing.pptx
@@ -13531,8 +13531,8 @@
         </p:nvSpPr>
         <p:spPr>
           <a:xfrm>
-            <a:off x="706581" y="3732911"/>
-            <a:ext cx="4686522" cy="2275495"/>
+            <a:off x="167523" y="3732911"/>
+            <a:ext cx="5225579" cy="2587183"/>
           </a:xfrm>
           <a:prstGeom prst="rect">
             <a:avLst/>
@@ -13557,7 +13557,7 @@
               <a:buNone/>
             </a:pPr>
             <a:r>
-              <a:rPr lang="en-US" sz="1400" dirty="0">
+              <a:rPr lang="en-US" sz="1600" dirty="0">
                 <a:solidFill>
                   <a:srgbClr val="AF00DB"/>
                 </a:solidFill>
@@ -13567,7 +13567,7 @@
               <a:t>if</a:t>
             </a:r>
             <a:r>
-              <a:rPr lang="en-US" sz="1400" dirty="0">
+              <a:rPr lang="en-US" sz="1600" dirty="0">
                 <a:solidFill>
                   <a:srgbClr val="000000"/>
                 </a:solidFill>
@@ -13577,7 +13577,7 @@
               <a:t> (</a:t>
             </a:r>
             <a:r>
-              <a:rPr lang="en-US" sz="1400" dirty="0">
+              <a:rPr lang="en-US" sz="1600" dirty="0">
                 <a:solidFill>
                   <a:srgbClr val="001080"/>
                 </a:solidFill>
@@ -13587,7 +13587,7 @@
               <a:t>current</a:t>
             </a:r>
             <a:r>
-              <a:rPr lang="en-US" sz="1400" dirty="0">
+              <a:rPr lang="en-US" sz="1600" dirty="0">
                 <a:solidFill>
                   <a:srgbClr val="000000"/>
                 </a:solidFill>
@@ -13597,7 +13597,7 @@
               <a:t> == </a:t>
             </a:r>
             <a:r>
-              <a:rPr lang="en-US" sz="1400" dirty="0">
+              <a:rPr lang="en-US" sz="1600" dirty="0">
                 <a:solidFill>
                   <a:srgbClr val="0070C1"/>
                 </a:solidFill>
@@ -13607,7 +13607,7 @@
               <a:t>ALIVE</a:t>
             </a:r>
             <a:r>
-              <a:rPr lang="en-US" sz="1400" dirty="0">
+              <a:rPr lang="en-US" sz="1600" dirty="0">
                 <a:solidFill>
                   <a:srgbClr val="000000"/>
                 </a:solidFill>
@@ -13625,7 +13625,7 @@
               <a:buNone/>
             </a:pPr>
             <a:r>
-              <a:rPr lang="en-US" sz="1400" b="0" dirty="0">
+              <a:rPr lang="en-US" sz="1600" b="0" dirty="0">
                 <a:solidFill>
                   <a:srgbClr val="000000"/>
                 </a:solidFill>
@@ -13635,7 +13635,7 @@
               <a:t>    </a:t>
             </a:r>
             <a:r>
-              <a:rPr lang="en-US" sz="1400" b="0" dirty="0">
+              <a:rPr lang="en-US" sz="1600" b="0" dirty="0">
                 <a:solidFill>
                   <a:srgbClr val="AF00DB"/>
                 </a:solidFill>
@@ -13645,7 +13645,7 @@
               <a:t>if</a:t>
             </a:r>
             <a:r>
-              <a:rPr lang="en-US" sz="1400" b="0" dirty="0">
+              <a:rPr lang="en-US" sz="1600" b="0" dirty="0">
                 <a:solidFill>
                   <a:srgbClr val="000000"/>
                 </a:solidFill>
@@ -13655,7 +13655,7 @@
               <a:t> (</a:t>
             </a:r>
             <a:r>
-              <a:rPr lang="en-US" sz="1400" b="0" dirty="0">
+              <a:rPr lang="en-US" sz="1600" b="0" dirty="0">
                 <a:solidFill>
                   <a:srgbClr val="001080"/>
                 </a:solidFill>
@@ -13665,7 +13665,7 @@
               <a:t>neighbors</a:t>
             </a:r>
             <a:r>
-              <a:rPr lang="en-US" sz="1400" b="0" dirty="0">
+              <a:rPr lang="en-US" sz="1600" b="0" dirty="0">
                 <a:solidFill>
                   <a:srgbClr val="000000"/>
                 </a:solidFill>
@@ -13675,7 +13675,7 @@
               <a:t> == </a:t>
             </a:r>
             <a:r>
-              <a:rPr lang="en-US" sz="1400" b="0" dirty="0">
+              <a:rPr lang="en-US" sz="1600" b="0" dirty="0">
                 <a:solidFill>
                   <a:srgbClr val="098658"/>
                 </a:solidFill>
@@ -13685,7 +13685,7 @@
               <a:t>2</a:t>
             </a:r>
             <a:r>
-              <a:rPr lang="en-US" sz="1400" b="0" dirty="0">
+              <a:rPr lang="en-US" sz="1600" b="0" dirty="0">
                 <a:solidFill>
                   <a:srgbClr val="000000"/>
                 </a:solidFill>
@@ -13695,7 +13695,7 @@
               <a:t> || </a:t>
             </a:r>
             <a:r>
-              <a:rPr lang="en-US" sz="1400" b="0" dirty="0">
+              <a:rPr lang="en-US" sz="1600" b="0" dirty="0">
                 <a:solidFill>
                   <a:srgbClr val="001080"/>
                 </a:solidFill>
@@ -13705,7 +13705,7 @@
               <a:t>neighbors</a:t>
             </a:r>
             <a:r>
-              <a:rPr lang="en-US" sz="1400" b="0" dirty="0">
+              <a:rPr lang="en-US" sz="1600" b="0" dirty="0">
                 <a:solidFill>
                   <a:srgbClr val="000000"/>
                 </a:solidFill>
@@ -13715,7 +13715,7 @@
               <a:t> == </a:t>
             </a:r>
             <a:r>
-              <a:rPr lang="en-US" sz="1400" b="0" dirty="0">
+              <a:rPr lang="en-US" sz="1600" b="0" dirty="0">
                 <a:solidFill>
                   <a:srgbClr val="098658"/>
                 </a:solidFill>
@@ -13725,7 +13725,7 @@
               <a:t>3</a:t>
             </a:r>
             <a:r>
-              <a:rPr lang="en-US" sz="1400" b="0" dirty="0">
+              <a:rPr lang="en-US" sz="1600" b="0" dirty="0">
                 <a:solidFill>
                   <a:srgbClr val="000000"/>
                 </a:solidFill>
@@ -13743,7 +13743,7 @@
               <a:buNone/>
             </a:pPr>
             <a:r>
-              <a:rPr lang="en-US" sz="1400" b="0" dirty="0">
+              <a:rPr lang="en-US" sz="1600" b="0" dirty="0">
                 <a:solidFill>
                   <a:srgbClr val="000000"/>
                 </a:solidFill>
@@ -13753,7 +13753,7 @@
               <a:t>        </a:t>
             </a:r>
             <a:r>
-              <a:rPr lang="en-US" sz="1400" b="0" dirty="0">
+              <a:rPr lang="en-US" sz="1600" b="0" dirty="0">
                 <a:solidFill>
                   <a:srgbClr val="001080"/>
                 </a:solidFill>
@@ -13763,7 +13763,7 @@
               <a:t>next </a:t>
             </a:r>
             <a:r>
-              <a:rPr lang="en-US" sz="1400" b="0" dirty="0">
+              <a:rPr lang="en-US" sz="1600" b="0" dirty="0">
                 <a:solidFill>
                   <a:srgbClr val="000000"/>
                 </a:solidFill>
@@ -13773,7 +13773,7 @@
               <a:t>= </a:t>
             </a:r>
             <a:r>
-              <a:rPr lang="en-US" sz="1400" b="0" dirty="0">
+              <a:rPr lang="en-US" sz="1600" b="0" dirty="0">
                 <a:solidFill>
                   <a:srgbClr val="0070C1"/>
                 </a:solidFill>
@@ -13783,7 +13783,7 @@
               <a:t>ALIVE</a:t>
             </a:r>
             <a:r>
-              <a:rPr lang="en-US" sz="1400" b="0" dirty="0">
+              <a:rPr lang="en-US" sz="1600" b="0" dirty="0">
                 <a:solidFill>
                   <a:srgbClr val="000000"/>
                 </a:solidFill>
@@ -13801,7 +13801,7 @@
               <a:buNone/>
             </a:pPr>
             <a:r>
-              <a:rPr lang="en-US" sz="1400" b="0" dirty="0">
+              <a:rPr lang="en-US" sz="1600" b="0" dirty="0">
                 <a:solidFill>
                   <a:srgbClr val="000000"/>
                 </a:solidFill>
@@ -13811,7 +13811,7 @@
               <a:t>    </a:t>
             </a:r>
             <a:r>
-              <a:rPr lang="en-US" sz="1400" b="0" dirty="0">
+              <a:rPr lang="en-US" sz="1600" b="0" dirty="0">
                 <a:solidFill>
                   <a:srgbClr val="AF00DB"/>
                 </a:solidFill>
@@ -13820,7 +13820,7 @@
               </a:rPr>
               <a:t>else</a:t>
             </a:r>
-            <a:endParaRPr lang="en-US" sz="1400" b="0" dirty="0">
+            <a:endParaRPr lang="en-US" sz="1600" b="0" dirty="0">
               <a:solidFill>
                 <a:srgbClr val="000000"/>
               </a:solidFill>
@@ -13836,7 +13836,7 @@
               <a:buNone/>
             </a:pPr>
             <a:r>
-              <a:rPr lang="en-US" sz="1400" b="0" dirty="0">
+              <a:rPr lang="en-US" sz="1600" b="0" dirty="0">
                 <a:solidFill>
                   <a:srgbClr val="000000"/>
                 </a:solidFill>
@@ -13846,7 +13846,7 @@
               <a:t>        </a:t>
             </a:r>
             <a:r>
-              <a:rPr lang="en-US" sz="1400" b="0" dirty="0">
+              <a:rPr lang="en-US" sz="1600" b="0" dirty="0">
                 <a:solidFill>
                   <a:srgbClr val="001080"/>
                 </a:solidFill>
@@ -13856,7 +13856,7 @@
               <a:t>next</a:t>
             </a:r>
             <a:r>
-              <a:rPr lang="en-US" sz="1400" b="0" dirty="0">
+              <a:rPr lang="en-US" sz="1600" b="0" dirty="0">
                 <a:solidFill>
                   <a:srgbClr val="000000"/>
                 </a:solidFill>
@@ -13866,7 +13866,7 @@
               <a:t> = </a:t>
             </a:r>
             <a:r>
-              <a:rPr lang="en-US" sz="1400" b="0" dirty="0">
+              <a:rPr lang="en-US" sz="1600" b="0" dirty="0">
                 <a:solidFill>
                   <a:srgbClr val="0070C1"/>
                 </a:solidFill>
@@ -13876,7 +13876,7 @@
               <a:t>DEAD</a:t>
             </a:r>
             <a:r>
-              <a:rPr lang="en-US" sz="1400" b="0" dirty="0">
+              <a:rPr lang="en-US" sz="1600" b="0" dirty="0">
                 <a:solidFill>
                   <a:srgbClr val="000000"/>
                 </a:solidFill>
@@ -13894,7 +13894,7 @@
               <a:buNone/>
             </a:pPr>
             <a:r>
-              <a:rPr lang="en-US" sz="1400" b="0" dirty="0">
+              <a:rPr lang="en-US" sz="1600" b="0" dirty="0">
                 <a:solidFill>
                   <a:srgbClr val="000000"/>
                 </a:solidFill>
@@ -13904,7 +13904,7 @@
               <a:t>} </a:t>
             </a:r>
             <a:r>
-              <a:rPr lang="en-US" sz="1400" b="0" dirty="0">
+              <a:rPr lang="en-US" sz="1600" b="0" dirty="0">
                 <a:solidFill>
                   <a:srgbClr val="AF00DB"/>
                 </a:solidFill>
@@ -13914,7 +13914,7 @@
               <a:t>else</a:t>
             </a:r>
             <a:r>
-              <a:rPr lang="en-US" sz="1400" b="0" dirty="0">
+              <a:rPr lang="en-US" sz="1600" b="0" dirty="0">
                 <a:solidFill>
                   <a:srgbClr val="000000"/>
                 </a:solidFill>
@@ -13924,7 +13924,7 @@
               <a:t> </a:t>
             </a:r>
             <a:r>
-              <a:rPr lang="en-US" sz="1400" b="0" dirty="0">
+              <a:rPr lang="en-US" sz="1600" b="0" dirty="0">
                 <a:solidFill>
                   <a:srgbClr val="AF00DB"/>
                 </a:solidFill>
@@ -13934,7 +13934,7 @@
               <a:t>if</a:t>
             </a:r>
             <a:r>
-              <a:rPr lang="en-US" sz="1400" b="0" dirty="0">
+              <a:rPr lang="en-US" sz="1600" b="0" dirty="0">
                 <a:solidFill>
                   <a:srgbClr val="000000"/>
                 </a:solidFill>
@@ -13944,7 +13944,7 @@
               <a:t> (</a:t>
             </a:r>
             <a:r>
-              <a:rPr lang="en-US" sz="1400" b="0" dirty="0">
+              <a:rPr lang="en-US" sz="1600" b="0" dirty="0">
                 <a:solidFill>
                   <a:srgbClr val="001080"/>
                 </a:solidFill>
@@ -13954,7 +13954,7 @@
               <a:t>neighbors</a:t>
             </a:r>
             <a:r>
-              <a:rPr lang="en-US" sz="1400" b="0" dirty="0">
+              <a:rPr lang="en-US" sz="1600" b="0" dirty="0">
                 <a:solidFill>
                   <a:srgbClr val="000000"/>
                 </a:solidFill>
@@ -13964,7 +13964,7 @@
               <a:t> == </a:t>
             </a:r>
             <a:r>
-              <a:rPr lang="en-US" sz="1400" b="0" dirty="0">
+              <a:rPr lang="en-US" sz="1600" b="0" dirty="0">
                 <a:solidFill>
                   <a:srgbClr val="098658"/>
                 </a:solidFill>
@@ -13974,7 +13974,7 @@
               <a:t>3</a:t>
             </a:r>
             <a:r>
-              <a:rPr lang="en-US" sz="1400" b="0" dirty="0">
+              <a:rPr lang="en-US" sz="1600" b="0" dirty="0">
                 <a:solidFill>
                   <a:srgbClr val="000000"/>
                 </a:solidFill>
@@ -13992,7 +13992,7 @@
               <a:buNone/>
             </a:pPr>
             <a:r>
-              <a:rPr lang="en-US" sz="1400" b="0" dirty="0">
+              <a:rPr lang="en-US" sz="1600" b="0" dirty="0">
                 <a:solidFill>
                   <a:srgbClr val="000000"/>
                 </a:solidFill>
@@ -14002,7 +14002,7 @@
               <a:t>    </a:t>
             </a:r>
             <a:r>
-              <a:rPr lang="en-US" sz="1400" b="0" dirty="0">
+              <a:rPr lang="en-US" sz="1600" b="0" dirty="0">
                 <a:solidFill>
                   <a:srgbClr val="001080"/>
                 </a:solidFill>
@@ -14012,7 +14012,7 @@
               <a:t>next</a:t>
             </a:r>
             <a:r>
-              <a:rPr lang="en-US" sz="1400" b="0" dirty="0">
+              <a:rPr lang="en-US" sz="1600" b="0" dirty="0">
                 <a:solidFill>
                   <a:srgbClr val="000000"/>
                 </a:solidFill>
@@ -14022,7 +14022,7 @@
               <a:t> = </a:t>
             </a:r>
             <a:r>
-              <a:rPr lang="en-US" sz="1400" b="0" dirty="0">
+              <a:rPr lang="en-US" sz="1600" b="0" dirty="0">
                 <a:solidFill>
                   <a:srgbClr val="0070C1"/>
                 </a:solidFill>
@@ -14032,7 +14032,7 @@
               <a:t>ALIVE</a:t>
             </a:r>
             <a:r>
-              <a:rPr lang="en-US" sz="1400" b="0" dirty="0">
+              <a:rPr lang="en-US" sz="1600" b="0" dirty="0">
                 <a:solidFill>
                   <a:srgbClr val="000000"/>
                 </a:solidFill>
@@ -14050,7 +14050,7 @@
               <a:buNone/>
             </a:pPr>
             <a:r>
-              <a:rPr lang="en-US" sz="1400" b="0" dirty="0">
+              <a:rPr lang="en-US" sz="1600" b="0" dirty="0">
                 <a:solidFill>
                   <a:srgbClr val="AF00DB"/>
                 </a:solidFill>
@@ -14059,7 +14059,7 @@
               </a:rPr>
               <a:t>else</a:t>
             </a:r>
-            <a:endParaRPr lang="en-US" sz="1400" b="0" dirty="0">
+            <a:endParaRPr lang="en-US" sz="1600" b="0" dirty="0">
               <a:solidFill>
                 <a:srgbClr val="000000"/>
               </a:solidFill>
@@ -14075,7 +14075,7 @@
               <a:buNone/>
             </a:pPr>
             <a:r>
-              <a:rPr lang="en-US" sz="1400" b="0" dirty="0">
+              <a:rPr lang="en-US" sz="1600" b="0" dirty="0">
                 <a:solidFill>
                   <a:srgbClr val="000000"/>
                 </a:solidFill>
@@ -14085,7 +14085,7 @@
               <a:t>    </a:t>
             </a:r>
             <a:r>
-              <a:rPr lang="en-US" sz="1400" b="0" dirty="0">
+              <a:rPr lang="en-US" sz="1600" b="0" dirty="0">
                 <a:solidFill>
                   <a:srgbClr val="001080"/>
                 </a:solidFill>
@@ -14095,7 +14095,7 @@
               <a:t>next</a:t>
             </a:r>
             <a:r>
-              <a:rPr lang="en-US" sz="1400" b="0" dirty="0">
+              <a:rPr lang="en-US" sz="1600" b="0" dirty="0">
                 <a:solidFill>
                   <a:srgbClr val="000000"/>
                 </a:solidFill>
@@ -14105,7 +14105,7 @@
               <a:t> = </a:t>
             </a:r>
             <a:r>
-              <a:rPr lang="en-US" sz="1400" b="0" dirty="0">
+              <a:rPr lang="en-US" sz="1600" b="0" dirty="0">
                 <a:solidFill>
                   <a:srgbClr val="0070C1"/>
                 </a:solidFill>
@@ -14115,7 +14115,7 @@
               <a:t>DEAD</a:t>
             </a:r>
             <a:r>
-              <a:rPr lang="en-US" sz="1400" b="0" dirty="0">
+              <a:rPr lang="en-US" sz="1600" b="0" dirty="0">
                 <a:solidFill>
                   <a:srgbClr val="000000"/>
                 </a:solidFill>
@@ -14303,8 +14303,8 @@
         </p:nvSpPr>
         <p:spPr>
           <a:xfrm>
-            <a:off x="6332220" y="4098107"/>
-            <a:ext cx="5513417" cy="1545103"/>
+            <a:off x="6040927" y="4150236"/>
+            <a:ext cx="6096000" cy="1752531"/>
           </a:xfrm>
           <a:prstGeom prst="rect">
             <a:avLst/>
@@ -14329,7 +14329,7 @@
               <a:buNone/>
             </a:pPr>
             <a:r>
-              <a:rPr lang="en-US" sz="1400" b="0" dirty="0">
+              <a:rPr lang="en-US" sz="1600" b="0" dirty="0">
                 <a:solidFill>
                   <a:srgbClr val="AF00DB"/>
                 </a:solidFill>
@@ -14339,7 +14339,7 @@
               <a:t>using</a:t>
             </a:r>
             <a:r>
-              <a:rPr lang="en-US" sz="1400" b="0" dirty="0">
+              <a:rPr lang="en-US" sz="1600" b="0" dirty="0">
                 <a:solidFill>
                   <a:srgbClr val="000000"/>
                 </a:solidFill>
@@ -14349,7 +14349,7 @@
               <a:t> </a:t>
             </a:r>
             <a:r>
-              <a:rPr lang="en-US" sz="1400" b="0" dirty="0" err="1">
+              <a:rPr lang="en-US" sz="1600" b="0" dirty="0" err="1">
                 <a:solidFill>
                   <a:srgbClr val="267F99"/>
                 </a:solidFill>
@@ -14359,7 +14359,7 @@
               <a:t>gol_rule</a:t>
             </a:r>
             <a:r>
-              <a:rPr lang="en-US" sz="1400" b="0" dirty="0">
+              <a:rPr lang="en-US" sz="1600" b="0" dirty="0">
                 <a:solidFill>
                   <a:srgbClr val="000000"/>
                 </a:solidFill>
@@ -14377,7 +14377,7 @@
               <a:buNone/>
             </a:pPr>
             <a:r>
-              <a:rPr lang="en-US" sz="1400" b="0" dirty="0">
+              <a:rPr lang="en-US" sz="1600" b="0" dirty="0">
                 <a:solidFill>
                   <a:srgbClr val="000000"/>
                 </a:solidFill>
@@ -14387,7 +14387,7 @@
               <a:t>  </a:t>
             </a:r>
             <a:r>
-              <a:rPr lang="en-US" sz="1400" dirty="0">
+              <a:rPr lang="en-US" sz="1600" dirty="0">
                 <a:solidFill>
                   <a:srgbClr val="AF00DB"/>
                 </a:solidFill>
@@ -14396,7 +14396,7 @@
               <a:t>if_</a:t>
             </a:r>
             <a:r>
-              <a:rPr lang="en-US" sz="1400" b="0" dirty="0">
+              <a:rPr lang="en-US" sz="1600" b="0" dirty="0">
                 <a:solidFill>
                   <a:srgbClr val="000000"/>
                 </a:solidFill>
@@ -14406,7 +14406,7 @@
               <a:t>&lt;</a:t>
             </a:r>
             <a:r>
-              <a:rPr lang="en-US" sz="1400" dirty="0" err="1">
+              <a:rPr lang="en-US" sz="1600" dirty="0" err="1">
                 <a:solidFill>
                   <a:srgbClr val="001080"/>
                 </a:solidFill>
@@ -14415,7 +14415,7 @@
               <a:t>is_alive</a:t>
             </a:r>
             <a:r>
-              <a:rPr lang="en-US" sz="1400" b="0" dirty="0">
+              <a:rPr lang="en-US" sz="1600" b="0" dirty="0">
                 <a:solidFill>
                   <a:srgbClr val="000000"/>
                 </a:solidFill>
@@ -14425,14 +14425,14 @@
               <a:t>&gt;::</a:t>
             </a:r>
             <a:r>
-              <a:rPr lang="en-US" sz="1400" b="0" dirty="0">
+              <a:rPr lang="en-US" sz="1600" b="0" dirty="0">
                 <a:effectLst/>
                 <a:latin typeface="Fira Code" panose="020B0809050000020004" pitchFamily="49" charset="0"/>
               </a:rPr>
               <a:t>then_</a:t>
             </a:r>
             <a:r>
-              <a:rPr lang="en-US" sz="1400" b="0" dirty="0">
+              <a:rPr lang="en-US" sz="1600" b="0" dirty="0">
                 <a:solidFill>
                   <a:srgbClr val="000000"/>
                 </a:solidFill>
@@ -14450,7 +14450,7 @@
               <a:buNone/>
             </a:pPr>
             <a:r>
-              <a:rPr lang="en-US" sz="1400" b="0" dirty="0">
+              <a:rPr lang="en-US" sz="1600" b="0" dirty="0">
                 <a:solidFill>
                   <a:srgbClr val="000000"/>
                 </a:solidFill>
@@ -14460,7 +14460,7 @@
               <a:t>    </a:t>
             </a:r>
             <a:r>
-              <a:rPr lang="en-US" sz="1400" dirty="0">
+              <a:rPr lang="en-US" sz="1600" dirty="0">
                 <a:solidFill>
                   <a:srgbClr val="AF00DB"/>
                 </a:solidFill>
@@ -14469,7 +14469,7 @@
               <a:t>if_</a:t>
             </a:r>
             <a:r>
-              <a:rPr lang="en-US" sz="1400" b="0" dirty="0">
+              <a:rPr lang="en-US" sz="1600" b="0" dirty="0">
                 <a:solidFill>
                   <a:srgbClr val="000000"/>
                 </a:solidFill>
@@ -14479,7 +14479,7 @@
               <a:t>&lt;</a:t>
             </a:r>
             <a:r>
-              <a:rPr lang="en-US" sz="1400" dirty="0">
+              <a:rPr lang="en-US" sz="1600" dirty="0">
                 <a:solidFill>
                   <a:srgbClr val="001080"/>
                 </a:solidFill>
@@ -14488,7 +14488,7 @@
               <a:t>has3_or_2</a:t>
             </a:r>
             <a:r>
-              <a:rPr lang="en-US" sz="1400" b="0" dirty="0">
+              <a:rPr lang="en-US" sz="1600" b="0" dirty="0">
                 <a:solidFill>
                   <a:srgbClr val="000000"/>
                 </a:solidFill>
@@ -14498,14 +14498,14 @@
               <a:t>&gt;::</a:t>
             </a:r>
             <a:r>
-              <a:rPr lang="en-US" sz="1400" b="0" dirty="0">
+              <a:rPr lang="en-US" sz="1600" b="0" dirty="0">
                 <a:effectLst/>
                 <a:latin typeface="Fira Code" panose="020B0809050000020004" pitchFamily="49" charset="0"/>
               </a:rPr>
               <a:t>then_</a:t>
             </a:r>
             <a:r>
-              <a:rPr lang="en-US" sz="1400" b="0" dirty="0">
+              <a:rPr lang="en-US" sz="1600" b="0" dirty="0">
                 <a:solidFill>
                   <a:srgbClr val="000000"/>
                 </a:solidFill>
@@ -14515,7 +14515,7 @@
               <a:t>&lt;</a:t>
             </a:r>
             <a:r>
-              <a:rPr lang="en-US" sz="1400" b="0" dirty="0">
+              <a:rPr lang="en-US" sz="1600" b="0" dirty="0">
                 <a:solidFill>
                   <a:srgbClr val="267F99"/>
                 </a:solidFill>
@@ -14525,7 +14525,7 @@
               <a:t>alive</a:t>
             </a:r>
             <a:r>
-              <a:rPr lang="en-US" sz="1400" b="0" dirty="0">
+              <a:rPr lang="en-US" sz="1600" b="0" dirty="0">
                 <a:solidFill>
                   <a:srgbClr val="000000"/>
                 </a:solidFill>
@@ -14535,7 +14535,7 @@
               <a:t>&gt;::</a:t>
             </a:r>
             <a:r>
-              <a:rPr lang="en-US" sz="1400" dirty="0">
+              <a:rPr lang="en-US" sz="1600" dirty="0">
                 <a:solidFill>
                   <a:srgbClr val="AF00DB"/>
                 </a:solidFill>
@@ -14544,7 +14544,7 @@
               <a:t>else_</a:t>
             </a:r>
             <a:r>
-              <a:rPr lang="en-US" sz="1400" b="0" dirty="0">
+              <a:rPr lang="en-US" sz="1600" b="0" dirty="0">
                 <a:solidFill>
                   <a:srgbClr val="000000"/>
                 </a:solidFill>
@@ -14554,7 +14554,7 @@
               <a:t>&lt;</a:t>
             </a:r>
             <a:r>
-              <a:rPr lang="en-US" sz="1400" b="0" dirty="0">
+              <a:rPr lang="en-US" sz="1600" b="0" dirty="0">
                 <a:solidFill>
                   <a:srgbClr val="267F99"/>
                 </a:solidFill>
@@ -14564,7 +14564,7 @@
               <a:t>dead</a:t>
             </a:r>
             <a:r>
-              <a:rPr lang="en-US" sz="1400" b="0" dirty="0">
+              <a:rPr lang="en-US" sz="1600" b="0" dirty="0">
                 <a:solidFill>
                   <a:srgbClr val="000000"/>
                 </a:solidFill>
@@ -14582,7 +14582,7 @@
               <a:buNone/>
             </a:pPr>
             <a:r>
-              <a:rPr lang="en-US" sz="1400" b="0" dirty="0">
+              <a:rPr lang="en-US" sz="1600" b="0" dirty="0">
                 <a:solidFill>
                   <a:srgbClr val="000000"/>
                 </a:solidFill>
@@ -14592,7 +14592,7 @@
               <a:t>  </a:t>
             </a:r>
             <a:r>
-              <a:rPr lang="en-US" sz="1400" dirty="0">
+              <a:rPr lang="en-US" sz="1600" dirty="0">
                 <a:solidFill>
                   <a:srgbClr val="AF00DB"/>
                 </a:solidFill>
@@ -14601,7 +14601,7 @@
               <a:t>else_</a:t>
             </a:r>
             <a:r>
-              <a:rPr lang="en-US" sz="1400" b="0" dirty="0">
+              <a:rPr lang="en-US" sz="1600" b="0" dirty="0">
                 <a:solidFill>
                   <a:srgbClr val="000000"/>
                 </a:solidFill>
@@ -14619,7 +14619,7 @@
               <a:buNone/>
             </a:pPr>
             <a:r>
-              <a:rPr lang="en-US" sz="1400" b="0" dirty="0">
+              <a:rPr lang="en-US" sz="1600" b="0" dirty="0">
                 <a:solidFill>
                   <a:srgbClr val="000000"/>
                 </a:solidFill>
@@ -14629,7 +14629,7 @@
               <a:t>    </a:t>
             </a:r>
             <a:r>
-              <a:rPr lang="en-US" sz="1400" dirty="0">
+              <a:rPr lang="en-US" sz="1600" dirty="0">
                 <a:solidFill>
                   <a:srgbClr val="AF00DB"/>
                 </a:solidFill>
@@ -14638,7 +14638,7 @@
               <a:t>if_</a:t>
             </a:r>
             <a:r>
-              <a:rPr lang="en-US" sz="1400" b="0" dirty="0">
+              <a:rPr lang="en-US" sz="1600" b="0" dirty="0">
                 <a:solidFill>
                   <a:srgbClr val="000000"/>
                 </a:solidFill>
@@ -14648,7 +14648,7 @@
               <a:t>&lt;</a:t>
             </a:r>
             <a:r>
-              <a:rPr lang="en-US" sz="1400" dirty="0">
+              <a:rPr lang="en-US" sz="1600" dirty="0">
                 <a:solidFill>
                   <a:srgbClr val="001080"/>
                 </a:solidFill>
@@ -14657,7 +14657,7 @@
               <a:t>has3</a:t>
             </a:r>
             <a:r>
-              <a:rPr lang="en-US" sz="1400" b="0" dirty="0">
+              <a:rPr lang="en-US" sz="1600" b="0" dirty="0">
                 <a:solidFill>
                   <a:srgbClr val="000000"/>
                 </a:solidFill>
@@ -14667,14 +14667,14 @@
               <a:t>&gt;::</a:t>
             </a:r>
             <a:r>
-              <a:rPr lang="en-US" sz="1400" b="0" dirty="0">
+              <a:rPr lang="en-US" sz="1600" b="0" dirty="0">
                 <a:effectLst/>
                 <a:latin typeface="Fira Code" panose="020B0809050000020004" pitchFamily="49" charset="0"/>
               </a:rPr>
               <a:t>then_</a:t>
             </a:r>
             <a:r>
-              <a:rPr lang="en-US" sz="1400" b="0" dirty="0">
+              <a:rPr lang="en-US" sz="1600" b="0" dirty="0">
                 <a:solidFill>
                   <a:srgbClr val="000000"/>
                 </a:solidFill>
@@ -14684,7 +14684,7 @@
               <a:t>&lt;</a:t>
             </a:r>
             <a:r>
-              <a:rPr lang="en-US" sz="1400" b="0" dirty="0">
+              <a:rPr lang="en-US" sz="1600" b="0" dirty="0">
                 <a:solidFill>
                   <a:srgbClr val="267F99"/>
                 </a:solidFill>
@@ -14694,7 +14694,7 @@
               <a:t>alive</a:t>
             </a:r>
             <a:r>
-              <a:rPr lang="en-US" sz="1400" b="0" dirty="0">
+              <a:rPr lang="en-US" sz="1600" b="0" dirty="0">
                 <a:solidFill>
                   <a:srgbClr val="000000"/>
                 </a:solidFill>
@@ -14704,7 +14704,7 @@
               <a:t>&gt;::</a:t>
             </a:r>
             <a:r>
-              <a:rPr lang="en-US" sz="1400" dirty="0">
+              <a:rPr lang="en-US" sz="1600" dirty="0">
                 <a:solidFill>
                   <a:srgbClr val="AF00DB"/>
                 </a:solidFill>
@@ -14713,7 +14713,7 @@
               <a:t>else_</a:t>
             </a:r>
             <a:r>
-              <a:rPr lang="en-US" sz="1400" b="0" dirty="0">
+              <a:rPr lang="en-US" sz="1600" b="0" dirty="0">
                 <a:solidFill>
                   <a:srgbClr val="000000"/>
                 </a:solidFill>
@@ -14723,7 +14723,7 @@
               <a:t>&lt;</a:t>
             </a:r>
             <a:r>
-              <a:rPr lang="en-US" sz="1400" b="0" dirty="0">
+              <a:rPr lang="en-US" sz="1600" b="0" dirty="0">
                 <a:solidFill>
                   <a:srgbClr val="267F99"/>
                 </a:solidFill>
@@ -14733,7 +14733,7 @@
               <a:t>dead</a:t>
             </a:r>
             <a:r>
-              <a:rPr lang="en-US" sz="1400" b="0" dirty="0">
+              <a:rPr lang="en-US" sz="1600" b="0" dirty="0">
                 <a:solidFill>
                   <a:srgbClr val="000000"/>
                 </a:solidFill>
@@ -14751,7 +14751,7 @@
               <a:buNone/>
             </a:pPr>
             <a:r>
-              <a:rPr lang="en-US" sz="1400" b="0" dirty="0">
+              <a:rPr lang="en-US" sz="1600" b="0" dirty="0">
                 <a:solidFill>
                   <a:srgbClr val="000000"/>
                 </a:solidFill>
@@ -14780,9 +14780,9 @@
           <p:nvPr/>
         </p:nvCxnSpPr>
         <p:spPr>
-          <a:xfrm>
-            <a:off x="5393103" y="4870659"/>
-            <a:ext cx="939117" cy="0"/>
+          <a:xfrm flipV="1">
+            <a:off x="5393102" y="5026502"/>
+            <a:ext cx="647825" cy="1"/>
           </a:xfrm>
           <a:prstGeom prst="straightConnector1">
             <a:avLst/>
@@ -14820,7 +14820,7 @@
         </p:nvSpPr>
         <p:spPr>
           <a:xfrm>
-            <a:off x="7256342" y="3654187"/>
+            <a:off x="7256341" y="3780904"/>
             <a:ext cx="3665171" cy="369332"/>
           </a:xfrm>
           <a:prstGeom prst="rect">
@@ -36055,8 +36055,8 @@
         </p:nvSpPr>
         <p:spPr>
           <a:xfrm>
-            <a:off x="8915592" y="3547821"/>
-            <a:ext cx="3169227" cy="307777"/>
+            <a:off x="8785840" y="3531626"/>
+            <a:ext cx="3537000" cy="338554"/>
           </a:xfrm>
           <a:prstGeom prst="rect">
             <a:avLst/>
@@ -36070,7 +36070,7 @@
           <a:lstStyle/>
           <a:p>
             <a:r>
-              <a:rPr lang="en-US" sz="1400" dirty="0">
+              <a:rPr lang="en-US" sz="1600" dirty="0">
                 <a:solidFill>
                   <a:srgbClr val="001080"/>
                 </a:solidFill>
@@ -36079,7 +36079,7 @@
               <a:t>matrix</a:t>
             </a:r>
             <a:r>
-              <a:rPr lang="en-US" sz="1400" dirty="0">
+              <a:rPr lang="en-US" sz="1600" dirty="0">
                 <a:solidFill>
                   <a:srgbClr val="000000"/>
                 </a:solidFill>
@@ -36088,7 +36088,7 @@
               <a:t>[</a:t>
             </a:r>
             <a:r>
-              <a:rPr lang="en-US" sz="1400" dirty="0" err="1">
+              <a:rPr lang="en-US" sz="1600" dirty="0" err="1">
                 <a:solidFill>
                   <a:srgbClr val="0070C1"/>
                 </a:solidFill>
@@ -36097,7 +36097,7 @@
               <a:t>idx</a:t>
             </a:r>
             <a:r>
-              <a:rPr lang="en-US" sz="1400" dirty="0">
+              <a:rPr lang="en-US" sz="1600" dirty="0">
                 <a:solidFill>
                   <a:srgbClr val="000000"/>
                 </a:solidFill>
@@ -36106,7 +36106,7 @@
               <a:t>&lt;</a:t>
             </a:r>
             <a:r>
-              <a:rPr lang="en-US" sz="1400" dirty="0">
+              <a:rPr lang="en-US" sz="1600" dirty="0">
                 <a:solidFill>
                   <a:srgbClr val="A31515"/>
                 </a:solidFill>
@@ -36115,7 +36115,7 @@
               <a:t>'m'</a:t>
             </a:r>
             <a:r>
-              <a:rPr lang="en-US" sz="1400" dirty="0">
+              <a:rPr lang="en-US" sz="1600" dirty="0">
                 <a:solidFill>
                   <a:srgbClr val="000000"/>
                 </a:solidFill>
@@ -36124,7 +36124,7 @@
               <a:t>, </a:t>
             </a:r>
             <a:r>
-              <a:rPr lang="en-US" sz="1400" dirty="0">
+              <a:rPr lang="en-US" sz="1600" dirty="0">
                 <a:solidFill>
                   <a:srgbClr val="A31515"/>
                 </a:solidFill>
@@ -36133,7 +36133,7 @@
               <a:t>'n'</a:t>
             </a:r>
             <a:r>
-              <a:rPr lang="en-US" sz="1400" dirty="0">
+              <a:rPr lang="en-US" sz="1600" dirty="0">
                 <a:solidFill>
                   <a:srgbClr val="000000"/>
                 </a:solidFill>
@@ -36142,7 +36142,7 @@
               <a:t>&gt;(</a:t>
             </a:r>
             <a:r>
-              <a:rPr lang="en-US" sz="1400" dirty="0">
+              <a:rPr lang="en-US" sz="1600" dirty="0">
                 <a:solidFill>
                   <a:srgbClr val="0070C1"/>
                 </a:solidFill>
@@ -36151,7 +36151,7 @@
               <a:t>4</a:t>
             </a:r>
             <a:r>
-              <a:rPr lang="en-US" sz="1400" dirty="0">
+              <a:rPr lang="en-US" sz="1600" dirty="0">
                 <a:solidFill>
                   <a:srgbClr val="000000"/>
                 </a:solidFill>
@@ -36160,7 +36160,7 @@
               <a:t>, </a:t>
             </a:r>
             <a:r>
-              <a:rPr lang="en-US" sz="1400" dirty="0">
+              <a:rPr lang="en-US" sz="1600" dirty="0">
                 <a:solidFill>
                   <a:srgbClr val="0070C1"/>
                 </a:solidFill>
@@ -36169,7 +36169,7 @@
               <a:t>2</a:t>
             </a:r>
             <a:r>
-              <a:rPr lang="en-US" sz="1400" dirty="0">
+              <a:rPr lang="en-US" sz="1600" dirty="0">
                 <a:solidFill>
                   <a:srgbClr val="000000"/>
                 </a:solidFill>
@@ -36177,7 +36177,7 @@
               </a:rPr>
               <a:t>)]</a:t>
             </a:r>
-            <a:endParaRPr lang="en-US" dirty="0"/>
+            <a:endParaRPr lang="en-US" sz="2000" dirty="0"/>
           </a:p>
         </p:txBody>
       </p:sp>
@@ -36190,13 +36190,15 @@
               </a:ext>
             </a:extLst>
           </p:cNvPr>
-          <p:cNvCxnSpPr/>
+          <p:cNvCxnSpPr>
+            <a:cxnSpLocks/>
+          </p:cNvCxnSpPr>
           <p:nvPr/>
         </p:nvCxnSpPr>
         <p:spPr>
           <a:xfrm>
-            <a:off x="8204662" y="3695948"/>
-            <a:ext cx="648393" cy="0"/>
+            <a:off x="8079856" y="3700903"/>
+            <a:ext cx="705984" cy="0"/>
           </a:xfrm>
           <a:prstGeom prst="straightConnector1">
             <a:avLst/>
@@ -36234,7 +36236,7 @@
         </p:nvSpPr>
         <p:spPr>
           <a:xfrm>
-            <a:off x="8079856" y="3346960"/>
+            <a:off x="7983846" y="3385418"/>
             <a:ext cx="898003" cy="369332"/>
           </a:xfrm>
           <a:prstGeom prst="rect">
@@ -36269,10 +36271,10 @@
         </p:nvGrpSpPr>
         <p:grpSpPr>
           <a:xfrm>
-            <a:off x="4543100" y="3030894"/>
-            <a:ext cx="3903812" cy="1444798"/>
-            <a:chOff x="4543100" y="3030894"/>
-            <a:chExt cx="3903812" cy="1444798"/>
+            <a:off x="4146506" y="2952604"/>
+            <a:ext cx="4300406" cy="2570126"/>
+            <a:chOff x="4543100" y="2952604"/>
+            <a:chExt cx="3903812" cy="2570126"/>
           </a:xfrm>
         </p:grpSpPr>
         <p:sp>
@@ -36290,7 +36292,7 @@
           <p:spPr>
             <a:xfrm>
               <a:off x="4543100" y="3030894"/>
-              <a:ext cx="3903812" cy="1330108"/>
+              <a:ext cx="3903812" cy="2491836"/>
             </a:xfrm>
             <a:prstGeom prst="rect">
               <a:avLst/>
@@ -36310,7 +36312,7 @@
                 <a:buNone/>
               </a:pPr>
               <a:r>
-                <a:rPr lang="en-US" sz="1400" b="0" noProof="0" dirty="0">
+                <a:rPr lang="en-US" sz="1600" b="0" noProof="0" dirty="0">
                   <a:solidFill>
                     <a:srgbClr val="267F99"/>
                   </a:solidFill>
@@ -36320,7 +36322,7 @@
                 <a:t>auto</a:t>
               </a:r>
               <a:r>
-                <a:rPr lang="en-US" sz="1400" b="0" noProof="0" dirty="0">
+                <a:rPr lang="en-US" sz="1600" b="0" noProof="0" dirty="0">
                   <a:solidFill>
                     <a:srgbClr val="000000"/>
                   </a:solidFill>
@@ -36330,7 +36332,7 @@
                 <a:t> </a:t>
               </a:r>
               <a:r>
-                <a:rPr lang="en-US" sz="1400" b="0" noProof="0" dirty="0">
+                <a:rPr lang="en-US" sz="1600" b="0" noProof="0" dirty="0">
                   <a:solidFill>
                     <a:srgbClr val="001080"/>
                   </a:solidFill>
@@ -36340,7 +36342,7 @@
                 <a:t>layout</a:t>
               </a:r>
               <a:r>
-                <a:rPr lang="en-US" sz="1400" b="0" noProof="0" dirty="0">
+                <a:rPr lang="en-US" sz="1600" b="0" noProof="0" dirty="0">
                   <a:solidFill>
                     <a:srgbClr val="000000"/>
                   </a:solidFill>
@@ -36350,7 +36352,7 @@
                 <a:t> = </a:t>
               </a:r>
               <a:r>
-                <a:rPr lang="en-US" sz="1400" b="0" noProof="0" dirty="0">
+                <a:rPr lang="en-US" sz="1600" b="0" noProof="0" dirty="0">
                   <a:solidFill>
                     <a:srgbClr val="267F99"/>
                   </a:solidFill>
@@ -36360,7 +36362,7 @@
                 <a:t>scalar</a:t>
               </a:r>
               <a:r>
-                <a:rPr lang="en-US" sz="1400" b="0" noProof="0" dirty="0">
+                <a:rPr lang="en-US" sz="1600" b="0" noProof="0" dirty="0">
                   <a:solidFill>
                     <a:srgbClr val="000000"/>
                   </a:solidFill>
@@ -36370,7 +36372,7 @@
                 <a:t>&lt;</a:t>
               </a:r>
               <a:r>
-                <a:rPr lang="en-US" sz="1400" b="0" noProof="0" dirty="0">
+                <a:rPr lang="en-US" sz="1600" b="0" noProof="0" dirty="0">
                   <a:solidFill>
                     <a:srgbClr val="0000FF"/>
                   </a:solidFill>
@@ -36380,7 +36382,7 @@
                 <a:t>float</a:t>
               </a:r>
               <a:r>
-                <a:rPr lang="en-US" sz="1400" b="0" noProof="0" dirty="0">
+                <a:rPr lang="en-US" sz="1600" b="0" noProof="0" dirty="0">
                   <a:solidFill>
                     <a:srgbClr val="000000"/>
                   </a:solidFill>
@@ -36398,7 +36400,7 @@
                 <a:buNone/>
               </a:pPr>
               <a:r>
-                <a:rPr lang="en-US" sz="1400" b="0" noProof="0" dirty="0">
+                <a:rPr lang="en-US" sz="1600" b="0" noProof="0" dirty="0">
                   <a:solidFill>
                     <a:srgbClr val="000000"/>
                   </a:solidFill>
@@ -36408,7 +36410,7 @@
                 <a:t>              </a:t>
               </a:r>
               <a:r>
-                <a:rPr lang="en-US" sz="1400" b="0" noProof="0" dirty="0">
+                <a:rPr lang="en-US" sz="1600" b="0" noProof="0" dirty="0">
                   <a:solidFill>
                     <a:srgbClr val="795E26"/>
                   </a:solidFill>
@@ -36418,7 +36420,7 @@
                 <a:t>vector</a:t>
               </a:r>
               <a:r>
-                <a:rPr lang="en-US" sz="1400" b="0" noProof="0" dirty="0">
+                <a:rPr lang="en-US" sz="1600" b="0" noProof="0" dirty="0">
                   <a:solidFill>
                     <a:srgbClr val="000000"/>
                   </a:solidFill>
@@ -36428,7 +36430,7 @@
                 <a:t>&lt;</a:t>
               </a:r>
               <a:r>
-                <a:rPr lang="en-US" sz="1400" b="0" noProof="0" dirty="0">
+                <a:rPr lang="en-US" sz="1600" b="0" noProof="0" dirty="0">
                   <a:solidFill>
                     <a:srgbClr val="A31515"/>
                   </a:solidFill>
@@ -36438,7 +36440,7 @@
                 <a:t>'n'</a:t>
               </a:r>
               <a:r>
-                <a:rPr lang="en-US" sz="1400" b="0" noProof="0" dirty="0">
+                <a:rPr lang="en-US" sz="1600" b="0" noProof="0" dirty="0">
                   <a:solidFill>
                     <a:srgbClr val="000000"/>
                   </a:solidFill>
@@ -36448,7 +36450,7 @@
                 <a:t>&gt;(</a:t>
               </a:r>
               <a:r>
-                <a:rPr lang="en-US" sz="1400" b="0" noProof="0" dirty="0">
+                <a:rPr lang="en-US" sz="1600" b="0" noProof="0" dirty="0">
                   <a:solidFill>
                     <a:srgbClr val="0070C1"/>
                   </a:solidFill>
@@ -36458,7 +36460,7 @@
                 <a:t>M</a:t>
               </a:r>
               <a:r>
-                <a:rPr lang="en-US" sz="1400" b="0" noProof="0" dirty="0">
+                <a:rPr lang="en-US" sz="1600" b="0" noProof="0" dirty="0">
                   <a:solidFill>
                     <a:srgbClr val="000000"/>
                   </a:solidFill>
@@ -36476,7 +36478,7 @@
                 <a:buNone/>
               </a:pPr>
               <a:r>
-                <a:rPr lang="en-US" sz="1400" b="0" noProof="0" dirty="0">
+                <a:rPr lang="en-US" sz="1600" b="0" noProof="0" dirty="0">
                   <a:solidFill>
                     <a:srgbClr val="000000"/>
                   </a:solidFill>
@@ -36486,7 +36488,7 @@
                 <a:t>              </a:t>
               </a:r>
               <a:r>
-                <a:rPr lang="en-US" sz="1400" b="0" noProof="0" dirty="0">
+                <a:rPr lang="en-US" sz="1600" b="0" noProof="0" dirty="0">
                   <a:solidFill>
                     <a:srgbClr val="795E26"/>
                   </a:solidFill>
@@ -36496,7 +36498,7 @@
                 <a:t>vector</a:t>
               </a:r>
               <a:r>
-                <a:rPr lang="en-US" sz="1400" b="0" noProof="0" dirty="0">
+                <a:rPr lang="en-US" sz="1600" b="0" noProof="0" dirty="0">
                   <a:solidFill>
                     <a:srgbClr val="000000"/>
                   </a:solidFill>
@@ -36506,7 +36508,7 @@
                 <a:t>&lt;</a:t>
               </a:r>
               <a:r>
-                <a:rPr lang="en-US" sz="1400" b="0" noProof="0" dirty="0">
+                <a:rPr lang="en-US" sz="1600" b="0" noProof="0" dirty="0">
                   <a:solidFill>
                     <a:srgbClr val="A31515"/>
                   </a:solidFill>
@@ -36516,7 +36518,7 @@
                 <a:t>'m'</a:t>
               </a:r>
               <a:r>
-                <a:rPr lang="en-US" sz="1400" b="0" noProof="0" dirty="0">
+                <a:rPr lang="en-US" sz="1600" b="0" noProof="0" dirty="0">
                   <a:solidFill>
                     <a:srgbClr val="000000"/>
                   </a:solidFill>
@@ -36526,7 +36528,7 @@
                 <a:t>&gt;(</a:t>
               </a:r>
               <a:r>
-                <a:rPr lang="en-US" sz="1400" b="0" noProof="0" dirty="0">
+                <a:rPr lang="en-US" sz="1600" b="0" noProof="0" dirty="0">
                   <a:solidFill>
                     <a:srgbClr val="0070C1"/>
                   </a:solidFill>
@@ -36536,7 +36538,7 @@
                 <a:t>N</a:t>
               </a:r>
               <a:r>
-                <a:rPr lang="en-US" sz="1400" b="0" noProof="0" dirty="0">
+                <a:rPr lang="en-US" sz="1600" b="0" noProof="0" dirty="0">
                   <a:solidFill>
                     <a:srgbClr val="000000"/>
                   </a:solidFill>
@@ -36562,7 +36564,7 @@
           </p:nvSpPr>
           <p:spPr>
             <a:xfrm>
-              <a:off x="6037812" y="3113605"/>
+              <a:off x="6157798" y="3140003"/>
               <a:ext cx="1698171" cy="435428"/>
             </a:xfrm>
             <a:prstGeom prst="rect">
@@ -36609,8 +36611,8 @@
           </p:nvSpPr>
           <p:spPr>
             <a:xfrm>
-              <a:off x="6037811" y="3571000"/>
-              <a:ext cx="1698171" cy="435428"/>
+              <a:off x="6157798" y="3631744"/>
+              <a:ext cx="1578184" cy="435428"/>
             </a:xfrm>
             <a:prstGeom prst="rect">
               <a:avLst/>
@@ -36656,8 +36658,8 @@
           </p:nvSpPr>
           <p:spPr>
             <a:xfrm>
-              <a:off x="6037811" y="4040264"/>
-              <a:ext cx="1698171" cy="435428"/>
+              <a:off x="6157798" y="4111106"/>
+              <a:ext cx="1578184" cy="435428"/>
             </a:xfrm>
             <a:prstGeom prst="rect">
               <a:avLst/>
@@ -36703,8 +36705,8 @@
           </p:nvSpPr>
           <p:spPr>
             <a:xfrm rot="16200000">
-              <a:off x="7058495" y="2820887"/>
-              <a:ext cx="156743" cy="689175"/>
+              <a:off x="7072582" y="2672301"/>
+              <a:ext cx="275785" cy="836392"/>
             </a:xfrm>
             <a:prstGeom prst="rightBrace">
               <a:avLst/>
@@ -36748,7 +36750,7 @@
         </p:nvSpPr>
         <p:spPr>
           <a:xfrm>
-            <a:off x="5001672" y="2658886"/>
+            <a:off x="4756218" y="2637256"/>
             <a:ext cx="5225982" cy="369332"/>
           </a:xfrm>
           <a:prstGeom prst="rect">
@@ -36900,13 +36902,15 @@
               </a:ext>
             </a:extLst>
           </p:cNvPr>
-          <p:cNvCxnSpPr/>
+          <p:cNvCxnSpPr>
+            <a:cxnSpLocks/>
+          </p:cNvCxnSpPr>
           <p:nvPr/>
         </p:nvCxnSpPr>
         <p:spPr>
           <a:xfrm flipH="1" flipV="1">
-            <a:off x="7614663" y="4361002"/>
-            <a:ext cx="589999" cy="410503"/>
+            <a:off x="7545544" y="4396831"/>
+            <a:ext cx="1470102" cy="706559"/>
           </a:xfrm>
           <a:prstGeom prst="straightConnector1">
             <a:avLst/>
@@ -36944,8 +36948,8 @@
         </p:nvSpPr>
         <p:spPr>
           <a:xfrm>
-            <a:off x="8204662" y="4667567"/>
-            <a:ext cx="906087" cy="307777"/>
+            <a:off x="8977859" y="4912371"/>
+            <a:ext cx="1158202" cy="369332"/>
           </a:xfrm>
           <a:prstGeom prst="rect">
             <a:avLst/>
@@ -36959,7 +36963,7 @@
           <a:lstStyle/>
           <a:p>
             <a:r>
-              <a:rPr lang="en-US" sz="1400" dirty="0">
+              <a:rPr lang="en-US" dirty="0">
                 <a:solidFill>
                   <a:srgbClr val="0070C1"/>
                 </a:solidFill>
@@ -36968,7 +36972,7 @@
               <a:t>lit</a:t>
             </a:r>
             <a:r>
-              <a:rPr lang="en-US" sz="1400" dirty="0">
+              <a:rPr lang="en-US" dirty="0">
                 <a:solidFill>
                   <a:srgbClr val="000000"/>
                 </a:solidFill>
@@ -36977,7 +36981,7 @@
               <a:t>&lt;</a:t>
             </a:r>
             <a:r>
-              <a:rPr lang="en-US" sz="1400" b="0" noProof="0" dirty="0">
+              <a:rPr lang="en-US" b="0" noProof="0" dirty="0">
                 <a:solidFill>
                   <a:srgbClr val="0070C1"/>
                 </a:solidFill>
@@ -36987,7 +36991,7 @@
               <a:t>N</a:t>
             </a:r>
             <a:r>
-              <a:rPr lang="en-US" sz="1400" b="0" noProof="0" dirty="0">
+              <a:rPr lang="en-US" b="0" noProof="0" dirty="0">
                 <a:solidFill>
                   <a:srgbClr val="000000"/>
                 </a:solidFill>
@@ -36996,7 +37000,7 @@
               </a:rPr>
               <a:t>&gt;</a:t>
             </a:r>
-            <a:endParaRPr lang="en-US" sz="2800" dirty="0"/>
+            <a:endParaRPr lang="en-US" sz="3600" dirty="0"/>
           </a:p>
         </p:txBody>
       </p:sp>
@@ -37014,7 +37018,7 @@
         </p:nvSpPr>
         <p:spPr>
           <a:xfrm>
-            <a:off x="7167247" y="4611764"/>
+            <a:off x="8182635" y="4396831"/>
             <a:ext cx="1137469" cy="369332"/>
           </a:xfrm>
           <a:prstGeom prst="rect">
@@ -37337,7 +37341,7 @@
         </p:nvGrpSpPr>
         <p:grpSpPr>
           <a:xfrm>
-            <a:off x="1639754" y="2546722"/>
+            <a:off x="1284138" y="2628689"/>
             <a:ext cx="1590800" cy="1764556"/>
             <a:chOff x="735535" y="1909480"/>
             <a:chExt cx="1590800" cy="1764556"/>
@@ -37653,7 +37657,7 @@
         </p:nvCxnSpPr>
         <p:spPr>
           <a:xfrm flipV="1">
-            <a:off x="3230554" y="3346960"/>
+            <a:off x="2874938" y="3428927"/>
             <a:ext cx="1312546" cy="343650"/>
           </a:xfrm>
           <a:prstGeom prst="straightConnector1">
@@ -37692,7 +37696,7 @@
 </file>
 
 <file path=ppt/slides/slide6.xml><?xml version="1.0" encoding="utf-8"?>
-<p:sld xmlns:a="http://schemas.openxmlformats.org/drawingml/2006/main" xmlns:r="http://schemas.openxmlformats.org/officeDocument/2006/relationships" xmlns:p="http://schemas.openxmlformats.org/presentationml/2006/main">
+<p:sld xmlns:a="http://schemas.openxmlformats.org/drawingml/2006/main" xmlns:r="http://schemas.openxmlformats.org/officeDocument/2006/relationships" xmlns:p="http://schemas.openxmlformats.org/presentationml/2006/main" show="0">
   <p:cSld>
     <p:spTree>
       <p:nvGrpSpPr>
@@ -38628,7 +38632,7 @@
               <a:rPr lang="en-US" smtClean="0"/>
               <a:t>6</a:t>
             </a:fld>
-            <a:endParaRPr lang="en-US"/>
+            <a:endParaRPr lang="en-US" dirty="0"/>
           </a:p>
         </p:txBody>
       </p:sp>
@@ -38701,7 +38705,7 @@
         </p:nvSpPr>
         <p:spPr>
           <a:xfrm>
-            <a:off x="4274320" y="4582689"/>
+            <a:off x="4274320" y="4746531"/>
             <a:ext cx="6181949" cy="2032031"/>
           </a:xfrm>
           <a:prstGeom prst="rect">
@@ -40278,7 +40282,26 @@
                 <a:effectLst/>
                 <a:latin typeface="Fira Code" panose="020B0809050000020004" pitchFamily="49" charset="0"/>
               </a:rPr>
-              <a:t>,... m - </a:t>
+              <a:t>,... </a:t>
+            </a:r>
+            <a:r>
+              <a:rPr lang="en-US" dirty="0">
+                <a:solidFill>
+                  <a:srgbClr val="098658"/>
+                </a:solidFill>
+                <a:latin typeface="Fira Code" panose="020B0809050000020004" pitchFamily="49" charset="0"/>
+              </a:rPr>
+              <a:t>m</a:t>
+            </a:r>
+            <a:r>
+              <a:rPr lang="en-US" b="0" noProof="0" dirty="0">
+                <a:solidFill>
+                  <a:srgbClr val="000000"/>
+                </a:solidFill>
+                <a:effectLst/>
+                <a:latin typeface="Fira Code" panose="020B0809050000020004" pitchFamily="49" charset="0"/>
+              </a:rPr>
+              <a:t> - </a:t>
             </a:r>
             <a:r>
               <a:rPr lang="en-US" b="0" noProof="0" dirty="0">
@@ -40396,7 +40419,26 @@
                 <a:effectLst/>
                 <a:latin typeface="Fira Code" panose="020B0809050000020004" pitchFamily="49" charset="0"/>
               </a:rPr>
-              <a:t>,... n - </a:t>
+              <a:t>,... </a:t>
+            </a:r>
+            <a:r>
+              <a:rPr lang="en-US" dirty="0">
+                <a:solidFill>
+                  <a:srgbClr val="098658"/>
+                </a:solidFill>
+                <a:latin typeface="Fira Code" panose="020B0809050000020004" pitchFamily="49" charset="0"/>
+              </a:rPr>
+              <a:t>n</a:t>
+            </a:r>
+            <a:r>
+              <a:rPr lang="en-US" b="0" noProof="0" dirty="0">
+                <a:solidFill>
+                  <a:srgbClr val="000000"/>
+                </a:solidFill>
+                <a:effectLst/>
+                <a:latin typeface="Fira Code" panose="020B0809050000020004" pitchFamily="49" charset="0"/>
+              </a:rPr>
+              <a:t> - </a:t>
             </a:r>
             <a:r>
               <a:rPr lang="en-US" b="0" noProof="0" dirty="0">
@@ -40434,7 +40476,26 @@
                 <a:effectLst/>
                 <a:latin typeface="Fira Code" panose="020B0809050000020004" pitchFamily="49" charset="0"/>
               </a:rPr>
-              <a:t>        matrix[</a:t>
+              <a:t>        </a:t>
+            </a:r>
+            <a:r>
+              <a:rPr lang="en-US" dirty="0">
+                <a:solidFill>
+                  <a:srgbClr val="001080"/>
+                </a:solidFill>
+                <a:latin typeface="Fira Code" panose="020B0809050000020004" pitchFamily="49" charset="0"/>
+              </a:rPr>
+              <a:t>matrix</a:t>
+            </a:r>
+            <a:r>
+              <a:rPr lang="en-US" b="0" noProof="0" dirty="0">
+                <a:solidFill>
+                  <a:srgbClr val="000000"/>
+                </a:solidFill>
+                <a:effectLst/>
+                <a:latin typeface="Fira Code" panose="020B0809050000020004" pitchFamily="49" charset="0"/>
+              </a:rPr>
+              <a:t>[</a:t>
             </a:r>
             <a:r>
               <a:rPr lang="en-US" b="0" noProof="0" dirty="0" err="1">
@@ -40477,11 +40538,10 @@
               <a:t>] = </a:t>
             </a:r>
             <a:r>
-              <a:rPr lang="en-US" b="0" noProof="0" dirty="0" err="1">
-                <a:solidFill>
-                  <a:srgbClr val="000000"/>
-                </a:solidFill>
-                <a:effectLst/>
+              <a:rPr lang="en-US" dirty="0" err="1">
+                <a:solidFill>
+                  <a:srgbClr val="795E26"/>
+                </a:solidFill>
                 <a:latin typeface="Fira Code" panose="020B0809050000020004" pitchFamily="49" charset="0"/>
               </a:rPr>
               <a:t>init</a:t>
@@ -40723,6 +40783,112 @@
           </a:p>
         </p:txBody>
       </p:sp>
+      <p:sp>
+        <p:nvSpPr>
+          <p:cNvPr id="13" name="TextBox 12">
+            <a:extLst>
+              <a:ext uri="{FF2B5EF4-FFF2-40B4-BE49-F238E27FC236}">
+                <a16:creationId xmlns:a16="http://schemas.microsoft.com/office/drawing/2014/main" id="{A9A86E85-8E7C-683C-C244-2344EE805A9E}"/>
+              </a:ext>
+            </a:extLst>
+          </p:cNvPr>
+          <p:cNvSpPr txBox="1"/>
+          <p:nvPr/>
+        </p:nvSpPr>
+        <p:spPr>
+          <a:xfrm>
+            <a:off x="3524638" y="1674084"/>
+            <a:ext cx="1665841" cy="369332"/>
+          </a:xfrm>
+          <a:prstGeom prst="rect">
+            <a:avLst/>
+          </a:prstGeom>
+          <a:noFill/>
+        </p:spPr>
+        <p:txBody>
+          <a:bodyPr wrap="none" rtlCol="0">
+            <a:spAutoFit/>
+          </a:bodyPr>
+          <a:lstStyle/>
+          <a:p>
+            <a:r>
+              <a:rPr lang="en-US" dirty="0"/>
+              <a:t>Matrix initialize</a:t>
+            </a:r>
+          </a:p>
+        </p:txBody>
+      </p:sp>
+      <p:sp>
+        <p:nvSpPr>
+          <p:cNvPr id="15" name="TextBox 14">
+            <a:extLst>
+              <a:ext uri="{FF2B5EF4-FFF2-40B4-BE49-F238E27FC236}">
+                <a16:creationId xmlns:a16="http://schemas.microsoft.com/office/drawing/2014/main" id="{5AC42510-7505-8080-DACA-010297680AE7}"/>
+              </a:ext>
+            </a:extLst>
+          </p:cNvPr>
+          <p:cNvSpPr txBox="1"/>
+          <p:nvPr/>
+        </p:nvSpPr>
+        <p:spPr>
+          <a:xfrm>
+            <a:off x="9130431" y="3022048"/>
+            <a:ext cx="703398" cy="369332"/>
+          </a:xfrm>
+          <a:prstGeom prst="rect">
+            <a:avLst/>
+          </a:prstGeom>
+          <a:noFill/>
+        </p:spPr>
+        <p:txBody>
+          <a:bodyPr wrap="none" rtlCol="0">
+            <a:spAutoFit/>
+          </a:bodyPr>
+          <a:lstStyle/>
+          <a:p>
+            <a:r>
+              <a:rPr lang="en-US" dirty="0"/>
+              <a:t>Copy</a:t>
+            </a:r>
+          </a:p>
+        </p:txBody>
+      </p:sp>
+      <p:sp>
+        <p:nvSpPr>
+          <p:cNvPr id="18" name="TextBox 17">
+            <a:extLst>
+              <a:ext uri="{FF2B5EF4-FFF2-40B4-BE49-F238E27FC236}">
+                <a16:creationId xmlns:a16="http://schemas.microsoft.com/office/drawing/2014/main" id="{6C2D8186-5554-A5E9-260E-01CC6F7A914B}"/>
+              </a:ext>
+            </a:extLst>
+          </p:cNvPr>
+          <p:cNvSpPr txBox="1"/>
+          <p:nvPr/>
+        </p:nvSpPr>
+        <p:spPr>
+          <a:xfrm>
+            <a:off x="6539590" y="4425419"/>
+            <a:ext cx="1651414" cy="369332"/>
+          </a:xfrm>
+          <a:prstGeom prst="rect">
+            <a:avLst/>
+          </a:prstGeom>
+          <a:noFill/>
+        </p:spPr>
+        <p:txBody>
+          <a:bodyPr wrap="none" rtlCol="0">
+            <a:spAutoFit/>
+          </a:bodyPr>
+          <a:lstStyle/>
+          <a:p>
+            <a:pPr algn="ctr"/>
+            <a:r>
+              <a:rPr lang="en-US" dirty="0"/>
+              <a:t>Matrix multiply</a:t>
+            </a:r>
+          </a:p>
+        </p:txBody>
+      </p:sp>
     </p:spTree>
     <p:extLst>
       <p:ext uri="{BB962C8B-B14F-4D97-AF65-F5344CB8AC3E}">
@@ -41236,7 +41402,7 @@
               <a:t>) ^ </a:t>
             </a:r>
             <a:r>
-              <a:rPr lang="en-US" sz="1600" b="0" noProof="0" dirty="0" err="1">
+              <a:rPr lang="en-US" sz="1600" b="1" noProof="0" dirty="0" err="1">
                 <a:solidFill>
                   <a:srgbClr val="001080"/>
                 </a:solidFill>
@@ -41246,6 +41412,16 @@
               <a:t>by_tiles</a:t>
             </a:r>
             <a:r>
+              <a:rPr lang="en-US" sz="1600" b="1" noProof="0" dirty="0">
+                <a:solidFill>
+                  <a:srgbClr val="000000"/>
+                </a:solidFill>
+                <a:effectLst/>
+                <a:latin typeface="Fira Code" panose="020B0809050000020004" pitchFamily="49" charset="0"/>
+              </a:rPr>
+              <a:t> </a:t>
+            </a:r>
+            <a:r>
               <a:rPr lang="en-US" sz="1600" b="0" noProof="0" dirty="0">
                 <a:solidFill>
                   <a:srgbClr val="000000"/>
@@ -41253,7 +41429,7 @@
                 <a:effectLst/>
                 <a:latin typeface="Fira Code" panose="020B0809050000020004" pitchFamily="49" charset="0"/>
               </a:rPr>
-              <a:t> | [&amp;](</a:t>
+              <a:t>| [&amp;](</a:t>
             </a:r>
             <a:r>
               <a:rPr lang="en-US" sz="1600" b="0" noProof="0" dirty="0">

--- a/slides/Optimizing Memory Layouts and Traversal Orders in High-Performance Computing.pptx
+++ b/slides/Optimizing Memory Layouts and Traversal Orders in High-Performance Computing.pptx
@@ -1354,7 +1354,7 @@
           <a:p>
             <a:r>
               <a:rPr lang="en-US" dirty="0"/>
-              <a:t>We have compared the state of the art C++ bindings for MPI in how they manage to seamlessly enable layout-agnostic communication of data over MPI</a:t>
+              <a:t>(key idea: it is very great)</a:t>
             </a:r>
           </a:p>
           <a:p>
@@ -1363,7 +1363,31 @@
           <a:p>
             <a:r>
               <a:rPr lang="en-US" dirty="0"/>
-              <a:t>This requires that the framework encodes the layout correctly so it is automatically transformed between the two end-points</a:t>
+              <a:t>We have compared our approach to various state-of-the-art C++ bindings for MPI in terms of how they manage to seamlessly enable layout-agnostic communication of data over MPI.</a:t>
+            </a:r>
+          </a:p>
+          <a:p>
+            <a:endParaRPr lang="en-US" dirty="0"/>
+          </a:p>
+          <a:p>
+            <a:r>
+              <a:rPr lang="en-US" dirty="0"/>
+              <a:t>Our approach is the only one that automatically handles differing physical layouts on opposite endpoints of communication (as shown on the previous slide),</a:t>
+            </a:r>
+          </a:p>
+          <a:p>
+            <a:r>
+              <a:rPr lang="en-US" dirty="0"/>
+              <a:t>And it also handles general multidimensional data layouts.</a:t>
+            </a:r>
+          </a:p>
+          <a:p>
+            <a:endParaRPr lang="en-US" dirty="0"/>
+          </a:p>
+          <a:p>
+            <a:r>
+              <a:rPr lang="en-US" dirty="0"/>
+              <a:t>And, in terms of performance, it does not add overhead compared to a hand-written native MPI distributed computation.</a:t>
             </a:r>
           </a:p>
         </p:txBody>
@@ -1903,7 +1927,13 @@
           <a:p>
             <a:r>
               <a:rPr lang="en-US" dirty="0"/>
-              <a:t>(key idea: we’ve left abstractions to help LLMs generate better para code)</a:t>
+              <a:t>Thus, we have shown that the abstractions offer a practical solution to parallel CPU and GPU, as well as distributed computations in High-Performance Computing,</a:t>
+            </a:r>
+          </a:p>
+          <a:p>
+            <a:r>
+              <a:rPr lang="en-US" dirty="0"/>
+              <a:t>And enable even stronger optimizations for specific domains, such as Cellular Automata simulation</a:t>
             </a:r>
           </a:p>
           <a:p>
@@ -1912,136 +1942,7 @@
           <a:p>
             <a:r>
               <a:rPr lang="en-US" dirty="0"/>
-              <a:t>After extending our earlier work to cover distributed computing as well and adapting it for a specific domain,</a:t>
-            </a:r>
-          </a:p>
-          <a:p>
-            <a:r>
-              <a:rPr lang="en-US" dirty="0"/>
-              <a:t>We have started to do research in a different approach for simplifying HPC algorithm design.</a:t>
-            </a:r>
-          </a:p>
-          <a:p>
-            <a:endParaRPr lang="en-US" dirty="0"/>
-          </a:p>
-          <a:p>
-            <a:pPr marL="0" marR="0" lvl="0" indent="0" algn="l" defTabSz="914400" rtl="0" eaLnBrk="1" fontAlgn="auto" latinLnBrk="0" hangingPunct="1">
-              <a:lnSpc>
-                <a:spcPct val="100000"/>
-              </a:lnSpc>
-              <a:spcBef>
-                <a:spcPts val="0"/>
-              </a:spcBef>
-              <a:spcAft>
-                <a:spcPts val="0"/>
-              </a:spcAft>
-              <a:buClrTx/>
-              <a:buSzTx/>
-              <a:buFontTx/>
-              <a:buNone/>
-              <a:tabLst/>
-              <a:defRPr/>
-            </a:pPr>
-            <a:r>
-              <a:rPr lang="en-US" dirty="0"/>
-              <a:t>This work reacts to the recent introduction of LLM models to the area of software design.</a:t>
-            </a:r>
-          </a:p>
-          <a:p>
-            <a:pPr marL="0" marR="0" lvl="0" indent="0" algn="l" defTabSz="914400" rtl="0" eaLnBrk="1" fontAlgn="auto" latinLnBrk="0" hangingPunct="1">
-              <a:lnSpc>
-                <a:spcPct val="100000"/>
-              </a:lnSpc>
-              <a:spcBef>
-                <a:spcPts val="0"/>
-              </a:spcBef>
-              <a:spcAft>
-                <a:spcPts val="0"/>
-              </a:spcAft>
-              <a:buClrTx/>
-              <a:buSzTx/>
-              <a:buFontTx/>
-              <a:buNone/>
-              <a:tabLst/>
-              <a:defRPr/>
-            </a:pPr>
-            <a:r>
-              <a:rPr lang="en-US" dirty="0"/>
-              <a:t>At the time of the beginning of our research in this area, LLM models were capable of implementing simple algorithms (like data visualization, simple scripting, </a:t>
-            </a:r>
-            <a:r>
-              <a:rPr lang="en-US" dirty="0" err="1"/>
-              <a:t>etc</a:t>
-            </a:r>
-            <a:r>
-              <a:rPr lang="en-US" dirty="0"/>
-              <a:t>),</a:t>
-            </a:r>
-          </a:p>
-          <a:p>
-            <a:pPr marL="0" marR="0" lvl="0" indent="0" algn="l" defTabSz="914400" rtl="0" eaLnBrk="1" fontAlgn="auto" latinLnBrk="0" hangingPunct="1">
-              <a:lnSpc>
-                <a:spcPct val="100000"/>
-              </a:lnSpc>
-              <a:spcBef>
-                <a:spcPts val="0"/>
-              </a:spcBef>
-              <a:spcAft>
-                <a:spcPts val="0"/>
-              </a:spcAft>
-              <a:buClrTx/>
-              <a:buSzTx/>
-              <a:buFontTx/>
-              <a:buNone/>
-              <a:tabLst/>
-              <a:defRPr/>
-            </a:pPr>
-            <a:r>
-              <a:rPr lang="en-US" dirty="0"/>
-              <a:t>But not yet that competent at making more high-level design decisions for efficient computation, especially in parallel algorithms.</a:t>
-            </a:r>
-          </a:p>
-          <a:p>
-            <a:pPr marL="0" marR="0" lvl="0" indent="0" algn="l" defTabSz="914400" rtl="0" eaLnBrk="1" fontAlgn="auto" latinLnBrk="0" hangingPunct="1">
-              <a:lnSpc>
-                <a:spcPct val="100000"/>
-              </a:lnSpc>
-              <a:spcBef>
-                <a:spcPts val="0"/>
-              </a:spcBef>
-              <a:spcAft>
-                <a:spcPts val="0"/>
-              </a:spcAft>
-              <a:buClrTx/>
-              <a:buSzTx/>
-              <a:buFontTx/>
-              <a:buNone/>
-              <a:tabLst/>
-              <a:defRPr/>
-            </a:pPr>
-            <a:endParaRPr lang="en-US" dirty="0"/>
-          </a:p>
-          <a:p>
-            <a:pPr marL="0" marR="0" lvl="0" indent="0" algn="l" defTabSz="914400" rtl="0" eaLnBrk="1" fontAlgn="auto" latinLnBrk="0" hangingPunct="1">
-              <a:lnSpc>
-                <a:spcPct val="100000"/>
-              </a:lnSpc>
-              <a:spcBef>
-                <a:spcPts val="0"/>
-              </a:spcBef>
-              <a:spcAft>
-                <a:spcPts val="0"/>
-              </a:spcAft>
-              <a:buClrTx/>
-              <a:buSzTx/>
-              <a:buFontTx/>
-              <a:buNone/>
-              <a:tabLst/>
-              <a:defRPr/>
-            </a:pPr>
-            <a:r>
-              <a:rPr lang="en-US" dirty="0"/>
-              <a:t>Therefore, our research has focused on identifying what helps LLMs generate better code and what does not.</a:t>
+              <a:t>These abstractions make the developed algorithms easier to manage, more flexible to transform, and allow automatic application of advanced optimizations.</a:t>
             </a:r>
           </a:p>
         </p:txBody>
@@ -2063,7 +1964,7 @@
           <a:p>
             <a:fld id="{FA8FD632-245B-410D-BCC4-8BF8D37AB67F}" type="slidenum">
               <a:rPr lang="en-US" smtClean="0"/>
-              <a:t>19</a:t>
+              <a:t>18</a:t>
             </a:fld>
             <a:endParaRPr lang="en-US"/>
           </a:p>
@@ -2072,7 +1973,7 @@
     </p:spTree>
     <p:extLst>
       <p:ext uri="{BB962C8B-B14F-4D97-AF65-F5344CB8AC3E}">
-        <p14:creationId xmlns:p14="http://schemas.microsoft.com/office/powerpoint/2010/main" val="3351236279"/>
+        <p14:creationId xmlns:p14="http://schemas.microsoft.com/office/powerpoint/2010/main" val="1243571906"/>
       </p:ext>
     </p:extLst>
   </p:cSld>
@@ -2128,7 +2029,7 @@
           <a:p>
             <a:r>
               <a:rPr lang="en-US" dirty="0"/>
-              <a:t>(key idea: tutoring; what is it?)</a:t>
+              <a:t>(key idea: we’ve left abstractions to help LLMs generate better para code)</a:t>
             </a:r>
           </a:p>
           <a:p>
@@ -2137,23 +2038,136 @@
           <a:p>
             <a:r>
               <a:rPr lang="en-US" dirty="0"/>
-              <a:t>In our first work in this area, we focused on CUDA code generation, which was one of the challenging areas for the contemporary LLMs; more specifically,</a:t>
-            </a:r>
-            <a:br>
-              <a:rPr lang="en-US" dirty="0"/>
-            </a:br>
-            <a:r>
-              <a:rPr lang="en-US" dirty="0"/>
-              <a:t>we studied whether adding increasingly more detailed high-level design hints or outright dictating some design decisions significantly helps LLMs generate better code</a:t>
+              <a:t>After extending our earlier work to cover distributed computing as well and adapting it for a specific domain,</a:t>
+            </a:r>
+          </a:p>
+          <a:p>
+            <a:r>
+              <a:rPr lang="en-US" dirty="0"/>
+              <a:t>We have started to do research in a different approach for simplifying HPC algorithm design.</a:t>
             </a:r>
           </a:p>
           <a:p>
             <a:endParaRPr lang="en-US" dirty="0"/>
           </a:p>
           <a:p>
-            <a:r>
-              <a:rPr lang="en-US" dirty="0"/>
-              <a:t>(…)</a:t>
+            <a:pPr marL="0" marR="0" lvl="0" indent="0" algn="l" defTabSz="914400" rtl="0" eaLnBrk="1" fontAlgn="auto" latinLnBrk="0" hangingPunct="1">
+              <a:lnSpc>
+                <a:spcPct val="100000"/>
+              </a:lnSpc>
+              <a:spcBef>
+                <a:spcPts val="0"/>
+              </a:spcBef>
+              <a:spcAft>
+                <a:spcPts val="0"/>
+              </a:spcAft>
+              <a:buClrTx/>
+              <a:buSzTx/>
+              <a:buFontTx/>
+              <a:buNone/>
+              <a:tabLst/>
+              <a:defRPr/>
+            </a:pPr>
+            <a:r>
+              <a:rPr lang="en-US" dirty="0"/>
+              <a:t>This work reacts to the recent introduction of LLM models to the area of software design.</a:t>
+            </a:r>
+          </a:p>
+          <a:p>
+            <a:pPr marL="0" marR="0" lvl="0" indent="0" algn="l" defTabSz="914400" rtl="0" eaLnBrk="1" fontAlgn="auto" latinLnBrk="0" hangingPunct="1">
+              <a:lnSpc>
+                <a:spcPct val="100000"/>
+              </a:lnSpc>
+              <a:spcBef>
+                <a:spcPts val="0"/>
+              </a:spcBef>
+              <a:spcAft>
+                <a:spcPts val="0"/>
+              </a:spcAft>
+              <a:buClrTx/>
+              <a:buSzTx/>
+              <a:buFontTx/>
+              <a:buNone/>
+              <a:tabLst/>
+              <a:defRPr/>
+            </a:pPr>
+            <a:r>
+              <a:rPr lang="en-US" dirty="0"/>
+              <a:t>At the time of the beginning of our research in this area, LLM models were capable of implementing simple algorithms (like data visualization, simple scripting, </a:t>
+            </a:r>
+            <a:r>
+              <a:rPr lang="en-US" dirty="0" err="1"/>
+              <a:t>etc</a:t>
+            </a:r>
+            <a:r>
+              <a:rPr lang="en-US" dirty="0"/>
+              <a:t>),</a:t>
+            </a:r>
+          </a:p>
+          <a:p>
+            <a:pPr marL="0" marR="0" lvl="0" indent="0" algn="l" defTabSz="914400" rtl="0" eaLnBrk="1" fontAlgn="auto" latinLnBrk="0" hangingPunct="1">
+              <a:lnSpc>
+                <a:spcPct val="100000"/>
+              </a:lnSpc>
+              <a:spcBef>
+                <a:spcPts val="0"/>
+              </a:spcBef>
+              <a:spcAft>
+                <a:spcPts val="0"/>
+              </a:spcAft>
+              <a:buClrTx/>
+              <a:buSzTx/>
+              <a:buFontTx/>
+              <a:buNone/>
+              <a:tabLst/>
+              <a:defRPr/>
+            </a:pPr>
+            <a:r>
+              <a:rPr lang="en-US" dirty="0"/>
+              <a:t>But not yet that competent at making more high-level design decisions for efficient computation, especially in parallel algorithms.</a:t>
+            </a:r>
+          </a:p>
+          <a:p>
+            <a:pPr marL="0" marR="0" lvl="0" indent="0" algn="l" defTabSz="914400" rtl="0" eaLnBrk="1" fontAlgn="auto" latinLnBrk="0" hangingPunct="1">
+              <a:lnSpc>
+                <a:spcPct val="100000"/>
+              </a:lnSpc>
+              <a:spcBef>
+                <a:spcPts val="0"/>
+              </a:spcBef>
+              <a:spcAft>
+                <a:spcPts val="0"/>
+              </a:spcAft>
+              <a:buClrTx/>
+              <a:buSzTx/>
+              <a:buFontTx/>
+              <a:buNone/>
+              <a:tabLst/>
+              <a:defRPr/>
+            </a:pPr>
+            <a:endParaRPr lang="en-US" dirty="0"/>
+          </a:p>
+          <a:p>
+            <a:pPr marL="0" marR="0" lvl="0" indent="0" algn="l" defTabSz="914400" rtl="0" eaLnBrk="1" fontAlgn="auto" latinLnBrk="0" hangingPunct="1">
+              <a:lnSpc>
+                <a:spcPct val="100000"/>
+              </a:lnSpc>
+              <a:spcBef>
+                <a:spcPts val="0"/>
+              </a:spcBef>
+              <a:spcAft>
+                <a:spcPts val="0"/>
+              </a:spcAft>
+              <a:buClrTx/>
+              <a:buSzTx/>
+              <a:buFontTx/>
+              <a:buNone/>
+              <a:tabLst/>
+              <a:defRPr/>
+            </a:pPr>
+            <a:r>
+              <a:rPr lang="en-US" dirty="0"/>
+              <a:t>Therefore, our research has focused on identifying what helps LLMs generate better code and what does not.</a:t>
             </a:r>
           </a:p>
         </p:txBody>
@@ -2175,7 +2189,7 @@
           <a:p>
             <a:fld id="{FA8FD632-245B-410D-BCC4-8BF8D37AB67F}" type="slidenum">
               <a:rPr lang="en-US" smtClean="0"/>
-              <a:t>20</a:t>
+              <a:t>19</a:t>
             </a:fld>
             <a:endParaRPr lang="en-US"/>
           </a:p>
@@ -2184,7 +2198,7 @@
     </p:spTree>
     <p:extLst>
       <p:ext uri="{BB962C8B-B14F-4D97-AF65-F5344CB8AC3E}">
-        <p14:creationId xmlns:p14="http://schemas.microsoft.com/office/powerpoint/2010/main" val="4235059812"/>
+        <p14:creationId xmlns:p14="http://schemas.microsoft.com/office/powerpoint/2010/main" val="3351236279"/>
       </p:ext>
     </p:extLst>
   </p:cSld>
@@ -2383,6 +2397,118 @@
   <p:cSld>
     <p:spTree>
       <p:nvGrpSpPr>
+        <p:cNvPr id="1" name=""/>
+        <p:cNvGrpSpPr/>
+        <p:nvPr/>
+      </p:nvGrpSpPr>
+      <p:grpSpPr>
+        <a:xfrm>
+          <a:off x="0" y="0"/>
+          <a:ext cx="0" cy="0"/>
+          <a:chOff x="0" y="0"/>
+          <a:chExt cx="0" cy="0"/>
+        </a:xfrm>
+      </p:grpSpPr>
+      <p:sp>
+        <p:nvSpPr>
+          <p:cNvPr id="2" name="Slide Image Placeholder 1"/>
+          <p:cNvSpPr>
+            <a:spLocks noGrp="1" noRot="1" noChangeAspect="1"/>
+          </p:cNvSpPr>
+          <p:nvPr>
+            <p:ph type="sldImg"/>
+          </p:nvPr>
+        </p:nvSpPr>
+        <p:spPr/>
+      </p:sp>
+      <p:sp>
+        <p:nvSpPr>
+          <p:cNvPr id="3" name="Notes Placeholder 2"/>
+          <p:cNvSpPr>
+            <a:spLocks noGrp="1"/>
+          </p:cNvSpPr>
+          <p:nvPr>
+            <p:ph type="body" idx="1"/>
+          </p:nvPr>
+        </p:nvSpPr>
+        <p:spPr/>
+        <p:txBody>
+          <a:bodyPr/>
+          <a:lstStyle/>
+          <a:p>
+            <a:r>
+              <a:rPr lang="en-US" dirty="0"/>
+              <a:t>(key idea: tutoring; what is it?)</a:t>
+            </a:r>
+          </a:p>
+          <a:p>
+            <a:endParaRPr lang="en-US" dirty="0"/>
+          </a:p>
+          <a:p>
+            <a:r>
+              <a:rPr lang="en-US" dirty="0"/>
+              <a:t>In our first work in this area, we focused on CUDA code generation, which was one of the challenging areas for the contemporary LLMs; more specifically,</a:t>
+            </a:r>
+            <a:br>
+              <a:rPr lang="en-US" dirty="0"/>
+            </a:br>
+            <a:r>
+              <a:rPr lang="en-US" dirty="0"/>
+              <a:t>we studied whether adding increasingly more detailed high-level design hints or outright dictating some design decisions significantly helps LLMs generate better code</a:t>
+            </a:r>
+          </a:p>
+          <a:p>
+            <a:endParaRPr lang="en-US" dirty="0"/>
+          </a:p>
+          <a:p>
+            <a:r>
+              <a:rPr lang="en-US" dirty="0"/>
+              <a:t>(…)</a:t>
+            </a:r>
+          </a:p>
+        </p:txBody>
+      </p:sp>
+      <p:sp>
+        <p:nvSpPr>
+          <p:cNvPr id="4" name="Slide Number Placeholder 3"/>
+          <p:cNvSpPr>
+            <a:spLocks noGrp="1"/>
+          </p:cNvSpPr>
+          <p:nvPr>
+            <p:ph type="sldNum" sz="quarter" idx="5"/>
+          </p:nvPr>
+        </p:nvSpPr>
+        <p:spPr/>
+        <p:txBody>
+          <a:bodyPr/>
+          <a:lstStyle/>
+          <a:p>
+            <a:fld id="{FA8FD632-245B-410D-BCC4-8BF8D37AB67F}" type="slidenum">
+              <a:rPr lang="en-US" smtClean="0"/>
+              <a:t>20</a:t>
+            </a:fld>
+            <a:endParaRPr lang="en-US"/>
+          </a:p>
+        </p:txBody>
+      </p:sp>
+    </p:spTree>
+    <p:extLst>
+      <p:ext uri="{BB962C8B-B14F-4D97-AF65-F5344CB8AC3E}">
+        <p14:creationId xmlns:p14="http://schemas.microsoft.com/office/powerpoint/2010/main" val="4235059812"/>
+      </p:ext>
+    </p:extLst>
+  </p:cSld>
+  <p:clrMapOvr>
+    <a:masterClrMapping/>
+  </p:clrMapOvr>
+</p:notes>
+</file>
+
+<file path=ppt/notesSlides/notesSlide21.xml><?xml version="1.0" encoding="utf-8"?>
+<p:notes xmlns:a="http://schemas.openxmlformats.org/drawingml/2006/main" xmlns:r="http://schemas.openxmlformats.org/officeDocument/2006/relationships" xmlns:p="http://schemas.openxmlformats.org/presentationml/2006/main">
+  <p:cSld>
+    <p:spTree>
+      <p:nvGrpSpPr>
         <p:cNvPr id="1" name="">
           <a:extLst>
             <a:ext uri="{FF2B5EF4-FFF2-40B4-BE49-F238E27FC236}">
@@ -2507,7 +2633,7 @@
           <a:p>
             <a:r>
               <a:rPr lang="en-US" dirty="0"/>
-              <a:t>Efficient implementations of these three algorithms require considering more obscure or CUDA-specific features such as</a:t>
+              <a:t>Efficient implementations of these three algorithms require considering more obscure or CUDA-specific features, such as</a:t>
             </a:r>
           </a:p>
           <a:p>
@@ -2554,22 +2680,22 @@
             </a:pPr>
             <a:r>
               <a:rPr lang="en-US" dirty="0"/>
-              <a:t>For the easier, Histogram and Game of Life algorithms, the LLM generated progressively better code,</a:t>
+              <a:t>For the easier, Histogram and Game of Life algorithms, GPT-o3-mini, a </a:t>
+            </a:r>
+            <a:r>
+              <a:rPr lang="en-US" dirty="0" err="1"/>
+              <a:t>SotA</a:t>
+            </a:r>
+            <a:r>
+              <a:rPr lang="en-US" dirty="0"/>
+              <a:t> LLM model at that time, generated progressively better code,</a:t>
             </a:r>
             <a:br>
               <a:rPr lang="en-US" dirty="0"/>
             </a:br>
             <a:r>
               <a:rPr lang="en-US" dirty="0"/>
-              <a:t>but for the k-</a:t>
-            </a:r>
-            <a:r>
-              <a:rPr lang="en-US" dirty="0" err="1"/>
-              <a:t>Nearnearest</a:t>
-            </a:r>
-            <a:r>
-              <a:rPr lang="en-US" dirty="0"/>
-              <a:t> Neighbors search, it managed to implement only the naïve implementation,</a:t>
+              <a:t>but for the k-Nearest Neighbors search, it managed to implement only the naïve implementation,</a:t>
             </a:r>
             <a:br>
               <a:rPr lang="en-US" dirty="0"/>
@@ -2623,7 +2749,7 @@
 </p:notes>
 </file>
 
-<file path=ppt/notesSlides/notesSlide21.xml><?xml version="1.0" encoding="utf-8"?>
+<file path=ppt/notesSlides/notesSlide22.xml><?xml version="1.0" encoding="utf-8"?>
 <p:notes xmlns:a="http://schemas.openxmlformats.org/drawingml/2006/main" xmlns:r="http://schemas.openxmlformats.org/officeDocument/2006/relationships" xmlns:p="http://schemas.openxmlformats.org/presentationml/2006/main">
   <p:cSld>
     <p:spTree>
@@ -2687,7 +2813,49 @@
           <a:p>
             <a:r>
               <a:rPr lang="en-US" dirty="0"/>
-              <a:t>(TODO)</a:t>
+              <a:t>(key idea: the performance progression matches the assumption)</a:t>
+            </a:r>
+          </a:p>
+          <a:p>
+            <a:endParaRPr lang="en-US" dirty="0"/>
+          </a:p>
+          <a:p>
+            <a:r>
+              <a:rPr lang="en-US" dirty="0"/>
+              <a:t>Here, we can see the plots for the performance measurements of the generated code for the Histogram and Game of Life algorithms.</a:t>
+            </a:r>
+          </a:p>
+          <a:p>
+            <a:endParaRPr lang="en-US" dirty="0"/>
+          </a:p>
+          <a:p>
+            <a:r>
+              <a:rPr lang="en-US" dirty="0"/>
+              <a:t>Both show wall clock times of the runtime on a representative dataset (on the y-axis), lower is better;</a:t>
+            </a:r>
+          </a:p>
+          <a:p>
+            <a:r>
+              <a:rPr lang="en-US" dirty="0"/>
+              <a:t>And the x-axis of both shows the incrementally more specific prompts.</a:t>
+            </a:r>
+          </a:p>
+          <a:p>
+            <a:endParaRPr lang="en-US" dirty="0"/>
+          </a:p>
+          <a:p>
+            <a:r>
+              <a:rPr lang="en-US" dirty="0"/>
+              <a:t>The horizontal lines show various reference implementations.</a:t>
+            </a:r>
+          </a:p>
+          <a:p>
+            <a:endParaRPr lang="en-US" dirty="0"/>
+          </a:p>
+          <a:p>
+            <a:r>
+              <a:rPr lang="en-US" dirty="0"/>
+              <a:t>The performance improves with more specific prompts, which is slightly noticeable for the Histogram algorithm, and more so for the Game of Life algorithm.</a:t>
             </a:r>
           </a:p>
         </p:txBody>
@@ -2734,7 +2902,7 @@
 </p:notes>
 </file>
 
-<file path=ppt/notesSlides/notesSlide22.xml><?xml version="1.0" encoding="utf-8"?>
+<file path=ppt/notesSlides/notesSlide23.xml><?xml version="1.0" encoding="utf-8"?>
 <p:notes xmlns:a="http://schemas.openxmlformats.org/drawingml/2006/main" xmlns:r="http://schemas.openxmlformats.org/officeDocument/2006/relationships" xmlns:p="http://schemas.openxmlformats.org/presentationml/2006/main">
   <p:cSld>
     <p:spTree>
@@ -2798,7 +2966,28 @@
           <a:p>
             <a:r>
               <a:rPr lang="en-US" dirty="0"/>
-              <a:t>(TODO)</a:t>
+              <a:t>(key idea: LLMs improve over time, the complexity threshold shifts)</a:t>
+            </a:r>
+          </a:p>
+          <a:p>
+            <a:endParaRPr lang="en-US" dirty="0"/>
+          </a:p>
+          <a:p>
+            <a:r>
+              <a:rPr lang="en-US" dirty="0"/>
+              <a:t>When we presented our results, the LLM state of the art had already shifted;</a:t>
+            </a:r>
+          </a:p>
+          <a:p>
+            <a:r>
+              <a:rPr lang="en-US" dirty="0"/>
+              <a:t>The then-current GPT-5 provided expert-level performance on the Game of Life algorithm for all prompts except the naïve one,</a:t>
+            </a:r>
+          </a:p>
+          <a:p>
+            <a:r>
+              <a:rPr lang="en-US" dirty="0"/>
+              <a:t>And it successfully benefitted from tutoring for the k-Nearest Neighbor algorithm.</a:t>
             </a:r>
           </a:p>
         </p:txBody>
@@ -2836,127 +3025,6 @@
     <p:extLst>
       <p:ext uri="{BB962C8B-B14F-4D97-AF65-F5344CB8AC3E}">
         <p14:creationId xmlns:p14="http://schemas.microsoft.com/office/powerpoint/2010/main" val="2367210526"/>
-      </p:ext>
-    </p:extLst>
-  </p:cSld>
-  <p:clrMapOvr>
-    <a:masterClrMapping/>
-  </p:clrMapOvr>
-</p:notes>
-</file>
-
-<file path=ppt/notesSlides/notesSlide23.xml><?xml version="1.0" encoding="utf-8"?>
-<p:notes xmlns:a="http://schemas.openxmlformats.org/drawingml/2006/main" xmlns:r="http://schemas.openxmlformats.org/officeDocument/2006/relationships" xmlns:p="http://schemas.openxmlformats.org/presentationml/2006/main">
-  <p:cSld>
-    <p:spTree>
-      <p:nvGrpSpPr>
-        <p:cNvPr id="1" name=""/>
-        <p:cNvGrpSpPr/>
-        <p:nvPr/>
-      </p:nvGrpSpPr>
-      <p:grpSpPr>
-        <a:xfrm>
-          <a:off x="0" y="0"/>
-          <a:ext cx="0" cy="0"/>
-          <a:chOff x="0" y="0"/>
-          <a:chExt cx="0" cy="0"/>
-        </a:xfrm>
-      </p:grpSpPr>
-      <p:sp>
-        <p:nvSpPr>
-          <p:cNvPr id="2" name="Slide Image Placeholder 1"/>
-          <p:cNvSpPr>
-            <a:spLocks noGrp="1" noRot="1" noChangeAspect="1"/>
-          </p:cNvSpPr>
-          <p:nvPr>
-            <p:ph type="sldImg"/>
-          </p:nvPr>
-        </p:nvSpPr>
-        <p:spPr/>
-      </p:sp>
-      <p:sp>
-        <p:nvSpPr>
-          <p:cNvPr id="3" name="Notes Placeholder 2"/>
-          <p:cNvSpPr>
-            <a:spLocks noGrp="1"/>
-          </p:cNvSpPr>
-          <p:nvPr>
-            <p:ph type="body" idx="1"/>
-          </p:nvPr>
-        </p:nvSpPr>
-        <p:spPr/>
-        <p:txBody>
-          <a:bodyPr/>
-          <a:lstStyle/>
-          <a:p>
-            <a:r>
-              <a:rPr lang="en-US" dirty="0"/>
-              <a:t>(key idea: combining the two branches)</a:t>
-            </a:r>
-          </a:p>
-          <a:p>
-            <a:endParaRPr lang="en-US" dirty="0"/>
-          </a:p>
-          <a:p>
-            <a:r>
-              <a:rPr lang="en-US" dirty="0"/>
-              <a:t>Then, we have studied whether the earlier studied abstractions enabling layout- and traversal-agnostic design significantly improve the correctness and efficiency of the generated parallel code during optimization tasks.</a:t>
-            </a:r>
-          </a:p>
-          <a:p>
-            <a:endParaRPr lang="en-US" dirty="0"/>
-          </a:p>
-          <a:p>
-            <a:r>
-              <a:rPr lang="en-US" dirty="0"/>
-              <a:t>For that, we have compared 3 abstractions (Halide, Exo and </a:t>
-            </a:r>
-            <a:r>
-              <a:rPr lang="en-US" dirty="0" err="1"/>
-              <a:t>Noarr</a:t>
-            </a:r>
-            <a:r>
-              <a:rPr lang="en-US" dirty="0"/>
-              <a:t>) with different designs and principles as well as outputting pure C on the 30 algorithms from the </a:t>
-            </a:r>
-            <a:r>
-              <a:rPr lang="en-US" dirty="0" err="1"/>
-              <a:t>PolyBench</a:t>
-            </a:r>
-            <a:r>
-              <a:rPr lang="en-US" dirty="0"/>
-              <a:t>/C benchmark suite.</a:t>
-            </a:r>
-          </a:p>
-        </p:txBody>
-      </p:sp>
-      <p:sp>
-        <p:nvSpPr>
-          <p:cNvPr id="4" name="Slide Number Placeholder 3"/>
-          <p:cNvSpPr>
-            <a:spLocks noGrp="1"/>
-          </p:cNvSpPr>
-          <p:nvPr>
-            <p:ph type="sldNum" sz="quarter" idx="5"/>
-          </p:nvPr>
-        </p:nvSpPr>
-        <p:spPr/>
-        <p:txBody>
-          <a:bodyPr/>
-          <a:lstStyle/>
-          <a:p>
-            <a:fld id="{FA8FD632-245B-410D-BCC4-8BF8D37AB67F}" type="slidenum">
-              <a:rPr lang="en-US" smtClean="0"/>
-              <a:t>24</a:t>
-            </a:fld>
-            <a:endParaRPr lang="en-US"/>
-          </a:p>
-        </p:txBody>
-      </p:sp>
-    </p:spTree>
-    <p:extLst>
-      <p:ext uri="{BB962C8B-B14F-4D97-AF65-F5344CB8AC3E}">
-        <p14:creationId xmlns:p14="http://schemas.microsoft.com/office/powerpoint/2010/main" val="2436190103"/>
       </p:ext>
     </p:extLst>
   </p:cSld>
@@ -3012,7 +3080,7 @@
           <a:p>
             <a:r>
               <a:rPr lang="en-US" dirty="0"/>
-              <a:t>(key idea: we did a lot)</a:t>
+              <a:t>(key idea: combining the two branches)</a:t>
             </a:r>
           </a:p>
           <a:p>
@@ -3021,120 +3089,32 @@
           <a:p>
             <a:r>
               <a:rPr lang="en-US" dirty="0"/>
-              <a:t>In the experimental setup, we have used a multithreaded datacenter-grade computer, and to avoid many mistakes, the optimization pipeline consisted of two generation steps:</a:t>
-            </a:r>
-          </a:p>
-          <a:p>
-            <a:pPr marL="171450" indent="-171450">
-              <a:buFontTx/>
-              <a:buChar char="-"/>
-            </a:pPr>
-            <a:r>
-              <a:rPr lang="en-US" dirty="0"/>
-              <a:t>The first translated the baseline algorithm into the given abstraction</a:t>
-            </a:r>
-          </a:p>
-          <a:p>
-            <a:pPr marL="171450" indent="-171450">
-              <a:buFontTx/>
-              <a:buChar char="-"/>
-            </a:pPr>
-            <a:r>
-              <a:rPr lang="en-US" dirty="0"/>
-              <a:t>And the second one optimized the translation that best matched the baseline</a:t>
-            </a:r>
-          </a:p>
-          <a:p>
-            <a:pPr marL="0" indent="0">
-              <a:buFontTx/>
-              <a:buNone/>
-            </a:pPr>
+              <a:t>Then, we have studied whether the earlier studied abstractions enabling layout- and traversal-agnostic design significantly improve the correctness and efficiency of the generated parallel code during optimization tasks.</a:t>
+            </a:r>
+          </a:p>
+          <a:p>
             <a:endParaRPr lang="en-US" dirty="0"/>
           </a:p>
           <a:p>
-            <a:pPr marL="0" indent="0">
-              <a:buFontTx/>
-              <a:buNone/>
-            </a:pPr>
-            <a:r>
-              <a:rPr lang="en-US" dirty="0"/>
-              <a:t>The first step was followed up by an automated selection of the best generated translation.</a:t>
-            </a:r>
-          </a:p>
-          <a:p>
-            <a:pPr marL="0" indent="0">
-              <a:buFontTx/>
-              <a:buNone/>
-            </a:pPr>
-            <a:r>
-              <a:rPr lang="en-US" dirty="0"/>
-              <a:t>This helped to avoid implementations that didn’t correctly capture the semantics or the code, improving the overall correctness rate.</a:t>
-            </a:r>
-          </a:p>
-          <a:p>
-            <a:pPr marL="0" indent="0">
-              <a:buFontTx/>
-              <a:buNone/>
-            </a:pPr>
-            <a:endParaRPr lang="en-US" dirty="0"/>
-          </a:p>
-          <a:p>
-            <a:pPr marL="0" indent="0">
-              <a:buFontTx/>
-              <a:buNone/>
-            </a:pPr>
-            <a:r>
-              <a:rPr lang="en-US" dirty="0"/>
-              <a:t>In both generation steps, the prompts were accompanied by official developer guides and custom abstraction-specific hints for the given abstractions</a:t>
-            </a:r>
-            <a:br>
-              <a:rPr lang="en-US" dirty="0"/>
-            </a:br>
-            <a:r>
-              <a:rPr lang="en-US" dirty="0"/>
-              <a:t>to give the LLM a good understanding how to use them, and the translation tasks were accompanied by one example of translating the algorithm to ensure that the translations follow the expected design.</a:t>
-            </a:r>
-          </a:p>
-          <a:p>
-            <a:pPr marL="0" indent="0">
-              <a:buFontTx/>
-              <a:buNone/>
-            </a:pPr>
-            <a:endParaRPr lang="en-US" dirty="0"/>
-          </a:p>
-          <a:p>
-            <a:pPr marL="0" indent="0">
-              <a:buFontTx/>
-              <a:buNone/>
-            </a:pPr>
-            <a:r>
-              <a:rPr lang="en-US" dirty="0"/>
-              <a:t>Finally, we have also prepared multiple optimization prompts to compare the effect of abstraction choice with the effect of prompt specificity.</a:t>
-            </a:r>
-          </a:p>
-          <a:p>
-            <a:pPr marL="0" indent="0">
-              <a:buFontTx/>
-              <a:buNone/>
-            </a:pPr>
-            <a:endParaRPr lang="en-US" dirty="0"/>
-          </a:p>
-          <a:p>
-            <a:pPr marL="0" indent="0">
-              <a:buFontTx/>
-              <a:buNone/>
-            </a:pPr>
-            <a:r>
-              <a:rPr lang="en-US" dirty="0"/>
-              <a:t>With the 30 </a:t>
+            <a:r>
+              <a:rPr lang="en-US" dirty="0"/>
+              <a:t>For that, we have compared 3 abstractions (Halide, Exo and </a:t>
             </a:r>
             <a:r>
               <a:rPr lang="en-US" dirty="0" err="1"/>
-              <a:t>polybench</a:t>
-            </a:r>
-            <a:r>
-              <a:rPr lang="en-US" dirty="0"/>
-              <a:t> algorithms, 4 different abstraction choices, and 4 prompting strategies, this gives almost 500 optimization experiments.</a:t>
+              <a:t>Noarr</a:t>
+            </a:r>
+            <a:r>
+              <a:rPr lang="en-US" dirty="0"/>
+              <a:t>) with different designs and principles as well as outputting pure C on the 30 algorithms from the </a:t>
+            </a:r>
+            <a:r>
+              <a:rPr lang="en-US" dirty="0" err="1"/>
+              <a:t>PolyBench</a:t>
+            </a:r>
+            <a:r>
+              <a:rPr lang="en-US" dirty="0"/>
+              <a:t>/C benchmark suite.</a:t>
             </a:r>
           </a:p>
         </p:txBody>
@@ -3156,7 +3136,7 @@
           <a:p>
             <a:fld id="{FA8FD632-245B-410D-BCC4-8BF8D37AB67F}" type="slidenum">
               <a:rPr lang="en-US" smtClean="0"/>
-              <a:t>25</a:t>
+              <a:t>24</a:t>
             </a:fld>
             <a:endParaRPr lang="en-US"/>
           </a:p>
@@ -3165,7 +3145,7 @@
     </p:spTree>
     <p:extLst>
       <p:ext uri="{BB962C8B-B14F-4D97-AF65-F5344CB8AC3E}">
-        <p14:creationId xmlns:p14="http://schemas.microsoft.com/office/powerpoint/2010/main" val="4284797405"/>
+        <p14:creationId xmlns:p14="http://schemas.microsoft.com/office/powerpoint/2010/main" val="2436190103"/>
       </p:ext>
     </p:extLst>
   </p:cSld>
@@ -3221,56 +3201,129 @@
           <a:p>
             <a:r>
               <a:rPr lang="en-US" dirty="0"/>
-              <a:t>Together with increasing number of optimization attempts from 1to5 to account for LLM generation stochasticity,</a:t>
+              <a:t>(key idea: we did a lot)</a:t>
+            </a:r>
+          </a:p>
+          <a:p>
+            <a:endParaRPr lang="en-US" dirty="0"/>
+          </a:p>
+          <a:p>
+            <a:r>
+              <a:rPr lang="en-US" dirty="0"/>
+              <a:t>In the experimental setup, we have used a multithreaded datacenter-grade computer, and to avoid many mistakes, the optimization pipeline consisted of two generation steps:</a:t>
+            </a:r>
+          </a:p>
+          <a:p>
+            <a:pPr marL="171450" indent="-171450">
+              <a:buFontTx/>
+              <a:buChar char="-"/>
+            </a:pPr>
+            <a:r>
+              <a:rPr lang="en-US" dirty="0"/>
+              <a:t>The first translated the baseline algorithm into the given abstraction</a:t>
+            </a:r>
+          </a:p>
+          <a:p>
+            <a:pPr marL="171450" indent="-171450">
+              <a:buFontTx/>
+              <a:buChar char="-"/>
+            </a:pPr>
+            <a:r>
+              <a:rPr lang="en-US" dirty="0"/>
+              <a:t>And the second one optimized the translation that best matched the baseline</a:t>
+            </a:r>
+          </a:p>
+          <a:p>
+            <a:pPr marL="0" indent="0">
+              <a:buFontTx/>
+              <a:buNone/>
+            </a:pPr>
+            <a:endParaRPr lang="en-US" dirty="0"/>
+          </a:p>
+          <a:p>
+            <a:pPr marL="0" indent="0">
+              <a:buFontTx/>
+              <a:buNone/>
+            </a:pPr>
+            <a:r>
+              <a:rPr lang="en-US" dirty="0"/>
+              <a:t>The first step was followed up by an automated selection of the best generated translation.</a:t>
+            </a:r>
+          </a:p>
+          <a:p>
+            <a:pPr marL="0" indent="0">
+              <a:buFontTx/>
+              <a:buNone/>
+            </a:pPr>
+            <a:r>
+              <a:rPr lang="en-US" dirty="0"/>
+              <a:t>This helped to avoid implementations that didn’t correctly capture the semantics or the code, improving the overall correctness rate.</a:t>
+            </a:r>
+          </a:p>
+          <a:p>
+            <a:pPr marL="0" indent="0">
+              <a:buFontTx/>
+              <a:buNone/>
+            </a:pPr>
+            <a:endParaRPr lang="en-US" dirty="0"/>
+          </a:p>
+          <a:p>
+            <a:pPr marL="0" indent="0">
+              <a:buFontTx/>
+              <a:buNone/>
+            </a:pPr>
+            <a:r>
+              <a:rPr lang="en-US" dirty="0"/>
+              <a:t>In both generation steps, the prompts were accompanied by official developer guides and custom abstraction-specific hints for the given abstractions</a:t>
             </a:r>
             <a:br>
               <a:rPr lang="en-US" dirty="0"/>
             </a:br>
-            <a:br>
-              <a:rPr lang="en-US" dirty="0"/>
-            </a:br>
-            <a:r>
-              <a:rPr lang="en-US" dirty="0"/>
-              <a:t>we observed that contemporary abstractions do not improve the performance nor the correctness of the generated code,</a:t>
-            </a:r>
-            <a:br>
-              <a:rPr lang="en-US" dirty="0"/>
-            </a:br>
-            <a:r>
-              <a:rPr lang="en-US" dirty="0"/>
-              <a:t>as generating C code yielded both the best performance and correctness overall.</a:t>
-            </a:r>
-          </a:p>
-          <a:p>
+            <a:r>
+              <a:rPr lang="en-US" dirty="0"/>
+              <a:t>to give the LLM a good understanding how to use them, and the translation tasks were accompanied by one example of translating the algorithm to ensure that the translations follow the expected design.</a:t>
+            </a:r>
+          </a:p>
+          <a:p>
+            <a:pPr marL="0" indent="0">
+              <a:buFontTx/>
+              <a:buNone/>
+            </a:pPr>
             <a:endParaRPr lang="en-US" dirty="0"/>
           </a:p>
           <a:p>
-            <a:r>
-              <a:rPr lang="en-US" dirty="0"/>
-              <a:t>We didn’t study just the specificity of the hints, but also their </a:t>
+            <a:pPr marL="0" indent="0">
+              <a:buFontTx/>
+              <a:buNone/>
+            </a:pPr>
+            <a:r>
+              <a:rPr lang="en-US" dirty="0"/>
+              <a:t>Finally, we have also prepared multiple optimization prompts to compare the effect of abstraction choice with the effect of prompt specificity.</a:t>
+            </a:r>
+          </a:p>
+          <a:p>
+            <a:pPr marL="0" indent="0">
+              <a:buFontTx/>
+              <a:buNone/>
+            </a:pPr>
+            <a:endParaRPr lang="en-US" dirty="0"/>
+          </a:p>
+          <a:p>
+            <a:pPr marL="0" indent="0">
+              <a:buFontTx/>
+              <a:buNone/>
+            </a:pPr>
+            <a:r>
+              <a:rPr lang="en-US" dirty="0"/>
+              <a:t>With the 30 </a:t>
             </a:r>
             <a:r>
               <a:rPr lang="en-US" dirty="0" err="1"/>
-              <a:t>aggresiveness</a:t>
-            </a:r>
-            <a:r>
-              <a:rPr lang="en-US" dirty="0"/>
-              <a:t> (more assertive hints yielding slightly better performance),</a:t>
-            </a:r>
-          </a:p>
-          <a:p>
-            <a:r>
-              <a:rPr lang="en-US" dirty="0"/>
-              <a:t>and an alternative approach that separated the optimization task into two steps, which didn’t improve correctness and significantly limited the performance.</a:t>
-            </a:r>
-          </a:p>
-          <a:p>
-            <a:endParaRPr lang="en-US" dirty="0"/>
-          </a:p>
-          <a:p>
-            <a:r>
-              <a:rPr lang="en-US" dirty="0"/>
-              <a:t>The conclusion of this work is that correct prompting strategy yields better results than using the abstractions for user-directed optimization.</a:t>
+              <a:t>polybench</a:t>
+            </a:r>
+            <a:r>
+              <a:rPr lang="en-US" dirty="0"/>
+              <a:t> algorithms, 4 different abstraction choices, and 4 prompting strategies, this gives almost 500 optimization experiments.</a:t>
             </a:r>
           </a:p>
         </p:txBody>
@@ -3292,7 +3345,7 @@
           <a:p>
             <a:fld id="{FA8FD632-245B-410D-BCC4-8BF8D37AB67F}" type="slidenum">
               <a:rPr lang="en-US" smtClean="0"/>
-              <a:t>26</a:t>
+              <a:t>25</a:t>
             </a:fld>
             <a:endParaRPr lang="en-US"/>
           </a:p>
@@ -3301,7 +3354,7 @@
     </p:spTree>
     <p:extLst>
       <p:ext uri="{BB962C8B-B14F-4D97-AF65-F5344CB8AC3E}">
-        <p14:creationId xmlns:p14="http://schemas.microsoft.com/office/powerpoint/2010/main" val="2015766894"/>
+        <p14:creationId xmlns:p14="http://schemas.microsoft.com/office/powerpoint/2010/main" val="4284797405"/>
       </p:ext>
     </p:extLst>
   </p:cSld>
@@ -3357,15 +3410,57 @@
           <a:p>
             <a:r>
               <a:rPr lang="en-US" dirty="0"/>
-              <a:t>Still haven’t done this one </a:t>
-            </a:r>
-            <a:r>
-              <a:rPr lang="en-US" dirty="0">
-                <a:sym typeface="Wingdings" panose="05000000000000000000" pitchFamily="2" charset="2"/>
-              </a:rPr>
-              <a:t></a:t>
-            </a:r>
+              <a:t>Together with increasing number of optimization attempts from 1to5 to account for LLM generation stochasticity,</a:t>
+            </a:r>
+            <a:br>
+              <a:rPr lang="en-US" dirty="0"/>
+            </a:br>
+            <a:br>
+              <a:rPr lang="en-US" dirty="0"/>
+            </a:br>
+            <a:r>
+              <a:rPr lang="en-US" dirty="0"/>
+              <a:t>we observed that contemporary abstractions do not improve the performance nor the correctness of the generated code,</a:t>
+            </a:r>
+            <a:br>
+              <a:rPr lang="en-US" dirty="0"/>
+            </a:br>
+            <a:r>
+              <a:rPr lang="en-US" dirty="0"/>
+              <a:t>as generating C code yielded both the best performance and correctness overall.</a:t>
+            </a:r>
+          </a:p>
+          <a:p>
             <a:endParaRPr lang="en-US" dirty="0"/>
+          </a:p>
+          <a:p>
+            <a:r>
+              <a:rPr lang="en-US" dirty="0"/>
+              <a:t>We didn’t study just the specificity of the hints, but also their </a:t>
+            </a:r>
+            <a:r>
+              <a:rPr lang="en-US" dirty="0" err="1"/>
+              <a:t>aggresiveness</a:t>
+            </a:r>
+            <a:r>
+              <a:rPr lang="en-US" dirty="0"/>
+              <a:t> (more assertive hints yielding slightly better performance),</a:t>
+            </a:r>
+          </a:p>
+          <a:p>
+            <a:r>
+              <a:rPr lang="en-US" dirty="0"/>
+              <a:t>and an alternative approach that separated the optimization task into two steps, which didn’t improve correctness and significantly limited the performance.</a:t>
+            </a:r>
+          </a:p>
+          <a:p>
+            <a:endParaRPr lang="en-US" dirty="0"/>
+          </a:p>
+          <a:p>
+            <a:r>
+              <a:rPr lang="en-US" dirty="0"/>
+              <a:t>The conclusion of this work is that correct prompting strategy yields better results than using the abstractions for user-directed optimization.</a:t>
+            </a:r>
           </a:p>
         </p:txBody>
       </p:sp>
@@ -3386,7 +3481,7 @@
           <a:p>
             <a:fld id="{FA8FD632-245B-410D-BCC4-8BF8D37AB67F}" type="slidenum">
               <a:rPr lang="en-US" smtClean="0"/>
-              <a:t>28</a:t>
+              <a:t>26</a:t>
             </a:fld>
             <a:endParaRPr lang="en-US"/>
           </a:p>
@@ -3395,7 +3490,7 @@
     </p:spTree>
     <p:extLst>
       <p:ext uri="{BB962C8B-B14F-4D97-AF65-F5344CB8AC3E}">
-        <p14:creationId xmlns:p14="http://schemas.microsoft.com/office/powerpoint/2010/main" val="2911046873"/>
+        <p14:creationId xmlns:p14="http://schemas.microsoft.com/office/powerpoint/2010/main" val="2015766894"/>
       </p:ext>
     </p:extLst>
   </p:cSld>
@@ -3451,80 +3546,14 @@
           <a:p>
             <a:r>
               <a:rPr lang="en-US" dirty="0"/>
-              <a:t>---(slide 2/2; do not forget to copy from upward)---</a:t>
-            </a:r>
-            <a:br>
-              <a:rPr lang="en-US" dirty="0"/>
-            </a:br>
-            <a:br>
-              <a:rPr lang="en-US" dirty="0"/>
-            </a:br>
-            <a:r>
-              <a:rPr lang="en-US" dirty="0"/>
-              <a:t>(key idea: optimizing the traversal)</a:t>
-            </a:r>
-          </a:p>
-          <a:p>
-            <a:endParaRPr lang="en-US" dirty="0"/>
-          </a:p>
-          <a:p>
-            <a:r>
-              <a:rPr lang="en-US" dirty="0"/>
-              <a:t>By itself, this would be nice, but we can do much more.</a:t>
-            </a:r>
-            <a:br>
-              <a:rPr lang="en-US" dirty="0"/>
-            </a:br>
-            <a:endParaRPr lang="en-US" dirty="0"/>
-          </a:p>
-          <a:p>
-            <a:r>
-              <a:rPr lang="en-US" dirty="0"/>
-              <a:t>We can use the same principles for building memory layouts to specify transformations of the traversal orders as well.</a:t>
-            </a:r>
-          </a:p>
-          <a:p>
-            <a:r>
-              <a:rPr lang="en-US" dirty="0"/>
-              <a:t>Let’s say we want to perform the matrix multiplication by tiles of the output; we can do so by defining the transformation and then applying it to the traverser.</a:t>
-            </a:r>
-            <a:br>
-              <a:rPr lang="en-US" dirty="0"/>
-            </a:br>
-            <a:r>
-              <a:rPr lang="en-US" dirty="0"/>
-              <a:t>We do not need to rewrite the computation logic or change the structures to do that.</a:t>
-            </a:r>
-          </a:p>
-          <a:p>
-            <a:endParaRPr lang="en-US" dirty="0"/>
-          </a:p>
-          <a:p>
-            <a:endParaRPr lang="en-US" dirty="0"/>
-          </a:p>
-          <a:p>
-            <a:r>
-              <a:rPr lang="en-US" dirty="0"/>
-              <a:t>We can also use the traversers as ranges to be parallelized using various parallel backends such as OpenMP or Threading Building Blocks.</a:t>
-            </a:r>
-          </a:p>
-          <a:p>
-            <a:endParaRPr lang="en-US" dirty="0"/>
-          </a:p>
-          <a:p>
-            <a:r>
-              <a:rPr lang="en-US" dirty="0"/>
-              <a:t>For the CUDA framework (used for general-purpose GPU programming), we have shown that the principles pair well with  binding different threads and blocks to the dimensions of the computation</a:t>
-            </a:r>
-            <a:br>
-              <a:rPr lang="en-US" dirty="0"/>
-            </a:br>
-            <a:r>
-              <a:rPr lang="en-US" dirty="0"/>
-              <a:t>and privatizing the data in the GPU shared memory.</a:t>
-            </a:r>
-          </a:p>
-          <a:p>
+              <a:t>Still haven’t done this one </a:t>
+            </a:r>
+            <a:r>
+              <a:rPr lang="en-US" dirty="0">
+                <a:sym typeface="Wingdings" panose="05000000000000000000" pitchFamily="2" charset="2"/>
+              </a:rPr>
+              <a:t></a:t>
+            </a:r>
             <a:endParaRPr lang="en-US" dirty="0"/>
           </a:p>
         </p:txBody>
@@ -3546,7 +3575,7 @@
           <a:p>
             <a:fld id="{FA8FD632-245B-410D-BCC4-8BF8D37AB67F}" type="slidenum">
               <a:rPr lang="en-US" smtClean="0"/>
-              <a:t>30</a:t>
+              <a:t>28</a:t>
             </a:fld>
             <a:endParaRPr lang="en-US"/>
           </a:p>
@@ -3555,7 +3584,7 @@
     </p:spTree>
     <p:extLst>
       <p:ext uri="{BB962C8B-B14F-4D97-AF65-F5344CB8AC3E}">
-        <p14:creationId xmlns:p14="http://schemas.microsoft.com/office/powerpoint/2010/main" val="2539622489"/>
+        <p14:creationId xmlns:p14="http://schemas.microsoft.com/office/powerpoint/2010/main" val="2911046873"/>
       </p:ext>
     </p:extLst>
   </p:cSld>
@@ -3611,14 +3640,17 @@
           <a:p>
             <a:r>
               <a:rPr lang="en-US" dirty="0"/>
-              <a:t>Following up on the recent improvements of LLMs since our previous work, we have become interested in whether their capability</a:t>
+              <a:t>---(slide 2/2; do not forget to copy from upward)---</a:t>
             </a:r>
             <a:br>
               <a:rPr lang="en-US" dirty="0"/>
             </a:br>
-            <a:r>
-              <a:rPr lang="en-US" dirty="0"/>
-              <a:t>further improves with abstractions that allow user-directed optimizations of the code in a similar manner to our abstractions.</a:t>
+            <a:br>
+              <a:rPr lang="en-US" dirty="0"/>
+            </a:br>
+            <a:r>
+              <a:rPr lang="en-US" dirty="0"/>
+              <a:t>(key idea: optimizing the traversal)</a:t>
             </a:r>
           </a:p>
           <a:p>
@@ -3627,96 +3659,62 @@
           <a:p>
             <a:r>
               <a:rPr lang="en-US" dirty="0"/>
-              <a:t>We have made a study with 3 different abstractions (Halide, Exo, </a:t>
-            </a:r>
-            <a:r>
-              <a:rPr lang="en-US" dirty="0" err="1"/>
-              <a:t>Noarr</a:t>
-            </a:r>
-            <a:r>
-              <a:rPr lang="en-US" dirty="0"/>
-              <a:t>), evaluating a state of the art LLM on the </a:t>
-            </a:r>
-            <a:r>
-              <a:rPr lang="en-US" dirty="0" err="1"/>
-              <a:t>PolyBench</a:t>
-            </a:r>
-            <a:r>
-              <a:rPr lang="en-US" dirty="0"/>
-              <a:t>/C suite;</a:t>
+              <a:t>By itself, this would be nice, but we can do much more.</a:t>
             </a:r>
             <a:br>
               <a:rPr lang="en-US" dirty="0"/>
             </a:br>
-            <a:r>
-              <a:rPr lang="en-US" dirty="0"/>
-              <a:t>the workflow consisted of 2 generation steps (translation and optimization) combined with an algorithmic selection of the best translation.</a:t>
-            </a:r>
-          </a:p>
-          <a:p>
             <a:endParaRPr lang="en-US" dirty="0"/>
           </a:p>
           <a:p>
             <a:r>
               <a:rPr lang="en-US" dirty="0"/>
-              <a:t>This was made to ensure that the LLM would have a working translation to use as a basis for its optimization attempt, as, at the time of the study,</a:t>
-            </a:r>
-          </a:p>
-          <a:p>
-            <a:r>
-              <a:rPr lang="en-US" dirty="0"/>
-              <a:t>it wasn’t feasible to put the entire programming reference for the given abstraction within the LLM’s limited context window.</a:t>
+              <a:t>We can use the same principles for building memory layouts to specify transformations of the traversal orders as well.</a:t>
+            </a:r>
+          </a:p>
+          <a:p>
+            <a:r>
+              <a:rPr lang="en-US" dirty="0"/>
+              <a:t>Let’s say we want to perform the matrix multiplication by tiles of the output; we can do so by defining the transformation and then applying it to the traverser.</a:t>
+            </a:r>
+            <a:br>
+              <a:rPr lang="en-US" dirty="0"/>
+            </a:br>
+            <a:r>
+              <a:rPr lang="en-US" dirty="0"/>
+              <a:t>We do not need to rewrite the computation logic or change the structures to do that.</a:t>
             </a:r>
           </a:p>
           <a:p>
             <a:endParaRPr lang="en-US" dirty="0"/>
           </a:p>
           <a:p>
-            <a:r>
-              <a:rPr lang="en-US" dirty="0"/>
-              <a:t>The prompts were supplied with one example of the translation (/optimization?) to further compensate for the limitation of its context window.</a:t>
-            </a:r>
-          </a:p>
-          <a:p>
             <a:endParaRPr lang="en-US" dirty="0"/>
           </a:p>
           <a:p>
             <a:r>
               <a:rPr lang="en-US" dirty="0"/>
-              <a:t>We have compared a naïve prompt (just to optimize the given computation) with more specific prompts giving general optimization hints,</a:t>
+              <a:t>We can also use the traversers as ranges to be parallelized using various parallel backends such as OpenMP or Threading Building Blocks.</a:t>
+            </a:r>
+          </a:p>
+          <a:p>
+            <a:endParaRPr lang="en-US" dirty="0"/>
+          </a:p>
+          <a:p>
+            <a:r>
+              <a:rPr lang="en-US" dirty="0"/>
+              <a:t>For the CUDA framework (used for general-purpose GPU programming), we have shown that the principles pair well with  binding different threads and blocks to the dimensions of the computation</a:t>
             </a:r>
             <a:br>
               <a:rPr lang="en-US" dirty="0"/>
             </a:br>
             <a:r>
               <a:rPr lang="en-US" dirty="0"/>
-              <a:t>and an alternative approach based on first writing an abstract optimization strategy and then implementing it in the second request.</a:t>
+              <a:t>and privatizing the data in the GPU shared memory.</a:t>
             </a:r>
           </a:p>
           <a:p>
             <a:endParaRPr lang="en-US" dirty="0"/>
-          </a:p>
-          <a:p>
-            <a:r>
-              <a:rPr lang="en-US" dirty="0"/>
-              <a:t>All these combinations of abstractions and prompts were also compared to applying the same methodology to the C baseline.</a:t>
-            </a:r>
-          </a:p>
-          <a:p>
-            <a:endParaRPr lang="en-US" dirty="0"/>
-          </a:p>
-          <a:p>
-            <a:r>
-              <a:rPr lang="en-US" dirty="0"/>
-              <a:t>Very unsurprisingly, more specific prompts performed better across all abstractions and C, but at the same time,</a:t>
-            </a:r>
-            <a:br>
-              <a:rPr lang="en-US" dirty="0"/>
-            </a:br>
-            <a:r>
-              <a:rPr lang="en-US" dirty="0"/>
-              <a:t>pure C optimization attempts performed better than any abstraction.</a:t>
-            </a:r>
           </a:p>
         </p:txBody>
       </p:sp>
@@ -3737,7 +3735,7 @@
           <a:p>
             <a:fld id="{FA8FD632-245B-410D-BCC4-8BF8D37AB67F}" type="slidenum">
               <a:rPr lang="en-US" smtClean="0"/>
-              <a:t>31</a:t>
+              <a:t>30</a:t>
             </a:fld>
             <a:endParaRPr lang="en-US"/>
           </a:p>
@@ -3746,7 +3744,7 @@
     </p:spTree>
     <p:extLst>
       <p:ext uri="{BB962C8B-B14F-4D97-AF65-F5344CB8AC3E}">
-        <p14:creationId xmlns:p14="http://schemas.microsoft.com/office/powerpoint/2010/main" val="215031226"/>
+        <p14:creationId xmlns:p14="http://schemas.microsoft.com/office/powerpoint/2010/main" val="2539622489"/>
       </p:ext>
     </p:extLst>
   </p:cSld>
@@ -3761,13 +3759,7 @@
   <p:cSld>
     <p:spTree>
       <p:nvGrpSpPr>
-        <p:cNvPr id="1" name="">
-          <a:extLst>
-            <a:ext uri="{FF2B5EF4-FFF2-40B4-BE49-F238E27FC236}">
-              <a16:creationId xmlns:a16="http://schemas.microsoft.com/office/drawing/2014/main" id="{F9A08B9B-DA7C-CEF0-D2F2-45B10F3312AF}"/>
-            </a:ext>
-          </a:extLst>
-        </p:cNvPr>
+        <p:cNvPr id="1" name=""/>
         <p:cNvGrpSpPr/>
         <p:nvPr/>
       </p:nvGrpSpPr>
@@ -3781,13 +3773,7 @@
       </p:grpSpPr>
       <p:sp>
         <p:nvSpPr>
-          <p:cNvPr id="2" name="Slide Image Placeholder 1">
-            <a:extLst>
-              <a:ext uri="{FF2B5EF4-FFF2-40B4-BE49-F238E27FC236}">
-                <a16:creationId xmlns:a16="http://schemas.microsoft.com/office/drawing/2014/main" id="{ABBA7740-2DAD-1370-B2CB-228DA0882621}"/>
-              </a:ext>
-            </a:extLst>
-          </p:cNvPr>
+          <p:cNvPr id="2" name="Slide Image Placeholder 1"/>
           <p:cNvSpPr>
             <a:spLocks noGrp="1" noRot="1" noChangeAspect="1"/>
           </p:cNvSpPr>
@@ -3799,13 +3785,7 @@
       </p:sp>
       <p:sp>
         <p:nvSpPr>
-          <p:cNvPr id="3" name="Notes Placeholder 2">
-            <a:extLst>
-              <a:ext uri="{FF2B5EF4-FFF2-40B4-BE49-F238E27FC236}">
-                <a16:creationId xmlns:a16="http://schemas.microsoft.com/office/drawing/2014/main" id="{25E4B22E-1818-E5A6-0350-5F174A750D46}"/>
-              </a:ext>
-            </a:extLst>
-          </p:cNvPr>
+          <p:cNvPr id="3" name="Notes Placeholder 2"/>
           <p:cNvSpPr>
             <a:spLocks noGrp="1"/>
           </p:cNvSpPr>
@@ -3883,7 +3863,7 @@
           <a:p>
             <a:r>
               <a:rPr lang="en-US" dirty="0"/>
-              <a:t>The prompts were supplied with one example of the translation (/optimization?) and language-specific documentation and hints to further compensate for the limitation of its context window.</a:t>
+              <a:t>The prompts were supplied with one example of the translation (/optimization?) to further compensate for the limitation of its context window.</a:t>
             </a:r>
           </a:p>
           <a:p>
@@ -3931,13 +3911,7 @@
       </p:sp>
       <p:sp>
         <p:nvSpPr>
-          <p:cNvPr id="4" name="Slide Number Placeholder 3">
-            <a:extLst>
-              <a:ext uri="{FF2B5EF4-FFF2-40B4-BE49-F238E27FC236}">
-                <a16:creationId xmlns:a16="http://schemas.microsoft.com/office/drawing/2014/main" id="{EC9A10B2-2AAB-DC98-721D-F9B66A801B35}"/>
-              </a:ext>
-            </a:extLst>
-          </p:cNvPr>
+          <p:cNvPr id="4" name="Slide Number Placeholder 3"/>
           <p:cNvSpPr>
             <a:spLocks noGrp="1"/>
           </p:cNvSpPr>
@@ -3952,7 +3926,7 @@
           <a:p>
             <a:fld id="{FA8FD632-245B-410D-BCC4-8BF8D37AB67F}" type="slidenum">
               <a:rPr lang="en-US" smtClean="0"/>
-              <a:t>32</a:t>
+              <a:t>31</a:t>
             </a:fld>
             <a:endParaRPr lang="en-US"/>
           </a:p>
@@ -3961,7 +3935,7 @@
     </p:spTree>
     <p:extLst>
       <p:ext uri="{BB962C8B-B14F-4D97-AF65-F5344CB8AC3E}">
-        <p14:creationId xmlns:p14="http://schemas.microsoft.com/office/powerpoint/2010/main" val="3608555400"/>
+        <p14:creationId xmlns:p14="http://schemas.microsoft.com/office/powerpoint/2010/main" val="215031226"/>
       </p:ext>
     </p:extLst>
   </p:cSld>
@@ -4136,6 +4110,221 @@
         <p:cNvPr id="1" name="">
           <a:extLst>
             <a:ext uri="{FF2B5EF4-FFF2-40B4-BE49-F238E27FC236}">
+              <a16:creationId xmlns:a16="http://schemas.microsoft.com/office/drawing/2014/main" id="{F9A08B9B-DA7C-CEF0-D2F2-45B10F3312AF}"/>
+            </a:ext>
+          </a:extLst>
+        </p:cNvPr>
+        <p:cNvGrpSpPr/>
+        <p:nvPr/>
+      </p:nvGrpSpPr>
+      <p:grpSpPr>
+        <a:xfrm>
+          <a:off x="0" y="0"/>
+          <a:ext cx="0" cy="0"/>
+          <a:chOff x="0" y="0"/>
+          <a:chExt cx="0" cy="0"/>
+        </a:xfrm>
+      </p:grpSpPr>
+      <p:sp>
+        <p:nvSpPr>
+          <p:cNvPr id="2" name="Slide Image Placeholder 1">
+            <a:extLst>
+              <a:ext uri="{FF2B5EF4-FFF2-40B4-BE49-F238E27FC236}">
+                <a16:creationId xmlns:a16="http://schemas.microsoft.com/office/drawing/2014/main" id="{ABBA7740-2DAD-1370-B2CB-228DA0882621}"/>
+              </a:ext>
+            </a:extLst>
+          </p:cNvPr>
+          <p:cNvSpPr>
+            <a:spLocks noGrp="1" noRot="1" noChangeAspect="1"/>
+          </p:cNvSpPr>
+          <p:nvPr>
+            <p:ph type="sldImg"/>
+          </p:nvPr>
+        </p:nvSpPr>
+        <p:spPr/>
+      </p:sp>
+      <p:sp>
+        <p:nvSpPr>
+          <p:cNvPr id="3" name="Notes Placeholder 2">
+            <a:extLst>
+              <a:ext uri="{FF2B5EF4-FFF2-40B4-BE49-F238E27FC236}">
+                <a16:creationId xmlns:a16="http://schemas.microsoft.com/office/drawing/2014/main" id="{25E4B22E-1818-E5A6-0350-5F174A750D46}"/>
+              </a:ext>
+            </a:extLst>
+          </p:cNvPr>
+          <p:cNvSpPr>
+            <a:spLocks noGrp="1"/>
+          </p:cNvSpPr>
+          <p:nvPr>
+            <p:ph type="body" idx="1"/>
+          </p:nvPr>
+        </p:nvSpPr>
+        <p:spPr/>
+        <p:txBody>
+          <a:bodyPr/>
+          <a:lstStyle/>
+          <a:p>
+            <a:r>
+              <a:rPr lang="en-US" dirty="0"/>
+              <a:t>Following up on the recent improvements of LLMs since our previous work, we have become interested in whether their capability</a:t>
+            </a:r>
+            <a:br>
+              <a:rPr lang="en-US" dirty="0"/>
+            </a:br>
+            <a:r>
+              <a:rPr lang="en-US" dirty="0"/>
+              <a:t>further improves with abstractions that allow user-directed optimizations of the code in a similar manner to our abstractions.</a:t>
+            </a:r>
+          </a:p>
+          <a:p>
+            <a:endParaRPr lang="en-US" dirty="0"/>
+          </a:p>
+          <a:p>
+            <a:r>
+              <a:rPr lang="en-US" dirty="0"/>
+              <a:t>We have made a study with 3 different abstractions (Halide, Exo, </a:t>
+            </a:r>
+            <a:r>
+              <a:rPr lang="en-US" dirty="0" err="1"/>
+              <a:t>Noarr</a:t>
+            </a:r>
+            <a:r>
+              <a:rPr lang="en-US" dirty="0"/>
+              <a:t>), evaluating a state of the art LLM on the </a:t>
+            </a:r>
+            <a:r>
+              <a:rPr lang="en-US" dirty="0" err="1"/>
+              <a:t>PolyBench</a:t>
+            </a:r>
+            <a:r>
+              <a:rPr lang="en-US" dirty="0"/>
+              <a:t>/C suite;</a:t>
+            </a:r>
+            <a:br>
+              <a:rPr lang="en-US" dirty="0"/>
+            </a:br>
+            <a:r>
+              <a:rPr lang="en-US" dirty="0"/>
+              <a:t>the workflow consisted of 2 generation steps (translation and optimization) combined with an algorithmic selection of the best translation.</a:t>
+            </a:r>
+          </a:p>
+          <a:p>
+            <a:endParaRPr lang="en-US" dirty="0"/>
+          </a:p>
+          <a:p>
+            <a:r>
+              <a:rPr lang="en-US" dirty="0"/>
+              <a:t>This was made to ensure that the LLM would have a working translation to use as a basis for its optimization attempt, as, at the time of the study,</a:t>
+            </a:r>
+          </a:p>
+          <a:p>
+            <a:r>
+              <a:rPr lang="en-US" dirty="0"/>
+              <a:t>it wasn’t feasible to put the entire programming reference for the given abstraction within the LLM’s limited context window.</a:t>
+            </a:r>
+          </a:p>
+          <a:p>
+            <a:endParaRPr lang="en-US" dirty="0"/>
+          </a:p>
+          <a:p>
+            <a:r>
+              <a:rPr lang="en-US" dirty="0"/>
+              <a:t>The prompts were supplied with one example of the translation (/optimization?) and language-specific documentation and hints to further compensate for the limitation of its context window.</a:t>
+            </a:r>
+          </a:p>
+          <a:p>
+            <a:endParaRPr lang="en-US" dirty="0"/>
+          </a:p>
+          <a:p>
+            <a:r>
+              <a:rPr lang="en-US" dirty="0"/>
+              <a:t>We have compared a naïve prompt (just to optimize the given computation) with more specific prompts giving general optimization hints,</a:t>
+            </a:r>
+            <a:br>
+              <a:rPr lang="en-US" dirty="0"/>
+            </a:br>
+            <a:r>
+              <a:rPr lang="en-US" dirty="0"/>
+              <a:t>and an alternative approach based on first writing an abstract optimization strategy and then implementing it in the second request.</a:t>
+            </a:r>
+          </a:p>
+          <a:p>
+            <a:endParaRPr lang="en-US" dirty="0"/>
+          </a:p>
+          <a:p>
+            <a:r>
+              <a:rPr lang="en-US" dirty="0"/>
+              <a:t>All these combinations of abstractions and prompts were also compared to applying the same methodology to the C baseline.</a:t>
+            </a:r>
+          </a:p>
+          <a:p>
+            <a:endParaRPr lang="en-US" dirty="0"/>
+          </a:p>
+          <a:p>
+            <a:r>
+              <a:rPr lang="en-US" dirty="0"/>
+              <a:t>Very unsurprisingly, more specific prompts performed better across all abstractions and C, but at the same time,</a:t>
+            </a:r>
+            <a:br>
+              <a:rPr lang="en-US" dirty="0"/>
+            </a:br>
+            <a:r>
+              <a:rPr lang="en-US" dirty="0"/>
+              <a:t>pure C optimization attempts performed better than any abstraction.</a:t>
+            </a:r>
+          </a:p>
+        </p:txBody>
+      </p:sp>
+      <p:sp>
+        <p:nvSpPr>
+          <p:cNvPr id="4" name="Slide Number Placeholder 3">
+            <a:extLst>
+              <a:ext uri="{FF2B5EF4-FFF2-40B4-BE49-F238E27FC236}">
+                <a16:creationId xmlns:a16="http://schemas.microsoft.com/office/drawing/2014/main" id="{EC9A10B2-2AAB-DC98-721D-F9B66A801B35}"/>
+              </a:ext>
+            </a:extLst>
+          </p:cNvPr>
+          <p:cNvSpPr>
+            <a:spLocks noGrp="1"/>
+          </p:cNvSpPr>
+          <p:nvPr>
+            <p:ph type="sldNum" sz="quarter" idx="5"/>
+          </p:nvPr>
+        </p:nvSpPr>
+        <p:spPr/>
+        <p:txBody>
+          <a:bodyPr/>
+          <a:lstStyle/>
+          <a:p>
+            <a:fld id="{FA8FD632-245B-410D-BCC4-8BF8D37AB67F}" type="slidenum">
+              <a:rPr lang="en-US" smtClean="0"/>
+              <a:t>32</a:t>
+            </a:fld>
+            <a:endParaRPr lang="en-US"/>
+          </a:p>
+        </p:txBody>
+      </p:sp>
+    </p:spTree>
+    <p:extLst>
+      <p:ext uri="{BB962C8B-B14F-4D97-AF65-F5344CB8AC3E}">
+        <p14:creationId xmlns:p14="http://schemas.microsoft.com/office/powerpoint/2010/main" val="3608555400"/>
+      </p:ext>
+    </p:extLst>
+  </p:cSld>
+  <p:clrMapOvr>
+    <a:masterClrMapping/>
+  </p:clrMapOvr>
+</p:notes>
+</file>
+
+<file path=ppt/notesSlides/notesSlide31.xml><?xml version="1.0" encoding="utf-8"?>
+<p:notes xmlns:a="http://schemas.openxmlformats.org/drawingml/2006/main" xmlns:r="http://schemas.openxmlformats.org/officeDocument/2006/relationships" xmlns:p="http://schemas.openxmlformats.org/presentationml/2006/main">
+  <p:cSld>
+    <p:spTree>
+      <p:nvGrpSpPr>
+        <p:cNvPr id="1" name="">
+          <a:extLst>
+            <a:ext uri="{FF2B5EF4-FFF2-40B4-BE49-F238E27FC236}">
               <a16:creationId xmlns:a16="http://schemas.microsoft.com/office/drawing/2014/main" id="{3937F3B2-C0BA-B51C-5F65-FC97C70D1079}"/>
             </a:ext>
           </a:extLst>
@@ -4342,7 +4531,7 @@
 </p:notes>
 </file>
 
-<file path=ppt/notesSlides/notesSlide31.xml><?xml version="1.0" encoding="utf-8"?>
+<file path=ppt/notesSlides/notesSlide32.xml><?xml version="1.0" encoding="utf-8"?>
 <p:notes xmlns:a="http://schemas.openxmlformats.org/drawingml/2006/main" xmlns:r="http://schemas.openxmlformats.org/officeDocument/2006/relationships" xmlns:p="http://schemas.openxmlformats.org/presentationml/2006/main">
   <p:cSld>
     <p:spTree>
@@ -4460,7 +4649,7 @@
 </p:notes>
 </file>
 
-<file path=ppt/notesSlides/notesSlide32.xml><?xml version="1.0" encoding="utf-8"?>
+<file path=ppt/notesSlides/notesSlide33.xml><?xml version="1.0" encoding="utf-8"?>
 <p:notes xmlns:a="http://schemas.openxmlformats.org/drawingml/2006/main" xmlns:r="http://schemas.openxmlformats.org/officeDocument/2006/relationships" xmlns:p="http://schemas.openxmlformats.org/presentationml/2006/main">
   <p:cSld>
     <p:spTree>
@@ -4763,150 +4952,6 @@
     <p:extLst>
       <p:ext uri="{BB962C8B-B14F-4D97-AF65-F5344CB8AC3E}">
         <p14:creationId xmlns:p14="http://schemas.microsoft.com/office/powerpoint/2010/main" val="1453155774"/>
-      </p:ext>
-    </p:extLst>
-  </p:cSld>
-  <p:clrMapOvr>
-    <a:masterClrMapping/>
-  </p:clrMapOvr>
-</p:notes>
-</file>
-
-<file path=ppt/notesSlides/notesSlide33.xml><?xml version="1.0" encoding="utf-8"?>
-<p:notes xmlns:a="http://schemas.openxmlformats.org/drawingml/2006/main" xmlns:r="http://schemas.openxmlformats.org/officeDocument/2006/relationships" xmlns:p="http://schemas.openxmlformats.org/presentationml/2006/main">
-  <p:cSld>
-    <p:spTree>
-      <p:nvGrpSpPr>
-        <p:cNvPr id="1" name=""/>
-        <p:cNvGrpSpPr/>
-        <p:nvPr/>
-      </p:nvGrpSpPr>
-      <p:grpSpPr>
-        <a:xfrm>
-          <a:off x="0" y="0"/>
-          <a:ext cx="0" cy="0"/>
-          <a:chOff x="0" y="0"/>
-          <a:chExt cx="0" cy="0"/>
-        </a:xfrm>
-      </p:grpSpPr>
-      <p:sp>
-        <p:nvSpPr>
-          <p:cNvPr id="2" name="Slide Image Placeholder 1"/>
-          <p:cNvSpPr>
-            <a:spLocks noGrp="1" noRot="1" noChangeAspect="1"/>
-          </p:cNvSpPr>
-          <p:nvPr>
-            <p:ph type="sldImg"/>
-          </p:nvPr>
-        </p:nvSpPr>
-        <p:spPr/>
-      </p:sp>
-      <p:sp>
-        <p:nvSpPr>
-          <p:cNvPr id="3" name="Notes Placeholder 2"/>
-          <p:cNvSpPr>
-            <a:spLocks noGrp="1"/>
-          </p:cNvSpPr>
-          <p:nvPr>
-            <p:ph type="body" idx="1"/>
-          </p:nvPr>
-        </p:nvSpPr>
-        <p:spPr/>
-        <p:txBody>
-          <a:bodyPr/>
-          <a:lstStyle/>
-          <a:p>
-            <a:r>
-              <a:rPr lang="en-US" dirty="0"/>
-              <a:t>For this, our research focused on two (something like compatible) directions</a:t>
-            </a:r>
-          </a:p>
-          <a:p>
-            <a:endParaRPr lang="en-US" dirty="0"/>
-          </a:p>
-          <a:p>
-            <a:r>
-              <a:rPr lang="en-US" dirty="0"/>
-              <a:t>The first one was investigating and implementing abstractions that offer composable building blocks that can be used to design efficient memory layouts and traversal orders; the choices can be algorithmically automatized by techniques such as autotuning</a:t>
-            </a:r>
-          </a:p>
-          <a:p>
-            <a:endParaRPr lang="en-US" dirty="0"/>
-          </a:p>
-          <a:p>
-            <a:r>
-              <a:rPr lang="en-US" dirty="0"/>
-              <a:t>The other direction has opened with the introduction of Large Language Models (LLMs), where the LLM can provide efficient implementation details fulfilling a given API requirement</a:t>
-            </a:r>
-          </a:p>
-          <a:p>
-            <a:endParaRPr lang="en-US" dirty="0"/>
-          </a:p>
-          <a:p>
-            <a:r>
-              <a:rPr lang="en-US" dirty="0"/>
-              <a:t>(?? More yapping?</a:t>
-            </a:r>
-          </a:p>
-          <a:p>
-            <a:r>
-              <a:rPr lang="en-US" dirty="0"/>
-              <a:t>- We have investigated how to … (tutoring)</a:t>
-            </a:r>
-          </a:p>
-          <a:p>
-            <a:r>
-              <a:rPr lang="en-US" dirty="0"/>
-              <a:t>)</a:t>
-            </a:r>
-          </a:p>
-          <a:p>
-            <a:endParaRPr lang="en-US" dirty="0"/>
-          </a:p>
-          <a:p>
-            <a:r>
-              <a:rPr lang="en-US" dirty="0"/>
-              <a:t>?? Since this research area is quite broad, we have mostly focused solely on dense data structures and algorithms utilizing regular loops, as even with this limitation, the area offers interesting challenges and many opportunities for improving the state of the art</a:t>
-            </a:r>
-          </a:p>
-          <a:p>
-            <a:endParaRPr lang="en-US" dirty="0"/>
-          </a:p>
-          <a:p>
-            <a:r>
-              <a:rPr lang="en-US" dirty="0"/>
-              <a:t>(ass bridge: now focusing on the abstractions…)</a:t>
-            </a:r>
-          </a:p>
-        </p:txBody>
-      </p:sp>
-      <p:sp>
-        <p:nvSpPr>
-          <p:cNvPr id="4" name="Slide Number Placeholder 3"/>
-          <p:cNvSpPr>
-            <a:spLocks noGrp="1"/>
-          </p:cNvSpPr>
-          <p:nvPr>
-            <p:ph type="sldNum" sz="quarter" idx="5"/>
-          </p:nvPr>
-        </p:nvSpPr>
-        <p:spPr/>
-        <p:txBody>
-          <a:bodyPr/>
-          <a:lstStyle/>
-          <a:p>
-            <a:fld id="{FA8FD632-245B-410D-BCC4-8BF8D37AB67F}" type="slidenum">
-              <a:rPr lang="en-US" smtClean="0"/>
-              <a:t>37</a:t>
-            </a:fld>
-            <a:endParaRPr lang="en-US"/>
-          </a:p>
-        </p:txBody>
-      </p:sp>
-    </p:spTree>
-    <p:extLst>
-      <p:ext uri="{BB962C8B-B14F-4D97-AF65-F5344CB8AC3E}">
-        <p14:creationId xmlns:p14="http://schemas.microsoft.com/office/powerpoint/2010/main" val="3810469099"/>
       </p:ext>
     </p:extLst>
   </p:cSld>
@@ -4960,7 +5005,67 @@
           <a:bodyPr/>
           <a:lstStyle/>
           <a:p>
+            <a:r>
+              <a:rPr lang="en-US" dirty="0"/>
+              <a:t>For this, our research focused on two (something like compatible) directions</a:t>
+            </a:r>
+          </a:p>
+          <a:p>
             <a:endParaRPr lang="en-US" dirty="0"/>
+          </a:p>
+          <a:p>
+            <a:r>
+              <a:rPr lang="en-US" dirty="0"/>
+              <a:t>The first one was investigating and implementing abstractions that offer composable building blocks that can be used to design efficient memory layouts and traversal orders; the choices can be algorithmically automatized by techniques such as autotuning</a:t>
+            </a:r>
+          </a:p>
+          <a:p>
+            <a:endParaRPr lang="en-US" dirty="0"/>
+          </a:p>
+          <a:p>
+            <a:r>
+              <a:rPr lang="en-US" dirty="0"/>
+              <a:t>The other direction has opened with the introduction of Large Language Models (LLMs), where the LLM can provide efficient implementation details fulfilling a given API requirement</a:t>
+            </a:r>
+          </a:p>
+          <a:p>
+            <a:endParaRPr lang="en-US" dirty="0"/>
+          </a:p>
+          <a:p>
+            <a:r>
+              <a:rPr lang="en-US" dirty="0"/>
+              <a:t>(?? More yapping?</a:t>
+            </a:r>
+          </a:p>
+          <a:p>
+            <a:r>
+              <a:rPr lang="en-US" dirty="0"/>
+              <a:t>- We have investigated how to … (tutoring)</a:t>
+            </a:r>
+          </a:p>
+          <a:p>
+            <a:r>
+              <a:rPr lang="en-US" dirty="0"/>
+              <a:t>)</a:t>
+            </a:r>
+          </a:p>
+          <a:p>
+            <a:endParaRPr lang="en-US" dirty="0"/>
+          </a:p>
+          <a:p>
+            <a:r>
+              <a:rPr lang="en-US" dirty="0"/>
+              <a:t>?? Since this research area is quite broad, we have mostly focused solely on dense data structures and algorithms utilizing regular loops, as even with this limitation, the area offers interesting challenges and many opportunities for improving the state of the art</a:t>
+            </a:r>
+          </a:p>
+          <a:p>
+            <a:endParaRPr lang="en-US" dirty="0"/>
+          </a:p>
+          <a:p>
+            <a:r>
+              <a:rPr lang="en-US" dirty="0"/>
+              <a:t>(ass bridge: now focusing on the abstractions…)</a:t>
+            </a:r>
           </a:p>
         </p:txBody>
       </p:sp>
@@ -4981,7 +5086,7 @@
           <a:p>
             <a:fld id="{FA8FD632-245B-410D-BCC4-8BF8D37AB67F}" type="slidenum">
               <a:rPr lang="en-US" smtClean="0"/>
-              <a:t>38</a:t>
+              <a:t>37</a:t>
             </a:fld>
             <a:endParaRPr lang="en-US"/>
           </a:p>
@@ -4990,7 +5095,7 @@
     </p:spTree>
     <p:extLst>
       <p:ext uri="{BB962C8B-B14F-4D97-AF65-F5344CB8AC3E}">
-        <p14:creationId xmlns:p14="http://schemas.microsoft.com/office/powerpoint/2010/main" val="1067365625"/>
+        <p14:creationId xmlns:p14="http://schemas.microsoft.com/office/powerpoint/2010/main" val="3810469099"/>
       </p:ext>
     </p:extLst>
   </p:cSld>
@@ -5044,133 +5149,7 @@
           <a:bodyPr/>
           <a:lstStyle/>
           <a:p>
-            <a:r>
-              <a:rPr lang="en-US" dirty="0"/>
-              <a:t>(key idea: introducing </a:t>
-            </a:r>
-            <a:r>
-              <a:rPr lang="en-US" dirty="0" err="1"/>
-              <a:t>Noarr</a:t>
-            </a:r>
-            <a:r>
-              <a:rPr lang="en-US" dirty="0"/>
-              <a:t> Structures; or abstractions for layout-agnostic design)</a:t>
-            </a:r>
-            <a:br>
-              <a:rPr lang="en-US" dirty="0"/>
-            </a:br>
-            <a:br>
-              <a:rPr lang="en-US" dirty="0"/>
-            </a:br>
-            <a:r>
-              <a:rPr lang="en-US" dirty="0"/>
-              <a:t>/*</a:t>
-            </a:r>
-          </a:p>
-          <a:p>
-            <a:r>
-              <a:rPr lang="en-US" dirty="0"/>
-              <a:t>As the first contribution of our research, we have devised an abstraction for building and transforming memory layouts that enable the design of layout-agnostic algorithms as well as the reuse of the defined layouts.</a:t>
-            </a:r>
-          </a:p>
-          <a:p>
             <a:endParaRPr lang="en-US" dirty="0"/>
-          </a:p>
-          <a:p>
-            <a:r>
-              <a:rPr lang="en-US" dirty="0"/>
-              <a:t>In real-use algorithms</a:t>
-            </a:r>
-            <a:br>
-              <a:rPr lang="en-US" dirty="0"/>
-            </a:br>
-            <a:r>
-              <a:rPr lang="en-US" dirty="0"/>
-              <a:t>- dimensions have semantic value</a:t>
-            </a:r>
-            <a:br>
-              <a:rPr lang="en-US" dirty="0"/>
-            </a:br>
-            <a:r>
-              <a:rPr lang="en-US" dirty="0"/>
-              <a:t>- a data access more often depends on the semantic (logic) structure than on a specific memory offset</a:t>
-            </a:r>
-            <a:br>
-              <a:rPr lang="en-US" dirty="0"/>
-            </a:br>
-            <a:r>
-              <a:rPr lang="en-US" dirty="0"/>
-              <a:t>- traversals cover the semantic space rather than a set of abstract coordinates</a:t>
-            </a:r>
-          </a:p>
-          <a:p>
-            <a:r>
-              <a:rPr lang="en-US" dirty="0"/>
-              <a:t>*/</a:t>
-            </a:r>
-          </a:p>
-          <a:p>
-            <a:endParaRPr lang="en-US" dirty="0"/>
-          </a:p>
-          <a:p>
-            <a:r>
-              <a:rPr lang="en-US" dirty="0"/>
-              <a:t>At the beginning of our research, we focused on devising abstractions that would enable a more seamless design of algorithms amenable to source-level optimizations allowing for user-direction and automation.</a:t>
-            </a:r>
-          </a:p>
-          <a:p>
-            <a:endParaRPr lang="en-US" dirty="0"/>
-          </a:p>
-          <a:p>
-            <a:r>
-              <a:rPr lang="en-US" dirty="0"/>
-              <a:t>If we slightly optimize a standard matrix multiplication algorithm, we might end up with something similar to the shown code.</a:t>
-            </a:r>
-          </a:p>
-          <a:p>
-            <a:r>
-              <a:rPr lang="en-US" dirty="0"/>
-              <a:t>At first view, it is difficult to see that it is actually a three-dimensional traversal performed in a tiled manner, accessing elements in row-major or column-major layouts.</a:t>
-            </a:r>
-          </a:p>
-          <a:p>
-            <a:br>
-              <a:rPr lang="en-US" dirty="0"/>
-            </a:br>
-            <a:br>
-              <a:rPr lang="en-US" dirty="0"/>
-            </a:br>
-            <a:r>
-              <a:rPr lang="en-US" dirty="0"/>
-              <a:t>[without runtime overhead]</a:t>
-            </a:r>
-            <a:br>
-              <a:rPr lang="en-US" dirty="0"/>
-            </a:br>
-            <a:r>
-              <a:rPr lang="en-US" dirty="0"/>
-              <a:t>Our research iteratively progressed to a point where we can encode the semantic logical structure of layouts independently of the physical layout, naming the dimensions for specifying the logical API that is common to the layouts sharing the same dimensions.</a:t>
-            </a:r>
-          </a:p>
-          <a:p>
-            <a:r>
-              <a:rPr lang="en-US" dirty="0"/>
-              <a:t>This makes the structures more resistant to simple errors and encodes further information that then allows using these names to either identify common dimensions of different structures and thus automatically infer traversals over them, or specify transformations of these traversals.</a:t>
-            </a:r>
-            <a:br>
-              <a:rPr lang="en-US" dirty="0"/>
-            </a:br>
-            <a:r>
-              <a:rPr lang="en-US" dirty="0"/>
-              <a:t>This then allows us to compact the difficult-to-maintain version of the matrix multiplication algorithm into a more compact and semantic code.</a:t>
-            </a:r>
-            <a:br>
-              <a:rPr lang="en-US" dirty="0"/>
-            </a:br>
-            <a:r>
-              <a:rPr lang="en-US" dirty="0"/>
-              <a:t>(The first three rows directly match, then we simply specify we want to traverse the combined space of the three structures, and specify the action that should happen for each point of the space; the order directive then specifies the tiling optimization)</a:t>
-            </a:r>
           </a:p>
         </p:txBody>
       </p:sp>
@@ -5191,7 +5170,7 @@
           <a:p>
             <a:fld id="{FA8FD632-245B-410D-BCC4-8BF8D37AB67F}" type="slidenum">
               <a:rPr lang="en-US" smtClean="0"/>
-              <a:t>39</a:t>
+              <a:t>38</a:t>
             </a:fld>
             <a:endParaRPr lang="en-US"/>
           </a:p>
@@ -5200,7 +5179,7 @@
     </p:spTree>
     <p:extLst>
       <p:ext uri="{BB962C8B-B14F-4D97-AF65-F5344CB8AC3E}">
-        <p14:creationId xmlns:p14="http://schemas.microsoft.com/office/powerpoint/2010/main" val="3577613745"/>
+        <p14:creationId xmlns:p14="http://schemas.microsoft.com/office/powerpoint/2010/main" val="1067365625"/>
       </p:ext>
     </p:extLst>
   </p:cSld>
@@ -5256,6 +5235,216 @@
           <a:p>
             <a:r>
               <a:rPr lang="en-US" dirty="0"/>
+              <a:t>(key idea: introducing </a:t>
+            </a:r>
+            <a:r>
+              <a:rPr lang="en-US" dirty="0" err="1"/>
+              <a:t>Noarr</a:t>
+            </a:r>
+            <a:r>
+              <a:rPr lang="en-US" dirty="0"/>
+              <a:t> Structures; or abstractions for layout-agnostic design)</a:t>
+            </a:r>
+            <a:br>
+              <a:rPr lang="en-US" dirty="0"/>
+            </a:br>
+            <a:br>
+              <a:rPr lang="en-US" dirty="0"/>
+            </a:br>
+            <a:r>
+              <a:rPr lang="en-US" dirty="0"/>
+              <a:t>/*</a:t>
+            </a:r>
+          </a:p>
+          <a:p>
+            <a:r>
+              <a:rPr lang="en-US" dirty="0"/>
+              <a:t>As the first contribution of our research, we have devised an abstraction for building and transforming memory layouts that enable the design of layout-agnostic algorithms as well as the reuse of the defined layouts.</a:t>
+            </a:r>
+          </a:p>
+          <a:p>
+            <a:endParaRPr lang="en-US" dirty="0"/>
+          </a:p>
+          <a:p>
+            <a:r>
+              <a:rPr lang="en-US" dirty="0"/>
+              <a:t>In real-use algorithms</a:t>
+            </a:r>
+            <a:br>
+              <a:rPr lang="en-US" dirty="0"/>
+            </a:br>
+            <a:r>
+              <a:rPr lang="en-US" dirty="0"/>
+              <a:t>- dimensions have semantic value</a:t>
+            </a:r>
+            <a:br>
+              <a:rPr lang="en-US" dirty="0"/>
+            </a:br>
+            <a:r>
+              <a:rPr lang="en-US" dirty="0"/>
+              <a:t>- a data access more often depends on the semantic (logic) structure than on a specific memory offset</a:t>
+            </a:r>
+            <a:br>
+              <a:rPr lang="en-US" dirty="0"/>
+            </a:br>
+            <a:r>
+              <a:rPr lang="en-US" dirty="0"/>
+              <a:t>- traversals cover the semantic space rather than a set of abstract coordinates</a:t>
+            </a:r>
+          </a:p>
+          <a:p>
+            <a:r>
+              <a:rPr lang="en-US" dirty="0"/>
+              <a:t>*/</a:t>
+            </a:r>
+          </a:p>
+          <a:p>
+            <a:endParaRPr lang="en-US" dirty="0"/>
+          </a:p>
+          <a:p>
+            <a:r>
+              <a:rPr lang="en-US" dirty="0"/>
+              <a:t>At the beginning of our research, we focused on devising abstractions that would enable a more seamless design of algorithms amenable to source-level optimizations allowing for user-direction and automation.</a:t>
+            </a:r>
+          </a:p>
+          <a:p>
+            <a:endParaRPr lang="en-US" dirty="0"/>
+          </a:p>
+          <a:p>
+            <a:r>
+              <a:rPr lang="en-US" dirty="0"/>
+              <a:t>If we slightly optimize a standard matrix multiplication algorithm, we might end up with something similar to the shown code.</a:t>
+            </a:r>
+          </a:p>
+          <a:p>
+            <a:r>
+              <a:rPr lang="en-US" dirty="0"/>
+              <a:t>At first view, it is difficult to see that it is actually a three-dimensional traversal performed in a tiled manner, accessing elements in row-major or column-major layouts.</a:t>
+            </a:r>
+          </a:p>
+          <a:p>
+            <a:br>
+              <a:rPr lang="en-US" dirty="0"/>
+            </a:br>
+            <a:br>
+              <a:rPr lang="en-US" dirty="0"/>
+            </a:br>
+            <a:r>
+              <a:rPr lang="en-US" dirty="0"/>
+              <a:t>[without runtime overhead]</a:t>
+            </a:r>
+            <a:br>
+              <a:rPr lang="en-US" dirty="0"/>
+            </a:br>
+            <a:r>
+              <a:rPr lang="en-US" dirty="0"/>
+              <a:t>Our research iteratively progressed to a point where we can encode the semantic logical structure of layouts independently of the physical layout, naming the dimensions for specifying the logical API that is common to the layouts sharing the same dimensions.</a:t>
+            </a:r>
+          </a:p>
+          <a:p>
+            <a:r>
+              <a:rPr lang="en-US" dirty="0"/>
+              <a:t>This makes the structures more resistant to simple errors and encodes further information that then allows using these names to either identify common dimensions of different structures and thus automatically infer traversals over them, or specify transformations of these traversals.</a:t>
+            </a:r>
+            <a:br>
+              <a:rPr lang="en-US" dirty="0"/>
+            </a:br>
+            <a:r>
+              <a:rPr lang="en-US" dirty="0"/>
+              <a:t>This then allows us to compact the difficult-to-maintain version of the matrix multiplication algorithm into a more compact and semantic code.</a:t>
+            </a:r>
+            <a:br>
+              <a:rPr lang="en-US" dirty="0"/>
+            </a:br>
+            <a:r>
+              <a:rPr lang="en-US" dirty="0"/>
+              <a:t>(The first three rows directly match, then we simply specify we want to traverse the combined space of the three structures, and specify the action that should happen for each point of the space; the order directive then specifies the tiling optimization)</a:t>
+            </a:r>
+          </a:p>
+        </p:txBody>
+      </p:sp>
+      <p:sp>
+        <p:nvSpPr>
+          <p:cNvPr id="4" name="Slide Number Placeholder 3"/>
+          <p:cNvSpPr>
+            <a:spLocks noGrp="1"/>
+          </p:cNvSpPr>
+          <p:nvPr>
+            <p:ph type="sldNum" sz="quarter" idx="5"/>
+          </p:nvPr>
+        </p:nvSpPr>
+        <p:spPr/>
+        <p:txBody>
+          <a:bodyPr/>
+          <a:lstStyle/>
+          <a:p>
+            <a:fld id="{FA8FD632-245B-410D-BCC4-8BF8D37AB67F}" type="slidenum">
+              <a:rPr lang="en-US" smtClean="0"/>
+              <a:t>39</a:t>
+            </a:fld>
+            <a:endParaRPr lang="en-US"/>
+          </a:p>
+        </p:txBody>
+      </p:sp>
+    </p:spTree>
+    <p:extLst>
+      <p:ext uri="{BB962C8B-B14F-4D97-AF65-F5344CB8AC3E}">
+        <p14:creationId xmlns:p14="http://schemas.microsoft.com/office/powerpoint/2010/main" val="3577613745"/>
+      </p:ext>
+    </p:extLst>
+  </p:cSld>
+  <p:clrMapOvr>
+    <a:masterClrMapping/>
+  </p:clrMapOvr>
+</p:notes>
+</file>
+
+<file path=ppt/notesSlides/notesSlide37.xml><?xml version="1.0" encoding="utf-8"?>
+<p:notes xmlns:a="http://schemas.openxmlformats.org/drawingml/2006/main" xmlns:r="http://schemas.openxmlformats.org/officeDocument/2006/relationships" xmlns:p="http://schemas.openxmlformats.org/presentationml/2006/main">
+  <p:cSld>
+    <p:spTree>
+      <p:nvGrpSpPr>
+        <p:cNvPr id="1" name=""/>
+        <p:cNvGrpSpPr/>
+        <p:nvPr/>
+      </p:nvGrpSpPr>
+      <p:grpSpPr>
+        <a:xfrm>
+          <a:off x="0" y="0"/>
+          <a:ext cx="0" cy="0"/>
+          <a:chOff x="0" y="0"/>
+          <a:chExt cx="0" cy="0"/>
+        </a:xfrm>
+      </p:grpSpPr>
+      <p:sp>
+        <p:nvSpPr>
+          <p:cNvPr id="2" name="Slide Image Placeholder 1"/>
+          <p:cNvSpPr>
+            <a:spLocks noGrp="1" noRot="1" noChangeAspect="1"/>
+          </p:cNvSpPr>
+          <p:nvPr>
+            <p:ph type="sldImg"/>
+          </p:nvPr>
+        </p:nvSpPr>
+        <p:spPr/>
+      </p:sp>
+      <p:sp>
+        <p:nvSpPr>
+          <p:cNvPr id="3" name="Notes Placeholder 2"/>
+          <p:cNvSpPr>
+            <a:spLocks noGrp="1"/>
+          </p:cNvSpPr>
+          <p:nvPr>
+            <p:ph type="body" idx="1"/>
+          </p:nvPr>
+        </p:nvSpPr>
+        <p:spPr/>
+        <p:txBody>
+          <a:bodyPr/>
+          <a:lstStyle/>
+          <a:p>
+            <a:r>
+              <a:rPr lang="en-US" dirty="0"/>
               <a:t>In our first contribution, we focused on abstractions for encoding the memory layouts so that they separate the logical structure used in the algorithms from the physical memory layout (offsets). Our research is not the only effort on this, as nowadays, we can see similar efforts in the C++ standard with the introduction of </a:t>
             </a:r>
             <a:r>
@@ -5393,7 +5582,7 @@
 </p:notes>
 </file>
 
-<file path=ppt/notesSlides/notesSlide37.xml><?xml version="1.0" encoding="utf-8"?>
+<file path=ppt/notesSlides/notesSlide38.xml><?xml version="1.0" encoding="utf-8"?>
 <p:notes xmlns:a="http://schemas.openxmlformats.org/drawingml/2006/main" xmlns:r="http://schemas.openxmlformats.org/officeDocument/2006/relationships" xmlns:p="http://schemas.openxmlformats.org/presentationml/2006/main">
   <p:cSld>
     <p:spTree>
@@ -6346,7 +6535,15 @@
           <a:p>
             <a:r>
               <a:rPr lang="en-US" dirty="0"/>
-              <a:t>So, these two stages have provided the groundwork for enabling seamless and automatable code optimization in C++ that is fully transparent and directable by the user.</a:t>
+              <a:t>(key idea: autotuning made easier &amp; we can switch </a:t>
+            </a:r>
+            <a:r>
+              <a:rPr lang="en-US" dirty="0" err="1"/>
+              <a:t>autotuners</a:t>
+            </a:r>
+            <a:r>
+              <a:rPr lang="en-US" dirty="0"/>
+              <a:t>)</a:t>
             </a:r>
           </a:p>
           <a:p>
@@ -6355,13 +6552,7 @@
           <a:p>
             <a:r>
               <a:rPr lang="en-US" dirty="0"/>
-              <a:t>We have finalized this effort by implementing an autotuning interface that allows for specifying the tuned parameters in the same code as the algorithm.</a:t>
-            </a:r>
-          </a:p>
-          <a:p>
-            <a:r>
-              <a:rPr lang="en-US" dirty="0"/>
-              <a:t>This interface was designed to pair well with the abstractions.</a:t>
+              <a:t>These two stages have provided the groundwork for enabling seamless and automatable code optimization in C++ that is fully transparent and directable by the user.</a:t>
             </a:r>
           </a:p>
           <a:p>
@@ -6370,15 +6561,87 @@
           <a:p>
             <a:r>
               <a:rPr lang="en-US" dirty="0"/>
-              <a:t>(Oh god I don’t know how to continue </a:t>
+              <a:t>Typically, when we want to use an autotuning framework to optimize an algorithm, we need to:</a:t>
+            </a:r>
+          </a:p>
+          <a:p>
+            <a:pPr marL="171450" indent="-171450">
+              <a:buFontTx/>
+              <a:buChar char="-"/>
+            </a:pPr>
+            <a:r>
+              <a:rPr lang="en-US" dirty="0"/>
+              <a:t>Define each parameter in the code</a:t>
+            </a:r>
+          </a:p>
+          <a:p>
+            <a:pPr marL="171450" indent="-171450">
+              <a:buFontTx/>
+              <a:buChar char="-"/>
+            </a:pPr>
+            <a:r>
+              <a:rPr lang="en-US" dirty="0"/>
+              <a:t>Handle communication with the autotuning framework</a:t>
+            </a:r>
+          </a:p>
+          <a:p>
+            <a:pPr marL="171450" indent="-171450">
+              <a:buFontTx/>
+              <a:buChar char="-"/>
+            </a:pPr>
+            <a:r>
+              <a:rPr lang="en-US" dirty="0"/>
+              <a:t>Define the parameter on the </a:t>
             </a:r>
             <a:r>
               <a:rPr lang="en-US" dirty="0" err="1"/>
-              <a:t>rn</a:t>
-            </a:r>
-            <a:r>
-              <a:rPr lang="en-US" dirty="0"/>
-              <a:t>)</a:t>
+              <a:t>autotuner’s</a:t>
+            </a:r>
+            <a:r>
+              <a:rPr lang="en-US" dirty="0"/>
+              <a:t> side</a:t>
+            </a:r>
+          </a:p>
+          <a:p>
+            <a:pPr marL="0" indent="0">
+              <a:buFontTx/>
+              <a:buNone/>
+            </a:pPr>
+            <a:endParaRPr lang="en-US" dirty="0"/>
+          </a:p>
+          <a:p>
+            <a:pPr marL="0" indent="0">
+              <a:buFontTx/>
+              <a:buNone/>
+            </a:pPr>
+            <a:r>
+              <a:rPr lang="en-US" dirty="0"/>
+              <a:t>This creates unnecessary amount of boilerplate definitions and communication specification that is difficult to maintain and easy to make mistakes in.</a:t>
+            </a:r>
+          </a:p>
+          <a:p>
+            <a:endParaRPr lang="en-US" dirty="0"/>
+          </a:p>
+          <a:p>
+            <a:r>
+              <a:rPr lang="en-US" dirty="0"/>
+              <a:t>We have implemented an autotuning interface that allows for specifying the tuned parameters in the same code as the algorithm,</a:t>
+            </a:r>
+            <a:br>
+              <a:rPr lang="en-US" dirty="0"/>
+            </a:br>
+            <a:r>
+              <a:rPr lang="en-US" dirty="0"/>
+              <a:t>this specification is independent of the autotuning backend, and the whole autotuning process is handled automatically.</a:t>
+            </a:r>
+          </a:p>
+          <a:p>
+            <a:endParaRPr lang="en-US" dirty="0"/>
+          </a:p>
+          <a:p>
+            <a:r>
+              <a:rPr lang="en-US" dirty="0"/>
+              <a:t>Since the specification is independent of the autotuning backend, this also makes switching between different autotuning frameworks easy.</a:t>
             </a:r>
           </a:p>
         </p:txBody>
@@ -13200,14 +13463,6 @@
 <file path=ppt/slides/slide14.xml><?xml version="1.0" encoding="utf-8"?>
 <p:sld xmlns:a="http://schemas.openxmlformats.org/drawingml/2006/main" xmlns:r="http://schemas.openxmlformats.org/officeDocument/2006/relationships" xmlns:p="http://schemas.openxmlformats.org/presentationml/2006/main">
   <p:cSld>
-    <p:bg>
-      <p:bgPr>
-        <a:solidFill>
-          <a:srgbClr val="FFFF00"/>
-        </a:solidFill>
-        <a:effectLst/>
-      </p:bgPr>
-    </p:bg>
     <p:spTree>
       <p:nvGrpSpPr>
         <p:cNvPr id="1" name=""/>
@@ -13272,7 +13527,7 @@
         </p:blipFill>
         <p:spPr>
           <a:xfrm>
-            <a:off x="2940615" y="3429000"/>
+            <a:off x="1794862" y="3305637"/>
             <a:ext cx="8602275" cy="2924583"/>
           </a:xfrm>
           <a:prstGeom prst="rect">
@@ -13302,7 +13557,7 @@
         </p:blipFill>
         <p:spPr>
           <a:xfrm>
-            <a:off x="4121330" y="1293295"/>
+            <a:off x="2733204" y="1356359"/>
             <a:ext cx="6725589" cy="1886213"/>
           </a:xfrm>
           <a:prstGeom prst="rect">
@@ -15766,14 +16021,6 @@
 <file path=ppt/slides/slide18.xml><?xml version="1.0" encoding="utf-8"?>
 <p:sld xmlns:a="http://schemas.openxmlformats.org/drawingml/2006/main" xmlns:r="http://schemas.openxmlformats.org/officeDocument/2006/relationships" xmlns:p="http://schemas.openxmlformats.org/presentationml/2006/main">
   <p:cSld>
-    <p:bg>
-      <p:bgPr>
-        <a:solidFill>
-          <a:srgbClr val="FFFF00"/>
-        </a:solidFill>
-        <a:effectLst/>
-      </p:bgPr>
-    </p:bg>
     <p:spTree>
       <p:nvGrpSpPr>
         <p:cNvPr id="1" name=""/>
@@ -15845,7 +16092,7 @@
           <a:p>
             <a:r>
               <a:rPr lang="en-US" dirty="0"/>
-              <a:t>Applicable to parallel and distributed HPC computing</a:t>
+              <a:t>Applicable to parallel (CPU/GPU) and distributed HPC computing</a:t>
             </a:r>
           </a:p>
           <a:p>
@@ -17617,6 +17864,13 @@
               <a:rPr lang="en-US" noProof="0" dirty="0"/>
               <a:t>Tutoring LLMs for CUDA</a:t>
             </a:r>
+            <a:br>
+              <a:rPr lang="en-US" noProof="0" dirty="0"/>
+            </a:br>
+            <a:r>
+              <a:rPr lang="en-US" sz="2400" i="1" noProof="0" dirty="0"/>
+              <a:t>OpenAI GPT-o3-mini</a:t>
+            </a:r>
           </a:p>
         </p:txBody>
       </p:sp>
@@ -18697,14 +18951,6 @@
 <file path=ppt/slides/slide22.xml><?xml version="1.0" encoding="utf-8"?>
 <p:sld xmlns:a="http://schemas.openxmlformats.org/drawingml/2006/main" xmlns:r="http://schemas.openxmlformats.org/officeDocument/2006/relationships" xmlns:p="http://schemas.openxmlformats.org/presentationml/2006/main">
   <p:cSld>
-    <p:bg>
-      <p:bgPr>
-        <a:solidFill>
-          <a:srgbClr val="FFFF00"/>
-        </a:solidFill>
-        <a:effectLst/>
-      </p:bgPr>
-    </p:bg>
     <p:spTree>
       <p:nvGrpSpPr>
         <p:cNvPr id="1" name="">
@@ -18750,6 +18996,14 @@
               <a:rPr lang="en-US" noProof="0" dirty="0"/>
               <a:t>Tutoring LLMs for CUDA – submission</a:t>
             </a:r>
+            <a:br>
+              <a:rPr lang="en-US" noProof="0" dirty="0"/>
+            </a:br>
+            <a:r>
+              <a:rPr lang="en-US" sz="2400" i="1" dirty="0"/>
+              <a:t>OpenAI GPT-o3-mini</a:t>
+            </a:r>
+            <a:endParaRPr lang="en-US" sz="2400" noProof="0" dirty="0"/>
           </a:p>
         </p:txBody>
       </p:sp>
@@ -18943,6 +19197,90 @@
           </a:p>
         </p:txBody>
       </p:sp>
+      <p:sp>
+        <p:nvSpPr>
+          <p:cNvPr id="9" name="TextBox 8">
+            <a:extLst>
+              <a:ext uri="{FF2B5EF4-FFF2-40B4-BE49-F238E27FC236}">
+                <a16:creationId xmlns:a16="http://schemas.microsoft.com/office/drawing/2014/main" id="{5F4D55C3-3077-8567-A06E-0244BA5AA6CA}"/>
+              </a:ext>
+            </a:extLst>
+          </p:cNvPr>
+          <p:cNvSpPr txBox="1"/>
+          <p:nvPr/>
+        </p:nvSpPr>
+        <p:spPr>
+          <a:xfrm>
+            <a:off x="236845" y="6084477"/>
+            <a:ext cx="5697394" cy="369332"/>
+          </a:xfrm>
+          <a:prstGeom prst="rect">
+            <a:avLst/>
+          </a:prstGeom>
+          <a:noFill/>
+        </p:spPr>
+        <p:txBody>
+          <a:bodyPr wrap="none" rtlCol="0">
+            <a:spAutoFit/>
+          </a:bodyPr>
+          <a:lstStyle/>
+          <a:p>
+            <a:r>
+              <a:rPr lang="en-US" dirty="0"/>
+              <a:t>Prompt specificity (naïve </a:t>
+            </a:r>
+            <a:r>
+              <a:rPr lang="en-US" dirty="0">
+                <a:sym typeface="Wingdings" panose="05000000000000000000" pitchFamily="2" charset="2"/>
+              </a:rPr>
+              <a:t> …  design specification)</a:t>
+            </a:r>
+            <a:endParaRPr lang="en-US" dirty="0"/>
+          </a:p>
+        </p:txBody>
+      </p:sp>
+      <p:sp>
+        <p:nvSpPr>
+          <p:cNvPr id="11" name="TextBox 10">
+            <a:extLst>
+              <a:ext uri="{FF2B5EF4-FFF2-40B4-BE49-F238E27FC236}">
+                <a16:creationId xmlns:a16="http://schemas.microsoft.com/office/drawing/2014/main" id="{BEFC1A91-D2F9-8087-5FD2-A346BE6173B0}"/>
+              </a:ext>
+            </a:extLst>
+          </p:cNvPr>
+          <p:cNvSpPr txBox="1"/>
+          <p:nvPr/>
+        </p:nvSpPr>
+        <p:spPr>
+          <a:xfrm>
+            <a:off x="6189752" y="5756063"/>
+            <a:ext cx="5697394" cy="369332"/>
+          </a:xfrm>
+          <a:prstGeom prst="rect">
+            <a:avLst/>
+          </a:prstGeom>
+          <a:noFill/>
+        </p:spPr>
+        <p:txBody>
+          <a:bodyPr wrap="none" rtlCol="0">
+            <a:spAutoFit/>
+          </a:bodyPr>
+          <a:lstStyle/>
+          <a:p>
+            <a:r>
+              <a:rPr lang="en-US" dirty="0"/>
+              <a:t>Prompt specificity (naïve </a:t>
+            </a:r>
+            <a:r>
+              <a:rPr lang="en-US" dirty="0">
+                <a:sym typeface="Wingdings" panose="05000000000000000000" pitchFamily="2" charset="2"/>
+              </a:rPr>
+              <a:t> …  design specification)</a:t>
+            </a:r>
+            <a:endParaRPr lang="en-US" dirty="0"/>
+          </a:p>
+        </p:txBody>
+      </p:sp>
     </p:spTree>
     <p:extLst>
       <p:ext uri="{BB962C8B-B14F-4D97-AF65-F5344CB8AC3E}">
@@ -18959,14 +19297,6 @@
 <file path=ppt/slides/slide23.xml><?xml version="1.0" encoding="utf-8"?>
 <p:sld xmlns:a="http://schemas.openxmlformats.org/drawingml/2006/main" xmlns:r="http://schemas.openxmlformats.org/officeDocument/2006/relationships" xmlns:p="http://schemas.openxmlformats.org/presentationml/2006/main">
   <p:cSld>
-    <p:bg>
-      <p:bgPr>
-        <a:solidFill>
-          <a:srgbClr val="FFFF00"/>
-        </a:solidFill>
-        <a:effectLst/>
-      </p:bgPr>
-    </p:bg>
     <p:spTree>
       <p:nvGrpSpPr>
         <p:cNvPr id="1" name="">
@@ -19012,6 +19342,14 @@
               <a:rPr lang="en-US" noProof="0" dirty="0"/>
               <a:t>Tutoring LLMs for CUDA – at conference</a:t>
             </a:r>
+            <a:br>
+              <a:rPr lang="en-US" noProof="0" dirty="0"/>
+            </a:br>
+            <a:r>
+              <a:rPr lang="en-US" sz="2400" i="1" dirty="0"/>
+              <a:t>OpenAI GPT-5</a:t>
+            </a:r>
+            <a:endParaRPr lang="en-US" sz="2400" noProof="0" dirty="0"/>
           </a:p>
         </p:txBody>
       </p:sp>
@@ -19200,6 +19538,90 @@
               <a:rPr lang="en-US" dirty="0"/>
               <a:t>k-Nearest Neighbors</a:t>
             </a:r>
+          </a:p>
+        </p:txBody>
+      </p:sp>
+      <p:sp>
+        <p:nvSpPr>
+          <p:cNvPr id="16" name="TextBox 15">
+            <a:extLst>
+              <a:ext uri="{FF2B5EF4-FFF2-40B4-BE49-F238E27FC236}">
+                <a16:creationId xmlns:a16="http://schemas.microsoft.com/office/drawing/2014/main" id="{4CA870EA-9FA0-3527-D9FC-4D14AAF90D3C}"/>
+              </a:ext>
+            </a:extLst>
+          </p:cNvPr>
+          <p:cNvSpPr txBox="1"/>
+          <p:nvPr/>
+        </p:nvSpPr>
+        <p:spPr>
+          <a:xfrm>
+            <a:off x="299642" y="6013676"/>
+            <a:ext cx="5697394" cy="369332"/>
+          </a:xfrm>
+          <a:prstGeom prst="rect">
+            <a:avLst/>
+          </a:prstGeom>
+          <a:noFill/>
+        </p:spPr>
+        <p:txBody>
+          <a:bodyPr wrap="none" rtlCol="0">
+            <a:spAutoFit/>
+          </a:bodyPr>
+          <a:lstStyle/>
+          <a:p>
+            <a:r>
+              <a:rPr lang="en-US" dirty="0"/>
+              <a:t>Prompt specificity (naïve </a:t>
+            </a:r>
+            <a:r>
+              <a:rPr lang="en-US" dirty="0">
+                <a:sym typeface="Wingdings" panose="05000000000000000000" pitchFamily="2" charset="2"/>
+              </a:rPr>
+              <a:t> …  design specification)</a:t>
+            </a:r>
+            <a:endParaRPr lang="en-US" dirty="0"/>
+          </a:p>
+        </p:txBody>
+      </p:sp>
+      <p:sp>
+        <p:nvSpPr>
+          <p:cNvPr id="21" name="TextBox 20">
+            <a:extLst>
+              <a:ext uri="{FF2B5EF4-FFF2-40B4-BE49-F238E27FC236}">
+                <a16:creationId xmlns:a16="http://schemas.microsoft.com/office/drawing/2014/main" id="{EBEA3F10-024D-07D5-20F8-E8C233912E18}"/>
+              </a:ext>
+            </a:extLst>
+          </p:cNvPr>
+          <p:cNvSpPr txBox="1"/>
+          <p:nvPr/>
+        </p:nvSpPr>
+        <p:spPr>
+          <a:xfrm>
+            <a:off x="6350972" y="5987018"/>
+            <a:ext cx="5697394" cy="369332"/>
+          </a:xfrm>
+          <a:prstGeom prst="rect">
+            <a:avLst/>
+          </a:prstGeom>
+          <a:noFill/>
+        </p:spPr>
+        <p:txBody>
+          <a:bodyPr wrap="none" rtlCol="0">
+            <a:spAutoFit/>
+          </a:bodyPr>
+          <a:lstStyle/>
+          <a:p>
+            <a:r>
+              <a:rPr lang="en-US" dirty="0"/>
+              <a:t>Prompt specificity (naïve </a:t>
+            </a:r>
+            <a:r>
+              <a:rPr lang="en-US" dirty="0">
+                <a:sym typeface="Wingdings" panose="05000000000000000000" pitchFamily="2" charset="2"/>
+              </a:rPr>
+              <a:t> …  design specification)</a:t>
+            </a:r>
+            <a:endParaRPr lang="en-US" dirty="0"/>
           </a:p>
         </p:txBody>
       </p:sp>
@@ -20940,8 +21362,8 @@
         </p:nvCxnSpPr>
         <p:spPr>
           <a:xfrm>
-            <a:off x="1200373" y="956745"/>
-            <a:ext cx="761050" cy="683591"/>
+            <a:off x="1371093" y="956745"/>
+            <a:ext cx="590330" cy="683591"/>
           </a:xfrm>
           <a:prstGeom prst="straightConnector1">
             <a:avLst/>
@@ -20983,7 +21405,7 @@
         <p:spPr>
           <a:xfrm>
             <a:off x="216385" y="587413"/>
-            <a:ext cx="1967975" cy="369332"/>
+            <a:ext cx="2309415" cy="369332"/>
           </a:xfrm>
           <a:prstGeom prst="rect">
             <a:avLst/>
@@ -20998,7 +21420,7 @@
           <a:p>
             <a:r>
               <a:rPr lang="en-US" dirty="0"/>
-              <a:t>Best performance</a:t>
+              <a:t>Best performance (C)</a:t>
             </a:r>
           </a:p>
         </p:txBody>
@@ -23314,14 +23736,15 @@
         </p:nvPicPr>
         <p:blipFill>
           <a:blip r:embed="rId4"/>
+          <a:srcRect t="3764" r="7222" b="4370"/>
           <a:stretch>
             <a:fillRect/>
           </a:stretch>
         </p:blipFill>
         <p:spPr>
           <a:xfrm>
-            <a:off x="108065" y="4043553"/>
-            <a:ext cx="12192000" cy="2727753"/>
+            <a:off x="108065" y="4146210"/>
+            <a:ext cx="11311465" cy="2505875"/>
           </a:xfrm>
           <a:prstGeom prst="rect">
             <a:avLst/>
@@ -36037,7 +36460,10 @@
           <a:bodyPr/>
           <a:lstStyle/>
           <a:p>
-            <a:endParaRPr lang="en-US"/>
+            <a:r>
+              <a:rPr lang="en-US" dirty="0"/>
+              <a:t>Layout abstractions</a:t>
+            </a:r>
           </a:p>
         </p:txBody>
       </p:sp>
@@ -37733,7 +38159,10 @@
           <a:bodyPr/>
           <a:lstStyle/>
           <a:p>
-            <a:endParaRPr lang="en-US"/>
+            <a:r>
+              <a:rPr lang="en-US" dirty="0"/>
+              <a:t>Layout abstractions</a:t>
+            </a:r>
           </a:p>
         </p:txBody>
       </p:sp>
@@ -38687,6 +39116,10 @@
           <a:bodyPr/>
           <a:lstStyle/>
           <a:p>
+            <a:r>
+              <a:rPr lang="en-US" dirty="0"/>
+              <a:t>Traversal abstractions</a:t>
+            </a:r>
             <a:endParaRPr lang="en-US" noProof="0" dirty="0"/>
           </a:p>
         </p:txBody>
@@ -40940,7 +41373,10 @@
           <a:bodyPr/>
           <a:lstStyle/>
           <a:p>
-            <a:endParaRPr lang="en-US" noProof="0" dirty="0"/>
+            <a:r>
+              <a:rPr lang="en-US" noProof="0" dirty="0"/>
+              <a:t>Traversal transformations &amp; parallelization</a:t>
+            </a:r>
           </a:p>
         </p:txBody>
       </p:sp>
@@ -42629,14 +43065,6 @@
 <file path=ppt/slides/slide9.xml><?xml version="1.0" encoding="utf-8"?>
 <p:sld xmlns:a="http://schemas.openxmlformats.org/drawingml/2006/main" xmlns:r="http://schemas.openxmlformats.org/officeDocument/2006/relationships" xmlns:p="http://schemas.openxmlformats.org/presentationml/2006/main">
   <p:cSld>
-    <p:bg>
-      <p:bgPr>
-        <a:solidFill>
-          <a:srgbClr val="FF0000"/>
-        </a:solidFill>
-        <a:effectLst/>
-      </p:bgPr>
-    </p:bg>
     <p:spTree>
       <p:nvGrpSpPr>
         <p:cNvPr id="1" name=""/>
@@ -42672,7 +43100,10 @@
           <a:bodyPr/>
           <a:lstStyle/>
           <a:p>
-            <a:endParaRPr lang="en-US" noProof="0" dirty="0"/>
+            <a:r>
+              <a:rPr lang="en-US" noProof="0" dirty="0"/>
+              <a:t>Autotuning</a:t>
+            </a:r>
           </a:p>
         </p:txBody>
       </p:sp>
@@ -42705,46 +43136,198 @@
         </p:blipFill>
         <p:spPr>
           <a:xfrm>
-            <a:off x="3648473" y="3573561"/>
-            <a:ext cx="4208444" cy="1949986"/>
+            <a:off x="2962939" y="4275380"/>
+            <a:ext cx="5573788" cy="2582620"/>
           </a:xfrm>
           <a:prstGeom prst="rect">
             <a:avLst/>
           </a:prstGeom>
         </p:spPr>
       </p:pic>
-      <p:sp>
-        <p:nvSpPr>
-          <p:cNvPr id="10" name="Rectangle 9">
-            <a:extLst>
-              <a:ext uri="{FF2B5EF4-FFF2-40B4-BE49-F238E27FC236}">
-                <a16:creationId xmlns:a16="http://schemas.microsoft.com/office/drawing/2014/main" id="{156176CF-A5A8-202F-6D91-07F22B4C343A}"/>
-              </a:ext>
-            </a:extLst>
-          </p:cNvPr>
-          <p:cNvSpPr/>
+      <p:pic>
+        <p:nvPicPr>
+          <p:cNvPr id="17" name="Picture 16" descr="OpenTuner - An extensible framework for program autotuning">
+            <a:extLst>
+              <a:ext uri="{FF2B5EF4-FFF2-40B4-BE49-F238E27FC236}">
+                <a16:creationId xmlns:a16="http://schemas.microsoft.com/office/drawing/2014/main" id="{9B62B548-A2CB-44E7-8C14-94F9EC04F63D}"/>
+              </a:ext>
+            </a:extLst>
+          </p:cNvPr>
+          <p:cNvPicPr>
+            <a:picLocks noChangeAspect="1"/>
+          </p:cNvPicPr>
           <p:nvPr/>
-        </p:nvSpPr>
+        </p:nvPicPr>
+        <p:blipFill>
+          <a:blip r:embed="rId4"/>
+          <a:stretch>
+            <a:fillRect/>
+          </a:stretch>
+        </p:blipFill>
         <p:spPr>
           <a:xfrm>
-            <a:off x="838200" y="2467778"/>
-            <a:ext cx="2621096" cy="1729649"/>
+            <a:off x="9068399" y="5485816"/>
+            <a:ext cx="2455817" cy="842437"/>
           </a:xfrm>
           <a:prstGeom prst="rect">
             <a:avLst/>
           </a:prstGeom>
         </p:spPr>
+      </p:pic>
+      <p:pic>
+        <p:nvPicPr>
+          <p:cNvPr id="18" name="Picture 17" descr="Optuna: A hyperparameter optimization framework — Optuna 4.9.0 documentation">
+            <a:extLst>
+              <a:ext uri="{FF2B5EF4-FFF2-40B4-BE49-F238E27FC236}">
+                <a16:creationId xmlns:a16="http://schemas.microsoft.com/office/drawing/2014/main" id="{AF010DE9-B658-4682-CFDF-661E5A062AA0}"/>
+              </a:ext>
+            </a:extLst>
+          </p:cNvPr>
+          <p:cNvPicPr>
+            <a:picLocks noChangeAspect="1"/>
+          </p:cNvPicPr>
+          <p:nvPr/>
+        </p:nvPicPr>
+        <p:blipFill>
+          <a:blip r:embed="rId5"/>
+          <a:stretch>
+            <a:fillRect/>
+          </a:stretch>
+        </p:blipFill>
+        <p:spPr>
+          <a:xfrm>
+            <a:off x="9315748" y="4521033"/>
+            <a:ext cx="2455817" cy="515722"/>
+          </a:xfrm>
+          <a:prstGeom prst="rect">
+            <a:avLst/>
+          </a:prstGeom>
+        </p:spPr>
+      </p:pic>
+      <p:pic>
+        <p:nvPicPr>
+          <p:cNvPr id="19" name="Picture 18" descr="Auto-Tuning Framework (ATF) · GitHub">
+            <a:extLst>
+              <a:ext uri="{FF2B5EF4-FFF2-40B4-BE49-F238E27FC236}">
+                <a16:creationId xmlns:a16="http://schemas.microsoft.com/office/drawing/2014/main" id="{F7F7CFF8-EDA0-77B0-914C-2AD8CCB7F8CA}"/>
+              </a:ext>
+            </a:extLst>
+          </p:cNvPr>
+          <p:cNvPicPr>
+            <a:picLocks noChangeAspect="1"/>
+          </p:cNvPicPr>
+          <p:nvPr/>
+        </p:nvPicPr>
+        <p:blipFill>
+          <a:blip r:embed="rId6"/>
+          <a:srcRect/>
+          <a:stretch>
+            <a:fillRect/>
+          </a:stretch>
+        </p:blipFill>
+        <p:spPr>
+          <a:xfrm>
+            <a:off x="9523323" y="3265015"/>
+            <a:ext cx="1099238" cy="1099238"/>
+          </a:xfrm>
+          <a:prstGeom prst="rect">
+            <a:avLst/>
+          </a:prstGeom>
+        </p:spPr>
+      </p:pic>
+      <p:sp>
+        <p:nvSpPr>
+          <p:cNvPr id="2" name="Date Placeholder 1">
+            <a:extLst>
+              <a:ext uri="{FF2B5EF4-FFF2-40B4-BE49-F238E27FC236}">
+                <a16:creationId xmlns:a16="http://schemas.microsoft.com/office/drawing/2014/main" id="{44FA33F8-BA09-FE20-AA3F-F979C5E8EF66}"/>
+              </a:ext>
+            </a:extLst>
+          </p:cNvPr>
+          <p:cNvSpPr>
+            <a:spLocks noGrp="1"/>
+          </p:cNvSpPr>
+          <p:nvPr>
+            <p:ph type="dt" sz="half" idx="10"/>
+          </p:nvPr>
+        </p:nvSpPr>
+        <p:spPr/>
+        <p:txBody>
+          <a:bodyPr/>
+          <a:lstStyle/>
+          <a:p>
+            <a:fld id="{B7D82220-9CE2-4BC9-B6C9-7A7531EEF273}" type="datetime1">
+              <a:rPr lang="en-US" smtClean="0"/>
+              <a:t>8/28/2026</a:t>
+            </a:fld>
+            <a:endParaRPr lang="en-US"/>
+          </a:p>
+        </p:txBody>
+      </p:sp>
+      <p:sp>
+        <p:nvSpPr>
+          <p:cNvPr id="3" name="Slide Number Placeholder 2">
+            <a:extLst>
+              <a:ext uri="{FF2B5EF4-FFF2-40B4-BE49-F238E27FC236}">
+                <a16:creationId xmlns:a16="http://schemas.microsoft.com/office/drawing/2014/main" id="{9CFF31DD-3BF8-7967-3565-500F50D5E9D9}"/>
+              </a:ext>
+            </a:extLst>
+          </p:cNvPr>
+          <p:cNvSpPr>
+            <a:spLocks noGrp="1"/>
+          </p:cNvSpPr>
+          <p:nvPr>
+            <p:ph type="sldNum" sz="quarter" idx="12"/>
+          </p:nvPr>
+        </p:nvSpPr>
+        <p:spPr/>
+        <p:txBody>
+          <a:bodyPr/>
+          <a:lstStyle/>
+          <a:p>
+            <a:fld id="{DA0BB241-1B5F-4309-9407-9EEA04D9598D}" type="slidenum">
+              <a:rPr lang="en-US" smtClean="0"/>
+              <a:t>9</a:t>
+            </a:fld>
+            <a:endParaRPr lang="en-US"/>
+          </a:p>
+        </p:txBody>
+      </p:sp>
+      <p:sp>
+        <p:nvSpPr>
+          <p:cNvPr id="4" name="Flowchart: Process 3">
+            <a:extLst>
+              <a:ext uri="{FF2B5EF4-FFF2-40B4-BE49-F238E27FC236}">
+                <a16:creationId xmlns:a16="http://schemas.microsoft.com/office/drawing/2014/main" id="{1A3646A4-0501-E64C-9EBA-2A5D70FCC45E}"/>
+              </a:ext>
+            </a:extLst>
+          </p:cNvPr>
+          <p:cNvSpPr/>
+          <p:nvPr/>
+        </p:nvSpPr>
+        <p:spPr>
+          <a:xfrm>
+            <a:off x="2719349" y="1987248"/>
+            <a:ext cx="1923615" cy="842437"/>
+          </a:xfrm>
+          <a:prstGeom prst="flowChartProcess">
+            <a:avLst/>
+          </a:prstGeom>
+          <a:ln>
+            <a:solidFill>
+              <a:schemeClr val="tx1"/>
+            </a:solidFill>
+          </a:ln>
+        </p:spPr>
         <p:style>
-          <a:lnRef idx="2">
-            <a:schemeClr val="accent1">
-              <a:shade val="15000"/>
-            </a:schemeClr>
+          <a:lnRef idx="1">
+            <a:schemeClr val="accent2"/>
           </a:lnRef>
-          <a:fillRef idx="1">
-            <a:schemeClr val="accent1"/>
+          <a:fillRef idx="3">
+            <a:schemeClr val="accent2"/>
           </a:fillRef>
-          <a:effectRef idx="0">
-            <a:schemeClr val="accent1"/>
+          <a:effectRef idx="2">
+            <a:schemeClr val="accent2"/>
           </a:effectRef>
           <a:fontRef idx="minor">
             <a:schemeClr val="lt1"/>
@@ -42756,18 +43339,18 @@
           <a:p>
             <a:pPr algn="ctr"/>
             <a:r>
-              <a:rPr lang="en-US" noProof="0" dirty="0"/>
-              <a:t>Tuning parameters</a:t>
-            </a:r>
-          </a:p>
-        </p:txBody>
-      </p:sp>
-      <p:sp>
-        <p:nvSpPr>
-          <p:cNvPr id="12" name="Rectangle 11">
-            <a:extLst>
-              <a:ext uri="{FF2B5EF4-FFF2-40B4-BE49-F238E27FC236}">
-                <a16:creationId xmlns:a16="http://schemas.microsoft.com/office/drawing/2014/main" id="{EF842F52-719B-B662-4BF8-29ED15AC61DB}"/>
+              <a:rPr lang="en-US" dirty="0"/>
+              <a:t>Parameters in the application</a:t>
+            </a:r>
+          </a:p>
+        </p:txBody>
+      </p:sp>
+      <p:sp>
+        <p:nvSpPr>
+          <p:cNvPr id="6" name="Flowchart: Process 5">
+            <a:extLst>
+              <a:ext uri="{FF2B5EF4-FFF2-40B4-BE49-F238E27FC236}">
+                <a16:creationId xmlns:a16="http://schemas.microsoft.com/office/drawing/2014/main" id="{09D4644A-2975-4E43-85E5-AC04135744E4}"/>
               </a:ext>
             </a:extLst>
           </p:cNvPr>
@@ -42776,24 +43359,240 @@
         </p:nvSpPr>
         <p:spPr>
           <a:xfrm>
-            <a:off x="838200" y="4763226"/>
-            <a:ext cx="2621096" cy="1729649"/>
+            <a:off x="6756788" y="1987248"/>
+            <a:ext cx="1923615" cy="842437"/>
           </a:xfrm>
-          <a:prstGeom prst="rect">
+          <a:prstGeom prst="flowChartProcess">
+            <a:avLst/>
+          </a:prstGeom>
+          <a:ln>
+            <a:solidFill>
+              <a:schemeClr val="tx1"/>
+            </a:solidFill>
+          </a:ln>
+        </p:spPr>
+        <p:style>
+          <a:lnRef idx="1">
+            <a:schemeClr val="accent2"/>
+          </a:lnRef>
+          <a:fillRef idx="3">
+            <a:schemeClr val="accent2"/>
+          </a:fillRef>
+          <a:effectRef idx="2">
+            <a:schemeClr val="accent2"/>
+          </a:effectRef>
+          <a:fontRef idx="minor">
+            <a:schemeClr val="lt1"/>
+          </a:fontRef>
+        </p:style>
+        <p:txBody>
+          <a:bodyPr rtlCol="0" anchor="ctr"/>
+          <a:lstStyle/>
+          <a:p>
+            <a:pPr algn="ctr"/>
+            <a:r>
+              <a:rPr lang="en-US" dirty="0"/>
+              <a:t>Parameters in an </a:t>
+            </a:r>
+            <a:r>
+              <a:rPr lang="en-US" dirty="0" err="1"/>
+              <a:t>autotuner</a:t>
+            </a:r>
+            <a:r>
+              <a:rPr lang="en-US" dirty="0"/>
+              <a:t> script</a:t>
+            </a:r>
+          </a:p>
+        </p:txBody>
+      </p:sp>
+      <p:sp>
+        <p:nvSpPr>
+          <p:cNvPr id="8" name="Arrow: Left-Right 7">
+            <a:extLst>
+              <a:ext uri="{FF2B5EF4-FFF2-40B4-BE49-F238E27FC236}">
+                <a16:creationId xmlns:a16="http://schemas.microsoft.com/office/drawing/2014/main" id="{87FD7390-E206-0701-B169-9DA704B413EE}"/>
+              </a:ext>
+            </a:extLst>
+          </p:cNvPr>
+          <p:cNvSpPr/>
+          <p:nvPr/>
+        </p:nvSpPr>
+        <p:spPr>
+          <a:xfrm>
+            <a:off x="4642964" y="2061867"/>
+            <a:ext cx="2113824" cy="690836"/>
+          </a:xfrm>
+          <a:prstGeom prst="leftRightArrow">
+            <a:avLst>
+              <a:gd name="adj1" fmla="val 41917"/>
+              <a:gd name="adj2" fmla="val 50000"/>
+            </a:avLst>
+          </a:prstGeom>
+          <a:gradFill flip="none" rotWithShape="1">
+            <a:gsLst>
+              <a:gs pos="0">
+                <a:schemeClr val="accent2">
+                  <a:lumMod val="67000"/>
+                </a:schemeClr>
+              </a:gs>
+              <a:gs pos="48000">
+                <a:schemeClr val="accent2">
+                  <a:lumMod val="97000"/>
+                  <a:lumOff val="3000"/>
+                </a:schemeClr>
+              </a:gs>
+              <a:gs pos="100000">
+                <a:schemeClr val="accent2">
+                  <a:lumMod val="60000"/>
+                  <a:lumOff val="40000"/>
+                </a:schemeClr>
+              </a:gs>
+            </a:gsLst>
+            <a:lin ang="16200000" scaled="1"/>
+            <a:tileRect/>
+          </a:gradFill>
+          <a:ln>
+            <a:solidFill>
+              <a:schemeClr val="tx1"/>
+            </a:solidFill>
+          </a:ln>
+        </p:spPr>
+        <p:style>
+          <a:lnRef idx="0">
+            <a:scrgbClr r="0" g="0" b="0"/>
+          </a:lnRef>
+          <a:fillRef idx="0">
+            <a:scrgbClr r="0" g="0" b="0"/>
+          </a:fillRef>
+          <a:effectRef idx="0">
+            <a:scrgbClr r="0" g="0" b="0"/>
+          </a:effectRef>
+          <a:fontRef idx="minor">
+            <a:schemeClr val="lt1"/>
+          </a:fontRef>
+        </p:style>
+        <p:txBody>
+          <a:bodyPr rtlCol="0" anchor="ctr"/>
+          <a:lstStyle/>
+          <a:p>
+            <a:pPr algn="ctr"/>
+            <a:r>
+              <a:rPr lang="en-US" dirty="0"/>
+              <a:t>Communication</a:t>
+            </a:r>
+          </a:p>
+        </p:txBody>
+      </p:sp>
+      <p:sp>
+        <p:nvSpPr>
+          <p:cNvPr id="11" name="Right Brace 10">
+            <a:extLst>
+              <a:ext uri="{FF2B5EF4-FFF2-40B4-BE49-F238E27FC236}">
+                <a16:creationId xmlns:a16="http://schemas.microsoft.com/office/drawing/2014/main" id="{0E210CDB-EAA6-0C9F-CAB9-B16CAFD1D4A6}"/>
+              </a:ext>
+            </a:extLst>
+          </p:cNvPr>
+          <p:cNvSpPr/>
+          <p:nvPr/>
+        </p:nvSpPr>
+        <p:spPr>
+          <a:xfrm rot="5400000">
+            <a:off x="5605927" y="17730"/>
+            <a:ext cx="187902" cy="5961054"/>
+          </a:xfrm>
+          <a:prstGeom prst="rightBrace">
             <a:avLst/>
           </a:prstGeom>
         </p:spPr>
         <p:style>
           <a:lnRef idx="2">
-            <a:schemeClr val="accent1">
-              <a:shade val="15000"/>
-            </a:schemeClr>
+            <a:schemeClr val="accent1"/>
           </a:lnRef>
-          <a:fillRef idx="1">
+          <a:fillRef idx="0">
             <a:schemeClr val="accent1"/>
           </a:fillRef>
-          <a:effectRef idx="0">
+          <a:effectRef idx="1">
             <a:schemeClr val="accent1"/>
+          </a:effectRef>
+          <a:fontRef idx="minor">
+            <a:schemeClr val="tx1"/>
+          </a:fontRef>
+        </p:style>
+        <p:txBody>
+          <a:bodyPr rtlCol="0" anchor="ctr"/>
+          <a:lstStyle/>
+          <a:p>
+            <a:pPr algn="ctr"/>
+            <a:endParaRPr lang="en-US"/>
+          </a:p>
+        </p:txBody>
+      </p:sp>
+      <p:sp>
+        <p:nvSpPr>
+          <p:cNvPr id="13" name="TextBox 12">
+            <a:extLst>
+              <a:ext uri="{FF2B5EF4-FFF2-40B4-BE49-F238E27FC236}">
+                <a16:creationId xmlns:a16="http://schemas.microsoft.com/office/drawing/2014/main" id="{41D587DC-555E-F024-2296-A3954C42F0E6}"/>
+              </a:ext>
+            </a:extLst>
+          </p:cNvPr>
+          <p:cNvSpPr txBox="1"/>
+          <p:nvPr/>
+        </p:nvSpPr>
+        <p:spPr>
+          <a:xfrm>
+            <a:off x="3949108" y="3152109"/>
+            <a:ext cx="3501536" cy="369332"/>
+          </a:xfrm>
+          <a:prstGeom prst="rect">
+            <a:avLst/>
+          </a:prstGeom>
+          <a:noFill/>
+        </p:spPr>
+        <p:txBody>
+          <a:bodyPr wrap="none" rtlCol="0">
+            <a:spAutoFit/>
+          </a:bodyPr>
+          <a:lstStyle/>
+          <a:p>
+            <a:pPr algn="ctr"/>
+            <a:r>
+              <a:rPr lang="en-US" dirty="0"/>
+              <a:t>Too much boilerplate, error-prone</a:t>
+            </a:r>
+          </a:p>
+        </p:txBody>
+      </p:sp>
+      <p:sp>
+        <p:nvSpPr>
+          <p:cNvPr id="15" name="Arrow: Down 14">
+            <a:extLst>
+              <a:ext uri="{FF2B5EF4-FFF2-40B4-BE49-F238E27FC236}">
+                <a16:creationId xmlns:a16="http://schemas.microsoft.com/office/drawing/2014/main" id="{6270A02A-F64D-1590-FA37-729E2E1BC765}"/>
+              </a:ext>
+            </a:extLst>
+          </p:cNvPr>
+          <p:cNvSpPr/>
+          <p:nvPr/>
+        </p:nvSpPr>
+        <p:spPr>
+          <a:xfrm>
+            <a:off x="5200214" y="3664580"/>
+            <a:ext cx="1099238" cy="670577"/>
+          </a:xfrm>
+          <a:prstGeom prst="downArrow">
+            <a:avLst/>
+          </a:prstGeom>
+        </p:spPr>
+        <p:style>
+          <a:lnRef idx="1">
+            <a:schemeClr val="accent6"/>
+          </a:lnRef>
+          <a:fillRef idx="3">
+            <a:schemeClr val="accent6"/>
+          </a:fillRef>
+          <a:effectRef idx="2">
+            <a:schemeClr val="accent6"/>
           </a:effectRef>
           <a:fontRef idx="minor">
             <a:schemeClr val="lt1"/>
@@ -42804,29 +43603,28 @@
           <a:lstStyle/>
           <a:p>
             <a:pPr algn="ctr"/>
-            <a:r>
-              <a:rPr lang="en-US" noProof="0" dirty="0"/>
-              <a:t>code</a:t>
-            </a:r>
+            <a:endParaRPr lang="en-US"/>
           </a:p>
         </p:txBody>
       </p:sp>
       <p:cxnSp>
         <p:nvCxnSpPr>
-          <p:cNvPr id="14" name="Straight Arrow Connector 13">
-            <a:extLst>
-              <a:ext uri="{FF2B5EF4-FFF2-40B4-BE49-F238E27FC236}">
-                <a16:creationId xmlns:a16="http://schemas.microsoft.com/office/drawing/2014/main" id="{B602A479-F122-7128-33EA-B0468E099110}"/>
-              </a:ext>
-            </a:extLst>
-          </p:cNvPr>
-          <p:cNvCxnSpPr/>
+          <p:cNvPr id="21" name="Straight Arrow Connector 20">
+            <a:extLst>
+              <a:ext uri="{FF2B5EF4-FFF2-40B4-BE49-F238E27FC236}">
+                <a16:creationId xmlns:a16="http://schemas.microsoft.com/office/drawing/2014/main" id="{A517191D-6E0A-AA15-0D0A-F36C9AFA3E26}"/>
+              </a:ext>
+            </a:extLst>
+          </p:cNvPr>
+          <p:cNvCxnSpPr>
+            <a:endCxn id="19" idx="1"/>
+          </p:cNvCxnSpPr>
           <p:nvPr/>
         </p:nvCxnSpPr>
         <p:spPr>
-          <a:xfrm>
-            <a:off x="8020594" y="4484914"/>
-            <a:ext cx="1297577" cy="0"/>
+          <a:xfrm flipV="1">
+            <a:off x="8306382" y="3814634"/>
+            <a:ext cx="1216941" cy="904431"/>
           </a:xfrm>
           <a:prstGeom prst="straightConnector1">
             <a:avLst/>
@@ -42850,204 +43648,89 @@
           </a:fontRef>
         </p:style>
       </p:cxnSp>
-      <p:sp>
-        <p:nvSpPr>
-          <p:cNvPr id="16" name="Rectangle 15">
-            <a:extLst>
-              <a:ext uri="{FF2B5EF4-FFF2-40B4-BE49-F238E27FC236}">
-                <a16:creationId xmlns:a16="http://schemas.microsoft.com/office/drawing/2014/main" id="{C357A183-7240-A9A1-5A5E-E5F000C6DC05}"/>
-              </a:ext>
-            </a:extLst>
-          </p:cNvPr>
-          <p:cNvSpPr/>
+      <p:cxnSp>
+        <p:nvCxnSpPr>
+          <p:cNvPr id="23" name="Straight Arrow Connector 22">
+            <a:extLst>
+              <a:ext uri="{FF2B5EF4-FFF2-40B4-BE49-F238E27FC236}">
+                <a16:creationId xmlns:a16="http://schemas.microsoft.com/office/drawing/2014/main" id="{77DDBBE2-A63E-674B-08AE-0EFF57E0FE30}"/>
+              </a:ext>
+            </a:extLst>
+          </p:cNvPr>
+          <p:cNvCxnSpPr>
+            <a:cxnSpLocks/>
+            <a:endCxn id="18" idx="1"/>
+          </p:cNvCxnSpPr>
           <p:nvPr/>
-        </p:nvSpPr>
+        </p:nvCxnSpPr>
         <p:spPr>
           <a:xfrm>
-            <a:off x="9394372" y="3683729"/>
-            <a:ext cx="2621096" cy="1729649"/>
+            <a:off x="8306382" y="4719065"/>
+            <a:ext cx="1009366" cy="59829"/>
           </a:xfrm>
-          <a:prstGeom prst="rect">
+          <a:prstGeom prst="straightConnector1">
             <a:avLst/>
           </a:prstGeom>
+          <a:ln>
+            <a:tailEnd type="triangle"/>
+          </a:ln>
         </p:spPr>
         <p:style>
           <a:lnRef idx="2">
-            <a:schemeClr val="accent1">
-              <a:shade val="15000"/>
-            </a:schemeClr>
+            <a:schemeClr val="accent1"/>
           </a:lnRef>
-          <a:fillRef idx="1">
+          <a:fillRef idx="0">
             <a:schemeClr val="accent1"/>
           </a:fillRef>
-          <a:effectRef idx="0">
+          <a:effectRef idx="1">
             <a:schemeClr val="accent1"/>
           </a:effectRef>
           <a:fontRef idx="minor">
-            <a:schemeClr val="lt1"/>
+            <a:schemeClr val="tx1"/>
           </a:fontRef>
         </p:style>
-        <p:txBody>
-          <a:bodyPr rtlCol="0" anchor="ctr"/>
-          <a:lstStyle/>
-          <a:p>
-            <a:pPr algn="ctr"/>
-            <a:r>
-              <a:rPr lang="en-US" noProof="0" dirty="0"/>
-              <a:t>Optimized application</a:t>
-            </a:r>
-          </a:p>
-        </p:txBody>
-      </p:sp>
-      <p:pic>
-        <p:nvPicPr>
-          <p:cNvPr id="17" name="Picture 16" descr="OpenTuner - An extensible framework for program autotuning">
-            <a:extLst>
-              <a:ext uri="{FF2B5EF4-FFF2-40B4-BE49-F238E27FC236}">
-                <a16:creationId xmlns:a16="http://schemas.microsoft.com/office/drawing/2014/main" id="{9B62B548-A2CB-44E7-8C14-94F9EC04F63D}"/>
-              </a:ext>
-            </a:extLst>
-          </p:cNvPr>
-          <p:cNvPicPr>
-            <a:picLocks noChangeAspect="1"/>
-          </p:cNvPicPr>
+      </p:cxnSp>
+      <p:cxnSp>
+        <p:nvCxnSpPr>
+          <p:cNvPr id="25" name="Straight Arrow Connector 24">
+            <a:extLst>
+              <a:ext uri="{FF2B5EF4-FFF2-40B4-BE49-F238E27FC236}">
+                <a16:creationId xmlns:a16="http://schemas.microsoft.com/office/drawing/2014/main" id="{DEE38BC2-DE6F-53AE-919A-9277CD5405A3}"/>
+              </a:ext>
+            </a:extLst>
+          </p:cNvPr>
+          <p:cNvCxnSpPr>
+            <a:endCxn id="17" idx="1"/>
+          </p:cNvCxnSpPr>
           <p:nvPr/>
-        </p:nvPicPr>
-        <p:blipFill>
-          <a:blip r:embed="rId4"/>
-          <a:stretch>
-            <a:fillRect/>
-          </a:stretch>
-        </p:blipFill>
+        </p:nvCxnSpPr>
         <p:spPr>
           <a:xfrm>
-            <a:off x="4324489" y="5513019"/>
-            <a:ext cx="2856411" cy="979856"/>
+            <a:off x="8306382" y="4719065"/>
+            <a:ext cx="762017" cy="1187970"/>
           </a:xfrm>
-          <a:prstGeom prst="rect">
+          <a:prstGeom prst="straightConnector1">
             <a:avLst/>
           </a:prstGeom>
+          <a:ln>
+            <a:tailEnd type="triangle"/>
+          </a:ln>
         </p:spPr>
-      </p:pic>
-      <p:pic>
-        <p:nvPicPr>
-          <p:cNvPr id="18" name="Picture 17" descr="Optuna: A hyperparameter optimization framework — Optuna 4.9.0 documentation">
-            <a:extLst>
-              <a:ext uri="{FF2B5EF4-FFF2-40B4-BE49-F238E27FC236}">
-                <a16:creationId xmlns:a16="http://schemas.microsoft.com/office/drawing/2014/main" id="{AF010DE9-B658-4682-CFDF-661E5A062AA0}"/>
-              </a:ext>
-            </a:extLst>
-          </p:cNvPr>
-          <p:cNvPicPr>
-            <a:picLocks noChangeAspect="1"/>
-          </p:cNvPicPr>
-          <p:nvPr/>
-        </p:nvPicPr>
-        <p:blipFill>
-          <a:blip r:embed="rId5"/>
-          <a:stretch>
-            <a:fillRect/>
-          </a:stretch>
-        </p:blipFill>
-        <p:spPr>
-          <a:xfrm>
-            <a:off x="7707086" y="5750350"/>
-            <a:ext cx="2455817" cy="515722"/>
-          </a:xfrm>
-          <a:prstGeom prst="rect">
-            <a:avLst/>
-          </a:prstGeom>
-        </p:spPr>
-      </p:pic>
-      <p:pic>
-        <p:nvPicPr>
-          <p:cNvPr id="19" name="Picture 18" descr="Auto-Tuning Framework (ATF) · GitHub">
-            <a:extLst>
-              <a:ext uri="{FF2B5EF4-FFF2-40B4-BE49-F238E27FC236}">
-                <a16:creationId xmlns:a16="http://schemas.microsoft.com/office/drawing/2014/main" id="{F7F7CFF8-EDA0-77B0-914C-2AD8CCB7F8CA}"/>
-              </a:ext>
-            </a:extLst>
-          </p:cNvPr>
-          <p:cNvPicPr>
-            <a:picLocks noChangeAspect="1"/>
-          </p:cNvPicPr>
-          <p:nvPr/>
-        </p:nvPicPr>
-        <p:blipFill>
-          <a:blip r:embed="rId6"/>
-          <a:srcRect/>
-          <a:stretch>
-            <a:fillRect/>
-          </a:stretch>
-        </p:blipFill>
-        <p:spPr>
-          <a:xfrm>
-            <a:off x="10474420" y="5500211"/>
-            <a:ext cx="1099238" cy="1099238"/>
-          </a:xfrm>
-          <a:prstGeom prst="rect">
-            <a:avLst/>
-          </a:prstGeom>
-        </p:spPr>
-      </p:pic>
-      <p:sp>
-        <p:nvSpPr>
-          <p:cNvPr id="2" name="Date Placeholder 1">
-            <a:extLst>
-              <a:ext uri="{FF2B5EF4-FFF2-40B4-BE49-F238E27FC236}">
-                <a16:creationId xmlns:a16="http://schemas.microsoft.com/office/drawing/2014/main" id="{44FA33F8-BA09-FE20-AA3F-F979C5E8EF66}"/>
-              </a:ext>
-            </a:extLst>
-          </p:cNvPr>
-          <p:cNvSpPr>
-            <a:spLocks noGrp="1"/>
-          </p:cNvSpPr>
-          <p:nvPr>
-            <p:ph type="dt" sz="half" idx="10"/>
-          </p:nvPr>
-        </p:nvSpPr>
-        <p:spPr/>
-        <p:txBody>
-          <a:bodyPr/>
-          <a:lstStyle/>
-          <a:p>
-            <a:fld id="{B7D82220-9CE2-4BC9-B6C9-7A7531EEF273}" type="datetime1">
-              <a:rPr lang="en-US" smtClean="0"/>
-              <a:t>8/28/2026</a:t>
-            </a:fld>
-            <a:endParaRPr lang="en-US"/>
-          </a:p>
-        </p:txBody>
-      </p:sp>
-      <p:sp>
-        <p:nvSpPr>
-          <p:cNvPr id="3" name="Slide Number Placeholder 2">
-            <a:extLst>
-              <a:ext uri="{FF2B5EF4-FFF2-40B4-BE49-F238E27FC236}">
-                <a16:creationId xmlns:a16="http://schemas.microsoft.com/office/drawing/2014/main" id="{9CFF31DD-3BF8-7967-3565-500F50D5E9D9}"/>
-              </a:ext>
-            </a:extLst>
-          </p:cNvPr>
-          <p:cNvSpPr>
-            <a:spLocks noGrp="1"/>
-          </p:cNvSpPr>
-          <p:nvPr>
-            <p:ph type="sldNum" sz="quarter" idx="12"/>
-          </p:nvPr>
-        </p:nvSpPr>
-        <p:spPr/>
-        <p:txBody>
-          <a:bodyPr/>
-          <a:lstStyle/>
-          <a:p>
-            <a:fld id="{DA0BB241-1B5F-4309-9407-9EEA04D9598D}" type="slidenum">
-              <a:rPr lang="en-US" smtClean="0"/>
-              <a:t>9</a:t>
-            </a:fld>
-            <a:endParaRPr lang="en-US"/>
-          </a:p>
-        </p:txBody>
-      </p:sp>
+        <p:style>
+          <a:lnRef idx="2">
+            <a:schemeClr val="accent1"/>
+          </a:lnRef>
+          <a:fillRef idx="0">
+            <a:schemeClr val="accent1"/>
+          </a:fillRef>
+          <a:effectRef idx="1">
+            <a:schemeClr val="accent1"/>
+          </a:effectRef>
+          <a:fontRef idx="minor">
+            <a:schemeClr val="tx1"/>
+          </a:fontRef>
+        </p:style>
+      </p:cxnSp>
     </p:spTree>
     <p:extLst>
       <p:ext uri="{BB962C8B-B14F-4D97-AF65-F5344CB8AC3E}">

--- a/slides/Optimizing Memory Layouts and Traversal Orders in High-Performance Computing.pptx
+++ b/slides/Optimizing Memory Layouts and Traversal Orders in High-Performance Computing.pptx
@@ -3546,7 +3546,45 @@
           <a:bodyPr/>
           <a:lstStyle/>
           <a:p>
+            <a:r>
+              <a:rPr lang="en-US" dirty="0"/>
+              <a:t>In this part of this research, we have shown that prompting specificity improves performance,</a:t>
+            </a:r>
+            <a:br>
+              <a:rPr lang="en-US" dirty="0"/>
+            </a:br>
+            <a:r>
+              <a:rPr lang="en-US" dirty="0"/>
+              <a:t>and further hints can improve output quality if the algorithm is challenging for the LLM,</a:t>
+            </a:r>
+          </a:p>
+          <a:p>
+            <a:r>
+              <a:rPr lang="en-US" dirty="0"/>
+              <a:t>But the contemporary abstractions do not help.</a:t>
+            </a:r>
+          </a:p>
+          <a:p>
             <a:endParaRPr lang="en-US" dirty="0"/>
+          </a:p>
+          <a:p>
+            <a:r>
+              <a:rPr lang="en-US" dirty="0"/>
+              <a:t>Future research may re-evaluate our approach to agentic LLMs that can automatically gather feedback</a:t>
+            </a:r>
+            <a:br>
+              <a:rPr lang="en-US" dirty="0"/>
+            </a:br>
+            <a:r>
+              <a:rPr lang="en-US" dirty="0"/>
+              <a:t>(from compiling and running the generated implementations) and they can collect the necessary context,</a:t>
+            </a:r>
+          </a:p>
+          <a:p>
+            <a:r>
+              <a:rPr lang="en-US" dirty="0"/>
+              <a:t>So they can, for example, look up how to use specific abstractions or what algorithm designs to use.</a:t>
+            </a:r>
           </a:p>
         </p:txBody>
       </p:sp>
@@ -3567,7 +3605,7 @@
           <a:p>
             <a:fld id="{FA8FD632-245B-410D-BCC4-8BF8D37AB67F}" type="slidenum">
               <a:rPr lang="en-US" smtClean="0"/>
-              <a:t>28</a:t>
+              <a:t>27</a:t>
             </a:fld>
             <a:endParaRPr lang="en-US"/>
           </a:p>
@@ -3576,7 +3614,7 @@
     </p:spTree>
     <p:extLst>
       <p:ext uri="{BB962C8B-B14F-4D97-AF65-F5344CB8AC3E}">
-        <p14:creationId xmlns:p14="http://schemas.microsoft.com/office/powerpoint/2010/main" val="2911046873"/>
+        <p14:creationId xmlns:p14="http://schemas.microsoft.com/office/powerpoint/2010/main" val="3665500441"/>
       </p:ext>
     </p:extLst>
   </p:cSld>
@@ -3630,82 +3668,6 @@
           <a:bodyPr/>
           <a:lstStyle/>
           <a:p>
-            <a:r>
-              <a:rPr lang="en-US" dirty="0"/>
-              <a:t>---(slide 2/2; do not forget to copy from upward)---</a:t>
-            </a:r>
-            <a:br>
-              <a:rPr lang="en-US" dirty="0"/>
-            </a:br>
-            <a:br>
-              <a:rPr lang="en-US" dirty="0"/>
-            </a:br>
-            <a:r>
-              <a:rPr lang="en-US" dirty="0"/>
-              <a:t>(key idea: optimizing the traversal)</a:t>
-            </a:r>
-          </a:p>
-          <a:p>
-            <a:endParaRPr lang="en-US" dirty="0"/>
-          </a:p>
-          <a:p>
-            <a:r>
-              <a:rPr lang="en-US" dirty="0"/>
-              <a:t>By itself, this would be nice, but we can do much more.</a:t>
-            </a:r>
-            <a:br>
-              <a:rPr lang="en-US" dirty="0"/>
-            </a:br>
-            <a:endParaRPr lang="en-US" dirty="0"/>
-          </a:p>
-          <a:p>
-            <a:r>
-              <a:rPr lang="en-US" dirty="0"/>
-              <a:t>We can use the same principles for building memory layouts to specify transformations of the traversal orders as well.</a:t>
-            </a:r>
-          </a:p>
-          <a:p>
-            <a:r>
-              <a:rPr lang="en-US" dirty="0"/>
-              <a:t>Let’s say we want to perform the matrix multiplication by tiles of the output; we can do so by defining the transformation and then applying it to the traverser.</a:t>
-            </a:r>
-            <a:br>
-              <a:rPr lang="en-US" dirty="0"/>
-            </a:br>
-            <a:r>
-              <a:rPr lang="en-US" dirty="0"/>
-              <a:t>We do not need to rewrite the computation logic or change the structures to do that.</a:t>
-            </a:r>
-          </a:p>
-          <a:p>
-            <a:endParaRPr lang="en-US" dirty="0"/>
-          </a:p>
-          <a:p>
-            <a:endParaRPr lang="en-US" dirty="0"/>
-          </a:p>
-          <a:p>
-            <a:r>
-              <a:rPr lang="en-US" dirty="0"/>
-              <a:t>We can also use the traversers as ranges to be parallelized using various parallel backends such as OpenMP or Threading Building Blocks.</a:t>
-            </a:r>
-          </a:p>
-          <a:p>
-            <a:endParaRPr lang="en-US" dirty="0"/>
-          </a:p>
-          <a:p>
-            <a:r>
-              <a:rPr lang="en-US" dirty="0"/>
-              <a:t>For the CUDA framework (used for general-purpose GPU programming), we have shown that the principles pair well with  binding different threads and blocks to the dimensions of the computation</a:t>
-            </a:r>
-            <a:br>
-              <a:rPr lang="en-US" dirty="0"/>
-            </a:br>
-            <a:r>
-              <a:rPr lang="en-US" dirty="0"/>
-              <a:t>and privatizing the data in the GPU shared memory.</a:t>
-            </a:r>
-          </a:p>
-          <a:p>
             <a:endParaRPr lang="en-US" dirty="0"/>
           </a:p>
         </p:txBody>
@@ -3727,7 +3689,7 @@
           <a:p>
             <a:fld id="{FA8FD632-245B-410D-BCC4-8BF8D37AB67F}" type="slidenum">
               <a:rPr lang="en-US" smtClean="0"/>
-              <a:t>31</a:t>
+              <a:t>28</a:t>
             </a:fld>
             <a:endParaRPr lang="en-US"/>
           </a:p>
@@ -3736,7 +3698,7 @@
     </p:spTree>
     <p:extLst>
       <p:ext uri="{BB962C8B-B14F-4D97-AF65-F5344CB8AC3E}">
-        <p14:creationId xmlns:p14="http://schemas.microsoft.com/office/powerpoint/2010/main" val="2539622489"/>
+        <p14:creationId xmlns:p14="http://schemas.microsoft.com/office/powerpoint/2010/main" val="2911046873"/>
       </p:ext>
     </p:extLst>
   </p:cSld>
@@ -3792,14 +3754,17 @@
           <a:p>
             <a:r>
               <a:rPr lang="en-US" dirty="0"/>
-              <a:t>Following up on the recent improvements of LLMs since our previous work, we have become interested in whether their capability</a:t>
+              <a:t>---(slide 2/2; do not forget to copy from upward)---</a:t>
             </a:r>
             <a:br>
               <a:rPr lang="en-US" dirty="0"/>
             </a:br>
-            <a:r>
-              <a:rPr lang="en-US" dirty="0"/>
-              <a:t>further improves with abstractions that allow user-directed optimizations of the code in a similar manner to our abstractions.</a:t>
+            <a:br>
+              <a:rPr lang="en-US" dirty="0"/>
+            </a:br>
+            <a:r>
+              <a:rPr lang="en-US" dirty="0"/>
+              <a:t>(key idea: optimizing the traversal)</a:t>
             </a:r>
           </a:p>
           <a:p>
@@ -3808,96 +3773,62 @@
           <a:p>
             <a:r>
               <a:rPr lang="en-US" dirty="0"/>
-              <a:t>We have made a study with 3 different abstractions (Halide, Exo, </a:t>
-            </a:r>
-            <a:r>
-              <a:rPr lang="en-US" dirty="0" err="1"/>
-              <a:t>Noarr</a:t>
-            </a:r>
-            <a:r>
-              <a:rPr lang="en-US" dirty="0"/>
-              <a:t>), evaluating a state of the art LLM on the </a:t>
-            </a:r>
-            <a:r>
-              <a:rPr lang="en-US" dirty="0" err="1"/>
-              <a:t>PolyBench</a:t>
-            </a:r>
-            <a:r>
-              <a:rPr lang="en-US" dirty="0"/>
-              <a:t>/C suite;</a:t>
+              <a:t>By itself, this would be nice, but we can do much more.</a:t>
             </a:r>
             <a:br>
               <a:rPr lang="en-US" dirty="0"/>
             </a:br>
-            <a:r>
-              <a:rPr lang="en-US" dirty="0"/>
-              <a:t>the workflow consisted of 2 generation steps (translation and optimization) combined with an algorithmic selection of the best translation.</a:t>
-            </a:r>
-          </a:p>
-          <a:p>
             <a:endParaRPr lang="en-US" dirty="0"/>
           </a:p>
           <a:p>
             <a:r>
               <a:rPr lang="en-US" dirty="0"/>
-              <a:t>This was made to ensure that the LLM would have a working translation to use as a basis for its optimization attempt, as, at the time of the study,</a:t>
-            </a:r>
-          </a:p>
-          <a:p>
-            <a:r>
-              <a:rPr lang="en-US" dirty="0"/>
-              <a:t>it wasn’t feasible to put the entire programming reference for the given abstraction within the LLM’s limited context window.</a:t>
+              <a:t>We can use the same principles for building memory layouts to specify transformations of the traversal orders as well.</a:t>
+            </a:r>
+          </a:p>
+          <a:p>
+            <a:r>
+              <a:rPr lang="en-US" dirty="0"/>
+              <a:t>Let’s say we want to perform the matrix multiplication by tiles of the output; we can do so by defining the transformation and then applying it to the traverser.</a:t>
+            </a:r>
+            <a:br>
+              <a:rPr lang="en-US" dirty="0"/>
+            </a:br>
+            <a:r>
+              <a:rPr lang="en-US" dirty="0"/>
+              <a:t>We do not need to rewrite the computation logic or change the structures to do that.</a:t>
             </a:r>
           </a:p>
           <a:p>
             <a:endParaRPr lang="en-US" dirty="0"/>
           </a:p>
           <a:p>
-            <a:r>
-              <a:rPr lang="en-US" dirty="0"/>
-              <a:t>The prompts were supplied with one example of the translation (/optimization?) to further compensate for the limitation of its context window.</a:t>
-            </a:r>
-          </a:p>
-          <a:p>
             <a:endParaRPr lang="en-US" dirty="0"/>
           </a:p>
           <a:p>
             <a:r>
               <a:rPr lang="en-US" dirty="0"/>
-              <a:t>We have compared a naïve prompt (just to optimize the given computation) with more specific prompts giving general optimization hints,</a:t>
+              <a:t>We can also use the traversers as ranges to be parallelized using various parallel backends such as OpenMP or Threading Building Blocks.</a:t>
+            </a:r>
+          </a:p>
+          <a:p>
+            <a:endParaRPr lang="en-US" dirty="0"/>
+          </a:p>
+          <a:p>
+            <a:r>
+              <a:rPr lang="en-US" dirty="0"/>
+              <a:t>For the CUDA framework (used for general-purpose GPU programming), we have shown that the principles pair well with  binding different threads and blocks to the dimensions of the computation</a:t>
             </a:r>
             <a:br>
               <a:rPr lang="en-US" dirty="0"/>
             </a:br>
             <a:r>
               <a:rPr lang="en-US" dirty="0"/>
-              <a:t>and an alternative approach based on first writing an abstract optimization strategy and then implementing it in the second request.</a:t>
+              <a:t>and privatizing the data in the GPU shared memory.</a:t>
             </a:r>
           </a:p>
           <a:p>
             <a:endParaRPr lang="en-US" dirty="0"/>
-          </a:p>
-          <a:p>
-            <a:r>
-              <a:rPr lang="en-US" dirty="0"/>
-              <a:t>All these combinations of abstractions and prompts were also compared to applying the same methodology to the C baseline.</a:t>
-            </a:r>
-          </a:p>
-          <a:p>
-            <a:endParaRPr lang="en-US" dirty="0"/>
-          </a:p>
-          <a:p>
-            <a:r>
-              <a:rPr lang="en-US" dirty="0"/>
-              <a:t>Very unsurprisingly, more specific prompts performed better across all abstractions and C, but at the same time,</a:t>
-            </a:r>
-            <a:br>
-              <a:rPr lang="en-US" dirty="0"/>
-            </a:br>
-            <a:r>
-              <a:rPr lang="en-US" dirty="0"/>
-              <a:t>pure C optimization attempts performed better than any abstraction.</a:t>
-            </a:r>
           </a:p>
         </p:txBody>
       </p:sp>
@@ -3918,7 +3849,7 @@
           <a:p>
             <a:fld id="{FA8FD632-245B-410D-BCC4-8BF8D37AB67F}" type="slidenum">
               <a:rPr lang="en-US" smtClean="0"/>
-              <a:t>32</a:t>
+              <a:t>31</a:t>
             </a:fld>
             <a:endParaRPr lang="en-US"/>
           </a:p>
@@ -3927,7 +3858,7 @@
     </p:spTree>
     <p:extLst>
       <p:ext uri="{BB962C8B-B14F-4D97-AF65-F5344CB8AC3E}">
-        <p14:creationId xmlns:p14="http://schemas.microsoft.com/office/powerpoint/2010/main" val="215031226"/>
+        <p14:creationId xmlns:p14="http://schemas.microsoft.com/office/powerpoint/2010/main" val="2539622489"/>
       </p:ext>
     </p:extLst>
   </p:cSld>
@@ -4099,6 +4030,197 @@
   <p:cSld>
     <p:spTree>
       <p:nvGrpSpPr>
+        <p:cNvPr id="1" name=""/>
+        <p:cNvGrpSpPr/>
+        <p:nvPr/>
+      </p:nvGrpSpPr>
+      <p:grpSpPr>
+        <a:xfrm>
+          <a:off x="0" y="0"/>
+          <a:ext cx="0" cy="0"/>
+          <a:chOff x="0" y="0"/>
+          <a:chExt cx="0" cy="0"/>
+        </a:xfrm>
+      </p:grpSpPr>
+      <p:sp>
+        <p:nvSpPr>
+          <p:cNvPr id="2" name="Slide Image Placeholder 1"/>
+          <p:cNvSpPr>
+            <a:spLocks noGrp="1" noRot="1" noChangeAspect="1"/>
+          </p:cNvSpPr>
+          <p:nvPr>
+            <p:ph type="sldImg"/>
+          </p:nvPr>
+        </p:nvSpPr>
+        <p:spPr/>
+      </p:sp>
+      <p:sp>
+        <p:nvSpPr>
+          <p:cNvPr id="3" name="Notes Placeholder 2"/>
+          <p:cNvSpPr>
+            <a:spLocks noGrp="1"/>
+          </p:cNvSpPr>
+          <p:nvPr>
+            <p:ph type="body" idx="1"/>
+          </p:nvPr>
+        </p:nvSpPr>
+        <p:spPr/>
+        <p:txBody>
+          <a:bodyPr/>
+          <a:lstStyle/>
+          <a:p>
+            <a:r>
+              <a:rPr lang="en-US" dirty="0"/>
+              <a:t>Following up on the recent improvements of LLMs since our previous work, we have become interested in whether their capability</a:t>
+            </a:r>
+            <a:br>
+              <a:rPr lang="en-US" dirty="0"/>
+            </a:br>
+            <a:r>
+              <a:rPr lang="en-US" dirty="0"/>
+              <a:t>further improves with abstractions that allow user-directed optimizations of the code in a similar manner to our abstractions.</a:t>
+            </a:r>
+          </a:p>
+          <a:p>
+            <a:endParaRPr lang="en-US" dirty="0"/>
+          </a:p>
+          <a:p>
+            <a:r>
+              <a:rPr lang="en-US" dirty="0"/>
+              <a:t>We have made a study with 3 different abstractions (Halide, Exo, </a:t>
+            </a:r>
+            <a:r>
+              <a:rPr lang="en-US" dirty="0" err="1"/>
+              <a:t>Noarr</a:t>
+            </a:r>
+            <a:r>
+              <a:rPr lang="en-US" dirty="0"/>
+              <a:t>), evaluating a state of the art LLM on the </a:t>
+            </a:r>
+            <a:r>
+              <a:rPr lang="en-US" dirty="0" err="1"/>
+              <a:t>PolyBench</a:t>
+            </a:r>
+            <a:r>
+              <a:rPr lang="en-US" dirty="0"/>
+              <a:t>/C suite;</a:t>
+            </a:r>
+            <a:br>
+              <a:rPr lang="en-US" dirty="0"/>
+            </a:br>
+            <a:r>
+              <a:rPr lang="en-US" dirty="0"/>
+              <a:t>the workflow consisted of 2 generation steps (translation and optimization) combined with an algorithmic selection of the best translation.</a:t>
+            </a:r>
+          </a:p>
+          <a:p>
+            <a:endParaRPr lang="en-US" dirty="0"/>
+          </a:p>
+          <a:p>
+            <a:r>
+              <a:rPr lang="en-US" dirty="0"/>
+              <a:t>This was made to ensure that the LLM would have a working translation to use as a basis for its optimization attempt, as, at the time of the study,</a:t>
+            </a:r>
+          </a:p>
+          <a:p>
+            <a:r>
+              <a:rPr lang="en-US" dirty="0"/>
+              <a:t>it wasn’t feasible to put the entire programming reference for the given abstraction within the LLM’s limited context window.</a:t>
+            </a:r>
+          </a:p>
+          <a:p>
+            <a:endParaRPr lang="en-US" dirty="0"/>
+          </a:p>
+          <a:p>
+            <a:r>
+              <a:rPr lang="en-US" dirty="0"/>
+              <a:t>The prompts were supplied with one example of the translation (/optimization?) to further compensate for the limitation of its context window.</a:t>
+            </a:r>
+          </a:p>
+          <a:p>
+            <a:endParaRPr lang="en-US" dirty="0"/>
+          </a:p>
+          <a:p>
+            <a:r>
+              <a:rPr lang="en-US" dirty="0"/>
+              <a:t>We have compared a naïve prompt (just to optimize the given computation) with more specific prompts giving general optimization hints,</a:t>
+            </a:r>
+            <a:br>
+              <a:rPr lang="en-US" dirty="0"/>
+            </a:br>
+            <a:r>
+              <a:rPr lang="en-US" dirty="0"/>
+              <a:t>and an alternative approach based on first writing an abstract optimization strategy and then implementing it in the second request.</a:t>
+            </a:r>
+          </a:p>
+          <a:p>
+            <a:endParaRPr lang="en-US" dirty="0"/>
+          </a:p>
+          <a:p>
+            <a:r>
+              <a:rPr lang="en-US" dirty="0"/>
+              <a:t>All these combinations of abstractions and prompts were also compared to applying the same methodology to the C baseline.</a:t>
+            </a:r>
+          </a:p>
+          <a:p>
+            <a:endParaRPr lang="en-US" dirty="0"/>
+          </a:p>
+          <a:p>
+            <a:r>
+              <a:rPr lang="en-US" dirty="0"/>
+              <a:t>Very unsurprisingly, more specific prompts performed better across all abstractions and C, but at the same time,</a:t>
+            </a:r>
+            <a:br>
+              <a:rPr lang="en-US" dirty="0"/>
+            </a:br>
+            <a:r>
+              <a:rPr lang="en-US" dirty="0"/>
+              <a:t>pure C optimization attempts performed better than any abstraction.</a:t>
+            </a:r>
+          </a:p>
+        </p:txBody>
+      </p:sp>
+      <p:sp>
+        <p:nvSpPr>
+          <p:cNvPr id="4" name="Slide Number Placeholder 3"/>
+          <p:cNvSpPr>
+            <a:spLocks noGrp="1"/>
+          </p:cNvSpPr>
+          <p:nvPr>
+            <p:ph type="sldNum" sz="quarter" idx="5"/>
+          </p:nvPr>
+        </p:nvSpPr>
+        <p:spPr/>
+        <p:txBody>
+          <a:bodyPr/>
+          <a:lstStyle/>
+          <a:p>
+            <a:fld id="{FA8FD632-245B-410D-BCC4-8BF8D37AB67F}" type="slidenum">
+              <a:rPr lang="en-US" smtClean="0"/>
+              <a:t>32</a:t>
+            </a:fld>
+            <a:endParaRPr lang="en-US"/>
+          </a:p>
+        </p:txBody>
+      </p:sp>
+    </p:spTree>
+    <p:extLst>
+      <p:ext uri="{BB962C8B-B14F-4D97-AF65-F5344CB8AC3E}">
+        <p14:creationId xmlns:p14="http://schemas.microsoft.com/office/powerpoint/2010/main" val="215031226"/>
+      </p:ext>
+    </p:extLst>
+  </p:cSld>
+  <p:clrMapOvr>
+    <a:masterClrMapping/>
+  </p:clrMapOvr>
+</p:notes>
+</file>
+
+<file path=ppt/notesSlides/notesSlide31.xml><?xml version="1.0" encoding="utf-8"?>
+<p:notes xmlns:a="http://schemas.openxmlformats.org/drawingml/2006/main" xmlns:r="http://schemas.openxmlformats.org/officeDocument/2006/relationships" xmlns:p="http://schemas.openxmlformats.org/presentationml/2006/main">
+  <p:cSld>
+    <p:spTree>
+      <p:nvGrpSpPr>
         <p:cNvPr id="1" name="">
           <a:extLst>
             <a:ext uri="{FF2B5EF4-FFF2-40B4-BE49-F238E27FC236}">
@@ -4309,7 +4431,7 @@
 </p:notes>
 </file>
 
-<file path=ppt/notesSlides/notesSlide31.xml><?xml version="1.0" encoding="utf-8"?>
+<file path=ppt/notesSlides/notesSlide32.xml><?xml version="1.0" encoding="utf-8"?>
 <p:notes xmlns:a="http://schemas.openxmlformats.org/drawingml/2006/main" xmlns:r="http://schemas.openxmlformats.org/officeDocument/2006/relationships" xmlns:p="http://schemas.openxmlformats.org/presentationml/2006/main">
   <p:cSld>
     <p:spTree>
@@ -4523,7 +4645,7 @@
 </p:notes>
 </file>
 
-<file path=ppt/notesSlides/notesSlide32.xml><?xml version="1.0" encoding="utf-8"?>
+<file path=ppt/notesSlides/notesSlide33.xml><?xml version="1.0" encoding="utf-8"?>
 <p:notes xmlns:a="http://schemas.openxmlformats.org/drawingml/2006/main" xmlns:r="http://schemas.openxmlformats.org/officeDocument/2006/relationships" xmlns:p="http://schemas.openxmlformats.org/presentationml/2006/main">
   <p:cSld>
     <p:spTree>
@@ -4641,7 +4763,7 @@
 </p:notes>
 </file>
 
-<file path=ppt/notesSlides/notesSlide33.xml><?xml version="1.0" encoding="utf-8"?>
+<file path=ppt/notesSlides/notesSlide34.xml><?xml version="1.0" encoding="utf-8"?>
 <p:notes xmlns:a="http://schemas.openxmlformats.org/drawingml/2006/main" xmlns:r="http://schemas.openxmlformats.org/officeDocument/2006/relationships" xmlns:p="http://schemas.openxmlformats.org/presentationml/2006/main">
   <p:cSld>
     <p:spTree>
@@ -4944,150 +5066,6 @@
     <p:extLst>
       <p:ext uri="{BB962C8B-B14F-4D97-AF65-F5344CB8AC3E}">
         <p14:creationId xmlns:p14="http://schemas.microsoft.com/office/powerpoint/2010/main" val="1453155774"/>
-      </p:ext>
-    </p:extLst>
-  </p:cSld>
-  <p:clrMapOvr>
-    <a:masterClrMapping/>
-  </p:clrMapOvr>
-</p:notes>
-</file>
-
-<file path=ppt/notesSlides/notesSlide34.xml><?xml version="1.0" encoding="utf-8"?>
-<p:notes xmlns:a="http://schemas.openxmlformats.org/drawingml/2006/main" xmlns:r="http://schemas.openxmlformats.org/officeDocument/2006/relationships" xmlns:p="http://schemas.openxmlformats.org/presentationml/2006/main">
-  <p:cSld>
-    <p:spTree>
-      <p:nvGrpSpPr>
-        <p:cNvPr id="1" name=""/>
-        <p:cNvGrpSpPr/>
-        <p:nvPr/>
-      </p:nvGrpSpPr>
-      <p:grpSpPr>
-        <a:xfrm>
-          <a:off x="0" y="0"/>
-          <a:ext cx="0" cy="0"/>
-          <a:chOff x="0" y="0"/>
-          <a:chExt cx="0" cy="0"/>
-        </a:xfrm>
-      </p:grpSpPr>
-      <p:sp>
-        <p:nvSpPr>
-          <p:cNvPr id="2" name="Slide Image Placeholder 1"/>
-          <p:cNvSpPr>
-            <a:spLocks noGrp="1" noRot="1" noChangeAspect="1"/>
-          </p:cNvSpPr>
-          <p:nvPr>
-            <p:ph type="sldImg"/>
-          </p:nvPr>
-        </p:nvSpPr>
-        <p:spPr/>
-      </p:sp>
-      <p:sp>
-        <p:nvSpPr>
-          <p:cNvPr id="3" name="Notes Placeholder 2"/>
-          <p:cNvSpPr>
-            <a:spLocks noGrp="1"/>
-          </p:cNvSpPr>
-          <p:nvPr>
-            <p:ph type="body" idx="1"/>
-          </p:nvPr>
-        </p:nvSpPr>
-        <p:spPr/>
-        <p:txBody>
-          <a:bodyPr/>
-          <a:lstStyle/>
-          <a:p>
-            <a:r>
-              <a:rPr lang="en-US" dirty="0"/>
-              <a:t>For this, our research focused on two (something like compatible) directions</a:t>
-            </a:r>
-          </a:p>
-          <a:p>
-            <a:endParaRPr lang="en-US" dirty="0"/>
-          </a:p>
-          <a:p>
-            <a:r>
-              <a:rPr lang="en-US" dirty="0"/>
-              <a:t>The first one was investigating and implementing abstractions that offer composable building blocks that can be used to design efficient memory layouts and traversal orders; the choices can be algorithmically automatized by techniques such as autotuning</a:t>
-            </a:r>
-          </a:p>
-          <a:p>
-            <a:endParaRPr lang="en-US" dirty="0"/>
-          </a:p>
-          <a:p>
-            <a:r>
-              <a:rPr lang="en-US" dirty="0"/>
-              <a:t>The other direction has opened with the introduction of Large Language Models (LLMs), where the LLM can provide efficient implementation details fulfilling a given API requirement</a:t>
-            </a:r>
-          </a:p>
-          <a:p>
-            <a:endParaRPr lang="en-US" dirty="0"/>
-          </a:p>
-          <a:p>
-            <a:r>
-              <a:rPr lang="en-US" dirty="0"/>
-              <a:t>(?? More yapping?</a:t>
-            </a:r>
-          </a:p>
-          <a:p>
-            <a:r>
-              <a:rPr lang="en-US" dirty="0"/>
-              <a:t>- We have investigated how to … (tutoring)</a:t>
-            </a:r>
-          </a:p>
-          <a:p>
-            <a:r>
-              <a:rPr lang="en-US" dirty="0"/>
-              <a:t>)</a:t>
-            </a:r>
-          </a:p>
-          <a:p>
-            <a:endParaRPr lang="en-US" dirty="0"/>
-          </a:p>
-          <a:p>
-            <a:r>
-              <a:rPr lang="en-US" dirty="0"/>
-              <a:t>?? Since this research area is quite broad, we have mostly focused solely on dense data structures and algorithms utilizing regular loops, as even with this limitation, the area offers interesting challenges and many opportunities for improving the state of the art</a:t>
-            </a:r>
-          </a:p>
-          <a:p>
-            <a:endParaRPr lang="en-US" dirty="0"/>
-          </a:p>
-          <a:p>
-            <a:r>
-              <a:rPr lang="en-US" dirty="0"/>
-              <a:t>(ass bridge: now focusing on the abstractions…)</a:t>
-            </a:r>
-          </a:p>
-        </p:txBody>
-      </p:sp>
-      <p:sp>
-        <p:nvSpPr>
-          <p:cNvPr id="4" name="Slide Number Placeholder 3"/>
-          <p:cNvSpPr>
-            <a:spLocks noGrp="1"/>
-          </p:cNvSpPr>
-          <p:nvPr>
-            <p:ph type="sldNum" sz="quarter" idx="5"/>
-          </p:nvPr>
-        </p:nvSpPr>
-        <p:spPr/>
-        <p:txBody>
-          <a:bodyPr/>
-          <a:lstStyle/>
-          <a:p>
-            <a:fld id="{FA8FD632-245B-410D-BCC4-8BF8D37AB67F}" type="slidenum">
-              <a:rPr lang="en-US" smtClean="0"/>
-              <a:t>38</a:t>
-            </a:fld>
-            <a:endParaRPr lang="en-US"/>
-          </a:p>
-        </p:txBody>
-      </p:sp>
-    </p:spTree>
-    <p:extLst>
-      <p:ext uri="{BB962C8B-B14F-4D97-AF65-F5344CB8AC3E}">
-        <p14:creationId xmlns:p14="http://schemas.microsoft.com/office/powerpoint/2010/main" val="3810469099"/>
       </p:ext>
     </p:extLst>
   </p:cSld>
@@ -5141,7 +5119,67 @@
           <a:bodyPr/>
           <a:lstStyle/>
           <a:p>
+            <a:r>
+              <a:rPr lang="en-US" dirty="0"/>
+              <a:t>For this, our research focused on two (something like compatible) directions</a:t>
+            </a:r>
+          </a:p>
+          <a:p>
             <a:endParaRPr lang="en-US" dirty="0"/>
+          </a:p>
+          <a:p>
+            <a:r>
+              <a:rPr lang="en-US" dirty="0"/>
+              <a:t>The first one was investigating and implementing abstractions that offer composable building blocks that can be used to design efficient memory layouts and traversal orders; the choices can be algorithmically automatized by techniques such as autotuning</a:t>
+            </a:r>
+          </a:p>
+          <a:p>
+            <a:endParaRPr lang="en-US" dirty="0"/>
+          </a:p>
+          <a:p>
+            <a:r>
+              <a:rPr lang="en-US" dirty="0"/>
+              <a:t>The other direction has opened with the introduction of Large Language Models (LLMs), where the LLM can provide efficient implementation details fulfilling a given API requirement</a:t>
+            </a:r>
+          </a:p>
+          <a:p>
+            <a:endParaRPr lang="en-US" dirty="0"/>
+          </a:p>
+          <a:p>
+            <a:r>
+              <a:rPr lang="en-US" dirty="0"/>
+              <a:t>(?? More yapping?</a:t>
+            </a:r>
+          </a:p>
+          <a:p>
+            <a:r>
+              <a:rPr lang="en-US" dirty="0"/>
+              <a:t>- We have investigated how to … (tutoring)</a:t>
+            </a:r>
+          </a:p>
+          <a:p>
+            <a:r>
+              <a:rPr lang="en-US" dirty="0"/>
+              <a:t>)</a:t>
+            </a:r>
+          </a:p>
+          <a:p>
+            <a:endParaRPr lang="en-US" dirty="0"/>
+          </a:p>
+          <a:p>
+            <a:r>
+              <a:rPr lang="en-US" dirty="0"/>
+              <a:t>?? Since this research area is quite broad, we have mostly focused solely on dense data structures and algorithms utilizing regular loops, as even with this limitation, the area offers interesting challenges and many opportunities for improving the state of the art</a:t>
+            </a:r>
+          </a:p>
+          <a:p>
+            <a:endParaRPr lang="en-US" dirty="0"/>
+          </a:p>
+          <a:p>
+            <a:r>
+              <a:rPr lang="en-US" dirty="0"/>
+              <a:t>(ass bridge: now focusing on the abstractions…)</a:t>
+            </a:r>
           </a:p>
         </p:txBody>
       </p:sp>
@@ -5162,7 +5200,7 @@
           <a:p>
             <a:fld id="{FA8FD632-245B-410D-BCC4-8BF8D37AB67F}" type="slidenum">
               <a:rPr lang="en-US" smtClean="0"/>
-              <a:t>39</a:t>
+              <a:t>38</a:t>
             </a:fld>
             <a:endParaRPr lang="en-US"/>
           </a:p>
@@ -5171,7 +5209,7 @@
     </p:spTree>
     <p:extLst>
       <p:ext uri="{BB962C8B-B14F-4D97-AF65-F5344CB8AC3E}">
-        <p14:creationId xmlns:p14="http://schemas.microsoft.com/office/powerpoint/2010/main" val="1067365625"/>
+        <p14:creationId xmlns:p14="http://schemas.microsoft.com/office/powerpoint/2010/main" val="3810469099"/>
       </p:ext>
     </p:extLst>
   </p:cSld>
@@ -5225,133 +5263,7 @@
           <a:bodyPr/>
           <a:lstStyle/>
           <a:p>
-            <a:r>
-              <a:rPr lang="en-US" dirty="0"/>
-              <a:t>(key idea: introducing </a:t>
-            </a:r>
-            <a:r>
-              <a:rPr lang="en-US" dirty="0" err="1"/>
-              <a:t>Noarr</a:t>
-            </a:r>
-            <a:r>
-              <a:rPr lang="en-US" dirty="0"/>
-              <a:t> Structures; or abstractions for layout-agnostic design)</a:t>
-            </a:r>
-            <a:br>
-              <a:rPr lang="en-US" dirty="0"/>
-            </a:br>
-            <a:br>
-              <a:rPr lang="en-US" dirty="0"/>
-            </a:br>
-            <a:r>
-              <a:rPr lang="en-US" dirty="0"/>
-              <a:t>/*</a:t>
-            </a:r>
-          </a:p>
-          <a:p>
-            <a:r>
-              <a:rPr lang="en-US" dirty="0"/>
-              <a:t>As the first contribution of our research, we have devised an abstraction for building and transforming memory layouts that enable the design of layout-agnostic algorithms as well as the reuse of the defined layouts.</a:t>
-            </a:r>
-          </a:p>
-          <a:p>
             <a:endParaRPr lang="en-US" dirty="0"/>
-          </a:p>
-          <a:p>
-            <a:r>
-              <a:rPr lang="en-US" dirty="0"/>
-              <a:t>In real-use algorithms</a:t>
-            </a:r>
-            <a:br>
-              <a:rPr lang="en-US" dirty="0"/>
-            </a:br>
-            <a:r>
-              <a:rPr lang="en-US" dirty="0"/>
-              <a:t>- dimensions have semantic value</a:t>
-            </a:r>
-            <a:br>
-              <a:rPr lang="en-US" dirty="0"/>
-            </a:br>
-            <a:r>
-              <a:rPr lang="en-US" dirty="0"/>
-              <a:t>- a data access more often depends on the semantic (logic) structure than on a specific memory offset</a:t>
-            </a:r>
-            <a:br>
-              <a:rPr lang="en-US" dirty="0"/>
-            </a:br>
-            <a:r>
-              <a:rPr lang="en-US" dirty="0"/>
-              <a:t>- traversals cover the semantic space rather than a set of abstract coordinates</a:t>
-            </a:r>
-          </a:p>
-          <a:p>
-            <a:r>
-              <a:rPr lang="en-US" dirty="0"/>
-              <a:t>*/</a:t>
-            </a:r>
-          </a:p>
-          <a:p>
-            <a:endParaRPr lang="en-US" dirty="0"/>
-          </a:p>
-          <a:p>
-            <a:r>
-              <a:rPr lang="en-US" dirty="0"/>
-              <a:t>At the beginning of our research, we focused on devising abstractions that would enable a more seamless design of algorithms amenable to source-level optimizations allowing for user-direction and automation.</a:t>
-            </a:r>
-          </a:p>
-          <a:p>
-            <a:endParaRPr lang="en-US" dirty="0"/>
-          </a:p>
-          <a:p>
-            <a:r>
-              <a:rPr lang="en-US" dirty="0"/>
-              <a:t>If we slightly optimize a standard matrix multiplication algorithm, we might end up with something similar to the shown code.</a:t>
-            </a:r>
-          </a:p>
-          <a:p>
-            <a:r>
-              <a:rPr lang="en-US" dirty="0"/>
-              <a:t>At first view, it is difficult to see that it is actually a three-dimensional traversal performed in a tiled manner, accessing elements in row-major or column-major layouts.</a:t>
-            </a:r>
-          </a:p>
-          <a:p>
-            <a:br>
-              <a:rPr lang="en-US" dirty="0"/>
-            </a:br>
-            <a:br>
-              <a:rPr lang="en-US" dirty="0"/>
-            </a:br>
-            <a:r>
-              <a:rPr lang="en-US" dirty="0"/>
-              <a:t>[without runtime overhead]</a:t>
-            </a:r>
-            <a:br>
-              <a:rPr lang="en-US" dirty="0"/>
-            </a:br>
-            <a:r>
-              <a:rPr lang="en-US" dirty="0"/>
-              <a:t>Our research iteratively progressed to a point where we can encode the semantic logical structure of layouts independently of the physical layout, naming the dimensions for specifying the logical API that is common to the layouts sharing the same dimensions.</a:t>
-            </a:r>
-          </a:p>
-          <a:p>
-            <a:r>
-              <a:rPr lang="en-US" dirty="0"/>
-              <a:t>This makes the structures more resistant to simple errors and encodes further information that then allows using these names to either identify common dimensions of different structures and thus automatically infer traversals over them, or specify transformations of these traversals.</a:t>
-            </a:r>
-            <a:br>
-              <a:rPr lang="en-US" dirty="0"/>
-            </a:br>
-            <a:r>
-              <a:rPr lang="en-US" dirty="0"/>
-              <a:t>This then allows us to compact the difficult-to-maintain version of the matrix multiplication algorithm into a more compact and semantic code.</a:t>
-            </a:r>
-            <a:br>
-              <a:rPr lang="en-US" dirty="0"/>
-            </a:br>
-            <a:r>
-              <a:rPr lang="en-US" dirty="0"/>
-              <a:t>(The first three rows directly match, then we simply specify we want to traverse the combined space of the three structures, and specify the action that should happen for each point of the space; the order directive then specifies the tiling optimization)</a:t>
-            </a:r>
           </a:p>
         </p:txBody>
       </p:sp>
@@ -5372,7 +5284,7 @@
           <a:p>
             <a:fld id="{FA8FD632-245B-410D-BCC4-8BF8D37AB67F}" type="slidenum">
               <a:rPr lang="en-US" smtClean="0"/>
-              <a:t>40</a:t>
+              <a:t>39</a:t>
             </a:fld>
             <a:endParaRPr lang="en-US"/>
           </a:p>
@@ -5381,7 +5293,7 @@
     </p:spTree>
     <p:extLst>
       <p:ext uri="{BB962C8B-B14F-4D97-AF65-F5344CB8AC3E}">
-        <p14:creationId xmlns:p14="http://schemas.microsoft.com/office/powerpoint/2010/main" val="3577613745"/>
+        <p14:creationId xmlns:p14="http://schemas.microsoft.com/office/powerpoint/2010/main" val="1067365625"/>
       </p:ext>
     </p:extLst>
   </p:cSld>
@@ -5437,6 +5349,216 @@
           <a:p>
             <a:r>
               <a:rPr lang="en-US" dirty="0"/>
+              <a:t>(key idea: introducing </a:t>
+            </a:r>
+            <a:r>
+              <a:rPr lang="en-US" dirty="0" err="1"/>
+              <a:t>Noarr</a:t>
+            </a:r>
+            <a:r>
+              <a:rPr lang="en-US" dirty="0"/>
+              <a:t> Structures; or abstractions for layout-agnostic design)</a:t>
+            </a:r>
+            <a:br>
+              <a:rPr lang="en-US" dirty="0"/>
+            </a:br>
+            <a:br>
+              <a:rPr lang="en-US" dirty="0"/>
+            </a:br>
+            <a:r>
+              <a:rPr lang="en-US" dirty="0"/>
+              <a:t>/*</a:t>
+            </a:r>
+          </a:p>
+          <a:p>
+            <a:r>
+              <a:rPr lang="en-US" dirty="0"/>
+              <a:t>As the first contribution of our research, we have devised an abstraction for building and transforming memory layouts that enable the design of layout-agnostic algorithms as well as the reuse of the defined layouts.</a:t>
+            </a:r>
+          </a:p>
+          <a:p>
+            <a:endParaRPr lang="en-US" dirty="0"/>
+          </a:p>
+          <a:p>
+            <a:r>
+              <a:rPr lang="en-US" dirty="0"/>
+              <a:t>In real-use algorithms</a:t>
+            </a:r>
+            <a:br>
+              <a:rPr lang="en-US" dirty="0"/>
+            </a:br>
+            <a:r>
+              <a:rPr lang="en-US" dirty="0"/>
+              <a:t>- dimensions have semantic value</a:t>
+            </a:r>
+            <a:br>
+              <a:rPr lang="en-US" dirty="0"/>
+            </a:br>
+            <a:r>
+              <a:rPr lang="en-US" dirty="0"/>
+              <a:t>- a data access more often depends on the semantic (logic) structure than on a specific memory offset</a:t>
+            </a:r>
+            <a:br>
+              <a:rPr lang="en-US" dirty="0"/>
+            </a:br>
+            <a:r>
+              <a:rPr lang="en-US" dirty="0"/>
+              <a:t>- traversals cover the semantic space rather than a set of abstract coordinates</a:t>
+            </a:r>
+          </a:p>
+          <a:p>
+            <a:r>
+              <a:rPr lang="en-US" dirty="0"/>
+              <a:t>*/</a:t>
+            </a:r>
+          </a:p>
+          <a:p>
+            <a:endParaRPr lang="en-US" dirty="0"/>
+          </a:p>
+          <a:p>
+            <a:r>
+              <a:rPr lang="en-US" dirty="0"/>
+              <a:t>At the beginning of our research, we focused on devising abstractions that would enable a more seamless design of algorithms amenable to source-level optimizations allowing for user-direction and automation.</a:t>
+            </a:r>
+          </a:p>
+          <a:p>
+            <a:endParaRPr lang="en-US" dirty="0"/>
+          </a:p>
+          <a:p>
+            <a:r>
+              <a:rPr lang="en-US" dirty="0"/>
+              <a:t>If we slightly optimize a standard matrix multiplication algorithm, we might end up with something similar to the shown code.</a:t>
+            </a:r>
+          </a:p>
+          <a:p>
+            <a:r>
+              <a:rPr lang="en-US" dirty="0"/>
+              <a:t>At first view, it is difficult to see that it is actually a three-dimensional traversal performed in a tiled manner, accessing elements in row-major or column-major layouts.</a:t>
+            </a:r>
+          </a:p>
+          <a:p>
+            <a:br>
+              <a:rPr lang="en-US" dirty="0"/>
+            </a:br>
+            <a:br>
+              <a:rPr lang="en-US" dirty="0"/>
+            </a:br>
+            <a:r>
+              <a:rPr lang="en-US" dirty="0"/>
+              <a:t>[without runtime overhead]</a:t>
+            </a:r>
+            <a:br>
+              <a:rPr lang="en-US" dirty="0"/>
+            </a:br>
+            <a:r>
+              <a:rPr lang="en-US" dirty="0"/>
+              <a:t>Our research iteratively progressed to a point where we can encode the semantic logical structure of layouts independently of the physical layout, naming the dimensions for specifying the logical API that is common to the layouts sharing the same dimensions.</a:t>
+            </a:r>
+          </a:p>
+          <a:p>
+            <a:r>
+              <a:rPr lang="en-US" dirty="0"/>
+              <a:t>This makes the structures more resistant to simple errors and encodes further information that then allows using these names to either identify common dimensions of different structures and thus automatically infer traversals over them, or specify transformations of these traversals.</a:t>
+            </a:r>
+            <a:br>
+              <a:rPr lang="en-US" dirty="0"/>
+            </a:br>
+            <a:r>
+              <a:rPr lang="en-US" dirty="0"/>
+              <a:t>This then allows us to compact the difficult-to-maintain version of the matrix multiplication algorithm into a more compact and semantic code.</a:t>
+            </a:r>
+            <a:br>
+              <a:rPr lang="en-US" dirty="0"/>
+            </a:br>
+            <a:r>
+              <a:rPr lang="en-US" dirty="0"/>
+              <a:t>(The first three rows directly match, then we simply specify we want to traverse the combined space of the three structures, and specify the action that should happen for each point of the space; the order directive then specifies the tiling optimization)</a:t>
+            </a:r>
+          </a:p>
+        </p:txBody>
+      </p:sp>
+      <p:sp>
+        <p:nvSpPr>
+          <p:cNvPr id="4" name="Slide Number Placeholder 3"/>
+          <p:cNvSpPr>
+            <a:spLocks noGrp="1"/>
+          </p:cNvSpPr>
+          <p:nvPr>
+            <p:ph type="sldNum" sz="quarter" idx="5"/>
+          </p:nvPr>
+        </p:nvSpPr>
+        <p:spPr/>
+        <p:txBody>
+          <a:bodyPr/>
+          <a:lstStyle/>
+          <a:p>
+            <a:fld id="{FA8FD632-245B-410D-BCC4-8BF8D37AB67F}" type="slidenum">
+              <a:rPr lang="en-US" smtClean="0"/>
+              <a:t>40</a:t>
+            </a:fld>
+            <a:endParaRPr lang="en-US"/>
+          </a:p>
+        </p:txBody>
+      </p:sp>
+    </p:spTree>
+    <p:extLst>
+      <p:ext uri="{BB962C8B-B14F-4D97-AF65-F5344CB8AC3E}">
+        <p14:creationId xmlns:p14="http://schemas.microsoft.com/office/powerpoint/2010/main" val="3577613745"/>
+      </p:ext>
+    </p:extLst>
+  </p:cSld>
+  <p:clrMapOvr>
+    <a:masterClrMapping/>
+  </p:clrMapOvr>
+</p:notes>
+</file>
+
+<file path=ppt/notesSlides/notesSlide38.xml><?xml version="1.0" encoding="utf-8"?>
+<p:notes xmlns:a="http://schemas.openxmlformats.org/drawingml/2006/main" xmlns:r="http://schemas.openxmlformats.org/officeDocument/2006/relationships" xmlns:p="http://schemas.openxmlformats.org/presentationml/2006/main">
+  <p:cSld>
+    <p:spTree>
+      <p:nvGrpSpPr>
+        <p:cNvPr id="1" name=""/>
+        <p:cNvGrpSpPr/>
+        <p:nvPr/>
+      </p:nvGrpSpPr>
+      <p:grpSpPr>
+        <a:xfrm>
+          <a:off x="0" y="0"/>
+          <a:ext cx="0" cy="0"/>
+          <a:chOff x="0" y="0"/>
+          <a:chExt cx="0" cy="0"/>
+        </a:xfrm>
+      </p:grpSpPr>
+      <p:sp>
+        <p:nvSpPr>
+          <p:cNvPr id="2" name="Slide Image Placeholder 1"/>
+          <p:cNvSpPr>
+            <a:spLocks noGrp="1" noRot="1" noChangeAspect="1"/>
+          </p:cNvSpPr>
+          <p:nvPr>
+            <p:ph type="sldImg"/>
+          </p:nvPr>
+        </p:nvSpPr>
+        <p:spPr/>
+      </p:sp>
+      <p:sp>
+        <p:nvSpPr>
+          <p:cNvPr id="3" name="Notes Placeholder 2"/>
+          <p:cNvSpPr>
+            <a:spLocks noGrp="1"/>
+          </p:cNvSpPr>
+          <p:nvPr>
+            <p:ph type="body" idx="1"/>
+          </p:nvPr>
+        </p:nvSpPr>
+        <p:spPr/>
+        <p:txBody>
+          <a:bodyPr/>
+          <a:lstStyle/>
+          <a:p>
+            <a:r>
+              <a:rPr lang="en-US" dirty="0"/>
               <a:t>In our first contribution, we focused on abstractions for encoding the memory layouts so that they separate the logical structure used in the algorithms from the physical memory layout (offsets). Our research is not the only effort on this, as nowadays, we can see similar efforts in the C++ standard with the introduction of </a:t>
             </a:r>
             <a:r>
@@ -5574,7 +5696,7 @@
 </p:notes>
 </file>
 
-<file path=ppt/notesSlides/notesSlide38.xml><?xml version="1.0" encoding="utf-8"?>
+<file path=ppt/notesSlides/notesSlide39.xml><?xml version="1.0" encoding="utf-8"?>
 <p:notes xmlns:a="http://schemas.openxmlformats.org/drawingml/2006/main" xmlns:r="http://schemas.openxmlformats.org/officeDocument/2006/relationships" xmlns:p="http://schemas.openxmlformats.org/presentationml/2006/main">
   <p:cSld>
     <p:spTree>

--- a/slides/Optimizing Memory Layouts and Traversal Orders in High-Performance Computing.pptx
+++ b/slides/Optimizing Memory Layouts and Traversal Orders in High-Performance Computing.pptx
@@ -5,7 +5,7 @@
     <p:sldMasterId id="2147483648" r:id="rId1"/>
   </p:sldMasterIdLst>
   <p:notesMasterIdLst>
-    <p:notesMasterId r:id="rId32"/>
+    <p:notesMasterId r:id="rId33"/>
   </p:notesMasterIdLst>
   <p:sldIdLst>
     <p:sldId id="256" r:id="rId2"/>
@@ -23,21 +23,22 @@
     <p:sldId id="290" r:id="rId14"/>
     <p:sldId id="279" r:id="rId15"/>
     <p:sldId id="287" r:id="rId16"/>
-    <p:sldId id="302" r:id="rId17"/>
-    <p:sldId id="280" r:id="rId18"/>
-    <p:sldId id="310" r:id="rId19"/>
-    <p:sldId id="295" r:id="rId20"/>
-    <p:sldId id="288" r:id="rId21"/>
-    <p:sldId id="305" r:id="rId22"/>
-    <p:sldId id="291" r:id="rId23"/>
-    <p:sldId id="306" r:id="rId24"/>
-    <p:sldId id="307" r:id="rId25"/>
-    <p:sldId id="308" r:id="rId26"/>
-    <p:sldId id="309" r:id="rId27"/>
-    <p:sldId id="311" r:id="rId28"/>
-    <p:sldId id="266" r:id="rId29"/>
-    <p:sldId id="312" r:id="rId30"/>
-    <p:sldId id="262" r:id="rId31"/>
+    <p:sldId id="316" r:id="rId17"/>
+    <p:sldId id="302" r:id="rId18"/>
+    <p:sldId id="280" r:id="rId19"/>
+    <p:sldId id="310" r:id="rId20"/>
+    <p:sldId id="295" r:id="rId21"/>
+    <p:sldId id="288" r:id="rId22"/>
+    <p:sldId id="305" r:id="rId23"/>
+    <p:sldId id="291" r:id="rId24"/>
+    <p:sldId id="306" r:id="rId25"/>
+    <p:sldId id="315" r:id="rId26"/>
+    <p:sldId id="308" r:id="rId27"/>
+    <p:sldId id="309" r:id="rId28"/>
+    <p:sldId id="311" r:id="rId29"/>
+    <p:sldId id="266" r:id="rId30"/>
+    <p:sldId id="312" r:id="rId31"/>
+    <p:sldId id="262" r:id="rId32"/>
   </p:sldIdLst>
   <p:sldSz cx="12192000" cy="6858000"/>
   <p:notesSz cx="6858000" cy="9144000"/>
@@ -160,6 +161,7 @@
             <p14:sldId id="290"/>
             <p14:sldId id="279"/>
             <p14:sldId id="287"/>
+            <p14:sldId id="316"/>
             <p14:sldId id="302"/>
             <p14:sldId id="280"/>
             <p14:sldId id="310"/>
@@ -172,7 +174,7 @@
             <p14:sldId id="305"/>
             <p14:sldId id="291"/>
             <p14:sldId id="306"/>
-            <p14:sldId id="307"/>
+            <p14:sldId id="315"/>
             <p14:sldId id="308"/>
             <p14:sldId id="309"/>
             <p14:sldId id="311"/>
@@ -892,7 +894,14 @@
             </a:br>
             <a:r>
               <a:rPr lang="en-US" dirty="0"/>
-              <a:t>the code is more verbose, as the abstraction encodes more information overall (such as names of dimensions), but contains slightly less complex control flow, and significantly simpler indexation.</a:t>
+              <a:t>the code is more verbose (but most of the verbosity can be resolved with code completion and static code analyzers)</a:t>
+            </a:r>
+            <a:br>
+              <a:rPr lang="en-US" dirty="0"/>
+            </a:br>
+            <a:r>
+              <a:rPr lang="en-US" dirty="0"/>
+              <a:t>but contains less complex control flow, and significantly simpler indexation.</a:t>
             </a:r>
           </a:p>
           <a:p>
@@ -1216,13 +1225,13 @@
           <a:p>
             <a:r>
               <a:rPr lang="en-US" dirty="0"/>
-              <a:t>It also enables automatic transformation of the data if the memory layouts on the opposing end-points differ (perhaps due to optimization).</a:t>
+              <a:t>It also enables automatic transformation of the data if the memory layouts on the opposing end-points differ (perhaps due to efficiency requirements).</a:t>
             </a:r>
           </a:p>
           <a:p>
             <a:r>
               <a:rPr lang="en-US" dirty="0"/>
-              <a:t>If this was done naively. the MPI backend would corrupt the data by preserving the physical layout and not the logical structure.</a:t>
+              <a:t>If such communication was done naively. the MPI backend would corrupt the data by preserving the physical layout instead of the intended logical structure.</a:t>
             </a:r>
           </a:p>
         </p:txBody>
@@ -1328,6 +1337,12 @@
             </a:r>
           </a:p>
           <a:p>
+            <a:r>
+              <a:rPr lang="en-US" dirty="0"/>
+              <a:t>Fo that, we have identified 6 main characteristics.</a:t>
+            </a:r>
+          </a:p>
+          <a:p>
             <a:endParaRPr lang="en-US" dirty="0"/>
           </a:p>
           <a:p>
@@ -1339,7 +1354,16 @@
           <a:p>
             <a:r>
               <a:rPr lang="en-US" dirty="0"/>
-              <a:t>And it also handles general multidimensional data layouts.</a:t>
+              <a:t>Supporting general multidimensional data layouts, without explicit packing and unpacking of data elements, and performing some type safety checks.</a:t>
+            </a:r>
+          </a:p>
+          <a:p>
+            <a:endParaRPr lang="en-US" dirty="0"/>
+          </a:p>
+          <a:p>
+            <a:r>
+              <a:rPr lang="en-US" dirty="0"/>
+              <a:t>(Many of the bindings do not even fully support scatter and gather instructions that can distribute/collect data into/from smaller chunks)</a:t>
             </a:r>
           </a:p>
           <a:p>
@@ -1435,7 +1459,7 @@
           <a:p>
             <a:r>
               <a:rPr lang="en-US" dirty="0"/>
-              <a:t>(key idea: knowledge transfer to cellular automata simulation; what is going on)</a:t>
+              <a:t>(key idea: knowledge transfer to stencil computation)</a:t>
             </a:r>
           </a:p>
           <a:p>
@@ -1453,13 +1477,13 @@
           <a:p>
             <a:r>
               <a:rPr lang="en-US" dirty="0"/>
-              <a:t>One domain from our past research that could adapt the abstractions was cellular automata simulation.</a:t>
+              <a:t>One domain from our past research that could adapt the abstractions was stencil computations.</a:t>
             </a:r>
           </a:p>
           <a:p>
             <a:r>
               <a:rPr lang="en-US" dirty="0"/>
-              <a:t>It is used for modelling various systems such as fluid dynamics or material sciences.</a:t>
+              <a:t>Stencil computations are used in many field ranging from weather prediction to image processing.</a:t>
             </a:r>
           </a:p>
           <a:p>
@@ -1468,22 +1492,23 @@
           <a:p>
             <a:r>
               <a:rPr lang="en-US" dirty="0"/>
-              <a:t>They are computed on regular grids where each cell has one of a limited number of possible states;</a:t>
-            </a:r>
+              <a:t>They are computed on regular grids with cells. The grid is updated by applying a neighborhood-based rule to each cell.</a:t>
+            </a:r>
+          </a:p>
+          <a:p>
+            <a:endParaRPr lang="en-US" dirty="0"/>
           </a:p>
           <a:p>
             <a:r>
               <a:rPr lang="en-US" dirty="0"/>
-              <a:t>The grid is updated in discrete time steps by applying a neighborhood-based rule to each cell.</a:t>
-            </a:r>
-          </a:p>
-          <a:p>
-            <a:endParaRPr lang="en-US" dirty="0"/>
-          </a:p>
-          <a:p>
-            <a:r>
+              <a:t>While the earlier abstractions are usable for general stencil computations,</a:t>
+            </a:r>
+            <a:br>
               <a:rPr lang="en-US" dirty="0"/>
-              <a:t>The rule can be encoded in a type-level expression that does not assume any specific layout, traversal, or even cell state encoding and evaluation strategy.</a:t>
+            </a:br>
+            <a:r>
+              <a:rPr lang="en-US" dirty="0"/>
+              <a:t>we have studied whether we can abstract away even more details of the implementation.</a:t>
             </a:r>
           </a:p>
           <a:p>
@@ -1538,7 +1563,13 @@
   <p:cSld>
     <p:spTree>
       <p:nvGrpSpPr>
-        <p:cNvPr id="1" name=""/>
+        <p:cNvPr id="1" name="">
+          <a:extLst>
+            <a:ext uri="{FF2B5EF4-FFF2-40B4-BE49-F238E27FC236}">
+              <a16:creationId xmlns:a16="http://schemas.microsoft.com/office/drawing/2014/main" id="{40A8F060-1288-B07E-F077-DC4D1977877A}"/>
+            </a:ext>
+          </a:extLst>
+        </p:cNvPr>
         <p:cNvGrpSpPr/>
         <p:nvPr/>
       </p:nvGrpSpPr>
@@ -1552,7 +1583,13 @@
       </p:grpSpPr>
       <p:sp>
         <p:nvSpPr>
-          <p:cNvPr id="2" name="Slide Image Placeholder 1"/>
+          <p:cNvPr id="2" name="Slide Image Placeholder 1">
+            <a:extLst>
+              <a:ext uri="{FF2B5EF4-FFF2-40B4-BE49-F238E27FC236}">
+                <a16:creationId xmlns:a16="http://schemas.microsoft.com/office/drawing/2014/main" id="{212C560A-2FE9-66AF-8FFE-DF75D23102AE}"/>
+              </a:ext>
+            </a:extLst>
+          </p:cNvPr>
           <p:cNvSpPr>
             <a:spLocks noGrp="1" noRot="1" noChangeAspect="1"/>
           </p:cNvSpPr>
@@ -1564,7 +1601,13 @@
       </p:sp>
       <p:sp>
         <p:nvSpPr>
-          <p:cNvPr id="3" name="Notes Placeholder 2"/>
+          <p:cNvPr id="3" name="Notes Placeholder 2">
+            <a:extLst>
+              <a:ext uri="{FF2B5EF4-FFF2-40B4-BE49-F238E27FC236}">
+                <a16:creationId xmlns:a16="http://schemas.microsoft.com/office/drawing/2014/main" id="{D1377610-4852-1BF0-7832-B2A0414FD544}"/>
+              </a:ext>
+            </a:extLst>
+          </p:cNvPr>
           <p:cNvSpPr>
             <a:spLocks noGrp="1"/>
           </p:cNvSpPr>
@@ -1579,7 +1622,7 @@
           <a:p>
             <a:r>
               <a:rPr lang="en-US" dirty="0"/>
-              <a:t>(…; there is some template metaprogramming magic that enables cool stuff)</a:t>
+              <a:t>(key idea: cellular automata)</a:t>
             </a:r>
           </a:p>
           <a:p>
@@ -1588,95 +1631,44 @@
           <a:p>
             <a:r>
               <a:rPr lang="en-US" dirty="0"/>
-              <a:t>This type-level expression can then be evaluated by applying specific templated components via metaprogramming:</a:t>
-            </a:r>
-          </a:p>
-          <a:p>
-            <a:pPr marL="171450" indent="-171450">
-              <a:buFontTx/>
-              <a:buChar char="-"/>
-            </a:pPr>
-            <a:r>
+              <a:t>We have successfully designed such abstractions for a specific subclass of</a:t>
+            </a:r>
+            <a:br>
               <a:rPr lang="en-US" dirty="0"/>
-              <a:t>Memory Layouts that specify how the grid and the single cells are encoded</a:t>
-            </a:r>
-          </a:p>
-          <a:p>
-            <a:pPr marL="171450" indent="-171450">
-              <a:buFontTx/>
-              <a:buChar char="-"/>
-            </a:pPr>
+            </a:br>
             <a:r>
               <a:rPr lang="en-US" dirty="0"/>
-              <a:t>Evaluators that specify how the update rules should be computed on the specific Memory Layouts</a:t>
-            </a:r>
-          </a:p>
-          <a:p>
-            <a:pPr marL="171450" indent="-171450">
-              <a:buFontTx/>
-              <a:buChar char="-"/>
-            </a:pPr>
+              <a:t>stencil computations with discrete cell states – Cellular automata.</a:t>
+            </a:r>
+          </a:p>
+          <a:p>
             <a:r>
               <a:rPr lang="en-US" dirty="0"/>
-              <a:t>And Traversers that specify the evaluation order as well as parallelization of the computation</a:t>
-            </a:r>
-          </a:p>
-          <a:p>
-            <a:pPr marL="171450" indent="-171450">
-              <a:buFontTx/>
-              <a:buChar char="-"/>
-            </a:pPr>
+              <a:t>They are used for modelling various systems such as fluid dynamics or material sciences.</a:t>
+            </a:r>
+          </a:p>
+          <a:p>
             <a:endParaRPr lang="en-US" dirty="0"/>
           </a:p>
           <a:p>
-            <a:pPr marL="0" indent="0">
-              <a:buFontTx/>
-              <a:buNone/>
-            </a:pPr>
             <a:r>
               <a:rPr lang="en-US" dirty="0"/>
-              <a:t>This enables faster development and prototyping of the automatons, and simplifies experimental exploration of different optimization techniques.</a:t>
-            </a:r>
-          </a:p>
-          <a:p>
-            <a:pPr marL="0" indent="0">
-              <a:buFontTx/>
-              <a:buNone/>
-            </a:pPr>
+              <a:t>Their rules can often be expressed as nested logic expressions that depend on cell states in the neighborhood.</a:t>
+            </a:r>
+          </a:p>
+          <a:p>
             <a:endParaRPr lang="en-US" dirty="0"/>
           </a:p>
           <a:p>
-            <a:pPr marL="0" indent="0">
-              <a:buFontTx/>
-              <a:buNone/>
-            </a:pPr>
             <a:r>
               <a:rPr lang="en-US" dirty="0"/>
-              <a:t>One of the optimization technique we study in a recently submitted publication is encoding the cell states in efficient bit-packed arrays instead of wasteful encoding in separate machine words.</a:t>
-            </a:r>
-          </a:p>
-          <a:p>
-            <a:pPr marL="0" indent="0">
-              <a:buFontTx/>
-              <a:buNone/>
-            </a:pPr>
-            <a:r>
-              <a:rPr lang="en-US" dirty="0"/>
-              <a:t>These bit-packed encodings also allow for bit-level vectorized computation of many cell updates simultaneously.</a:t>
-            </a:r>
-          </a:p>
-          <a:p>
-            <a:pPr marL="0" indent="0">
-              <a:buFontTx/>
-              <a:buNone/>
-            </a:pPr>
+              <a:t>The rule can be encoded in a type-level expression that does not assume any specific layout, traversal, or even cell state encoding and evaluation strategy.</a:t>
+            </a:r>
+          </a:p>
+          <a:p>
             <a:endParaRPr lang="en-US" dirty="0"/>
           </a:p>
           <a:p>
-            <a:pPr marL="0" indent="0">
-              <a:buFontTx/>
-              <a:buNone/>
-            </a:pPr>
             <a:r>
               <a:rPr lang="en-US" dirty="0"/>
               <a:t>(…)</a:t>
@@ -1686,7 +1678,13 @@
       </p:sp>
       <p:sp>
         <p:nvSpPr>
-          <p:cNvPr id="4" name="Slide Number Placeholder 3"/>
+          <p:cNvPr id="4" name="Slide Number Placeholder 3">
+            <a:extLst>
+              <a:ext uri="{FF2B5EF4-FFF2-40B4-BE49-F238E27FC236}">
+                <a16:creationId xmlns:a16="http://schemas.microsoft.com/office/drawing/2014/main" id="{20CDA17C-3A49-7F24-D366-187D1C66C50B}"/>
+              </a:ext>
+            </a:extLst>
+          </p:cNvPr>
           <p:cNvSpPr>
             <a:spLocks noGrp="1"/>
           </p:cNvSpPr>
@@ -1710,7 +1708,7 @@
     </p:spTree>
     <p:extLst>
       <p:ext uri="{BB962C8B-B14F-4D97-AF65-F5344CB8AC3E}">
-        <p14:creationId xmlns:p14="http://schemas.microsoft.com/office/powerpoint/2010/main" val="454108675"/>
+        <p14:creationId xmlns:p14="http://schemas.microsoft.com/office/powerpoint/2010/main" val="607623478"/>
       </p:ext>
     </p:extLst>
   </p:cSld>
@@ -1766,42 +1764,107 @@
           <a:p>
             <a:r>
               <a:rPr lang="en-US" dirty="0"/>
-              <a:t>(…; it can be </a:t>
-            </a:r>
-            <a:r>
-              <a:rPr lang="en-US" dirty="0" err="1"/>
-              <a:t>faaaast</a:t>
-            </a:r>
+              <a:t>(…; there is some template metaprogramming magic that enables cool stuff)</a:t>
+            </a:r>
+          </a:p>
+          <a:p>
+            <a:endParaRPr lang="en-US" dirty="0"/>
+          </a:p>
+          <a:p>
             <a:r>
               <a:rPr lang="en-US" dirty="0"/>
-              <a:t>)</a:t>
-            </a:r>
-          </a:p>
-          <a:p>
+              <a:t>This type-level expression can then be evaluated by applying specific templated components via metaprogramming; they specify</a:t>
+            </a:r>
+          </a:p>
+          <a:p>
+            <a:pPr marL="171450" indent="-171450">
+              <a:buFontTx/>
+              <a:buChar char="-"/>
+            </a:pPr>
+            <a:r>
+              <a:rPr lang="en-US" dirty="0"/>
+              <a:t>how the grid and the cells are encoded</a:t>
+            </a:r>
+          </a:p>
+          <a:p>
+            <a:pPr marL="171450" indent="-171450">
+              <a:buFontTx/>
+              <a:buChar char="-"/>
+            </a:pPr>
+            <a:r>
+              <a:rPr lang="en-US" dirty="0"/>
+              <a:t>how the update rules should be computed</a:t>
+            </a:r>
+          </a:p>
+          <a:p>
+            <a:pPr marL="171450" indent="-171450">
+              <a:buFontTx/>
+              <a:buChar char="-"/>
+            </a:pPr>
+            <a:r>
+              <a:rPr lang="en-US" dirty="0"/>
+              <a:t>order of computation as well as the parallelization</a:t>
+            </a:r>
+          </a:p>
+          <a:p>
+            <a:pPr marL="171450" indent="-171450">
+              <a:buFontTx/>
+              <a:buChar char="-"/>
+            </a:pPr>
             <a:endParaRPr lang="en-US" dirty="0"/>
           </a:p>
           <a:p>
+            <a:pPr marL="0" indent="0">
+              <a:buFontTx/>
+              <a:buNone/>
+            </a:pPr>
             <a:r>
               <a:rPr lang="en-US" dirty="0"/>
-              <a:t>If the rule specification is paired with these efficient components, the computation may improve over even already GPU-parallelized baseline performance in one or two decadic orders.</a:t>
-            </a:r>
-          </a:p>
-          <a:p>
+              <a:t>This enables faster development and prototyping of the automatons, and simplifies experimental exploration of different optimization techniques.</a:t>
+            </a:r>
+          </a:p>
+          <a:p>
+            <a:pPr marL="0" indent="0">
+              <a:buFontTx/>
+              <a:buNone/>
+            </a:pPr>
             <a:endParaRPr lang="en-US" dirty="0"/>
           </a:p>
           <a:p>
+            <a:pPr marL="0" indent="0">
+              <a:buFontTx/>
+              <a:buNone/>
+            </a:pPr>
             <a:r>
               <a:rPr lang="en-US" dirty="0"/>
-              <a:t>This plot shows possible improvements using different optimization techniques available in our prototype framework on different cellular automata.</a:t>
-            </a:r>
-          </a:p>
-          <a:p>
+              <a:t>One of the optimization technique we study in a recently submitted publication is encoding the cell states in efficient bit-packed arrays instead of wasteful encoding in separate machine words.</a:t>
+            </a:r>
+          </a:p>
+          <a:p>
+            <a:pPr marL="0" indent="0">
+              <a:buFontTx/>
+              <a:buNone/>
+            </a:pPr>
+            <a:r>
+              <a:rPr lang="en-US" dirty="0"/>
+              <a:t>These bit-packed encodings also allow for bit-level vectorized computation of many cell updates simultaneously.</a:t>
+            </a:r>
+          </a:p>
+          <a:p>
+            <a:pPr marL="0" indent="0">
+              <a:buFontTx/>
+              <a:buNone/>
+            </a:pPr>
             <a:endParaRPr lang="en-US" dirty="0"/>
           </a:p>
           <a:p>
+            <a:pPr marL="0" indent="0">
+              <a:buFontTx/>
+              <a:buNone/>
+            </a:pPr>
             <a:r>
               <a:rPr lang="en-US" dirty="0"/>
-              <a:t>(We can see that simple bit-packing is not enough for achieving highly efficient computation; and it is necessary to compute the cells in bit-vectorized manner, which is implemented by Bit Planes and Temporal, which implements temporal blocking on top of these optimizations)</a:t>
+              <a:t>(…)</a:t>
             </a:r>
           </a:p>
         </p:txBody>
@@ -1832,7 +1895,7 @@
     </p:spTree>
     <p:extLst>
       <p:ext uri="{BB962C8B-B14F-4D97-AF65-F5344CB8AC3E}">
-        <p14:creationId xmlns:p14="http://schemas.microsoft.com/office/powerpoint/2010/main" val="1504701067"/>
+        <p14:creationId xmlns:p14="http://schemas.microsoft.com/office/powerpoint/2010/main" val="454108675"/>
       </p:ext>
     </p:extLst>
   </p:cSld>
@@ -1888,13 +1951,15 @@
           <a:p>
             <a:r>
               <a:rPr lang="en-US" dirty="0"/>
-              <a:t>Thus, we have shown that the abstractions offer a practical solution to parallel CPU and GPU, as well as distributed computations in High-Performance Computing,</a:t>
-            </a:r>
-          </a:p>
-          <a:p>
+              <a:t>(…; it can be </a:t>
+            </a:r>
+            <a:r>
+              <a:rPr lang="en-US" dirty="0" err="1"/>
+              <a:t>faaaast</a:t>
+            </a:r>
             <a:r>
               <a:rPr lang="en-US" dirty="0"/>
-              <a:t>And enable even stronger optimizations for specific domains, such as Cellular Automata simulation</a:t>
+              <a:t>)</a:t>
             </a:r>
           </a:p>
           <a:p>
@@ -1903,7 +1968,25 @@
           <a:p>
             <a:r>
               <a:rPr lang="en-US" dirty="0"/>
-              <a:t>These abstractions make the developed algorithms easier to manage, more flexible to transform, and allow automatic application of advanced optimizations.</a:t>
+              <a:t>If the rule specification is paired with these efficient components, the computation may improve over even already GPU-parallelized baseline performance in one or two decadic orders.</a:t>
+            </a:r>
+          </a:p>
+          <a:p>
+            <a:endParaRPr lang="en-US" dirty="0"/>
+          </a:p>
+          <a:p>
+            <a:r>
+              <a:rPr lang="en-US" dirty="0"/>
+              <a:t>This plot shows possible improvements using different optimization techniques available in our prototype framework on many different cellular automata.</a:t>
+            </a:r>
+          </a:p>
+          <a:p>
+            <a:endParaRPr lang="en-US" dirty="0"/>
+          </a:p>
+          <a:p>
+            <a:r>
+              <a:rPr lang="en-US" dirty="0"/>
+              <a:t>(We can see that simple bit-packing is not enough for achieving highly efficient computation; and it is necessary to compute the cells in bit-vectorized manner, which is implemented by Bit Planes and Temporal, which implements temporal blocking on top of these optimizations)</a:t>
             </a:r>
           </a:p>
         </p:txBody>
@@ -1934,7 +2017,7 @@
     </p:spTree>
     <p:extLst>
       <p:ext uri="{BB962C8B-B14F-4D97-AF65-F5344CB8AC3E}">
-        <p14:creationId xmlns:p14="http://schemas.microsoft.com/office/powerpoint/2010/main" val="1243571906"/>
+        <p14:creationId xmlns:p14="http://schemas.microsoft.com/office/powerpoint/2010/main" val="1504701067"/>
       </p:ext>
     </p:extLst>
   </p:cSld>
@@ -1990,7 +2073,19 @@
           <a:p>
             <a:r>
               <a:rPr lang="en-US" dirty="0"/>
-              <a:t>(key idea: we’ve left abstractions to help LLMs generate better para code)</a:t>
+              <a:t>We have shown that the abstractions for layouts and traversals that simplify user-guided optimization,</a:t>
+            </a:r>
+          </a:p>
+          <a:p>
+            <a:r>
+              <a:rPr lang="en-US" dirty="0"/>
+              <a:t>Including parallel CPU and GPU computation, as well as distributed computing.</a:t>
+            </a:r>
+          </a:p>
+          <a:p>
+            <a:r>
+              <a:rPr lang="en-US" dirty="0"/>
+              <a:t>We have used the principles to enable even stronger optimizations in specific domains, such as Cellular Automata.</a:t>
             </a:r>
           </a:p>
           <a:p>
@@ -1999,136 +2094,16 @@
           <a:p>
             <a:r>
               <a:rPr lang="en-US" dirty="0"/>
-              <a:t>After extending our earlier work to cover distributed computing as well and adapting it for a specific domain,</a:t>
-            </a:r>
+              <a:t>These abstractions make the developed algorithms easier to write, more flexible to transform, and allow automatic application of advanced optimizations.</a:t>
+            </a:r>
+          </a:p>
+          <a:p>
+            <a:endParaRPr lang="en-US" dirty="0"/>
           </a:p>
           <a:p>
             <a:r>
               <a:rPr lang="en-US" dirty="0"/>
-              <a:t>We have started to do research in a different approach for simplifying HPC algorithm design.</a:t>
-            </a:r>
-          </a:p>
-          <a:p>
-            <a:endParaRPr lang="en-US" dirty="0"/>
-          </a:p>
-          <a:p>
-            <a:pPr marL="0" marR="0" lvl="0" indent="0" algn="l" defTabSz="914400" rtl="0" eaLnBrk="1" fontAlgn="auto" latinLnBrk="0" hangingPunct="1">
-              <a:lnSpc>
-                <a:spcPct val="100000"/>
-              </a:lnSpc>
-              <a:spcBef>
-                <a:spcPts val="0"/>
-              </a:spcBef>
-              <a:spcAft>
-                <a:spcPts val="0"/>
-              </a:spcAft>
-              <a:buClrTx/>
-              <a:buSzTx/>
-              <a:buFontTx/>
-              <a:buNone/>
-              <a:tabLst/>
-              <a:defRPr/>
-            </a:pPr>
-            <a:r>
-              <a:rPr lang="en-US" dirty="0"/>
-              <a:t>This work reacts to the recent introduction of LLM models to the area of software design.</a:t>
-            </a:r>
-          </a:p>
-          <a:p>
-            <a:pPr marL="0" marR="0" lvl="0" indent="0" algn="l" defTabSz="914400" rtl="0" eaLnBrk="1" fontAlgn="auto" latinLnBrk="0" hangingPunct="1">
-              <a:lnSpc>
-                <a:spcPct val="100000"/>
-              </a:lnSpc>
-              <a:spcBef>
-                <a:spcPts val="0"/>
-              </a:spcBef>
-              <a:spcAft>
-                <a:spcPts val="0"/>
-              </a:spcAft>
-              <a:buClrTx/>
-              <a:buSzTx/>
-              <a:buFontTx/>
-              <a:buNone/>
-              <a:tabLst/>
-              <a:defRPr/>
-            </a:pPr>
-            <a:r>
-              <a:rPr lang="en-US" dirty="0"/>
-              <a:t>At the time of the beginning of our research in this area, LLM models were capable of implementing simple algorithms (like data visualization, simple scripting, </a:t>
-            </a:r>
-            <a:r>
-              <a:rPr lang="en-US" dirty="0" err="1"/>
-              <a:t>etc</a:t>
-            </a:r>
-            <a:r>
-              <a:rPr lang="en-US" dirty="0"/>
-              <a:t>),</a:t>
-            </a:r>
-          </a:p>
-          <a:p>
-            <a:pPr marL="0" marR="0" lvl="0" indent="0" algn="l" defTabSz="914400" rtl="0" eaLnBrk="1" fontAlgn="auto" latinLnBrk="0" hangingPunct="1">
-              <a:lnSpc>
-                <a:spcPct val="100000"/>
-              </a:lnSpc>
-              <a:spcBef>
-                <a:spcPts val="0"/>
-              </a:spcBef>
-              <a:spcAft>
-                <a:spcPts val="0"/>
-              </a:spcAft>
-              <a:buClrTx/>
-              <a:buSzTx/>
-              <a:buFontTx/>
-              <a:buNone/>
-              <a:tabLst/>
-              <a:defRPr/>
-            </a:pPr>
-            <a:r>
-              <a:rPr lang="en-US" dirty="0"/>
-              <a:t>But not yet that competent at making more high-level design decisions for efficient computation, especially in parallel algorithms.</a:t>
-            </a:r>
-          </a:p>
-          <a:p>
-            <a:pPr marL="0" marR="0" lvl="0" indent="0" algn="l" defTabSz="914400" rtl="0" eaLnBrk="1" fontAlgn="auto" latinLnBrk="0" hangingPunct="1">
-              <a:lnSpc>
-                <a:spcPct val="100000"/>
-              </a:lnSpc>
-              <a:spcBef>
-                <a:spcPts val="0"/>
-              </a:spcBef>
-              <a:spcAft>
-                <a:spcPts val="0"/>
-              </a:spcAft>
-              <a:buClrTx/>
-              <a:buSzTx/>
-              <a:buFontTx/>
-              <a:buNone/>
-              <a:tabLst/>
-              <a:defRPr/>
-            </a:pPr>
-            <a:endParaRPr lang="en-US" dirty="0"/>
-          </a:p>
-          <a:p>
-            <a:pPr marL="0" marR="0" lvl="0" indent="0" algn="l" defTabSz="914400" rtl="0" eaLnBrk="1" fontAlgn="auto" latinLnBrk="0" hangingPunct="1">
-              <a:lnSpc>
-                <a:spcPct val="100000"/>
-              </a:lnSpc>
-              <a:spcBef>
-                <a:spcPts val="0"/>
-              </a:spcBef>
-              <a:spcAft>
-                <a:spcPts val="0"/>
-              </a:spcAft>
-              <a:buClrTx/>
-              <a:buSzTx/>
-              <a:buFontTx/>
-              <a:buNone/>
-              <a:tabLst/>
-              <a:defRPr/>
-            </a:pPr>
-            <a:r>
-              <a:rPr lang="en-US" dirty="0"/>
-              <a:t>Therefore, our research has focused on identifying what helps LLMs generate better code and what does not.</a:t>
+              <a:t>But we can make the development even simpler and more automatic!</a:t>
             </a:r>
           </a:p>
         </p:txBody>
@@ -2159,7 +2134,7 @@
     </p:spTree>
     <p:extLst>
       <p:ext uri="{BB962C8B-B14F-4D97-AF65-F5344CB8AC3E}">
-        <p14:creationId xmlns:p14="http://schemas.microsoft.com/office/powerpoint/2010/main" val="3351236279"/>
+        <p14:creationId xmlns:p14="http://schemas.microsoft.com/office/powerpoint/2010/main" val="1243571906"/>
       </p:ext>
     </p:extLst>
   </p:cSld>
@@ -2370,7 +2345,7 @@
           <a:p>
             <a:r>
               <a:rPr lang="en-US" dirty="0"/>
-              <a:t>(key idea: tutoring; what is it?)</a:t>
+              <a:t>(key idea: we’ve left abstractions to help LLMs generate better para code)</a:t>
             </a:r>
           </a:p>
           <a:p>
@@ -2379,23 +2354,136 @@
           <a:p>
             <a:r>
               <a:rPr lang="en-US" dirty="0"/>
-              <a:t>In our first work in this area, we focused on CUDA code generation, which was one of the challenging areas for the contemporary LLMs; more specifically,</a:t>
-            </a:r>
-            <a:br>
+              <a:t>After extending our earlier work to cover distributed computing as well and adapting it for a specific domain,</a:t>
+            </a:r>
+          </a:p>
+          <a:p>
+            <a:r>
               <a:rPr lang="en-US" dirty="0"/>
-            </a:br>
+              <a:t>We have started to do research in a different approach for simplifying HPC algorithm design.</a:t>
+            </a:r>
+          </a:p>
+          <a:p>
+            <a:endParaRPr lang="en-US" dirty="0"/>
+          </a:p>
+          <a:p>
+            <a:pPr marL="0" marR="0" lvl="0" indent="0" algn="l" defTabSz="914400" rtl="0" eaLnBrk="1" fontAlgn="auto" latinLnBrk="0" hangingPunct="1">
+              <a:lnSpc>
+                <a:spcPct val="100000"/>
+              </a:lnSpc>
+              <a:spcBef>
+                <a:spcPts val="0"/>
+              </a:spcBef>
+              <a:spcAft>
+                <a:spcPts val="0"/>
+              </a:spcAft>
+              <a:buClrTx/>
+              <a:buSzTx/>
+              <a:buFontTx/>
+              <a:buNone/>
+              <a:tabLst/>
+              <a:defRPr/>
+            </a:pPr>
             <a:r>
               <a:rPr lang="en-US" dirty="0"/>
-              <a:t>we studied whether adding increasingly more detailed high-level design hints or outright dictating some design decisions significantly helps LLMs generate better code</a:t>
-            </a:r>
-          </a:p>
-          <a:p>
+              <a:t>This work reacts to the recent introduction of LLM models to the area of software design.</a:t>
+            </a:r>
+          </a:p>
+          <a:p>
+            <a:pPr marL="0" marR="0" lvl="0" indent="0" algn="l" defTabSz="914400" rtl="0" eaLnBrk="1" fontAlgn="auto" latinLnBrk="0" hangingPunct="1">
+              <a:lnSpc>
+                <a:spcPct val="100000"/>
+              </a:lnSpc>
+              <a:spcBef>
+                <a:spcPts val="0"/>
+              </a:spcBef>
+              <a:spcAft>
+                <a:spcPts val="0"/>
+              </a:spcAft>
+              <a:buClrTx/>
+              <a:buSzTx/>
+              <a:buFontTx/>
+              <a:buNone/>
+              <a:tabLst/>
+              <a:defRPr/>
+            </a:pPr>
+            <a:r>
+              <a:rPr lang="en-US" dirty="0"/>
+              <a:t>At the time of the beginning of our research in this area, LLM models were capable of implementing simple algorithms (like data visualization, simple scripting, </a:t>
+            </a:r>
+            <a:r>
+              <a:rPr lang="en-US" dirty="0" err="1"/>
+              <a:t>etc</a:t>
+            </a:r>
+            <a:r>
+              <a:rPr lang="en-US" dirty="0"/>
+              <a:t>),</a:t>
+            </a:r>
+          </a:p>
+          <a:p>
+            <a:pPr marL="0" marR="0" lvl="0" indent="0" algn="l" defTabSz="914400" rtl="0" eaLnBrk="1" fontAlgn="auto" latinLnBrk="0" hangingPunct="1">
+              <a:lnSpc>
+                <a:spcPct val="100000"/>
+              </a:lnSpc>
+              <a:spcBef>
+                <a:spcPts val="0"/>
+              </a:spcBef>
+              <a:spcAft>
+                <a:spcPts val="0"/>
+              </a:spcAft>
+              <a:buClrTx/>
+              <a:buSzTx/>
+              <a:buFontTx/>
+              <a:buNone/>
+              <a:tabLst/>
+              <a:defRPr/>
+            </a:pPr>
+            <a:r>
+              <a:rPr lang="en-US" dirty="0"/>
+              <a:t>But not yet that competent at making more high-level design decisions for efficient computation, especially in parallel algorithms.</a:t>
+            </a:r>
+          </a:p>
+          <a:p>
+            <a:pPr marL="0" marR="0" lvl="0" indent="0" algn="l" defTabSz="914400" rtl="0" eaLnBrk="1" fontAlgn="auto" latinLnBrk="0" hangingPunct="1">
+              <a:lnSpc>
+                <a:spcPct val="100000"/>
+              </a:lnSpc>
+              <a:spcBef>
+                <a:spcPts val="0"/>
+              </a:spcBef>
+              <a:spcAft>
+                <a:spcPts val="0"/>
+              </a:spcAft>
+              <a:buClrTx/>
+              <a:buSzTx/>
+              <a:buFontTx/>
+              <a:buNone/>
+              <a:tabLst/>
+              <a:defRPr/>
+            </a:pPr>
             <a:endParaRPr lang="en-US" dirty="0"/>
           </a:p>
           <a:p>
+            <a:pPr marL="0" marR="0" lvl="0" indent="0" algn="l" defTabSz="914400" rtl="0" eaLnBrk="1" fontAlgn="auto" latinLnBrk="0" hangingPunct="1">
+              <a:lnSpc>
+                <a:spcPct val="100000"/>
+              </a:lnSpc>
+              <a:spcBef>
+                <a:spcPts val="0"/>
+              </a:spcBef>
+              <a:spcAft>
+                <a:spcPts val="0"/>
+              </a:spcAft>
+              <a:buClrTx/>
+              <a:buSzTx/>
+              <a:buFontTx/>
+              <a:buNone/>
+              <a:tabLst/>
+              <a:defRPr/>
+            </a:pPr>
             <a:r>
               <a:rPr lang="en-US" dirty="0"/>
-              <a:t>(…)</a:t>
+              <a:t>Therefore, our research has focused on identifying what helps LLMs generate better code and what does not.</a:t>
             </a:r>
           </a:p>
         </p:txBody>
@@ -2418,6 +2506,118 @@
             <a:fld id="{FA8FD632-245B-410D-BCC4-8BF8D37AB67F}" type="slidenum">
               <a:rPr lang="en-US" smtClean="0"/>
               <a:t>20</a:t>
+            </a:fld>
+            <a:endParaRPr lang="en-US"/>
+          </a:p>
+        </p:txBody>
+      </p:sp>
+    </p:spTree>
+    <p:extLst>
+      <p:ext uri="{BB962C8B-B14F-4D97-AF65-F5344CB8AC3E}">
+        <p14:creationId xmlns:p14="http://schemas.microsoft.com/office/powerpoint/2010/main" val="3351236279"/>
+      </p:ext>
+    </p:extLst>
+  </p:cSld>
+  <p:clrMapOvr>
+    <a:masterClrMapping/>
+  </p:clrMapOvr>
+</p:notes>
+</file>
+
+<file path=ppt/notesSlides/notesSlide21.xml><?xml version="1.0" encoding="utf-8"?>
+<p:notes xmlns:a="http://schemas.openxmlformats.org/drawingml/2006/main" xmlns:r="http://schemas.openxmlformats.org/officeDocument/2006/relationships" xmlns:p="http://schemas.openxmlformats.org/presentationml/2006/main">
+  <p:cSld>
+    <p:spTree>
+      <p:nvGrpSpPr>
+        <p:cNvPr id="1" name=""/>
+        <p:cNvGrpSpPr/>
+        <p:nvPr/>
+      </p:nvGrpSpPr>
+      <p:grpSpPr>
+        <a:xfrm>
+          <a:off x="0" y="0"/>
+          <a:ext cx="0" cy="0"/>
+          <a:chOff x="0" y="0"/>
+          <a:chExt cx="0" cy="0"/>
+        </a:xfrm>
+      </p:grpSpPr>
+      <p:sp>
+        <p:nvSpPr>
+          <p:cNvPr id="2" name="Slide Image Placeholder 1"/>
+          <p:cNvSpPr>
+            <a:spLocks noGrp="1" noRot="1" noChangeAspect="1"/>
+          </p:cNvSpPr>
+          <p:nvPr>
+            <p:ph type="sldImg"/>
+          </p:nvPr>
+        </p:nvSpPr>
+        <p:spPr/>
+      </p:sp>
+      <p:sp>
+        <p:nvSpPr>
+          <p:cNvPr id="3" name="Notes Placeholder 2"/>
+          <p:cNvSpPr>
+            <a:spLocks noGrp="1"/>
+          </p:cNvSpPr>
+          <p:nvPr>
+            <p:ph type="body" idx="1"/>
+          </p:nvPr>
+        </p:nvSpPr>
+        <p:spPr/>
+        <p:txBody>
+          <a:bodyPr/>
+          <a:lstStyle/>
+          <a:p>
+            <a:r>
+              <a:rPr lang="en-US" dirty="0"/>
+              <a:t>(key idea: tutoring; what is it?)</a:t>
+            </a:r>
+          </a:p>
+          <a:p>
+            <a:endParaRPr lang="en-US" dirty="0"/>
+          </a:p>
+          <a:p>
+            <a:r>
+              <a:rPr lang="en-US" dirty="0"/>
+              <a:t>In our first work in this area, we focused on CUDA code generation, which was one of the challenging areas for the contemporary LLMs; more specifically,</a:t>
+            </a:r>
+            <a:br>
+              <a:rPr lang="en-US" dirty="0"/>
+            </a:br>
+            <a:r>
+              <a:rPr lang="en-US" dirty="0"/>
+              <a:t>we studied whether adding increasingly more detailed high-level design hints or outright dictating some design decisions significantly helps LLMs generate better code</a:t>
+            </a:r>
+          </a:p>
+          <a:p>
+            <a:endParaRPr lang="en-US" dirty="0"/>
+          </a:p>
+          <a:p>
+            <a:r>
+              <a:rPr lang="en-US" dirty="0"/>
+              <a:t>(…)</a:t>
+            </a:r>
+          </a:p>
+        </p:txBody>
+      </p:sp>
+      <p:sp>
+        <p:nvSpPr>
+          <p:cNvPr id="4" name="Slide Number Placeholder 3"/>
+          <p:cNvSpPr>
+            <a:spLocks noGrp="1"/>
+          </p:cNvSpPr>
+          <p:nvPr>
+            <p:ph type="sldNum" sz="quarter" idx="5"/>
+          </p:nvPr>
+        </p:nvSpPr>
+        <p:spPr/>
+        <p:txBody>
+          <a:bodyPr/>
+          <a:lstStyle/>
+          <a:p>
+            <a:fld id="{FA8FD632-245B-410D-BCC4-8BF8D37AB67F}" type="slidenum">
+              <a:rPr lang="en-US" smtClean="0"/>
+              <a:t>21</a:t>
             </a:fld>
             <a:endParaRPr lang="en-US"/>
           </a:p>
@@ -2436,7 +2636,7 @@
 </p:notes>
 </file>
 
-<file path=ppt/notesSlides/notesSlide21.xml><?xml version="1.0" encoding="utf-8"?>
+<file path=ppt/notesSlides/notesSlide22.xml><?xml version="1.0" encoding="utf-8"?>
 <p:notes xmlns:a="http://schemas.openxmlformats.org/drawingml/2006/main" xmlns:r="http://schemas.openxmlformats.org/officeDocument/2006/relationships" xmlns:p="http://schemas.openxmlformats.org/presentationml/2006/main">
   <p:cSld>
     <p:spTree>
@@ -2662,7 +2862,7 @@
           <a:p>
             <a:fld id="{FA8FD632-245B-410D-BCC4-8BF8D37AB67F}" type="slidenum">
               <a:rPr lang="en-US" smtClean="0"/>
-              <a:t>21</a:t>
+              <a:t>22</a:t>
             </a:fld>
             <a:endParaRPr lang="en-US"/>
           </a:p>
@@ -2681,7 +2881,7 @@
 </p:notes>
 </file>
 
-<file path=ppt/notesSlides/notesSlide22.xml><?xml version="1.0" encoding="utf-8"?>
+<file path=ppt/notesSlides/notesSlide23.xml><?xml version="1.0" encoding="utf-8"?>
 <p:notes xmlns:a="http://schemas.openxmlformats.org/drawingml/2006/main" xmlns:r="http://schemas.openxmlformats.org/officeDocument/2006/relationships" xmlns:p="http://schemas.openxmlformats.org/presentationml/2006/main">
   <p:cSld>
     <p:spTree>
@@ -2815,7 +3015,7 @@
           <a:p>
             <a:fld id="{FA8FD632-245B-410D-BCC4-8BF8D37AB67F}" type="slidenum">
               <a:rPr lang="en-US" smtClean="0"/>
-              <a:t>22</a:t>
+              <a:t>23</a:t>
             </a:fld>
             <a:endParaRPr lang="en-US"/>
           </a:p>
@@ -2834,7 +3034,7 @@
 </p:notes>
 </file>
 
-<file path=ppt/notesSlides/notesSlide23.xml><?xml version="1.0" encoding="utf-8"?>
+<file path=ppt/notesSlides/notesSlide24.xml><?xml version="1.0" encoding="utf-8"?>
 <p:notes xmlns:a="http://schemas.openxmlformats.org/drawingml/2006/main" xmlns:r="http://schemas.openxmlformats.org/officeDocument/2006/relationships" xmlns:p="http://schemas.openxmlformats.org/presentationml/2006/main">
   <p:cSld>
     <p:spTree>
@@ -2947,7 +3147,7 @@
           <a:p>
             <a:fld id="{FA8FD632-245B-410D-BCC4-8BF8D37AB67F}" type="slidenum">
               <a:rPr lang="en-US" smtClean="0"/>
-              <a:t>23</a:t>
+              <a:t>24</a:t>
             </a:fld>
             <a:endParaRPr lang="en-US"/>
           </a:p>
@@ -2957,127 +3157,6 @@
     <p:extLst>
       <p:ext uri="{BB962C8B-B14F-4D97-AF65-F5344CB8AC3E}">
         <p14:creationId xmlns:p14="http://schemas.microsoft.com/office/powerpoint/2010/main" val="2367210526"/>
-      </p:ext>
-    </p:extLst>
-  </p:cSld>
-  <p:clrMapOvr>
-    <a:masterClrMapping/>
-  </p:clrMapOvr>
-</p:notes>
-</file>
-
-<file path=ppt/notesSlides/notesSlide24.xml><?xml version="1.0" encoding="utf-8"?>
-<p:notes xmlns:a="http://schemas.openxmlformats.org/drawingml/2006/main" xmlns:r="http://schemas.openxmlformats.org/officeDocument/2006/relationships" xmlns:p="http://schemas.openxmlformats.org/presentationml/2006/main">
-  <p:cSld>
-    <p:spTree>
-      <p:nvGrpSpPr>
-        <p:cNvPr id="1" name=""/>
-        <p:cNvGrpSpPr/>
-        <p:nvPr/>
-      </p:nvGrpSpPr>
-      <p:grpSpPr>
-        <a:xfrm>
-          <a:off x="0" y="0"/>
-          <a:ext cx="0" cy="0"/>
-          <a:chOff x="0" y="0"/>
-          <a:chExt cx="0" cy="0"/>
-        </a:xfrm>
-      </p:grpSpPr>
-      <p:sp>
-        <p:nvSpPr>
-          <p:cNvPr id="2" name="Slide Image Placeholder 1"/>
-          <p:cNvSpPr>
-            <a:spLocks noGrp="1" noRot="1" noChangeAspect="1"/>
-          </p:cNvSpPr>
-          <p:nvPr>
-            <p:ph type="sldImg"/>
-          </p:nvPr>
-        </p:nvSpPr>
-        <p:spPr/>
-      </p:sp>
-      <p:sp>
-        <p:nvSpPr>
-          <p:cNvPr id="3" name="Notes Placeholder 2"/>
-          <p:cNvSpPr>
-            <a:spLocks noGrp="1"/>
-          </p:cNvSpPr>
-          <p:nvPr>
-            <p:ph type="body" idx="1"/>
-          </p:nvPr>
-        </p:nvSpPr>
-        <p:spPr/>
-        <p:txBody>
-          <a:bodyPr/>
-          <a:lstStyle/>
-          <a:p>
-            <a:r>
-              <a:rPr lang="en-US" dirty="0"/>
-              <a:t>(key idea: combining the two branches)</a:t>
-            </a:r>
-          </a:p>
-          <a:p>
-            <a:endParaRPr lang="en-US" dirty="0"/>
-          </a:p>
-          <a:p>
-            <a:r>
-              <a:rPr lang="en-US" dirty="0"/>
-              <a:t>Then, we have studied whether the earlier studied abstractions enabling layout- and traversal-agnostic design significantly improve the correctness and efficiency of the generated parallel code during optimization tasks.</a:t>
-            </a:r>
-          </a:p>
-          <a:p>
-            <a:endParaRPr lang="en-US" dirty="0"/>
-          </a:p>
-          <a:p>
-            <a:r>
-              <a:rPr lang="en-US" dirty="0"/>
-              <a:t>For that, we have compared 3 abstractions (Halide, Exo and </a:t>
-            </a:r>
-            <a:r>
-              <a:rPr lang="en-US" dirty="0" err="1"/>
-              <a:t>Noarr</a:t>
-            </a:r>
-            <a:r>
-              <a:rPr lang="en-US" dirty="0"/>
-              <a:t>) with different designs and principles as well as outputting pure C on the 30 algorithms from the </a:t>
-            </a:r>
-            <a:r>
-              <a:rPr lang="en-US" dirty="0" err="1"/>
-              <a:t>PolyBench</a:t>
-            </a:r>
-            <a:r>
-              <a:rPr lang="en-US" dirty="0"/>
-              <a:t>/C benchmark suite.</a:t>
-            </a:r>
-          </a:p>
-        </p:txBody>
-      </p:sp>
-      <p:sp>
-        <p:nvSpPr>
-          <p:cNvPr id="4" name="Slide Number Placeholder 3"/>
-          <p:cNvSpPr>
-            <a:spLocks noGrp="1"/>
-          </p:cNvSpPr>
-          <p:nvPr>
-            <p:ph type="sldNum" sz="quarter" idx="5"/>
-          </p:nvPr>
-        </p:nvSpPr>
-        <p:spPr/>
-        <p:txBody>
-          <a:bodyPr/>
-          <a:lstStyle/>
-          <a:p>
-            <a:fld id="{FA8FD632-245B-410D-BCC4-8BF8D37AB67F}" type="slidenum">
-              <a:rPr lang="en-US" smtClean="0"/>
-              <a:t>24</a:t>
-            </a:fld>
-            <a:endParaRPr lang="en-US"/>
-          </a:p>
-        </p:txBody>
-      </p:sp>
-    </p:spTree>
-    <p:extLst>
-      <p:ext uri="{BB962C8B-B14F-4D97-AF65-F5344CB8AC3E}">
-        <p14:creationId xmlns:p14="http://schemas.microsoft.com/office/powerpoint/2010/main" val="2436190103"/>
       </p:ext>
     </p:extLst>
   </p:cSld>
@@ -3131,132 +3210,79 @@
           <a:bodyPr/>
           <a:lstStyle/>
           <a:p>
-            <a:r>
-              <a:rPr lang="en-US" dirty="0"/>
-              <a:t>(key idea: we did a lot)</a:t>
-            </a:r>
-          </a:p>
-          <a:p>
-            <a:endParaRPr lang="en-US" dirty="0"/>
-          </a:p>
-          <a:p>
-            <a:r>
-              <a:rPr lang="en-US" dirty="0"/>
-              <a:t>In the experimental setup, we have used a multithreaded datacenter-grade computer, and to avoid many mistakes, the optimization pipeline consisted of two generation steps:</a:t>
-            </a:r>
-          </a:p>
-          <a:p>
-            <a:pPr marL="171450" indent="-171450">
-              <a:buFontTx/>
-              <a:buChar char="-"/>
-            </a:pPr>
-            <a:r>
-              <a:rPr lang="en-US" dirty="0"/>
-              <a:t>The first translated the baseline algorithm into the given abstraction</a:t>
-            </a:r>
-          </a:p>
-          <a:p>
-            <a:pPr marL="171450" indent="-171450">
-              <a:buFontTx/>
-              <a:buChar char="-"/>
-            </a:pPr>
-            <a:r>
-              <a:rPr lang="en-US" dirty="0"/>
-              <a:t>And the second one optimized the translation that best matched the baseline</a:t>
-            </a:r>
-          </a:p>
-          <a:p>
-            <a:pPr marL="0" indent="0">
+            <a:pPr marL="0" marR="0" lvl="0" indent="0" algn="l" defTabSz="914400" rtl="0" eaLnBrk="1" fontAlgn="auto" latinLnBrk="0" hangingPunct="1">
+              <a:lnSpc>
+                <a:spcPct val="100000"/>
+              </a:lnSpc>
+              <a:spcBef>
+                <a:spcPts val="0"/>
+              </a:spcBef>
+              <a:spcAft>
+                <a:spcPts val="0"/>
+              </a:spcAft>
+              <a:buClrTx/>
+              <a:buSzTx/>
               <a:buFontTx/>
               <a:buNone/>
+              <a:tabLst/>
+              <a:defRPr/>
             </a:pPr>
+            <a:r>
+              <a:rPr lang="en-US" dirty="0"/>
+              <a:t>(key idea: combining the two branches)</a:t>
+            </a:r>
+          </a:p>
+          <a:p>
             <a:endParaRPr lang="en-US" dirty="0"/>
           </a:p>
           <a:p>
-            <a:pPr marL="0" indent="0">
-              <a:buFontTx/>
-              <a:buNone/>
-            </a:pPr>
             <a:r>
               <a:rPr lang="en-US" dirty="0"/>
-              <a:t>The first step was followed up by an automated selection of the best generated translation.</a:t>
-            </a:r>
-          </a:p>
-          <a:p>
-            <a:pPr marL="0" indent="0">
-              <a:buFontTx/>
-              <a:buNone/>
-            </a:pPr>
+              <a:t>TODO MOTIVATION</a:t>
+            </a:r>
+          </a:p>
+          <a:p>
+            <a:endParaRPr lang="en-US" dirty="0"/>
+          </a:p>
+          <a:p>
             <a:r>
               <a:rPr lang="en-US" dirty="0"/>
-              <a:t>This helped to avoid implementations that didn’t correctly capture the semantics or the code, improving the overall correctness rate.</a:t>
-            </a:r>
-          </a:p>
-          <a:p>
-            <a:pPr marL="0" indent="0">
-              <a:buFontTx/>
-              <a:buNone/>
-            </a:pPr>
+              <a:t>OLD:</a:t>
+            </a:r>
+          </a:p>
+          <a:p>
+            <a:r>
+              <a:rPr lang="en-US" dirty="0"/>
+              <a:t>Then, we have studied whether the earlier studied abstractions enabling layout- and traversal-agnostic design significantly improve the correctness and efficiency of the generated parallel code during optimization tasks.</a:t>
+            </a:r>
+          </a:p>
+          <a:p>
             <a:endParaRPr lang="en-US" dirty="0"/>
           </a:p>
           <a:p>
-            <a:pPr marL="0" indent="0">
-              <a:buFontTx/>
-              <a:buNone/>
-            </a:pPr>
             <a:r>
               <a:rPr lang="en-US" dirty="0"/>
-              <a:t>In both generation steps, the prompts were accompanied by official developer guides and custom abstraction-specific hints for the given abstractions</a:t>
-            </a:r>
-            <a:br>
+              <a:t>For that, we have compared 3 abstractions (Halide, Exo and </a:t>
+            </a:r>
+            <a:r>
+              <a:rPr lang="en-US" dirty="0" err="1"/>
+              <a:t>Noarr</a:t>
+            </a:r>
+            <a:r>
               <a:rPr lang="en-US" dirty="0"/>
-            </a:br>
+              <a:t>) with different designs and principles as well as outputting pure C on the 30 algorithms from the </a:t>
+            </a:r>
+            <a:r>
+              <a:rPr lang="en-US" dirty="0" err="1"/>
+              <a:t>PolyBench</a:t>
+            </a:r>
             <a:r>
               <a:rPr lang="en-US" dirty="0"/>
-              <a:t>to give the LLM a good understanding how to use them, and the translation tasks were accompanied by one example of translating the algorithm to ensure that the translations follow the expected design.</a:t>
-            </a:r>
-          </a:p>
-          <a:p>
-            <a:pPr marL="0" indent="0">
-              <a:buFontTx/>
-              <a:buNone/>
-            </a:pPr>
+              <a:t>/C benchmark suite.</a:t>
+            </a:r>
+          </a:p>
+          <a:p>
             <a:endParaRPr lang="en-US" dirty="0"/>
-          </a:p>
-          <a:p>
-            <a:pPr marL="0" indent="0">
-              <a:buFontTx/>
-              <a:buNone/>
-            </a:pPr>
-            <a:r>
-              <a:rPr lang="en-US" dirty="0"/>
-              <a:t>Finally, we have also prepared multiple optimization prompts to compare the effect of abstraction choice with the effect of prompt specificity.</a:t>
-            </a:r>
-          </a:p>
-          <a:p>
-            <a:pPr marL="0" indent="0">
-              <a:buFontTx/>
-              <a:buNone/>
-            </a:pPr>
-            <a:endParaRPr lang="en-US" dirty="0"/>
-          </a:p>
-          <a:p>
-            <a:pPr marL="0" indent="0">
-              <a:buFontTx/>
-              <a:buNone/>
-            </a:pPr>
-            <a:r>
-              <a:rPr lang="en-US" dirty="0"/>
-              <a:t>With the 30 </a:t>
-            </a:r>
-            <a:r>
-              <a:rPr lang="en-US" dirty="0" err="1"/>
-              <a:t>polybench</a:t>
-            </a:r>
-            <a:r>
-              <a:rPr lang="en-US" dirty="0"/>
-              <a:t> algorithms, 4 different abstraction choices, and 4 prompting strategies, this gives almost 500 optimization experiments.</a:t>
-            </a:r>
           </a:p>
         </p:txBody>
       </p:sp>
@@ -3286,7 +3312,7 @@
     </p:spTree>
     <p:extLst>
       <p:ext uri="{BB962C8B-B14F-4D97-AF65-F5344CB8AC3E}">
-        <p14:creationId xmlns:p14="http://schemas.microsoft.com/office/powerpoint/2010/main" val="4284797405"/>
+        <p14:creationId xmlns:p14="http://schemas.microsoft.com/office/powerpoint/2010/main" val="304648477"/>
       </p:ext>
     </p:extLst>
   </p:cSld>
@@ -3342,56 +3368,129 @@
           <a:p>
             <a:r>
               <a:rPr lang="en-US" dirty="0"/>
-              <a:t>Together with increasing number of optimization attempts from 1to5 to account for LLM generation stochasticity,</a:t>
+              <a:t>(key idea: we did a lot)</a:t>
+            </a:r>
+          </a:p>
+          <a:p>
+            <a:endParaRPr lang="en-US" dirty="0"/>
+          </a:p>
+          <a:p>
+            <a:r>
+              <a:rPr lang="en-US" dirty="0"/>
+              <a:t>In the experimental setup, we have used a multithreaded datacenter-grade computer, and to avoid many mistakes, the optimization pipeline consisted of two generation steps:</a:t>
+            </a:r>
+          </a:p>
+          <a:p>
+            <a:pPr marL="171450" indent="-171450">
+              <a:buFontTx/>
+              <a:buChar char="-"/>
+            </a:pPr>
+            <a:r>
+              <a:rPr lang="en-US" dirty="0"/>
+              <a:t>The first translated the baseline algorithm into the given abstraction</a:t>
+            </a:r>
+          </a:p>
+          <a:p>
+            <a:pPr marL="171450" indent="-171450">
+              <a:buFontTx/>
+              <a:buChar char="-"/>
+            </a:pPr>
+            <a:r>
+              <a:rPr lang="en-US" dirty="0"/>
+              <a:t>And the second one optimized the translation that best matched the baseline</a:t>
+            </a:r>
+          </a:p>
+          <a:p>
+            <a:pPr marL="0" indent="0">
+              <a:buFontTx/>
+              <a:buNone/>
+            </a:pPr>
+            <a:endParaRPr lang="en-US" dirty="0"/>
+          </a:p>
+          <a:p>
+            <a:pPr marL="0" indent="0">
+              <a:buFontTx/>
+              <a:buNone/>
+            </a:pPr>
+            <a:r>
+              <a:rPr lang="en-US" dirty="0"/>
+              <a:t>The first step was followed up by an automated selection of the best generated translation.</a:t>
+            </a:r>
+          </a:p>
+          <a:p>
+            <a:pPr marL="0" indent="0">
+              <a:buFontTx/>
+              <a:buNone/>
+            </a:pPr>
+            <a:r>
+              <a:rPr lang="en-US" dirty="0"/>
+              <a:t>This helped to avoid implementations that didn’t correctly capture the semantics or the code, improving the overall correctness rate.</a:t>
+            </a:r>
+          </a:p>
+          <a:p>
+            <a:pPr marL="0" indent="0">
+              <a:buFontTx/>
+              <a:buNone/>
+            </a:pPr>
+            <a:endParaRPr lang="en-US" dirty="0"/>
+          </a:p>
+          <a:p>
+            <a:pPr marL="0" indent="0">
+              <a:buFontTx/>
+              <a:buNone/>
+            </a:pPr>
+            <a:r>
+              <a:rPr lang="en-US" dirty="0"/>
+              <a:t>In both generation steps, the prompts were accompanied by official developer guides and custom abstraction-specific hints for the given abstractions</a:t>
             </a:r>
             <a:br>
               <a:rPr lang="en-US" dirty="0"/>
             </a:br>
-            <a:br>
+            <a:r>
               <a:rPr lang="en-US" dirty="0"/>
-            </a:br>
+              <a:t>to give the LLM a good understanding how to use them, and the translation tasks were accompanied by one example of translating the algorithm to ensure that the translations follow the expected design.</a:t>
+            </a:r>
+          </a:p>
+          <a:p>
+            <a:pPr marL="0" indent="0">
+              <a:buFontTx/>
+              <a:buNone/>
+            </a:pPr>
+            <a:endParaRPr lang="en-US" dirty="0"/>
+          </a:p>
+          <a:p>
+            <a:pPr marL="0" indent="0">
+              <a:buFontTx/>
+              <a:buNone/>
+            </a:pPr>
             <a:r>
               <a:rPr lang="en-US" dirty="0"/>
-              <a:t>we observed that contemporary abstractions do not improve the performance nor the correctness of the generated code,</a:t>
-            </a:r>
-            <a:br>
+              <a:t>Finally, we have also prepared multiple optimization prompts to compare the effect of abstraction choice with the effect of prompt specificity.</a:t>
+            </a:r>
+          </a:p>
+          <a:p>
+            <a:pPr marL="0" indent="0">
+              <a:buFontTx/>
+              <a:buNone/>
+            </a:pPr>
+            <a:endParaRPr lang="en-US" dirty="0"/>
+          </a:p>
+          <a:p>
+            <a:pPr marL="0" indent="0">
+              <a:buFontTx/>
+              <a:buNone/>
+            </a:pPr>
+            <a:r>
               <a:rPr lang="en-US" dirty="0"/>
-            </a:br>
+              <a:t>With the 30 </a:t>
+            </a:r>
+            <a:r>
+              <a:rPr lang="en-US" dirty="0" err="1"/>
+              <a:t>polybench</a:t>
+            </a:r>
             <a:r>
               <a:rPr lang="en-US" dirty="0"/>
-              <a:t>as generating C code yielded both the best performance and correctness overall.</a:t>
-            </a:r>
-          </a:p>
-          <a:p>
-            <a:endParaRPr lang="en-US" dirty="0"/>
-          </a:p>
-          <a:p>
-            <a:r>
-              <a:rPr lang="en-US" dirty="0"/>
-              <a:t>We didn’t study just the specificity of the hints, but also their </a:t>
-            </a:r>
-            <a:r>
-              <a:rPr lang="en-US" dirty="0" err="1"/>
-              <a:t>aggresiveness</a:t>
-            </a:r>
-            <a:r>
-              <a:rPr lang="en-US" dirty="0"/>
-              <a:t> (more assertive hints yielding slightly better performance),</a:t>
-            </a:r>
-          </a:p>
-          <a:p>
-            <a:r>
-              <a:rPr lang="en-US" dirty="0"/>
-              <a:t>and an alternative approach that separated the optimization task into two steps, which didn’t improve correctness and significantly limited the performance.</a:t>
-            </a:r>
-          </a:p>
-          <a:p>
-            <a:endParaRPr lang="en-US" dirty="0"/>
-          </a:p>
-          <a:p>
-            <a:r>
-              <a:rPr lang="en-US" dirty="0"/>
-              <a:t>The conclusion of this work is that correct prompting strategy yields better results than using the abstractions for user-directed optimization.</a:t>
+              <a:t> algorithms, 4 different abstraction choices, and 4 prompting strategies, this gives almost 500 optimization experiments.</a:t>
             </a:r>
           </a:p>
         </p:txBody>
@@ -3422,7 +3521,7 @@
     </p:spTree>
     <p:extLst>
       <p:ext uri="{BB962C8B-B14F-4D97-AF65-F5344CB8AC3E}">
-        <p14:creationId xmlns:p14="http://schemas.microsoft.com/office/powerpoint/2010/main" val="2015766894"/>
+        <p14:creationId xmlns:p14="http://schemas.microsoft.com/office/powerpoint/2010/main" val="4284797405"/>
       </p:ext>
     </p:extLst>
   </p:cSld>
@@ -3478,50 +3577,56 @@
           <a:p>
             <a:r>
               <a:rPr lang="en-US" dirty="0"/>
-              <a:t>In this part of this research, we have shown that prompting specificity improves performance,</a:t>
+              <a:t>Together with increasing number of optimization attempts from 1to5 to account for LLM generation stochasticity,</a:t>
             </a:r>
             <a:br>
               <a:rPr lang="en-US" dirty="0"/>
             </a:br>
-            <a:r>
-              <a:rPr lang="en-US" dirty="0"/>
-              <a:t>and further hints can improve output quality if the algorithm is challenging for the LLM,</a:t>
-            </a:r>
-          </a:p>
-          <a:p>
-            <a:r>
-              <a:rPr lang="en-US" dirty="0"/>
-              <a:t>But the contemporary abstractions do not help.</a:t>
-            </a:r>
-          </a:p>
-          <a:p>
-            <a:endParaRPr lang="en-US" dirty="0"/>
-          </a:p>
-          <a:p>
-            <a:r>
-              <a:rPr lang="en-US" dirty="0"/>
-              <a:t>Future research may re-evaluate our approach to agentic LLMs that can automatically gather feedback</a:t>
-            </a:r>
             <a:br>
               <a:rPr lang="en-US" dirty="0"/>
             </a:br>
             <a:r>
               <a:rPr lang="en-US" dirty="0"/>
-              <a:t>(from compiling and running the generated implementations) and they can collect the necessary context,</a:t>
-            </a:r>
-          </a:p>
-          <a:p>
-            <a:r>
+              <a:t>we observed that contemporary abstractions do not improve the performance nor the correctness of the generated code,</a:t>
+            </a:r>
+            <a:br>
               <a:rPr lang="en-US" dirty="0"/>
-              <a:t>So they can, </a:t>
-            </a:r>
-            <a:r>
-              <a:rPr lang="en-US"/>
-              <a:t>for example, </a:t>
-            </a:r>
+            </a:br>
             <a:r>
               <a:rPr lang="en-US" dirty="0"/>
-              <a:t>look up how to use specific abstractions or what algorithm designs to use.</a:t>
+              <a:t>as generating C code yielded both the best performance and correctness overall.</a:t>
+            </a:r>
+          </a:p>
+          <a:p>
+            <a:endParaRPr lang="en-US" dirty="0"/>
+          </a:p>
+          <a:p>
+            <a:r>
+              <a:rPr lang="en-US" dirty="0"/>
+              <a:t>We didn’t study just the specificity of the hints, but also their </a:t>
+            </a:r>
+            <a:r>
+              <a:rPr lang="en-US" dirty="0" err="1"/>
+              <a:t>aggresiveness</a:t>
+            </a:r>
+            <a:r>
+              <a:rPr lang="en-US" dirty="0"/>
+              <a:t> (more assertive hints yielding slightly better performance),</a:t>
+            </a:r>
+          </a:p>
+          <a:p>
+            <a:r>
+              <a:rPr lang="en-US" dirty="0"/>
+              <a:t>and an alternative approach that separated the optimization task into two steps, which didn’t improve correctness and significantly limited the performance.</a:t>
+            </a:r>
+          </a:p>
+          <a:p>
+            <a:endParaRPr lang="en-US" dirty="0"/>
+          </a:p>
+          <a:p>
+            <a:r>
+              <a:rPr lang="en-US" dirty="0"/>
+              <a:t>The conclusion of this work is that correct prompting strategy yields better results than using the abstractions for user-directed optimization.</a:t>
             </a:r>
           </a:p>
         </p:txBody>
@@ -3552,7 +3657,7 @@
     </p:spTree>
     <p:extLst>
       <p:ext uri="{BB962C8B-B14F-4D97-AF65-F5344CB8AC3E}">
-        <p14:creationId xmlns:p14="http://schemas.microsoft.com/office/powerpoint/2010/main" val="3665500441"/>
+        <p14:creationId xmlns:p14="http://schemas.microsoft.com/office/powerpoint/2010/main" val="2015766894"/>
       </p:ext>
     </p:extLst>
   </p:cSld>
@@ -3606,7 +3711,53 @@
           <a:bodyPr/>
           <a:lstStyle/>
           <a:p>
+            <a:r>
+              <a:rPr lang="en-US" dirty="0"/>
+              <a:t>In this part of this research, we have shown that prompting specificity improves performance,</a:t>
+            </a:r>
+            <a:br>
+              <a:rPr lang="en-US" dirty="0"/>
+            </a:br>
+            <a:r>
+              <a:rPr lang="en-US" dirty="0"/>
+              <a:t>and further hints can improve output quality if the algorithm is challenging for the LLM,</a:t>
+            </a:r>
+          </a:p>
+          <a:p>
+            <a:r>
+              <a:rPr lang="en-US" dirty="0"/>
+              <a:t>But the contemporary abstractions do not help.</a:t>
+            </a:r>
+          </a:p>
+          <a:p>
             <a:endParaRPr lang="en-US" dirty="0"/>
+          </a:p>
+          <a:p>
+            <a:r>
+              <a:rPr lang="en-US" dirty="0"/>
+              <a:t>Future research may re-evaluate our approach to agentic LLMs that can automatically gather feedback</a:t>
+            </a:r>
+            <a:br>
+              <a:rPr lang="en-US" dirty="0"/>
+            </a:br>
+            <a:r>
+              <a:rPr lang="en-US" dirty="0"/>
+              <a:t>(from compiling and running the generated implementations) and they can collect the necessary context,</a:t>
+            </a:r>
+          </a:p>
+          <a:p>
+            <a:r>
+              <a:rPr lang="en-US" dirty="0"/>
+              <a:t>So they can, </a:t>
+            </a:r>
+            <a:r>
+              <a:rPr lang="en-US"/>
+              <a:t>for example, </a:t>
+            </a:r>
+            <a:r>
+              <a:rPr lang="en-US" dirty="0"/>
+              <a:t>look up how to use specific abstractions or what algorithm designs to use.</a:t>
+            </a:r>
           </a:p>
         </p:txBody>
       </p:sp>
@@ -3628,6 +3779,90 @@
             <a:fld id="{FA8FD632-245B-410D-BCC4-8BF8D37AB67F}" type="slidenum">
               <a:rPr lang="en-US" smtClean="0"/>
               <a:t>28</a:t>
+            </a:fld>
+            <a:endParaRPr lang="en-US"/>
+          </a:p>
+        </p:txBody>
+      </p:sp>
+    </p:spTree>
+    <p:extLst>
+      <p:ext uri="{BB962C8B-B14F-4D97-AF65-F5344CB8AC3E}">
+        <p14:creationId xmlns:p14="http://schemas.microsoft.com/office/powerpoint/2010/main" val="3665500441"/>
+      </p:ext>
+    </p:extLst>
+  </p:cSld>
+  <p:clrMapOvr>
+    <a:masterClrMapping/>
+  </p:clrMapOvr>
+</p:notes>
+</file>
+
+<file path=ppt/notesSlides/notesSlide29.xml><?xml version="1.0" encoding="utf-8"?>
+<p:notes xmlns:a="http://schemas.openxmlformats.org/drawingml/2006/main" xmlns:r="http://schemas.openxmlformats.org/officeDocument/2006/relationships" xmlns:p="http://schemas.openxmlformats.org/presentationml/2006/main">
+  <p:cSld>
+    <p:spTree>
+      <p:nvGrpSpPr>
+        <p:cNvPr id="1" name=""/>
+        <p:cNvGrpSpPr/>
+        <p:nvPr/>
+      </p:nvGrpSpPr>
+      <p:grpSpPr>
+        <a:xfrm>
+          <a:off x="0" y="0"/>
+          <a:ext cx="0" cy="0"/>
+          <a:chOff x="0" y="0"/>
+          <a:chExt cx="0" cy="0"/>
+        </a:xfrm>
+      </p:grpSpPr>
+      <p:sp>
+        <p:nvSpPr>
+          <p:cNvPr id="2" name="Slide Image Placeholder 1"/>
+          <p:cNvSpPr>
+            <a:spLocks noGrp="1" noRot="1" noChangeAspect="1"/>
+          </p:cNvSpPr>
+          <p:nvPr>
+            <p:ph type="sldImg"/>
+          </p:nvPr>
+        </p:nvSpPr>
+        <p:spPr/>
+      </p:sp>
+      <p:sp>
+        <p:nvSpPr>
+          <p:cNvPr id="3" name="Notes Placeholder 2"/>
+          <p:cNvSpPr>
+            <a:spLocks noGrp="1"/>
+          </p:cNvSpPr>
+          <p:nvPr>
+            <p:ph type="body" idx="1"/>
+          </p:nvPr>
+        </p:nvSpPr>
+        <p:spPr/>
+        <p:txBody>
+          <a:bodyPr/>
+          <a:lstStyle/>
+          <a:p>
+            <a:endParaRPr lang="en-US" dirty="0"/>
+          </a:p>
+        </p:txBody>
+      </p:sp>
+      <p:sp>
+        <p:nvSpPr>
+          <p:cNvPr id="4" name="Slide Number Placeholder 3"/>
+          <p:cNvSpPr>
+            <a:spLocks noGrp="1"/>
+          </p:cNvSpPr>
+          <p:nvPr>
+            <p:ph type="sldNum" sz="quarter" idx="5"/>
+          </p:nvPr>
+        </p:nvSpPr>
+        <p:spPr/>
+        <p:txBody>
+          <a:bodyPr/>
+          <a:lstStyle/>
+          <a:p>
+            <a:fld id="{FA8FD632-245B-410D-BCC4-8BF8D37AB67F}" type="slidenum">
+              <a:rPr lang="en-US" smtClean="0"/>
+              <a:t>29</a:t>
             </a:fld>
             <a:endParaRPr lang="en-US"/>
           </a:p>
@@ -8820,14 +9055,6 @@
 <file path=ppt/slides/slide11.xml><?xml version="1.0" encoding="utf-8"?>
 <p:sld xmlns:a="http://schemas.openxmlformats.org/drawingml/2006/main" xmlns:r="http://schemas.openxmlformats.org/officeDocument/2006/relationships" xmlns:p="http://schemas.openxmlformats.org/presentationml/2006/main">
   <p:cSld>
-    <p:bg>
-      <p:bgPr>
-        <a:solidFill>
-          <a:srgbClr val="FFFF00"/>
-        </a:solidFill>
-        <a:effectLst/>
-      </p:bgPr>
-    </p:bg>
     <p:spTree>
       <p:nvGrpSpPr>
         <p:cNvPr id="1" name="">
@@ -12009,14 +12236,6 @@
 <file path=ppt/slides/slide14.xml><?xml version="1.0" encoding="utf-8"?>
 <p:sld xmlns:a="http://schemas.openxmlformats.org/drawingml/2006/main" xmlns:r="http://schemas.openxmlformats.org/officeDocument/2006/relationships" xmlns:p="http://schemas.openxmlformats.org/presentationml/2006/main">
   <p:cSld>
-    <p:bg>
-      <p:bgPr>
-        <a:solidFill>
-          <a:srgbClr val="FFFF00"/>
-        </a:solidFill>
-        <a:effectLst/>
-      </p:bgPr>
-    </p:bg>
     <p:spTree>
       <p:nvGrpSpPr>
         <p:cNvPr id="1" name=""/>
@@ -12193,14 +12412,6 @@
 <file path=ppt/slides/slide15.xml><?xml version="1.0" encoding="utf-8"?>
 <p:sld xmlns:a="http://schemas.openxmlformats.org/drawingml/2006/main" xmlns:r="http://schemas.openxmlformats.org/officeDocument/2006/relationships" xmlns:p="http://schemas.openxmlformats.org/presentationml/2006/main">
   <p:cSld>
-    <p:bg>
-      <p:bgPr>
-        <a:solidFill>
-          <a:srgbClr val="FFFF00"/>
-        </a:solidFill>
-        <a:effectLst/>
-      </p:bgPr>
-    </p:bg>
     <p:spTree>
       <p:nvGrpSpPr>
         <p:cNvPr id="1" name=""/>
@@ -12238,7 +12449,7 @@
           <a:p>
             <a:r>
               <a:rPr lang="en-US" noProof="0" dirty="0"/>
-              <a:t>Cellular Automata abstractions</a:t>
+              <a:t>Stencil computation abstractions</a:t>
             </a:r>
           </a:p>
         </p:txBody>
@@ -12303,10 +12514,10 @@
       </p:sp>
       <p:pic>
         <p:nvPicPr>
-          <p:cNvPr id="8" name="Graphic 7">
-            <a:extLst>
-              <a:ext uri="{FF2B5EF4-FFF2-40B4-BE49-F238E27FC236}">
-                <a16:creationId xmlns:a16="http://schemas.microsoft.com/office/drawing/2014/main" id="{98E1269E-84AC-DEE2-DB4E-44747500089C}"/>
+          <p:cNvPr id="7" name="Graphic 6" descr="Rain with solid fill">
+            <a:extLst>
+              <a:ext uri="{FF2B5EF4-FFF2-40B4-BE49-F238E27FC236}">
+                <a16:creationId xmlns:a16="http://schemas.microsoft.com/office/drawing/2014/main" id="{C82052E5-5676-1353-12D7-18B167CB2741}"/>
               </a:ext>
             </a:extLst>
           </p:cNvPr>
@@ -12329,8 +12540,8 @@
         </p:blipFill>
         <p:spPr>
           <a:xfrm>
-            <a:off x="1147156" y="2248708"/>
-            <a:ext cx="1375954" cy="1375954"/>
+            <a:off x="3417496" y="1428852"/>
+            <a:ext cx="732656" cy="732656"/>
           </a:xfrm>
           <a:prstGeom prst="rect">
             <a:avLst/>
@@ -12339,10 +12550,10 @@
       </p:pic>
       <p:sp>
         <p:nvSpPr>
-          <p:cNvPr id="31" name="TextBox 30">
-            <a:extLst>
-              <a:ext uri="{FF2B5EF4-FFF2-40B4-BE49-F238E27FC236}">
-                <a16:creationId xmlns:a16="http://schemas.microsoft.com/office/drawing/2014/main" id="{7F9EF83F-D6D0-6A28-58E5-56F7C20423D4}"/>
+          <p:cNvPr id="9" name="TextBox 8">
+            <a:extLst>
+              <a:ext uri="{FF2B5EF4-FFF2-40B4-BE49-F238E27FC236}">
+                <a16:creationId xmlns:a16="http://schemas.microsoft.com/office/drawing/2014/main" id="{9D4FD725-88BE-61BC-EA94-E5BEA6E7C2CD}"/>
               </a:ext>
             </a:extLst>
           </p:cNvPr>
@@ -12351,7 +12562,757 @@
         </p:nvSpPr>
         <p:spPr>
           <a:xfrm>
-            <a:off x="167523" y="3732911"/>
+            <a:off x="4083685" y="1653739"/>
+            <a:ext cx="2089290" cy="369332"/>
+          </a:xfrm>
+          <a:prstGeom prst="rect">
+            <a:avLst/>
+          </a:prstGeom>
+          <a:noFill/>
+        </p:spPr>
+        <p:txBody>
+          <a:bodyPr wrap="none" rtlCol="0">
+            <a:spAutoFit/>
+          </a:bodyPr>
+          <a:lstStyle/>
+          <a:p>
+            <a:r>
+              <a:rPr lang="en-US" dirty="0"/>
+              <a:t>Weather prediction</a:t>
+            </a:r>
+          </a:p>
+        </p:txBody>
+      </p:sp>
+      <p:pic>
+        <p:nvPicPr>
+          <p:cNvPr id="11" name="Graphic 10" descr="Images with solid fill">
+            <a:extLst>
+              <a:ext uri="{FF2B5EF4-FFF2-40B4-BE49-F238E27FC236}">
+                <a16:creationId xmlns:a16="http://schemas.microsoft.com/office/drawing/2014/main" id="{BCB8AB1E-4038-D3A7-C93F-C113F4A99490}"/>
+              </a:ext>
+            </a:extLst>
+          </p:cNvPr>
+          <p:cNvPicPr>
+            <a:picLocks noChangeAspect="1"/>
+          </p:cNvPicPr>
+          <p:nvPr/>
+        </p:nvPicPr>
+        <p:blipFill>
+          <a:blip>
+            <a:extLst>
+              <a:ext uri="{96DAC541-7B7A-43D3-8B79-37D633B846F1}">
+                <asvg:svgBlip xmlns:asvg="http://schemas.microsoft.com/office/drawing/2016/SVG/main" r:embed="rId4"/>
+              </a:ext>
+            </a:extLst>
+          </a:blip>
+          <a:stretch>
+            <a:fillRect/>
+          </a:stretch>
+        </p:blipFill>
+        <p:spPr>
+          <a:xfrm>
+            <a:off x="6373769" y="1459455"/>
+            <a:ext cx="732656" cy="732656"/>
+          </a:xfrm>
+          <a:prstGeom prst="rect">
+            <a:avLst/>
+          </a:prstGeom>
+        </p:spPr>
+      </p:pic>
+      <p:sp>
+        <p:nvSpPr>
+          <p:cNvPr id="12" name="TextBox 11">
+            <a:extLst>
+              <a:ext uri="{FF2B5EF4-FFF2-40B4-BE49-F238E27FC236}">
+                <a16:creationId xmlns:a16="http://schemas.microsoft.com/office/drawing/2014/main" id="{FDC41653-37C0-2B80-EE45-53468F84FBC7}"/>
+              </a:ext>
+            </a:extLst>
+          </p:cNvPr>
+          <p:cNvSpPr txBox="1"/>
+          <p:nvPr/>
+        </p:nvSpPr>
+        <p:spPr>
+          <a:xfrm>
+            <a:off x="7036845" y="1641117"/>
+            <a:ext cx="1935145" cy="369332"/>
+          </a:xfrm>
+          <a:prstGeom prst="rect">
+            <a:avLst/>
+          </a:prstGeom>
+          <a:noFill/>
+        </p:spPr>
+        <p:txBody>
+          <a:bodyPr wrap="none" rtlCol="0">
+            <a:spAutoFit/>
+          </a:bodyPr>
+          <a:lstStyle/>
+          <a:p>
+            <a:r>
+              <a:rPr lang="en-US" dirty="0"/>
+              <a:t>Image processing</a:t>
+            </a:r>
+          </a:p>
+        </p:txBody>
+      </p:sp>
+      <p:sp>
+        <p:nvSpPr>
+          <p:cNvPr id="17" name="TextBox 16">
+            <a:extLst>
+              <a:ext uri="{FF2B5EF4-FFF2-40B4-BE49-F238E27FC236}">
+                <a16:creationId xmlns:a16="http://schemas.microsoft.com/office/drawing/2014/main" id="{EDBA9A01-C547-889B-493B-188DC700AFAE}"/>
+              </a:ext>
+            </a:extLst>
+          </p:cNvPr>
+          <p:cNvSpPr txBox="1"/>
+          <p:nvPr/>
+        </p:nvSpPr>
+        <p:spPr>
+          <a:xfrm>
+            <a:off x="4748692" y="2585231"/>
+            <a:ext cx="2934778" cy="369332"/>
+          </a:xfrm>
+          <a:prstGeom prst="rect">
+            <a:avLst/>
+          </a:prstGeom>
+          <a:noFill/>
+        </p:spPr>
+        <p:txBody>
+          <a:bodyPr wrap="none" rtlCol="0">
+            <a:spAutoFit/>
+          </a:bodyPr>
+          <a:lstStyle/>
+          <a:p>
+            <a:r>
+              <a:rPr lang="en-US" dirty="0"/>
+              <a:t>Example of a 4-point stencil</a:t>
+            </a:r>
+          </a:p>
+        </p:txBody>
+      </p:sp>
+      <p:pic>
+        <p:nvPicPr>
+          <p:cNvPr id="18" name="Picture 17">
+            <a:extLst>
+              <a:ext uri="{FF2B5EF4-FFF2-40B4-BE49-F238E27FC236}">
+                <a16:creationId xmlns:a16="http://schemas.microsoft.com/office/drawing/2014/main" id="{9A97F5A2-4CA4-CAFF-A67E-E3B95DD9266D}"/>
+              </a:ext>
+            </a:extLst>
+          </p:cNvPr>
+          <p:cNvPicPr>
+            <a:picLocks noChangeAspect="1"/>
+          </p:cNvPicPr>
+          <p:nvPr/>
+        </p:nvPicPr>
+        <p:blipFill>
+          <a:blip r:embed="rId5"/>
+          <a:stretch>
+            <a:fillRect/>
+          </a:stretch>
+        </p:blipFill>
+        <p:spPr>
+          <a:xfrm>
+            <a:off x="5730706" y="2961728"/>
+            <a:ext cx="970750" cy="970750"/>
+          </a:xfrm>
+          <a:prstGeom prst="rect">
+            <a:avLst/>
+          </a:prstGeom>
+        </p:spPr>
+      </p:pic>
+      <mc:AlternateContent xmlns:mc="http://schemas.openxmlformats.org/markup-compatibility/2006">
+        <mc:Choice xmlns:a14="http://schemas.microsoft.com/office/drawing/2010/main" Requires="a14">
+          <p:sp>
+            <p:nvSpPr>
+              <p:cNvPr id="19" name="TextBox 18">
+                <a:extLst>
+                  <a:ext uri="{FF2B5EF4-FFF2-40B4-BE49-F238E27FC236}">
+                    <a16:creationId xmlns:a16="http://schemas.microsoft.com/office/drawing/2014/main" id="{7BF11FBE-6E66-AF47-90FB-A53F1CB69841}"/>
+                  </a:ext>
+                </a:extLst>
+              </p:cNvPr>
+              <p:cNvSpPr txBox="1"/>
+              <p:nvPr/>
+            </p:nvSpPr>
+            <p:spPr>
+              <a:xfrm>
+                <a:off x="2512745" y="3850171"/>
+                <a:ext cx="6677790" cy="369332"/>
+              </a:xfrm>
+              <a:prstGeom prst="rect">
+                <a:avLst/>
+              </a:prstGeom>
+              <a:noFill/>
+            </p:spPr>
+            <p:txBody>
+              <a:bodyPr wrap="none" rtlCol="0">
+                <a:spAutoFit/>
+              </a:bodyPr>
+              <a:lstStyle/>
+              <a:p>
+                <a14:m>
+                  <m:oMathPara xmlns:m="http://schemas.openxmlformats.org/officeDocument/2006/math">
+                    <m:oMath>
+                      <m:sSub>
+                        <m:sSubPr>
+                          <m:ctrlPr>
+                            <a:rPr lang="en-US" b="0" i="1" smtClean="0">
+                              <a:latin typeface="Cambria Math" panose="02040503050406030204" pitchFamily="18" charset="0"/>
+                            </a:rPr>
+                          </m:ctrlPr>
+                        </m:sSubPr>
+                        <m:e>
+                          <m:r>
+                            <a:rPr lang="en-US" b="0" i="1" smtClean="0">
+                              <a:latin typeface="Cambria Math" panose="02040503050406030204" pitchFamily="18" charset="0"/>
+                            </a:rPr>
+                            <m:t>𝐶</m:t>
+                          </m:r>
+                        </m:e>
+                        <m:sub>
+                          <m:r>
+                            <a:rPr lang="en-US" b="0" i="1" smtClean="0">
+                              <a:latin typeface="Cambria Math" panose="02040503050406030204" pitchFamily="18" charset="0"/>
+                            </a:rPr>
+                            <m:t>𝑡</m:t>
+                          </m:r>
+                          <m:r>
+                            <a:rPr lang="en-US" b="0" i="1" smtClean="0">
+                              <a:latin typeface="Cambria Math" panose="02040503050406030204" pitchFamily="18" charset="0"/>
+                            </a:rPr>
+                            <m:t>+1</m:t>
+                          </m:r>
+                        </m:sub>
+                      </m:sSub>
+                      <m:d>
+                        <m:dPr>
+                          <m:ctrlPr>
+                            <a:rPr lang="en-US" b="0" i="1" smtClean="0">
+                              <a:latin typeface="Cambria Math" panose="02040503050406030204" pitchFamily="18" charset="0"/>
+                            </a:rPr>
+                          </m:ctrlPr>
+                        </m:dPr>
+                        <m:e>
+                          <m:r>
+                            <a:rPr lang="en-US" b="0" i="1" smtClean="0">
+                              <a:latin typeface="Cambria Math" panose="02040503050406030204" pitchFamily="18" charset="0"/>
+                            </a:rPr>
+                            <m:t>𝑥</m:t>
+                          </m:r>
+                          <m:r>
+                            <a:rPr lang="en-US" b="0" i="1" smtClean="0">
+                              <a:latin typeface="Cambria Math" panose="02040503050406030204" pitchFamily="18" charset="0"/>
+                            </a:rPr>
+                            <m:t>,</m:t>
+                          </m:r>
+                          <m:r>
+                            <a:rPr lang="en-US" b="0" i="1" smtClean="0">
+                              <a:latin typeface="Cambria Math" panose="02040503050406030204" pitchFamily="18" charset="0"/>
+                            </a:rPr>
+                            <m:t>𝑦</m:t>
+                          </m:r>
+                        </m:e>
+                      </m:d>
+                      <m:r>
+                        <a:rPr lang="en-US" b="0" i="1" smtClean="0">
+                          <a:latin typeface="Cambria Math" panose="02040503050406030204" pitchFamily="18" charset="0"/>
+                        </a:rPr>
+                        <m:t>=</m:t>
+                      </m:r>
+                      <m:r>
+                        <a:rPr lang="en-US" b="0" i="1" smtClean="0">
+                          <a:latin typeface="Cambria Math" panose="02040503050406030204" pitchFamily="18" charset="0"/>
+                        </a:rPr>
+                        <m:t>𝑓</m:t>
+                      </m:r>
+                      <m:r>
+                        <a:rPr lang="en-US" b="0" i="1" smtClean="0">
+                          <a:latin typeface="Cambria Math" panose="02040503050406030204" pitchFamily="18" charset="0"/>
+                        </a:rPr>
+                        <m:t>(</m:t>
+                      </m:r>
+                      <m:sSub>
+                        <m:sSubPr>
+                          <m:ctrlPr>
+                            <a:rPr lang="en-US" b="0" i="1" smtClean="0">
+                              <a:latin typeface="Cambria Math" panose="02040503050406030204" pitchFamily="18" charset="0"/>
+                            </a:rPr>
+                          </m:ctrlPr>
+                        </m:sSubPr>
+                        <m:e>
+                          <m:r>
+                            <a:rPr lang="en-US" b="0" i="1" smtClean="0">
+                              <a:latin typeface="Cambria Math" panose="02040503050406030204" pitchFamily="18" charset="0"/>
+                            </a:rPr>
+                            <m:t>𝐶</m:t>
+                          </m:r>
+                        </m:e>
+                        <m:sub>
+                          <m:r>
+                            <a:rPr lang="en-US" b="0" i="1" smtClean="0">
+                              <a:latin typeface="Cambria Math" panose="02040503050406030204" pitchFamily="18" charset="0"/>
+                            </a:rPr>
+                            <m:t>𝑡</m:t>
+                          </m:r>
+                        </m:sub>
+                      </m:sSub>
+                      <m:d>
+                        <m:dPr>
+                          <m:ctrlPr>
+                            <a:rPr lang="en-US" b="0" i="1" smtClean="0">
+                              <a:latin typeface="Cambria Math" panose="02040503050406030204" pitchFamily="18" charset="0"/>
+                            </a:rPr>
+                          </m:ctrlPr>
+                        </m:dPr>
+                        <m:e>
+                          <m:r>
+                            <a:rPr lang="en-US" b="0" i="1" smtClean="0">
+                              <a:latin typeface="Cambria Math" panose="02040503050406030204" pitchFamily="18" charset="0"/>
+                            </a:rPr>
+                            <m:t>𝑥</m:t>
+                          </m:r>
+                          <m:r>
+                            <a:rPr lang="en-US" b="0" i="1" smtClean="0">
+                              <a:latin typeface="Cambria Math" panose="02040503050406030204" pitchFamily="18" charset="0"/>
+                            </a:rPr>
+                            <m:t>−1, </m:t>
+                          </m:r>
+                          <m:r>
+                            <a:rPr lang="en-US" b="0" i="1" smtClean="0">
+                              <a:latin typeface="Cambria Math" panose="02040503050406030204" pitchFamily="18" charset="0"/>
+                            </a:rPr>
+                            <m:t>𝑦</m:t>
+                          </m:r>
+                        </m:e>
+                      </m:d>
+                      <m:r>
+                        <a:rPr lang="en-US" b="0" i="1" smtClean="0">
+                          <a:latin typeface="Cambria Math" panose="02040503050406030204" pitchFamily="18" charset="0"/>
+                        </a:rPr>
+                        <m:t>,</m:t>
+                      </m:r>
+                      <m:sSub>
+                        <m:sSubPr>
+                          <m:ctrlPr>
+                            <a:rPr lang="en-US" i="1">
+                              <a:latin typeface="Cambria Math" panose="02040503050406030204" pitchFamily="18" charset="0"/>
+                            </a:rPr>
+                          </m:ctrlPr>
+                        </m:sSubPr>
+                        <m:e>
+                          <m:r>
+                            <a:rPr lang="en-US" i="1">
+                              <a:latin typeface="Cambria Math" panose="02040503050406030204" pitchFamily="18" charset="0"/>
+                            </a:rPr>
+                            <m:t>𝐶</m:t>
+                          </m:r>
+                        </m:e>
+                        <m:sub>
+                          <m:r>
+                            <a:rPr lang="en-US" i="1">
+                              <a:latin typeface="Cambria Math" panose="02040503050406030204" pitchFamily="18" charset="0"/>
+                            </a:rPr>
+                            <m:t>𝑡</m:t>
+                          </m:r>
+                        </m:sub>
+                      </m:sSub>
+                      <m:d>
+                        <m:dPr>
+                          <m:ctrlPr>
+                            <a:rPr lang="en-US" i="1">
+                              <a:latin typeface="Cambria Math" panose="02040503050406030204" pitchFamily="18" charset="0"/>
+                            </a:rPr>
+                          </m:ctrlPr>
+                        </m:dPr>
+                        <m:e>
+                          <m:r>
+                            <a:rPr lang="en-US" i="1">
+                              <a:latin typeface="Cambria Math" panose="02040503050406030204" pitchFamily="18" charset="0"/>
+                            </a:rPr>
+                            <m:t>𝑥</m:t>
+                          </m:r>
+                          <m:r>
+                            <a:rPr lang="en-US" i="1">
+                              <a:latin typeface="Cambria Math" panose="02040503050406030204" pitchFamily="18" charset="0"/>
+                            </a:rPr>
+                            <m:t>, </m:t>
+                          </m:r>
+                          <m:r>
+                            <a:rPr lang="en-US" i="1">
+                              <a:latin typeface="Cambria Math" panose="02040503050406030204" pitchFamily="18" charset="0"/>
+                            </a:rPr>
+                            <m:t>𝑦</m:t>
+                          </m:r>
+                          <m:r>
+                            <a:rPr lang="en-US" b="0" i="1" smtClean="0">
+                              <a:latin typeface="Cambria Math" panose="02040503050406030204" pitchFamily="18" charset="0"/>
+                            </a:rPr>
+                            <m:t>−1</m:t>
+                          </m:r>
+                        </m:e>
+                      </m:d>
+                      <m:r>
+                        <a:rPr lang="en-US" i="1">
+                          <a:latin typeface="Cambria Math" panose="02040503050406030204" pitchFamily="18" charset="0"/>
+                        </a:rPr>
+                        <m:t>,</m:t>
+                      </m:r>
+                      <m:sSub>
+                        <m:sSubPr>
+                          <m:ctrlPr>
+                            <a:rPr lang="en-US" i="1">
+                              <a:latin typeface="Cambria Math" panose="02040503050406030204" pitchFamily="18" charset="0"/>
+                            </a:rPr>
+                          </m:ctrlPr>
+                        </m:sSubPr>
+                        <m:e>
+                          <m:r>
+                            <a:rPr lang="en-US" i="1">
+                              <a:latin typeface="Cambria Math" panose="02040503050406030204" pitchFamily="18" charset="0"/>
+                            </a:rPr>
+                            <m:t>𝐶</m:t>
+                          </m:r>
+                        </m:e>
+                        <m:sub>
+                          <m:r>
+                            <a:rPr lang="en-US" i="1">
+                              <a:latin typeface="Cambria Math" panose="02040503050406030204" pitchFamily="18" charset="0"/>
+                            </a:rPr>
+                            <m:t>𝑡</m:t>
+                          </m:r>
+                        </m:sub>
+                      </m:sSub>
+                      <m:d>
+                        <m:dPr>
+                          <m:ctrlPr>
+                            <a:rPr lang="en-US" i="1">
+                              <a:latin typeface="Cambria Math" panose="02040503050406030204" pitchFamily="18" charset="0"/>
+                            </a:rPr>
+                          </m:ctrlPr>
+                        </m:dPr>
+                        <m:e>
+                          <m:r>
+                            <a:rPr lang="en-US" i="1">
+                              <a:latin typeface="Cambria Math" panose="02040503050406030204" pitchFamily="18" charset="0"/>
+                            </a:rPr>
+                            <m:t>𝑥</m:t>
+                          </m:r>
+                          <m:r>
+                            <a:rPr lang="en-US" b="0" i="1" smtClean="0">
+                              <a:latin typeface="Cambria Math" panose="02040503050406030204" pitchFamily="18" charset="0"/>
+                            </a:rPr>
+                            <m:t>+</m:t>
+                          </m:r>
+                          <m:r>
+                            <a:rPr lang="en-US" i="1">
+                              <a:latin typeface="Cambria Math" panose="02040503050406030204" pitchFamily="18" charset="0"/>
+                            </a:rPr>
+                            <m:t>1, </m:t>
+                          </m:r>
+                          <m:r>
+                            <a:rPr lang="en-US" i="1">
+                              <a:latin typeface="Cambria Math" panose="02040503050406030204" pitchFamily="18" charset="0"/>
+                            </a:rPr>
+                            <m:t>𝑦</m:t>
+                          </m:r>
+                        </m:e>
+                      </m:d>
+                      <m:r>
+                        <a:rPr lang="en-US" b="0" i="1" smtClean="0">
+                          <a:latin typeface="Cambria Math" panose="02040503050406030204" pitchFamily="18" charset="0"/>
+                        </a:rPr>
+                        <m:t>,</m:t>
+                      </m:r>
+                      <m:sSub>
+                        <m:sSubPr>
+                          <m:ctrlPr>
+                            <a:rPr lang="en-US" i="1">
+                              <a:latin typeface="Cambria Math" panose="02040503050406030204" pitchFamily="18" charset="0"/>
+                            </a:rPr>
+                          </m:ctrlPr>
+                        </m:sSubPr>
+                        <m:e>
+                          <m:r>
+                            <a:rPr lang="en-US" i="1">
+                              <a:latin typeface="Cambria Math" panose="02040503050406030204" pitchFamily="18" charset="0"/>
+                            </a:rPr>
+                            <m:t>𝐶</m:t>
+                          </m:r>
+                        </m:e>
+                        <m:sub>
+                          <m:r>
+                            <a:rPr lang="en-US" i="1">
+                              <a:latin typeface="Cambria Math" panose="02040503050406030204" pitchFamily="18" charset="0"/>
+                            </a:rPr>
+                            <m:t>𝑡</m:t>
+                          </m:r>
+                        </m:sub>
+                      </m:sSub>
+                      <m:d>
+                        <m:dPr>
+                          <m:ctrlPr>
+                            <a:rPr lang="en-US" i="1">
+                              <a:latin typeface="Cambria Math" panose="02040503050406030204" pitchFamily="18" charset="0"/>
+                            </a:rPr>
+                          </m:ctrlPr>
+                        </m:dPr>
+                        <m:e>
+                          <m:r>
+                            <a:rPr lang="en-US" i="1">
+                              <a:latin typeface="Cambria Math" panose="02040503050406030204" pitchFamily="18" charset="0"/>
+                            </a:rPr>
+                            <m:t>𝑥</m:t>
+                          </m:r>
+                          <m:r>
+                            <a:rPr lang="en-US" i="1">
+                              <a:latin typeface="Cambria Math" panose="02040503050406030204" pitchFamily="18" charset="0"/>
+                            </a:rPr>
+                            <m:t>, </m:t>
+                          </m:r>
+                          <m:r>
+                            <a:rPr lang="en-US" i="1">
+                              <a:latin typeface="Cambria Math" panose="02040503050406030204" pitchFamily="18" charset="0"/>
+                            </a:rPr>
+                            <m:t>𝑦</m:t>
+                          </m:r>
+                          <m:r>
+                            <a:rPr lang="en-US" b="0" i="1" smtClean="0">
+                              <a:latin typeface="Cambria Math" panose="02040503050406030204" pitchFamily="18" charset="0"/>
+                            </a:rPr>
+                            <m:t>+1</m:t>
+                          </m:r>
+                        </m:e>
+                      </m:d>
+                      <m:r>
+                        <a:rPr lang="en-US" b="0" i="1" smtClean="0">
+                          <a:latin typeface="Cambria Math" panose="02040503050406030204" pitchFamily="18" charset="0"/>
+                        </a:rPr>
+                        <m:t>)</m:t>
+                      </m:r>
+                    </m:oMath>
+                  </m:oMathPara>
+                </a14:m>
+                <a:endParaRPr lang="en-US" dirty="0"/>
+              </a:p>
+            </p:txBody>
+          </p:sp>
+        </mc:Choice>
+        <mc:Fallback>
+          <p:sp>
+            <p:nvSpPr>
+              <p:cNvPr id="19" name="TextBox 18">
+                <a:extLst>
+                  <a:ext uri="{FF2B5EF4-FFF2-40B4-BE49-F238E27FC236}">
+                    <a16:creationId xmlns:a16="http://schemas.microsoft.com/office/drawing/2014/main" id="{7BF11FBE-6E66-AF47-90FB-A53F1CB69841}"/>
+                  </a:ext>
+                </a:extLst>
+              </p:cNvPr>
+              <p:cNvSpPr txBox="1">
+                <a:spLocks noRot="1" noChangeAspect="1" noMove="1" noResize="1" noEditPoints="1" noAdjustHandles="1" noChangeArrowheads="1" noChangeShapeType="1" noTextEdit="1"/>
+              </p:cNvSpPr>
+              <p:nvPr/>
+            </p:nvSpPr>
+            <p:spPr>
+              <a:xfrm>
+                <a:off x="2512745" y="3850171"/>
+                <a:ext cx="6677790" cy="369332"/>
+              </a:xfrm>
+              <a:prstGeom prst="rect">
+                <a:avLst/>
+              </a:prstGeom>
+              <a:blipFill>
+                <a:blip r:embed="rId6"/>
+                <a:stretch>
+                  <a:fillRect b="-13333"/>
+                </a:stretch>
+              </a:blipFill>
+            </p:spPr>
+            <p:txBody>
+              <a:bodyPr/>
+              <a:lstStyle/>
+              <a:p>
+                <a:r>
+                  <a:rPr lang="en-US">
+                    <a:noFill/>
+                  </a:rPr>
+                  <a:t> </a:t>
+                </a:r>
+              </a:p>
+            </p:txBody>
+          </p:sp>
+        </mc:Fallback>
+      </mc:AlternateContent>
+      <p:sp>
+        <p:nvSpPr>
+          <p:cNvPr id="20" name="TextBox 19">
+            <a:extLst>
+              <a:ext uri="{FF2B5EF4-FFF2-40B4-BE49-F238E27FC236}">
+                <a16:creationId xmlns:a16="http://schemas.microsoft.com/office/drawing/2014/main" id="{00085155-9776-5628-AC7C-0E24C456238E}"/>
+              </a:ext>
+            </a:extLst>
+          </p:cNvPr>
+          <p:cNvSpPr txBox="1"/>
+          <p:nvPr/>
+        </p:nvSpPr>
+        <p:spPr>
+          <a:xfrm>
+            <a:off x="4856814" y="5114046"/>
+            <a:ext cx="2478371" cy="369332"/>
+          </a:xfrm>
+          <a:prstGeom prst="rect">
+            <a:avLst/>
+          </a:prstGeom>
+          <a:noFill/>
+        </p:spPr>
+        <p:txBody>
+          <a:bodyPr wrap="none" rtlCol="0">
+            <a:spAutoFit/>
+          </a:bodyPr>
+          <a:lstStyle/>
+          <a:p>
+            <a:r>
+              <a:rPr lang="en-US" dirty="0"/>
+              <a:t>Can we abstract more?</a:t>
+            </a:r>
+          </a:p>
+        </p:txBody>
+      </p:sp>
+    </p:spTree>
+    <p:extLst>
+      <p:ext uri="{BB962C8B-B14F-4D97-AF65-F5344CB8AC3E}">
+        <p14:creationId xmlns:p14="http://schemas.microsoft.com/office/powerpoint/2010/main" val="2630539974"/>
+      </p:ext>
+    </p:extLst>
+  </p:cSld>
+  <p:clrMapOvr>
+    <a:masterClrMapping/>
+  </p:clrMapOvr>
+</p:sld>
+</file>
+
+<file path=ppt/slides/slide16.xml><?xml version="1.0" encoding="utf-8"?>
+<p:sld xmlns:a="http://schemas.openxmlformats.org/drawingml/2006/main" xmlns:r="http://schemas.openxmlformats.org/officeDocument/2006/relationships" xmlns:p="http://schemas.openxmlformats.org/presentationml/2006/main">
+  <p:cSld>
+    <p:spTree>
+      <p:nvGrpSpPr>
+        <p:cNvPr id="1" name="">
+          <a:extLst>
+            <a:ext uri="{FF2B5EF4-FFF2-40B4-BE49-F238E27FC236}">
+              <a16:creationId xmlns:a16="http://schemas.microsoft.com/office/drawing/2014/main" id="{DBE1AA58-A4AC-2579-03F2-ED09FAFEBBBB}"/>
+            </a:ext>
+          </a:extLst>
+        </p:cNvPr>
+        <p:cNvGrpSpPr/>
+        <p:nvPr/>
+      </p:nvGrpSpPr>
+      <p:grpSpPr>
+        <a:xfrm>
+          <a:off x="0" y="0"/>
+          <a:ext cx="0" cy="0"/>
+          <a:chOff x="0" y="0"/>
+          <a:chExt cx="0" cy="0"/>
+        </a:xfrm>
+      </p:grpSpPr>
+      <p:sp>
+        <p:nvSpPr>
+          <p:cNvPr id="4" name="Title 3">
+            <a:extLst>
+              <a:ext uri="{FF2B5EF4-FFF2-40B4-BE49-F238E27FC236}">
+                <a16:creationId xmlns:a16="http://schemas.microsoft.com/office/drawing/2014/main" id="{FBA40584-E9E1-E05A-DDA2-513A6AB47700}"/>
+              </a:ext>
+            </a:extLst>
+          </p:cNvPr>
+          <p:cNvSpPr>
+            <a:spLocks noGrp="1"/>
+          </p:cNvSpPr>
+          <p:nvPr>
+            <p:ph type="title"/>
+          </p:nvPr>
+        </p:nvSpPr>
+        <p:spPr/>
+        <p:txBody>
+          <a:bodyPr/>
+          <a:lstStyle/>
+          <a:p>
+            <a:r>
+              <a:rPr lang="en-US" noProof="0" dirty="0"/>
+              <a:t>Cellular automata abstraction</a:t>
+            </a:r>
+          </a:p>
+        </p:txBody>
+      </p:sp>
+      <p:sp>
+        <p:nvSpPr>
+          <p:cNvPr id="2" name="Date Placeholder 1">
+            <a:extLst>
+              <a:ext uri="{FF2B5EF4-FFF2-40B4-BE49-F238E27FC236}">
+                <a16:creationId xmlns:a16="http://schemas.microsoft.com/office/drawing/2014/main" id="{6E693EDC-6C75-05FA-FE9F-559117D7FE85}"/>
+              </a:ext>
+            </a:extLst>
+          </p:cNvPr>
+          <p:cNvSpPr>
+            <a:spLocks noGrp="1"/>
+          </p:cNvSpPr>
+          <p:nvPr>
+            <p:ph type="dt" sz="half" idx="10"/>
+          </p:nvPr>
+        </p:nvSpPr>
+        <p:spPr/>
+        <p:txBody>
+          <a:bodyPr/>
+          <a:lstStyle/>
+          <a:p>
+            <a:fld id="{3282519B-8553-4EB5-804E-C162E89AEEEB}" type="datetime1">
+              <a:rPr lang="en-US" noProof="0" smtClean="0"/>
+              <a:t>8/29/2026</a:t>
+            </a:fld>
+            <a:endParaRPr lang="en-US" noProof="0" dirty="0"/>
+          </a:p>
+        </p:txBody>
+      </p:sp>
+      <p:sp>
+        <p:nvSpPr>
+          <p:cNvPr id="3" name="Slide Number Placeholder 2">
+            <a:extLst>
+              <a:ext uri="{FF2B5EF4-FFF2-40B4-BE49-F238E27FC236}">
+                <a16:creationId xmlns:a16="http://schemas.microsoft.com/office/drawing/2014/main" id="{B8F34F27-B556-2C57-69D5-4A149598881E}"/>
+              </a:ext>
+            </a:extLst>
+          </p:cNvPr>
+          <p:cNvSpPr>
+            <a:spLocks noGrp="1"/>
+          </p:cNvSpPr>
+          <p:nvPr>
+            <p:ph type="sldNum" sz="quarter" idx="12"/>
+          </p:nvPr>
+        </p:nvSpPr>
+        <p:spPr/>
+        <p:txBody>
+          <a:bodyPr/>
+          <a:lstStyle/>
+          <a:p>
+            <a:fld id="{DA0BB241-1B5F-4309-9407-9EEA04D9598D}" type="slidenum">
+              <a:rPr lang="en-US" noProof="0" smtClean="0"/>
+              <a:t>16</a:t>
+            </a:fld>
+            <a:endParaRPr lang="en-US" noProof="0" dirty="0"/>
+          </a:p>
+        </p:txBody>
+      </p:sp>
+      <p:sp>
+        <p:nvSpPr>
+          <p:cNvPr id="31" name="TextBox 30">
+            <a:extLst>
+              <a:ext uri="{FF2B5EF4-FFF2-40B4-BE49-F238E27FC236}">
+                <a16:creationId xmlns:a16="http://schemas.microsoft.com/office/drawing/2014/main" id="{77E75B41-9FF8-203F-11A5-F4CDFE22F9AB}"/>
+              </a:ext>
+            </a:extLst>
+          </p:cNvPr>
+          <p:cNvSpPr txBox="1"/>
+          <p:nvPr/>
+        </p:nvSpPr>
+        <p:spPr>
+          <a:xfrm>
+            <a:off x="118662" y="3816761"/>
             <a:ext cx="5225579" cy="2587183"/>
           </a:xfrm>
           <a:prstGeom prst="rect">
@@ -12947,149 +13908,22 @@
           </a:p>
         </p:txBody>
       </p:sp>
-      <p:pic>
-        <p:nvPicPr>
-          <p:cNvPr id="34" name="Graphic 33">
-            <a:extLst>
-              <a:ext uri="{FF2B5EF4-FFF2-40B4-BE49-F238E27FC236}">
-                <a16:creationId xmlns:a16="http://schemas.microsoft.com/office/drawing/2014/main" id="{9EC9903D-7976-AE7F-53EA-DB7D6319B68D}"/>
-              </a:ext>
-            </a:extLst>
-          </p:cNvPr>
-          <p:cNvPicPr>
-            <a:picLocks noChangeAspect="1"/>
-          </p:cNvPicPr>
+      <p:sp>
+        <p:nvSpPr>
+          <p:cNvPr id="40" name="TextBox 39">
+            <a:extLst>
+              <a:ext uri="{FF2B5EF4-FFF2-40B4-BE49-F238E27FC236}">
+                <a16:creationId xmlns:a16="http://schemas.microsoft.com/office/drawing/2014/main" id="{D1EFD203-2857-53F1-07FC-94B8A741639D}"/>
+              </a:ext>
+            </a:extLst>
+          </p:cNvPr>
+          <p:cNvSpPr txBox="1"/>
           <p:nvPr/>
-        </p:nvPicPr>
-        <p:blipFill>
-          <a:blip>
-            <a:extLst>
-              <a:ext uri="{96DAC541-7B7A-43D3-8B79-37D633B846F1}">
-                <asvg:svgBlip xmlns:asvg="http://schemas.microsoft.com/office/drawing/2016/SVG/main" r:embed="rId3"/>
-              </a:ext>
-            </a:extLst>
-          </a:blip>
-          <a:stretch>
-            <a:fillRect/>
-          </a:stretch>
-        </p:blipFill>
-        <p:spPr>
-          <a:xfrm rot="5400000">
-            <a:off x="3735186" y="2217749"/>
-            <a:ext cx="1375954" cy="1375954"/>
-          </a:xfrm>
-          <a:prstGeom prst="rect">
-            <a:avLst/>
-          </a:prstGeom>
-        </p:spPr>
-      </p:pic>
-      <p:cxnSp>
-        <p:nvCxnSpPr>
-          <p:cNvPr id="36" name="Straight Arrow Connector 35">
-            <a:extLst>
-              <a:ext uri="{FF2B5EF4-FFF2-40B4-BE49-F238E27FC236}">
-                <a16:creationId xmlns:a16="http://schemas.microsoft.com/office/drawing/2014/main" id="{73268C98-D978-F28F-D534-A50D31A6583D}"/>
-              </a:ext>
-            </a:extLst>
-          </p:cNvPr>
-          <p:cNvCxnSpPr/>
-          <p:nvPr/>
-        </p:nvCxnSpPr>
+        </p:nvSpPr>
         <p:spPr>
           <a:xfrm>
-            <a:off x="2685011" y="2936685"/>
-            <a:ext cx="964276" cy="0"/>
-          </a:xfrm>
-          <a:prstGeom prst="straightConnector1">
-            <a:avLst/>
-          </a:prstGeom>
-          <a:ln>
-            <a:tailEnd type="triangle"/>
-          </a:ln>
-        </p:spPr>
-        <p:style>
-          <a:lnRef idx="2">
-            <a:schemeClr val="accent1"/>
-          </a:lnRef>
-          <a:fillRef idx="0">
-            <a:schemeClr val="accent1"/>
-          </a:fillRef>
-          <a:effectRef idx="1">
-            <a:schemeClr val="accent1"/>
-          </a:effectRef>
-          <a:fontRef idx="minor">
-            <a:schemeClr val="tx1"/>
-          </a:fontRef>
-        </p:style>
-      </p:cxnSp>
-      <p:sp>
-        <p:nvSpPr>
-          <p:cNvPr id="37" name="Rectangle 36">
-            <a:extLst>
-              <a:ext uri="{FF2B5EF4-FFF2-40B4-BE49-F238E27FC236}">
-                <a16:creationId xmlns:a16="http://schemas.microsoft.com/office/drawing/2014/main" id="{84762BE1-916C-D601-B954-E9B4996AD7B4}"/>
-              </a:ext>
-            </a:extLst>
-          </p:cNvPr>
-          <p:cNvSpPr/>
-          <p:nvPr/>
-        </p:nvSpPr>
-        <p:spPr>
-          <a:xfrm>
-            <a:off x="1704109" y="2535382"/>
-            <a:ext cx="819001" cy="849585"/>
-          </a:xfrm>
-          <a:prstGeom prst="rect">
-            <a:avLst/>
-          </a:prstGeom>
-          <a:noFill/>
-          <a:ln w="38100">
-            <a:solidFill>
-              <a:srgbClr val="FF0000"/>
-            </a:solidFill>
-          </a:ln>
-        </p:spPr>
-        <p:style>
-          <a:lnRef idx="2">
-            <a:schemeClr val="accent1">
-              <a:shade val="15000"/>
-            </a:schemeClr>
-          </a:lnRef>
-          <a:fillRef idx="1">
-            <a:schemeClr val="accent1"/>
-          </a:fillRef>
-          <a:effectRef idx="0">
-            <a:schemeClr val="accent1"/>
-          </a:effectRef>
-          <a:fontRef idx="minor">
-            <a:schemeClr val="lt1"/>
-          </a:fontRef>
-        </p:style>
-        <p:txBody>
-          <a:bodyPr rtlCol="0" anchor="ctr"/>
-          <a:lstStyle/>
-          <a:p>
-            <a:pPr algn="ctr"/>
-            <a:endParaRPr lang="en-US" noProof="0" dirty="0"/>
-          </a:p>
-        </p:txBody>
-      </p:sp>
-      <p:sp>
-        <p:nvSpPr>
-          <p:cNvPr id="40" name="TextBox 39">
-            <a:extLst>
-              <a:ext uri="{FF2B5EF4-FFF2-40B4-BE49-F238E27FC236}">
-                <a16:creationId xmlns:a16="http://schemas.microsoft.com/office/drawing/2014/main" id="{1DF01CBF-ED82-75C5-B137-525BD0A227B1}"/>
-              </a:ext>
-            </a:extLst>
-          </p:cNvPr>
-          <p:cNvSpPr txBox="1"/>
-          <p:nvPr/>
-        </p:nvSpPr>
-        <p:spPr>
-          <a:xfrm>
-            <a:off x="1876218" y="1771333"/>
-            <a:ext cx="2581861" cy="369332"/>
+            <a:off x="1248256" y="3381228"/>
+            <a:ext cx="2966389" cy="369332"/>
           </a:xfrm>
           <a:prstGeom prst="rect">
             <a:avLst/>
@@ -13104,7 +13938,7 @@
           <a:p>
             <a:r>
               <a:rPr lang="en-US" noProof="0" dirty="0"/>
-              <a:t>Game of Life automaton</a:t>
+              <a:t>Update rule for Game of Life</a:t>
             </a:r>
           </a:p>
         </p:txBody>
@@ -13114,7 +13948,7 @@
           <p:cNvPr id="46" name="TextBox 45">
             <a:extLst>
               <a:ext uri="{FF2B5EF4-FFF2-40B4-BE49-F238E27FC236}">
-                <a16:creationId xmlns:a16="http://schemas.microsoft.com/office/drawing/2014/main" id="{A0DADC12-4478-238B-5B5C-FCD09EE6C61B}"/>
+                <a16:creationId xmlns:a16="http://schemas.microsoft.com/office/drawing/2014/main" id="{0F7A28B7-7C76-0D69-D0F9-D698CC5C32FC}"/>
               </a:ext>
             </a:extLst>
           </p:cNvPr>
@@ -13123,7 +13957,7 @@
         </p:nvSpPr>
         <p:spPr>
           <a:xfrm>
-            <a:off x="6040927" y="4150236"/>
+            <a:off x="5992066" y="4234086"/>
             <a:ext cx="6096000" cy="1752531"/>
           </a:xfrm>
           <a:prstGeom prst="rect">
@@ -13391,8 +14225,14 @@
                 <a:effectLst/>
                 <a:latin typeface="Fira Code" panose="020B0809050000020004" pitchFamily="49" charset="0"/>
               </a:rPr>
-              <a:t>&gt;&gt;::</a:t>
-            </a:r>
+              <a:t>&gt;</a:t>
+            </a:r>
+            <a:endParaRPr lang="en-US" sz="1600" dirty="0">
+              <a:solidFill>
+                <a:srgbClr val="000000"/>
+              </a:solidFill>
+              <a:latin typeface="Fira Code" panose="020B0809050000020004" pitchFamily="49" charset="0"/>
+            </a:endParaRPr>
           </a:p>
           <a:p>
             <a:pPr>
@@ -13409,7 +14249,7 @@
                 <a:effectLst/>
                 <a:latin typeface="Fira Code" panose="020B0809050000020004" pitchFamily="49" charset="0"/>
               </a:rPr>
-              <a:t>  </a:t>
+              <a:t>  &gt;::</a:t>
             </a:r>
             <a:r>
               <a:rPr lang="en-US" sz="1600" noProof="0" dirty="0">
@@ -13588,7 +14428,7 @@
           <p:cNvPr id="48" name="Straight Arrow Connector 47">
             <a:extLst>
               <a:ext uri="{FF2B5EF4-FFF2-40B4-BE49-F238E27FC236}">
-                <a16:creationId xmlns:a16="http://schemas.microsoft.com/office/drawing/2014/main" id="{28944F7A-9857-3E6D-3641-A00C683DD933}"/>
+                <a16:creationId xmlns:a16="http://schemas.microsoft.com/office/drawing/2014/main" id="{3FDFC3A0-3DF2-3607-D2AB-F7A7F82FA0AC}"/>
               </a:ext>
             </a:extLst>
           </p:cNvPr>
@@ -13601,7 +14441,7 @@
         </p:nvCxnSpPr>
         <p:spPr>
           <a:xfrm flipV="1">
-            <a:off x="5393102" y="5026502"/>
+            <a:off x="5344241" y="5110352"/>
             <a:ext cx="647825" cy="1"/>
           </a:xfrm>
           <a:prstGeom prst="straightConnector1">
@@ -13631,7 +14471,7 @@
           <p:cNvPr id="50" name="TextBox 49">
             <a:extLst>
               <a:ext uri="{FF2B5EF4-FFF2-40B4-BE49-F238E27FC236}">
-                <a16:creationId xmlns:a16="http://schemas.microsoft.com/office/drawing/2014/main" id="{19394614-4B59-2819-85FD-88921C74BAE7}"/>
+                <a16:creationId xmlns:a16="http://schemas.microsoft.com/office/drawing/2014/main" id="{B0BF9745-75CB-C855-CD93-BB61357ED979}"/>
               </a:ext>
             </a:extLst>
           </p:cNvPr>
@@ -13669,10 +14509,80 @@
           </a:p>
         </p:txBody>
       </p:sp>
+      <p:pic>
+        <p:nvPicPr>
+          <p:cNvPr id="16" name="Picture 15" descr="Glider Gun">
+            <a:extLst>
+              <a:ext uri="{FF2B5EF4-FFF2-40B4-BE49-F238E27FC236}">
+                <a16:creationId xmlns:a16="http://schemas.microsoft.com/office/drawing/2014/main" id="{82C71BC4-EA06-7F93-2807-F6C8B43B18A3}"/>
+              </a:ext>
+            </a:extLst>
+          </p:cNvPr>
+          <p:cNvPicPr>
+            <a:picLocks noChangeAspect="1"/>
+          </p:cNvPicPr>
+          <p:nvPr/>
+        </p:nvPicPr>
+        <p:blipFill>
+          <a:blip r:embed="rId3"/>
+          <a:stretch>
+            <a:fillRect/>
+          </a:stretch>
+        </p:blipFill>
+        <p:spPr>
+          <a:xfrm>
+            <a:off x="4909839" y="1823089"/>
+            <a:ext cx="1944670" cy="1400161"/>
+          </a:xfrm>
+          <a:prstGeom prst="rect">
+            <a:avLst/>
+          </a:prstGeom>
+          <a:ln>
+            <a:solidFill>
+              <a:schemeClr val="tx1"/>
+            </a:solidFill>
+          </a:ln>
+        </p:spPr>
+      </p:pic>
+      <p:sp>
+        <p:nvSpPr>
+          <p:cNvPr id="10" name="TextBox 9">
+            <a:extLst>
+              <a:ext uri="{FF2B5EF4-FFF2-40B4-BE49-F238E27FC236}">
+                <a16:creationId xmlns:a16="http://schemas.microsoft.com/office/drawing/2014/main" id="{F87652A6-37F0-2CC7-1FD2-E46D9878EE9E}"/>
+              </a:ext>
+            </a:extLst>
+          </p:cNvPr>
+          <p:cNvSpPr txBox="1"/>
+          <p:nvPr/>
+        </p:nvSpPr>
+        <p:spPr>
+          <a:xfrm>
+            <a:off x="4563608" y="1387557"/>
+            <a:ext cx="2637132" cy="369332"/>
+          </a:xfrm>
+          <a:prstGeom prst="rect">
+            <a:avLst/>
+          </a:prstGeom>
+          <a:noFill/>
+        </p:spPr>
+        <p:txBody>
+          <a:bodyPr wrap="none" rtlCol="0">
+            <a:spAutoFit/>
+          </a:bodyPr>
+          <a:lstStyle/>
+          <a:p>
+            <a:r>
+              <a:rPr lang="en-US" dirty="0"/>
+              <a:t>Discrete cell state space</a:t>
+            </a:r>
+          </a:p>
+        </p:txBody>
+      </p:sp>
     </p:spTree>
     <p:extLst>
       <p:ext uri="{BB962C8B-B14F-4D97-AF65-F5344CB8AC3E}">
-        <p14:creationId xmlns:p14="http://schemas.microsoft.com/office/powerpoint/2010/main" val="2630539974"/>
+        <p14:creationId xmlns:p14="http://schemas.microsoft.com/office/powerpoint/2010/main" val="1664180798"/>
       </p:ext>
     </p:extLst>
   </p:cSld>
@@ -13682,17 +14592,9 @@
 </p:sld>
 </file>
 
-<file path=ppt/slides/slide16.xml><?xml version="1.0" encoding="utf-8"?>
+<file path=ppt/slides/slide17.xml><?xml version="1.0" encoding="utf-8"?>
 <p:sld xmlns:a="http://schemas.openxmlformats.org/drawingml/2006/main" xmlns:r="http://schemas.openxmlformats.org/officeDocument/2006/relationships" xmlns:p="http://schemas.openxmlformats.org/presentationml/2006/main">
   <p:cSld>
-    <p:bg>
-      <p:bgPr>
-        <a:solidFill>
-          <a:srgbClr val="FFFF00"/>
-        </a:solidFill>
-        <a:effectLst/>
-      </p:bgPr>
-    </p:bg>
     <p:spTree>
       <p:nvGrpSpPr>
         <p:cNvPr id="1" name=""/>
@@ -13759,7 +14661,7 @@
           <a:p>
             <a:fld id="{DA0BB241-1B5F-4309-9407-9EEA04D9598D}" type="slidenum">
               <a:rPr lang="en-US" noProof="0" smtClean="0"/>
-              <a:t>16</a:t>
+              <a:t>17</a:t>
             </a:fld>
             <a:endParaRPr lang="en-US" noProof="0" dirty="0"/>
           </a:p>
@@ -14063,24 +14965,24 @@
                 </a:solidFill>
                 <a:latin typeface="Fira Code" panose="020B0809050000020004" pitchFamily="49" charset="0"/>
               </a:rPr>
-              <a:t>&gt;&gt;::</a:t>
-            </a:r>
-          </a:p>
-          <a:p>
-            <a:pPr>
-              <a:lnSpc>
-                <a:spcPct val="113095"/>
-              </a:lnSpc>
-              <a:buNone/>
-            </a:pPr>
-            <a:r>
+              <a:t>&gt;</a:t>
+            </a:r>
+            <a:br>
               <a:rPr lang="en-US" sz="1400" noProof="0" dirty="0">
                 <a:solidFill>
                   <a:srgbClr val="000000"/>
                 </a:solidFill>
                 <a:latin typeface="Fira Code" panose="020B0809050000020004" pitchFamily="49" charset="0"/>
               </a:rPr>
-              <a:t>  </a:t>
+            </a:br>
+            <a:r>
+              <a:rPr lang="en-US" sz="1400" noProof="0" dirty="0">
+                <a:solidFill>
+                  <a:srgbClr val="000000"/>
+                </a:solidFill>
+                <a:latin typeface="Fira Code" panose="020B0809050000020004" pitchFamily="49" charset="0"/>
+              </a:rPr>
+              <a:t>  &gt;::</a:t>
             </a:r>
             <a:r>
               <a:rPr lang="en-US" sz="1400" noProof="0" dirty="0">
@@ -14340,17 +15242,9 @@
 </p:sld>
 </file>
 
-<file path=ppt/slides/slide17.xml><?xml version="1.0" encoding="utf-8"?>
+<file path=ppt/slides/slide18.xml><?xml version="1.0" encoding="utf-8"?>
 <p:sld xmlns:a="http://schemas.openxmlformats.org/drawingml/2006/main" xmlns:r="http://schemas.openxmlformats.org/officeDocument/2006/relationships" xmlns:p="http://schemas.openxmlformats.org/presentationml/2006/main">
   <p:cSld>
-    <p:bg>
-      <p:bgPr>
-        <a:solidFill>
-          <a:srgbClr val="FFFF00"/>
-        </a:solidFill>
-        <a:effectLst/>
-      </p:bgPr>
-    </p:bg>
     <p:spTree>
       <p:nvGrpSpPr>
         <p:cNvPr id="1" name=""/>
@@ -14475,7 +15369,7 @@
           <a:p>
             <a:fld id="{DA0BB241-1B5F-4309-9407-9EEA04D9598D}" type="slidenum">
               <a:rPr lang="en-US" noProof="0" smtClean="0"/>
-              <a:t>17</a:t>
+              <a:t>18</a:t>
             </a:fld>
             <a:endParaRPr lang="en-US" noProof="0" dirty="0"/>
           </a:p>
@@ -14537,17 +15431,9 @@
 </p:sld>
 </file>
 
-<file path=ppt/slides/slide18.xml><?xml version="1.0" encoding="utf-8"?>
+<file path=ppt/slides/slide19.xml><?xml version="1.0" encoding="utf-8"?>
 <p:sld xmlns:a="http://schemas.openxmlformats.org/drawingml/2006/main" xmlns:r="http://schemas.openxmlformats.org/officeDocument/2006/relationships" xmlns:p="http://schemas.openxmlformats.org/presentationml/2006/main">
   <p:cSld>
-    <p:bg>
-      <p:bgPr>
-        <a:solidFill>
-          <a:srgbClr val="FF0000"/>
-        </a:solidFill>
-        <a:effectLst/>
-      </p:bgPr>
-    </p:bg>
     <p:spTree>
       <p:nvGrpSpPr>
         <p:cNvPr id="1" name=""/>
@@ -14611,48 +15497,90 @@
           <a:bodyPr/>
           <a:lstStyle/>
           <a:p>
+            <a:pPr>
+              <a:buFont typeface="Wingdings" panose="05000000000000000000" pitchFamily="2" charset="2"/>
+              <a:buChar char="ü"/>
+            </a:pPr>
             <a:r>
               <a:rPr lang="en-US" noProof="0" dirty="0"/>
-              <a:t>Abstractions for layout- &amp; traversal-agnostic design are practical</a:t>
-            </a:r>
-          </a:p>
-          <a:p>
+              <a:t> Can transform layouts &amp; traversals</a:t>
+            </a:r>
+          </a:p>
+          <a:p>
+            <a:pPr>
+              <a:buFont typeface="Wingdings" panose="05000000000000000000" pitchFamily="2" charset="2"/>
+              <a:buChar char="ü"/>
+            </a:pPr>
             <a:r>
               <a:rPr lang="en-US" noProof="0" dirty="0"/>
-              <a:t>Applicable to parallel (CPU/GPU) and distributed HPC computing</a:t>
-            </a:r>
-          </a:p>
-          <a:p>
+              <a:t> Parallel computing CPU, GPU</a:t>
+            </a:r>
+          </a:p>
+          <a:p>
+            <a:pPr>
+              <a:buFont typeface="Wingdings" panose="05000000000000000000" pitchFamily="2" charset="2"/>
+              <a:buChar char="ü"/>
+            </a:pPr>
+            <a:r>
+              <a:rPr lang="en-US" dirty="0"/>
+              <a:t> D</a:t>
+            </a:r>
+            <a:r>
+              <a:rPr lang="en-US" noProof="0" dirty="0" err="1"/>
+              <a:t>istributed</a:t>
+            </a:r>
             <a:r>
               <a:rPr lang="en-US" noProof="0" dirty="0"/>
-              <a:t>Abstract even deeper details  in Cellular Automata</a:t>
-            </a:r>
-          </a:p>
-          <a:p>
+              <a:t> computing</a:t>
+            </a:r>
+          </a:p>
+          <a:p>
+            <a:pPr>
+              <a:buFont typeface="Wingdings" panose="05000000000000000000" pitchFamily="2" charset="2"/>
+              <a:buChar char="ü"/>
+            </a:pPr>
+            <a:r>
+              <a:rPr lang="en-US" noProof="0" dirty="0"/>
+              <a:t> Encoding &amp; Evaluation  in Cellular Automata</a:t>
+            </a:r>
+          </a:p>
+          <a:p>
+            <a:pPr marL="0" indent="0">
+              <a:buNone/>
+            </a:pPr>
             <a:r>
               <a:rPr lang="en-US" noProof="0" dirty="0"/>
               <a:t>Improve</a:t>
             </a:r>
           </a:p>
           <a:p>
-            <a:pPr lvl="1"/>
+            <a:pPr lvl="1">
+              <a:buFont typeface="Wingdings" panose="05000000000000000000" pitchFamily="2" charset="2"/>
+              <a:buChar char="ü"/>
+            </a:pPr>
             <a:r>
               <a:rPr lang="en-US" noProof="0" dirty="0"/>
-              <a:t>Maintainability</a:t>
-            </a:r>
-          </a:p>
-          <a:p>
-            <a:pPr lvl="1"/>
+              <a:t> Simplicity</a:t>
+            </a:r>
+          </a:p>
+          <a:p>
+            <a:pPr lvl="1">
+              <a:buFont typeface="Wingdings" panose="05000000000000000000" pitchFamily="2" charset="2"/>
+              <a:buChar char="ü"/>
+            </a:pPr>
             <a:r>
               <a:rPr lang="en-US" noProof="0" dirty="0"/>
-              <a:t>Flexibility</a:t>
-            </a:r>
-          </a:p>
-          <a:p>
-            <a:pPr lvl="1"/>
+              <a:t> Flexibility</a:t>
+            </a:r>
+          </a:p>
+          <a:p>
+            <a:pPr lvl="1">
+              <a:buFont typeface="Wingdings" panose="05000000000000000000" pitchFamily="2" charset="2"/>
+              <a:buChar char="ü"/>
+            </a:pPr>
             <a:r>
               <a:rPr lang="en-US" noProof="0" dirty="0"/>
-              <a:t>Automatability</a:t>
+              <a:t> Automatability</a:t>
             </a:r>
           </a:p>
         </p:txBody>
@@ -14709,9 +15637,196 @@
           <a:p>
             <a:fld id="{DA0BB241-1B5F-4309-9407-9EEA04D9598D}" type="slidenum">
               <a:rPr lang="en-US" noProof="0" smtClean="0"/>
-              <a:t>18</a:t>
+              <a:t>19</a:t>
             </a:fld>
             <a:endParaRPr lang="en-US" noProof="0" dirty="0"/>
+          </a:p>
+        </p:txBody>
+      </p:sp>
+      <p:sp>
+        <p:nvSpPr>
+          <p:cNvPr id="6" name="Right Brace 5">
+            <a:extLst>
+              <a:ext uri="{FF2B5EF4-FFF2-40B4-BE49-F238E27FC236}">
+                <a16:creationId xmlns:a16="http://schemas.microsoft.com/office/drawing/2014/main" id="{78CF35CC-A730-C361-5E7C-62A784D86C38}"/>
+              </a:ext>
+            </a:extLst>
+          </p:cNvPr>
+          <p:cNvSpPr/>
+          <p:nvPr/>
+        </p:nvSpPr>
+        <p:spPr>
+          <a:xfrm>
+            <a:off x="3650619" y="4411455"/>
+            <a:ext cx="209405" cy="1060983"/>
+          </a:xfrm>
+          <a:prstGeom prst="rightBrace">
+            <a:avLst/>
+          </a:prstGeom>
+          <a:ln>
+            <a:solidFill>
+              <a:schemeClr val="tx1"/>
+            </a:solidFill>
+          </a:ln>
+        </p:spPr>
+        <p:style>
+          <a:lnRef idx="2">
+            <a:schemeClr val="accent1"/>
+          </a:lnRef>
+          <a:fillRef idx="0">
+            <a:schemeClr val="accent1"/>
+          </a:fillRef>
+          <a:effectRef idx="1">
+            <a:schemeClr val="accent1"/>
+          </a:effectRef>
+          <a:fontRef idx="minor">
+            <a:schemeClr val="tx1"/>
+          </a:fontRef>
+        </p:style>
+        <p:txBody>
+          <a:bodyPr rtlCol="0" anchor="ctr"/>
+          <a:lstStyle/>
+          <a:p>
+            <a:pPr algn="ctr"/>
+            <a:endParaRPr lang="en-US"/>
+          </a:p>
+        </p:txBody>
+      </p:sp>
+      <p:pic>
+        <p:nvPicPr>
+          <p:cNvPr id="8" name="Graphic 7" descr="Robot with solid fill">
+            <a:extLst>
+              <a:ext uri="{FF2B5EF4-FFF2-40B4-BE49-F238E27FC236}">
+                <a16:creationId xmlns:a16="http://schemas.microsoft.com/office/drawing/2014/main" id="{DC3A6F04-0374-7B2A-6A87-FEA92F4C8D3C}"/>
+              </a:ext>
+            </a:extLst>
+          </p:cNvPr>
+          <p:cNvPicPr>
+            <a:picLocks noChangeAspect="1"/>
+          </p:cNvPicPr>
+          <p:nvPr/>
+        </p:nvPicPr>
+        <p:blipFill>
+          <a:blip>
+            <a:extLst>
+              <a:ext uri="{96DAC541-7B7A-43D3-8B79-37D633B846F1}">
+                <asvg:svgBlip xmlns:asvg="http://schemas.microsoft.com/office/drawing/2016/SVG/main" r:embed="rId3"/>
+              </a:ext>
+            </a:extLst>
+          </a:blip>
+          <a:stretch>
+            <a:fillRect/>
+          </a:stretch>
+        </p:blipFill>
+        <p:spPr>
+          <a:xfrm>
+            <a:off x="6096000" y="4138648"/>
+            <a:ext cx="1788083" cy="1788083"/>
+          </a:xfrm>
+          <a:prstGeom prst="rect">
+            <a:avLst/>
+          </a:prstGeom>
+        </p:spPr>
+      </p:pic>
+      <p:cxnSp>
+        <p:nvCxnSpPr>
+          <p:cNvPr id="10" name="Straight Connector 9">
+            <a:extLst>
+              <a:ext uri="{FF2B5EF4-FFF2-40B4-BE49-F238E27FC236}">
+                <a16:creationId xmlns:a16="http://schemas.microsoft.com/office/drawing/2014/main" id="{6A7A7546-AB4B-B0AA-3591-AB55403B6F68}"/>
+              </a:ext>
+            </a:extLst>
+          </p:cNvPr>
+          <p:cNvCxnSpPr>
+            <a:cxnSpLocks/>
+          </p:cNvCxnSpPr>
+          <p:nvPr/>
+        </p:nvCxnSpPr>
+        <p:spPr>
+          <a:xfrm>
+            <a:off x="3922846" y="4941946"/>
+            <a:ext cx="2404081" cy="2"/>
+          </a:xfrm>
+          <a:prstGeom prst="line">
+            <a:avLst/>
+          </a:prstGeom>
+          <a:ln>
+            <a:solidFill>
+              <a:schemeClr val="tx1"/>
+            </a:solidFill>
+            <a:prstDash val="sysDot"/>
+          </a:ln>
+        </p:spPr>
+        <p:style>
+          <a:lnRef idx="2">
+            <a:schemeClr val="accent1"/>
+          </a:lnRef>
+          <a:fillRef idx="0">
+            <a:schemeClr val="accent1"/>
+          </a:fillRef>
+          <a:effectRef idx="1">
+            <a:schemeClr val="accent1"/>
+          </a:effectRef>
+          <a:fontRef idx="minor">
+            <a:schemeClr val="tx1"/>
+          </a:fontRef>
+        </p:style>
+      </p:cxnSp>
+      <p:sp>
+        <p:nvSpPr>
+          <p:cNvPr id="16" name="Speech Bubble: Rectangle with Corners Rounded 15">
+            <a:extLst>
+              <a:ext uri="{FF2B5EF4-FFF2-40B4-BE49-F238E27FC236}">
+                <a16:creationId xmlns:a16="http://schemas.microsoft.com/office/drawing/2014/main" id="{EEA29218-CBAB-5518-9C50-26809DEFD9F4}"/>
+              </a:ext>
+            </a:extLst>
+          </p:cNvPr>
+          <p:cNvSpPr/>
+          <p:nvPr/>
+        </p:nvSpPr>
+        <p:spPr>
+          <a:xfrm>
+            <a:off x="7329742" y="3807728"/>
+            <a:ext cx="2561716" cy="661840"/>
+          </a:xfrm>
+          <a:prstGeom prst="wedgeRoundRectCallout">
+            <a:avLst>
+              <a:gd name="adj1" fmla="val -49944"/>
+              <a:gd name="adj2" fmla="val 66003"/>
+              <a:gd name="adj3" fmla="val 16667"/>
+            </a:avLst>
+          </a:prstGeom>
+        </p:spPr>
+        <p:style>
+          <a:lnRef idx="1">
+            <a:schemeClr val="accent5"/>
+          </a:lnRef>
+          <a:fillRef idx="2">
+            <a:schemeClr val="accent5"/>
+          </a:fillRef>
+          <a:effectRef idx="1">
+            <a:schemeClr val="accent5"/>
+          </a:effectRef>
+          <a:fontRef idx="minor">
+            <a:schemeClr val="dk1"/>
+          </a:fontRef>
+        </p:style>
+        <p:txBody>
+          <a:bodyPr rtlCol="0" anchor="ctr"/>
+          <a:lstStyle/>
+          <a:p>
+            <a:pPr algn="ctr"/>
+            <a:r>
+              <a:rPr lang="en-US" dirty="0"/>
+              <a:t>I am an LLM</a:t>
+            </a:r>
+            <a:br>
+              <a:rPr lang="en-US" dirty="0"/>
+            </a:br>
+            <a:r>
+              <a:rPr lang="en-US" dirty="0"/>
+              <a:t>and I can do that too</a:t>
+            </a:r>
           </a:p>
         </p:txBody>
       </p:sp>
@@ -14719,201 +15834,6 @@
     <p:extLst>
       <p:ext uri="{BB962C8B-B14F-4D97-AF65-F5344CB8AC3E}">
         <p14:creationId xmlns:p14="http://schemas.microsoft.com/office/powerpoint/2010/main" val="3259765721"/>
-      </p:ext>
-    </p:extLst>
-  </p:cSld>
-  <p:clrMapOvr>
-    <a:masterClrMapping/>
-  </p:clrMapOvr>
-</p:sld>
-</file>
-
-<file path=ppt/slides/slide19.xml><?xml version="1.0" encoding="utf-8"?>
-<p:sld xmlns:a="http://schemas.openxmlformats.org/drawingml/2006/main" xmlns:r="http://schemas.openxmlformats.org/officeDocument/2006/relationships" xmlns:p="http://schemas.openxmlformats.org/presentationml/2006/main">
-  <p:cSld>
-    <p:bg>
-      <p:bgPr>
-        <a:solidFill>
-          <a:srgbClr val="FFFF00"/>
-        </a:solidFill>
-        <a:effectLst/>
-      </p:bgPr>
-    </p:bg>
-    <p:spTree>
-      <p:nvGrpSpPr>
-        <p:cNvPr id="1" name=""/>
-        <p:cNvGrpSpPr/>
-        <p:nvPr/>
-      </p:nvGrpSpPr>
-      <p:grpSpPr>
-        <a:xfrm>
-          <a:off x="0" y="0"/>
-          <a:ext cx="0" cy="0"/>
-          <a:chOff x="0" y="0"/>
-          <a:chExt cx="0" cy="0"/>
-        </a:xfrm>
-      </p:grpSpPr>
-      <p:sp>
-        <p:nvSpPr>
-          <p:cNvPr id="2" name="Title 1">
-            <a:extLst>
-              <a:ext uri="{FF2B5EF4-FFF2-40B4-BE49-F238E27FC236}">
-                <a16:creationId xmlns:a16="http://schemas.microsoft.com/office/drawing/2014/main" id="{804BCED2-BEE7-D354-CAE7-2D1D5570855C}"/>
-              </a:ext>
-            </a:extLst>
-          </p:cNvPr>
-          <p:cNvSpPr>
-            <a:spLocks noGrp="1"/>
-          </p:cNvSpPr>
-          <p:nvPr>
-            <p:ph type="title"/>
-          </p:nvPr>
-        </p:nvSpPr>
-        <p:spPr/>
-        <p:txBody>
-          <a:bodyPr/>
-          <a:lstStyle/>
-          <a:p>
-            <a:r>
-              <a:rPr lang="en-US" noProof="0" dirty="0"/>
-              <a:t>Motivation</a:t>
-            </a:r>
-          </a:p>
-        </p:txBody>
-      </p:sp>
-      <p:sp>
-        <p:nvSpPr>
-          <p:cNvPr id="5" name="Content Placeholder 4">
-            <a:extLst>
-              <a:ext uri="{FF2B5EF4-FFF2-40B4-BE49-F238E27FC236}">
-                <a16:creationId xmlns:a16="http://schemas.microsoft.com/office/drawing/2014/main" id="{C738426C-F143-A522-DD5E-6B4D3FEAE64E}"/>
-              </a:ext>
-            </a:extLst>
-          </p:cNvPr>
-          <p:cNvSpPr>
-            <a:spLocks noGrp="1"/>
-          </p:cNvSpPr>
-          <p:nvPr>
-            <p:ph idx="1"/>
-          </p:nvPr>
-        </p:nvSpPr>
-        <p:spPr/>
-        <p:txBody>
-          <a:bodyPr/>
-          <a:lstStyle/>
-          <a:p>
-            <a:r>
-              <a:rPr lang="en-US" noProof="0" dirty="0"/>
-              <a:t>LLMs capable of writing simple code</a:t>
-            </a:r>
-          </a:p>
-          <a:p>
-            <a:pPr lvl="1"/>
-            <a:r>
-              <a:rPr lang="en-US" noProof="0" dirty="0"/>
-              <a:t>Data visualization, simple scripting, …</a:t>
-            </a:r>
-          </a:p>
-          <a:p>
-            <a:r>
-              <a:rPr lang="en-US" noProof="0" dirty="0"/>
-              <a:t>Not high-</a:t>
-            </a:r>
-            <a:r>
-              <a:rPr lang="en-US" noProof="0" dirty="0" err="1"/>
-              <a:t>lvl</a:t>
-            </a:r>
-            <a:r>
-              <a:rPr lang="en-US" noProof="0" dirty="0"/>
-              <a:t> decisions and parallel algorithms</a:t>
-            </a:r>
-          </a:p>
-          <a:p>
-            <a:endParaRPr lang="en-US" noProof="0" dirty="0"/>
-          </a:p>
-          <a:p>
-            <a:endParaRPr lang="en-US" noProof="0" dirty="0"/>
-          </a:p>
-          <a:p>
-            <a:endParaRPr lang="en-US" noProof="0" dirty="0"/>
-          </a:p>
-          <a:p>
-            <a:r>
-              <a:rPr lang="en-US" noProof="0" dirty="0"/>
-              <a:t>What helps LLMs generate better code?</a:t>
-            </a:r>
-          </a:p>
-          <a:p>
-            <a:pPr lvl="1"/>
-            <a:r>
-              <a:rPr lang="en-US" noProof="0" dirty="0"/>
-              <a:t>And what doesn’t</a:t>
-            </a:r>
-          </a:p>
-        </p:txBody>
-      </p:sp>
-      <p:sp>
-        <p:nvSpPr>
-          <p:cNvPr id="3" name="Date Placeholder 2">
-            <a:extLst>
-              <a:ext uri="{FF2B5EF4-FFF2-40B4-BE49-F238E27FC236}">
-                <a16:creationId xmlns:a16="http://schemas.microsoft.com/office/drawing/2014/main" id="{5DCC059B-2575-F82C-34AC-4698211F241C}"/>
-              </a:ext>
-            </a:extLst>
-          </p:cNvPr>
-          <p:cNvSpPr>
-            <a:spLocks noGrp="1"/>
-          </p:cNvSpPr>
-          <p:nvPr>
-            <p:ph type="dt" sz="half" idx="10"/>
-          </p:nvPr>
-        </p:nvSpPr>
-        <p:spPr/>
-        <p:txBody>
-          <a:bodyPr/>
-          <a:lstStyle/>
-          <a:p>
-            <a:fld id="{33B56853-0028-4549-B0D0-953613129C64}" type="datetime1">
-              <a:rPr lang="en-US" noProof="0" smtClean="0"/>
-              <a:t>8/29/2026</a:t>
-            </a:fld>
-            <a:endParaRPr lang="en-US" noProof="0" dirty="0"/>
-          </a:p>
-        </p:txBody>
-      </p:sp>
-      <p:sp>
-        <p:nvSpPr>
-          <p:cNvPr id="4" name="Slide Number Placeholder 3">
-            <a:extLst>
-              <a:ext uri="{FF2B5EF4-FFF2-40B4-BE49-F238E27FC236}">
-                <a16:creationId xmlns:a16="http://schemas.microsoft.com/office/drawing/2014/main" id="{64951596-60B1-E40A-3E74-4B0256A5404A}"/>
-              </a:ext>
-            </a:extLst>
-          </p:cNvPr>
-          <p:cNvSpPr>
-            <a:spLocks noGrp="1"/>
-          </p:cNvSpPr>
-          <p:nvPr>
-            <p:ph type="sldNum" sz="quarter" idx="12"/>
-          </p:nvPr>
-        </p:nvSpPr>
-        <p:spPr/>
-        <p:txBody>
-          <a:bodyPr/>
-          <a:lstStyle/>
-          <a:p>
-            <a:fld id="{DA0BB241-1B5F-4309-9407-9EEA04D9598D}" type="slidenum">
-              <a:rPr lang="en-US" noProof="0" smtClean="0"/>
-              <a:t>19</a:t>
-            </a:fld>
-            <a:endParaRPr lang="en-US" noProof="0" dirty="0"/>
-          </a:p>
-        </p:txBody>
-      </p:sp>
-    </p:spTree>
-    <p:extLst>
-      <p:ext uri="{BB962C8B-B14F-4D97-AF65-F5344CB8AC3E}">
-        <p14:creationId xmlns:p14="http://schemas.microsoft.com/office/powerpoint/2010/main" val="2540851836"/>
       </p:ext>
     </p:extLst>
   </p:cSld>
@@ -15143,7 +16063,7 @@
           <p:cNvPr id="2" name="Title 1">
             <a:extLst>
               <a:ext uri="{FF2B5EF4-FFF2-40B4-BE49-F238E27FC236}">
-                <a16:creationId xmlns:a16="http://schemas.microsoft.com/office/drawing/2014/main" id="{E0D1D975-7AEF-41C8-9128-2012304DE08F}"/>
+                <a16:creationId xmlns:a16="http://schemas.microsoft.com/office/drawing/2014/main" id="{804BCED2-BEE7-D354-CAE7-2D1D5570855C}"/>
               </a:ext>
             </a:extLst>
           </p:cNvPr>
@@ -15161,7 +16081,78 @@
           <a:p>
             <a:r>
               <a:rPr lang="en-US" noProof="0" dirty="0"/>
-              <a:t>Tutoring LLMs for CUDA</a:t>
+              <a:t>LLMs in HPC</a:t>
+            </a:r>
+          </a:p>
+        </p:txBody>
+      </p:sp>
+      <p:sp>
+        <p:nvSpPr>
+          <p:cNvPr id="5" name="Content Placeholder 4">
+            <a:extLst>
+              <a:ext uri="{FF2B5EF4-FFF2-40B4-BE49-F238E27FC236}">
+                <a16:creationId xmlns:a16="http://schemas.microsoft.com/office/drawing/2014/main" id="{C738426C-F143-A522-DD5E-6B4D3FEAE64E}"/>
+              </a:ext>
+            </a:extLst>
+          </p:cNvPr>
+          <p:cNvSpPr>
+            <a:spLocks noGrp="1"/>
+          </p:cNvSpPr>
+          <p:nvPr>
+            <p:ph idx="1"/>
+          </p:nvPr>
+        </p:nvSpPr>
+        <p:spPr/>
+        <p:txBody>
+          <a:bodyPr/>
+          <a:lstStyle/>
+          <a:p>
+            <a:r>
+              <a:rPr lang="en-US" noProof="0" dirty="0"/>
+              <a:t>LLMs capable of writing simple code</a:t>
+            </a:r>
+          </a:p>
+          <a:p>
+            <a:pPr lvl="1"/>
+            <a:r>
+              <a:rPr lang="en-US" noProof="0" dirty="0"/>
+              <a:t>Data visualization, simple scripting, …</a:t>
+            </a:r>
+          </a:p>
+          <a:p>
+            <a:r>
+              <a:rPr lang="en-US" noProof="0" dirty="0"/>
+              <a:t>But not high-</a:t>
+            </a:r>
+            <a:r>
+              <a:rPr lang="en-US" noProof="0" dirty="0" err="1"/>
+              <a:t>lvl</a:t>
+            </a:r>
+            <a:r>
+              <a:rPr lang="en-US" noProof="0" dirty="0"/>
+              <a:t> decisions and parallel algorithms</a:t>
+            </a:r>
+          </a:p>
+          <a:p>
+            <a:endParaRPr lang="en-US" noProof="0" dirty="0"/>
+          </a:p>
+          <a:p>
+            <a:endParaRPr lang="en-US" noProof="0" dirty="0"/>
+          </a:p>
+          <a:p>
+            <a:endParaRPr lang="en-US" noProof="0" dirty="0"/>
+          </a:p>
+          <a:p>
+            <a:r>
+              <a:rPr lang="en-US" noProof="0" dirty="0"/>
+              <a:t>What helps LLMs generate better code?</a:t>
+            </a:r>
+          </a:p>
+          <a:p>
+            <a:pPr lvl="1"/>
+            <a:r>
+              <a:rPr lang="en-US" noProof="0" dirty="0"/>
+              <a:t>And what doesn’t</a:t>
             </a:r>
           </a:p>
         </p:txBody>
@@ -15171,7 +16162,7 @@
           <p:cNvPr id="3" name="Date Placeholder 2">
             <a:extLst>
               <a:ext uri="{FF2B5EF4-FFF2-40B4-BE49-F238E27FC236}">
-                <a16:creationId xmlns:a16="http://schemas.microsoft.com/office/drawing/2014/main" id="{DC8EF9FE-8675-53C4-C0C8-6B18ACCF6DA8}"/>
+                <a16:creationId xmlns:a16="http://schemas.microsoft.com/office/drawing/2014/main" id="{5DCC059B-2575-F82C-34AC-4698211F241C}"/>
               </a:ext>
             </a:extLst>
           </p:cNvPr>
@@ -15187,7 +16178,7 @@
           <a:bodyPr/>
           <a:lstStyle/>
           <a:p>
-            <a:fld id="{472E5813-EC9F-4C36-A7F2-49C469A5F96E}" type="datetime1">
+            <a:fld id="{33B56853-0028-4549-B0D0-953613129C64}" type="datetime1">
               <a:rPr lang="en-US" noProof="0" smtClean="0"/>
               <a:t>8/29/2026</a:t>
             </a:fld>
@@ -15197,10 +16188,10 @@
       </p:sp>
       <p:sp>
         <p:nvSpPr>
-          <p:cNvPr id="5" name="Slide Number Placeholder 4">
-            <a:extLst>
-              <a:ext uri="{FF2B5EF4-FFF2-40B4-BE49-F238E27FC236}">
-                <a16:creationId xmlns:a16="http://schemas.microsoft.com/office/drawing/2014/main" id="{AE5975AD-7C47-E1A4-2296-34363FEF7D11}"/>
+          <p:cNvPr id="4" name="Slide Number Placeholder 3">
+            <a:extLst>
+              <a:ext uri="{FF2B5EF4-FFF2-40B4-BE49-F238E27FC236}">
+                <a16:creationId xmlns:a16="http://schemas.microsoft.com/office/drawing/2014/main" id="{64951596-60B1-E40A-3E74-4B0256A5404A}"/>
               </a:ext>
             </a:extLst>
           </p:cNvPr>
@@ -15219,6 +16210,216 @@
             <a:fld id="{DA0BB241-1B5F-4309-9407-9EEA04D9598D}" type="slidenum">
               <a:rPr lang="en-US" noProof="0" smtClean="0"/>
               <a:t>20</a:t>
+            </a:fld>
+            <a:endParaRPr lang="en-US" noProof="0" dirty="0"/>
+          </a:p>
+        </p:txBody>
+      </p:sp>
+      <p:pic>
+        <p:nvPicPr>
+          <p:cNvPr id="11" name="Graphic 10" descr="Robot with solid fill">
+            <a:extLst>
+              <a:ext uri="{FF2B5EF4-FFF2-40B4-BE49-F238E27FC236}">
+                <a16:creationId xmlns:a16="http://schemas.microsoft.com/office/drawing/2014/main" id="{41CECEA7-3178-756D-41C4-D6B0C12E3D7D}"/>
+              </a:ext>
+            </a:extLst>
+          </p:cNvPr>
+          <p:cNvPicPr>
+            <a:picLocks noChangeAspect="1"/>
+          </p:cNvPicPr>
+          <p:nvPr/>
+        </p:nvPicPr>
+        <p:blipFill>
+          <a:blip>
+            <a:extLst>
+              <a:ext uri="{96DAC541-7B7A-43D3-8B79-37D633B846F1}">
+                <asvg:svgBlip xmlns:asvg="http://schemas.microsoft.com/office/drawing/2016/SVG/main" r:embed="rId3"/>
+              </a:ext>
+            </a:extLst>
+          </a:blip>
+          <a:stretch>
+            <a:fillRect/>
+          </a:stretch>
+        </p:blipFill>
+        <p:spPr>
+          <a:xfrm>
+            <a:off x="8190046" y="4035437"/>
+            <a:ext cx="1788083" cy="1788083"/>
+          </a:xfrm>
+          <a:prstGeom prst="rect">
+            <a:avLst/>
+          </a:prstGeom>
+        </p:spPr>
+      </p:pic>
+      <p:sp>
+        <p:nvSpPr>
+          <p:cNvPr id="13" name="Speech Bubble: Rectangle with Corners Rounded 12">
+            <a:extLst>
+              <a:ext uri="{FF2B5EF4-FFF2-40B4-BE49-F238E27FC236}">
+                <a16:creationId xmlns:a16="http://schemas.microsoft.com/office/drawing/2014/main" id="{AE7025AB-C2BF-48E9-6016-7ED3E2EDADB6}"/>
+              </a:ext>
+            </a:extLst>
+          </p:cNvPr>
+          <p:cNvSpPr/>
+          <p:nvPr/>
+        </p:nvSpPr>
+        <p:spPr>
+          <a:xfrm>
+            <a:off x="9423788" y="3704517"/>
+            <a:ext cx="2561716" cy="661840"/>
+          </a:xfrm>
+          <a:prstGeom prst="wedgeRoundRectCallout">
+            <a:avLst>
+              <a:gd name="adj1" fmla="val -49944"/>
+              <a:gd name="adj2" fmla="val 66003"/>
+              <a:gd name="adj3" fmla="val 16667"/>
+            </a:avLst>
+          </a:prstGeom>
+        </p:spPr>
+        <p:style>
+          <a:lnRef idx="1">
+            <a:schemeClr val="accent5"/>
+          </a:lnRef>
+          <a:fillRef idx="2">
+            <a:schemeClr val="accent5"/>
+          </a:fillRef>
+          <a:effectRef idx="1">
+            <a:schemeClr val="accent5"/>
+          </a:effectRef>
+          <a:fontRef idx="minor">
+            <a:schemeClr val="dk1"/>
+          </a:fontRef>
+        </p:style>
+        <p:txBody>
+          <a:bodyPr rtlCol="0" anchor="ctr"/>
+          <a:lstStyle/>
+          <a:p>
+            <a:pPr algn="ctr"/>
+            <a:r>
+              <a:rPr lang="en-US" dirty="0"/>
+              <a:t>I am an LLM</a:t>
+            </a:r>
+            <a:br>
+              <a:rPr lang="en-US" dirty="0"/>
+            </a:br>
+            <a:r>
+              <a:rPr lang="en-US" dirty="0"/>
+              <a:t>and I can do that too</a:t>
+            </a:r>
+          </a:p>
+        </p:txBody>
+      </p:sp>
+    </p:spTree>
+    <p:extLst>
+      <p:ext uri="{BB962C8B-B14F-4D97-AF65-F5344CB8AC3E}">
+        <p14:creationId xmlns:p14="http://schemas.microsoft.com/office/powerpoint/2010/main" val="2540851836"/>
+      </p:ext>
+    </p:extLst>
+  </p:cSld>
+  <p:clrMapOvr>
+    <a:masterClrMapping/>
+  </p:clrMapOvr>
+</p:sld>
+</file>
+
+<file path=ppt/slides/slide21.xml><?xml version="1.0" encoding="utf-8"?>
+<p:sld xmlns:a="http://schemas.openxmlformats.org/drawingml/2006/main" xmlns:r="http://schemas.openxmlformats.org/officeDocument/2006/relationships" xmlns:p="http://schemas.openxmlformats.org/presentationml/2006/main">
+  <p:cSld>
+    <p:spTree>
+      <p:nvGrpSpPr>
+        <p:cNvPr id="1" name=""/>
+        <p:cNvGrpSpPr/>
+        <p:nvPr/>
+      </p:nvGrpSpPr>
+      <p:grpSpPr>
+        <a:xfrm>
+          <a:off x="0" y="0"/>
+          <a:ext cx="0" cy="0"/>
+          <a:chOff x="0" y="0"/>
+          <a:chExt cx="0" cy="0"/>
+        </a:xfrm>
+      </p:grpSpPr>
+      <p:sp>
+        <p:nvSpPr>
+          <p:cNvPr id="2" name="Title 1">
+            <a:extLst>
+              <a:ext uri="{FF2B5EF4-FFF2-40B4-BE49-F238E27FC236}">
+                <a16:creationId xmlns:a16="http://schemas.microsoft.com/office/drawing/2014/main" id="{E0D1D975-7AEF-41C8-9128-2012304DE08F}"/>
+              </a:ext>
+            </a:extLst>
+          </p:cNvPr>
+          <p:cNvSpPr>
+            <a:spLocks noGrp="1"/>
+          </p:cNvSpPr>
+          <p:nvPr>
+            <p:ph type="title"/>
+          </p:nvPr>
+        </p:nvSpPr>
+        <p:spPr/>
+        <p:txBody>
+          <a:bodyPr/>
+          <a:lstStyle/>
+          <a:p>
+            <a:r>
+              <a:rPr lang="en-US" noProof="0" dirty="0"/>
+              <a:t>Tutoring LLMs for CUDA</a:t>
+            </a:r>
+          </a:p>
+        </p:txBody>
+      </p:sp>
+      <p:sp>
+        <p:nvSpPr>
+          <p:cNvPr id="3" name="Date Placeholder 2">
+            <a:extLst>
+              <a:ext uri="{FF2B5EF4-FFF2-40B4-BE49-F238E27FC236}">
+                <a16:creationId xmlns:a16="http://schemas.microsoft.com/office/drawing/2014/main" id="{DC8EF9FE-8675-53C4-C0C8-6B18ACCF6DA8}"/>
+              </a:ext>
+            </a:extLst>
+          </p:cNvPr>
+          <p:cNvSpPr>
+            <a:spLocks noGrp="1"/>
+          </p:cNvSpPr>
+          <p:nvPr>
+            <p:ph type="dt" sz="half" idx="10"/>
+          </p:nvPr>
+        </p:nvSpPr>
+        <p:spPr/>
+        <p:txBody>
+          <a:bodyPr/>
+          <a:lstStyle/>
+          <a:p>
+            <a:fld id="{472E5813-EC9F-4C36-A7F2-49C469A5F96E}" type="datetime1">
+              <a:rPr lang="en-US" noProof="0" smtClean="0"/>
+              <a:t>8/29/2026</a:t>
+            </a:fld>
+            <a:endParaRPr lang="en-US" noProof="0" dirty="0"/>
+          </a:p>
+        </p:txBody>
+      </p:sp>
+      <p:sp>
+        <p:nvSpPr>
+          <p:cNvPr id="5" name="Slide Number Placeholder 4">
+            <a:extLst>
+              <a:ext uri="{FF2B5EF4-FFF2-40B4-BE49-F238E27FC236}">
+                <a16:creationId xmlns:a16="http://schemas.microsoft.com/office/drawing/2014/main" id="{AE5975AD-7C47-E1A4-2296-34363FEF7D11}"/>
+              </a:ext>
+            </a:extLst>
+          </p:cNvPr>
+          <p:cNvSpPr>
+            <a:spLocks noGrp="1"/>
+          </p:cNvSpPr>
+          <p:nvPr>
+            <p:ph type="sldNum" sz="quarter" idx="12"/>
+          </p:nvPr>
+        </p:nvSpPr>
+        <p:spPr/>
+        <p:txBody>
+          <a:bodyPr/>
+          <a:lstStyle/>
+          <a:p>
+            <a:fld id="{DA0BB241-1B5F-4309-9407-9EEA04D9598D}" type="slidenum">
+              <a:rPr lang="en-US" noProof="0" smtClean="0"/>
+              <a:t>21</a:t>
             </a:fld>
             <a:endParaRPr lang="en-US" noProof="0" dirty="0"/>
           </a:p>
@@ -15282,45 +16483,20 @@
               <a:gd name="adj2" fmla="val 73252"/>
             </a:avLst>
           </a:prstGeom>
-          <a:gradFill flip="none" rotWithShape="1">
-            <a:gsLst>
-              <a:gs pos="0">
-                <a:schemeClr val="dk1">
-                  <a:lumMod val="67000"/>
-                </a:schemeClr>
-              </a:gs>
-              <a:gs pos="48000">
-                <a:schemeClr val="dk1">
-                  <a:lumMod val="97000"/>
-                  <a:lumOff val="3000"/>
-                </a:schemeClr>
-              </a:gs>
-              <a:gs pos="100000">
-                <a:schemeClr val="dk1">
-                  <a:lumMod val="60000"/>
-                  <a:lumOff val="40000"/>
-                </a:schemeClr>
-              </a:gs>
-            </a:gsLst>
-            <a:lin ang="16200000" scaled="1"/>
-            <a:tileRect/>
-          </a:gradFill>
-          <a:ln>
-            <a:noFill/>
-          </a:ln>
+          <a:ln/>
         </p:spPr>
         <p:style>
-          <a:lnRef idx="0">
-            <a:scrgbClr r="0" g="0" b="0"/>
+          <a:lnRef idx="1">
+            <a:schemeClr val="accent4"/>
           </a:lnRef>
-          <a:fillRef idx="0">
-            <a:scrgbClr r="0" g="0" b="0"/>
+          <a:fillRef idx="2">
+            <a:schemeClr val="accent4"/>
           </a:fillRef>
-          <a:effectRef idx="0">
-            <a:scrgbClr r="0" g="0" b="0"/>
+          <a:effectRef idx="1">
+            <a:schemeClr val="accent4"/>
           </a:effectRef>
           <a:fontRef idx="minor">
-            <a:schemeClr val="lt1"/>
+            <a:schemeClr val="dk1"/>
           </a:fontRef>
         </p:style>
         <p:txBody>
@@ -15401,19 +16577,17 @@
           </a:prstGeom>
         </p:spPr>
         <p:style>
-          <a:lnRef idx="2">
-            <a:schemeClr val="dk1">
-              <a:shade val="15000"/>
-            </a:schemeClr>
+          <a:lnRef idx="1">
+            <a:schemeClr val="accent6"/>
           </a:lnRef>
-          <a:fillRef idx="1">
-            <a:schemeClr val="dk1"/>
+          <a:fillRef idx="2">
+            <a:schemeClr val="accent6"/>
           </a:fillRef>
-          <a:effectRef idx="0">
-            <a:schemeClr val="dk1"/>
+          <a:effectRef idx="1">
+            <a:schemeClr val="accent6"/>
           </a:effectRef>
           <a:fontRef idx="minor">
-            <a:schemeClr val="lt1"/>
+            <a:schemeClr val="dk1"/>
           </a:fontRef>
         </p:style>
         <p:txBody>
@@ -15529,45 +16703,20 @@
               <a:gd name="adj2" fmla="val 73252"/>
             </a:avLst>
           </a:prstGeom>
-          <a:gradFill flip="none" rotWithShape="1">
-            <a:gsLst>
-              <a:gs pos="0">
-                <a:schemeClr val="dk1">
-                  <a:lumMod val="67000"/>
-                </a:schemeClr>
-              </a:gs>
-              <a:gs pos="48000">
-                <a:schemeClr val="dk1">
-                  <a:lumMod val="97000"/>
-                  <a:lumOff val="3000"/>
-                </a:schemeClr>
-              </a:gs>
-              <a:gs pos="100000">
-                <a:schemeClr val="dk1">
-                  <a:lumMod val="60000"/>
-                  <a:lumOff val="40000"/>
-                </a:schemeClr>
-              </a:gs>
-            </a:gsLst>
-            <a:lin ang="16200000" scaled="1"/>
-            <a:tileRect/>
-          </a:gradFill>
-          <a:ln>
-            <a:noFill/>
-          </a:ln>
+          <a:ln/>
         </p:spPr>
         <p:style>
-          <a:lnRef idx="0">
-            <a:scrgbClr r="0" g="0" b="0"/>
+          <a:lnRef idx="1">
+            <a:schemeClr val="accent4"/>
           </a:lnRef>
-          <a:fillRef idx="0">
-            <a:scrgbClr r="0" g="0" b="0"/>
+          <a:fillRef idx="2">
+            <a:schemeClr val="accent4"/>
           </a:fillRef>
-          <a:effectRef idx="0">
-            <a:scrgbClr r="0" g="0" b="0"/>
+          <a:effectRef idx="1">
+            <a:schemeClr val="accent4"/>
           </a:effectRef>
           <a:fontRef idx="minor">
-            <a:schemeClr val="lt1"/>
+            <a:schemeClr val="dk1"/>
           </a:fontRef>
         </p:style>
         <p:txBody>
@@ -15648,19 +16797,17 @@
           </a:prstGeom>
         </p:spPr>
         <p:style>
-          <a:lnRef idx="2">
-            <a:schemeClr val="dk1">
-              <a:shade val="15000"/>
-            </a:schemeClr>
+          <a:lnRef idx="1">
+            <a:schemeClr val="accent6"/>
           </a:lnRef>
-          <a:fillRef idx="1">
-            <a:schemeClr val="dk1"/>
+          <a:fillRef idx="2">
+            <a:schemeClr val="accent6"/>
           </a:fillRef>
-          <a:effectRef idx="0">
-            <a:schemeClr val="dk1"/>
+          <a:effectRef idx="1">
+            <a:schemeClr val="accent6"/>
           </a:effectRef>
           <a:fontRef idx="minor">
-            <a:schemeClr val="lt1"/>
+            <a:schemeClr val="dk1"/>
           </a:fontRef>
         </p:style>
         <p:txBody>
@@ -15741,45 +16888,20 @@
               <a:gd name="adj2" fmla="val 73252"/>
             </a:avLst>
           </a:prstGeom>
-          <a:gradFill flip="none" rotWithShape="1">
-            <a:gsLst>
-              <a:gs pos="0">
-                <a:schemeClr val="dk1">
-                  <a:lumMod val="67000"/>
-                </a:schemeClr>
-              </a:gs>
-              <a:gs pos="48000">
-                <a:schemeClr val="dk1">
-                  <a:lumMod val="97000"/>
-                  <a:lumOff val="3000"/>
-                </a:schemeClr>
-              </a:gs>
-              <a:gs pos="100000">
-                <a:schemeClr val="dk1">
-                  <a:lumMod val="60000"/>
-                  <a:lumOff val="40000"/>
-                </a:schemeClr>
-              </a:gs>
-            </a:gsLst>
-            <a:lin ang="16200000" scaled="1"/>
-            <a:tileRect/>
-          </a:gradFill>
-          <a:ln>
-            <a:noFill/>
-          </a:ln>
+          <a:ln/>
         </p:spPr>
         <p:style>
-          <a:lnRef idx="0">
-            <a:scrgbClr r="0" g="0" b="0"/>
+          <a:lnRef idx="1">
+            <a:schemeClr val="accent4"/>
           </a:lnRef>
-          <a:fillRef idx="0">
-            <a:scrgbClr r="0" g="0" b="0"/>
+          <a:fillRef idx="2">
+            <a:schemeClr val="accent4"/>
           </a:fillRef>
-          <a:effectRef idx="0">
-            <a:scrgbClr r="0" g="0" b="0"/>
+          <a:effectRef idx="1">
+            <a:schemeClr val="accent4"/>
           </a:effectRef>
           <a:fontRef idx="minor">
-            <a:schemeClr val="lt1"/>
+            <a:schemeClr val="dk1"/>
           </a:fontRef>
         </p:style>
         <p:txBody>
@@ -15817,19 +16939,17 @@
           </a:prstGeom>
         </p:spPr>
         <p:style>
-          <a:lnRef idx="2">
-            <a:schemeClr val="dk1">
-              <a:shade val="15000"/>
-            </a:schemeClr>
+          <a:lnRef idx="1">
+            <a:schemeClr val="accent6"/>
           </a:lnRef>
-          <a:fillRef idx="1">
-            <a:schemeClr val="dk1"/>
+          <a:fillRef idx="2">
+            <a:schemeClr val="accent6"/>
           </a:fillRef>
-          <a:effectRef idx="0">
-            <a:schemeClr val="dk1"/>
+          <a:effectRef idx="1">
+            <a:schemeClr val="accent6"/>
           </a:effectRef>
           <a:fontRef idx="minor">
-            <a:schemeClr val="lt1"/>
+            <a:schemeClr val="dk1"/>
           </a:fontRef>
         </p:style>
         <p:txBody>
@@ -16046,17 +17166,9 @@
 </p:sld>
 </file>
 
-<file path=ppt/slides/slide21.xml><?xml version="1.0" encoding="utf-8"?>
+<file path=ppt/slides/slide22.xml><?xml version="1.0" encoding="utf-8"?>
 <p:sld xmlns:a="http://schemas.openxmlformats.org/drawingml/2006/main" xmlns:r="http://schemas.openxmlformats.org/officeDocument/2006/relationships" xmlns:p="http://schemas.openxmlformats.org/presentationml/2006/main">
   <p:cSld>
-    <p:bg>
-      <p:bgPr>
-        <a:solidFill>
-          <a:srgbClr val="FFFF00"/>
-        </a:solidFill>
-        <a:effectLst/>
-      </p:bgPr>
-    </p:bg>
     <p:spTree>
       <p:nvGrpSpPr>
         <p:cNvPr id="1" name="">
@@ -16164,7 +17276,7 @@
           <a:p>
             <a:fld id="{DA0BB241-1B5F-4309-9407-9EEA04D9598D}" type="slidenum">
               <a:rPr lang="en-US" noProof="0" smtClean="0"/>
-              <a:t>21</a:t>
+              <a:t>22</a:t>
             </a:fld>
             <a:endParaRPr lang="en-US" noProof="0" dirty="0"/>
           </a:p>
@@ -17186,7 +18298,7 @@
 </p:sld>
 </file>
 
-<file path=ppt/slides/slide22.xml><?xml version="1.0" encoding="utf-8"?>
+<file path=ppt/slides/slide23.xml><?xml version="1.0" encoding="utf-8"?>
 <p:sld xmlns:a="http://schemas.openxmlformats.org/drawingml/2006/main" xmlns:r="http://schemas.openxmlformats.org/officeDocument/2006/relationships" xmlns:p="http://schemas.openxmlformats.org/presentationml/2006/main">
   <p:cSld>
     <p:spTree>
@@ -17359,7 +18471,7 @@
           <a:p>
             <a:fld id="{DA0BB241-1B5F-4309-9407-9EEA04D9598D}" type="slidenum">
               <a:rPr lang="en-US" noProof="0" smtClean="0"/>
-              <a:t>22</a:t>
+              <a:t>23</a:t>
             </a:fld>
             <a:endParaRPr lang="en-US" noProof="0" dirty="0"/>
           </a:p>
@@ -17532,7 +18644,7 @@
 </p:sld>
 </file>
 
-<file path=ppt/slides/slide23.xml><?xml version="1.0" encoding="utf-8"?>
+<file path=ppt/slides/slide24.xml><?xml version="1.0" encoding="utf-8"?>
 <p:sld xmlns:a="http://schemas.openxmlformats.org/drawingml/2006/main" xmlns:r="http://schemas.openxmlformats.org/officeDocument/2006/relationships" xmlns:p="http://schemas.openxmlformats.org/presentationml/2006/main">
   <p:cSld>
     <p:spTree>
@@ -17703,7 +18815,7 @@
           <a:p>
             <a:fld id="{DA0BB241-1B5F-4309-9407-9EEA04D9598D}" type="slidenum">
               <a:rPr lang="en-US" noProof="0" smtClean="0"/>
-              <a:t>23</a:t>
+              <a:t>24</a:t>
             </a:fld>
             <a:endParaRPr lang="en-US" noProof="0" dirty="0"/>
           </a:p>
@@ -17876,13 +18988,13 @@
 </p:sld>
 </file>
 
-<file path=ppt/slides/slide24.xml><?xml version="1.0" encoding="utf-8"?>
+<file path=ppt/slides/slide25.xml><?xml version="1.0" encoding="utf-8"?>
 <p:sld xmlns:a="http://schemas.openxmlformats.org/drawingml/2006/main" xmlns:r="http://schemas.openxmlformats.org/officeDocument/2006/relationships" xmlns:p="http://schemas.openxmlformats.org/presentationml/2006/main">
   <p:cSld>
     <p:bg>
       <p:bgPr>
         <a:solidFill>
-          <a:srgbClr val="C00000"/>
+          <a:srgbClr val="FFFF00"/>
         </a:solidFill>
         <a:effectLst/>
       </p:bgPr>
@@ -17906,7 +19018,7 @@
           <p:cNvPr id="2" name="Title 1">
             <a:extLst>
               <a:ext uri="{FF2B5EF4-FFF2-40B4-BE49-F238E27FC236}">
-                <a16:creationId xmlns:a16="http://schemas.microsoft.com/office/drawing/2014/main" id="{1D8F8F2B-8096-7E9E-AA5F-7F72726C819C}"/>
+                <a16:creationId xmlns:a16="http://schemas.microsoft.com/office/drawing/2014/main" id="{232648C3-E8A8-80F5-FFF8-D207F8FAB0B7}"/>
               </a:ext>
             </a:extLst>
           </p:cNvPr>
@@ -17923,8 +19035,8 @@
           <a:lstStyle/>
           <a:p>
             <a:r>
-              <a:rPr lang="en-US" noProof="0" dirty="0"/>
-              <a:t>LLMs and Abstractions</a:t>
+              <a:rPr lang="en-US" dirty="0"/>
+              <a:t>LLMs and abstractions</a:t>
             </a:r>
           </a:p>
         </p:txBody>
@@ -17934,7 +19046,7 @@
           <p:cNvPr id="3" name="Date Placeholder 2">
             <a:extLst>
               <a:ext uri="{FF2B5EF4-FFF2-40B4-BE49-F238E27FC236}">
-                <a16:creationId xmlns:a16="http://schemas.microsoft.com/office/drawing/2014/main" id="{7C9DDCDD-E57A-60CF-F6C1-98722252234C}"/>
+                <a16:creationId xmlns:a16="http://schemas.microsoft.com/office/drawing/2014/main" id="{5B3156B7-FB64-2477-4F0F-ECE30CB02A63}"/>
               </a:ext>
             </a:extLst>
           </p:cNvPr>
@@ -17951,10 +19063,10 @@
           <a:lstStyle/>
           <a:p>
             <a:fld id="{1AB26190-46ED-4A0C-A5E8-CDBCA5C2D5C3}" type="datetime1">
-              <a:rPr lang="en-US" noProof="0" smtClean="0"/>
+              <a:rPr lang="en-US" smtClean="0"/>
               <a:t>8/29/2026</a:t>
             </a:fld>
-            <a:endParaRPr lang="en-US" noProof="0" dirty="0"/>
+            <a:endParaRPr lang="en-US"/>
           </a:p>
         </p:txBody>
       </p:sp>
@@ -17963,7 +19075,7 @@
           <p:cNvPr id="4" name="Slide Number Placeholder 3">
             <a:extLst>
               <a:ext uri="{FF2B5EF4-FFF2-40B4-BE49-F238E27FC236}">
-                <a16:creationId xmlns:a16="http://schemas.microsoft.com/office/drawing/2014/main" id="{EB15584F-9C46-0B94-52F1-15D64D9E529C}"/>
+                <a16:creationId xmlns:a16="http://schemas.microsoft.com/office/drawing/2014/main" id="{B38BF62A-6F36-4AFB-C34B-B5CD6527FF5C}"/>
               </a:ext>
             </a:extLst>
           </p:cNvPr>
@@ -17980,721 +19092,17 @@
           <a:lstStyle/>
           <a:p>
             <a:fld id="{DA0BB241-1B5F-4309-9407-9EEA04D9598D}" type="slidenum">
-              <a:rPr lang="en-US" noProof="0" smtClean="0"/>
-              <a:t>24</a:t>
+              <a:rPr lang="en-US" smtClean="0"/>
+              <a:t>25</a:t>
             </a:fld>
-            <a:endParaRPr lang="en-US" noProof="0" dirty="0"/>
-          </a:p>
-        </p:txBody>
-      </p:sp>
-      <p:sp>
-        <p:nvSpPr>
-          <p:cNvPr id="6" name="TextBox 5">
-            <a:extLst>
-              <a:ext uri="{FF2B5EF4-FFF2-40B4-BE49-F238E27FC236}">
-                <a16:creationId xmlns:a16="http://schemas.microsoft.com/office/drawing/2014/main" id="{F931F0D3-62D6-B790-92EE-5989B4C2DE90}"/>
-              </a:ext>
-            </a:extLst>
-          </p:cNvPr>
-          <p:cNvSpPr txBox="1"/>
-          <p:nvPr/>
-        </p:nvSpPr>
-        <p:spPr>
-          <a:xfrm>
-            <a:off x="5898155" y="3285794"/>
-            <a:ext cx="678391" cy="523220"/>
-          </a:xfrm>
-          <a:prstGeom prst="rect">
-            <a:avLst/>
-          </a:prstGeom>
-          <a:noFill/>
-        </p:spPr>
-        <p:txBody>
-          <a:bodyPr wrap="none" rtlCol="0">
-            <a:spAutoFit/>
-          </a:bodyPr>
-          <a:lstStyle/>
-          <a:p>
-            <a:pPr algn="ctr"/>
-            <a:r>
-              <a:rPr lang="en-US" sz="2800" noProof="0" dirty="0"/>
-              <a:t>🤖</a:t>
-            </a:r>
-          </a:p>
-        </p:txBody>
-      </p:sp>
-      <p:sp>
-        <p:nvSpPr>
-          <p:cNvPr id="7" name="TextBox 6">
-            <a:extLst>
-              <a:ext uri="{FF2B5EF4-FFF2-40B4-BE49-F238E27FC236}">
-                <a16:creationId xmlns:a16="http://schemas.microsoft.com/office/drawing/2014/main" id="{9FA49B44-DE06-06BD-B7AF-75B04E4D7F06}"/>
-              </a:ext>
-            </a:extLst>
-          </p:cNvPr>
-          <p:cNvSpPr txBox="1"/>
-          <p:nvPr/>
-        </p:nvSpPr>
-        <p:spPr>
-          <a:xfrm>
-            <a:off x="5447840" y="3809014"/>
-            <a:ext cx="1579022" cy="369332"/>
-          </a:xfrm>
-          <a:prstGeom prst="rect">
-            <a:avLst/>
-          </a:prstGeom>
-          <a:noFill/>
-        </p:spPr>
-        <p:txBody>
-          <a:bodyPr wrap="none" rtlCol="0">
-            <a:spAutoFit/>
-          </a:bodyPr>
-          <a:lstStyle/>
-          <a:p>
-            <a:pPr algn="ctr"/>
-            <a:r>
-              <a:rPr lang="en-US" noProof="0" dirty="0"/>
-              <a:t>LLM optimizer</a:t>
-            </a:r>
-          </a:p>
-        </p:txBody>
-      </p:sp>
-      <p:sp>
-        <p:nvSpPr>
-          <p:cNvPr id="9" name="TextBox 8">
-            <a:extLst>
-              <a:ext uri="{FF2B5EF4-FFF2-40B4-BE49-F238E27FC236}">
-                <a16:creationId xmlns:a16="http://schemas.microsoft.com/office/drawing/2014/main" id="{493CFFAC-E147-8EA9-0CFB-C6E6643CF311}"/>
-              </a:ext>
-            </a:extLst>
-          </p:cNvPr>
-          <p:cNvSpPr txBox="1"/>
-          <p:nvPr/>
-        </p:nvSpPr>
-        <p:spPr>
-          <a:xfrm>
-            <a:off x="3864099" y="3285794"/>
-            <a:ext cx="678391" cy="523220"/>
-          </a:xfrm>
-          <a:prstGeom prst="rect">
-            <a:avLst/>
-          </a:prstGeom>
-          <a:noFill/>
-        </p:spPr>
-        <p:txBody>
-          <a:bodyPr wrap="none" rtlCol="0">
-            <a:spAutoFit/>
-          </a:bodyPr>
-          <a:lstStyle/>
-          <a:p>
-            <a:r>
-              <a:rPr lang="en-US" sz="2800" noProof="0" dirty="0"/>
-              <a:t>🐌</a:t>
-            </a:r>
-          </a:p>
-        </p:txBody>
-      </p:sp>
-      <p:cxnSp>
-        <p:nvCxnSpPr>
-          <p:cNvPr id="11" name="Straight Arrow Connector 10">
-            <a:extLst>
-              <a:ext uri="{FF2B5EF4-FFF2-40B4-BE49-F238E27FC236}">
-                <a16:creationId xmlns:a16="http://schemas.microsoft.com/office/drawing/2014/main" id="{36C96701-4992-BFFC-E886-D8DF71533624}"/>
-              </a:ext>
-            </a:extLst>
-          </p:cNvPr>
-          <p:cNvCxnSpPr>
-            <a:stCxn id="9" idx="3"/>
-            <a:endCxn id="6" idx="1"/>
-          </p:cNvCxnSpPr>
-          <p:nvPr/>
-        </p:nvCxnSpPr>
-        <p:spPr>
-          <a:xfrm>
-            <a:off x="4542490" y="3547404"/>
-            <a:ext cx="1355665" cy="0"/>
-          </a:xfrm>
-          <a:prstGeom prst="straightConnector1">
-            <a:avLst/>
-          </a:prstGeom>
-          <a:ln>
-            <a:tailEnd type="triangle"/>
-          </a:ln>
-        </p:spPr>
-        <p:style>
-          <a:lnRef idx="2">
-            <a:schemeClr val="accent1"/>
-          </a:lnRef>
-          <a:fillRef idx="0">
-            <a:schemeClr val="accent1"/>
-          </a:fillRef>
-          <a:effectRef idx="1">
-            <a:schemeClr val="accent1"/>
-          </a:effectRef>
-          <a:fontRef idx="minor">
-            <a:schemeClr val="tx1"/>
-          </a:fontRef>
-        </p:style>
-      </p:cxnSp>
-      <p:cxnSp>
-        <p:nvCxnSpPr>
-          <p:cNvPr id="13" name="Straight Arrow Connector 12">
-            <a:extLst>
-              <a:ext uri="{FF2B5EF4-FFF2-40B4-BE49-F238E27FC236}">
-                <a16:creationId xmlns:a16="http://schemas.microsoft.com/office/drawing/2014/main" id="{D17F6E4F-7D25-96B8-1EA2-2A31E82074AB}"/>
-              </a:ext>
-            </a:extLst>
-          </p:cNvPr>
-          <p:cNvCxnSpPr>
-            <a:cxnSpLocks/>
-            <a:endCxn id="15" idx="1"/>
-          </p:cNvCxnSpPr>
-          <p:nvPr/>
-        </p:nvCxnSpPr>
-        <p:spPr>
-          <a:xfrm>
-            <a:off x="6576546" y="3547404"/>
-            <a:ext cx="1355663" cy="0"/>
-          </a:xfrm>
-          <a:prstGeom prst="straightConnector1">
-            <a:avLst/>
-          </a:prstGeom>
-          <a:ln>
-            <a:tailEnd type="triangle"/>
-          </a:ln>
-        </p:spPr>
-        <p:style>
-          <a:lnRef idx="2">
-            <a:schemeClr val="accent1"/>
-          </a:lnRef>
-          <a:fillRef idx="0">
-            <a:schemeClr val="accent1"/>
-          </a:fillRef>
-          <a:effectRef idx="1">
-            <a:schemeClr val="accent1"/>
-          </a:effectRef>
-          <a:fontRef idx="minor">
-            <a:schemeClr val="tx1"/>
-          </a:fontRef>
-        </p:style>
-      </p:cxnSp>
-      <p:sp>
-        <p:nvSpPr>
-          <p:cNvPr id="15" name="TextBox 14">
-            <a:extLst>
-              <a:ext uri="{FF2B5EF4-FFF2-40B4-BE49-F238E27FC236}">
-                <a16:creationId xmlns:a16="http://schemas.microsoft.com/office/drawing/2014/main" id="{509495A2-2783-83D7-9F8A-49ECA60DA476}"/>
-              </a:ext>
-            </a:extLst>
-          </p:cNvPr>
-          <p:cNvSpPr txBox="1"/>
-          <p:nvPr/>
-        </p:nvSpPr>
-        <p:spPr>
-          <a:xfrm>
-            <a:off x="7932209" y="3285794"/>
-            <a:ext cx="678391" cy="523220"/>
-          </a:xfrm>
-          <a:prstGeom prst="rect">
-            <a:avLst/>
-          </a:prstGeom>
-          <a:noFill/>
-        </p:spPr>
-        <p:txBody>
-          <a:bodyPr wrap="none" rtlCol="0">
-            <a:spAutoFit/>
-          </a:bodyPr>
-          <a:lstStyle/>
-          <a:p>
-            <a:pPr algn="ctr"/>
-            <a:r>
-              <a:rPr lang="en-US" sz="2800" noProof="0" dirty="0"/>
-              <a:t>🚀</a:t>
-            </a:r>
-          </a:p>
-        </p:txBody>
-      </p:sp>
-      <p:sp>
-        <p:nvSpPr>
-          <p:cNvPr id="17" name="TextBox 16">
-            <a:extLst>
-              <a:ext uri="{FF2B5EF4-FFF2-40B4-BE49-F238E27FC236}">
-                <a16:creationId xmlns:a16="http://schemas.microsoft.com/office/drawing/2014/main" id="{C0057DF1-75D1-ABD6-14BF-FA343EC6D033}"/>
-              </a:ext>
-            </a:extLst>
-          </p:cNvPr>
-          <p:cNvSpPr txBox="1"/>
-          <p:nvPr/>
-        </p:nvSpPr>
-        <p:spPr>
-          <a:xfrm>
-            <a:off x="5276959" y="4928729"/>
-            <a:ext cx="1910459" cy="369332"/>
-          </a:xfrm>
-          <a:prstGeom prst="rect">
-            <a:avLst/>
-          </a:prstGeom>
-          <a:noFill/>
-        </p:spPr>
-        <p:txBody>
-          <a:bodyPr wrap="none" rtlCol="0">
-            <a:spAutoFit/>
-          </a:bodyPr>
-          <a:lstStyle/>
-          <a:p>
-            <a:r>
-              <a:rPr lang="en-US" noProof="0" dirty="0"/>
-              <a:t>What Abstraction</a:t>
-            </a:r>
-          </a:p>
-        </p:txBody>
-      </p:sp>
-      <p:sp>
-        <p:nvSpPr>
-          <p:cNvPr id="18" name="TextBox 17">
-            <a:extLst>
-              <a:ext uri="{FF2B5EF4-FFF2-40B4-BE49-F238E27FC236}">
-                <a16:creationId xmlns:a16="http://schemas.microsoft.com/office/drawing/2014/main" id="{BC787B5C-F15D-E453-E0C2-74F32811444B}"/>
-              </a:ext>
-            </a:extLst>
-          </p:cNvPr>
-          <p:cNvSpPr txBox="1"/>
-          <p:nvPr/>
-        </p:nvSpPr>
-        <p:spPr>
-          <a:xfrm>
-            <a:off x="4077934" y="5555516"/>
-            <a:ext cx="837089" cy="369332"/>
-          </a:xfrm>
-          <a:prstGeom prst="rect">
-            <a:avLst/>
-          </a:prstGeom>
-          <a:noFill/>
-        </p:spPr>
-        <p:txBody>
-          <a:bodyPr wrap="none" rtlCol="0">
-            <a:spAutoFit/>
-          </a:bodyPr>
-          <a:lstStyle/>
-          <a:p>
-            <a:r>
-              <a:rPr lang="en-US" noProof="0" dirty="0"/>
-              <a:t>Halide</a:t>
-            </a:r>
-          </a:p>
-        </p:txBody>
-      </p:sp>
-      <p:sp>
-        <p:nvSpPr>
-          <p:cNvPr id="19" name="TextBox 18">
-            <a:extLst>
-              <a:ext uri="{FF2B5EF4-FFF2-40B4-BE49-F238E27FC236}">
-                <a16:creationId xmlns:a16="http://schemas.microsoft.com/office/drawing/2014/main" id="{23358F22-F533-1C7C-D8C5-74ED702D9FF3}"/>
-              </a:ext>
-            </a:extLst>
-          </p:cNvPr>
-          <p:cNvSpPr txBox="1"/>
-          <p:nvPr/>
-        </p:nvSpPr>
-        <p:spPr>
-          <a:xfrm>
-            <a:off x="5538167" y="5555516"/>
-            <a:ext cx="538417" cy="369332"/>
-          </a:xfrm>
-          <a:prstGeom prst="rect">
-            <a:avLst/>
-          </a:prstGeom>
-          <a:noFill/>
-        </p:spPr>
-        <p:txBody>
-          <a:bodyPr wrap="none" rtlCol="0">
-            <a:spAutoFit/>
-          </a:bodyPr>
-          <a:lstStyle/>
-          <a:p>
-            <a:r>
-              <a:rPr lang="en-US" noProof="0" dirty="0"/>
-              <a:t>Exo</a:t>
-            </a:r>
-          </a:p>
-        </p:txBody>
-      </p:sp>
-      <p:sp>
-        <p:nvSpPr>
-          <p:cNvPr id="20" name="TextBox 19">
-            <a:extLst>
-              <a:ext uri="{FF2B5EF4-FFF2-40B4-BE49-F238E27FC236}">
-                <a16:creationId xmlns:a16="http://schemas.microsoft.com/office/drawing/2014/main" id="{09544EDC-8C17-AE4B-036F-97A08EF7C98C}"/>
-              </a:ext>
-            </a:extLst>
-          </p:cNvPr>
-          <p:cNvSpPr txBox="1"/>
-          <p:nvPr/>
-        </p:nvSpPr>
-        <p:spPr>
-          <a:xfrm>
-            <a:off x="6699728" y="5555516"/>
-            <a:ext cx="752129" cy="369332"/>
-          </a:xfrm>
-          <a:prstGeom prst="rect">
-            <a:avLst/>
-          </a:prstGeom>
-          <a:noFill/>
-        </p:spPr>
-        <p:txBody>
-          <a:bodyPr wrap="none" rtlCol="0">
-            <a:spAutoFit/>
-          </a:bodyPr>
-          <a:lstStyle/>
-          <a:p>
-            <a:r>
-              <a:rPr lang="en-US" noProof="0" dirty="0" err="1"/>
-              <a:t>Noarr</a:t>
-            </a:r>
-            <a:endParaRPr lang="en-US" noProof="0" dirty="0"/>
-          </a:p>
-        </p:txBody>
-      </p:sp>
-      <p:sp>
-        <p:nvSpPr>
-          <p:cNvPr id="21" name="TextBox 20">
-            <a:extLst>
-              <a:ext uri="{FF2B5EF4-FFF2-40B4-BE49-F238E27FC236}">
-                <a16:creationId xmlns:a16="http://schemas.microsoft.com/office/drawing/2014/main" id="{0A41B583-F767-91B8-538B-75DE9DE7AF66}"/>
-              </a:ext>
-            </a:extLst>
-          </p:cNvPr>
-          <p:cNvSpPr txBox="1"/>
-          <p:nvPr/>
-        </p:nvSpPr>
-        <p:spPr>
-          <a:xfrm>
-            <a:off x="8079505" y="5555516"/>
-            <a:ext cx="344966" cy="369332"/>
-          </a:xfrm>
-          <a:prstGeom prst="rect">
-            <a:avLst/>
-          </a:prstGeom>
-          <a:noFill/>
-        </p:spPr>
-        <p:txBody>
-          <a:bodyPr wrap="none" rtlCol="0">
-            <a:spAutoFit/>
-          </a:bodyPr>
-          <a:lstStyle/>
-          <a:p>
-            <a:r>
-              <a:rPr lang="en-US" noProof="0" dirty="0">
-                <a:solidFill>
-                  <a:schemeClr val="bg2">
-                    <a:lumMod val="50000"/>
-                  </a:schemeClr>
-                </a:solidFill>
-              </a:rPr>
-              <a:t>C</a:t>
-            </a:r>
-          </a:p>
-        </p:txBody>
-      </p:sp>
-      <p:sp>
-        <p:nvSpPr>
-          <p:cNvPr id="22" name="Right Brace 21">
-            <a:extLst>
-              <a:ext uri="{FF2B5EF4-FFF2-40B4-BE49-F238E27FC236}">
-                <a16:creationId xmlns:a16="http://schemas.microsoft.com/office/drawing/2014/main" id="{F8913E04-5267-66BC-CE21-BB61AA117287}"/>
-              </a:ext>
-            </a:extLst>
-          </p:cNvPr>
-          <p:cNvSpPr/>
-          <p:nvPr/>
-        </p:nvSpPr>
-        <p:spPr>
-          <a:xfrm rot="16200000">
-            <a:off x="6122237" y="3315566"/>
-            <a:ext cx="230225" cy="4249671"/>
-          </a:xfrm>
-          <a:prstGeom prst="rightBrace">
-            <a:avLst/>
-          </a:prstGeom>
-        </p:spPr>
-        <p:style>
-          <a:lnRef idx="2">
-            <a:schemeClr val="accent1"/>
-          </a:lnRef>
-          <a:fillRef idx="0">
-            <a:schemeClr val="accent1"/>
-          </a:fillRef>
-          <a:effectRef idx="1">
-            <a:schemeClr val="accent1"/>
-          </a:effectRef>
-          <a:fontRef idx="minor">
-            <a:schemeClr val="tx1"/>
-          </a:fontRef>
-        </p:style>
-        <p:txBody>
-          <a:bodyPr rtlCol="0" anchor="ctr"/>
-          <a:lstStyle/>
-          <a:p>
-            <a:pPr algn="ctr"/>
-            <a:endParaRPr lang="en-US" noProof="0" dirty="0"/>
-          </a:p>
-        </p:txBody>
-      </p:sp>
-      <p:cxnSp>
-        <p:nvCxnSpPr>
-          <p:cNvPr id="24" name="Straight Arrow Connector 23">
-            <a:extLst>
-              <a:ext uri="{FF2B5EF4-FFF2-40B4-BE49-F238E27FC236}">
-                <a16:creationId xmlns:a16="http://schemas.microsoft.com/office/drawing/2014/main" id="{5FBD808A-C60E-D2B4-AE81-67F52D4FA591}"/>
-              </a:ext>
-            </a:extLst>
-          </p:cNvPr>
-          <p:cNvCxnSpPr>
-            <a:cxnSpLocks/>
-            <a:stCxn id="17" idx="0"/>
-            <a:endCxn id="7" idx="2"/>
-          </p:cNvCxnSpPr>
-          <p:nvPr/>
-        </p:nvCxnSpPr>
-        <p:spPr>
-          <a:xfrm flipV="1">
-            <a:off x="6232189" y="4178346"/>
-            <a:ext cx="5162" cy="750383"/>
-          </a:xfrm>
-          <a:prstGeom prst="straightConnector1">
-            <a:avLst/>
-          </a:prstGeom>
-          <a:ln>
-            <a:tailEnd type="triangle"/>
-          </a:ln>
-        </p:spPr>
-        <p:style>
-          <a:lnRef idx="2">
-            <a:schemeClr val="accent1"/>
-          </a:lnRef>
-          <a:fillRef idx="0">
-            <a:schemeClr val="accent1"/>
-          </a:fillRef>
-          <a:effectRef idx="1">
-            <a:schemeClr val="accent1"/>
-          </a:effectRef>
-          <a:fontRef idx="minor">
-            <a:schemeClr val="tx1"/>
-          </a:fontRef>
-        </p:style>
-      </p:cxnSp>
-      <p:sp>
-        <p:nvSpPr>
-          <p:cNvPr id="29" name="TextBox 28">
-            <a:extLst>
-              <a:ext uri="{FF2B5EF4-FFF2-40B4-BE49-F238E27FC236}">
-                <a16:creationId xmlns:a16="http://schemas.microsoft.com/office/drawing/2014/main" id="{A37A6BF4-23D3-4BC4-D822-08D7F02A8E4A}"/>
-              </a:ext>
-            </a:extLst>
-          </p:cNvPr>
-          <p:cNvSpPr txBox="1"/>
-          <p:nvPr/>
-        </p:nvSpPr>
-        <p:spPr>
-          <a:xfrm>
-            <a:off x="1864701" y="3224238"/>
-            <a:ext cx="1542410" cy="646331"/>
-          </a:xfrm>
-          <a:prstGeom prst="rect">
-            <a:avLst/>
-          </a:prstGeom>
-          <a:noFill/>
-          <a:ln>
-            <a:solidFill>
-              <a:schemeClr val="tx1"/>
-            </a:solidFill>
-          </a:ln>
-        </p:spPr>
-        <p:txBody>
-          <a:bodyPr wrap="none" rtlCol="0">
-            <a:spAutoFit/>
-          </a:bodyPr>
-          <a:lstStyle/>
-          <a:p>
-            <a:pPr algn="ctr"/>
-            <a:r>
-              <a:rPr lang="en-US" noProof="0" dirty="0" err="1"/>
-              <a:t>PolyBench</a:t>
-            </a:r>
-            <a:r>
-              <a:rPr lang="en-US" noProof="0" dirty="0"/>
-              <a:t>/C</a:t>
-            </a:r>
-          </a:p>
-          <a:p>
-            <a:pPr algn="ctr"/>
-            <a:r>
-              <a:rPr lang="en-US" i="1" noProof="0" dirty="0"/>
-              <a:t>30 algorithms</a:t>
-            </a:r>
-          </a:p>
-        </p:txBody>
-      </p:sp>
-      <p:cxnSp>
-        <p:nvCxnSpPr>
-          <p:cNvPr id="31" name="Straight Arrow Connector 30">
-            <a:extLst>
-              <a:ext uri="{FF2B5EF4-FFF2-40B4-BE49-F238E27FC236}">
-                <a16:creationId xmlns:a16="http://schemas.microsoft.com/office/drawing/2014/main" id="{3563A0DB-403A-ADCF-C3F1-0F9C8265FE3F}"/>
-              </a:ext>
-            </a:extLst>
-          </p:cNvPr>
-          <p:cNvCxnSpPr>
-            <a:stCxn id="29" idx="3"/>
-            <a:endCxn id="9" idx="1"/>
-          </p:cNvCxnSpPr>
-          <p:nvPr/>
-        </p:nvCxnSpPr>
-        <p:spPr>
-          <a:xfrm>
-            <a:off x="3407111" y="3547404"/>
-            <a:ext cx="456988" cy="0"/>
-          </a:xfrm>
-          <a:prstGeom prst="straightConnector1">
-            <a:avLst/>
-          </a:prstGeom>
-          <a:ln>
-            <a:tailEnd type="triangle"/>
-          </a:ln>
-        </p:spPr>
-        <p:style>
-          <a:lnRef idx="2">
-            <a:schemeClr val="accent1"/>
-          </a:lnRef>
-          <a:fillRef idx="0">
-            <a:schemeClr val="accent1"/>
-          </a:fillRef>
-          <a:effectRef idx="1">
-            <a:schemeClr val="accent1"/>
-          </a:effectRef>
-          <a:fontRef idx="minor">
-            <a:schemeClr val="tx1"/>
-          </a:fontRef>
-        </p:style>
-      </p:cxnSp>
-      <p:sp>
-        <p:nvSpPr>
-          <p:cNvPr id="33" name="Left Brace 32">
-            <a:extLst>
-              <a:ext uri="{FF2B5EF4-FFF2-40B4-BE49-F238E27FC236}">
-                <a16:creationId xmlns:a16="http://schemas.microsoft.com/office/drawing/2014/main" id="{6C2941FF-F0FF-E5E0-7D40-1745F519E03E}"/>
-              </a:ext>
-            </a:extLst>
-          </p:cNvPr>
-          <p:cNvSpPr/>
-          <p:nvPr/>
-        </p:nvSpPr>
-        <p:spPr>
-          <a:xfrm>
-            <a:off x="8610600" y="3259030"/>
-            <a:ext cx="114804" cy="549984"/>
-          </a:xfrm>
-          <a:prstGeom prst="leftBrace">
-            <a:avLst/>
-          </a:prstGeom>
-        </p:spPr>
-        <p:style>
-          <a:lnRef idx="2">
-            <a:schemeClr val="accent1"/>
-          </a:lnRef>
-          <a:fillRef idx="0">
-            <a:schemeClr val="accent1"/>
-          </a:fillRef>
-          <a:effectRef idx="1">
-            <a:schemeClr val="accent1"/>
-          </a:effectRef>
-          <a:fontRef idx="minor">
-            <a:schemeClr val="tx1"/>
-          </a:fontRef>
-        </p:style>
-        <p:txBody>
-          <a:bodyPr rtlCol="0" anchor="ctr"/>
-          <a:lstStyle/>
-          <a:p>
-            <a:pPr algn="ctr"/>
-            <a:endParaRPr lang="en-US" noProof="0" dirty="0"/>
-          </a:p>
-        </p:txBody>
-      </p:sp>
-      <p:sp>
-        <p:nvSpPr>
-          <p:cNvPr id="34" name="TextBox 33">
-            <a:extLst>
-              <a:ext uri="{FF2B5EF4-FFF2-40B4-BE49-F238E27FC236}">
-                <a16:creationId xmlns:a16="http://schemas.microsoft.com/office/drawing/2014/main" id="{C17EFA50-E483-F872-FFF7-0042EB900CD4}"/>
-              </a:ext>
-            </a:extLst>
-          </p:cNvPr>
-          <p:cNvSpPr txBox="1"/>
-          <p:nvPr/>
-        </p:nvSpPr>
-        <p:spPr>
-          <a:xfrm>
-            <a:off x="8725404" y="3164074"/>
-            <a:ext cx="1414233" cy="369332"/>
-          </a:xfrm>
-          <a:prstGeom prst="rect">
-            <a:avLst/>
-          </a:prstGeom>
-          <a:noFill/>
-        </p:spPr>
-        <p:txBody>
-          <a:bodyPr wrap="none" rtlCol="0">
-            <a:spAutoFit/>
-          </a:bodyPr>
-          <a:lstStyle/>
-          <a:p>
-            <a:r>
-              <a:rPr lang="en-US" noProof="0" dirty="0"/>
-              <a:t>Correctness</a:t>
-            </a:r>
-          </a:p>
-        </p:txBody>
-      </p:sp>
-      <p:sp>
-        <p:nvSpPr>
-          <p:cNvPr id="36" name="TextBox 35">
-            <a:extLst>
-              <a:ext uri="{FF2B5EF4-FFF2-40B4-BE49-F238E27FC236}">
-                <a16:creationId xmlns:a16="http://schemas.microsoft.com/office/drawing/2014/main" id="{2F778B3F-0584-FE3C-1B8D-FA252396DDD7}"/>
-              </a:ext>
-            </a:extLst>
-          </p:cNvPr>
-          <p:cNvSpPr txBox="1"/>
-          <p:nvPr/>
-        </p:nvSpPr>
-        <p:spPr>
-          <a:xfrm>
-            <a:off x="8854766" y="3439682"/>
-            <a:ext cx="1155509" cy="369332"/>
-          </a:xfrm>
-          <a:prstGeom prst="rect">
-            <a:avLst/>
-          </a:prstGeom>
-          <a:noFill/>
-        </p:spPr>
-        <p:txBody>
-          <a:bodyPr wrap="none" rtlCol="0">
-            <a:spAutoFit/>
-          </a:bodyPr>
-          <a:lstStyle/>
-          <a:p>
-            <a:r>
-              <a:rPr lang="en-US" noProof="0" dirty="0"/>
-              <a:t>Efficiency</a:t>
-            </a:r>
+            <a:endParaRPr lang="en-US"/>
           </a:p>
         </p:txBody>
       </p:sp>
     </p:spTree>
     <p:extLst>
       <p:ext uri="{BB962C8B-B14F-4D97-AF65-F5344CB8AC3E}">
-        <p14:creationId xmlns:p14="http://schemas.microsoft.com/office/powerpoint/2010/main" val="270770237"/>
+        <p14:creationId xmlns:p14="http://schemas.microsoft.com/office/powerpoint/2010/main" val="3418108369"/>
       </p:ext>
     </p:extLst>
   </p:cSld>
@@ -18704,7 +19112,7 @@
 </p:sld>
 </file>
 
-<file path=ppt/slides/slide25.xml><?xml version="1.0" encoding="utf-8"?>
+<file path=ppt/slides/slide26.xml><?xml version="1.0" encoding="utf-8"?>
 <p:sld xmlns:a="http://schemas.openxmlformats.org/drawingml/2006/main" xmlns:r="http://schemas.openxmlformats.org/officeDocument/2006/relationships" xmlns:p="http://schemas.openxmlformats.org/presentationml/2006/main">
   <p:cSld>
     <p:spTree>
@@ -18951,7 +19359,7 @@
           <a:p>
             <a:r>
               <a:rPr lang="en-US" noProof="0" dirty="0"/>
-              <a:t>LLMs and Abstractions</a:t>
+              <a:t>LLMs and abstractions</a:t>
             </a:r>
           </a:p>
         </p:txBody>
@@ -19008,7 +19416,7 @@
           <a:p>
             <a:fld id="{DA0BB241-1B5F-4309-9407-9EEA04D9598D}" type="slidenum">
               <a:rPr lang="en-US" noProof="0" smtClean="0"/>
-              <a:t>25</a:t>
+              <a:t>26</a:t>
             </a:fld>
             <a:endParaRPr lang="en-US" noProof="0" dirty="0"/>
           </a:p>
@@ -19486,7 +19894,7 @@
 </p:sld>
 </file>
 
-<file path=ppt/slides/slide26.xml><?xml version="1.0" encoding="utf-8"?>
+<file path=ppt/slides/slide27.xml><?xml version="1.0" encoding="utf-8"?>
 <p:sld xmlns:a="http://schemas.openxmlformats.org/drawingml/2006/main" xmlns:r="http://schemas.openxmlformats.org/officeDocument/2006/relationships" xmlns:p="http://schemas.openxmlformats.org/presentationml/2006/main">
   <p:cSld>
     <p:spTree>
@@ -19555,7 +19963,7 @@
           <a:p>
             <a:fld id="{DA0BB241-1B5F-4309-9407-9EEA04D9598D}" type="slidenum">
               <a:rPr lang="en-US" noProof="0" smtClean="0"/>
-              <a:t>26</a:t>
+              <a:t>27</a:t>
             </a:fld>
             <a:endParaRPr lang="en-US" noProof="0" dirty="0"/>
           </a:p>
@@ -19684,193 +20092,6 @@
 </p:sld>
 </file>
 
-<file path=ppt/slides/slide27.xml><?xml version="1.0" encoding="utf-8"?>
-<p:sld xmlns:a="http://schemas.openxmlformats.org/drawingml/2006/main" xmlns:r="http://schemas.openxmlformats.org/officeDocument/2006/relationships" xmlns:p="http://schemas.openxmlformats.org/presentationml/2006/main">
-  <p:cSld>
-    <p:spTree>
-      <p:nvGrpSpPr>
-        <p:cNvPr id="1" name=""/>
-        <p:cNvGrpSpPr/>
-        <p:nvPr/>
-      </p:nvGrpSpPr>
-      <p:grpSpPr>
-        <a:xfrm>
-          <a:off x="0" y="0"/>
-          <a:ext cx="0" cy="0"/>
-          <a:chOff x="0" y="0"/>
-          <a:chExt cx="0" cy="0"/>
-        </a:xfrm>
-      </p:grpSpPr>
-      <p:sp>
-        <p:nvSpPr>
-          <p:cNvPr id="6" name="Title 5">
-            <a:extLst>
-              <a:ext uri="{FF2B5EF4-FFF2-40B4-BE49-F238E27FC236}">
-                <a16:creationId xmlns:a16="http://schemas.microsoft.com/office/drawing/2014/main" id="{5054ED28-5B59-E4A7-513A-4F06F356F3F4}"/>
-              </a:ext>
-            </a:extLst>
-          </p:cNvPr>
-          <p:cNvSpPr>
-            <a:spLocks noGrp="1"/>
-          </p:cNvSpPr>
-          <p:nvPr>
-            <p:ph type="title"/>
-          </p:nvPr>
-        </p:nvSpPr>
-        <p:spPr/>
-        <p:txBody>
-          <a:bodyPr/>
-          <a:lstStyle/>
-          <a:p>
-            <a:r>
-              <a:rPr lang="en-US" noProof="0" dirty="0"/>
-              <a:t>LLM-directed optimization summary</a:t>
-            </a:r>
-          </a:p>
-        </p:txBody>
-      </p:sp>
-      <p:sp>
-        <p:nvSpPr>
-          <p:cNvPr id="7" name="Content Placeholder 6">
-            <a:extLst>
-              <a:ext uri="{FF2B5EF4-FFF2-40B4-BE49-F238E27FC236}">
-                <a16:creationId xmlns:a16="http://schemas.microsoft.com/office/drawing/2014/main" id="{BCF66668-3BAD-E37E-63AF-30E04874E872}"/>
-              </a:ext>
-            </a:extLst>
-          </p:cNvPr>
-          <p:cNvSpPr>
-            <a:spLocks noGrp="1"/>
-          </p:cNvSpPr>
-          <p:nvPr>
-            <p:ph idx="1"/>
-          </p:nvPr>
-        </p:nvSpPr>
-        <p:spPr/>
-        <p:txBody>
-          <a:bodyPr/>
-          <a:lstStyle/>
-          <a:p>
-            <a:r>
-              <a:rPr lang="en-US" noProof="0" dirty="0"/>
-              <a:t>Prompting specificity</a:t>
-            </a:r>
-          </a:p>
-          <a:p>
-            <a:r>
-              <a:rPr lang="en-US" noProof="0" dirty="0"/>
-              <a:t>Contemporary abstractions do not help</a:t>
-            </a:r>
-          </a:p>
-          <a:p>
-            <a:endParaRPr lang="en-US" noProof="0" dirty="0"/>
-          </a:p>
-          <a:p>
-            <a:r>
-              <a:rPr lang="en-US" noProof="0" dirty="0"/>
-              <a:t>Future research</a:t>
-            </a:r>
-          </a:p>
-          <a:p>
-            <a:pPr lvl="1"/>
-            <a:r>
-              <a:rPr lang="en-US" noProof="0" dirty="0"/>
-              <a:t>Re-evaluate on agentic LLMs</a:t>
-            </a:r>
-          </a:p>
-          <a:p>
-            <a:pPr lvl="2"/>
-            <a:r>
-              <a:rPr lang="en-US" noProof="0" dirty="0"/>
-              <a:t>Automatically gather feedback</a:t>
-            </a:r>
-          </a:p>
-          <a:p>
-            <a:pPr lvl="2"/>
-            <a:r>
-              <a:rPr lang="en-US" noProof="0" dirty="0"/>
-              <a:t>Can collect necessary context (e.g., work with abstraction reference)</a:t>
-            </a:r>
-          </a:p>
-          <a:p>
-            <a:pPr lvl="1"/>
-            <a:r>
-              <a:rPr lang="en-US" noProof="0" dirty="0"/>
-              <a:t>More LLM-focused abstractions or scaffolding</a:t>
-            </a:r>
-          </a:p>
-        </p:txBody>
-      </p:sp>
-      <p:sp>
-        <p:nvSpPr>
-          <p:cNvPr id="2" name="Date Placeholder 1">
-            <a:extLst>
-              <a:ext uri="{FF2B5EF4-FFF2-40B4-BE49-F238E27FC236}">
-                <a16:creationId xmlns:a16="http://schemas.microsoft.com/office/drawing/2014/main" id="{12E3398E-268D-A00A-DD6D-029BB4AC95CE}"/>
-              </a:ext>
-            </a:extLst>
-          </p:cNvPr>
-          <p:cNvSpPr>
-            <a:spLocks noGrp="1"/>
-          </p:cNvSpPr>
-          <p:nvPr>
-            <p:ph type="dt" sz="half" idx="10"/>
-          </p:nvPr>
-        </p:nvSpPr>
-        <p:spPr/>
-        <p:txBody>
-          <a:bodyPr/>
-          <a:lstStyle/>
-          <a:p>
-            <a:fld id="{2E4D20BF-4C0E-41E5-B4FC-9D48FCD3AF33}" type="datetime1">
-              <a:rPr lang="en-US" noProof="0" smtClean="0"/>
-              <a:t>8/29/2026</a:t>
-            </a:fld>
-            <a:endParaRPr lang="en-US" noProof="0" dirty="0"/>
-          </a:p>
-        </p:txBody>
-      </p:sp>
-      <p:sp>
-        <p:nvSpPr>
-          <p:cNvPr id="3" name="Slide Number Placeholder 2">
-            <a:extLst>
-              <a:ext uri="{FF2B5EF4-FFF2-40B4-BE49-F238E27FC236}">
-                <a16:creationId xmlns:a16="http://schemas.microsoft.com/office/drawing/2014/main" id="{DEA52200-683B-032B-050F-13B46C40BC60}"/>
-              </a:ext>
-            </a:extLst>
-          </p:cNvPr>
-          <p:cNvSpPr>
-            <a:spLocks noGrp="1"/>
-          </p:cNvSpPr>
-          <p:nvPr>
-            <p:ph type="sldNum" sz="quarter" idx="12"/>
-          </p:nvPr>
-        </p:nvSpPr>
-        <p:spPr/>
-        <p:txBody>
-          <a:bodyPr/>
-          <a:lstStyle/>
-          <a:p>
-            <a:fld id="{DA0BB241-1B5F-4309-9407-9EEA04D9598D}" type="slidenum">
-              <a:rPr lang="en-US" noProof="0" smtClean="0"/>
-              <a:t>27</a:t>
-            </a:fld>
-            <a:endParaRPr lang="en-US" noProof="0" dirty="0"/>
-          </a:p>
-        </p:txBody>
-      </p:sp>
-    </p:spTree>
-    <p:extLst>
-      <p:ext uri="{BB962C8B-B14F-4D97-AF65-F5344CB8AC3E}">
-        <p14:creationId xmlns:p14="http://schemas.microsoft.com/office/powerpoint/2010/main" val="2709945850"/>
-      </p:ext>
-    </p:extLst>
-  </p:cSld>
-  <p:clrMapOvr>
-    <a:masterClrMapping/>
-  </p:clrMapOvr>
-</p:sld>
-</file>
-
 <file path=ppt/slides/slide28.xml><?xml version="1.0" encoding="utf-8"?>
 <p:sld xmlns:a="http://schemas.openxmlformats.org/drawingml/2006/main" xmlns:r="http://schemas.openxmlformats.org/officeDocument/2006/relationships" xmlns:p="http://schemas.openxmlformats.org/presentationml/2006/main">
   <p:cSld>
@@ -19898,10 +20119,10 @@
       </p:grpSpPr>
       <p:sp>
         <p:nvSpPr>
-          <p:cNvPr id="2" name="Title 1">
-            <a:extLst>
-              <a:ext uri="{FF2B5EF4-FFF2-40B4-BE49-F238E27FC236}">
-                <a16:creationId xmlns:a16="http://schemas.microsoft.com/office/drawing/2014/main" id="{6447B745-9B50-DD90-5161-BD2A06CEA44B}"/>
+          <p:cNvPr id="6" name="Title 5">
+            <a:extLst>
+              <a:ext uri="{FF2B5EF4-FFF2-40B4-BE49-F238E27FC236}">
+                <a16:creationId xmlns:a16="http://schemas.microsoft.com/office/drawing/2014/main" id="{5054ED28-5B59-E4A7-513A-4F06F356F3F4}"/>
               </a:ext>
             </a:extLst>
           </p:cNvPr>
@@ -19919,17 +20140,92 @@
           <a:p>
             <a:r>
               <a:rPr lang="en-US" noProof="0" dirty="0"/>
-              <a:t>Contribution map</a:t>
-            </a:r>
-          </a:p>
-        </p:txBody>
-      </p:sp>
-      <p:sp>
-        <p:nvSpPr>
-          <p:cNvPr id="3" name="Date Placeholder 2">
-            <a:extLst>
-              <a:ext uri="{FF2B5EF4-FFF2-40B4-BE49-F238E27FC236}">
-                <a16:creationId xmlns:a16="http://schemas.microsoft.com/office/drawing/2014/main" id="{BD7C89E2-483C-AAE2-A28B-882731CF7B1F}"/>
+              <a:t>LLM-directed optimization summary</a:t>
+            </a:r>
+          </a:p>
+        </p:txBody>
+      </p:sp>
+      <p:sp>
+        <p:nvSpPr>
+          <p:cNvPr id="7" name="Content Placeholder 6">
+            <a:extLst>
+              <a:ext uri="{FF2B5EF4-FFF2-40B4-BE49-F238E27FC236}">
+                <a16:creationId xmlns:a16="http://schemas.microsoft.com/office/drawing/2014/main" id="{BCF66668-3BAD-E37E-63AF-30E04874E872}"/>
+              </a:ext>
+            </a:extLst>
+          </p:cNvPr>
+          <p:cNvSpPr>
+            <a:spLocks noGrp="1"/>
+          </p:cNvSpPr>
+          <p:nvPr>
+            <p:ph idx="1"/>
+          </p:nvPr>
+        </p:nvSpPr>
+        <p:spPr/>
+        <p:txBody>
+          <a:bodyPr/>
+          <a:lstStyle/>
+          <a:p>
+            <a:r>
+              <a:rPr lang="en-US" noProof="0" dirty="0"/>
+              <a:t>Prompting specificity</a:t>
+            </a:r>
+          </a:p>
+          <a:p>
+            <a:r>
+              <a:rPr lang="en-US" noProof="0" dirty="0"/>
+              <a:t>Contemporary abstractions do not help</a:t>
+            </a:r>
+          </a:p>
+          <a:p>
+            <a:endParaRPr lang="en-US" noProof="0" dirty="0"/>
+          </a:p>
+          <a:p>
+            <a:r>
+              <a:rPr lang="en-US" noProof="0" dirty="0">
+                <a:solidFill>
+                  <a:srgbClr val="FF0000"/>
+                </a:solidFill>
+              </a:rPr>
+              <a:t>Future research</a:t>
+            </a:r>
+          </a:p>
+          <a:p>
+            <a:pPr lvl="1"/>
+            <a:r>
+              <a:rPr lang="en-US" noProof="0" dirty="0"/>
+              <a:t>Re-evaluate on agentic LLMs</a:t>
+            </a:r>
+          </a:p>
+          <a:p>
+            <a:pPr lvl="2"/>
+            <a:r>
+              <a:rPr lang="en-US" noProof="0" dirty="0"/>
+              <a:t>Automatically gather feedback</a:t>
+            </a:r>
+          </a:p>
+          <a:p>
+            <a:pPr lvl="2"/>
+            <a:r>
+              <a:rPr lang="en-US" noProof="0" dirty="0"/>
+              <a:t>Can collect necessary context (e.g., work with abstraction reference)</a:t>
+            </a:r>
+          </a:p>
+          <a:p>
+            <a:pPr lvl="1"/>
+            <a:r>
+              <a:rPr lang="en-US" noProof="0" dirty="0"/>
+              <a:t>More LLM-focused abstractions or scaffolding</a:t>
+            </a:r>
+          </a:p>
+        </p:txBody>
+      </p:sp>
+      <p:sp>
+        <p:nvSpPr>
+          <p:cNvPr id="2" name="Date Placeholder 1">
+            <a:extLst>
+              <a:ext uri="{FF2B5EF4-FFF2-40B4-BE49-F238E27FC236}">
+                <a16:creationId xmlns:a16="http://schemas.microsoft.com/office/drawing/2014/main" id="{12E3398E-268D-A00A-DD6D-029BB4AC95CE}"/>
               </a:ext>
             </a:extLst>
           </p:cNvPr>
@@ -19945,7 +20241,7 @@
           <a:bodyPr/>
           <a:lstStyle/>
           <a:p>
-            <a:fld id="{6DAC1E11-C476-4762-AFFB-C3D6ECD7A44E}" type="datetime1">
+            <a:fld id="{2E4D20BF-4C0E-41E5-B4FC-9D48FCD3AF33}" type="datetime1">
               <a:rPr lang="en-US" noProof="0" smtClean="0"/>
               <a:t>8/29/2026</a:t>
             </a:fld>
@@ -19955,10 +20251,10 @@
       </p:sp>
       <p:sp>
         <p:nvSpPr>
-          <p:cNvPr id="4" name="Slide Number Placeholder 3">
-            <a:extLst>
-              <a:ext uri="{FF2B5EF4-FFF2-40B4-BE49-F238E27FC236}">
-                <a16:creationId xmlns:a16="http://schemas.microsoft.com/office/drawing/2014/main" id="{1EE703C1-86DF-7428-224F-96B06FB73E3C}"/>
+          <p:cNvPr id="3" name="Slide Number Placeholder 2">
+            <a:extLst>
+              <a:ext uri="{FF2B5EF4-FFF2-40B4-BE49-F238E27FC236}">
+                <a16:creationId xmlns:a16="http://schemas.microsoft.com/office/drawing/2014/main" id="{DEA52200-683B-032B-050F-13B46C40BC60}"/>
               </a:ext>
             </a:extLst>
           </p:cNvPr>
@@ -19982,6 +20278,122 @@
           </a:p>
         </p:txBody>
       </p:sp>
+    </p:spTree>
+    <p:extLst>
+      <p:ext uri="{BB962C8B-B14F-4D97-AF65-F5344CB8AC3E}">
+        <p14:creationId xmlns:p14="http://schemas.microsoft.com/office/powerpoint/2010/main" val="2709945850"/>
+      </p:ext>
+    </p:extLst>
+  </p:cSld>
+  <p:clrMapOvr>
+    <a:masterClrMapping/>
+  </p:clrMapOvr>
+</p:sld>
+</file>
+
+<file path=ppt/slides/slide29.xml><?xml version="1.0" encoding="utf-8"?>
+<p:sld xmlns:a="http://schemas.openxmlformats.org/drawingml/2006/main" xmlns:r="http://schemas.openxmlformats.org/officeDocument/2006/relationships" xmlns:p="http://schemas.openxmlformats.org/presentationml/2006/main">
+  <p:cSld>
+    <p:spTree>
+      <p:nvGrpSpPr>
+        <p:cNvPr id="1" name=""/>
+        <p:cNvGrpSpPr/>
+        <p:nvPr/>
+      </p:nvGrpSpPr>
+      <p:grpSpPr>
+        <a:xfrm>
+          <a:off x="0" y="0"/>
+          <a:ext cx="0" cy="0"/>
+          <a:chOff x="0" y="0"/>
+          <a:chExt cx="0" cy="0"/>
+        </a:xfrm>
+      </p:grpSpPr>
+      <p:sp>
+        <p:nvSpPr>
+          <p:cNvPr id="2" name="Title 1">
+            <a:extLst>
+              <a:ext uri="{FF2B5EF4-FFF2-40B4-BE49-F238E27FC236}">
+                <a16:creationId xmlns:a16="http://schemas.microsoft.com/office/drawing/2014/main" id="{6447B745-9B50-DD90-5161-BD2A06CEA44B}"/>
+              </a:ext>
+            </a:extLst>
+          </p:cNvPr>
+          <p:cNvSpPr>
+            <a:spLocks noGrp="1"/>
+          </p:cNvSpPr>
+          <p:nvPr>
+            <p:ph type="title"/>
+          </p:nvPr>
+        </p:nvSpPr>
+        <p:spPr/>
+        <p:txBody>
+          <a:bodyPr/>
+          <a:lstStyle/>
+          <a:p>
+            <a:r>
+              <a:rPr lang="en-US" noProof="0" dirty="0"/>
+              <a:t>Contribution map</a:t>
+            </a:r>
+          </a:p>
+        </p:txBody>
+      </p:sp>
+      <p:sp>
+        <p:nvSpPr>
+          <p:cNvPr id="3" name="Date Placeholder 2">
+            <a:extLst>
+              <a:ext uri="{FF2B5EF4-FFF2-40B4-BE49-F238E27FC236}">
+                <a16:creationId xmlns:a16="http://schemas.microsoft.com/office/drawing/2014/main" id="{BD7C89E2-483C-AAE2-A28B-882731CF7B1F}"/>
+              </a:ext>
+            </a:extLst>
+          </p:cNvPr>
+          <p:cNvSpPr>
+            <a:spLocks noGrp="1"/>
+          </p:cNvSpPr>
+          <p:nvPr>
+            <p:ph type="dt" sz="half" idx="10"/>
+          </p:nvPr>
+        </p:nvSpPr>
+        <p:spPr/>
+        <p:txBody>
+          <a:bodyPr/>
+          <a:lstStyle/>
+          <a:p>
+            <a:fld id="{6DAC1E11-C476-4762-AFFB-C3D6ECD7A44E}" type="datetime1">
+              <a:rPr lang="en-US" noProof="0" smtClean="0"/>
+              <a:t>8/29/2026</a:t>
+            </a:fld>
+            <a:endParaRPr lang="en-US" noProof="0" dirty="0"/>
+          </a:p>
+        </p:txBody>
+      </p:sp>
+      <p:sp>
+        <p:nvSpPr>
+          <p:cNvPr id="4" name="Slide Number Placeholder 3">
+            <a:extLst>
+              <a:ext uri="{FF2B5EF4-FFF2-40B4-BE49-F238E27FC236}">
+                <a16:creationId xmlns:a16="http://schemas.microsoft.com/office/drawing/2014/main" id="{1EE703C1-86DF-7428-224F-96B06FB73E3C}"/>
+              </a:ext>
+            </a:extLst>
+          </p:cNvPr>
+          <p:cNvSpPr>
+            <a:spLocks noGrp="1"/>
+          </p:cNvSpPr>
+          <p:nvPr>
+            <p:ph type="sldNum" sz="quarter" idx="12"/>
+          </p:nvPr>
+        </p:nvSpPr>
+        <p:spPr/>
+        <p:txBody>
+          <a:bodyPr/>
+          <a:lstStyle/>
+          <a:p>
+            <a:fld id="{DA0BB241-1B5F-4309-9407-9EEA04D9598D}" type="slidenum">
+              <a:rPr lang="en-US" noProof="0" smtClean="0"/>
+              <a:t>29</a:t>
+            </a:fld>
+            <a:endParaRPr lang="en-US" noProof="0" dirty="0"/>
+          </a:p>
+        </p:txBody>
+      </p:sp>
       <p:sp>
         <p:nvSpPr>
           <p:cNvPr id="6" name="TextBox 5">
@@ -19996,8 +20408,8 @@
         </p:nvSpPr>
         <p:spPr>
           <a:xfrm>
-            <a:off x="-20481" y="3707894"/>
-            <a:ext cx="2441744" cy="408623"/>
+            <a:off x="796339" y="3540214"/>
+            <a:ext cx="1337160" cy="408623"/>
           </a:xfrm>
           <a:prstGeom prst="roundRect">
             <a:avLst/>
@@ -20054,7 +20466,7 @@
             <a:pPr algn="ctr"/>
             <a:r>
               <a:rPr lang="en-US" noProof="0" dirty="0"/>
-              <a:t>Distributed computing</a:t>
+              <a:t>Distributed</a:t>
             </a:r>
           </a:p>
         </p:txBody>
@@ -20073,8 +20485,8 @@
         </p:nvSpPr>
         <p:spPr>
           <a:xfrm>
-            <a:off x="1050704" y="1964514"/>
-            <a:ext cx="2062430" cy="408623"/>
+            <a:off x="1578385" y="1964514"/>
+            <a:ext cx="1007068" cy="408623"/>
           </a:xfrm>
           <a:prstGeom prst="roundRect">
             <a:avLst/>
@@ -20131,7 +20543,7 @@
             <a:pPr algn="ctr"/>
             <a:r>
               <a:rPr lang="en-US" noProof="0" dirty="0"/>
-              <a:t>Layout abstraction</a:t>
+              <a:t>Layouts</a:t>
             </a:r>
           </a:p>
         </p:txBody>
@@ -20150,8 +20562,8 @@
         </p:nvSpPr>
         <p:spPr>
           <a:xfrm>
-            <a:off x="1407869" y="2519945"/>
-            <a:ext cx="2277820" cy="408623"/>
+            <a:off x="2202790" y="2704852"/>
+            <a:ext cx="1218131" cy="408623"/>
           </a:xfrm>
           <a:prstGeom prst="roundRect">
             <a:avLst/>
@@ -20208,7 +20620,7 @@
             <a:pPr algn="ctr"/>
             <a:r>
               <a:rPr lang="en-US" noProof="0" dirty="0"/>
-              <a:t>Traversal abstraction</a:t>
+              <a:t>Traversals</a:t>
             </a:r>
           </a:p>
         </p:txBody>
@@ -20227,8 +20639,8 @@
         </p:nvSpPr>
         <p:spPr>
           <a:xfrm>
-            <a:off x="2276742" y="3179715"/>
-            <a:ext cx="2481752" cy="408623"/>
+            <a:off x="3180692" y="3587248"/>
+            <a:ext cx="1310504" cy="408623"/>
           </a:xfrm>
           <a:prstGeom prst="roundRect">
             <a:avLst/>
@@ -20285,7 +20697,7 @@
             <a:pPr algn="ctr"/>
             <a:r>
               <a:rPr lang="en-US" noProof="0" dirty="0"/>
-              <a:t>Autotuning abstraction</a:t>
+              <a:t>Autotuning</a:t>
             </a:r>
           </a:p>
         </p:txBody>
@@ -20304,7 +20716,7 @@
         </p:nvSpPr>
         <p:spPr>
           <a:xfrm>
-            <a:off x="9271328" y="1703501"/>
+            <a:off x="9394667" y="1602719"/>
             <a:ext cx="2027218" cy="408623"/>
           </a:xfrm>
           <a:prstGeom prst="roundRect">
@@ -20355,8 +20767,8 @@
         </p:nvSpPr>
         <p:spPr>
           <a:xfrm>
-            <a:off x="8530735" y="2245918"/>
-            <a:ext cx="3508404" cy="408623"/>
+            <a:off x="9073599" y="2712837"/>
+            <a:ext cx="2669353" cy="476488"/>
           </a:xfrm>
           <a:prstGeom prst="roundRect">
             <a:avLst>
@@ -20413,8 +20825,13 @@
             <a:pPr algn="ctr"/>
             <a:r>
               <a:rPr lang="en-US" noProof="0" dirty="0"/>
-              <a:t>Bit-level encoding and evaluation</a:t>
-            </a:r>
+              <a:t>Bitwise encoding of </a:t>
+            </a:r>
+            <a:r>
+              <a:rPr lang="en-US" noProof="0" dirty="0" err="1"/>
+              <a:t>GoL</a:t>
+            </a:r>
+            <a:endParaRPr lang="en-US" noProof="0" dirty="0"/>
           </a:p>
         </p:txBody>
       </p:sp>
@@ -20432,8 +20849,8 @@
         </p:nvSpPr>
         <p:spPr>
           <a:xfrm>
-            <a:off x="6275060" y="2821747"/>
-            <a:ext cx="3610369" cy="408623"/>
+            <a:off x="6617359" y="2114333"/>
+            <a:ext cx="1776972" cy="487204"/>
           </a:xfrm>
           <a:prstGeom prst="roundRect">
             <a:avLst>
@@ -20492,7 +20909,7 @@
             <a:pPr algn="ctr"/>
             <a:r>
               <a:rPr lang="en-US" noProof="0" dirty="0"/>
-              <a:t>Abstractions for cellular automata</a:t>
+              <a:t>CA abstraction</a:t>
             </a:r>
           </a:p>
         </p:txBody>
@@ -20511,7 +20928,7 @@
         </p:nvSpPr>
         <p:spPr>
           <a:xfrm>
-            <a:off x="6854601" y="4108664"/>
+            <a:off x="6781927" y="4959624"/>
             <a:ext cx="2529026" cy="369332"/>
           </a:xfrm>
           <a:prstGeom prst="rect">
@@ -20588,7 +21005,7 @@
         </p:nvSpPr>
         <p:spPr>
           <a:xfrm>
-            <a:off x="4605836" y="3600524"/>
+            <a:off x="4857296" y="3941654"/>
             <a:ext cx="2433487" cy="369332"/>
           </a:xfrm>
           <a:prstGeom prst="rect">
@@ -20662,8 +21079,8 @@
         </p:nvSpPr>
         <p:spPr>
           <a:xfrm>
-            <a:off x="82007" y="1421002"/>
-            <a:ext cx="3952877" cy="369332"/>
+            <a:off x="309634" y="1421002"/>
+            <a:ext cx="3497625" cy="369332"/>
           </a:xfrm>
           <a:prstGeom prst="rect">
             <a:avLst/>
@@ -20692,7 +21109,7 @@
             <a:pPr algn="ctr"/>
             <a:r>
               <a:rPr lang="en-US" noProof="0" dirty="0"/>
-              <a:t>General-purpose scientific computing</a:t>
+              <a:t>General-purpose HPC computing</a:t>
             </a:r>
           </a:p>
         </p:txBody>
@@ -20711,8 +21128,8 @@
         </p:nvSpPr>
         <p:spPr>
           <a:xfrm>
-            <a:off x="7070880" y="405111"/>
-            <a:ext cx="3913251" cy="369332"/>
+            <a:off x="7421845" y="304329"/>
+            <a:ext cx="3457998" cy="369332"/>
           </a:xfrm>
           <a:prstGeom prst="rect">
             <a:avLst/>
@@ -20741,7 +21158,7 @@
             <a:pPr algn="ctr"/>
             <a:r>
               <a:rPr lang="en-US" noProof="0" dirty="0"/>
-              <a:t>Domain-specific scientific computing</a:t>
+              <a:t>Domain-specific HPC computing</a:t>
             </a:r>
           </a:p>
         </p:txBody>
@@ -20760,7 +21177,7 @@
         </p:nvSpPr>
         <p:spPr>
           <a:xfrm>
-            <a:off x="9173315" y="1095173"/>
+            <a:off x="9296654" y="994391"/>
             <a:ext cx="2223245" cy="408623"/>
           </a:xfrm>
           <a:prstGeom prst="roundRect">
@@ -20811,7 +21228,7 @@
         </p:nvSpPr>
         <p:spPr>
           <a:xfrm>
-            <a:off x="9860746" y="4702220"/>
+            <a:off x="8610600" y="5993832"/>
             <a:ext cx="2246769" cy="369332"/>
           </a:xfrm>
           <a:prstGeom prst="rect">
@@ -20910,7 +21327,7 @@
         <p:spPr>
           <a:xfrm>
             <a:off x="1561243" y="5903812"/>
-            <a:ext cx="2339038" cy="369332"/>
+            <a:ext cx="3203056" cy="369332"/>
           </a:xfrm>
           <a:prstGeom prst="rect">
             <a:avLst/>
@@ -20938,7 +21355,7 @@
           <a:p>
             <a:r>
               <a:rPr lang="en-US" noProof="0" dirty="0"/>
-              <a:t>GPU algorithm design</a:t>
+              <a:t>GPU-specific algorithm design</a:t>
             </a:r>
           </a:p>
         </p:txBody>
@@ -20958,7 +21375,7 @@
         <p:spPr>
           <a:xfrm>
             <a:off x="2628617" y="4473316"/>
-            <a:ext cx="3338136" cy="408623"/>
+            <a:ext cx="2397292" cy="501491"/>
           </a:xfrm>
           <a:prstGeom prst="roundRect">
             <a:avLst>
@@ -21013,8 +21430,12 @@
           <a:lstStyle/>
           <a:p>
             <a:r>
+              <a:rPr lang="en-US" noProof="0" dirty="0" err="1"/>
+              <a:t>kNN</a:t>
+            </a:r>
+            <a:r>
               <a:rPr lang="en-US" noProof="0" dirty="0"/>
-              <a:t>Utilizing efficient </a:t>
+              <a:t> with </a:t>
             </a:r>
             <a:r>
               <a:rPr lang="en-US" noProof="0" dirty="0" err="1"/>
@@ -21022,7 +21443,7 @@
             </a:r>
             <a:r>
               <a:rPr lang="en-US" noProof="0" dirty="0"/>
-              <a:t> sorting</a:t>
+              <a:t> sort</a:t>
             </a:r>
           </a:p>
         </p:txBody>
@@ -21044,8 +21465,8 @@
         </p:nvCxnSpPr>
         <p:spPr>
           <a:xfrm flipH="1" flipV="1">
-            <a:off x="2058446" y="1790334"/>
-            <a:ext cx="23473" cy="174180"/>
+            <a:off x="2058447" y="1790334"/>
+            <a:ext cx="23472" cy="174180"/>
           </a:xfrm>
           <a:prstGeom prst="line">
             <a:avLst/>
@@ -21092,7 +21513,7 @@
         <p:spPr>
           <a:xfrm>
             <a:off x="2081919" y="2373137"/>
-            <a:ext cx="464860" cy="146808"/>
+            <a:ext cx="729937" cy="331715"/>
           </a:xfrm>
           <a:prstGeom prst="line">
             <a:avLst/>
@@ -21138,8 +21559,8 @@
         </p:nvCxnSpPr>
         <p:spPr>
           <a:xfrm flipH="1">
-            <a:off x="1200391" y="2928568"/>
-            <a:ext cx="1346388" cy="779326"/>
+            <a:off x="1464919" y="3113475"/>
+            <a:ext cx="1346937" cy="426739"/>
           </a:xfrm>
           <a:prstGeom prst="line">
             <a:avLst/>
@@ -21185,8 +21606,8 @@
         </p:nvCxnSpPr>
         <p:spPr>
           <a:xfrm>
-            <a:off x="2546779" y="2928568"/>
-            <a:ext cx="970839" cy="251147"/>
+            <a:off x="2811856" y="3113475"/>
+            <a:ext cx="1024088" cy="473773"/>
           </a:xfrm>
           <a:prstGeom prst="line">
             <a:avLst/>
@@ -21231,8 +21652,8 @@
         </p:nvCxnSpPr>
         <p:spPr>
           <a:xfrm>
-            <a:off x="9027506" y="774443"/>
-            <a:ext cx="1257432" cy="320730"/>
+            <a:off x="9150844" y="673661"/>
+            <a:ext cx="1257433" cy="320730"/>
           </a:xfrm>
           <a:prstGeom prst="line">
             <a:avLst/>
@@ -21277,7 +21698,7 @@
         </p:nvCxnSpPr>
         <p:spPr>
           <a:xfrm flipH="1">
-            <a:off x="10284937" y="1503796"/>
+            <a:off x="10408276" y="1403014"/>
             <a:ext cx="1" cy="199705"/>
           </a:xfrm>
           <a:prstGeom prst="line">
@@ -21323,8 +21744,8 @@
         </p:nvCxnSpPr>
         <p:spPr>
           <a:xfrm>
-            <a:off x="10284937" y="2112124"/>
-            <a:ext cx="0" cy="133794"/>
+            <a:off x="10408276" y="2011342"/>
+            <a:ext cx="0" cy="701495"/>
           </a:xfrm>
           <a:prstGeom prst="line">
             <a:avLst/>
@@ -21363,15 +21784,15 @@
           </p:cNvPr>
           <p:cNvCxnSpPr>
             <a:cxnSpLocks/>
-            <a:stCxn id="24" idx="1"/>
-            <a:endCxn id="27" idx="0"/>
+            <a:stCxn id="20" idx="1"/>
+            <a:endCxn id="27" idx="3"/>
           </p:cNvCxnSpPr>
           <p:nvPr/>
         </p:nvCxnSpPr>
         <p:spPr>
           <a:xfrm flipH="1">
-            <a:off x="8080245" y="2450230"/>
-            <a:ext cx="450490" cy="371517"/>
+            <a:off x="8394331" y="1807031"/>
+            <a:ext cx="1000336" cy="550904"/>
           </a:xfrm>
           <a:prstGeom prst="line">
             <a:avLst/>
@@ -21416,8 +21837,8 @@
         </p:nvCxnSpPr>
         <p:spPr>
           <a:xfrm flipH="1" flipV="1">
-            <a:off x="5822580" y="3969856"/>
-            <a:ext cx="2296534" cy="138808"/>
+            <a:off x="6074040" y="4310986"/>
+            <a:ext cx="1972400" cy="648638"/>
           </a:xfrm>
           <a:prstGeom prst="line">
             <a:avLst/>
@@ -21457,14 +21878,14 @@
           <p:cNvCxnSpPr>
             <a:cxnSpLocks/>
             <a:stCxn id="7" idx="0"/>
-            <a:endCxn id="28" idx="3"/>
+            <a:endCxn id="28" idx="2"/>
           </p:cNvCxnSpPr>
           <p:nvPr/>
         </p:nvCxnSpPr>
         <p:spPr>
           <a:xfrm flipH="1" flipV="1">
-            <a:off x="9383627" y="4293330"/>
-            <a:ext cx="1600504" cy="408890"/>
+            <a:off x="8046440" y="5328956"/>
+            <a:ext cx="1687545" cy="664876"/>
           </a:xfrm>
           <a:prstGeom prst="line">
             <a:avLst/>
@@ -21508,9 +21929,9 @@
           <p:nvPr/>
         </p:nvCxnSpPr>
         <p:spPr>
-          <a:xfrm flipV="1">
-            <a:off x="2730762" y="5552913"/>
-            <a:ext cx="270869" cy="350899"/>
+          <a:xfrm flipH="1" flipV="1">
+            <a:off x="3001631" y="5552913"/>
+            <a:ext cx="161140" cy="350899"/>
           </a:xfrm>
           <a:prstGeom prst="line">
             <a:avLst/>
@@ -21548,8 +21969,8 @@
         </p:nvCxnSpPr>
         <p:spPr>
           <a:xfrm flipV="1">
-            <a:off x="3001631" y="4881939"/>
-            <a:ext cx="1296054" cy="262351"/>
+            <a:off x="3001631" y="4974807"/>
+            <a:ext cx="825632" cy="169483"/>
           </a:xfrm>
           <a:prstGeom prst="line">
             <a:avLst/>
@@ -21586,9 +22007,9 @@
           <p:nvPr/>
         </p:nvCxnSpPr>
         <p:spPr>
-          <a:xfrm flipV="1">
-            <a:off x="5966753" y="4293330"/>
-            <a:ext cx="887848" cy="384298"/>
+          <a:xfrm>
+            <a:off x="5025909" y="4724062"/>
+            <a:ext cx="1756018" cy="420228"/>
           </a:xfrm>
           <a:prstGeom prst="curvedConnector3">
             <a:avLst/>
@@ -21626,17 +22047,19 @@
           <p:cNvCxnSpPr>
             <a:cxnSpLocks/>
             <a:stCxn id="24" idx="2"/>
-            <a:endCxn id="28" idx="3"/>
+            <a:endCxn id="28" idx="0"/>
           </p:cNvCxnSpPr>
           <p:nvPr/>
         </p:nvCxnSpPr>
         <p:spPr>
           <a:xfrm rot="5400000">
-            <a:off x="9014888" y="3023280"/>
-            <a:ext cx="1638789" cy="901310"/>
+            <a:off x="8342209" y="2893556"/>
+            <a:ext cx="1770299" cy="2361836"/>
           </a:xfrm>
-          <a:prstGeom prst="curvedConnector2">
-            <a:avLst/>
+          <a:prstGeom prst="curvedConnector3">
+            <a:avLst>
+              <a:gd name="adj1" fmla="val 50000"/>
+            </a:avLst>
           </a:prstGeom>
           <a:ln>
             <a:solidFill>
@@ -21682,8 +22105,8 @@
         </p:nvCxnSpPr>
         <p:spPr>
           <a:xfrm>
-            <a:off x="3685689" y="2724257"/>
-            <a:ext cx="2136891" cy="876267"/>
+            <a:off x="3420921" y="2909164"/>
+            <a:ext cx="2653119" cy="1032490"/>
           </a:xfrm>
           <a:prstGeom prst="line">
             <a:avLst/>
@@ -21722,18 +22145,20 @@
           </p:cNvPr>
           <p:cNvCxnSpPr>
             <a:cxnSpLocks/>
-            <a:stCxn id="16" idx="3"/>
-            <a:endCxn id="27" idx="1"/>
+            <a:stCxn id="12" idx="0"/>
+            <a:endCxn id="27" idx="0"/>
           </p:cNvCxnSpPr>
           <p:nvPr/>
         </p:nvCxnSpPr>
         <p:spPr>
-          <a:xfrm flipV="1">
-            <a:off x="4758494" y="3026059"/>
-            <a:ext cx="1516566" cy="357968"/>
+          <a:xfrm rot="5400000" flipH="1" flipV="1">
+            <a:off x="4863591" y="62599"/>
+            <a:ext cx="590519" cy="4693989"/>
           </a:xfrm>
           <a:prstGeom prst="curvedConnector3">
-            <a:avLst/>
+            <a:avLst>
+              <a:gd name="adj1" fmla="val 138712"/>
+            </a:avLst>
           </a:prstGeom>
           <a:ln w="57150">
             <a:solidFill>
@@ -21771,8 +22196,8 @@
           <p:nvPr/>
         </p:nvSpPr>
         <p:spPr>
-          <a:xfrm rot="20522865">
-            <a:off x="4607719" y="2705785"/>
+          <a:xfrm>
+            <a:off x="4190498" y="1512671"/>
             <a:ext cx="2095254" cy="369332"/>
           </a:xfrm>
           <a:prstGeom prst="rect">
@@ -21821,8 +22246,8 @@
         </p:blipFill>
         <p:spPr>
           <a:xfrm>
-            <a:off x="2950779" y="1811313"/>
-      